--- a/04_제출물/데이터분석_계획서.pptx
+++ b/04_제출물/데이터분석_계획서.pptx
@@ -5266,7 +5266,7 @@
                   </a:txBody>
                   <a:tcPr marT="27432" marB="27432" marL="73152" marR="73152" anchor="ctr">
                     <a:solidFill>
-                      <a:srgbClr val="1B3A5F"/>
+                      <a:srgbClr val="33393F"/>
                     </a:solidFill>
                   </a:tcPr>
                 </a:tc>
@@ -5294,7 +5294,7 @@
                   </a:txBody>
                   <a:tcPr marT="27432" marB="27432" marL="73152" marR="73152" anchor="ctr">
                     <a:solidFill>
-                      <a:srgbClr val="1B3A5F"/>
+                      <a:srgbClr val="33393F"/>
                     </a:solidFill>
                   </a:tcPr>
                 </a:tc>
@@ -5906,7 +5906,7 @@
                   </a:txBody>
                   <a:tcPr marT="27432" marB="27432" marL="73152" marR="73152" anchor="ctr">
                     <a:solidFill>
-                      <a:srgbClr val="1B3A5F"/>
+                      <a:srgbClr val="33393F"/>
                     </a:solidFill>
                   </a:tcPr>
                 </a:tc>
@@ -5934,7 +5934,7 @@
                   </a:txBody>
                   <a:tcPr marT="27432" marB="27432" marL="73152" marR="73152" anchor="ctr">
                     <a:solidFill>
-                      <a:srgbClr val="1B3A5F"/>
+                      <a:srgbClr val="33393F"/>
                     </a:solidFill>
                   </a:tcPr>
                 </a:tc>
@@ -5962,7 +5962,7 @@
                   </a:txBody>
                   <a:tcPr marT="27432" marB="27432" marL="73152" marR="73152" anchor="ctr">
                     <a:solidFill>
-                      <a:srgbClr val="1B3A5F"/>
+                      <a:srgbClr val="33393F"/>
                     </a:solidFill>
                   </a:tcPr>
                 </a:tc>
@@ -9973,7 +9973,7 @@
                   </a:txBody>
                   <a:tcPr marT="27432" marB="27432" marL="73152" marR="73152" anchor="ctr">
                     <a:solidFill>
-                      <a:srgbClr val="1B3A5F"/>
+                      <a:srgbClr val="33393F"/>
                     </a:solidFill>
                   </a:tcPr>
                 </a:tc>
@@ -10001,7 +10001,7 @@
                   </a:txBody>
                   <a:tcPr marT="27432" marB="27432" marL="73152" marR="73152" anchor="ctr">
                     <a:solidFill>
-                      <a:srgbClr val="1B3A5F"/>
+                      <a:srgbClr val="33393F"/>
                     </a:solidFill>
                   </a:tcPr>
                 </a:tc>
@@ -10598,7 +10598,7 @@
                   </a:txBody>
                   <a:tcPr marT="27432" marB="27432" marL="73152" marR="73152" anchor="ctr">
                     <a:solidFill>
-                      <a:srgbClr val="1B3A5F"/>
+                      <a:srgbClr val="33393F"/>
                     </a:solidFill>
                   </a:tcPr>
                 </a:tc>
@@ -10626,7 +10626,7 @@
                   </a:txBody>
                   <a:tcPr marT="27432" marB="27432" marL="73152" marR="73152" anchor="ctr">
                     <a:solidFill>
-                      <a:srgbClr val="1B3A5F"/>
+                      <a:srgbClr val="33393F"/>
                     </a:solidFill>
                   </a:tcPr>
                 </a:tc>
@@ -10654,7 +10654,7 @@
                   </a:txBody>
                   <a:tcPr marT="27432" marB="27432" marL="73152" marR="73152" anchor="ctr">
                     <a:solidFill>
-                      <a:srgbClr val="1B3A5F"/>
+                      <a:srgbClr val="33393F"/>
                     </a:solidFill>
                   </a:tcPr>
                 </a:tc>
@@ -11626,7 +11626,7 @@
                   </a:txBody>
                   <a:tcPr marT="27432" marB="27432" marL="73152" marR="73152" anchor="ctr">
                     <a:solidFill>
-                      <a:srgbClr val="1B3A5F"/>
+                      <a:srgbClr val="33393F"/>
                     </a:solidFill>
                   </a:tcPr>
                 </a:tc>
@@ -11654,7 +11654,7 @@
                   </a:txBody>
                   <a:tcPr marT="27432" marB="27432" marL="73152" marR="73152" anchor="ctr">
                     <a:solidFill>
-                      <a:srgbClr val="1B3A5F"/>
+                      <a:srgbClr val="33393F"/>
                     </a:solidFill>
                   </a:tcPr>
                 </a:tc>
@@ -11682,7 +11682,7 @@
                   </a:txBody>
                   <a:tcPr marT="27432" marB="27432" marL="73152" marR="73152" anchor="ctr">
                     <a:solidFill>
-                      <a:srgbClr val="1B3A5F"/>
+                      <a:srgbClr val="33393F"/>
                     </a:solidFill>
                   </a:tcPr>
                 </a:tc>
@@ -12756,7 +12756,7 @@
                   </a:txBody>
                   <a:tcPr marT="27432" marB="27432" marL="73152" marR="73152" anchor="ctr">
                     <a:solidFill>
-                      <a:srgbClr val="1B3A5F"/>
+                      <a:srgbClr val="33393F"/>
                     </a:solidFill>
                   </a:tcPr>
                 </a:tc>
@@ -12784,7 +12784,7 @@
                   </a:txBody>
                   <a:tcPr marT="27432" marB="27432" marL="73152" marR="73152" anchor="ctr">
                     <a:solidFill>
-                      <a:srgbClr val="1B3A5F"/>
+                      <a:srgbClr val="33393F"/>
                     </a:solidFill>
                   </a:tcPr>
                 </a:tc>

--- a/04_제출물/데이터분석_계획서.pptx
+++ b/04_제출물/데이터분석_계획서.pptx
@@ -3143,201 +3143,9 @@
           </a:p>
         </p:txBody>
       </p:sp>
-      <p:pic>
-        <p:nvPicPr>
-          <p:cNvPr id="3" name="Picture 2" descr="blob_coral.png"/>
-          <p:cNvPicPr>
-            <a:picLocks noChangeAspect="1"/>
-          </p:cNvPicPr>
-          <p:nvPr/>
-        </p:nvPicPr>
-        <p:blipFill>
-          <a:blip r:embed="rId2"/>
-          <a:stretch>
-            <a:fillRect/>
-          </a:stretch>
-        </p:blipFill>
-        <p:spPr>
-          <a:xfrm>
-            <a:off x="6949440" y="-2926080"/>
-            <a:ext cx="7315200" cy="7315200"/>
-          </a:xfrm>
-          <a:prstGeom prst="rect">
-            <a:avLst/>
-          </a:prstGeom>
-        </p:spPr>
-      </p:pic>
-      <p:pic>
-        <p:nvPicPr>
-          <p:cNvPr id="4" name="Picture 3" descr="blob_blue.png"/>
-          <p:cNvPicPr>
-            <a:picLocks noChangeAspect="1"/>
-          </p:cNvPicPr>
-          <p:nvPr/>
-        </p:nvPicPr>
-        <p:blipFill>
-          <a:blip r:embed="rId3"/>
-          <a:stretch>
-            <a:fillRect/>
-          </a:stretch>
-        </p:blipFill>
-        <p:spPr>
-          <a:xfrm>
-            <a:off x="-3108960" y="2377440"/>
-            <a:ext cx="7863840" cy="7863840"/>
-          </a:xfrm>
-          <a:prstGeom prst="rect">
-            <a:avLst/>
-          </a:prstGeom>
-        </p:spPr>
-      </p:pic>
-      <p:pic>
-        <p:nvPicPr>
-          <p:cNvPr id="5" name="Picture 4" descr="blob_teal.png"/>
-          <p:cNvPicPr>
-            <a:picLocks noChangeAspect="1"/>
-          </p:cNvPicPr>
-          <p:nvPr/>
-        </p:nvPicPr>
-        <p:blipFill>
-          <a:blip r:embed="rId4"/>
-          <a:stretch>
-            <a:fillRect/>
-          </a:stretch>
-        </p:blipFill>
-        <p:spPr>
-          <a:xfrm>
-            <a:off x="4206240" y="5120640"/>
-            <a:ext cx="4206240" cy="4206240"/>
-          </a:xfrm>
-          <a:prstGeom prst="rect">
-            <a:avLst/>
-          </a:prstGeom>
-        </p:spPr>
-      </p:pic>
-      <p:pic>
-        <p:nvPicPr>
-          <p:cNvPr id="6" name="Picture 5" descr="korea_map.png"/>
-          <p:cNvPicPr>
-            <a:picLocks noChangeAspect="1"/>
-          </p:cNvPicPr>
-          <p:nvPr/>
-        </p:nvPicPr>
-        <p:blipFill>
-          <a:blip r:embed="rId5"/>
-          <a:stretch>
-            <a:fillRect/>
-          </a:stretch>
-        </p:blipFill>
-        <p:spPr>
-          <a:xfrm>
-            <a:off x="8229600" y="777240"/>
-            <a:ext cx="3383280" cy="4687928"/>
-          </a:xfrm>
-          <a:prstGeom prst="rect">
-            <a:avLst/>
-          </a:prstGeom>
-        </p:spPr>
-      </p:pic>
-      <p:pic>
-        <p:nvPicPr>
-          <p:cNvPr id="7" name="Picture 6" descr="icon_pin.png"/>
-          <p:cNvPicPr>
-            <a:picLocks noChangeAspect="1"/>
-          </p:cNvPicPr>
-          <p:nvPr/>
-        </p:nvPicPr>
-        <p:blipFill>
-          <a:blip r:embed="rId6"/>
-          <a:stretch>
-            <a:fillRect/>
-          </a:stretch>
-        </p:blipFill>
-        <p:spPr>
-          <a:xfrm>
-            <a:off x="9464040" y="1234440"/>
-            <a:ext cx="566928" cy="634644"/>
-          </a:xfrm>
-          <a:prstGeom prst="rect">
-            <a:avLst/>
-          </a:prstGeom>
-        </p:spPr>
-      </p:pic>
-      <p:pic>
-        <p:nvPicPr>
-          <p:cNvPr id="8" name="Picture 7" descr="sphere_coral.png"/>
-          <p:cNvPicPr>
-            <a:picLocks noChangeAspect="1"/>
-          </p:cNvPicPr>
-          <p:nvPr/>
-        </p:nvPicPr>
-        <p:blipFill>
-          <a:blip r:embed="rId7"/>
-          <a:stretch>
-            <a:fillRect/>
-          </a:stretch>
-        </p:blipFill>
-        <p:spPr>
-          <a:xfrm>
-            <a:off x="7635240" y="4160520"/>
-            <a:ext cx="1600200" cy="1866899"/>
-          </a:xfrm>
-          <a:prstGeom prst="rect">
-            <a:avLst/>
-          </a:prstGeom>
-        </p:spPr>
-      </p:pic>
-      <p:pic>
-        <p:nvPicPr>
-          <p:cNvPr id="9" name="Picture 8" descr="ring_blue.png"/>
-          <p:cNvPicPr>
-            <a:picLocks noChangeAspect="1"/>
-          </p:cNvPicPr>
-          <p:nvPr/>
-        </p:nvPicPr>
-        <p:blipFill>
-          <a:blip r:embed="rId8"/>
-          <a:stretch>
-            <a:fillRect/>
-          </a:stretch>
-        </p:blipFill>
-        <p:spPr>
-          <a:xfrm>
-            <a:off x="10561320" y="4480560"/>
-            <a:ext cx="1600200" cy="1600200"/>
-          </a:xfrm>
-          <a:prstGeom prst="rect">
-            <a:avLst/>
-          </a:prstGeom>
-        </p:spPr>
-      </p:pic>
-      <p:pic>
-        <p:nvPicPr>
-          <p:cNvPr id="10" name="Picture 9" descr="sphere_teal.png"/>
-          <p:cNvPicPr>
-            <a:picLocks noChangeAspect="1"/>
-          </p:cNvPicPr>
-          <p:nvPr/>
-        </p:nvPicPr>
-        <p:blipFill>
-          <a:blip r:embed="rId9"/>
-          <a:stretch>
-            <a:fillRect/>
-          </a:stretch>
-        </p:blipFill>
-        <p:spPr>
-          <a:xfrm>
-            <a:off x="7452360" y="685800"/>
-            <a:ext cx="658368" cy="767397"/>
-          </a:xfrm>
-          <a:prstGeom prst="rect">
-            <a:avLst/>
-          </a:prstGeom>
-        </p:spPr>
-      </p:pic>
-      <p:sp>
-        <p:nvSpPr>
-          <p:cNvPr id="11" name="Rounded Rectangle 10"/>
+      <p:sp>
+        <p:nvSpPr>
+          <p:cNvPr id="3" name="Rounded Rectangle 2"/>
           <p:cNvSpPr/>
           <p:nvPr/>
         </p:nvSpPr>
@@ -3354,10 +3162,10 @@
           <a:gradFill rotWithShape="1">
             <a:gsLst>
               <a:gs pos="0">
-                <a:srgbClr val="FF7A59"/>
+                <a:srgbClr val="3A3F45"/>
               </a:gs>
               <a:gs pos="100000">
-                <a:srgbClr val="FFB86B"/>
+                <a:srgbClr val="73787E"/>
               </a:gs>
             </a:gsLst>
             <a:lin scaled="0" ang="18900000"/>
@@ -3367,7 +3175,7 @@
           </a:ln>
           <a:effectLst>
             <a:outerShdw blurRad="109728" dist="36576" dir="5400000" rotWithShape="0">
-              <a:srgbClr val="C24E30">
+              <a:srgbClr val="000000">
                 <a:alpha val="35000"/>
               </a:srgbClr>
             </a:outerShdw>
@@ -3397,7 +3205,7 @@
       </p:sp>
       <p:sp>
         <p:nvSpPr>
-          <p:cNvPr id="12" name="TextBox 11"/>
+          <p:cNvPr id="4" name="TextBox 3"/>
           <p:cNvSpPr txBox="1"/>
           <p:nvPr/>
         </p:nvSpPr>
@@ -3428,7 +3236,7 @@
             <a:r>
               <a:rPr sz="1450" b="0">
                 <a:solidFill>
-                  <a:srgbClr val="6A7B92"/>
+                  <a:srgbClr val="767A7F"/>
                 </a:solidFill>
                 <a:latin typeface="맑은 고딕"/>
                 <a:ea typeface="맑은 고딕"/>
@@ -3448,7 +3256,7 @@
             <a:r>
               <a:rPr sz="4700" b="1">
                 <a:solidFill>
-                  <a:srgbClr val="222E40"/>
+                  <a:srgbClr val="1C1C1E"/>
                 </a:solidFill>
                 <a:latin typeface="맑은 고딕"/>
                 <a:ea typeface="맑은 고딕"/>
@@ -3468,7 +3276,7 @@
             <a:r>
               <a:rPr sz="1900" b="0">
                 <a:solidFill>
-                  <a:srgbClr val="17456B"/>
+                  <a:srgbClr val="33393F"/>
                 </a:solidFill>
                 <a:latin typeface="맑은 고딕"/>
                 <a:ea typeface="맑은 고딕"/>
@@ -3478,33 +3286,61 @@
           </a:p>
         </p:txBody>
       </p:sp>
-      <p:pic>
-        <p:nvPicPr>
-          <p:cNvPr id="13" name="Picture 12" descr="glow_bar.png"/>
-          <p:cNvPicPr>
-            <a:picLocks noChangeAspect="1"/>
-          </p:cNvPicPr>
-          <p:nvPr/>
-        </p:nvPicPr>
-        <p:blipFill>
-          <a:blip r:embed="rId10"/>
-          <a:stretch>
-            <a:fillRect/>
-          </a:stretch>
-        </p:blipFill>
+      <p:sp>
+        <p:nvSpPr>
+          <p:cNvPr id="5" name="Rectangle 4"/>
+          <p:cNvSpPr/>
+          <p:nvPr/>
+        </p:nvSpPr>
         <p:spPr>
           <a:xfrm>
             <a:off x="932688" y="4370832"/>
-            <a:ext cx="5852160" cy="50292"/>
+            <a:ext cx="5852160" cy="27432"/>
           </a:xfrm>
           <a:prstGeom prst="rect">
             <a:avLst/>
           </a:prstGeom>
-        </p:spPr>
-      </p:pic>
-      <p:sp>
-        <p:nvSpPr>
-          <p:cNvPr id="14" name="TextBox 13"/>
+          <a:gradFill rotWithShape="1">
+            <a:gsLst>
+              <a:gs pos="0">
+                <a:srgbClr val="2A2E33"/>
+              </a:gs>
+              <a:gs pos="100000">
+                <a:srgbClr val="FFFFFF"/>
+              </a:gs>
+            </a:gsLst>
+            <a:lin scaled="0" ang="0"/>
+          </a:gradFill>
+          <a:ln>
+            <a:noFill/>
+          </a:ln>
+          <a:effectLst/>
+        </p:spPr>
+        <p:style>
+          <a:lnRef idx="1">
+            <a:schemeClr val="accent1"/>
+          </a:lnRef>
+          <a:fillRef idx="3">
+            <a:schemeClr val="accent1"/>
+          </a:fillRef>
+          <a:effectRef idx="2">
+            <a:schemeClr val="accent1"/>
+          </a:effectRef>
+          <a:fontRef idx="minor">
+            <a:schemeClr val="lt1"/>
+          </a:fontRef>
+        </p:style>
+        <p:txBody>
+          <a:bodyPr rtlCol="0" anchor="ctr"/>
+          <a:lstStyle/>
+          <a:p>
+            <a:pPr algn="ctr"/>
+          </a:p>
+        </p:txBody>
+      </p:sp>
+      <p:sp>
+        <p:nvSpPr>
+          <p:cNvPr id="6" name="TextBox 5"/>
           <p:cNvSpPr txBox="1"/>
           <p:nvPr/>
         </p:nvSpPr>
@@ -3535,7 +3371,7 @@
             <a:r>
               <a:rPr sz="1350" b="1">
                 <a:solidFill>
-                  <a:srgbClr val="222E40"/>
+                  <a:srgbClr val="1C1C1E"/>
                 </a:solidFill>
                 <a:latin typeface="맑은 고딕"/>
                 <a:ea typeface="맑은 고딕"/>
@@ -3555,7 +3391,7 @@
             <a:r>
               <a:rPr sz="1250" b="0">
                 <a:solidFill>
-                  <a:srgbClr val="6A7B92"/>
+                  <a:srgbClr val="767A7F"/>
                 </a:solidFill>
                 <a:latin typeface="맑은 고딕"/>
                 <a:ea typeface="맑은 고딕"/>
@@ -3575,7 +3411,7 @@
             <a:r>
               <a:rPr sz="1250" b="0">
                 <a:solidFill>
-                  <a:srgbClr val="6A7B92"/>
+                  <a:srgbClr val="767A7F"/>
                 </a:solidFill>
                 <a:latin typeface="맑은 고딕"/>
                 <a:ea typeface="맑은 고딕"/>
@@ -3647,57 +3483,9 @@
           </a:p>
         </p:txBody>
       </p:sp>
-      <p:pic>
-        <p:nvPicPr>
-          <p:cNvPr id="3" name="Picture 2" descr="blob_blue.png"/>
-          <p:cNvPicPr>
-            <a:picLocks noChangeAspect="1"/>
-          </p:cNvPicPr>
-          <p:nvPr/>
-        </p:nvPicPr>
-        <p:blipFill>
-          <a:blip r:embed="rId2"/>
-          <a:stretch>
-            <a:fillRect/>
-          </a:stretch>
-        </p:blipFill>
-        <p:spPr>
-          <a:xfrm>
-            <a:off x="-3474720" y="3840480"/>
-            <a:ext cx="6583680" cy="6583680"/>
-          </a:xfrm>
-          <a:prstGeom prst="rect">
-            <a:avLst/>
-          </a:prstGeom>
-        </p:spPr>
-      </p:pic>
-      <p:pic>
-        <p:nvPicPr>
-          <p:cNvPr id="4" name="Picture 3" descr="blob_coral.png"/>
-          <p:cNvPicPr>
-            <a:picLocks noChangeAspect="1"/>
-          </p:cNvPicPr>
-          <p:nvPr/>
-        </p:nvPicPr>
-        <p:blipFill>
-          <a:blip r:embed="rId3"/>
-          <a:stretch>
-            <a:fillRect/>
-          </a:stretch>
-        </p:blipFill>
-        <p:spPr>
-          <a:xfrm>
-            <a:off x="8961120" y="-3291840"/>
-            <a:ext cx="6217920" cy="6217920"/>
-          </a:xfrm>
-          <a:prstGeom prst="rect">
-            <a:avLst/>
-          </a:prstGeom>
-        </p:spPr>
-      </p:pic>
-      <p:sp>
-        <p:nvSpPr>
-          <p:cNvPr id="5" name="Rounded Rectangle 4"/>
+      <p:sp>
+        <p:nvSpPr>
+          <p:cNvPr id="3" name="Rounded Rectangle 2"/>
           <p:cNvSpPr/>
           <p:nvPr/>
         </p:nvSpPr>
@@ -3714,10 +3502,10 @@
           <a:gradFill rotWithShape="1">
             <a:gsLst>
               <a:gs pos="0">
-                <a:srgbClr val="FF7A59"/>
+                <a:srgbClr val="3A3F45"/>
               </a:gs>
               <a:gs pos="100000">
-                <a:srgbClr val="FFB86B"/>
+                <a:srgbClr val="73787E"/>
               </a:gs>
             </a:gsLst>
             <a:lin scaled="0" ang="18900000"/>
@@ -3727,7 +3515,7 @@
           </a:ln>
           <a:effectLst>
             <a:outerShdw blurRad="109728" dist="36576" dir="5400000" rotWithShape="0">
-              <a:srgbClr val="C24E30">
+              <a:srgbClr val="000000">
                 <a:alpha val="35000"/>
               </a:srgbClr>
             </a:outerShdw>
@@ -3757,7 +3545,7 @@
       </p:sp>
       <p:sp>
         <p:nvSpPr>
-          <p:cNvPr id="6" name="TextBox 5"/>
+          <p:cNvPr id="4" name="TextBox 3"/>
           <p:cNvSpPr txBox="1"/>
           <p:nvPr/>
         </p:nvSpPr>
@@ -3788,7 +3576,7 @@
             <a:r>
               <a:rPr sz="2150" b="1">
                 <a:solidFill>
-                  <a:srgbClr val="222E40"/>
+                  <a:srgbClr val="1C1C1E"/>
                 </a:solidFill>
                 <a:latin typeface="맑은 고딕"/>
                 <a:ea typeface="맑은 고딕"/>
@@ -3798,33 +3586,61 @@
           </a:p>
         </p:txBody>
       </p:sp>
-      <p:pic>
-        <p:nvPicPr>
-          <p:cNvPr id="7" name="Picture 6" descr="glow_bar.png"/>
-          <p:cNvPicPr>
-            <a:picLocks noChangeAspect="1"/>
-          </p:cNvPicPr>
-          <p:nvPr/>
-        </p:nvPicPr>
-        <p:blipFill>
-          <a:blip r:embed="rId4"/>
-          <a:stretch>
-            <a:fillRect/>
-          </a:stretch>
-        </p:blipFill>
+      <p:sp>
+        <p:nvSpPr>
+          <p:cNvPr id="5" name="Rectangle 4"/>
+          <p:cNvSpPr/>
+          <p:nvPr/>
+        </p:nvSpPr>
         <p:spPr>
           <a:xfrm>
             <a:off x="521207" y="969264"/>
-            <a:ext cx="4206240" cy="50292"/>
+            <a:ext cx="4206240" cy="27432"/>
           </a:xfrm>
           <a:prstGeom prst="rect">
             <a:avLst/>
           </a:prstGeom>
-        </p:spPr>
-      </p:pic>
-      <p:sp>
-        <p:nvSpPr>
-          <p:cNvPr id="8" name="TextBox 7"/>
+          <a:gradFill rotWithShape="1">
+            <a:gsLst>
+              <a:gs pos="0">
+                <a:srgbClr val="2A2E33"/>
+              </a:gs>
+              <a:gs pos="100000">
+                <a:srgbClr val="FFFFFF"/>
+              </a:gs>
+            </a:gsLst>
+            <a:lin scaled="0" ang="0"/>
+          </a:gradFill>
+          <a:ln>
+            <a:noFill/>
+          </a:ln>
+          <a:effectLst/>
+        </p:spPr>
+        <p:style>
+          <a:lnRef idx="1">
+            <a:schemeClr val="accent1"/>
+          </a:lnRef>
+          <a:fillRef idx="3">
+            <a:schemeClr val="accent1"/>
+          </a:fillRef>
+          <a:effectRef idx="2">
+            <a:schemeClr val="accent1"/>
+          </a:effectRef>
+          <a:fontRef idx="minor">
+            <a:schemeClr val="lt1"/>
+          </a:fontRef>
+        </p:style>
+        <p:txBody>
+          <a:bodyPr rtlCol="0" anchor="ctr"/>
+          <a:lstStyle/>
+          <a:p>
+            <a:pPr algn="ctr"/>
+          </a:p>
+        </p:txBody>
+      </p:sp>
+      <p:sp>
+        <p:nvSpPr>
+          <p:cNvPr id="6" name="TextBox 5"/>
           <p:cNvSpPr txBox="1"/>
           <p:nvPr/>
         </p:nvSpPr>
@@ -3855,7 +3671,7 @@
             <a:r>
               <a:rPr sz="3000" b="1">
                 <a:solidFill>
-                  <a:srgbClr val="D3DDEA"/>
+                  <a:srgbClr val="D8DADD"/>
                 </a:solidFill>
                 <a:latin typeface="맑은 고딕"/>
                 <a:ea typeface="맑은 고딕"/>
@@ -3867,7 +3683,7 @@
       </p:sp>
       <p:sp>
         <p:nvSpPr>
-          <p:cNvPr id="9" name="TextBox 8"/>
+          <p:cNvPr id="7" name="TextBox 6"/>
           <p:cNvSpPr txBox="1"/>
           <p:nvPr/>
         </p:nvSpPr>
@@ -3898,7 +3714,7 @@
             <a:r>
               <a:rPr sz="1250" b="0">
                 <a:solidFill>
-                  <a:srgbClr val="6A7B92"/>
+                  <a:srgbClr val="767A7F"/>
                 </a:solidFill>
                 <a:latin typeface="맑은 고딕"/>
                 <a:ea typeface="맑은 고딕"/>
@@ -3910,7 +3726,7 @@
       </p:sp>
       <p:sp>
         <p:nvSpPr>
-          <p:cNvPr id="10" name="TextBox 9"/>
+          <p:cNvPr id="8" name="TextBox 7"/>
           <p:cNvSpPr txBox="1"/>
           <p:nvPr/>
         </p:nvSpPr>
@@ -3941,7 +3757,7 @@
             <a:r>
               <a:rPr sz="850" b="0">
                 <a:solidFill>
-                  <a:srgbClr val="ABB7C7"/>
+                  <a:srgbClr val="B2B5B9"/>
                 </a:solidFill>
                 <a:latin typeface="맑은 고딕"/>
                 <a:ea typeface="맑은 고딕"/>
@@ -3953,7 +3769,7 @@
       </p:sp>
       <p:sp>
         <p:nvSpPr>
-          <p:cNvPr id="11" name="Rounded Rectangle 10"/>
+          <p:cNvPr id="9" name="Rounded Rectangle 8"/>
           <p:cNvSpPr/>
           <p:nvPr/>
         </p:nvSpPr>
@@ -3972,12 +3788,12 @@
           </a:solidFill>
           <a:ln w="12700">
             <a:solidFill>
-              <a:srgbClr val="E4EAF2"/>
+              <a:srgbClr val="E4E6E9"/>
             </a:solidFill>
           </a:ln>
           <a:effectLst>
             <a:outerShdw blurRad="182880" dist="64008" dir="5400000" rotWithShape="0">
-              <a:srgbClr val="2A3B55">
+              <a:srgbClr val="000000">
                 <a:alpha val="30000"/>
               </a:srgbClr>
             </a:outerShdw>
@@ -4007,7 +3823,7 @@
       </p:sp>
       <p:sp>
         <p:nvSpPr>
-          <p:cNvPr id="12" name="TextBox 11"/>
+          <p:cNvPr id="10" name="TextBox 9"/>
           <p:cNvSpPr txBox="1"/>
           <p:nvPr/>
         </p:nvSpPr>
@@ -4038,7 +3854,7 @@
             <a:r>
               <a:rPr sz="1300" b="1">
                 <a:solidFill>
-                  <a:srgbClr val="17456B"/>
+                  <a:srgbClr val="33393F"/>
                 </a:solidFill>
                 <a:latin typeface="맑은 고딕"/>
                 <a:ea typeface="맑은 고딕"/>
@@ -4058,7 +3874,7 @@
             <a:r>
               <a:rPr sz="1150" b="0">
                 <a:solidFill>
-                  <a:srgbClr val="222E40"/>
+                  <a:srgbClr val="1C1C1E"/>
                 </a:solidFill>
                 <a:latin typeface="맑은 고딕"/>
                 <a:ea typeface="맑은 고딕"/>
@@ -4078,7 +3894,7 @@
             <a:r>
               <a:rPr sz="1150" b="0">
                 <a:solidFill>
-                  <a:srgbClr val="222E40"/>
+                  <a:srgbClr val="1C1C1E"/>
                 </a:solidFill>
                 <a:latin typeface="맑은 고딕"/>
                 <a:ea typeface="맑은 고딕"/>
@@ -4098,7 +3914,7 @@
             <a:r>
               <a:rPr sz="1150" b="0">
                 <a:solidFill>
-                  <a:srgbClr val="222E40"/>
+                  <a:srgbClr val="1C1C1E"/>
                 </a:solidFill>
                 <a:latin typeface="맑은 고딕"/>
                 <a:ea typeface="맑은 고딕"/>
@@ -4110,7 +3926,7 @@
       </p:sp>
       <p:sp>
         <p:nvSpPr>
-          <p:cNvPr id="13" name="Rounded Rectangle 12"/>
+          <p:cNvPr id="11" name="Rounded Rectangle 10"/>
           <p:cNvSpPr/>
           <p:nvPr/>
         </p:nvSpPr>
@@ -4129,12 +3945,12 @@
           </a:solidFill>
           <a:ln w="12700">
             <a:solidFill>
-              <a:srgbClr val="E4EAF2"/>
+              <a:srgbClr val="E4E6E9"/>
             </a:solidFill>
           </a:ln>
           <a:effectLst>
             <a:outerShdw blurRad="182880" dist="64008" dir="5400000" rotWithShape="0">
-              <a:srgbClr val="2A3B55">
+              <a:srgbClr val="000000">
                 <a:alpha val="30000"/>
               </a:srgbClr>
             </a:outerShdw>
@@ -4164,7 +3980,7 @@
       </p:sp>
       <p:sp>
         <p:nvSpPr>
-          <p:cNvPr id="14" name="TextBox 13"/>
+          <p:cNvPr id="12" name="TextBox 11"/>
           <p:cNvSpPr txBox="1"/>
           <p:nvPr/>
         </p:nvSpPr>
@@ -4195,7 +4011,7 @@
             <a:r>
               <a:rPr sz="1300" b="1">
                 <a:solidFill>
-                  <a:srgbClr val="17456B"/>
+                  <a:srgbClr val="33393F"/>
                 </a:solidFill>
                 <a:latin typeface="맑은 고딕"/>
                 <a:ea typeface="맑은 고딕"/>
@@ -4215,7 +4031,7 @@
             <a:r>
               <a:rPr sz="1150" b="0">
                 <a:solidFill>
-                  <a:srgbClr val="222E40"/>
+                  <a:srgbClr val="1C1C1E"/>
                 </a:solidFill>
                 <a:latin typeface="맑은 고딕"/>
                 <a:ea typeface="맑은 고딕"/>
@@ -4235,7 +4051,7 @@
             <a:r>
               <a:rPr sz="1150" b="0">
                 <a:solidFill>
-                  <a:srgbClr val="222E40"/>
+                  <a:srgbClr val="1C1C1E"/>
                 </a:solidFill>
                 <a:latin typeface="맑은 고딕"/>
                 <a:ea typeface="맑은 고딕"/>
@@ -4247,7 +4063,7 @@
       </p:sp>
       <p:sp>
         <p:nvSpPr>
-          <p:cNvPr id="15" name="Rounded Rectangle 14"/>
+          <p:cNvPr id="13" name="Rounded Rectangle 12"/>
           <p:cNvSpPr/>
           <p:nvPr/>
         </p:nvSpPr>
@@ -4266,12 +4082,12 @@
           </a:solidFill>
           <a:ln w="12700">
             <a:solidFill>
-              <a:srgbClr val="E4EAF2"/>
+              <a:srgbClr val="E4E6E9"/>
             </a:solidFill>
           </a:ln>
           <a:effectLst>
             <a:outerShdw blurRad="182880" dist="64008" dir="5400000" rotWithShape="0">
-              <a:srgbClr val="2A3B55">
+              <a:srgbClr val="000000">
                 <a:alpha val="30000"/>
               </a:srgbClr>
             </a:outerShdw>
@@ -4301,7 +4117,7 @@
       </p:sp>
       <p:sp>
         <p:nvSpPr>
-          <p:cNvPr id="16" name="TextBox 15"/>
+          <p:cNvPr id="14" name="TextBox 13"/>
           <p:cNvSpPr txBox="1"/>
           <p:nvPr/>
         </p:nvSpPr>
@@ -4332,7 +4148,7 @@
             <a:r>
               <a:rPr sz="1300" b="1">
                 <a:solidFill>
-                  <a:srgbClr val="17456B"/>
+                  <a:srgbClr val="33393F"/>
                 </a:solidFill>
                 <a:latin typeface="맑은 고딕"/>
                 <a:ea typeface="맑은 고딕"/>
@@ -4352,7 +4168,7 @@
             <a:r>
               <a:rPr sz="1150" b="0">
                 <a:solidFill>
-                  <a:srgbClr val="222E40"/>
+                  <a:srgbClr val="1C1C1E"/>
                 </a:solidFill>
                 <a:latin typeface="맑은 고딕"/>
                 <a:ea typeface="맑은 고딕"/>
@@ -4372,7 +4188,7 @@
             <a:r>
               <a:rPr sz="1150" b="0">
                 <a:solidFill>
-                  <a:srgbClr val="222E40"/>
+                  <a:srgbClr val="1C1C1E"/>
                 </a:solidFill>
                 <a:latin typeface="맑은 고딕"/>
                 <a:ea typeface="맑은 고딕"/>
@@ -4392,7 +4208,7 @@
             <a:r>
               <a:rPr sz="1150" b="0">
                 <a:solidFill>
-                  <a:srgbClr val="222E40"/>
+                  <a:srgbClr val="1C1C1E"/>
                 </a:solidFill>
                 <a:latin typeface="맑은 고딕"/>
                 <a:ea typeface="맑은 고딕"/>
@@ -4412,7 +4228,7 @@
             <a:r>
               <a:rPr sz="1150" b="0">
                 <a:solidFill>
-                  <a:srgbClr val="222E40"/>
+                  <a:srgbClr val="1C1C1E"/>
                 </a:solidFill>
                 <a:latin typeface="맑은 고딕"/>
                 <a:ea typeface="맑은 고딕"/>
@@ -4484,57 +4300,9 @@
           </a:p>
         </p:txBody>
       </p:sp>
-      <p:pic>
-        <p:nvPicPr>
-          <p:cNvPr id="3" name="Picture 2" descr="blob_blue.png"/>
-          <p:cNvPicPr>
-            <a:picLocks noChangeAspect="1"/>
-          </p:cNvPicPr>
-          <p:nvPr/>
-        </p:nvPicPr>
-        <p:blipFill>
-          <a:blip r:embed="rId2"/>
-          <a:stretch>
-            <a:fillRect/>
-          </a:stretch>
-        </p:blipFill>
-        <p:spPr>
-          <a:xfrm>
-            <a:off x="-3474720" y="3840480"/>
-            <a:ext cx="6583680" cy="6583680"/>
-          </a:xfrm>
-          <a:prstGeom prst="rect">
-            <a:avLst/>
-          </a:prstGeom>
-        </p:spPr>
-      </p:pic>
-      <p:pic>
-        <p:nvPicPr>
-          <p:cNvPr id="4" name="Picture 3" descr="blob_coral.png"/>
-          <p:cNvPicPr>
-            <a:picLocks noChangeAspect="1"/>
-          </p:cNvPicPr>
-          <p:nvPr/>
-        </p:nvPicPr>
-        <p:blipFill>
-          <a:blip r:embed="rId3"/>
-          <a:stretch>
-            <a:fillRect/>
-          </a:stretch>
-        </p:blipFill>
-        <p:spPr>
-          <a:xfrm>
-            <a:off x="8961120" y="-3291840"/>
-            <a:ext cx="6217920" cy="6217920"/>
-          </a:xfrm>
-          <a:prstGeom prst="rect">
-            <a:avLst/>
-          </a:prstGeom>
-        </p:spPr>
-      </p:pic>
-      <p:sp>
-        <p:nvSpPr>
-          <p:cNvPr id="5" name="Rounded Rectangle 4"/>
+      <p:sp>
+        <p:nvSpPr>
+          <p:cNvPr id="3" name="Rounded Rectangle 2"/>
           <p:cNvSpPr/>
           <p:nvPr/>
         </p:nvSpPr>
@@ -4551,10 +4319,10 @@
           <a:gradFill rotWithShape="1">
             <a:gsLst>
               <a:gs pos="0">
-                <a:srgbClr val="FF7A59"/>
+                <a:srgbClr val="3A3F45"/>
               </a:gs>
               <a:gs pos="100000">
-                <a:srgbClr val="FFB86B"/>
+                <a:srgbClr val="73787E"/>
               </a:gs>
             </a:gsLst>
             <a:lin scaled="0" ang="18900000"/>
@@ -4564,7 +4332,7 @@
           </a:ln>
           <a:effectLst>
             <a:outerShdw blurRad="109728" dist="36576" dir="5400000" rotWithShape="0">
-              <a:srgbClr val="C24E30">
+              <a:srgbClr val="000000">
                 <a:alpha val="35000"/>
               </a:srgbClr>
             </a:outerShdw>
@@ -4594,7 +4362,7 @@
       </p:sp>
       <p:sp>
         <p:nvSpPr>
-          <p:cNvPr id="6" name="TextBox 5"/>
+          <p:cNvPr id="4" name="TextBox 3"/>
           <p:cNvSpPr txBox="1"/>
           <p:nvPr/>
         </p:nvSpPr>
@@ -4625,7 +4393,7 @@
             <a:r>
               <a:rPr sz="2150" b="1">
                 <a:solidFill>
-                  <a:srgbClr val="222E40"/>
+                  <a:srgbClr val="1C1C1E"/>
                 </a:solidFill>
                 <a:latin typeface="맑은 고딕"/>
                 <a:ea typeface="맑은 고딕"/>
@@ -4635,33 +4403,61 @@
           </a:p>
         </p:txBody>
       </p:sp>
-      <p:pic>
-        <p:nvPicPr>
-          <p:cNvPr id="7" name="Picture 6" descr="glow_bar.png"/>
-          <p:cNvPicPr>
-            <a:picLocks noChangeAspect="1"/>
-          </p:cNvPicPr>
-          <p:nvPr/>
-        </p:nvPicPr>
-        <p:blipFill>
-          <a:blip r:embed="rId4"/>
-          <a:stretch>
-            <a:fillRect/>
-          </a:stretch>
-        </p:blipFill>
+      <p:sp>
+        <p:nvSpPr>
+          <p:cNvPr id="5" name="Rectangle 4"/>
+          <p:cNvSpPr/>
+          <p:nvPr/>
+        </p:nvSpPr>
         <p:spPr>
           <a:xfrm>
             <a:off x="521207" y="969264"/>
-            <a:ext cx="4206240" cy="50292"/>
+            <a:ext cx="4206240" cy="27432"/>
           </a:xfrm>
           <a:prstGeom prst="rect">
             <a:avLst/>
           </a:prstGeom>
-        </p:spPr>
-      </p:pic>
-      <p:sp>
-        <p:nvSpPr>
-          <p:cNvPr id="8" name="TextBox 7"/>
+          <a:gradFill rotWithShape="1">
+            <a:gsLst>
+              <a:gs pos="0">
+                <a:srgbClr val="2A2E33"/>
+              </a:gs>
+              <a:gs pos="100000">
+                <a:srgbClr val="FFFFFF"/>
+              </a:gs>
+            </a:gsLst>
+            <a:lin scaled="0" ang="0"/>
+          </a:gradFill>
+          <a:ln>
+            <a:noFill/>
+          </a:ln>
+          <a:effectLst/>
+        </p:spPr>
+        <p:style>
+          <a:lnRef idx="1">
+            <a:schemeClr val="accent1"/>
+          </a:lnRef>
+          <a:fillRef idx="3">
+            <a:schemeClr val="accent1"/>
+          </a:fillRef>
+          <a:effectRef idx="2">
+            <a:schemeClr val="accent1"/>
+          </a:effectRef>
+          <a:fontRef idx="minor">
+            <a:schemeClr val="lt1"/>
+          </a:fontRef>
+        </p:style>
+        <p:txBody>
+          <a:bodyPr rtlCol="0" anchor="ctr"/>
+          <a:lstStyle/>
+          <a:p>
+            <a:pPr algn="ctr"/>
+          </a:p>
+        </p:txBody>
+      </p:sp>
+      <p:sp>
+        <p:nvSpPr>
+          <p:cNvPr id="6" name="TextBox 5"/>
           <p:cNvSpPr txBox="1"/>
           <p:nvPr/>
         </p:nvSpPr>
@@ -4692,7 +4488,7 @@
             <a:r>
               <a:rPr sz="3000" b="1">
                 <a:solidFill>
-                  <a:srgbClr val="D3DDEA"/>
+                  <a:srgbClr val="D8DADD"/>
                 </a:solidFill>
                 <a:latin typeface="맑은 고딕"/>
                 <a:ea typeface="맑은 고딕"/>
@@ -4704,7 +4500,7 @@
       </p:sp>
       <p:sp>
         <p:nvSpPr>
-          <p:cNvPr id="9" name="TextBox 8"/>
+          <p:cNvPr id="7" name="TextBox 6"/>
           <p:cNvSpPr txBox="1"/>
           <p:nvPr/>
         </p:nvSpPr>
@@ -4735,7 +4531,7 @@
             <a:r>
               <a:rPr sz="850" b="0">
                 <a:solidFill>
-                  <a:srgbClr val="ABB7C7"/>
+                  <a:srgbClr val="B2B5B9"/>
                 </a:solidFill>
                 <a:latin typeface="맑은 고딕"/>
                 <a:ea typeface="맑은 고딕"/>
@@ -4747,7 +4543,7 @@
       </p:sp>
       <p:sp>
         <p:nvSpPr>
-          <p:cNvPr id="10" name="Rounded Rectangle 9"/>
+          <p:cNvPr id="8" name="Rounded Rectangle 7"/>
           <p:cNvSpPr/>
           <p:nvPr/>
         </p:nvSpPr>
@@ -4766,12 +4562,12 @@
           </a:solidFill>
           <a:ln w="12700">
             <a:solidFill>
-              <a:srgbClr val="E4EAF2"/>
+              <a:srgbClr val="E4E6E9"/>
             </a:solidFill>
           </a:ln>
           <a:effectLst>
             <a:outerShdw blurRad="182880" dist="64008" dir="5400000" rotWithShape="0">
-              <a:srgbClr val="2A3B55">
+              <a:srgbClr val="000000">
                 <a:alpha val="30000"/>
               </a:srgbClr>
             </a:outerShdw>
@@ -4801,7 +4597,7 @@
       </p:sp>
       <p:sp>
         <p:nvSpPr>
-          <p:cNvPr id="11" name="TextBox 10"/>
+          <p:cNvPr id="9" name="TextBox 8"/>
           <p:cNvSpPr txBox="1"/>
           <p:nvPr/>
         </p:nvSpPr>
@@ -4832,7 +4628,7 @@
             <a:r>
               <a:rPr sz="1300" b="1">
                 <a:solidFill>
-                  <a:srgbClr val="17456B"/>
+                  <a:srgbClr val="33393F"/>
                 </a:solidFill>
                 <a:latin typeface="맑은 고딕"/>
                 <a:ea typeface="맑은 고딕"/>
@@ -4852,7 +4648,7 @@
             <a:r>
               <a:rPr sz="1100" b="0">
                 <a:solidFill>
-                  <a:srgbClr val="222E40"/>
+                  <a:srgbClr val="1C1C1E"/>
                 </a:solidFill>
                 <a:latin typeface="맑은 고딕"/>
                 <a:ea typeface="맑은 고딕"/>
@@ -4872,7 +4668,7 @@
             <a:r>
               <a:rPr sz="1100" b="0">
                 <a:solidFill>
-                  <a:srgbClr val="222E40"/>
+                  <a:srgbClr val="1C1C1E"/>
                 </a:solidFill>
                 <a:latin typeface="맑은 고딕"/>
                 <a:ea typeface="맑은 고딕"/>
@@ -4884,7 +4680,7 @@
       </p:sp>
       <p:sp>
         <p:nvSpPr>
-          <p:cNvPr id="12" name="Rounded Rectangle 11"/>
+          <p:cNvPr id="10" name="Rounded Rectangle 9"/>
           <p:cNvSpPr/>
           <p:nvPr/>
         </p:nvSpPr>
@@ -4903,12 +4699,12 @@
           </a:solidFill>
           <a:ln w="12700">
             <a:solidFill>
-              <a:srgbClr val="E4EAF2"/>
+              <a:srgbClr val="E4E6E9"/>
             </a:solidFill>
           </a:ln>
           <a:effectLst>
             <a:outerShdw blurRad="182880" dist="64008" dir="5400000" rotWithShape="0">
-              <a:srgbClr val="2A3B55">
+              <a:srgbClr val="000000">
                 <a:alpha val="30000"/>
               </a:srgbClr>
             </a:outerShdw>
@@ -4938,7 +4734,7 @@
       </p:sp>
       <p:sp>
         <p:nvSpPr>
-          <p:cNvPr id="13" name="TextBox 12"/>
+          <p:cNvPr id="11" name="TextBox 10"/>
           <p:cNvSpPr txBox="1"/>
           <p:nvPr/>
         </p:nvSpPr>
@@ -4969,7 +4765,7 @@
             <a:r>
               <a:rPr sz="1300" b="1">
                 <a:solidFill>
-                  <a:srgbClr val="17456B"/>
+                  <a:srgbClr val="33393F"/>
                 </a:solidFill>
                 <a:latin typeface="맑은 고딕"/>
                 <a:ea typeface="맑은 고딕"/>
@@ -4989,7 +4785,7 @@
             <a:r>
               <a:rPr sz="1100" b="0">
                 <a:solidFill>
-                  <a:srgbClr val="222E40"/>
+                  <a:srgbClr val="1C1C1E"/>
                 </a:solidFill>
                 <a:latin typeface="맑은 고딕"/>
                 <a:ea typeface="맑은 고딕"/>
@@ -5009,7 +4805,7 @@
             <a:r>
               <a:rPr sz="1100" b="0">
                 <a:solidFill>
-                  <a:srgbClr val="222E40"/>
+                  <a:srgbClr val="1C1C1E"/>
                 </a:solidFill>
                 <a:latin typeface="맑은 고딕"/>
                 <a:ea typeface="맑은 고딕"/>
@@ -5021,7 +4817,7 @@
       </p:sp>
       <p:sp>
         <p:nvSpPr>
-          <p:cNvPr id="14" name="Rounded Rectangle 13"/>
+          <p:cNvPr id="12" name="Rounded Rectangle 11"/>
           <p:cNvSpPr/>
           <p:nvPr/>
         </p:nvSpPr>
@@ -5040,12 +4836,12 @@
           </a:solidFill>
           <a:ln w="12700">
             <a:solidFill>
-              <a:srgbClr val="E4EAF2"/>
+              <a:srgbClr val="E4E6E9"/>
             </a:solidFill>
           </a:ln>
           <a:effectLst>
             <a:outerShdw blurRad="182880" dist="64008" dir="5400000" rotWithShape="0">
-              <a:srgbClr val="2A3B55">
+              <a:srgbClr val="000000">
                 <a:alpha val="30000"/>
               </a:srgbClr>
             </a:outerShdw>
@@ -5075,7 +4871,7 @@
       </p:sp>
       <p:sp>
         <p:nvSpPr>
-          <p:cNvPr id="15" name="TextBox 14"/>
+          <p:cNvPr id="13" name="TextBox 12"/>
           <p:cNvSpPr txBox="1"/>
           <p:nvPr/>
         </p:nvSpPr>
@@ -5106,7 +4902,7 @@
             <a:r>
               <a:rPr sz="1300" b="1">
                 <a:solidFill>
-                  <a:srgbClr val="17456B"/>
+                  <a:srgbClr val="33393F"/>
                 </a:solidFill>
                 <a:latin typeface="맑은 고딕"/>
                 <a:ea typeface="맑은 고딕"/>
@@ -5126,7 +4922,7 @@
             <a:r>
               <a:rPr sz="1100" b="0">
                 <a:solidFill>
-                  <a:srgbClr val="222E40"/>
+                  <a:srgbClr val="1C1C1E"/>
                 </a:solidFill>
                 <a:latin typeface="맑은 고딕"/>
                 <a:ea typeface="맑은 고딕"/>
@@ -5146,7 +4942,7 @@
             <a:r>
               <a:rPr sz="1100" b="0">
                 <a:solidFill>
-                  <a:srgbClr val="222E40"/>
+                  <a:srgbClr val="1C1C1E"/>
                 </a:solidFill>
                 <a:latin typeface="맑은 고딕"/>
                 <a:ea typeface="맑은 고딕"/>
@@ -5166,7 +4962,7 @@
             <a:r>
               <a:rPr sz="1100" b="0">
                 <a:solidFill>
-                  <a:srgbClr val="222E40"/>
+                  <a:srgbClr val="1C1C1E"/>
                 </a:solidFill>
                 <a:latin typeface="맑은 고딕"/>
                 <a:ea typeface="맑은 고딕"/>
@@ -5178,7 +4974,7 @@
       </p:sp>
       <p:sp>
         <p:nvSpPr>
-          <p:cNvPr id="16" name="TextBox 15"/>
+          <p:cNvPr id="14" name="TextBox 13"/>
           <p:cNvSpPr txBox="1"/>
           <p:nvPr/>
         </p:nvSpPr>
@@ -5209,7 +5005,7 @@
             <a:r>
               <a:rPr sz="1400" b="1">
                 <a:solidFill>
-                  <a:srgbClr val="17456B"/>
+                  <a:srgbClr val="33393F"/>
                 </a:solidFill>
                 <a:latin typeface="맑은 고딕"/>
                 <a:ea typeface="맑은 고딕"/>
@@ -5221,7 +5017,7 @@
       </p:sp>
       <p:graphicFrame>
         <p:nvGraphicFramePr>
-          <p:cNvPr id="17" name="Table 16"/>
+          <p:cNvPr id="15" name="Table 14"/>
           <p:cNvGraphicFramePr>
             <a:graphicFrameLocks noGrp="1"/>
           </p:cNvGraphicFramePr>
@@ -5313,7 +5109,7 @@
                       <a:r>
                         <a:rPr sz="1100" b="0">
                           <a:solidFill>
-                            <a:srgbClr val="222E40"/>
+                            <a:srgbClr val="1C1C1E"/>
                           </a:solidFill>
                           <a:latin typeface="맑은 고딕"/>
                           <a:ea typeface="맑은 고딕"/>
@@ -5341,7 +5137,7 @@
                       <a:r>
                         <a:rPr sz="1100" b="0">
                           <a:solidFill>
-                            <a:srgbClr val="222E40"/>
+                            <a:srgbClr val="1C1C1E"/>
                           </a:solidFill>
                           <a:latin typeface="맑은 고딕"/>
                           <a:ea typeface="맑은 고딕"/>
@@ -5371,7 +5167,7 @@
                       <a:r>
                         <a:rPr sz="1100" b="0">
                           <a:solidFill>
-                            <a:srgbClr val="222E40"/>
+                            <a:srgbClr val="1C1C1E"/>
                           </a:solidFill>
                           <a:latin typeface="맑은 고딕"/>
                           <a:ea typeface="맑은 고딕"/>
@@ -5382,7 +5178,7 @@
                   </a:txBody>
                   <a:tcPr marT="27432" marB="27432" marL="73152" marR="73152" anchor="ctr">
                     <a:solidFill>
-                      <a:srgbClr val="F5F8FC"/>
+                      <a:srgbClr val="F6F7F8"/>
                     </a:solidFill>
                   </a:tcPr>
                 </a:tc>
@@ -5399,7 +5195,7 @@
                       <a:r>
                         <a:rPr sz="1100" b="0">
                           <a:solidFill>
-                            <a:srgbClr val="222E40"/>
+                            <a:srgbClr val="1C1C1E"/>
                           </a:solidFill>
                           <a:latin typeface="맑은 고딕"/>
                           <a:ea typeface="맑은 고딕"/>
@@ -5410,7 +5206,7 @@
                   </a:txBody>
                   <a:tcPr marT="27432" marB="27432" marL="73152" marR="73152" anchor="ctr">
                     <a:solidFill>
-                      <a:srgbClr val="F5F8FC"/>
+                      <a:srgbClr val="F6F7F8"/>
                     </a:solidFill>
                   </a:tcPr>
                 </a:tc>
@@ -5429,7 +5225,7 @@
                       <a:r>
                         <a:rPr sz="1100" b="0">
                           <a:solidFill>
-                            <a:srgbClr val="222E40"/>
+                            <a:srgbClr val="1C1C1E"/>
                           </a:solidFill>
                           <a:latin typeface="맑은 고딕"/>
                           <a:ea typeface="맑은 고딕"/>
@@ -5457,7 +5253,7 @@
                       <a:r>
                         <a:rPr sz="1100" b="0">
                           <a:solidFill>
-                            <a:srgbClr val="222E40"/>
+                            <a:srgbClr val="1C1C1E"/>
                           </a:solidFill>
                           <a:latin typeface="맑은 고딕"/>
                           <a:ea typeface="맑은 고딕"/>
@@ -5487,7 +5283,7 @@
                       <a:r>
                         <a:rPr sz="1100" b="0">
                           <a:solidFill>
-                            <a:srgbClr val="222E40"/>
+                            <a:srgbClr val="1C1C1E"/>
                           </a:solidFill>
                           <a:latin typeface="맑은 고딕"/>
                           <a:ea typeface="맑은 고딕"/>
@@ -5498,7 +5294,7 @@
                   </a:txBody>
                   <a:tcPr marT="27432" marB="27432" marL="73152" marR="73152" anchor="ctr">
                     <a:solidFill>
-                      <a:srgbClr val="F5F8FC"/>
+                      <a:srgbClr val="F6F7F8"/>
                     </a:solidFill>
                   </a:tcPr>
                 </a:tc>
@@ -5515,7 +5311,7 @@
                       <a:r>
                         <a:rPr sz="1100" b="0">
                           <a:solidFill>
-                            <a:srgbClr val="222E40"/>
+                            <a:srgbClr val="1C1C1E"/>
                           </a:solidFill>
                           <a:latin typeface="맑은 고딕"/>
                           <a:ea typeface="맑은 고딕"/>
@@ -5526,7 +5322,7 @@
                   </a:txBody>
                   <a:tcPr marT="27432" marB="27432" marL="73152" marR="73152" anchor="ctr">
                     <a:solidFill>
-                      <a:srgbClr val="F5F8FC"/>
+                      <a:srgbClr val="F6F7F8"/>
                     </a:solidFill>
                   </a:tcPr>
                 </a:tc>
@@ -5597,57 +5393,9 @@
           </a:p>
         </p:txBody>
       </p:sp>
-      <p:pic>
-        <p:nvPicPr>
-          <p:cNvPr id="3" name="Picture 2" descr="blob_blue.png"/>
-          <p:cNvPicPr>
-            <a:picLocks noChangeAspect="1"/>
-          </p:cNvPicPr>
-          <p:nvPr/>
-        </p:nvPicPr>
-        <p:blipFill>
-          <a:blip r:embed="rId2"/>
-          <a:stretch>
-            <a:fillRect/>
-          </a:stretch>
-        </p:blipFill>
-        <p:spPr>
-          <a:xfrm>
-            <a:off x="-3474720" y="3840480"/>
-            <a:ext cx="6583680" cy="6583680"/>
-          </a:xfrm>
-          <a:prstGeom prst="rect">
-            <a:avLst/>
-          </a:prstGeom>
-        </p:spPr>
-      </p:pic>
-      <p:pic>
-        <p:nvPicPr>
-          <p:cNvPr id="4" name="Picture 3" descr="blob_coral.png"/>
-          <p:cNvPicPr>
-            <a:picLocks noChangeAspect="1"/>
-          </p:cNvPicPr>
-          <p:nvPr/>
-        </p:nvPicPr>
-        <p:blipFill>
-          <a:blip r:embed="rId3"/>
-          <a:stretch>
-            <a:fillRect/>
-          </a:stretch>
-        </p:blipFill>
-        <p:spPr>
-          <a:xfrm>
-            <a:off x="8961120" y="-3291840"/>
-            <a:ext cx="6217920" cy="6217920"/>
-          </a:xfrm>
-          <a:prstGeom prst="rect">
-            <a:avLst/>
-          </a:prstGeom>
-        </p:spPr>
-      </p:pic>
-      <p:sp>
-        <p:nvSpPr>
-          <p:cNvPr id="5" name="Rounded Rectangle 4"/>
+      <p:sp>
+        <p:nvSpPr>
+          <p:cNvPr id="3" name="Rounded Rectangle 2"/>
           <p:cNvSpPr/>
           <p:nvPr/>
         </p:nvSpPr>
@@ -5664,10 +5412,10 @@
           <a:gradFill rotWithShape="1">
             <a:gsLst>
               <a:gs pos="0">
-                <a:srgbClr val="FF7A59"/>
+                <a:srgbClr val="3A3F45"/>
               </a:gs>
               <a:gs pos="100000">
-                <a:srgbClr val="FFB86B"/>
+                <a:srgbClr val="73787E"/>
               </a:gs>
             </a:gsLst>
             <a:lin scaled="0" ang="18900000"/>
@@ -5677,7 +5425,7 @@
           </a:ln>
           <a:effectLst>
             <a:outerShdw blurRad="109728" dist="36576" dir="5400000" rotWithShape="0">
-              <a:srgbClr val="C24E30">
+              <a:srgbClr val="000000">
                 <a:alpha val="35000"/>
               </a:srgbClr>
             </a:outerShdw>
@@ -5707,7 +5455,7 @@
       </p:sp>
       <p:sp>
         <p:nvSpPr>
-          <p:cNvPr id="6" name="TextBox 5"/>
+          <p:cNvPr id="4" name="TextBox 3"/>
           <p:cNvSpPr txBox="1"/>
           <p:nvPr/>
         </p:nvSpPr>
@@ -5738,7 +5486,7 @@
             <a:r>
               <a:rPr sz="2150" b="1">
                 <a:solidFill>
-                  <a:srgbClr val="222E40"/>
+                  <a:srgbClr val="1C1C1E"/>
                 </a:solidFill>
                 <a:latin typeface="맑은 고딕"/>
                 <a:ea typeface="맑은 고딕"/>
@@ -5748,33 +5496,61 @@
           </a:p>
         </p:txBody>
       </p:sp>
-      <p:pic>
-        <p:nvPicPr>
-          <p:cNvPr id="7" name="Picture 6" descr="glow_bar.png"/>
-          <p:cNvPicPr>
-            <a:picLocks noChangeAspect="1"/>
-          </p:cNvPicPr>
-          <p:nvPr/>
-        </p:nvPicPr>
-        <p:blipFill>
-          <a:blip r:embed="rId4"/>
-          <a:stretch>
-            <a:fillRect/>
-          </a:stretch>
-        </p:blipFill>
+      <p:sp>
+        <p:nvSpPr>
+          <p:cNvPr id="5" name="Rectangle 4"/>
+          <p:cNvSpPr/>
+          <p:nvPr/>
+        </p:nvSpPr>
         <p:spPr>
           <a:xfrm>
             <a:off x="521207" y="969264"/>
-            <a:ext cx="4206240" cy="50292"/>
+            <a:ext cx="4206240" cy="27432"/>
           </a:xfrm>
           <a:prstGeom prst="rect">
             <a:avLst/>
           </a:prstGeom>
-        </p:spPr>
-      </p:pic>
-      <p:sp>
-        <p:nvSpPr>
-          <p:cNvPr id="8" name="TextBox 7"/>
+          <a:gradFill rotWithShape="1">
+            <a:gsLst>
+              <a:gs pos="0">
+                <a:srgbClr val="2A2E33"/>
+              </a:gs>
+              <a:gs pos="100000">
+                <a:srgbClr val="FFFFFF"/>
+              </a:gs>
+            </a:gsLst>
+            <a:lin scaled="0" ang="0"/>
+          </a:gradFill>
+          <a:ln>
+            <a:noFill/>
+          </a:ln>
+          <a:effectLst/>
+        </p:spPr>
+        <p:style>
+          <a:lnRef idx="1">
+            <a:schemeClr val="accent1"/>
+          </a:lnRef>
+          <a:fillRef idx="3">
+            <a:schemeClr val="accent1"/>
+          </a:fillRef>
+          <a:effectRef idx="2">
+            <a:schemeClr val="accent1"/>
+          </a:effectRef>
+          <a:fontRef idx="minor">
+            <a:schemeClr val="lt1"/>
+          </a:fontRef>
+        </p:style>
+        <p:txBody>
+          <a:bodyPr rtlCol="0" anchor="ctr"/>
+          <a:lstStyle/>
+          <a:p>
+            <a:pPr algn="ctr"/>
+          </a:p>
+        </p:txBody>
+      </p:sp>
+      <p:sp>
+        <p:nvSpPr>
+          <p:cNvPr id="6" name="TextBox 5"/>
           <p:cNvSpPr txBox="1"/>
           <p:nvPr/>
         </p:nvSpPr>
@@ -5805,7 +5581,7 @@
             <a:r>
               <a:rPr sz="3000" b="1">
                 <a:solidFill>
-                  <a:srgbClr val="D3DDEA"/>
+                  <a:srgbClr val="D8DADD"/>
                 </a:solidFill>
                 <a:latin typeface="맑은 고딕"/>
                 <a:ea typeface="맑은 고딕"/>
@@ -5817,7 +5593,7 @@
       </p:sp>
       <p:sp>
         <p:nvSpPr>
-          <p:cNvPr id="9" name="TextBox 8"/>
+          <p:cNvPr id="7" name="TextBox 6"/>
           <p:cNvSpPr txBox="1"/>
           <p:nvPr/>
         </p:nvSpPr>
@@ -5848,7 +5624,7 @@
             <a:r>
               <a:rPr sz="850" b="0">
                 <a:solidFill>
-                  <a:srgbClr val="ABB7C7"/>
+                  <a:srgbClr val="B2B5B9"/>
                 </a:solidFill>
                 <a:latin typeface="맑은 고딕"/>
                 <a:ea typeface="맑은 고딕"/>
@@ -5860,7 +5636,7 @@
       </p:sp>
       <p:graphicFrame>
         <p:nvGraphicFramePr>
-          <p:cNvPr id="10" name="Table 9"/>
+          <p:cNvPr id="8" name="Table 7"/>
           <p:cNvGraphicFramePr>
             <a:graphicFrameLocks noGrp="1"/>
           </p:cNvGraphicFramePr>
@@ -5981,7 +5757,7 @@
                       <a:r>
                         <a:rPr sz="1100" b="0">
                           <a:solidFill>
-                            <a:srgbClr val="222E40"/>
+                            <a:srgbClr val="1C1C1E"/>
                           </a:solidFill>
                           <a:latin typeface="맑은 고딕"/>
                           <a:ea typeface="맑은 고딕"/>
@@ -6009,7 +5785,7 @@
                       <a:r>
                         <a:rPr sz="1100" b="0">
                           <a:solidFill>
-                            <a:srgbClr val="222E40"/>
+                            <a:srgbClr val="1C1C1E"/>
                           </a:solidFill>
                           <a:latin typeface="맑은 고딕"/>
                           <a:ea typeface="맑은 고딕"/>
@@ -6037,7 +5813,7 @@
                       <a:r>
                         <a:rPr sz="1100" b="0">
                           <a:solidFill>
-                            <a:srgbClr val="222E40"/>
+                            <a:srgbClr val="1C1C1E"/>
                           </a:solidFill>
                           <a:latin typeface="맑은 고딕"/>
                           <a:ea typeface="맑은 고딕"/>
@@ -6067,7 +5843,7 @@
                       <a:r>
                         <a:rPr sz="1100" b="0">
                           <a:solidFill>
-                            <a:srgbClr val="222E40"/>
+                            <a:srgbClr val="1C1C1E"/>
                           </a:solidFill>
                           <a:latin typeface="맑은 고딕"/>
                           <a:ea typeface="맑은 고딕"/>
@@ -6078,7 +5854,7 @@
                   </a:txBody>
                   <a:tcPr marT="27432" marB="27432" marL="73152" marR="73152" anchor="ctr">
                     <a:solidFill>
-                      <a:srgbClr val="F5F8FC"/>
+                      <a:srgbClr val="F6F7F8"/>
                     </a:solidFill>
                   </a:tcPr>
                 </a:tc>
@@ -6095,7 +5871,7 @@
                       <a:r>
                         <a:rPr sz="1100" b="0">
                           <a:solidFill>
-                            <a:srgbClr val="222E40"/>
+                            <a:srgbClr val="1C1C1E"/>
                           </a:solidFill>
                           <a:latin typeface="맑은 고딕"/>
                           <a:ea typeface="맑은 고딕"/>
@@ -6106,7 +5882,7 @@
                   </a:txBody>
                   <a:tcPr marT="27432" marB="27432" marL="73152" marR="73152" anchor="ctr">
                     <a:solidFill>
-                      <a:srgbClr val="F5F8FC"/>
+                      <a:srgbClr val="F6F7F8"/>
                     </a:solidFill>
                   </a:tcPr>
                 </a:tc>
@@ -6123,7 +5899,7 @@
                       <a:r>
                         <a:rPr sz="1100" b="0">
                           <a:solidFill>
-                            <a:srgbClr val="222E40"/>
+                            <a:srgbClr val="1C1C1E"/>
                           </a:solidFill>
                           <a:latin typeface="맑은 고딕"/>
                           <a:ea typeface="맑은 고딕"/>
@@ -6134,7 +5910,7 @@
                   </a:txBody>
                   <a:tcPr marT="27432" marB="27432" marL="73152" marR="73152" anchor="ctr">
                     <a:solidFill>
-                      <a:srgbClr val="F5F8FC"/>
+                      <a:srgbClr val="F6F7F8"/>
                     </a:solidFill>
                   </a:tcPr>
                 </a:tc>
@@ -6153,7 +5929,7 @@
                       <a:r>
                         <a:rPr sz="1100" b="0">
                           <a:solidFill>
-                            <a:srgbClr val="222E40"/>
+                            <a:srgbClr val="1C1C1E"/>
                           </a:solidFill>
                           <a:latin typeface="맑은 고딕"/>
                           <a:ea typeface="맑은 고딕"/>
@@ -6181,7 +5957,7 @@
                       <a:r>
                         <a:rPr sz="1100" b="0">
                           <a:solidFill>
-                            <a:srgbClr val="222E40"/>
+                            <a:srgbClr val="1C1C1E"/>
                           </a:solidFill>
                           <a:latin typeface="맑은 고딕"/>
                           <a:ea typeface="맑은 고딕"/>
@@ -6209,7 +5985,7 @@
                       <a:r>
                         <a:rPr sz="1100" b="0">
                           <a:solidFill>
-                            <a:srgbClr val="222E40"/>
+                            <a:srgbClr val="1C1C1E"/>
                           </a:solidFill>
                           <a:latin typeface="맑은 고딕"/>
                           <a:ea typeface="맑은 고딕"/>
@@ -6239,7 +6015,7 @@
                       <a:r>
                         <a:rPr sz="1100" b="0">
                           <a:solidFill>
-                            <a:srgbClr val="222E40"/>
+                            <a:srgbClr val="1C1C1E"/>
                           </a:solidFill>
                           <a:latin typeface="맑은 고딕"/>
                           <a:ea typeface="맑은 고딕"/>
@@ -6250,7 +6026,7 @@
                   </a:txBody>
                   <a:tcPr marT="27432" marB="27432" marL="73152" marR="73152" anchor="ctr">
                     <a:solidFill>
-                      <a:srgbClr val="F5F8FC"/>
+                      <a:srgbClr val="F6F7F8"/>
                     </a:solidFill>
                   </a:tcPr>
                 </a:tc>
@@ -6267,7 +6043,7 @@
                       <a:r>
                         <a:rPr sz="1100" b="0">
                           <a:solidFill>
-                            <a:srgbClr val="222E40"/>
+                            <a:srgbClr val="1C1C1E"/>
                           </a:solidFill>
                           <a:latin typeface="맑은 고딕"/>
                           <a:ea typeface="맑은 고딕"/>
@@ -6278,7 +6054,7 @@
                   </a:txBody>
                   <a:tcPr marT="27432" marB="27432" marL="73152" marR="73152" anchor="ctr">
                     <a:solidFill>
-                      <a:srgbClr val="F5F8FC"/>
+                      <a:srgbClr val="F6F7F8"/>
                     </a:solidFill>
                   </a:tcPr>
                 </a:tc>
@@ -6295,7 +6071,7 @@
                       <a:r>
                         <a:rPr sz="1100" b="0">
                           <a:solidFill>
-                            <a:srgbClr val="222E40"/>
+                            <a:srgbClr val="1C1C1E"/>
                           </a:solidFill>
                           <a:latin typeface="맑은 고딕"/>
                           <a:ea typeface="맑은 고딕"/>
@@ -6306,7 +6082,7 @@
                   </a:txBody>
                   <a:tcPr marT="27432" marB="27432" marL="73152" marR="73152" anchor="ctr">
                     <a:solidFill>
-                      <a:srgbClr val="F5F8FC"/>
+                      <a:srgbClr val="F6F7F8"/>
                     </a:solidFill>
                   </a:tcPr>
                 </a:tc>
@@ -6325,7 +6101,7 @@
                       <a:r>
                         <a:rPr sz="1100" b="0">
                           <a:solidFill>
-                            <a:srgbClr val="222E40"/>
+                            <a:srgbClr val="1C1C1E"/>
                           </a:solidFill>
                           <a:latin typeface="맑은 고딕"/>
                           <a:ea typeface="맑은 고딕"/>
@@ -6353,7 +6129,7 @@
                       <a:r>
                         <a:rPr sz="1100" b="0">
                           <a:solidFill>
-                            <a:srgbClr val="222E40"/>
+                            <a:srgbClr val="1C1C1E"/>
                           </a:solidFill>
                           <a:latin typeface="맑은 고딕"/>
                           <a:ea typeface="맑은 고딕"/>
@@ -6381,7 +6157,7 @@
                       <a:r>
                         <a:rPr sz="1100" b="0">
                           <a:solidFill>
-                            <a:srgbClr val="222E40"/>
+                            <a:srgbClr val="1C1C1E"/>
                           </a:solidFill>
                           <a:latin typeface="맑은 고딕"/>
                           <a:ea typeface="맑은 고딕"/>
@@ -6411,7 +6187,7 @@
                       <a:r>
                         <a:rPr sz="1100" b="0">
                           <a:solidFill>
-                            <a:srgbClr val="222E40"/>
+                            <a:srgbClr val="1C1C1E"/>
                           </a:solidFill>
                           <a:latin typeface="맑은 고딕"/>
                           <a:ea typeface="맑은 고딕"/>
@@ -6422,7 +6198,7 @@
                   </a:txBody>
                   <a:tcPr marT="27432" marB="27432" marL="73152" marR="73152" anchor="ctr">
                     <a:solidFill>
-                      <a:srgbClr val="F5F8FC"/>
+                      <a:srgbClr val="F6F7F8"/>
                     </a:solidFill>
                   </a:tcPr>
                 </a:tc>
@@ -6439,7 +6215,7 @@
                       <a:r>
                         <a:rPr sz="1100" b="0">
                           <a:solidFill>
-                            <a:srgbClr val="222E40"/>
+                            <a:srgbClr val="1C1C1E"/>
                           </a:solidFill>
                           <a:latin typeface="맑은 고딕"/>
                           <a:ea typeface="맑은 고딕"/>
@@ -6450,7 +6226,7 @@
                   </a:txBody>
                   <a:tcPr marT="27432" marB="27432" marL="73152" marR="73152" anchor="ctr">
                     <a:solidFill>
-                      <a:srgbClr val="F5F8FC"/>
+                      <a:srgbClr val="F6F7F8"/>
                     </a:solidFill>
                   </a:tcPr>
                 </a:tc>
@@ -6467,7 +6243,7 @@
                       <a:r>
                         <a:rPr sz="1100" b="0">
                           <a:solidFill>
-                            <a:srgbClr val="222E40"/>
+                            <a:srgbClr val="1C1C1E"/>
                           </a:solidFill>
                           <a:latin typeface="맑은 고딕"/>
                           <a:ea typeface="맑은 고딕"/>
@@ -6478,7 +6254,7 @@
                   </a:txBody>
                   <a:tcPr marT="27432" marB="27432" marL="73152" marR="73152" anchor="ctr">
                     <a:solidFill>
-                      <a:srgbClr val="F5F8FC"/>
+                      <a:srgbClr val="F6F7F8"/>
                     </a:solidFill>
                   </a:tcPr>
                 </a:tc>
@@ -6489,7 +6265,7 @@
       </p:graphicFrame>
       <p:sp>
         <p:nvSpPr>
-          <p:cNvPr id="11" name="Rounded Rectangle 10"/>
+          <p:cNvPr id="9" name="Rounded Rectangle 8"/>
           <p:cNvSpPr/>
           <p:nvPr/>
         </p:nvSpPr>
@@ -6508,12 +6284,12 @@
           </a:solidFill>
           <a:ln w="12700">
             <a:solidFill>
-              <a:srgbClr val="E4EAF2"/>
+              <a:srgbClr val="E4E6E9"/>
             </a:solidFill>
           </a:ln>
           <a:effectLst>
             <a:outerShdw blurRad="182880" dist="64008" dir="5400000" rotWithShape="0">
-              <a:srgbClr val="2A3B55">
+              <a:srgbClr val="000000">
                 <a:alpha val="30000"/>
               </a:srgbClr>
             </a:outerShdw>
@@ -6543,7 +6319,7 @@
       </p:sp>
       <p:sp>
         <p:nvSpPr>
-          <p:cNvPr id="12" name="TextBox 11"/>
+          <p:cNvPr id="10" name="TextBox 9"/>
           <p:cNvSpPr txBox="1"/>
           <p:nvPr/>
         </p:nvSpPr>
@@ -6574,7 +6350,7 @@
             <a:r>
               <a:rPr sz="1300" b="1">
                 <a:solidFill>
-                  <a:srgbClr val="17456B"/>
+                  <a:srgbClr val="33393F"/>
                 </a:solidFill>
                 <a:latin typeface="맑은 고딕"/>
                 <a:ea typeface="맑은 고딕"/>
@@ -6594,7 +6370,7 @@
             <a:r>
               <a:rPr sz="1150" b="0">
                 <a:solidFill>
-                  <a:srgbClr val="222E40"/>
+                  <a:srgbClr val="1C1C1E"/>
                 </a:solidFill>
                 <a:latin typeface="맑은 고딕"/>
                 <a:ea typeface="맑은 고딕"/>
@@ -6614,7 +6390,7 @@
             <a:r>
               <a:rPr sz="1150" b="0">
                 <a:solidFill>
-                  <a:srgbClr val="222E40"/>
+                  <a:srgbClr val="1C1C1E"/>
                 </a:solidFill>
                 <a:latin typeface="맑은 고딕"/>
                 <a:ea typeface="맑은 고딕"/>
@@ -6626,7 +6402,7 @@
       </p:sp>
       <p:sp>
         <p:nvSpPr>
-          <p:cNvPr id="13" name="Rounded Rectangle 12"/>
+          <p:cNvPr id="11" name="Rounded Rectangle 10"/>
           <p:cNvSpPr/>
           <p:nvPr/>
         </p:nvSpPr>
@@ -6645,12 +6421,12 @@
           </a:solidFill>
           <a:ln w="12700">
             <a:solidFill>
-              <a:srgbClr val="E4EAF2"/>
+              <a:srgbClr val="E4E6E9"/>
             </a:solidFill>
           </a:ln>
           <a:effectLst>
             <a:outerShdw blurRad="182880" dist="64008" dir="5400000" rotWithShape="0">
-              <a:srgbClr val="2A3B55">
+              <a:srgbClr val="000000">
                 <a:alpha val="30000"/>
               </a:srgbClr>
             </a:outerShdw>
@@ -6680,7 +6456,7 @@
       </p:sp>
       <p:sp>
         <p:nvSpPr>
-          <p:cNvPr id="14" name="TextBox 13"/>
+          <p:cNvPr id="12" name="TextBox 11"/>
           <p:cNvSpPr txBox="1"/>
           <p:nvPr/>
         </p:nvSpPr>
@@ -6711,7 +6487,7 @@
             <a:r>
               <a:rPr sz="1300" b="1">
                 <a:solidFill>
-                  <a:srgbClr val="17456B"/>
+                  <a:srgbClr val="33393F"/>
                 </a:solidFill>
                 <a:latin typeface="맑은 고딕"/>
                 <a:ea typeface="맑은 고딕"/>
@@ -6731,7 +6507,7 @@
             <a:r>
               <a:rPr sz="1150" b="0">
                 <a:solidFill>
-                  <a:srgbClr val="222E40"/>
+                  <a:srgbClr val="1C1C1E"/>
                 </a:solidFill>
                 <a:latin typeface="맑은 고딕"/>
                 <a:ea typeface="맑은 고딕"/>
@@ -6751,7 +6527,7 @@
             <a:r>
               <a:rPr sz="1150" b="0">
                 <a:solidFill>
-                  <a:srgbClr val="222E40"/>
+                  <a:srgbClr val="1C1C1E"/>
                 </a:solidFill>
                 <a:latin typeface="맑은 고딕"/>
                 <a:ea typeface="맑은 고딕"/>
@@ -6823,57 +6599,9 @@
           </a:p>
         </p:txBody>
       </p:sp>
-      <p:pic>
-        <p:nvPicPr>
-          <p:cNvPr id="3" name="Picture 2" descr="blob_blue.png"/>
-          <p:cNvPicPr>
-            <a:picLocks noChangeAspect="1"/>
-          </p:cNvPicPr>
-          <p:nvPr/>
-        </p:nvPicPr>
-        <p:blipFill>
-          <a:blip r:embed="rId2"/>
-          <a:stretch>
-            <a:fillRect/>
-          </a:stretch>
-        </p:blipFill>
-        <p:spPr>
-          <a:xfrm>
-            <a:off x="-3474720" y="3840480"/>
-            <a:ext cx="6583680" cy="6583680"/>
-          </a:xfrm>
-          <a:prstGeom prst="rect">
-            <a:avLst/>
-          </a:prstGeom>
-        </p:spPr>
-      </p:pic>
-      <p:pic>
-        <p:nvPicPr>
-          <p:cNvPr id="4" name="Picture 3" descr="blob_coral.png"/>
-          <p:cNvPicPr>
-            <a:picLocks noChangeAspect="1"/>
-          </p:cNvPicPr>
-          <p:nvPr/>
-        </p:nvPicPr>
-        <p:blipFill>
-          <a:blip r:embed="rId3"/>
-          <a:stretch>
-            <a:fillRect/>
-          </a:stretch>
-        </p:blipFill>
-        <p:spPr>
-          <a:xfrm>
-            <a:off x="8961120" y="-3291840"/>
-            <a:ext cx="6217920" cy="6217920"/>
-          </a:xfrm>
-          <a:prstGeom prst="rect">
-            <a:avLst/>
-          </a:prstGeom>
-        </p:spPr>
-      </p:pic>
-      <p:sp>
-        <p:nvSpPr>
-          <p:cNvPr id="5" name="Rounded Rectangle 4"/>
+      <p:sp>
+        <p:nvSpPr>
+          <p:cNvPr id="3" name="Rounded Rectangle 2"/>
           <p:cNvSpPr/>
           <p:nvPr/>
         </p:nvSpPr>
@@ -6890,10 +6618,10 @@
           <a:gradFill rotWithShape="1">
             <a:gsLst>
               <a:gs pos="0">
-                <a:srgbClr val="FF7A59"/>
+                <a:srgbClr val="3A3F45"/>
               </a:gs>
               <a:gs pos="100000">
-                <a:srgbClr val="FFB86B"/>
+                <a:srgbClr val="73787E"/>
               </a:gs>
             </a:gsLst>
             <a:lin scaled="0" ang="18900000"/>
@@ -6903,7 +6631,7 @@
           </a:ln>
           <a:effectLst>
             <a:outerShdw blurRad="109728" dist="36576" dir="5400000" rotWithShape="0">
-              <a:srgbClr val="C24E30">
+              <a:srgbClr val="000000">
                 <a:alpha val="35000"/>
               </a:srgbClr>
             </a:outerShdw>
@@ -6933,7 +6661,7 @@
       </p:sp>
       <p:sp>
         <p:nvSpPr>
-          <p:cNvPr id="6" name="TextBox 5"/>
+          <p:cNvPr id="4" name="TextBox 3"/>
           <p:cNvSpPr txBox="1"/>
           <p:nvPr/>
         </p:nvSpPr>
@@ -6964,7 +6692,7 @@
             <a:r>
               <a:rPr sz="2150" b="1">
                 <a:solidFill>
-                  <a:srgbClr val="222E40"/>
+                  <a:srgbClr val="1C1C1E"/>
                 </a:solidFill>
                 <a:latin typeface="맑은 고딕"/>
                 <a:ea typeface="맑은 고딕"/>
@@ -6974,33 +6702,61 @@
           </a:p>
         </p:txBody>
       </p:sp>
-      <p:pic>
-        <p:nvPicPr>
-          <p:cNvPr id="7" name="Picture 6" descr="glow_bar.png"/>
-          <p:cNvPicPr>
-            <a:picLocks noChangeAspect="1"/>
-          </p:cNvPicPr>
-          <p:nvPr/>
-        </p:nvPicPr>
-        <p:blipFill>
-          <a:blip r:embed="rId4"/>
-          <a:stretch>
-            <a:fillRect/>
-          </a:stretch>
-        </p:blipFill>
+      <p:sp>
+        <p:nvSpPr>
+          <p:cNvPr id="5" name="Rectangle 4"/>
+          <p:cNvSpPr/>
+          <p:nvPr/>
+        </p:nvSpPr>
         <p:spPr>
           <a:xfrm>
             <a:off x="521207" y="969264"/>
-            <a:ext cx="4206240" cy="50292"/>
+            <a:ext cx="4206240" cy="27432"/>
           </a:xfrm>
           <a:prstGeom prst="rect">
             <a:avLst/>
           </a:prstGeom>
-        </p:spPr>
-      </p:pic>
-      <p:sp>
-        <p:nvSpPr>
-          <p:cNvPr id="8" name="TextBox 7"/>
+          <a:gradFill rotWithShape="1">
+            <a:gsLst>
+              <a:gs pos="0">
+                <a:srgbClr val="2A2E33"/>
+              </a:gs>
+              <a:gs pos="100000">
+                <a:srgbClr val="FFFFFF"/>
+              </a:gs>
+            </a:gsLst>
+            <a:lin scaled="0" ang="0"/>
+          </a:gradFill>
+          <a:ln>
+            <a:noFill/>
+          </a:ln>
+          <a:effectLst/>
+        </p:spPr>
+        <p:style>
+          <a:lnRef idx="1">
+            <a:schemeClr val="accent1"/>
+          </a:lnRef>
+          <a:fillRef idx="3">
+            <a:schemeClr val="accent1"/>
+          </a:fillRef>
+          <a:effectRef idx="2">
+            <a:schemeClr val="accent1"/>
+          </a:effectRef>
+          <a:fontRef idx="minor">
+            <a:schemeClr val="lt1"/>
+          </a:fontRef>
+        </p:style>
+        <p:txBody>
+          <a:bodyPr rtlCol="0" anchor="ctr"/>
+          <a:lstStyle/>
+          <a:p>
+            <a:pPr algn="ctr"/>
+          </a:p>
+        </p:txBody>
+      </p:sp>
+      <p:sp>
+        <p:nvSpPr>
+          <p:cNvPr id="6" name="TextBox 5"/>
           <p:cNvSpPr txBox="1"/>
           <p:nvPr/>
         </p:nvSpPr>
@@ -7031,7 +6787,7 @@
             <a:r>
               <a:rPr sz="3000" b="1">
                 <a:solidFill>
-                  <a:srgbClr val="D3DDEA"/>
+                  <a:srgbClr val="D8DADD"/>
                 </a:solidFill>
                 <a:latin typeface="맑은 고딕"/>
                 <a:ea typeface="맑은 고딕"/>
@@ -7043,7 +6799,7 @@
       </p:sp>
       <p:sp>
         <p:nvSpPr>
-          <p:cNvPr id="9" name="TextBox 8"/>
+          <p:cNvPr id="7" name="TextBox 6"/>
           <p:cNvSpPr txBox="1"/>
           <p:nvPr/>
         </p:nvSpPr>
@@ -7074,7 +6830,7 @@
             <a:r>
               <a:rPr sz="850" b="0">
                 <a:solidFill>
-                  <a:srgbClr val="ABB7C7"/>
+                  <a:srgbClr val="B2B5B9"/>
                 </a:solidFill>
                 <a:latin typeface="맑은 고딕"/>
                 <a:ea typeface="맑은 고딕"/>
@@ -7086,7 +6842,7 @@
       </p:sp>
       <p:sp>
         <p:nvSpPr>
-          <p:cNvPr id="10" name="Rounded Rectangle 9"/>
+          <p:cNvPr id="8" name="Rounded Rectangle 7"/>
           <p:cNvSpPr/>
           <p:nvPr/>
         </p:nvSpPr>
@@ -7105,12 +6861,12 @@
           </a:solidFill>
           <a:ln w="12700">
             <a:solidFill>
-              <a:srgbClr val="E4EAF2"/>
+              <a:srgbClr val="E4E6E9"/>
             </a:solidFill>
           </a:ln>
           <a:effectLst>
             <a:outerShdw blurRad="182880" dist="64008" dir="5400000" rotWithShape="0">
-              <a:srgbClr val="2A3B55">
+              <a:srgbClr val="000000">
                 <a:alpha val="30000"/>
               </a:srgbClr>
             </a:outerShdw>
@@ -7140,7 +6896,7 @@
       </p:sp>
       <p:sp>
         <p:nvSpPr>
-          <p:cNvPr id="11" name="TextBox 10"/>
+          <p:cNvPr id="9" name="TextBox 8"/>
           <p:cNvSpPr txBox="1"/>
           <p:nvPr/>
         </p:nvSpPr>
@@ -7171,7 +6927,7 @@
             <a:r>
               <a:rPr sz="1500" b="1">
                 <a:solidFill>
-                  <a:srgbClr val="17456B"/>
+                  <a:srgbClr val="33393F"/>
                 </a:solidFill>
                 <a:latin typeface="맑은 고딕"/>
                 <a:ea typeface="맑은 고딕"/>
@@ -7191,7 +6947,7 @@
             <a:r>
               <a:rPr sz="1150" b="0">
                 <a:solidFill>
-                  <a:srgbClr val="222E40"/>
+                  <a:srgbClr val="1C1C1E"/>
                 </a:solidFill>
                 <a:latin typeface="맑은 고딕"/>
                 <a:ea typeface="맑은 고딕"/>
@@ -7211,7 +6967,7 @@
             <a:r>
               <a:rPr sz="1150" b="0">
                 <a:solidFill>
-                  <a:srgbClr val="222E40"/>
+                  <a:srgbClr val="1C1C1E"/>
                 </a:solidFill>
                 <a:latin typeface="맑은 고딕"/>
                 <a:ea typeface="맑은 고딕"/>
@@ -7223,7 +6979,7 @@
       </p:sp>
       <p:sp>
         <p:nvSpPr>
-          <p:cNvPr id="12" name="TextBox 11"/>
+          <p:cNvPr id="10" name="TextBox 9"/>
           <p:cNvSpPr txBox="1"/>
           <p:nvPr/>
         </p:nvSpPr>
@@ -7254,7 +7010,7 @@
             <a:r>
               <a:rPr sz="2200" b="1">
                 <a:solidFill>
-                  <a:srgbClr val="6A7B92"/>
+                  <a:srgbClr val="767A7F"/>
                 </a:solidFill>
                 <a:latin typeface="맑은 고딕"/>
                 <a:ea typeface="맑은 고딕"/>
@@ -7266,7 +7022,7 @@
       </p:sp>
       <p:sp>
         <p:nvSpPr>
-          <p:cNvPr id="13" name="Rounded Rectangle 12"/>
+          <p:cNvPr id="11" name="Rounded Rectangle 10"/>
           <p:cNvSpPr/>
           <p:nvPr/>
         </p:nvSpPr>
@@ -7285,12 +7041,12 @@
           </a:solidFill>
           <a:ln w="12700">
             <a:solidFill>
-              <a:srgbClr val="E4EAF2"/>
+              <a:srgbClr val="E4E6E9"/>
             </a:solidFill>
           </a:ln>
           <a:effectLst>
             <a:outerShdw blurRad="182880" dist="64008" dir="5400000" rotWithShape="0">
-              <a:srgbClr val="2A3B55">
+              <a:srgbClr val="000000">
                 <a:alpha val="30000"/>
               </a:srgbClr>
             </a:outerShdw>
@@ -7320,7 +7076,7 @@
       </p:sp>
       <p:sp>
         <p:nvSpPr>
-          <p:cNvPr id="14" name="TextBox 13"/>
+          <p:cNvPr id="12" name="TextBox 11"/>
           <p:cNvSpPr txBox="1"/>
           <p:nvPr/>
         </p:nvSpPr>
@@ -7351,7 +7107,7 @@
             <a:r>
               <a:rPr sz="1500" b="1">
                 <a:solidFill>
-                  <a:srgbClr val="17456B"/>
+                  <a:srgbClr val="33393F"/>
                 </a:solidFill>
                 <a:latin typeface="맑은 고딕"/>
                 <a:ea typeface="맑은 고딕"/>
@@ -7371,7 +7127,7 @@
             <a:r>
               <a:rPr sz="1150" b="0">
                 <a:solidFill>
-                  <a:srgbClr val="222E40"/>
+                  <a:srgbClr val="1C1C1E"/>
                 </a:solidFill>
                 <a:latin typeface="맑은 고딕"/>
                 <a:ea typeface="맑은 고딕"/>
@@ -7391,7 +7147,7 @@
             <a:r>
               <a:rPr sz="1150" b="0">
                 <a:solidFill>
-                  <a:srgbClr val="222E40"/>
+                  <a:srgbClr val="1C1C1E"/>
                 </a:solidFill>
                 <a:latin typeface="맑은 고딕"/>
                 <a:ea typeface="맑은 고딕"/>
@@ -7403,7 +7159,7 @@
       </p:sp>
       <p:sp>
         <p:nvSpPr>
-          <p:cNvPr id="15" name="TextBox 14"/>
+          <p:cNvPr id="13" name="TextBox 12"/>
           <p:cNvSpPr txBox="1"/>
           <p:nvPr/>
         </p:nvSpPr>
@@ -7434,7 +7190,7 @@
             <a:r>
               <a:rPr sz="2200" b="1">
                 <a:solidFill>
-                  <a:srgbClr val="6A7B92"/>
+                  <a:srgbClr val="767A7F"/>
                 </a:solidFill>
                 <a:latin typeface="맑은 고딕"/>
                 <a:ea typeface="맑은 고딕"/>
@@ -7446,7 +7202,7 @@
       </p:sp>
       <p:sp>
         <p:nvSpPr>
-          <p:cNvPr id="16" name="Rounded Rectangle 15"/>
+          <p:cNvPr id="14" name="Rounded Rectangle 13"/>
           <p:cNvSpPr/>
           <p:nvPr/>
         </p:nvSpPr>
@@ -7465,12 +7221,12 @@
           </a:solidFill>
           <a:ln w="12700">
             <a:solidFill>
-              <a:srgbClr val="E4EAF2"/>
+              <a:srgbClr val="E4E6E9"/>
             </a:solidFill>
           </a:ln>
           <a:effectLst>
             <a:outerShdw blurRad="182880" dist="64008" dir="5400000" rotWithShape="0">
-              <a:srgbClr val="2A3B55">
+              <a:srgbClr val="000000">
                 <a:alpha val="30000"/>
               </a:srgbClr>
             </a:outerShdw>
@@ -7500,7 +7256,7 @@
       </p:sp>
       <p:sp>
         <p:nvSpPr>
-          <p:cNvPr id="17" name="TextBox 16"/>
+          <p:cNvPr id="15" name="TextBox 14"/>
           <p:cNvSpPr txBox="1"/>
           <p:nvPr/>
         </p:nvSpPr>
@@ -7531,7 +7287,7 @@
             <a:r>
               <a:rPr sz="1500" b="1">
                 <a:solidFill>
-                  <a:srgbClr val="17456B"/>
+                  <a:srgbClr val="33393F"/>
                 </a:solidFill>
                 <a:latin typeface="맑은 고딕"/>
                 <a:ea typeface="맑은 고딕"/>
@@ -7551,7 +7307,7 @@
             <a:r>
               <a:rPr sz="1150" b="0">
                 <a:solidFill>
-                  <a:srgbClr val="222E40"/>
+                  <a:srgbClr val="1C1C1E"/>
                 </a:solidFill>
                 <a:latin typeface="맑은 고딕"/>
                 <a:ea typeface="맑은 고딕"/>
@@ -7571,7 +7327,7 @@
             <a:r>
               <a:rPr sz="1150" b="0">
                 <a:solidFill>
-                  <a:srgbClr val="222E40"/>
+                  <a:srgbClr val="1C1C1E"/>
                 </a:solidFill>
                 <a:latin typeface="맑은 고딕"/>
                 <a:ea typeface="맑은 고딕"/>
@@ -7583,7 +7339,7 @@
       </p:sp>
       <p:sp>
         <p:nvSpPr>
-          <p:cNvPr id="18" name="Rounded Rectangle 17"/>
+          <p:cNvPr id="16" name="Rounded Rectangle 15"/>
           <p:cNvSpPr/>
           <p:nvPr/>
         </p:nvSpPr>
@@ -7598,17 +7354,17 @@
             </a:avLst>
           </a:prstGeom>
           <a:solidFill>
-            <a:srgbClr val="FFF3EE"/>
+            <a:srgbClr val="F1F2F3"/>
           </a:solidFill>
-          <a:ln w="12700">
+          <a:ln w="15875">
             <a:solidFill>
-              <a:srgbClr val="F6CDBE"/>
+              <a:srgbClr val="9AA0A6"/>
             </a:solidFill>
           </a:ln>
           <a:effectLst>
             <a:outerShdw blurRad="182880" dist="64008" dir="5400000" rotWithShape="0">
-              <a:srgbClr val="B24A32">
-                <a:alpha val="26000"/>
+              <a:srgbClr val="000000">
+                <a:alpha val="32000"/>
               </a:srgbClr>
             </a:outerShdw>
           </a:effectLst>
@@ -7637,7 +7393,7 @@
       </p:sp>
       <p:sp>
         <p:nvSpPr>
-          <p:cNvPr id="19" name="TextBox 18"/>
+          <p:cNvPr id="17" name="TextBox 16"/>
           <p:cNvSpPr txBox="1"/>
           <p:nvPr/>
         </p:nvSpPr>
@@ -7668,7 +7424,7 @@
             <a:r>
               <a:rPr sz="1300" b="1">
                 <a:solidFill>
-                  <a:srgbClr val="E85D42"/>
+                  <a:srgbClr val="000000"/>
                 </a:solidFill>
                 <a:latin typeface="맑은 고딕"/>
                 <a:ea typeface="맑은 고딕"/>
@@ -7688,7 +7444,7 @@
             <a:r>
               <a:rPr sz="1150" b="0">
                 <a:solidFill>
-                  <a:srgbClr val="222E40"/>
+                  <a:srgbClr val="1C1C1E"/>
                 </a:solidFill>
                 <a:latin typeface="맑은 고딕"/>
                 <a:ea typeface="맑은 고딕"/>
@@ -7708,7 +7464,7 @@
             <a:r>
               <a:rPr sz="1150" b="0">
                 <a:solidFill>
-                  <a:srgbClr val="222E40"/>
+                  <a:srgbClr val="1C1C1E"/>
                 </a:solidFill>
                 <a:latin typeface="맑은 고딕"/>
                 <a:ea typeface="맑은 고딕"/>
@@ -7728,7 +7484,7 @@
             <a:r>
               <a:rPr sz="1150" b="0">
                 <a:solidFill>
-                  <a:srgbClr val="222E40"/>
+                  <a:srgbClr val="1C1C1E"/>
                 </a:solidFill>
                 <a:latin typeface="맑은 고딕"/>
                 <a:ea typeface="맑은 고딕"/>
@@ -7740,7 +7496,7 @@
       </p:sp>
       <p:sp>
         <p:nvSpPr>
-          <p:cNvPr id="20" name="Rounded Rectangle 19"/>
+          <p:cNvPr id="18" name="Rounded Rectangle 17"/>
           <p:cNvSpPr/>
           <p:nvPr/>
         </p:nvSpPr>
@@ -7755,17 +7511,17 @@
             </a:avLst>
           </a:prstGeom>
           <a:solidFill>
-            <a:srgbClr val="FFF3EE"/>
+            <a:srgbClr val="F1F2F3"/>
           </a:solidFill>
-          <a:ln w="12700">
+          <a:ln w="15875">
             <a:solidFill>
-              <a:srgbClr val="F6CDBE"/>
+              <a:srgbClr val="9AA0A6"/>
             </a:solidFill>
           </a:ln>
           <a:effectLst>
             <a:outerShdw blurRad="182880" dist="64008" dir="5400000" rotWithShape="0">
-              <a:srgbClr val="B24A32">
-                <a:alpha val="26000"/>
+              <a:srgbClr val="000000">
+                <a:alpha val="32000"/>
               </a:srgbClr>
             </a:outerShdw>
           </a:effectLst>
@@ -7794,7 +7550,7 @@
       </p:sp>
       <p:sp>
         <p:nvSpPr>
-          <p:cNvPr id="21" name="TextBox 20"/>
+          <p:cNvPr id="19" name="TextBox 18"/>
           <p:cNvSpPr txBox="1"/>
           <p:nvPr/>
         </p:nvSpPr>
@@ -7825,7 +7581,7 @@
             <a:r>
               <a:rPr sz="1300" b="1">
                 <a:solidFill>
-                  <a:srgbClr val="E85D42"/>
+                  <a:srgbClr val="000000"/>
                 </a:solidFill>
                 <a:latin typeface="맑은 고딕"/>
                 <a:ea typeface="맑은 고딕"/>
@@ -7845,7 +7601,7 @@
             <a:r>
               <a:rPr sz="1150" b="0">
                 <a:solidFill>
-                  <a:srgbClr val="222E40"/>
+                  <a:srgbClr val="1C1C1E"/>
                 </a:solidFill>
                 <a:latin typeface="맑은 고딕"/>
                 <a:ea typeface="맑은 고딕"/>
@@ -7865,7 +7621,7 @@
             <a:r>
               <a:rPr sz="1150" b="0">
                 <a:solidFill>
-                  <a:srgbClr val="222E40"/>
+                  <a:srgbClr val="1C1C1E"/>
                 </a:solidFill>
                 <a:latin typeface="맑은 고딕"/>
                 <a:ea typeface="맑은 고딕"/>
@@ -7885,7 +7641,7 @@
             <a:r>
               <a:rPr sz="1150" b="0">
                 <a:solidFill>
-                  <a:srgbClr val="222E40"/>
+                  <a:srgbClr val="1C1C1E"/>
                 </a:solidFill>
                 <a:latin typeface="맑은 고딕"/>
                 <a:ea typeface="맑은 고딕"/>
@@ -7897,7 +7653,7 @@
       </p:sp>
       <p:sp>
         <p:nvSpPr>
-          <p:cNvPr id="22" name="Rounded Rectangle 21"/>
+          <p:cNvPr id="20" name="Rounded Rectangle 19"/>
           <p:cNvSpPr/>
           <p:nvPr/>
         </p:nvSpPr>
@@ -7916,12 +7672,12 @@
           </a:solidFill>
           <a:ln w="12700">
             <a:solidFill>
-              <a:srgbClr val="E4EAF2"/>
+              <a:srgbClr val="E4E6E9"/>
             </a:solidFill>
           </a:ln>
           <a:effectLst>
             <a:outerShdw blurRad="182880" dist="64008" dir="5400000" rotWithShape="0">
-              <a:srgbClr val="2A3B55">
+              <a:srgbClr val="000000">
                 <a:alpha val="30000"/>
               </a:srgbClr>
             </a:outerShdw>
@@ -7951,7 +7707,7 @@
       </p:sp>
       <p:sp>
         <p:nvSpPr>
-          <p:cNvPr id="23" name="TextBox 22"/>
+          <p:cNvPr id="21" name="TextBox 20"/>
           <p:cNvSpPr txBox="1"/>
           <p:nvPr/>
         </p:nvSpPr>
@@ -7982,7 +7738,7 @@
             <a:r>
               <a:rPr sz="1300" b="1">
                 <a:solidFill>
-                  <a:srgbClr val="17456B"/>
+                  <a:srgbClr val="33393F"/>
                 </a:solidFill>
                 <a:latin typeface="맑은 고딕"/>
                 <a:ea typeface="맑은 고딕"/>
@@ -8002,7 +7758,7 @@
             <a:r>
               <a:rPr sz="1150" b="0">
                 <a:solidFill>
-                  <a:srgbClr val="222E40"/>
+                  <a:srgbClr val="1C1C1E"/>
                 </a:solidFill>
                 <a:latin typeface="맑은 고딕"/>
                 <a:ea typeface="맑은 고딕"/>
@@ -8022,7 +7778,7 @@
             <a:r>
               <a:rPr sz="1150" b="0">
                 <a:solidFill>
-                  <a:srgbClr val="222E40"/>
+                  <a:srgbClr val="1C1C1E"/>
                 </a:solidFill>
                 <a:latin typeface="맑은 고딕"/>
                 <a:ea typeface="맑은 고딕"/>
@@ -8042,7 +7798,7 @@
             <a:r>
               <a:rPr sz="1150" b="0">
                 <a:solidFill>
-                  <a:srgbClr val="222E40"/>
+                  <a:srgbClr val="1C1C1E"/>
                 </a:solidFill>
                 <a:latin typeface="맑은 고딕"/>
                 <a:ea typeface="맑은 고딕"/>
@@ -8114,57 +7870,9 @@
           </a:p>
         </p:txBody>
       </p:sp>
-      <p:pic>
-        <p:nvPicPr>
-          <p:cNvPr id="3" name="Picture 2" descr="blob_blue.png"/>
-          <p:cNvPicPr>
-            <a:picLocks noChangeAspect="1"/>
-          </p:cNvPicPr>
-          <p:nvPr/>
-        </p:nvPicPr>
-        <p:blipFill>
-          <a:blip r:embed="rId2"/>
-          <a:stretch>
-            <a:fillRect/>
-          </a:stretch>
-        </p:blipFill>
-        <p:spPr>
-          <a:xfrm>
-            <a:off x="-3474720" y="3840480"/>
-            <a:ext cx="6583680" cy="6583680"/>
-          </a:xfrm>
-          <a:prstGeom prst="rect">
-            <a:avLst/>
-          </a:prstGeom>
-        </p:spPr>
-      </p:pic>
-      <p:pic>
-        <p:nvPicPr>
-          <p:cNvPr id="4" name="Picture 3" descr="blob_coral.png"/>
-          <p:cNvPicPr>
-            <a:picLocks noChangeAspect="1"/>
-          </p:cNvPicPr>
-          <p:nvPr/>
-        </p:nvPicPr>
-        <p:blipFill>
-          <a:blip r:embed="rId3"/>
-          <a:stretch>
-            <a:fillRect/>
-          </a:stretch>
-        </p:blipFill>
-        <p:spPr>
-          <a:xfrm>
-            <a:off x="8961120" y="-3291840"/>
-            <a:ext cx="6217920" cy="6217920"/>
-          </a:xfrm>
-          <a:prstGeom prst="rect">
-            <a:avLst/>
-          </a:prstGeom>
-        </p:spPr>
-      </p:pic>
-      <p:sp>
-        <p:nvSpPr>
-          <p:cNvPr id="5" name="Rounded Rectangle 4"/>
+      <p:sp>
+        <p:nvSpPr>
+          <p:cNvPr id="3" name="Rounded Rectangle 2"/>
           <p:cNvSpPr/>
           <p:nvPr/>
         </p:nvSpPr>
@@ -8181,10 +7889,10 @@
           <a:gradFill rotWithShape="1">
             <a:gsLst>
               <a:gs pos="0">
-                <a:srgbClr val="FF7A59"/>
+                <a:srgbClr val="3A3F45"/>
               </a:gs>
               <a:gs pos="100000">
-                <a:srgbClr val="FFB86B"/>
+                <a:srgbClr val="73787E"/>
               </a:gs>
             </a:gsLst>
             <a:lin scaled="0" ang="18900000"/>
@@ -8194,7 +7902,7 @@
           </a:ln>
           <a:effectLst>
             <a:outerShdw blurRad="109728" dist="36576" dir="5400000" rotWithShape="0">
-              <a:srgbClr val="C24E30">
+              <a:srgbClr val="000000">
                 <a:alpha val="35000"/>
               </a:srgbClr>
             </a:outerShdw>
@@ -8224,7 +7932,7 @@
       </p:sp>
       <p:sp>
         <p:nvSpPr>
-          <p:cNvPr id="6" name="TextBox 5"/>
+          <p:cNvPr id="4" name="TextBox 3"/>
           <p:cNvSpPr txBox="1"/>
           <p:nvPr/>
         </p:nvSpPr>
@@ -8255,7 +7963,7 @@
             <a:r>
               <a:rPr sz="2150" b="1">
                 <a:solidFill>
-                  <a:srgbClr val="222E40"/>
+                  <a:srgbClr val="1C1C1E"/>
                 </a:solidFill>
                 <a:latin typeface="맑은 고딕"/>
                 <a:ea typeface="맑은 고딕"/>
@@ -8265,33 +7973,61 @@
           </a:p>
         </p:txBody>
       </p:sp>
-      <p:pic>
-        <p:nvPicPr>
-          <p:cNvPr id="7" name="Picture 6" descr="glow_bar.png"/>
-          <p:cNvPicPr>
-            <a:picLocks noChangeAspect="1"/>
-          </p:cNvPicPr>
-          <p:nvPr/>
-        </p:nvPicPr>
-        <p:blipFill>
-          <a:blip r:embed="rId4"/>
-          <a:stretch>
-            <a:fillRect/>
-          </a:stretch>
-        </p:blipFill>
+      <p:sp>
+        <p:nvSpPr>
+          <p:cNvPr id="5" name="Rectangle 4"/>
+          <p:cNvSpPr/>
+          <p:nvPr/>
+        </p:nvSpPr>
         <p:spPr>
           <a:xfrm>
             <a:off x="521207" y="969264"/>
-            <a:ext cx="4206240" cy="50292"/>
+            <a:ext cx="4206240" cy="27432"/>
           </a:xfrm>
           <a:prstGeom prst="rect">
             <a:avLst/>
           </a:prstGeom>
-        </p:spPr>
-      </p:pic>
-      <p:sp>
-        <p:nvSpPr>
-          <p:cNvPr id="8" name="TextBox 7"/>
+          <a:gradFill rotWithShape="1">
+            <a:gsLst>
+              <a:gs pos="0">
+                <a:srgbClr val="2A2E33"/>
+              </a:gs>
+              <a:gs pos="100000">
+                <a:srgbClr val="FFFFFF"/>
+              </a:gs>
+            </a:gsLst>
+            <a:lin scaled="0" ang="0"/>
+          </a:gradFill>
+          <a:ln>
+            <a:noFill/>
+          </a:ln>
+          <a:effectLst/>
+        </p:spPr>
+        <p:style>
+          <a:lnRef idx="1">
+            <a:schemeClr val="accent1"/>
+          </a:lnRef>
+          <a:fillRef idx="3">
+            <a:schemeClr val="accent1"/>
+          </a:fillRef>
+          <a:effectRef idx="2">
+            <a:schemeClr val="accent1"/>
+          </a:effectRef>
+          <a:fontRef idx="minor">
+            <a:schemeClr val="lt1"/>
+          </a:fontRef>
+        </p:style>
+        <p:txBody>
+          <a:bodyPr rtlCol="0" anchor="ctr"/>
+          <a:lstStyle/>
+          <a:p>
+            <a:pPr algn="ctr"/>
+          </a:p>
+        </p:txBody>
+      </p:sp>
+      <p:sp>
+        <p:nvSpPr>
+          <p:cNvPr id="6" name="TextBox 5"/>
           <p:cNvSpPr txBox="1"/>
           <p:nvPr/>
         </p:nvSpPr>
@@ -8322,7 +8058,7 @@
             <a:r>
               <a:rPr sz="3000" b="1">
                 <a:solidFill>
-                  <a:srgbClr val="D3DDEA"/>
+                  <a:srgbClr val="D8DADD"/>
                 </a:solidFill>
                 <a:latin typeface="맑은 고딕"/>
                 <a:ea typeface="맑은 고딕"/>
@@ -8334,7 +8070,7 @@
       </p:sp>
       <p:sp>
         <p:nvSpPr>
-          <p:cNvPr id="9" name="TextBox 8"/>
+          <p:cNvPr id="7" name="TextBox 6"/>
           <p:cNvSpPr txBox="1"/>
           <p:nvPr/>
         </p:nvSpPr>
@@ -8365,7 +8101,7 @@
             <a:r>
               <a:rPr sz="850" b="0">
                 <a:solidFill>
-                  <a:srgbClr val="ABB7C7"/>
+                  <a:srgbClr val="B2B5B9"/>
                 </a:solidFill>
                 <a:latin typeface="맑은 고딕"/>
                 <a:ea typeface="맑은 고딕"/>
@@ -8377,7 +8113,7 @@
       </p:sp>
       <p:sp>
         <p:nvSpPr>
-          <p:cNvPr id="10" name="Rounded Rectangle 9"/>
+          <p:cNvPr id="8" name="Rounded Rectangle 7"/>
           <p:cNvSpPr/>
           <p:nvPr/>
         </p:nvSpPr>
@@ -8396,12 +8132,12 @@
           </a:solidFill>
           <a:ln w="12700">
             <a:solidFill>
-              <a:srgbClr val="E4EAF2"/>
+              <a:srgbClr val="E4E6E9"/>
             </a:solidFill>
           </a:ln>
           <a:effectLst>
             <a:outerShdw blurRad="182880" dist="64008" dir="5400000" rotWithShape="0">
-              <a:srgbClr val="2A3B55">
+              <a:srgbClr val="000000">
                 <a:alpha val="30000"/>
               </a:srgbClr>
             </a:outerShdw>
@@ -8431,7 +8167,7 @@
       </p:sp>
       <p:sp>
         <p:nvSpPr>
-          <p:cNvPr id="11" name="Rounded Rectangle 10"/>
+          <p:cNvPr id="9" name="Rounded Rectangle 8"/>
           <p:cNvSpPr/>
           <p:nvPr/>
         </p:nvSpPr>
@@ -8448,10 +8184,10 @@
           <a:gradFill rotWithShape="1">
             <a:gsLst>
               <a:gs pos="0">
-                <a:srgbClr val="FF7A59"/>
+                <a:srgbClr val="3A3F45"/>
               </a:gs>
               <a:gs pos="100000">
-                <a:srgbClr val="FFB86B"/>
+                <a:srgbClr val="73787E"/>
               </a:gs>
             </a:gsLst>
             <a:lin scaled="0" ang="18900000"/>
@@ -8461,7 +8197,7 @@
           </a:ln>
           <a:effectLst>
             <a:outerShdw blurRad="109728" dist="36576" dir="5400000" rotWithShape="0">
-              <a:srgbClr val="C24E30">
+              <a:srgbClr val="000000">
                 <a:alpha val="35000"/>
               </a:srgbClr>
             </a:outerShdw>
@@ -8491,7 +8227,7 @@
       </p:sp>
       <p:sp>
         <p:nvSpPr>
-          <p:cNvPr id="12" name="TextBox 11"/>
+          <p:cNvPr id="10" name="TextBox 9"/>
           <p:cNvSpPr txBox="1"/>
           <p:nvPr/>
         </p:nvSpPr>
@@ -8522,7 +8258,7 @@
             <a:r>
               <a:rPr sz="1500" b="1">
                 <a:solidFill>
-                  <a:srgbClr val="17456B"/>
+                  <a:srgbClr val="33393F"/>
                 </a:solidFill>
                 <a:latin typeface="맑은 고딕"/>
                 <a:ea typeface="맑은 고딕"/>
@@ -8542,7 +8278,7 @@
             <a:r>
               <a:rPr sz="1200" b="0">
                 <a:solidFill>
-                  <a:srgbClr val="222E40"/>
+                  <a:srgbClr val="1C1C1E"/>
                 </a:solidFill>
                 <a:latin typeface="맑은 고딕"/>
                 <a:ea typeface="맑은 고딕"/>
@@ -8562,7 +8298,7 @@
             <a:r>
               <a:rPr sz="1200" b="0">
                 <a:solidFill>
-                  <a:srgbClr val="222E40"/>
+                  <a:srgbClr val="1C1C1E"/>
                 </a:solidFill>
                 <a:latin typeface="맑은 고딕"/>
                 <a:ea typeface="맑은 고딕"/>
@@ -8574,7 +8310,7 @@
       </p:sp>
       <p:sp>
         <p:nvSpPr>
-          <p:cNvPr id="13" name="Rounded Rectangle 12"/>
+          <p:cNvPr id="11" name="Rounded Rectangle 10"/>
           <p:cNvSpPr/>
           <p:nvPr/>
         </p:nvSpPr>
@@ -8593,12 +8329,12 @@
           </a:solidFill>
           <a:ln w="12700">
             <a:solidFill>
-              <a:srgbClr val="E4EAF2"/>
+              <a:srgbClr val="E4E6E9"/>
             </a:solidFill>
           </a:ln>
           <a:effectLst>
             <a:outerShdw blurRad="182880" dist="64008" dir="5400000" rotWithShape="0">
-              <a:srgbClr val="2A3B55">
+              <a:srgbClr val="000000">
                 <a:alpha val="30000"/>
               </a:srgbClr>
             </a:outerShdw>
@@ -8628,7 +8364,7 @@
       </p:sp>
       <p:sp>
         <p:nvSpPr>
-          <p:cNvPr id="14" name="Rounded Rectangle 13"/>
+          <p:cNvPr id="12" name="Rounded Rectangle 11"/>
           <p:cNvSpPr/>
           <p:nvPr/>
         </p:nvSpPr>
@@ -8645,10 +8381,10 @@
           <a:gradFill rotWithShape="1">
             <a:gsLst>
               <a:gs pos="0">
-                <a:srgbClr val="FF7A59"/>
+                <a:srgbClr val="3A3F45"/>
               </a:gs>
               <a:gs pos="100000">
-                <a:srgbClr val="FFB86B"/>
+                <a:srgbClr val="73787E"/>
               </a:gs>
             </a:gsLst>
             <a:lin scaled="0" ang="18900000"/>
@@ -8658,7 +8394,7 @@
           </a:ln>
           <a:effectLst>
             <a:outerShdw blurRad="109728" dist="36576" dir="5400000" rotWithShape="0">
-              <a:srgbClr val="C24E30">
+              <a:srgbClr val="000000">
                 <a:alpha val="35000"/>
               </a:srgbClr>
             </a:outerShdw>
@@ -8688,7 +8424,7 @@
       </p:sp>
       <p:sp>
         <p:nvSpPr>
-          <p:cNvPr id="15" name="TextBox 14"/>
+          <p:cNvPr id="13" name="TextBox 12"/>
           <p:cNvSpPr txBox="1"/>
           <p:nvPr/>
         </p:nvSpPr>
@@ -8719,7 +8455,7 @@
             <a:r>
               <a:rPr sz="1500" b="1">
                 <a:solidFill>
-                  <a:srgbClr val="17456B"/>
+                  <a:srgbClr val="33393F"/>
                 </a:solidFill>
                 <a:latin typeface="맑은 고딕"/>
                 <a:ea typeface="맑은 고딕"/>
@@ -8739,7 +8475,7 @@
             <a:r>
               <a:rPr sz="1200" b="0">
                 <a:solidFill>
-                  <a:srgbClr val="222E40"/>
+                  <a:srgbClr val="1C1C1E"/>
                 </a:solidFill>
                 <a:latin typeface="맑은 고딕"/>
                 <a:ea typeface="맑은 고딕"/>
@@ -8759,7 +8495,7 @@
             <a:r>
               <a:rPr sz="1200" b="0">
                 <a:solidFill>
-                  <a:srgbClr val="222E40"/>
+                  <a:srgbClr val="1C1C1E"/>
                 </a:solidFill>
                 <a:latin typeface="맑은 고딕"/>
                 <a:ea typeface="맑은 고딕"/>
@@ -8771,7 +8507,7 @@
       </p:sp>
       <p:sp>
         <p:nvSpPr>
-          <p:cNvPr id="16" name="Rounded Rectangle 15"/>
+          <p:cNvPr id="14" name="Rounded Rectangle 13"/>
           <p:cNvSpPr/>
           <p:nvPr/>
         </p:nvSpPr>
@@ -8790,12 +8526,12 @@
           </a:solidFill>
           <a:ln w="12700">
             <a:solidFill>
-              <a:srgbClr val="E4EAF2"/>
+              <a:srgbClr val="E4E6E9"/>
             </a:solidFill>
           </a:ln>
           <a:effectLst>
             <a:outerShdw blurRad="182880" dist="64008" dir="5400000" rotWithShape="0">
-              <a:srgbClr val="2A3B55">
+              <a:srgbClr val="000000">
                 <a:alpha val="30000"/>
               </a:srgbClr>
             </a:outerShdw>
@@ -8825,7 +8561,7 @@
       </p:sp>
       <p:sp>
         <p:nvSpPr>
-          <p:cNvPr id="17" name="Rounded Rectangle 16"/>
+          <p:cNvPr id="15" name="Rounded Rectangle 14"/>
           <p:cNvSpPr/>
           <p:nvPr/>
         </p:nvSpPr>
@@ -8842,10 +8578,10 @@
           <a:gradFill rotWithShape="1">
             <a:gsLst>
               <a:gs pos="0">
-                <a:srgbClr val="FF7A59"/>
+                <a:srgbClr val="3A3F45"/>
               </a:gs>
               <a:gs pos="100000">
-                <a:srgbClr val="FFB86B"/>
+                <a:srgbClr val="73787E"/>
               </a:gs>
             </a:gsLst>
             <a:lin scaled="0" ang="18900000"/>
@@ -8855,7 +8591,7 @@
           </a:ln>
           <a:effectLst>
             <a:outerShdw blurRad="109728" dist="36576" dir="5400000" rotWithShape="0">
-              <a:srgbClr val="C24E30">
+              <a:srgbClr val="000000">
                 <a:alpha val="35000"/>
               </a:srgbClr>
             </a:outerShdw>
@@ -8885,7 +8621,7 @@
       </p:sp>
       <p:sp>
         <p:nvSpPr>
-          <p:cNvPr id="18" name="TextBox 17"/>
+          <p:cNvPr id="16" name="TextBox 15"/>
           <p:cNvSpPr txBox="1"/>
           <p:nvPr/>
         </p:nvSpPr>
@@ -8916,7 +8652,7 @@
             <a:r>
               <a:rPr sz="1500" b="1">
                 <a:solidFill>
-                  <a:srgbClr val="17456B"/>
+                  <a:srgbClr val="33393F"/>
                 </a:solidFill>
                 <a:latin typeface="맑은 고딕"/>
                 <a:ea typeface="맑은 고딕"/>
@@ -8936,7 +8672,7 @@
             <a:r>
               <a:rPr sz="1200" b="0">
                 <a:solidFill>
-                  <a:srgbClr val="222E40"/>
+                  <a:srgbClr val="1C1C1E"/>
                 </a:solidFill>
                 <a:latin typeface="맑은 고딕"/>
                 <a:ea typeface="맑은 고딕"/>
@@ -8956,7 +8692,7 @@
             <a:r>
               <a:rPr sz="1200" b="0">
                 <a:solidFill>
-                  <a:srgbClr val="222E40"/>
+                  <a:srgbClr val="1C1C1E"/>
                 </a:solidFill>
                 <a:latin typeface="맑은 고딕"/>
                 <a:ea typeface="맑은 고딕"/>
@@ -8968,7 +8704,7 @@
       </p:sp>
       <p:sp>
         <p:nvSpPr>
-          <p:cNvPr id="19" name="Rounded Rectangle 18"/>
+          <p:cNvPr id="17" name="Rounded Rectangle 16"/>
           <p:cNvSpPr/>
           <p:nvPr/>
         </p:nvSpPr>
@@ -8987,12 +8723,12 @@
           </a:solidFill>
           <a:ln w="12700">
             <a:solidFill>
-              <a:srgbClr val="E4EAF2"/>
+              <a:srgbClr val="E4E6E9"/>
             </a:solidFill>
           </a:ln>
           <a:effectLst>
             <a:outerShdw blurRad="182880" dist="64008" dir="5400000" rotWithShape="0">
-              <a:srgbClr val="2A3B55">
+              <a:srgbClr val="000000">
                 <a:alpha val="30000"/>
               </a:srgbClr>
             </a:outerShdw>
@@ -9022,7 +8758,7 @@
       </p:sp>
       <p:sp>
         <p:nvSpPr>
-          <p:cNvPr id="20" name="Rounded Rectangle 19"/>
+          <p:cNvPr id="18" name="Rounded Rectangle 17"/>
           <p:cNvSpPr/>
           <p:nvPr/>
         </p:nvSpPr>
@@ -9039,10 +8775,10 @@
           <a:gradFill rotWithShape="1">
             <a:gsLst>
               <a:gs pos="0">
-                <a:srgbClr val="FF7A59"/>
+                <a:srgbClr val="3A3F45"/>
               </a:gs>
               <a:gs pos="100000">
-                <a:srgbClr val="FFB86B"/>
+                <a:srgbClr val="73787E"/>
               </a:gs>
             </a:gsLst>
             <a:lin scaled="0" ang="18900000"/>
@@ -9052,7 +8788,7 @@
           </a:ln>
           <a:effectLst>
             <a:outerShdw blurRad="109728" dist="36576" dir="5400000" rotWithShape="0">
-              <a:srgbClr val="C24E30">
+              <a:srgbClr val="000000">
                 <a:alpha val="35000"/>
               </a:srgbClr>
             </a:outerShdw>
@@ -9082,7 +8818,7 @@
       </p:sp>
       <p:sp>
         <p:nvSpPr>
-          <p:cNvPr id="21" name="TextBox 20"/>
+          <p:cNvPr id="19" name="TextBox 18"/>
           <p:cNvSpPr txBox="1"/>
           <p:nvPr/>
         </p:nvSpPr>
@@ -9113,7 +8849,7 @@
             <a:r>
               <a:rPr sz="1500" b="1">
                 <a:solidFill>
-                  <a:srgbClr val="17456B"/>
+                  <a:srgbClr val="33393F"/>
                 </a:solidFill>
                 <a:latin typeface="맑은 고딕"/>
                 <a:ea typeface="맑은 고딕"/>
@@ -9133,7 +8869,7 @@
             <a:r>
               <a:rPr sz="1200" b="0">
                 <a:solidFill>
-                  <a:srgbClr val="222E40"/>
+                  <a:srgbClr val="1C1C1E"/>
                 </a:solidFill>
                 <a:latin typeface="맑은 고딕"/>
                 <a:ea typeface="맑은 고딕"/>
@@ -9153,7 +8889,7 @@
             <a:r>
               <a:rPr sz="1200" b="0">
                 <a:solidFill>
-                  <a:srgbClr val="222E40"/>
+                  <a:srgbClr val="1C1C1E"/>
                 </a:solidFill>
                 <a:latin typeface="맑은 고딕"/>
                 <a:ea typeface="맑은 고딕"/>
@@ -9165,7 +8901,7 @@
       </p:sp>
       <p:sp>
         <p:nvSpPr>
-          <p:cNvPr id="22" name="TextBox 21"/>
+          <p:cNvPr id="20" name="TextBox 19"/>
           <p:cNvSpPr txBox="1"/>
           <p:nvPr/>
         </p:nvSpPr>
@@ -9196,7 +8932,7 @@
             <a:r>
               <a:rPr sz="1250" b="1">
                 <a:solidFill>
-                  <a:srgbClr val="222E40"/>
+                  <a:srgbClr val="1C1C1E"/>
                 </a:solidFill>
                 <a:latin typeface="맑은 고딕"/>
                 <a:ea typeface="맑은 고딕"/>
@@ -9216,7 +8952,7 @@
             <a:r>
               <a:rPr sz="1200" b="0">
                 <a:solidFill>
-                  <a:srgbClr val="6A7B92"/>
+                  <a:srgbClr val="767A7F"/>
                 </a:solidFill>
                 <a:latin typeface="맑은 고딕"/>
                 <a:ea typeface="맑은 고딕"/>
@@ -9288,57 +9024,9 @@
           </a:p>
         </p:txBody>
       </p:sp>
-      <p:pic>
-        <p:nvPicPr>
-          <p:cNvPr id="3" name="Picture 2" descr="blob_blue.png"/>
-          <p:cNvPicPr>
-            <a:picLocks noChangeAspect="1"/>
-          </p:cNvPicPr>
-          <p:nvPr/>
-        </p:nvPicPr>
-        <p:blipFill>
-          <a:blip r:embed="rId2"/>
-          <a:stretch>
-            <a:fillRect/>
-          </a:stretch>
-        </p:blipFill>
-        <p:spPr>
-          <a:xfrm>
-            <a:off x="-3474720" y="3840480"/>
-            <a:ext cx="6583680" cy="6583680"/>
-          </a:xfrm>
-          <a:prstGeom prst="rect">
-            <a:avLst/>
-          </a:prstGeom>
-        </p:spPr>
-      </p:pic>
-      <p:pic>
-        <p:nvPicPr>
-          <p:cNvPr id="4" name="Picture 3" descr="blob_coral.png"/>
-          <p:cNvPicPr>
-            <a:picLocks noChangeAspect="1"/>
-          </p:cNvPicPr>
-          <p:nvPr/>
-        </p:nvPicPr>
-        <p:blipFill>
-          <a:blip r:embed="rId3"/>
-          <a:stretch>
-            <a:fillRect/>
-          </a:stretch>
-        </p:blipFill>
-        <p:spPr>
-          <a:xfrm>
-            <a:off x="8961120" y="-3291840"/>
-            <a:ext cx="6217920" cy="6217920"/>
-          </a:xfrm>
-          <a:prstGeom prst="rect">
-            <a:avLst/>
-          </a:prstGeom>
-        </p:spPr>
-      </p:pic>
-      <p:sp>
-        <p:nvSpPr>
-          <p:cNvPr id="5" name="Rounded Rectangle 4"/>
+      <p:sp>
+        <p:nvSpPr>
+          <p:cNvPr id="3" name="Rounded Rectangle 2"/>
           <p:cNvSpPr/>
           <p:nvPr/>
         </p:nvSpPr>
@@ -9355,10 +9043,10 @@
           <a:gradFill rotWithShape="1">
             <a:gsLst>
               <a:gs pos="0">
-                <a:srgbClr val="FF7A59"/>
+                <a:srgbClr val="3A3F45"/>
               </a:gs>
               <a:gs pos="100000">
-                <a:srgbClr val="FFB86B"/>
+                <a:srgbClr val="73787E"/>
               </a:gs>
             </a:gsLst>
             <a:lin scaled="0" ang="18900000"/>
@@ -9368,7 +9056,7 @@
           </a:ln>
           <a:effectLst>
             <a:outerShdw blurRad="109728" dist="36576" dir="5400000" rotWithShape="0">
-              <a:srgbClr val="C24E30">
+              <a:srgbClr val="000000">
                 <a:alpha val="35000"/>
               </a:srgbClr>
             </a:outerShdw>
@@ -9398,7 +9086,7 @@
       </p:sp>
       <p:sp>
         <p:nvSpPr>
-          <p:cNvPr id="6" name="TextBox 5"/>
+          <p:cNvPr id="4" name="TextBox 3"/>
           <p:cNvSpPr txBox="1"/>
           <p:nvPr/>
         </p:nvSpPr>
@@ -9429,7 +9117,7 @@
             <a:r>
               <a:rPr sz="2150" b="1">
                 <a:solidFill>
-                  <a:srgbClr val="222E40"/>
+                  <a:srgbClr val="1C1C1E"/>
                 </a:solidFill>
                 <a:latin typeface="맑은 고딕"/>
                 <a:ea typeface="맑은 고딕"/>
@@ -9439,33 +9127,61 @@
           </a:p>
         </p:txBody>
       </p:sp>
-      <p:pic>
-        <p:nvPicPr>
-          <p:cNvPr id="7" name="Picture 6" descr="glow_bar.png"/>
-          <p:cNvPicPr>
-            <a:picLocks noChangeAspect="1"/>
-          </p:cNvPicPr>
-          <p:nvPr/>
-        </p:nvPicPr>
-        <p:blipFill>
-          <a:blip r:embed="rId4"/>
-          <a:stretch>
-            <a:fillRect/>
-          </a:stretch>
-        </p:blipFill>
+      <p:sp>
+        <p:nvSpPr>
+          <p:cNvPr id="5" name="Rectangle 4"/>
+          <p:cNvSpPr/>
+          <p:nvPr/>
+        </p:nvSpPr>
         <p:spPr>
           <a:xfrm>
             <a:off x="521207" y="969264"/>
-            <a:ext cx="4206240" cy="50292"/>
+            <a:ext cx="4206240" cy="27432"/>
           </a:xfrm>
           <a:prstGeom prst="rect">
             <a:avLst/>
           </a:prstGeom>
-        </p:spPr>
-      </p:pic>
-      <p:sp>
-        <p:nvSpPr>
-          <p:cNvPr id="8" name="TextBox 7"/>
+          <a:gradFill rotWithShape="1">
+            <a:gsLst>
+              <a:gs pos="0">
+                <a:srgbClr val="2A2E33"/>
+              </a:gs>
+              <a:gs pos="100000">
+                <a:srgbClr val="FFFFFF"/>
+              </a:gs>
+            </a:gsLst>
+            <a:lin scaled="0" ang="0"/>
+          </a:gradFill>
+          <a:ln>
+            <a:noFill/>
+          </a:ln>
+          <a:effectLst/>
+        </p:spPr>
+        <p:style>
+          <a:lnRef idx="1">
+            <a:schemeClr val="accent1"/>
+          </a:lnRef>
+          <a:fillRef idx="3">
+            <a:schemeClr val="accent1"/>
+          </a:fillRef>
+          <a:effectRef idx="2">
+            <a:schemeClr val="accent1"/>
+          </a:effectRef>
+          <a:fontRef idx="minor">
+            <a:schemeClr val="lt1"/>
+          </a:fontRef>
+        </p:style>
+        <p:txBody>
+          <a:bodyPr rtlCol="0" anchor="ctr"/>
+          <a:lstStyle/>
+          <a:p>
+            <a:pPr algn="ctr"/>
+          </a:p>
+        </p:txBody>
+      </p:sp>
+      <p:sp>
+        <p:nvSpPr>
+          <p:cNvPr id="6" name="TextBox 5"/>
           <p:cNvSpPr txBox="1"/>
           <p:nvPr/>
         </p:nvSpPr>
@@ -9496,7 +9212,7 @@
             <a:r>
               <a:rPr sz="3000" b="1">
                 <a:solidFill>
-                  <a:srgbClr val="D3DDEA"/>
+                  <a:srgbClr val="D8DADD"/>
                 </a:solidFill>
                 <a:latin typeface="맑은 고딕"/>
                 <a:ea typeface="맑은 고딕"/>
@@ -9508,7 +9224,7 @@
       </p:sp>
       <p:sp>
         <p:nvSpPr>
-          <p:cNvPr id="9" name="TextBox 8"/>
+          <p:cNvPr id="7" name="TextBox 6"/>
           <p:cNvSpPr txBox="1"/>
           <p:nvPr/>
         </p:nvSpPr>
@@ -9539,7 +9255,7 @@
             <a:r>
               <a:rPr sz="850" b="0">
                 <a:solidFill>
-                  <a:srgbClr val="ABB7C7"/>
+                  <a:srgbClr val="B2B5B9"/>
                 </a:solidFill>
                 <a:latin typeface="맑은 고딕"/>
                 <a:ea typeface="맑은 고딕"/>
@@ -9551,7 +9267,7 @@
       </p:sp>
       <p:sp>
         <p:nvSpPr>
-          <p:cNvPr id="10" name="Rounded Rectangle 9"/>
+          <p:cNvPr id="8" name="Rounded Rectangle 7"/>
           <p:cNvSpPr/>
           <p:nvPr/>
         </p:nvSpPr>
@@ -9570,12 +9286,12 @@
           </a:solidFill>
           <a:ln w="12700">
             <a:solidFill>
-              <a:srgbClr val="E4EAF2"/>
+              <a:srgbClr val="E4E6E9"/>
             </a:solidFill>
           </a:ln>
           <a:effectLst>
             <a:outerShdw blurRad="182880" dist="64008" dir="5400000" rotWithShape="0">
-              <a:srgbClr val="2A3B55">
+              <a:srgbClr val="000000">
                 <a:alpha val="30000"/>
               </a:srgbClr>
             </a:outerShdw>
@@ -9605,7 +9321,7 @@
       </p:sp>
       <p:sp>
         <p:nvSpPr>
-          <p:cNvPr id="11" name="TextBox 10"/>
+          <p:cNvPr id="9" name="TextBox 8"/>
           <p:cNvSpPr txBox="1"/>
           <p:nvPr/>
         </p:nvSpPr>
@@ -9636,7 +9352,7 @@
             <a:r>
               <a:rPr sz="1300" b="1">
                 <a:solidFill>
-                  <a:srgbClr val="17456B"/>
+                  <a:srgbClr val="33393F"/>
                 </a:solidFill>
                 <a:latin typeface="맑은 고딕"/>
                 <a:ea typeface="맑은 고딕"/>
@@ -9656,7 +9372,7 @@
             <a:r>
               <a:rPr sz="1150" b="0">
                 <a:solidFill>
-                  <a:srgbClr val="222E40"/>
+                  <a:srgbClr val="1C1C1E"/>
                 </a:solidFill>
                 <a:latin typeface="맑은 고딕"/>
                 <a:ea typeface="맑은 고딕"/>
@@ -9676,7 +9392,7 @@
             <a:r>
               <a:rPr sz="1150" b="0">
                 <a:solidFill>
-                  <a:srgbClr val="222E40"/>
+                  <a:srgbClr val="1C1C1E"/>
                 </a:solidFill>
                 <a:latin typeface="맑은 고딕"/>
                 <a:ea typeface="맑은 고딕"/>
@@ -9696,7 +9412,7 @@
             <a:r>
               <a:rPr sz="1150" b="0">
                 <a:solidFill>
-                  <a:srgbClr val="222E40"/>
+                  <a:srgbClr val="1C1C1E"/>
                 </a:solidFill>
                 <a:latin typeface="맑은 고딕"/>
                 <a:ea typeface="맑은 고딕"/>
@@ -9716,7 +9432,7 @@
             <a:r>
               <a:rPr sz="1150" b="0">
                 <a:solidFill>
-                  <a:srgbClr val="222E40"/>
+                  <a:srgbClr val="1C1C1E"/>
                 </a:solidFill>
                 <a:latin typeface="맑은 고딕"/>
                 <a:ea typeface="맑은 고딕"/>
@@ -9728,7 +9444,7 @@
       </p:sp>
       <p:sp>
         <p:nvSpPr>
-          <p:cNvPr id="12" name="Rounded Rectangle 11"/>
+          <p:cNvPr id="10" name="Rounded Rectangle 9"/>
           <p:cNvSpPr/>
           <p:nvPr/>
         </p:nvSpPr>
@@ -9747,12 +9463,12 @@
           </a:solidFill>
           <a:ln w="12700">
             <a:solidFill>
-              <a:srgbClr val="E4EAF2"/>
+              <a:srgbClr val="E4E6E9"/>
             </a:solidFill>
           </a:ln>
           <a:effectLst>
             <a:outerShdw blurRad="182880" dist="64008" dir="5400000" rotWithShape="0">
-              <a:srgbClr val="2A3B55">
+              <a:srgbClr val="000000">
                 <a:alpha val="30000"/>
               </a:srgbClr>
             </a:outerShdw>
@@ -9782,7 +9498,7 @@
       </p:sp>
       <p:sp>
         <p:nvSpPr>
-          <p:cNvPr id="13" name="TextBox 12"/>
+          <p:cNvPr id="11" name="TextBox 10"/>
           <p:cNvSpPr txBox="1"/>
           <p:nvPr/>
         </p:nvSpPr>
@@ -9813,7 +9529,7 @@
             <a:r>
               <a:rPr sz="1300" b="1">
                 <a:solidFill>
-                  <a:srgbClr val="17456B"/>
+                  <a:srgbClr val="33393F"/>
                 </a:solidFill>
                 <a:latin typeface="맑은 고딕"/>
                 <a:ea typeface="맑은 고딕"/>
@@ -9833,7 +9549,7 @@
             <a:r>
               <a:rPr sz="1150" b="0">
                 <a:solidFill>
-                  <a:srgbClr val="222E40"/>
+                  <a:srgbClr val="1C1C1E"/>
                 </a:solidFill>
                 <a:latin typeface="맑은 고딕"/>
                 <a:ea typeface="맑은 고딕"/>
@@ -9853,7 +9569,7 @@
             <a:r>
               <a:rPr sz="1150" b="0">
                 <a:solidFill>
-                  <a:srgbClr val="222E40"/>
+                  <a:srgbClr val="1C1C1E"/>
                 </a:solidFill>
                 <a:latin typeface="맑은 고딕"/>
                 <a:ea typeface="맑은 고딕"/>
@@ -9873,7 +9589,7 @@
             <a:r>
               <a:rPr sz="1150" b="0">
                 <a:solidFill>
-                  <a:srgbClr val="222E40"/>
+                  <a:srgbClr val="1C1C1E"/>
                 </a:solidFill>
                 <a:latin typeface="맑은 고딕"/>
                 <a:ea typeface="맑은 고딕"/>
@@ -9885,7 +9601,7 @@
       </p:sp>
       <p:sp>
         <p:nvSpPr>
-          <p:cNvPr id="14" name="TextBox 13"/>
+          <p:cNvPr id="12" name="TextBox 11"/>
           <p:cNvSpPr txBox="1"/>
           <p:nvPr/>
         </p:nvSpPr>
@@ -9916,7 +9632,7 @@
             <a:r>
               <a:rPr sz="1400" b="1">
                 <a:solidFill>
-                  <a:srgbClr val="17456B"/>
+                  <a:srgbClr val="33393F"/>
                 </a:solidFill>
                 <a:latin typeface="맑은 고딕"/>
                 <a:ea typeface="맑은 고딕"/>
@@ -9928,7 +9644,7 @@
       </p:sp>
       <p:graphicFrame>
         <p:nvGraphicFramePr>
-          <p:cNvPr id="15" name="Table 14"/>
+          <p:cNvPr id="13" name="Table 12"/>
           <p:cNvGraphicFramePr>
             <a:graphicFrameLocks noGrp="1"/>
           </p:cNvGraphicFramePr>
@@ -10020,7 +9736,7 @@
                       <a:r>
                         <a:rPr sz="1100" b="0">
                           <a:solidFill>
-                            <a:srgbClr val="222E40"/>
+                            <a:srgbClr val="1C1C1E"/>
                           </a:solidFill>
                           <a:latin typeface="맑은 고딕"/>
                           <a:ea typeface="맑은 고딕"/>
@@ -10048,7 +9764,7 @@
                       <a:r>
                         <a:rPr sz="1100" b="0">
                           <a:solidFill>
-                            <a:srgbClr val="222E40"/>
+                            <a:srgbClr val="1C1C1E"/>
                           </a:solidFill>
                           <a:latin typeface="맑은 고딕"/>
                           <a:ea typeface="맑은 고딕"/>
@@ -10078,7 +9794,7 @@
                       <a:r>
                         <a:rPr sz="1100" b="0">
                           <a:solidFill>
-                            <a:srgbClr val="222E40"/>
+                            <a:srgbClr val="1C1C1E"/>
                           </a:solidFill>
                           <a:latin typeface="맑은 고딕"/>
                           <a:ea typeface="맑은 고딕"/>
@@ -10089,7 +9805,7 @@
                   </a:txBody>
                   <a:tcPr marT="27432" marB="27432" marL="73152" marR="73152" anchor="ctr">
                     <a:solidFill>
-                      <a:srgbClr val="F5F8FC"/>
+                      <a:srgbClr val="F6F7F8"/>
                     </a:solidFill>
                   </a:tcPr>
                 </a:tc>
@@ -10106,7 +9822,7 @@
                       <a:r>
                         <a:rPr sz="1100" b="0">
                           <a:solidFill>
-                            <a:srgbClr val="222E40"/>
+                            <a:srgbClr val="1C1C1E"/>
                           </a:solidFill>
                           <a:latin typeface="맑은 고딕"/>
                           <a:ea typeface="맑은 고딕"/>
@@ -10117,7 +9833,7 @@
                   </a:txBody>
                   <a:tcPr marT="27432" marB="27432" marL="73152" marR="73152" anchor="ctr">
                     <a:solidFill>
-                      <a:srgbClr val="F5F8FC"/>
+                      <a:srgbClr val="F6F7F8"/>
                     </a:solidFill>
                   </a:tcPr>
                 </a:tc>
@@ -10136,7 +9852,7 @@
                       <a:r>
                         <a:rPr sz="1100" b="0">
                           <a:solidFill>
-                            <a:srgbClr val="222E40"/>
+                            <a:srgbClr val="1C1C1E"/>
                           </a:solidFill>
                           <a:latin typeface="맑은 고딕"/>
                           <a:ea typeface="맑은 고딕"/>
@@ -10164,7 +9880,7 @@
                       <a:r>
                         <a:rPr sz="1100" b="0">
                           <a:solidFill>
-                            <a:srgbClr val="222E40"/>
+                            <a:srgbClr val="1C1C1E"/>
                           </a:solidFill>
                           <a:latin typeface="맑은 고딕"/>
                           <a:ea typeface="맑은 고딕"/>
@@ -10246,57 +9962,9 @@
           </a:p>
         </p:txBody>
       </p:sp>
-      <p:pic>
-        <p:nvPicPr>
-          <p:cNvPr id="3" name="Picture 2" descr="blob_blue.png"/>
-          <p:cNvPicPr>
-            <a:picLocks noChangeAspect="1"/>
-          </p:cNvPicPr>
-          <p:nvPr/>
-        </p:nvPicPr>
-        <p:blipFill>
-          <a:blip r:embed="rId2"/>
-          <a:stretch>
-            <a:fillRect/>
-          </a:stretch>
-        </p:blipFill>
-        <p:spPr>
-          <a:xfrm>
-            <a:off x="-3474720" y="3840480"/>
-            <a:ext cx="6583680" cy="6583680"/>
-          </a:xfrm>
-          <a:prstGeom prst="rect">
-            <a:avLst/>
-          </a:prstGeom>
-        </p:spPr>
-      </p:pic>
-      <p:pic>
-        <p:nvPicPr>
-          <p:cNvPr id="4" name="Picture 3" descr="blob_coral.png"/>
-          <p:cNvPicPr>
-            <a:picLocks noChangeAspect="1"/>
-          </p:cNvPicPr>
-          <p:nvPr/>
-        </p:nvPicPr>
-        <p:blipFill>
-          <a:blip r:embed="rId3"/>
-          <a:stretch>
-            <a:fillRect/>
-          </a:stretch>
-        </p:blipFill>
-        <p:spPr>
-          <a:xfrm>
-            <a:off x="8961120" y="-3291840"/>
-            <a:ext cx="6217920" cy="6217920"/>
-          </a:xfrm>
-          <a:prstGeom prst="rect">
-            <a:avLst/>
-          </a:prstGeom>
-        </p:spPr>
-      </p:pic>
-      <p:sp>
-        <p:nvSpPr>
-          <p:cNvPr id="5" name="Rounded Rectangle 4"/>
+      <p:sp>
+        <p:nvSpPr>
+          <p:cNvPr id="3" name="Rounded Rectangle 2"/>
           <p:cNvSpPr/>
           <p:nvPr/>
         </p:nvSpPr>
@@ -10313,10 +9981,10 @@
           <a:gradFill rotWithShape="1">
             <a:gsLst>
               <a:gs pos="0">
-                <a:srgbClr val="FF7A59"/>
+                <a:srgbClr val="3A3F45"/>
               </a:gs>
               <a:gs pos="100000">
-                <a:srgbClr val="FFB86B"/>
+                <a:srgbClr val="73787E"/>
               </a:gs>
             </a:gsLst>
             <a:lin scaled="0" ang="18900000"/>
@@ -10326,7 +9994,7 @@
           </a:ln>
           <a:effectLst>
             <a:outerShdw blurRad="109728" dist="36576" dir="5400000" rotWithShape="0">
-              <a:srgbClr val="C24E30">
+              <a:srgbClr val="000000">
                 <a:alpha val="35000"/>
               </a:srgbClr>
             </a:outerShdw>
@@ -10356,7 +10024,7 @@
       </p:sp>
       <p:sp>
         <p:nvSpPr>
-          <p:cNvPr id="6" name="TextBox 5"/>
+          <p:cNvPr id="4" name="TextBox 3"/>
           <p:cNvSpPr txBox="1"/>
           <p:nvPr/>
         </p:nvSpPr>
@@ -10387,7 +10055,7 @@
             <a:r>
               <a:rPr sz="2150" b="1">
                 <a:solidFill>
-                  <a:srgbClr val="222E40"/>
+                  <a:srgbClr val="1C1C1E"/>
                 </a:solidFill>
                 <a:latin typeface="맑은 고딕"/>
                 <a:ea typeface="맑은 고딕"/>
@@ -10397,33 +10065,61 @@
           </a:p>
         </p:txBody>
       </p:sp>
-      <p:pic>
-        <p:nvPicPr>
-          <p:cNvPr id="7" name="Picture 6" descr="glow_bar.png"/>
-          <p:cNvPicPr>
-            <a:picLocks noChangeAspect="1"/>
-          </p:cNvPicPr>
-          <p:nvPr/>
-        </p:nvPicPr>
-        <p:blipFill>
-          <a:blip r:embed="rId4"/>
-          <a:stretch>
-            <a:fillRect/>
-          </a:stretch>
-        </p:blipFill>
+      <p:sp>
+        <p:nvSpPr>
+          <p:cNvPr id="5" name="Rectangle 4"/>
+          <p:cNvSpPr/>
+          <p:nvPr/>
+        </p:nvSpPr>
         <p:spPr>
           <a:xfrm>
             <a:off x="521207" y="969264"/>
-            <a:ext cx="4206240" cy="50292"/>
+            <a:ext cx="4206240" cy="27432"/>
           </a:xfrm>
           <a:prstGeom prst="rect">
             <a:avLst/>
           </a:prstGeom>
-        </p:spPr>
-      </p:pic>
-      <p:sp>
-        <p:nvSpPr>
-          <p:cNvPr id="8" name="TextBox 7"/>
+          <a:gradFill rotWithShape="1">
+            <a:gsLst>
+              <a:gs pos="0">
+                <a:srgbClr val="2A2E33"/>
+              </a:gs>
+              <a:gs pos="100000">
+                <a:srgbClr val="FFFFFF"/>
+              </a:gs>
+            </a:gsLst>
+            <a:lin scaled="0" ang="0"/>
+          </a:gradFill>
+          <a:ln>
+            <a:noFill/>
+          </a:ln>
+          <a:effectLst/>
+        </p:spPr>
+        <p:style>
+          <a:lnRef idx="1">
+            <a:schemeClr val="accent1"/>
+          </a:lnRef>
+          <a:fillRef idx="3">
+            <a:schemeClr val="accent1"/>
+          </a:fillRef>
+          <a:effectRef idx="2">
+            <a:schemeClr val="accent1"/>
+          </a:effectRef>
+          <a:fontRef idx="minor">
+            <a:schemeClr val="lt1"/>
+          </a:fontRef>
+        </p:style>
+        <p:txBody>
+          <a:bodyPr rtlCol="0" anchor="ctr"/>
+          <a:lstStyle/>
+          <a:p>
+            <a:pPr algn="ctr"/>
+          </a:p>
+        </p:txBody>
+      </p:sp>
+      <p:sp>
+        <p:nvSpPr>
+          <p:cNvPr id="6" name="TextBox 5"/>
           <p:cNvSpPr txBox="1"/>
           <p:nvPr/>
         </p:nvSpPr>
@@ -10454,7 +10150,7 @@
             <a:r>
               <a:rPr sz="3000" b="1">
                 <a:solidFill>
-                  <a:srgbClr val="D3DDEA"/>
+                  <a:srgbClr val="D8DADD"/>
                 </a:solidFill>
                 <a:latin typeface="맑은 고딕"/>
                 <a:ea typeface="맑은 고딕"/>
@@ -10466,7 +10162,7 @@
       </p:sp>
       <p:sp>
         <p:nvSpPr>
-          <p:cNvPr id="9" name="TextBox 8"/>
+          <p:cNvPr id="7" name="TextBox 6"/>
           <p:cNvSpPr txBox="1"/>
           <p:nvPr/>
         </p:nvSpPr>
@@ -10497,7 +10193,7 @@
             <a:r>
               <a:rPr sz="850" b="0">
                 <a:solidFill>
-                  <a:srgbClr val="ABB7C7"/>
+                  <a:srgbClr val="B2B5B9"/>
                 </a:solidFill>
                 <a:latin typeface="맑은 고딕"/>
                 <a:ea typeface="맑은 고딕"/>
@@ -10509,7 +10205,7 @@
       </p:sp>
       <p:sp>
         <p:nvSpPr>
-          <p:cNvPr id="10" name="TextBox 9"/>
+          <p:cNvPr id="8" name="TextBox 7"/>
           <p:cNvSpPr txBox="1"/>
           <p:nvPr/>
         </p:nvSpPr>
@@ -10540,7 +10236,7 @@
             <a:r>
               <a:rPr sz="1400" b="1">
                 <a:solidFill>
-                  <a:srgbClr val="17456B"/>
+                  <a:srgbClr val="33393F"/>
                 </a:solidFill>
                 <a:latin typeface="맑은 고딕"/>
                 <a:ea typeface="맑은 고딕"/>
@@ -10552,7 +10248,7 @@
       </p:sp>
       <p:graphicFrame>
         <p:nvGraphicFramePr>
-          <p:cNvPr id="11" name="Table 10"/>
+          <p:cNvPr id="9" name="Table 8"/>
           <p:cNvGraphicFramePr>
             <a:graphicFrameLocks noGrp="1"/>
           </p:cNvGraphicFramePr>
@@ -10673,7 +10369,7 @@
                       <a:r>
                         <a:rPr sz="1100" b="0">
                           <a:solidFill>
-                            <a:srgbClr val="222E40"/>
+                            <a:srgbClr val="1C1C1E"/>
                           </a:solidFill>
                           <a:latin typeface="맑은 고딕"/>
                           <a:ea typeface="맑은 고딕"/>
@@ -10701,7 +10397,7 @@
                       <a:r>
                         <a:rPr sz="1100" b="0">
                           <a:solidFill>
-                            <a:srgbClr val="222E40"/>
+                            <a:srgbClr val="1C1C1E"/>
                           </a:solidFill>
                           <a:latin typeface="맑은 고딕"/>
                           <a:ea typeface="맑은 고딕"/>
@@ -10729,7 +10425,7 @@
                       <a:r>
                         <a:rPr sz="1100" b="0">
                           <a:solidFill>
-                            <a:srgbClr val="222E40"/>
+                            <a:srgbClr val="1C1C1E"/>
                           </a:solidFill>
                           <a:latin typeface="맑은 고딕"/>
                           <a:ea typeface="맑은 고딕"/>
@@ -10759,7 +10455,7 @@
                       <a:r>
                         <a:rPr sz="1100" b="0">
                           <a:solidFill>
-                            <a:srgbClr val="222E40"/>
+                            <a:srgbClr val="1C1C1E"/>
                           </a:solidFill>
                           <a:latin typeface="맑은 고딕"/>
                           <a:ea typeface="맑은 고딕"/>
@@ -10770,7 +10466,7 @@
                   </a:txBody>
                   <a:tcPr marT="27432" marB="27432" marL="73152" marR="73152" anchor="ctr">
                     <a:solidFill>
-                      <a:srgbClr val="F5F8FC"/>
+                      <a:srgbClr val="F6F7F8"/>
                     </a:solidFill>
                   </a:tcPr>
                 </a:tc>
@@ -10787,7 +10483,7 @@
                       <a:r>
                         <a:rPr sz="1100" b="0">
                           <a:solidFill>
-                            <a:srgbClr val="222E40"/>
+                            <a:srgbClr val="1C1C1E"/>
                           </a:solidFill>
                           <a:latin typeface="맑은 고딕"/>
                           <a:ea typeface="맑은 고딕"/>
@@ -10798,7 +10494,7 @@
                   </a:txBody>
                   <a:tcPr marT="27432" marB="27432" marL="73152" marR="73152" anchor="ctr">
                     <a:solidFill>
-                      <a:srgbClr val="F5F8FC"/>
+                      <a:srgbClr val="F6F7F8"/>
                     </a:solidFill>
                   </a:tcPr>
                 </a:tc>
@@ -10815,7 +10511,7 @@
                       <a:r>
                         <a:rPr sz="1100" b="0">
                           <a:solidFill>
-                            <a:srgbClr val="222E40"/>
+                            <a:srgbClr val="1C1C1E"/>
                           </a:solidFill>
                           <a:latin typeface="맑은 고딕"/>
                           <a:ea typeface="맑은 고딕"/>
@@ -10826,7 +10522,7 @@
                   </a:txBody>
                   <a:tcPr marT="27432" marB="27432" marL="73152" marR="73152" anchor="ctr">
                     <a:solidFill>
-                      <a:srgbClr val="F5F8FC"/>
+                      <a:srgbClr val="F6F7F8"/>
                     </a:solidFill>
                   </a:tcPr>
                 </a:tc>
@@ -10837,7 +10533,7 @@
       </p:graphicFrame>
       <p:sp>
         <p:nvSpPr>
-          <p:cNvPr id="12" name="TextBox 11"/>
+          <p:cNvPr id="10" name="TextBox 9"/>
           <p:cNvSpPr txBox="1"/>
           <p:nvPr/>
         </p:nvSpPr>
@@ -10868,7 +10564,7 @@
             <a:r>
               <a:rPr sz="1400" b="1">
                 <a:solidFill>
-                  <a:srgbClr val="17456B"/>
+                  <a:srgbClr val="33393F"/>
                 </a:solidFill>
                 <a:latin typeface="맑은 고딕"/>
                 <a:ea typeface="맑은 고딕"/>
@@ -10880,7 +10576,7 @@
       </p:sp>
       <p:sp>
         <p:nvSpPr>
-          <p:cNvPr id="13" name="Rounded Rectangle 12"/>
+          <p:cNvPr id="11" name="Rounded Rectangle 10"/>
           <p:cNvSpPr/>
           <p:nvPr/>
         </p:nvSpPr>
@@ -10899,12 +10595,12 @@
           </a:solidFill>
           <a:ln w="12700">
             <a:solidFill>
-              <a:srgbClr val="E4EAF2"/>
+              <a:srgbClr val="E4E6E9"/>
             </a:solidFill>
           </a:ln>
           <a:effectLst>
             <a:outerShdw blurRad="182880" dist="64008" dir="5400000" rotWithShape="0">
-              <a:srgbClr val="2A3B55">
+              <a:srgbClr val="000000">
                 <a:alpha val="30000"/>
               </a:srgbClr>
             </a:outerShdw>
@@ -10934,7 +10630,7 @@
       </p:sp>
       <p:sp>
         <p:nvSpPr>
-          <p:cNvPr id="14" name="TextBox 13"/>
+          <p:cNvPr id="12" name="TextBox 11"/>
           <p:cNvSpPr txBox="1"/>
           <p:nvPr/>
         </p:nvSpPr>
@@ -10965,7 +10661,7 @@
             <a:r>
               <a:rPr sz="1300" b="1">
                 <a:solidFill>
-                  <a:srgbClr val="17456B"/>
+                  <a:srgbClr val="33393F"/>
                 </a:solidFill>
                 <a:latin typeface="맑은 고딕"/>
                 <a:ea typeface="맑은 고딕"/>
@@ -10985,7 +10681,7 @@
             <a:r>
               <a:rPr sz="1150" b="0">
                 <a:solidFill>
-                  <a:srgbClr val="222E40"/>
+                  <a:srgbClr val="1C1C1E"/>
                 </a:solidFill>
                 <a:latin typeface="맑은 고딕"/>
                 <a:ea typeface="맑은 고딕"/>
@@ -11005,7 +10701,7 @@
             <a:r>
               <a:rPr sz="1150" b="0">
                 <a:solidFill>
-                  <a:srgbClr val="222E40"/>
+                  <a:srgbClr val="1C1C1E"/>
                 </a:solidFill>
                 <a:latin typeface="맑은 고딕"/>
                 <a:ea typeface="맑은 고딕"/>
@@ -11025,7 +10721,7 @@
             <a:r>
               <a:rPr sz="1150" b="0">
                 <a:solidFill>
-                  <a:srgbClr val="222E40"/>
+                  <a:srgbClr val="1C1C1E"/>
                 </a:solidFill>
                 <a:latin typeface="맑은 고딕"/>
                 <a:ea typeface="맑은 고딕"/>
@@ -11037,7 +10733,7 @@
       </p:sp>
       <p:sp>
         <p:nvSpPr>
-          <p:cNvPr id="15" name="Rounded Rectangle 14"/>
+          <p:cNvPr id="13" name="Rounded Rectangle 12"/>
           <p:cNvSpPr/>
           <p:nvPr/>
         </p:nvSpPr>
@@ -11056,12 +10752,12 @@
           </a:solidFill>
           <a:ln w="12700">
             <a:solidFill>
-              <a:srgbClr val="E4EAF2"/>
+              <a:srgbClr val="E4E6E9"/>
             </a:solidFill>
           </a:ln>
           <a:effectLst>
             <a:outerShdw blurRad="182880" dist="64008" dir="5400000" rotWithShape="0">
-              <a:srgbClr val="2A3B55">
+              <a:srgbClr val="000000">
                 <a:alpha val="30000"/>
               </a:srgbClr>
             </a:outerShdw>
@@ -11091,7 +10787,7 @@
       </p:sp>
       <p:sp>
         <p:nvSpPr>
-          <p:cNvPr id="16" name="TextBox 15"/>
+          <p:cNvPr id="14" name="TextBox 13"/>
           <p:cNvSpPr txBox="1"/>
           <p:nvPr/>
         </p:nvSpPr>
@@ -11122,7 +10818,7 @@
             <a:r>
               <a:rPr sz="1300" b="1">
                 <a:solidFill>
-                  <a:srgbClr val="17456B"/>
+                  <a:srgbClr val="33393F"/>
                 </a:solidFill>
                 <a:latin typeface="맑은 고딕"/>
                 <a:ea typeface="맑은 고딕"/>
@@ -11142,7 +10838,7 @@
             <a:r>
               <a:rPr sz="1150" b="0">
                 <a:solidFill>
-                  <a:srgbClr val="222E40"/>
+                  <a:srgbClr val="1C1C1E"/>
                 </a:solidFill>
                 <a:latin typeface="맑은 고딕"/>
                 <a:ea typeface="맑은 고딕"/>
@@ -11162,7 +10858,7 @@
             <a:r>
               <a:rPr sz="1150" b="0">
                 <a:solidFill>
-                  <a:srgbClr val="222E40"/>
+                  <a:srgbClr val="1C1C1E"/>
                 </a:solidFill>
                 <a:latin typeface="맑은 고딕"/>
                 <a:ea typeface="맑은 고딕"/>
@@ -11182,7 +10878,7 @@
             <a:r>
               <a:rPr sz="1150" b="0">
                 <a:solidFill>
-                  <a:srgbClr val="222E40"/>
+                  <a:srgbClr val="1C1C1E"/>
                 </a:solidFill>
                 <a:latin typeface="맑은 고딕"/>
                 <a:ea typeface="맑은 고딕"/>
@@ -11202,7 +10898,7 @@
             <a:r>
               <a:rPr sz="1150" b="0">
                 <a:solidFill>
-                  <a:srgbClr val="222E40"/>
+                  <a:srgbClr val="1C1C1E"/>
                 </a:solidFill>
                 <a:latin typeface="맑은 고딕"/>
                 <a:ea typeface="맑은 고딕"/>
@@ -11214,7 +10910,7 @@
       </p:sp>
       <p:sp>
         <p:nvSpPr>
-          <p:cNvPr id="17" name="TextBox 16"/>
+          <p:cNvPr id="15" name="TextBox 14"/>
           <p:cNvSpPr txBox="1"/>
           <p:nvPr/>
         </p:nvSpPr>
@@ -11245,7 +10941,7 @@
             <a:r>
               <a:rPr sz="1150" b="0">
                 <a:solidFill>
-                  <a:srgbClr val="6A7B92"/>
+                  <a:srgbClr val="767A7F"/>
                 </a:solidFill>
                 <a:latin typeface="맑은 고딕"/>
                 <a:ea typeface="맑은 고딕"/>
@@ -11317,57 +11013,9 @@
           </a:p>
         </p:txBody>
       </p:sp>
-      <p:pic>
-        <p:nvPicPr>
-          <p:cNvPr id="3" name="Picture 2" descr="blob_blue.png"/>
-          <p:cNvPicPr>
-            <a:picLocks noChangeAspect="1"/>
-          </p:cNvPicPr>
-          <p:nvPr/>
-        </p:nvPicPr>
-        <p:blipFill>
-          <a:blip r:embed="rId2"/>
-          <a:stretch>
-            <a:fillRect/>
-          </a:stretch>
-        </p:blipFill>
-        <p:spPr>
-          <a:xfrm>
-            <a:off x="-3474720" y="3840480"/>
-            <a:ext cx="6583680" cy="6583680"/>
-          </a:xfrm>
-          <a:prstGeom prst="rect">
-            <a:avLst/>
-          </a:prstGeom>
-        </p:spPr>
-      </p:pic>
-      <p:pic>
-        <p:nvPicPr>
-          <p:cNvPr id="4" name="Picture 3" descr="blob_coral.png"/>
-          <p:cNvPicPr>
-            <a:picLocks noChangeAspect="1"/>
-          </p:cNvPicPr>
-          <p:nvPr/>
-        </p:nvPicPr>
-        <p:blipFill>
-          <a:blip r:embed="rId3"/>
-          <a:stretch>
-            <a:fillRect/>
-          </a:stretch>
-        </p:blipFill>
-        <p:spPr>
-          <a:xfrm>
-            <a:off x="8961120" y="-3291840"/>
-            <a:ext cx="6217920" cy="6217920"/>
-          </a:xfrm>
-          <a:prstGeom prst="rect">
-            <a:avLst/>
-          </a:prstGeom>
-        </p:spPr>
-      </p:pic>
-      <p:sp>
-        <p:nvSpPr>
-          <p:cNvPr id="5" name="Rounded Rectangle 4"/>
+      <p:sp>
+        <p:nvSpPr>
+          <p:cNvPr id="3" name="Rounded Rectangle 2"/>
           <p:cNvSpPr/>
           <p:nvPr/>
         </p:nvSpPr>
@@ -11384,10 +11032,10 @@
           <a:gradFill rotWithShape="1">
             <a:gsLst>
               <a:gs pos="0">
-                <a:srgbClr val="FF7A59"/>
+                <a:srgbClr val="3A3F45"/>
               </a:gs>
               <a:gs pos="100000">
-                <a:srgbClr val="FFB86B"/>
+                <a:srgbClr val="73787E"/>
               </a:gs>
             </a:gsLst>
             <a:lin scaled="0" ang="18900000"/>
@@ -11397,7 +11045,7 @@
           </a:ln>
           <a:effectLst>
             <a:outerShdw blurRad="109728" dist="36576" dir="5400000" rotWithShape="0">
-              <a:srgbClr val="C24E30">
+              <a:srgbClr val="000000">
                 <a:alpha val="35000"/>
               </a:srgbClr>
             </a:outerShdw>
@@ -11427,7 +11075,7 @@
       </p:sp>
       <p:sp>
         <p:nvSpPr>
-          <p:cNvPr id="6" name="TextBox 5"/>
+          <p:cNvPr id="4" name="TextBox 3"/>
           <p:cNvSpPr txBox="1"/>
           <p:nvPr/>
         </p:nvSpPr>
@@ -11458,7 +11106,7 @@
             <a:r>
               <a:rPr sz="2150" b="1">
                 <a:solidFill>
-                  <a:srgbClr val="222E40"/>
+                  <a:srgbClr val="1C1C1E"/>
                 </a:solidFill>
                 <a:latin typeface="맑은 고딕"/>
                 <a:ea typeface="맑은 고딕"/>
@@ -11468,33 +11116,61 @@
           </a:p>
         </p:txBody>
       </p:sp>
-      <p:pic>
-        <p:nvPicPr>
-          <p:cNvPr id="7" name="Picture 6" descr="glow_bar.png"/>
-          <p:cNvPicPr>
-            <a:picLocks noChangeAspect="1"/>
-          </p:cNvPicPr>
-          <p:nvPr/>
-        </p:nvPicPr>
-        <p:blipFill>
-          <a:blip r:embed="rId4"/>
-          <a:stretch>
-            <a:fillRect/>
-          </a:stretch>
-        </p:blipFill>
+      <p:sp>
+        <p:nvSpPr>
+          <p:cNvPr id="5" name="Rectangle 4"/>
+          <p:cNvSpPr/>
+          <p:nvPr/>
+        </p:nvSpPr>
         <p:spPr>
           <a:xfrm>
             <a:off x="521207" y="969264"/>
-            <a:ext cx="4206240" cy="50292"/>
+            <a:ext cx="4206240" cy="27432"/>
           </a:xfrm>
           <a:prstGeom prst="rect">
             <a:avLst/>
           </a:prstGeom>
-        </p:spPr>
-      </p:pic>
-      <p:sp>
-        <p:nvSpPr>
-          <p:cNvPr id="8" name="TextBox 7"/>
+          <a:gradFill rotWithShape="1">
+            <a:gsLst>
+              <a:gs pos="0">
+                <a:srgbClr val="2A2E33"/>
+              </a:gs>
+              <a:gs pos="100000">
+                <a:srgbClr val="FFFFFF"/>
+              </a:gs>
+            </a:gsLst>
+            <a:lin scaled="0" ang="0"/>
+          </a:gradFill>
+          <a:ln>
+            <a:noFill/>
+          </a:ln>
+          <a:effectLst/>
+        </p:spPr>
+        <p:style>
+          <a:lnRef idx="1">
+            <a:schemeClr val="accent1"/>
+          </a:lnRef>
+          <a:fillRef idx="3">
+            <a:schemeClr val="accent1"/>
+          </a:fillRef>
+          <a:effectRef idx="2">
+            <a:schemeClr val="accent1"/>
+          </a:effectRef>
+          <a:fontRef idx="minor">
+            <a:schemeClr val="lt1"/>
+          </a:fontRef>
+        </p:style>
+        <p:txBody>
+          <a:bodyPr rtlCol="0" anchor="ctr"/>
+          <a:lstStyle/>
+          <a:p>
+            <a:pPr algn="ctr"/>
+          </a:p>
+        </p:txBody>
+      </p:sp>
+      <p:sp>
+        <p:nvSpPr>
+          <p:cNvPr id="6" name="TextBox 5"/>
           <p:cNvSpPr txBox="1"/>
           <p:nvPr/>
         </p:nvSpPr>
@@ -11525,7 +11201,7 @@
             <a:r>
               <a:rPr sz="3000" b="1">
                 <a:solidFill>
-                  <a:srgbClr val="D3DDEA"/>
+                  <a:srgbClr val="D8DADD"/>
                 </a:solidFill>
                 <a:latin typeface="맑은 고딕"/>
                 <a:ea typeface="맑은 고딕"/>
@@ -11537,7 +11213,7 @@
       </p:sp>
       <p:sp>
         <p:nvSpPr>
-          <p:cNvPr id="9" name="TextBox 8"/>
+          <p:cNvPr id="7" name="TextBox 6"/>
           <p:cNvSpPr txBox="1"/>
           <p:nvPr/>
         </p:nvSpPr>
@@ -11568,7 +11244,7 @@
             <a:r>
               <a:rPr sz="850" b="0">
                 <a:solidFill>
-                  <a:srgbClr val="ABB7C7"/>
+                  <a:srgbClr val="B2B5B9"/>
                 </a:solidFill>
                 <a:latin typeface="맑은 고딕"/>
                 <a:ea typeface="맑은 고딕"/>
@@ -11580,7 +11256,7 @@
       </p:sp>
       <p:graphicFrame>
         <p:nvGraphicFramePr>
-          <p:cNvPr id="10" name="Table 9"/>
+          <p:cNvPr id="8" name="Table 7"/>
           <p:cNvGraphicFramePr>
             <a:graphicFrameLocks noGrp="1"/>
           </p:cNvGraphicFramePr>
@@ -11701,7 +11377,7 @@
                       <a:r>
                         <a:rPr sz="1100" b="0">
                           <a:solidFill>
-                            <a:srgbClr val="222E40"/>
+                            <a:srgbClr val="1C1C1E"/>
                           </a:solidFill>
                           <a:latin typeface="맑은 고딕"/>
                           <a:ea typeface="맑은 고딕"/>
@@ -11729,7 +11405,7 @@
                       <a:r>
                         <a:rPr sz="1100" b="0">
                           <a:solidFill>
-                            <a:srgbClr val="222E40"/>
+                            <a:srgbClr val="1C1C1E"/>
                           </a:solidFill>
                           <a:latin typeface="맑은 고딕"/>
                           <a:ea typeface="맑은 고딕"/>
@@ -11757,7 +11433,7 @@
                       <a:r>
                         <a:rPr sz="1100" b="0">
                           <a:solidFill>
-                            <a:srgbClr val="222E40"/>
+                            <a:srgbClr val="1C1C1E"/>
                           </a:solidFill>
                           <a:latin typeface="맑은 고딕"/>
                           <a:ea typeface="맑은 고딕"/>
@@ -11787,7 +11463,7 @@
                       <a:r>
                         <a:rPr sz="1100" b="0">
                           <a:solidFill>
-                            <a:srgbClr val="222E40"/>
+                            <a:srgbClr val="1C1C1E"/>
                           </a:solidFill>
                           <a:latin typeface="맑은 고딕"/>
                           <a:ea typeface="맑은 고딕"/>
@@ -11798,7 +11474,7 @@
                   </a:txBody>
                   <a:tcPr marT="27432" marB="27432" marL="73152" marR="73152" anchor="ctr">
                     <a:solidFill>
-                      <a:srgbClr val="F5F8FC"/>
+                      <a:srgbClr val="F6F7F8"/>
                     </a:solidFill>
                   </a:tcPr>
                 </a:tc>
@@ -11815,7 +11491,7 @@
                       <a:r>
                         <a:rPr sz="1100" b="0">
                           <a:solidFill>
-                            <a:srgbClr val="222E40"/>
+                            <a:srgbClr val="1C1C1E"/>
                           </a:solidFill>
                           <a:latin typeface="맑은 고딕"/>
                           <a:ea typeface="맑은 고딕"/>
@@ -11826,7 +11502,7 @@
                   </a:txBody>
                   <a:tcPr marT="27432" marB="27432" marL="73152" marR="73152" anchor="ctr">
                     <a:solidFill>
-                      <a:srgbClr val="F5F8FC"/>
+                      <a:srgbClr val="F6F7F8"/>
                     </a:solidFill>
                   </a:tcPr>
                 </a:tc>
@@ -11843,7 +11519,7 @@
                       <a:r>
                         <a:rPr sz="1100" b="0">
                           <a:solidFill>
-                            <a:srgbClr val="222E40"/>
+                            <a:srgbClr val="1C1C1E"/>
                           </a:solidFill>
                           <a:latin typeface="맑은 고딕"/>
                           <a:ea typeface="맑은 고딕"/>
@@ -11854,7 +11530,7 @@
                   </a:txBody>
                   <a:tcPr marT="27432" marB="27432" marL="73152" marR="73152" anchor="ctr">
                     <a:solidFill>
-                      <a:srgbClr val="F5F8FC"/>
+                      <a:srgbClr val="F6F7F8"/>
                     </a:solidFill>
                   </a:tcPr>
                 </a:tc>
@@ -11873,7 +11549,7 @@
                       <a:r>
                         <a:rPr sz="1100" b="0">
                           <a:solidFill>
-                            <a:srgbClr val="222E40"/>
+                            <a:srgbClr val="1C1C1E"/>
                           </a:solidFill>
                           <a:latin typeface="맑은 고딕"/>
                           <a:ea typeface="맑은 고딕"/>
@@ -11901,7 +11577,7 @@
                       <a:r>
                         <a:rPr sz="1100" b="0">
                           <a:solidFill>
-                            <a:srgbClr val="222E40"/>
+                            <a:srgbClr val="1C1C1E"/>
                           </a:solidFill>
                           <a:latin typeface="맑은 고딕"/>
                           <a:ea typeface="맑은 고딕"/>
@@ -11929,7 +11605,7 @@
                       <a:r>
                         <a:rPr sz="1100" b="0">
                           <a:solidFill>
-                            <a:srgbClr val="222E40"/>
+                            <a:srgbClr val="1C1C1E"/>
                           </a:solidFill>
                           <a:latin typeface="맑은 고딕"/>
                           <a:ea typeface="맑은 고딕"/>
@@ -11951,7 +11627,7 @@
       </p:graphicFrame>
       <p:sp>
         <p:nvSpPr>
-          <p:cNvPr id="11" name="TextBox 10"/>
+          <p:cNvPr id="9" name="TextBox 8"/>
           <p:cNvSpPr txBox="1"/>
           <p:nvPr/>
         </p:nvSpPr>
@@ -11982,7 +11658,7 @@
             <a:r>
               <a:rPr sz="1400" b="1">
                 <a:solidFill>
-                  <a:srgbClr val="17456B"/>
+                  <a:srgbClr val="33393F"/>
                 </a:solidFill>
                 <a:latin typeface="맑은 고딕"/>
                 <a:ea typeface="맑은 고딕"/>
@@ -11994,7 +11670,7 @@
       </p:sp>
       <p:sp>
         <p:nvSpPr>
-          <p:cNvPr id="12" name="Rounded Rectangle 11"/>
+          <p:cNvPr id="10" name="Rounded Rectangle 9"/>
           <p:cNvSpPr/>
           <p:nvPr/>
         </p:nvSpPr>
@@ -12013,12 +11689,12 @@
           </a:solidFill>
           <a:ln w="12700">
             <a:solidFill>
-              <a:srgbClr val="E4EAF2"/>
+              <a:srgbClr val="E4E6E9"/>
             </a:solidFill>
           </a:ln>
           <a:effectLst>
             <a:outerShdw blurRad="182880" dist="64008" dir="5400000" rotWithShape="0">
-              <a:srgbClr val="2A3B55">
+              <a:srgbClr val="000000">
                 <a:alpha val="30000"/>
               </a:srgbClr>
             </a:outerShdw>
@@ -12048,7 +11724,7 @@
       </p:sp>
       <p:sp>
         <p:nvSpPr>
-          <p:cNvPr id="13" name="TextBox 12"/>
+          <p:cNvPr id="11" name="TextBox 10"/>
           <p:cNvSpPr txBox="1"/>
           <p:nvPr/>
         </p:nvSpPr>
@@ -12079,7 +11755,7 @@
             <a:r>
               <a:rPr sz="1300" b="1">
                 <a:solidFill>
-                  <a:srgbClr val="17456B"/>
+                  <a:srgbClr val="33393F"/>
                 </a:solidFill>
                 <a:latin typeface="맑은 고딕"/>
                 <a:ea typeface="맑은 고딕"/>
@@ -12099,7 +11775,7 @@
             <a:r>
               <a:rPr sz="1100" b="0">
                 <a:solidFill>
-                  <a:srgbClr val="222E40"/>
+                  <a:srgbClr val="1C1C1E"/>
                 </a:solidFill>
                 <a:latin typeface="맑은 고딕"/>
                 <a:ea typeface="맑은 고딕"/>
@@ -12111,7 +11787,7 @@
       </p:sp>
       <p:sp>
         <p:nvSpPr>
-          <p:cNvPr id="14" name="Rounded Rectangle 13"/>
+          <p:cNvPr id="12" name="Rounded Rectangle 11"/>
           <p:cNvSpPr/>
           <p:nvPr/>
         </p:nvSpPr>
@@ -12130,12 +11806,12 @@
           </a:solidFill>
           <a:ln w="12700">
             <a:solidFill>
-              <a:srgbClr val="E4EAF2"/>
+              <a:srgbClr val="E4E6E9"/>
             </a:solidFill>
           </a:ln>
           <a:effectLst>
             <a:outerShdw blurRad="182880" dist="64008" dir="5400000" rotWithShape="0">
-              <a:srgbClr val="2A3B55">
+              <a:srgbClr val="000000">
                 <a:alpha val="30000"/>
               </a:srgbClr>
             </a:outerShdw>
@@ -12165,7 +11841,7 @@
       </p:sp>
       <p:sp>
         <p:nvSpPr>
-          <p:cNvPr id="15" name="TextBox 14"/>
+          <p:cNvPr id="13" name="TextBox 12"/>
           <p:cNvSpPr txBox="1"/>
           <p:nvPr/>
         </p:nvSpPr>
@@ -12196,7 +11872,7 @@
             <a:r>
               <a:rPr sz="1300" b="1">
                 <a:solidFill>
-                  <a:srgbClr val="17456B"/>
+                  <a:srgbClr val="33393F"/>
                 </a:solidFill>
                 <a:latin typeface="맑은 고딕"/>
                 <a:ea typeface="맑은 고딕"/>
@@ -12216,7 +11892,7 @@
             <a:r>
               <a:rPr sz="1100" b="0">
                 <a:solidFill>
-                  <a:srgbClr val="222E40"/>
+                  <a:srgbClr val="1C1C1E"/>
                 </a:solidFill>
                 <a:latin typeface="맑은 고딕"/>
                 <a:ea typeface="맑은 고딕"/>
@@ -12228,7 +11904,7 @@
       </p:sp>
       <p:sp>
         <p:nvSpPr>
-          <p:cNvPr id="16" name="Rounded Rectangle 15"/>
+          <p:cNvPr id="14" name="Rounded Rectangle 13"/>
           <p:cNvSpPr/>
           <p:nvPr/>
         </p:nvSpPr>
@@ -12247,12 +11923,12 @@
           </a:solidFill>
           <a:ln w="12700">
             <a:solidFill>
-              <a:srgbClr val="E4EAF2"/>
+              <a:srgbClr val="E4E6E9"/>
             </a:solidFill>
           </a:ln>
           <a:effectLst>
             <a:outerShdw blurRad="182880" dist="64008" dir="5400000" rotWithShape="0">
-              <a:srgbClr val="2A3B55">
+              <a:srgbClr val="000000">
                 <a:alpha val="30000"/>
               </a:srgbClr>
             </a:outerShdw>
@@ -12282,7 +11958,7 @@
       </p:sp>
       <p:sp>
         <p:nvSpPr>
-          <p:cNvPr id="17" name="TextBox 16"/>
+          <p:cNvPr id="15" name="TextBox 14"/>
           <p:cNvSpPr txBox="1"/>
           <p:nvPr/>
         </p:nvSpPr>
@@ -12313,7 +11989,7 @@
             <a:r>
               <a:rPr sz="1300" b="1">
                 <a:solidFill>
-                  <a:srgbClr val="17456B"/>
+                  <a:srgbClr val="33393F"/>
                 </a:solidFill>
                 <a:latin typeface="맑은 고딕"/>
                 <a:ea typeface="맑은 고딕"/>
@@ -12333,7 +12009,7 @@
             <a:r>
               <a:rPr sz="1100" b="0">
                 <a:solidFill>
-                  <a:srgbClr val="222E40"/>
+                  <a:srgbClr val="1C1C1E"/>
                 </a:solidFill>
                 <a:latin typeface="맑은 고딕"/>
                 <a:ea typeface="맑은 고딕"/>
@@ -12345,7 +12021,7 @@
       </p:sp>
       <p:sp>
         <p:nvSpPr>
-          <p:cNvPr id="18" name="TextBox 17"/>
+          <p:cNvPr id="16" name="TextBox 15"/>
           <p:cNvSpPr txBox="1"/>
           <p:nvPr/>
         </p:nvSpPr>
@@ -12376,7 +12052,7 @@
             <a:r>
               <a:rPr sz="1200" b="1">
                 <a:solidFill>
-                  <a:srgbClr val="222E40"/>
+                  <a:srgbClr val="1C1C1E"/>
                 </a:solidFill>
                 <a:latin typeface="맑은 고딕"/>
                 <a:ea typeface="맑은 고딕"/>
@@ -12448,57 +12124,9 @@
           </a:p>
         </p:txBody>
       </p:sp>
-      <p:pic>
-        <p:nvPicPr>
-          <p:cNvPr id="3" name="Picture 2" descr="blob_blue.png"/>
-          <p:cNvPicPr>
-            <a:picLocks noChangeAspect="1"/>
-          </p:cNvPicPr>
-          <p:nvPr/>
-        </p:nvPicPr>
-        <p:blipFill>
-          <a:blip r:embed="rId2"/>
-          <a:stretch>
-            <a:fillRect/>
-          </a:stretch>
-        </p:blipFill>
-        <p:spPr>
-          <a:xfrm>
-            <a:off x="-3474720" y="3840480"/>
-            <a:ext cx="6583680" cy="6583680"/>
-          </a:xfrm>
-          <a:prstGeom prst="rect">
-            <a:avLst/>
-          </a:prstGeom>
-        </p:spPr>
-      </p:pic>
-      <p:pic>
-        <p:nvPicPr>
-          <p:cNvPr id="4" name="Picture 3" descr="blob_coral.png"/>
-          <p:cNvPicPr>
-            <a:picLocks noChangeAspect="1"/>
-          </p:cNvPicPr>
-          <p:nvPr/>
-        </p:nvPicPr>
-        <p:blipFill>
-          <a:blip r:embed="rId3"/>
-          <a:stretch>
-            <a:fillRect/>
-          </a:stretch>
-        </p:blipFill>
-        <p:spPr>
-          <a:xfrm>
-            <a:off x="8961120" y="-3291840"/>
-            <a:ext cx="6217920" cy="6217920"/>
-          </a:xfrm>
-          <a:prstGeom prst="rect">
-            <a:avLst/>
-          </a:prstGeom>
-        </p:spPr>
-      </p:pic>
-      <p:sp>
-        <p:nvSpPr>
-          <p:cNvPr id="5" name="Rounded Rectangle 4"/>
+      <p:sp>
+        <p:nvSpPr>
+          <p:cNvPr id="3" name="Rounded Rectangle 2"/>
           <p:cNvSpPr/>
           <p:nvPr/>
         </p:nvSpPr>
@@ -12515,10 +12143,10 @@
           <a:gradFill rotWithShape="1">
             <a:gsLst>
               <a:gs pos="0">
-                <a:srgbClr val="FF7A59"/>
+                <a:srgbClr val="3A3F45"/>
               </a:gs>
               <a:gs pos="100000">
-                <a:srgbClr val="FFB86B"/>
+                <a:srgbClr val="73787E"/>
               </a:gs>
             </a:gsLst>
             <a:lin scaled="0" ang="18900000"/>
@@ -12528,7 +12156,7 @@
           </a:ln>
           <a:effectLst>
             <a:outerShdw blurRad="109728" dist="36576" dir="5400000" rotWithShape="0">
-              <a:srgbClr val="C24E30">
+              <a:srgbClr val="000000">
                 <a:alpha val="35000"/>
               </a:srgbClr>
             </a:outerShdw>
@@ -12558,7 +12186,7 @@
       </p:sp>
       <p:sp>
         <p:nvSpPr>
-          <p:cNvPr id="6" name="TextBox 5"/>
+          <p:cNvPr id="4" name="TextBox 3"/>
           <p:cNvSpPr txBox="1"/>
           <p:nvPr/>
         </p:nvSpPr>
@@ -12589,7 +12217,7 @@
             <a:r>
               <a:rPr sz="2150" b="1">
                 <a:solidFill>
-                  <a:srgbClr val="222E40"/>
+                  <a:srgbClr val="1C1C1E"/>
                 </a:solidFill>
                 <a:latin typeface="맑은 고딕"/>
                 <a:ea typeface="맑은 고딕"/>
@@ -12599,33 +12227,61 @@
           </a:p>
         </p:txBody>
       </p:sp>
-      <p:pic>
-        <p:nvPicPr>
-          <p:cNvPr id="7" name="Picture 6" descr="glow_bar.png"/>
-          <p:cNvPicPr>
-            <a:picLocks noChangeAspect="1"/>
-          </p:cNvPicPr>
-          <p:nvPr/>
-        </p:nvPicPr>
-        <p:blipFill>
-          <a:blip r:embed="rId4"/>
-          <a:stretch>
-            <a:fillRect/>
-          </a:stretch>
-        </p:blipFill>
+      <p:sp>
+        <p:nvSpPr>
+          <p:cNvPr id="5" name="Rectangle 4"/>
+          <p:cNvSpPr/>
+          <p:nvPr/>
+        </p:nvSpPr>
         <p:spPr>
           <a:xfrm>
             <a:off x="521207" y="969264"/>
-            <a:ext cx="4206240" cy="50292"/>
+            <a:ext cx="4206240" cy="27432"/>
           </a:xfrm>
           <a:prstGeom prst="rect">
             <a:avLst/>
           </a:prstGeom>
-        </p:spPr>
-      </p:pic>
-      <p:sp>
-        <p:nvSpPr>
-          <p:cNvPr id="8" name="TextBox 7"/>
+          <a:gradFill rotWithShape="1">
+            <a:gsLst>
+              <a:gs pos="0">
+                <a:srgbClr val="2A2E33"/>
+              </a:gs>
+              <a:gs pos="100000">
+                <a:srgbClr val="FFFFFF"/>
+              </a:gs>
+            </a:gsLst>
+            <a:lin scaled="0" ang="0"/>
+          </a:gradFill>
+          <a:ln>
+            <a:noFill/>
+          </a:ln>
+          <a:effectLst/>
+        </p:spPr>
+        <p:style>
+          <a:lnRef idx="1">
+            <a:schemeClr val="accent1"/>
+          </a:lnRef>
+          <a:fillRef idx="3">
+            <a:schemeClr val="accent1"/>
+          </a:fillRef>
+          <a:effectRef idx="2">
+            <a:schemeClr val="accent1"/>
+          </a:effectRef>
+          <a:fontRef idx="minor">
+            <a:schemeClr val="lt1"/>
+          </a:fontRef>
+        </p:style>
+        <p:txBody>
+          <a:bodyPr rtlCol="0" anchor="ctr"/>
+          <a:lstStyle/>
+          <a:p>
+            <a:pPr algn="ctr"/>
+          </a:p>
+        </p:txBody>
+      </p:sp>
+      <p:sp>
+        <p:nvSpPr>
+          <p:cNvPr id="6" name="TextBox 5"/>
           <p:cNvSpPr txBox="1"/>
           <p:nvPr/>
         </p:nvSpPr>
@@ -12656,7 +12312,7 @@
             <a:r>
               <a:rPr sz="3000" b="1">
                 <a:solidFill>
-                  <a:srgbClr val="D3DDEA"/>
+                  <a:srgbClr val="D8DADD"/>
                 </a:solidFill>
                 <a:latin typeface="맑은 고딕"/>
                 <a:ea typeface="맑은 고딕"/>
@@ -12668,7 +12324,7 @@
       </p:sp>
       <p:sp>
         <p:nvSpPr>
-          <p:cNvPr id="9" name="TextBox 8"/>
+          <p:cNvPr id="7" name="TextBox 6"/>
           <p:cNvSpPr txBox="1"/>
           <p:nvPr/>
         </p:nvSpPr>
@@ -12699,7 +12355,7 @@
             <a:r>
               <a:rPr sz="850" b="0">
                 <a:solidFill>
-                  <a:srgbClr val="ABB7C7"/>
+                  <a:srgbClr val="B2B5B9"/>
                 </a:solidFill>
                 <a:latin typeface="맑은 고딕"/>
                 <a:ea typeface="맑은 고딕"/>
@@ -12711,7 +12367,7 @@
       </p:sp>
       <p:graphicFrame>
         <p:nvGraphicFramePr>
-          <p:cNvPr id="10" name="Table 9"/>
+          <p:cNvPr id="8" name="Table 7"/>
           <p:cNvGraphicFramePr>
             <a:graphicFrameLocks noGrp="1"/>
           </p:cNvGraphicFramePr>
@@ -12803,7 +12459,7 @@
                       <a:r>
                         <a:rPr sz="1100" b="0">
                           <a:solidFill>
-                            <a:srgbClr val="222E40"/>
+                            <a:srgbClr val="1C1C1E"/>
                           </a:solidFill>
                           <a:latin typeface="맑은 고딕"/>
                           <a:ea typeface="맑은 고딕"/>
@@ -12831,7 +12487,7 @@
                       <a:r>
                         <a:rPr sz="1100" b="0">
                           <a:solidFill>
-                            <a:srgbClr val="222E40"/>
+                            <a:srgbClr val="1C1C1E"/>
                           </a:solidFill>
                           <a:latin typeface="맑은 고딕"/>
                           <a:ea typeface="맑은 고딕"/>
@@ -12861,7 +12517,7 @@
                       <a:r>
                         <a:rPr sz="1100" b="0">
                           <a:solidFill>
-                            <a:srgbClr val="222E40"/>
+                            <a:srgbClr val="1C1C1E"/>
                           </a:solidFill>
                           <a:latin typeface="맑은 고딕"/>
                           <a:ea typeface="맑은 고딕"/>
@@ -12872,7 +12528,7 @@
                   </a:txBody>
                   <a:tcPr marT="27432" marB="27432" marL="73152" marR="73152" anchor="ctr">
                     <a:solidFill>
-                      <a:srgbClr val="F5F8FC"/>
+                      <a:srgbClr val="F6F7F8"/>
                     </a:solidFill>
                   </a:tcPr>
                 </a:tc>
@@ -12889,7 +12545,7 @@
                       <a:r>
                         <a:rPr sz="1100" b="0">
                           <a:solidFill>
-                            <a:srgbClr val="222E40"/>
+                            <a:srgbClr val="1C1C1E"/>
                           </a:solidFill>
                           <a:latin typeface="맑은 고딕"/>
                           <a:ea typeface="맑은 고딕"/>
@@ -12900,7 +12556,7 @@
                   </a:txBody>
                   <a:tcPr marT="27432" marB="27432" marL="73152" marR="73152" anchor="ctr">
                     <a:solidFill>
-                      <a:srgbClr val="F5F8FC"/>
+                      <a:srgbClr val="F6F7F8"/>
                     </a:solidFill>
                   </a:tcPr>
                 </a:tc>
@@ -12919,7 +12575,7 @@
                       <a:r>
                         <a:rPr sz="1100" b="0">
                           <a:solidFill>
-                            <a:srgbClr val="222E40"/>
+                            <a:srgbClr val="1C1C1E"/>
                           </a:solidFill>
                           <a:latin typeface="맑은 고딕"/>
                           <a:ea typeface="맑은 고딕"/>
@@ -12947,7 +12603,7 @@
                       <a:r>
                         <a:rPr sz="1100" b="0">
                           <a:solidFill>
-                            <a:srgbClr val="222E40"/>
+                            <a:srgbClr val="1C1C1E"/>
                           </a:solidFill>
                           <a:latin typeface="맑은 고딕"/>
                           <a:ea typeface="맑은 고딕"/>
@@ -12977,7 +12633,7 @@
                       <a:r>
                         <a:rPr sz="1100" b="0">
                           <a:solidFill>
-                            <a:srgbClr val="222E40"/>
+                            <a:srgbClr val="1C1C1E"/>
                           </a:solidFill>
                           <a:latin typeface="맑은 고딕"/>
                           <a:ea typeface="맑은 고딕"/>
@@ -12988,7 +12644,7 @@
                   </a:txBody>
                   <a:tcPr marT="27432" marB="27432" marL="73152" marR="73152" anchor="ctr">
                     <a:solidFill>
-                      <a:srgbClr val="F5F8FC"/>
+                      <a:srgbClr val="F6F7F8"/>
                     </a:solidFill>
                   </a:tcPr>
                 </a:tc>
@@ -13005,7 +12661,7 @@
                       <a:r>
                         <a:rPr sz="1100" b="0">
                           <a:solidFill>
-                            <a:srgbClr val="222E40"/>
+                            <a:srgbClr val="1C1C1E"/>
                           </a:solidFill>
                           <a:latin typeface="맑은 고딕"/>
                           <a:ea typeface="맑은 고딕"/>
@@ -13016,7 +12672,7 @@
                   </a:txBody>
                   <a:tcPr marT="27432" marB="27432" marL="73152" marR="73152" anchor="ctr">
                     <a:solidFill>
-                      <a:srgbClr val="F5F8FC"/>
+                      <a:srgbClr val="F6F7F8"/>
                     </a:solidFill>
                   </a:tcPr>
                 </a:tc>
@@ -13035,7 +12691,7 @@
                       <a:r>
                         <a:rPr sz="1100" b="0">
                           <a:solidFill>
-                            <a:srgbClr val="222E40"/>
+                            <a:srgbClr val="1C1C1E"/>
                           </a:solidFill>
                           <a:latin typeface="맑은 고딕"/>
                           <a:ea typeface="맑은 고딕"/>
@@ -13063,7 +12719,7 @@
                       <a:r>
                         <a:rPr sz="1100" b="0">
                           <a:solidFill>
-                            <a:srgbClr val="222E40"/>
+                            <a:srgbClr val="1C1C1E"/>
                           </a:solidFill>
                           <a:latin typeface="맑은 고딕"/>
                           <a:ea typeface="맑은 고딕"/>
@@ -13085,7 +12741,7 @@
       </p:graphicFrame>
       <p:sp>
         <p:nvSpPr>
-          <p:cNvPr id="11" name="Rounded Rectangle 10"/>
+          <p:cNvPr id="9" name="Rounded Rectangle 8"/>
           <p:cNvSpPr/>
           <p:nvPr/>
         </p:nvSpPr>
@@ -13104,12 +12760,12 @@
           </a:solidFill>
           <a:ln w="12700">
             <a:solidFill>
-              <a:srgbClr val="E4EAF2"/>
+              <a:srgbClr val="E4E6E9"/>
             </a:solidFill>
           </a:ln>
           <a:effectLst>
             <a:outerShdw blurRad="182880" dist="64008" dir="5400000" rotWithShape="0">
-              <a:srgbClr val="2A3B55">
+              <a:srgbClr val="000000">
                 <a:alpha val="30000"/>
               </a:srgbClr>
             </a:outerShdw>
@@ -13139,7 +12795,7 @@
       </p:sp>
       <p:sp>
         <p:nvSpPr>
-          <p:cNvPr id="12" name="TextBox 11"/>
+          <p:cNvPr id="10" name="TextBox 9"/>
           <p:cNvSpPr txBox="1"/>
           <p:nvPr/>
         </p:nvSpPr>
@@ -13170,7 +12826,7 @@
             <a:r>
               <a:rPr sz="1300" b="1">
                 <a:solidFill>
-                  <a:srgbClr val="17456B"/>
+                  <a:srgbClr val="33393F"/>
                 </a:solidFill>
                 <a:latin typeface="맑은 고딕"/>
                 <a:ea typeface="맑은 고딕"/>
@@ -13190,7 +12846,7 @@
             <a:r>
               <a:rPr sz="1150" b="0">
                 <a:solidFill>
-                  <a:srgbClr val="222E40"/>
+                  <a:srgbClr val="1C1C1E"/>
                 </a:solidFill>
                 <a:latin typeface="맑은 고딕"/>
                 <a:ea typeface="맑은 고딕"/>
@@ -13210,7 +12866,7 @@
             <a:r>
               <a:rPr sz="1150" b="0">
                 <a:solidFill>
-                  <a:srgbClr val="222E40"/>
+                  <a:srgbClr val="1C1C1E"/>
                 </a:solidFill>
                 <a:latin typeface="맑은 고딕"/>
                 <a:ea typeface="맑은 고딕"/>
@@ -13230,7 +12886,7 @@
             <a:r>
               <a:rPr sz="1150" b="0">
                 <a:solidFill>
-                  <a:srgbClr val="222E40"/>
+                  <a:srgbClr val="1C1C1E"/>
                 </a:solidFill>
                 <a:latin typeface="맑은 고딕"/>
                 <a:ea typeface="맑은 고딕"/>
@@ -13302,57 +12958,9 @@
           </a:p>
         </p:txBody>
       </p:sp>
-      <p:pic>
-        <p:nvPicPr>
-          <p:cNvPr id="3" name="Picture 2" descr="blob_blue.png"/>
-          <p:cNvPicPr>
-            <a:picLocks noChangeAspect="1"/>
-          </p:cNvPicPr>
-          <p:nvPr/>
-        </p:nvPicPr>
-        <p:blipFill>
-          <a:blip r:embed="rId2"/>
-          <a:stretch>
-            <a:fillRect/>
-          </a:stretch>
-        </p:blipFill>
-        <p:spPr>
-          <a:xfrm>
-            <a:off x="-3474720" y="3840480"/>
-            <a:ext cx="6583680" cy="6583680"/>
-          </a:xfrm>
-          <a:prstGeom prst="rect">
-            <a:avLst/>
-          </a:prstGeom>
-        </p:spPr>
-      </p:pic>
-      <p:pic>
-        <p:nvPicPr>
-          <p:cNvPr id="4" name="Picture 3" descr="blob_coral.png"/>
-          <p:cNvPicPr>
-            <a:picLocks noChangeAspect="1"/>
-          </p:cNvPicPr>
-          <p:nvPr/>
-        </p:nvPicPr>
-        <p:blipFill>
-          <a:blip r:embed="rId3"/>
-          <a:stretch>
-            <a:fillRect/>
-          </a:stretch>
-        </p:blipFill>
-        <p:spPr>
-          <a:xfrm>
-            <a:off x="8961120" y="-3291840"/>
-            <a:ext cx="6217920" cy="6217920"/>
-          </a:xfrm>
-          <a:prstGeom prst="rect">
-            <a:avLst/>
-          </a:prstGeom>
-        </p:spPr>
-      </p:pic>
-      <p:sp>
-        <p:nvSpPr>
-          <p:cNvPr id="5" name="Rounded Rectangle 4"/>
+      <p:sp>
+        <p:nvSpPr>
+          <p:cNvPr id="3" name="Rounded Rectangle 2"/>
           <p:cNvSpPr/>
           <p:nvPr/>
         </p:nvSpPr>
@@ -13369,10 +12977,10 @@
           <a:gradFill rotWithShape="1">
             <a:gsLst>
               <a:gs pos="0">
-                <a:srgbClr val="FF7A59"/>
+                <a:srgbClr val="3A3F45"/>
               </a:gs>
               <a:gs pos="100000">
-                <a:srgbClr val="FFB86B"/>
+                <a:srgbClr val="73787E"/>
               </a:gs>
             </a:gsLst>
             <a:lin scaled="0" ang="18900000"/>
@@ -13382,7 +12990,7 @@
           </a:ln>
           <a:effectLst>
             <a:outerShdw blurRad="109728" dist="36576" dir="5400000" rotWithShape="0">
-              <a:srgbClr val="C24E30">
+              <a:srgbClr val="000000">
                 <a:alpha val="35000"/>
               </a:srgbClr>
             </a:outerShdw>
@@ -13412,7 +13020,7 @@
       </p:sp>
       <p:sp>
         <p:nvSpPr>
-          <p:cNvPr id="6" name="TextBox 5"/>
+          <p:cNvPr id="4" name="TextBox 3"/>
           <p:cNvSpPr txBox="1"/>
           <p:nvPr/>
         </p:nvSpPr>
@@ -13443,7 +13051,7 @@
             <a:r>
               <a:rPr sz="2150" b="1">
                 <a:solidFill>
-                  <a:srgbClr val="222E40"/>
+                  <a:srgbClr val="1C1C1E"/>
                 </a:solidFill>
                 <a:latin typeface="맑은 고딕"/>
                 <a:ea typeface="맑은 고딕"/>
@@ -13453,33 +13061,61 @@
           </a:p>
         </p:txBody>
       </p:sp>
-      <p:pic>
-        <p:nvPicPr>
-          <p:cNvPr id="7" name="Picture 6" descr="glow_bar.png"/>
-          <p:cNvPicPr>
-            <a:picLocks noChangeAspect="1"/>
-          </p:cNvPicPr>
-          <p:nvPr/>
-        </p:nvPicPr>
-        <p:blipFill>
-          <a:blip r:embed="rId4"/>
-          <a:stretch>
-            <a:fillRect/>
-          </a:stretch>
-        </p:blipFill>
+      <p:sp>
+        <p:nvSpPr>
+          <p:cNvPr id="5" name="Rectangle 4"/>
+          <p:cNvSpPr/>
+          <p:nvPr/>
+        </p:nvSpPr>
         <p:spPr>
           <a:xfrm>
             <a:off x="521207" y="969264"/>
-            <a:ext cx="4206240" cy="50292"/>
+            <a:ext cx="4206240" cy="27432"/>
           </a:xfrm>
           <a:prstGeom prst="rect">
             <a:avLst/>
           </a:prstGeom>
-        </p:spPr>
-      </p:pic>
-      <p:sp>
-        <p:nvSpPr>
-          <p:cNvPr id="8" name="TextBox 7"/>
+          <a:gradFill rotWithShape="1">
+            <a:gsLst>
+              <a:gs pos="0">
+                <a:srgbClr val="2A2E33"/>
+              </a:gs>
+              <a:gs pos="100000">
+                <a:srgbClr val="FFFFFF"/>
+              </a:gs>
+            </a:gsLst>
+            <a:lin scaled="0" ang="0"/>
+          </a:gradFill>
+          <a:ln>
+            <a:noFill/>
+          </a:ln>
+          <a:effectLst/>
+        </p:spPr>
+        <p:style>
+          <a:lnRef idx="1">
+            <a:schemeClr val="accent1"/>
+          </a:lnRef>
+          <a:fillRef idx="3">
+            <a:schemeClr val="accent1"/>
+          </a:fillRef>
+          <a:effectRef idx="2">
+            <a:schemeClr val="accent1"/>
+          </a:effectRef>
+          <a:fontRef idx="minor">
+            <a:schemeClr val="lt1"/>
+          </a:fontRef>
+        </p:style>
+        <p:txBody>
+          <a:bodyPr rtlCol="0" anchor="ctr"/>
+          <a:lstStyle/>
+          <a:p>
+            <a:pPr algn="ctr"/>
+          </a:p>
+        </p:txBody>
+      </p:sp>
+      <p:sp>
+        <p:nvSpPr>
+          <p:cNvPr id="6" name="TextBox 5"/>
           <p:cNvSpPr txBox="1"/>
           <p:nvPr/>
         </p:nvSpPr>
@@ -13510,7 +13146,7 @@
             <a:r>
               <a:rPr sz="3000" b="1">
                 <a:solidFill>
-                  <a:srgbClr val="D3DDEA"/>
+                  <a:srgbClr val="D8DADD"/>
                 </a:solidFill>
                 <a:latin typeface="맑은 고딕"/>
                 <a:ea typeface="맑은 고딕"/>
@@ -13522,7 +13158,7 @@
       </p:sp>
       <p:sp>
         <p:nvSpPr>
-          <p:cNvPr id="9" name="TextBox 8"/>
+          <p:cNvPr id="7" name="TextBox 6"/>
           <p:cNvSpPr txBox="1"/>
           <p:nvPr/>
         </p:nvSpPr>
@@ -13553,7 +13189,7 @@
             <a:r>
               <a:rPr sz="1250" b="0">
                 <a:solidFill>
-                  <a:srgbClr val="6A7B92"/>
+                  <a:srgbClr val="767A7F"/>
                 </a:solidFill>
                 <a:latin typeface="맑은 고딕"/>
                 <a:ea typeface="맑은 고딕"/>
@@ -13565,7 +13201,7 @@
       </p:sp>
       <p:sp>
         <p:nvSpPr>
-          <p:cNvPr id="10" name="TextBox 9"/>
+          <p:cNvPr id="8" name="TextBox 7"/>
           <p:cNvSpPr txBox="1"/>
           <p:nvPr/>
         </p:nvSpPr>
@@ -13596,7 +13232,7 @@
             <a:r>
               <a:rPr sz="850" b="0">
                 <a:solidFill>
-                  <a:srgbClr val="ABB7C7"/>
+                  <a:srgbClr val="B2B5B9"/>
                 </a:solidFill>
                 <a:latin typeface="맑은 고딕"/>
                 <a:ea typeface="맑은 고딕"/>
@@ -13608,7 +13244,7 @@
       </p:sp>
       <p:sp>
         <p:nvSpPr>
-          <p:cNvPr id="11" name="Rounded Rectangle 10"/>
+          <p:cNvPr id="9" name="Rounded Rectangle 8"/>
           <p:cNvSpPr/>
           <p:nvPr/>
         </p:nvSpPr>
@@ -13627,12 +13263,12 @@
           </a:solidFill>
           <a:ln w="12700">
             <a:solidFill>
-              <a:srgbClr val="E4EAF2"/>
+              <a:srgbClr val="E4E6E9"/>
             </a:solidFill>
           </a:ln>
           <a:effectLst>
             <a:outerShdw blurRad="182880" dist="64008" dir="5400000" rotWithShape="0">
-              <a:srgbClr val="2A3B55">
+              <a:srgbClr val="000000">
                 <a:alpha val="30000"/>
               </a:srgbClr>
             </a:outerShdw>
@@ -13662,7 +13298,7 @@
       </p:sp>
       <p:sp>
         <p:nvSpPr>
-          <p:cNvPr id="12" name="TextBox 11"/>
+          <p:cNvPr id="10" name="TextBox 9"/>
           <p:cNvSpPr txBox="1"/>
           <p:nvPr/>
         </p:nvSpPr>
@@ -13693,7 +13329,7 @@
             <a:r>
               <a:rPr sz="1350" b="1">
                 <a:solidFill>
-                  <a:srgbClr val="17456B"/>
+                  <a:srgbClr val="33393F"/>
                 </a:solidFill>
                 <a:latin typeface="맑은 고딕"/>
                 <a:ea typeface="맑은 고딕"/>
@@ -13713,7 +13349,7 @@
             <a:r>
               <a:rPr sz="1100" b="0">
                 <a:solidFill>
-                  <a:srgbClr val="222E40"/>
+                  <a:srgbClr val="1C1C1E"/>
                 </a:solidFill>
                 <a:latin typeface="맑은 고딕"/>
                 <a:ea typeface="맑은 고딕"/>
@@ -13733,7 +13369,7 @@
             <a:r>
               <a:rPr sz="1100" b="0">
                 <a:solidFill>
-                  <a:srgbClr val="222E40"/>
+                  <a:srgbClr val="1C1C1E"/>
                 </a:solidFill>
                 <a:latin typeface="맑은 고딕"/>
                 <a:ea typeface="맑은 고딕"/>
@@ -13745,7 +13381,7 @@
       </p:sp>
       <p:sp>
         <p:nvSpPr>
-          <p:cNvPr id="13" name="Rounded Rectangle 12"/>
+          <p:cNvPr id="11" name="Rounded Rectangle 10"/>
           <p:cNvSpPr/>
           <p:nvPr/>
         </p:nvSpPr>
@@ -13764,12 +13400,12 @@
           </a:solidFill>
           <a:ln w="12700">
             <a:solidFill>
-              <a:srgbClr val="E4EAF2"/>
+              <a:srgbClr val="E4E6E9"/>
             </a:solidFill>
           </a:ln>
           <a:effectLst>
             <a:outerShdw blurRad="182880" dist="64008" dir="5400000" rotWithShape="0">
-              <a:srgbClr val="2A3B55">
+              <a:srgbClr val="000000">
                 <a:alpha val="30000"/>
               </a:srgbClr>
             </a:outerShdw>
@@ -13799,7 +13435,7 @@
       </p:sp>
       <p:sp>
         <p:nvSpPr>
-          <p:cNvPr id="14" name="TextBox 13"/>
+          <p:cNvPr id="12" name="TextBox 11"/>
           <p:cNvSpPr txBox="1"/>
           <p:nvPr/>
         </p:nvSpPr>
@@ -13830,7 +13466,7 @@
             <a:r>
               <a:rPr sz="1350" b="1">
                 <a:solidFill>
-                  <a:srgbClr val="17456B"/>
+                  <a:srgbClr val="33393F"/>
                 </a:solidFill>
                 <a:latin typeface="맑은 고딕"/>
                 <a:ea typeface="맑은 고딕"/>
@@ -13850,7 +13486,7 @@
             <a:r>
               <a:rPr sz="1100" b="0">
                 <a:solidFill>
-                  <a:srgbClr val="222E40"/>
+                  <a:srgbClr val="1C1C1E"/>
                 </a:solidFill>
                 <a:latin typeface="맑은 고딕"/>
                 <a:ea typeface="맑은 고딕"/>
@@ -13870,7 +13506,7 @@
             <a:r>
               <a:rPr sz="1100" b="0">
                 <a:solidFill>
-                  <a:srgbClr val="222E40"/>
+                  <a:srgbClr val="1C1C1E"/>
                 </a:solidFill>
                 <a:latin typeface="맑은 고딕"/>
                 <a:ea typeface="맑은 고딕"/>
@@ -13882,7 +13518,7 @@
       </p:sp>
       <p:sp>
         <p:nvSpPr>
-          <p:cNvPr id="15" name="Rounded Rectangle 14"/>
+          <p:cNvPr id="13" name="Rounded Rectangle 12"/>
           <p:cNvSpPr/>
           <p:nvPr/>
         </p:nvSpPr>
@@ -13901,12 +13537,12 @@
           </a:solidFill>
           <a:ln w="12700">
             <a:solidFill>
-              <a:srgbClr val="E4EAF2"/>
+              <a:srgbClr val="E4E6E9"/>
             </a:solidFill>
           </a:ln>
           <a:effectLst>
             <a:outerShdw blurRad="182880" dist="64008" dir="5400000" rotWithShape="0">
-              <a:srgbClr val="2A3B55">
+              <a:srgbClr val="000000">
                 <a:alpha val="30000"/>
               </a:srgbClr>
             </a:outerShdw>
@@ -13936,7 +13572,7 @@
       </p:sp>
       <p:sp>
         <p:nvSpPr>
-          <p:cNvPr id="16" name="TextBox 15"/>
+          <p:cNvPr id="14" name="TextBox 13"/>
           <p:cNvSpPr txBox="1"/>
           <p:nvPr/>
         </p:nvSpPr>
@@ -13967,7 +13603,7 @@
             <a:r>
               <a:rPr sz="1350" b="1">
                 <a:solidFill>
-                  <a:srgbClr val="17456B"/>
+                  <a:srgbClr val="33393F"/>
                 </a:solidFill>
                 <a:latin typeface="맑은 고딕"/>
                 <a:ea typeface="맑은 고딕"/>
@@ -13987,7 +13623,7 @@
             <a:r>
               <a:rPr sz="1100" b="0">
                 <a:solidFill>
-                  <a:srgbClr val="222E40"/>
+                  <a:srgbClr val="1C1C1E"/>
                 </a:solidFill>
                 <a:latin typeface="맑은 고딕"/>
                 <a:ea typeface="맑은 고딕"/>
@@ -14007,7 +13643,7 @@
             <a:r>
               <a:rPr sz="1100" b="0">
                 <a:solidFill>
-                  <a:srgbClr val="222E40"/>
+                  <a:srgbClr val="1C1C1E"/>
                 </a:solidFill>
                 <a:latin typeface="맑은 고딕"/>
                 <a:ea typeface="맑은 고딕"/>
@@ -14019,7 +13655,7 @@
       </p:sp>
       <p:sp>
         <p:nvSpPr>
-          <p:cNvPr id="17" name="Rounded Rectangle 16"/>
+          <p:cNvPr id="15" name="Rounded Rectangle 14"/>
           <p:cNvSpPr/>
           <p:nvPr/>
         </p:nvSpPr>
@@ -14038,12 +13674,12 @@
           </a:solidFill>
           <a:ln w="12700">
             <a:solidFill>
-              <a:srgbClr val="E4EAF2"/>
+              <a:srgbClr val="E4E6E9"/>
             </a:solidFill>
           </a:ln>
           <a:effectLst>
             <a:outerShdw blurRad="182880" dist="64008" dir="5400000" rotWithShape="0">
-              <a:srgbClr val="2A3B55">
+              <a:srgbClr val="000000">
                 <a:alpha val="30000"/>
               </a:srgbClr>
             </a:outerShdw>
@@ -14073,7 +13709,7 @@
       </p:sp>
       <p:sp>
         <p:nvSpPr>
-          <p:cNvPr id="18" name="TextBox 17"/>
+          <p:cNvPr id="16" name="TextBox 15"/>
           <p:cNvSpPr txBox="1"/>
           <p:nvPr/>
         </p:nvSpPr>
@@ -14104,7 +13740,7 @@
             <a:r>
               <a:rPr sz="1300" b="1">
                 <a:solidFill>
-                  <a:srgbClr val="17456B"/>
+                  <a:srgbClr val="33393F"/>
                 </a:solidFill>
                 <a:latin typeface="맑은 고딕"/>
                 <a:ea typeface="맑은 고딕"/>
@@ -14124,7 +13760,7 @@
             <a:r>
               <a:rPr sz="1150" b="0">
                 <a:solidFill>
-                  <a:srgbClr val="222E40"/>
+                  <a:srgbClr val="1C1C1E"/>
                 </a:solidFill>
                 <a:latin typeface="맑은 고딕"/>
                 <a:ea typeface="맑은 고딕"/>
@@ -14144,7 +13780,7 @@
             <a:r>
               <a:rPr sz="1150" b="0">
                 <a:solidFill>
-                  <a:srgbClr val="222E40"/>
+                  <a:srgbClr val="1C1C1E"/>
                 </a:solidFill>
                 <a:latin typeface="맑은 고딕"/>
                 <a:ea typeface="맑은 고딕"/>
@@ -14216,57 +13852,9 @@
           </a:p>
         </p:txBody>
       </p:sp>
-      <p:pic>
-        <p:nvPicPr>
-          <p:cNvPr id="3" name="Picture 2" descr="blob_blue.png"/>
-          <p:cNvPicPr>
-            <a:picLocks noChangeAspect="1"/>
-          </p:cNvPicPr>
-          <p:nvPr/>
-        </p:nvPicPr>
-        <p:blipFill>
-          <a:blip r:embed="rId2"/>
-          <a:stretch>
-            <a:fillRect/>
-          </a:stretch>
-        </p:blipFill>
-        <p:spPr>
-          <a:xfrm>
-            <a:off x="-3474720" y="3840480"/>
-            <a:ext cx="6583680" cy="6583680"/>
-          </a:xfrm>
-          <a:prstGeom prst="rect">
-            <a:avLst/>
-          </a:prstGeom>
-        </p:spPr>
-      </p:pic>
-      <p:pic>
-        <p:nvPicPr>
-          <p:cNvPr id="4" name="Picture 3" descr="blob_coral.png"/>
-          <p:cNvPicPr>
-            <a:picLocks noChangeAspect="1"/>
-          </p:cNvPicPr>
-          <p:nvPr/>
-        </p:nvPicPr>
-        <p:blipFill>
-          <a:blip r:embed="rId3"/>
-          <a:stretch>
-            <a:fillRect/>
-          </a:stretch>
-        </p:blipFill>
-        <p:spPr>
-          <a:xfrm>
-            <a:off x="8961120" y="-3291840"/>
-            <a:ext cx="6217920" cy="6217920"/>
-          </a:xfrm>
-          <a:prstGeom prst="rect">
-            <a:avLst/>
-          </a:prstGeom>
-        </p:spPr>
-      </p:pic>
-      <p:sp>
-        <p:nvSpPr>
-          <p:cNvPr id="5" name="Rounded Rectangle 4"/>
+      <p:sp>
+        <p:nvSpPr>
+          <p:cNvPr id="3" name="Rounded Rectangle 2"/>
           <p:cNvSpPr/>
           <p:nvPr/>
         </p:nvSpPr>
@@ -14283,10 +13871,10 @@
           <a:gradFill rotWithShape="1">
             <a:gsLst>
               <a:gs pos="0">
-                <a:srgbClr val="FF7A59"/>
+                <a:srgbClr val="3A3F45"/>
               </a:gs>
               <a:gs pos="100000">
-                <a:srgbClr val="FFB86B"/>
+                <a:srgbClr val="73787E"/>
               </a:gs>
             </a:gsLst>
             <a:lin scaled="0" ang="18900000"/>
@@ -14296,7 +13884,7 @@
           </a:ln>
           <a:effectLst>
             <a:outerShdw blurRad="109728" dist="36576" dir="5400000" rotWithShape="0">
-              <a:srgbClr val="C24E30">
+              <a:srgbClr val="000000">
                 <a:alpha val="35000"/>
               </a:srgbClr>
             </a:outerShdw>
@@ -14326,7 +13914,7 @@
       </p:sp>
       <p:sp>
         <p:nvSpPr>
-          <p:cNvPr id="6" name="TextBox 5"/>
+          <p:cNvPr id="4" name="TextBox 3"/>
           <p:cNvSpPr txBox="1"/>
           <p:nvPr/>
         </p:nvSpPr>
@@ -14357,7 +13945,7 @@
             <a:r>
               <a:rPr sz="2150" b="1">
                 <a:solidFill>
-                  <a:srgbClr val="222E40"/>
+                  <a:srgbClr val="1C1C1E"/>
                 </a:solidFill>
                 <a:latin typeface="맑은 고딕"/>
                 <a:ea typeface="맑은 고딕"/>
@@ -14367,33 +13955,61 @@
           </a:p>
         </p:txBody>
       </p:sp>
-      <p:pic>
-        <p:nvPicPr>
-          <p:cNvPr id="7" name="Picture 6" descr="glow_bar.png"/>
-          <p:cNvPicPr>
-            <a:picLocks noChangeAspect="1"/>
-          </p:cNvPicPr>
-          <p:nvPr/>
-        </p:nvPicPr>
-        <p:blipFill>
-          <a:blip r:embed="rId4"/>
-          <a:stretch>
-            <a:fillRect/>
-          </a:stretch>
-        </p:blipFill>
+      <p:sp>
+        <p:nvSpPr>
+          <p:cNvPr id="5" name="Rectangle 4"/>
+          <p:cNvSpPr/>
+          <p:nvPr/>
+        </p:nvSpPr>
         <p:spPr>
           <a:xfrm>
             <a:off x="521207" y="969264"/>
-            <a:ext cx="4206240" cy="50292"/>
+            <a:ext cx="4206240" cy="27432"/>
           </a:xfrm>
           <a:prstGeom prst="rect">
             <a:avLst/>
           </a:prstGeom>
-        </p:spPr>
-      </p:pic>
-      <p:sp>
-        <p:nvSpPr>
-          <p:cNvPr id="8" name="TextBox 7"/>
+          <a:gradFill rotWithShape="1">
+            <a:gsLst>
+              <a:gs pos="0">
+                <a:srgbClr val="2A2E33"/>
+              </a:gs>
+              <a:gs pos="100000">
+                <a:srgbClr val="FFFFFF"/>
+              </a:gs>
+            </a:gsLst>
+            <a:lin scaled="0" ang="0"/>
+          </a:gradFill>
+          <a:ln>
+            <a:noFill/>
+          </a:ln>
+          <a:effectLst/>
+        </p:spPr>
+        <p:style>
+          <a:lnRef idx="1">
+            <a:schemeClr val="accent1"/>
+          </a:lnRef>
+          <a:fillRef idx="3">
+            <a:schemeClr val="accent1"/>
+          </a:fillRef>
+          <a:effectRef idx="2">
+            <a:schemeClr val="accent1"/>
+          </a:effectRef>
+          <a:fontRef idx="minor">
+            <a:schemeClr val="lt1"/>
+          </a:fontRef>
+        </p:style>
+        <p:txBody>
+          <a:bodyPr rtlCol="0" anchor="ctr"/>
+          <a:lstStyle/>
+          <a:p>
+            <a:pPr algn="ctr"/>
+          </a:p>
+        </p:txBody>
+      </p:sp>
+      <p:sp>
+        <p:nvSpPr>
+          <p:cNvPr id="6" name="TextBox 5"/>
           <p:cNvSpPr txBox="1"/>
           <p:nvPr/>
         </p:nvSpPr>
@@ -14424,7 +14040,7 @@
             <a:r>
               <a:rPr sz="3000" b="1">
                 <a:solidFill>
-                  <a:srgbClr val="D3DDEA"/>
+                  <a:srgbClr val="D8DADD"/>
                 </a:solidFill>
                 <a:latin typeface="맑은 고딕"/>
                 <a:ea typeface="맑은 고딕"/>
@@ -14436,7 +14052,7 @@
       </p:sp>
       <p:sp>
         <p:nvSpPr>
-          <p:cNvPr id="9" name="TextBox 8"/>
+          <p:cNvPr id="7" name="TextBox 6"/>
           <p:cNvSpPr txBox="1"/>
           <p:nvPr/>
         </p:nvSpPr>
@@ -14467,7 +14083,7 @@
             <a:r>
               <a:rPr sz="1250" b="0">
                 <a:solidFill>
-                  <a:srgbClr val="6A7B92"/>
+                  <a:srgbClr val="767A7F"/>
                 </a:solidFill>
                 <a:latin typeface="맑은 고딕"/>
                 <a:ea typeface="맑은 고딕"/>
@@ -14479,7 +14095,7 @@
       </p:sp>
       <p:sp>
         <p:nvSpPr>
-          <p:cNvPr id="10" name="TextBox 9"/>
+          <p:cNvPr id="8" name="TextBox 7"/>
           <p:cNvSpPr txBox="1"/>
           <p:nvPr/>
         </p:nvSpPr>
@@ -14510,7 +14126,7 @@
             <a:r>
               <a:rPr sz="850" b="0">
                 <a:solidFill>
-                  <a:srgbClr val="ABB7C7"/>
+                  <a:srgbClr val="B2B5B9"/>
                 </a:solidFill>
                 <a:latin typeface="맑은 고딕"/>
                 <a:ea typeface="맑은 고딕"/>
@@ -14522,7 +14138,7 @@
       </p:sp>
       <p:sp>
         <p:nvSpPr>
-          <p:cNvPr id="11" name="Rounded Rectangle 10"/>
+          <p:cNvPr id="9" name="Rounded Rectangle 8"/>
           <p:cNvSpPr/>
           <p:nvPr/>
         </p:nvSpPr>
@@ -14541,12 +14157,12 @@
           </a:solidFill>
           <a:ln w="12700">
             <a:solidFill>
-              <a:srgbClr val="E4EAF2"/>
+              <a:srgbClr val="E4E6E9"/>
             </a:solidFill>
           </a:ln>
           <a:effectLst>
             <a:outerShdw blurRad="182880" dist="64008" dir="5400000" rotWithShape="0">
-              <a:srgbClr val="2A3B55">
+              <a:srgbClr val="000000">
                 <a:alpha val="30000"/>
               </a:srgbClr>
             </a:outerShdw>
@@ -14576,7 +14192,7 @@
       </p:sp>
       <p:sp>
         <p:nvSpPr>
-          <p:cNvPr id="12" name="TextBox 11"/>
+          <p:cNvPr id="10" name="TextBox 9"/>
           <p:cNvSpPr txBox="1"/>
           <p:nvPr/>
         </p:nvSpPr>
@@ -14607,7 +14223,7 @@
             <a:r>
               <a:rPr sz="1300" b="1">
                 <a:solidFill>
-                  <a:srgbClr val="17456B"/>
+                  <a:srgbClr val="33393F"/>
                 </a:solidFill>
                 <a:latin typeface="맑은 고딕"/>
                 <a:ea typeface="맑은 고딕"/>
@@ -14627,7 +14243,7 @@
             <a:r>
               <a:rPr sz="1150" b="0">
                 <a:solidFill>
-                  <a:srgbClr val="222E40"/>
+                  <a:srgbClr val="1C1C1E"/>
                 </a:solidFill>
                 <a:latin typeface="맑은 고딕"/>
                 <a:ea typeface="맑은 고딕"/>
@@ -14647,7 +14263,7 @@
             <a:r>
               <a:rPr sz="1150" b="0">
                 <a:solidFill>
-                  <a:srgbClr val="222E40"/>
+                  <a:srgbClr val="1C1C1E"/>
                 </a:solidFill>
                 <a:latin typeface="맑은 고딕"/>
                 <a:ea typeface="맑은 고딕"/>
@@ -14659,7 +14275,7 @@
       </p:sp>
       <p:sp>
         <p:nvSpPr>
-          <p:cNvPr id="13" name="Rounded Rectangle 12"/>
+          <p:cNvPr id="11" name="Rounded Rectangle 10"/>
           <p:cNvSpPr/>
           <p:nvPr/>
         </p:nvSpPr>
@@ -14676,10 +14292,10 @@
           <a:gradFill rotWithShape="1">
             <a:gsLst>
               <a:gs pos="0">
-                <a:srgbClr val="1B3A5F"/>
+                <a:srgbClr val="2A2E33"/>
               </a:gs>
               <a:gs pos="100000">
-                <a:srgbClr val="17456B"/>
+                <a:srgbClr val="4A4F55"/>
               </a:gs>
             </a:gsLst>
             <a:lin scaled="0" ang="14700000"/>
@@ -14689,7 +14305,7 @@
           </a:ln>
           <a:effectLst>
             <a:outerShdw blurRad="182880" dist="64008" dir="5400000" rotWithShape="0">
-              <a:srgbClr val="2A3B55">
+              <a:srgbClr val="000000">
                 <a:alpha val="38000"/>
               </a:srgbClr>
             </a:outerShdw>
@@ -14719,7 +14335,7 @@
       </p:sp>
       <p:sp>
         <p:nvSpPr>
-          <p:cNvPr id="14" name="TextBox 13"/>
+          <p:cNvPr id="12" name="TextBox 11"/>
           <p:cNvSpPr txBox="1"/>
           <p:nvPr/>
         </p:nvSpPr>
@@ -14762,7 +14378,7 @@
       </p:sp>
       <p:sp>
         <p:nvSpPr>
-          <p:cNvPr id="15" name="Rounded Rectangle 14"/>
+          <p:cNvPr id="13" name="Rounded Rectangle 12"/>
           <p:cNvSpPr/>
           <p:nvPr/>
         </p:nvSpPr>
@@ -14781,12 +14397,12 @@
           </a:solidFill>
           <a:ln w="12700">
             <a:solidFill>
-              <a:srgbClr val="E4EAF2"/>
+              <a:srgbClr val="E4E6E9"/>
             </a:solidFill>
           </a:ln>
           <a:effectLst>
             <a:outerShdw blurRad="182880" dist="64008" dir="5400000" rotWithShape="0">
-              <a:srgbClr val="2A3B55">
+              <a:srgbClr val="000000">
                 <a:alpha val="30000"/>
               </a:srgbClr>
             </a:outerShdw>
@@ -14816,7 +14432,7 @@
       </p:sp>
       <p:sp>
         <p:nvSpPr>
-          <p:cNvPr id="16" name="TextBox 15"/>
+          <p:cNvPr id="14" name="TextBox 13"/>
           <p:cNvSpPr txBox="1"/>
           <p:nvPr/>
         </p:nvSpPr>
@@ -14847,7 +14463,7 @@
             <a:r>
               <a:rPr sz="1150" b="0">
                 <a:solidFill>
-                  <a:srgbClr val="222E40"/>
+                  <a:srgbClr val="1C1C1E"/>
                 </a:solidFill>
                 <a:latin typeface="맑은 고딕"/>
                 <a:ea typeface="맑은 고딕"/>
@@ -14859,7 +14475,7 @@
       </p:sp>
       <p:sp>
         <p:nvSpPr>
-          <p:cNvPr id="17" name="Rounded Rectangle 16"/>
+          <p:cNvPr id="15" name="Rounded Rectangle 14"/>
           <p:cNvSpPr/>
           <p:nvPr/>
         </p:nvSpPr>
@@ -14876,10 +14492,10 @@
           <a:gradFill rotWithShape="1">
             <a:gsLst>
               <a:gs pos="0">
-                <a:srgbClr val="1B3A5F"/>
+                <a:srgbClr val="2A2E33"/>
               </a:gs>
               <a:gs pos="100000">
-                <a:srgbClr val="17456B"/>
+                <a:srgbClr val="4A4F55"/>
               </a:gs>
             </a:gsLst>
             <a:lin scaled="0" ang="14700000"/>
@@ -14889,7 +14505,7 @@
           </a:ln>
           <a:effectLst>
             <a:outerShdw blurRad="182880" dist="64008" dir="5400000" rotWithShape="0">
-              <a:srgbClr val="2A3B55">
+              <a:srgbClr val="000000">
                 <a:alpha val="38000"/>
               </a:srgbClr>
             </a:outerShdw>
@@ -14919,7 +14535,7 @@
       </p:sp>
       <p:sp>
         <p:nvSpPr>
-          <p:cNvPr id="18" name="TextBox 17"/>
+          <p:cNvPr id="16" name="TextBox 15"/>
           <p:cNvSpPr txBox="1"/>
           <p:nvPr/>
         </p:nvSpPr>
@@ -14962,7 +14578,7 @@
       </p:sp>
       <p:sp>
         <p:nvSpPr>
-          <p:cNvPr id="19" name="Rounded Rectangle 18"/>
+          <p:cNvPr id="17" name="Rounded Rectangle 16"/>
           <p:cNvSpPr/>
           <p:nvPr/>
         </p:nvSpPr>
@@ -14981,12 +14597,12 @@
           </a:solidFill>
           <a:ln w="12700">
             <a:solidFill>
-              <a:srgbClr val="E4EAF2"/>
+              <a:srgbClr val="E4E6E9"/>
             </a:solidFill>
           </a:ln>
           <a:effectLst>
             <a:outerShdw blurRad="182880" dist="64008" dir="5400000" rotWithShape="0">
-              <a:srgbClr val="2A3B55">
+              <a:srgbClr val="000000">
                 <a:alpha val="30000"/>
               </a:srgbClr>
             </a:outerShdw>
@@ -15016,7 +14632,7 @@
       </p:sp>
       <p:sp>
         <p:nvSpPr>
-          <p:cNvPr id="20" name="TextBox 19"/>
+          <p:cNvPr id="18" name="TextBox 17"/>
           <p:cNvSpPr txBox="1"/>
           <p:nvPr/>
         </p:nvSpPr>
@@ -15047,7 +14663,7 @@
             <a:r>
               <a:rPr sz="1150" b="0">
                 <a:solidFill>
-                  <a:srgbClr val="222E40"/>
+                  <a:srgbClr val="1C1C1E"/>
                 </a:solidFill>
                 <a:latin typeface="맑은 고딕"/>
                 <a:ea typeface="맑은 고딕"/>
@@ -15059,7 +14675,7 @@
       </p:sp>
       <p:sp>
         <p:nvSpPr>
-          <p:cNvPr id="21" name="Rounded Rectangle 20"/>
+          <p:cNvPr id="19" name="Rounded Rectangle 18"/>
           <p:cNvSpPr/>
           <p:nvPr/>
         </p:nvSpPr>
@@ -15076,10 +14692,10 @@
           <a:gradFill rotWithShape="1">
             <a:gsLst>
               <a:gs pos="0">
-                <a:srgbClr val="1B3A5F"/>
+                <a:srgbClr val="2A2E33"/>
               </a:gs>
               <a:gs pos="100000">
-                <a:srgbClr val="17456B"/>
+                <a:srgbClr val="4A4F55"/>
               </a:gs>
             </a:gsLst>
             <a:lin scaled="0" ang="14700000"/>
@@ -15089,7 +14705,7 @@
           </a:ln>
           <a:effectLst>
             <a:outerShdw blurRad="182880" dist="64008" dir="5400000" rotWithShape="0">
-              <a:srgbClr val="2A3B55">
+              <a:srgbClr val="000000">
                 <a:alpha val="38000"/>
               </a:srgbClr>
             </a:outerShdw>
@@ -15119,7 +14735,7 @@
       </p:sp>
       <p:sp>
         <p:nvSpPr>
-          <p:cNvPr id="22" name="TextBox 21"/>
+          <p:cNvPr id="20" name="TextBox 19"/>
           <p:cNvSpPr txBox="1"/>
           <p:nvPr/>
         </p:nvSpPr>
@@ -15162,7 +14778,7 @@
       </p:sp>
       <p:sp>
         <p:nvSpPr>
-          <p:cNvPr id="23" name="Rounded Rectangle 22"/>
+          <p:cNvPr id="21" name="Rounded Rectangle 20"/>
           <p:cNvSpPr/>
           <p:nvPr/>
         </p:nvSpPr>
@@ -15181,12 +14797,12 @@
           </a:solidFill>
           <a:ln w="12700">
             <a:solidFill>
-              <a:srgbClr val="E4EAF2"/>
+              <a:srgbClr val="E4E6E9"/>
             </a:solidFill>
           </a:ln>
           <a:effectLst>
             <a:outerShdw blurRad="182880" dist="64008" dir="5400000" rotWithShape="0">
-              <a:srgbClr val="2A3B55">
+              <a:srgbClr val="000000">
                 <a:alpha val="30000"/>
               </a:srgbClr>
             </a:outerShdw>
@@ -15216,7 +14832,7 @@
       </p:sp>
       <p:sp>
         <p:nvSpPr>
-          <p:cNvPr id="24" name="TextBox 23"/>
+          <p:cNvPr id="22" name="TextBox 21"/>
           <p:cNvSpPr txBox="1"/>
           <p:nvPr/>
         </p:nvSpPr>
@@ -15247,7 +14863,7 @@
             <a:r>
               <a:rPr sz="1150" b="0">
                 <a:solidFill>
-                  <a:srgbClr val="222E40"/>
+                  <a:srgbClr val="1C1C1E"/>
                 </a:solidFill>
                 <a:latin typeface="맑은 고딕"/>
                 <a:ea typeface="맑은 고딕"/>
@@ -15259,7 +14875,7 @@
       </p:sp>
       <p:sp>
         <p:nvSpPr>
-          <p:cNvPr id="25" name="TextBox 24"/>
+          <p:cNvPr id="23" name="TextBox 22"/>
           <p:cNvSpPr txBox="1"/>
           <p:nvPr/>
         </p:nvSpPr>
@@ -15290,7 +14906,7 @@
             <a:r>
               <a:rPr sz="1150" b="0">
                 <a:solidFill>
-                  <a:srgbClr val="6A7B92"/>
+                  <a:srgbClr val="767A7F"/>
                 </a:solidFill>
                 <a:latin typeface="맑은 고딕"/>
                 <a:ea typeface="맑은 고딕"/>
@@ -15310,7 +14926,7 @@
             <a:r>
               <a:rPr sz="1150" b="0">
                 <a:solidFill>
-                  <a:srgbClr val="6A7B92"/>
+                  <a:srgbClr val="767A7F"/>
                 </a:solidFill>
                 <a:latin typeface="맑은 고딕"/>
                 <a:ea typeface="맑은 고딕"/>

--- a/04_제출물/데이터분석_계획서.pptx
+++ b/04_제출물/데이터분석_계획서.pptx
@@ -17,6 +17,7 @@
     <p:sldId id="265" r:id="rId16"/>
     <p:sldId id="266" r:id="rId17"/>
     <p:sldId id="267" r:id="rId18"/>
+    <p:sldId id="268" r:id="rId19"/>
   </p:sldIdLst>
   <p:sldSz cx="12191695" cy="6858000" type="screen4x3"/>
   <p:notesSz cx="6858000" cy="9144000"/>
@@ -3581,7 +3582,7 @@
                 <a:latin typeface="맑은 고딕"/>
                 <a:ea typeface="맑은 고딕"/>
               </a:rPr>
-              <a:t>분석 설계 ③ 처방 — 우선순위·유형 배정 모형 (RQ4)</a:t>
+              <a:t>분석 설계 ② 배분 진단 (RQ3)</a:t>
             </a:r>
           </a:p>
         </p:txBody>
@@ -3719,7 +3720,7 @@
                 <a:latin typeface="맑은 고딕"/>
                 <a:ea typeface="맑은 고딕"/>
               </a:rPr>
-              <a:t>새 기준을 만들지 않는다: 정부 문서의 임계값만 조합한다</a:t>
+              <a:t>작은 표본의 관행을 지키는 검정 사다리</a:t>
             </a:r>
           </a:p>
         </p:txBody>
@@ -3776,11 +3777,11 @@
         <p:spPr>
           <a:xfrm>
             <a:off x="502920" y="1737360"/>
-            <a:ext cx="5532120" cy="2057400"/>
+            <a:ext cx="11292840" cy="1188720"/>
           </a:xfrm>
           <a:prstGeom prst="roundRect">
             <a:avLst>
-              <a:gd name="adj" fmla="val 4000"/>
+              <a:gd name="adj" fmla="val 6923"/>
             </a:avLst>
           </a:prstGeom>
           <a:solidFill>
@@ -3830,7 +3831,7 @@
         <p:spPr>
           <a:xfrm>
             <a:off x="685800" y="1865376"/>
-            <a:ext cx="5166359" cy="1801368"/>
+            <a:ext cx="10927080" cy="932688"/>
           </a:xfrm>
           <a:prstGeom prst="rect">
             <a:avLst/>
@@ -3859,7 +3860,7 @@
                 <a:latin typeface="맑은 고딕"/>
                 <a:ea typeface="맑은 고딕"/>
               </a:rPr>
-              <a:t>우선순위 — 두 관점을 병렬 제시</a:t>
+              <a:t>설계 원칙 — C등급 제외</a:t>
             </a:r>
           </a:p>
           <a:p>
@@ -3879,7 +3880,7 @@
                 <a:latin typeface="맑은 고딕"/>
                 <a:ea typeface="맑은 고딕"/>
               </a:rPr>
-              <a:t>• 심도 축: 취약이 가장 깊은 곳 먼저 — 객관 가중(엔트로피·CRITIC) + TOPSIS 종합</a:t>
+              <a:t>• C의 정의에 "지원 기수령"이 포함되어, 지원받으면 C가 되는 순환 구조가 있다 — 종속변수가 집단 정의에 새어드는 셈</a:t>
             </a:r>
           </a:p>
           <a:p>
@@ -3899,27 +3900,7 @@
                 <a:latin typeface="맑은 고딕"/>
                 <a:ea typeface="맑은 고딕"/>
               </a:rPr>
-              <a:t>• 부담 축: 영향 인원이 큰 곳 먼저 — 미충족 분만 규모</a:t>
-            </a:r>
-          </a:p>
-          <a:p>
-            <a:pPr marL="160020" indent="-160020">
-              <a:lnSpc>
-                <a:spcPct val="114000"/>
-              </a:lnSpc>
-              <a:spcAft>
-                <a:spcPts val="200"/>
-              </a:spcAft>
-            </a:pPr>
-            <a:r>
-              <a:rPr sz="1150" b="0">
-                <a:solidFill>
-                  <a:srgbClr val="1C1C1E"/>
-                </a:solidFill>
-                <a:latin typeface="맑은 고딕"/>
-                <a:ea typeface="맑은 고딕"/>
-              </a:rPr>
-              <a:t>• 두 축을 평균해 합성하지 않는다 — 가치 선택을 가리는 대신 병렬로 드러내는 것이 목적</a:t>
+              <a:t>• 이 누출을 막기 위해 실질 취약지 A·B만으로 배분을 분석한다 (제외 논리 자체를 보고서에 기록)</a:t>
             </a:r>
           </a:p>
         </p:txBody>
@@ -3932,12 +3913,115 @@
         </p:nvSpPr>
         <p:spPr>
           <a:xfrm>
-            <a:off x="6263640" y="1737360"/>
-            <a:ext cx="5532120" cy="2057400"/>
+            <a:off x="502920" y="3154680"/>
+            <a:ext cx="2286000" cy="685800"/>
           </a:xfrm>
           <a:prstGeom prst="roundRect">
             <a:avLst>
-              <a:gd name="adj" fmla="val 4000"/>
+              <a:gd name="adj" fmla="val 12000"/>
+            </a:avLst>
+          </a:prstGeom>
+          <a:gradFill rotWithShape="1">
+            <a:gsLst>
+              <a:gs pos="0">
+                <a:srgbClr val="2A2E33"/>
+              </a:gs>
+              <a:gs pos="100000">
+                <a:srgbClr val="4A4F55"/>
+              </a:gs>
+            </a:gsLst>
+            <a:lin scaled="0" ang="14700000"/>
+          </a:gradFill>
+          <a:ln>
+            <a:noFill/>
+          </a:ln>
+          <a:effectLst>
+            <a:outerShdw blurRad="182880" dist="64008" dir="5400000" rotWithShape="0">
+              <a:srgbClr val="000000">
+                <a:alpha val="38000"/>
+              </a:srgbClr>
+            </a:outerShdw>
+          </a:effectLst>
+        </p:spPr>
+        <p:style>
+          <a:lnRef idx="1">
+            <a:schemeClr val="accent1"/>
+          </a:lnRef>
+          <a:fillRef idx="3">
+            <a:schemeClr val="accent1"/>
+          </a:fillRef>
+          <a:effectRef idx="2">
+            <a:schemeClr val="accent1"/>
+          </a:effectRef>
+          <a:fontRef idx="minor">
+            <a:schemeClr val="lt1"/>
+          </a:fontRef>
+        </p:style>
+        <p:txBody>
+          <a:bodyPr rtlCol="0" anchor="ctr"/>
+          <a:lstStyle/>
+          <a:p>
+            <a:pPr algn="ctr"/>
+          </a:p>
+        </p:txBody>
+      </p:sp>
+      <p:sp>
+        <p:nvSpPr>
+          <p:cNvPr id="12" name="TextBox 11"/>
+          <p:cNvSpPr txBox="1"/>
+          <p:nvPr/>
+        </p:nvSpPr>
+        <p:spPr>
+          <a:xfrm>
+            <a:off x="640080" y="3227832"/>
+            <a:ext cx="2103120" cy="548640"/>
+          </a:xfrm>
+          <a:prstGeom prst="rect">
+            <a:avLst/>
+          </a:prstGeom>
+          <a:noFill/>
+        </p:spPr>
+        <p:txBody>
+          <a:bodyPr wrap="square" anchor="ctr">
+            <a:spAutoFit/>
+          </a:bodyPr>
+          <a:lstStyle/>
+          <a:p>
+            <a:pPr>
+              <a:lnSpc>
+                <a:spcPct val="114000"/>
+              </a:lnSpc>
+              <a:spcAft>
+                <a:spcPts val="0"/>
+              </a:spcAft>
+            </a:pPr>
+            <a:r>
+              <a:rPr sz="1300" b="1">
+                <a:solidFill>
+                  <a:srgbClr val="FFFFFF"/>
+                </a:solidFill>
+                <a:latin typeface="맑은 고딕"/>
+                <a:ea typeface="맑은 고딕"/>
+              </a:rPr>
+              <a:t>①  분할표 검정</a:t>
+            </a:r>
+          </a:p>
+        </p:txBody>
+      </p:sp>
+      <p:sp>
+        <p:nvSpPr>
+          <p:cNvPr id="13" name="Rounded Rectangle 12"/>
+          <p:cNvSpPr/>
+          <p:nvPr/>
+        </p:nvSpPr>
+        <p:spPr>
+          <a:xfrm>
+            <a:off x="2926080" y="3154680"/>
+            <a:ext cx="8869680" cy="685800"/>
+          </a:xfrm>
+          <a:prstGeom prst="roundRect">
+            <a:avLst>
+              <a:gd name="adj" fmla="val 12000"/>
             </a:avLst>
           </a:prstGeom>
           <a:solidFill>
@@ -3980,14 +4064,14 @@
       </p:sp>
       <p:sp>
         <p:nvSpPr>
-          <p:cNvPr id="12" name="TextBox 11"/>
+          <p:cNvPr id="14" name="TextBox 13"/>
           <p:cNvSpPr txBox="1"/>
           <p:nvPr/>
         </p:nvSpPr>
         <p:spPr>
           <a:xfrm>
-            <a:off x="6446520" y="1865376"/>
-            <a:ext cx="5166359" cy="1801368"/>
+            <a:off x="3108960" y="3227832"/>
+            <a:ext cx="8549640" cy="548640"/>
           </a:xfrm>
           <a:prstGeom prst="rect">
             <a:avLst/>
@@ -3995,7 +4079,7 @@
           <a:noFill/>
         </p:spPr>
         <p:txBody>
-          <a:bodyPr wrap="square" anchor="t">
+          <a:bodyPr wrap="square" anchor="ctr">
             <a:spAutoFit/>
           </a:bodyPr>
           <a:lstStyle/>
@@ -4005,27 +4089,7 @@
                 <a:spcPct val="114000"/>
               </a:lnSpc>
               <a:spcAft>
-                <a:spcPts val="350"/>
-              </a:spcAft>
-            </a:pPr>
-            <a:r>
-              <a:rPr sz="1300" b="1">
-                <a:solidFill>
-                  <a:srgbClr val="33393F"/>
-                </a:solidFill>
-                <a:latin typeface="맑은 고딕"/>
-                <a:ea typeface="맑은 고딕"/>
-              </a:rPr>
-              <a:t>유형 배정 — 규칙 기반 (머신러닝 아님)</a:t>
-            </a:r>
-          </a:p>
-          <a:p>
-            <a:pPr marL="160020" indent="-160020">
-              <a:lnSpc>
-                <a:spcPct val="114000"/>
-              </a:lnSpc>
-              <a:spcAft>
-                <a:spcPts val="200"/>
+                <a:spcPts val="0"/>
               </a:spcAft>
             </a:pPr>
             <a:r>
@@ -4036,45 +4100,128 @@
                 <a:latin typeface="맑은 고딕"/>
                 <a:ea typeface="맑은 고딕"/>
               </a:rPr>
-              <a:t>• 관내 수행·인구·수요·접근성의 정부 임계값만으로 설치/운영지원/외래/순회 4유형을 규칙 배정</a:t>
-            </a:r>
-          </a:p>
-          <a:p>
-            <a:pPr marL="160020" indent="-160020">
-              <a:lnSpc>
-                <a:spcPct val="114000"/>
-              </a:lnSpc>
-              <a:spcAft>
-                <a:spcPts val="200"/>
-              </a:spcAft>
-            </a:pPr>
-            <a:r>
-              <a:rPr sz="1150" b="0">
-                <a:solidFill>
-                  <a:srgbClr val="1C1C1E"/>
-                </a:solidFill>
-                <a:latin typeface="맑은 고딕"/>
-                <a:ea typeface="맑은 고딕"/>
-              </a:rPr>
-              <a:t>• 학습이 없어 과적합·라벨 누수 논쟁에서 자유롭고, 모든 판정이 문서의 숫자로 소급 가능</a:t>
-            </a:r>
-          </a:p>
-        </p:txBody>
-      </p:sp>
-      <p:sp>
-        <p:nvSpPr>
-          <p:cNvPr id="13" name="Rounded Rectangle 12"/>
+              <a:t>A·B 등급과 지원 여부의 연관을 Fisher 정확검정으로 확인 (작은 표에 적합)</a:t>
+            </a:r>
+          </a:p>
+        </p:txBody>
+      </p:sp>
+      <p:sp>
+        <p:nvSpPr>
+          <p:cNvPr id="15" name="Rounded Rectangle 14"/>
           <p:cNvSpPr/>
           <p:nvPr/>
         </p:nvSpPr>
         <p:spPr>
           <a:xfrm>
             <a:off x="502920" y="4023360"/>
-            <a:ext cx="11292840" cy="1965960"/>
+            <a:ext cx="2286000" cy="685800"/>
           </a:xfrm>
           <a:prstGeom prst="roundRect">
             <a:avLst>
-              <a:gd name="adj" fmla="val 4186"/>
+              <a:gd name="adj" fmla="val 12000"/>
+            </a:avLst>
+          </a:prstGeom>
+          <a:gradFill rotWithShape="1">
+            <a:gsLst>
+              <a:gs pos="0">
+                <a:srgbClr val="2A2E33"/>
+              </a:gs>
+              <a:gs pos="100000">
+                <a:srgbClr val="4A4F55"/>
+              </a:gs>
+            </a:gsLst>
+            <a:lin scaled="0" ang="14700000"/>
+          </a:gradFill>
+          <a:ln>
+            <a:noFill/>
+          </a:ln>
+          <a:effectLst>
+            <a:outerShdw blurRad="182880" dist="64008" dir="5400000" rotWithShape="0">
+              <a:srgbClr val="000000">
+                <a:alpha val="38000"/>
+              </a:srgbClr>
+            </a:outerShdw>
+          </a:effectLst>
+        </p:spPr>
+        <p:style>
+          <a:lnRef idx="1">
+            <a:schemeClr val="accent1"/>
+          </a:lnRef>
+          <a:fillRef idx="3">
+            <a:schemeClr val="accent1"/>
+          </a:fillRef>
+          <a:effectRef idx="2">
+            <a:schemeClr val="accent1"/>
+          </a:effectRef>
+          <a:fontRef idx="minor">
+            <a:schemeClr val="lt1"/>
+          </a:fontRef>
+        </p:style>
+        <p:txBody>
+          <a:bodyPr rtlCol="0" anchor="ctr"/>
+          <a:lstStyle/>
+          <a:p>
+            <a:pPr algn="ctr"/>
+          </a:p>
+        </p:txBody>
+      </p:sp>
+      <p:sp>
+        <p:nvSpPr>
+          <p:cNvPr id="16" name="TextBox 15"/>
+          <p:cNvSpPr txBox="1"/>
+          <p:nvPr/>
+        </p:nvSpPr>
+        <p:spPr>
+          <a:xfrm>
+            <a:off x="640080" y="4096512"/>
+            <a:ext cx="2103120" cy="548640"/>
+          </a:xfrm>
+          <a:prstGeom prst="rect">
+            <a:avLst/>
+          </a:prstGeom>
+          <a:noFill/>
+        </p:spPr>
+        <p:txBody>
+          <a:bodyPr wrap="square" anchor="ctr">
+            <a:spAutoFit/>
+          </a:bodyPr>
+          <a:lstStyle/>
+          <a:p>
+            <a:pPr>
+              <a:lnSpc>
+                <a:spcPct val="114000"/>
+              </a:lnSpc>
+              <a:spcAft>
+                <a:spcPts val="0"/>
+              </a:spcAft>
+            </a:pPr>
+            <a:r>
+              <a:rPr sz="1300" b="1">
+                <a:solidFill>
+                  <a:srgbClr val="FFFFFF"/>
+                </a:solidFill>
+                <a:latin typeface="맑은 고딕"/>
+                <a:ea typeface="맑은 고딕"/>
+              </a:rPr>
+              <a:t>②  변수별 비교</a:t>
+            </a:r>
+          </a:p>
+        </p:txBody>
+      </p:sp>
+      <p:sp>
+        <p:nvSpPr>
+          <p:cNvPr id="17" name="Rounded Rectangle 16"/>
+          <p:cNvSpPr/>
+          <p:nvPr/>
+        </p:nvSpPr>
+        <p:spPr>
+          <a:xfrm>
+            <a:off x="2926080" y="4023360"/>
+            <a:ext cx="8869680" cy="685800"/>
+          </a:xfrm>
+          <a:prstGeom prst="roundRect">
+            <a:avLst>
+              <a:gd name="adj" fmla="val 12000"/>
             </a:avLst>
           </a:prstGeom>
           <a:solidFill>
@@ -4117,14 +4264,257 @@
       </p:sp>
       <p:sp>
         <p:nvSpPr>
-          <p:cNvPr id="14" name="TextBox 13"/>
+          <p:cNvPr id="18" name="TextBox 17"/>
           <p:cNvSpPr txBox="1"/>
           <p:nvPr/>
         </p:nvSpPr>
         <p:spPr>
           <a:xfrm>
-            <a:off x="685800" y="4151376"/>
-            <a:ext cx="10927080" cy="1709928"/>
+            <a:off x="3108960" y="4096512"/>
+            <a:ext cx="8549640" cy="548640"/>
+          </a:xfrm>
+          <a:prstGeom prst="rect">
+            <a:avLst/>
+          </a:prstGeom>
+          <a:noFill/>
+        </p:spPr>
+        <p:txBody>
+          <a:bodyPr wrap="square" anchor="ctr">
+            <a:spAutoFit/>
+          </a:bodyPr>
+          <a:lstStyle/>
+          <a:p>
+            <a:pPr>
+              <a:lnSpc>
+                <a:spcPct val="114000"/>
+              </a:lnSpc>
+              <a:spcAft>
+                <a:spcPts val="0"/>
+              </a:spcAft>
+            </a:pPr>
+            <a:r>
+              <a:rPr sz="1150" b="0">
+                <a:solidFill>
+                  <a:srgbClr val="1C1C1E"/>
+                </a:solidFill>
+                <a:latin typeface="맑은 고딕"/>
+                <a:ea typeface="맑은 고딕"/>
+              </a:rPr>
+              <a:t>지원/미지원 집단의 지표 차이를 Mann-Whitney U로 검정하고, 다중비교는 BH 보정으로 통제</a:t>
+            </a:r>
+          </a:p>
+        </p:txBody>
+      </p:sp>
+      <p:sp>
+        <p:nvSpPr>
+          <p:cNvPr id="19" name="Rounded Rectangle 18"/>
+          <p:cNvSpPr/>
+          <p:nvPr/>
+        </p:nvSpPr>
+        <p:spPr>
+          <a:xfrm>
+            <a:off x="502920" y="4892040"/>
+            <a:ext cx="2286000" cy="685800"/>
+          </a:xfrm>
+          <a:prstGeom prst="roundRect">
+            <a:avLst>
+              <a:gd name="adj" fmla="val 12000"/>
+            </a:avLst>
+          </a:prstGeom>
+          <a:gradFill rotWithShape="1">
+            <a:gsLst>
+              <a:gs pos="0">
+                <a:srgbClr val="2A2E33"/>
+              </a:gs>
+              <a:gs pos="100000">
+                <a:srgbClr val="4A4F55"/>
+              </a:gs>
+            </a:gsLst>
+            <a:lin scaled="0" ang="14700000"/>
+          </a:gradFill>
+          <a:ln>
+            <a:noFill/>
+          </a:ln>
+          <a:effectLst>
+            <a:outerShdw blurRad="182880" dist="64008" dir="5400000" rotWithShape="0">
+              <a:srgbClr val="000000">
+                <a:alpha val="38000"/>
+              </a:srgbClr>
+            </a:outerShdw>
+          </a:effectLst>
+        </p:spPr>
+        <p:style>
+          <a:lnRef idx="1">
+            <a:schemeClr val="accent1"/>
+          </a:lnRef>
+          <a:fillRef idx="3">
+            <a:schemeClr val="accent1"/>
+          </a:fillRef>
+          <a:effectRef idx="2">
+            <a:schemeClr val="accent1"/>
+          </a:effectRef>
+          <a:fontRef idx="minor">
+            <a:schemeClr val="lt1"/>
+          </a:fontRef>
+        </p:style>
+        <p:txBody>
+          <a:bodyPr rtlCol="0" anchor="ctr"/>
+          <a:lstStyle/>
+          <a:p>
+            <a:pPr algn="ctr"/>
+          </a:p>
+        </p:txBody>
+      </p:sp>
+      <p:sp>
+        <p:nvSpPr>
+          <p:cNvPr id="20" name="TextBox 19"/>
+          <p:cNvSpPr txBox="1"/>
+          <p:nvPr/>
+        </p:nvSpPr>
+        <p:spPr>
+          <a:xfrm>
+            <a:off x="640080" y="4965192"/>
+            <a:ext cx="2103120" cy="548640"/>
+          </a:xfrm>
+          <a:prstGeom prst="rect">
+            <a:avLst/>
+          </a:prstGeom>
+          <a:noFill/>
+        </p:spPr>
+        <p:txBody>
+          <a:bodyPr wrap="square" anchor="ctr">
+            <a:spAutoFit/>
+          </a:bodyPr>
+          <a:lstStyle/>
+          <a:p>
+            <a:pPr>
+              <a:lnSpc>
+                <a:spcPct val="114000"/>
+              </a:lnSpc>
+              <a:spcAft>
+                <a:spcPts val="0"/>
+              </a:spcAft>
+            </a:pPr>
+            <a:r>
+              <a:rPr sz="1300" b="1">
+                <a:solidFill>
+                  <a:srgbClr val="FFFFFF"/>
+                </a:solidFill>
+                <a:latin typeface="맑은 고딕"/>
+                <a:ea typeface="맑은 고딕"/>
+              </a:rPr>
+              <a:t>③  다변량 모형</a:t>
+            </a:r>
+          </a:p>
+        </p:txBody>
+      </p:sp>
+      <p:sp>
+        <p:nvSpPr>
+          <p:cNvPr id="21" name="Rounded Rectangle 20"/>
+          <p:cNvSpPr/>
+          <p:nvPr/>
+        </p:nvSpPr>
+        <p:spPr>
+          <a:xfrm>
+            <a:off x="2926080" y="4892040"/>
+            <a:ext cx="8869680" cy="685800"/>
+          </a:xfrm>
+          <a:prstGeom prst="roundRect">
+            <a:avLst>
+              <a:gd name="adj" fmla="val 12000"/>
+            </a:avLst>
+          </a:prstGeom>
+          <a:solidFill>
+            <a:srgbClr val="FFFFFF"/>
+          </a:solidFill>
+          <a:ln w="12700">
+            <a:solidFill>
+              <a:srgbClr val="E4E6E9"/>
+            </a:solidFill>
+          </a:ln>
+          <a:effectLst>
+            <a:outerShdw blurRad="182880" dist="64008" dir="5400000" rotWithShape="0">
+              <a:srgbClr val="000000">
+                <a:alpha val="30000"/>
+              </a:srgbClr>
+            </a:outerShdw>
+          </a:effectLst>
+        </p:spPr>
+        <p:style>
+          <a:lnRef idx="1">
+            <a:schemeClr val="accent1"/>
+          </a:lnRef>
+          <a:fillRef idx="3">
+            <a:schemeClr val="accent1"/>
+          </a:fillRef>
+          <a:effectRef idx="2">
+            <a:schemeClr val="accent1"/>
+          </a:effectRef>
+          <a:fontRef idx="minor">
+            <a:schemeClr val="lt1"/>
+          </a:fontRef>
+        </p:style>
+        <p:txBody>
+          <a:bodyPr rtlCol="0" anchor="ctr"/>
+          <a:lstStyle/>
+          <a:p>
+            <a:pPr algn="ctr"/>
+          </a:p>
+        </p:txBody>
+      </p:sp>
+      <p:sp>
+        <p:nvSpPr>
+          <p:cNvPr id="22" name="TextBox 21"/>
+          <p:cNvSpPr txBox="1"/>
+          <p:nvPr/>
+        </p:nvSpPr>
+        <p:spPr>
+          <a:xfrm>
+            <a:off x="3108960" y="4965192"/>
+            <a:ext cx="8549640" cy="548640"/>
+          </a:xfrm>
+          <a:prstGeom prst="rect">
+            <a:avLst/>
+          </a:prstGeom>
+          <a:noFill/>
+        </p:spPr>
+        <p:txBody>
+          <a:bodyPr wrap="square" anchor="ctr">
+            <a:spAutoFit/>
+          </a:bodyPr>
+          <a:lstStyle/>
+          <a:p>
+            <a:pPr>
+              <a:lnSpc>
+                <a:spcPct val="114000"/>
+              </a:lnSpc>
+              <a:spcAft>
+                <a:spcPts val="0"/>
+              </a:spcAft>
+            </a:pPr>
+            <a:r>
+              <a:rPr sz="1150" b="0">
+                <a:solidFill>
+                  <a:srgbClr val="1C1C1E"/>
+                </a:solidFill>
+                <a:latin typeface="맑은 고딕"/>
+                <a:ea typeface="맑은 고딕"/>
+              </a:rPr>
+              <a:t>사건 수 대비 변수 수 관행(EPV)을 지켜 소수 변수 로지스틱 + 우도비검정 + 부트스트랩 부호 일관성으로 판단</a:t>
+            </a:r>
+          </a:p>
+        </p:txBody>
+      </p:sp>
+      <p:sp>
+        <p:nvSpPr>
+          <p:cNvPr id="23" name="TextBox 22"/>
+          <p:cNvSpPr txBox="1"/>
+          <p:nvPr/>
+        </p:nvSpPr>
+        <p:spPr>
+          <a:xfrm>
+            <a:off x="502920" y="5897880"/>
+            <a:ext cx="11247120" cy="640080"/>
           </a:xfrm>
           <a:prstGeom prst="rect">
             <a:avLst/>
@@ -4142,98 +4532,38 @@
                 <a:spcPct val="114000"/>
               </a:lnSpc>
               <a:spcAft>
-                <a:spcPts val="350"/>
-              </a:spcAft>
-            </a:pPr>
-            <a:r>
-              <a:rPr sz="1300" b="1">
-                <a:solidFill>
-                  <a:srgbClr val="33393F"/>
-                </a:solidFill>
-                <a:latin typeface="맑은 고딕"/>
-                <a:ea typeface="맑은 고딕"/>
-              </a:rPr>
-              <a:t>검증 계획 — 모형을 스스로 공격한다</a:t>
-            </a:r>
-          </a:p>
-          <a:p>
-            <a:pPr marL="160020" indent="-160020">
-              <a:lnSpc>
-                <a:spcPct val="114000"/>
-              </a:lnSpc>
-              <a:spcAft>
                 <a:spcPts val="200"/>
               </a:spcAft>
             </a:pPr>
             <a:r>
               <a:rPr sz="1150" b="0">
                 <a:solidFill>
-                  <a:srgbClr val="1C1C1E"/>
-                </a:solidFill>
-                <a:latin typeface="맑은 고딕"/>
-                <a:ea typeface="맑은 고딕"/>
-              </a:rPr>
-              <a:t>• 외부 검증: 공고의 순회진료 대상 목록과 본 규칙의 판정을 교차 대조한다 (일치·불일치 모두 보고)</a:t>
-            </a:r>
-          </a:p>
-          <a:p>
-            <a:pPr marL="160020" indent="-160020">
-              <a:lnSpc>
-                <a:spcPct val="114000"/>
-              </a:lnSpc>
-              <a:spcAft>
-                <a:spcPts val="200"/>
+                  <a:srgbClr val="767A7F"/>
+                </a:solidFill>
+                <a:latin typeface="맑은 고딕"/>
+                <a:ea typeface="맑은 고딕"/>
+              </a:rPr>
+              <a:t>보고 원칙: "유의하지 않음"을 "효과 없음"으로 쓰지 않는다 — 표본이 작아 식별 불가일 수 있음을 명시하고,</a:t>
+            </a:r>
+          </a:p>
+          <a:p>
+            <a:pPr>
+              <a:lnSpc>
+                <a:spcPct val="114000"/>
+              </a:lnSpc>
+              <a:spcAft>
+                <a:spcPts val="0"/>
               </a:spcAft>
             </a:pPr>
             <a:r>
               <a:rPr sz="1150" b="0">
                 <a:solidFill>
-                  <a:srgbClr val="1C1C1E"/>
-                </a:solidFill>
-                <a:latin typeface="맑은 고딕"/>
-                <a:ea typeface="맑은 고딕"/>
-              </a:rPr>
-              <a:t>• 민감도 분석: 차용한 임계값을 변화시켜 결과가 얼마나 흔들리는지 공개한다</a:t>
-            </a:r>
-          </a:p>
-          <a:p>
-            <a:pPr marL="160020" indent="-160020">
-              <a:lnSpc>
-                <a:spcPct val="114000"/>
-              </a:lnSpc>
-              <a:spcAft>
-                <a:spcPts val="200"/>
-              </a:spcAft>
-            </a:pPr>
-            <a:r>
-              <a:rPr sz="1150" b="0">
-                <a:solidFill>
-                  <a:srgbClr val="1C1C1E"/>
-                </a:solidFill>
-                <a:latin typeface="맑은 고딕"/>
-                <a:ea typeface="맑은 고딕"/>
-              </a:rPr>
-              <a:t>• 강건성 분석: 가중법을 바꿔(엔트로피/CRITIC/동일 가중) 순위가 유지되는지 확인한다</a:t>
-            </a:r>
-          </a:p>
-          <a:p>
-            <a:pPr marL="160020" indent="-160020">
-              <a:lnSpc>
-                <a:spcPct val="114000"/>
-              </a:lnSpc>
-              <a:spcAft>
-                <a:spcPts val="200"/>
-              </a:spcAft>
-            </a:pPr>
-            <a:r>
-              <a:rPr sz="1150" b="0">
-                <a:solidFill>
-                  <a:srgbClr val="1C1C1E"/>
-                </a:solidFill>
-                <a:latin typeface="맑은 고딕"/>
-                <a:ea typeface="맑은 고딕"/>
-              </a:rPr>
-              <a:t>• 실패한 설계(예: 군집분석이 부적합하면 기각 사유)도 은폐하지 않고 보고서에 남긴다</a:t>
+                  <a:srgbClr val="767A7F"/>
+                </a:solidFill>
+                <a:latin typeface="맑은 고딕"/>
+                <a:ea typeface="맑은 고딕"/>
+              </a:rPr>
+              <a:t>개별 p값보다 방향의 안정성(부트스트랩)과 모형 설명력을 함께 제시한다.</a:t>
             </a:r>
           </a:p>
         </p:txBody>
@@ -4398,7 +4728,7 @@
                 <a:latin typeface="맑은 고딕"/>
                 <a:ea typeface="맑은 고딕"/>
               </a:rPr>
-              <a:t>기대 산출물과 활용 계획</a:t>
+              <a:t>분석 설계 ③ 처방 — 우선순위·유형 배정 모형 (RQ4)</a:t>
             </a:r>
           </a:p>
         </p:txBody>
@@ -4494,6 +4824,823 @@
                 <a:ea typeface="맑은 고딕"/>
               </a:rPr>
               <a:t>11</a:t>
+            </a:r>
+          </a:p>
+        </p:txBody>
+      </p:sp>
+      <p:sp>
+        <p:nvSpPr>
+          <p:cNvPr id="7" name="TextBox 6"/>
+          <p:cNvSpPr txBox="1"/>
+          <p:nvPr/>
+        </p:nvSpPr>
+        <p:spPr>
+          <a:xfrm>
+            <a:off x="548640" y="1097280"/>
+            <a:ext cx="11155680" cy="384048"/>
+          </a:xfrm>
+          <a:prstGeom prst="rect">
+            <a:avLst/>
+          </a:prstGeom>
+          <a:noFill/>
+        </p:spPr>
+        <p:txBody>
+          <a:bodyPr wrap="square" anchor="t">
+            <a:spAutoFit/>
+          </a:bodyPr>
+          <a:lstStyle/>
+          <a:p>
+            <a:pPr>
+              <a:lnSpc>
+                <a:spcPct val="114000"/>
+              </a:lnSpc>
+              <a:spcAft>
+                <a:spcPts val="0"/>
+              </a:spcAft>
+            </a:pPr>
+            <a:r>
+              <a:rPr sz="1250" b="0">
+                <a:solidFill>
+                  <a:srgbClr val="767A7F"/>
+                </a:solidFill>
+                <a:latin typeface="맑은 고딕"/>
+                <a:ea typeface="맑은 고딕"/>
+              </a:rPr>
+              <a:t>새 기준을 만들지 않는다: 정부 문서의 임계값만 조합한다</a:t>
+            </a:r>
+          </a:p>
+        </p:txBody>
+      </p:sp>
+      <p:sp>
+        <p:nvSpPr>
+          <p:cNvPr id="8" name="TextBox 7"/>
+          <p:cNvSpPr txBox="1"/>
+          <p:nvPr/>
+        </p:nvSpPr>
+        <p:spPr>
+          <a:xfrm>
+            <a:off x="502920" y="6492240"/>
+            <a:ext cx="11247120" cy="320040"/>
+          </a:xfrm>
+          <a:prstGeom prst="rect">
+            <a:avLst/>
+          </a:prstGeom>
+          <a:noFill/>
+        </p:spPr>
+        <p:txBody>
+          <a:bodyPr wrap="square" anchor="t">
+            <a:spAutoFit/>
+          </a:bodyPr>
+          <a:lstStyle/>
+          <a:p>
+            <a:pPr>
+              <a:lnSpc>
+                <a:spcPct val="114000"/>
+              </a:lnSpc>
+              <a:spcAft>
+                <a:spcPts val="0"/>
+              </a:spcAft>
+            </a:pPr>
+            <a:r>
+              <a:rPr sz="850" b="0">
+                <a:solidFill>
+                  <a:srgbClr val="B2B5B9"/>
+                </a:solidFill>
+                <a:latin typeface="맑은 고딕"/>
+                <a:ea typeface="맑은 고딕"/>
+              </a:rPr>
+              <a:t>2026 명지대학교 창의적 SW프로그램 경진대회 · 빅데이터 분석 — 데이터 분석 계획서</a:t>
+            </a:r>
+          </a:p>
+        </p:txBody>
+      </p:sp>
+      <p:sp>
+        <p:nvSpPr>
+          <p:cNvPr id="9" name="Rounded Rectangle 8"/>
+          <p:cNvSpPr/>
+          <p:nvPr/>
+        </p:nvSpPr>
+        <p:spPr>
+          <a:xfrm>
+            <a:off x="502920" y="1737360"/>
+            <a:ext cx="5532120" cy="2057400"/>
+          </a:xfrm>
+          <a:prstGeom prst="roundRect">
+            <a:avLst>
+              <a:gd name="adj" fmla="val 4000"/>
+            </a:avLst>
+          </a:prstGeom>
+          <a:solidFill>
+            <a:srgbClr val="FFFFFF"/>
+          </a:solidFill>
+          <a:ln w="12700">
+            <a:solidFill>
+              <a:srgbClr val="E4E6E9"/>
+            </a:solidFill>
+          </a:ln>
+          <a:effectLst>
+            <a:outerShdw blurRad="182880" dist="64008" dir="5400000" rotWithShape="0">
+              <a:srgbClr val="000000">
+                <a:alpha val="30000"/>
+              </a:srgbClr>
+            </a:outerShdw>
+          </a:effectLst>
+        </p:spPr>
+        <p:style>
+          <a:lnRef idx="1">
+            <a:schemeClr val="accent1"/>
+          </a:lnRef>
+          <a:fillRef idx="3">
+            <a:schemeClr val="accent1"/>
+          </a:fillRef>
+          <a:effectRef idx="2">
+            <a:schemeClr val="accent1"/>
+          </a:effectRef>
+          <a:fontRef idx="minor">
+            <a:schemeClr val="lt1"/>
+          </a:fontRef>
+        </p:style>
+        <p:txBody>
+          <a:bodyPr rtlCol="0" anchor="ctr"/>
+          <a:lstStyle/>
+          <a:p>
+            <a:pPr algn="ctr"/>
+          </a:p>
+        </p:txBody>
+      </p:sp>
+      <p:sp>
+        <p:nvSpPr>
+          <p:cNvPr id="10" name="TextBox 9"/>
+          <p:cNvSpPr txBox="1"/>
+          <p:nvPr/>
+        </p:nvSpPr>
+        <p:spPr>
+          <a:xfrm>
+            <a:off x="685800" y="1865376"/>
+            <a:ext cx="5166359" cy="1801368"/>
+          </a:xfrm>
+          <a:prstGeom prst="rect">
+            <a:avLst/>
+          </a:prstGeom>
+          <a:noFill/>
+        </p:spPr>
+        <p:txBody>
+          <a:bodyPr wrap="square" anchor="t">
+            <a:spAutoFit/>
+          </a:bodyPr>
+          <a:lstStyle/>
+          <a:p>
+            <a:pPr>
+              <a:lnSpc>
+                <a:spcPct val="114000"/>
+              </a:lnSpc>
+              <a:spcAft>
+                <a:spcPts val="350"/>
+              </a:spcAft>
+            </a:pPr>
+            <a:r>
+              <a:rPr sz="1300" b="1">
+                <a:solidFill>
+                  <a:srgbClr val="33393F"/>
+                </a:solidFill>
+                <a:latin typeface="맑은 고딕"/>
+                <a:ea typeface="맑은 고딕"/>
+              </a:rPr>
+              <a:t>우선순위 — 두 관점을 병렬 제시</a:t>
+            </a:r>
+          </a:p>
+          <a:p>
+            <a:pPr marL="160020" indent="-160020">
+              <a:lnSpc>
+                <a:spcPct val="114000"/>
+              </a:lnSpc>
+              <a:spcAft>
+                <a:spcPts val="200"/>
+              </a:spcAft>
+            </a:pPr>
+            <a:r>
+              <a:rPr sz="1150" b="0">
+                <a:solidFill>
+                  <a:srgbClr val="1C1C1E"/>
+                </a:solidFill>
+                <a:latin typeface="맑은 고딕"/>
+                <a:ea typeface="맑은 고딕"/>
+              </a:rPr>
+              <a:t>• 심도 축: 취약이 가장 깊은 곳 먼저 — 객관 가중(엔트로피·CRITIC) + TOPSIS 종합</a:t>
+            </a:r>
+          </a:p>
+          <a:p>
+            <a:pPr marL="160020" indent="-160020">
+              <a:lnSpc>
+                <a:spcPct val="114000"/>
+              </a:lnSpc>
+              <a:spcAft>
+                <a:spcPts val="200"/>
+              </a:spcAft>
+            </a:pPr>
+            <a:r>
+              <a:rPr sz="1150" b="0">
+                <a:solidFill>
+                  <a:srgbClr val="1C1C1E"/>
+                </a:solidFill>
+                <a:latin typeface="맑은 고딕"/>
+                <a:ea typeface="맑은 고딕"/>
+              </a:rPr>
+              <a:t>• 부담 축: 영향 인원이 큰 곳 먼저 — 미충족 분만 규모</a:t>
+            </a:r>
+          </a:p>
+          <a:p>
+            <a:pPr marL="160020" indent="-160020">
+              <a:lnSpc>
+                <a:spcPct val="114000"/>
+              </a:lnSpc>
+              <a:spcAft>
+                <a:spcPts val="200"/>
+              </a:spcAft>
+            </a:pPr>
+            <a:r>
+              <a:rPr sz="1150" b="0">
+                <a:solidFill>
+                  <a:srgbClr val="1C1C1E"/>
+                </a:solidFill>
+                <a:latin typeface="맑은 고딕"/>
+                <a:ea typeface="맑은 고딕"/>
+              </a:rPr>
+              <a:t>• 두 축을 평균해 합성하지 않는다 — 가치 선택을 가리는 대신 병렬로 드러내는 것이 목적</a:t>
+            </a:r>
+          </a:p>
+        </p:txBody>
+      </p:sp>
+      <p:sp>
+        <p:nvSpPr>
+          <p:cNvPr id="11" name="Rounded Rectangle 10"/>
+          <p:cNvSpPr/>
+          <p:nvPr/>
+        </p:nvSpPr>
+        <p:spPr>
+          <a:xfrm>
+            <a:off x="6263640" y="1737360"/>
+            <a:ext cx="5532120" cy="2057400"/>
+          </a:xfrm>
+          <a:prstGeom prst="roundRect">
+            <a:avLst>
+              <a:gd name="adj" fmla="val 4000"/>
+            </a:avLst>
+          </a:prstGeom>
+          <a:solidFill>
+            <a:srgbClr val="FFFFFF"/>
+          </a:solidFill>
+          <a:ln w="12700">
+            <a:solidFill>
+              <a:srgbClr val="E4E6E9"/>
+            </a:solidFill>
+          </a:ln>
+          <a:effectLst>
+            <a:outerShdw blurRad="182880" dist="64008" dir="5400000" rotWithShape="0">
+              <a:srgbClr val="000000">
+                <a:alpha val="30000"/>
+              </a:srgbClr>
+            </a:outerShdw>
+          </a:effectLst>
+        </p:spPr>
+        <p:style>
+          <a:lnRef idx="1">
+            <a:schemeClr val="accent1"/>
+          </a:lnRef>
+          <a:fillRef idx="3">
+            <a:schemeClr val="accent1"/>
+          </a:fillRef>
+          <a:effectRef idx="2">
+            <a:schemeClr val="accent1"/>
+          </a:effectRef>
+          <a:fontRef idx="minor">
+            <a:schemeClr val="lt1"/>
+          </a:fontRef>
+        </p:style>
+        <p:txBody>
+          <a:bodyPr rtlCol="0" anchor="ctr"/>
+          <a:lstStyle/>
+          <a:p>
+            <a:pPr algn="ctr"/>
+          </a:p>
+        </p:txBody>
+      </p:sp>
+      <p:sp>
+        <p:nvSpPr>
+          <p:cNvPr id="12" name="TextBox 11"/>
+          <p:cNvSpPr txBox="1"/>
+          <p:nvPr/>
+        </p:nvSpPr>
+        <p:spPr>
+          <a:xfrm>
+            <a:off x="6446520" y="1865376"/>
+            <a:ext cx="5166359" cy="1801368"/>
+          </a:xfrm>
+          <a:prstGeom prst="rect">
+            <a:avLst/>
+          </a:prstGeom>
+          <a:noFill/>
+        </p:spPr>
+        <p:txBody>
+          <a:bodyPr wrap="square" anchor="t">
+            <a:spAutoFit/>
+          </a:bodyPr>
+          <a:lstStyle/>
+          <a:p>
+            <a:pPr>
+              <a:lnSpc>
+                <a:spcPct val="114000"/>
+              </a:lnSpc>
+              <a:spcAft>
+                <a:spcPts val="350"/>
+              </a:spcAft>
+            </a:pPr>
+            <a:r>
+              <a:rPr sz="1300" b="1">
+                <a:solidFill>
+                  <a:srgbClr val="33393F"/>
+                </a:solidFill>
+                <a:latin typeface="맑은 고딕"/>
+                <a:ea typeface="맑은 고딕"/>
+              </a:rPr>
+              <a:t>유형 배정 — 규칙 기반 (머신러닝 아님)</a:t>
+            </a:r>
+          </a:p>
+          <a:p>
+            <a:pPr marL="160020" indent="-160020">
+              <a:lnSpc>
+                <a:spcPct val="114000"/>
+              </a:lnSpc>
+              <a:spcAft>
+                <a:spcPts val="200"/>
+              </a:spcAft>
+            </a:pPr>
+            <a:r>
+              <a:rPr sz="1150" b="0">
+                <a:solidFill>
+                  <a:srgbClr val="1C1C1E"/>
+                </a:solidFill>
+                <a:latin typeface="맑은 고딕"/>
+                <a:ea typeface="맑은 고딕"/>
+              </a:rPr>
+              <a:t>• 관내 수행·인구·수요·접근성의 정부 임계값만으로 설치/운영지원/외래/순회 4유형을 규칙 배정</a:t>
+            </a:r>
+          </a:p>
+          <a:p>
+            <a:pPr marL="160020" indent="-160020">
+              <a:lnSpc>
+                <a:spcPct val="114000"/>
+              </a:lnSpc>
+              <a:spcAft>
+                <a:spcPts val="200"/>
+              </a:spcAft>
+            </a:pPr>
+            <a:r>
+              <a:rPr sz="1150" b="0">
+                <a:solidFill>
+                  <a:srgbClr val="1C1C1E"/>
+                </a:solidFill>
+                <a:latin typeface="맑은 고딕"/>
+                <a:ea typeface="맑은 고딕"/>
+              </a:rPr>
+              <a:t>• 학습이 없어 과적합·라벨 누수 논쟁에서 자유롭고, 모든 판정이 문서의 숫자로 소급 가능</a:t>
+            </a:r>
+          </a:p>
+        </p:txBody>
+      </p:sp>
+      <p:sp>
+        <p:nvSpPr>
+          <p:cNvPr id="13" name="Rounded Rectangle 12"/>
+          <p:cNvSpPr/>
+          <p:nvPr/>
+        </p:nvSpPr>
+        <p:spPr>
+          <a:xfrm>
+            <a:off x="502920" y="4023360"/>
+            <a:ext cx="11292840" cy="1965960"/>
+          </a:xfrm>
+          <a:prstGeom prst="roundRect">
+            <a:avLst>
+              <a:gd name="adj" fmla="val 4186"/>
+            </a:avLst>
+          </a:prstGeom>
+          <a:solidFill>
+            <a:srgbClr val="FFFFFF"/>
+          </a:solidFill>
+          <a:ln w="12700">
+            <a:solidFill>
+              <a:srgbClr val="E4E6E9"/>
+            </a:solidFill>
+          </a:ln>
+          <a:effectLst>
+            <a:outerShdw blurRad="182880" dist="64008" dir="5400000" rotWithShape="0">
+              <a:srgbClr val="000000">
+                <a:alpha val="30000"/>
+              </a:srgbClr>
+            </a:outerShdw>
+          </a:effectLst>
+        </p:spPr>
+        <p:style>
+          <a:lnRef idx="1">
+            <a:schemeClr val="accent1"/>
+          </a:lnRef>
+          <a:fillRef idx="3">
+            <a:schemeClr val="accent1"/>
+          </a:fillRef>
+          <a:effectRef idx="2">
+            <a:schemeClr val="accent1"/>
+          </a:effectRef>
+          <a:fontRef idx="minor">
+            <a:schemeClr val="lt1"/>
+          </a:fontRef>
+        </p:style>
+        <p:txBody>
+          <a:bodyPr rtlCol="0" anchor="ctr"/>
+          <a:lstStyle/>
+          <a:p>
+            <a:pPr algn="ctr"/>
+          </a:p>
+        </p:txBody>
+      </p:sp>
+      <p:sp>
+        <p:nvSpPr>
+          <p:cNvPr id="14" name="TextBox 13"/>
+          <p:cNvSpPr txBox="1"/>
+          <p:nvPr/>
+        </p:nvSpPr>
+        <p:spPr>
+          <a:xfrm>
+            <a:off x="685800" y="4151376"/>
+            <a:ext cx="10927080" cy="1709928"/>
+          </a:xfrm>
+          <a:prstGeom prst="rect">
+            <a:avLst/>
+          </a:prstGeom>
+          <a:noFill/>
+        </p:spPr>
+        <p:txBody>
+          <a:bodyPr wrap="square" anchor="t">
+            <a:spAutoFit/>
+          </a:bodyPr>
+          <a:lstStyle/>
+          <a:p>
+            <a:pPr>
+              <a:lnSpc>
+                <a:spcPct val="114000"/>
+              </a:lnSpc>
+              <a:spcAft>
+                <a:spcPts val="350"/>
+              </a:spcAft>
+            </a:pPr>
+            <a:r>
+              <a:rPr sz="1300" b="1">
+                <a:solidFill>
+                  <a:srgbClr val="33393F"/>
+                </a:solidFill>
+                <a:latin typeface="맑은 고딕"/>
+                <a:ea typeface="맑은 고딕"/>
+              </a:rPr>
+              <a:t>검증 계획 — 모형을 스스로 공격한다</a:t>
+            </a:r>
+          </a:p>
+          <a:p>
+            <a:pPr marL="160020" indent="-160020">
+              <a:lnSpc>
+                <a:spcPct val="114000"/>
+              </a:lnSpc>
+              <a:spcAft>
+                <a:spcPts val="200"/>
+              </a:spcAft>
+            </a:pPr>
+            <a:r>
+              <a:rPr sz="1150" b="0">
+                <a:solidFill>
+                  <a:srgbClr val="1C1C1E"/>
+                </a:solidFill>
+                <a:latin typeface="맑은 고딕"/>
+                <a:ea typeface="맑은 고딕"/>
+              </a:rPr>
+              <a:t>• 외부 검증: 공고의 순회진료 대상 목록과 본 규칙의 판정을 교차 대조한다 (일치·불일치 모두 보고)</a:t>
+            </a:r>
+          </a:p>
+          <a:p>
+            <a:pPr marL="160020" indent="-160020">
+              <a:lnSpc>
+                <a:spcPct val="114000"/>
+              </a:lnSpc>
+              <a:spcAft>
+                <a:spcPts val="200"/>
+              </a:spcAft>
+            </a:pPr>
+            <a:r>
+              <a:rPr sz="1150" b="0">
+                <a:solidFill>
+                  <a:srgbClr val="1C1C1E"/>
+                </a:solidFill>
+                <a:latin typeface="맑은 고딕"/>
+                <a:ea typeface="맑은 고딕"/>
+              </a:rPr>
+              <a:t>• 민감도 분석: 차용한 임계값을 변화시켜 결과가 얼마나 흔들리는지 공개한다</a:t>
+            </a:r>
+          </a:p>
+          <a:p>
+            <a:pPr marL="160020" indent="-160020">
+              <a:lnSpc>
+                <a:spcPct val="114000"/>
+              </a:lnSpc>
+              <a:spcAft>
+                <a:spcPts val="200"/>
+              </a:spcAft>
+            </a:pPr>
+            <a:r>
+              <a:rPr sz="1150" b="0">
+                <a:solidFill>
+                  <a:srgbClr val="1C1C1E"/>
+                </a:solidFill>
+                <a:latin typeface="맑은 고딕"/>
+                <a:ea typeface="맑은 고딕"/>
+              </a:rPr>
+              <a:t>• 강건성 분석: 가중법을 바꿔(엔트로피/CRITIC/동일 가중) 순위가 유지되는지 확인한다</a:t>
+            </a:r>
+          </a:p>
+          <a:p>
+            <a:pPr marL="160020" indent="-160020">
+              <a:lnSpc>
+                <a:spcPct val="114000"/>
+              </a:lnSpc>
+              <a:spcAft>
+                <a:spcPts val="200"/>
+              </a:spcAft>
+            </a:pPr>
+            <a:r>
+              <a:rPr sz="1150" b="0">
+                <a:solidFill>
+                  <a:srgbClr val="1C1C1E"/>
+                </a:solidFill>
+                <a:latin typeface="맑은 고딕"/>
+                <a:ea typeface="맑은 고딕"/>
+              </a:rPr>
+              <a:t>• 실패한 설계(예: 군집분석이 부적합하면 기각 사유)도 은폐하지 않고 보고서에 남긴다</a:t>
+            </a:r>
+          </a:p>
+        </p:txBody>
+      </p:sp>
+    </p:spTree>
+  </p:cSld>
+  <p:clrMapOvr>
+    <a:masterClrMapping/>
+  </p:clrMapOvr>
+</p:sld>
+</file>
+
+<file path=ppt/slides/slide12.xml><?xml version="1.0" encoding="utf-8"?>
+<p:sld xmlns:a="http://schemas.openxmlformats.org/drawingml/2006/main" xmlns:p="http://schemas.openxmlformats.org/presentationml/2006/main" xmlns:r="http://schemas.openxmlformats.org/officeDocument/2006/relationships">
+  <p:cSld>
+    <p:spTree>
+      <p:nvGrpSpPr>
+        <p:cNvPr id="1" name=""/>
+        <p:cNvGrpSpPr/>
+        <p:nvPr/>
+      </p:nvGrpSpPr>
+      <p:grpSpPr/>
+      <p:sp>
+        <p:nvSpPr>
+          <p:cNvPr id="2" name="Rectangle 1"/>
+          <p:cNvSpPr/>
+          <p:nvPr/>
+        </p:nvSpPr>
+        <p:spPr>
+          <a:xfrm>
+            <a:off x="0" y="0"/>
+            <a:ext cx="12191695" cy="6858000"/>
+          </a:xfrm>
+          <a:prstGeom prst="rect">
+            <a:avLst/>
+          </a:prstGeom>
+          <a:solidFill>
+            <a:srgbClr val="FFFFFF"/>
+          </a:solidFill>
+          <a:ln>
+            <a:noFill/>
+          </a:ln>
+          <a:effectLst/>
+        </p:spPr>
+        <p:style>
+          <a:lnRef idx="1">
+            <a:schemeClr val="accent1"/>
+          </a:lnRef>
+          <a:fillRef idx="3">
+            <a:schemeClr val="accent1"/>
+          </a:fillRef>
+          <a:effectRef idx="2">
+            <a:schemeClr val="accent1"/>
+          </a:effectRef>
+          <a:fontRef idx="minor">
+            <a:schemeClr val="lt1"/>
+          </a:fontRef>
+        </p:style>
+        <p:txBody>
+          <a:bodyPr rtlCol="0" anchor="ctr"/>
+          <a:lstStyle/>
+          <a:p>
+            <a:pPr algn="ctr"/>
+          </a:p>
+        </p:txBody>
+      </p:sp>
+      <p:sp>
+        <p:nvSpPr>
+          <p:cNvPr id="3" name="Rounded Rectangle 2"/>
+          <p:cNvSpPr/>
+          <p:nvPr/>
+        </p:nvSpPr>
+        <p:spPr>
+          <a:xfrm>
+            <a:off x="502920" y="475488"/>
+            <a:ext cx="310896" cy="310896"/>
+          </a:xfrm>
+          <a:prstGeom prst="roundRect">
+            <a:avLst>
+              <a:gd name="adj" fmla="val 50000"/>
+            </a:avLst>
+          </a:prstGeom>
+          <a:gradFill rotWithShape="1">
+            <a:gsLst>
+              <a:gs pos="0">
+                <a:srgbClr val="3A3F45"/>
+              </a:gs>
+              <a:gs pos="100000">
+                <a:srgbClr val="73787E"/>
+              </a:gs>
+            </a:gsLst>
+            <a:lin scaled="0" ang="18900000"/>
+          </a:gradFill>
+          <a:ln>
+            <a:noFill/>
+          </a:ln>
+          <a:effectLst>
+            <a:outerShdw blurRad="109728" dist="36576" dir="5400000" rotWithShape="0">
+              <a:srgbClr val="000000">
+                <a:alpha val="35000"/>
+              </a:srgbClr>
+            </a:outerShdw>
+          </a:effectLst>
+        </p:spPr>
+        <p:style>
+          <a:lnRef idx="1">
+            <a:schemeClr val="accent1"/>
+          </a:lnRef>
+          <a:fillRef idx="3">
+            <a:schemeClr val="accent1"/>
+          </a:fillRef>
+          <a:effectRef idx="2">
+            <a:schemeClr val="accent1"/>
+          </a:effectRef>
+          <a:fontRef idx="minor">
+            <a:schemeClr val="lt1"/>
+          </a:fontRef>
+        </p:style>
+        <p:txBody>
+          <a:bodyPr rtlCol="0" anchor="ctr"/>
+          <a:lstStyle/>
+          <a:p>
+            <a:pPr algn="ctr"/>
+          </a:p>
+        </p:txBody>
+      </p:sp>
+      <p:sp>
+        <p:nvSpPr>
+          <p:cNvPr id="4" name="TextBox 3"/>
+          <p:cNvSpPr txBox="1"/>
+          <p:nvPr/>
+        </p:nvSpPr>
+        <p:spPr>
+          <a:xfrm>
+            <a:off x="960120" y="274320"/>
+            <a:ext cx="9692640" cy="685800"/>
+          </a:xfrm>
+          <a:prstGeom prst="rect">
+            <a:avLst/>
+          </a:prstGeom>
+          <a:noFill/>
+        </p:spPr>
+        <p:txBody>
+          <a:bodyPr wrap="square" anchor="ctr">
+            <a:spAutoFit/>
+          </a:bodyPr>
+          <a:lstStyle/>
+          <a:p>
+            <a:pPr>
+              <a:lnSpc>
+                <a:spcPct val="114000"/>
+              </a:lnSpc>
+              <a:spcAft>
+                <a:spcPts val="0"/>
+              </a:spcAft>
+            </a:pPr>
+            <a:r>
+              <a:rPr sz="2150" b="1">
+                <a:solidFill>
+                  <a:srgbClr val="1C1C1E"/>
+                </a:solidFill>
+                <a:latin typeface="맑은 고딕"/>
+                <a:ea typeface="맑은 고딕"/>
+              </a:rPr>
+              <a:t>기대 산출물과 활용 계획</a:t>
+            </a:r>
+          </a:p>
+        </p:txBody>
+      </p:sp>
+      <p:sp>
+        <p:nvSpPr>
+          <p:cNvPr id="5" name="Rectangle 4"/>
+          <p:cNvSpPr/>
+          <p:nvPr/>
+        </p:nvSpPr>
+        <p:spPr>
+          <a:xfrm>
+            <a:off x="521207" y="969264"/>
+            <a:ext cx="4206240" cy="27432"/>
+          </a:xfrm>
+          <a:prstGeom prst="rect">
+            <a:avLst/>
+          </a:prstGeom>
+          <a:gradFill rotWithShape="1">
+            <a:gsLst>
+              <a:gs pos="0">
+                <a:srgbClr val="2A2E33"/>
+              </a:gs>
+              <a:gs pos="100000">
+                <a:srgbClr val="FFFFFF"/>
+              </a:gs>
+            </a:gsLst>
+            <a:lin scaled="0" ang="0"/>
+          </a:gradFill>
+          <a:ln>
+            <a:noFill/>
+          </a:ln>
+          <a:effectLst/>
+        </p:spPr>
+        <p:style>
+          <a:lnRef idx="1">
+            <a:schemeClr val="accent1"/>
+          </a:lnRef>
+          <a:fillRef idx="3">
+            <a:schemeClr val="accent1"/>
+          </a:fillRef>
+          <a:effectRef idx="2">
+            <a:schemeClr val="accent1"/>
+          </a:effectRef>
+          <a:fontRef idx="minor">
+            <a:schemeClr val="lt1"/>
+          </a:fontRef>
+        </p:style>
+        <p:txBody>
+          <a:bodyPr rtlCol="0" anchor="ctr"/>
+          <a:lstStyle/>
+          <a:p>
+            <a:pPr algn="ctr"/>
+          </a:p>
+        </p:txBody>
+      </p:sp>
+      <p:sp>
+        <p:nvSpPr>
+          <p:cNvPr id="6" name="TextBox 5"/>
+          <p:cNvSpPr txBox="1"/>
+          <p:nvPr/>
+        </p:nvSpPr>
+        <p:spPr>
+          <a:xfrm>
+            <a:off x="10835640" y="164592"/>
+            <a:ext cx="1188720" cy="777240"/>
+          </a:xfrm>
+          <a:prstGeom prst="rect">
+            <a:avLst/>
+          </a:prstGeom>
+          <a:noFill/>
+        </p:spPr>
+        <p:txBody>
+          <a:bodyPr wrap="square" anchor="t">
+            <a:spAutoFit/>
+          </a:bodyPr>
+          <a:lstStyle/>
+          <a:p>
+            <a:pPr>
+              <a:lnSpc>
+                <a:spcPct val="114000"/>
+              </a:lnSpc>
+              <a:spcAft>
+                <a:spcPts val="0"/>
+              </a:spcAft>
+            </a:pPr>
+            <a:r>
+              <a:rPr sz="3000" b="1">
+                <a:solidFill>
+                  <a:srgbClr val="D8DADD"/>
+                </a:solidFill>
+                <a:latin typeface="맑은 고딕"/>
+                <a:ea typeface="맑은 고딕"/>
+              </a:rPr>
+              <a:t>12</a:t>
             </a:r>
           </a:p>
         </p:txBody>
@@ -5339,7 +6486,7 @@
 </p:sld>
 </file>
 
-<file path=ppt/slides/slide12.xml><?xml version="1.0" encoding="utf-8"?>
+<file path=ppt/slides/slide13.xml><?xml version="1.0" encoding="utf-8"?>
 <p:sld xmlns:a="http://schemas.openxmlformats.org/drawingml/2006/main" xmlns:p="http://schemas.openxmlformats.org/presentationml/2006/main" xmlns:r="http://schemas.openxmlformats.org/officeDocument/2006/relationships">
   <p:cSld>
     <p:spTree>
@@ -5586,7 +6733,7 @@
                 <a:latin typeface="맑은 고딕"/>
                 <a:ea typeface="맑은 고딕"/>
               </a:rPr>
-              <a:t>12</a:t>
+              <a:t>13</a:t>
             </a:r>
           </a:p>
         </p:txBody>
@@ -6697,7 +7844,7 @@
                 <a:latin typeface="맑은 고딕"/>
                 <a:ea typeface="맑은 고딕"/>
               </a:rPr>
-              <a:t>문제 인식 — 취약지 정책은 세 단계 파이프라인이다</a:t>
+              <a:t>출발점 — 의료 공백은 정말 "자원이 모자라서" 생기는가</a:t>
             </a:r>
           </a:p>
         </p:txBody>
@@ -6805,8 +7952,8 @@
         </p:nvSpPr>
         <p:spPr>
           <a:xfrm>
-            <a:off x="502920" y="6492240"/>
-            <a:ext cx="11247120" cy="320040"/>
+            <a:off x="548640" y="1097280"/>
+            <a:ext cx="11155680" cy="384048"/>
           </a:xfrm>
           <a:prstGeom prst="rect">
             <a:avLst/>
@@ -6828,6 +7975,49 @@
               </a:spcAft>
             </a:pPr>
             <a:r>
+              <a:rPr sz="1250" b="0">
+                <a:solidFill>
+                  <a:srgbClr val="767A7F"/>
+                </a:solidFill>
+                <a:latin typeface="맑은 고딕"/>
+                <a:ea typeface="맑은 고딕"/>
+              </a:rPr>
+              <a:t>주제를 고른 이유, 그리고 왜 "취약지"가 아니라 "제도"를 분석 대상으로 삼는가</a:t>
+            </a:r>
+          </a:p>
+        </p:txBody>
+      </p:sp>
+      <p:sp>
+        <p:nvSpPr>
+          <p:cNvPr id="8" name="TextBox 7"/>
+          <p:cNvSpPr txBox="1"/>
+          <p:nvPr/>
+        </p:nvSpPr>
+        <p:spPr>
+          <a:xfrm>
+            <a:off x="502920" y="6492240"/>
+            <a:ext cx="11247120" cy="320040"/>
+          </a:xfrm>
+          <a:prstGeom prst="rect">
+            <a:avLst/>
+          </a:prstGeom>
+          <a:noFill/>
+        </p:spPr>
+        <p:txBody>
+          <a:bodyPr wrap="square" anchor="t">
+            <a:spAutoFit/>
+          </a:bodyPr>
+          <a:lstStyle/>
+          <a:p>
+            <a:pPr>
+              <a:lnSpc>
+                <a:spcPct val="114000"/>
+              </a:lnSpc>
+              <a:spcAft>
+                <a:spcPts val="0"/>
+              </a:spcAft>
+            </a:pPr>
+            <a:r>
               <a:rPr sz="850" b="0">
                 <a:solidFill>
                   <a:srgbClr val="B2B5B9"/>
@@ -6842,18 +8032,18 @@
       </p:sp>
       <p:sp>
         <p:nvSpPr>
-          <p:cNvPr id="8" name="Rounded Rectangle 7"/>
+          <p:cNvPr id="9" name="Rounded Rectangle 8"/>
           <p:cNvSpPr/>
           <p:nvPr/>
         </p:nvSpPr>
         <p:spPr>
           <a:xfrm>
             <a:off x="502920" y="1371600"/>
-            <a:ext cx="3291840" cy="1143000"/>
+            <a:ext cx="3611880" cy="1783080"/>
           </a:xfrm>
           <a:prstGeom prst="roundRect">
             <a:avLst>
-              <a:gd name="adj" fmla="val 7199"/>
+              <a:gd name="adj" fmla="val 4615"/>
             </a:avLst>
           </a:prstGeom>
           <a:solidFill>
@@ -6896,14 +8086,14 @@
       </p:sp>
       <p:sp>
         <p:nvSpPr>
-          <p:cNvPr id="9" name="TextBox 8"/>
+          <p:cNvPr id="10" name="TextBox 9"/>
           <p:cNvSpPr txBox="1"/>
           <p:nvPr/>
         </p:nvSpPr>
         <p:spPr>
           <a:xfrm>
-            <a:off x="667512" y="1463040"/>
-            <a:ext cx="3017520" cy="960120"/>
+            <a:off x="685800" y="1499616"/>
+            <a:ext cx="3246120" cy="1527048"/>
           </a:xfrm>
           <a:prstGeom prst="rect">
             <a:avLst/>
@@ -6921,101 +8111,38 @@
                 <a:spcPct val="114000"/>
               </a:lnSpc>
               <a:spcAft>
-                <a:spcPts val="300"/>
-              </a:spcAft>
-            </a:pPr>
-            <a:r>
-              <a:rPr sz="1500" b="1">
+                <a:spcPts val="350"/>
+              </a:spcAft>
+            </a:pPr>
+            <a:r>
+              <a:rPr sz="1300" b="1">
                 <a:solidFill>
                   <a:srgbClr val="33393F"/>
                 </a:solidFill>
                 <a:latin typeface="맑은 고딕"/>
                 <a:ea typeface="맑은 고딕"/>
               </a:rPr>
-              <a:t>① 측정</a:t>
-            </a:r>
-          </a:p>
-          <a:p>
-            <a:pPr>
-              <a:lnSpc>
-                <a:spcPct val="114000"/>
-              </a:lnSpc>
-              <a:spcAft>
-                <a:spcPts val="0"/>
-              </a:spcAft>
-            </a:pPr>
-            <a:r>
-              <a:rPr sz="1150" b="0">
+              <a:t>① 익숙한 진단</a:t>
+            </a:r>
+          </a:p>
+          <a:p>
+            <a:pPr marL="160020" indent="-160020">
+              <a:lnSpc>
+                <a:spcPct val="114000"/>
+              </a:lnSpc>
+              <a:spcAft>
+                <a:spcPts val="200"/>
+              </a:spcAft>
+            </a:pPr>
+            <a:r>
+              <a:rPr sz="1100" b="0">
                 <a:solidFill>
                   <a:srgbClr val="1C1C1E"/>
                 </a:solidFill>
                 <a:latin typeface="맑은 고딕"/>
                 <a:ea typeface="맑은 고딕"/>
               </a:rPr>
-              <a:t>2년마다 전국 시·군의</a:t>
-            </a:r>
-          </a:p>
-          <a:p>
-            <a:pPr>
-              <a:lnSpc>
-                <a:spcPct val="114000"/>
-              </a:lnSpc>
-              <a:spcAft>
-                <a:spcPts val="0"/>
-              </a:spcAft>
-            </a:pPr>
-            <a:r>
-              <a:rPr sz="1150" b="0">
-                <a:solidFill>
-                  <a:srgbClr val="1C1C1E"/>
-                </a:solidFill>
-                <a:latin typeface="맑은 고딕"/>
-                <a:ea typeface="맑은 고딕"/>
-              </a:rPr>
-              <a:t>접근성·의료이용률 산출</a:t>
-            </a:r>
-          </a:p>
-        </p:txBody>
-      </p:sp>
-      <p:sp>
-        <p:nvSpPr>
-          <p:cNvPr id="10" name="TextBox 9"/>
-          <p:cNvSpPr txBox="1"/>
-          <p:nvPr/>
-        </p:nvSpPr>
-        <p:spPr>
-          <a:xfrm>
-            <a:off x="3813048" y="1691640"/>
-            <a:ext cx="685800" cy="548640"/>
-          </a:xfrm>
-          <a:prstGeom prst="rect">
-            <a:avLst/>
-          </a:prstGeom>
-          <a:noFill/>
-        </p:spPr>
-        <p:txBody>
-          <a:bodyPr wrap="square" anchor="t">
-            <a:spAutoFit/>
-          </a:bodyPr>
-          <a:lstStyle/>
-          <a:p>
-            <a:pPr>
-              <a:lnSpc>
-                <a:spcPct val="114000"/>
-              </a:lnSpc>
-              <a:spcAft>
-                <a:spcPts val="0"/>
-              </a:spcAft>
-            </a:pPr>
-            <a:r>
-              <a:rPr sz="2200" b="1">
-                <a:solidFill>
-                  <a:srgbClr val="767A7F"/>
-                </a:solidFill>
-                <a:latin typeface="맑은 고딕"/>
-                <a:ea typeface="맑은 고딕"/>
-              </a:rPr>
-              <a:t>→</a:t>
+              <a:t>• "지방에 분만실이 없다" — 해마다 반복되는 기사. 따라붙는 처방도 늘 같다: 의사를 늘리고 병원을 지어라</a:t>
             </a:r>
           </a:p>
         </p:txBody>
@@ -7028,12 +8155,12 @@
         </p:nvSpPr>
         <p:spPr>
           <a:xfrm>
-            <a:off x="4480559" y="1371600"/>
-            <a:ext cx="3291840" cy="1143000"/>
+            <a:off x="4343400" y="1371600"/>
+            <a:ext cx="3611880" cy="1783080"/>
           </a:xfrm>
           <a:prstGeom prst="roundRect">
             <a:avLst>
-              <a:gd name="adj" fmla="val 7199"/>
+              <a:gd name="adj" fmla="val 4615"/>
             </a:avLst>
           </a:prstGeom>
           <a:solidFill>
@@ -7082,8 +8209,8 @@
         </p:nvSpPr>
         <p:spPr>
           <a:xfrm>
-            <a:off x="4645151" y="1463040"/>
-            <a:ext cx="3017520" cy="960120"/>
+            <a:off x="4526280" y="1499616"/>
+            <a:ext cx="3246120" cy="1527048"/>
           </a:xfrm>
           <a:prstGeom prst="rect">
             <a:avLst/>
@@ -7101,72 +8228,106 @@
                 <a:spcPct val="114000"/>
               </a:lnSpc>
               <a:spcAft>
-                <a:spcPts val="300"/>
-              </a:spcAft>
-            </a:pPr>
-            <a:r>
-              <a:rPr sz="1500" b="1">
+                <a:spcPts val="350"/>
+              </a:spcAft>
+            </a:pPr>
+            <a:r>
+              <a:rPr sz="1300" b="1">
                 <a:solidFill>
                   <a:srgbClr val="33393F"/>
                 </a:solidFill>
                 <a:latin typeface="맑은 고딕"/>
                 <a:ea typeface="맑은 고딕"/>
               </a:rPr>
-              <a:t>② 지정</a:t>
-            </a:r>
-          </a:p>
-          <a:p>
-            <a:pPr>
-              <a:lnSpc>
-                <a:spcPct val="114000"/>
-              </a:lnSpc>
-              <a:spcAft>
-                <a:spcPts val="0"/>
-              </a:spcAft>
-            </a:pPr>
-            <a:r>
-              <a:rPr sz="1150" b="0">
+              <a:t>② 그 처방이 선 전제</a:t>
+            </a:r>
+          </a:p>
+          <a:p>
+            <a:pPr marL="160020" indent="-160020">
+              <a:lnSpc>
+                <a:spcPct val="114000"/>
+              </a:lnSpc>
+              <a:spcAft>
+                <a:spcPts val="200"/>
+              </a:spcAft>
+            </a:pPr>
+            <a:r>
+              <a:rPr sz="1100" b="0">
                 <a:solidFill>
                   <a:srgbClr val="1C1C1E"/>
                 </a:solidFill>
                 <a:latin typeface="맑은 고딕"/>
                 <a:ea typeface="맑은 고딕"/>
               </a:rPr>
-              <a:t>측정값으로 취약지 판정</a:t>
-            </a:r>
-          </a:p>
-          <a:p>
-            <a:pPr>
-              <a:lnSpc>
-                <a:spcPct val="114000"/>
-              </a:lnSpc>
-              <a:spcAft>
-                <a:spcPts val="0"/>
-              </a:spcAft>
-            </a:pPr>
-            <a:r>
-              <a:rPr sz="1150" b="0">
-                <a:solidFill>
-                  <a:srgbClr val="1C1C1E"/>
-                </a:solidFill>
-                <a:latin typeface="맑은 고딕"/>
-                <a:ea typeface="맑은 고딕"/>
-              </a:rPr>
-              <a:t>(등급 부여)</a:t>
-            </a:r>
-          </a:p>
-        </p:txBody>
-      </p:sp>
-      <p:sp>
-        <p:nvSpPr>
-          <p:cNvPr id="13" name="TextBox 12"/>
+              <a:t>• 공백의 원인이 자원의 절대량 부족이라는 것. 사실이라면 답은 예산뿐이고, 데이터가 할 말은 없다</a:t>
+            </a:r>
+          </a:p>
+        </p:txBody>
+      </p:sp>
+      <p:sp>
+        <p:nvSpPr>
+          <p:cNvPr id="13" name="Rounded Rectangle 12"/>
+          <p:cNvSpPr/>
+          <p:nvPr/>
+        </p:nvSpPr>
+        <p:spPr>
+          <a:xfrm>
+            <a:off x="8183880" y="1371600"/>
+            <a:ext cx="3611880" cy="1783080"/>
+          </a:xfrm>
+          <a:prstGeom prst="roundRect">
+            <a:avLst>
+              <a:gd name="adj" fmla="val 4615"/>
+            </a:avLst>
+          </a:prstGeom>
+          <a:solidFill>
+            <a:srgbClr val="F1F2F3"/>
+          </a:solidFill>
+          <a:ln w="15875">
+            <a:solidFill>
+              <a:srgbClr val="9AA0A6"/>
+            </a:solidFill>
+          </a:ln>
+          <a:effectLst>
+            <a:outerShdw blurRad="182880" dist="64008" dir="5400000" rotWithShape="0">
+              <a:srgbClr val="000000">
+                <a:alpha val="32000"/>
+              </a:srgbClr>
+            </a:outerShdw>
+          </a:effectLst>
+        </p:spPr>
+        <p:style>
+          <a:lnRef idx="1">
+            <a:schemeClr val="accent1"/>
+          </a:lnRef>
+          <a:fillRef idx="3">
+            <a:schemeClr val="accent1"/>
+          </a:fillRef>
+          <a:effectRef idx="2">
+            <a:schemeClr val="accent1"/>
+          </a:effectRef>
+          <a:fontRef idx="minor">
+            <a:schemeClr val="lt1"/>
+          </a:fontRef>
+        </p:style>
+        <p:txBody>
+          <a:bodyPr rtlCol="0" anchor="ctr"/>
+          <a:lstStyle/>
+          <a:p>
+            <a:pPr algn="ctr"/>
+          </a:p>
+        </p:txBody>
+      </p:sp>
+      <p:sp>
+        <p:nvSpPr>
+          <p:cNvPr id="14" name="TextBox 13"/>
           <p:cNvSpPr txBox="1"/>
           <p:nvPr/>
         </p:nvSpPr>
         <p:spPr>
           <a:xfrm>
-            <a:off x="7790688" y="1691640"/>
-            <a:ext cx="685800" cy="548640"/>
+            <a:off x="8366760" y="1499616"/>
+            <a:ext cx="3246120" cy="1527048"/>
           </a:xfrm>
           <a:prstGeom prst="rect">
             <a:avLst/>
@@ -7184,36 +8345,56 @@
                 <a:spcPct val="114000"/>
               </a:lnSpc>
               <a:spcAft>
-                <a:spcPts val="0"/>
-              </a:spcAft>
-            </a:pPr>
-            <a:r>
-              <a:rPr sz="2200" b="1">
-                <a:solidFill>
-                  <a:srgbClr val="767A7F"/>
-                </a:solidFill>
-                <a:latin typeface="맑은 고딕"/>
-                <a:ea typeface="맑은 고딕"/>
-              </a:rPr>
-              <a:t>→</a:t>
-            </a:r>
-          </a:p>
-        </p:txBody>
-      </p:sp>
-      <p:sp>
-        <p:nvSpPr>
-          <p:cNvPr id="14" name="Rounded Rectangle 13"/>
+                <a:spcPts val="350"/>
+              </a:spcAft>
+            </a:pPr>
+            <a:r>
+              <a:rPr sz="1300" b="1">
+                <a:solidFill>
+                  <a:srgbClr val="000000"/>
+                </a:solidFill>
+                <a:latin typeface="맑은 고딕"/>
+                <a:ea typeface="맑은 고딕"/>
+              </a:rPr>
+              <a:t>③ 우리의 의심</a:t>
+            </a:r>
+          </a:p>
+          <a:p>
+            <a:pPr marL="160020" indent="-160020">
+              <a:lnSpc>
+                <a:spcPct val="114000"/>
+              </a:lnSpc>
+              <a:spcAft>
+                <a:spcPts val="200"/>
+              </a:spcAft>
+            </a:pPr>
+            <a:r>
+              <a:rPr sz="1100" b="0">
+                <a:solidFill>
+                  <a:srgbClr val="1C1C1E"/>
+                </a:solidFill>
+                <a:latin typeface="맑은 고딕"/>
+                <a:ea typeface="맑은 고딕"/>
+              </a:rPr>
+              <a:t>• 자원이 없는 것과, 있는 자원이 필요한 곳에 닿지 않는 것은 다른 문제다. 뒤쪽이라면 예산 없이도 줄일 수 있다</a:t>
+            </a:r>
+          </a:p>
+        </p:txBody>
+      </p:sp>
+      <p:sp>
+        <p:nvSpPr>
+          <p:cNvPr id="15" name="Rounded Rectangle 14"/>
           <p:cNvSpPr/>
           <p:nvPr/>
         </p:nvSpPr>
         <p:spPr>
           <a:xfrm>
-            <a:off x="8458200" y="1371600"/>
-            <a:ext cx="3291840" cy="1143000"/>
+            <a:off x="502920" y="3401568"/>
+            <a:ext cx="11292840" cy="1572768"/>
           </a:xfrm>
           <a:prstGeom prst="roundRect">
             <a:avLst>
-              <a:gd name="adj" fmla="val 7199"/>
+              <a:gd name="adj" fmla="val 5232"/>
             </a:avLst>
           </a:prstGeom>
           <a:solidFill>
@@ -7256,14 +8437,14 @@
       </p:sp>
       <p:sp>
         <p:nvSpPr>
-          <p:cNvPr id="15" name="TextBox 14"/>
+          <p:cNvPr id="16" name="TextBox 15"/>
           <p:cNvSpPr txBox="1"/>
           <p:nvPr/>
         </p:nvSpPr>
         <p:spPr>
           <a:xfrm>
-            <a:off x="8622792" y="1463040"/>
-            <a:ext cx="3017520" cy="960120"/>
+            <a:off x="685800" y="3529584"/>
+            <a:ext cx="10927080" cy="1316736"/>
           </a:xfrm>
           <a:prstGeom prst="rect">
             <a:avLst/>
@@ -7281,113 +8462,79 @@
                 <a:spcPct val="114000"/>
               </a:lnSpc>
               <a:spcAft>
-                <a:spcPts val="300"/>
-              </a:spcAft>
-            </a:pPr>
-            <a:r>
-              <a:rPr sz="1500" b="1">
+                <a:spcPts val="350"/>
+              </a:spcAft>
+            </a:pPr>
+            <a:r>
+              <a:rPr sz="1300" b="1">
                 <a:solidFill>
                   <a:srgbClr val="33393F"/>
                 </a:solidFill>
                 <a:latin typeface="맑은 고딕"/>
                 <a:ea typeface="맑은 고딕"/>
               </a:rPr>
-              <a:t>③ 배분</a:t>
-            </a:r>
-          </a:p>
-          <a:p>
-            <a:pPr>
-              <a:lnSpc>
-                <a:spcPct val="114000"/>
-              </a:lnSpc>
-              <a:spcAft>
-                <a:spcPts val="0"/>
-              </a:spcAft>
-            </a:pPr>
-            <a:r>
-              <a:rPr sz="1150" b="0">
+              <a:t>그리고 자원을 공백 지역으로 보내는 제도는 이미 있다 — 「분만취약지 지원사업」(15년째)</a:t>
+            </a:r>
+          </a:p>
+          <a:p>
+            <a:pPr marL="160020" indent="-160020">
+              <a:lnSpc>
+                <a:spcPct val="114000"/>
+              </a:lnSpc>
+              <a:spcAft>
+                <a:spcPts val="200"/>
+              </a:spcAft>
+            </a:pPr>
+            <a:r>
+              <a:rPr sz="1100" b="0">
                 <a:solidFill>
                   <a:srgbClr val="1C1C1E"/>
                 </a:solidFill>
                 <a:latin typeface="맑은 고딕"/>
                 <a:ea typeface="맑은 고딕"/>
               </a:rPr>
-              <a:t>지정 지역 병원에</a:t>
-            </a:r>
-          </a:p>
-          <a:p>
-            <a:pPr>
-              <a:lnSpc>
-                <a:spcPct val="114000"/>
-              </a:lnSpc>
-              <a:spcAft>
-                <a:spcPts val="0"/>
-              </a:spcAft>
-            </a:pPr>
-            <a:r>
-              <a:rPr sz="1150" b="0">
+              <a:t>• 분만취약지 = 소득·인구가 적은 지역이 아니라, 그 지역 가임기 여성이 ① 분만 가능 기관까지 60분 안에 닿기 어렵고(접근성) ② 실제 출산도 60분 안에 하지 못하는(이용률) 시·군</a:t>
+            </a:r>
+          </a:p>
+          <a:p>
+            <a:pPr marL="160020" indent="-160020">
+              <a:lnSpc>
+                <a:spcPct val="114000"/>
+              </a:lnSpc>
+              <a:spcAft>
+                <a:spcPts val="200"/>
+              </a:spcAft>
+            </a:pPr>
+            <a:r>
+              <a:rPr sz="1100" b="0">
                 <a:solidFill>
                   <a:srgbClr val="1C1C1E"/>
                 </a:solidFill>
                 <a:latin typeface="맑은 고딕"/>
                 <a:ea typeface="맑은 고딕"/>
               </a:rPr>
-              <a:t>시설·운영비 지원</a:t>
-            </a:r>
-          </a:p>
-        </p:txBody>
-      </p:sp>
-      <p:sp>
-        <p:nvSpPr>
-          <p:cNvPr id="16" name="Rounded Rectangle 15"/>
-          <p:cNvSpPr/>
-          <p:nvPr/>
-        </p:nvSpPr>
-        <p:spPr>
-          <a:xfrm>
-            <a:off x="502920" y="2788920"/>
-            <a:ext cx="5532120" cy="1783080"/>
-          </a:xfrm>
-          <a:prstGeom prst="roundRect">
-            <a:avLst>
-              <a:gd name="adj" fmla="val 4615"/>
-            </a:avLst>
-          </a:prstGeom>
-          <a:solidFill>
-            <a:srgbClr val="F1F2F3"/>
-          </a:solidFill>
-          <a:ln w="15875">
-            <a:solidFill>
-              <a:srgbClr val="9AA0A6"/>
-            </a:solidFill>
-          </a:ln>
-          <a:effectLst>
-            <a:outerShdw blurRad="182880" dist="64008" dir="5400000" rotWithShape="0">
-              <a:srgbClr val="000000">
-                <a:alpha val="32000"/>
-              </a:srgbClr>
-            </a:outerShdw>
-          </a:effectLst>
-        </p:spPr>
-        <p:style>
-          <a:lnRef idx="1">
-            <a:schemeClr val="accent1"/>
-          </a:lnRef>
-          <a:fillRef idx="3">
-            <a:schemeClr val="accent1"/>
-          </a:fillRef>
-          <a:effectRef idx="2">
-            <a:schemeClr val="accent1"/>
-          </a:effectRef>
-          <a:fontRef idx="minor">
-            <a:schemeClr val="lt1"/>
-          </a:fontRef>
-        </p:style>
-        <p:txBody>
-          <a:bodyPr rtlCol="0" anchor="ctr"/>
-          <a:lstStyle/>
-          <a:p>
-            <a:pPr algn="ctr"/>
+              <a:t>• 즉 이 제도에서 "취약"은 처음부터 끝까지 거리와 시간으로 정의된다 — 이 점이 본 연구의 첫 번째 표적이 된다</a:t>
+            </a:r>
+          </a:p>
+          <a:p>
+            <a:pPr marL="160020" indent="-160020">
+              <a:lnSpc>
+                <a:spcPct val="114000"/>
+              </a:lnSpc>
+              <a:spcAft>
+                <a:spcPts val="200"/>
+              </a:spcAft>
+            </a:pPr>
+            <a:r>
+              <a:rPr sz="1100" b="0">
+                <a:solidFill>
+                  <a:srgbClr val="1C1C1E"/>
+                </a:solidFill>
+                <a:latin typeface="맑은 고딕"/>
+                <a:ea typeface="맑은 고딕"/>
+              </a:rPr>
+              <a:t>• 정부는 2년마다 전국을 재어 A·B·C 등급을 매기고, 지정 지역 병원에 분만실 설치비 약 10억 원 + 연 운영비 약 5억 원을 지원 (15년 누적 57개소)</a:t>
+            </a:r>
           </a:p>
         </p:txBody>
       </p:sp>
@@ -7399,8 +8546,8 @@
         </p:nvSpPr>
         <p:spPr>
           <a:xfrm>
-            <a:off x="685800" y="2916936"/>
-            <a:ext cx="5166359" cy="1527048"/>
+            <a:off x="502920" y="5230368"/>
+            <a:ext cx="11247120" cy="1005840"/>
           </a:xfrm>
           <a:prstGeom prst="rect">
             <a:avLst/>
@@ -7418,392 +8565,38 @@
                 <a:spcPct val="114000"/>
               </a:lnSpc>
               <a:spcAft>
-                <a:spcPts val="350"/>
-              </a:spcAft>
-            </a:pPr>
-            <a:r>
-              <a:rPr sz="1300" b="1">
+                <a:spcPts val="400"/>
+              </a:spcAft>
+            </a:pPr>
+            <a:r>
+              <a:rPr sz="1500" b="1">
+                <a:solidFill>
+                  <a:srgbClr val="1C1C1E"/>
+                </a:solidFill>
+                <a:latin typeface="맑은 고딕"/>
+                <a:ea typeface="맑은 고딕"/>
+              </a:rPr>
+              <a:t>통로가 이미 깔려 있다면, 물어야 할 것은 "얼마나 부족한가"가 아니다.</a:t>
+            </a:r>
+          </a:p>
+          <a:p>
+            <a:pPr>
+              <a:lnSpc>
+                <a:spcPct val="114000"/>
+              </a:lnSpc>
+              <a:spcAft>
+                <a:spcPts val="0"/>
+              </a:spcAft>
+            </a:pPr>
+            <a:r>
+              <a:rPr sz="1500" b="1">
                 <a:solidFill>
                   <a:srgbClr val="000000"/>
                 </a:solidFill>
                 <a:latin typeface="맑은 고딕"/>
                 <a:ea typeface="맑은 고딕"/>
               </a:rPr>
-              <a:t>의심 1 — 지정 단계</a:t>
-            </a:r>
-          </a:p>
-          <a:p>
-            <a:pPr marL="160020" indent="-160020">
-              <a:lnSpc>
-                <a:spcPct val="114000"/>
-              </a:lnSpc>
-              <a:spcAft>
-                <a:spcPts val="200"/>
-              </a:spcAft>
-            </a:pPr>
-            <a:r>
-              <a:rPr sz="1150" b="0">
-                <a:solidFill>
-                  <a:srgbClr val="1C1C1E"/>
-                </a:solidFill>
-                <a:latin typeface="맑은 고딕"/>
-                <a:ea typeface="맑은 고딕"/>
-              </a:rPr>
-              <a:t>• 판정 기준은 이동시간 파생 지표뿐이다</a:t>
-            </a:r>
-          </a:p>
-          <a:p>
-            <a:pPr marL="160020" indent="-160020">
-              <a:lnSpc>
-                <a:spcPct val="114000"/>
-              </a:lnSpc>
-              <a:spcAft>
-                <a:spcPts val="200"/>
-              </a:spcAft>
-            </a:pPr>
-            <a:r>
-              <a:rPr sz="1150" b="0">
-                <a:solidFill>
-                  <a:srgbClr val="1C1C1E"/>
-                </a:solidFill>
-                <a:latin typeface="맑은 고딕"/>
-                <a:ea typeface="맑은 고딕"/>
-              </a:rPr>
-              <a:t>• 관내 분만 인프라가 소멸해도 "옆 도시로 60분 안에 갈 수 있으면" 취약지가 아니게 되는 구조 아닌가?</a:t>
-            </a:r>
-          </a:p>
-          <a:p>
-            <a:pPr>
-              <a:lnSpc>
-                <a:spcPct val="114000"/>
-              </a:lnSpc>
-              <a:spcAft>
-                <a:spcPts val="200"/>
-              </a:spcAft>
-            </a:pPr>
-            <a:r>
-              <a:rPr sz="1150" b="0">
-                <a:solidFill>
-                  <a:srgbClr val="1C1C1E"/>
-                </a:solidFill>
-                <a:latin typeface="맑은 고딕"/>
-                <a:ea typeface="맑은 고딕"/>
-              </a:rPr>
-              <a:t>→ 기준이 구조적으로 놓치는 지역이 있는지 검증한다</a:t>
-            </a:r>
-          </a:p>
-        </p:txBody>
-      </p:sp>
-      <p:sp>
-        <p:nvSpPr>
-          <p:cNvPr id="18" name="Rounded Rectangle 17"/>
-          <p:cNvSpPr/>
-          <p:nvPr/>
-        </p:nvSpPr>
-        <p:spPr>
-          <a:xfrm>
-            <a:off x="6263640" y="2788920"/>
-            <a:ext cx="5532120" cy="1783080"/>
-          </a:xfrm>
-          <a:prstGeom prst="roundRect">
-            <a:avLst>
-              <a:gd name="adj" fmla="val 4615"/>
-            </a:avLst>
-          </a:prstGeom>
-          <a:solidFill>
-            <a:srgbClr val="F1F2F3"/>
-          </a:solidFill>
-          <a:ln w="15875">
-            <a:solidFill>
-              <a:srgbClr val="9AA0A6"/>
-            </a:solidFill>
-          </a:ln>
-          <a:effectLst>
-            <a:outerShdw blurRad="182880" dist="64008" dir="5400000" rotWithShape="0">
-              <a:srgbClr val="000000">
-                <a:alpha val="32000"/>
-              </a:srgbClr>
-            </a:outerShdw>
-          </a:effectLst>
-        </p:spPr>
-        <p:style>
-          <a:lnRef idx="1">
-            <a:schemeClr val="accent1"/>
-          </a:lnRef>
-          <a:fillRef idx="3">
-            <a:schemeClr val="accent1"/>
-          </a:fillRef>
-          <a:effectRef idx="2">
-            <a:schemeClr val="accent1"/>
-          </a:effectRef>
-          <a:fontRef idx="minor">
-            <a:schemeClr val="lt1"/>
-          </a:fontRef>
-        </p:style>
-        <p:txBody>
-          <a:bodyPr rtlCol="0" anchor="ctr"/>
-          <a:lstStyle/>
-          <a:p>
-            <a:pPr algn="ctr"/>
-          </a:p>
-        </p:txBody>
-      </p:sp>
-      <p:sp>
-        <p:nvSpPr>
-          <p:cNvPr id="19" name="TextBox 18"/>
-          <p:cNvSpPr txBox="1"/>
-          <p:nvPr/>
-        </p:nvSpPr>
-        <p:spPr>
-          <a:xfrm>
-            <a:off x="6446520" y="2916936"/>
-            <a:ext cx="5166359" cy="1527048"/>
-          </a:xfrm>
-          <a:prstGeom prst="rect">
-            <a:avLst/>
-          </a:prstGeom>
-          <a:noFill/>
-        </p:spPr>
-        <p:txBody>
-          <a:bodyPr wrap="square" anchor="t">
-            <a:spAutoFit/>
-          </a:bodyPr>
-          <a:lstStyle/>
-          <a:p>
-            <a:pPr>
-              <a:lnSpc>
-                <a:spcPct val="114000"/>
-              </a:lnSpc>
-              <a:spcAft>
-                <a:spcPts val="350"/>
-              </a:spcAft>
-            </a:pPr>
-            <a:r>
-              <a:rPr sz="1300" b="1">
-                <a:solidFill>
-                  <a:srgbClr val="000000"/>
-                </a:solidFill>
-                <a:latin typeface="맑은 고딕"/>
-                <a:ea typeface="맑은 고딕"/>
-              </a:rPr>
-              <a:t>의심 2 — 배분 단계</a:t>
-            </a:r>
-          </a:p>
-          <a:p>
-            <a:pPr marL="160020" indent="-160020">
-              <a:lnSpc>
-                <a:spcPct val="114000"/>
-              </a:lnSpc>
-              <a:spcAft>
-                <a:spcPts val="200"/>
-              </a:spcAft>
-            </a:pPr>
-            <a:r>
-              <a:rPr sz="1150" b="0">
-                <a:solidFill>
-                  <a:srgbClr val="1C1C1E"/>
-                </a:solidFill>
-                <a:latin typeface="맑은 고딕"/>
-                <a:ea typeface="맑은 고딕"/>
-              </a:rPr>
-              <a:t>• 지원 심사 배점 100점 중 취약도 항목은 0점</a:t>
-            </a:r>
-          </a:p>
-          <a:p>
-            <a:pPr marL="160020" indent="-160020">
-              <a:lnSpc>
-                <a:spcPct val="114000"/>
-              </a:lnSpc>
-              <a:spcAft>
-                <a:spcPts val="200"/>
-              </a:spcAft>
-            </a:pPr>
-            <a:r>
-              <a:rPr sz="1150" b="0">
-                <a:solidFill>
-                  <a:srgbClr val="1C1C1E"/>
-                </a:solidFill>
-                <a:latin typeface="맑은 고딕"/>
-                <a:ea typeface="맑은 고딕"/>
-              </a:rPr>
-              <a:t>• 시·도 선별 기준은 "예산 규모, 의료 취약성 등 고려"가 전부 — 누구를 먼저 지원할지의 규칙이 있는가?</a:t>
-            </a:r>
-          </a:p>
-          <a:p>
-            <a:pPr>
-              <a:lnSpc>
-                <a:spcPct val="114000"/>
-              </a:lnSpc>
-              <a:spcAft>
-                <a:spcPts val="200"/>
-              </a:spcAft>
-            </a:pPr>
-            <a:r>
-              <a:rPr sz="1150" b="0">
-                <a:solidFill>
-                  <a:srgbClr val="1C1C1E"/>
-                </a:solidFill>
-                <a:latin typeface="맑은 고딕"/>
-                <a:ea typeface="맑은 고딕"/>
-              </a:rPr>
-              <a:t>→ 현행 배분이 무엇으로 설명되는지 진단한다</a:t>
-            </a:r>
-          </a:p>
-        </p:txBody>
-      </p:sp>
-      <p:sp>
-        <p:nvSpPr>
-          <p:cNvPr id="20" name="Rounded Rectangle 19"/>
-          <p:cNvSpPr/>
-          <p:nvPr/>
-        </p:nvSpPr>
-        <p:spPr>
-          <a:xfrm>
-            <a:off x="502920" y="4800600"/>
-            <a:ext cx="11292840" cy="1417320"/>
-          </a:xfrm>
-          <a:prstGeom prst="roundRect">
-            <a:avLst>
-              <a:gd name="adj" fmla="val 5806"/>
-            </a:avLst>
-          </a:prstGeom>
-          <a:solidFill>
-            <a:srgbClr val="FFFFFF"/>
-          </a:solidFill>
-          <a:ln w="12700">
-            <a:solidFill>
-              <a:srgbClr val="E4E6E9"/>
-            </a:solidFill>
-          </a:ln>
-          <a:effectLst>
-            <a:outerShdw blurRad="182880" dist="64008" dir="5400000" rotWithShape="0">
-              <a:srgbClr val="000000">
-                <a:alpha val="30000"/>
-              </a:srgbClr>
-            </a:outerShdw>
-          </a:effectLst>
-        </p:spPr>
-        <p:style>
-          <a:lnRef idx="1">
-            <a:schemeClr val="accent1"/>
-          </a:lnRef>
-          <a:fillRef idx="3">
-            <a:schemeClr val="accent1"/>
-          </a:fillRef>
-          <a:effectRef idx="2">
-            <a:schemeClr val="accent1"/>
-          </a:effectRef>
-          <a:fontRef idx="minor">
-            <a:schemeClr val="lt1"/>
-          </a:fontRef>
-        </p:style>
-        <p:txBody>
-          <a:bodyPr rtlCol="0" anchor="ctr"/>
-          <a:lstStyle/>
-          <a:p>
-            <a:pPr algn="ctr"/>
-          </a:p>
-        </p:txBody>
-      </p:sp>
-      <p:sp>
-        <p:nvSpPr>
-          <p:cNvPr id="21" name="TextBox 20"/>
-          <p:cNvSpPr txBox="1"/>
-          <p:nvPr/>
-        </p:nvSpPr>
-        <p:spPr>
-          <a:xfrm>
-            <a:off x="685800" y="4928616"/>
-            <a:ext cx="10927080" cy="1161288"/>
-          </a:xfrm>
-          <a:prstGeom prst="rect">
-            <a:avLst/>
-          </a:prstGeom>
-          <a:noFill/>
-        </p:spPr>
-        <p:txBody>
-          <a:bodyPr wrap="square" anchor="t">
-            <a:spAutoFit/>
-          </a:bodyPr>
-          <a:lstStyle/>
-          <a:p>
-            <a:pPr>
-              <a:lnSpc>
-                <a:spcPct val="114000"/>
-              </a:lnSpc>
-              <a:spcAft>
-                <a:spcPts val="350"/>
-              </a:spcAft>
-            </a:pPr>
-            <a:r>
-              <a:rPr sz="1300" b="1">
-                <a:solidFill>
-                  <a:srgbClr val="33393F"/>
-                </a:solidFill>
-                <a:latin typeface="맑은 고딕"/>
-                <a:ea typeface="맑은 고딕"/>
-              </a:rPr>
-              <a:t>왜 지금, 왜 데이터인가</a:t>
-            </a:r>
-          </a:p>
-          <a:p>
-            <a:pPr marL="160020" indent="-160020">
-              <a:lnSpc>
-                <a:spcPct val="114000"/>
-              </a:lnSpc>
-              <a:spcAft>
-                <a:spcPts val="200"/>
-              </a:spcAft>
-            </a:pPr>
-            <a:r>
-              <a:rPr sz="1150" b="0">
-                <a:solidFill>
-                  <a:srgbClr val="1C1C1E"/>
-                </a:solidFill>
-                <a:latin typeface="맑은 고딕"/>
-                <a:ea typeface="맑은 고딕"/>
-              </a:rPr>
-              <a:t>• 분만 인프라 공백은 언론·국회에서 반복 지적되어 왔으나, 전국 단위 공개 데이터로 정량 검증된 적이 없다</a:t>
-            </a:r>
-          </a:p>
-          <a:p>
-            <a:pPr marL="160020" indent="-160020">
-              <a:lnSpc>
-                <a:spcPct val="114000"/>
-              </a:lnSpc>
-              <a:spcAft>
-                <a:spcPts val="200"/>
-              </a:spcAft>
-            </a:pPr>
-            <a:r>
-              <a:rPr sz="1150" b="0">
-                <a:solidFill>
-                  <a:srgbClr val="1C1C1E"/>
-                </a:solidFill>
-                <a:latin typeface="맑은 고딕"/>
-                <a:ea typeface="맑은 고딕"/>
-              </a:rPr>
-              <a:t>• 분석 대상은 취약지라는 현상이 아니라, 취약지를 판정하고 지원하는 제도 그 자체다 (제도 감사 프레임)</a:t>
-            </a:r>
-          </a:p>
-          <a:p>
-            <a:pPr marL="160020" indent="-160020">
-              <a:lnSpc>
-                <a:spcPct val="114000"/>
-              </a:lnSpc>
-              <a:spcAft>
-                <a:spcPts val="200"/>
-              </a:spcAft>
-            </a:pPr>
-            <a:r>
-              <a:rPr sz="1150" b="0">
-                <a:solidFill>
-                  <a:srgbClr val="1C1C1E"/>
-                </a:solidFill>
-                <a:latin typeface="맑은 고딕"/>
-                <a:ea typeface="맑은 고딕"/>
-              </a:rPr>
-              <a:t>• 모든 판단 기준과 임계값은 정부 자신의 문서·데이터에서 가져와 실현 가능성을 확보할 계획이다</a:t>
+              <a:t>"지금 있는 것은 필요한 곳으로 제대로 가고 있는가" — 이 물음을 데이터로 검증하는 것이 본 계획이다.</a:t>
             </a:r>
           </a:p>
         </p:txBody>
@@ -7968,7 +8761,7 @@
                 <a:latin typeface="맑은 고딕"/>
                 <a:ea typeface="맑은 고딕"/>
               </a:rPr>
-              <a:t>연구 질문 (RQ) — 감사의 네 가지 물음</a:t>
+              <a:t>문제 인식 — 제도는 세 단계로 자원을 흘려보낸다</a:t>
             </a:r>
           </a:p>
         </p:txBody>
@@ -8076,8 +8869,8 @@
         </p:nvSpPr>
         <p:spPr>
           <a:xfrm>
-            <a:off x="502920" y="6492240"/>
-            <a:ext cx="11247120" cy="320040"/>
+            <a:off x="548640" y="1097280"/>
+            <a:ext cx="11155680" cy="384048"/>
           </a:xfrm>
           <a:prstGeom prst="rect">
             <a:avLst/>
@@ -8099,6 +8892,49 @@
               </a:spcAft>
             </a:pPr>
             <a:r>
+              <a:rPr sz="1250" b="0">
+                <a:solidFill>
+                  <a:srgbClr val="767A7F"/>
+                </a:solidFill>
+                <a:latin typeface="맑은 고딕"/>
+                <a:ea typeface="맑은 고딕"/>
+              </a:rPr>
+              <a:t>한 단계라도 막히거나 새면, 앞 단계가 아무리 정확해도 자원은 엉뚱한 곳으로 간다</a:t>
+            </a:r>
+          </a:p>
+        </p:txBody>
+      </p:sp>
+      <p:sp>
+        <p:nvSpPr>
+          <p:cNvPr id="8" name="TextBox 7"/>
+          <p:cNvSpPr txBox="1"/>
+          <p:nvPr/>
+        </p:nvSpPr>
+        <p:spPr>
+          <a:xfrm>
+            <a:off x="502920" y="6492240"/>
+            <a:ext cx="11247120" cy="320040"/>
+          </a:xfrm>
+          <a:prstGeom prst="rect">
+            <a:avLst/>
+          </a:prstGeom>
+          <a:noFill/>
+        </p:spPr>
+        <p:txBody>
+          <a:bodyPr wrap="square" anchor="t">
+            <a:spAutoFit/>
+          </a:bodyPr>
+          <a:lstStyle/>
+          <a:p>
+            <a:pPr>
+              <a:lnSpc>
+                <a:spcPct val="114000"/>
+              </a:lnSpc>
+              <a:spcAft>
+                <a:spcPts val="0"/>
+              </a:spcAft>
+            </a:pPr>
+            <a:r>
               <a:rPr sz="850" b="0">
                 <a:solidFill>
                   <a:srgbClr val="B2B5B9"/>
@@ -8113,18 +8949,18 @@
       </p:sp>
       <p:sp>
         <p:nvSpPr>
-          <p:cNvPr id="8" name="Rounded Rectangle 7"/>
+          <p:cNvPr id="9" name="Rounded Rectangle 8"/>
           <p:cNvSpPr/>
           <p:nvPr/>
         </p:nvSpPr>
         <p:spPr>
           <a:xfrm>
             <a:off x="502920" y="1371600"/>
-            <a:ext cx="5532120" cy="1737360"/>
+            <a:ext cx="3291840" cy="1298448"/>
           </a:xfrm>
           <a:prstGeom prst="roundRect">
             <a:avLst>
-              <a:gd name="adj" fmla="val 4736"/>
+              <a:gd name="adj" fmla="val 6338"/>
             </a:avLst>
           </a:prstGeom>
           <a:solidFill>
@@ -8167,14 +9003,1050 @@
       </p:sp>
       <p:sp>
         <p:nvSpPr>
-          <p:cNvPr id="9" name="Rounded Rectangle 8"/>
+          <p:cNvPr id="10" name="TextBox 9"/>
+          <p:cNvSpPr txBox="1"/>
+          <p:nvPr/>
+        </p:nvSpPr>
+        <p:spPr>
+          <a:xfrm>
+            <a:off x="667512" y="1444752"/>
+            <a:ext cx="3017520" cy="1152144"/>
+          </a:xfrm>
+          <a:prstGeom prst="rect">
+            <a:avLst/>
+          </a:prstGeom>
+          <a:noFill/>
+        </p:spPr>
+        <p:txBody>
+          <a:bodyPr wrap="square" anchor="t">
+            <a:spAutoFit/>
+          </a:bodyPr>
+          <a:lstStyle/>
+          <a:p>
+            <a:pPr>
+              <a:lnSpc>
+                <a:spcPct val="114000"/>
+              </a:lnSpc>
+              <a:spcAft>
+                <a:spcPts val="300"/>
+              </a:spcAft>
+            </a:pPr>
+            <a:r>
+              <a:rPr sz="1500" b="1">
+                <a:solidFill>
+                  <a:srgbClr val="33393F"/>
+                </a:solidFill>
+                <a:latin typeface="맑은 고딕"/>
+                <a:ea typeface="맑은 고딕"/>
+              </a:rPr>
+              <a:t>① 측정</a:t>
+            </a:r>
+          </a:p>
+          <a:p>
+            <a:pPr>
+              <a:lnSpc>
+                <a:spcPct val="114000"/>
+              </a:lnSpc>
+              <a:spcAft>
+                <a:spcPts val="0"/>
+              </a:spcAft>
+            </a:pPr>
+            <a:r>
+              <a:rPr sz="1050" b="0">
+                <a:solidFill>
+                  <a:srgbClr val="1C1C1E"/>
+                </a:solidFill>
+                <a:latin typeface="맑은 고딕"/>
+                <a:ea typeface="맑은 고딕"/>
+              </a:rPr>
+              <a:t>2년마다 전국 시·군·구의</a:t>
+            </a:r>
+          </a:p>
+          <a:p>
+            <a:pPr>
+              <a:lnSpc>
+                <a:spcPct val="114000"/>
+              </a:lnSpc>
+              <a:spcAft>
+                <a:spcPts val="0"/>
+              </a:spcAft>
+            </a:pPr>
+            <a:r>
+              <a:rPr sz="1050" b="0">
+                <a:solidFill>
+                  <a:srgbClr val="1C1C1E"/>
+                </a:solidFill>
+                <a:latin typeface="맑은 고딕"/>
+                <a:ea typeface="맑은 고딕"/>
+              </a:rPr>
+              <a:t>분만실 60분 접근성과</a:t>
+            </a:r>
+          </a:p>
+          <a:p>
+            <a:pPr>
+              <a:lnSpc>
+                <a:spcPct val="114000"/>
+              </a:lnSpc>
+              <a:spcAft>
+                <a:spcPts val="0"/>
+              </a:spcAft>
+            </a:pPr>
+            <a:r>
+              <a:rPr sz="1050" b="0">
+                <a:solidFill>
+                  <a:srgbClr val="1C1C1E"/>
+                </a:solidFill>
+                <a:latin typeface="맑은 고딕"/>
+                <a:ea typeface="맑은 고딕"/>
+              </a:rPr>
+              <a:t>실제 분만 이동시간을 산출</a:t>
+            </a:r>
+          </a:p>
+        </p:txBody>
+      </p:sp>
+      <p:sp>
+        <p:nvSpPr>
+          <p:cNvPr id="11" name="TextBox 10"/>
+          <p:cNvSpPr txBox="1"/>
+          <p:nvPr/>
+        </p:nvSpPr>
+        <p:spPr>
+          <a:xfrm>
+            <a:off x="3813048" y="1783080"/>
+            <a:ext cx="685800" cy="548640"/>
+          </a:xfrm>
+          <a:prstGeom prst="rect">
+            <a:avLst/>
+          </a:prstGeom>
+          <a:noFill/>
+        </p:spPr>
+        <p:txBody>
+          <a:bodyPr wrap="square" anchor="t">
+            <a:spAutoFit/>
+          </a:bodyPr>
+          <a:lstStyle/>
+          <a:p>
+            <a:pPr>
+              <a:lnSpc>
+                <a:spcPct val="114000"/>
+              </a:lnSpc>
+              <a:spcAft>
+                <a:spcPts val="0"/>
+              </a:spcAft>
+            </a:pPr>
+            <a:r>
+              <a:rPr sz="2200" b="1">
+                <a:solidFill>
+                  <a:srgbClr val="767A7F"/>
+                </a:solidFill>
+                <a:latin typeface="맑은 고딕"/>
+                <a:ea typeface="맑은 고딕"/>
+              </a:rPr>
+              <a:t>→</a:t>
+            </a:r>
+          </a:p>
+        </p:txBody>
+      </p:sp>
+      <p:sp>
+        <p:nvSpPr>
+          <p:cNvPr id="12" name="Rounded Rectangle 11"/>
           <p:cNvSpPr/>
           <p:nvPr/>
         </p:nvSpPr>
         <p:spPr>
           <a:xfrm>
-            <a:off x="521208" y="1600200"/>
-            <a:ext cx="82296" cy="1280160"/>
+            <a:off x="4480559" y="1371600"/>
+            <a:ext cx="3291840" cy="1298448"/>
+          </a:xfrm>
+          <a:prstGeom prst="roundRect">
+            <a:avLst>
+              <a:gd name="adj" fmla="val 6338"/>
+            </a:avLst>
+          </a:prstGeom>
+          <a:solidFill>
+            <a:srgbClr val="FFFFFF"/>
+          </a:solidFill>
+          <a:ln w="12700">
+            <a:solidFill>
+              <a:srgbClr val="E4E6E9"/>
+            </a:solidFill>
+          </a:ln>
+          <a:effectLst>
+            <a:outerShdw blurRad="182880" dist="64008" dir="5400000" rotWithShape="0">
+              <a:srgbClr val="000000">
+                <a:alpha val="30000"/>
+              </a:srgbClr>
+            </a:outerShdw>
+          </a:effectLst>
+        </p:spPr>
+        <p:style>
+          <a:lnRef idx="1">
+            <a:schemeClr val="accent1"/>
+          </a:lnRef>
+          <a:fillRef idx="3">
+            <a:schemeClr val="accent1"/>
+          </a:fillRef>
+          <a:effectRef idx="2">
+            <a:schemeClr val="accent1"/>
+          </a:effectRef>
+          <a:fontRef idx="minor">
+            <a:schemeClr val="lt1"/>
+          </a:fontRef>
+        </p:style>
+        <p:txBody>
+          <a:bodyPr rtlCol="0" anchor="ctr"/>
+          <a:lstStyle/>
+          <a:p>
+            <a:pPr algn="ctr"/>
+          </a:p>
+        </p:txBody>
+      </p:sp>
+      <p:sp>
+        <p:nvSpPr>
+          <p:cNvPr id="13" name="TextBox 12"/>
+          <p:cNvSpPr txBox="1"/>
+          <p:nvPr/>
+        </p:nvSpPr>
+        <p:spPr>
+          <a:xfrm>
+            <a:off x="4645151" y="1444752"/>
+            <a:ext cx="3017520" cy="1152144"/>
+          </a:xfrm>
+          <a:prstGeom prst="rect">
+            <a:avLst/>
+          </a:prstGeom>
+          <a:noFill/>
+        </p:spPr>
+        <p:txBody>
+          <a:bodyPr wrap="square" anchor="t">
+            <a:spAutoFit/>
+          </a:bodyPr>
+          <a:lstStyle/>
+          <a:p>
+            <a:pPr>
+              <a:lnSpc>
+                <a:spcPct val="114000"/>
+              </a:lnSpc>
+              <a:spcAft>
+                <a:spcPts val="300"/>
+              </a:spcAft>
+            </a:pPr>
+            <a:r>
+              <a:rPr sz="1500" b="1">
+                <a:solidFill>
+                  <a:srgbClr val="33393F"/>
+                </a:solidFill>
+                <a:latin typeface="맑은 고딕"/>
+                <a:ea typeface="맑은 고딕"/>
+              </a:rPr>
+              <a:t>② 지정</a:t>
+            </a:r>
+          </a:p>
+          <a:p>
+            <a:pPr>
+              <a:lnSpc>
+                <a:spcPct val="114000"/>
+              </a:lnSpc>
+              <a:spcAft>
+                <a:spcPts val="0"/>
+              </a:spcAft>
+            </a:pPr>
+            <a:r>
+              <a:rPr sz="1050" b="0">
+                <a:solidFill>
+                  <a:srgbClr val="1C1C1E"/>
+                </a:solidFill>
+                <a:latin typeface="맑은 고딕"/>
+                <a:ea typeface="맑은 고딕"/>
+              </a:rPr>
+              <a:t>그 값을 임계값(30/30)과 대조해</a:t>
+            </a:r>
+          </a:p>
+          <a:p>
+            <a:pPr>
+              <a:lnSpc>
+                <a:spcPct val="114000"/>
+              </a:lnSpc>
+              <a:spcAft>
+                <a:spcPts val="0"/>
+              </a:spcAft>
+            </a:pPr>
+            <a:r>
+              <a:rPr sz="1050" b="0">
+                <a:solidFill>
+                  <a:srgbClr val="1C1C1E"/>
+                </a:solidFill>
+                <a:latin typeface="맑은 고딕"/>
+                <a:ea typeface="맑은 고딕"/>
+              </a:rPr>
+              <a:t>분만취약지를 판정하고</a:t>
+            </a:r>
+          </a:p>
+          <a:p>
+            <a:pPr>
+              <a:lnSpc>
+                <a:spcPct val="114000"/>
+              </a:lnSpc>
+              <a:spcAft>
+                <a:spcPts val="0"/>
+              </a:spcAft>
+            </a:pPr>
+            <a:r>
+              <a:rPr sz="1050" b="0">
+                <a:solidFill>
+                  <a:srgbClr val="1C1C1E"/>
+                </a:solidFill>
+                <a:latin typeface="맑은 고딕"/>
+                <a:ea typeface="맑은 고딕"/>
+              </a:rPr>
+              <a:t>A·B·C 등급 부여</a:t>
+            </a:r>
+          </a:p>
+        </p:txBody>
+      </p:sp>
+      <p:sp>
+        <p:nvSpPr>
+          <p:cNvPr id="14" name="TextBox 13"/>
+          <p:cNvSpPr txBox="1"/>
+          <p:nvPr/>
+        </p:nvSpPr>
+        <p:spPr>
+          <a:xfrm>
+            <a:off x="7790688" y="1783080"/>
+            <a:ext cx="685800" cy="548640"/>
+          </a:xfrm>
+          <a:prstGeom prst="rect">
+            <a:avLst/>
+          </a:prstGeom>
+          <a:noFill/>
+        </p:spPr>
+        <p:txBody>
+          <a:bodyPr wrap="square" anchor="t">
+            <a:spAutoFit/>
+          </a:bodyPr>
+          <a:lstStyle/>
+          <a:p>
+            <a:pPr>
+              <a:lnSpc>
+                <a:spcPct val="114000"/>
+              </a:lnSpc>
+              <a:spcAft>
+                <a:spcPts val="0"/>
+              </a:spcAft>
+            </a:pPr>
+            <a:r>
+              <a:rPr sz="2200" b="1">
+                <a:solidFill>
+                  <a:srgbClr val="767A7F"/>
+                </a:solidFill>
+                <a:latin typeface="맑은 고딕"/>
+                <a:ea typeface="맑은 고딕"/>
+              </a:rPr>
+              <a:t>→</a:t>
+            </a:r>
+          </a:p>
+        </p:txBody>
+      </p:sp>
+      <p:sp>
+        <p:nvSpPr>
+          <p:cNvPr id="15" name="Rounded Rectangle 14"/>
+          <p:cNvSpPr/>
+          <p:nvPr/>
+        </p:nvSpPr>
+        <p:spPr>
+          <a:xfrm>
+            <a:off x="8458200" y="1371600"/>
+            <a:ext cx="3291840" cy="1298448"/>
+          </a:xfrm>
+          <a:prstGeom prst="roundRect">
+            <a:avLst>
+              <a:gd name="adj" fmla="val 6338"/>
+            </a:avLst>
+          </a:prstGeom>
+          <a:solidFill>
+            <a:srgbClr val="FFFFFF"/>
+          </a:solidFill>
+          <a:ln w="12700">
+            <a:solidFill>
+              <a:srgbClr val="E4E6E9"/>
+            </a:solidFill>
+          </a:ln>
+          <a:effectLst>
+            <a:outerShdw blurRad="182880" dist="64008" dir="5400000" rotWithShape="0">
+              <a:srgbClr val="000000">
+                <a:alpha val="30000"/>
+              </a:srgbClr>
+            </a:outerShdw>
+          </a:effectLst>
+        </p:spPr>
+        <p:style>
+          <a:lnRef idx="1">
+            <a:schemeClr val="accent1"/>
+          </a:lnRef>
+          <a:fillRef idx="3">
+            <a:schemeClr val="accent1"/>
+          </a:fillRef>
+          <a:effectRef idx="2">
+            <a:schemeClr val="accent1"/>
+          </a:effectRef>
+          <a:fontRef idx="minor">
+            <a:schemeClr val="lt1"/>
+          </a:fontRef>
+        </p:style>
+        <p:txBody>
+          <a:bodyPr rtlCol="0" anchor="ctr"/>
+          <a:lstStyle/>
+          <a:p>
+            <a:pPr algn="ctr"/>
+          </a:p>
+        </p:txBody>
+      </p:sp>
+      <p:sp>
+        <p:nvSpPr>
+          <p:cNvPr id="16" name="TextBox 15"/>
+          <p:cNvSpPr txBox="1"/>
+          <p:nvPr/>
+        </p:nvSpPr>
+        <p:spPr>
+          <a:xfrm>
+            <a:off x="8622792" y="1444752"/>
+            <a:ext cx="3017520" cy="1152144"/>
+          </a:xfrm>
+          <a:prstGeom prst="rect">
+            <a:avLst/>
+          </a:prstGeom>
+          <a:noFill/>
+        </p:spPr>
+        <p:txBody>
+          <a:bodyPr wrap="square" anchor="t">
+            <a:spAutoFit/>
+          </a:bodyPr>
+          <a:lstStyle/>
+          <a:p>
+            <a:pPr>
+              <a:lnSpc>
+                <a:spcPct val="114000"/>
+              </a:lnSpc>
+              <a:spcAft>
+                <a:spcPts val="300"/>
+              </a:spcAft>
+            </a:pPr>
+            <a:r>
+              <a:rPr sz="1500" b="1">
+                <a:solidFill>
+                  <a:srgbClr val="33393F"/>
+                </a:solidFill>
+                <a:latin typeface="맑은 고딕"/>
+                <a:ea typeface="맑은 고딕"/>
+              </a:rPr>
+              <a:t>③ 배분</a:t>
+            </a:r>
+          </a:p>
+          <a:p>
+            <a:pPr>
+              <a:lnSpc>
+                <a:spcPct val="114000"/>
+              </a:lnSpc>
+              <a:spcAft>
+                <a:spcPts val="0"/>
+              </a:spcAft>
+            </a:pPr>
+            <a:r>
+              <a:rPr sz="1050" b="0">
+                <a:solidFill>
+                  <a:srgbClr val="1C1C1E"/>
+                </a:solidFill>
+                <a:latin typeface="맑은 고딕"/>
+                <a:ea typeface="맑은 고딕"/>
+              </a:rPr>
+              <a:t>지정 지역의 병원 한 곳을 골라</a:t>
+            </a:r>
+          </a:p>
+          <a:p>
+            <a:pPr>
+              <a:lnSpc>
+                <a:spcPct val="114000"/>
+              </a:lnSpc>
+              <a:spcAft>
+                <a:spcPts val="0"/>
+              </a:spcAft>
+            </a:pPr>
+            <a:r>
+              <a:rPr sz="1050" b="0">
+                <a:solidFill>
+                  <a:srgbClr val="1C1C1E"/>
+                </a:solidFill>
+                <a:latin typeface="맑은 고딕"/>
+                <a:ea typeface="맑은 고딕"/>
+              </a:rPr>
+              <a:t>분만실 설치비·운영비 지급</a:t>
+            </a:r>
+          </a:p>
+          <a:p>
+            <a:pPr>
+              <a:lnSpc>
+                <a:spcPct val="114000"/>
+              </a:lnSpc>
+              <a:spcAft>
+                <a:spcPts val="0"/>
+              </a:spcAft>
+            </a:pPr>
+            <a:r>
+              <a:rPr sz="1050" b="0">
+                <a:solidFill>
+                  <a:srgbClr val="1C1C1E"/>
+                </a:solidFill>
+                <a:latin typeface="맑은 고딕"/>
+                <a:ea typeface="맑은 고딕"/>
+              </a:rPr>
+              <a:t>(설치 약 10억 + 연 5억)</a:t>
+            </a:r>
+          </a:p>
+        </p:txBody>
+      </p:sp>
+      <p:sp>
+        <p:nvSpPr>
+          <p:cNvPr id="17" name="Rounded Rectangle 16"/>
+          <p:cNvSpPr/>
+          <p:nvPr/>
+        </p:nvSpPr>
+        <p:spPr>
+          <a:xfrm>
+            <a:off x="502920" y="2926080"/>
+            <a:ext cx="5532120" cy="1783080"/>
+          </a:xfrm>
+          <a:prstGeom prst="roundRect">
+            <a:avLst>
+              <a:gd name="adj" fmla="val 4615"/>
+            </a:avLst>
+          </a:prstGeom>
+          <a:solidFill>
+            <a:srgbClr val="F1F2F3"/>
+          </a:solidFill>
+          <a:ln w="15875">
+            <a:solidFill>
+              <a:srgbClr val="9AA0A6"/>
+            </a:solidFill>
+          </a:ln>
+          <a:effectLst>
+            <a:outerShdw blurRad="182880" dist="64008" dir="5400000" rotWithShape="0">
+              <a:srgbClr val="000000">
+                <a:alpha val="32000"/>
+              </a:srgbClr>
+            </a:outerShdw>
+          </a:effectLst>
+        </p:spPr>
+        <p:style>
+          <a:lnRef idx="1">
+            <a:schemeClr val="accent1"/>
+          </a:lnRef>
+          <a:fillRef idx="3">
+            <a:schemeClr val="accent1"/>
+          </a:fillRef>
+          <a:effectRef idx="2">
+            <a:schemeClr val="accent1"/>
+          </a:effectRef>
+          <a:fontRef idx="minor">
+            <a:schemeClr val="lt1"/>
+          </a:fontRef>
+        </p:style>
+        <p:txBody>
+          <a:bodyPr rtlCol="0" anchor="ctr"/>
+          <a:lstStyle/>
+          <a:p>
+            <a:pPr algn="ctr"/>
+          </a:p>
+        </p:txBody>
+      </p:sp>
+      <p:sp>
+        <p:nvSpPr>
+          <p:cNvPr id="18" name="TextBox 17"/>
+          <p:cNvSpPr txBox="1"/>
+          <p:nvPr/>
+        </p:nvSpPr>
+        <p:spPr>
+          <a:xfrm>
+            <a:off x="685800" y="3054096"/>
+            <a:ext cx="5166359" cy="1527048"/>
+          </a:xfrm>
+          <a:prstGeom prst="rect">
+            <a:avLst/>
+          </a:prstGeom>
+          <a:noFill/>
+        </p:spPr>
+        <p:txBody>
+          <a:bodyPr wrap="square" anchor="t">
+            <a:spAutoFit/>
+          </a:bodyPr>
+          <a:lstStyle/>
+          <a:p>
+            <a:pPr>
+              <a:lnSpc>
+                <a:spcPct val="114000"/>
+              </a:lnSpc>
+              <a:spcAft>
+                <a:spcPts val="350"/>
+              </a:spcAft>
+            </a:pPr>
+            <a:r>
+              <a:rPr sz="1300" b="1">
+                <a:solidFill>
+                  <a:srgbClr val="000000"/>
+                </a:solidFill>
+                <a:latin typeface="맑은 고딕"/>
+                <a:ea typeface="맑은 고딕"/>
+              </a:rPr>
+              <a:t>의심 1 — 지정 단계</a:t>
+            </a:r>
+          </a:p>
+          <a:p>
+            <a:pPr marL="160020" indent="-160020">
+              <a:lnSpc>
+                <a:spcPct val="114000"/>
+              </a:lnSpc>
+              <a:spcAft>
+                <a:spcPts val="200"/>
+              </a:spcAft>
+            </a:pPr>
+            <a:r>
+              <a:rPr sz="1150" b="0">
+                <a:solidFill>
+                  <a:srgbClr val="1C1C1E"/>
+                </a:solidFill>
+                <a:latin typeface="맑은 고딕"/>
+                <a:ea typeface="맑은 고딕"/>
+              </a:rPr>
+              <a:t>• 판정 기준은 이동시간 파생 지표뿐이다</a:t>
+            </a:r>
+          </a:p>
+          <a:p>
+            <a:pPr marL="160020" indent="-160020">
+              <a:lnSpc>
+                <a:spcPct val="114000"/>
+              </a:lnSpc>
+              <a:spcAft>
+                <a:spcPts val="200"/>
+              </a:spcAft>
+            </a:pPr>
+            <a:r>
+              <a:rPr sz="1150" b="0">
+                <a:solidFill>
+                  <a:srgbClr val="1C1C1E"/>
+                </a:solidFill>
+                <a:latin typeface="맑은 고딕"/>
+                <a:ea typeface="맑은 고딕"/>
+              </a:rPr>
+              <a:t>• 관내 분만 인프라가 소멸해도 "옆 도시로 60분 안에 갈 수 있으면" 취약지가 아니게 되는 구조 아닌가?</a:t>
+            </a:r>
+          </a:p>
+          <a:p>
+            <a:pPr>
+              <a:lnSpc>
+                <a:spcPct val="114000"/>
+              </a:lnSpc>
+              <a:spcAft>
+                <a:spcPts val="200"/>
+              </a:spcAft>
+            </a:pPr>
+            <a:r>
+              <a:rPr sz="1150" b="0">
+                <a:solidFill>
+                  <a:srgbClr val="1C1C1E"/>
+                </a:solidFill>
+                <a:latin typeface="맑은 고딕"/>
+                <a:ea typeface="맑은 고딕"/>
+              </a:rPr>
+              <a:t>→ 기준이 구조적으로 놓치는 지역이 있는지 검증한다</a:t>
+            </a:r>
+          </a:p>
+        </p:txBody>
+      </p:sp>
+      <p:sp>
+        <p:nvSpPr>
+          <p:cNvPr id="19" name="Rounded Rectangle 18"/>
+          <p:cNvSpPr/>
+          <p:nvPr/>
+        </p:nvSpPr>
+        <p:spPr>
+          <a:xfrm>
+            <a:off x="6263640" y="2926080"/>
+            <a:ext cx="5532120" cy="1783080"/>
+          </a:xfrm>
+          <a:prstGeom prst="roundRect">
+            <a:avLst>
+              <a:gd name="adj" fmla="val 4615"/>
+            </a:avLst>
+          </a:prstGeom>
+          <a:solidFill>
+            <a:srgbClr val="F1F2F3"/>
+          </a:solidFill>
+          <a:ln w="15875">
+            <a:solidFill>
+              <a:srgbClr val="9AA0A6"/>
+            </a:solidFill>
+          </a:ln>
+          <a:effectLst>
+            <a:outerShdw blurRad="182880" dist="64008" dir="5400000" rotWithShape="0">
+              <a:srgbClr val="000000">
+                <a:alpha val="32000"/>
+              </a:srgbClr>
+            </a:outerShdw>
+          </a:effectLst>
+        </p:spPr>
+        <p:style>
+          <a:lnRef idx="1">
+            <a:schemeClr val="accent1"/>
+          </a:lnRef>
+          <a:fillRef idx="3">
+            <a:schemeClr val="accent1"/>
+          </a:fillRef>
+          <a:effectRef idx="2">
+            <a:schemeClr val="accent1"/>
+          </a:effectRef>
+          <a:fontRef idx="minor">
+            <a:schemeClr val="lt1"/>
+          </a:fontRef>
+        </p:style>
+        <p:txBody>
+          <a:bodyPr rtlCol="0" anchor="ctr"/>
+          <a:lstStyle/>
+          <a:p>
+            <a:pPr algn="ctr"/>
+          </a:p>
+        </p:txBody>
+      </p:sp>
+      <p:sp>
+        <p:nvSpPr>
+          <p:cNvPr id="20" name="TextBox 19"/>
+          <p:cNvSpPr txBox="1"/>
+          <p:nvPr/>
+        </p:nvSpPr>
+        <p:spPr>
+          <a:xfrm>
+            <a:off x="6446520" y="3054096"/>
+            <a:ext cx="5166359" cy="1527048"/>
+          </a:xfrm>
+          <a:prstGeom prst="rect">
+            <a:avLst/>
+          </a:prstGeom>
+          <a:noFill/>
+        </p:spPr>
+        <p:txBody>
+          <a:bodyPr wrap="square" anchor="t">
+            <a:spAutoFit/>
+          </a:bodyPr>
+          <a:lstStyle/>
+          <a:p>
+            <a:pPr>
+              <a:lnSpc>
+                <a:spcPct val="114000"/>
+              </a:lnSpc>
+              <a:spcAft>
+                <a:spcPts val="350"/>
+              </a:spcAft>
+            </a:pPr>
+            <a:r>
+              <a:rPr sz="1300" b="1">
+                <a:solidFill>
+                  <a:srgbClr val="000000"/>
+                </a:solidFill>
+                <a:latin typeface="맑은 고딕"/>
+                <a:ea typeface="맑은 고딕"/>
+              </a:rPr>
+              <a:t>의심 2 — 배분 단계</a:t>
+            </a:r>
+          </a:p>
+          <a:p>
+            <a:pPr marL="160020" indent="-160020">
+              <a:lnSpc>
+                <a:spcPct val="114000"/>
+              </a:lnSpc>
+              <a:spcAft>
+                <a:spcPts val="200"/>
+              </a:spcAft>
+            </a:pPr>
+            <a:r>
+              <a:rPr sz="1150" b="0">
+                <a:solidFill>
+                  <a:srgbClr val="1C1C1E"/>
+                </a:solidFill>
+                <a:latin typeface="맑은 고딕"/>
+                <a:ea typeface="맑은 고딕"/>
+              </a:rPr>
+              <a:t>• 지원 심사 배점 100점 중 취약도 항목은 0점</a:t>
+            </a:r>
+          </a:p>
+          <a:p>
+            <a:pPr marL="160020" indent="-160020">
+              <a:lnSpc>
+                <a:spcPct val="114000"/>
+              </a:lnSpc>
+              <a:spcAft>
+                <a:spcPts val="200"/>
+              </a:spcAft>
+            </a:pPr>
+            <a:r>
+              <a:rPr sz="1150" b="0">
+                <a:solidFill>
+                  <a:srgbClr val="1C1C1E"/>
+                </a:solidFill>
+                <a:latin typeface="맑은 고딕"/>
+                <a:ea typeface="맑은 고딕"/>
+              </a:rPr>
+              <a:t>• 시·도 선별 기준은 "예산 규모, 의료 취약성 등 고려"가 전부 — 누구를 먼저 지원할지의 규칙이 있는가?</a:t>
+            </a:r>
+          </a:p>
+          <a:p>
+            <a:pPr>
+              <a:lnSpc>
+                <a:spcPct val="114000"/>
+              </a:lnSpc>
+              <a:spcAft>
+                <a:spcPts val="200"/>
+              </a:spcAft>
+            </a:pPr>
+            <a:r>
+              <a:rPr sz="1150" b="0">
+                <a:solidFill>
+                  <a:srgbClr val="1C1C1E"/>
+                </a:solidFill>
+                <a:latin typeface="맑은 고딕"/>
+                <a:ea typeface="맑은 고딕"/>
+              </a:rPr>
+              <a:t>→ 현행 배분이 무엇으로 설명되는지 진단한다</a:t>
+            </a:r>
+          </a:p>
+        </p:txBody>
+      </p:sp>
+      <p:sp>
+        <p:nvSpPr>
+          <p:cNvPr id="21" name="Rounded Rectangle 20"/>
+          <p:cNvSpPr/>
+          <p:nvPr/>
+        </p:nvSpPr>
+        <p:spPr>
+          <a:xfrm>
+            <a:off x="502920" y="4892040"/>
+            <a:ext cx="11292840" cy="1371600"/>
+          </a:xfrm>
+          <a:prstGeom prst="roundRect">
+            <a:avLst>
+              <a:gd name="adj" fmla="val 6000"/>
+            </a:avLst>
+          </a:prstGeom>
+          <a:solidFill>
+            <a:srgbClr val="FFFFFF"/>
+          </a:solidFill>
+          <a:ln w="12700">
+            <a:solidFill>
+              <a:srgbClr val="E4E6E9"/>
+            </a:solidFill>
+          </a:ln>
+          <a:effectLst>
+            <a:outerShdw blurRad="182880" dist="64008" dir="5400000" rotWithShape="0">
+              <a:srgbClr val="000000">
+                <a:alpha val="30000"/>
+              </a:srgbClr>
+            </a:outerShdw>
+          </a:effectLst>
+        </p:spPr>
+        <p:style>
+          <a:lnRef idx="1">
+            <a:schemeClr val="accent1"/>
+          </a:lnRef>
+          <a:fillRef idx="3">
+            <a:schemeClr val="accent1"/>
+          </a:fillRef>
+          <a:effectRef idx="2">
+            <a:schemeClr val="accent1"/>
+          </a:effectRef>
+          <a:fontRef idx="minor">
+            <a:schemeClr val="lt1"/>
+          </a:fontRef>
+        </p:style>
+        <p:txBody>
+          <a:bodyPr rtlCol="0" anchor="ctr"/>
+          <a:lstStyle/>
+          <a:p>
+            <a:pPr algn="ctr"/>
+          </a:p>
+        </p:txBody>
+      </p:sp>
+      <p:sp>
+        <p:nvSpPr>
+          <p:cNvPr id="22" name="TextBox 21"/>
+          <p:cNvSpPr txBox="1"/>
+          <p:nvPr/>
+        </p:nvSpPr>
+        <p:spPr>
+          <a:xfrm>
+            <a:off x="685800" y="5020055"/>
+            <a:ext cx="10927080" cy="1115568"/>
+          </a:xfrm>
+          <a:prstGeom prst="rect">
+            <a:avLst/>
+          </a:prstGeom>
+          <a:noFill/>
+        </p:spPr>
+        <p:txBody>
+          <a:bodyPr wrap="square" anchor="t">
+            <a:spAutoFit/>
+          </a:bodyPr>
+          <a:lstStyle/>
+          <a:p>
+            <a:pPr>
+              <a:lnSpc>
+                <a:spcPct val="114000"/>
+              </a:lnSpc>
+              <a:spcAft>
+                <a:spcPts val="350"/>
+              </a:spcAft>
+            </a:pPr>
+            <a:r>
+              <a:rPr sz="1300" b="1">
+                <a:solidFill>
+                  <a:srgbClr val="33393F"/>
+                </a:solidFill>
+                <a:latin typeface="맑은 고딕"/>
+                <a:ea typeface="맑은 고딕"/>
+              </a:rPr>
+              <a:t>왜 지금, 왜 데이터인가</a:t>
+            </a:r>
+          </a:p>
+          <a:p>
+            <a:pPr marL="160020" indent="-160020">
+              <a:lnSpc>
+                <a:spcPct val="114000"/>
+              </a:lnSpc>
+              <a:spcAft>
+                <a:spcPts val="200"/>
+              </a:spcAft>
+            </a:pPr>
+            <a:r>
+              <a:rPr sz="1150" b="0">
+                <a:solidFill>
+                  <a:srgbClr val="1C1C1E"/>
+                </a:solidFill>
+                <a:latin typeface="맑은 고딕"/>
+                <a:ea typeface="맑은 고딕"/>
+              </a:rPr>
+              <a:t>• 분만 인프라 공백은 언론·국회에서 반복 지적되어 왔으나, 전국 단위 공개 데이터로 정량 검증된 적이 없다</a:t>
+            </a:r>
+          </a:p>
+          <a:p>
+            <a:pPr marL="160020" indent="-160020">
+              <a:lnSpc>
+                <a:spcPct val="114000"/>
+              </a:lnSpc>
+              <a:spcAft>
+                <a:spcPts val="200"/>
+              </a:spcAft>
+            </a:pPr>
+            <a:r>
+              <a:rPr sz="1150" b="0">
+                <a:solidFill>
+                  <a:srgbClr val="1C1C1E"/>
+                </a:solidFill>
+                <a:latin typeface="맑은 고딕"/>
+                <a:ea typeface="맑은 고딕"/>
+              </a:rPr>
+              <a:t>• 분석 대상은 취약지라는 현상이 아니라, 취약지를 판정하고 지원하는 제도 그 자체다 (제도 감사 프레임)</a:t>
+            </a:r>
+          </a:p>
+          <a:p>
+            <a:pPr marL="160020" indent="-160020">
+              <a:lnSpc>
+                <a:spcPct val="114000"/>
+              </a:lnSpc>
+              <a:spcAft>
+                <a:spcPts val="200"/>
+              </a:spcAft>
+            </a:pPr>
+            <a:r>
+              <a:rPr sz="1150" b="0">
+                <a:solidFill>
+                  <a:srgbClr val="1C1C1E"/>
+                </a:solidFill>
+                <a:latin typeface="맑은 고딕"/>
+                <a:ea typeface="맑은 고딕"/>
+              </a:rPr>
+              <a:t>• 모든 판단 기준과 임계값은 정부 자신의 문서·데이터에서 가져와 실현 가능성을 확보할 계획이다</a:t>
+            </a:r>
+          </a:p>
+        </p:txBody>
+      </p:sp>
+    </p:spTree>
+  </p:cSld>
+  <p:clrMapOvr>
+    <a:masterClrMapping/>
+  </p:clrMapOvr>
+</p:sld>
+</file>
+
+<file path=ppt/slides/slide4.xml><?xml version="1.0" encoding="utf-8"?>
+<p:sld xmlns:a="http://schemas.openxmlformats.org/drawingml/2006/main" xmlns:p="http://schemas.openxmlformats.org/presentationml/2006/main" xmlns:r="http://schemas.openxmlformats.org/officeDocument/2006/relationships">
+  <p:cSld>
+    <p:spTree>
+      <p:nvGrpSpPr>
+        <p:cNvPr id="1" name=""/>
+        <p:cNvGrpSpPr/>
+        <p:nvPr/>
+      </p:nvGrpSpPr>
+      <p:grpSpPr/>
+      <p:sp>
+        <p:nvSpPr>
+          <p:cNvPr id="2" name="Rectangle 1"/>
+          <p:cNvSpPr/>
+          <p:nvPr/>
+        </p:nvSpPr>
+        <p:spPr>
+          <a:xfrm>
+            <a:off x="0" y="0"/>
+            <a:ext cx="12191695" cy="6858000"/>
+          </a:xfrm>
+          <a:prstGeom prst="rect">
+            <a:avLst/>
+          </a:prstGeom>
+          <a:solidFill>
+            <a:srgbClr val="FFFFFF"/>
+          </a:solidFill>
+          <a:ln>
+            <a:noFill/>
+          </a:ln>
+          <a:effectLst/>
+        </p:spPr>
+        <p:style>
+          <a:lnRef idx="1">
+            <a:schemeClr val="accent1"/>
+          </a:lnRef>
+          <a:fillRef idx="3">
+            <a:schemeClr val="accent1"/>
+          </a:fillRef>
+          <a:effectRef idx="2">
+            <a:schemeClr val="accent1"/>
+          </a:effectRef>
+          <a:fontRef idx="minor">
+            <a:schemeClr val="lt1"/>
+          </a:fontRef>
+        </p:style>
+        <p:txBody>
+          <a:bodyPr rtlCol="0" anchor="ctr"/>
+          <a:lstStyle/>
+          <a:p>
+            <a:pPr algn="ctr"/>
+          </a:p>
+        </p:txBody>
+      </p:sp>
+      <p:sp>
+        <p:nvSpPr>
+          <p:cNvPr id="3" name="Rounded Rectangle 2"/>
+          <p:cNvSpPr/>
+          <p:nvPr/>
+        </p:nvSpPr>
+        <p:spPr>
+          <a:xfrm>
+            <a:off x="502920" y="475488"/>
+            <a:ext cx="310896" cy="310896"/>
           </a:xfrm>
           <a:prstGeom prst="roundRect">
             <a:avLst>
@@ -8227,14 +10099,109 @@
       </p:sp>
       <p:sp>
         <p:nvSpPr>
-          <p:cNvPr id="10" name="TextBox 9"/>
+          <p:cNvPr id="4" name="TextBox 3"/>
           <p:cNvSpPr txBox="1"/>
           <p:nvPr/>
         </p:nvSpPr>
         <p:spPr>
           <a:xfrm>
-            <a:off x="822960" y="1536192"/>
-            <a:ext cx="5074920" cy="1463040"/>
+            <a:off x="960120" y="274320"/>
+            <a:ext cx="9692640" cy="685800"/>
+          </a:xfrm>
+          <a:prstGeom prst="rect">
+            <a:avLst/>
+          </a:prstGeom>
+          <a:noFill/>
+        </p:spPr>
+        <p:txBody>
+          <a:bodyPr wrap="square" anchor="ctr">
+            <a:spAutoFit/>
+          </a:bodyPr>
+          <a:lstStyle/>
+          <a:p>
+            <a:pPr>
+              <a:lnSpc>
+                <a:spcPct val="114000"/>
+              </a:lnSpc>
+              <a:spcAft>
+                <a:spcPts val="0"/>
+              </a:spcAft>
+            </a:pPr>
+            <a:r>
+              <a:rPr sz="2150" b="1">
+                <a:solidFill>
+                  <a:srgbClr val="1C1C1E"/>
+                </a:solidFill>
+                <a:latin typeface="맑은 고딕"/>
+                <a:ea typeface="맑은 고딕"/>
+              </a:rPr>
+              <a:t>연구 질문 (RQ) — 감사의 네 가지 물음</a:t>
+            </a:r>
+          </a:p>
+        </p:txBody>
+      </p:sp>
+      <p:sp>
+        <p:nvSpPr>
+          <p:cNvPr id="5" name="Rectangle 4"/>
+          <p:cNvSpPr/>
+          <p:nvPr/>
+        </p:nvSpPr>
+        <p:spPr>
+          <a:xfrm>
+            <a:off x="521207" y="969264"/>
+            <a:ext cx="4206240" cy="27432"/>
+          </a:xfrm>
+          <a:prstGeom prst="rect">
+            <a:avLst/>
+          </a:prstGeom>
+          <a:gradFill rotWithShape="1">
+            <a:gsLst>
+              <a:gs pos="0">
+                <a:srgbClr val="2A2E33"/>
+              </a:gs>
+              <a:gs pos="100000">
+                <a:srgbClr val="FFFFFF"/>
+              </a:gs>
+            </a:gsLst>
+            <a:lin scaled="0" ang="0"/>
+          </a:gradFill>
+          <a:ln>
+            <a:noFill/>
+          </a:ln>
+          <a:effectLst/>
+        </p:spPr>
+        <p:style>
+          <a:lnRef idx="1">
+            <a:schemeClr val="accent1"/>
+          </a:lnRef>
+          <a:fillRef idx="3">
+            <a:schemeClr val="accent1"/>
+          </a:fillRef>
+          <a:effectRef idx="2">
+            <a:schemeClr val="accent1"/>
+          </a:effectRef>
+          <a:fontRef idx="minor">
+            <a:schemeClr val="lt1"/>
+          </a:fontRef>
+        </p:style>
+        <p:txBody>
+          <a:bodyPr rtlCol="0" anchor="ctr"/>
+          <a:lstStyle/>
+          <a:p>
+            <a:pPr algn="ctr"/>
+          </a:p>
+        </p:txBody>
+      </p:sp>
+      <p:sp>
+        <p:nvSpPr>
+          <p:cNvPr id="6" name="TextBox 5"/>
+          <p:cNvSpPr txBox="1"/>
+          <p:nvPr/>
+        </p:nvSpPr>
+        <p:spPr>
+          <a:xfrm>
+            <a:off x="10835640" y="164592"/>
+            <a:ext cx="1188720" cy="777240"/>
           </a:xfrm>
           <a:prstGeom prst="rect">
             <a:avLst/>
@@ -8252,71 +10219,74 @@
                 <a:spcPct val="114000"/>
               </a:lnSpc>
               <a:spcAft>
-                <a:spcPts val="500"/>
-              </a:spcAft>
-            </a:pPr>
-            <a:r>
-              <a:rPr sz="1500" b="1">
-                <a:solidFill>
-                  <a:srgbClr val="33393F"/>
-                </a:solidFill>
-                <a:latin typeface="맑은 고딕"/>
-                <a:ea typeface="맑은 고딕"/>
-              </a:rPr>
-              <a:t>RQ1 · 지정의 검증</a:t>
-            </a:r>
-          </a:p>
+                <a:spcPts val="0"/>
+              </a:spcAft>
+            </a:pPr>
+            <a:r>
+              <a:rPr sz="3000" b="1">
+                <a:solidFill>
+                  <a:srgbClr val="D8DADD"/>
+                </a:solidFill>
+                <a:latin typeface="맑은 고딕"/>
+                <a:ea typeface="맑은 고딕"/>
+              </a:rPr>
+              <a:t>04</a:t>
+            </a:r>
+          </a:p>
+        </p:txBody>
+      </p:sp>
+      <p:sp>
+        <p:nvSpPr>
+          <p:cNvPr id="7" name="TextBox 6"/>
+          <p:cNvSpPr txBox="1"/>
+          <p:nvPr/>
+        </p:nvSpPr>
+        <p:spPr>
+          <a:xfrm>
+            <a:off x="502920" y="6492240"/>
+            <a:ext cx="11247120" cy="320040"/>
+          </a:xfrm>
+          <a:prstGeom prst="rect">
+            <a:avLst/>
+          </a:prstGeom>
+          <a:noFill/>
+        </p:spPr>
+        <p:txBody>
+          <a:bodyPr wrap="square" anchor="t">
+            <a:spAutoFit/>
+          </a:bodyPr>
+          <a:lstStyle/>
           <a:p>
             <a:pPr>
               <a:lnSpc>
                 <a:spcPct val="114000"/>
               </a:lnSpc>
               <a:spcAft>
-                <a:spcPts val="200"/>
-              </a:spcAft>
-            </a:pPr>
-            <a:r>
-              <a:rPr sz="1200" b="0">
-                <a:solidFill>
-                  <a:srgbClr val="1C1C1E"/>
-                </a:solidFill>
-                <a:latin typeface="맑은 고딕"/>
-                <a:ea typeface="맑은 고딕"/>
-              </a:rPr>
-              <a:t>현행 지정은 공표된 판정식대로 실제 작동하는가?</a:t>
-            </a:r>
-          </a:p>
-          <a:p>
-            <a:pPr>
-              <a:lnSpc>
-                <a:spcPct val="114000"/>
-              </a:lnSpc>
-              <a:spcAft>
-                <a:spcPts val="200"/>
-              </a:spcAft>
-            </a:pPr>
-            <a:r>
-              <a:rPr sz="1200" b="0">
-                <a:solidFill>
-                  <a:srgbClr val="1C1C1E"/>
-                </a:solidFill>
-                <a:latin typeface="맑은 고딕"/>
-                <a:ea typeface="맑은 고딕"/>
-              </a:rPr>
-              <a:t>공급(관내 인프라) 변수는 판정에 반영되는가?</a:t>
-            </a:r>
-          </a:p>
-        </p:txBody>
-      </p:sp>
-      <p:sp>
-        <p:nvSpPr>
-          <p:cNvPr id="11" name="Rounded Rectangle 10"/>
+                <a:spcPts val="0"/>
+              </a:spcAft>
+            </a:pPr>
+            <a:r>
+              <a:rPr sz="850" b="0">
+                <a:solidFill>
+                  <a:srgbClr val="B2B5B9"/>
+                </a:solidFill>
+                <a:latin typeface="맑은 고딕"/>
+                <a:ea typeface="맑은 고딕"/>
+              </a:rPr>
+              <a:t>2026 명지대학교 창의적 SW프로그램 경진대회 · 빅데이터 분석 — 데이터 분석 계획서</a:t>
+            </a:r>
+          </a:p>
+        </p:txBody>
+      </p:sp>
+      <p:sp>
+        <p:nvSpPr>
+          <p:cNvPr id="8" name="Rounded Rectangle 7"/>
           <p:cNvSpPr/>
           <p:nvPr/>
         </p:nvSpPr>
         <p:spPr>
           <a:xfrm>
-            <a:off x="6263640" y="1371600"/>
+            <a:off x="502920" y="1371600"/>
             <a:ext cx="5532120" cy="1737360"/>
           </a:xfrm>
           <a:prstGeom prst="roundRect">
@@ -8364,13 +10334,13 @@
       </p:sp>
       <p:sp>
         <p:nvSpPr>
-          <p:cNvPr id="12" name="Rounded Rectangle 11"/>
+          <p:cNvPr id="9" name="Rounded Rectangle 8"/>
           <p:cNvSpPr/>
           <p:nvPr/>
         </p:nvSpPr>
         <p:spPr>
           <a:xfrm>
-            <a:off x="6281927" y="1600200"/>
+            <a:off x="521208" y="1600200"/>
             <a:ext cx="82296" cy="1280160"/>
           </a:xfrm>
           <a:prstGeom prst="roundRect">
@@ -8424,13 +10394,13 @@
       </p:sp>
       <p:sp>
         <p:nvSpPr>
-          <p:cNvPr id="13" name="TextBox 12"/>
+          <p:cNvPr id="10" name="TextBox 9"/>
           <p:cNvSpPr txBox="1"/>
           <p:nvPr/>
         </p:nvSpPr>
         <p:spPr>
           <a:xfrm>
-            <a:off x="6583679" y="1536192"/>
+            <a:off x="822960" y="1536192"/>
             <a:ext cx="5074920" cy="1463040"/>
           </a:xfrm>
           <a:prstGeom prst="rect">
@@ -8460,7 +10430,7 @@
                 <a:latin typeface="맑은 고딕"/>
                 <a:ea typeface="맑은 고딕"/>
               </a:rPr>
-              <a:t>RQ2 · 사각지대 탐지</a:t>
+              <a:t>RQ1 · 지정의 검증</a:t>
             </a:r>
           </a:p>
           <a:p>
@@ -8480,7 +10450,7 @@
                 <a:latin typeface="맑은 고딕"/>
                 <a:ea typeface="맑은 고딕"/>
               </a:rPr>
-              <a:t>판정식이 구조적으로 놓치는 지역이 실재하는가?</a:t>
+              <a:t>현행 지정은 공표된 판정식대로 실제 작동하는가?</a:t>
             </a:r>
           </a:p>
           <a:p>
@@ -8500,20 +10470,20 @@
                 <a:latin typeface="맑은 고딕"/>
                 <a:ea typeface="맑은 고딕"/>
               </a:rPr>
-              <a:t>(거리 기준은 통과하지만 관내 공급이 소멸한 지역)</a:t>
-            </a:r>
-          </a:p>
-        </p:txBody>
-      </p:sp>
-      <p:sp>
-        <p:nvSpPr>
-          <p:cNvPr id="14" name="Rounded Rectangle 13"/>
+              <a:t>공급(관내 인프라) 변수는 판정에 반영되는가?</a:t>
+            </a:r>
+          </a:p>
+        </p:txBody>
+      </p:sp>
+      <p:sp>
+        <p:nvSpPr>
+          <p:cNvPr id="11" name="Rounded Rectangle 10"/>
           <p:cNvSpPr/>
           <p:nvPr/>
         </p:nvSpPr>
         <p:spPr>
           <a:xfrm>
-            <a:off x="502920" y="3337560"/>
+            <a:off x="6263640" y="1371600"/>
             <a:ext cx="5532120" cy="1737360"/>
           </a:xfrm>
           <a:prstGeom prst="roundRect">
@@ -8561,13 +10531,13 @@
       </p:sp>
       <p:sp>
         <p:nvSpPr>
-          <p:cNvPr id="15" name="Rounded Rectangle 14"/>
+          <p:cNvPr id="12" name="Rounded Rectangle 11"/>
           <p:cNvSpPr/>
           <p:nvPr/>
         </p:nvSpPr>
         <p:spPr>
           <a:xfrm>
-            <a:off x="521208" y="3566160"/>
+            <a:off x="6281927" y="1600200"/>
             <a:ext cx="82296" cy="1280160"/>
           </a:xfrm>
           <a:prstGeom prst="roundRect">
@@ -8621,13 +10591,13 @@
       </p:sp>
       <p:sp>
         <p:nvSpPr>
-          <p:cNvPr id="16" name="TextBox 15"/>
+          <p:cNvPr id="13" name="TextBox 12"/>
           <p:cNvSpPr txBox="1"/>
           <p:nvPr/>
         </p:nvSpPr>
         <p:spPr>
           <a:xfrm>
-            <a:off x="822960" y="3502152"/>
+            <a:off x="6583679" y="1536192"/>
             <a:ext cx="5074920" cy="1463040"/>
           </a:xfrm>
           <a:prstGeom prst="rect">
@@ -8657,7 +10627,7 @@
                 <a:latin typeface="맑은 고딕"/>
                 <a:ea typeface="맑은 고딕"/>
               </a:rPr>
-              <a:t>RQ3 · 배분의 진단</a:t>
+              <a:t>RQ2 · 사각지대 탐지</a:t>
             </a:r>
           </a:p>
           <a:p>
@@ -8677,7 +10647,7 @@
                 <a:latin typeface="맑은 고딕"/>
                 <a:ea typeface="맑은 고딕"/>
               </a:rPr>
-              <a:t>지정 이후의 지원 배분은 공개 지표로 설명되는가?</a:t>
+              <a:t>판정식이 구조적으로 놓치는 지역이 실재하는가?</a:t>
             </a:r>
           </a:p>
           <a:p>
@@ -8697,20 +10667,20 @@
                 <a:latin typeface="맑은 고딕"/>
                 <a:ea typeface="맑은 고딕"/>
               </a:rPr>
-              <a:t>등급·취약도·수요 중 무엇이 선정을 갈랐는가?</a:t>
-            </a:r>
-          </a:p>
-        </p:txBody>
-      </p:sp>
-      <p:sp>
-        <p:nvSpPr>
-          <p:cNvPr id="17" name="Rounded Rectangle 16"/>
+              <a:t>(거리 기준은 통과하지만 관내 공급이 소멸한 지역)</a:t>
+            </a:r>
+          </a:p>
+        </p:txBody>
+      </p:sp>
+      <p:sp>
+        <p:nvSpPr>
+          <p:cNvPr id="14" name="Rounded Rectangle 13"/>
           <p:cNvSpPr/>
           <p:nvPr/>
         </p:nvSpPr>
         <p:spPr>
           <a:xfrm>
-            <a:off x="6263640" y="3337560"/>
+            <a:off x="502920" y="3337560"/>
             <a:ext cx="5532120" cy="1737360"/>
           </a:xfrm>
           <a:prstGeom prst="roundRect">
@@ -8758,13 +10728,13 @@
       </p:sp>
       <p:sp>
         <p:nvSpPr>
-          <p:cNvPr id="18" name="Rounded Rectangle 17"/>
+          <p:cNvPr id="15" name="Rounded Rectangle 14"/>
           <p:cNvSpPr/>
           <p:nvPr/>
         </p:nvSpPr>
         <p:spPr>
           <a:xfrm>
-            <a:off x="6281927" y="3566160"/>
+            <a:off x="521208" y="3566160"/>
             <a:ext cx="82296" cy="1280160"/>
           </a:xfrm>
           <a:prstGeom prst="roundRect">
@@ -8818,13 +10788,13 @@
       </p:sp>
       <p:sp>
         <p:nvSpPr>
-          <p:cNvPr id="19" name="TextBox 18"/>
+          <p:cNvPr id="16" name="TextBox 15"/>
           <p:cNvSpPr txBox="1"/>
           <p:nvPr/>
         </p:nvSpPr>
         <p:spPr>
           <a:xfrm>
-            <a:off x="6583679" y="3502152"/>
+            <a:off x="822960" y="3502152"/>
             <a:ext cx="5074920" cy="1463040"/>
           </a:xfrm>
           <a:prstGeom prst="rect">
@@ -8854,7 +10824,7 @@
                 <a:latin typeface="맑은 고딕"/>
                 <a:ea typeface="맑은 고딕"/>
               </a:rPr>
-              <a:t>RQ4 · 처방과 대조</a:t>
+              <a:t>RQ3 · 배분의 진단</a:t>
             </a:r>
           </a:p>
           <a:p>
@@ -8874,7 +10844,7 @@
                 <a:latin typeface="맑은 고딕"/>
                 <a:ea typeface="맑은 고딕"/>
               </a:rPr>
-              <a:t>정부가 이미 정한 기준만 조합해 배분 규칙을 만들면</a:t>
+              <a:t>지정 이후의 지원 배분은 공개 지표로 설명되는가?</a:t>
             </a:r>
           </a:p>
           <a:p>
@@ -8894,113 +10864,42 @@
                 <a:latin typeface="맑은 고딕"/>
                 <a:ea typeface="맑은 고딕"/>
               </a:rPr>
-              <a:t>현행 배분과 어디가 어긋나는가?</a:t>
-            </a:r>
-          </a:p>
-        </p:txBody>
-      </p:sp>
-      <p:sp>
-        <p:nvSpPr>
-          <p:cNvPr id="20" name="TextBox 19"/>
-          <p:cNvSpPr txBox="1"/>
-          <p:nvPr/>
-        </p:nvSpPr>
-        <p:spPr>
-          <a:xfrm>
-            <a:off x="502920" y="5440680"/>
-            <a:ext cx="11247120" cy="822960"/>
-          </a:xfrm>
-          <a:prstGeom prst="rect">
-            <a:avLst/>
-          </a:prstGeom>
-          <a:noFill/>
-        </p:spPr>
-        <p:txBody>
-          <a:bodyPr wrap="square" anchor="t">
-            <a:spAutoFit/>
-          </a:bodyPr>
-          <a:lstStyle/>
-          <a:p>
-            <a:pPr>
-              <a:lnSpc>
-                <a:spcPct val="114000"/>
-              </a:lnSpc>
-              <a:spcAft>
-                <a:spcPts val="300"/>
-              </a:spcAft>
-            </a:pPr>
-            <a:r>
-              <a:rPr sz="1250" b="1">
-                <a:solidFill>
-                  <a:srgbClr val="1C1C1E"/>
-                </a:solidFill>
-                <a:latin typeface="맑은 고딕"/>
-                <a:ea typeface="맑은 고딕"/>
-              </a:rPr>
-              <a:t>RQ1·2는 "지정 감사", RQ3·4는 "배분 감사·처방"으로 묶여 제도 파이프라인 전체를 관통한다.</a:t>
-            </a:r>
-          </a:p>
-          <a:p>
-            <a:pPr>
-              <a:lnSpc>
-                <a:spcPct val="114000"/>
-              </a:lnSpc>
-              <a:spcAft>
-                <a:spcPts val="0"/>
-              </a:spcAft>
-            </a:pPr>
-            <a:r>
-              <a:rPr sz="1200" b="0">
-                <a:solidFill>
-                  <a:srgbClr val="767A7F"/>
-                </a:solidFill>
-                <a:latin typeface="맑은 고딕"/>
-                <a:ea typeface="맑은 고딕"/>
-              </a:rPr>
-              <a:t>각 질문은 판단 기준을 분석 전에 명시해(사전 등록 성격) 사후 해석 시비를 차단한다.</a:t>
-            </a:r>
-          </a:p>
-        </p:txBody>
-      </p:sp>
-    </p:spTree>
-  </p:cSld>
-  <p:clrMapOvr>
-    <a:masterClrMapping/>
-  </p:clrMapOvr>
-</p:sld>
-</file>
-
-<file path=ppt/slides/slide4.xml><?xml version="1.0" encoding="utf-8"?>
-<p:sld xmlns:a="http://schemas.openxmlformats.org/drawingml/2006/main" xmlns:p="http://schemas.openxmlformats.org/presentationml/2006/main" xmlns:r="http://schemas.openxmlformats.org/officeDocument/2006/relationships">
-  <p:cSld>
-    <p:spTree>
-      <p:nvGrpSpPr>
-        <p:cNvPr id="1" name=""/>
-        <p:cNvGrpSpPr/>
-        <p:nvPr/>
-      </p:nvGrpSpPr>
-      <p:grpSpPr/>
-      <p:sp>
-        <p:nvSpPr>
-          <p:cNvPr id="2" name="Rectangle 1"/>
+              <a:t>등급·취약도·수요 중 무엇이 선정을 갈랐는가?</a:t>
+            </a:r>
+          </a:p>
+        </p:txBody>
+      </p:sp>
+      <p:sp>
+        <p:nvSpPr>
+          <p:cNvPr id="17" name="Rounded Rectangle 16"/>
           <p:cNvSpPr/>
           <p:nvPr/>
         </p:nvSpPr>
         <p:spPr>
           <a:xfrm>
-            <a:off x="0" y="0"/>
-            <a:ext cx="12191695" cy="6858000"/>
-          </a:xfrm>
-          <a:prstGeom prst="rect">
-            <a:avLst/>
+            <a:off x="6263640" y="3337560"/>
+            <a:ext cx="5532120" cy="1737360"/>
+          </a:xfrm>
+          <a:prstGeom prst="roundRect">
+            <a:avLst>
+              <a:gd name="adj" fmla="val 4736"/>
+            </a:avLst>
           </a:prstGeom>
           <a:solidFill>
             <a:srgbClr val="FFFFFF"/>
           </a:solidFill>
-          <a:ln>
-            <a:noFill/>
+          <a:ln w="12700">
+            <a:solidFill>
+              <a:srgbClr val="E4E6E9"/>
+            </a:solidFill>
           </a:ln>
-          <a:effectLst/>
+          <a:effectLst>
+            <a:outerShdw blurRad="182880" dist="64008" dir="5400000" rotWithShape="0">
+              <a:srgbClr val="000000">
+                <a:alpha val="30000"/>
+              </a:srgbClr>
+            </a:outerShdw>
+          </a:effectLst>
         </p:spPr>
         <p:style>
           <a:lnRef idx="1">
@@ -9026,14 +10925,14 @@
       </p:sp>
       <p:sp>
         <p:nvSpPr>
-          <p:cNvPr id="3" name="Rounded Rectangle 2"/>
+          <p:cNvPr id="18" name="Rounded Rectangle 17"/>
           <p:cNvSpPr/>
           <p:nvPr/>
         </p:nvSpPr>
         <p:spPr>
           <a:xfrm>
-            <a:off x="502920" y="475488"/>
-            <a:ext cx="310896" cy="310896"/>
+            <a:off x="6281927" y="3566160"/>
+            <a:ext cx="82296" cy="1280160"/>
           </a:xfrm>
           <a:prstGeom prst="roundRect">
             <a:avLst>
@@ -9086,6 +10985,274 @@
       </p:sp>
       <p:sp>
         <p:nvSpPr>
+          <p:cNvPr id="19" name="TextBox 18"/>
+          <p:cNvSpPr txBox="1"/>
+          <p:nvPr/>
+        </p:nvSpPr>
+        <p:spPr>
+          <a:xfrm>
+            <a:off x="6583679" y="3502152"/>
+            <a:ext cx="5074920" cy="1463040"/>
+          </a:xfrm>
+          <a:prstGeom prst="rect">
+            <a:avLst/>
+          </a:prstGeom>
+          <a:noFill/>
+        </p:spPr>
+        <p:txBody>
+          <a:bodyPr wrap="square" anchor="t">
+            <a:spAutoFit/>
+          </a:bodyPr>
+          <a:lstStyle/>
+          <a:p>
+            <a:pPr>
+              <a:lnSpc>
+                <a:spcPct val="114000"/>
+              </a:lnSpc>
+              <a:spcAft>
+                <a:spcPts val="500"/>
+              </a:spcAft>
+            </a:pPr>
+            <a:r>
+              <a:rPr sz="1500" b="1">
+                <a:solidFill>
+                  <a:srgbClr val="33393F"/>
+                </a:solidFill>
+                <a:latin typeface="맑은 고딕"/>
+                <a:ea typeface="맑은 고딕"/>
+              </a:rPr>
+              <a:t>RQ4 · 처방과 대조</a:t>
+            </a:r>
+          </a:p>
+          <a:p>
+            <a:pPr>
+              <a:lnSpc>
+                <a:spcPct val="114000"/>
+              </a:lnSpc>
+              <a:spcAft>
+                <a:spcPts val="200"/>
+              </a:spcAft>
+            </a:pPr>
+            <a:r>
+              <a:rPr sz="1200" b="0">
+                <a:solidFill>
+                  <a:srgbClr val="1C1C1E"/>
+                </a:solidFill>
+                <a:latin typeface="맑은 고딕"/>
+                <a:ea typeface="맑은 고딕"/>
+              </a:rPr>
+              <a:t>정부가 이미 정한 기준만 조합해 배분 규칙을 만들면</a:t>
+            </a:r>
+          </a:p>
+          <a:p>
+            <a:pPr>
+              <a:lnSpc>
+                <a:spcPct val="114000"/>
+              </a:lnSpc>
+              <a:spcAft>
+                <a:spcPts val="200"/>
+              </a:spcAft>
+            </a:pPr>
+            <a:r>
+              <a:rPr sz="1200" b="0">
+                <a:solidFill>
+                  <a:srgbClr val="1C1C1E"/>
+                </a:solidFill>
+                <a:latin typeface="맑은 고딕"/>
+                <a:ea typeface="맑은 고딕"/>
+              </a:rPr>
+              <a:t>현행 배분과 어디가 어긋나는가?</a:t>
+            </a:r>
+          </a:p>
+        </p:txBody>
+      </p:sp>
+      <p:sp>
+        <p:nvSpPr>
+          <p:cNvPr id="20" name="TextBox 19"/>
+          <p:cNvSpPr txBox="1"/>
+          <p:nvPr/>
+        </p:nvSpPr>
+        <p:spPr>
+          <a:xfrm>
+            <a:off x="502920" y="5440680"/>
+            <a:ext cx="11247120" cy="822960"/>
+          </a:xfrm>
+          <a:prstGeom prst="rect">
+            <a:avLst/>
+          </a:prstGeom>
+          <a:noFill/>
+        </p:spPr>
+        <p:txBody>
+          <a:bodyPr wrap="square" anchor="t">
+            <a:spAutoFit/>
+          </a:bodyPr>
+          <a:lstStyle/>
+          <a:p>
+            <a:pPr>
+              <a:lnSpc>
+                <a:spcPct val="114000"/>
+              </a:lnSpc>
+              <a:spcAft>
+                <a:spcPts val="300"/>
+              </a:spcAft>
+            </a:pPr>
+            <a:r>
+              <a:rPr sz="1250" b="1">
+                <a:solidFill>
+                  <a:srgbClr val="1C1C1E"/>
+                </a:solidFill>
+                <a:latin typeface="맑은 고딕"/>
+                <a:ea typeface="맑은 고딕"/>
+              </a:rPr>
+              <a:t>RQ1·2는 "지정 감사", RQ3·4는 "배분 감사·처방"으로 묶여 제도 파이프라인 전체를 관통한다.</a:t>
+            </a:r>
+          </a:p>
+          <a:p>
+            <a:pPr>
+              <a:lnSpc>
+                <a:spcPct val="114000"/>
+              </a:lnSpc>
+              <a:spcAft>
+                <a:spcPts val="0"/>
+              </a:spcAft>
+            </a:pPr>
+            <a:r>
+              <a:rPr sz="1200" b="0">
+                <a:solidFill>
+                  <a:srgbClr val="767A7F"/>
+                </a:solidFill>
+                <a:latin typeface="맑은 고딕"/>
+                <a:ea typeface="맑은 고딕"/>
+              </a:rPr>
+              <a:t>각 질문은 판단 기준을 분석 전에 명시해(사전 등록 성격) 사후 해석 시비를 차단한다.</a:t>
+            </a:r>
+          </a:p>
+        </p:txBody>
+      </p:sp>
+    </p:spTree>
+  </p:cSld>
+  <p:clrMapOvr>
+    <a:masterClrMapping/>
+  </p:clrMapOvr>
+</p:sld>
+</file>
+
+<file path=ppt/slides/slide5.xml><?xml version="1.0" encoding="utf-8"?>
+<p:sld xmlns:a="http://schemas.openxmlformats.org/drawingml/2006/main" xmlns:p="http://schemas.openxmlformats.org/presentationml/2006/main" xmlns:r="http://schemas.openxmlformats.org/officeDocument/2006/relationships">
+  <p:cSld>
+    <p:spTree>
+      <p:nvGrpSpPr>
+        <p:cNvPr id="1" name=""/>
+        <p:cNvGrpSpPr/>
+        <p:nvPr/>
+      </p:nvGrpSpPr>
+      <p:grpSpPr/>
+      <p:sp>
+        <p:nvSpPr>
+          <p:cNvPr id="2" name="Rectangle 1"/>
+          <p:cNvSpPr/>
+          <p:nvPr/>
+        </p:nvSpPr>
+        <p:spPr>
+          <a:xfrm>
+            <a:off x="0" y="0"/>
+            <a:ext cx="12191695" cy="6858000"/>
+          </a:xfrm>
+          <a:prstGeom prst="rect">
+            <a:avLst/>
+          </a:prstGeom>
+          <a:solidFill>
+            <a:srgbClr val="FFFFFF"/>
+          </a:solidFill>
+          <a:ln>
+            <a:noFill/>
+          </a:ln>
+          <a:effectLst/>
+        </p:spPr>
+        <p:style>
+          <a:lnRef idx="1">
+            <a:schemeClr val="accent1"/>
+          </a:lnRef>
+          <a:fillRef idx="3">
+            <a:schemeClr val="accent1"/>
+          </a:fillRef>
+          <a:effectRef idx="2">
+            <a:schemeClr val="accent1"/>
+          </a:effectRef>
+          <a:fontRef idx="minor">
+            <a:schemeClr val="lt1"/>
+          </a:fontRef>
+        </p:style>
+        <p:txBody>
+          <a:bodyPr rtlCol="0" anchor="ctr"/>
+          <a:lstStyle/>
+          <a:p>
+            <a:pPr algn="ctr"/>
+          </a:p>
+        </p:txBody>
+      </p:sp>
+      <p:sp>
+        <p:nvSpPr>
+          <p:cNvPr id="3" name="Rounded Rectangle 2"/>
+          <p:cNvSpPr/>
+          <p:nvPr/>
+        </p:nvSpPr>
+        <p:spPr>
+          <a:xfrm>
+            <a:off x="502920" y="475488"/>
+            <a:ext cx="310896" cy="310896"/>
+          </a:xfrm>
+          <a:prstGeom prst="roundRect">
+            <a:avLst>
+              <a:gd name="adj" fmla="val 50000"/>
+            </a:avLst>
+          </a:prstGeom>
+          <a:gradFill rotWithShape="1">
+            <a:gsLst>
+              <a:gs pos="0">
+                <a:srgbClr val="3A3F45"/>
+              </a:gs>
+              <a:gs pos="100000">
+                <a:srgbClr val="73787E"/>
+              </a:gs>
+            </a:gsLst>
+            <a:lin scaled="0" ang="18900000"/>
+          </a:gradFill>
+          <a:ln>
+            <a:noFill/>
+          </a:ln>
+          <a:effectLst>
+            <a:outerShdw blurRad="109728" dist="36576" dir="5400000" rotWithShape="0">
+              <a:srgbClr val="000000">
+                <a:alpha val="35000"/>
+              </a:srgbClr>
+            </a:outerShdw>
+          </a:effectLst>
+        </p:spPr>
+        <p:style>
+          <a:lnRef idx="1">
+            <a:schemeClr val="accent1"/>
+          </a:lnRef>
+          <a:fillRef idx="3">
+            <a:schemeClr val="accent1"/>
+          </a:fillRef>
+          <a:effectRef idx="2">
+            <a:schemeClr val="accent1"/>
+          </a:effectRef>
+          <a:fontRef idx="minor">
+            <a:schemeClr val="lt1"/>
+          </a:fontRef>
+        </p:style>
+        <p:txBody>
+          <a:bodyPr rtlCol="0" anchor="ctr"/>
+          <a:lstStyle/>
+          <a:p>
+            <a:pPr algn="ctr"/>
+          </a:p>
+        </p:txBody>
+      </p:sp>
+      <p:sp>
+        <p:nvSpPr>
           <p:cNvPr id="4" name="TextBox 3"/>
           <p:cNvSpPr txBox="1"/>
           <p:nvPr/>
@@ -9217,7 +11384,7 @@
                 <a:latin typeface="맑은 고딕"/>
                 <a:ea typeface="맑은 고딕"/>
               </a:rPr>
-              <a:t>04</a:t>
+              <a:t>05</a:t>
             </a:r>
           </a:p>
         </p:txBody>
@@ -9908,7 +12075,7 @@
 </p:sld>
 </file>
 
-<file path=ppt/slides/slide5.xml><?xml version="1.0" encoding="utf-8"?>
+<file path=ppt/slides/slide6.xml><?xml version="1.0" encoding="utf-8"?>
 <p:sld xmlns:a="http://schemas.openxmlformats.org/drawingml/2006/main" xmlns:p="http://schemas.openxmlformats.org/presentationml/2006/main" xmlns:r="http://schemas.openxmlformats.org/officeDocument/2006/relationships">
   <p:cSld>
     <p:spTree>
@@ -10155,7 +12322,7 @@
                 <a:latin typeface="맑은 고딕"/>
                 <a:ea typeface="맑은 고딕"/>
               </a:rPr>
-              <a:t>05</a:t>
+              <a:t>06</a:t>
             </a:r>
           </a:p>
         </p:txBody>
@@ -10959,7 +13126,7 @@
 </p:sld>
 </file>
 
-<file path=ppt/slides/slide6.xml><?xml version="1.0" encoding="utf-8"?>
+<file path=ppt/slides/slide7.xml><?xml version="1.0" encoding="utf-8"?>
 <p:sld xmlns:a="http://schemas.openxmlformats.org/drawingml/2006/main" xmlns:p="http://schemas.openxmlformats.org/presentationml/2006/main" xmlns:r="http://schemas.openxmlformats.org/officeDocument/2006/relationships">
   <p:cSld>
     <p:spTree>
@@ -11206,7 +13373,7 @@
                 <a:latin typeface="맑은 고딕"/>
                 <a:ea typeface="맑은 고딕"/>
               </a:rPr>
-              <a:t>06</a:t>
+              <a:t>07</a:t>
             </a:r>
           </a:p>
         </p:txBody>
@@ -12070,7 +14237,7 @@
 </p:sld>
 </file>
 
-<file path=ppt/slides/slide7.xml><?xml version="1.0" encoding="utf-8"?>
+<file path=ppt/slides/slide8.xml><?xml version="1.0" encoding="utf-8"?>
 <p:sld xmlns:a="http://schemas.openxmlformats.org/drawingml/2006/main" xmlns:p="http://schemas.openxmlformats.org/presentationml/2006/main" xmlns:r="http://schemas.openxmlformats.org/officeDocument/2006/relationships">
   <p:cSld>
     <p:spTree>
@@ -12317,7 +14484,7 @@
                 <a:latin typeface="맑은 고딕"/>
                 <a:ea typeface="맑은 고딕"/>
               </a:rPr>
-              <a:t>07</a:t>
+              <a:t>08</a:t>
             </a:r>
           </a:p>
         </p:txBody>
@@ -12904,7 +15071,7 @@
 </p:sld>
 </file>
 
-<file path=ppt/slides/slide8.xml><?xml version="1.0" encoding="utf-8"?>
+<file path=ppt/slides/slide9.xml><?xml version="1.0" encoding="utf-8"?>
 <p:sld xmlns:a="http://schemas.openxmlformats.org/drawingml/2006/main" xmlns:p="http://schemas.openxmlformats.org/presentationml/2006/main" xmlns:r="http://schemas.openxmlformats.org/officeDocument/2006/relationships">
   <p:cSld>
     <p:spTree>
@@ -13151,7 +15318,7 @@
                 <a:latin typeface="맑은 고딕"/>
                 <a:ea typeface="맑은 고딕"/>
               </a:rPr>
-              <a:t>08</a:t>
+              <a:t>09</a:t>
             </a:r>
           </a:p>
         </p:txBody>
@@ -13786,1152 +15953,6 @@
                 <a:ea typeface="맑은 고딕"/>
               </a:rPr>
               <a:t>• 반대 해석(예: "옆 도시로 가면 되지 않는가")을 본문에서 정면으로 다루는 섹션을 계획에 포함한다</a:t>
-            </a:r>
-          </a:p>
-        </p:txBody>
-      </p:sp>
-    </p:spTree>
-  </p:cSld>
-  <p:clrMapOvr>
-    <a:masterClrMapping/>
-  </p:clrMapOvr>
-</p:sld>
-</file>
-
-<file path=ppt/slides/slide9.xml><?xml version="1.0" encoding="utf-8"?>
-<p:sld xmlns:a="http://schemas.openxmlformats.org/drawingml/2006/main" xmlns:p="http://schemas.openxmlformats.org/presentationml/2006/main" xmlns:r="http://schemas.openxmlformats.org/officeDocument/2006/relationships">
-  <p:cSld>
-    <p:spTree>
-      <p:nvGrpSpPr>
-        <p:cNvPr id="1" name=""/>
-        <p:cNvGrpSpPr/>
-        <p:nvPr/>
-      </p:nvGrpSpPr>
-      <p:grpSpPr/>
-      <p:sp>
-        <p:nvSpPr>
-          <p:cNvPr id="2" name="Rectangle 1"/>
-          <p:cNvSpPr/>
-          <p:nvPr/>
-        </p:nvSpPr>
-        <p:spPr>
-          <a:xfrm>
-            <a:off x="0" y="0"/>
-            <a:ext cx="12191695" cy="6858000"/>
-          </a:xfrm>
-          <a:prstGeom prst="rect">
-            <a:avLst/>
-          </a:prstGeom>
-          <a:solidFill>
-            <a:srgbClr val="FFFFFF"/>
-          </a:solidFill>
-          <a:ln>
-            <a:noFill/>
-          </a:ln>
-          <a:effectLst/>
-        </p:spPr>
-        <p:style>
-          <a:lnRef idx="1">
-            <a:schemeClr val="accent1"/>
-          </a:lnRef>
-          <a:fillRef idx="3">
-            <a:schemeClr val="accent1"/>
-          </a:fillRef>
-          <a:effectRef idx="2">
-            <a:schemeClr val="accent1"/>
-          </a:effectRef>
-          <a:fontRef idx="minor">
-            <a:schemeClr val="lt1"/>
-          </a:fontRef>
-        </p:style>
-        <p:txBody>
-          <a:bodyPr rtlCol="0" anchor="ctr"/>
-          <a:lstStyle/>
-          <a:p>
-            <a:pPr algn="ctr"/>
-          </a:p>
-        </p:txBody>
-      </p:sp>
-      <p:sp>
-        <p:nvSpPr>
-          <p:cNvPr id="3" name="Rounded Rectangle 2"/>
-          <p:cNvSpPr/>
-          <p:nvPr/>
-        </p:nvSpPr>
-        <p:spPr>
-          <a:xfrm>
-            <a:off x="502920" y="475488"/>
-            <a:ext cx="310896" cy="310896"/>
-          </a:xfrm>
-          <a:prstGeom prst="roundRect">
-            <a:avLst>
-              <a:gd name="adj" fmla="val 50000"/>
-            </a:avLst>
-          </a:prstGeom>
-          <a:gradFill rotWithShape="1">
-            <a:gsLst>
-              <a:gs pos="0">
-                <a:srgbClr val="3A3F45"/>
-              </a:gs>
-              <a:gs pos="100000">
-                <a:srgbClr val="73787E"/>
-              </a:gs>
-            </a:gsLst>
-            <a:lin scaled="0" ang="18900000"/>
-          </a:gradFill>
-          <a:ln>
-            <a:noFill/>
-          </a:ln>
-          <a:effectLst>
-            <a:outerShdw blurRad="109728" dist="36576" dir="5400000" rotWithShape="0">
-              <a:srgbClr val="000000">
-                <a:alpha val="35000"/>
-              </a:srgbClr>
-            </a:outerShdw>
-          </a:effectLst>
-        </p:spPr>
-        <p:style>
-          <a:lnRef idx="1">
-            <a:schemeClr val="accent1"/>
-          </a:lnRef>
-          <a:fillRef idx="3">
-            <a:schemeClr val="accent1"/>
-          </a:fillRef>
-          <a:effectRef idx="2">
-            <a:schemeClr val="accent1"/>
-          </a:effectRef>
-          <a:fontRef idx="minor">
-            <a:schemeClr val="lt1"/>
-          </a:fontRef>
-        </p:style>
-        <p:txBody>
-          <a:bodyPr rtlCol="0" anchor="ctr"/>
-          <a:lstStyle/>
-          <a:p>
-            <a:pPr algn="ctr"/>
-          </a:p>
-        </p:txBody>
-      </p:sp>
-      <p:sp>
-        <p:nvSpPr>
-          <p:cNvPr id="4" name="TextBox 3"/>
-          <p:cNvSpPr txBox="1"/>
-          <p:nvPr/>
-        </p:nvSpPr>
-        <p:spPr>
-          <a:xfrm>
-            <a:off x="960120" y="274320"/>
-            <a:ext cx="9692640" cy="685800"/>
-          </a:xfrm>
-          <a:prstGeom prst="rect">
-            <a:avLst/>
-          </a:prstGeom>
-          <a:noFill/>
-        </p:spPr>
-        <p:txBody>
-          <a:bodyPr wrap="square" anchor="ctr">
-            <a:spAutoFit/>
-          </a:bodyPr>
-          <a:lstStyle/>
-          <a:p>
-            <a:pPr>
-              <a:lnSpc>
-                <a:spcPct val="114000"/>
-              </a:lnSpc>
-              <a:spcAft>
-                <a:spcPts val="0"/>
-              </a:spcAft>
-            </a:pPr>
-            <a:r>
-              <a:rPr sz="2150" b="1">
-                <a:solidFill>
-                  <a:srgbClr val="1C1C1E"/>
-                </a:solidFill>
-                <a:latin typeface="맑은 고딕"/>
-                <a:ea typeface="맑은 고딕"/>
-              </a:rPr>
-              <a:t>분석 설계 ② 배분 진단 (RQ3)</a:t>
-            </a:r>
-          </a:p>
-        </p:txBody>
-      </p:sp>
-      <p:sp>
-        <p:nvSpPr>
-          <p:cNvPr id="5" name="Rectangle 4"/>
-          <p:cNvSpPr/>
-          <p:nvPr/>
-        </p:nvSpPr>
-        <p:spPr>
-          <a:xfrm>
-            <a:off x="521207" y="969264"/>
-            <a:ext cx="4206240" cy="27432"/>
-          </a:xfrm>
-          <a:prstGeom prst="rect">
-            <a:avLst/>
-          </a:prstGeom>
-          <a:gradFill rotWithShape="1">
-            <a:gsLst>
-              <a:gs pos="0">
-                <a:srgbClr val="2A2E33"/>
-              </a:gs>
-              <a:gs pos="100000">
-                <a:srgbClr val="FFFFFF"/>
-              </a:gs>
-            </a:gsLst>
-            <a:lin scaled="0" ang="0"/>
-          </a:gradFill>
-          <a:ln>
-            <a:noFill/>
-          </a:ln>
-          <a:effectLst/>
-        </p:spPr>
-        <p:style>
-          <a:lnRef idx="1">
-            <a:schemeClr val="accent1"/>
-          </a:lnRef>
-          <a:fillRef idx="3">
-            <a:schemeClr val="accent1"/>
-          </a:fillRef>
-          <a:effectRef idx="2">
-            <a:schemeClr val="accent1"/>
-          </a:effectRef>
-          <a:fontRef idx="minor">
-            <a:schemeClr val="lt1"/>
-          </a:fontRef>
-        </p:style>
-        <p:txBody>
-          <a:bodyPr rtlCol="0" anchor="ctr"/>
-          <a:lstStyle/>
-          <a:p>
-            <a:pPr algn="ctr"/>
-          </a:p>
-        </p:txBody>
-      </p:sp>
-      <p:sp>
-        <p:nvSpPr>
-          <p:cNvPr id="6" name="TextBox 5"/>
-          <p:cNvSpPr txBox="1"/>
-          <p:nvPr/>
-        </p:nvSpPr>
-        <p:spPr>
-          <a:xfrm>
-            <a:off x="10835640" y="164592"/>
-            <a:ext cx="1188720" cy="777240"/>
-          </a:xfrm>
-          <a:prstGeom prst="rect">
-            <a:avLst/>
-          </a:prstGeom>
-          <a:noFill/>
-        </p:spPr>
-        <p:txBody>
-          <a:bodyPr wrap="square" anchor="t">
-            <a:spAutoFit/>
-          </a:bodyPr>
-          <a:lstStyle/>
-          <a:p>
-            <a:pPr>
-              <a:lnSpc>
-                <a:spcPct val="114000"/>
-              </a:lnSpc>
-              <a:spcAft>
-                <a:spcPts val="0"/>
-              </a:spcAft>
-            </a:pPr>
-            <a:r>
-              <a:rPr sz="3000" b="1">
-                <a:solidFill>
-                  <a:srgbClr val="D8DADD"/>
-                </a:solidFill>
-                <a:latin typeface="맑은 고딕"/>
-                <a:ea typeface="맑은 고딕"/>
-              </a:rPr>
-              <a:t>09</a:t>
-            </a:r>
-          </a:p>
-        </p:txBody>
-      </p:sp>
-      <p:sp>
-        <p:nvSpPr>
-          <p:cNvPr id="7" name="TextBox 6"/>
-          <p:cNvSpPr txBox="1"/>
-          <p:nvPr/>
-        </p:nvSpPr>
-        <p:spPr>
-          <a:xfrm>
-            <a:off x="548640" y="1097280"/>
-            <a:ext cx="11155680" cy="384048"/>
-          </a:xfrm>
-          <a:prstGeom prst="rect">
-            <a:avLst/>
-          </a:prstGeom>
-          <a:noFill/>
-        </p:spPr>
-        <p:txBody>
-          <a:bodyPr wrap="square" anchor="t">
-            <a:spAutoFit/>
-          </a:bodyPr>
-          <a:lstStyle/>
-          <a:p>
-            <a:pPr>
-              <a:lnSpc>
-                <a:spcPct val="114000"/>
-              </a:lnSpc>
-              <a:spcAft>
-                <a:spcPts val="0"/>
-              </a:spcAft>
-            </a:pPr>
-            <a:r>
-              <a:rPr sz="1250" b="0">
-                <a:solidFill>
-                  <a:srgbClr val="767A7F"/>
-                </a:solidFill>
-                <a:latin typeface="맑은 고딕"/>
-                <a:ea typeface="맑은 고딕"/>
-              </a:rPr>
-              <a:t>작은 표본의 관행을 지키는 검정 사다리</a:t>
-            </a:r>
-          </a:p>
-        </p:txBody>
-      </p:sp>
-      <p:sp>
-        <p:nvSpPr>
-          <p:cNvPr id="8" name="TextBox 7"/>
-          <p:cNvSpPr txBox="1"/>
-          <p:nvPr/>
-        </p:nvSpPr>
-        <p:spPr>
-          <a:xfrm>
-            <a:off x="502920" y="6492240"/>
-            <a:ext cx="11247120" cy="320040"/>
-          </a:xfrm>
-          <a:prstGeom prst="rect">
-            <a:avLst/>
-          </a:prstGeom>
-          <a:noFill/>
-        </p:spPr>
-        <p:txBody>
-          <a:bodyPr wrap="square" anchor="t">
-            <a:spAutoFit/>
-          </a:bodyPr>
-          <a:lstStyle/>
-          <a:p>
-            <a:pPr>
-              <a:lnSpc>
-                <a:spcPct val="114000"/>
-              </a:lnSpc>
-              <a:spcAft>
-                <a:spcPts val="0"/>
-              </a:spcAft>
-            </a:pPr>
-            <a:r>
-              <a:rPr sz="850" b="0">
-                <a:solidFill>
-                  <a:srgbClr val="B2B5B9"/>
-                </a:solidFill>
-                <a:latin typeface="맑은 고딕"/>
-                <a:ea typeface="맑은 고딕"/>
-              </a:rPr>
-              <a:t>2026 명지대학교 창의적 SW프로그램 경진대회 · 빅데이터 분석 — 데이터 분석 계획서</a:t>
-            </a:r>
-          </a:p>
-        </p:txBody>
-      </p:sp>
-      <p:sp>
-        <p:nvSpPr>
-          <p:cNvPr id="9" name="Rounded Rectangle 8"/>
-          <p:cNvSpPr/>
-          <p:nvPr/>
-        </p:nvSpPr>
-        <p:spPr>
-          <a:xfrm>
-            <a:off x="502920" y="1737360"/>
-            <a:ext cx="11292840" cy="1188720"/>
-          </a:xfrm>
-          <a:prstGeom prst="roundRect">
-            <a:avLst>
-              <a:gd name="adj" fmla="val 6923"/>
-            </a:avLst>
-          </a:prstGeom>
-          <a:solidFill>
-            <a:srgbClr val="FFFFFF"/>
-          </a:solidFill>
-          <a:ln w="12700">
-            <a:solidFill>
-              <a:srgbClr val="E4E6E9"/>
-            </a:solidFill>
-          </a:ln>
-          <a:effectLst>
-            <a:outerShdw blurRad="182880" dist="64008" dir="5400000" rotWithShape="0">
-              <a:srgbClr val="000000">
-                <a:alpha val="30000"/>
-              </a:srgbClr>
-            </a:outerShdw>
-          </a:effectLst>
-        </p:spPr>
-        <p:style>
-          <a:lnRef idx="1">
-            <a:schemeClr val="accent1"/>
-          </a:lnRef>
-          <a:fillRef idx="3">
-            <a:schemeClr val="accent1"/>
-          </a:fillRef>
-          <a:effectRef idx="2">
-            <a:schemeClr val="accent1"/>
-          </a:effectRef>
-          <a:fontRef idx="minor">
-            <a:schemeClr val="lt1"/>
-          </a:fontRef>
-        </p:style>
-        <p:txBody>
-          <a:bodyPr rtlCol="0" anchor="ctr"/>
-          <a:lstStyle/>
-          <a:p>
-            <a:pPr algn="ctr"/>
-          </a:p>
-        </p:txBody>
-      </p:sp>
-      <p:sp>
-        <p:nvSpPr>
-          <p:cNvPr id="10" name="TextBox 9"/>
-          <p:cNvSpPr txBox="1"/>
-          <p:nvPr/>
-        </p:nvSpPr>
-        <p:spPr>
-          <a:xfrm>
-            <a:off x="685800" y="1865376"/>
-            <a:ext cx="10927080" cy="932688"/>
-          </a:xfrm>
-          <a:prstGeom prst="rect">
-            <a:avLst/>
-          </a:prstGeom>
-          <a:noFill/>
-        </p:spPr>
-        <p:txBody>
-          <a:bodyPr wrap="square" anchor="t">
-            <a:spAutoFit/>
-          </a:bodyPr>
-          <a:lstStyle/>
-          <a:p>
-            <a:pPr>
-              <a:lnSpc>
-                <a:spcPct val="114000"/>
-              </a:lnSpc>
-              <a:spcAft>
-                <a:spcPts val="350"/>
-              </a:spcAft>
-            </a:pPr>
-            <a:r>
-              <a:rPr sz="1300" b="1">
-                <a:solidFill>
-                  <a:srgbClr val="33393F"/>
-                </a:solidFill>
-                <a:latin typeface="맑은 고딕"/>
-                <a:ea typeface="맑은 고딕"/>
-              </a:rPr>
-              <a:t>설계 원칙 — C등급 제외</a:t>
-            </a:r>
-          </a:p>
-          <a:p>
-            <a:pPr marL="160020" indent="-160020">
-              <a:lnSpc>
-                <a:spcPct val="114000"/>
-              </a:lnSpc>
-              <a:spcAft>
-                <a:spcPts val="200"/>
-              </a:spcAft>
-            </a:pPr>
-            <a:r>
-              <a:rPr sz="1150" b="0">
-                <a:solidFill>
-                  <a:srgbClr val="1C1C1E"/>
-                </a:solidFill>
-                <a:latin typeface="맑은 고딕"/>
-                <a:ea typeface="맑은 고딕"/>
-              </a:rPr>
-              <a:t>• C의 정의에 "지원 기수령"이 포함되어, 지원받으면 C가 되는 순환 구조가 있다 — 종속변수가 집단 정의에 새어드는 셈</a:t>
-            </a:r>
-          </a:p>
-          <a:p>
-            <a:pPr marL="160020" indent="-160020">
-              <a:lnSpc>
-                <a:spcPct val="114000"/>
-              </a:lnSpc>
-              <a:spcAft>
-                <a:spcPts val="200"/>
-              </a:spcAft>
-            </a:pPr>
-            <a:r>
-              <a:rPr sz="1150" b="0">
-                <a:solidFill>
-                  <a:srgbClr val="1C1C1E"/>
-                </a:solidFill>
-                <a:latin typeface="맑은 고딕"/>
-                <a:ea typeface="맑은 고딕"/>
-              </a:rPr>
-              <a:t>• 이 누출을 막기 위해 실질 취약지 A·B만으로 배분을 분석한다 (제외 논리 자체를 보고서에 기록)</a:t>
-            </a:r>
-          </a:p>
-        </p:txBody>
-      </p:sp>
-      <p:sp>
-        <p:nvSpPr>
-          <p:cNvPr id="11" name="Rounded Rectangle 10"/>
-          <p:cNvSpPr/>
-          <p:nvPr/>
-        </p:nvSpPr>
-        <p:spPr>
-          <a:xfrm>
-            <a:off x="502920" y="3154680"/>
-            <a:ext cx="2286000" cy="685800"/>
-          </a:xfrm>
-          <a:prstGeom prst="roundRect">
-            <a:avLst>
-              <a:gd name="adj" fmla="val 12000"/>
-            </a:avLst>
-          </a:prstGeom>
-          <a:gradFill rotWithShape="1">
-            <a:gsLst>
-              <a:gs pos="0">
-                <a:srgbClr val="2A2E33"/>
-              </a:gs>
-              <a:gs pos="100000">
-                <a:srgbClr val="4A4F55"/>
-              </a:gs>
-            </a:gsLst>
-            <a:lin scaled="0" ang="14700000"/>
-          </a:gradFill>
-          <a:ln>
-            <a:noFill/>
-          </a:ln>
-          <a:effectLst>
-            <a:outerShdw blurRad="182880" dist="64008" dir="5400000" rotWithShape="0">
-              <a:srgbClr val="000000">
-                <a:alpha val="38000"/>
-              </a:srgbClr>
-            </a:outerShdw>
-          </a:effectLst>
-        </p:spPr>
-        <p:style>
-          <a:lnRef idx="1">
-            <a:schemeClr val="accent1"/>
-          </a:lnRef>
-          <a:fillRef idx="3">
-            <a:schemeClr val="accent1"/>
-          </a:fillRef>
-          <a:effectRef idx="2">
-            <a:schemeClr val="accent1"/>
-          </a:effectRef>
-          <a:fontRef idx="minor">
-            <a:schemeClr val="lt1"/>
-          </a:fontRef>
-        </p:style>
-        <p:txBody>
-          <a:bodyPr rtlCol="0" anchor="ctr"/>
-          <a:lstStyle/>
-          <a:p>
-            <a:pPr algn="ctr"/>
-          </a:p>
-        </p:txBody>
-      </p:sp>
-      <p:sp>
-        <p:nvSpPr>
-          <p:cNvPr id="12" name="TextBox 11"/>
-          <p:cNvSpPr txBox="1"/>
-          <p:nvPr/>
-        </p:nvSpPr>
-        <p:spPr>
-          <a:xfrm>
-            <a:off x="640080" y="3227832"/>
-            <a:ext cx="2103120" cy="548640"/>
-          </a:xfrm>
-          <a:prstGeom prst="rect">
-            <a:avLst/>
-          </a:prstGeom>
-          <a:noFill/>
-        </p:spPr>
-        <p:txBody>
-          <a:bodyPr wrap="square" anchor="ctr">
-            <a:spAutoFit/>
-          </a:bodyPr>
-          <a:lstStyle/>
-          <a:p>
-            <a:pPr>
-              <a:lnSpc>
-                <a:spcPct val="114000"/>
-              </a:lnSpc>
-              <a:spcAft>
-                <a:spcPts val="0"/>
-              </a:spcAft>
-            </a:pPr>
-            <a:r>
-              <a:rPr sz="1300" b="1">
-                <a:solidFill>
-                  <a:srgbClr val="FFFFFF"/>
-                </a:solidFill>
-                <a:latin typeface="맑은 고딕"/>
-                <a:ea typeface="맑은 고딕"/>
-              </a:rPr>
-              <a:t>①  분할표 검정</a:t>
-            </a:r>
-          </a:p>
-        </p:txBody>
-      </p:sp>
-      <p:sp>
-        <p:nvSpPr>
-          <p:cNvPr id="13" name="Rounded Rectangle 12"/>
-          <p:cNvSpPr/>
-          <p:nvPr/>
-        </p:nvSpPr>
-        <p:spPr>
-          <a:xfrm>
-            <a:off x="2926080" y="3154680"/>
-            <a:ext cx="8869680" cy="685800"/>
-          </a:xfrm>
-          <a:prstGeom prst="roundRect">
-            <a:avLst>
-              <a:gd name="adj" fmla="val 12000"/>
-            </a:avLst>
-          </a:prstGeom>
-          <a:solidFill>
-            <a:srgbClr val="FFFFFF"/>
-          </a:solidFill>
-          <a:ln w="12700">
-            <a:solidFill>
-              <a:srgbClr val="E4E6E9"/>
-            </a:solidFill>
-          </a:ln>
-          <a:effectLst>
-            <a:outerShdw blurRad="182880" dist="64008" dir="5400000" rotWithShape="0">
-              <a:srgbClr val="000000">
-                <a:alpha val="30000"/>
-              </a:srgbClr>
-            </a:outerShdw>
-          </a:effectLst>
-        </p:spPr>
-        <p:style>
-          <a:lnRef idx="1">
-            <a:schemeClr val="accent1"/>
-          </a:lnRef>
-          <a:fillRef idx="3">
-            <a:schemeClr val="accent1"/>
-          </a:fillRef>
-          <a:effectRef idx="2">
-            <a:schemeClr val="accent1"/>
-          </a:effectRef>
-          <a:fontRef idx="minor">
-            <a:schemeClr val="lt1"/>
-          </a:fontRef>
-        </p:style>
-        <p:txBody>
-          <a:bodyPr rtlCol="0" anchor="ctr"/>
-          <a:lstStyle/>
-          <a:p>
-            <a:pPr algn="ctr"/>
-          </a:p>
-        </p:txBody>
-      </p:sp>
-      <p:sp>
-        <p:nvSpPr>
-          <p:cNvPr id="14" name="TextBox 13"/>
-          <p:cNvSpPr txBox="1"/>
-          <p:nvPr/>
-        </p:nvSpPr>
-        <p:spPr>
-          <a:xfrm>
-            <a:off x="3108960" y="3227832"/>
-            <a:ext cx="8549640" cy="548640"/>
-          </a:xfrm>
-          <a:prstGeom prst="rect">
-            <a:avLst/>
-          </a:prstGeom>
-          <a:noFill/>
-        </p:spPr>
-        <p:txBody>
-          <a:bodyPr wrap="square" anchor="ctr">
-            <a:spAutoFit/>
-          </a:bodyPr>
-          <a:lstStyle/>
-          <a:p>
-            <a:pPr>
-              <a:lnSpc>
-                <a:spcPct val="114000"/>
-              </a:lnSpc>
-              <a:spcAft>
-                <a:spcPts val="0"/>
-              </a:spcAft>
-            </a:pPr>
-            <a:r>
-              <a:rPr sz="1150" b="0">
-                <a:solidFill>
-                  <a:srgbClr val="1C1C1E"/>
-                </a:solidFill>
-                <a:latin typeface="맑은 고딕"/>
-                <a:ea typeface="맑은 고딕"/>
-              </a:rPr>
-              <a:t>A·B 등급과 지원 여부의 연관을 Fisher 정확검정으로 확인 (작은 표에 적합)</a:t>
-            </a:r>
-          </a:p>
-        </p:txBody>
-      </p:sp>
-      <p:sp>
-        <p:nvSpPr>
-          <p:cNvPr id="15" name="Rounded Rectangle 14"/>
-          <p:cNvSpPr/>
-          <p:nvPr/>
-        </p:nvSpPr>
-        <p:spPr>
-          <a:xfrm>
-            <a:off x="502920" y="4023360"/>
-            <a:ext cx="2286000" cy="685800"/>
-          </a:xfrm>
-          <a:prstGeom prst="roundRect">
-            <a:avLst>
-              <a:gd name="adj" fmla="val 12000"/>
-            </a:avLst>
-          </a:prstGeom>
-          <a:gradFill rotWithShape="1">
-            <a:gsLst>
-              <a:gs pos="0">
-                <a:srgbClr val="2A2E33"/>
-              </a:gs>
-              <a:gs pos="100000">
-                <a:srgbClr val="4A4F55"/>
-              </a:gs>
-            </a:gsLst>
-            <a:lin scaled="0" ang="14700000"/>
-          </a:gradFill>
-          <a:ln>
-            <a:noFill/>
-          </a:ln>
-          <a:effectLst>
-            <a:outerShdw blurRad="182880" dist="64008" dir="5400000" rotWithShape="0">
-              <a:srgbClr val="000000">
-                <a:alpha val="38000"/>
-              </a:srgbClr>
-            </a:outerShdw>
-          </a:effectLst>
-        </p:spPr>
-        <p:style>
-          <a:lnRef idx="1">
-            <a:schemeClr val="accent1"/>
-          </a:lnRef>
-          <a:fillRef idx="3">
-            <a:schemeClr val="accent1"/>
-          </a:fillRef>
-          <a:effectRef idx="2">
-            <a:schemeClr val="accent1"/>
-          </a:effectRef>
-          <a:fontRef idx="minor">
-            <a:schemeClr val="lt1"/>
-          </a:fontRef>
-        </p:style>
-        <p:txBody>
-          <a:bodyPr rtlCol="0" anchor="ctr"/>
-          <a:lstStyle/>
-          <a:p>
-            <a:pPr algn="ctr"/>
-          </a:p>
-        </p:txBody>
-      </p:sp>
-      <p:sp>
-        <p:nvSpPr>
-          <p:cNvPr id="16" name="TextBox 15"/>
-          <p:cNvSpPr txBox="1"/>
-          <p:nvPr/>
-        </p:nvSpPr>
-        <p:spPr>
-          <a:xfrm>
-            <a:off x="640080" y="4096512"/>
-            <a:ext cx="2103120" cy="548640"/>
-          </a:xfrm>
-          <a:prstGeom prst="rect">
-            <a:avLst/>
-          </a:prstGeom>
-          <a:noFill/>
-        </p:spPr>
-        <p:txBody>
-          <a:bodyPr wrap="square" anchor="ctr">
-            <a:spAutoFit/>
-          </a:bodyPr>
-          <a:lstStyle/>
-          <a:p>
-            <a:pPr>
-              <a:lnSpc>
-                <a:spcPct val="114000"/>
-              </a:lnSpc>
-              <a:spcAft>
-                <a:spcPts val="0"/>
-              </a:spcAft>
-            </a:pPr>
-            <a:r>
-              <a:rPr sz="1300" b="1">
-                <a:solidFill>
-                  <a:srgbClr val="FFFFFF"/>
-                </a:solidFill>
-                <a:latin typeface="맑은 고딕"/>
-                <a:ea typeface="맑은 고딕"/>
-              </a:rPr>
-              <a:t>②  변수별 비교</a:t>
-            </a:r>
-          </a:p>
-        </p:txBody>
-      </p:sp>
-      <p:sp>
-        <p:nvSpPr>
-          <p:cNvPr id="17" name="Rounded Rectangle 16"/>
-          <p:cNvSpPr/>
-          <p:nvPr/>
-        </p:nvSpPr>
-        <p:spPr>
-          <a:xfrm>
-            <a:off x="2926080" y="4023360"/>
-            <a:ext cx="8869680" cy="685800"/>
-          </a:xfrm>
-          <a:prstGeom prst="roundRect">
-            <a:avLst>
-              <a:gd name="adj" fmla="val 12000"/>
-            </a:avLst>
-          </a:prstGeom>
-          <a:solidFill>
-            <a:srgbClr val="FFFFFF"/>
-          </a:solidFill>
-          <a:ln w="12700">
-            <a:solidFill>
-              <a:srgbClr val="E4E6E9"/>
-            </a:solidFill>
-          </a:ln>
-          <a:effectLst>
-            <a:outerShdw blurRad="182880" dist="64008" dir="5400000" rotWithShape="0">
-              <a:srgbClr val="000000">
-                <a:alpha val="30000"/>
-              </a:srgbClr>
-            </a:outerShdw>
-          </a:effectLst>
-        </p:spPr>
-        <p:style>
-          <a:lnRef idx="1">
-            <a:schemeClr val="accent1"/>
-          </a:lnRef>
-          <a:fillRef idx="3">
-            <a:schemeClr val="accent1"/>
-          </a:fillRef>
-          <a:effectRef idx="2">
-            <a:schemeClr val="accent1"/>
-          </a:effectRef>
-          <a:fontRef idx="minor">
-            <a:schemeClr val="lt1"/>
-          </a:fontRef>
-        </p:style>
-        <p:txBody>
-          <a:bodyPr rtlCol="0" anchor="ctr"/>
-          <a:lstStyle/>
-          <a:p>
-            <a:pPr algn="ctr"/>
-          </a:p>
-        </p:txBody>
-      </p:sp>
-      <p:sp>
-        <p:nvSpPr>
-          <p:cNvPr id="18" name="TextBox 17"/>
-          <p:cNvSpPr txBox="1"/>
-          <p:nvPr/>
-        </p:nvSpPr>
-        <p:spPr>
-          <a:xfrm>
-            <a:off x="3108960" y="4096512"/>
-            <a:ext cx="8549640" cy="548640"/>
-          </a:xfrm>
-          <a:prstGeom prst="rect">
-            <a:avLst/>
-          </a:prstGeom>
-          <a:noFill/>
-        </p:spPr>
-        <p:txBody>
-          <a:bodyPr wrap="square" anchor="ctr">
-            <a:spAutoFit/>
-          </a:bodyPr>
-          <a:lstStyle/>
-          <a:p>
-            <a:pPr>
-              <a:lnSpc>
-                <a:spcPct val="114000"/>
-              </a:lnSpc>
-              <a:spcAft>
-                <a:spcPts val="0"/>
-              </a:spcAft>
-            </a:pPr>
-            <a:r>
-              <a:rPr sz="1150" b="0">
-                <a:solidFill>
-                  <a:srgbClr val="1C1C1E"/>
-                </a:solidFill>
-                <a:latin typeface="맑은 고딕"/>
-                <a:ea typeface="맑은 고딕"/>
-              </a:rPr>
-              <a:t>지원/미지원 집단의 지표 차이를 Mann-Whitney U로 검정하고, 다중비교는 BH 보정으로 통제</a:t>
-            </a:r>
-          </a:p>
-        </p:txBody>
-      </p:sp>
-      <p:sp>
-        <p:nvSpPr>
-          <p:cNvPr id="19" name="Rounded Rectangle 18"/>
-          <p:cNvSpPr/>
-          <p:nvPr/>
-        </p:nvSpPr>
-        <p:spPr>
-          <a:xfrm>
-            <a:off x="502920" y="4892040"/>
-            <a:ext cx="2286000" cy="685800"/>
-          </a:xfrm>
-          <a:prstGeom prst="roundRect">
-            <a:avLst>
-              <a:gd name="adj" fmla="val 12000"/>
-            </a:avLst>
-          </a:prstGeom>
-          <a:gradFill rotWithShape="1">
-            <a:gsLst>
-              <a:gs pos="0">
-                <a:srgbClr val="2A2E33"/>
-              </a:gs>
-              <a:gs pos="100000">
-                <a:srgbClr val="4A4F55"/>
-              </a:gs>
-            </a:gsLst>
-            <a:lin scaled="0" ang="14700000"/>
-          </a:gradFill>
-          <a:ln>
-            <a:noFill/>
-          </a:ln>
-          <a:effectLst>
-            <a:outerShdw blurRad="182880" dist="64008" dir="5400000" rotWithShape="0">
-              <a:srgbClr val="000000">
-                <a:alpha val="38000"/>
-              </a:srgbClr>
-            </a:outerShdw>
-          </a:effectLst>
-        </p:spPr>
-        <p:style>
-          <a:lnRef idx="1">
-            <a:schemeClr val="accent1"/>
-          </a:lnRef>
-          <a:fillRef idx="3">
-            <a:schemeClr val="accent1"/>
-          </a:fillRef>
-          <a:effectRef idx="2">
-            <a:schemeClr val="accent1"/>
-          </a:effectRef>
-          <a:fontRef idx="minor">
-            <a:schemeClr val="lt1"/>
-          </a:fontRef>
-        </p:style>
-        <p:txBody>
-          <a:bodyPr rtlCol="0" anchor="ctr"/>
-          <a:lstStyle/>
-          <a:p>
-            <a:pPr algn="ctr"/>
-          </a:p>
-        </p:txBody>
-      </p:sp>
-      <p:sp>
-        <p:nvSpPr>
-          <p:cNvPr id="20" name="TextBox 19"/>
-          <p:cNvSpPr txBox="1"/>
-          <p:nvPr/>
-        </p:nvSpPr>
-        <p:spPr>
-          <a:xfrm>
-            <a:off x="640080" y="4965192"/>
-            <a:ext cx="2103120" cy="548640"/>
-          </a:xfrm>
-          <a:prstGeom prst="rect">
-            <a:avLst/>
-          </a:prstGeom>
-          <a:noFill/>
-        </p:spPr>
-        <p:txBody>
-          <a:bodyPr wrap="square" anchor="ctr">
-            <a:spAutoFit/>
-          </a:bodyPr>
-          <a:lstStyle/>
-          <a:p>
-            <a:pPr>
-              <a:lnSpc>
-                <a:spcPct val="114000"/>
-              </a:lnSpc>
-              <a:spcAft>
-                <a:spcPts val="0"/>
-              </a:spcAft>
-            </a:pPr>
-            <a:r>
-              <a:rPr sz="1300" b="1">
-                <a:solidFill>
-                  <a:srgbClr val="FFFFFF"/>
-                </a:solidFill>
-                <a:latin typeface="맑은 고딕"/>
-                <a:ea typeface="맑은 고딕"/>
-              </a:rPr>
-              <a:t>③  다변량 모형</a:t>
-            </a:r>
-          </a:p>
-        </p:txBody>
-      </p:sp>
-      <p:sp>
-        <p:nvSpPr>
-          <p:cNvPr id="21" name="Rounded Rectangle 20"/>
-          <p:cNvSpPr/>
-          <p:nvPr/>
-        </p:nvSpPr>
-        <p:spPr>
-          <a:xfrm>
-            <a:off x="2926080" y="4892040"/>
-            <a:ext cx="8869680" cy="685800"/>
-          </a:xfrm>
-          <a:prstGeom prst="roundRect">
-            <a:avLst>
-              <a:gd name="adj" fmla="val 12000"/>
-            </a:avLst>
-          </a:prstGeom>
-          <a:solidFill>
-            <a:srgbClr val="FFFFFF"/>
-          </a:solidFill>
-          <a:ln w="12700">
-            <a:solidFill>
-              <a:srgbClr val="E4E6E9"/>
-            </a:solidFill>
-          </a:ln>
-          <a:effectLst>
-            <a:outerShdw blurRad="182880" dist="64008" dir="5400000" rotWithShape="0">
-              <a:srgbClr val="000000">
-                <a:alpha val="30000"/>
-              </a:srgbClr>
-            </a:outerShdw>
-          </a:effectLst>
-        </p:spPr>
-        <p:style>
-          <a:lnRef idx="1">
-            <a:schemeClr val="accent1"/>
-          </a:lnRef>
-          <a:fillRef idx="3">
-            <a:schemeClr val="accent1"/>
-          </a:fillRef>
-          <a:effectRef idx="2">
-            <a:schemeClr val="accent1"/>
-          </a:effectRef>
-          <a:fontRef idx="minor">
-            <a:schemeClr val="lt1"/>
-          </a:fontRef>
-        </p:style>
-        <p:txBody>
-          <a:bodyPr rtlCol="0" anchor="ctr"/>
-          <a:lstStyle/>
-          <a:p>
-            <a:pPr algn="ctr"/>
-          </a:p>
-        </p:txBody>
-      </p:sp>
-      <p:sp>
-        <p:nvSpPr>
-          <p:cNvPr id="22" name="TextBox 21"/>
-          <p:cNvSpPr txBox="1"/>
-          <p:nvPr/>
-        </p:nvSpPr>
-        <p:spPr>
-          <a:xfrm>
-            <a:off x="3108960" y="4965192"/>
-            <a:ext cx="8549640" cy="548640"/>
-          </a:xfrm>
-          <a:prstGeom prst="rect">
-            <a:avLst/>
-          </a:prstGeom>
-          <a:noFill/>
-        </p:spPr>
-        <p:txBody>
-          <a:bodyPr wrap="square" anchor="ctr">
-            <a:spAutoFit/>
-          </a:bodyPr>
-          <a:lstStyle/>
-          <a:p>
-            <a:pPr>
-              <a:lnSpc>
-                <a:spcPct val="114000"/>
-              </a:lnSpc>
-              <a:spcAft>
-                <a:spcPts val="0"/>
-              </a:spcAft>
-            </a:pPr>
-            <a:r>
-              <a:rPr sz="1150" b="0">
-                <a:solidFill>
-                  <a:srgbClr val="1C1C1E"/>
-                </a:solidFill>
-                <a:latin typeface="맑은 고딕"/>
-                <a:ea typeface="맑은 고딕"/>
-              </a:rPr>
-              <a:t>사건 수 대비 변수 수 관행(EPV)을 지켜 소수 변수 로지스틱 + 우도비검정 + 부트스트랩 부호 일관성으로 판단</a:t>
-            </a:r>
-          </a:p>
-        </p:txBody>
-      </p:sp>
-      <p:sp>
-        <p:nvSpPr>
-          <p:cNvPr id="23" name="TextBox 22"/>
-          <p:cNvSpPr txBox="1"/>
-          <p:nvPr/>
-        </p:nvSpPr>
-        <p:spPr>
-          <a:xfrm>
-            <a:off x="502920" y="5897880"/>
-            <a:ext cx="11247120" cy="640080"/>
-          </a:xfrm>
-          <a:prstGeom prst="rect">
-            <a:avLst/>
-          </a:prstGeom>
-          <a:noFill/>
-        </p:spPr>
-        <p:txBody>
-          <a:bodyPr wrap="square" anchor="t">
-            <a:spAutoFit/>
-          </a:bodyPr>
-          <a:lstStyle/>
-          <a:p>
-            <a:pPr>
-              <a:lnSpc>
-                <a:spcPct val="114000"/>
-              </a:lnSpc>
-              <a:spcAft>
-                <a:spcPts val="200"/>
-              </a:spcAft>
-            </a:pPr>
-            <a:r>
-              <a:rPr sz="1150" b="0">
-                <a:solidFill>
-                  <a:srgbClr val="767A7F"/>
-                </a:solidFill>
-                <a:latin typeface="맑은 고딕"/>
-                <a:ea typeface="맑은 고딕"/>
-              </a:rPr>
-              <a:t>보고 원칙: "유의하지 않음"을 "효과 없음"으로 쓰지 않는다 — 표본이 작아 식별 불가일 수 있음을 명시하고,</a:t>
-            </a:r>
-          </a:p>
-          <a:p>
-            <a:pPr>
-              <a:lnSpc>
-                <a:spcPct val="114000"/>
-              </a:lnSpc>
-              <a:spcAft>
-                <a:spcPts val="0"/>
-              </a:spcAft>
-            </a:pPr>
-            <a:r>
-              <a:rPr sz="1150" b="0">
-                <a:solidFill>
-                  <a:srgbClr val="767A7F"/>
-                </a:solidFill>
-                <a:latin typeface="맑은 고딕"/>
-                <a:ea typeface="맑은 고딕"/>
-              </a:rPr>
-              <a:t>개별 p값보다 방향의 안정성(부트스트랩)과 모형 설명력을 함께 제시한다.</a:t>
             </a:r>
           </a:p>
         </p:txBody>

--- a/04_제출물/데이터분석_계획서.pptx
+++ b/04_제출물/데이터분석_계획서.pptx
@@ -18,6 +18,7 @@
     <p:sldId id="266" r:id="rId17"/>
     <p:sldId id="267" r:id="rId18"/>
     <p:sldId id="268" r:id="rId19"/>
+    <p:sldId id="269" r:id="rId20"/>
   </p:sldIdLst>
   <p:sldSz cx="12191695" cy="6858000" type="screen4x3"/>
   <p:notesSz cx="6858000" cy="9144000"/>
@@ -3213,7 +3214,7 @@
         <p:spPr>
           <a:xfrm>
             <a:off x="914400" y="1481328"/>
-            <a:ext cx="7315200" cy="2834640"/>
+            <a:ext cx="8467344" cy="1764792"/>
           </a:xfrm>
           <a:prstGeom prst="rect">
             <a:avLst/>
@@ -3262,7 +3263,7 @@
                 <a:latin typeface="맑은 고딕"/>
                 <a:ea typeface="맑은 고딕"/>
               </a:rPr>
-              <a:t>측정과 배분 사이</a:t>
+              <a:t>분만취약지 지원제도 개선안</a:t>
             </a:r>
           </a:p>
           <a:p>
@@ -3282,7 +3283,7 @@
                 <a:latin typeface="맑은 고딕"/>
                 <a:ea typeface="맑은 고딕"/>
               </a:rPr>
-              <a:t>— 분만취약지 제도의 전 과정 데이터 감사와 우선순위 모형</a:t>
+              <a:t>분만취약지 지원 제도의 모든 절차 속 데이터 감사와 개선된 분석 모형 제안</a:t>
             </a:r>
           </a:p>
         </p:txBody>
@@ -3582,7 +3583,7 @@
                 <a:latin typeface="맑은 고딕"/>
                 <a:ea typeface="맑은 고딕"/>
               </a:rPr>
-              <a:t>분석 설계 ② 배분 진단 (RQ3)</a:t>
+              <a:t>분석 설계 ① 지정 감사 (RQ1·RQ2)</a:t>
             </a:r>
           </a:p>
         </p:txBody>
@@ -3678,6 +3679,900 @@
                 <a:ea typeface="맑은 고딕"/>
               </a:rPr>
               <a:t>10</a:t>
+            </a:r>
+          </a:p>
+        </p:txBody>
+      </p:sp>
+      <p:sp>
+        <p:nvSpPr>
+          <p:cNvPr id="7" name="TextBox 6"/>
+          <p:cNvSpPr txBox="1"/>
+          <p:nvPr/>
+        </p:nvSpPr>
+        <p:spPr>
+          <a:xfrm>
+            <a:off x="548640" y="1097280"/>
+            <a:ext cx="11155680" cy="384048"/>
+          </a:xfrm>
+          <a:prstGeom prst="rect">
+            <a:avLst/>
+          </a:prstGeom>
+          <a:noFill/>
+        </p:spPr>
+        <p:txBody>
+          <a:bodyPr wrap="square" anchor="t">
+            <a:spAutoFit/>
+          </a:bodyPr>
+          <a:lstStyle/>
+          <a:p>
+            <a:pPr>
+              <a:lnSpc>
+                <a:spcPct val="114000"/>
+              </a:lnSpc>
+              <a:spcAft>
+                <a:spcPts val="0"/>
+              </a:spcAft>
+            </a:pPr>
+            <a:r>
+              <a:rPr sz="1250" b="0">
+                <a:solidFill>
+                  <a:srgbClr val="767A7F"/>
+                </a:solidFill>
+                <a:latin typeface="맑은 고딕"/>
+                <a:ea typeface="맑은 고딕"/>
+              </a:rPr>
+              <a:t>공표된 규칙을 그대로 재계산해 실제와 대조한다</a:t>
+            </a:r>
+          </a:p>
+        </p:txBody>
+      </p:sp>
+      <p:sp>
+        <p:nvSpPr>
+          <p:cNvPr id="8" name="TextBox 7"/>
+          <p:cNvSpPr txBox="1"/>
+          <p:nvPr/>
+        </p:nvSpPr>
+        <p:spPr>
+          <a:xfrm>
+            <a:off x="502920" y="6492240"/>
+            <a:ext cx="11247120" cy="320040"/>
+          </a:xfrm>
+          <a:prstGeom prst="rect">
+            <a:avLst/>
+          </a:prstGeom>
+          <a:noFill/>
+        </p:spPr>
+        <p:txBody>
+          <a:bodyPr wrap="square" anchor="t">
+            <a:spAutoFit/>
+          </a:bodyPr>
+          <a:lstStyle/>
+          <a:p>
+            <a:pPr>
+              <a:lnSpc>
+                <a:spcPct val="114000"/>
+              </a:lnSpc>
+              <a:spcAft>
+                <a:spcPts val="0"/>
+              </a:spcAft>
+            </a:pPr>
+            <a:r>
+              <a:rPr sz="850" b="0">
+                <a:solidFill>
+                  <a:srgbClr val="B2B5B9"/>
+                </a:solidFill>
+                <a:latin typeface="맑은 고딕"/>
+                <a:ea typeface="맑은 고딕"/>
+              </a:rPr>
+              <a:t>2026 명지대학교 창의적 SW프로그램 경진대회 · 빅데이터 분석 — 데이터 분석 계획서</a:t>
+            </a:r>
+          </a:p>
+        </p:txBody>
+      </p:sp>
+      <p:sp>
+        <p:nvSpPr>
+          <p:cNvPr id="9" name="Rounded Rectangle 8"/>
+          <p:cNvSpPr/>
+          <p:nvPr/>
+        </p:nvSpPr>
+        <p:spPr>
+          <a:xfrm>
+            <a:off x="502920" y="1737360"/>
+            <a:ext cx="3611880" cy="2651760"/>
+          </a:xfrm>
+          <a:prstGeom prst="roundRect">
+            <a:avLst>
+              <a:gd name="adj" fmla="val 3103"/>
+            </a:avLst>
+          </a:prstGeom>
+          <a:solidFill>
+            <a:srgbClr val="FFFFFF"/>
+          </a:solidFill>
+          <a:ln w="12700">
+            <a:solidFill>
+              <a:srgbClr val="E4E6E9"/>
+            </a:solidFill>
+          </a:ln>
+          <a:effectLst>
+            <a:outerShdw blurRad="182880" dist="64008" dir="5400000" rotWithShape="0">
+              <a:srgbClr val="000000">
+                <a:alpha val="30000"/>
+              </a:srgbClr>
+            </a:outerShdw>
+          </a:effectLst>
+        </p:spPr>
+        <p:style>
+          <a:lnRef idx="1">
+            <a:schemeClr val="accent1"/>
+          </a:lnRef>
+          <a:fillRef idx="3">
+            <a:schemeClr val="accent1"/>
+          </a:fillRef>
+          <a:effectRef idx="2">
+            <a:schemeClr val="accent1"/>
+          </a:effectRef>
+          <a:fontRef idx="minor">
+            <a:schemeClr val="lt1"/>
+          </a:fontRef>
+        </p:style>
+        <p:txBody>
+          <a:bodyPr rtlCol="0" anchor="ctr"/>
+          <a:lstStyle/>
+          <a:p>
+            <a:pPr algn="ctr"/>
+          </a:p>
+        </p:txBody>
+      </p:sp>
+      <p:sp>
+        <p:nvSpPr>
+          <p:cNvPr id="10" name="TextBox 9"/>
+          <p:cNvSpPr txBox="1"/>
+          <p:nvPr/>
+        </p:nvSpPr>
+        <p:spPr>
+          <a:xfrm>
+            <a:off x="685800" y="1865376"/>
+            <a:ext cx="3246120" cy="2395728"/>
+          </a:xfrm>
+          <a:prstGeom prst="rect">
+            <a:avLst/>
+          </a:prstGeom>
+          <a:noFill/>
+        </p:spPr>
+        <p:txBody>
+          <a:bodyPr wrap="square" anchor="t">
+            <a:spAutoFit/>
+          </a:bodyPr>
+          <a:lstStyle/>
+          <a:p>
+            <a:pPr>
+              <a:lnSpc>
+                <a:spcPct val="114000"/>
+              </a:lnSpc>
+              <a:spcAft>
+                <a:spcPts val="350"/>
+              </a:spcAft>
+            </a:pPr>
+            <a:r>
+              <a:rPr sz="1350" b="1">
+                <a:solidFill>
+                  <a:srgbClr val="33393F"/>
+                </a:solidFill>
+                <a:latin typeface="맑은 고딕"/>
+                <a:ea typeface="맑은 고딕"/>
+              </a:rPr>
+              <a:t>1단계 · 판정식 검증</a:t>
+            </a:r>
+          </a:p>
+          <a:p>
+            <a:pPr marL="160020" indent="-160020">
+              <a:lnSpc>
+                <a:spcPct val="114000"/>
+              </a:lnSpc>
+              <a:spcAft>
+                <a:spcPts val="200"/>
+              </a:spcAft>
+            </a:pPr>
+            <a:r>
+              <a:rPr sz="1100" b="0">
+                <a:solidFill>
+                  <a:srgbClr val="1C1C1E"/>
+                </a:solidFill>
+                <a:latin typeface="맑은 고딕"/>
+                <a:ea typeface="맑은 고딕"/>
+              </a:rPr>
+              <a:t>• 공표 임계값(접근성·TRI 30/30 등)으로 전 지역을 재판정하고 실제 지정 결과와 대조한다</a:t>
+            </a:r>
+          </a:p>
+          <a:p>
+            <a:pPr marL="160020" indent="-160020">
+              <a:lnSpc>
+                <a:spcPct val="114000"/>
+              </a:lnSpc>
+              <a:spcAft>
+                <a:spcPts val="200"/>
+              </a:spcAft>
+            </a:pPr>
+            <a:r>
+              <a:rPr sz="1100" b="0">
+                <a:solidFill>
+                  <a:srgbClr val="1C1C1E"/>
+                </a:solidFill>
+                <a:latin typeface="맑은 고딕"/>
+                <a:ea typeface="맑은 고딕"/>
+              </a:rPr>
+              <a:t>• 일치율과 불일치 사례를 모두 보고한다 — 불일치는 오류가 아니라 행정 층의 증거로 해석할 계획</a:t>
+            </a:r>
+          </a:p>
+        </p:txBody>
+      </p:sp>
+      <p:sp>
+        <p:nvSpPr>
+          <p:cNvPr id="11" name="Rounded Rectangle 10"/>
+          <p:cNvSpPr/>
+          <p:nvPr/>
+        </p:nvSpPr>
+        <p:spPr>
+          <a:xfrm>
+            <a:off x="4343400" y="1737360"/>
+            <a:ext cx="3611880" cy="2651760"/>
+          </a:xfrm>
+          <a:prstGeom prst="roundRect">
+            <a:avLst>
+              <a:gd name="adj" fmla="val 3103"/>
+            </a:avLst>
+          </a:prstGeom>
+          <a:solidFill>
+            <a:srgbClr val="FFFFFF"/>
+          </a:solidFill>
+          <a:ln w="12700">
+            <a:solidFill>
+              <a:srgbClr val="E4E6E9"/>
+            </a:solidFill>
+          </a:ln>
+          <a:effectLst>
+            <a:outerShdw blurRad="182880" dist="64008" dir="5400000" rotWithShape="0">
+              <a:srgbClr val="000000">
+                <a:alpha val="30000"/>
+              </a:srgbClr>
+            </a:outerShdw>
+          </a:effectLst>
+        </p:spPr>
+        <p:style>
+          <a:lnRef idx="1">
+            <a:schemeClr val="accent1"/>
+          </a:lnRef>
+          <a:fillRef idx="3">
+            <a:schemeClr val="accent1"/>
+          </a:fillRef>
+          <a:effectRef idx="2">
+            <a:schemeClr val="accent1"/>
+          </a:effectRef>
+          <a:fontRef idx="minor">
+            <a:schemeClr val="lt1"/>
+          </a:fontRef>
+        </p:style>
+        <p:txBody>
+          <a:bodyPr rtlCol="0" anchor="ctr"/>
+          <a:lstStyle/>
+          <a:p>
+            <a:pPr algn="ctr"/>
+          </a:p>
+        </p:txBody>
+      </p:sp>
+      <p:sp>
+        <p:nvSpPr>
+          <p:cNvPr id="12" name="TextBox 11"/>
+          <p:cNvSpPr txBox="1"/>
+          <p:nvPr/>
+        </p:nvSpPr>
+        <p:spPr>
+          <a:xfrm>
+            <a:off x="4526280" y="1865376"/>
+            <a:ext cx="3246120" cy="2395728"/>
+          </a:xfrm>
+          <a:prstGeom prst="rect">
+            <a:avLst/>
+          </a:prstGeom>
+          <a:noFill/>
+        </p:spPr>
+        <p:txBody>
+          <a:bodyPr wrap="square" anchor="t">
+            <a:spAutoFit/>
+          </a:bodyPr>
+          <a:lstStyle/>
+          <a:p>
+            <a:pPr>
+              <a:lnSpc>
+                <a:spcPct val="114000"/>
+              </a:lnSpc>
+              <a:spcAft>
+                <a:spcPts val="350"/>
+              </a:spcAft>
+            </a:pPr>
+            <a:r>
+              <a:rPr sz="1350" b="1">
+                <a:solidFill>
+                  <a:srgbClr val="33393F"/>
+                </a:solidFill>
+                <a:latin typeface="맑은 고딕"/>
+                <a:ea typeface="맑은 고딕"/>
+              </a:rPr>
+              <a:t>2단계 · 공급 반영 검정</a:t>
+            </a:r>
+          </a:p>
+          <a:p>
+            <a:pPr marL="160020" indent="-160020">
+              <a:lnSpc>
+                <a:spcPct val="114000"/>
+              </a:lnSpc>
+              <a:spcAft>
+                <a:spcPts val="200"/>
+              </a:spcAft>
+            </a:pPr>
+            <a:r>
+              <a:rPr sz="1100" b="0">
+                <a:solidFill>
+                  <a:srgbClr val="1C1C1E"/>
+                </a:solidFill>
+                <a:latin typeface="맑은 고딕"/>
+                <a:ea typeface="맑은 고딕"/>
+              </a:rPr>
+              <a:t>• 로지스틱 회귀(5-겹 교차검증)로 판정을 예측하고, 공급 변수(전문의 수 등)를 추가했을 때 판별력(AUC)이 개선되는지 본다</a:t>
+            </a:r>
+          </a:p>
+          <a:p>
+            <a:pPr marL="160020" indent="-160020">
+              <a:lnSpc>
+                <a:spcPct val="114000"/>
+              </a:lnSpc>
+              <a:spcAft>
+                <a:spcPts val="200"/>
+              </a:spcAft>
+            </a:pPr>
+            <a:r>
+              <a:rPr sz="1100" b="0">
+                <a:solidFill>
+                  <a:srgbClr val="1C1C1E"/>
+                </a:solidFill>
+                <a:latin typeface="맑은 고딕"/>
+                <a:ea typeface="맑은 고딕"/>
+              </a:rPr>
+              <a:t>• 개선이 없다면 판정이 공급을 보지 않는다는 증거다</a:t>
+            </a:r>
+          </a:p>
+        </p:txBody>
+      </p:sp>
+      <p:sp>
+        <p:nvSpPr>
+          <p:cNvPr id="13" name="Rounded Rectangle 12"/>
+          <p:cNvSpPr/>
+          <p:nvPr/>
+        </p:nvSpPr>
+        <p:spPr>
+          <a:xfrm>
+            <a:off x="8183880" y="1737360"/>
+            <a:ext cx="3611880" cy="2651760"/>
+          </a:xfrm>
+          <a:prstGeom prst="roundRect">
+            <a:avLst>
+              <a:gd name="adj" fmla="val 3103"/>
+            </a:avLst>
+          </a:prstGeom>
+          <a:solidFill>
+            <a:srgbClr val="FFFFFF"/>
+          </a:solidFill>
+          <a:ln w="12700">
+            <a:solidFill>
+              <a:srgbClr val="E4E6E9"/>
+            </a:solidFill>
+          </a:ln>
+          <a:effectLst>
+            <a:outerShdw blurRad="182880" dist="64008" dir="5400000" rotWithShape="0">
+              <a:srgbClr val="000000">
+                <a:alpha val="30000"/>
+              </a:srgbClr>
+            </a:outerShdw>
+          </a:effectLst>
+        </p:spPr>
+        <p:style>
+          <a:lnRef idx="1">
+            <a:schemeClr val="accent1"/>
+          </a:lnRef>
+          <a:fillRef idx="3">
+            <a:schemeClr val="accent1"/>
+          </a:fillRef>
+          <a:effectRef idx="2">
+            <a:schemeClr val="accent1"/>
+          </a:effectRef>
+          <a:fontRef idx="minor">
+            <a:schemeClr val="lt1"/>
+          </a:fontRef>
+        </p:style>
+        <p:txBody>
+          <a:bodyPr rtlCol="0" anchor="ctr"/>
+          <a:lstStyle/>
+          <a:p>
+            <a:pPr algn="ctr"/>
+          </a:p>
+        </p:txBody>
+      </p:sp>
+      <p:sp>
+        <p:nvSpPr>
+          <p:cNvPr id="14" name="TextBox 13"/>
+          <p:cNvSpPr txBox="1"/>
+          <p:nvPr/>
+        </p:nvSpPr>
+        <p:spPr>
+          <a:xfrm>
+            <a:off x="8366760" y="1865376"/>
+            <a:ext cx="3246120" cy="2395728"/>
+          </a:xfrm>
+          <a:prstGeom prst="rect">
+            <a:avLst/>
+          </a:prstGeom>
+          <a:noFill/>
+        </p:spPr>
+        <p:txBody>
+          <a:bodyPr wrap="square" anchor="t">
+            <a:spAutoFit/>
+          </a:bodyPr>
+          <a:lstStyle/>
+          <a:p>
+            <a:pPr>
+              <a:lnSpc>
+                <a:spcPct val="114000"/>
+              </a:lnSpc>
+              <a:spcAft>
+                <a:spcPts val="350"/>
+              </a:spcAft>
+            </a:pPr>
+            <a:r>
+              <a:rPr sz="1350" b="1">
+                <a:solidFill>
+                  <a:srgbClr val="33393F"/>
+                </a:solidFill>
+                <a:latin typeface="맑은 고딕"/>
+                <a:ea typeface="맑은 고딕"/>
+              </a:rPr>
+              <a:t>3단계 · 사각지대 탐지</a:t>
+            </a:r>
+          </a:p>
+          <a:p>
+            <a:pPr marL="160020" indent="-160020">
+              <a:lnSpc>
+                <a:spcPct val="114000"/>
+              </a:lnSpc>
+              <a:spcAft>
+                <a:spcPts val="200"/>
+              </a:spcAft>
+            </a:pPr>
+            <a:r>
+              <a:rPr sz="1100" b="0">
+                <a:solidFill>
+                  <a:srgbClr val="1C1C1E"/>
+                </a:solidFill>
+                <a:latin typeface="맑은 고딕"/>
+                <a:ea typeface="맑은 고딕"/>
+              </a:rPr>
+              <a:t>• "거리 기준 통과 ∧ 관내 공급 공백 ∧ 관내 이용 0"의 3중 기준을 사전 정의하고 해당 지역을 탐지한다</a:t>
+            </a:r>
+          </a:p>
+          <a:p>
+            <a:pPr marL="160020" indent="-160020">
+              <a:lnSpc>
+                <a:spcPct val="114000"/>
+              </a:lnSpc>
+              <a:spcAft>
+                <a:spcPts val="200"/>
+              </a:spcAft>
+            </a:pPr>
+            <a:r>
+              <a:rPr sz="1100" b="0">
+                <a:solidFill>
+                  <a:srgbClr val="1C1C1E"/>
+                </a:solidFill>
+                <a:latin typeface="맑은 고딕"/>
+                <a:ea typeface="맑은 고딕"/>
+              </a:rPr>
+              <a:t>• 중증 이송 반론은 동급 병원 유출 분리로, 선호 원정 반론은 관내 선택지 유무로 통제한다</a:t>
+            </a:r>
+          </a:p>
+        </p:txBody>
+      </p:sp>
+      <p:sp>
+        <p:nvSpPr>
+          <p:cNvPr id="15" name="Rounded Rectangle 14"/>
+          <p:cNvSpPr/>
+          <p:nvPr/>
+        </p:nvSpPr>
+        <p:spPr>
+          <a:xfrm>
+            <a:off x="502920" y="4663440"/>
+            <a:ext cx="11292840" cy="1417320"/>
+          </a:xfrm>
+          <a:prstGeom prst="roundRect">
+            <a:avLst>
+              <a:gd name="adj" fmla="val 5806"/>
+            </a:avLst>
+          </a:prstGeom>
+          <a:solidFill>
+            <a:srgbClr val="FFFFFF"/>
+          </a:solidFill>
+          <a:ln w="12700">
+            <a:solidFill>
+              <a:srgbClr val="E4E6E9"/>
+            </a:solidFill>
+          </a:ln>
+          <a:effectLst>
+            <a:outerShdw blurRad="182880" dist="64008" dir="5400000" rotWithShape="0">
+              <a:srgbClr val="000000">
+                <a:alpha val="30000"/>
+              </a:srgbClr>
+            </a:outerShdw>
+          </a:effectLst>
+        </p:spPr>
+        <p:style>
+          <a:lnRef idx="1">
+            <a:schemeClr val="accent1"/>
+          </a:lnRef>
+          <a:fillRef idx="3">
+            <a:schemeClr val="accent1"/>
+          </a:fillRef>
+          <a:effectRef idx="2">
+            <a:schemeClr val="accent1"/>
+          </a:effectRef>
+          <a:fontRef idx="minor">
+            <a:schemeClr val="lt1"/>
+          </a:fontRef>
+        </p:style>
+        <p:txBody>
+          <a:bodyPr rtlCol="0" anchor="ctr"/>
+          <a:lstStyle/>
+          <a:p>
+            <a:pPr algn="ctr"/>
+          </a:p>
+        </p:txBody>
+      </p:sp>
+      <p:sp>
+        <p:nvSpPr>
+          <p:cNvPr id="16" name="TextBox 15"/>
+          <p:cNvSpPr txBox="1"/>
+          <p:nvPr/>
+        </p:nvSpPr>
+        <p:spPr>
+          <a:xfrm>
+            <a:off x="685800" y="4791455"/>
+            <a:ext cx="10927080" cy="1161288"/>
+          </a:xfrm>
+          <a:prstGeom prst="rect">
+            <a:avLst/>
+          </a:prstGeom>
+          <a:noFill/>
+        </p:spPr>
+        <p:txBody>
+          <a:bodyPr wrap="square" anchor="t">
+            <a:spAutoFit/>
+          </a:bodyPr>
+          <a:lstStyle/>
+          <a:p>
+            <a:pPr>
+              <a:lnSpc>
+                <a:spcPct val="114000"/>
+              </a:lnSpc>
+              <a:spcAft>
+                <a:spcPts val="350"/>
+              </a:spcAft>
+            </a:pPr>
+            <a:r>
+              <a:rPr sz="1300" b="1">
+                <a:solidFill>
+                  <a:srgbClr val="33393F"/>
+                </a:solidFill>
+                <a:latin typeface="맑은 고딕"/>
+                <a:ea typeface="맑은 고딕"/>
+              </a:rPr>
+              <a:t>판단 기준의 사전 명시</a:t>
+            </a:r>
+          </a:p>
+          <a:p>
+            <a:pPr marL="160020" indent="-160020">
+              <a:lnSpc>
+                <a:spcPct val="114000"/>
+              </a:lnSpc>
+              <a:spcAft>
+                <a:spcPts val="200"/>
+              </a:spcAft>
+            </a:pPr>
+            <a:r>
+              <a:rPr sz="1150" b="0">
+                <a:solidFill>
+                  <a:srgbClr val="1C1C1E"/>
+                </a:solidFill>
+                <a:latin typeface="맑은 고딕"/>
+                <a:ea typeface="맑은 고딕"/>
+              </a:rPr>
+              <a:t>• 무엇을 "재현 성공"으로, 무엇을 "사각지대"로 볼지의 기준을 분석 전에 확정해 보고서에 명시한다</a:t>
+            </a:r>
+          </a:p>
+          <a:p>
+            <a:pPr marL="160020" indent="-160020">
+              <a:lnSpc>
+                <a:spcPct val="114000"/>
+              </a:lnSpc>
+              <a:spcAft>
+                <a:spcPts val="200"/>
+              </a:spcAft>
+            </a:pPr>
+            <a:r>
+              <a:rPr sz="1150" b="0">
+                <a:solidFill>
+                  <a:srgbClr val="1C1C1E"/>
+                </a:solidFill>
+                <a:latin typeface="맑은 고딕"/>
+                <a:ea typeface="맑은 고딕"/>
+              </a:rPr>
+              <a:t>• 반대 해석(예: "옆 도시로 가면 되지 않는가")을 본문에서 정면으로 다루는 섹션을 계획에 포함한다</a:t>
+            </a:r>
+          </a:p>
+        </p:txBody>
+      </p:sp>
+    </p:spTree>
+  </p:cSld>
+  <p:clrMapOvr>
+    <a:masterClrMapping/>
+  </p:clrMapOvr>
+</p:sld>
+</file>
+
+<file path=ppt/slides/slide11.xml><?xml version="1.0" encoding="utf-8"?>
+<p:sld xmlns:a="http://schemas.openxmlformats.org/drawingml/2006/main" xmlns:p="http://schemas.openxmlformats.org/presentationml/2006/main" xmlns:r="http://schemas.openxmlformats.org/officeDocument/2006/relationships">
+  <p:cSld>
+    <p:spTree>
+      <p:nvGrpSpPr>
+        <p:cNvPr id="1" name=""/>
+        <p:cNvGrpSpPr/>
+        <p:nvPr/>
+      </p:nvGrpSpPr>
+      <p:grpSpPr/>
+      <p:sp>
+        <p:nvSpPr>
+          <p:cNvPr id="2" name="Rectangle 1"/>
+          <p:cNvSpPr/>
+          <p:nvPr/>
+        </p:nvSpPr>
+        <p:spPr>
+          <a:xfrm>
+            <a:off x="0" y="0"/>
+            <a:ext cx="12191695" cy="6858000"/>
+          </a:xfrm>
+          <a:prstGeom prst="rect">
+            <a:avLst/>
+          </a:prstGeom>
+          <a:solidFill>
+            <a:srgbClr val="FFFFFF"/>
+          </a:solidFill>
+          <a:ln>
+            <a:noFill/>
+          </a:ln>
+          <a:effectLst/>
+        </p:spPr>
+        <p:style>
+          <a:lnRef idx="1">
+            <a:schemeClr val="accent1"/>
+          </a:lnRef>
+          <a:fillRef idx="3">
+            <a:schemeClr val="accent1"/>
+          </a:fillRef>
+          <a:effectRef idx="2">
+            <a:schemeClr val="accent1"/>
+          </a:effectRef>
+          <a:fontRef idx="minor">
+            <a:schemeClr val="lt1"/>
+          </a:fontRef>
+        </p:style>
+        <p:txBody>
+          <a:bodyPr rtlCol="0" anchor="ctr"/>
+          <a:lstStyle/>
+          <a:p>
+            <a:pPr algn="ctr"/>
+          </a:p>
+        </p:txBody>
+      </p:sp>
+      <p:sp>
+        <p:nvSpPr>
+          <p:cNvPr id="3" name="Rounded Rectangle 2"/>
+          <p:cNvSpPr/>
+          <p:nvPr/>
+        </p:nvSpPr>
+        <p:spPr>
+          <a:xfrm>
+            <a:off x="502920" y="475488"/>
+            <a:ext cx="310896" cy="310896"/>
+          </a:xfrm>
+          <a:prstGeom prst="roundRect">
+            <a:avLst>
+              <a:gd name="adj" fmla="val 50000"/>
+            </a:avLst>
+          </a:prstGeom>
+          <a:gradFill rotWithShape="1">
+            <a:gsLst>
+              <a:gs pos="0">
+                <a:srgbClr val="3A3F45"/>
+              </a:gs>
+              <a:gs pos="100000">
+                <a:srgbClr val="73787E"/>
+              </a:gs>
+            </a:gsLst>
+            <a:lin scaled="0" ang="18900000"/>
+          </a:gradFill>
+          <a:ln>
+            <a:noFill/>
+          </a:ln>
+          <a:effectLst>
+            <a:outerShdw blurRad="109728" dist="36576" dir="5400000" rotWithShape="0">
+              <a:srgbClr val="000000">
+                <a:alpha val="35000"/>
+              </a:srgbClr>
+            </a:outerShdw>
+          </a:effectLst>
+        </p:spPr>
+        <p:style>
+          <a:lnRef idx="1">
+            <a:schemeClr val="accent1"/>
+          </a:lnRef>
+          <a:fillRef idx="3">
+            <a:schemeClr val="accent1"/>
+          </a:fillRef>
+          <a:effectRef idx="2">
+            <a:schemeClr val="accent1"/>
+          </a:effectRef>
+          <a:fontRef idx="minor">
+            <a:schemeClr val="lt1"/>
+          </a:fontRef>
+        </p:style>
+        <p:txBody>
+          <a:bodyPr rtlCol="0" anchor="ctr"/>
+          <a:lstStyle/>
+          <a:p>
+            <a:pPr algn="ctr"/>
+          </a:p>
+        </p:txBody>
+      </p:sp>
+      <p:sp>
+        <p:nvSpPr>
+          <p:cNvPr id="4" name="TextBox 3"/>
+          <p:cNvSpPr txBox="1"/>
+          <p:nvPr/>
+        </p:nvSpPr>
+        <p:spPr>
+          <a:xfrm>
+            <a:off x="960120" y="274320"/>
+            <a:ext cx="9692640" cy="685800"/>
+          </a:xfrm>
+          <a:prstGeom prst="rect">
+            <a:avLst/>
+          </a:prstGeom>
+          <a:noFill/>
+        </p:spPr>
+        <p:txBody>
+          <a:bodyPr wrap="square" anchor="ctr">
+            <a:spAutoFit/>
+          </a:bodyPr>
+          <a:lstStyle/>
+          <a:p>
+            <a:pPr>
+              <a:lnSpc>
+                <a:spcPct val="114000"/>
+              </a:lnSpc>
+              <a:spcAft>
+                <a:spcPts val="0"/>
+              </a:spcAft>
+            </a:pPr>
+            <a:r>
+              <a:rPr sz="2150" b="1">
+                <a:solidFill>
+                  <a:srgbClr val="1C1C1E"/>
+                </a:solidFill>
+                <a:latin typeface="맑은 고딕"/>
+                <a:ea typeface="맑은 고딕"/>
+              </a:rPr>
+              <a:t>분석 설계 ② 배분 진단 (RQ3)</a:t>
+            </a:r>
+          </a:p>
+        </p:txBody>
+      </p:sp>
+      <p:sp>
+        <p:nvSpPr>
+          <p:cNvPr id="5" name="Rectangle 4"/>
+          <p:cNvSpPr/>
+          <p:nvPr/>
+        </p:nvSpPr>
+        <p:spPr>
+          <a:xfrm>
+            <a:off x="521207" y="969264"/>
+            <a:ext cx="4206240" cy="27432"/>
+          </a:xfrm>
+          <a:prstGeom prst="rect">
+            <a:avLst/>
+          </a:prstGeom>
+          <a:gradFill rotWithShape="1">
+            <a:gsLst>
+              <a:gs pos="0">
+                <a:srgbClr val="2A2E33"/>
+              </a:gs>
+              <a:gs pos="100000">
+                <a:srgbClr val="FFFFFF"/>
+              </a:gs>
+            </a:gsLst>
+            <a:lin scaled="0" ang="0"/>
+          </a:gradFill>
+          <a:ln>
+            <a:noFill/>
+          </a:ln>
+          <a:effectLst/>
+        </p:spPr>
+        <p:style>
+          <a:lnRef idx="1">
+            <a:schemeClr val="accent1"/>
+          </a:lnRef>
+          <a:fillRef idx="3">
+            <a:schemeClr val="accent1"/>
+          </a:fillRef>
+          <a:effectRef idx="2">
+            <a:schemeClr val="accent1"/>
+          </a:effectRef>
+          <a:fontRef idx="minor">
+            <a:schemeClr val="lt1"/>
+          </a:fontRef>
+        </p:style>
+        <p:txBody>
+          <a:bodyPr rtlCol="0" anchor="ctr"/>
+          <a:lstStyle/>
+          <a:p>
+            <a:pPr algn="ctr"/>
+          </a:p>
+        </p:txBody>
+      </p:sp>
+      <p:sp>
+        <p:nvSpPr>
+          <p:cNvPr id="6" name="TextBox 5"/>
+          <p:cNvSpPr txBox="1"/>
+          <p:nvPr/>
+        </p:nvSpPr>
+        <p:spPr>
+          <a:xfrm>
+            <a:off x="10835640" y="164592"/>
+            <a:ext cx="1188720" cy="777240"/>
+          </a:xfrm>
+          <a:prstGeom prst="rect">
+            <a:avLst/>
+          </a:prstGeom>
+          <a:noFill/>
+        </p:spPr>
+        <p:txBody>
+          <a:bodyPr wrap="square" anchor="t">
+            <a:spAutoFit/>
+          </a:bodyPr>
+          <a:lstStyle/>
+          <a:p>
+            <a:pPr>
+              <a:lnSpc>
+                <a:spcPct val="114000"/>
+              </a:lnSpc>
+              <a:spcAft>
+                <a:spcPts val="0"/>
+              </a:spcAft>
+            </a:pPr>
+            <a:r>
+              <a:rPr sz="3000" b="1">
+                <a:solidFill>
+                  <a:srgbClr val="D8DADD"/>
+                </a:solidFill>
+                <a:latin typeface="맑은 고딕"/>
+                <a:ea typeface="맑은 고딕"/>
+              </a:rPr>
+              <a:t>11</a:t>
             </a:r>
           </a:p>
         </p:txBody>
@@ -4576,7 +5471,7 @@
 </p:sld>
 </file>
 
-<file path=ppt/slides/slide11.xml><?xml version="1.0" encoding="utf-8"?>
+<file path=ppt/slides/slide12.xml><?xml version="1.0" encoding="utf-8"?>
 <p:sld xmlns:a="http://schemas.openxmlformats.org/drawingml/2006/main" xmlns:p="http://schemas.openxmlformats.org/presentationml/2006/main" xmlns:r="http://schemas.openxmlformats.org/officeDocument/2006/relationships">
   <p:cSld>
     <p:spTree>
@@ -4823,7 +5718,7 @@
                 <a:latin typeface="맑은 고딕"/>
                 <a:ea typeface="맑은 고딕"/>
               </a:rPr>
-              <a:t>11</a:t>
+              <a:t>12</a:t>
             </a:r>
           </a:p>
         </p:txBody>
@@ -5393,7 +6288,7 @@
 </p:sld>
 </file>
 
-<file path=ppt/slides/slide12.xml><?xml version="1.0" encoding="utf-8"?>
+<file path=ppt/slides/slide13.xml><?xml version="1.0" encoding="utf-8"?>
 <p:sld xmlns:a="http://schemas.openxmlformats.org/drawingml/2006/main" xmlns:p="http://schemas.openxmlformats.org/presentationml/2006/main" xmlns:r="http://schemas.openxmlformats.org/officeDocument/2006/relationships">
   <p:cSld>
     <p:spTree>
@@ -5640,7 +6535,7 @@
                 <a:latin typeface="맑은 고딕"/>
                 <a:ea typeface="맑은 고딕"/>
               </a:rPr>
-              <a:t>12</a:t>
+              <a:t>13</a:t>
             </a:r>
           </a:p>
         </p:txBody>
@@ -6486,7 +7381,7 @@
 </p:sld>
 </file>
 
-<file path=ppt/slides/slide13.xml><?xml version="1.0" encoding="utf-8"?>
+<file path=ppt/slides/slide14.xml><?xml version="1.0" encoding="utf-8"?>
 <p:sld xmlns:a="http://schemas.openxmlformats.org/drawingml/2006/main" xmlns:p="http://schemas.openxmlformats.org/presentationml/2006/main" xmlns:r="http://schemas.openxmlformats.org/officeDocument/2006/relationships">
   <p:cSld>
     <p:spTree>
@@ -6733,7 +7628,7 @@
                 <a:latin typeface="맑은 고딕"/>
                 <a:ea typeface="맑은 고딕"/>
               </a:rPr>
-              <a:t>13</a:t>
+              <a:t>14</a:t>
             </a:r>
           </a:p>
         </p:txBody>
@@ -7844,7 +8739,7 @@
                 <a:latin typeface="맑은 고딕"/>
                 <a:ea typeface="맑은 고딕"/>
               </a:rPr>
-              <a:t>출발점 — 의료 공백은 정말 "자원이 모자라서" 생기는가</a:t>
+              <a:t>목차</a:t>
             </a:r>
           </a:p>
         </p:txBody>
@@ -7909,8 +8804,8 @@
         </p:nvSpPr>
         <p:spPr>
           <a:xfrm>
-            <a:off x="10835640" y="164592"/>
-            <a:ext cx="1188720" cy="777240"/>
+            <a:off x="502920" y="6492240"/>
+            <a:ext cx="11247120" cy="320040"/>
           </a:xfrm>
           <a:prstGeom prst="rect">
             <a:avLst/>
@@ -7932,92 +8827,6 @@
               </a:spcAft>
             </a:pPr>
             <a:r>
-              <a:rPr sz="3000" b="1">
-                <a:solidFill>
-                  <a:srgbClr val="D8DADD"/>
-                </a:solidFill>
-                <a:latin typeface="맑은 고딕"/>
-                <a:ea typeface="맑은 고딕"/>
-              </a:rPr>
-              <a:t>02</a:t>
-            </a:r>
-          </a:p>
-        </p:txBody>
-      </p:sp>
-      <p:sp>
-        <p:nvSpPr>
-          <p:cNvPr id="7" name="TextBox 6"/>
-          <p:cNvSpPr txBox="1"/>
-          <p:nvPr/>
-        </p:nvSpPr>
-        <p:spPr>
-          <a:xfrm>
-            <a:off x="548640" y="1097280"/>
-            <a:ext cx="11155680" cy="384048"/>
-          </a:xfrm>
-          <a:prstGeom prst="rect">
-            <a:avLst/>
-          </a:prstGeom>
-          <a:noFill/>
-        </p:spPr>
-        <p:txBody>
-          <a:bodyPr wrap="square" anchor="t">
-            <a:spAutoFit/>
-          </a:bodyPr>
-          <a:lstStyle/>
-          <a:p>
-            <a:pPr>
-              <a:lnSpc>
-                <a:spcPct val="114000"/>
-              </a:lnSpc>
-              <a:spcAft>
-                <a:spcPts val="0"/>
-              </a:spcAft>
-            </a:pPr>
-            <a:r>
-              <a:rPr sz="1250" b="0">
-                <a:solidFill>
-                  <a:srgbClr val="767A7F"/>
-                </a:solidFill>
-                <a:latin typeface="맑은 고딕"/>
-                <a:ea typeface="맑은 고딕"/>
-              </a:rPr>
-              <a:t>주제를 고른 이유, 그리고 왜 "취약지"가 아니라 "제도"를 분석 대상으로 삼는가</a:t>
-            </a:r>
-          </a:p>
-        </p:txBody>
-      </p:sp>
-      <p:sp>
-        <p:nvSpPr>
-          <p:cNvPr id="8" name="TextBox 7"/>
-          <p:cNvSpPr txBox="1"/>
-          <p:nvPr/>
-        </p:nvSpPr>
-        <p:spPr>
-          <a:xfrm>
-            <a:off x="502920" y="6492240"/>
-            <a:ext cx="11247120" cy="320040"/>
-          </a:xfrm>
-          <a:prstGeom prst="rect">
-            <a:avLst/>
-          </a:prstGeom>
-          <a:noFill/>
-        </p:spPr>
-        <p:txBody>
-          <a:bodyPr wrap="square" anchor="t">
-            <a:spAutoFit/>
-          </a:bodyPr>
-          <a:lstStyle/>
-          <a:p>
-            <a:pPr>
-              <a:lnSpc>
-                <a:spcPct val="114000"/>
-              </a:lnSpc>
-              <a:spcAft>
-                <a:spcPts val="0"/>
-              </a:spcAft>
-            </a:pPr>
-            <a:r>
               <a:rPr sz="850" b="0">
                 <a:solidFill>
                   <a:srgbClr val="B2B5B9"/>
@@ -8032,18 +8841,18 @@
       </p:sp>
       <p:sp>
         <p:nvSpPr>
-          <p:cNvPr id="9" name="Rounded Rectangle 8"/>
+          <p:cNvPr id="7" name="Rounded Rectangle 6"/>
           <p:cNvSpPr/>
           <p:nvPr/>
         </p:nvSpPr>
         <p:spPr>
           <a:xfrm>
-            <a:off x="502920" y="1371600"/>
-            <a:ext cx="3611880" cy="1783080"/>
+            <a:off x="502920" y="1325880"/>
+            <a:ext cx="5532120" cy="1499616"/>
           </a:xfrm>
           <a:prstGeom prst="roundRect">
             <a:avLst>
-              <a:gd name="adj" fmla="val 4615"/>
+              <a:gd name="adj" fmla="val 5487"/>
             </a:avLst>
           </a:prstGeom>
           <a:solidFill>
@@ -8086,14 +8895,14 @@
       </p:sp>
       <p:sp>
         <p:nvSpPr>
-          <p:cNvPr id="10" name="TextBox 9"/>
+          <p:cNvPr id="8" name="TextBox 7"/>
           <p:cNvSpPr txBox="1"/>
           <p:nvPr/>
         </p:nvSpPr>
         <p:spPr>
           <a:xfrm>
-            <a:off x="685800" y="1499616"/>
-            <a:ext cx="3246120" cy="1527048"/>
+            <a:off x="685800" y="1444752"/>
+            <a:ext cx="5166360" cy="1261872"/>
           </a:xfrm>
           <a:prstGeom prst="rect">
             <a:avLst/>
@@ -8111,56 +8920,116 @@
                 <a:spcPct val="114000"/>
               </a:lnSpc>
               <a:spcAft>
-                <a:spcPts val="350"/>
-              </a:spcAft>
-            </a:pPr>
-            <a:r>
-              <a:rPr sz="1300" b="1">
+                <a:spcPts val="300"/>
+              </a:spcAft>
+            </a:pPr>
+            <a:r>
+              <a:rPr sz="1350" b="1">
                 <a:solidFill>
                   <a:srgbClr val="33393F"/>
                 </a:solidFill>
                 <a:latin typeface="맑은 고딕"/>
                 <a:ea typeface="맑은 고딕"/>
               </a:rPr>
-              <a:t>① 익숙한 진단</a:t>
-            </a:r>
-          </a:p>
-          <a:p>
-            <a:pPr marL="160020" indent="-160020">
-              <a:lnSpc>
-                <a:spcPct val="114000"/>
-              </a:lnSpc>
-              <a:spcAft>
-                <a:spcPts val="200"/>
-              </a:spcAft>
-            </a:pPr>
-            <a:r>
-              <a:rPr sz="1100" b="0">
+              <a:t>Ⅰ. 문제 정의</a:t>
+            </a:r>
+          </a:p>
+          <a:p>
+            <a:pPr>
+              <a:lnSpc>
+                <a:spcPct val="114000"/>
+              </a:lnSpc>
+              <a:spcAft>
+                <a:spcPts val="400"/>
+              </a:spcAft>
+            </a:pPr>
+            <a:r>
+              <a:rPr sz="1050" b="0">
+                <a:solidFill>
+                  <a:srgbClr val="767A7F"/>
+                </a:solidFill>
+                <a:latin typeface="맑은 고딕"/>
+                <a:ea typeface="맑은 고딕"/>
+              </a:rPr>
+              <a:t>왜 이 주제이고, 무엇을 물을 것인가</a:t>
+            </a:r>
+          </a:p>
+          <a:p>
+            <a:pPr>
+              <a:lnSpc>
+                <a:spcPct val="114000"/>
+              </a:lnSpc>
+              <a:spcAft>
+                <a:spcPts val="150"/>
+              </a:spcAft>
+            </a:pPr>
+            <a:r>
+              <a:rPr sz="1150" b="0">
                 <a:solidFill>
                   <a:srgbClr val="1C1C1E"/>
                 </a:solidFill>
                 <a:latin typeface="맑은 고딕"/>
                 <a:ea typeface="맑은 고딕"/>
               </a:rPr>
-              <a:t>• "지방에 분만실이 없다" — 해마다 반복되는 기사. 따라붙는 처방도 늘 같다: 의사를 늘리고 병원을 지어라</a:t>
-            </a:r>
-          </a:p>
-        </p:txBody>
-      </p:sp>
-      <p:sp>
-        <p:nvSpPr>
-          <p:cNvPr id="11" name="Rounded Rectangle 10"/>
+              <a:t>03   아이디어의 발단</a:t>
+            </a:r>
+          </a:p>
+          <a:p>
+            <a:pPr>
+              <a:lnSpc>
+                <a:spcPct val="114000"/>
+              </a:lnSpc>
+              <a:spcAft>
+                <a:spcPts val="150"/>
+              </a:spcAft>
+            </a:pPr>
+            <a:r>
+              <a:rPr sz="1150" b="0">
+                <a:solidFill>
+                  <a:srgbClr val="1C1C1E"/>
+                </a:solidFill>
+                <a:latin typeface="맑은 고딕"/>
+                <a:ea typeface="맑은 고딕"/>
+              </a:rPr>
+              <a:t>04   문제 인식 — 세 단계 파이프라인</a:t>
+            </a:r>
+          </a:p>
+          <a:p>
+            <a:pPr>
+              <a:lnSpc>
+                <a:spcPct val="114000"/>
+              </a:lnSpc>
+              <a:spcAft>
+                <a:spcPts val="150"/>
+              </a:spcAft>
+            </a:pPr>
+            <a:r>
+              <a:rPr sz="1150" b="0">
+                <a:solidFill>
+                  <a:srgbClr val="1C1C1E"/>
+                </a:solidFill>
+                <a:latin typeface="맑은 고딕"/>
+                <a:ea typeface="맑은 고딕"/>
+              </a:rPr>
+              <a:t>05   연구 질문 (RQ 4개)</a:t>
+            </a:r>
+          </a:p>
+        </p:txBody>
+      </p:sp>
+      <p:sp>
+        <p:nvSpPr>
+          <p:cNvPr id="9" name="Rounded Rectangle 8"/>
           <p:cNvSpPr/>
           <p:nvPr/>
         </p:nvSpPr>
         <p:spPr>
           <a:xfrm>
-            <a:off x="4343400" y="1371600"/>
-            <a:ext cx="3611880" cy="1783080"/>
+            <a:off x="502920" y="3026663"/>
+            <a:ext cx="5532120" cy="1225296"/>
           </a:xfrm>
           <a:prstGeom prst="roundRect">
             <a:avLst>
-              <a:gd name="adj" fmla="val 4615"/>
+              <a:gd name="adj" fmla="val 6716"/>
             </a:avLst>
           </a:prstGeom>
           <a:solidFill>
@@ -8203,14 +9072,14 @@
       </p:sp>
       <p:sp>
         <p:nvSpPr>
-          <p:cNvPr id="12" name="TextBox 11"/>
+          <p:cNvPr id="10" name="TextBox 9"/>
           <p:cNvSpPr txBox="1"/>
           <p:nvPr/>
         </p:nvSpPr>
         <p:spPr>
           <a:xfrm>
-            <a:off x="4526280" y="1499616"/>
-            <a:ext cx="3246120" cy="1527048"/>
+            <a:off x="685800" y="3145535"/>
+            <a:ext cx="5166360" cy="987552"/>
           </a:xfrm>
           <a:prstGeom prst="rect">
             <a:avLst/>
@@ -8228,173 +9097,96 @@
                 <a:spcPct val="114000"/>
               </a:lnSpc>
               <a:spcAft>
-                <a:spcPts val="350"/>
-              </a:spcAft>
-            </a:pPr>
-            <a:r>
-              <a:rPr sz="1300" b="1">
+                <a:spcPts val="300"/>
+              </a:spcAft>
+            </a:pPr>
+            <a:r>
+              <a:rPr sz="1350" b="1">
                 <a:solidFill>
                   <a:srgbClr val="33393F"/>
                 </a:solidFill>
                 <a:latin typeface="맑은 고딕"/>
                 <a:ea typeface="맑은 고딕"/>
               </a:rPr>
-              <a:t>② 그 처방이 선 전제</a:t>
-            </a:r>
-          </a:p>
-          <a:p>
-            <a:pPr marL="160020" indent="-160020">
-              <a:lnSpc>
-                <a:spcPct val="114000"/>
-              </a:lnSpc>
-              <a:spcAft>
-                <a:spcPts val="200"/>
-              </a:spcAft>
-            </a:pPr>
-            <a:r>
-              <a:rPr sz="1100" b="0">
+              <a:t>Ⅱ. 배경 이해</a:t>
+            </a:r>
+          </a:p>
+          <a:p>
+            <a:pPr>
+              <a:lnSpc>
+                <a:spcPct val="114000"/>
+              </a:lnSpc>
+              <a:spcAft>
+                <a:spcPts val="400"/>
+              </a:spcAft>
+            </a:pPr>
+            <a:r>
+              <a:rPr sz="1050" b="0">
+                <a:solidFill>
+                  <a:srgbClr val="767A7F"/>
+                </a:solidFill>
+                <a:latin typeface="맑은 고딕"/>
+                <a:ea typeface="맑은 고딕"/>
+              </a:rPr>
+              <a:t>분석 전에 확정해야 할 이론과 제도</a:t>
+            </a:r>
+          </a:p>
+          <a:p>
+            <a:pPr>
+              <a:lnSpc>
+                <a:spcPct val="114000"/>
+              </a:lnSpc>
+              <a:spcAft>
+                <a:spcPts val="150"/>
+              </a:spcAft>
+            </a:pPr>
+            <a:r>
+              <a:rPr sz="1150" b="0">
                 <a:solidFill>
                   <a:srgbClr val="1C1C1E"/>
                 </a:solidFill>
                 <a:latin typeface="맑은 고딕"/>
                 <a:ea typeface="맑은 고딕"/>
               </a:rPr>
-              <a:t>• 공백의 원인이 자원의 절대량 부족이라는 것. 사실이라면 답은 예산뿐이고, 데이터가 할 말은 없다</a:t>
-            </a:r>
-          </a:p>
-        </p:txBody>
-      </p:sp>
-      <p:sp>
-        <p:nvSpPr>
-          <p:cNvPr id="13" name="Rounded Rectangle 12"/>
+              <a:t>06   이론적 고찰 — 접근성의 두 축</a:t>
+            </a:r>
+          </a:p>
+          <a:p>
+            <a:pPr>
+              <a:lnSpc>
+                <a:spcPct val="114000"/>
+              </a:lnSpc>
+              <a:spcAft>
+                <a:spcPts val="150"/>
+              </a:spcAft>
+            </a:pPr>
+            <a:r>
+              <a:rPr sz="1150" b="0">
+                <a:solidFill>
+                  <a:srgbClr val="1C1C1E"/>
+                </a:solidFill>
+                <a:latin typeface="맑은 고딕"/>
+                <a:ea typeface="맑은 고딕"/>
+              </a:rPr>
+              <a:t>07   분석 대상 제도 — 지표·등급·배분</a:t>
+            </a:r>
+          </a:p>
+        </p:txBody>
+      </p:sp>
+      <p:sp>
+        <p:nvSpPr>
+          <p:cNvPr id="11" name="Rounded Rectangle 10"/>
           <p:cNvSpPr/>
           <p:nvPr/>
         </p:nvSpPr>
         <p:spPr>
           <a:xfrm>
-            <a:off x="8183880" y="1371600"/>
-            <a:ext cx="3611880" cy="1783080"/>
+            <a:off x="502920" y="4453127"/>
+            <a:ext cx="5532120" cy="1225296"/>
           </a:xfrm>
           <a:prstGeom prst="roundRect">
             <a:avLst>
-              <a:gd name="adj" fmla="val 4615"/>
-            </a:avLst>
-          </a:prstGeom>
-          <a:solidFill>
-            <a:srgbClr val="F1F2F3"/>
-          </a:solidFill>
-          <a:ln w="15875">
-            <a:solidFill>
-              <a:srgbClr val="9AA0A6"/>
-            </a:solidFill>
-          </a:ln>
-          <a:effectLst>
-            <a:outerShdw blurRad="182880" dist="64008" dir="5400000" rotWithShape="0">
-              <a:srgbClr val="000000">
-                <a:alpha val="32000"/>
-              </a:srgbClr>
-            </a:outerShdw>
-          </a:effectLst>
-        </p:spPr>
-        <p:style>
-          <a:lnRef idx="1">
-            <a:schemeClr val="accent1"/>
-          </a:lnRef>
-          <a:fillRef idx="3">
-            <a:schemeClr val="accent1"/>
-          </a:fillRef>
-          <a:effectRef idx="2">
-            <a:schemeClr val="accent1"/>
-          </a:effectRef>
-          <a:fontRef idx="minor">
-            <a:schemeClr val="lt1"/>
-          </a:fontRef>
-        </p:style>
-        <p:txBody>
-          <a:bodyPr rtlCol="0" anchor="ctr"/>
-          <a:lstStyle/>
-          <a:p>
-            <a:pPr algn="ctr"/>
-          </a:p>
-        </p:txBody>
-      </p:sp>
-      <p:sp>
-        <p:nvSpPr>
-          <p:cNvPr id="14" name="TextBox 13"/>
-          <p:cNvSpPr txBox="1"/>
-          <p:nvPr/>
-        </p:nvSpPr>
-        <p:spPr>
-          <a:xfrm>
-            <a:off x="8366760" y="1499616"/>
-            <a:ext cx="3246120" cy="1527048"/>
-          </a:xfrm>
-          <a:prstGeom prst="rect">
-            <a:avLst/>
-          </a:prstGeom>
-          <a:noFill/>
-        </p:spPr>
-        <p:txBody>
-          <a:bodyPr wrap="square" anchor="t">
-            <a:spAutoFit/>
-          </a:bodyPr>
-          <a:lstStyle/>
-          <a:p>
-            <a:pPr>
-              <a:lnSpc>
-                <a:spcPct val="114000"/>
-              </a:lnSpc>
-              <a:spcAft>
-                <a:spcPts val="350"/>
-              </a:spcAft>
-            </a:pPr>
-            <a:r>
-              <a:rPr sz="1300" b="1">
-                <a:solidFill>
-                  <a:srgbClr val="000000"/>
-                </a:solidFill>
-                <a:latin typeface="맑은 고딕"/>
-                <a:ea typeface="맑은 고딕"/>
-              </a:rPr>
-              <a:t>③ 우리의 의심</a:t>
-            </a:r>
-          </a:p>
-          <a:p>
-            <a:pPr marL="160020" indent="-160020">
-              <a:lnSpc>
-                <a:spcPct val="114000"/>
-              </a:lnSpc>
-              <a:spcAft>
-                <a:spcPts val="200"/>
-              </a:spcAft>
-            </a:pPr>
-            <a:r>
-              <a:rPr sz="1100" b="0">
-                <a:solidFill>
-                  <a:srgbClr val="1C1C1E"/>
-                </a:solidFill>
-                <a:latin typeface="맑은 고딕"/>
-                <a:ea typeface="맑은 고딕"/>
-              </a:rPr>
-              <a:t>• 자원이 없는 것과, 있는 자원이 필요한 곳에 닿지 않는 것은 다른 문제다. 뒤쪽이라면 예산 없이도 줄일 수 있다</a:t>
-            </a:r>
-          </a:p>
-        </p:txBody>
-      </p:sp>
-      <p:sp>
-        <p:nvSpPr>
-          <p:cNvPr id="15" name="Rounded Rectangle 14"/>
-          <p:cNvSpPr/>
-          <p:nvPr/>
-        </p:nvSpPr>
-        <p:spPr>
-          <a:xfrm>
-            <a:off x="502920" y="3401568"/>
-            <a:ext cx="11292840" cy="1572768"/>
-          </a:xfrm>
-          <a:prstGeom prst="roundRect">
-            <a:avLst>
-              <a:gd name="adj" fmla="val 5232"/>
+              <a:gd name="adj" fmla="val 6716"/>
             </a:avLst>
           </a:prstGeom>
           <a:solidFill>
@@ -8437,14 +9229,14 @@
       </p:sp>
       <p:sp>
         <p:nvSpPr>
-          <p:cNvPr id="16" name="TextBox 15"/>
+          <p:cNvPr id="12" name="TextBox 11"/>
           <p:cNvSpPr txBox="1"/>
           <p:nvPr/>
         </p:nvSpPr>
         <p:spPr>
           <a:xfrm>
-            <a:off x="685800" y="3529584"/>
-            <a:ext cx="10927080" cy="1316736"/>
+            <a:off x="685800" y="4571999"/>
+            <a:ext cx="5166360" cy="987552"/>
           </a:xfrm>
           <a:prstGeom prst="rect">
             <a:avLst/>
@@ -8462,92 +9254,146 @@
                 <a:spcPct val="114000"/>
               </a:lnSpc>
               <a:spcAft>
-                <a:spcPts val="350"/>
-              </a:spcAft>
-            </a:pPr>
-            <a:r>
-              <a:rPr sz="1300" b="1">
+                <a:spcPts val="300"/>
+              </a:spcAft>
+            </a:pPr>
+            <a:r>
+              <a:rPr sz="1350" b="1">
                 <a:solidFill>
                   <a:srgbClr val="33393F"/>
                 </a:solidFill>
                 <a:latin typeface="맑은 고딕"/>
                 <a:ea typeface="맑은 고딕"/>
               </a:rPr>
-              <a:t>그리고 자원을 공백 지역으로 보내는 제도는 이미 있다 — 「분만취약지 지원사업」(15년째)</a:t>
-            </a:r>
-          </a:p>
-          <a:p>
-            <a:pPr marL="160020" indent="-160020">
-              <a:lnSpc>
-                <a:spcPct val="114000"/>
-              </a:lnSpc>
-              <a:spcAft>
-                <a:spcPts val="200"/>
-              </a:spcAft>
-            </a:pPr>
-            <a:r>
-              <a:rPr sz="1100" b="0">
+              <a:t>Ⅲ. 데이터 계획</a:t>
+            </a:r>
+          </a:p>
+          <a:p>
+            <a:pPr>
+              <a:lnSpc>
+                <a:spcPct val="114000"/>
+              </a:lnSpc>
+              <a:spcAft>
+                <a:spcPts val="400"/>
+              </a:spcAft>
+            </a:pPr>
+            <a:r>
+              <a:rPr sz="1050" b="0">
+                <a:solidFill>
+                  <a:srgbClr val="767A7F"/>
+                </a:solidFill>
+                <a:latin typeface="맑은 고딕"/>
+                <a:ea typeface="맑은 고딕"/>
+              </a:rPr>
+              <a:t>무엇을 어떻게 모으고 검증할 것인가</a:t>
+            </a:r>
+          </a:p>
+          <a:p>
+            <a:pPr>
+              <a:lnSpc>
+                <a:spcPct val="114000"/>
+              </a:lnSpc>
+              <a:spcAft>
+                <a:spcPts val="150"/>
+              </a:spcAft>
+            </a:pPr>
+            <a:r>
+              <a:rPr sz="1150" b="0">
                 <a:solidFill>
                   <a:srgbClr val="1C1C1E"/>
                 </a:solidFill>
                 <a:latin typeface="맑은 고딕"/>
                 <a:ea typeface="맑은 고딕"/>
               </a:rPr>
-              <a:t>• 분만취약지 = 소득·인구가 적은 지역이 아니라, 그 지역 가임기 여성이 ① 분만 가능 기관까지 60분 안에 닿기 어렵고(접근성) ② 실제 출산도 60분 안에 하지 못하는(이용률) 시·군</a:t>
-            </a:r>
-          </a:p>
-          <a:p>
-            <a:pPr marL="160020" indent="-160020">
-              <a:lnSpc>
-                <a:spcPct val="114000"/>
-              </a:lnSpc>
-              <a:spcAft>
-                <a:spcPts val="200"/>
-              </a:spcAft>
-            </a:pPr>
-            <a:r>
-              <a:rPr sz="1100" b="0">
+              <a:t>08   데이터 수집 계획</a:t>
+            </a:r>
+          </a:p>
+          <a:p>
+            <a:pPr>
+              <a:lnSpc>
+                <a:spcPct val="114000"/>
+              </a:lnSpc>
+              <a:spcAft>
+                <a:spcPts val="150"/>
+              </a:spcAft>
+            </a:pPr>
+            <a:r>
+              <a:rPr sz="1150" b="0">
                 <a:solidFill>
                   <a:srgbClr val="1C1C1E"/>
                 </a:solidFill>
                 <a:latin typeface="맑은 고딕"/>
                 <a:ea typeface="맑은 고딕"/>
               </a:rPr>
-              <a:t>• 즉 이 제도에서 "취약"은 처음부터 끝까지 거리와 시간으로 정의된다 — 이 점이 본 연구의 첫 번째 표적이 된다</a:t>
-            </a:r>
-          </a:p>
-          <a:p>
-            <a:pPr marL="160020" indent="-160020">
-              <a:lnSpc>
-                <a:spcPct val="114000"/>
-              </a:lnSpc>
-              <a:spcAft>
-                <a:spcPts val="200"/>
-              </a:spcAft>
-            </a:pPr>
-            <a:r>
-              <a:rPr sz="1100" b="0">
-                <a:solidFill>
-                  <a:srgbClr val="1C1C1E"/>
-                </a:solidFill>
-                <a:latin typeface="맑은 고딕"/>
-                <a:ea typeface="맑은 고딕"/>
-              </a:rPr>
-              <a:t>• 정부는 2년마다 전국을 재어 A·B·C 등급을 매기고, 지정 지역 병원에 분만실 설치비 약 10억 원 + 연 운영비 약 5억 원을 지원 (15년 누적 57개소)</a:t>
-            </a:r>
-          </a:p>
-        </p:txBody>
-      </p:sp>
-      <p:sp>
-        <p:nvSpPr>
-          <p:cNvPr id="17" name="TextBox 16"/>
+              <a:t>09   전처리·품질 관리 계획</a:t>
+            </a:r>
+          </a:p>
+        </p:txBody>
+      </p:sp>
+      <p:sp>
+        <p:nvSpPr>
+          <p:cNvPr id="13" name="Rounded Rectangle 12"/>
+          <p:cNvSpPr/>
+          <p:nvPr/>
+        </p:nvSpPr>
+        <p:spPr>
+          <a:xfrm>
+            <a:off x="6263640" y="1325880"/>
+            <a:ext cx="5532120" cy="1499616"/>
+          </a:xfrm>
+          <a:prstGeom prst="roundRect">
+            <a:avLst>
+              <a:gd name="adj" fmla="val 5487"/>
+            </a:avLst>
+          </a:prstGeom>
+          <a:solidFill>
+            <a:srgbClr val="FFFFFF"/>
+          </a:solidFill>
+          <a:ln w="12700">
+            <a:solidFill>
+              <a:srgbClr val="E4E6E9"/>
+            </a:solidFill>
+          </a:ln>
+          <a:effectLst>
+            <a:outerShdw blurRad="182880" dist="64008" dir="5400000" rotWithShape="0">
+              <a:srgbClr val="000000">
+                <a:alpha val="30000"/>
+              </a:srgbClr>
+            </a:outerShdw>
+          </a:effectLst>
+        </p:spPr>
+        <p:style>
+          <a:lnRef idx="1">
+            <a:schemeClr val="accent1"/>
+          </a:lnRef>
+          <a:fillRef idx="3">
+            <a:schemeClr val="accent1"/>
+          </a:fillRef>
+          <a:effectRef idx="2">
+            <a:schemeClr val="accent1"/>
+          </a:effectRef>
+          <a:fontRef idx="minor">
+            <a:schemeClr val="lt1"/>
+          </a:fontRef>
+        </p:style>
+        <p:txBody>
+          <a:bodyPr rtlCol="0" anchor="ctr"/>
+          <a:lstStyle/>
+          <a:p>
+            <a:pPr algn="ctr"/>
+          </a:p>
+        </p:txBody>
+      </p:sp>
+      <p:sp>
+        <p:nvSpPr>
+          <p:cNvPr id="14" name="TextBox 13"/>
           <p:cNvSpPr txBox="1"/>
           <p:nvPr/>
         </p:nvSpPr>
         <p:spPr>
           <a:xfrm>
-            <a:off x="502920" y="5230368"/>
-            <a:ext cx="11247120" cy="1005840"/>
+            <a:off x="6446520" y="1444752"/>
+            <a:ext cx="5166360" cy="1261872"/>
           </a:xfrm>
           <a:prstGeom prst="rect">
             <a:avLst/>
@@ -8565,18 +9411,58 @@
                 <a:spcPct val="114000"/>
               </a:lnSpc>
               <a:spcAft>
+                <a:spcPts val="300"/>
+              </a:spcAft>
+            </a:pPr>
+            <a:r>
+              <a:rPr sz="1350" b="1">
+                <a:solidFill>
+                  <a:srgbClr val="33393F"/>
+                </a:solidFill>
+                <a:latin typeface="맑은 고딕"/>
+                <a:ea typeface="맑은 고딕"/>
+              </a:rPr>
+              <a:t>Ⅳ. 분석 설계</a:t>
+            </a:r>
+          </a:p>
+          <a:p>
+            <a:pPr>
+              <a:lnSpc>
+                <a:spcPct val="114000"/>
+              </a:lnSpc>
+              <a:spcAft>
                 <a:spcPts val="400"/>
               </a:spcAft>
             </a:pPr>
             <a:r>
-              <a:rPr sz="1500" b="1">
+              <a:rPr sz="1050" b="0">
+                <a:solidFill>
+                  <a:srgbClr val="767A7F"/>
+                </a:solidFill>
+                <a:latin typeface="맑은 고딕"/>
+                <a:ea typeface="맑은 고딕"/>
+              </a:rPr>
+              <a:t>RQ별로 어떤 방법을 쓸 것인가</a:t>
+            </a:r>
+          </a:p>
+          <a:p>
+            <a:pPr>
+              <a:lnSpc>
+                <a:spcPct val="114000"/>
+              </a:lnSpc>
+              <a:spcAft>
+                <a:spcPts val="150"/>
+              </a:spcAft>
+            </a:pPr>
+            <a:r>
+              <a:rPr sz="1150" b="0">
                 <a:solidFill>
                   <a:srgbClr val="1C1C1E"/>
                 </a:solidFill>
                 <a:latin typeface="맑은 고딕"/>
                 <a:ea typeface="맑은 고딕"/>
               </a:rPr>
-              <a:t>통로가 이미 깔려 있다면, 물어야 할 것은 "얼마나 부족한가"가 아니다.</a:t>
+              <a:t>10   ① 지정 감사 (RQ1·RQ2)</a:t>
             </a:r>
           </a:p>
           <a:p>
@@ -8585,18 +9471,238 @@
                 <a:spcPct val="114000"/>
               </a:lnSpc>
               <a:spcAft>
+                <a:spcPts val="150"/>
+              </a:spcAft>
+            </a:pPr>
+            <a:r>
+              <a:rPr sz="1150" b="0">
+                <a:solidFill>
+                  <a:srgbClr val="1C1C1E"/>
+                </a:solidFill>
+                <a:latin typeface="맑은 고딕"/>
+                <a:ea typeface="맑은 고딕"/>
+              </a:rPr>
+              <a:t>11   ② 배분 진단 (RQ3)</a:t>
+            </a:r>
+          </a:p>
+          <a:p>
+            <a:pPr>
+              <a:lnSpc>
+                <a:spcPct val="114000"/>
+              </a:lnSpc>
+              <a:spcAft>
+                <a:spcPts val="150"/>
+              </a:spcAft>
+            </a:pPr>
+            <a:r>
+              <a:rPr sz="1150" b="0">
+                <a:solidFill>
+                  <a:srgbClr val="1C1C1E"/>
+                </a:solidFill>
+                <a:latin typeface="맑은 고딕"/>
+                <a:ea typeface="맑은 고딕"/>
+              </a:rPr>
+              <a:t>12   ③ 처방 모형 (RQ4)</a:t>
+            </a:r>
+          </a:p>
+        </p:txBody>
+      </p:sp>
+      <p:sp>
+        <p:nvSpPr>
+          <p:cNvPr id="15" name="Rounded Rectangle 14"/>
+          <p:cNvSpPr/>
+          <p:nvPr/>
+        </p:nvSpPr>
+        <p:spPr>
+          <a:xfrm>
+            <a:off x="6263640" y="3026663"/>
+            <a:ext cx="5532120" cy="1225296"/>
+          </a:xfrm>
+          <a:prstGeom prst="roundRect">
+            <a:avLst>
+              <a:gd name="adj" fmla="val 6716"/>
+            </a:avLst>
+          </a:prstGeom>
+          <a:solidFill>
+            <a:srgbClr val="FFFFFF"/>
+          </a:solidFill>
+          <a:ln w="12700">
+            <a:solidFill>
+              <a:srgbClr val="E4E6E9"/>
+            </a:solidFill>
+          </a:ln>
+          <a:effectLst>
+            <a:outerShdw blurRad="182880" dist="64008" dir="5400000" rotWithShape="0">
+              <a:srgbClr val="000000">
+                <a:alpha val="30000"/>
+              </a:srgbClr>
+            </a:outerShdw>
+          </a:effectLst>
+        </p:spPr>
+        <p:style>
+          <a:lnRef idx="1">
+            <a:schemeClr val="accent1"/>
+          </a:lnRef>
+          <a:fillRef idx="3">
+            <a:schemeClr val="accent1"/>
+          </a:fillRef>
+          <a:effectRef idx="2">
+            <a:schemeClr val="accent1"/>
+          </a:effectRef>
+          <a:fontRef idx="minor">
+            <a:schemeClr val="lt1"/>
+          </a:fontRef>
+        </p:style>
+        <p:txBody>
+          <a:bodyPr rtlCol="0" anchor="ctr"/>
+          <a:lstStyle/>
+          <a:p>
+            <a:pPr algn="ctr"/>
+          </a:p>
+        </p:txBody>
+      </p:sp>
+      <p:sp>
+        <p:nvSpPr>
+          <p:cNvPr id="16" name="TextBox 15"/>
+          <p:cNvSpPr txBox="1"/>
+          <p:nvPr/>
+        </p:nvSpPr>
+        <p:spPr>
+          <a:xfrm>
+            <a:off x="6446520" y="3145535"/>
+            <a:ext cx="5166360" cy="987552"/>
+          </a:xfrm>
+          <a:prstGeom prst="rect">
+            <a:avLst/>
+          </a:prstGeom>
+          <a:noFill/>
+        </p:spPr>
+        <p:txBody>
+          <a:bodyPr wrap="square" anchor="t">
+            <a:spAutoFit/>
+          </a:bodyPr>
+          <a:lstStyle/>
+          <a:p>
+            <a:pPr>
+              <a:lnSpc>
+                <a:spcPct val="114000"/>
+              </a:lnSpc>
+              <a:spcAft>
+                <a:spcPts val="300"/>
+              </a:spcAft>
+            </a:pPr>
+            <a:r>
+              <a:rPr sz="1350" b="1">
+                <a:solidFill>
+                  <a:srgbClr val="33393F"/>
+                </a:solidFill>
+                <a:latin typeface="맑은 고딕"/>
+                <a:ea typeface="맑은 고딕"/>
+              </a:rPr>
+              <a:t>Ⅴ. 산출물과 일정</a:t>
+            </a:r>
+          </a:p>
+          <a:p>
+            <a:pPr>
+              <a:lnSpc>
+                <a:spcPct val="114000"/>
+              </a:lnSpc>
+              <a:spcAft>
+                <a:spcPts val="400"/>
+              </a:spcAft>
+            </a:pPr>
+            <a:r>
+              <a:rPr sz="1050" b="0">
+                <a:solidFill>
+                  <a:srgbClr val="767A7F"/>
+                </a:solidFill>
+                <a:latin typeface="맑은 고딕"/>
+                <a:ea typeface="맑은 고딕"/>
+              </a:rPr>
+              <a:t>무엇을 내놓고, 언제 할 것인가</a:t>
+            </a:r>
+          </a:p>
+          <a:p>
+            <a:pPr>
+              <a:lnSpc>
+                <a:spcPct val="114000"/>
+              </a:lnSpc>
+              <a:spcAft>
+                <a:spcPts val="150"/>
+              </a:spcAft>
+            </a:pPr>
+            <a:r>
+              <a:rPr sz="1150" b="0">
+                <a:solidFill>
+                  <a:srgbClr val="1C1C1E"/>
+                </a:solidFill>
+                <a:latin typeface="맑은 고딕"/>
+                <a:ea typeface="맑은 고딕"/>
+              </a:rPr>
+              <a:t>13   기대 산출물과 활용 계획</a:t>
+            </a:r>
+          </a:p>
+          <a:p>
+            <a:pPr>
+              <a:lnSpc>
+                <a:spcPct val="114000"/>
+              </a:lnSpc>
+              <a:spcAft>
+                <a:spcPts val="150"/>
+              </a:spcAft>
+            </a:pPr>
+            <a:r>
+              <a:rPr sz="1150" b="0">
+                <a:solidFill>
+                  <a:srgbClr val="1C1C1E"/>
+                </a:solidFill>
+                <a:latin typeface="맑은 고딕"/>
+                <a:ea typeface="맑은 고딕"/>
+              </a:rPr>
+              <a:t>14   추진 일정과 역할 분담</a:t>
+            </a:r>
+          </a:p>
+        </p:txBody>
+      </p:sp>
+      <p:sp>
+        <p:nvSpPr>
+          <p:cNvPr id="17" name="TextBox 16"/>
+          <p:cNvSpPr txBox="1"/>
+          <p:nvPr/>
+        </p:nvSpPr>
+        <p:spPr>
+          <a:xfrm>
+            <a:off x="502920" y="6053328"/>
+            <a:ext cx="11247120" cy="384048"/>
+          </a:xfrm>
+          <a:prstGeom prst="rect">
+            <a:avLst/>
+          </a:prstGeom>
+          <a:noFill/>
+        </p:spPr>
+        <p:txBody>
+          <a:bodyPr wrap="square" anchor="t">
+            <a:spAutoFit/>
+          </a:bodyPr>
+          <a:lstStyle/>
+          <a:p>
+            <a:pPr>
+              <a:lnSpc>
+                <a:spcPct val="114000"/>
+              </a:lnSpc>
+              <a:spcAft>
                 <a:spcPts val="0"/>
               </a:spcAft>
             </a:pPr>
             <a:r>
-              <a:rPr sz="1500" b="1">
-                <a:solidFill>
-                  <a:srgbClr val="000000"/>
-                </a:solidFill>
-                <a:latin typeface="맑은 고딕"/>
-                <a:ea typeface="맑은 고딕"/>
-              </a:rPr>
-              <a:t>"지금 있는 것은 필요한 곳으로 제대로 가고 있는가" — 이 물음을 데이터로 검증하는 것이 본 계획이다.</a:t>
+              <a:rPr sz="1150" b="1">
+                <a:solidFill>
+                  <a:srgbClr val="1C1C1E"/>
+                </a:solidFill>
+                <a:latin typeface="맑은 고딕"/>
+                <a:ea typeface="맑은 고딕"/>
+              </a:rPr>
+              <a:t>본 계획서는 "왜·어떻게 할 것인가"를 다룬다. 실제 발견과 결과는 결과보고서에서 보고한다.</a:t>
             </a:r>
           </a:p>
         </p:txBody>
@@ -8761,7 +9867,7 @@
                 <a:latin typeface="맑은 고딕"/>
                 <a:ea typeface="맑은 고딕"/>
               </a:rPr>
-              <a:t>문제 인식 — 제도는 세 단계로 자원을 흘려보낸다</a:t>
+              <a:t>아이디어의 발단 — 자원 부족은 실재한다. 그런데 원인이 그것뿐인가</a:t>
             </a:r>
           </a:p>
         </p:txBody>
@@ -8899,7 +10005,7 @@
                 <a:latin typeface="맑은 고딕"/>
                 <a:ea typeface="맑은 고딕"/>
               </a:rPr>
-              <a:t>한 단계라도 막히거나 새면, 앞 단계가 아무리 정확해도 자원은 엉뚱한 곳으로 간다</a:t>
+              <a:t>부족(㉠)과 배분(㉡)은 다른 문제이고 해법도 다르다 — 본 계획은 ㉡을 맡는다</a:t>
             </a:r>
           </a:p>
         </p:txBody>
@@ -8956,11 +10062,11 @@
         <p:spPr>
           <a:xfrm>
             <a:off x="502920" y="1371600"/>
-            <a:ext cx="3291840" cy="1298448"/>
+            <a:ext cx="3611880" cy="1783080"/>
           </a:xfrm>
           <a:prstGeom prst="roundRect">
             <a:avLst>
-              <a:gd name="adj" fmla="val 6338"/>
+              <a:gd name="adj" fmla="val 4615"/>
             </a:avLst>
           </a:prstGeom>
           <a:solidFill>
@@ -9009,8 +10115,8 @@
         </p:nvSpPr>
         <p:spPr>
           <a:xfrm>
-            <a:off x="667512" y="1444752"/>
-            <a:ext cx="3017520" cy="1152144"/>
+            <a:off x="685800" y="1499616"/>
+            <a:ext cx="3246120" cy="1527048"/>
           </a:xfrm>
           <a:prstGeom prst="rect">
             <a:avLst/>
@@ -9028,139 +10134,56 @@
                 <a:spcPct val="114000"/>
               </a:lnSpc>
               <a:spcAft>
-                <a:spcPts val="300"/>
-              </a:spcAft>
-            </a:pPr>
-            <a:r>
-              <a:rPr sz="1500" b="1">
+                <a:spcPts val="350"/>
+              </a:spcAft>
+            </a:pPr>
+            <a:r>
+              <a:rPr sz="1300" b="1">
                 <a:solidFill>
                   <a:srgbClr val="33393F"/>
                 </a:solidFill>
                 <a:latin typeface="맑은 고딕"/>
                 <a:ea typeface="맑은 고딕"/>
               </a:rPr>
-              <a:t>① 측정</a:t>
-            </a:r>
-          </a:p>
-          <a:p>
-            <a:pPr>
-              <a:lnSpc>
-                <a:spcPct val="114000"/>
-              </a:lnSpc>
-              <a:spcAft>
-                <a:spcPts val="0"/>
-              </a:spcAft>
-            </a:pPr>
-            <a:r>
-              <a:rPr sz="1050" b="0">
+              <a:t>① 여전히 존재하는 분만취약지</a:t>
+            </a:r>
+          </a:p>
+          <a:p>
+            <a:pPr marL="160020" indent="-160020">
+              <a:lnSpc>
+                <a:spcPct val="114000"/>
+              </a:lnSpc>
+              <a:spcAft>
+                <a:spcPts val="200"/>
+              </a:spcAft>
+            </a:pPr>
+            <a:r>
+              <a:rPr sz="1100" b="0">
                 <a:solidFill>
                   <a:srgbClr val="1C1C1E"/>
                 </a:solidFill>
                 <a:latin typeface="맑은 고딕"/>
                 <a:ea typeface="맑은 고딕"/>
               </a:rPr>
-              <a:t>2년마다 전국 시·군·구의</a:t>
-            </a:r>
-          </a:p>
-          <a:p>
-            <a:pPr>
-              <a:lnSpc>
-                <a:spcPct val="114000"/>
-              </a:lnSpc>
-              <a:spcAft>
-                <a:spcPts val="0"/>
-              </a:spcAft>
-            </a:pPr>
-            <a:r>
-              <a:rPr sz="1050" b="0">
-                <a:solidFill>
-                  <a:srgbClr val="1C1C1E"/>
-                </a:solidFill>
-                <a:latin typeface="맑은 고딕"/>
-                <a:ea typeface="맑은 고딕"/>
-              </a:rPr>
-              <a:t>분만실 60분 접근성과</a:t>
-            </a:r>
-          </a:p>
-          <a:p>
-            <a:pPr>
-              <a:lnSpc>
-                <a:spcPct val="114000"/>
-              </a:lnSpc>
-              <a:spcAft>
-                <a:spcPts val="0"/>
-              </a:spcAft>
-            </a:pPr>
-            <a:r>
-              <a:rPr sz="1050" b="0">
-                <a:solidFill>
-                  <a:srgbClr val="1C1C1E"/>
-                </a:solidFill>
-                <a:latin typeface="맑은 고딕"/>
-                <a:ea typeface="맑은 고딕"/>
-              </a:rPr>
-              <a:t>실제 분만 이동시간을 산출</a:t>
-            </a:r>
-          </a:p>
-        </p:txBody>
-      </p:sp>
-      <p:sp>
-        <p:nvSpPr>
-          <p:cNvPr id="11" name="TextBox 10"/>
-          <p:cNvSpPr txBox="1"/>
-          <p:nvPr/>
-        </p:nvSpPr>
-        <p:spPr>
-          <a:xfrm>
-            <a:off x="3813048" y="1783080"/>
-            <a:ext cx="685800" cy="548640"/>
-          </a:xfrm>
-          <a:prstGeom prst="rect">
-            <a:avLst/>
-          </a:prstGeom>
-          <a:noFill/>
-        </p:spPr>
-        <p:txBody>
-          <a:bodyPr wrap="square" anchor="t">
-            <a:spAutoFit/>
-          </a:bodyPr>
-          <a:lstStyle/>
-          <a:p>
-            <a:pPr>
-              <a:lnSpc>
-                <a:spcPct val="114000"/>
-              </a:lnSpc>
-              <a:spcAft>
-                <a:spcPts val="0"/>
-              </a:spcAft>
-            </a:pPr>
-            <a:r>
-              <a:rPr sz="2200" b="1">
-                <a:solidFill>
-                  <a:srgbClr val="767A7F"/>
-                </a:solidFill>
-                <a:latin typeface="맑은 고딕"/>
-                <a:ea typeface="맑은 고딕"/>
-              </a:rPr>
-              <a:t>→</a:t>
-            </a:r>
-          </a:p>
-        </p:txBody>
-      </p:sp>
-      <p:sp>
-        <p:nvSpPr>
-          <p:cNvPr id="12" name="Rounded Rectangle 11"/>
+              <a:t>• "지방에 분만실이 없다" — 해마다 반복되는 기사. 처방도 늘 같다: 의사를 늘리고 병원을 지어라. 그리고 이 처방은 옳다 — 절대량이 모자란 것은 사실이다</a:t>
+            </a:r>
+          </a:p>
+        </p:txBody>
+      </p:sp>
+      <p:sp>
+        <p:nvSpPr>
+          <p:cNvPr id="11" name="Rounded Rectangle 10"/>
           <p:cNvSpPr/>
           <p:nvPr/>
         </p:nvSpPr>
         <p:spPr>
           <a:xfrm>
-            <a:off x="4480559" y="1371600"/>
-            <a:ext cx="3291840" cy="1298448"/>
+            <a:off x="4343400" y="1371600"/>
+            <a:ext cx="3611880" cy="1783080"/>
           </a:xfrm>
           <a:prstGeom prst="roundRect">
             <a:avLst>
-              <a:gd name="adj" fmla="val 6338"/>
+              <a:gd name="adj" fmla="val 4615"/>
             </a:avLst>
           </a:prstGeom>
           <a:solidFill>
@@ -9203,14 +10226,14 @@
       </p:sp>
       <p:sp>
         <p:nvSpPr>
-          <p:cNvPr id="13" name="TextBox 12"/>
+          <p:cNvPr id="12" name="TextBox 11"/>
           <p:cNvSpPr txBox="1"/>
           <p:nvPr/>
         </p:nvSpPr>
         <p:spPr>
           <a:xfrm>
-            <a:off x="4645151" y="1444752"/>
-            <a:ext cx="3017520" cy="1152144"/>
+            <a:off x="4526280" y="1499616"/>
+            <a:ext cx="3246120" cy="1527048"/>
           </a:xfrm>
           <a:prstGeom prst="rect">
             <a:avLst/>
@@ -9228,79 +10251,93 @@
                 <a:spcPct val="114000"/>
               </a:lnSpc>
               <a:spcAft>
-                <a:spcPts val="300"/>
-              </a:spcAft>
-            </a:pPr>
-            <a:r>
-              <a:rPr sz="1500" b="1">
+                <a:spcPts val="350"/>
+              </a:spcAft>
+            </a:pPr>
+            <a:r>
+              <a:rPr sz="1300" b="1">
                 <a:solidFill>
                   <a:srgbClr val="33393F"/>
                 </a:solidFill>
                 <a:latin typeface="맑은 고딕"/>
                 <a:ea typeface="맑은 고딕"/>
               </a:rPr>
-              <a:t>② 지정</a:t>
-            </a:r>
-          </a:p>
-          <a:p>
-            <a:pPr>
-              <a:lnSpc>
-                <a:spcPct val="114000"/>
-              </a:lnSpc>
-              <a:spcAft>
-                <a:spcPts val="0"/>
-              </a:spcAft>
-            </a:pPr>
-            <a:r>
-              <a:rPr sz="1050" b="0">
+              <a:t>② 그런데 원인이 그것뿐인가</a:t>
+            </a:r>
+          </a:p>
+          <a:p>
+            <a:pPr marL="160020" indent="-160020">
+              <a:lnSpc>
+                <a:spcPct val="114000"/>
+              </a:lnSpc>
+              <a:spcAft>
+                <a:spcPts val="200"/>
+              </a:spcAft>
+            </a:pPr>
+            <a:r>
+              <a:rPr sz="1100" b="0">
                 <a:solidFill>
                   <a:srgbClr val="1C1C1E"/>
                 </a:solidFill>
                 <a:latin typeface="맑은 고딕"/>
                 <a:ea typeface="맑은 고딕"/>
               </a:rPr>
-              <a:t>그 값을 임계값(30/30)과 대조해</a:t>
-            </a:r>
-          </a:p>
-          <a:p>
-            <a:pPr>
-              <a:lnSpc>
-                <a:spcPct val="114000"/>
-              </a:lnSpc>
-              <a:spcAft>
-                <a:spcPts val="0"/>
-              </a:spcAft>
-            </a:pPr>
-            <a:r>
-              <a:rPr sz="1050" b="0">
-                <a:solidFill>
-                  <a:srgbClr val="1C1C1E"/>
-                </a:solidFill>
-                <a:latin typeface="맑은 고딕"/>
-                <a:ea typeface="맑은 고딕"/>
-              </a:rPr>
-              <a:t>분만취약지를 판정하고</a:t>
-            </a:r>
-          </a:p>
-          <a:p>
-            <a:pPr>
-              <a:lnSpc>
-                <a:spcPct val="114000"/>
-              </a:lnSpc>
-              <a:spcAft>
-                <a:spcPts val="0"/>
-              </a:spcAft>
-            </a:pPr>
-            <a:r>
-              <a:rPr sz="1050" b="0">
-                <a:solidFill>
-                  <a:srgbClr val="1C1C1E"/>
-                </a:solidFill>
-                <a:latin typeface="맑은 고딕"/>
-                <a:ea typeface="맑은 고딕"/>
-              </a:rPr>
-              <a:t>A·B·C 등급 부여</a:t>
-            </a:r>
+              <a:t>• 자원이 모자란 것(㉠)과, 있는 자원이 체계적으로 배분되지 않는 것(㉡)은 다른 문제다. 그리고 둘은 동시에 성립할 수 있다</a:t>
+            </a:r>
+          </a:p>
+        </p:txBody>
+      </p:sp>
+      <p:sp>
+        <p:nvSpPr>
+          <p:cNvPr id="13" name="Rounded Rectangle 12"/>
+          <p:cNvSpPr/>
+          <p:nvPr/>
+        </p:nvSpPr>
+        <p:spPr>
+          <a:xfrm>
+            <a:off x="8183880" y="1371600"/>
+            <a:ext cx="3611880" cy="1783080"/>
+          </a:xfrm>
+          <a:prstGeom prst="roundRect">
+            <a:avLst>
+              <a:gd name="adj" fmla="val 4615"/>
+            </a:avLst>
+          </a:prstGeom>
+          <a:solidFill>
+            <a:srgbClr val="F1F2F3"/>
+          </a:solidFill>
+          <a:ln w="15875">
+            <a:solidFill>
+              <a:srgbClr val="9AA0A6"/>
+            </a:solidFill>
+          </a:ln>
+          <a:effectLst>
+            <a:outerShdw blurRad="182880" dist="64008" dir="5400000" rotWithShape="0">
+              <a:srgbClr val="000000">
+                <a:alpha val="32000"/>
+              </a:srgbClr>
+            </a:outerShdw>
+          </a:effectLst>
+        </p:spPr>
+        <p:style>
+          <a:lnRef idx="1">
+            <a:schemeClr val="accent1"/>
+          </a:lnRef>
+          <a:fillRef idx="3">
+            <a:schemeClr val="accent1"/>
+          </a:fillRef>
+          <a:effectRef idx="2">
+            <a:schemeClr val="accent1"/>
+          </a:effectRef>
+          <a:fontRef idx="minor">
+            <a:schemeClr val="lt1"/>
+          </a:fontRef>
+        </p:style>
+        <p:txBody>
+          <a:bodyPr rtlCol="0" anchor="ctr"/>
+          <a:lstStyle/>
+          <a:p>
+            <a:pPr algn="ctr"/>
           </a:p>
         </p:txBody>
       </p:sp>
@@ -9312,8 +10349,8 @@
         </p:nvSpPr>
         <p:spPr>
           <a:xfrm>
-            <a:off x="7790688" y="1783080"/>
-            <a:ext cx="685800" cy="548640"/>
+            <a:off x="8366760" y="1499616"/>
+            <a:ext cx="3246120" cy="1527048"/>
           </a:xfrm>
           <a:prstGeom prst="rect">
             <a:avLst/>
@@ -9331,18 +10368,38 @@
                 <a:spcPct val="114000"/>
               </a:lnSpc>
               <a:spcAft>
-                <a:spcPts val="0"/>
-              </a:spcAft>
-            </a:pPr>
-            <a:r>
-              <a:rPr sz="2200" b="1">
-                <a:solidFill>
-                  <a:srgbClr val="767A7F"/>
-                </a:solidFill>
-                <a:latin typeface="맑은 고딕"/>
-                <a:ea typeface="맑은 고딕"/>
-              </a:rPr>
-              <a:t>→</a:t>
+                <a:spcPts val="350"/>
+              </a:spcAft>
+            </a:pPr>
+            <a:r>
+              <a:rPr sz="1300" b="1">
+                <a:solidFill>
+                  <a:srgbClr val="000000"/>
+                </a:solidFill>
+                <a:latin typeface="맑은 고딕"/>
+                <a:ea typeface="맑은 고딕"/>
+              </a:rPr>
+              <a:t>③ 해결할 수 있는 문제</a:t>
+            </a:r>
+          </a:p>
+          <a:p>
+            <a:pPr marL="160020" indent="-160020">
+              <a:lnSpc>
+                <a:spcPct val="114000"/>
+              </a:lnSpc>
+              <a:spcAft>
+                <a:spcPts val="200"/>
+              </a:spcAft>
+            </a:pPr>
+            <a:r>
+              <a:rPr sz="1100" b="0">
+                <a:solidFill>
+                  <a:srgbClr val="1C1C1E"/>
+                </a:solidFill>
+                <a:latin typeface="맑은 고딕"/>
+                <a:ea typeface="맑은 고딕"/>
+              </a:rPr>
+              <a:t>• ㉠은 예산·인력의 영역이라 데이터가 답할 수 없다. ㉡은 배분 규칙의 문제이므로 데이터로 답할 수 있다 — 그리고 ㉡은 아직 검증된 적이 없다</a:t>
             </a:r>
           </a:p>
         </p:txBody>
@@ -9355,12 +10412,12 @@
         </p:nvSpPr>
         <p:spPr>
           <a:xfrm>
-            <a:off x="8458200" y="1371600"/>
-            <a:ext cx="3291840" cy="1298448"/>
+            <a:off x="502920" y="3401568"/>
+            <a:ext cx="11292840" cy="1572768"/>
           </a:xfrm>
           <a:prstGeom prst="roundRect">
             <a:avLst>
-              <a:gd name="adj" fmla="val 6338"/>
+              <a:gd name="adj" fmla="val 5232"/>
             </a:avLst>
           </a:prstGeom>
           <a:solidFill>
@@ -9409,8 +10466,8 @@
         </p:nvSpPr>
         <p:spPr>
           <a:xfrm>
-            <a:off x="8622792" y="1444752"/>
-            <a:ext cx="3017520" cy="1152144"/>
+            <a:off x="685800" y="3529584"/>
+            <a:ext cx="10927080" cy="1316736"/>
           </a:xfrm>
           <a:prstGeom prst="rect">
             <a:avLst/>
@@ -9428,146 +10485,92 @@
                 <a:spcPct val="114000"/>
               </a:lnSpc>
               <a:spcAft>
-                <a:spcPts val="300"/>
-              </a:spcAft>
-            </a:pPr>
-            <a:r>
-              <a:rPr sz="1500" b="1">
+                <a:spcPts val="350"/>
+              </a:spcAft>
+            </a:pPr>
+            <a:r>
+              <a:rPr sz="1300" b="1">
                 <a:solidFill>
                   <a:srgbClr val="33393F"/>
                 </a:solidFill>
                 <a:latin typeface="맑은 고딕"/>
                 <a:ea typeface="맑은 고딕"/>
               </a:rPr>
-              <a:t>③ 배분</a:t>
-            </a:r>
-          </a:p>
-          <a:p>
-            <a:pPr>
-              <a:lnSpc>
-                <a:spcPct val="114000"/>
-              </a:lnSpc>
-              <a:spcAft>
-                <a:spcPts val="0"/>
-              </a:spcAft>
-            </a:pPr>
-            <a:r>
-              <a:rPr sz="1050" b="0">
+              <a:t>그리고 자원을 공백 지역으로 보내는 제도는 이미 있다 — 「분만취약지 지원사업」(15년째)</a:t>
+            </a:r>
+          </a:p>
+          <a:p>
+            <a:pPr marL="160020" indent="-160020">
+              <a:lnSpc>
+                <a:spcPct val="114000"/>
+              </a:lnSpc>
+              <a:spcAft>
+                <a:spcPts val="200"/>
+              </a:spcAft>
+            </a:pPr>
+            <a:r>
+              <a:rPr sz="1100" b="0">
                 <a:solidFill>
                   <a:srgbClr val="1C1C1E"/>
                 </a:solidFill>
                 <a:latin typeface="맑은 고딕"/>
                 <a:ea typeface="맑은 고딕"/>
               </a:rPr>
-              <a:t>지정 지역의 병원 한 곳을 골라</a:t>
-            </a:r>
-          </a:p>
-          <a:p>
-            <a:pPr>
-              <a:lnSpc>
-                <a:spcPct val="114000"/>
-              </a:lnSpc>
-              <a:spcAft>
-                <a:spcPts val="0"/>
-              </a:spcAft>
-            </a:pPr>
-            <a:r>
-              <a:rPr sz="1050" b="0">
+              <a:t>• 분만취약지 = 소득·인구가 적은 지역이 아니라, 그 지역 가임기 여성이 ① 분만 가능 기관까지 60분 안에 닿기 어렵고(접근성) ② 실제 출산도 60분 안에 하지 못하는(이용률) 시·군</a:t>
+            </a:r>
+          </a:p>
+          <a:p>
+            <a:pPr marL="160020" indent="-160020">
+              <a:lnSpc>
+                <a:spcPct val="114000"/>
+              </a:lnSpc>
+              <a:spcAft>
+                <a:spcPts val="200"/>
+              </a:spcAft>
+            </a:pPr>
+            <a:r>
+              <a:rPr sz="1100" b="0">
                 <a:solidFill>
                   <a:srgbClr val="1C1C1E"/>
                 </a:solidFill>
                 <a:latin typeface="맑은 고딕"/>
                 <a:ea typeface="맑은 고딕"/>
               </a:rPr>
-              <a:t>분만실 설치비·운영비 지급</a:t>
-            </a:r>
-          </a:p>
-          <a:p>
-            <a:pPr>
-              <a:lnSpc>
-                <a:spcPct val="114000"/>
-              </a:lnSpc>
-              <a:spcAft>
-                <a:spcPts val="0"/>
-              </a:spcAft>
-            </a:pPr>
-            <a:r>
-              <a:rPr sz="1050" b="0">
+              <a:t>• 즉 이 제도에서 "취약"은 처음부터 끝까지 거리와 시간으로 정의된다 — 이 점이 본 연구의 첫 번째 표적이 된다</a:t>
+            </a:r>
+          </a:p>
+          <a:p>
+            <a:pPr marL="160020" indent="-160020">
+              <a:lnSpc>
+                <a:spcPct val="114000"/>
+              </a:lnSpc>
+              <a:spcAft>
+                <a:spcPts val="200"/>
+              </a:spcAft>
+            </a:pPr>
+            <a:r>
+              <a:rPr sz="1100" b="0">
                 <a:solidFill>
                   <a:srgbClr val="1C1C1E"/>
                 </a:solidFill>
                 <a:latin typeface="맑은 고딕"/>
                 <a:ea typeface="맑은 고딕"/>
               </a:rPr>
-              <a:t>(설치 약 10억 + 연 5억)</a:t>
-            </a:r>
-          </a:p>
-        </p:txBody>
-      </p:sp>
-      <p:sp>
-        <p:nvSpPr>
-          <p:cNvPr id="17" name="Rounded Rectangle 16"/>
-          <p:cNvSpPr/>
-          <p:nvPr/>
-        </p:nvSpPr>
-        <p:spPr>
-          <a:xfrm>
-            <a:off x="502920" y="2926080"/>
-            <a:ext cx="5532120" cy="1783080"/>
-          </a:xfrm>
-          <a:prstGeom prst="roundRect">
-            <a:avLst>
-              <a:gd name="adj" fmla="val 4615"/>
-            </a:avLst>
-          </a:prstGeom>
-          <a:solidFill>
-            <a:srgbClr val="F1F2F3"/>
-          </a:solidFill>
-          <a:ln w="15875">
-            <a:solidFill>
-              <a:srgbClr val="9AA0A6"/>
-            </a:solidFill>
-          </a:ln>
-          <a:effectLst>
-            <a:outerShdw blurRad="182880" dist="64008" dir="5400000" rotWithShape="0">
-              <a:srgbClr val="000000">
-                <a:alpha val="32000"/>
-              </a:srgbClr>
-            </a:outerShdw>
-          </a:effectLst>
-        </p:spPr>
-        <p:style>
-          <a:lnRef idx="1">
-            <a:schemeClr val="accent1"/>
-          </a:lnRef>
-          <a:fillRef idx="3">
-            <a:schemeClr val="accent1"/>
-          </a:fillRef>
-          <a:effectRef idx="2">
-            <a:schemeClr val="accent1"/>
-          </a:effectRef>
-          <a:fontRef idx="minor">
-            <a:schemeClr val="lt1"/>
-          </a:fontRef>
-        </p:style>
-        <p:txBody>
-          <a:bodyPr rtlCol="0" anchor="ctr"/>
-          <a:lstStyle/>
-          <a:p>
-            <a:pPr algn="ctr"/>
-          </a:p>
-        </p:txBody>
-      </p:sp>
-      <p:sp>
-        <p:nvSpPr>
-          <p:cNvPr id="18" name="TextBox 17"/>
+              <a:t>• 정부는 2년마다 전국을 재어 A·B·C 등급을 매기고, 지정 지역 병원에 분만실 설치비 약 10억 원 + 연 운영비 약 5억 원을 지원 (15년 누적 57개소)</a:t>
+            </a:r>
+          </a:p>
+        </p:txBody>
+      </p:sp>
+      <p:sp>
+        <p:nvSpPr>
+          <p:cNvPr id="17" name="TextBox 16"/>
           <p:cNvSpPr txBox="1"/>
           <p:nvPr/>
         </p:nvSpPr>
         <p:spPr>
           <a:xfrm>
-            <a:off x="685800" y="3054096"/>
-            <a:ext cx="5166359" cy="1527048"/>
+            <a:off x="502920" y="5230368"/>
+            <a:ext cx="11247120" cy="1005840"/>
           </a:xfrm>
           <a:prstGeom prst="rect">
             <a:avLst/>
@@ -9585,392 +10588,38 @@
                 <a:spcPct val="114000"/>
               </a:lnSpc>
               <a:spcAft>
-                <a:spcPts val="350"/>
-              </a:spcAft>
-            </a:pPr>
-            <a:r>
-              <a:rPr sz="1300" b="1">
+                <a:spcPts val="400"/>
+              </a:spcAft>
+            </a:pPr>
+            <a:r>
+              <a:rPr sz="1500" b="1">
+                <a:solidFill>
+                  <a:srgbClr val="1C1C1E"/>
+                </a:solidFill>
+                <a:latin typeface="맑은 고딕"/>
+                <a:ea typeface="맑은 고딕"/>
+              </a:rPr>
+              <a:t>자원 부족은 여전히 문제다. 다만 그것과 별개로, 있는 자원이 체계적으로 배분되지 않는 문제가 함께 있다.</a:t>
+            </a:r>
+          </a:p>
+          <a:p>
+            <a:pPr>
+              <a:lnSpc>
+                <a:spcPct val="114000"/>
+              </a:lnSpc>
+              <a:spcAft>
+                <a:spcPts val="0"/>
+              </a:spcAft>
+            </a:pPr>
+            <a:r>
+              <a:rPr sz="1500" b="1">
                 <a:solidFill>
                   <a:srgbClr val="000000"/>
                 </a:solidFill>
                 <a:latin typeface="맑은 고딕"/>
                 <a:ea typeface="맑은 고딕"/>
               </a:rPr>
-              <a:t>의심 1 — 지정 단계</a:t>
-            </a:r>
-          </a:p>
-          <a:p>
-            <a:pPr marL="160020" indent="-160020">
-              <a:lnSpc>
-                <a:spcPct val="114000"/>
-              </a:lnSpc>
-              <a:spcAft>
-                <a:spcPts val="200"/>
-              </a:spcAft>
-            </a:pPr>
-            <a:r>
-              <a:rPr sz="1150" b="0">
-                <a:solidFill>
-                  <a:srgbClr val="1C1C1E"/>
-                </a:solidFill>
-                <a:latin typeface="맑은 고딕"/>
-                <a:ea typeface="맑은 고딕"/>
-              </a:rPr>
-              <a:t>• 판정 기준은 이동시간 파생 지표뿐이다</a:t>
-            </a:r>
-          </a:p>
-          <a:p>
-            <a:pPr marL="160020" indent="-160020">
-              <a:lnSpc>
-                <a:spcPct val="114000"/>
-              </a:lnSpc>
-              <a:spcAft>
-                <a:spcPts val="200"/>
-              </a:spcAft>
-            </a:pPr>
-            <a:r>
-              <a:rPr sz="1150" b="0">
-                <a:solidFill>
-                  <a:srgbClr val="1C1C1E"/>
-                </a:solidFill>
-                <a:latin typeface="맑은 고딕"/>
-                <a:ea typeface="맑은 고딕"/>
-              </a:rPr>
-              <a:t>• 관내 분만 인프라가 소멸해도 "옆 도시로 60분 안에 갈 수 있으면" 취약지가 아니게 되는 구조 아닌가?</a:t>
-            </a:r>
-          </a:p>
-          <a:p>
-            <a:pPr>
-              <a:lnSpc>
-                <a:spcPct val="114000"/>
-              </a:lnSpc>
-              <a:spcAft>
-                <a:spcPts val="200"/>
-              </a:spcAft>
-            </a:pPr>
-            <a:r>
-              <a:rPr sz="1150" b="0">
-                <a:solidFill>
-                  <a:srgbClr val="1C1C1E"/>
-                </a:solidFill>
-                <a:latin typeface="맑은 고딕"/>
-                <a:ea typeface="맑은 고딕"/>
-              </a:rPr>
-              <a:t>→ 기준이 구조적으로 놓치는 지역이 있는지 검증한다</a:t>
-            </a:r>
-          </a:p>
-        </p:txBody>
-      </p:sp>
-      <p:sp>
-        <p:nvSpPr>
-          <p:cNvPr id="19" name="Rounded Rectangle 18"/>
-          <p:cNvSpPr/>
-          <p:nvPr/>
-        </p:nvSpPr>
-        <p:spPr>
-          <a:xfrm>
-            <a:off x="6263640" y="2926080"/>
-            <a:ext cx="5532120" cy="1783080"/>
-          </a:xfrm>
-          <a:prstGeom prst="roundRect">
-            <a:avLst>
-              <a:gd name="adj" fmla="val 4615"/>
-            </a:avLst>
-          </a:prstGeom>
-          <a:solidFill>
-            <a:srgbClr val="F1F2F3"/>
-          </a:solidFill>
-          <a:ln w="15875">
-            <a:solidFill>
-              <a:srgbClr val="9AA0A6"/>
-            </a:solidFill>
-          </a:ln>
-          <a:effectLst>
-            <a:outerShdw blurRad="182880" dist="64008" dir="5400000" rotWithShape="0">
-              <a:srgbClr val="000000">
-                <a:alpha val="32000"/>
-              </a:srgbClr>
-            </a:outerShdw>
-          </a:effectLst>
-        </p:spPr>
-        <p:style>
-          <a:lnRef idx="1">
-            <a:schemeClr val="accent1"/>
-          </a:lnRef>
-          <a:fillRef idx="3">
-            <a:schemeClr val="accent1"/>
-          </a:fillRef>
-          <a:effectRef idx="2">
-            <a:schemeClr val="accent1"/>
-          </a:effectRef>
-          <a:fontRef idx="minor">
-            <a:schemeClr val="lt1"/>
-          </a:fontRef>
-        </p:style>
-        <p:txBody>
-          <a:bodyPr rtlCol="0" anchor="ctr"/>
-          <a:lstStyle/>
-          <a:p>
-            <a:pPr algn="ctr"/>
-          </a:p>
-        </p:txBody>
-      </p:sp>
-      <p:sp>
-        <p:nvSpPr>
-          <p:cNvPr id="20" name="TextBox 19"/>
-          <p:cNvSpPr txBox="1"/>
-          <p:nvPr/>
-        </p:nvSpPr>
-        <p:spPr>
-          <a:xfrm>
-            <a:off x="6446520" y="3054096"/>
-            <a:ext cx="5166359" cy="1527048"/>
-          </a:xfrm>
-          <a:prstGeom prst="rect">
-            <a:avLst/>
-          </a:prstGeom>
-          <a:noFill/>
-        </p:spPr>
-        <p:txBody>
-          <a:bodyPr wrap="square" anchor="t">
-            <a:spAutoFit/>
-          </a:bodyPr>
-          <a:lstStyle/>
-          <a:p>
-            <a:pPr>
-              <a:lnSpc>
-                <a:spcPct val="114000"/>
-              </a:lnSpc>
-              <a:spcAft>
-                <a:spcPts val="350"/>
-              </a:spcAft>
-            </a:pPr>
-            <a:r>
-              <a:rPr sz="1300" b="1">
-                <a:solidFill>
-                  <a:srgbClr val="000000"/>
-                </a:solidFill>
-                <a:latin typeface="맑은 고딕"/>
-                <a:ea typeface="맑은 고딕"/>
-              </a:rPr>
-              <a:t>의심 2 — 배분 단계</a:t>
-            </a:r>
-          </a:p>
-          <a:p>
-            <a:pPr marL="160020" indent="-160020">
-              <a:lnSpc>
-                <a:spcPct val="114000"/>
-              </a:lnSpc>
-              <a:spcAft>
-                <a:spcPts val="200"/>
-              </a:spcAft>
-            </a:pPr>
-            <a:r>
-              <a:rPr sz="1150" b="0">
-                <a:solidFill>
-                  <a:srgbClr val="1C1C1E"/>
-                </a:solidFill>
-                <a:latin typeface="맑은 고딕"/>
-                <a:ea typeface="맑은 고딕"/>
-              </a:rPr>
-              <a:t>• 지원 심사 배점 100점 중 취약도 항목은 0점</a:t>
-            </a:r>
-          </a:p>
-          <a:p>
-            <a:pPr marL="160020" indent="-160020">
-              <a:lnSpc>
-                <a:spcPct val="114000"/>
-              </a:lnSpc>
-              <a:spcAft>
-                <a:spcPts val="200"/>
-              </a:spcAft>
-            </a:pPr>
-            <a:r>
-              <a:rPr sz="1150" b="0">
-                <a:solidFill>
-                  <a:srgbClr val="1C1C1E"/>
-                </a:solidFill>
-                <a:latin typeface="맑은 고딕"/>
-                <a:ea typeface="맑은 고딕"/>
-              </a:rPr>
-              <a:t>• 시·도 선별 기준은 "예산 규모, 의료 취약성 등 고려"가 전부 — 누구를 먼저 지원할지의 규칙이 있는가?</a:t>
-            </a:r>
-          </a:p>
-          <a:p>
-            <a:pPr>
-              <a:lnSpc>
-                <a:spcPct val="114000"/>
-              </a:lnSpc>
-              <a:spcAft>
-                <a:spcPts val="200"/>
-              </a:spcAft>
-            </a:pPr>
-            <a:r>
-              <a:rPr sz="1150" b="0">
-                <a:solidFill>
-                  <a:srgbClr val="1C1C1E"/>
-                </a:solidFill>
-                <a:latin typeface="맑은 고딕"/>
-                <a:ea typeface="맑은 고딕"/>
-              </a:rPr>
-              <a:t>→ 현행 배분이 무엇으로 설명되는지 진단한다</a:t>
-            </a:r>
-          </a:p>
-        </p:txBody>
-      </p:sp>
-      <p:sp>
-        <p:nvSpPr>
-          <p:cNvPr id="21" name="Rounded Rectangle 20"/>
-          <p:cNvSpPr/>
-          <p:nvPr/>
-        </p:nvSpPr>
-        <p:spPr>
-          <a:xfrm>
-            <a:off x="502920" y="4892040"/>
-            <a:ext cx="11292840" cy="1371600"/>
-          </a:xfrm>
-          <a:prstGeom prst="roundRect">
-            <a:avLst>
-              <a:gd name="adj" fmla="val 6000"/>
-            </a:avLst>
-          </a:prstGeom>
-          <a:solidFill>
-            <a:srgbClr val="FFFFFF"/>
-          </a:solidFill>
-          <a:ln w="12700">
-            <a:solidFill>
-              <a:srgbClr val="E4E6E9"/>
-            </a:solidFill>
-          </a:ln>
-          <a:effectLst>
-            <a:outerShdw blurRad="182880" dist="64008" dir="5400000" rotWithShape="0">
-              <a:srgbClr val="000000">
-                <a:alpha val="30000"/>
-              </a:srgbClr>
-            </a:outerShdw>
-          </a:effectLst>
-        </p:spPr>
-        <p:style>
-          <a:lnRef idx="1">
-            <a:schemeClr val="accent1"/>
-          </a:lnRef>
-          <a:fillRef idx="3">
-            <a:schemeClr val="accent1"/>
-          </a:fillRef>
-          <a:effectRef idx="2">
-            <a:schemeClr val="accent1"/>
-          </a:effectRef>
-          <a:fontRef idx="minor">
-            <a:schemeClr val="lt1"/>
-          </a:fontRef>
-        </p:style>
-        <p:txBody>
-          <a:bodyPr rtlCol="0" anchor="ctr"/>
-          <a:lstStyle/>
-          <a:p>
-            <a:pPr algn="ctr"/>
-          </a:p>
-        </p:txBody>
-      </p:sp>
-      <p:sp>
-        <p:nvSpPr>
-          <p:cNvPr id="22" name="TextBox 21"/>
-          <p:cNvSpPr txBox="1"/>
-          <p:nvPr/>
-        </p:nvSpPr>
-        <p:spPr>
-          <a:xfrm>
-            <a:off x="685800" y="5020055"/>
-            <a:ext cx="10927080" cy="1115568"/>
-          </a:xfrm>
-          <a:prstGeom prst="rect">
-            <a:avLst/>
-          </a:prstGeom>
-          <a:noFill/>
-        </p:spPr>
-        <p:txBody>
-          <a:bodyPr wrap="square" anchor="t">
-            <a:spAutoFit/>
-          </a:bodyPr>
-          <a:lstStyle/>
-          <a:p>
-            <a:pPr>
-              <a:lnSpc>
-                <a:spcPct val="114000"/>
-              </a:lnSpc>
-              <a:spcAft>
-                <a:spcPts val="350"/>
-              </a:spcAft>
-            </a:pPr>
-            <a:r>
-              <a:rPr sz="1300" b="1">
-                <a:solidFill>
-                  <a:srgbClr val="33393F"/>
-                </a:solidFill>
-                <a:latin typeface="맑은 고딕"/>
-                <a:ea typeface="맑은 고딕"/>
-              </a:rPr>
-              <a:t>왜 지금, 왜 데이터인가</a:t>
-            </a:r>
-          </a:p>
-          <a:p>
-            <a:pPr marL="160020" indent="-160020">
-              <a:lnSpc>
-                <a:spcPct val="114000"/>
-              </a:lnSpc>
-              <a:spcAft>
-                <a:spcPts val="200"/>
-              </a:spcAft>
-            </a:pPr>
-            <a:r>
-              <a:rPr sz="1150" b="0">
-                <a:solidFill>
-                  <a:srgbClr val="1C1C1E"/>
-                </a:solidFill>
-                <a:latin typeface="맑은 고딕"/>
-                <a:ea typeface="맑은 고딕"/>
-              </a:rPr>
-              <a:t>• 분만 인프라 공백은 언론·국회에서 반복 지적되어 왔으나, 전국 단위 공개 데이터로 정량 검증된 적이 없다</a:t>
-            </a:r>
-          </a:p>
-          <a:p>
-            <a:pPr marL="160020" indent="-160020">
-              <a:lnSpc>
-                <a:spcPct val="114000"/>
-              </a:lnSpc>
-              <a:spcAft>
-                <a:spcPts val="200"/>
-              </a:spcAft>
-            </a:pPr>
-            <a:r>
-              <a:rPr sz="1150" b="0">
-                <a:solidFill>
-                  <a:srgbClr val="1C1C1E"/>
-                </a:solidFill>
-                <a:latin typeface="맑은 고딕"/>
-                <a:ea typeface="맑은 고딕"/>
-              </a:rPr>
-              <a:t>• 분석 대상은 취약지라는 현상이 아니라, 취약지를 판정하고 지원하는 제도 그 자체다 (제도 감사 프레임)</a:t>
-            </a:r>
-          </a:p>
-          <a:p>
-            <a:pPr marL="160020" indent="-160020">
-              <a:lnSpc>
-                <a:spcPct val="114000"/>
-              </a:lnSpc>
-              <a:spcAft>
-                <a:spcPts val="200"/>
-              </a:spcAft>
-            </a:pPr>
-            <a:r>
-              <a:rPr sz="1150" b="0">
-                <a:solidFill>
-                  <a:srgbClr val="1C1C1E"/>
-                </a:solidFill>
-                <a:latin typeface="맑은 고딕"/>
-                <a:ea typeface="맑은 고딕"/>
-              </a:rPr>
-              <a:t>• 모든 판단 기준과 임계값은 정부 자신의 문서·데이터에서 가져와 실현 가능성을 확보할 계획이다</a:t>
+              <a:t>"지금 있는 것은 체계적으로, 필요한 곳으로 배분되고 있는가" — 이를 데이터로 검증하는 것이 본 계획이다.</a:t>
             </a:r>
           </a:p>
         </p:txBody>
@@ -10135,7 +10784,7 @@
                 <a:latin typeface="맑은 고딕"/>
                 <a:ea typeface="맑은 고딕"/>
               </a:rPr>
-              <a:t>연구 질문 (RQ) — 감사의 네 가지 물음</a:t>
+              <a:t>문제 인식 — 제도는 세 단계로 자원을 흘려보낸다</a:t>
             </a:r>
           </a:p>
         </p:txBody>
@@ -10243,8 +10892,8 @@
         </p:nvSpPr>
         <p:spPr>
           <a:xfrm>
-            <a:off x="502920" y="6492240"/>
-            <a:ext cx="11247120" cy="320040"/>
+            <a:off x="548640" y="1097280"/>
+            <a:ext cx="11155680" cy="384048"/>
           </a:xfrm>
           <a:prstGeom prst="rect">
             <a:avLst/>
@@ -10266,6 +10915,49 @@
               </a:spcAft>
             </a:pPr>
             <a:r>
+              <a:rPr sz="1250" b="0">
+                <a:solidFill>
+                  <a:srgbClr val="767A7F"/>
+                </a:solidFill>
+                <a:latin typeface="맑은 고딕"/>
+                <a:ea typeface="맑은 고딕"/>
+              </a:rPr>
+              <a:t>한 단계라도 막히거나 새면, 앞 단계가 아무리 정확해도 자원은 엉뚱한 곳으로 간다</a:t>
+            </a:r>
+          </a:p>
+        </p:txBody>
+      </p:sp>
+      <p:sp>
+        <p:nvSpPr>
+          <p:cNvPr id="8" name="TextBox 7"/>
+          <p:cNvSpPr txBox="1"/>
+          <p:nvPr/>
+        </p:nvSpPr>
+        <p:spPr>
+          <a:xfrm>
+            <a:off x="502920" y="6492240"/>
+            <a:ext cx="11247120" cy="320040"/>
+          </a:xfrm>
+          <a:prstGeom prst="rect">
+            <a:avLst/>
+          </a:prstGeom>
+          <a:noFill/>
+        </p:spPr>
+        <p:txBody>
+          <a:bodyPr wrap="square" anchor="t">
+            <a:spAutoFit/>
+          </a:bodyPr>
+          <a:lstStyle/>
+          <a:p>
+            <a:pPr>
+              <a:lnSpc>
+                <a:spcPct val="114000"/>
+              </a:lnSpc>
+              <a:spcAft>
+                <a:spcPts val="0"/>
+              </a:spcAft>
+            </a:pPr>
+            <a:r>
               <a:rPr sz="850" b="0">
                 <a:solidFill>
                   <a:srgbClr val="B2B5B9"/>
@@ -10280,18 +10972,18 @@
       </p:sp>
       <p:sp>
         <p:nvSpPr>
-          <p:cNvPr id="8" name="Rounded Rectangle 7"/>
+          <p:cNvPr id="9" name="Rounded Rectangle 8"/>
           <p:cNvSpPr/>
           <p:nvPr/>
         </p:nvSpPr>
         <p:spPr>
           <a:xfrm>
             <a:off x="502920" y="1371600"/>
-            <a:ext cx="5532120" cy="1737360"/>
+            <a:ext cx="3291840" cy="1298448"/>
           </a:xfrm>
           <a:prstGeom prst="roundRect">
             <a:avLst>
-              <a:gd name="adj" fmla="val 4736"/>
+              <a:gd name="adj" fmla="val 6338"/>
             </a:avLst>
           </a:prstGeom>
           <a:solidFill>
@@ -10334,14 +11026,1050 @@
       </p:sp>
       <p:sp>
         <p:nvSpPr>
-          <p:cNvPr id="9" name="Rounded Rectangle 8"/>
+          <p:cNvPr id="10" name="TextBox 9"/>
+          <p:cNvSpPr txBox="1"/>
+          <p:nvPr/>
+        </p:nvSpPr>
+        <p:spPr>
+          <a:xfrm>
+            <a:off x="667512" y="1444752"/>
+            <a:ext cx="3017520" cy="1152144"/>
+          </a:xfrm>
+          <a:prstGeom prst="rect">
+            <a:avLst/>
+          </a:prstGeom>
+          <a:noFill/>
+        </p:spPr>
+        <p:txBody>
+          <a:bodyPr wrap="square" anchor="t">
+            <a:spAutoFit/>
+          </a:bodyPr>
+          <a:lstStyle/>
+          <a:p>
+            <a:pPr>
+              <a:lnSpc>
+                <a:spcPct val="114000"/>
+              </a:lnSpc>
+              <a:spcAft>
+                <a:spcPts val="300"/>
+              </a:spcAft>
+            </a:pPr>
+            <a:r>
+              <a:rPr sz="1500" b="1">
+                <a:solidFill>
+                  <a:srgbClr val="33393F"/>
+                </a:solidFill>
+                <a:latin typeface="맑은 고딕"/>
+                <a:ea typeface="맑은 고딕"/>
+              </a:rPr>
+              <a:t>① 측정</a:t>
+            </a:r>
+          </a:p>
+          <a:p>
+            <a:pPr>
+              <a:lnSpc>
+                <a:spcPct val="114000"/>
+              </a:lnSpc>
+              <a:spcAft>
+                <a:spcPts val="0"/>
+              </a:spcAft>
+            </a:pPr>
+            <a:r>
+              <a:rPr sz="1050" b="0">
+                <a:solidFill>
+                  <a:srgbClr val="1C1C1E"/>
+                </a:solidFill>
+                <a:latin typeface="맑은 고딕"/>
+                <a:ea typeface="맑은 고딕"/>
+              </a:rPr>
+              <a:t>2년마다 전국 시·군·구의</a:t>
+            </a:r>
+          </a:p>
+          <a:p>
+            <a:pPr>
+              <a:lnSpc>
+                <a:spcPct val="114000"/>
+              </a:lnSpc>
+              <a:spcAft>
+                <a:spcPts val="0"/>
+              </a:spcAft>
+            </a:pPr>
+            <a:r>
+              <a:rPr sz="1050" b="0">
+                <a:solidFill>
+                  <a:srgbClr val="1C1C1E"/>
+                </a:solidFill>
+                <a:latin typeface="맑은 고딕"/>
+                <a:ea typeface="맑은 고딕"/>
+              </a:rPr>
+              <a:t>분만실 60분 접근성과</a:t>
+            </a:r>
+          </a:p>
+          <a:p>
+            <a:pPr>
+              <a:lnSpc>
+                <a:spcPct val="114000"/>
+              </a:lnSpc>
+              <a:spcAft>
+                <a:spcPts val="0"/>
+              </a:spcAft>
+            </a:pPr>
+            <a:r>
+              <a:rPr sz="1050" b="0">
+                <a:solidFill>
+                  <a:srgbClr val="1C1C1E"/>
+                </a:solidFill>
+                <a:latin typeface="맑은 고딕"/>
+                <a:ea typeface="맑은 고딕"/>
+              </a:rPr>
+              <a:t>실제 분만 이동시간을 산출</a:t>
+            </a:r>
+          </a:p>
+        </p:txBody>
+      </p:sp>
+      <p:sp>
+        <p:nvSpPr>
+          <p:cNvPr id="11" name="TextBox 10"/>
+          <p:cNvSpPr txBox="1"/>
+          <p:nvPr/>
+        </p:nvSpPr>
+        <p:spPr>
+          <a:xfrm>
+            <a:off x="3813048" y="1783080"/>
+            <a:ext cx="685800" cy="548640"/>
+          </a:xfrm>
+          <a:prstGeom prst="rect">
+            <a:avLst/>
+          </a:prstGeom>
+          <a:noFill/>
+        </p:spPr>
+        <p:txBody>
+          <a:bodyPr wrap="square" anchor="t">
+            <a:spAutoFit/>
+          </a:bodyPr>
+          <a:lstStyle/>
+          <a:p>
+            <a:pPr>
+              <a:lnSpc>
+                <a:spcPct val="114000"/>
+              </a:lnSpc>
+              <a:spcAft>
+                <a:spcPts val="0"/>
+              </a:spcAft>
+            </a:pPr>
+            <a:r>
+              <a:rPr sz="2200" b="1">
+                <a:solidFill>
+                  <a:srgbClr val="767A7F"/>
+                </a:solidFill>
+                <a:latin typeface="맑은 고딕"/>
+                <a:ea typeface="맑은 고딕"/>
+              </a:rPr>
+              <a:t>→</a:t>
+            </a:r>
+          </a:p>
+        </p:txBody>
+      </p:sp>
+      <p:sp>
+        <p:nvSpPr>
+          <p:cNvPr id="12" name="Rounded Rectangle 11"/>
           <p:cNvSpPr/>
           <p:nvPr/>
         </p:nvSpPr>
         <p:spPr>
           <a:xfrm>
-            <a:off x="521208" y="1600200"/>
-            <a:ext cx="82296" cy="1280160"/>
+            <a:off x="4480559" y="1371600"/>
+            <a:ext cx="3291840" cy="1298448"/>
+          </a:xfrm>
+          <a:prstGeom prst="roundRect">
+            <a:avLst>
+              <a:gd name="adj" fmla="val 6338"/>
+            </a:avLst>
+          </a:prstGeom>
+          <a:solidFill>
+            <a:srgbClr val="FFFFFF"/>
+          </a:solidFill>
+          <a:ln w="12700">
+            <a:solidFill>
+              <a:srgbClr val="E4E6E9"/>
+            </a:solidFill>
+          </a:ln>
+          <a:effectLst>
+            <a:outerShdw blurRad="182880" dist="64008" dir="5400000" rotWithShape="0">
+              <a:srgbClr val="000000">
+                <a:alpha val="30000"/>
+              </a:srgbClr>
+            </a:outerShdw>
+          </a:effectLst>
+        </p:spPr>
+        <p:style>
+          <a:lnRef idx="1">
+            <a:schemeClr val="accent1"/>
+          </a:lnRef>
+          <a:fillRef idx="3">
+            <a:schemeClr val="accent1"/>
+          </a:fillRef>
+          <a:effectRef idx="2">
+            <a:schemeClr val="accent1"/>
+          </a:effectRef>
+          <a:fontRef idx="minor">
+            <a:schemeClr val="lt1"/>
+          </a:fontRef>
+        </p:style>
+        <p:txBody>
+          <a:bodyPr rtlCol="0" anchor="ctr"/>
+          <a:lstStyle/>
+          <a:p>
+            <a:pPr algn="ctr"/>
+          </a:p>
+        </p:txBody>
+      </p:sp>
+      <p:sp>
+        <p:nvSpPr>
+          <p:cNvPr id="13" name="TextBox 12"/>
+          <p:cNvSpPr txBox="1"/>
+          <p:nvPr/>
+        </p:nvSpPr>
+        <p:spPr>
+          <a:xfrm>
+            <a:off x="4645151" y="1444752"/>
+            <a:ext cx="3017520" cy="1152144"/>
+          </a:xfrm>
+          <a:prstGeom prst="rect">
+            <a:avLst/>
+          </a:prstGeom>
+          <a:noFill/>
+        </p:spPr>
+        <p:txBody>
+          <a:bodyPr wrap="square" anchor="t">
+            <a:spAutoFit/>
+          </a:bodyPr>
+          <a:lstStyle/>
+          <a:p>
+            <a:pPr>
+              <a:lnSpc>
+                <a:spcPct val="114000"/>
+              </a:lnSpc>
+              <a:spcAft>
+                <a:spcPts val="300"/>
+              </a:spcAft>
+            </a:pPr>
+            <a:r>
+              <a:rPr sz="1500" b="1">
+                <a:solidFill>
+                  <a:srgbClr val="33393F"/>
+                </a:solidFill>
+                <a:latin typeface="맑은 고딕"/>
+                <a:ea typeface="맑은 고딕"/>
+              </a:rPr>
+              <a:t>② 지정</a:t>
+            </a:r>
+          </a:p>
+          <a:p>
+            <a:pPr>
+              <a:lnSpc>
+                <a:spcPct val="114000"/>
+              </a:lnSpc>
+              <a:spcAft>
+                <a:spcPts val="0"/>
+              </a:spcAft>
+            </a:pPr>
+            <a:r>
+              <a:rPr sz="1050" b="0">
+                <a:solidFill>
+                  <a:srgbClr val="1C1C1E"/>
+                </a:solidFill>
+                <a:latin typeface="맑은 고딕"/>
+                <a:ea typeface="맑은 고딕"/>
+              </a:rPr>
+              <a:t>그 값을 임계값(30/30)과 대조해</a:t>
+            </a:r>
+          </a:p>
+          <a:p>
+            <a:pPr>
+              <a:lnSpc>
+                <a:spcPct val="114000"/>
+              </a:lnSpc>
+              <a:spcAft>
+                <a:spcPts val="0"/>
+              </a:spcAft>
+            </a:pPr>
+            <a:r>
+              <a:rPr sz="1050" b="0">
+                <a:solidFill>
+                  <a:srgbClr val="1C1C1E"/>
+                </a:solidFill>
+                <a:latin typeface="맑은 고딕"/>
+                <a:ea typeface="맑은 고딕"/>
+              </a:rPr>
+              <a:t>분만취약지를 판정하고</a:t>
+            </a:r>
+          </a:p>
+          <a:p>
+            <a:pPr>
+              <a:lnSpc>
+                <a:spcPct val="114000"/>
+              </a:lnSpc>
+              <a:spcAft>
+                <a:spcPts val="0"/>
+              </a:spcAft>
+            </a:pPr>
+            <a:r>
+              <a:rPr sz="1050" b="0">
+                <a:solidFill>
+                  <a:srgbClr val="1C1C1E"/>
+                </a:solidFill>
+                <a:latin typeface="맑은 고딕"/>
+                <a:ea typeface="맑은 고딕"/>
+              </a:rPr>
+              <a:t>A·B·C 등급 부여</a:t>
+            </a:r>
+          </a:p>
+        </p:txBody>
+      </p:sp>
+      <p:sp>
+        <p:nvSpPr>
+          <p:cNvPr id="14" name="TextBox 13"/>
+          <p:cNvSpPr txBox="1"/>
+          <p:nvPr/>
+        </p:nvSpPr>
+        <p:spPr>
+          <a:xfrm>
+            <a:off x="7790688" y="1783080"/>
+            <a:ext cx="685800" cy="548640"/>
+          </a:xfrm>
+          <a:prstGeom prst="rect">
+            <a:avLst/>
+          </a:prstGeom>
+          <a:noFill/>
+        </p:spPr>
+        <p:txBody>
+          <a:bodyPr wrap="square" anchor="t">
+            <a:spAutoFit/>
+          </a:bodyPr>
+          <a:lstStyle/>
+          <a:p>
+            <a:pPr>
+              <a:lnSpc>
+                <a:spcPct val="114000"/>
+              </a:lnSpc>
+              <a:spcAft>
+                <a:spcPts val="0"/>
+              </a:spcAft>
+            </a:pPr>
+            <a:r>
+              <a:rPr sz="2200" b="1">
+                <a:solidFill>
+                  <a:srgbClr val="767A7F"/>
+                </a:solidFill>
+                <a:latin typeface="맑은 고딕"/>
+                <a:ea typeface="맑은 고딕"/>
+              </a:rPr>
+              <a:t>→</a:t>
+            </a:r>
+          </a:p>
+        </p:txBody>
+      </p:sp>
+      <p:sp>
+        <p:nvSpPr>
+          <p:cNvPr id="15" name="Rounded Rectangle 14"/>
+          <p:cNvSpPr/>
+          <p:nvPr/>
+        </p:nvSpPr>
+        <p:spPr>
+          <a:xfrm>
+            <a:off x="8458200" y="1371600"/>
+            <a:ext cx="3291840" cy="1298448"/>
+          </a:xfrm>
+          <a:prstGeom prst="roundRect">
+            <a:avLst>
+              <a:gd name="adj" fmla="val 6338"/>
+            </a:avLst>
+          </a:prstGeom>
+          <a:solidFill>
+            <a:srgbClr val="FFFFFF"/>
+          </a:solidFill>
+          <a:ln w="12700">
+            <a:solidFill>
+              <a:srgbClr val="E4E6E9"/>
+            </a:solidFill>
+          </a:ln>
+          <a:effectLst>
+            <a:outerShdw blurRad="182880" dist="64008" dir="5400000" rotWithShape="0">
+              <a:srgbClr val="000000">
+                <a:alpha val="30000"/>
+              </a:srgbClr>
+            </a:outerShdw>
+          </a:effectLst>
+        </p:spPr>
+        <p:style>
+          <a:lnRef idx="1">
+            <a:schemeClr val="accent1"/>
+          </a:lnRef>
+          <a:fillRef idx="3">
+            <a:schemeClr val="accent1"/>
+          </a:fillRef>
+          <a:effectRef idx="2">
+            <a:schemeClr val="accent1"/>
+          </a:effectRef>
+          <a:fontRef idx="minor">
+            <a:schemeClr val="lt1"/>
+          </a:fontRef>
+        </p:style>
+        <p:txBody>
+          <a:bodyPr rtlCol="0" anchor="ctr"/>
+          <a:lstStyle/>
+          <a:p>
+            <a:pPr algn="ctr"/>
+          </a:p>
+        </p:txBody>
+      </p:sp>
+      <p:sp>
+        <p:nvSpPr>
+          <p:cNvPr id="16" name="TextBox 15"/>
+          <p:cNvSpPr txBox="1"/>
+          <p:nvPr/>
+        </p:nvSpPr>
+        <p:spPr>
+          <a:xfrm>
+            <a:off x="8622792" y="1444752"/>
+            <a:ext cx="3017520" cy="1152144"/>
+          </a:xfrm>
+          <a:prstGeom prst="rect">
+            <a:avLst/>
+          </a:prstGeom>
+          <a:noFill/>
+        </p:spPr>
+        <p:txBody>
+          <a:bodyPr wrap="square" anchor="t">
+            <a:spAutoFit/>
+          </a:bodyPr>
+          <a:lstStyle/>
+          <a:p>
+            <a:pPr>
+              <a:lnSpc>
+                <a:spcPct val="114000"/>
+              </a:lnSpc>
+              <a:spcAft>
+                <a:spcPts val="300"/>
+              </a:spcAft>
+            </a:pPr>
+            <a:r>
+              <a:rPr sz="1500" b="1">
+                <a:solidFill>
+                  <a:srgbClr val="33393F"/>
+                </a:solidFill>
+                <a:latin typeface="맑은 고딕"/>
+                <a:ea typeface="맑은 고딕"/>
+              </a:rPr>
+              <a:t>③ 배분</a:t>
+            </a:r>
+          </a:p>
+          <a:p>
+            <a:pPr>
+              <a:lnSpc>
+                <a:spcPct val="114000"/>
+              </a:lnSpc>
+              <a:spcAft>
+                <a:spcPts val="0"/>
+              </a:spcAft>
+            </a:pPr>
+            <a:r>
+              <a:rPr sz="1050" b="0">
+                <a:solidFill>
+                  <a:srgbClr val="1C1C1E"/>
+                </a:solidFill>
+                <a:latin typeface="맑은 고딕"/>
+                <a:ea typeface="맑은 고딕"/>
+              </a:rPr>
+              <a:t>지정 지역의 병원 한 곳을 골라</a:t>
+            </a:r>
+          </a:p>
+          <a:p>
+            <a:pPr>
+              <a:lnSpc>
+                <a:spcPct val="114000"/>
+              </a:lnSpc>
+              <a:spcAft>
+                <a:spcPts val="0"/>
+              </a:spcAft>
+            </a:pPr>
+            <a:r>
+              <a:rPr sz="1050" b="0">
+                <a:solidFill>
+                  <a:srgbClr val="1C1C1E"/>
+                </a:solidFill>
+                <a:latin typeface="맑은 고딕"/>
+                <a:ea typeface="맑은 고딕"/>
+              </a:rPr>
+              <a:t>분만실 설치비·운영비 지급</a:t>
+            </a:r>
+          </a:p>
+          <a:p>
+            <a:pPr>
+              <a:lnSpc>
+                <a:spcPct val="114000"/>
+              </a:lnSpc>
+              <a:spcAft>
+                <a:spcPts val="0"/>
+              </a:spcAft>
+            </a:pPr>
+            <a:r>
+              <a:rPr sz="1050" b="0">
+                <a:solidFill>
+                  <a:srgbClr val="1C1C1E"/>
+                </a:solidFill>
+                <a:latin typeface="맑은 고딕"/>
+                <a:ea typeface="맑은 고딕"/>
+              </a:rPr>
+              <a:t>(설치 약 10억 + 연 5억)</a:t>
+            </a:r>
+          </a:p>
+        </p:txBody>
+      </p:sp>
+      <p:sp>
+        <p:nvSpPr>
+          <p:cNvPr id="17" name="Rounded Rectangle 16"/>
+          <p:cNvSpPr/>
+          <p:nvPr/>
+        </p:nvSpPr>
+        <p:spPr>
+          <a:xfrm>
+            <a:off x="502920" y="2926080"/>
+            <a:ext cx="5532120" cy="1783080"/>
+          </a:xfrm>
+          <a:prstGeom prst="roundRect">
+            <a:avLst>
+              <a:gd name="adj" fmla="val 4615"/>
+            </a:avLst>
+          </a:prstGeom>
+          <a:solidFill>
+            <a:srgbClr val="F1F2F3"/>
+          </a:solidFill>
+          <a:ln w="15875">
+            <a:solidFill>
+              <a:srgbClr val="9AA0A6"/>
+            </a:solidFill>
+          </a:ln>
+          <a:effectLst>
+            <a:outerShdw blurRad="182880" dist="64008" dir="5400000" rotWithShape="0">
+              <a:srgbClr val="000000">
+                <a:alpha val="32000"/>
+              </a:srgbClr>
+            </a:outerShdw>
+          </a:effectLst>
+        </p:spPr>
+        <p:style>
+          <a:lnRef idx="1">
+            <a:schemeClr val="accent1"/>
+          </a:lnRef>
+          <a:fillRef idx="3">
+            <a:schemeClr val="accent1"/>
+          </a:fillRef>
+          <a:effectRef idx="2">
+            <a:schemeClr val="accent1"/>
+          </a:effectRef>
+          <a:fontRef idx="minor">
+            <a:schemeClr val="lt1"/>
+          </a:fontRef>
+        </p:style>
+        <p:txBody>
+          <a:bodyPr rtlCol="0" anchor="ctr"/>
+          <a:lstStyle/>
+          <a:p>
+            <a:pPr algn="ctr"/>
+          </a:p>
+        </p:txBody>
+      </p:sp>
+      <p:sp>
+        <p:nvSpPr>
+          <p:cNvPr id="18" name="TextBox 17"/>
+          <p:cNvSpPr txBox="1"/>
+          <p:nvPr/>
+        </p:nvSpPr>
+        <p:spPr>
+          <a:xfrm>
+            <a:off x="685800" y="3054096"/>
+            <a:ext cx="5166359" cy="1527048"/>
+          </a:xfrm>
+          <a:prstGeom prst="rect">
+            <a:avLst/>
+          </a:prstGeom>
+          <a:noFill/>
+        </p:spPr>
+        <p:txBody>
+          <a:bodyPr wrap="square" anchor="t">
+            <a:spAutoFit/>
+          </a:bodyPr>
+          <a:lstStyle/>
+          <a:p>
+            <a:pPr>
+              <a:lnSpc>
+                <a:spcPct val="114000"/>
+              </a:lnSpc>
+              <a:spcAft>
+                <a:spcPts val="350"/>
+              </a:spcAft>
+            </a:pPr>
+            <a:r>
+              <a:rPr sz="1300" b="1">
+                <a:solidFill>
+                  <a:srgbClr val="000000"/>
+                </a:solidFill>
+                <a:latin typeface="맑은 고딕"/>
+                <a:ea typeface="맑은 고딕"/>
+              </a:rPr>
+              <a:t>의심 1 — 지정 단계</a:t>
+            </a:r>
+          </a:p>
+          <a:p>
+            <a:pPr marL="160020" indent="-160020">
+              <a:lnSpc>
+                <a:spcPct val="114000"/>
+              </a:lnSpc>
+              <a:spcAft>
+                <a:spcPts val="200"/>
+              </a:spcAft>
+            </a:pPr>
+            <a:r>
+              <a:rPr sz="1150" b="0">
+                <a:solidFill>
+                  <a:srgbClr val="1C1C1E"/>
+                </a:solidFill>
+                <a:latin typeface="맑은 고딕"/>
+                <a:ea typeface="맑은 고딕"/>
+              </a:rPr>
+              <a:t>• 판정 기준은 이동시간 파생 지표뿐이다</a:t>
+            </a:r>
+          </a:p>
+          <a:p>
+            <a:pPr marL="160020" indent="-160020">
+              <a:lnSpc>
+                <a:spcPct val="114000"/>
+              </a:lnSpc>
+              <a:spcAft>
+                <a:spcPts val="200"/>
+              </a:spcAft>
+            </a:pPr>
+            <a:r>
+              <a:rPr sz="1150" b="0">
+                <a:solidFill>
+                  <a:srgbClr val="1C1C1E"/>
+                </a:solidFill>
+                <a:latin typeface="맑은 고딕"/>
+                <a:ea typeface="맑은 고딕"/>
+              </a:rPr>
+              <a:t>• 관내 분만 인프라가 소멸해도 "옆 도시로 60분 안에 갈 수 있으면" 취약지가 아니게 되는 구조 아닌가?</a:t>
+            </a:r>
+          </a:p>
+          <a:p>
+            <a:pPr>
+              <a:lnSpc>
+                <a:spcPct val="114000"/>
+              </a:lnSpc>
+              <a:spcAft>
+                <a:spcPts val="200"/>
+              </a:spcAft>
+            </a:pPr>
+            <a:r>
+              <a:rPr sz="1150" b="0">
+                <a:solidFill>
+                  <a:srgbClr val="1C1C1E"/>
+                </a:solidFill>
+                <a:latin typeface="맑은 고딕"/>
+                <a:ea typeface="맑은 고딕"/>
+              </a:rPr>
+              <a:t>→ 기준이 구조적으로 놓치는 지역이 있는지 검증한다</a:t>
+            </a:r>
+          </a:p>
+        </p:txBody>
+      </p:sp>
+      <p:sp>
+        <p:nvSpPr>
+          <p:cNvPr id="19" name="Rounded Rectangle 18"/>
+          <p:cNvSpPr/>
+          <p:nvPr/>
+        </p:nvSpPr>
+        <p:spPr>
+          <a:xfrm>
+            <a:off x="6263640" y="2926080"/>
+            <a:ext cx="5532120" cy="1783080"/>
+          </a:xfrm>
+          <a:prstGeom prst="roundRect">
+            <a:avLst>
+              <a:gd name="adj" fmla="val 4615"/>
+            </a:avLst>
+          </a:prstGeom>
+          <a:solidFill>
+            <a:srgbClr val="F1F2F3"/>
+          </a:solidFill>
+          <a:ln w="15875">
+            <a:solidFill>
+              <a:srgbClr val="9AA0A6"/>
+            </a:solidFill>
+          </a:ln>
+          <a:effectLst>
+            <a:outerShdw blurRad="182880" dist="64008" dir="5400000" rotWithShape="0">
+              <a:srgbClr val="000000">
+                <a:alpha val="32000"/>
+              </a:srgbClr>
+            </a:outerShdw>
+          </a:effectLst>
+        </p:spPr>
+        <p:style>
+          <a:lnRef idx="1">
+            <a:schemeClr val="accent1"/>
+          </a:lnRef>
+          <a:fillRef idx="3">
+            <a:schemeClr val="accent1"/>
+          </a:fillRef>
+          <a:effectRef idx="2">
+            <a:schemeClr val="accent1"/>
+          </a:effectRef>
+          <a:fontRef idx="minor">
+            <a:schemeClr val="lt1"/>
+          </a:fontRef>
+        </p:style>
+        <p:txBody>
+          <a:bodyPr rtlCol="0" anchor="ctr"/>
+          <a:lstStyle/>
+          <a:p>
+            <a:pPr algn="ctr"/>
+          </a:p>
+        </p:txBody>
+      </p:sp>
+      <p:sp>
+        <p:nvSpPr>
+          <p:cNvPr id="20" name="TextBox 19"/>
+          <p:cNvSpPr txBox="1"/>
+          <p:nvPr/>
+        </p:nvSpPr>
+        <p:spPr>
+          <a:xfrm>
+            <a:off x="6446520" y="3054096"/>
+            <a:ext cx="5166359" cy="1527048"/>
+          </a:xfrm>
+          <a:prstGeom prst="rect">
+            <a:avLst/>
+          </a:prstGeom>
+          <a:noFill/>
+        </p:spPr>
+        <p:txBody>
+          <a:bodyPr wrap="square" anchor="t">
+            <a:spAutoFit/>
+          </a:bodyPr>
+          <a:lstStyle/>
+          <a:p>
+            <a:pPr>
+              <a:lnSpc>
+                <a:spcPct val="114000"/>
+              </a:lnSpc>
+              <a:spcAft>
+                <a:spcPts val="350"/>
+              </a:spcAft>
+            </a:pPr>
+            <a:r>
+              <a:rPr sz="1300" b="1">
+                <a:solidFill>
+                  <a:srgbClr val="000000"/>
+                </a:solidFill>
+                <a:latin typeface="맑은 고딕"/>
+                <a:ea typeface="맑은 고딕"/>
+              </a:rPr>
+              <a:t>의심 2 — 배분 단계</a:t>
+            </a:r>
+          </a:p>
+          <a:p>
+            <a:pPr marL="160020" indent="-160020">
+              <a:lnSpc>
+                <a:spcPct val="114000"/>
+              </a:lnSpc>
+              <a:spcAft>
+                <a:spcPts val="200"/>
+              </a:spcAft>
+            </a:pPr>
+            <a:r>
+              <a:rPr sz="1150" b="0">
+                <a:solidFill>
+                  <a:srgbClr val="1C1C1E"/>
+                </a:solidFill>
+                <a:latin typeface="맑은 고딕"/>
+                <a:ea typeface="맑은 고딕"/>
+              </a:rPr>
+              <a:t>• 지원 심사 배점 100점 중 취약도 항목은 0점</a:t>
+            </a:r>
+          </a:p>
+          <a:p>
+            <a:pPr marL="160020" indent="-160020">
+              <a:lnSpc>
+                <a:spcPct val="114000"/>
+              </a:lnSpc>
+              <a:spcAft>
+                <a:spcPts val="200"/>
+              </a:spcAft>
+            </a:pPr>
+            <a:r>
+              <a:rPr sz="1150" b="0">
+                <a:solidFill>
+                  <a:srgbClr val="1C1C1E"/>
+                </a:solidFill>
+                <a:latin typeface="맑은 고딕"/>
+                <a:ea typeface="맑은 고딕"/>
+              </a:rPr>
+              <a:t>• 시·도 선별 기준은 "예산 규모, 의료 취약성 등 고려"가 전부 — 누구를 먼저 지원할지의 규칙이 있는가?</a:t>
+            </a:r>
+          </a:p>
+          <a:p>
+            <a:pPr>
+              <a:lnSpc>
+                <a:spcPct val="114000"/>
+              </a:lnSpc>
+              <a:spcAft>
+                <a:spcPts val="200"/>
+              </a:spcAft>
+            </a:pPr>
+            <a:r>
+              <a:rPr sz="1150" b="0">
+                <a:solidFill>
+                  <a:srgbClr val="1C1C1E"/>
+                </a:solidFill>
+                <a:latin typeface="맑은 고딕"/>
+                <a:ea typeface="맑은 고딕"/>
+              </a:rPr>
+              <a:t>→ 현행 배분이 무엇으로 설명되는지 진단한다</a:t>
+            </a:r>
+          </a:p>
+        </p:txBody>
+      </p:sp>
+      <p:sp>
+        <p:nvSpPr>
+          <p:cNvPr id="21" name="Rounded Rectangle 20"/>
+          <p:cNvSpPr/>
+          <p:nvPr/>
+        </p:nvSpPr>
+        <p:spPr>
+          <a:xfrm>
+            <a:off x="502920" y="4892040"/>
+            <a:ext cx="11292840" cy="1371600"/>
+          </a:xfrm>
+          <a:prstGeom prst="roundRect">
+            <a:avLst>
+              <a:gd name="adj" fmla="val 6000"/>
+            </a:avLst>
+          </a:prstGeom>
+          <a:solidFill>
+            <a:srgbClr val="FFFFFF"/>
+          </a:solidFill>
+          <a:ln w="12700">
+            <a:solidFill>
+              <a:srgbClr val="E4E6E9"/>
+            </a:solidFill>
+          </a:ln>
+          <a:effectLst>
+            <a:outerShdw blurRad="182880" dist="64008" dir="5400000" rotWithShape="0">
+              <a:srgbClr val="000000">
+                <a:alpha val="30000"/>
+              </a:srgbClr>
+            </a:outerShdw>
+          </a:effectLst>
+        </p:spPr>
+        <p:style>
+          <a:lnRef idx="1">
+            <a:schemeClr val="accent1"/>
+          </a:lnRef>
+          <a:fillRef idx="3">
+            <a:schemeClr val="accent1"/>
+          </a:fillRef>
+          <a:effectRef idx="2">
+            <a:schemeClr val="accent1"/>
+          </a:effectRef>
+          <a:fontRef idx="minor">
+            <a:schemeClr val="lt1"/>
+          </a:fontRef>
+        </p:style>
+        <p:txBody>
+          <a:bodyPr rtlCol="0" anchor="ctr"/>
+          <a:lstStyle/>
+          <a:p>
+            <a:pPr algn="ctr"/>
+          </a:p>
+        </p:txBody>
+      </p:sp>
+      <p:sp>
+        <p:nvSpPr>
+          <p:cNvPr id="22" name="TextBox 21"/>
+          <p:cNvSpPr txBox="1"/>
+          <p:nvPr/>
+        </p:nvSpPr>
+        <p:spPr>
+          <a:xfrm>
+            <a:off x="685800" y="5020055"/>
+            <a:ext cx="10927080" cy="1115568"/>
+          </a:xfrm>
+          <a:prstGeom prst="rect">
+            <a:avLst/>
+          </a:prstGeom>
+          <a:noFill/>
+        </p:spPr>
+        <p:txBody>
+          <a:bodyPr wrap="square" anchor="t">
+            <a:spAutoFit/>
+          </a:bodyPr>
+          <a:lstStyle/>
+          <a:p>
+            <a:pPr>
+              <a:lnSpc>
+                <a:spcPct val="114000"/>
+              </a:lnSpc>
+              <a:spcAft>
+                <a:spcPts val="350"/>
+              </a:spcAft>
+            </a:pPr>
+            <a:r>
+              <a:rPr sz="1300" b="1">
+                <a:solidFill>
+                  <a:srgbClr val="33393F"/>
+                </a:solidFill>
+                <a:latin typeface="맑은 고딕"/>
+                <a:ea typeface="맑은 고딕"/>
+              </a:rPr>
+              <a:t>왜 지금, 왜 데이터인가</a:t>
+            </a:r>
+          </a:p>
+          <a:p>
+            <a:pPr marL="160020" indent="-160020">
+              <a:lnSpc>
+                <a:spcPct val="114000"/>
+              </a:lnSpc>
+              <a:spcAft>
+                <a:spcPts val="200"/>
+              </a:spcAft>
+            </a:pPr>
+            <a:r>
+              <a:rPr sz="1150" b="0">
+                <a:solidFill>
+                  <a:srgbClr val="1C1C1E"/>
+                </a:solidFill>
+                <a:latin typeface="맑은 고딕"/>
+                <a:ea typeface="맑은 고딕"/>
+              </a:rPr>
+              <a:t>• 분만 인프라 공백은 언론·국회에서 반복 지적되어 왔으나, 전국 단위 공개 데이터로 정량 검증된 적이 없다</a:t>
+            </a:r>
+          </a:p>
+          <a:p>
+            <a:pPr marL="160020" indent="-160020">
+              <a:lnSpc>
+                <a:spcPct val="114000"/>
+              </a:lnSpc>
+              <a:spcAft>
+                <a:spcPts val="200"/>
+              </a:spcAft>
+            </a:pPr>
+            <a:r>
+              <a:rPr sz="1150" b="0">
+                <a:solidFill>
+                  <a:srgbClr val="1C1C1E"/>
+                </a:solidFill>
+                <a:latin typeface="맑은 고딕"/>
+                <a:ea typeface="맑은 고딕"/>
+              </a:rPr>
+              <a:t>• 분석 대상은 취약지라는 현상이 아니라, 취약지를 판정하고 지원하는 제도 그 자체다 (제도 감사 프레임)</a:t>
+            </a:r>
+          </a:p>
+          <a:p>
+            <a:pPr marL="160020" indent="-160020">
+              <a:lnSpc>
+                <a:spcPct val="114000"/>
+              </a:lnSpc>
+              <a:spcAft>
+                <a:spcPts val="200"/>
+              </a:spcAft>
+            </a:pPr>
+            <a:r>
+              <a:rPr sz="1150" b="0">
+                <a:solidFill>
+                  <a:srgbClr val="1C1C1E"/>
+                </a:solidFill>
+                <a:latin typeface="맑은 고딕"/>
+                <a:ea typeface="맑은 고딕"/>
+              </a:rPr>
+              <a:t>• 모든 판단 기준과 임계값은 정부 자신의 문서·데이터에서 가져와 실현 가능성을 확보할 계획이다</a:t>
+            </a:r>
+          </a:p>
+        </p:txBody>
+      </p:sp>
+    </p:spTree>
+  </p:cSld>
+  <p:clrMapOvr>
+    <a:masterClrMapping/>
+  </p:clrMapOvr>
+</p:sld>
+</file>
+
+<file path=ppt/slides/slide5.xml><?xml version="1.0" encoding="utf-8"?>
+<p:sld xmlns:a="http://schemas.openxmlformats.org/drawingml/2006/main" xmlns:p="http://schemas.openxmlformats.org/presentationml/2006/main" xmlns:r="http://schemas.openxmlformats.org/officeDocument/2006/relationships">
+  <p:cSld>
+    <p:spTree>
+      <p:nvGrpSpPr>
+        <p:cNvPr id="1" name=""/>
+        <p:cNvGrpSpPr/>
+        <p:nvPr/>
+      </p:nvGrpSpPr>
+      <p:grpSpPr/>
+      <p:sp>
+        <p:nvSpPr>
+          <p:cNvPr id="2" name="Rectangle 1"/>
+          <p:cNvSpPr/>
+          <p:nvPr/>
+        </p:nvSpPr>
+        <p:spPr>
+          <a:xfrm>
+            <a:off x="0" y="0"/>
+            <a:ext cx="12191695" cy="6858000"/>
+          </a:xfrm>
+          <a:prstGeom prst="rect">
+            <a:avLst/>
+          </a:prstGeom>
+          <a:solidFill>
+            <a:srgbClr val="FFFFFF"/>
+          </a:solidFill>
+          <a:ln>
+            <a:noFill/>
+          </a:ln>
+          <a:effectLst/>
+        </p:spPr>
+        <p:style>
+          <a:lnRef idx="1">
+            <a:schemeClr val="accent1"/>
+          </a:lnRef>
+          <a:fillRef idx="3">
+            <a:schemeClr val="accent1"/>
+          </a:fillRef>
+          <a:effectRef idx="2">
+            <a:schemeClr val="accent1"/>
+          </a:effectRef>
+          <a:fontRef idx="minor">
+            <a:schemeClr val="lt1"/>
+          </a:fontRef>
+        </p:style>
+        <p:txBody>
+          <a:bodyPr rtlCol="0" anchor="ctr"/>
+          <a:lstStyle/>
+          <a:p>
+            <a:pPr algn="ctr"/>
+          </a:p>
+        </p:txBody>
+      </p:sp>
+      <p:sp>
+        <p:nvSpPr>
+          <p:cNvPr id="3" name="Rounded Rectangle 2"/>
+          <p:cNvSpPr/>
+          <p:nvPr/>
+        </p:nvSpPr>
+        <p:spPr>
+          <a:xfrm>
+            <a:off x="502920" y="475488"/>
+            <a:ext cx="310896" cy="310896"/>
           </a:xfrm>
           <a:prstGeom prst="roundRect">
             <a:avLst>
@@ -10394,14 +12122,109 @@
       </p:sp>
       <p:sp>
         <p:nvSpPr>
-          <p:cNvPr id="10" name="TextBox 9"/>
+          <p:cNvPr id="4" name="TextBox 3"/>
           <p:cNvSpPr txBox="1"/>
           <p:nvPr/>
         </p:nvSpPr>
         <p:spPr>
           <a:xfrm>
-            <a:off x="822960" y="1536192"/>
-            <a:ext cx="5074920" cy="1463040"/>
+            <a:off x="960120" y="274320"/>
+            <a:ext cx="9692640" cy="685800"/>
+          </a:xfrm>
+          <a:prstGeom prst="rect">
+            <a:avLst/>
+          </a:prstGeom>
+          <a:noFill/>
+        </p:spPr>
+        <p:txBody>
+          <a:bodyPr wrap="square" anchor="ctr">
+            <a:spAutoFit/>
+          </a:bodyPr>
+          <a:lstStyle/>
+          <a:p>
+            <a:pPr>
+              <a:lnSpc>
+                <a:spcPct val="114000"/>
+              </a:lnSpc>
+              <a:spcAft>
+                <a:spcPts val="0"/>
+              </a:spcAft>
+            </a:pPr>
+            <a:r>
+              <a:rPr sz="2150" b="1">
+                <a:solidFill>
+                  <a:srgbClr val="1C1C1E"/>
+                </a:solidFill>
+                <a:latin typeface="맑은 고딕"/>
+                <a:ea typeface="맑은 고딕"/>
+              </a:rPr>
+              <a:t>연구 질문 (RQ) — 감사의 네 가지 물음</a:t>
+            </a:r>
+          </a:p>
+        </p:txBody>
+      </p:sp>
+      <p:sp>
+        <p:nvSpPr>
+          <p:cNvPr id="5" name="Rectangle 4"/>
+          <p:cNvSpPr/>
+          <p:nvPr/>
+        </p:nvSpPr>
+        <p:spPr>
+          <a:xfrm>
+            <a:off x="521207" y="969264"/>
+            <a:ext cx="4206240" cy="27432"/>
+          </a:xfrm>
+          <a:prstGeom prst="rect">
+            <a:avLst/>
+          </a:prstGeom>
+          <a:gradFill rotWithShape="1">
+            <a:gsLst>
+              <a:gs pos="0">
+                <a:srgbClr val="2A2E33"/>
+              </a:gs>
+              <a:gs pos="100000">
+                <a:srgbClr val="FFFFFF"/>
+              </a:gs>
+            </a:gsLst>
+            <a:lin scaled="0" ang="0"/>
+          </a:gradFill>
+          <a:ln>
+            <a:noFill/>
+          </a:ln>
+          <a:effectLst/>
+        </p:spPr>
+        <p:style>
+          <a:lnRef idx="1">
+            <a:schemeClr val="accent1"/>
+          </a:lnRef>
+          <a:fillRef idx="3">
+            <a:schemeClr val="accent1"/>
+          </a:fillRef>
+          <a:effectRef idx="2">
+            <a:schemeClr val="accent1"/>
+          </a:effectRef>
+          <a:fontRef idx="minor">
+            <a:schemeClr val="lt1"/>
+          </a:fontRef>
+        </p:style>
+        <p:txBody>
+          <a:bodyPr rtlCol="0" anchor="ctr"/>
+          <a:lstStyle/>
+          <a:p>
+            <a:pPr algn="ctr"/>
+          </a:p>
+        </p:txBody>
+      </p:sp>
+      <p:sp>
+        <p:nvSpPr>
+          <p:cNvPr id="6" name="TextBox 5"/>
+          <p:cNvSpPr txBox="1"/>
+          <p:nvPr/>
+        </p:nvSpPr>
+        <p:spPr>
+          <a:xfrm>
+            <a:off x="10835640" y="164592"/>
+            <a:ext cx="1188720" cy="777240"/>
           </a:xfrm>
           <a:prstGeom prst="rect">
             <a:avLst/>
@@ -10419,71 +12242,74 @@
                 <a:spcPct val="114000"/>
               </a:lnSpc>
               <a:spcAft>
-                <a:spcPts val="500"/>
-              </a:spcAft>
-            </a:pPr>
-            <a:r>
-              <a:rPr sz="1500" b="1">
-                <a:solidFill>
-                  <a:srgbClr val="33393F"/>
-                </a:solidFill>
-                <a:latin typeface="맑은 고딕"/>
-                <a:ea typeface="맑은 고딕"/>
-              </a:rPr>
-              <a:t>RQ1 · 지정의 검증</a:t>
-            </a:r>
-          </a:p>
+                <a:spcPts val="0"/>
+              </a:spcAft>
+            </a:pPr>
+            <a:r>
+              <a:rPr sz="3000" b="1">
+                <a:solidFill>
+                  <a:srgbClr val="D8DADD"/>
+                </a:solidFill>
+                <a:latin typeface="맑은 고딕"/>
+                <a:ea typeface="맑은 고딕"/>
+              </a:rPr>
+              <a:t>05</a:t>
+            </a:r>
+          </a:p>
+        </p:txBody>
+      </p:sp>
+      <p:sp>
+        <p:nvSpPr>
+          <p:cNvPr id="7" name="TextBox 6"/>
+          <p:cNvSpPr txBox="1"/>
+          <p:nvPr/>
+        </p:nvSpPr>
+        <p:spPr>
+          <a:xfrm>
+            <a:off x="502920" y="6492240"/>
+            <a:ext cx="11247120" cy="320040"/>
+          </a:xfrm>
+          <a:prstGeom prst="rect">
+            <a:avLst/>
+          </a:prstGeom>
+          <a:noFill/>
+        </p:spPr>
+        <p:txBody>
+          <a:bodyPr wrap="square" anchor="t">
+            <a:spAutoFit/>
+          </a:bodyPr>
+          <a:lstStyle/>
           <a:p>
             <a:pPr>
               <a:lnSpc>
                 <a:spcPct val="114000"/>
               </a:lnSpc>
               <a:spcAft>
-                <a:spcPts val="200"/>
-              </a:spcAft>
-            </a:pPr>
-            <a:r>
-              <a:rPr sz="1200" b="0">
-                <a:solidFill>
-                  <a:srgbClr val="1C1C1E"/>
-                </a:solidFill>
-                <a:latin typeface="맑은 고딕"/>
-                <a:ea typeface="맑은 고딕"/>
-              </a:rPr>
-              <a:t>현행 지정은 공표된 판정식대로 실제 작동하는가?</a:t>
-            </a:r>
-          </a:p>
-          <a:p>
-            <a:pPr>
-              <a:lnSpc>
-                <a:spcPct val="114000"/>
-              </a:lnSpc>
-              <a:spcAft>
-                <a:spcPts val="200"/>
-              </a:spcAft>
-            </a:pPr>
-            <a:r>
-              <a:rPr sz="1200" b="0">
-                <a:solidFill>
-                  <a:srgbClr val="1C1C1E"/>
-                </a:solidFill>
-                <a:latin typeface="맑은 고딕"/>
-                <a:ea typeface="맑은 고딕"/>
-              </a:rPr>
-              <a:t>공급(관내 인프라) 변수는 판정에 반영되는가?</a:t>
-            </a:r>
-          </a:p>
-        </p:txBody>
-      </p:sp>
-      <p:sp>
-        <p:nvSpPr>
-          <p:cNvPr id="11" name="Rounded Rectangle 10"/>
+                <a:spcPts val="0"/>
+              </a:spcAft>
+            </a:pPr>
+            <a:r>
+              <a:rPr sz="850" b="0">
+                <a:solidFill>
+                  <a:srgbClr val="B2B5B9"/>
+                </a:solidFill>
+                <a:latin typeface="맑은 고딕"/>
+                <a:ea typeface="맑은 고딕"/>
+              </a:rPr>
+              <a:t>2026 명지대학교 창의적 SW프로그램 경진대회 · 빅데이터 분석 — 데이터 분석 계획서</a:t>
+            </a:r>
+          </a:p>
+        </p:txBody>
+      </p:sp>
+      <p:sp>
+        <p:nvSpPr>
+          <p:cNvPr id="8" name="Rounded Rectangle 7"/>
           <p:cNvSpPr/>
           <p:nvPr/>
         </p:nvSpPr>
         <p:spPr>
           <a:xfrm>
-            <a:off x="6263640" y="1371600"/>
+            <a:off x="502920" y="1371600"/>
             <a:ext cx="5532120" cy="1737360"/>
           </a:xfrm>
           <a:prstGeom prst="roundRect">
@@ -10531,13 +12357,13 @@
       </p:sp>
       <p:sp>
         <p:nvSpPr>
-          <p:cNvPr id="12" name="Rounded Rectangle 11"/>
+          <p:cNvPr id="9" name="Rounded Rectangle 8"/>
           <p:cNvSpPr/>
           <p:nvPr/>
         </p:nvSpPr>
         <p:spPr>
           <a:xfrm>
-            <a:off x="6281927" y="1600200"/>
+            <a:off x="521208" y="1600200"/>
             <a:ext cx="82296" cy="1280160"/>
           </a:xfrm>
           <a:prstGeom prst="roundRect">
@@ -10591,13 +12417,13 @@
       </p:sp>
       <p:sp>
         <p:nvSpPr>
-          <p:cNvPr id="13" name="TextBox 12"/>
+          <p:cNvPr id="10" name="TextBox 9"/>
           <p:cNvSpPr txBox="1"/>
           <p:nvPr/>
         </p:nvSpPr>
         <p:spPr>
           <a:xfrm>
-            <a:off x="6583679" y="1536192"/>
+            <a:off x="822960" y="1536192"/>
             <a:ext cx="5074920" cy="1463040"/>
           </a:xfrm>
           <a:prstGeom prst="rect">
@@ -10627,7 +12453,7 @@
                 <a:latin typeface="맑은 고딕"/>
                 <a:ea typeface="맑은 고딕"/>
               </a:rPr>
-              <a:t>RQ2 · 사각지대 탐지</a:t>
+              <a:t>RQ1 · 지정의 검증</a:t>
             </a:r>
           </a:p>
           <a:p>
@@ -10647,7 +12473,7 @@
                 <a:latin typeface="맑은 고딕"/>
                 <a:ea typeface="맑은 고딕"/>
               </a:rPr>
-              <a:t>판정식이 구조적으로 놓치는 지역이 실재하는가?</a:t>
+              <a:t>현행 지정은 공표된 판정식대로 실제 작동하는가?</a:t>
             </a:r>
           </a:p>
           <a:p>
@@ -10667,20 +12493,20 @@
                 <a:latin typeface="맑은 고딕"/>
                 <a:ea typeface="맑은 고딕"/>
               </a:rPr>
-              <a:t>(거리 기준은 통과하지만 관내 공급이 소멸한 지역)</a:t>
-            </a:r>
-          </a:p>
-        </p:txBody>
-      </p:sp>
-      <p:sp>
-        <p:nvSpPr>
-          <p:cNvPr id="14" name="Rounded Rectangle 13"/>
+              <a:t>공급(관내 인프라) 변수는 판정에 반영되는가?</a:t>
+            </a:r>
+          </a:p>
+        </p:txBody>
+      </p:sp>
+      <p:sp>
+        <p:nvSpPr>
+          <p:cNvPr id="11" name="Rounded Rectangle 10"/>
           <p:cNvSpPr/>
           <p:nvPr/>
         </p:nvSpPr>
         <p:spPr>
           <a:xfrm>
-            <a:off x="502920" y="3337560"/>
+            <a:off x="6263640" y="1371600"/>
             <a:ext cx="5532120" cy="1737360"/>
           </a:xfrm>
           <a:prstGeom prst="roundRect">
@@ -10728,13 +12554,13 @@
       </p:sp>
       <p:sp>
         <p:nvSpPr>
-          <p:cNvPr id="15" name="Rounded Rectangle 14"/>
+          <p:cNvPr id="12" name="Rounded Rectangle 11"/>
           <p:cNvSpPr/>
           <p:nvPr/>
         </p:nvSpPr>
         <p:spPr>
           <a:xfrm>
-            <a:off x="521208" y="3566160"/>
+            <a:off x="6281927" y="1600200"/>
             <a:ext cx="82296" cy="1280160"/>
           </a:xfrm>
           <a:prstGeom prst="roundRect">
@@ -10788,13 +12614,13 @@
       </p:sp>
       <p:sp>
         <p:nvSpPr>
-          <p:cNvPr id="16" name="TextBox 15"/>
+          <p:cNvPr id="13" name="TextBox 12"/>
           <p:cNvSpPr txBox="1"/>
           <p:nvPr/>
         </p:nvSpPr>
         <p:spPr>
           <a:xfrm>
-            <a:off x="822960" y="3502152"/>
+            <a:off x="6583679" y="1536192"/>
             <a:ext cx="5074920" cy="1463040"/>
           </a:xfrm>
           <a:prstGeom prst="rect">
@@ -10824,7 +12650,7 @@
                 <a:latin typeface="맑은 고딕"/>
                 <a:ea typeface="맑은 고딕"/>
               </a:rPr>
-              <a:t>RQ3 · 배분의 진단</a:t>
+              <a:t>RQ2 · 사각지대 탐지</a:t>
             </a:r>
           </a:p>
           <a:p>
@@ -10844,7 +12670,7 @@
                 <a:latin typeface="맑은 고딕"/>
                 <a:ea typeface="맑은 고딕"/>
               </a:rPr>
-              <a:t>지정 이후의 지원 배분은 공개 지표로 설명되는가?</a:t>
+              <a:t>판정식이 구조적으로 놓치는 지역이 실재하는가?</a:t>
             </a:r>
           </a:p>
           <a:p>
@@ -10864,20 +12690,20 @@
                 <a:latin typeface="맑은 고딕"/>
                 <a:ea typeface="맑은 고딕"/>
               </a:rPr>
-              <a:t>등급·취약도·수요 중 무엇이 선정을 갈랐는가?</a:t>
-            </a:r>
-          </a:p>
-        </p:txBody>
-      </p:sp>
-      <p:sp>
-        <p:nvSpPr>
-          <p:cNvPr id="17" name="Rounded Rectangle 16"/>
+              <a:t>(거리 기준은 통과하지만 관내 공급이 소멸한 지역)</a:t>
+            </a:r>
+          </a:p>
+        </p:txBody>
+      </p:sp>
+      <p:sp>
+        <p:nvSpPr>
+          <p:cNvPr id="14" name="Rounded Rectangle 13"/>
           <p:cNvSpPr/>
           <p:nvPr/>
         </p:nvSpPr>
         <p:spPr>
           <a:xfrm>
-            <a:off x="6263640" y="3337560"/>
+            <a:off x="502920" y="3337560"/>
             <a:ext cx="5532120" cy="1737360"/>
           </a:xfrm>
           <a:prstGeom prst="roundRect">
@@ -10925,13 +12751,13 @@
       </p:sp>
       <p:sp>
         <p:nvSpPr>
-          <p:cNvPr id="18" name="Rounded Rectangle 17"/>
+          <p:cNvPr id="15" name="Rounded Rectangle 14"/>
           <p:cNvSpPr/>
           <p:nvPr/>
         </p:nvSpPr>
         <p:spPr>
           <a:xfrm>
-            <a:off x="6281927" y="3566160"/>
+            <a:off x="521208" y="3566160"/>
             <a:ext cx="82296" cy="1280160"/>
           </a:xfrm>
           <a:prstGeom prst="roundRect">
@@ -10985,13 +12811,13 @@
       </p:sp>
       <p:sp>
         <p:nvSpPr>
-          <p:cNvPr id="19" name="TextBox 18"/>
+          <p:cNvPr id="16" name="TextBox 15"/>
           <p:cNvSpPr txBox="1"/>
           <p:nvPr/>
         </p:nvSpPr>
         <p:spPr>
           <a:xfrm>
-            <a:off x="6583679" y="3502152"/>
+            <a:off x="822960" y="3502152"/>
             <a:ext cx="5074920" cy="1463040"/>
           </a:xfrm>
           <a:prstGeom prst="rect">
@@ -11021,7 +12847,7 @@
                 <a:latin typeface="맑은 고딕"/>
                 <a:ea typeface="맑은 고딕"/>
               </a:rPr>
-              <a:t>RQ4 · 처방과 대조</a:t>
+              <a:t>RQ3 · 배분의 진단</a:t>
             </a:r>
           </a:p>
           <a:p>
@@ -11041,7 +12867,7 @@
                 <a:latin typeface="맑은 고딕"/>
                 <a:ea typeface="맑은 고딕"/>
               </a:rPr>
-              <a:t>정부가 이미 정한 기준만 조합해 배분 규칙을 만들면</a:t>
+              <a:t>지정 이후의 지원 배분은 공개 지표로 설명되는가?</a:t>
             </a:r>
           </a:p>
           <a:p>
@@ -11061,113 +12887,42 @@
                 <a:latin typeface="맑은 고딕"/>
                 <a:ea typeface="맑은 고딕"/>
               </a:rPr>
-              <a:t>현행 배분과 어디가 어긋나는가?</a:t>
-            </a:r>
-          </a:p>
-        </p:txBody>
-      </p:sp>
-      <p:sp>
-        <p:nvSpPr>
-          <p:cNvPr id="20" name="TextBox 19"/>
-          <p:cNvSpPr txBox="1"/>
-          <p:nvPr/>
-        </p:nvSpPr>
-        <p:spPr>
-          <a:xfrm>
-            <a:off x="502920" y="5440680"/>
-            <a:ext cx="11247120" cy="822960"/>
-          </a:xfrm>
-          <a:prstGeom prst="rect">
-            <a:avLst/>
-          </a:prstGeom>
-          <a:noFill/>
-        </p:spPr>
-        <p:txBody>
-          <a:bodyPr wrap="square" anchor="t">
-            <a:spAutoFit/>
-          </a:bodyPr>
-          <a:lstStyle/>
-          <a:p>
-            <a:pPr>
-              <a:lnSpc>
-                <a:spcPct val="114000"/>
-              </a:lnSpc>
-              <a:spcAft>
-                <a:spcPts val="300"/>
-              </a:spcAft>
-            </a:pPr>
-            <a:r>
-              <a:rPr sz="1250" b="1">
-                <a:solidFill>
-                  <a:srgbClr val="1C1C1E"/>
-                </a:solidFill>
-                <a:latin typeface="맑은 고딕"/>
-                <a:ea typeface="맑은 고딕"/>
-              </a:rPr>
-              <a:t>RQ1·2는 "지정 감사", RQ3·4는 "배분 감사·처방"으로 묶여 제도 파이프라인 전체를 관통한다.</a:t>
-            </a:r>
-          </a:p>
-          <a:p>
-            <a:pPr>
-              <a:lnSpc>
-                <a:spcPct val="114000"/>
-              </a:lnSpc>
-              <a:spcAft>
-                <a:spcPts val="0"/>
-              </a:spcAft>
-            </a:pPr>
-            <a:r>
-              <a:rPr sz="1200" b="0">
-                <a:solidFill>
-                  <a:srgbClr val="767A7F"/>
-                </a:solidFill>
-                <a:latin typeface="맑은 고딕"/>
-                <a:ea typeface="맑은 고딕"/>
-              </a:rPr>
-              <a:t>각 질문은 판단 기준을 분석 전에 명시해(사전 등록 성격) 사후 해석 시비를 차단한다.</a:t>
-            </a:r>
-          </a:p>
-        </p:txBody>
-      </p:sp>
-    </p:spTree>
-  </p:cSld>
-  <p:clrMapOvr>
-    <a:masterClrMapping/>
-  </p:clrMapOvr>
-</p:sld>
-</file>
-
-<file path=ppt/slides/slide5.xml><?xml version="1.0" encoding="utf-8"?>
-<p:sld xmlns:a="http://schemas.openxmlformats.org/drawingml/2006/main" xmlns:p="http://schemas.openxmlformats.org/presentationml/2006/main" xmlns:r="http://schemas.openxmlformats.org/officeDocument/2006/relationships">
-  <p:cSld>
-    <p:spTree>
-      <p:nvGrpSpPr>
-        <p:cNvPr id="1" name=""/>
-        <p:cNvGrpSpPr/>
-        <p:nvPr/>
-      </p:nvGrpSpPr>
-      <p:grpSpPr/>
-      <p:sp>
-        <p:nvSpPr>
-          <p:cNvPr id="2" name="Rectangle 1"/>
+              <a:t>등급·취약도·수요 중 무엇이 선정을 갈랐는가?</a:t>
+            </a:r>
+          </a:p>
+        </p:txBody>
+      </p:sp>
+      <p:sp>
+        <p:nvSpPr>
+          <p:cNvPr id="17" name="Rounded Rectangle 16"/>
           <p:cNvSpPr/>
           <p:nvPr/>
         </p:nvSpPr>
         <p:spPr>
           <a:xfrm>
-            <a:off x="0" y="0"/>
-            <a:ext cx="12191695" cy="6858000"/>
-          </a:xfrm>
-          <a:prstGeom prst="rect">
-            <a:avLst/>
+            <a:off x="6263640" y="3337560"/>
+            <a:ext cx="5532120" cy="1737360"/>
+          </a:xfrm>
+          <a:prstGeom prst="roundRect">
+            <a:avLst>
+              <a:gd name="adj" fmla="val 4736"/>
+            </a:avLst>
           </a:prstGeom>
           <a:solidFill>
             <a:srgbClr val="FFFFFF"/>
           </a:solidFill>
-          <a:ln>
-            <a:noFill/>
+          <a:ln w="12700">
+            <a:solidFill>
+              <a:srgbClr val="E4E6E9"/>
+            </a:solidFill>
           </a:ln>
-          <a:effectLst/>
+          <a:effectLst>
+            <a:outerShdw blurRad="182880" dist="64008" dir="5400000" rotWithShape="0">
+              <a:srgbClr val="000000">
+                <a:alpha val="30000"/>
+              </a:srgbClr>
+            </a:outerShdw>
+          </a:effectLst>
         </p:spPr>
         <p:style>
           <a:lnRef idx="1">
@@ -11193,14 +12948,14 @@
       </p:sp>
       <p:sp>
         <p:nvSpPr>
-          <p:cNvPr id="3" name="Rounded Rectangle 2"/>
+          <p:cNvPr id="18" name="Rounded Rectangle 17"/>
           <p:cNvSpPr/>
           <p:nvPr/>
         </p:nvSpPr>
         <p:spPr>
           <a:xfrm>
-            <a:off x="502920" y="475488"/>
-            <a:ext cx="310896" cy="310896"/>
+            <a:off x="6281927" y="3566160"/>
+            <a:ext cx="82296" cy="1280160"/>
           </a:xfrm>
           <a:prstGeom prst="roundRect">
             <a:avLst>
@@ -11253,6 +13008,274 @@
       </p:sp>
       <p:sp>
         <p:nvSpPr>
+          <p:cNvPr id="19" name="TextBox 18"/>
+          <p:cNvSpPr txBox="1"/>
+          <p:nvPr/>
+        </p:nvSpPr>
+        <p:spPr>
+          <a:xfrm>
+            <a:off x="6583679" y="3502152"/>
+            <a:ext cx="5074920" cy="1463040"/>
+          </a:xfrm>
+          <a:prstGeom prst="rect">
+            <a:avLst/>
+          </a:prstGeom>
+          <a:noFill/>
+        </p:spPr>
+        <p:txBody>
+          <a:bodyPr wrap="square" anchor="t">
+            <a:spAutoFit/>
+          </a:bodyPr>
+          <a:lstStyle/>
+          <a:p>
+            <a:pPr>
+              <a:lnSpc>
+                <a:spcPct val="114000"/>
+              </a:lnSpc>
+              <a:spcAft>
+                <a:spcPts val="500"/>
+              </a:spcAft>
+            </a:pPr>
+            <a:r>
+              <a:rPr sz="1500" b="1">
+                <a:solidFill>
+                  <a:srgbClr val="33393F"/>
+                </a:solidFill>
+                <a:latin typeface="맑은 고딕"/>
+                <a:ea typeface="맑은 고딕"/>
+              </a:rPr>
+              <a:t>RQ4 · 처방과 대조</a:t>
+            </a:r>
+          </a:p>
+          <a:p>
+            <a:pPr>
+              <a:lnSpc>
+                <a:spcPct val="114000"/>
+              </a:lnSpc>
+              <a:spcAft>
+                <a:spcPts val="200"/>
+              </a:spcAft>
+            </a:pPr>
+            <a:r>
+              <a:rPr sz="1200" b="0">
+                <a:solidFill>
+                  <a:srgbClr val="1C1C1E"/>
+                </a:solidFill>
+                <a:latin typeface="맑은 고딕"/>
+                <a:ea typeface="맑은 고딕"/>
+              </a:rPr>
+              <a:t>정부가 이미 정한 기준만 조합해 배분 규칙을 만들면</a:t>
+            </a:r>
+          </a:p>
+          <a:p>
+            <a:pPr>
+              <a:lnSpc>
+                <a:spcPct val="114000"/>
+              </a:lnSpc>
+              <a:spcAft>
+                <a:spcPts val="200"/>
+              </a:spcAft>
+            </a:pPr>
+            <a:r>
+              <a:rPr sz="1200" b="0">
+                <a:solidFill>
+                  <a:srgbClr val="1C1C1E"/>
+                </a:solidFill>
+                <a:latin typeface="맑은 고딕"/>
+                <a:ea typeface="맑은 고딕"/>
+              </a:rPr>
+              <a:t>현행 배분과 어디가 어긋나는가?</a:t>
+            </a:r>
+          </a:p>
+        </p:txBody>
+      </p:sp>
+      <p:sp>
+        <p:nvSpPr>
+          <p:cNvPr id="20" name="TextBox 19"/>
+          <p:cNvSpPr txBox="1"/>
+          <p:nvPr/>
+        </p:nvSpPr>
+        <p:spPr>
+          <a:xfrm>
+            <a:off x="502920" y="5440680"/>
+            <a:ext cx="11247120" cy="822960"/>
+          </a:xfrm>
+          <a:prstGeom prst="rect">
+            <a:avLst/>
+          </a:prstGeom>
+          <a:noFill/>
+        </p:spPr>
+        <p:txBody>
+          <a:bodyPr wrap="square" anchor="t">
+            <a:spAutoFit/>
+          </a:bodyPr>
+          <a:lstStyle/>
+          <a:p>
+            <a:pPr>
+              <a:lnSpc>
+                <a:spcPct val="114000"/>
+              </a:lnSpc>
+              <a:spcAft>
+                <a:spcPts val="300"/>
+              </a:spcAft>
+            </a:pPr>
+            <a:r>
+              <a:rPr sz="1250" b="1">
+                <a:solidFill>
+                  <a:srgbClr val="1C1C1E"/>
+                </a:solidFill>
+                <a:latin typeface="맑은 고딕"/>
+                <a:ea typeface="맑은 고딕"/>
+              </a:rPr>
+              <a:t>RQ1·2는 지정을, RQ3·4는 배분을 본다. 앞의 둘로 "규칙이 무엇을 보는가"를 확정해야 뒤의 둘에서 "그 규칙대로 나눠지고 있는가"를 물을 수 있다.</a:t>
+            </a:r>
+          </a:p>
+          <a:p>
+            <a:pPr>
+              <a:lnSpc>
+                <a:spcPct val="114000"/>
+              </a:lnSpc>
+              <a:spcAft>
+                <a:spcPts val="0"/>
+              </a:spcAft>
+            </a:pPr>
+            <a:r>
+              <a:rPr sz="1200" b="0">
+                <a:solidFill>
+                  <a:srgbClr val="767A7F"/>
+                </a:solidFill>
+                <a:latin typeface="맑은 고딕"/>
+                <a:ea typeface="맑은 고딕"/>
+              </a:rPr>
+              <a:t>무엇을 "재현 성공"으로 볼지, 무엇을 "사각지대"로 볼지는 분석을 시작하기 전에 정해 둔다 — 결과를 보고 기준을 맞추지 않기 위해서다.</a:t>
+            </a:r>
+          </a:p>
+        </p:txBody>
+      </p:sp>
+    </p:spTree>
+  </p:cSld>
+  <p:clrMapOvr>
+    <a:masterClrMapping/>
+  </p:clrMapOvr>
+</p:sld>
+</file>
+
+<file path=ppt/slides/slide6.xml><?xml version="1.0" encoding="utf-8"?>
+<p:sld xmlns:a="http://schemas.openxmlformats.org/drawingml/2006/main" xmlns:p="http://schemas.openxmlformats.org/presentationml/2006/main" xmlns:r="http://schemas.openxmlformats.org/officeDocument/2006/relationships">
+  <p:cSld>
+    <p:spTree>
+      <p:nvGrpSpPr>
+        <p:cNvPr id="1" name=""/>
+        <p:cNvGrpSpPr/>
+        <p:nvPr/>
+      </p:nvGrpSpPr>
+      <p:grpSpPr/>
+      <p:sp>
+        <p:nvSpPr>
+          <p:cNvPr id="2" name="Rectangle 1"/>
+          <p:cNvSpPr/>
+          <p:nvPr/>
+        </p:nvSpPr>
+        <p:spPr>
+          <a:xfrm>
+            <a:off x="0" y="0"/>
+            <a:ext cx="12191695" cy="6858000"/>
+          </a:xfrm>
+          <a:prstGeom prst="rect">
+            <a:avLst/>
+          </a:prstGeom>
+          <a:solidFill>
+            <a:srgbClr val="FFFFFF"/>
+          </a:solidFill>
+          <a:ln>
+            <a:noFill/>
+          </a:ln>
+          <a:effectLst/>
+        </p:spPr>
+        <p:style>
+          <a:lnRef idx="1">
+            <a:schemeClr val="accent1"/>
+          </a:lnRef>
+          <a:fillRef idx="3">
+            <a:schemeClr val="accent1"/>
+          </a:fillRef>
+          <a:effectRef idx="2">
+            <a:schemeClr val="accent1"/>
+          </a:effectRef>
+          <a:fontRef idx="minor">
+            <a:schemeClr val="lt1"/>
+          </a:fontRef>
+        </p:style>
+        <p:txBody>
+          <a:bodyPr rtlCol="0" anchor="ctr"/>
+          <a:lstStyle/>
+          <a:p>
+            <a:pPr algn="ctr"/>
+          </a:p>
+        </p:txBody>
+      </p:sp>
+      <p:sp>
+        <p:nvSpPr>
+          <p:cNvPr id="3" name="Rounded Rectangle 2"/>
+          <p:cNvSpPr/>
+          <p:nvPr/>
+        </p:nvSpPr>
+        <p:spPr>
+          <a:xfrm>
+            <a:off x="502920" y="475488"/>
+            <a:ext cx="310896" cy="310896"/>
+          </a:xfrm>
+          <a:prstGeom prst="roundRect">
+            <a:avLst>
+              <a:gd name="adj" fmla="val 50000"/>
+            </a:avLst>
+          </a:prstGeom>
+          <a:gradFill rotWithShape="1">
+            <a:gsLst>
+              <a:gs pos="0">
+                <a:srgbClr val="3A3F45"/>
+              </a:gs>
+              <a:gs pos="100000">
+                <a:srgbClr val="73787E"/>
+              </a:gs>
+            </a:gsLst>
+            <a:lin scaled="0" ang="18900000"/>
+          </a:gradFill>
+          <a:ln>
+            <a:noFill/>
+          </a:ln>
+          <a:effectLst>
+            <a:outerShdw blurRad="109728" dist="36576" dir="5400000" rotWithShape="0">
+              <a:srgbClr val="000000">
+                <a:alpha val="35000"/>
+              </a:srgbClr>
+            </a:outerShdw>
+          </a:effectLst>
+        </p:spPr>
+        <p:style>
+          <a:lnRef idx="1">
+            <a:schemeClr val="accent1"/>
+          </a:lnRef>
+          <a:fillRef idx="3">
+            <a:schemeClr val="accent1"/>
+          </a:fillRef>
+          <a:effectRef idx="2">
+            <a:schemeClr val="accent1"/>
+          </a:effectRef>
+          <a:fontRef idx="minor">
+            <a:schemeClr val="lt1"/>
+          </a:fontRef>
+        </p:style>
+        <p:txBody>
+          <a:bodyPr rtlCol="0" anchor="ctr"/>
+          <a:lstStyle/>
+          <a:p>
+            <a:pPr algn="ctr"/>
+          </a:p>
+        </p:txBody>
+      </p:sp>
+      <p:sp>
+        <p:nvSpPr>
           <p:cNvPr id="4" name="TextBox 3"/>
           <p:cNvSpPr txBox="1"/>
           <p:nvPr/>
@@ -11384,7 +13407,7 @@
                 <a:latin typeface="맑은 고딕"/>
                 <a:ea typeface="맑은 고딕"/>
               </a:rPr>
-              <a:t>05</a:t>
+              <a:t>06</a:t>
             </a:r>
           </a:p>
         </p:txBody>
@@ -12075,7 +14098,7 @@
 </p:sld>
 </file>
 
-<file path=ppt/slides/slide6.xml><?xml version="1.0" encoding="utf-8"?>
+<file path=ppt/slides/slide7.xml><?xml version="1.0" encoding="utf-8"?>
 <p:sld xmlns:a="http://schemas.openxmlformats.org/drawingml/2006/main" xmlns:p="http://schemas.openxmlformats.org/presentationml/2006/main" xmlns:r="http://schemas.openxmlformats.org/officeDocument/2006/relationships">
   <p:cSld>
     <p:spTree>
@@ -12322,7 +14345,7 @@
                 <a:latin typeface="맑은 고딕"/>
                 <a:ea typeface="맑은 고딕"/>
               </a:rPr>
-              <a:t>06</a:t>
+              <a:t>07</a:t>
             </a:r>
           </a:p>
         </p:txBody>
@@ -13126,7 +15149,7 @@
 </p:sld>
 </file>
 
-<file path=ppt/slides/slide7.xml><?xml version="1.0" encoding="utf-8"?>
+<file path=ppt/slides/slide8.xml><?xml version="1.0" encoding="utf-8"?>
 <p:sld xmlns:a="http://schemas.openxmlformats.org/drawingml/2006/main" xmlns:p="http://schemas.openxmlformats.org/presentationml/2006/main" xmlns:r="http://schemas.openxmlformats.org/officeDocument/2006/relationships">
   <p:cSld>
     <p:spTree>
@@ -13373,7 +15396,7 @@
                 <a:latin typeface="맑은 고딕"/>
                 <a:ea typeface="맑은 고딕"/>
               </a:rPr>
-              <a:t>07</a:t>
+              <a:t>08</a:t>
             </a:r>
           </a:p>
         </p:txBody>
@@ -14237,7 +16260,7 @@
 </p:sld>
 </file>
 
-<file path=ppt/slides/slide8.xml><?xml version="1.0" encoding="utf-8"?>
+<file path=ppt/slides/slide9.xml><?xml version="1.0" encoding="utf-8"?>
 <p:sld xmlns:a="http://schemas.openxmlformats.org/drawingml/2006/main" xmlns:p="http://schemas.openxmlformats.org/presentationml/2006/main" xmlns:r="http://schemas.openxmlformats.org/officeDocument/2006/relationships">
   <p:cSld>
     <p:spTree>
@@ -14484,7 +16507,7 @@
                 <a:latin typeface="맑은 고딕"/>
                 <a:ea typeface="맑은 고딕"/>
               </a:rPr>
-              <a:t>08</a:t>
+              <a:t>09</a:t>
             </a:r>
           </a:p>
         </p:txBody>
@@ -15071,900 +17094,6 @@
 </p:sld>
 </file>
 
-<file path=ppt/slides/slide9.xml><?xml version="1.0" encoding="utf-8"?>
-<p:sld xmlns:a="http://schemas.openxmlformats.org/drawingml/2006/main" xmlns:p="http://schemas.openxmlformats.org/presentationml/2006/main" xmlns:r="http://schemas.openxmlformats.org/officeDocument/2006/relationships">
-  <p:cSld>
-    <p:spTree>
-      <p:nvGrpSpPr>
-        <p:cNvPr id="1" name=""/>
-        <p:cNvGrpSpPr/>
-        <p:nvPr/>
-      </p:nvGrpSpPr>
-      <p:grpSpPr/>
-      <p:sp>
-        <p:nvSpPr>
-          <p:cNvPr id="2" name="Rectangle 1"/>
-          <p:cNvSpPr/>
-          <p:nvPr/>
-        </p:nvSpPr>
-        <p:spPr>
-          <a:xfrm>
-            <a:off x="0" y="0"/>
-            <a:ext cx="12191695" cy="6858000"/>
-          </a:xfrm>
-          <a:prstGeom prst="rect">
-            <a:avLst/>
-          </a:prstGeom>
-          <a:solidFill>
-            <a:srgbClr val="FFFFFF"/>
-          </a:solidFill>
-          <a:ln>
-            <a:noFill/>
-          </a:ln>
-          <a:effectLst/>
-        </p:spPr>
-        <p:style>
-          <a:lnRef idx="1">
-            <a:schemeClr val="accent1"/>
-          </a:lnRef>
-          <a:fillRef idx="3">
-            <a:schemeClr val="accent1"/>
-          </a:fillRef>
-          <a:effectRef idx="2">
-            <a:schemeClr val="accent1"/>
-          </a:effectRef>
-          <a:fontRef idx="minor">
-            <a:schemeClr val="lt1"/>
-          </a:fontRef>
-        </p:style>
-        <p:txBody>
-          <a:bodyPr rtlCol="0" anchor="ctr"/>
-          <a:lstStyle/>
-          <a:p>
-            <a:pPr algn="ctr"/>
-          </a:p>
-        </p:txBody>
-      </p:sp>
-      <p:sp>
-        <p:nvSpPr>
-          <p:cNvPr id="3" name="Rounded Rectangle 2"/>
-          <p:cNvSpPr/>
-          <p:nvPr/>
-        </p:nvSpPr>
-        <p:spPr>
-          <a:xfrm>
-            <a:off x="502920" y="475488"/>
-            <a:ext cx="310896" cy="310896"/>
-          </a:xfrm>
-          <a:prstGeom prst="roundRect">
-            <a:avLst>
-              <a:gd name="adj" fmla="val 50000"/>
-            </a:avLst>
-          </a:prstGeom>
-          <a:gradFill rotWithShape="1">
-            <a:gsLst>
-              <a:gs pos="0">
-                <a:srgbClr val="3A3F45"/>
-              </a:gs>
-              <a:gs pos="100000">
-                <a:srgbClr val="73787E"/>
-              </a:gs>
-            </a:gsLst>
-            <a:lin scaled="0" ang="18900000"/>
-          </a:gradFill>
-          <a:ln>
-            <a:noFill/>
-          </a:ln>
-          <a:effectLst>
-            <a:outerShdw blurRad="109728" dist="36576" dir="5400000" rotWithShape="0">
-              <a:srgbClr val="000000">
-                <a:alpha val="35000"/>
-              </a:srgbClr>
-            </a:outerShdw>
-          </a:effectLst>
-        </p:spPr>
-        <p:style>
-          <a:lnRef idx="1">
-            <a:schemeClr val="accent1"/>
-          </a:lnRef>
-          <a:fillRef idx="3">
-            <a:schemeClr val="accent1"/>
-          </a:fillRef>
-          <a:effectRef idx="2">
-            <a:schemeClr val="accent1"/>
-          </a:effectRef>
-          <a:fontRef idx="minor">
-            <a:schemeClr val="lt1"/>
-          </a:fontRef>
-        </p:style>
-        <p:txBody>
-          <a:bodyPr rtlCol="0" anchor="ctr"/>
-          <a:lstStyle/>
-          <a:p>
-            <a:pPr algn="ctr"/>
-          </a:p>
-        </p:txBody>
-      </p:sp>
-      <p:sp>
-        <p:nvSpPr>
-          <p:cNvPr id="4" name="TextBox 3"/>
-          <p:cNvSpPr txBox="1"/>
-          <p:nvPr/>
-        </p:nvSpPr>
-        <p:spPr>
-          <a:xfrm>
-            <a:off x="960120" y="274320"/>
-            <a:ext cx="9692640" cy="685800"/>
-          </a:xfrm>
-          <a:prstGeom prst="rect">
-            <a:avLst/>
-          </a:prstGeom>
-          <a:noFill/>
-        </p:spPr>
-        <p:txBody>
-          <a:bodyPr wrap="square" anchor="ctr">
-            <a:spAutoFit/>
-          </a:bodyPr>
-          <a:lstStyle/>
-          <a:p>
-            <a:pPr>
-              <a:lnSpc>
-                <a:spcPct val="114000"/>
-              </a:lnSpc>
-              <a:spcAft>
-                <a:spcPts val="0"/>
-              </a:spcAft>
-            </a:pPr>
-            <a:r>
-              <a:rPr sz="2150" b="1">
-                <a:solidFill>
-                  <a:srgbClr val="1C1C1E"/>
-                </a:solidFill>
-                <a:latin typeface="맑은 고딕"/>
-                <a:ea typeface="맑은 고딕"/>
-              </a:rPr>
-              <a:t>분석 설계 ① 지정 감사 (RQ1·RQ2)</a:t>
-            </a:r>
-          </a:p>
-        </p:txBody>
-      </p:sp>
-      <p:sp>
-        <p:nvSpPr>
-          <p:cNvPr id="5" name="Rectangle 4"/>
-          <p:cNvSpPr/>
-          <p:nvPr/>
-        </p:nvSpPr>
-        <p:spPr>
-          <a:xfrm>
-            <a:off x="521207" y="969264"/>
-            <a:ext cx="4206240" cy="27432"/>
-          </a:xfrm>
-          <a:prstGeom prst="rect">
-            <a:avLst/>
-          </a:prstGeom>
-          <a:gradFill rotWithShape="1">
-            <a:gsLst>
-              <a:gs pos="0">
-                <a:srgbClr val="2A2E33"/>
-              </a:gs>
-              <a:gs pos="100000">
-                <a:srgbClr val="FFFFFF"/>
-              </a:gs>
-            </a:gsLst>
-            <a:lin scaled="0" ang="0"/>
-          </a:gradFill>
-          <a:ln>
-            <a:noFill/>
-          </a:ln>
-          <a:effectLst/>
-        </p:spPr>
-        <p:style>
-          <a:lnRef idx="1">
-            <a:schemeClr val="accent1"/>
-          </a:lnRef>
-          <a:fillRef idx="3">
-            <a:schemeClr val="accent1"/>
-          </a:fillRef>
-          <a:effectRef idx="2">
-            <a:schemeClr val="accent1"/>
-          </a:effectRef>
-          <a:fontRef idx="minor">
-            <a:schemeClr val="lt1"/>
-          </a:fontRef>
-        </p:style>
-        <p:txBody>
-          <a:bodyPr rtlCol="0" anchor="ctr"/>
-          <a:lstStyle/>
-          <a:p>
-            <a:pPr algn="ctr"/>
-          </a:p>
-        </p:txBody>
-      </p:sp>
-      <p:sp>
-        <p:nvSpPr>
-          <p:cNvPr id="6" name="TextBox 5"/>
-          <p:cNvSpPr txBox="1"/>
-          <p:nvPr/>
-        </p:nvSpPr>
-        <p:spPr>
-          <a:xfrm>
-            <a:off x="10835640" y="164592"/>
-            <a:ext cx="1188720" cy="777240"/>
-          </a:xfrm>
-          <a:prstGeom prst="rect">
-            <a:avLst/>
-          </a:prstGeom>
-          <a:noFill/>
-        </p:spPr>
-        <p:txBody>
-          <a:bodyPr wrap="square" anchor="t">
-            <a:spAutoFit/>
-          </a:bodyPr>
-          <a:lstStyle/>
-          <a:p>
-            <a:pPr>
-              <a:lnSpc>
-                <a:spcPct val="114000"/>
-              </a:lnSpc>
-              <a:spcAft>
-                <a:spcPts val="0"/>
-              </a:spcAft>
-            </a:pPr>
-            <a:r>
-              <a:rPr sz="3000" b="1">
-                <a:solidFill>
-                  <a:srgbClr val="D8DADD"/>
-                </a:solidFill>
-                <a:latin typeface="맑은 고딕"/>
-                <a:ea typeface="맑은 고딕"/>
-              </a:rPr>
-              <a:t>09</a:t>
-            </a:r>
-          </a:p>
-        </p:txBody>
-      </p:sp>
-      <p:sp>
-        <p:nvSpPr>
-          <p:cNvPr id="7" name="TextBox 6"/>
-          <p:cNvSpPr txBox="1"/>
-          <p:nvPr/>
-        </p:nvSpPr>
-        <p:spPr>
-          <a:xfrm>
-            <a:off x="548640" y="1097280"/>
-            <a:ext cx="11155680" cy="384048"/>
-          </a:xfrm>
-          <a:prstGeom prst="rect">
-            <a:avLst/>
-          </a:prstGeom>
-          <a:noFill/>
-        </p:spPr>
-        <p:txBody>
-          <a:bodyPr wrap="square" anchor="t">
-            <a:spAutoFit/>
-          </a:bodyPr>
-          <a:lstStyle/>
-          <a:p>
-            <a:pPr>
-              <a:lnSpc>
-                <a:spcPct val="114000"/>
-              </a:lnSpc>
-              <a:spcAft>
-                <a:spcPts val="0"/>
-              </a:spcAft>
-            </a:pPr>
-            <a:r>
-              <a:rPr sz="1250" b="0">
-                <a:solidFill>
-                  <a:srgbClr val="767A7F"/>
-                </a:solidFill>
-                <a:latin typeface="맑은 고딕"/>
-                <a:ea typeface="맑은 고딕"/>
-              </a:rPr>
-              <a:t>공표된 규칙을 그대로 재계산해 실제와 대조한다</a:t>
-            </a:r>
-          </a:p>
-        </p:txBody>
-      </p:sp>
-      <p:sp>
-        <p:nvSpPr>
-          <p:cNvPr id="8" name="TextBox 7"/>
-          <p:cNvSpPr txBox="1"/>
-          <p:nvPr/>
-        </p:nvSpPr>
-        <p:spPr>
-          <a:xfrm>
-            <a:off x="502920" y="6492240"/>
-            <a:ext cx="11247120" cy="320040"/>
-          </a:xfrm>
-          <a:prstGeom prst="rect">
-            <a:avLst/>
-          </a:prstGeom>
-          <a:noFill/>
-        </p:spPr>
-        <p:txBody>
-          <a:bodyPr wrap="square" anchor="t">
-            <a:spAutoFit/>
-          </a:bodyPr>
-          <a:lstStyle/>
-          <a:p>
-            <a:pPr>
-              <a:lnSpc>
-                <a:spcPct val="114000"/>
-              </a:lnSpc>
-              <a:spcAft>
-                <a:spcPts val="0"/>
-              </a:spcAft>
-            </a:pPr>
-            <a:r>
-              <a:rPr sz="850" b="0">
-                <a:solidFill>
-                  <a:srgbClr val="B2B5B9"/>
-                </a:solidFill>
-                <a:latin typeface="맑은 고딕"/>
-                <a:ea typeface="맑은 고딕"/>
-              </a:rPr>
-              <a:t>2026 명지대학교 창의적 SW프로그램 경진대회 · 빅데이터 분석 — 데이터 분석 계획서</a:t>
-            </a:r>
-          </a:p>
-        </p:txBody>
-      </p:sp>
-      <p:sp>
-        <p:nvSpPr>
-          <p:cNvPr id="9" name="Rounded Rectangle 8"/>
-          <p:cNvSpPr/>
-          <p:nvPr/>
-        </p:nvSpPr>
-        <p:spPr>
-          <a:xfrm>
-            <a:off x="502920" y="1737360"/>
-            <a:ext cx="3611880" cy="2651760"/>
-          </a:xfrm>
-          <a:prstGeom prst="roundRect">
-            <a:avLst>
-              <a:gd name="adj" fmla="val 3103"/>
-            </a:avLst>
-          </a:prstGeom>
-          <a:solidFill>
-            <a:srgbClr val="FFFFFF"/>
-          </a:solidFill>
-          <a:ln w="12700">
-            <a:solidFill>
-              <a:srgbClr val="E4E6E9"/>
-            </a:solidFill>
-          </a:ln>
-          <a:effectLst>
-            <a:outerShdw blurRad="182880" dist="64008" dir="5400000" rotWithShape="0">
-              <a:srgbClr val="000000">
-                <a:alpha val="30000"/>
-              </a:srgbClr>
-            </a:outerShdw>
-          </a:effectLst>
-        </p:spPr>
-        <p:style>
-          <a:lnRef idx="1">
-            <a:schemeClr val="accent1"/>
-          </a:lnRef>
-          <a:fillRef idx="3">
-            <a:schemeClr val="accent1"/>
-          </a:fillRef>
-          <a:effectRef idx="2">
-            <a:schemeClr val="accent1"/>
-          </a:effectRef>
-          <a:fontRef idx="minor">
-            <a:schemeClr val="lt1"/>
-          </a:fontRef>
-        </p:style>
-        <p:txBody>
-          <a:bodyPr rtlCol="0" anchor="ctr"/>
-          <a:lstStyle/>
-          <a:p>
-            <a:pPr algn="ctr"/>
-          </a:p>
-        </p:txBody>
-      </p:sp>
-      <p:sp>
-        <p:nvSpPr>
-          <p:cNvPr id="10" name="TextBox 9"/>
-          <p:cNvSpPr txBox="1"/>
-          <p:nvPr/>
-        </p:nvSpPr>
-        <p:spPr>
-          <a:xfrm>
-            <a:off x="685800" y="1865376"/>
-            <a:ext cx="3246120" cy="2395728"/>
-          </a:xfrm>
-          <a:prstGeom prst="rect">
-            <a:avLst/>
-          </a:prstGeom>
-          <a:noFill/>
-        </p:spPr>
-        <p:txBody>
-          <a:bodyPr wrap="square" anchor="t">
-            <a:spAutoFit/>
-          </a:bodyPr>
-          <a:lstStyle/>
-          <a:p>
-            <a:pPr>
-              <a:lnSpc>
-                <a:spcPct val="114000"/>
-              </a:lnSpc>
-              <a:spcAft>
-                <a:spcPts val="350"/>
-              </a:spcAft>
-            </a:pPr>
-            <a:r>
-              <a:rPr sz="1350" b="1">
-                <a:solidFill>
-                  <a:srgbClr val="33393F"/>
-                </a:solidFill>
-                <a:latin typeface="맑은 고딕"/>
-                <a:ea typeface="맑은 고딕"/>
-              </a:rPr>
-              <a:t>1단계 · 판정식 검증</a:t>
-            </a:r>
-          </a:p>
-          <a:p>
-            <a:pPr marL="160020" indent="-160020">
-              <a:lnSpc>
-                <a:spcPct val="114000"/>
-              </a:lnSpc>
-              <a:spcAft>
-                <a:spcPts val="200"/>
-              </a:spcAft>
-            </a:pPr>
-            <a:r>
-              <a:rPr sz="1100" b="0">
-                <a:solidFill>
-                  <a:srgbClr val="1C1C1E"/>
-                </a:solidFill>
-                <a:latin typeface="맑은 고딕"/>
-                <a:ea typeface="맑은 고딕"/>
-              </a:rPr>
-              <a:t>• 공표 임계값(접근성·TRI 30/30 등)으로 전 지역을 재판정하고 실제 지정 결과와 대조한다</a:t>
-            </a:r>
-          </a:p>
-          <a:p>
-            <a:pPr marL="160020" indent="-160020">
-              <a:lnSpc>
-                <a:spcPct val="114000"/>
-              </a:lnSpc>
-              <a:spcAft>
-                <a:spcPts val="200"/>
-              </a:spcAft>
-            </a:pPr>
-            <a:r>
-              <a:rPr sz="1100" b="0">
-                <a:solidFill>
-                  <a:srgbClr val="1C1C1E"/>
-                </a:solidFill>
-                <a:latin typeface="맑은 고딕"/>
-                <a:ea typeface="맑은 고딕"/>
-              </a:rPr>
-              <a:t>• 일치율과 불일치 사례를 모두 보고한다 — 불일치는 오류가 아니라 행정 층의 증거로 해석할 계획</a:t>
-            </a:r>
-          </a:p>
-        </p:txBody>
-      </p:sp>
-      <p:sp>
-        <p:nvSpPr>
-          <p:cNvPr id="11" name="Rounded Rectangle 10"/>
-          <p:cNvSpPr/>
-          <p:nvPr/>
-        </p:nvSpPr>
-        <p:spPr>
-          <a:xfrm>
-            <a:off x="4343400" y="1737360"/>
-            <a:ext cx="3611880" cy="2651760"/>
-          </a:xfrm>
-          <a:prstGeom prst="roundRect">
-            <a:avLst>
-              <a:gd name="adj" fmla="val 3103"/>
-            </a:avLst>
-          </a:prstGeom>
-          <a:solidFill>
-            <a:srgbClr val="FFFFFF"/>
-          </a:solidFill>
-          <a:ln w="12700">
-            <a:solidFill>
-              <a:srgbClr val="E4E6E9"/>
-            </a:solidFill>
-          </a:ln>
-          <a:effectLst>
-            <a:outerShdw blurRad="182880" dist="64008" dir="5400000" rotWithShape="0">
-              <a:srgbClr val="000000">
-                <a:alpha val="30000"/>
-              </a:srgbClr>
-            </a:outerShdw>
-          </a:effectLst>
-        </p:spPr>
-        <p:style>
-          <a:lnRef idx="1">
-            <a:schemeClr val="accent1"/>
-          </a:lnRef>
-          <a:fillRef idx="3">
-            <a:schemeClr val="accent1"/>
-          </a:fillRef>
-          <a:effectRef idx="2">
-            <a:schemeClr val="accent1"/>
-          </a:effectRef>
-          <a:fontRef idx="minor">
-            <a:schemeClr val="lt1"/>
-          </a:fontRef>
-        </p:style>
-        <p:txBody>
-          <a:bodyPr rtlCol="0" anchor="ctr"/>
-          <a:lstStyle/>
-          <a:p>
-            <a:pPr algn="ctr"/>
-          </a:p>
-        </p:txBody>
-      </p:sp>
-      <p:sp>
-        <p:nvSpPr>
-          <p:cNvPr id="12" name="TextBox 11"/>
-          <p:cNvSpPr txBox="1"/>
-          <p:nvPr/>
-        </p:nvSpPr>
-        <p:spPr>
-          <a:xfrm>
-            <a:off x="4526280" y="1865376"/>
-            <a:ext cx="3246120" cy="2395728"/>
-          </a:xfrm>
-          <a:prstGeom prst="rect">
-            <a:avLst/>
-          </a:prstGeom>
-          <a:noFill/>
-        </p:spPr>
-        <p:txBody>
-          <a:bodyPr wrap="square" anchor="t">
-            <a:spAutoFit/>
-          </a:bodyPr>
-          <a:lstStyle/>
-          <a:p>
-            <a:pPr>
-              <a:lnSpc>
-                <a:spcPct val="114000"/>
-              </a:lnSpc>
-              <a:spcAft>
-                <a:spcPts val="350"/>
-              </a:spcAft>
-            </a:pPr>
-            <a:r>
-              <a:rPr sz="1350" b="1">
-                <a:solidFill>
-                  <a:srgbClr val="33393F"/>
-                </a:solidFill>
-                <a:latin typeface="맑은 고딕"/>
-                <a:ea typeface="맑은 고딕"/>
-              </a:rPr>
-              <a:t>2단계 · 공급 반영 검정</a:t>
-            </a:r>
-          </a:p>
-          <a:p>
-            <a:pPr marL="160020" indent="-160020">
-              <a:lnSpc>
-                <a:spcPct val="114000"/>
-              </a:lnSpc>
-              <a:spcAft>
-                <a:spcPts val="200"/>
-              </a:spcAft>
-            </a:pPr>
-            <a:r>
-              <a:rPr sz="1100" b="0">
-                <a:solidFill>
-                  <a:srgbClr val="1C1C1E"/>
-                </a:solidFill>
-                <a:latin typeface="맑은 고딕"/>
-                <a:ea typeface="맑은 고딕"/>
-              </a:rPr>
-              <a:t>• 로지스틱 회귀(5-겹 교차검증)로 판정을 예측하고, 공급 변수(전문의 수 등)를 추가했을 때 판별력(AUC)이 개선되는지 본다</a:t>
-            </a:r>
-          </a:p>
-          <a:p>
-            <a:pPr marL="160020" indent="-160020">
-              <a:lnSpc>
-                <a:spcPct val="114000"/>
-              </a:lnSpc>
-              <a:spcAft>
-                <a:spcPts val="200"/>
-              </a:spcAft>
-            </a:pPr>
-            <a:r>
-              <a:rPr sz="1100" b="0">
-                <a:solidFill>
-                  <a:srgbClr val="1C1C1E"/>
-                </a:solidFill>
-                <a:latin typeface="맑은 고딕"/>
-                <a:ea typeface="맑은 고딕"/>
-              </a:rPr>
-              <a:t>• 개선이 없다면 판정이 공급을 보지 않는다는 증거다</a:t>
-            </a:r>
-          </a:p>
-        </p:txBody>
-      </p:sp>
-      <p:sp>
-        <p:nvSpPr>
-          <p:cNvPr id="13" name="Rounded Rectangle 12"/>
-          <p:cNvSpPr/>
-          <p:nvPr/>
-        </p:nvSpPr>
-        <p:spPr>
-          <a:xfrm>
-            <a:off x="8183880" y="1737360"/>
-            <a:ext cx="3611880" cy="2651760"/>
-          </a:xfrm>
-          <a:prstGeom prst="roundRect">
-            <a:avLst>
-              <a:gd name="adj" fmla="val 3103"/>
-            </a:avLst>
-          </a:prstGeom>
-          <a:solidFill>
-            <a:srgbClr val="FFFFFF"/>
-          </a:solidFill>
-          <a:ln w="12700">
-            <a:solidFill>
-              <a:srgbClr val="E4E6E9"/>
-            </a:solidFill>
-          </a:ln>
-          <a:effectLst>
-            <a:outerShdw blurRad="182880" dist="64008" dir="5400000" rotWithShape="0">
-              <a:srgbClr val="000000">
-                <a:alpha val="30000"/>
-              </a:srgbClr>
-            </a:outerShdw>
-          </a:effectLst>
-        </p:spPr>
-        <p:style>
-          <a:lnRef idx="1">
-            <a:schemeClr val="accent1"/>
-          </a:lnRef>
-          <a:fillRef idx="3">
-            <a:schemeClr val="accent1"/>
-          </a:fillRef>
-          <a:effectRef idx="2">
-            <a:schemeClr val="accent1"/>
-          </a:effectRef>
-          <a:fontRef idx="minor">
-            <a:schemeClr val="lt1"/>
-          </a:fontRef>
-        </p:style>
-        <p:txBody>
-          <a:bodyPr rtlCol="0" anchor="ctr"/>
-          <a:lstStyle/>
-          <a:p>
-            <a:pPr algn="ctr"/>
-          </a:p>
-        </p:txBody>
-      </p:sp>
-      <p:sp>
-        <p:nvSpPr>
-          <p:cNvPr id="14" name="TextBox 13"/>
-          <p:cNvSpPr txBox="1"/>
-          <p:nvPr/>
-        </p:nvSpPr>
-        <p:spPr>
-          <a:xfrm>
-            <a:off x="8366760" y="1865376"/>
-            <a:ext cx="3246120" cy="2395728"/>
-          </a:xfrm>
-          <a:prstGeom prst="rect">
-            <a:avLst/>
-          </a:prstGeom>
-          <a:noFill/>
-        </p:spPr>
-        <p:txBody>
-          <a:bodyPr wrap="square" anchor="t">
-            <a:spAutoFit/>
-          </a:bodyPr>
-          <a:lstStyle/>
-          <a:p>
-            <a:pPr>
-              <a:lnSpc>
-                <a:spcPct val="114000"/>
-              </a:lnSpc>
-              <a:spcAft>
-                <a:spcPts val="350"/>
-              </a:spcAft>
-            </a:pPr>
-            <a:r>
-              <a:rPr sz="1350" b="1">
-                <a:solidFill>
-                  <a:srgbClr val="33393F"/>
-                </a:solidFill>
-                <a:latin typeface="맑은 고딕"/>
-                <a:ea typeface="맑은 고딕"/>
-              </a:rPr>
-              <a:t>3단계 · 사각지대 탐지</a:t>
-            </a:r>
-          </a:p>
-          <a:p>
-            <a:pPr marL="160020" indent="-160020">
-              <a:lnSpc>
-                <a:spcPct val="114000"/>
-              </a:lnSpc>
-              <a:spcAft>
-                <a:spcPts val="200"/>
-              </a:spcAft>
-            </a:pPr>
-            <a:r>
-              <a:rPr sz="1100" b="0">
-                <a:solidFill>
-                  <a:srgbClr val="1C1C1E"/>
-                </a:solidFill>
-                <a:latin typeface="맑은 고딕"/>
-                <a:ea typeface="맑은 고딕"/>
-              </a:rPr>
-              <a:t>• "거리 기준 통과 ∧ 관내 공급 공백 ∧ 관내 이용 0"의 3중 기준을 사전 정의하고 해당 지역을 탐지한다</a:t>
-            </a:r>
-          </a:p>
-          <a:p>
-            <a:pPr marL="160020" indent="-160020">
-              <a:lnSpc>
-                <a:spcPct val="114000"/>
-              </a:lnSpc>
-              <a:spcAft>
-                <a:spcPts val="200"/>
-              </a:spcAft>
-            </a:pPr>
-            <a:r>
-              <a:rPr sz="1100" b="0">
-                <a:solidFill>
-                  <a:srgbClr val="1C1C1E"/>
-                </a:solidFill>
-                <a:latin typeface="맑은 고딕"/>
-                <a:ea typeface="맑은 고딕"/>
-              </a:rPr>
-              <a:t>• 중증 이송 반론은 동급 병원 유출 분리로, 선호 원정 반론은 관내 선택지 유무로 통제한다</a:t>
-            </a:r>
-          </a:p>
-        </p:txBody>
-      </p:sp>
-      <p:sp>
-        <p:nvSpPr>
-          <p:cNvPr id="15" name="Rounded Rectangle 14"/>
-          <p:cNvSpPr/>
-          <p:nvPr/>
-        </p:nvSpPr>
-        <p:spPr>
-          <a:xfrm>
-            <a:off x="502920" y="4663440"/>
-            <a:ext cx="11292840" cy="1417320"/>
-          </a:xfrm>
-          <a:prstGeom prst="roundRect">
-            <a:avLst>
-              <a:gd name="adj" fmla="val 5806"/>
-            </a:avLst>
-          </a:prstGeom>
-          <a:solidFill>
-            <a:srgbClr val="FFFFFF"/>
-          </a:solidFill>
-          <a:ln w="12700">
-            <a:solidFill>
-              <a:srgbClr val="E4E6E9"/>
-            </a:solidFill>
-          </a:ln>
-          <a:effectLst>
-            <a:outerShdw blurRad="182880" dist="64008" dir="5400000" rotWithShape="0">
-              <a:srgbClr val="000000">
-                <a:alpha val="30000"/>
-              </a:srgbClr>
-            </a:outerShdw>
-          </a:effectLst>
-        </p:spPr>
-        <p:style>
-          <a:lnRef idx="1">
-            <a:schemeClr val="accent1"/>
-          </a:lnRef>
-          <a:fillRef idx="3">
-            <a:schemeClr val="accent1"/>
-          </a:fillRef>
-          <a:effectRef idx="2">
-            <a:schemeClr val="accent1"/>
-          </a:effectRef>
-          <a:fontRef idx="minor">
-            <a:schemeClr val="lt1"/>
-          </a:fontRef>
-        </p:style>
-        <p:txBody>
-          <a:bodyPr rtlCol="0" anchor="ctr"/>
-          <a:lstStyle/>
-          <a:p>
-            <a:pPr algn="ctr"/>
-          </a:p>
-        </p:txBody>
-      </p:sp>
-      <p:sp>
-        <p:nvSpPr>
-          <p:cNvPr id="16" name="TextBox 15"/>
-          <p:cNvSpPr txBox="1"/>
-          <p:nvPr/>
-        </p:nvSpPr>
-        <p:spPr>
-          <a:xfrm>
-            <a:off x="685800" y="4791455"/>
-            <a:ext cx="10927080" cy="1161288"/>
-          </a:xfrm>
-          <a:prstGeom prst="rect">
-            <a:avLst/>
-          </a:prstGeom>
-          <a:noFill/>
-        </p:spPr>
-        <p:txBody>
-          <a:bodyPr wrap="square" anchor="t">
-            <a:spAutoFit/>
-          </a:bodyPr>
-          <a:lstStyle/>
-          <a:p>
-            <a:pPr>
-              <a:lnSpc>
-                <a:spcPct val="114000"/>
-              </a:lnSpc>
-              <a:spcAft>
-                <a:spcPts val="350"/>
-              </a:spcAft>
-            </a:pPr>
-            <a:r>
-              <a:rPr sz="1300" b="1">
-                <a:solidFill>
-                  <a:srgbClr val="33393F"/>
-                </a:solidFill>
-                <a:latin typeface="맑은 고딕"/>
-                <a:ea typeface="맑은 고딕"/>
-              </a:rPr>
-              <a:t>판단 기준의 사전 명시</a:t>
-            </a:r>
-          </a:p>
-          <a:p>
-            <a:pPr marL="160020" indent="-160020">
-              <a:lnSpc>
-                <a:spcPct val="114000"/>
-              </a:lnSpc>
-              <a:spcAft>
-                <a:spcPts val="200"/>
-              </a:spcAft>
-            </a:pPr>
-            <a:r>
-              <a:rPr sz="1150" b="0">
-                <a:solidFill>
-                  <a:srgbClr val="1C1C1E"/>
-                </a:solidFill>
-                <a:latin typeface="맑은 고딕"/>
-                <a:ea typeface="맑은 고딕"/>
-              </a:rPr>
-              <a:t>• 무엇을 "재현 성공"으로, 무엇을 "사각지대"로 볼지의 기준을 분석 전에 확정해 보고서에 명시한다</a:t>
-            </a:r>
-          </a:p>
-          <a:p>
-            <a:pPr marL="160020" indent="-160020">
-              <a:lnSpc>
-                <a:spcPct val="114000"/>
-              </a:lnSpc>
-              <a:spcAft>
-                <a:spcPts val="200"/>
-              </a:spcAft>
-            </a:pPr>
-            <a:r>
-              <a:rPr sz="1150" b="0">
-                <a:solidFill>
-                  <a:srgbClr val="1C1C1E"/>
-                </a:solidFill>
-                <a:latin typeface="맑은 고딕"/>
-                <a:ea typeface="맑은 고딕"/>
-              </a:rPr>
-              <a:t>• 반대 해석(예: "옆 도시로 가면 되지 않는가")을 본문에서 정면으로 다루는 섹션을 계획에 포함한다</a:t>
-            </a:r>
-          </a:p>
-        </p:txBody>
-      </p:sp>
-    </p:spTree>
-  </p:cSld>
-  <p:clrMapOvr>
-    <a:masterClrMapping/>
-  </p:clrMapOvr>
-</p:sld>
-</file>
-
 <file path=ppt/theme/theme1.xml><?xml version="1.0" encoding="utf-8"?>
 <a:theme xmlns:a="http://schemas.openxmlformats.org/drawingml/2006/main" name="Office Theme">
   <a:themeElements>

--- a/04_제출물/데이터분석_계획서.pptx
+++ b/04_제출물/데이터분석_계획서.pptx
@@ -3349,7 +3349,7 @@
         <p:spPr>
           <a:xfrm>
             <a:off x="914400" y="4663440"/>
-            <a:ext cx="6949440" cy="1554480"/>
+            <a:ext cx="6949440" cy="310896"/>
           </a:xfrm>
           <a:prstGeom prst="rect">
             <a:avLst/>
@@ -3367,7 +3367,7 @@
                 <a:spcPct val="114000"/>
               </a:lnSpc>
               <a:spcAft>
-                <a:spcPts val="600"/>
+                <a:spcPts val="0"/>
               </a:spcAft>
             </a:pPr>
             <a:r>
@@ -3379,46 +3379,6 @@
                 <a:ea typeface="맑은 고딕"/>
               </a:rPr>
               <a:t>2026 제5회 명지대학교 창의적 SW프로그램 경진대회 · 빅데이터 분석 부문</a:t>
-            </a:r>
-          </a:p>
-          <a:p>
-            <a:pPr>
-              <a:lnSpc>
-                <a:spcPct val="114000"/>
-              </a:lnSpc>
-              <a:spcAft>
-                <a:spcPts val="200"/>
-              </a:spcAft>
-            </a:pPr>
-            <a:r>
-              <a:rPr sz="1250" b="0">
-                <a:solidFill>
-                  <a:srgbClr val="767A7F"/>
-                </a:solidFill>
-                <a:latin typeface="맑은 고딕"/>
-                <a:ea typeface="맑은 고딕"/>
-              </a:rPr>
-              <a:t>정부는 취약지를 정밀하게 측정한다. 지정 규칙과 배분 규칙은 그 측정을 따르는가 —</a:t>
-            </a:r>
-          </a:p>
-          <a:p>
-            <a:pPr>
-              <a:lnSpc>
-                <a:spcPct val="114000"/>
-              </a:lnSpc>
-              <a:spcAft>
-                <a:spcPts val="0"/>
-              </a:spcAft>
-            </a:pPr>
-            <a:r>
-              <a:rPr sz="1250" b="0">
-                <a:solidFill>
-                  <a:srgbClr val="767A7F"/>
-                </a:solidFill>
-                <a:latin typeface="맑은 고딕"/>
-                <a:ea typeface="맑은 고딕"/>
-              </a:rPr>
-              <a:t>정부 자신의 공개 데이터와 기준만으로 제도의 전 과정을 감사한다.</a:t>
             </a:r>
           </a:p>
         </p:txBody>

--- a/04_제출물/데이터분석_계획서.pptx
+++ b/04_제출물/데이터분석_계획서.pptx
@@ -5,22 +5,22 @@
     <p:sldMasterId id="2147483648" r:id="rId1"/>
   </p:sldMasterIdLst>
   <p:sldIdLst>
-    <p:sldId id="256" r:id="rId7"/>
-    <p:sldId id="257" r:id="rId8"/>
-    <p:sldId id="258" r:id="rId9"/>
-    <p:sldId id="259" r:id="rId10"/>
-    <p:sldId id="260" r:id="rId11"/>
-    <p:sldId id="261" r:id="rId12"/>
-    <p:sldId id="262" r:id="rId13"/>
-    <p:sldId id="263" r:id="rId14"/>
-    <p:sldId id="264" r:id="rId15"/>
-    <p:sldId id="265" r:id="rId16"/>
-    <p:sldId id="266" r:id="rId17"/>
-    <p:sldId id="267" r:id="rId18"/>
-    <p:sldId id="268" r:id="rId19"/>
-    <p:sldId id="269" r:id="rId20"/>
+    <p:sldId id="256" r:id="rId2"/>
+    <p:sldId id="257" r:id="rId3"/>
+    <p:sldId id="258" r:id="rId4"/>
+    <p:sldId id="259" r:id="rId5"/>
+    <p:sldId id="260" r:id="rId6"/>
+    <p:sldId id="261" r:id="rId7"/>
+    <p:sldId id="262" r:id="rId8"/>
+    <p:sldId id="263" r:id="rId9"/>
+    <p:sldId id="264" r:id="rId10"/>
+    <p:sldId id="265" r:id="rId11"/>
+    <p:sldId id="266" r:id="rId12"/>
+    <p:sldId id="267" r:id="rId13"/>
+    <p:sldId id="268" r:id="rId14"/>
+    <p:sldId id="269" r:id="rId15"/>
   </p:sldIdLst>
-  <p:sldSz cx="12191695" cy="6858000" type="screen4x3"/>
+  <p:sldSz cx="12192000" cy="6858000"/>
   <p:notesSz cx="6858000" cy="9144000"/>
   <p:defaultTextStyle>
     <a:defPPr>
@@ -117,6 +117,22 @@
       </a:defRPr>
     </a:lvl9pPr>
   </p:defaultTextStyle>
+  <p:extLst>
+    <p:ext uri="{EFAFB233-063F-42B5-8137-9DF3F51BA10A}">
+      <p15:sldGuideLst xmlns:p15="http://schemas.microsoft.com/office/powerpoint/2012/main">
+        <p15:guide id="1" orient="horz" pos="2160">
+          <p15:clr>
+            <a:srgbClr val="A4A3A4"/>
+          </p15:clr>
+        </p15:guide>
+        <p15:guide id="2" pos="2880">
+          <p15:clr>
+            <a:srgbClr val="A4A3A4"/>
+          </p15:clr>
+        </p15:guide>
+      </p15:sldGuideLst>
+    </p:ext>
+  </p:extLst>
 </p:presentation>
 </file>
 
@@ -158,10 +174,9 @@
           <a:lstStyle/>
           <a:p>
             <a:r>
-              <a:rPr lang="en-US" smtClean="0"/>
+              <a:rPr lang="en-US"/>
               <a:t>Click to edit Master title style</a:t>
             </a:r>
-            <a:endParaRPr lang="en-US"/>
           </a:p>
         </p:txBody>
       </p:sp>
@@ -277,10 +292,9 @@
           </a:lstStyle>
           <a:p>
             <a:r>
-              <a:rPr lang="en-US" smtClean="0"/>
+              <a:rPr lang="en-US"/>
               <a:t>Click to edit Master subtitle style</a:t>
             </a:r>
-            <a:endParaRPr lang="en-US"/>
           </a:p>
         </p:txBody>
       </p:sp>
@@ -301,7 +315,7 @@
           <a:p>
             <a:fld id="{5BCAD085-E8A6-8845-BD4E-CB4CCA059FC4}" type="datetimeFigureOut">
               <a:rPr lang="en-US" smtClean="0"/>
-              <a:t>1/27/13</a:t>
+              <a:t>8/12/2026</a:t>
             </a:fld>
             <a:endParaRPr lang="en-US"/>
           </a:p>
@@ -395,10 +409,9 @@
           <a:lstStyle/>
           <a:p>
             <a:r>
-              <a:rPr lang="en-US" smtClean="0"/>
+              <a:rPr lang="en-US"/>
               <a:t>Click to edit Master title style</a:t>
             </a:r>
-            <a:endParaRPr lang="en-US"/>
           </a:p>
         </p:txBody>
       </p:sp>
@@ -419,38 +432,37 @@
           <a:p>
             <a:pPr lvl="0"/>
             <a:r>
-              <a:rPr lang="en-US" smtClean="0"/>
+              <a:rPr lang="en-US"/>
               <a:t>Click to edit Master text styles</a:t>
             </a:r>
           </a:p>
           <a:p>
             <a:pPr lvl="1"/>
             <a:r>
-              <a:rPr lang="en-US" smtClean="0"/>
+              <a:rPr lang="en-US"/>
               <a:t>Second level</a:t>
             </a:r>
           </a:p>
           <a:p>
             <a:pPr lvl="2"/>
             <a:r>
-              <a:rPr lang="en-US" smtClean="0"/>
+              <a:rPr lang="en-US"/>
               <a:t>Third level</a:t>
             </a:r>
           </a:p>
           <a:p>
             <a:pPr lvl="3"/>
             <a:r>
-              <a:rPr lang="en-US" smtClean="0"/>
+              <a:rPr lang="en-US"/>
               <a:t>Fourth level</a:t>
             </a:r>
           </a:p>
           <a:p>
             <a:pPr lvl="4"/>
             <a:r>
-              <a:rPr lang="en-US" smtClean="0"/>
+              <a:rPr lang="en-US"/>
               <a:t>Fifth level</a:t>
             </a:r>
-            <a:endParaRPr lang="en-US"/>
           </a:p>
         </p:txBody>
       </p:sp>
@@ -471,7 +483,7 @@
           <a:p>
             <a:fld id="{5BCAD085-E8A6-8845-BD4E-CB4CCA059FC4}" type="datetimeFigureOut">
               <a:rPr lang="en-US" smtClean="0"/>
-              <a:t>1/27/13</a:t>
+              <a:t>8/12/2026</a:t>
             </a:fld>
             <a:endParaRPr lang="en-US"/>
           </a:p>
@@ -570,10 +582,9 @@
           <a:lstStyle/>
           <a:p>
             <a:r>
-              <a:rPr lang="en-US" smtClean="0"/>
+              <a:rPr lang="en-US"/>
               <a:t>Click to edit Master title style</a:t>
             </a:r>
-            <a:endParaRPr lang="en-US"/>
           </a:p>
         </p:txBody>
       </p:sp>
@@ -599,38 +610,37 @@
           <a:p>
             <a:pPr lvl="0"/>
             <a:r>
-              <a:rPr lang="en-US" smtClean="0"/>
+              <a:rPr lang="en-US"/>
               <a:t>Click to edit Master text styles</a:t>
             </a:r>
           </a:p>
           <a:p>
             <a:pPr lvl="1"/>
             <a:r>
-              <a:rPr lang="en-US" smtClean="0"/>
+              <a:rPr lang="en-US"/>
               <a:t>Second level</a:t>
             </a:r>
           </a:p>
           <a:p>
             <a:pPr lvl="2"/>
             <a:r>
-              <a:rPr lang="en-US" smtClean="0"/>
+              <a:rPr lang="en-US"/>
               <a:t>Third level</a:t>
             </a:r>
           </a:p>
           <a:p>
             <a:pPr lvl="3"/>
             <a:r>
-              <a:rPr lang="en-US" smtClean="0"/>
+              <a:rPr lang="en-US"/>
               <a:t>Fourth level</a:t>
             </a:r>
           </a:p>
           <a:p>
             <a:pPr lvl="4"/>
             <a:r>
-              <a:rPr lang="en-US" smtClean="0"/>
+              <a:rPr lang="en-US"/>
               <a:t>Fifth level</a:t>
             </a:r>
-            <a:endParaRPr lang="en-US"/>
           </a:p>
         </p:txBody>
       </p:sp>
@@ -651,7 +661,7 @@
           <a:p>
             <a:fld id="{5BCAD085-E8A6-8845-BD4E-CB4CCA059FC4}" type="datetimeFigureOut">
               <a:rPr lang="en-US" smtClean="0"/>
-              <a:t>1/27/13</a:t>
+              <a:t>8/12/2026</a:t>
             </a:fld>
             <a:endParaRPr lang="en-US"/>
           </a:p>
@@ -745,10 +755,9 @@
           <a:lstStyle/>
           <a:p>
             <a:r>
-              <a:rPr lang="en-US" smtClean="0"/>
+              <a:rPr lang="en-US"/>
               <a:t>Click to edit Master title style</a:t>
             </a:r>
-            <a:endParaRPr lang="en-US"/>
           </a:p>
         </p:txBody>
       </p:sp>
@@ -769,38 +778,37 @@
           <a:p>
             <a:pPr lvl="0"/>
             <a:r>
-              <a:rPr lang="en-US" smtClean="0"/>
+              <a:rPr lang="en-US"/>
               <a:t>Click to edit Master text styles</a:t>
             </a:r>
           </a:p>
           <a:p>
             <a:pPr lvl="1"/>
             <a:r>
-              <a:rPr lang="en-US" smtClean="0"/>
+              <a:rPr lang="en-US"/>
               <a:t>Second level</a:t>
             </a:r>
           </a:p>
           <a:p>
             <a:pPr lvl="2"/>
             <a:r>
-              <a:rPr lang="en-US" smtClean="0"/>
+              <a:rPr lang="en-US"/>
               <a:t>Third level</a:t>
             </a:r>
           </a:p>
           <a:p>
             <a:pPr lvl="3"/>
             <a:r>
-              <a:rPr lang="en-US" smtClean="0"/>
+              <a:rPr lang="en-US"/>
               <a:t>Fourth level</a:t>
             </a:r>
           </a:p>
           <a:p>
             <a:pPr lvl="4"/>
             <a:r>
-              <a:rPr lang="en-US" smtClean="0"/>
+              <a:rPr lang="en-US"/>
               <a:t>Fifth level</a:t>
             </a:r>
-            <a:endParaRPr lang="en-US"/>
           </a:p>
         </p:txBody>
       </p:sp>
@@ -821,7 +829,7 @@
           <a:p>
             <a:fld id="{5BCAD085-E8A6-8845-BD4E-CB4CCA059FC4}" type="datetimeFigureOut">
               <a:rPr lang="en-US" smtClean="0"/>
-              <a:t>1/27/13</a:t>
+              <a:t>8/12/2026</a:t>
             </a:fld>
             <a:endParaRPr lang="en-US"/>
           </a:p>
@@ -924,10 +932,9 @@
           </a:lstStyle>
           <a:p>
             <a:r>
-              <a:rPr lang="en-US" smtClean="0"/>
+              <a:rPr lang="en-US"/>
               <a:t>Click to edit Master title style</a:t>
             </a:r>
-            <a:endParaRPr lang="en-US"/>
           </a:p>
         </p:txBody>
       </p:sp>
@@ -1044,7 +1051,7 @@
           <a:p>
             <a:pPr lvl="0"/>
             <a:r>
-              <a:rPr lang="en-US" smtClean="0"/>
+              <a:rPr lang="en-US"/>
               <a:t>Click to edit Master text styles</a:t>
             </a:r>
           </a:p>
@@ -1067,7 +1074,7 @@
           <a:p>
             <a:fld id="{5BCAD085-E8A6-8845-BD4E-CB4CCA059FC4}" type="datetimeFigureOut">
               <a:rPr lang="en-US" smtClean="0"/>
-              <a:t>1/27/13</a:t>
+              <a:t>8/12/2026</a:t>
             </a:fld>
             <a:endParaRPr lang="en-US"/>
           </a:p>
@@ -1161,10 +1168,9 @@
           <a:lstStyle/>
           <a:p>
             <a:r>
-              <a:rPr lang="en-US" smtClean="0"/>
+              <a:rPr lang="en-US"/>
               <a:t>Click to edit Master title style</a:t>
             </a:r>
-            <a:endParaRPr lang="en-US"/>
           </a:p>
         </p:txBody>
       </p:sp>
@@ -1218,38 +1224,37 @@
           <a:p>
             <a:pPr lvl="0"/>
             <a:r>
-              <a:rPr lang="en-US" smtClean="0"/>
+              <a:rPr lang="en-US"/>
               <a:t>Click to edit Master text styles</a:t>
             </a:r>
           </a:p>
           <a:p>
             <a:pPr lvl="1"/>
             <a:r>
-              <a:rPr lang="en-US" smtClean="0"/>
+              <a:rPr lang="en-US"/>
               <a:t>Second level</a:t>
             </a:r>
           </a:p>
           <a:p>
             <a:pPr lvl="2"/>
             <a:r>
-              <a:rPr lang="en-US" smtClean="0"/>
+              <a:rPr lang="en-US"/>
               <a:t>Third level</a:t>
             </a:r>
           </a:p>
           <a:p>
             <a:pPr lvl="3"/>
             <a:r>
-              <a:rPr lang="en-US" smtClean="0"/>
+              <a:rPr lang="en-US"/>
               <a:t>Fourth level</a:t>
             </a:r>
           </a:p>
           <a:p>
             <a:pPr lvl="4"/>
             <a:r>
-              <a:rPr lang="en-US" smtClean="0"/>
+              <a:rPr lang="en-US"/>
               <a:t>Fifth level</a:t>
             </a:r>
-            <a:endParaRPr lang="en-US"/>
           </a:p>
         </p:txBody>
       </p:sp>
@@ -1303,38 +1308,37 @@
           <a:p>
             <a:pPr lvl="0"/>
             <a:r>
-              <a:rPr lang="en-US" smtClean="0"/>
+              <a:rPr lang="en-US"/>
               <a:t>Click to edit Master text styles</a:t>
             </a:r>
           </a:p>
           <a:p>
             <a:pPr lvl="1"/>
             <a:r>
-              <a:rPr lang="en-US" smtClean="0"/>
+              <a:rPr lang="en-US"/>
               <a:t>Second level</a:t>
             </a:r>
           </a:p>
           <a:p>
             <a:pPr lvl="2"/>
             <a:r>
-              <a:rPr lang="en-US" smtClean="0"/>
+              <a:rPr lang="en-US"/>
               <a:t>Third level</a:t>
             </a:r>
           </a:p>
           <a:p>
             <a:pPr lvl="3"/>
             <a:r>
-              <a:rPr lang="en-US" smtClean="0"/>
+              <a:rPr lang="en-US"/>
               <a:t>Fourth level</a:t>
             </a:r>
           </a:p>
           <a:p>
             <a:pPr lvl="4"/>
             <a:r>
-              <a:rPr lang="en-US" smtClean="0"/>
+              <a:rPr lang="en-US"/>
               <a:t>Fifth level</a:t>
             </a:r>
-            <a:endParaRPr lang="en-US"/>
           </a:p>
         </p:txBody>
       </p:sp>
@@ -1355,7 +1359,7 @@
           <a:p>
             <a:fld id="{5BCAD085-E8A6-8845-BD4E-CB4CCA059FC4}" type="datetimeFigureOut">
               <a:rPr lang="en-US" smtClean="0"/>
-              <a:t>1/27/13</a:t>
+              <a:t>8/12/2026</a:t>
             </a:fld>
             <a:endParaRPr lang="en-US"/>
           </a:p>
@@ -1453,10 +1457,9 @@
           </a:lstStyle>
           <a:p>
             <a:r>
-              <a:rPr lang="en-US" smtClean="0"/>
+              <a:rPr lang="en-US"/>
               <a:t>Click to edit Master title style</a:t>
             </a:r>
-            <a:endParaRPr lang="en-US"/>
           </a:p>
         </p:txBody>
       </p:sp>
@@ -1519,7 +1522,7 @@
           <a:p>
             <a:pPr lvl="0"/>
             <a:r>
-              <a:rPr lang="en-US" smtClean="0"/>
+              <a:rPr lang="en-US"/>
               <a:t>Click to edit Master text styles</a:t>
             </a:r>
           </a:p>
@@ -1575,38 +1578,37 @@
           <a:p>
             <a:pPr lvl="0"/>
             <a:r>
-              <a:rPr lang="en-US" smtClean="0"/>
+              <a:rPr lang="en-US"/>
               <a:t>Click to edit Master text styles</a:t>
             </a:r>
           </a:p>
           <a:p>
             <a:pPr lvl="1"/>
             <a:r>
-              <a:rPr lang="en-US" smtClean="0"/>
+              <a:rPr lang="en-US"/>
               <a:t>Second level</a:t>
             </a:r>
           </a:p>
           <a:p>
             <a:pPr lvl="2"/>
             <a:r>
-              <a:rPr lang="en-US" smtClean="0"/>
+              <a:rPr lang="en-US"/>
               <a:t>Third level</a:t>
             </a:r>
           </a:p>
           <a:p>
             <a:pPr lvl="3"/>
             <a:r>
-              <a:rPr lang="en-US" smtClean="0"/>
+              <a:rPr lang="en-US"/>
               <a:t>Fourth level</a:t>
             </a:r>
           </a:p>
           <a:p>
             <a:pPr lvl="4"/>
             <a:r>
-              <a:rPr lang="en-US" smtClean="0"/>
+              <a:rPr lang="en-US"/>
               <a:t>Fifth level</a:t>
             </a:r>
-            <a:endParaRPr lang="en-US"/>
           </a:p>
         </p:txBody>
       </p:sp>
@@ -1669,7 +1671,7 @@
           <a:p>
             <a:pPr lvl="0"/>
             <a:r>
-              <a:rPr lang="en-US" smtClean="0"/>
+              <a:rPr lang="en-US"/>
               <a:t>Click to edit Master text styles</a:t>
             </a:r>
           </a:p>
@@ -1725,38 +1727,37 @@
           <a:p>
             <a:pPr lvl="0"/>
             <a:r>
-              <a:rPr lang="en-US" smtClean="0"/>
+              <a:rPr lang="en-US"/>
               <a:t>Click to edit Master text styles</a:t>
             </a:r>
           </a:p>
           <a:p>
             <a:pPr lvl="1"/>
             <a:r>
-              <a:rPr lang="en-US" smtClean="0"/>
+              <a:rPr lang="en-US"/>
               <a:t>Second level</a:t>
             </a:r>
           </a:p>
           <a:p>
             <a:pPr lvl="2"/>
             <a:r>
-              <a:rPr lang="en-US" smtClean="0"/>
+              <a:rPr lang="en-US"/>
               <a:t>Third level</a:t>
             </a:r>
           </a:p>
           <a:p>
             <a:pPr lvl="3"/>
             <a:r>
-              <a:rPr lang="en-US" smtClean="0"/>
+              <a:rPr lang="en-US"/>
               <a:t>Fourth level</a:t>
             </a:r>
           </a:p>
           <a:p>
             <a:pPr lvl="4"/>
             <a:r>
-              <a:rPr lang="en-US" smtClean="0"/>
+              <a:rPr lang="en-US"/>
               <a:t>Fifth level</a:t>
             </a:r>
-            <a:endParaRPr lang="en-US"/>
           </a:p>
         </p:txBody>
       </p:sp>
@@ -1777,7 +1778,7 @@
           <a:p>
             <a:fld id="{5BCAD085-E8A6-8845-BD4E-CB4CCA059FC4}" type="datetimeFigureOut">
               <a:rPr lang="en-US" smtClean="0"/>
-              <a:t>1/27/13</a:t>
+              <a:t>8/12/2026</a:t>
             </a:fld>
             <a:endParaRPr lang="en-US"/>
           </a:p>
@@ -1871,10 +1872,9 @@
           <a:lstStyle/>
           <a:p>
             <a:r>
-              <a:rPr lang="en-US" smtClean="0"/>
+              <a:rPr lang="en-US"/>
               <a:t>Click to edit Master title style</a:t>
             </a:r>
-            <a:endParaRPr lang="en-US"/>
           </a:p>
         </p:txBody>
       </p:sp>
@@ -1895,7 +1895,7 @@
           <a:p>
             <a:fld id="{5BCAD085-E8A6-8845-BD4E-CB4CCA059FC4}" type="datetimeFigureOut">
               <a:rPr lang="en-US" smtClean="0"/>
-              <a:t>1/27/13</a:t>
+              <a:t>8/12/2026</a:t>
             </a:fld>
             <a:endParaRPr lang="en-US"/>
           </a:p>
@@ -1990,7 +1990,7 @@
           <a:p>
             <a:fld id="{5BCAD085-E8A6-8845-BD4E-CB4CCA059FC4}" type="datetimeFigureOut">
               <a:rPr lang="en-US" smtClean="0"/>
-              <a:t>1/27/13</a:t>
+              <a:t>8/12/2026</a:t>
             </a:fld>
             <a:endParaRPr lang="en-US"/>
           </a:p>
@@ -2093,10 +2093,9 @@
           </a:lstStyle>
           <a:p>
             <a:r>
-              <a:rPr lang="en-US" smtClean="0"/>
+              <a:rPr lang="en-US"/>
               <a:t>Click to edit Master title style</a:t>
             </a:r>
-            <a:endParaRPr lang="en-US"/>
           </a:p>
         </p:txBody>
       </p:sp>
@@ -2150,38 +2149,37 @@
           <a:p>
             <a:pPr lvl="0"/>
             <a:r>
-              <a:rPr lang="en-US" smtClean="0"/>
+              <a:rPr lang="en-US"/>
               <a:t>Click to edit Master text styles</a:t>
             </a:r>
           </a:p>
           <a:p>
             <a:pPr lvl="1"/>
             <a:r>
-              <a:rPr lang="en-US" smtClean="0"/>
+              <a:rPr lang="en-US"/>
               <a:t>Second level</a:t>
             </a:r>
           </a:p>
           <a:p>
             <a:pPr lvl="2"/>
             <a:r>
-              <a:rPr lang="en-US" smtClean="0"/>
+              <a:rPr lang="en-US"/>
               <a:t>Third level</a:t>
             </a:r>
           </a:p>
           <a:p>
             <a:pPr lvl="3"/>
             <a:r>
-              <a:rPr lang="en-US" smtClean="0"/>
+              <a:rPr lang="en-US"/>
               <a:t>Fourth level</a:t>
             </a:r>
           </a:p>
           <a:p>
             <a:pPr lvl="4"/>
             <a:r>
-              <a:rPr lang="en-US" smtClean="0"/>
+              <a:rPr lang="en-US"/>
               <a:t>Fifth level</a:t>
             </a:r>
-            <a:endParaRPr lang="en-US"/>
           </a:p>
         </p:txBody>
       </p:sp>
@@ -2244,7 +2242,7 @@
           <a:p>
             <a:pPr lvl="0"/>
             <a:r>
-              <a:rPr lang="en-US" smtClean="0"/>
+              <a:rPr lang="en-US"/>
               <a:t>Click to edit Master text styles</a:t>
             </a:r>
           </a:p>
@@ -2267,7 +2265,7 @@
           <a:p>
             <a:fld id="{5BCAD085-E8A6-8845-BD4E-CB4CCA059FC4}" type="datetimeFigureOut">
               <a:rPr lang="en-US" smtClean="0"/>
-              <a:t>1/27/13</a:t>
+              <a:t>8/12/2026</a:t>
             </a:fld>
             <a:endParaRPr lang="en-US"/>
           </a:p>
@@ -2370,10 +2368,9 @@
           </a:lstStyle>
           <a:p>
             <a:r>
-              <a:rPr lang="en-US" smtClean="0"/>
+              <a:rPr lang="en-US"/>
               <a:t>Click to edit Master title style</a:t>
             </a:r>
-            <a:endParaRPr lang="en-US"/>
           </a:p>
         </p:txBody>
       </p:sp>
@@ -2497,7 +2494,7 @@
           <a:p>
             <a:pPr lvl="0"/>
             <a:r>
-              <a:rPr lang="en-US" smtClean="0"/>
+              <a:rPr lang="en-US"/>
               <a:t>Click to edit Master text styles</a:t>
             </a:r>
           </a:p>
@@ -2520,7 +2517,7 @@
           <a:p>
             <a:fld id="{5BCAD085-E8A6-8845-BD4E-CB4CCA059FC4}" type="datetimeFigureOut">
               <a:rPr lang="en-US" smtClean="0"/>
-              <a:t>1/27/13</a:t>
+              <a:t>8/12/2026</a:t>
             </a:fld>
             <a:endParaRPr lang="en-US"/>
           </a:p>
@@ -2629,10 +2626,9 @@
           <a:lstStyle/>
           <a:p>
             <a:r>
-              <a:rPr lang="en-US" smtClean="0"/>
+              <a:rPr lang="en-US"/>
               <a:t>Click to edit Master title style</a:t>
             </a:r>
-            <a:endParaRPr lang="en-US"/>
           </a:p>
         </p:txBody>
       </p:sp>
@@ -2663,38 +2659,37 @@
           <a:p>
             <a:pPr lvl="0"/>
             <a:r>
-              <a:rPr lang="en-US" smtClean="0"/>
+              <a:rPr lang="en-US"/>
               <a:t>Click to edit Master text styles</a:t>
             </a:r>
           </a:p>
           <a:p>
             <a:pPr lvl="1"/>
             <a:r>
-              <a:rPr lang="en-US" smtClean="0"/>
+              <a:rPr lang="en-US"/>
               <a:t>Second level</a:t>
             </a:r>
           </a:p>
           <a:p>
             <a:pPr lvl="2"/>
             <a:r>
-              <a:rPr lang="en-US" smtClean="0"/>
+              <a:rPr lang="en-US"/>
               <a:t>Third level</a:t>
             </a:r>
           </a:p>
           <a:p>
             <a:pPr lvl="3"/>
             <a:r>
-              <a:rPr lang="en-US" smtClean="0"/>
+              <a:rPr lang="en-US"/>
               <a:t>Fourth level</a:t>
             </a:r>
           </a:p>
           <a:p>
             <a:pPr lvl="4"/>
             <a:r>
-              <a:rPr lang="en-US" smtClean="0"/>
+              <a:rPr lang="en-US"/>
               <a:t>Fifth level</a:t>
             </a:r>
-            <a:endParaRPr lang="en-US"/>
           </a:p>
         </p:txBody>
       </p:sp>
@@ -2733,7 +2728,7 @@
           <a:p>
             <a:fld id="{5BCAD085-E8A6-8845-BD4E-CB4CCA059FC4}" type="datetimeFigureOut">
               <a:rPr lang="en-US" smtClean="0"/>
-              <a:t>1/27/13</a:t>
+              <a:t>8/12/2026</a:t>
             </a:fld>
             <a:endParaRPr lang="en-US"/>
           </a:p>
@@ -3092,7 +3087,7 @@
 </file>
 
 <file path=ppt/slides/slide1.xml><?xml version="1.0" encoding="utf-8"?>
-<p:sld xmlns:a="http://schemas.openxmlformats.org/drawingml/2006/main" xmlns:p="http://schemas.openxmlformats.org/presentationml/2006/main" xmlns:r="http://schemas.openxmlformats.org/officeDocument/2006/relationships">
+<p:sld xmlns:a="http://schemas.openxmlformats.org/drawingml/2006/main" xmlns:r="http://schemas.openxmlformats.org/officeDocument/2006/relationships" xmlns:p="http://schemas.openxmlformats.org/presentationml/2006/main">
   <p:cSld>
     <p:spTree>
       <p:nvGrpSpPr>
@@ -3100,51 +3095,51 @@
         <p:cNvGrpSpPr/>
         <p:nvPr/>
       </p:nvGrpSpPr>
-      <p:grpSpPr/>
-      <p:sp>
-        <p:nvSpPr>
-          <p:cNvPr id="2" name="Rectangle 1"/>
-          <p:cNvSpPr/>
+      <p:grpSpPr>
+        <a:xfrm>
+          <a:off x="0" y="0"/>
+          <a:ext cx="0" cy="0"/>
+          <a:chOff x="0" y="0"/>
+          <a:chExt cx="0" cy="0"/>
+        </a:xfrm>
+      </p:grpSpPr>
+      <p:pic>
+        <p:nvPicPr>
+          <p:cNvPr id="8" name="그림 7" descr="The image depicts a serene landscape with a lone tree amidst a snowy, clear sky.&#10;&#10;AI 생성 콘텐츠는 정확하지 않을 수 있습니다.">
+            <a:extLst>
+              <a:ext uri="{FF2B5EF4-FFF2-40B4-BE49-F238E27FC236}">
+                <a16:creationId xmlns:a16="http://schemas.microsoft.com/office/drawing/2014/main" id="{40744C8F-A648-34F1-B8FF-B02F03987F5E}"/>
+              </a:ext>
+            </a:extLst>
+          </p:cNvPr>
+          <p:cNvPicPr>
+            <a:picLocks noChangeAspect="1"/>
+          </p:cNvPicPr>
           <p:nvPr/>
-        </p:nvSpPr>
-        <p:spPr>
-          <a:xfrm>
-            <a:off x="0" y="0"/>
-            <a:ext cx="12191695" cy="6858000"/>
+        </p:nvPicPr>
+        <p:blipFill>
+          <a:blip r:embed="rId2"/>
+          <a:stretch>
+            <a:fillRect/>
+          </a:stretch>
+        </p:blipFill>
+        <p:spPr>
+          <a:xfrm>
+            <a:off x="9480204" y="444829"/>
+            <a:ext cx="2055579" cy="2072998"/>
           </a:xfrm>
           <a:prstGeom prst="rect">
             <a:avLst/>
           </a:prstGeom>
-          <a:solidFill>
-            <a:srgbClr val="FFFFFF"/>
-          </a:solidFill>
-          <a:ln>
-            <a:noFill/>
-          </a:ln>
-          <a:effectLst/>
-        </p:spPr>
-        <p:style>
-          <a:lnRef idx="1">
-            <a:schemeClr val="accent1"/>
-          </a:lnRef>
-          <a:fillRef idx="3">
-            <a:schemeClr val="accent1"/>
-          </a:fillRef>
-          <a:effectRef idx="2">
-            <a:schemeClr val="accent1"/>
-          </a:effectRef>
-          <a:fontRef idx="minor">
-            <a:schemeClr val="lt1"/>
-          </a:fontRef>
-        </p:style>
-        <p:txBody>
-          <a:bodyPr rtlCol="0" anchor="ctr"/>
-          <a:lstStyle/>
-          <a:p>
-            <a:pPr algn="ctr"/>
-          </a:p>
-        </p:txBody>
-      </p:sp>
+          <a:effectLst>
+            <a:outerShdw blurRad="50800" dist="38100" dir="2700000" algn="tl" rotWithShape="0">
+              <a:prstClr val="black">
+                <a:alpha val="40000"/>
+              </a:prstClr>
+            </a:outerShdw>
+          </a:effectLst>
+        </p:spPr>
+      </p:pic>
       <p:sp>
         <p:nvSpPr>
           <p:cNvPr id="3" name="Rounded Rectangle 2"/>
@@ -3170,7 +3165,7 @@
                 <a:srgbClr val="73787E"/>
               </a:gs>
             </a:gsLst>
-            <a:lin scaled="0" ang="18900000"/>
+            <a:lin ang="18900000" scaled="0"/>
           </a:gradFill>
           <a:ln>
             <a:noFill/>
@@ -3202,6 +3197,7 @@
           <a:lstStyle/>
           <a:p>
             <a:pPr algn="ctr"/>
+            <a:endParaRPr/>
           </a:p>
         </p:txBody>
       </p:sp>
@@ -3296,7 +3292,7 @@
         </p:nvSpPr>
         <p:spPr>
           <a:xfrm>
-            <a:off x="932688" y="4370832"/>
+            <a:off x="932688" y="5362956"/>
             <a:ext cx="5852160" cy="27432"/>
           </a:xfrm>
           <a:prstGeom prst="rect">
@@ -3311,7 +3307,7 @@
                 <a:srgbClr val="FFFFFF"/>
               </a:gs>
             </a:gsLst>
-            <a:lin scaled="0" ang="0"/>
+            <a:lin ang="0" scaled="0"/>
           </a:gradFill>
           <a:ln>
             <a:noFill/>
@@ -3337,6 +3333,7 @@
           <a:lstStyle/>
           <a:p>
             <a:pPr algn="ctr"/>
+            <a:endParaRPr/>
           </a:p>
         </p:txBody>
       </p:sp>
@@ -3348,7 +3345,7 @@
         </p:nvSpPr>
         <p:spPr>
           <a:xfrm>
-            <a:off x="914400" y="4663440"/>
+            <a:off x="914400" y="5655564"/>
             <a:ext cx="6949440" cy="310896"/>
           </a:xfrm>
           <a:prstGeom prst="rect">
@@ -3371,15 +3368,152 @@
               </a:spcAft>
             </a:pPr>
             <a:r>
-              <a:rPr sz="1350" b="1">
-                <a:solidFill>
-                  <a:srgbClr val="1C1C1E"/>
-                </a:solidFill>
-                <a:latin typeface="맑은 고딕"/>
-                <a:ea typeface="맑은 고딕"/>
-              </a:rPr>
-              <a:t>2026 제5회 명지대학교 창의적 SW프로그램 경진대회 · 빅데이터 분석 부문</a:t>
-            </a:r>
+              <a:rPr sz="1350" b="1" dirty="0">
+                <a:solidFill>
+                  <a:srgbClr val="1C1C1E"/>
+                </a:solidFill>
+                <a:latin typeface="맑은 고딕"/>
+                <a:ea typeface="맑은 고딕"/>
+              </a:rPr>
+              <a:t>2026 제5회 </a:t>
+            </a:r>
+            <a:r>
+              <a:rPr sz="1350" b="1" dirty="0" err="1">
+                <a:solidFill>
+                  <a:srgbClr val="1C1C1E"/>
+                </a:solidFill>
+                <a:latin typeface="맑은 고딕"/>
+                <a:ea typeface="맑은 고딕"/>
+              </a:rPr>
+              <a:t>명지대학교</a:t>
+            </a:r>
+            <a:r>
+              <a:rPr sz="1350" b="1" dirty="0">
+                <a:solidFill>
+                  <a:srgbClr val="1C1C1E"/>
+                </a:solidFill>
+                <a:latin typeface="맑은 고딕"/>
+                <a:ea typeface="맑은 고딕"/>
+              </a:rPr>
+              <a:t> </a:t>
+            </a:r>
+            <a:r>
+              <a:rPr sz="1350" b="1" dirty="0" err="1">
+                <a:solidFill>
+                  <a:srgbClr val="1C1C1E"/>
+                </a:solidFill>
+                <a:latin typeface="맑은 고딕"/>
+                <a:ea typeface="맑은 고딕"/>
+              </a:rPr>
+              <a:t>창의적</a:t>
+            </a:r>
+            <a:r>
+              <a:rPr sz="1350" b="1" dirty="0">
+                <a:solidFill>
+                  <a:srgbClr val="1C1C1E"/>
+                </a:solidFill>
+                <a:latin typeface="맑은 고딕"/>
+                <a:ea typeface="맑은 고딕"/>
+              </a:rPr>
+              <a:t> </a:t>
+            </a:r>
+            <a:r>
+              <a:rPr sz="1350" b="1" dirty="0" err="1">
+                <a:solidFill>
+                  <a:srgbClr val="1C1C1E"/>
+                </a:solidFill>
+                <a:latin typeface="맑은 고딕"/>
+                <a:ea typeface="맑은 고딕"/>
+              </a:rPr>
+              <a:t>SW프로그램</a:t>
+            </a:r>
+            <a:r>
+              <a:rPr sz="1350" b="1" dirty="0">
+                <a:solidFill>
+                  <a:srgbClr val="1C1C1E"/>
+                </a:solidFill>
+                <a:latin typeface="맑은 고딕"/>
+                <a:ea typeface="맑은 고딕"/>
+              </a:rPr>
+              <a:t> </a:t>
+            </a:r>
+            <a:r>
+              <a:rPr sz="1350" b="1" dirty="0" err="1">
+                <a:solidFill>
+                  <a:srgbClr val="1C1C1E"/>
+                </a:solidFill>
+                <a:latin typeface="맑은 고딕"/>
+                <a:ea typeface="맑은 고딕"/>
+              </a:rPr>
+              <a:t>경진대회</a:t>
+            </a:r>
+            <a:r>
+              <a:rPr sz="1350" b="1" dirty="0">
+                <a:solidFill>
+                  <a:srgbClr val="1C1C1E"/>
+                </a:solidFill>
+                <a:latin typeface="맑은 고딕"/>
+                <a:ea typeface="맑은 고딕"/>
+              </a:rPr>
+              <a:t> · </a:t>
+            </a:r>
+            <a:r>
+              <a:rPr sz="1350" b="1" dirty="0" err="1">
+                <a:solidFill>
+                  <a:srgbClr val="1C1C1E"/>
+                </a:solidFill>
+                <a:latin typeface="맑은 고딕"/>
+                <a:ea typeface="맑은 고딕"/>
+              </a:rPr>
+              <a:t>빅데이터</a:t>
+            </a:r>
+            <a:r>
+              <a:rPr sz="1350" b="1" dirty="0">
+                <a:solidFill>
+                  <a:srgbClr val="1C1C1E"/>
+                </a:solidFill>
+                <a:latin typeface="맑은 고딕"/>
+                <a:ea typeface="맑은 고딕"/>
+              </a:rPr>
+              <a:t> </a:t>
+            </a:r>
+            <a:r>
+              <a:rPr sz="1350" b="1" dirty="0" err="1">
+                <a:solidFill>
+                  <a:srgbClr val="1C1C1E"/>
+                </a:solidFill>
+                <a:latin typeface="맑은 고딕"/>
+                <a:ea typeface="맑은 고딕"/>
+              </a:rPr>
+              <a:t>분석</a:t>
+            </a:r>
+            <a:r>
+              <a:rPr sz="1350" b="1" dirty="0">
+                <a:solidFill>
+                  <a:srgbClr val="1C1C1E"/>
+                </a:solidFill>
+                <a:latin typeface="맑은 고딕"/>
+                <a:ea typeface="맑은 고딕"/>
+              </a:rPr>
+              <a:t> </a:t>
+            </a:r>
+            <a:r>
+              <a:rPr sz="1350" b="1" dirty="0" err="1">
+                <a:solidFill>
+                  <a:srgbClr val="1C1C1E"/>
+                </a:solidFill>
+                <a:latin typeface="맑은 고딕"/>
+                <a:ea typeface="맑은 고딕"/>
+              </a:rPr>
+              <a:t>부문</a:t>
+            </a:r>
+            <a:endParaRPr sz="1350" b="1" dirty="0">
+              <a:solidFill>
+                <a:srgbClr val="1C1C1E"/>
+              </a:solidFill>
+              <a:latin typeface="맑은 고딕"/>
+              <a:ea typeface="맑은 고딕"/>
+            </a:endParaRPr>
           </a:p>
         </p:txBody>
       </p:sp>
@@ -3392,7 +3526,7 @@
 </file>
 
 <file path=ppt/slides/slide10.xml><?xml version="1.0" encoding="utf-8"?>
-<p:sld xmlns:a="http://schemas.openxmlformats.org/drawingml/2006/main" xmlns:p="http://schemas.openxmlformats.org/presentationml/2006/main" xmlns:r="http://schemas.openxmlformats.org/officeDocument/2006/relationships">
+<p:sld xmlns:a="http://schemas.openxmlformats.org/drawingml/2006/main" xmlns:r="http://schemas.openxmlformats.org/officeDocument/2006/relationships" xmlns:p="http://schemas.openxmlformats.org/presentationml/2006/main">
   <p:cSld>
     <p:spTree>
       <p:nvGrpSpPr>
@@ -3400,7 +3534,14 @@
         <p:cNvGrpSpPr/>
         <p:nvPr/>
       </p:nvGrpSpPr>
-      <p:grpSpPr/>
+      <p:grpSpPr>
+        <a:xfrm>
+          <a:off x="0" y="0"/>
+          <a:ext cx="0" cy="0"/>
+          <a:chOff x="0" y="0"/>
+          <a:chExt cx="0" cy="0"/>
+        </a:xfrm>
+      </p:grpSpPr>
       <p:sp>
         <p:nvSpPr>
           <p:cNvPr id="2" name="Rectangle 1"/>
@@ -3442,6 +3583,7 @@
           <a:lstStyle/>
           <a:p>
             <a:pPr algn="ctr"/>
+            <a:endParaRPr/>
           </a:p>
         </p:txBody>
       </p:sp>
@@ -3470,7 +3612,7 @@
                 <a:srgbClr val="73787E"/>
               </a:gs>
             </a:gsLst>
-            <a:lin scaled="0" ang="18900000"/>
+            <a:lin ang="18900000" scaled="0"/>
           </a:gradFill>
           <a:ln>
             <a:noFill/>
@@ -3502,6 +3644,7 @@
           <a:lstStyle/>
           <a:p>
             <a:pPr algn="ctr"/>
+            <a:endParaRPr/>
           </a:p>
         </p:txBody>
       </p:sp>
@@ -3571,7 +3714,7 @@
                 <a:srgbClr val="FFFFFF"/>
               </a:gs>
             </a:gsLst>
-            <a:lin scaled="0" ang="0"/>
+            <a:lin ang="0" scaled="0"/>
           </a:gradFill>
           <a:ln>
             <a:noFill/>
@@ -3597,6 +3740,7 @@
           <a:lstStyle/>
           <a:p>
             <a:pPr algn="ctr"/>
+            <a:endParaRPr/>
           </a:p>
         </p:txBody>
       </p:sp>
@@ -3780,6 +3924,7 @@
           <a:lstStyle/>
           <a:p>
             <a:pPr algn="ctr"/>
+            <a:endParaRPr/>
           </a:p>
         </p:txBody>
       </p:sp>
@@ -3917,6 +4062,7 @@
           <a:lstStyle/>
           <a:p>
             <a:pPr algn="ctr"/>
+            <a:endParaRPr/>
           </a:p>
         </p:txBody>
       </p:sp>
@@ -4054,6 +4200,7 @@
           <a:lstStyle/>
           <a:p>
             <a:pPr algn="ctr"/>
+            <a:endParaRPr/>
           </a:p>
         </p:txBody>
       </p:sp>
@@ -4191,6 +4338,7 @@
           <a:lstStyle/>
           <a:p>
             <a:pPr algn="ctr"/>
+            <a:endParaRPr/>
           </a:p>
         </p:txBody>
       </p:sp>
@@ -4286,7 +4434,7 @@
 </file>
 
 <file path=ppt/slides/slide11.xml><?xml version="1.0" encoding="utf-8"?>
-<p:sld xmlns:a="http://schemas.openxmlformats.org/drawingml/2006/main" xmlns:p="http://schemas.openxmlformats.org/presentationml/2006/main" xmlns:r="http://schemas.openxmlformats.org/officeDocument/2006/relationships">
+<p:sld xmlns:a="http://schemas.openxmlformats.org/drawingml/2006/main" xmlns:r="http://schemas.openxmlformats.org/officeDocument/2006/relationships" xmlns:p="http://schemas.openxmlformats.org/presentationml/2006/main">
   <p:cSld>
     <p:spTree>
       <p:nvGrpSpPr>
@@ -4294,7 +4442,14 @@
         <p:cNvGrpSpPr/>
         <p:nvPr/>
       </p:nvGrpSpPr>
-      <p:grpSpPr/>
+      <p:grpSpPr>
+        <a:xfrm>
+          <a:off x="0" y="0"/>
+          <a:ext cx="0" cy="0"/>
+          <a:chOff x="0" y="0"/>
+          <a:chExt cx="0" cy="0"/>
+        </a:xfrm>
+      </p:grpSpPr>
       <p:sp>
         <p:nvSpPr>
           <p:cNvPr id="2" name="Rectangle 1"/>
@@ -4336,6 +4491,7 @@
           <a:lstStyle/>
           <a:p>
             <a:pPr algn="ctr"/>
+            <a:endParaRPr/>
           </a:p>
         </p:txBody>
       </p:sp>
@@ -4364,7 +4520,7 @@
                 <a:srgbClr val="73787E"/>
               </a:gs>
             </a:gsLst>
-            <a:lin scaled="0" ang="18900000"/>
+            <a:lin ang="18900000" scaled="0"/>
           </a:gradFill>
           <a:ln>
             <a:noFill/>
@@ -4396,6 +4552,7 @@
           <a:lstStyle/>
           <a:p>
             <a:pPr algn="ctr"/>
+            <a:endParaRPr/>
           </a:p>
         </p:txBody>
       </p:sp>
@@ -4465,7 +4622,7 @@
                 <a:srgbClr val="FFFFFF"/>
               </a:gs>
             </a:gsLst>
-            <a:lin scaled="0" ang="0"/>
+            <a:lin ang="0" scaled="0"/>
           </a:gradFill>
           <a:ln>
             <a:noFill/>
@@ -4491,6 +4648,7 @@
           <a:lstStyle/>
           <a:p>
             <a:pPr algn="ctr"/>
+            <a:endParaRPr/>
           </a:p>
         </p:txBody>
       </p:sp>
@@ -4674,6 +4832,7 @@
           <a:lstStyle/>
           <a:p>
             <a:pPr algn="ctr"/>
+            <a:endParaRPr/>
           </a:p>
         </p:txBody>
       </p:sp>
@@ -4785,7 +4944,7 @@
                 <a:srgbClr val="4A4F55"/>
               </a:gs>
             </a:gsLst>
-            <a:lin scaled="0" ang="14700000"/>
+            <a:lin ang="14700000" scaled="0"/>
           </a:gradFill>
           <a:ln>
             <a:noFill/>
@@ -4817,6 +4976,7 @@
           <a:lstStyle/>
           <a:p>
             <a:pPr algn="ctr"/>
+            <a:endParaRPr/>
           </a:p>
         </p:txBody>
       </p:sp>
@@ -4914,6 +5074,7 @@
           <a:lstStyle/>
           <a:p>
             <a:pPr algn="ctr"/>
+            <a:endParaRPr/>
           </a:p>
         </p:txBody>
       </p:sp>
@@ -4985,7 +5146,7 @@
                 <a:srgbClr val="4A4F55"/>
               </a:gs>
             </a:gsLst>
-            <a:lin scaled="0" ang="14700000"/>
+            <a:lin ang="14700000" scaled="0"/>
           </a:gradFill>
           <a:ln>
             <a:noFill/>
@@ -5017,6 +5178,7 @@
           <a:lstStyle/>
           <a:p>
             <a:pPr algn="ctr"/>
+            <a:endParaRPr/>
           </a:p>
         </p:txBody>
       </p:sp>
@@ -5114,6 +5276,7 @@
           <a:lstStyle/>
           <a:p>
             <a:pPr algn="ctr"/>
+            <a:endParaRPr/>
           </a:p>
         </p:txBody>
       </p:sp>
@@ -5185,7 +5348,7 @@
                 <a:srgbClr val="4A4F55"/>
               </a:gs>
             </a:gsLst>
-            <a:lin scaled="0" ang="14700000"/>
+            <a:lin ang="14700000" scaled="0"/>
           </a:gradFill>
           <a:ln>
             <a:noFill/>
@@ -5217,6 +5380,7 @@
           <a:lstStyle/>
           <a:p>
             <a:pPr algn="ctr"/>
+            <a:endParaRPr/>
           </a:p>
         </p:txBody>
       </p:sp>
@@ -5314,6 +5478,7 @@
           <a:lstStyle/>
           <a:p>
             <a:pPr algn="ctr"/>
+            <a:endParaRPr/>
           </a:p>
         </p:txBody>
       </p:sp>
@@ -5432,7 +5597,7 @@
 </file>
 
 <file path=ppt/slides/slide12.xml><?xml version="1.0" encoding="utf-8"?>
-<p:sld xmlns:a="http://schemas.openxmlformats.org/drawingml/2006/main" xmlns:p="http://schemas.openxmlformats.org/presentationml/2006/main" xmlns:r="http://schemas.openxmlformats.org/officeDocument/2006/relationships">
+<p:sld xmlns:a="http://schemas.openxmlformats.org/drawingml/2006/main" xmlns:r="http://schemas.openxmlformats.org/officeDocument/2006/relationships" xmlns:p="http://schemas.openxmlformats.org/presentationml/2006/main">
   <p:cSld>
     <p:spTree>
       <p:nvGrpSpPr>
@@ -5440,7 +5605,14 @@
         <p:cNvGrpSpPr/>
         <p:nvPr/>
       </p:nvGrpSpPr>
-      <p:grpSpPr/>
+      <p:grpSpPr>
+        <a:xfrm>
+          <a:off x="0" y="0"/>
+          <a:ext cx="0" cy="0"/>
+          <a:chOff x="0" y="0"/>
+          <a:chExt cx="0" cy="0"/>
+        </a:xfrm>
+      </p:grpSpPr>
       <p:sp>
         <p:nvSpPr>
           <p:cNvPr id="2" name="Rectangle 1"/>
@@ -5482,6 +5654,7 @@
           <a:lstStyle/>
           <a:p>
             <a:pPr algn="ctr"/>
+            <a:endParaRPr/>
           </a:p>
         </p:txBody>
       </p:sp>
@@ -5510,7 +5683,7 @@
                 <a:srgbClr val="73787E"/>
               </a:gs>
             </a:gsLst>
-            <a:lin scaled="0" ang="18900000"/>
+            <a:lin ang="18900000" scaled="0"/>
           </a:gradFill>
           <a:ln>
             <a:noFill/>
@@ -5542,6 +5715,7 @@
           <a:lstStyle/>
           <a:p>
             <a:pPr algn="ctr"/>
+            <a:endParaRPr/>
           </a:p>
         </p:txBody>
       </p:sp>
@@ -5611,7 +5785,7 @@
                 <a:srgbClr val="FFFFFF"/>
               </a:gs>
             </a:gsLst>
-            <a:lin scaled="0" ang="0"/>
+            <a:lin ang="0" scaled="0"/>
           </a:gradFill>
           <a:ln>
             <a:noFill/>
@@ -5637,6 +5811,7 @@
           <a:lstStyle/>
           <a:p>
             <a:pPr algn="ctr"/>
+            <a:endParaRPr/>
           </a:p>
         </p:txBody>
       </p:sp>
@@ -5820,6 +5995,7 @@
           <a:lstStyle/>
           <a:p>
             <a:pPr algn="ctr"/>
+            <a:endParaRPr/>
           </a:p>
         </p:txBody>
       </p:sp>
@@ -5977,6 +6153,7 @@
           <a:lstStyle/>
           <a:p>
             <a:pPr algn="ctr"/>
+            <a:endParaRPr/>
           </a:p>
         </p:txBody>
       </p:sp>
@@ -6114,6 +6291,7 @@
           <a:lstStyle/>
           <a:p>
             <a:pPr algn="ctr"/>
+            <a:endParaRPr/>
           </a:p>
         </p:txBody>
       </p:sp>
@@ -6249,7 +6427,7 @@
 </file>
 
 <file path=ppt/slides/slide13.xml><?xml version="1.0" encoding="utf-8"?>
-<p:sld xmlns:a="http://schemas.openxmlformats.org/drawingml/2006/main" xmlns:p="http://schemas.openxmlformats.org/presentationml/2006/main" xmlns:r="http://schemas.openxmlformats.org/officeDocument/2006/relationships">
+<p:sld xmlns:a="http://schemas.openxmlformats.org/drawingml/2006/main" xmlns:r="http://schemas.openxmlformats.org/officeDocument/2006/relationships" xmlns:p="http://schemas.openxmlformats.org/presentationml/2006/main">
   <p:cSld>
     <p:spTree>
       <p:nvGrpSpPr>
@@ -6257,7 +6435,14 @@
         <p:cNvGrpSpPr/>
         <p:nvPr/>
       </p:nvGrpSpPr>
-      <p:grpSpPr/>
+      <p:grpSpPr>
+        <a:xfrm>
+          <a:off x="0" y="0"/>
+          <a:ext cx="0" cy="0"/>
+          <a:chOff x="0" y="0"/>
+          <a:chExt cx="0" cy="0"/>
+        </a:xfrm>
+      </p:grpSpPr>
       <p:sp>
         <p:nvSpPr>
           <p:cNvPr id="2" name="Rectangle 1"/>
@@ -6299,6 +6484,7 @@
           <a:lstStyle/>
           <a:p>
             <a:pPr algn="ctr"/>
+            <a:endParaRPr/>
           </a:p>
         </p:txBody>
       </p:sp>
@@ -6327,7 +6513,7 @@
                 <a:srgbClr val="73787E"/>
               </a:gs>
             </a:gsLst>
-            <a:lin scaled="0" ang="18900000"/>
+            <a:lin ang="18900000" scaled="0"/>
           </a:gradFill>
           <a:ln>
             <a:noFill/>
@@ -6359,6 +6545,7 @@
           <a:lstStyle/>
           <a:p>
             <a:pPr algn="ctr"/>
+            <a:endParaRPr/>
           </a:p>
         </p:txBody>
       </p:sp>
@@ -6428,7 +6615,7 @@
                 <a:srgbClr val="FFFFFF"/>
               </a:gs>
             </a:gsLst>
-            <a:lin scaled="0" ang="0"/>
+            <a:lin ang="0" scaled="0"/>
           </a:gradFill>
           <a:ln>
             <a:noFill/>
@@ -6454,6 +6641,7 @@
           <a:lstStyle/>
           <a:p>
             <a:pPr algn="ctr"/>
+            <a:endParaRPr/>
           </a:p>
         </p:txBody>
       </p:sp>
@@ -6594,6 +6782,7 @@
           <a:lstStyle/>
           <a:p>
             <a:pPr algn="ctr"/>
+            <a:endParaRPr/>
           </a:p>
         </p:txBody>
       </p:sp>
@@ -6731,6 +6920,7 @@
           <a:lstStyle/>
           <a:p>
             <a:pPr algn="ctr"/>
+            <a:endParaRPr/>
           </a:p>
         </p:txBody>
       </p:sp>
@@ -6868,6 +7058,7 @@
           <a:lstStyle/>
           <a:p>
             <a:pPr algn="ctr"/>
+            <a:endParaRPr/>
           </a:p>
         </p:txBody>
       </p:sp>
@@ -7036,8 +7227,20 @@
                 <a:tableStyleId>{5C22544A-7EE6-4342-B048-85BDC9FD1C3A}</a:tableStyleId>
               </a:tblPr>
               <a:tblGrid>
-                <a:gridCol w="3291840"/>
-                <a:gridCol w="8001000"/>
+                <a:gridCol w="3291840">
+                  <a:extLst>
+                    <a:ext uri="{9D8B030D-6E8A-4147-A177-3AD203B41FA5}">
+                      <a16:colId xmlns:a16="http://schemas.microsoft.com/office/drawing/2014/main" val="20000"/>
+                    </a:ext>
+                  </a:extLst>
+                </a:gridCol>
+                <a:gridCol w="8001000">
+                  <a:extLst>
+                    <a:ext uri="{9D8B030D-6E8A-4147-A177-3AD203B41FA5}">
+                      <a16:colId xmlns:a16="http://schemas.microsoft.com/office/drawing/2014/main" val="20001"/>
+                    </a:ext>
+                  </a:extLst>
+                </a:gridCol>
               </a:tblGrid>
               <a:tr h="457200">
                 <a:tc>
@@ -7062,7 +7265,7 @@
                       </a:r>
                     </a:p>
                   </a:txBody>
-                  <a:tcPr marT="27432" marB="27432" marL="73152" marR="73152" anchor="ctr">
+                  <a:tcPr marL="73152" marR="73152" marT="27432" marB="27432" anchor="ctr">
                     <a:solidFill>
                       <a:srgbClr val="33393F"/>
                     </a:solidFill>
@@ -7090,12 +7293,17 @@
                       </a:r>
                     </a:p>
                   </a:txBody>
-                  <a:tcPr marT="27432" marB="27432" marL="73152" marR="73152" anchor="ctr">
+                  <a:tcPr marL="73152" marR="73152" marT="27432" marB="27432" anchor="ctr">
                     <a:solidFill>
                       <a:srgbClr val="33393F"/>
                     </a:solidFill>
                   </a:tcPr>
                 </a:tc>
+                <a:extLst>
+                  <a:ext uri="{0D108BD9-81ED-4DB2-BD59-A6C34878D82A}">
+                    <a16:rowId xmlns:a16="http://schemas.microsoft.com/office/drawing/2014/main" val="10000"/>
+                  </a:ext>
+                </a:extLst>
               </a:tr>
               <a:tr h="457200">
                 <a:tc>
@@ -7120,7 +7328,7 @@
                       </a:r>
                     </a:p>
                   </a:txBody>
-                  <a:tcPr marT="27432" marB="27432" marL="73152" marR="73152" anchor="ctr">
+                  <a:tcPr marL="73152" marR="73152" marT="27432" marB="27432" anchor="ctr">
                     <a:solidFill>
                       <a:srgbClr val="FFFFFF"/>
                     </a:solidFill>
@@ -7148,12 +7356,17 @@
                       </a:r>
                     </a:p>
                   </a:txBody>
-                  <a:tcPr marT="27432" marB="27432" marL="73152" marR="73152" anchor="ctr">
+                  <a:tcPr marL="73152" marR="73152" marT="27432" marB="27432" anchor="ctr">
                     <a:solidFill>
                       <a:srgbClr val="FFFFFF"/>
                     </a:solidFill>
                   </a:tcPr>
                 </a:tc>
+                <a:extLst>
+                  <a:ext uri="{0D108BD9-81ED-4DB2-BD59-A6C34878D82A}">
+                    <a16:rowId xmlns:a16="http://schemas.microsoft.com/office/drawing/2014/main" val="10001"/>
+                  </a:ext>
+                </a:extLst>
               </a:tr>
               <a:tr h="457200">
                 <a:tc>
@@ -7178,7 +7391,7 @@
                       </a:r>
                     </a:p>
                   </a:txBody>
-                  <a:tcPr marT="27432" marB="27432" marL="73152" marR="73152" anchor="ctr">
+                  <a:tcPr marL="73152" marR="73152" marT="27432" marB="27432" anchor="ctr">
                     <a:solidFill>
                       <a:srgbClr val="F6F7F8"/>
                     </a:solidFill>
@@ -7206,12 +7419,17 @@
                       </a:r>
                     </a:p>
                   </a:txBody>
-                  <a:tcPr marT="27432" marB="27432" marL="73152" marR="73152" anchor="ctr">
+                  <a:tcPr marL="73152" marR="73152" marT="27432" marB="27432" anchor="ctr">
                     <a:solidFill>
                       <a:srgbClr val="F6F7F8"/>
                     </a:solidFill>
                   </a:tcPr>
                 </a:tc>
+                <a:extLst>
+                  <a:ext uri="{0D108BD9-81ED-4DB2-BD59-A6C34878D82A}">
+                    <a16:rowId xmlns:a16="http://schemas.microsoft.com/office/drawing/2014/main" val="10002"/>
+                  </a:ext>
+                </a:extLst>
               </a:tr>
               <a:tr h="457200">
                 <a:tc>
@@ -7236,7 +7454,7 @@
                       </a:r>
                     </a:p>
                   </a:txBody>
-                  <a:tcPr marT="27432" marB="27432" marL="73152" marR="73152" anchor="ctr">
+                  <a:tcPr marL="73152" marR="73152" marT="27432" marB="27432" anchor="ctr">
                     <a:solidFill>
                       <a:srgbClr val="FFFFFF"/>
                     </a:solidFill>
@@ -7264,12 +7482,17 @@
                       </a:r>
                     </a:p>
                   </a:txBody>
-                  <a:tcPr marT="27432" marB="27432" marL="73152" marR="73152" anchor="ctr">
+                  <a:tcPr marL="73152" marR="73152" marT="27432" marB="27432" anchor="ctr">
                     <a:solidFill>
                       <a:srgbClr val="FFFFFF"/>
                     </a:solidFill>
                   </a:tcPr>
                 </a:tc>
+                <a:extLst>
+                  <a:ext uri="{0D108BD9-81ED-4DB2-BD59-A6C34878D82A}">
+                    <a16:rowId xmlns:a16="http://schemas.microsoft.com/office/drawing/2014/main" val="10003"/>
+                  </a:ext>
+                </a:extLst>
               </a:tr>
               <a:tr h="457200">
                 <a:tc>
@@ -7294,7 +7517,7 @@
                       </a:r>
                     </a:p>
                   </a:txBody>
-                  <a:tcPr marT="27432" marB="27432" marL="73152" marR="73152" anchor="ctr">
+                  <a:tcPr marL="73152" marR="73152" marT="27432" marB="27432" anchor="ctr">
                     <a:solidFill>
                       <a:srgbClr val="F6F7F8"/>
                     </a:solidFill>
@@ -7322,12 +7545,17 @@
                       </a:r>
                     </a:p>
                   </a:txBody>
-                  <a:tcPr marT="27432" marB="27432" marL="73152" marR="73152" anchor="ctr">
+                  <a:tcPr marL="73152" marR="73152" marT="27432" marB="27432" anchor="ctr">
                     <a:solidFill>
                       <a:srgbClr val="F6F7F8"/>
                     </a:solidFill>
                   </a:tcPr>
                 </a:tc>
+                <a:extLst>
+                  <a:ext uri="{0D108BD9-81ED-4DB2-BD59-A6C34878D82A}">
+                    <a16:rowId xmlns:a16="http://schemas.microsoft.com/office/drawing/2014/main" val="10004"/>
+                  </a:ext>
+                </a:extLst>
               </a:tr>
             </a:tbl>
           </a:graphicData>
@@ -7342,7 +7570,7 @@
 </file>
 
 <file path=ppt/slides/slide14.xml><?xml version="1.0" encoding="utf-8"?>
-<p:sld xmlns:a="http://schemas.openxmlformats.org/drawingml/2006/main" xmlns:p="http://schemas.openxmlformats.org/presentationml/2006/main" xmlns:r="http://schemas.openxmlformats.org/officeDocument/2006/relationships">
+<p:sld xmlns:a="http://schemas.openxmlformats.org/drawingml/2006/main" xmlns:r="http://schemas.openxmlformats.org/officeDocument/2006/relationships" xmlns:p="http://schemas.openxmlformats.org/presentationml/2006/main">
   <p:cSld>
     <p:spTree>
       <p:nvGrpSpPr>
@@ -7350,7 +7578,14 @@
         <p:cNvGrpSpPr/>
         <p:nvPr/>
       </p:nvGrpSpPr>
-      <p:grpSpPr/>
+      <p:grpSpPr>
+        <a:xfrm>
+          <a:off x="0" y="0"/>
+          <a:ext cx="0" cy="0"/>
+          <a:chOff x="0" y="0"/>
+          <a:chExt cx="0" cy="0"/>
+        </a:xfrm>
+      </p:grpSpPr>
       <p:sp>
         <p:nvSpPr>
           <p:cNvPr id="2" name="Rectangle 1"/>
@@ -7392,6 +7627,7 @@
           <a:lstStyle/>
           <a:p>
             <a:pPr algn="ctr"/>
+            <a:endParaRPr/>
           </a:p>
         </p:txBody>
       </p:sp>
@@ -7420,7 +7656,7 @@
                 <a:srgbClr val="73787E"/>
               </a:gs>
             </a:gsLst>
-            <a:lin scaled="0" ang="18900000"/>
+            <a:lin ang="18900000" scaled="0"/>
           </a:gradFill>
           <a:ln>
             <a:noFill/>
@@ -7452,6 +7688,7 @@
           <a:lstStyle/>
           <a:p>
             <a:pPr algn="ctr"/>
+            <a:endParaRPr/>
           </a:p>
         </p:txBody>
       </p:sp>
@@ -7521,7 +7758,7 @@
                 <a:srgbClr val="FFFFFF"/>
               </a:gs>
             </a:gsLst>
-            <a:lin scaled="0" ang="0"/>
+            <a:lin ang="0" scaled="0"/>
           </a:gradFill>
           <a:ln>
             <a:noFill/>
@@ -7547,6 +7784,7 @@
           <a:lstStyle/>
           <a:p>
             <a:pPr algn="ctr"/>
+            <a:endParaRPr/>
           </a:p>
         </p:txBody>
       </p:sp>
@@ -7655,9 +7893,27 @@
                 <a:tableStyleId>{5C22544A-7EE6-4342-B048-85BDC9FD1C3A}</a:tableStyleId>
               </a:tblPr>
               <a:tblGrid>
-                <a:gridCol w="1920240"/>
-                <a:gridCol w="6812280"/>
-                <a:gridCol w="2560320"/>
+                <a:gridCol w="1920240">
+                  <a:extLst>
+                    <a:ext uri="{9D8B030D-6E8A-4147-A177-3AD203B41FA5}">
+                      <a16:colId xmlns:a16="http://schemas.microsoft.com/office/drawing/2014/main" val="20000"/>
+                    </a:ext>
+                  </a:extLst>
+                </a:gridCol>
+                <a:gridCol w="6812280">
+                  <a:extLst>
+                    <a:ext uri="{9D8B030D-6E8A-4147-A177-3AD203B41FA5}">
+                      <a16:colId xmlns:a16="http://schemas.microsoft.com/office/drawing/2014/main" val="20001"/>
+                    </a:ext>
+                  </a:extLst>
+                </a:gridCol>
+                <a:gridCol w="2560320">
+                  <a:extLst>
+                    <a:ext uri="{9D8B030D-6E8A-4147-A177-3AD203B41FA5}">
+                      <a16:colId xmlns:a16="http://schemas.microsoft.com/office/drawing/2014/main" val="20002"/>
+                    </a:ext>
+                  </a:extLst>
+                </a:gridCol>
               </a:tblGrid>
               <a:tr h="475488">
                 <a:tc>
@@ -7682,7 +7938,7 @@
                       </a:r>
                     </a:p>
                   </a:txBody>
-                  <a:tcPr marT="27432" marB="27432" marL="73152" marR="73152" anchor="ctr">
+                  <a:tcPr marL="73152" marR="73152" marT="27432" marB="27432" anchor="ctr">
                     <a:solidFill>
                       <a:srgbClr val="33393F"/>
                     </a:solidFill>
@@ -7710,7 +7966,7 @@
                       </a:r>
                     </a:p>
                   </a:txBody>
-                  <a:tcPr marT="27432" marB="27432" marL="73152" marR="73152" anchor="ctr">
+                  <a:tcPr marL="73152" marR="73152" marT="27432" marB="27432" anchor="ctr">
                     <a:solidFill>
                       <a:srgbClr val="33393F"/>
                     </a:solidFill>
@@ -7738,12 +7994,17 @@
                       </a:r>
                     </a:p>
                   </a:txBody>
-                  <a:tcPr marT="27432" marB="27432" marL="73152" marR="73152" anchor="ctr">
+                  <a:tcPr marL="73152" marR="73152" marT="27432" marB="27432" anchor="ctr">
                     <a:solidFill>
                       <a:srgbClr val="33393F"/>
                     </a:solidFill>
                   </a:tcPr>
                 </a:tc>
+                <a:extLst>
+                  <a:ext uri="{0D108BD9-81ED-4DB2-BD59-A6C34878D82A}">
+                    <a16:rowId xmlns:a16="http://schemas.microsoft.com/office/drawing/2014/main" val="10000"/>
+                  </a:ext>
+                </a:extLst>
               </a:tr>
               <a:tr h="475488">
                 <a:tc>
@@ -7768,7 +8029,7 @@
                       </a:r>
                     </a:p>
                   </a:txBody>
-                  <a:tcPr marT="27432" marB="27432" marL="73152" marR="73152" anchor="ctr">
+                  <a:tcPr marL="73152" marR="73152" marT="27432" marB="27432" anchor="ctr">
                     <a:solidFill>
                       <a:srgbClr val="FFFFFF"/>
                     </a:solidFill>
@@ -7796,7 +8057,7 @@
                       </a:r>
                     </a:p>
                   </a:txBody>
-                  <a:tcPr marT="27432" marB="27432" marL="73152" marR="73152" anchor="ctr">
+                  <a:tcPr marL="73152" marR="73152" marT="27432" marB="27432" anchor="ctr">
                     <a:solidFill>
                       <a:srgbClr val="FFFFFF"/>
                     </a:solidFill>
@@ -7824,12 +8085,17 @@
                       </a:r>
                     </a:p>
                   </a:txBody>
-                  <a:tcPr marT="27432" marB="27432" marL="73152" marR="73152" anchor="ctr">
+                  <a:tcPr marL="73152" marR="73152" marT="27432" marB="27432" anchor="ctr">
                     <a:solidFill>
                       <a:srgbClr val="FFFFFF"/>
                     </a:solidFill>
                   </a:tcPr>
                 </a:tc>
+                <a:extLst>
+                  <a:ext uri="{0D108BD9-81ED-4DB2-BD59-A6C34878D82A}">
+                    <a16:rowId xmlns:a16="http://schemas.microsoft.com/office/drawing/2014/main" val="10001"/>
+                  </a:ext>
+                </a:extLst>
               </a:tr>
               <a:tr h="475488">
                 <a:tc>
@@ -7854,7 +8120,7 @@
                       </a:r>
                     </a:p>
                   </a:txBody>
-                  <a:tcPr marT="27432" marB="27432" marL="73152" marR="73152" anchor="ctr">
+                  <a:tcPr marL="73152" marR="73152" marT="27432" marB="27432" anchor="ctr">
                     <a:solidFill>
                       <a:srgbClr val="F6F7F8"/>
                     </a:solidFill>
@@ -7882,7 +8148,7 @@
                       </a:r>
                     </a:p>
                   </a:txBody>
-                  <a:tcPr marT="27432" marB="27432" marL="73152" marR="73152" anchor="ctr">
+                  <a:tcPr marL="73152" marR="73152" marT="27432" marB="27432" anchor="ctr">
                     <a:solidFill>
                       <a:srgbClr val="F6F7F8"/>
                     </a:solidFill>
@@ -7910,12 +8176,17 @@
                       </a:r>
                     </a:p>
                   </a:txBody>
-                  <a:tcPr marT="27432" marB="27432" marL="73152" marR="73152" anchor="ctr">
+                  <a:tcPr marL="73152" marR="73152" marT="27432" marB="27432" anchor="ctr">
                     <a:solidFill>
                       <a:srgbClr val="F6F7F8"/>
                     </a:solidFill>
                   </a:tcPr>
                 </a:tc>
+                <a:extLst>
+                  <a:ext uri="{0D108BD9-81ED-4DB2-BD59-A6C34878D82A}">
+                    <a16:rowId xmlns:a16="http://schemas.microsoft.com/office/drawing/2014/main" val="10002"/>
+                  </a:ext>
+                </a:extLst>
               </a:tr>
               <a:tr h="475488">
                 <a:tc>
@@ -7940,7 +8211,7 @@
                       </a:r>
                     </a:p>
                   </a:txBody>
-                  <a:tcPr marT="27432" marB="27432" marL="73152" marR="73152" anchor="ctr">
+                  <a:tcPr marL="73152" marR="73152" marT="27432" marB="27432" anchor="ctr">
                     <a:solidFill>
                       <a:srgbClr val="FFFFFF"/>
                     </a:solidFill>
@@ -7968,7 +8239,7 @@
                       </a:r>
                     </a:p>
                   </a:txBody>
-                  <a:tcPr marT="27432" marB="27432" marL="73152" marR="73152" anchor="ctr">
+                  <a:tcPr marL="73152" marR="73152" marT="27432" marB="27432" anchor="ctr">
                     <a:solidFill>
                       <a:srgbClr val="FFFFFF"/>
                     </a:solidFill>
@@ -7996,12 +8267,17 @@
                       </a:r>
                     </a:p>
                   </a:txBody>
-                  <a:tcPr marT="27432" marB="27432" marL="73152" marR="73152" anchor="ctr">
+                  <a:tcPr marL="73152" marR="73152" marT="27432" marB="27432" anchor="ctr">
                     <a:solidFill>
                       <a:srgbClr val="FFFFFF"/>
                     </a:solidFill>
                   </a:tcPr>
                 </a:tc>
+                <a:extLst>
+                  <a:ext uri="{0D108BD9-81ED-4DB2-BD59-A6C34878D82A}">
+                    <a16:rowId xmlns:a16="http://schemas.microsoft.com/office/drawing/2014/main" val="10003"/>
+                  </a:ext>
+                </a:extLst>
               </a:tr>
               <a:tr h="475488">
                 <a:tc>
@@ -8026,7 +8302,7 @@
                       </a:r>
                     </a:p>
                   </a:txBody>
-                  <a:tcPr marT="27432" marB="27432" marL="73152" marR="73152" anchor="ctr">
+                  <a:tcPr marL="73152" marR="73152" marT="27432" marB="27432" anchor="ctr">
                     <a:solidFill>
                       <a:srgbClr val="F6F7F8"/>
                     </a:solidFill>
@@ -8054,7 +8330,7 @@
                       </a:r>
                     </a:p>
                   </a:txBody>
-                  <a:tcPr marT="27432" marB="27432" marL="73152" marR="73152" anchor="ctr">
+                  <a:tcPr marL="73152" marR="73152" marT="27432" marB="27432" anchor="ctr">
                     <a:solidFill>
                       <a:srgbClr val="F6F7F8"/>
                     </a:solidFill>
@@ -8082,12 +8358,17 @@
                       </a:r>
                     </a:p>
                   </a:txBody>
-                  <a:tcPr marT="27432" marB="27432" marL="73152" marR="73152" anchor="ctr">
+                  <a:tcPr marL="73152" marR="73152" marT="27432" marB="27432" anchor="ctr">
                     <a:solidFill>
                       <a:srgbClr val="F6F7F8"/>
                     </a:solidFill>
                   </a:tcPr>
                 </a:tc>
+                <a:extLst>
+                  <a:ext uri="{0D108BD9-81ED-4DB2-BD59-A6C34878D82A}">
+                    <a16:rowId xmlns:a16="http://schemas.microsoft.com/office/drawing/2014/main" val="10004"/>
+                  </a:ext>
+                </a:extLst>
               </a:tr>
               <a:tr h="475488">
                 <a:tc>
@@ -8112,7 +8393,7 @@
                       </a:r>
                     </a:p>
                   </a:txBody>
-                  <a:tcPr marT="27432" marB="27432" marL="73152" marR="73152" anchor="ctr">
+                  <a:tcPr marL="73152" marR="73152" marT="27432" marB="27432" anchor="ctr">
                     <a:solidFill>
                       <a:srgbClr val="FFFFFF"/>
                     </a:solidFill>
@@ -8140,7 +8421,7 @@
                       </a:r>
                     </a:p>
                   </a:txBody>
-                  <a:tcPr marT="27432" marB="27432" marL="73152" marR="73152" anchor="ctr">
+                  <a:tcPr marL="73152" marR="73152" marT="27432" marB="27432" anchor="ctr">
                     <a:solidFill>
                       <a:srgbClr val="FFFFFF"/>
                     </a:solidFill>
@@ -8168,12 +8449,17 @@
                       </a:r>
                     </a:p>
                   </a:txBody>
-                  <a:tcPr marT="27432" marB="27432" marL="73152" marR="73152" anchor="ctr">
+                  <a:tcPr marL="73152" marR="73152" marT="27432" marB="27432" anchor="ctr">
                     <a:solidFill>
                       <a:srgbClr val="FFFFFF"/>
                     </a:solidFill>
                   </a:tcPr>
                 </a:tc>
+                <a:extLst>
+                  <a:ext uri="{0D108BD9-81ED-4DB2-BD59-A6C34878D82A}">
+                    <a16:rowId xmlns:a16="http://schemas.microsoft.com/office/drawing/2014/main" val="10005"/>
+                  </a:ext>
+                </a:extLst>
               </a:tr>
               <a:tr h="475488">
                 <a:tc>
@@ -8198,7 +8484,7 @@
                       </a:r>
                     </a:p>
                   </a:txBody>
-                  <a:tcPr marT="27432" marB="27432" marL="73152" marR="73152" anchor="ctr">
+                  <a:tcPr marL="73152" marR="73152" marT="27432" marB="27432" anchor="ctr">
                     <a:solidFill>
                       <a:srgbClr val="F6F7F8"/>
                     </a:solidFill>
@@ -8226,7 +8512,7 @@
                       </a:r>
                     </a:p>
                   </a:txBody>
-                  <a:tcPr marT="27432" marB="27432" marL="73152" marR="73152" anchor="ctr">
+                  <a:tcPr marL="73152" marR="73152" marT="27432" marB="27432" anchor="ctr">
                     <a:solidFill>
                       <a:srgbClr val="F6F7F8"/>
                     </a:solidFill>
@@ -8254,12 +8540,17 @@
                       </a:r>
                     </a:p>
                   </a:txBody>
-                  <a:tcPr marT="27432" marB="27432" marL="73152" marR="73152" anchor="ctr">
+                  <a:tcPr marL="73152" marR="73152" marT="27432" marB="27432" anchor="ctr">
                     <a:solidFill>
                       <a:srgbClr val="F6F7F8"/>
                     </a:solidFill>
                   </a:tcPr>
                 </a:tc>
+                <a:extLst>
+                  <a:ext uri="{0D108BD9-81ED-4DB2-BD59-A6C34878D82A}">
+                    <a16:rowId xmlns:a16="http://schemas.microsoft.com/office/drawing/2014/main" val="10006"/>
+                  </a:ext>
+                </a:extLst>
               </a:tr>
             </a:tbl>
           </a:graphicData>
@@ -8316,6 +8607,7 @@
           <a:lstStyle/>
           <a:p>
             <a:pPr algn="ctr"/>
+            <a:endParaRPr/>
           </a:p>
         </p:txBody>
       </p:sp>
@@ -8453,6 +8745,7 @@
           <a:lstStyle/>
           <a:p>
             <a:pPr algn="ctr"/>
+            <a:endParaRPr/>
           </a:p>
         </p:txBody>
       </p:sp>
@@ -8548,7 +8841,7 @@
 </file>
 
 <file path=ppt/slides/slide2.xml><?xml version="1.0" encoding="utf-8"?>
-<p:sld xmlns:a="http://schemas.openxmlformats.org/drawingml/2006/main" xmlns:p="http://schemas.openxmlformats.org/presentationml/2006/main" xmlns:r="http://schemas.openxmlformats.org/officeDocument/2006/relationships">
+<p:sld xmlns:a="http://schemas.openxmlformats.org/drawingml/2006/main" xmlns:r="http://schemas.openxmlformats.org/officeDocument/2006/relationships" xmlns:p="http://schemas.openxmlformats.org/presentationml/2006/main">
   <p:cSld>
     <p:spTree>
       <p:nvGrpSpPr>
@@ -8556,7 +8849,14 @@
         <p:cNvGrpSpPr/>
         <p:nvPr/>
       </p:nvGrpSpPr>
-      <p:grpSpPr/>
+      <p:grpSpPr>
+        <a:xfrm>
+          <a:off x="0" y="0"/>
+          <a:ext cx="0" cy="0"/>
+          <a:chOff x="0" y="0"/>
+          <a:chExt cx="0" cy="0"/>
+        </a:xfrm>
+      </p:grpSpPr>
       <p:sp>
         <p:nvSpPr>
           <p:cNvPr id="2" name="Rectangle 1"/>
@@ -8598,6 +8898,7 @@
           <a:lstStyle/>
           <a:p>
             <a:pPr algn="ctr"/>
+            <a:endParaRPr/>
           </a:p>
         </p:txBody>
       </p:sp>
@@ -8626,7 +8927,7 @@
                 <a:srgbClr val="73787E"/>
               </a:gs>
             </a:gsLst>
-            <a:lin scaled="0" ang="18900000"/>
+            <a:lin ang="18900000" scaled="0"/>
           </a:gradFill>
           <a:ln>
             <a:noFill/>
@@ -8658,6 +8959,7 @@
           <a:lstStyle/>
           <a:p>
             <a:pPr algn="ctr"/>
+            <a:endParaRPr/>
           </a:p>
         </p:txBody>
       </p:sp>
@@ -8727,7 +9029,7 @@
                 <a:srgbClr val="FFFFFF"/>
               </a:gs>
             </a:gsLst>
-            <a:lin scaled="0" ang="0"/>
+            <a:lin ang="0" scaled="0"/>
           </a:gradFill>
           <a:ln>
             <a:noFill/>
@@ -8753,6 +9055,7 @@
           <a:lstStyle/>
           <a:p>
             <a:pPr algn="ctr"/>
+            <a:endParaRPr/>
           </a:p>
         </p:txBody>
       </p:sp>
@@ -8850,6 +9153,7 @@
           <a:lstStyle/>
           <a:p>
             <a:pPr algn="ctr"/>
+            <a:endParaRPr/>
           </a:p>
         </p:txBody>
       </p:sp>
@@ -8862,7 +9166,7 @@
         <p:spPr>
           <a:xfrm>
             <a:off x="685800" y="1444752"/>
-            <a:ext cx="5166360" cy="1261872"/>
+            <a:ext cx="5166360" cy="1005916"/>
           </a:xfrm>
           <a:prstGeom prst="rect">
             <a:avLst/>
@@ -8884,35 +9188,52 @@
               </a:spcAft>
             </a:pPr>
             <a:r>
-              <a:rPr sz="1350" b="1">
+              <a:rPr sz="1350" b="1" dirty="0">
                 <a:solidFill>
                   <a:srgbClr val="33393F"/>
                 </a:solidFill>
                 <a:latin typeface="맑은 고딕"/>
                 <a:ea typeface="맑은 고딕"/>
               </a:rPr>
-              <a:t>Ⅰ. 문제 정의</a:t>
-            </a:r>
-          </a:p>
-          <a:p>
-            <a:pPr>
-              <a:lnSpc>
-                <a:spcPct val="114000"/>
-              </a:lnSpc>
-              <a:spcAft>
-                <a:spcPts val="400"/>
-              </a:spcAft>
-            </a:pPr>
-            <a:r>
-              <a:rPr sz="1050" b="0">
-                <a:solidFill>
-                  <a:srgbClr val="767A7F"/>
-                </a:solidFill>
-                <a:latin typeface="맑은 고딕"/>
-                <a:ea typeface="맑은 고딕"/>
-              </a:rPr>
-              <a:t>왜 이 주제이고, 무엇을 물을 것인가</a:t>
-            </a:r>
+              <a:t>Ⅰ. </a:t>
+            </a:r>
+            <a:r>
+              <a:rPr sz="1350" b="1" dirty="0" err="1">
+                <a:solidFill>
+                  <a:srgbClr val="33393F"/>
+                </a:solidFill>
+                <a:latin typeface="맑은 고딕"/>
+                <a:ea typeface="맑은 고딕"/>
+              </a:rPr>
+              <a:t>문제</a:t>
+            </a:r>
+            <a:r>
+              <a:rPr sz="1350" b="1" dirty="0">
+                <a:solidFill>
+                  <a:srgbClr val="33393F"/>
+                </a:solidFill>
+                <a:latin typeface="맑은 고딕"/>
+                <a:ea typeface="맑은 고딕"/>
+              </a:rPr>
+              <a:t> </a:t>
+            </a:r>
+            <a:r>
+              <a:rPr sz="1350" b="1" dirty="0" err="1">
+                <a:solidFill>
+                  <a:srgbClr val="33393F"/>
+                </a:solidFill>
+                <a:latin typeface="맑은 고딕"/>
+                <a:ea typeface="맑은 고딕"/>
+              </a:rPr>
+              <a:t>정의</a:t>
+            </a:r>
+            <a:endParaRPr sz="1350" b="1" dirty="0">
+              <a:solidFill>
+                <a:srgbClr val="33393F"/>
+              </a:solidFill>
+              <a:latin typeface="맑은 고딕"/>
+              <a:ea typeface="맑은 고딕"/>
+            </a:endParaRPr>
           </a:p>
           <a:p>
             <a:pPr>
@@ -8924,15 +9245,52 @@
               </a:spcAft>
             </a:pPr>
             <a:r>
-              <a:rPr sz="1150" b="0">
-                <a:solidFill>
-                  <a:srgbClr val="1C1C1E"/>
-                </a:solidFill>
-                <a:latin typeface="맑은 고딕"/>
-                <a:ea typeface="맑은 고딕"/>
-              </a:rPr>
-              <a:t>03   아이디어의 발단</a:t>
-            </a:r>
+              <a:rPr sz="1150" b="0" dirty="0">
+                <a:solidFill>
+                  <a:srgbClr val="1C1C1E"/>
+                </a:solidFill>
+                <a:latin typeface="맑은 고딕"/>
+                <a:ea typeface="맑은 고딕"/>
+              </a:rPr>
+              <a:t>03   </a:t>
+            </a:r>
+            <a:r>
+              <a:rPr sz="1150" b="0" dirty="0" err="1">
+                <a:solidFill>
+                  <a:srgbClr val="1C1C1E"/>
+                </a:solidFill>
+                <a:latin typeface="맑은 고딕"/>
+                <a:ea typeface="맑은 고딕"/>
+              </a:rPr>
+              <a:t>아이디어의</a:t>
+            </a:r>
+            <a:r>
+              <a:rPr sz="1150" b="0" dirty="0">
+                <a:solidFill>
+                  <a:srgbClr val="1C1C1E"/>
+                </a:solidFill>
+                <a:latin typeface="맑은 고딕"/>
+                <a:ea typeface="맑은 고딕"/>
+              </a:rPr>
+              <a:t> </a:t>
+            </a:r>
+            <a:r>
+              <a:rPr sz="1150" b="0" dirty="0" err="1">
+                <a:solidFill>
+                  <a:srgbClr val="1C1C1E"/>
+                </a:solidFill>
+                <a:latin typeface="맑은 고딕"/>
+                <a:ea typeface="맑은 고딕"/>
+              </a:rPr>
+              <a:t>발단</a:t>
+            </a:r>
+            <a:endParaRPr sz="1150" b="0" dirty="0">
+              <a:solidFill>
+                <a:srgbClr val="1C1C1E"/>
+              </a:solidFill>
+              <a:latin typeface="맑은 고딕"/>
+              <a:ea typeface="맑은 고딕"/>
+            </a:endParaRPr>
           </a:p>
           <a:p>
             <a:pPr>
@@ -8944,15 +9302,92 @@
               </a:spcAft>
             </a:pPr>
             <a:r>
-              <a:rPr sz="1150" b="0">
-                <a:solidFill>
-                  <a:srgbClr val="1C1C1E"/>
-                </a:solidFill>
-                <a:latin typeface="맑은 고딕"/>
-                <a:ea typeface="맑은 고딕"/>
-              </a:rPr>
-              <a:t>04   문제 인식 — 세 단계 파이프라인</a:t>
-            </a:r>
+              <a:rPr sz="1150" b="0" dirty="0">
+                <a:solidFill>
+                  <a:srgbClr val="1C1C1E"/>
+                </a:solidFill>
+                <a:latin typeface="맑은 고딕"/>
+                <a:ea typeface="맑은 고딕"/>
+              </a:rPr>
+              <a:t>04   </a:t>
+            </a:r>
+            <a:r>
+              <a:rPr sz="1150" b="0" dirty="0" err="1">
+                <a:solidFill>
+                  <a:srgbClr val="1C1C1E"/>
+                </a:solidFill>
+                <a:latin typeface="맑은 고딕"/>
+                <a:ea typeface="맑은 고딕"/>
+              </a:rPr>
+              <a:t>문제</a:t>
+            </a:r>
+            <a:r>
+              <a:rPr sz="1150" b="0" dirty="0">
+                <a:solidFill>
+                  <a:srgbClr val="1C1C1E"/>
+                </a:solidFill>
+                <a:latin typeface="맑은 고딕"/>
+                <a:ea typeface="맑은 고딕"/>
+              </a:rPr>
+              <a:t> </a:t>
+            </a:r>
+            <a:r>
+              <a:rPr sz="1150" b="0" dirty="0" err="1">
+                <a:solidFill>
+                  <a:srgbClr val="1C1C1E"/>
+                </a:solidFill>
+                <a:latin typeface="맑은 고딕"/>
+                <a:ea typeface="맑은 고딕"/>
+              </a:rPr>
+              <a:t>인식</a:t>
+            </a:r>
+            <a:r>
+              <a:rPr sz="1150" b="0" dirty="0">
+                <a:solidFill>
+                  <a:srgbClr val="1C1C1E"/>
+                </a:solidFill>
+                <a:latin typeface="맑은 고딕"/>
+                <a:ea typeface="맑은 고딕"/>
+              </a:rPr>
+              <a:t> — 세 </a:t>
+            </a:r>
+            <a:r>
+              <a:rPr sz="1150" b="0" dirty="0" err="1">
+                <a:solidFill>
+                  <a:srgbClr val="1C1C1E"/>
+                </a:solidFill>
+                <a:latin typeface="맑은 고딕"/>
+                <a:ea typeface="맑은 고딕"/>
+              </a:rPr>
+              <a:t>단계</a:t>
+            </a:r>
+            <a:r>
+              <a:rPr sz="1150" b="0" dirty="0">
+                <a:solidFill>
+                  <a:srgbClr val="1C1C1E"/>
+                </a:solidFill>
+                <a:latin typeface="맑은 고딕"/>
+                <a:ea typeface="맑은 고딕"/>
+              </a:rPr>
+              <a:t> </a:t>
+            </a:r>
+            <a:r>
+              <a:rPr sz="1150" b="0" dirty="0" err="1">
+                <a:solidFill>
+                  <a:srgbClr val="1C1C1E"/>
+                </a:solidFill>
+                <a:latin typeface="맑은 고딕"/>
+                <a:ea typeface="맑은 고딕"/>
+              </a:rPr>
+              <a:t>파이프라인</a:t>
+            </a:r>
+            <a:endParaRPr sz="1150" b="0" dirty="0">
+              <a:solidFill>
+                <a:srgbClr val="1C1C1E"/>
+              </a:solidFill>
+              <a:latin typeface="맑은 고딕"/>
+              <a:ea typeface="맑은 고딕"/>
+            </a:endParaRPr>
           </a:p>
           <a:p>
             <a:pPr>
@@ -8964,15 +9399,62 @@
               </a:spcAft>
             </a:pPr>
             <a:r>
-              <a:rPr sz="1150" b="0">
-                <a:solidFill>
-                  <a:srgbClr val="1C1C1E"/>
-                </a:solidFill>
-                <a:latin typeface="맑은 고딕"/>
-                <a:ea typeface="맑은 고딕"/>
-              </a:rPr>
-              <a:t>05   연구 질문 (RQ 4개)</a:t>
-            </a:r>
+              <a:rPr sz="1150" b="0" dirty="0">
+                <a:solidFill>
+                  <a:srgbClr val="1C1C1E"/>
+                </a:solidFill>
+                <a:latin typeface="맑은 고딕"/>
+                <a:ea typeface="맑은 고딕"/>
+              </a:rPr>
+              <a:t>05   </a:t>
+            </a:r>
+            <a:r>
+              <a:rPr lang="ko-KR" altLang="en-US" sz="1150" b="0" dirty="0">
+                <a:solidFill>
+                  <a:srgbClr val="1C1C1E"/>
+                </a:solidFill>
+                <a:latin typeface="맑은 고딕"/>
+                <a:ea typeface="맑은 고딕"/>
+              </a:rPr>
+              <a:t>검증 </a:t>
+            </a:r>
+            <a:r>
+              <a:rPr sz="1150" b="0" dirty="0" err="1">
+                <a:solidFill>
+                  <a:srgbClr val="1C1C1E"/>
+                </a:solidFill>
+                <a:latin typeface="맑은 고딕"/>
+                <a:ea typeface="맑은 고딕"/>
+              </a:rPr>
+              <a:t>질문</a:t>
+            </a:r>
+            <a:r>
+              <a:rPr lang="en-US" sz="1150" b="0" dirty="0">
+                <a:solidFill>
+                  <a:srgbClr val="1C1C1E"/>
+                </a:solidFill>
+                <a:latin typeface="맑은 고딕"/>
+                <a:ea typeface="맑은 고딕"/>
+              </a:rPr>
+              <a:t> 4</a:t>
+            </a:r>
+            <a:r>
+              <a:rPr lang="ko-KR" altLang="en-US" sz="1150" b="0" dirty="0">
+                <a:solidFill>
+                  <a:srgbClr val="1C1C1E"/>
+                </a:solidFill>
+                <a:latin typeface="맑은 고딕"/>
+                <a:ea typeface="맑은 고딕"/>
+              </a:rPr>
+              <a:t>가지</a:t>
+            </a:r>
+            <a:endParaRPr sz="1150" b="0" dirty="0">
+              <a:solidFill>
+                <a:srgbClr val="1C1C1E"/>
+              </a:solidFill>
+              <a:latin typeface="맑은 고딕"/>
+              <a:ea typeface="맑은 고딕"/>
+            </a:endParaRPr>
           </a:p>
         </p:txBody>
       </p:sp>
@@ -9027,6 +9509,7 @@
           <a:lstStyle/>
           <a:p>
             <a:pPr algn="ctr"/>
+            <a:endParaRPr/>
           </a:p>
         </p:txBody>
       </p:sp>
@@ -9039,7 +9522,7 @@
         <p:spPr>
           <a:xfrm>
             <a:off x="685800" y="3145535"/>
-            <a:ext cx="5166360" cy="987552"/>
+            <a:ext cx="5166360" cy="778546"/>
           </a:xfrm>
           <a:prstGeom prst="rect">
             <a:avLst/>
@@ -9061,35 +9544,52 @@
               </a:spcAft>
             </a:pPr>
             <a:r>
-              <a:rPr sz="1350" b="1">
+              <a:rPr sz="1350" b="1" dirty="0">
                 <a:solidFill>
                   <a:srgbClr val="33393F"/>
                 </a:solidFill>
                 <a:latin typeface="맑은 고딕"/>
                 <a:ea typeface="맑은 고딕"/>
               </a:rPr>
-              <a:t>Ⅱ. 배경 이해</a:t>
-            </a:r>
-          </a:p>
-          <a:p>
-            <a:pPr>
-              <a:lnSpc>
-                <a:spcPct val="114000"/>
-              </a:lnSpc>
-              <a:spcAft>
-                <a:spcPts val="400"/>
-              </a:spcAft>
-            </a:pPr>
-            <a:r>
-              <a:rPr sz="1050" b="0">
-                <a:solidFill>
-                  <a:srgbClr val="767A7F"/>
-                </a:solidFill>
-                <a:latin typeface="맑은 고딕"/>
-                <a:ea typeface="맑은 고딕"/>
-              </a:rPr>
-              <a:t>분석 전에 확정해야 할 이론과 제도</a:t>
-            </a:r>
+              <a:t>Ⅱ. </a:t>
+            </a:r>
+            <a:r>
+              <a:rPr sz="1350" b="1" dirty="0" err="1">
+                <a:solidFill>
+                  <a:srgbClr val="33393F"/>
+                </a:solidFill>
+                <a:latin typeface="맑은 고딕"/>
+                <a:ea typeface="맑은 고딕"/>
+              </a:rPr>
+              <a:t>배경</a:t>
+            </a:r>
+            <a:r>
+              <a:rPr sz="1350" b="1" dirty="0">
+                <a:solidFill>
+                  <a:srgbClr val="33393F"/>
+                </a:solidFill>
+                <a:latin typeface="맑은 고딕"/>
+                <a:ea typeface="맑은 고딕"/>
+              </a:rPr>
+              <a:t> </a:t>
+            </a:r>
+            <a:r>
+              <a:rPr sz="1350" b="1" dirty="0" err="1">
+                <a:solidFill>
+                  <a:srgbClr val="33393F"/>
+                </a:solidFill>
+                <a:latin typeface="맑은 고딕"/>
+                <a:ea typeface="맑은 고딕"/>
+              </a:rPr>
+              <a:t>이해</a:t>
+            </a:r>
+            <a:endParaRPr sz="1350" b="1" dirty="0">
+              <a:solidFill>
+                <a:srgbClr val="33393F"/>
+              </a:solidFill>
+              <a:latin typeface="맑은 고딕"/>
+              <a:ea typeface="맑은 고딕"/>
+            </a:endParaRPr>
           </a:p>
           <a:p>
             <a:pPr>
@@ -9101,14 +9601,74 @@
               </a:spcAft>
             </a:pPr>
             <a:r>
-              <a:rPr sz="1150" b="0">
-                <a:solidFill>
-                  <a:srgbClr val="1C1C1E"/>
-                </a:solidFill>
-                <a:latin typeface="맑은 고딕"/>
-                <a:ea typeface="맑은 고딕"/>
-              </a:rPr>
-              <a:t>06   이론적 고찰 — 접근성의 두 축</a:t>
+              <a:rPr sz="1150" b="0" dirty="0">
+                <a:solidFill>
+                  <a:srgbClr val="1C1C1E"/>
+                </a:solidFill>
+                <a:latin typeface="맑은 고딕"/>
+                <a:ea typeface="맑은 고딕"/>
+              </a:rPr>
+              <a:t>06   </a:t>
+            </a:r>
+            <a:r>
+              <a:rPr sz="1150" b="0" dirty="0" err="1">
+                <a:solidFill>
+                  <a:srgbClr val="1C1C1E"/>
+                </a:solidFill>
+                <a:latin typeface="맑은 고딕"/>
+                <a:ea typeface="맑은 고딕"/>
+              </a:rPr>
+              <a:t>이론적</a:t>
+            </a:r>
+            <a:r>
+              <a:rPr sz="1150" b="0" dirty="0">
+                <a:solidFill>
+                  <a:srgbClr val="1C1C1E"/>
+                </a:solidFill>
+                <a:latin typeface="맑은 고딕"/>
+                <a:ea typeface="맑은 고딕"/>
+              </a:rPr>
+              <a:t> </a:t>
+            </a:r>
+            <a:r>
+              <a:rPr sz="1150" b="0" dirty="0" err="1">
+                <a:solidFill>
+                  <a:srgbClr val="1C1C1E"/>
+                </a:solidFill>
+                <a:latin typeface="맑은 고딕"/>
+                <a:ea typeface="맑은 고딕"/>
+              </a:rPr>
+              <a:t>고찰</a:t>
+            </a:r>
+            <a:r>
+              <a:rPr sz="1150" b="0" dirty="0">
+                <a:solidFill>
+                  <a:srgbClr val="1C1C1E"/>
+                </a:solidFill>
+                <a:latin typeface="맑은 고딕"/>
+                <a:ea typeface="맑은 고딕"/>
+              </a:rPr>
+              <a:t> — </a:t>
+            </a:r>
+            <a:r>
+              <a:rPr sz="1150" b="0" dirty="0" err="1">
+                <a:solidFill>
+                  <a:srgbClr val="1C1C1E"/>
+                </a:solidFill>
+                <a:latin typeface="맑은 고딕"/>
+                <a:ea typeface="맑은 고딕"/>
+              </a:rPr>
+              <a:t>접근성의</a:t>
+            </a:r>
+            <a:r>
+              <a:rPr sz="1150" b="0" dirty="0">
+                <a:solidFill>
+                  <a:srgbClr val="1C1C1E"/>
+                </a:solidFill>
+                <a:latin typeface="맑은 고딕"/>
+                <a:ea typeface="맑은 고딕"/>
+              </a:rPr>
+              <a:t> 두 축</a:t>
             </a:r>
           </a:p>
           <a:p>
@@ -9121,15 +9681,92 @@
               </a:spcAft>
             </a:pPr>
             <a:r>
-              <a:rPr sz="1150" b="0">
-                <a:solidFill>
-                  <a:srgbClr val="1C1C1E"/>
-                </a:solidFill>
-                <a:latin typeface="맑은 고딕"/>
-                <a:ea typeface="맑은 고딕"/>
-              </a:rPr>
-              <a:t>07   분석 대상 제도 — 지표·등급·배분</a:t>
-            </a:r>
+              <a:rPr sz="1150" b="0" dirty="0">
+                <a:solidFill>
+                  <a:srgbClr val="1C1C1E"/>
+                </a:solidFill>
+                <a:latin typeface="맑은 고딕"/>
+                <a:ea typeface="맑은 고딕"/>
+              </a:rPr>
+              <a:t>07   </a:t>
+            </a:r>
+            <a:r>
+              <a:rPr sz="1150" b="0" dirty="0" err="1">
+                <a:solidFill>
+                  <a:srgbClr val="1C1C1E"/>
+                </a:solidFill>
+                <a:latin typeface="맑은 고딕"/>
+                <a:ea typeface="맑은 고딕"/>
+              </a:rPr>
+              <a:t>분석</a:t>
+            </a:r>
+            <a:r>
+              <a:rPr sz="1150" b="0" dirty="0">
+                <a:solidFill>
+                  <a:srgbClr val="1C1C1E"/>
+                </a:solidFill>
+                <a:latin typeface="맑은 고딕"/>
+                <a:ea typeface="맑은 고딕"/>
+              </a:rPr>
+              <a:t> </a:t>
+            </a:r>
+            <a:r>
+              <a:rPr sz="1150" b="0" dirty="0" err="1">
+                <a:solidFill>
+                  <a:srgbClr val="1C1C1E"/>
+                </a:solidFill>
+                <a:latin typeface="맑은 고딕"/>
+                <a:ea typeface="맑은 고딕"/>
+              </a:rPr>
+              <a:t>대상</a:t>
+            </a:r>
+            <a:r>
+              <a:rPr sz="1150" b="0" dirty="0">
+                <a:solidFill>
+                  <a:srgbClr val="1C1C1E"/>
+                </a:solidFill>
+                <a:latin typeface="맑은 고딕"/>
+                <a:ea typeface="맑은 고딕"/>
+              </a:rPr>
+              <a:t> </a:t>
+            </a:r>
+            <a:r>
+              <a:rPr sz="1150" b="0" dirty="0" err="1">
+                <a:solidFill>
+                  <a:srgbClr val="1C1C1E"/>
+                </a:solidFill>
+                <a:latin typeface="맑은 고딕"/>
+                <a:ea typeface="맑은 고딕"/>
+              </a:rPr>
+              <a:t>제도</a:t>
+            </a:r>
+            <a:r>
+              <a:rPr sz="1150" b="0" dirty="0">
+                <a:solidFill>
+                  <a:srgbClr val="1C1C1E"/>
+                </a:solidFill>
+                <a:latin typeface="맑은 고딕"/>
+                <a:ea typeface="맑은 고딕"/>
+              </a:rPr>
+              <a:t> — </a:t>
+            </a:r>
+            <a:r>
+              <a:rPr sz="1150" b="0" dirty="0" err="1">
+                <a:solidFill>
+                  <a:srgbClr val="1C1C1E"/>
+                </a:solidFill>
+                <a:latin typeface="맑은 고딕"/>
+                <a:ea typeface="맑은 고딕"/>
+              </a:rPr>
+              <a:t>지표·등급·배분</a:t>
+            </a:r>
+            <a:endParaRPr sz="1150" b="0" dirty="0">
+              <a:solidFill>
+                <a:srgbClr val="1C1C1E"/>
+              </a:solidFill>
+              <a:latin typeface="맑은 고딕"/>
+              <a:ea typeface="맑은 고딕"/>
+            </a:endParaRPr>
           </a:p>
         </p:txBody>
       </p:sp>
@@ -9184,6 +9821,7 @@
           <a:lstStyle/>
           <a:p>
             <a:pPr algn="ctr"/>
+            <a:endParaRPr/>
           </a:p>
         </p:txBody>
       </p:sp>
@@ -9196,7 +9834,7 @@
         <p:spPr>
           <a:xfrm>
             <a:off x="685800" y="4571999"/>
-            <a:ext cx="5166360" cy="987552"/>
+            <a:ext cx="5166360" cy="778546"/>
           </a:xfrm>
           <a:prstGeom prst="rect">
             <a:avLst/>
@@ -9218,35 +9856,52 @@
               </a:spcAft>
             </a:pPr>
             <a:r>
-              <a:rPr sz="1350" b="1">
+              <a:rPr sz="1350" b="1" dirty="0">
                 <a:solidFill>
                   <a:srgbClr val="33393F"/>
                 </a:solidFill>
                 <a:latin typeface="맑은 고딕"/>
                 <a:ea typeface="맑은 고딕"/>
               </a:rPr>
-              <a:t>Ⅲ. 데이터 계획</a:t>
-            </a:r>
-          </a:p>
-          <a:p>
-            <a:pPr>
-              <a:lnSpc>
-                <a:spcPct val="114000"/>
-              </a:lnSpc>
-              <a:spcAft>
-                <a:spcPts val="400"/>
-              </a:spcAft>
-            </a:pPr>
-            <a:r>
-              <a:rPr sz="1050" b="0">
-                <a:solidFill>
-                  <a:srgbClr val="767A7F"/>
-                </a:solidFill>
-                <a:latin typeface="맑은 고딕"/>
-                <a:ea typeface="맑은 고딕"/>
-              </a:rPr>
-              <a:t>무엇을 어떻게 모으고 검증할 것인가</a:t>
-            </a:r>
+              <a:t>Ⅲ. </a:t>
+            </a:r>
+            <a:r>
+              <a:rPr sz="1350" b="1" dirty="0" err="1">
+                <a:solidFill>
+                  <a:srgbClr val="33393F"/>
+                </a:solidFill>
+                <a:latin typeface="맑은 고딕"/>
+                <a:ea typeface="맑은 고딕"/>
+              </a:rPr>
+              <a:t>데이터</a:t>
+            </a:r>
+            <a:r>
+              <a:rPr sz="1350" b="1" dirty="0">
+                <a:solidFill>
+                  <a:srgbClr val="33393F"/>
+                </a:solidFill>
+                <a:latin typeface="맑은 고딕"/>
+                <a:ea typeface="맑은 고딕"/>
+              </a:rPr>
+              <a:t> </a:t>
+            </a:r>
+            <a:r>
+              <a:rPr sz="1350" b="1" dirty="0" err="1">
+                <a:solidFill>
+                  <a:srgbClr val="33393F"/>
+                </a:solidFill>
+                <a:latin typeface="맑은 고딕"/>
+                <a:ea typeface="맑은 고딕"/>
+              </a:rPr>
+              <a:t>계획</a:t>
+            </a:r>
+            <a:endParaRPr sz="1350" b="1" dirty="0">
+              <a:solidFill>
+                <a:srgbClr val="33393F"/>
+              </a:solidFill>
+              <a:latin typeface="맑은 고딕"/>
+              <a:ea typeface="맑은 고딕"/>
+            </a:endParaRPr>
           </a:p>
           <a:p>
             <a:pPr>
@@ -9258,15 +9913,72 @@
               </a:spcAft>
             </a:pPr>
             <a:r>
-              <a:rPr sz="1150" b="0">
-                <a:solidFill>
-                  <a:srgbClr val="1C1C1E"/>
-                </a:solidFill>
-                <a:latin typeface="맑은 고딕"/>
-                <a:ea typeface="맑은 고딕"/>
-              </a:rPr>
-              <a:t>08   데이터 수집 계획</a:t>
-            </a:r>
+              <a:rPr sz="1150" b="0" dirty="0">
+                <a:solidFill>
+                  <a:srgbClr val="1C1C1E"/>
+                </a:solidFill>
+                <a:latin typeface="맑은 고딕"/>
+                <a:ea typeface="맑은 고딕"/>
+              </a:rPr>
+              <a:t>08   </a:t>
+            </a:r>
+            <a:r>
+              <a:rPr sz="1150" b="0" dirty="0" err="1">
+                <a:solidFill>
+                  <a:srgbClr val="1C1C1E"/>
+                </a:solidFill>
+                <a:latin typeface="맑은 고딕"/>
+                <a:ea typeface="맑은 고딕"/>
+              </a:rPr>
+              <a:t>데이터</a:t>
+            </a:r>
+            <a:r>
+              <a:rPr sz="1150" b="0" dirty="0">
+                <a:solidFill>
+                  <a:srgbClr val="1C1C1E"/>
+                </a:solidFill>
+                <a:latin typeface="맑은 고딕"/>
+                <a:ea typeface="맑은 고딕"/>
+              </a:rPr>
+              <a:t> </a:t>
+            </a:r>
+            <a:r>
+              <a:rPr sz="1150" b="0" dirty="0" err="1">
+                <a:solidFill>
+                  <a:srgbClr val="1C1C1E"/>
+                </a:solidFill>
+                <a:latin typeface="맑은 고딕"/>
+                <a:ea typeface="맑은 고딕"/>
+              </a:rPr>
+              <a:t>수집</a:t>
+            </a:r>
+            <a:r>
+              <a:rPr sz="1150" b="0" dirty="0">
+                <a:solidFill>
+                  <a:srgbClr val="1C1C1E"/>
+                </a:solidFill>
+                <a:latin typeface="맑은 고딕"/>
+                <a:ea typeface="맑은 고딕"/>
+              </a:rPr>
+              <a:t> </a:t>
+            </a:r>
+            <a:r>
+              <a:rPr sz="1150" b="0" dirty="0" err="1">
+                <a:solidFill>
+                  <a:srgbClr val="1C1C1E"/>
+                </a:solidFill>
+                <a:latin typeface="맑은 고딕"/>
+                <a:ea typeface="맑은 고딕"/>
+              </a:rPr>
+              <a:t>계획</a:t>
+            </a:r>
+            <a:endParaRPr sz="1150" b="0" dirty="0">
+              <a:solidFill>
+                <a:srgbClr val="1C1C1E"/>
+              </a:solidFill>
+              <a:latin typeface="맑은 고딕"/>
+              <a:ea typeface="맑은 고딕"/>
+            </a:endParaRPr>
           </a:p>
           <a:p>
             <a:pPr>
@@ -9278,15 +9990,72 @@
               </a:spcAft>
             </a:pPr>
             <a:r>
-              <a:rPr sz="1150" b="0">
-                <a:solidFill>
-                  <a:srgbClr val="1C1C1E"/>
-                </a:solidFill>
-                <a:latin typeface="맑은 고딕"/>
-                <a:ea typeface="맑은 고딕"/>
-              </a:rPr>
-              <a:t>09   전처리·품질 관리 계획</a:t>
-            </a:r>
+              <a:rPr sz="1150" b="0" dirty="0">
+                <a:solidFill>
+                  <a:srgbClr val="1C1C1E"/>
+                </a:solidFill>
+                <a:latin typeface="맑은 고딕"/>
+                <a:ea typeface="맑은 고딕"/>
+              </a:rPr>
+              <a:t>09   </a:t>
+            </a:r>
+            <a:r>
+              <a:rPr sz="1150" b="0" dirty="0" err="1">
+                <a:solidFill>
+                  <a:srgbClr val="1C1C1E"/>
+                </a:solidFill>
+                <a:latin typeface="맑은 고딕"/>
+                <a:ea typeface="맑은 고딕"/>
+              </a:rPr>
+              <a:t>전처리·품질</a:t>
+            </a:r>
+            <a:r>
+              <a:rPr sz="1150" b="0" dirty="0">
+                <a:solidFill>
+                  <a:srgbClr val="1C1C1E"/>
+                </a:solidFill>
+                <a:latin typeface="맑은 고딕"/>
+                <a:ea typeface="맑은 고딕"/>
+              </a:rPr>
+              <a:t> </a:t>
+            </a:r>
+            <a:r>
+              <a:rPr sz="1150" b="0" dirty="0" err="1">
+                <a:solidFill>
+                  <a:srgbClr val="1C1C1E"/>
+                </a:solidFill>
+                <a:latin typeface="맑은 고딕"/>
+                <a:ea typeface="맑은 고딕"/>
+              </a:rPr>
+              <a:t>관리</a:t>
+            </a:r>
+            <a:r>
+              <a:rPr sz="1150" b="0" dirty="0">
+                <a:solidFill>
+                  <a:srgbClr val="1C1C1E"/>
+                </a:solidFill>
+                <a:latin typeface="맑은 고딕"/>
+                <a:ea typeface="맑은 고딕"/>
+              </a:rPr>
+              <a:t> </a:t>
+            </a:r>
+            <a:r>
+              <a:rPr sz="1150" b="0" dirty="0" err="1">
+                <a:solidFill>
+                  <a:srgbClr val="1C1C1E"/>
+                </a:solidFill>
+                <a:latin typeface="맑은 고딕"/>
+                <a:ea typeface="맑은 고딕"/>
+              </a:rPr>
+              <a:t>계획</a:t>
+            </a:r>
+            <a:endParaRPr sz="1150" b="0" dirty="0">
+              <a:solidFill>
+                <a:srgbClr val="1C1C1E"/>
+              </a:solidFill>
+              <a:latin typeface="맑은 고딕"/>
+              <a:ea typeface="맑은 고딕"/>
+            </a:endParaRPr>
           </a:p>
         </p:txBody>
       </p:sp>
@@ -9341,6 +10110,7 @@
           <a:lstStyle/>
           <a:p>
             <a:pPr algn="ctr"/>
+            <a:endParaRPr/>
           </a:p>
         </p:txBody>
       </p:sp>
@@ -9353,7 +10123,7 @@
         <p:spPr>
           <a:xfrm>
             <a:off x="6446520" y="1444752"/>
-            <a:ext cx="5166360" cy="1261872"/>
+            <a:ext cx="5166360" cy="1005916"/>
           </a:xfrm>
           <a:prstGeom prst="rect">
             <a:avLst/>
@@ -9375,35 +10145,52 @@
               </a:spcAft>
             </a:pPr>
             <a:r>
-              <a:rPr sz="1350" b="1">
+              <a:rPr sz="1350" b="1" dirty="0">
                 <a:solidFill>
                   <a:srgbClr val="33393F"/>
                 </a:solidFill>
                 <a:latin typeface="맑은 고딕"/>
                 <a:ea typeface="맑은 고딕"/>
               </a:rPr>
-              <a:t>Ⅳ. 분석 설계</a:t>
-            </a:r>
-          </a:p>
-          <a:p>
-            <a:pPr>
-              <a:lnSpc>
-                <a:spcPct val="114000"/>
-              </a:lnSpc>
-              <a:spcAft>
-                <a:spcPts val="400"/>
-              </a:spcAft>
-            </a:pPr>
-            <a:r>
-              <a:rPr sz="1050" b="0">
-                <a:solidFill>
-                  <a:srgbClr val="767A7F"/>
-                </a:solidFill>
-                <a:latin typeface="맑은 고딕"/>
-                <a:ea typeface="맑은 고딕"/>
-              </a:rPr>
-              <a:t>RQ별로 어떤 방법을 쓸 것인가</a:t>
-            </a:r>
+              <a:t>Ⅳ. </a:t>
+            </a:r>
+            <a:r>
+              <a:rPr sz="1350" b="1" dirty="0" err="1">
+                <a:solidFill>
+                  <a:srgbClr val="33393F"/>
+                </a:solidFill>
+                <a:latin typeface="맑은 고딕"/>
+                <a:ea typeface="맑은 고딕"/>
+              </a:rPr>
+              <a:t>분석</a:t>
+            </a:r>
+            <a:r>
+              <a:rPr sz="1350" b="1" dirty="0">
+                <a:solidFill>
+                  <a:srgbClr val="33393F"/>
+                </a:solidFill>
+                <a:latin typeface="맑은 고딕"/>
+                <a:ea typeface="맑은 고딕"/>
+              </a:rPr>
+              <a:t> </a:t>
+            </a:r>
+            <a:r>
+              <a:rPr sz="1350" b="1" dirty="0" err="1">
+                <a:solidFill>
+                  <a:srgbClr val="33393F"/>
+                </a:solidFill>
+                <a:latin typeface="맑은 고딕"/>
+                <a:ea typeface="맑은 고딕"/>
+              </a:rPr>
+              <a:t>설계</a:t>
+            </a:r>
+            <a:endParaRPr sz="1350" b="1" dirty="0">
+              <a:solidFill>
+                <a:srgbClr val="33393F"/>
+              </a:solidFill>
+              <a:latin typeface="맑은 고딕"/>
+              <a:ea typeface="맑은 고딕"/>
+            </a:endParaRPr>
           </a:p>
           <a:p>
             <a:pPr>
@@ -9415,14 +10202,54 @@
               </a:spcAft>
             </a:pPr>
             <a:r>
-              <a:rPr sz="1150" b="0">
-                <a:solidFill>
-                  <a:srgbClr val="1C1C1E"/>
-                </a:solidFill>
-                <a:latin typeface="맑은 고딕"/>
-                <a:ea typeface="맑은 고딕"/>
-              </a:rPr>
-              <a:t>10   ① 지정 감사 (RQ1·RQ2)</a:t>
+              <a:rPr sz="1150" b="0" dirty="0">
+                <a:solidFill>
+                  <a:srgbClr val="1C1C1E"/>
+                </a:solidFill>
+                <a:latin typeface="맑은 고딕"/>
+                <a:ea typeface="맑은 고딕"/>
+              </a:rPr>
+              <a:t>10   ① </a:t>
+            </a:r>
+            <a:r>
+              <a:rPr sz="1150" b="0" dirty="0" err="1">
+                <a:solidFill>
+                  <a:srgbClr val="1C1C1E"/>
+                </a:solidFill>
+                <a:latin typeface="맑은 고딕"/>
+                <a:ea typeface="맑은 고딕"/>
+              </a:rPr>
+              <a:t>지정</a:t>
+            </a:r>
+            <a:r>
+              <a:rPr sz="1150" b="0" dirty="0">
+                <a:solidFill>
+                  <a:srgbClr val="1C1C1E"/>
+                </a:solidFill>
+                <a:latin typeface="맑은 고딕"/>
+                <a:ea typeface="맑은 고딕"/>
+              </a:rPr>
+              <a:t> </a:t>
+            </a:r>
+            <a:r>
+              <a:rPr sz="1150" b="0" dirty="0" err="1">
+                <a:solidFill>
+                  <a:srgbClr val="1C1C1E"/>
+                </a:solidFill>
+                <a:latin typeface="맑은 고딕"/>
+                <a:ea typeface="맑은 고딕"/>
+              </a:rPr>
+              <a:t>감사</a:t>
+            </a:r>
+            <a:r>
+              <a:rPr sz="1150" b="0" dirty="0">
+                <a:solidFill>
+                  <a:srgbClr val="1C1C1E"/>
+                </a:solidFill>
+                <a:latin typeface="맑은 고딕"/>
+                <a:ea typeface="맑은 고딕"/>
+              </a:rPr>
+              <a:t> (RQ1·RQ2)</a:t>
             </a:r>
           </a:p>
           <a:p>
@@ -9435,14 +10262,54 @@
               </a:spcAft>
             </a:pPr>
             <a:r>
-              <a:rPr sz="1150" b="0">
-                <a:solidFill>
-                  <a:srgbClr val="1C1C1E"/>
-                </a:solidFill>
-                <a:latin typeface="맑은 고딕"/>
-                <a:ea typeface="맑은 고딕"/>
-              </a:rPr>
-              <a:t>11   ② 배분 진단 (RQ3)</a:t>
+              <a:rPr sz="1150" b="0" dirty="0">
+                <a:solidFill>
+                  <a:srgbClr val="1C1C1E"/>
+                </a:solidFill>
+                <a:latin typeface="맑은 고딕"/>
+                <a:ea typeface="맑은 고딕"/>
+              </a:rPr>
+              <a:t>11   ② </a:t>
+            </a:r>
+            <a:r>
+              <a:rPr sz="1150" b="0" dirty="0" err="1">
+                <a:solidFill>
+                  <a:srgbClr val="1C1C1E"/>
+                </a:solidFill>
+                <a:latin typeface="맑은 고딕"/>
+                <a:ea typeface="맑은 고딕"/>
+              </a:rPr>
+              <a:t>배분</a:t>
+            </a:r>
+            <a:r>
+              <a:rPr sz="1150" b="0" dirty="0">
+                <a:solidFill>
+                  <a:srgbClr val="1C1C1E"/>
+                </a:solidFill>
+                <a:latin typeface="맑은 고딕"/>
+                <a:ea typeface="맑은 고딕"/>
+              </a:rPr>
+              <a:t> </a:t>
+            </a:r>
+            <a:r>
+              <a:rPr sz="1150" b="0" dirty="0" err="1">
+                <a:solidFill>
+                  <a:srgbClr val="1C1C1E"/>
+                </a:solidFill>
+                <a:latin typeface="맑은 고딕"/>
+                <a:ea typeface="맑은 고딕"/>
+              </a:rPr>
+              <a:t>진단</a:t>
+            </a:r>
+            <a:r>
+              <a:rPr sz="1150" b="0" dirty="0">
+                <a:solidFill>
+                  <a:srgbClr val="1C1C1E"/>
+                </a:solidFill>
+                <a:latin typeface="맑은 고딕"/>
+                <a:ea typeface="맑은 고딕"/>
+              </a:rPr>
+              <a:t> (RQ3)</a:t>
             </a:r>
           </a:p>
           <a:p>
@@ -9455,14 +10322,54 @@
               </a:spcAft>
             </a:pPr>
             <a:r>
-              <a:rPr sz="1150" b="0">
-                <a:solidFill>
-                  <a:srgbClr val="1C1C1E"/>
-                </a:solidFill>
-                <a:latin typeface="맑은 고딕"/>
-                <a:ea typeface="맑은 고딕"/>
-              </a:rPr>
-              <a:t>12   ③ 처방 모형 (RQ4)</a:t>
+              <a:rPr sz="1150" b="0" dirty="0">
+                <a:solidFill>
+                  <a:srgbClr val="1C1C1E"/>
+                </a:solidFill>
+                <a:latin typeface="맑은 고딕"/>
+                <a:ea typeface="맑은 고딕"/>
+              </a:rPr>
+              <a:t>12   ③ </a:t>
+            </a:r>
+            <a:r>
+              <a:rPr sz="1150" b="0" dirty="0" err="1">
+                <a:solidFill>
+                  <a:srgbClr val="1C1C1E"/>
+                </a:solidFill>
+                <a:latin typeface="맑은 고딕"/>
+                <a:ea typeface="맑은 고딕"/>
+              </a:rPr>
+              <a:t>처방</a:t>
+            </a:r>
+            <a:r>
+              <a:rPr sz="1150" b="0" dirty="0">
+                <a:solidFill>
+                  <a:srgbClr val="1C1C1E"/>
+                </a:solidFill>
+                <a:latin typeface="맑은 고딕"/>
+                <a:ea typeface="맑은 고딕"/>
+              </a:rPr>
+              <a:t> </a:t>
+            </a:r>
+            <a:r>
+              <a:rPr sz="1150" b="0" dirty="0" err="1">
+                <a:solidFill>
+                  <a:srgbClr val="1C1C1E"/>
+                </a:solidFill>
+                <a:latin typeface="맑은 고딕"/>
+                <a:ea typeface="맑은 고딕"/>
+              </a:rPr>
+              <a:t>모형</a:t>
+            </a:r>
+            <a:r>
+              <a:rPr sz="1150" b="0" dirty="0">
+                <a:solidFill>
+                  <a:srgbClr val="1C1C1E"/>
+                </a:solidFill>
+                <a:latin typeface="맑은 고딕"/>
+                <a:ea typeface="맑은 고딕"/>
+              </a:rPr>
+              <a:t> (RQ4)</a:t>
             </a:r>
           </a:p>
         </p:txBody>
@@ -9518,6 +10425,7 @@
           <a:lstStyle/>
           <a:p>
             <a:pPr algn="ctr"/>
+            <a:endParaRPr/>
           </a:p>
         </p:txBody>
       </p:sp>
@@ -9530,7 +10438,7 @@
         <p:spPr>
           <a:xfrm>
             <a:off x="6446520" y="3145535"/>
-            <a:ext cx="5166360" cy="987552"/>
+            <a:ext cx="5166360" cy="778546"/>
           </a:xfrm>
           <a:prstGeom prst="rect">
             <a:avLst/>
@@ -9552,35 +10460,52 @@
               </a:spcAft>
             </a:pPr>
             <a:r>
-              <a:rPr sz="1350" b="1">
+              <a:rPr sz="1350" b="1" dirty="0">
                 <a:solidFill>
                   <a:srgbClr val="33393F"/>
                 </a:solidFill>
                 <a:latin typeface="맑은 고딕"/>
                 <a:ea typeface="맑은 고딕"/>
               </a:rPr>
-              <a:t>Ⅴ. 산출물과 일정</a:t>
-            </a:r>
-          </a:p>
-          <a:p>
-            <a:pPr>
-              <a:lnSpc>
-                <a:spcPct val="114000"/>
-              </a:lnSpc>
-              <a:spcAft>
-                <a:spcPts val="400"/>
-              </a:spcAft>
-            </a:pPr>
-            <a:r>
-              <a:rPr sz="1050" b="0">
-                <a:solidFill>
-                  <a:srgbClr val="767A7F"/>
-                </a:solidFill>
-                <a:latin typeface="맑은 고딕"/>
-                <a:ea typeface="맑은 고딕"/>
-              </a:rPr>
-              <a:t>무엇을 내놓고, 언제 할 것인가</a:t>
-            </a:r>
+              <a:t>Ⅴ. </a:t>
+            </a:r>
+            <a:r>
+              <a:rPr sz="1350" b="1" dirty="0" err="1">
+                <a:solidFill>
+                  <a:srgbClr val="33393F"/>
+                </a:solidFill>
+                <a:latin typeface="맑은 고딕"/>
+                <a:ea typeface="맑은 고딕"/>
+              </a:rPr>
+              <a:t>산출물과</a:t>
+            </a:r>
+            <a:r>
+              <a:rPr sz="1350" b="1" dirty="0">
+                <a:solidFill>
+                  <a:srgbClr val="33393F"/>
+                </a:solidFill>
+                <a:latin typeface="맑은 고딕"/>
+                <a:ea typeface="맑은 고딕"/>
+              </a:rPr>
+              <a:t> </a:t>
+            </a:r>
+            <a:r>
+              <a:rPr sz="1350" b="1" dirty="0" err="1">
+                <a:solidFill>
+                  <a:srgbClr val="33393F"/>
+                </a:solidFill>
+                <a:latin typeface="맑은 고딕"/>
+                <a:ea typeface="맑은 고딕"/>
+              </a:rPr>
+              <a:t>일정</a:t>
+            </a:r>
+            <a:endParaRPr sz="1350" b="1" dirty="0">
+              <a:solidFill>
+                <a:srgbClr val="33393F"/>
+              </a:solidFill>
+              <a:latin typeface="맑은 고딕"/>
+              <a:ea typeface="맑은 고딕"/>
+            </a:endParaRPr>
           </a:p>
           <a:p>
             <a:pPr>
@@ -9592,15 +10517,92 @@
               </a:spcAft>
             </a:pPr>
             <a:r>
-              <a:rPr sz="1150" b="0">
-                <a:solidFill>
-                  <a:srgbClr val="1C1C1E"/>
-                </a:solidFill>
-                <a:latin typeface="맑은 고딕"/>
-                <a:ea typeface="맑은 고딕"/>
-              </a:rPr>
-              <a:t>13   기대 산출물과 활용 계획</a:t>
-            </a:r>
+              <a:rPr sz="1150" b="0" dirty="0">
+                <a:solidFill>
+                  <a:srgbClr val="1C1C1E"/>
+                </a:solidFill>
+                <a:latin typeface="맑은 고딕"/>
+                <a:ea typeface="맑은 고딕"/>
+              </a:rPr>
+              <a:t>13   </a:t>
+            </a:r>
+            <a:r>
+              <a:rPr sz="1150" b="0" dirty="0" err="1">
+                <a:solidFill>
+                  <a:srgbClr val="1C1C1E"/>
+                </a:solidFill>
+                <a:latin typeface="맑은 고딕"/>
+                <a:ea typeface="맑은 고딕"/>
+              </a:rPr>
+              <a:t>기대</a:t>
+            </a:r>
+            <a:r>
+              <a:rPr sz="1150" b="0" dirty="0">
+                <a:solidFill>
+                  <a:srgbClr val="1C1C1E"/>
+                </a:solidFill>
+                <a:latin typeface="맑은 고딕"/>
+                <a:ea typeface="맑은 고딕"/>
+              </a:rPr>
+              <a:t> </a:t>
+            </a:r>
+            <a:r>
+              <a:rPr sz="1150" b="0" dirty="0" err="1">
+                <a:solidFill>
+                  <a:srgbClr val="1C1C1E"/>
+                </a:solidFill>
+                <a:latin typeface="맑은 고딕"/>
+                <a:ea typeface="맑은 고딕"/>
+              </a:rPr>
+              <a:t>산출물과</a:t>
+            </a:r>
+            <a:r>
+              <a:rPr sz="1150" b="0" dirty="0">
+                <a:solidFill>
+                  <a:srgbClr val="1C1C1E"/>
+                </a:solidFill>
+                <a:latin typeface="맑은 고딕"/>
+                <a:ea typeface="맑은 고딕"/>
+              </a:rPr>
+              <a:t> </a:t>
+            </a:r>
+            <a:r>
+              <a:rPr sz="1150" b="0" dirty="0" err="1">
+                <a:solidFill>
+                  <a:srgbClr val="1C1C1E"/>
+                </a:solidFill>
+                <a:latin typeface="맑은 고딕"/>
+                <a:ea typeface="맑은 고딕"/>
+              </a:rPr>
+              <a:t>활용</a:t>
+            </a:r>
+            <a:r>
+              <a:rPr sz="1150" b="0" dirty="0">
+                <a:solidFill>
+                  <a:srgbClr val="1C1C1E"/>
+                </a:solidFill>
+                <a:latin typeface="맑은 고딕"/>
+                <a:ea typeface="맑은 고딕"/>
+              </a:rPr>
+              <a:t> </a:t>
+            </a:r>
+            <a:r>
+              <a:rPr sz="1150" b="0" dirty="0" err="1">
+                <a:solidFill>
+                  <a:srgbClr val="1C1C1E"/>
+                </a:solidFill>
+                <a:latin typeface="맑은 고딕"/>
+                <a:ea typeface="맑은 고딕"/>
+              </a:rPr>
+              <a:t>계획</a:t>
+            </a:r>
+            <a:endParaRPr sz="1150" b="0" dirty="0">
+              <a:solidFill>
+                <a:srgbClr val="1C1C1E"/>
+              </a:solidFill>
+              <a:latin typeface="맑은 고딕"/>
+              <a:ea typeface="맑은 고딕"/>
+            </a:endParaRPr>
           </a:p>
           <a:p>
             <a:pPr>
@@ -9612,15 +10614,92 @@
               </a:spcAft>
             </a:pPr>
             <a:r>
-              <a:rPr sz="1150" b="0">
-                <a:solidFill>
-                  <a:srgbClr val="1C1C1E"/>
-                </a:solidFill>
-                <a:latin typeface="맑은 고딕"/>
-                <a:ea typeface="맑은 고딕"/>
-              </a:rPr>
-              <a:t>14   추진 일정과 역할 분담</a:t>
-            </a:r>
+              <a:rPr sz="1150" b="0" dirty="0">
+                <a:solidFill>
+                  <a:srgbClr val="1C1C1E"/>
+                </a:solidFill>
+                <a:latin typeface="맑은 고딕"/>
+                <a:ea typeface="맑은 고딕"/>
+              </a:rPr>
+              <a:t>14   </a:t>
+            </a:r>
+            <a:r>
+              <a:rPr sz="1150" b="0" dirty="0" err="1">
+                <a:solidFill>
+                  <a:srgbClr val="1C1C1E"/>
+                </a:solidFill>
+                <a:latin typeface="맑은 고딕"/>
+                <a:ea typeface="맑은 고딕"/>
+              </a:rPr>
+              <a:t>추진</a:t>
+            </a:r>
+            <a:r>
+              <a:rPr sz="1150" b="0" dirty="0">
+                <a:solidFill>
+                  <a:srgbClr val="1C1C1E"/>
+                </a:solidFill>
+                <a:latin typeface="맑은 고딕"/>
+                <a:ea typeface="맑은 고딕"/>
+              </a:rPr>
+              <a:t> </a:t>
+            </a:r>
+            <a:r>
+              <a:rPr sz="1150" b="0" dirty="0" err="1">
+                <a:solidFill>
+                  <a:srgbClr val="1C1C1E"/>
+                </a:solidFill>
+                <a:latin typeface="맑은 고딕"/>
+                <a:ea typeface="맑은 고딕"/>
+              </a:rPr>
+              <a:t>일정과</a:t>
+            </a:r>
+            <a:r>
+              <a:rPr sz="1150" b="0" dirty="0">
+                <a:solidFill>
+                  <a:srgbClr val="1C1C1E"/>
+                </a:solidFill>
+                <a:latin typeface="맑은 고딕"/>
+                <a:ea typeface="맑은 고딕"/>
+              </a:rPr>
+              <a:t> </a:t>
+            </a:r>
+            <a:r>
+              <a:rPr sz="1150" b="0" dirty="0" err="1">
+                <a:solidFill>
+                  <a:srgbClr val="1C1C1E"/>
+                </a:solidFill>
+                <a:latin typeface="맑은 고딕"/>
+                <a:ea typeface="맑은 고딕"/>
+              </a:rPr>
+              <a:t>역할</a:t>
+            </a:r>
+            <a:r>
+              <a:rPr sz="1150" b="0" dirty="0">
+                <a:solidFill>
+                  <a:srgbClr val="1C1C1E"/>
+                </a:solidFill>
+                <a:latin typeface="맑은 고딕"/>
+                <a:ea typeface="맑은 고딕"/>
+              </a:rPr>
+              <a:t> </a:t>
+            </a:r>
+            <a:r>
+              <a:rPr sz="1150" b="0" dirty="0" err="1">
+                <a:solidFill>
+                  <a:srgbClr val="1C1C1E"/>
+                </a:solidFill>
+                <a:latin typeface="맑은 고딕"/>
+                <a:ea typeface="맑은 고딕"/>
+              </a:rPr>
+              <a:t>분담</a:t>
+            </a:r>
+            <a:endParaRPr sz="1150" b="0" dirty="0">
+              <a:solidFill>
+                <a:srgbClr val="1C1C1E"/>
+              </a:solidFill>
+              <a:latin typeface="맑은 고딕"/>
+              <a:ea typeface="맑은 고딕"/>
+            </a:endParaRPr>
           </a:p>
         </p:txBody>
       </p:sp>
@@ -9676,7 +10755,7 @@
 </file>
 
 <file path=ppt/slides/slide3.xml><?xml version="1.0" encoding="utf-8"?>
-<p:sld xmlns:a="http://schemas.openxmlformats.org/drawingml/2006/main" xmlns:p="http://schemas.openxmlformats.org/presentationml/2006/main" xmlns:r="http://schemas.openxmlformats.org/officeDocument/2006/relationships">
+<p:sld xmlns:a="http://schemas.openxmlformats.org/drawingml/2006/main" xmlns:r="http://schemas.openxmlformats.org/officeDocument/2006/relationships" xmlns:p="http://schemas.openxmlformats.org/presentationml/2006/main">
   <p:cSld>
     <p:spTree>
       <p:nvGrpSpPr>
@@ -9684,7 +10763,14 @@
         <p:cNvGrpSpPr/>
         <p:nvPr/>
       </p:nvGrpSpPr>
-      <p:grpSpPr/>
+      <p:grpSpPr>
+        <a:xfrm>
+          <a:off x="0" y="0"/>
+          <a:ext cx="0" cy="0"/>
+          <a:chOff x="0" y="0"/>
+          <a:chExt cx="0" cy="0"/>
+        </a:xfrm>
+      </p:grpSpPr>
       <p:sp>
         <p:nvSpPr>
           <p:cNvPr id="2" name="Rectangle 1"/>
@@ -9726,6 +10812,7 @@
           <a:lstStyle/>
           <a:p>
             <a:pPr algn="ctr"/>
+            <a:endParaRPr/>
           </a:p>
         </p:txBody>
       </p:sp>
@@ -9754,7 +10841,7 @@
                 <a:srgbClr val="73787E"/>
               </a:gs>
             </a:gsLst>
-            <a:lin scaled="0" ang="18900000"/>
+            <a:lin ang="18900000" scaled="0"/>
           </a:gradFill>
           <a:ln>
             <a:noFill/>
@@ -9786,6 +10873,7 @@
           <a:lstStyle/>
           <a:p>
             <a:pPr algn="ctr"/>
+            <a:endParaRPr/>
           </a:p>
         </p:txBody>
       </p:sp>
@@ -9797,8 +10885,8 @@
         </p:nvSpPr>
         <p:spPr>
           <a:xfrm>
-            <a:off x="960120" y="274320"/>
-            <a:ext cx="9692640" cy="685800"/>
+            <a:off x="960120" y="399564"/>
+            <a:ext cx="9692640" cy="435312"/>
           </a:xfrm>
           <a:prstGeom prst="rect">
             <a:avLst/>
@@ -9820,15 +10908,82 @@
               </a:spcAft>
             </a:pPr>
             <a:r>
-              <a:rPr sz="2150" b="1">
-                <a:solidFill>
-                  <a:srgbClr val="1C1C1E"/>
-                </a:solidFill>
-                <a:latin typeface="맑은 고딕"/>
-                <a:ea typeface="맑은 고딕"/>
-              </a:rPr>
-              <a:t>아이디어의 발단 — 자원 부족은 실재한다. 그런데 원인이 그것뿐인가</a:t>
-            </a:r>
+              <a:rPr sz="2150" b="1" dirty="0" err="1">
+                <a:solidFill>
+                  <a:srgbClr val="1C1C1E"/>
+                </a:solidFill>
+                <a:latin typeface="맑은 고딕"/>
+                <a:ea typeface="맑은 고딕"/>
+              </a:rPr>
+              <a:t>아이디어의</a:t>
+            </a:r>
+            <a:r>
+              <a:rPr sz="2150" b="1" dirty="0">
+                <a:solidFill>
+                  <a:srgbClr val="1C1C1E"/>
+                </a:solidFill>
+                <a:latin typeface="맑은 고딕"/>
+                <a:ea typeface="맑은 고딕"/>
+              </a:rPr>
+              <a:t> </a:t>
+            </a:r>
+            <a:r>
+              <a:rPr sz="2150" b="1" dirty="0" err="1">
+                <a:solidFill>
+                  <a:srgbClr val="1C1C1E"/>
+                </a:solidFill>
+                <a:latin typeface="맑은 고딕"/>
+                <a:ea typeface="맑은 고딕"/>
+              </a:rPr>
+              <a:t>발단</a:t>
+            </a:r>
+            <a:r>
+              <a:rPr lang="ko-KR" altLang="en-US" sz="2150" b="1" dirty="0">
+                <a:solidFill>
+                  <a:srgbClr val="1C1C1E"/>
+                </a:solidFill>
+                <a:latin typeface="맑은 고딕"/>
+                <a:ea typeface="맑은 고딕"/>
+              </a:rPr>
+              <a:t> </a:t>
+            </a:r>
+            <a:r>
+              <a:rPr lang="en-US" altLang="ko-KR" sz="2150" b="1" dirty="0">
+                <a:solidFill>
+                  <a:srgbClr val="1C1C1E"/>
+                </a:solidFill>
+                <a:latin typeface="맑은 고딕"/>
+                <a:ea typeface="맑은 고딕"/>
+              </a:rPr>
+              <a:t>— </a:t>
+            </a:r>
+            <a:r>
+              <a:rPr lang="ko-KR" altLang="en-US" sz="2150" b="1" dirty="0">
+                <a:solidFill>
+                  <a:srgbClr val="1C1C1E"/>
+                </a:solidFill>
+                <a:latin typeface="맑은 고딕"/>
+                <a:ea typeface="맑은 고딕"/>
+              </a:rPr>
+              <a:t>의료 공급 부족의 원인은 오직 자원부족 때문인가</a:t>
+            </a:r>
+            <a:r>
+              <a:rPr lang="en-US" altLang="ko-KR" sz="2150" b="1" dirty="0">
+                <a:solidFill>
+                  <a:srgbClr val="1C1C1E"/>
+                </a:solidFill>
+                <a:latin typeface="맑은 고딕"/>
+                <a:ea typeface="맑은 고딕"/>
+              </a:rPr>
+              <a:t>?</a:t>
+            </a:r>
+            <a:endParaRPr sz="2150" b="1" dirty="0">
+              <a:solidFill>
+                <a:srgbClr val="1C1C1E"/>
+              </a:solidFill>
+              <a:latin typeface="맑은 고딕"/>
+              <a:ea typeface="맑은 고딕"/>
+            </a:endParaRPr>
           </a:p>
         </p:txBody>
       </p:sp>
@@ -9855,7 +11010,7 @@
                 <a:srgbClr val="FFFFFF"/>
               </a:gs>
             </a:gsLst>
-            <a:lin scaled="0" ang="0"/>
+            <a:lin ang="0" scaled="0"/>
           </a:gradFill>
           <a:ln>
             <a:noFill/>
@@ -9881,6 +11036,7 @@
           <a:lstStyle/>
           <a:p>
             <a:pPr algn="ctr"/>
+            <a:endParaRPr/>
           </a:p>
         </p:txBody>
       </p:sp>
@@ -9958,15 +11114,162 @@
               </a:spcAft>
             </a:pPr>
             <a:r>
-              <a:rPr sz="1250" b="0">
+              <a:rPr sz="1250" b="0" dirty="0" err="1">
                 <a:solidFill>
                   <a:srgbClr val="767A7F"/>
                 </a:solidFill>
                 <a:latin typeface="맑은 고딕"/>
                 <a:ea typeface="맑은 고딕"/>
               </a:rPr>
-              <a:t>부족(㉠)과 배분(㉡)은 다른 문제이고 해법도 다르다 — 본 계획은 ㉡을 맡는다</a:t>
-            </a:r>
+              <a:t>부족</a:t>
+            </a:r>
+            <a:r>
+              <a:rPr sz="1250" b="0" dirty="0">
+                <a:solidFill>
+                  <a:srgbClr val="767A7F"/>
+                </a:solidFill>
+                <a:latin typeface="맑은 고딕"/>
+                <a:ea typeface="맑은 고딕"/>
+              </a:rPr>
+              <a:t>(㉠)과 </a:t>
+            </a:r>
+            <a:r>
+              <a:rPr sz="1250" b="0" dirty="0" err="1">
+                <a:solidFill>
+                  <a:srgbClr val="767A7F"/>
+                </a:solidFill>
+                <a:latin typeface="맑은 고딕"/>
+                <a:ea typeface="맑은 고딕"/>
+              </a:rPr>
+              <a:t>배분</a:t>
+            </a:r>
+            <a:r>
+              <a:rPr sz="1250" b="0" dirty="0">
+                <a:solidFill>
+                  <a:srgbClr val="767A7F"/>
+                </a:solidFill>
+                <a:latin typeface="맑은 고딕"/>
+                <a:ea typeface="맑은 고딕"/>
+              </a:rPr>
+              <a:t>(㉡)은 </a:t>
+            </a:r>
+            <a:r>
+              <a:rPr sz="1250" b="0" dirty="0" err="1">
+                <a:solidFill>
+                  <a:srgbClr val="767A7F"/>
+                </a:solidFill>
+                <a:latin typeface="맑은 고딕"/>
+                <a:ea typeface="맑은 고딕"/>
+              </a:rPr>
+              <a:t>다른</a:t>
+            </a:r>
+            <a:r>
+              <a:rPr sz="1250" b="0" dirty="0">
+                <a:solidFill>
+                  <a:srgbClr val="767A7F"/>
+                </a:solidFill>
+                <a:latin typeface="맑은 고딕"/>
+                <a:ea typeface="맑은 고딕"/>
+              </a:rPr>
+              <a:t> </a:t>
+            </a:r>
+            <a:r>
+              <a:rPr sz="1250" b="0" dirty="0" err="1">
+                <a:solidFill>
+                  <a:srgbClr val="767A7F"/>
+                </a:solidFill>
+                <a:latin typeface="맑은 고딕"/>
+                <a:ea typeface="맑은 고딕"/>
+              </a:rPr>
+              <a:t>문제이고</a:t>
+            </a:r>
+            <a:r>
+              <a:rPr sz="1250" b="0" dirty="0">
+                <a:solidFill>
+                  <a:srgbClr val="767A7F"/>
+                </a:solidFill>
+                <a:latin typeface="맑은 고딕"/>
+                <a:ea typeface="맑은 고딕"/>
+              </a:rPr>
+              <a:t> </a:t>
+            </a:r>
+            <a:r>
+              <a:rPr sz="1250" b="0" dirty="0" err="1">
+                <a:solidFill>
+                  <a:srgbClr val="767A7F"/>
+                </a:solidFill>
+                <a:latin typeface="맑은 고딕"/>
+                <a:ea typeface="맑은 고딕"/>
+              </a:rPr>
+              <a:t>해법도</a:t>
+            </a:r>
+            <a:r>
+              <a:rPr sz="1250" b="0" dirty="0">
+                <a:solidFill>
+                  <a:srgbClr val="767A7F"/>
+                </a:solidFill>
+                <a:latin typeface="맑은 고딕"/>
+                <a:ea typeface="맑은 고딕"/>
+              </a:rPr>
+              <a:t> </a:t>
+            </a:r>
+            <a:r>
+              <a:rPr sz="1250" b="0" dirty="0" err="1">
+                <a:solidFill>
+                  <a:srgbClr val="767A7F"/>
+                </a:solidFill>
+                <a:latin typeface="맑은 고딕"/>
+                <a:ea typeface="맑은 고딕"/>
+              </a:rPr>
+              <a:t>다르다</a:t>
+            </a:r>
+            <a:r>
+              <a:rPr sz="1250" b="0" dirty="0">
+                <a:solidFill>
+                  <a:srgbClr val="767A7F"/>
+                </a:solidFill>
+                <a:latin typeface="맑은 고딕"/>
+                <a:ea typeface="맑은 고딕"/>
+              </a:rPr>
+              <a:t> — 본 </a:t>
+            </a:r>
+            <a:r>
+              <a:rPr sz="1250" b="0" dirty="0" err="1">
+                <a:solidFill>
+                  <a:srgbClr val="767A7F"/>
+                </a:solidFill>
+                <a:latin typeface="맑은 고딕"/>
+                <a:ea typeface="맑은 고딕"/>
+              </a:rPr>
+              <a:t>계획은</a:t>
+            </a:r>
+            <a:r>
+              <a:rPr sz="1250" b="0" dirty="0">
+                <a:solidFill>
+                  <a:srgbClr val="767A7F"/>
+                </a:solidFill>
+                <a:latin typeface="맑은 고딕"/>
+                <a:ea typeface="맑은 고딕"/>
+              </a:rPr>
+              <a:t> ㉡을 </a:t>
+            </a:r>
+            <a:r>
+              <a:rPr sz="1250" b="0" dirty="0" err="1">
+                <a:solidFill>
+                  <a:srgbClr val="767A7F"/>
+                </a:solidFill>
+                <a:latin typeface="맑은 고딕"/>
+                <a:ea typeface="맑은 고딕"/>
+              </a:rPr>
+              <a:t>맡는다</a:t>
+            </a:r>
+            <a:endParaRPr sz="1250" b="0" dirty="0">
+              <a:solidFill>
+                <a:srgbClr val="767A7F"/>
+              </a:solidFill>
+              <a:latin typeface="맑은 고딕"/>
+              <a:ea typeface="맑은 고딕"/>
+            </a:endParaRPr>
           </a:p>
         </p:txBody>
       </p:sp>
@@ -10064,6 +11367,7 @@
           <a:lstStyle/>
           <a:p>
             <a:pPr algn="ctr"/>
+            <a:endParaRPr/>
           </a:p>
         </p:txBody>
       </p:sp>
@@ -10098,15 +11402,72 @@
               </a:spcAft>
             </a:pPr>
             <a:r>
-              <a:rPr sz="1300" b="1">
+              <a:rPr sz="1300" b="1" dirty="0">
                 <a:solidFill>
                   <a:srgbClr val="33393F"/>
                 </a:solidFill>
                 <a:latin typeface="맑은 고딕"/>
                 <a:ea typeface="맑은 고딕"/>
               </a:rPr>
-              <a:t>① 여전히 존재하는 분만취약지</a:t>
-            </a:r>
+              <a:t>① </a:t>
+            </a:r>
+            <a:r>
+              <a:rPr sz="1300" b="1" dirty="0" err="1">
+                <a:solidFill>
+                  <a:srgbClr val="33393F"/>
+                </a:solidFill>
+                <a:latin typeface="맑은 고딕"/>
+                <a:ea typeface="맑은 고딕"/>
+              </a:rPr>
+              <a:t>여전히</a:t>
+            </a:r>
+            <a:r>
+              <a:rPr sz="1300" b="1" dirty="0">
+                <a:solidFill>
+                  <a:srgbClr val="33393F"/>
+                </a:solidFill>
+                <a:latin typeface="맑은 고딕"/>
+                <a:ea typeface="맑은 고딕"/>
+              </a:rPr>
+              <a:t> </a:t>
+            </a:r>
+            <a:r>
+              <a:rPr sz="1300" b="1" dirty="0" err="1">
+                <a:solidFill>
+                  <a:srgbClr val="33393F"/>
+                </a:solidFill>
+                <a:latin typeface="맑은 고딕"/>
+                <a:ea typeface="맑은 고딕"/>
+              </a:rPr>
+              <a:t>존재하는</a:t>
+            </a:r>
+            <a:r>
+              <a:rPr sz="1300" b="1" dirty="0">
+                <a:solidFill>
+                  <a:srgbClr val="33393F"/>
+                </a:solidFill>
+                <a:latin typeface="맑은 고딕"/>
+                <a:ea typeface="맑은 고딕"/>
+              </a:rPr>
+              <a:t> </a:t>
+            </a:r>
+            <a:r>
+              <a:rPr sz="1300" b="1" dirty="0" err="1">
+                <a:solidFill>
+                  <a:srgbClr val="33393F"/>
+                </a:solidFill>
+                <a:latin typeface="맑은 고딕"/>
+                <a:ea typeface="맑은 고딕"/>
+              </a:rPr>
+              <a:t>분만취약지</a:t>
+            </a:r>
+            <a:endParaRPr sz="1300" b="1" dirty="0">
+              <a:solidFill>
+                <a:srgbClr val="33393F"/>
+              </a:solidFill>
+              <a:latin typeface="맑은 고딕"/>
+              <a:ea typeface="맑은 고딕"/>
+            </a:endParaRPr>
           </a:p>
           <a:p>
             <a:pPr marL="160020" indent="-160020">
@@ -10118,15 +11479,392 @@
               </a:spcAft>
             </a:pPr>
             <a:r>
-              <a:rPr sz="1100" b="0">
-                <a:solidFill>
-                  <a:srgbClr val="1C1C1E"/>
-                </a:solidFill>
-                <a:latin typeface="맑은 고딕"/>
-                <a:ea typeface="맑은 고딕"/>
-              </a:rPr>
-              <a:t>• "지방에 분만실이 없다" — 해마다 반복되는 기사. 처방도 늘 같다: 의사를 늘리고 병원을 지어라. 그리고 이 처방은 옳다 — 절대량이 모자란 것은 사실이다</a:t>
-            </a:r>
+              <a:rPr sz="1100" b="0" dirty="0">
+                <a:solidFill>
+                  <a:srgbClr val="1C1C1E"/>
+                </a:solidFill>
+                <a:latin typeface="맑은 고딕"/>
+                <a:ea typeface="맑은 고딕"/>
+              </a:rPr>
+              <a:t>• "</a:t>
+            </a:r>
+            <a:r>
+              <a:rPr sz="1100" b="0" dirty="0" err="1">
+                <a:solidFill>
+                  <a:srgbClr val="1C1C1E"/>
+                </a:solidFill>
+                <a:latin typeface="맑은 고딕"/>
+                <a:ea typeface="맑은 고딕"/>
+              </a:rPr>
+              <a:t>지방에</a:t>
+            </a:r>
+            <a:r>
+              <a:rPr sz="1100" b="0" dirty="0">
+                <a:solidFill>
+                  <a:srgbClr val="1C1C1E"/>
+                </a:solidFill>
+                <a:latin typeface="맑은 고딕"/>
+                <a:ea typeface="맑은 고딕"/>
+              </a:rPr>
+              <a:t> </a:t>
+            </a:r>
+            <a:r>
+              <a:rPr sz="1100" b="0" dirty="0" err="1">
+                <a:solidFill>
+                  <a:srgbClr val="1C1C1E"/>
+                </a:solidFill>
+                <a:latin typeface="맑은 고딕"/>
+                <a:ea typeface="맑은 고딕"/>
+              </a:rPr>
+              <a:t>분만실이</a:t>
+            </a:r>
+            <a:r>
+              <a:rPr sz="1100" b="0" dirty="0">
+                <a:solidFill>
+                  <a:srgbClr val="1C1C1E"/>
+                </a:solidFill>
+                <a:latin typeface="맑은 고딕"/>
+                <a:ea typeface="맑은 고딕"/>
+              </a:rPr>
+              <a:t> </a:t>
+            </a:r>
+            <a:r>
+              <a:rPr sz="1100" b="0" dirty="0" err="1">
+                <a:solidFill>
+                  <a:srgbClr val="1C1C1E"/>
+                </a:solidFill>
+                <a:latin typeface="맑은 고딕"/>
+                <a:ea typeface="맑은 고딕"/>
+              </a:rPr>
+              <a:t>없다</a:t>
+            </a:r>
+            <a:r>
+              <a:rPr sz="1100" b="0" dirty="0">
+                <a:solidFill>
+                  <a:srgbClr val="1C1C1E"/>
+                </a:solidFill>
+                <a:latin typeface="맑은 고딕"/>
+                <a:ea typeface="맑은 고딕"/>
+              </a:rPr>
+              <a:t>" — </a:t>
+            </a:r>
+            <a:r>
+              <a:rPr sz="1100" b="0" dirty="0" err="1">
+                <a:solidFill>
+                  <a:srgbClr val="1C1C1E"/>
+                </a:solidFill>
+                <a:latin typeface="맑은 고딕"/>
+                <a:ea typeface="맑은 고딕"/>
+              </a:rPr>
+              <a:t>해마다</a:t>
+            </a:r>
+            <a:r>
+              <a:rPr sz="1100" b="0" dirty="0">
+                <a:solidFill>
+                  <a:srgbClr val="1C1C1E"/>
+                </a:solidFill>
+                <a:latin typeface="맑은 고딕"/>
+                <a:ea typeface="맑은 고딕"/>
+              </a:rPr>
+              <a:t> </a:t>
+            </a:r>
+            <a:r>
+              <a:rPr sz="1100" b="0" dirty="0" err="1">
+                <a:solidFill>
+                  <a:srgbClr val="1C1C1E"/>
+                </a:solidFill>
+                <a:latin typeface="맑은 고딕"/>
+                <a:ea typeface="맑은 고딕"/>
+              </a:rPr>
+              <a:t>반복되는</a:t>
+            </a:r>
+            <a:r>
+              <a:rPr sz="1100" b="0" dirty="0">
+                <a:solidFill>
+                  <a:srgbClr val="1C1C1E"/>
+                </a:solidFill>
+                <a:latin typeface="맑은 고딕"/>
+                <a:ea typeface="맑은 고딕"/>
+              </a:rPr>
+              <a:t> </a:t>
+            </a:r>
+            <a:r>
+              <a:rPr sz="1100" b="0" dirty="0" err="1">
+                <a:solidFill>
+                  <a:srgbClr val="1C1C1E"/>
+                </a:solidFill>
+                <a:latin typeface="맑은 고딕"/>
+                <a:ea typeface="맑은 고딕"/>
+              </a:rPr>
+              <a:t>기사</a:t>
+            </a:r>
+            <a:r>
+              <a:rPr sz="1100" b="0" dirty="0">
+                <a:solidFill>
+                  <a:srgbClr val="1C1C1E"/>
+                </a:solidFill>
+                <a:latin typeface="맑은 고딕"/>
+                <a:ea typeface="맑은 고딕"/>
+              </a:rPr>
+              <a:t>. </a:t>
+            </a:r>
+            <a:r>
+              <a:rPr sz="1100" b="0" dirty="0" err="1">
+                <a:solidFill>
+                  <a:srgbClr val="1C1C1E"/>
+                </a:solidFill>
+                <a:latin typeface="맑은 고딕"/>
+                <a:ea typeface="맑은 고딕"/>
+              </a:rPr>
+              <a:t>처방도</a:t>
+            </a:r>
+            <a:r>
+              <a:rPr sz="1100" b="0" dirty="0">
+                <a:solidFill>
+                  <a:srgbClr val="1C1C1E"/>
+                </a:solidFill>
+                <a:latin typeface="맑은 고딕"/>
+                <a:ea typeface="맑은 고딕"/>
+              </a:rPr>
+              <a:t> 늘 </a:t>
+            </a:r>
+            <a:r>
+              <a:rPr sz="1100" b="0" dirty="0" err="1">
+                <a:solidFill>
+                  <a:srgbClr val="1C1C1E"/>
+                </a:solidFill>
+                <a:latin typeface="맑은 고딕"/>
+                <a:ea typeface="맑은 고딕"/>
+              </a:rPr>
+              <a:t>같다</a:t>
+            </a:r>
+            <a:r>
+              <a:rPr sz="1100" b="0" dirty="0">
+                <a:solidFill>
+                  <a:srgbClr val="1C1C1E"/>
+                </a:solidFill>
+                <a:latin typeface="맑은 고딕"/>
+                <a:ea typeface="맑은 고딕"/>
+              </a:rPr>
+              <a:t>: </a:t>
+            </a:r>
+            <a:r>
+              <a:rPr sz="1100" b="0" dirty="0" err="1">
+                <a:solidFill>
+                  <a:srgbClr val="1C1C1E"/>
+                </a:solidFill>
+                <a:latin typeface="맑은 고딕"/>
+                <a:ea typeface="맑은 고딕"/>
+              </a:rPr>
+              <a:t>의사를</a:t>
+            </a:r>
+            <a:r>
+              <a:rPr sz="1100" b="0" dirty="0">
+                <a:solidFill>
+                  <a:srgbClr val="1C1C1E"/>
+                </a:solidFill>
+                <a:latin typeface="맑은 고딕"/>
+                <a:ea typeface="맑은 고딕"/>
+              </a:rPr>
+              <a:t> </a:t>
+            </a:r>
+            <a:r>
+              <a:rPr sz="1100" b="0" dirty="0" err="1">
+                <a:solidFill>
+                  <a:srgbClr val="1C1C1E"/>
+                </a:solidFill>
+                <a:latin typeface="맑은 고딕"/>
+                <a:ea typeface="맑은 고딕"/>
+              </a:rPr>
+              <a:t>늘리고</a:t>
+            </a:r>
+            <a:r>
+              <a:rPr sz="1100" b="0" dirty="0">
+                <a:solidFill>
+                  <a:srgbClr val="1C1C1E"/>
+                </a:solidFill>
+                <a:latin typeface="맑은 고딕"/>
+                <a:ea typeface="맑은 고딕"/>
+              </a:rPr>
+              <a:t> </a:t>
+            </a:r>
+            <a:r>
+              <a:rPr sz="1100" b="0" dirty="0" err="1">
+                <a:solidFill>
+                  <a:srgbClr val="1C1C1E"/>
+                </a:solidFill>
+                <a:latin typeface="맑은 고딕"/>
+                <a:ea typeface="맑은 고딕"/>
+              </a:rPr>
+              <a:t>병원을</a:t>
+            </a:r>
+            <a:r>
+              <a:rPr sz="1100" b="0" dirty="0">
+                <a:solidFill>
+                  <a:srgbClr val="1C1C1E"/>
+                </a:solidFill>
+                <a:latin typeface="맑은 고딕"/>
+                <a:ea typeface="맑은 고딕"/>
+              </a:rPr>
+              <a:t> </a:t>
+            </a:r>
+            <a:r>
+              <a:rPr sz="1100" b="0" dirty="0" err="1">
+                <a:solidFill>
+                  <a:srgbClr val="1C1C1E"/>
+                </a:solidFill>
+                <a:latin typeface="맑은 고딕"/>
+                <a:ea typeface="맑은 고딕"/>
+              </a:rPr>
+              <a:t>지어라</a:t>
+            </a:r>
+            <a:r>
+              <a:rPr sz="1100" b="0" dirty="0">
+                <a:solidFill>
+                  <a:srgbClr val="1C1C1E"/>
+                </a:solidFill>
+                <a:latin typeface="맑은 고딕"/>
+                <a:ea typeface="맑은 고딕"/>
+              </a:rPr>
+              <a:t>. </a:t>
+            </a:r>
+            <a:r>
+              <a:rPr sz="1100" b="0" dirty="0" err="1">
+                <a:solidFill>
+                  <a:srgbClr val="1C1C1E"/>
+                </a:solidFill>
+                <a:latin typeface="맑은 고딕"/>
+                <a:ea typeface="맑은 고딕"/>
+              </a:rPr>
+              <a:t>그리고</a:t>
+            </a:r>
+            <a:r>
+              <a:rPr sz="1100" b="0" dirty="0">
+                <a:solidFill>
+                  <a:srgbClr val="1C1C1E"/>
+                </a:solidFill>
+                <a:latin typeface="맑은 고딕"/>
+                <a:ea typeface="맑은 고딕"/>
+              </a:rPr>
+              <a:t> 이 </a:t>
+            </a:r>
+            <a:r>
+              <a:rPr sz="1100" b="0" dirty="0" err="1">
+                <a:solidFill>
+                  <a:srgbClr val="1C1C1E"/>
+                </a:solidFill>
+                <a:latin typeface="맑은 고딕"/>
+                <a:ea typeface="맑은 고딕"/>
+              </a:rPr>
+              <a:t>처방은</a:t>
+            </a:r>
+            <a:r>
+              <a:rPr sz="1100" b="0" dirty="0">
+                <a:solidFill>
+                  <a:srgbClr val="1C1C1E"/>
+                </a:solidFill>
+                <a:latin typeface="맑은 고딕"/>
+                <a:ea typeface="맑은 고딕"/>
+              </a:rPr>
+              <a:t> </a:t>
+            </a:r>
+            <a:r>
+              <a:rPr sz="1100" b="0" dirty="0" err="1">
+                <a:solidFill>
+                  <a:srgbClr val="1C1C1E"/>
+                </a:solidFill>
+                <a:latin typeface="맑은 고딕"/>
+                <a:ea typeface="맑은 고딕"/>
+              </a:rPr>
+              <a:t>옳다</a:t>
+            </a:r>
+            <a:r>
+              <a:rPr sz="1100" b="0" dirty="0">
+                <a:solidFill>
+                  <a:srgbClr val="1C1C1E"/>
+                </a:solidFill>
+                <a:latin typeface="맑은 고딕"/>
+                <a:ea typeface="맑은 고딕"/>
+              </a:rPr>
+              <a:t> — </a:t>
+            </a:r>
+            <a:r>
+              <a:rPr sz="1100" b="0" dirty="0" err="1">
+                <a:solidFill>
+                  <a:srgbClr val="1C1C1E"/>
+                </a:solidFill>
+                <a:latin typeface="맑은 고딕"/>
+                <a:ea typeface="맑은 고딕"/>
+              </a:rPr>
+              <a:t>절대량이</a:t>
+            </a:r>
+            <a:r>
+              <a:rPr sz="1100" b="0" dirty="0">
+                <a:solidFill>
+                  <a:srgbClr val="1C1C1E"/>
+                </a:solidFill>
+                <a:latin typeface="맑은 고딕"/>
+                <a:ea typeface="맑은 고딕"/>
+              </a:rPr>
+              <a:t> </a:t>
+            </a:r>
+            <a:r>
+              <a:rPr sz="1100" b="0" dirty="0" err="1">
+                <a:solidFill>
+                  <a:srgbClr val="1C1C1E"/>
+                </a:solidFill>
+                <a:latin typeface="맑은 고딕"/>
+                <a:ea typeface="맑은 고딕"/>
+              </a:rPr>
+              <a:t>모자란</a:t>
+            </a:r>
+            <a:r>
+              <a:rPr sz="1100" b="0" dirty="0">
+                <a:solidFill>
+                  <a:srgbClr val="1C1C1E"/>
+                </a:solidFill>
+                <a:latin typeface="맑은 고딕"/>
+                <a:ea typeface="맑은 고딕"/>
+              </a:rPr>
+              <a:t> </a:t>
+            </a:r>
+            <a:r>
+              <a:rPr sz="1100" b="0" dirty="0" err="1">
+                <a:solidFill>
+                  <a:srgbClr val="1C1C1E"/>
+                </a:solidFill>
+                <a:latin typeface="맑은 고딕"/>
+                <a:ea typeface="맑은 고딕"/>
+              </a:rPr>
+              <a:t>것은</a:t>
+            </a:r>
+            <a:r>
+              <a:rPr sz="1100" b="0" dirty="0">
+                <a:solidFill>
+                  <a:srgbClr val="1C1C1E"/>
+                </a:solidFill>
+                <a:latin typeface="맑은 고딕"/>
+                <a:ea typeface="맑은 고딕"/>
+              </a:rPr>
+              <a:t> </a:t>
+            </a:r>
+            <a:r>
+              <a:rPr sz="1100" b="0" dirty="0" err="1">
+                <a:solidFill>
+                  <a:srgbClr val="1C1C1E"/>
+                </a:solidFill>
+                <a:latin typeface="맑은 고딕"/>
+                <a:ea typeface="맑은 고딕"/>
+              </a:rPr>
+              <a:t>사실이다</a:t>
+            </a:r>
+            <a:endParaRPr sz="1100" b="0" dirty="0">
+              <a:solidFill>
+                <a:srgbClr val="1C1C1E"/>
+              </a:solidFill>
+              <a:latin typeface="맑은 고딕"/>
+              <a:ea typeface="맑은 고딕"/>
+            </a:endParaRPr>
           </a:p>
         </p:txBody>
       </p:sp>
@@ -10181,6 +11919,7 @@
           <a:lstStyle/>
           <a:p>
             <a:pPr algn="ctr"/>
+            <a:endParaRPr/>
           </a:p>
         </p:txBody>
       </p:sp>
@@ -10215,15 +11954,72 @@
               </a:spcAft>
             </a:pPr>
             <a:r>
-              <a:rPr sz="1300" b="1">
+              <a:rPr sz="1300" b="1" dirty="0">
                 <a:solidFill>
                   <a:srgbClr val="33393F"/>
                 </a:solidFill>
                 <a:latin typeface="맑은 고딕"/>
                 <a:ea typeface="맑은 고딕"/>
               </a:rPr>
-              <a:t>② 그런데 원인이 그것뿐인가</a:t>
-            </a:r>
+              <a:t>② </a:t>
+            </a:r>
+            <a:r>
+              <a:rPr sz="1300" b="1" dirty="0" err="1">
+                <a:solidFill>
+                  <a:srgbClr val="33393F"/>
+                </a:solidFill>
+                <a:latin typeface="맑은 고딕"/>
+                <a:ea typeface="맑은 고딕"/>
+              </a:rPr>
+              <a:t>그런데</a:t>
+            </a:r>
+            <a:r>
+              <a:rPr sz="1300" b="1" dirty="0">
+                <a:solidFill>
+                  <a:srgbClr val="33393F"/>
+                </a:solidFill>
+                <a:latin typeface="맑은 고딕"/>
+                <a:ea typeface="맑은 고딕"/>
+              </a:rPr>
+              <a:t> </a:t>
+            </a:r>
+            <a:r>
+              <a:rPr sz="1300" b="1" dirty="0" err="1">
+                <a:solidFill>
+                  <a:srgbClr val="33393F"/>
+                </a:solidFill>
+                <a:latin typeface="맑은 고딕"/>
+                <a:ea typeface="맑은 고딕"/>
+              </a:rPr>
+              <a:t>원인이</a:t>
+            </a:r>
+            <a:r>
+              <a:rPr sz="1300" b="1" dirty="0">
+                <a:solidFill>
+                  <a:srgbClr val="33393F"/>
+                </a:solidFill>
+                <a:latin typeface="맑은 고딕"/>
+                <a:ea typeface="맑은 고딕"/>
+              </a:rPr>
+              <a:t> </a:t>
+            </a:r>
+            <a:r>
+              <a:rPr sz="1300" b="1" dirty="0" err="1">
+                <a:solidFill>
+                  <a:srgbClr val="33393F"/>
+                </a:solidFill>
+                <a:latin typeface="맑은 고딕"/>
+                <a:ea typeface="맑은 고딕"/>
+              </a:rPr>
+              <a:t>그것뿐인가</a:t>
+            </a:r>
+            <a:endParaRPr sz="1300" b="1" dirty="0">
+              <a:solidFill>
+                <a:srgbClr val="33393F"/>
+              </a:solidFill>
+              <a:latin typeface="맑은 고딕"/>
+              <a:ea typeface="맑은 고딕"/>
+            </a:endParaRPr>
           </a:p>
           <a:p>
             <a:pPr marL="160020" indent="-160020">
@@ -10235,15 +12031,292 @@
               </a:spcAft>
             </a:pPr>
             <a:r>
-              <a:rPr sz="1100" b="0">
-                <a:solidFill>
-                  <a:srgbClr val="1C1C1E"/>
-                </a:solidFill>
-                <a:latin typeface="맑은 고딕"/>
-                <a:ea typeface="맑은 고딕"/>
-              </a:rPr>
-              <a:t>• 자원이 모자란 것(㉠)과, 있는 자원이 체계적으로 배분되지 않는 것(㉡)은 다른 문제다. 그리고 둘은 동시에 성립할 수 있다</a:t>
-            </a:r>
+              <a:rPr sz="1100" b="0" dirty="0">
+                <a:solidFill>
+                  <a:srgbClr val="1C1C1E"/>
+                </a:solidFill>
+                <a:latin typeface="맑은 고딕"/>
+                <a:ea typeface="맑은 고딕"/>
+              </a:rPr>
+              <a:t>• </a:t>
+            </a:r>
+            <a:r>
+              <a:rPr sz="1100" b="0" dirty="0" err="1">
+                <a:solidFill>
+                  <a:srgbClr val="1C1C1E"/>
+                </a:solidFill>
+                <a:latin typeface="맑은 고딕"/>
+                <a:ea typeface="맑은 고딕"/>
+              </a:rPr>
+              <a:t>자원이</a:t>
+            </a:r>
+            <a:r>
+              <a:rPr sz="1100" b="0" dirty="0">
+                <a:solidFill>
+                  <a:srgbClr val="1C1C1E"/>
+                </a:solidFill>
+                <a:latin typeface="맑은 고딕"/>
+                <a:ea typeface="맑은 고딕"/>
+              </a:rPr>
+              <a:t> </a:t>
+            </a:r>
+            <a:r>
+              <a:rPr sz="1100" b="0" dirty="0" err="1">
+                <a:solidFill>
+                  <a:srgbClr val="1C1C1E"/>
+                </a:solidFill>
+                <a:latin typeface="맑은 고딕"/>
+                <a:ea typeface="맑은 고딕"/>
+              </a:rPr>
+              <a:t>모자란</a:t>
+            </a:r>
+            <a:r>
+              <a:rPr sz="1100" b="0" dirty="0">
+                <a:solidFill>
+                  <a:srgbClr val="1C1C1E"/>
+                </a:solidFill>
+                <a:latin typeface="맑은 고딕"/>
+                <a:ea typeface="맑은 고딕"/>
+              </a:rPr>
+              <a:t> 것(㉠)과, </a:t>
+            </a:r>
+            <a:r>
+              <a:rPr sz="1100" b="0" dirty="0" err="1">
+                <a:solidFill>
+                  <a:srgbClr val="1C1C1E"/>
+                </a:solidFill>
+                <a:latin typeface="맑은 고딕"/>
+                <a:ea typeface="맑은 고딕"/>
+              </a:rPr>
+              <a:t>있는</a:t>
+            </a:r>
+            <a:r>
+              <a:rPr sz="1100" b="0" dirty="0">
+                <a:solidFill>
+                  <a:srgbClr val="1C1C1E"/>
+                </a:solidFill>
+                <a:latin typeface="맑은 고딕"/>
+                <a:ea typeface="맑은 고딕"/>
+              </a:rPr>
+              <a:t> </a:t>
+            </a:r>
+            <a:r>
+              <a:rPr sz="1100" b="0" dirty="0" err="1">
+                <a:solidFill>
+                  <a:srgbClr val="1C1C1E"/>
+                </a:solidFill>
+                <a:latin typeface="맑은 고딕"/>
+                <a:ea typeface="맑은 고딕"/>
+              </a:rPr>
+              <a:t>자원이</a:t>
+            </a:r>
+            <a:r>
+              <a:rPr sz="1100" b="0" dirty="0">
+                <a:solidFill>
+                  <a:srgbClr val="1C1C1E"/>
+                </a:solidFill>
+                <a:latin typeface="맑은 고딕"/>
+                <a:ea typeface="맑은 고딕"/>
+              </a:rPr>
+              <a:t> </a:t>
+            </a:r>
+            <a:r>
+              <a:rPr sz="1100" b="0" dirty="0" err="1">
+                <a:solidFill>
+                  <a:srgbClr val="1C1C1E"/>
+                </a:solidFill>
+                <a:latin typeface="맑은 고딕"/>
+                <a:ea typeface="맑은 고딕"/>
+              </a:rPr>
+              <a:t>체계적으로</a:t>
+            </a:r>
+            <a:r>
+              <a:rPr sz="1100" b="0" dirty="0">
+                <a:solidFill>
+                  <a:srgbClr val="1C1C1E"/>
+                </a:solidFill>
+                <a:latin typeface="맑은 고딕"/>
+                <a:ea typeface="맑은 고딕"/>
+              </a:rPr>
+              <a:t> </a:t>
+            </a:r>
+            <a:r>
+              <a:rPr sz="1100" b="0" dirty="0" err="1">
+                <a:solidFill>
+                  <a:srgbClr val="1C1C1E"/>
+                </a:solidFill>
+                <a:latin typeface="맑은 고딕"/>
+                <a:ea typeface="맑은 고딕"/>
+              </a:rPr>
+              <a:t>배분되지</a:t>
+            </a:r>
+            <a:r>
+              <a:rPr sz="1100" b="0" dirty="0">
+                <a:solidFill>
+                  <a:srgbClr val="1C1C1E"/>
+                </a:solidFill>
+                <a:latin typeface="맑은 고딕"/>
+                <a:ea typeface="맑은 고딕"/>
+              </a:rPr>
+              <a:t> </a:t>
+            </a:r>
+            <a:r>
+              <a:rPr sz="1100" b="0" dirty="0" err="1">
+                <a:solidFill>
+                  <a:srgbClr val="1C1C1E"/>
+                </a:solidFill>
+                <a:latin typeface="맑은 고딕"/>
+                <a:ea typeface="맑은 고딕"/>
+              </a:rPr>
+              <a:t>않는</a:t>
+            </a:r>
+            <a:r>
+              <a:rPr sz="1100" b="0" dirty="0">
+                <a:solidFill>
+                  <a:srgbClr val="1C1C1E"/>
+                </a:solidFill>
+                <a:latin typeface="맑은 고딕"/>
+                <a:ea typeface="맑은 고딕"/>
+              </a:rPr>
+              <a:t> 것(㉡)은 </a:t>
+            </a:r>
+            <a:r>
+              <a:rPr sz="1100" b="0" dirty="0" err="1">
+                <a:solidFill>
+                  <a:srgbClr val="1C1C1E"/>
+                </a:solidFill>
+                <a:latin typeface="맑은 고딕"/>
+                <a:ea typeface="맑은 고딕"/>
+              </a:rPr>
+              <a:t>다른</a:t>
+            </a:r>
+            <a:r>
+              <a:rPr sz="1100" b="0" dirty="0">
+                <a:solidFill>
+                  <a:srgbClr val="1C1C1E"/>
+                </a:solidFill>
+                <a:latin typeface="맑은 고딕"/>
+                <a:ea typeface="맑은 고딕"/>
+              </a:rPr>
+              <a:t> </a:t>
+            </a:r>
+            <a:r>
+              <a:rPr sz="1100" b="0" dirty="0" err="1">
+                <a:solidFill>
+                  <a:srgbClr val="1C1C1E"/>
+                </a:solidFill>
+                <a:latin typeface="맑은 고딕"/>
+                <a:ea typeface="맑은 고딕"/>
+              </a:rPr>
+              <a:t>문제다</a:t>
+            </a:r>
+            <a:r>
+              <a:rPr sz="1100" b="0" dirty="0">
+                <a:solidFill>
+                  <a:srgbClr val="1C1C1E"/>
+                </a:solidFill>
+                <a:latin typeface="맑은 고딕"/>
+                <a:ea typeface="맑은 고딕"/>
+              </a:rPr>
+              <a:t>. </a:t>
+            </a:r>
+            <a:r>
+              <a:rPr sz="1100" b="0" dirty="0" err="1">
+                <a:solidFill>
+                  <a:srgbClr val="1C1C1E"/>
+                </a:solidFill>
+                <a:latin typeface="맑은 고딕"/>
+                <a:ea typeface="맑은 고딕"/>
+              </a:rPr>
+              <a:t>그리고</a:t>
+            </a:r>
+            <a:r>
+              <a:rPr sz="1100" b="0" dirty="0">
+                <a:solidFill>
+                  <a:srgbClr val="1C1C1E"/>
+                </a:solidFill>
+                <a:latin typeface="맑은 고딕"/>
+                <a:ea typeface="맑은 고딕"/>
+              </a:rPr>
+              <a:t> </a:t>
+            </a:r>
+            <a:r>
+              <a:rPr sz="1100" b="0" dirty="0" err="1">
+                <a:solidFill>
+                  <a:srgbClr val="1C1C1E"/>
+                </a:solidFill>
+                <a:latin typeface="맑은 고딕"/>
+                <a:ea typeface="맑은 고딕"/>
+              </a:rPr>
+              <a:t>둘은</a:t>
+            </a:r>
+            <a:r>
+              <a:rPr sz="1100" b="0" dirty="0">
+                <a:solidFill>
+                  <a:srgbClr val="1C1C1E"/>
+                </a:solidFill>
+                <a:latin typeface="맑은 고딕"/>
+                <a:ea typeface="맑은 고딕"/>
+              </a:rPr>
+              <a:t> </a:t>
+            </a:r>
+            <a:r>
+              <a:rPr sz="1100" b="0" dirty="0" err="1">
+                <a:solidFill>
+                  <a:srgbClr val="1C1C1E"/>
+                </a:solidFill>
+                <a:latin typeface="맑은 고딕"/>
+                <a:ea typeface="맑은 고딕"/>
+              </a:rPr>
+              <a:t>동시에</a:t>
+            </a:r>
+            <a:r>
+              <a:rPr sz="1100" b="0" dirty="0">
+                <a:solidFill>
+                  <a:srgbClr val="1C1C1E"/>
+                </a:solidFill>
+                <a:latin typeface="맑은 고딕"/>
+                <a:ea typeface="맑은 고딕"/>
+              </a:rPr>
+              <a:t> </a:t>
+            </a:r>
+            <a:r>
+              <a:rPr sz="1100" b="0" dirty="0" err="1">
+                <a:solidFill>
+                  <a:srgbClr val="1C1C1E"/>
+                </a:solidFill>
+                <a:latin typeface="맑은 고딕"/>
+                <a:ea typeface="맑은 고딕"/>
+              </a:rPr>
+              <a:t>성립할</a:t>
+            </a:r>
+            <a:r>
+              <a:rPr sz="1100" b="0" dirty="0">
+                <a:solidFill>
+                  <a:srgbClr val="1C1C1E"/>
+                </a:solidFill>
+                <a:latin typeface="맑은 고딕"/>
+                <a:ea typeface="맑은 고딕"/>
+              </a:rPr>
+              <a:t> 수 </a:t>
+            </a:r>
+            <a:r>
+              <a:rPr sz="1100" b="0" dirty="0" err="1">
+                <a:solidFill>
+                  <a:srgbClr val="1C1C1E"/>
+                </a:solidFill>
+                <a:latin typeface="맑은 고딕"/>
+                <a:ea typeface="맑은 고딕"/>
+              </a:rPr>
+              <a:t>있다</a:t>
+            </a:r>
+            <a:endParaRPr sz="1100" b="0" dirty="0">
+              <a:solidFill>
+                <a:srgbClr val="1C1C1E"/>
+              </a:solidFill>
+              <a:latin typeface="맑은 고딕"/>
+              <a:ea typeface="맑은 고딕"/>
+            </a:endParaRPr>
           </a:p>
         </p:txBody>
       </p:sp>
@@ -10298,6 +12371,7 @@
           <a:lstStyle/>
           <a:p>
             <a:pPr algn="ctr"/>
+            <a:endParaRPr/>
           </a:p>
         </p:txBody>
       </p:sp>
@@ -10310,7 +12384,7 @@
         <p:spPr>
           <a:xfrm>
             <a:off x="8366760" y="1499616"/>
-            <a:ext cx="3246120" cy="1527048"/>
+            <a:ext cx="3246120" cy="1126270"/>
           </a:xfrm>
           <a:prstGeom prst="rect">
             <a:avLst/>
@@ -10332,15 +12406,72 @@
               </a:spcAft>
             </a:pPr>
             <a:r>
-              <a:rPr sz="1300" b="1">
+              <a:rPr sz="1300" b="1" dirty="0">
                 <a:solidFill>
                   <a:srgbClr val="000000"/>
                 </a:solidFill>
                 <a:latin typeface="맑은 고딕"/>
                 <a:ea typeface="맑은 고딕"/>
               </a:rPr>
-              <a:t>③ 해결할 수 있는 문제</a:t>
-            </a:r>
+              <a:t>③ </a:t>
+            </a:r>
+            <a:r>
+              <a:rPr sz="1300" b="1" dirty="0" err="1">
+                <a:solidFill>
+                  <a:srgbClr val="000000"/>
+                </a:solidFill>
+                <a:latin typeface="맑은 고딕"/>
+                <a:ea typeface="맑은 고딕"/>
+              </a:rPr>
+              <a:t>해결할</a:t>
+            </a:r>
+            <a:r>
+              <a:rPr sz="1300" b="1" dirty="0">
+                <a:solidFill>
+                  <a:srgbClr val="000000"/>
+                </a:solidFill>
+                <a:latin typeface="맑은 고딕"/>
+                <a:ea typeface="맑은 고딕"/>
+              </a:rPr>
+              <a:t> 수 </a:t>
+            </a:r>
+            <a:r>
+              <a:rPr sz="1300" b="1" dirty="0" err="1">
+                <a:solidFill>
+                  <a:srgbClr val="000000"/>
+                </a:solidFill>
+                <a:latin typeface="맑은 고딕"/>
+                <a:ea typeface="맑은 고딕"/>
+              </a:rPr>
+              <a:t>있는</a:t>
+            </a:r>
+            <a:r>
+              <a:rPr sz="1300" b="1" dirty="0">
+                <a:solidFill>
+                  <a:srgbClr val="000000"/>
+                </a:solidFill>
+                <a:latin typeface="맑은 고딕"/>
+                <a:ea typeface="맑은 고딕"/>
+              </a:rPr>
+              <a:t> </a:t>
+            </a:r>
+            <a:r>
+              <a:rPr sz="1300" b="1" dirty="0" err="1">
+                <a:solidFill>
+                  <a:srgbClr val="000000"/>
+                </a:solidFill>
+                <a:latin typeface="맑은 고딕"/>
+                <a:ea typeface="맑은 고딕"/>
+              </a:rPr>
+              <a:t>문제</a:t>
+            </a:r>
+            <a:endParaRPr sz="1300" b="1" dirty="0">
+              <a:solidFill>
+                <a:srgbClr val="000000"/>
+              </a:solidFill>
+              <a:latin typeface="맑은 고딕"/>
+              <a:ea typeface="맑은 고딕"/>
+            </a:endParaRPr>
           </a:p>
           <a:p>
             <a:pPr marL="160020" indent="-160020">
@@ -10352,15 +12483,312 @@
               </a:spcAft>
             </a:pPr>
             <a:r>
-              <a:rPr sz="1100" b="0">
-                <a:solidFill>
-                  <a:srgbClr val="1C1C1E"/>
-                </a:solidFill>
-                <a:latin typeface="맑은 고딕"/>
-                <a:ea typeface="맑은 고딕"/>
-              </a:rPr>
-              <a:t>• ㉠은 예산·인력의 영역이라 데이터가 답할 수 없다. ㉡은 배분 규칙의 문제이므로 데이터로 답할 수 있다 — 그리고 ㉡은 아직 검증된 적이 없다</a:t>
-            </a:r>
+              <a:rPr sz="1100" b="0" dirty="0">
+                <a:solidFill>
+                  <a:srgbClr val="1C1C1E"/>
+                </a:solidFill>
+                <a:latin typeface="맑은 고딕"/>
+                <a:ea typeface="맑은 고딕"/>
+              </a:rPr>
+              <a:t>• ㉠은 </a:t>
+            </a:r>
+            <a:r>
+              <a:rPr sz="1100" b="0" dirty="0" err="1">
+                <a:solidFill>
+                  <a:srgbClr val="1C1C1E"/>
+                </a:solidFill>
+                <a:latin typeface="맑은 고딕"/>
+                <a:ea typeface="맑은 고딕"/>
+              </a:rPr>
+              <a:t>예산·인력</a:t>
+            </a:r>
+            <a:r>
+              <a:rPr lang="ko-KR" altLang="en-US" sz="1100" b="0" dirty="0">
+                <a:solidFill>
+                  <a:srgbClr val="1C1C1E"/>
+                </a:solidFill>
+                <a:latin typeface="맑은 고딕"/>
+                <a:ea typeface="맑은 고딕"/>
+              </a:rPr>
+              <a:t>에 따라 </a:t>
+            </a:r>
+            <a:r>
+              <a:rPr lang="ko-KR" altLang="en-US" sz="1100" b="0" dirty="0" err="1">
+                <a:solidFill>
+                  <a:srgbClr val="1C1C1E"/>
+                </a:solidFill>
+                <a:latin typeface="맑은 고딕"/>
+                <a:ea typeface="맑은 고딕"/>
+              </a:rPr>
+              <a:t>재한된</a:t>
+            </a:r>
+            <a:r>
+              <a:rPr lang="ko-KR" altLang="en-US" sz="1100" b="0" dirty="0">
+                <a:solidFill>
+                  <a:srgbClr val="1C1C1E"/>
+                </a:solidFill>
+                <a:latin typeface="맑은 고딕"/>
+                <a:ea typeface="맑은 고딕"/>
+              </a:rPr>
+              <a:t> </a:t>
+            </a:r>
+            <a:r>
+              <a:rPr sz="1100" b="0" dirty="0" err="1">
+                <a:solidFill>
+                  <a:srgbClr val="1C1C1E"/>
+                </a:solidFill>
+                <a:latin typeface="맑은 고딕"/>
+                <a:ea typeface="맑은 고딕"/>
+              </a:rPr>
+              <a:t>영역이라</a:t>
+            </a:r>
+            <a:r>
+              <a:rPr sz="1100" b="0" dirty="0">
+                <a:solidFill>
+                  <a:srgbClr val="1C1C1E"/>
+                </a:solidFill>
+                <a:latin typeface="맑은 고딕"/>
+                <a:ea typeface="맑은 고딕"/>
+              </a:rPr>
+              <a:t> </a:t>
+            </a:r>
+            <a:r>
+              <a:rPr sz="1100" b="0" dirty="0" err="1">
+                <a:solidFill>
+                  <a:srgbClr val="1C1C1E"/>
+                </a:solidFill>
+                <a:latin typeface="맑은 고딕"/>
+                <a:ea typeface="맑은 고딕"/>
+              </a:rPr>
+              <a:t>데이터가</a:t>
+            </a:r>
+            <a:r>
+              <a:rPr sz="1100" b="0" dirty="0">
+                <a:solidFill>
+                  <a:srgbClr val="1C1C1E"/>
+                </a:solidFill>
+                <a:latin typeface="맑은 고딕"/>
+                <a:ea typeface="맑은 고딕"/>
+              </a:rPr>
+              <a:t> </a:t>
+            </a:r>
+            <a:r>
+              <a:rPr lang="ko-KR" altLang="en-US" sz="1100" dirty="0">
+                <a:solidFill>
+                  <a:srgbClr val="1C1C1E"/>
+                </a:solidFill>
+                <a:latin typeface="맑은 고딕"/>
+                <a:ea typeface="맑은 고딕"/>
+              </a:rPr>
+              <a:t>해답을 주기 힘들</a:t>
+            </a:r>
+            <a:r>
+              <a:rPr sz="1100" b="0" dirty="0">
+                <a:solidFill>
+                  <a:srgbClr val="1C1C1E"/>
+                </a:solidFill>
+                <a:latin typeface="맑은 고딕"/>
+                <a:ea typeface="맑은 고딕"/>
+              </a:rPr>
+              <a:t>다. ㉡은 </a:t>
+            </a:r>
+            <a:r>
+              <a:rPr sz="1100" b="0" dirty="0" err="1">
+                <a:solidFill>
+                  <a:srgbClr val="1C1C1E"/>
+                </a:solidFill>
+                <a:latin typeface="맑은 고딕"/>
+                <a:ea typeface="맑은 고딕"/>
+              </a:rPr>
+              <a:t>배분</a:t>
+            </a:r>
+            <a:r>
+              <a:rPr sz="1100" b="0" dirty="0">
+                <a:solidFill>
+                  <a:srgbClr val="1C1C1E"/>
+                </a:solidFill>
+                <a:latin typeface="맑은 고딕"/>
+                <a:ea typeface="맑은 고딕"/>
+              </a:rPr>
+              <a:t> </a:t>
+            </a:r>
+            <a:r>
+              <a:rPr sz="1100" b="0" dirty="0" err="1">
+                <a:solidFill>
+                  <a:srgbClr val="1C1C1E"/>
+                </a:solidFill>
+                <a:latin typeface="맑은 고딕"/>
+                <a:ea typeface="맑은 고딕"/>
+              </a:rPr>
+              <a:t>규칙의</a:t>
+            </a:r>
+            <a:r>
+              <a:rPr sz="1100" b="0" dirty="0">
+                <a:solidFill>
+                  <a:srgbClr val="1C1C1E"/>
+                </a:solidFill>
+                <a:latin typeface="맑은 고딕"/>
+                <a:ea typeface="맑은 고딕"/>
+              </a:rPr>
+              <a:t> </a:t>
+            </a:r>
+            <a:r>
+              <a:rPr sz="1100" b="0" dirty="0" err="1">
+                <a:solidFill>
+                  <a:srgbClr val="1C1C1E"/>
+                </a:solidFill>
+                <a:latin typeface="맑은 고딕"/>
+                <a:ea typeface="맑은 고딕"/>
+              </a:rPr>
+              <a:t>문제이므로</a:t>
+            </a:r>
+            <a:r>
+              <a:rPr sz="1100" b="0" dirty="0">
+                <a:solidFill>
+                  <a:srgbClr val="1C1C1E"/>
+                </a:solidFill>
+                <a:latin typeface="맑은 고딕"/>
+                <a:ea typeface="맑은 고딕"/>
+              </a:rPr>
+              <a:t> </a:t>
+            </a:r>
+            <a:r>
+              <a:rPr sz="1100" b="0" dirty="0" err="1">
+                <a:solidFill>
+                  <a:srgbClr val="1C1C1E"/>
+                </a:solidFill>
+                <a:latin typeface="맑은 고딕"/>
+                <a:ea typeface="맑은 고딕"/>
+              </a:rPr>
+              <a:t>데이터로</a:t>
+            </a:r>
+            <a:r>
+              <a:rPr sz="1100" b="0" dirty="0">
+                <a:solidFill>
+                  <a:srgbClr val="1C1C1E"/>
+                </a:solidFill>
+                <a:latin typeface="맑은 고딕"/>
+                <a:ea typeface="맑은 고딕"/>
+              </a:rPr>
+              <a:t> </a:t>
+            </a:r>
+            <a:r>
+              <a:rPr sz="1100" b="0" dirty="0" err="1">
+                <a:solidFill>
+                  <a:srgbClr val="1C1C1E"/>
+                </a:solidFill>
+                <a:latin typeface="맑은 고딕"/>
+                <a:ea typeface="맑은 고딕"/>
+              </a:rPr>
+              <a:t>답할</a:t>
+            </a:r>
+            <a:r>
+              <a:rPr sz="1100" b="0" dirty="0">
+                <a:solidFill>
+                  <a:srgbClr val="1C1C1E"/>
+                </a:solidFill>
+                <a:latin typeface="맑은 고딕"/>
+                <a:ea typeface="맑은 고딕"/>
+              </a:rPr>
+              <a:t> 수 </a:t>
+            </a:r>
+            <a:r>
+              <a:rPr sz="1100" b="0" dirty="0" err="1">
+                <a:solidFill>
+                  <a:srgbClr val="1C1C1E"/>
+                </a:solidFill>
+                <a:latin typeface="맑은 고딕"/>
+                <a:ea typeface="맑은 고딕"/>
+              </a:rPr>
+              <a:t>있다</a:t>
+            </a:r>
+            <a:r>
+              <a:rPr sz="1100" b="0" dirty="0">
+                <a:solidFill>
+                  <a:srgbClr val="1C1C1E"/>
+                </a:solidFill>
+                <a:latin typeface="맑은 고딕"/>
+                <a:ea typeface="맑은 고딕"/>
+              </a:rPr>
+              <a:t> — </a:t>
+            </a:r>
+            <a:r>
+              <a:rPr sz="1100" b="0" dirty="0" err="1">
+                <a:solidFill>
+                  <a:srgbClr val="1C1C1E"/>
+                </a:solidFill>
+                <a:latin typeface="맑은 고딕"/>
+                <a:ea typeface="맑은 고딕"/>
+              </a:rPr>
+              <a:t>그리고</a:t>
+            </a:r>
+            <a:r>
+              <a:rPr sz="1100" b="0" dirty="0">
+                <a:solidFill>
+                  <a:srgbClr val="1C1C1E"/>
+                </a:solidFill>
+                <a:latin typeface="맑은 고딕"/>
+                <a:ea typeface="맑은 고딕"/>
+              </a:rPr>
+              <a:t> ㉡은 </a:t>
+            </a:r>
+            <a:r>
+              <a:rPr sz="1100" b="0" dirty="0" err="1">
+                <a:solidFill>
+                  <a:srgbClr val="1C1C1E"/>
+                </a:solidFill>
+                <a:latin typeface="맑은 고딕"/>
+                <a:ea typeface="맑은 고딕"/>
+              </a:rPr>
+              <a:t>아직</a:t>
+            </a:r>
+            <a:r>
+              <a:rPr sz="1100" b="0" dirty="0">
+                <a:solidFill>
+                  <a:srgbClr val="1C1C1E"/>
+                </a:solidFill>
+                <a:latin typeface="맑은 고딕"/>
+                <a:ea typeface="맑은 고딕"/>
+              </a:rPr>
+              <a:t> </a:t>
+            </a:r>
+            <a:r>
+              <a:rPr lang="ko-KR" altLang="en-US" sz="1100" b="0" dirty="0" err="1">
+                <a:solidFill>
+                  <a:srgbClr val="1C1C1E"/>
+                </a:solidFill>
+                <a:latin typeface="맑은 고딕"/>
+                <a:ea typeface="맑은 고딕"/>
+              </a:rPr>
+              <a:t>제대로된</a:t>
+            </a:r>
+            <a:r>
+              <a:rPr lang="ko-KR" altLang="en-US" sz="1100" b="0" dirty="0">
+                <a:solidFill>
+                  <a:srgbClr val="1C1C1E"/>
+                </a:solidFill>
+                <a:latin typeface="맑은 고딕"/>
+                <a:ea typeface="맑은 고딕"/>
+              </a:rPr>
+              <a:t> 검증이 되지 않았다</a:t>
+            </a:r>
+            <a:r>
+              <a:rPr lang="en-US" altLang="ko-KR" sz="1100" b="0" dirty="0">
+                <a:solidFill>
+                  <a:srgbClr val="1C1C1E"/>
+                </a:solidFill>
+                <a:latin typeface="맑은 고딕"/>
+                <a:ea typeface="맑은 고딕"/>
+              </a:rPr>
+              <a:t>.</a:t>
+            </a:r>
+            <a:endParaRPr sz="1100" b="0" dirty="0">
+              <a:solidFill>
+                <a:srgbClr val="1C1C1E"/>
+              </a:solidFill>
+              <a:latin typeface="맑은 고딕"/>
+              <a:ea typeface="맑은 고딕"/>
+            </a:endParaRPr>
           </a:p>
         </p:txBody>
       </p:sp>
@@ -10415,6 +12843,7 @@
           <a:lstStyle/>
           <a:p>
             <a:pPr algn="ctr"/>
+            <a:endParaRPr/>
           </a:p>
         </p:txBody>
       </p:sp>
@@ -10427,7 +12856,7 @@
         <p:spPr>
           <a:xfrm>
             <a:off x="685800" y="3529584"/>
-            <a:ext cx="10927080" cy="1316736"/>
+            <a:ext cx="10927080" cy="1177566"/>
           </a:xfrm>
           <a:prstGeom prst="rect">
             <a:avLst/>
@@ -10449,14 +12878,184 @@
               </a:spcAft>
             </a:pPr>
             <a:r>
-              <a:rPr sz="1300" b="1">
+              <a:rPr sz="1300" b="1" dirty="0" err="1">
                 <a:solidFill>
                   <a:srgbClr val="33393F"/>
                 </a:solidFill>
                 <a:latin typeface="맑은 고딕"/>
                 <a:ea typeface="맑은 고딕"/>
               </a:rPr>
-              <a:t>그리고 자원을 공백 지역으로 보내는 제도는 이미 있다 — 「분만취약지 지원사업」(15년째)</a:t>
+              <a:t>자원을</a:t>
+            </a:r>
+            <a:r>
+              <a:rPr sz="1300" b="1" dirty="0">
+                <a:solidFill>
+                  <a:srgbClr val="33393F"/>
+                </a:solidFill>
+                <a:latin typeface="맑은 고딕"/>
+                <a:ea typeface="맑은 고딕"/>
+              </a:rPr>
+              <a:t> </a:t>
+            </a:r>
+            <a:r>
+              <a:rPr sz="1300" b="1" dirty="0" err="1">
+                <a:solidFill>
+                  <a:srgbClr val="33393F"/>
+                </a:solidFill>
+                <a:latin typeface="맑은 고딕"/>
+                <a:ea typeface="맑은 고딕"/>
+              </a:rPr>
+              <a:t>공백</a:t>
+            </a:r>
+            <a:r>
+              <a:rPr sz="1300" b="1" dirty="0">
+                <a:solidFill>
+                  <a:srgbClr val="33393F"/>
+                </a:solidFill>
+                <a:latin typeface="맑은 고딕"/>
+                <a:ea typeface="맑은 고딕"/>
+              </a:rPr>
+              <a:t> </a:t>
+            </a:r>
+            <a:r>
+              <a:rPr sz="1300" b="1" dirty="0" err="1">
+                <a:solidFill>
+                  <a:srgbClr val="33393F"/>
+                </a:solidFill>
+                <a:latin typeface="맑은 고딕"/>
+                <a:ea typeface="맑은 고딕"/>
+              </a:rPr>
+              <a:t>지역으로</a:t>
+            </a:r>
+            <a:r>
+              <a:rPr sz="1300" b="1" dirty="0">
+                <a:solidFill>
+                  <a:srgbClr val="33393F"/>
+                </a:solidFill>
+                <a:latin typeface="맑은 고딕"/>
+                <a:ea typeface="맑은 고딕"/>
+              </a:rPr>
+              <a:t> </a:t>
+            </a:r>
+            <a:r>
+              <a:rPr sz="1300" b="1" dirty="0" err="1">
+                <a:solidFill>
+                  <a:srgbClr val="33393F"/>
+                </a:solidFill>
+                <a:latin typeface="맑은 고딕"/>
+                <a:ea typeface="맑은 고딕"/>
+              </a:rPr>
+              <a:t>보내는</a:t>
+            </a:r>
+            <a:r>
+              <a:rPr sz="1300" b="1" dirty="0">
+                <a:solidFill>
+                  <a:srgbClr val="33393F"/>
+                </a:solidFill>
+                <a:latin typeface="맑은 고딕"/>
+                <a:ea typeface="맑은 고딕"/>
+              </a:rPr>
+              <a:t> </a:t>
+            </a:r>
+            <a:r>
+              <a:rPr sz="1300" b="1" dirty="0" err="1">
+                <a:solidFill>
+                  <a:srgbClr val="33393F"/>
+                </a:solidFill>
+                <a:latin typeface="맑은 고딕"/>
+                <a:ea typeface="맑은 고딕"/>
+              </a:rPr>
+              <a:t>제도는</a:t>
+            </a:r>
+            <a:r>
+              <a:rPr sz="1300" b="1" dirty="0">
+                <a:solidFill>
+                  <a:srgbClr val="33393F"/>
+                </a:solidFill>
+                <a:latin typeface="맑은 고딕"/>
+                <a:ea typeface="맑은 고딕"/>
+              </a:rPr>
+              <a:t> </a:t>
+            </a:r>
+            <a:r>
+              <a:rPr sz="1300" b="1" dirty="0" err="1">
+                <a:solidFill>
+                  <a:srgbClr val="33393F"/>
+                </a:solidFill>
+                <a:latin typeface="맑은 고딕"/>
+                <a:ea typeface="맑은 고딕"/>
+              </a:rPr>
+              <a:t>이미</a:t>
+            </a:r>
+            <a:r>
+              <a:rPr sz="1300" b="1" dirty="0">
+                <a:solidFill>
+                  <a:srgbClr val="33393F"/>
+                </a:solidFill>
+                <a:latin typeface="맑은 고딕"/>
+                <a:ea typeface="맑은 고딕"/>
+              </a:rPr>
+              <a:t> </a:t>
+            </a:r>
+            <a:r>
+              <a:rPr sz="1300" b="1" dirty="0" err="1">
+                <a:solidFill>
+                  <a:srgbClr val="33393F"/>
+                </a:solidFill>
+                <a:latin typeface="맑은 고딕"/>
+                <a:ea typeface="맑은 고딕"/>
+              </a:rPr>
+              <a:t>있다</a:t>
+            </a:r>
+            <a:r>
+              <a:rPr sz="1300" b="1" dirty="0">
+                <a:solidFill>
+                  <a:srgbClr val="33393F"/>
+                </a:solidFill>
+                <a:latin typeface="맑은 고딕"/>
+                <a:ea typeface="맑은 고딕"/>
+              </a:rPr>
+              <a:t> — 「</a:t>
+            </a:r>
+            <a:r>
+              <a:rPr sz="1300" b="1" dirty="0" err="1">
+                <a:solidFill>
+                  <a:srgbClr val="33393F"/>
+                </a:solidFill>
+                <a:latin typeface="맑은 고딕"/>
+                <a:ea typeface="맑은 고딕"/>
+              </a:rPr>
+              <a:t>분만취약지</a:t>
+            </a:r>
+            <a:r>
+              <a:rPr sz="1300" b="1" dirty="0">
+                <a:solidFill>
+                  <a:srgbClr val="33393F"/>
+                </a:solidFill>
+                <a:latin typeface="맑은 고딕"/>
+                <a:ea typeface="맑은 고딕"/>
+              </a:rPr>
+              <a:t> </a:t>
+            </a:r>
+            <a:r>
+              <a:rPr sz="1300" b="1" dirty="0" err="1">
+                <a:solidFill>
+                  <a:srgbClr val="33393F"/>
+                </a:solidFill>
+                <a:latin typeface="맑은 고딕"/>
+                <a:ea typeface="맑은 고딕"/>
+              </a:rPr>
+              <a:t>지원사업</a:t>
+            </a:r>
+            <a:r>
+              <a:rPr sz="1300" b="1" dirty="0">
+                <a:solidFill>
+                  <a:srgbClr val="33393F"/>
+                </a:solidFill>
+                <a:latin typeface="맑은 고딕"/>
+                <a:ea typeface="맑은 고딕"/>
+              </a:rPr>
+              <a:t>」(15년째)</a:t>
             </a:r>
           </a:p>
           <a:p>
@@ -10469,15 +13068,452 @@
               </a:spcAft>
             </a:pPr>
             <a:r>
-              <a:rPr sz="1100" b="0">
-                <a:solidFill>
-                  <a:srgbClr val="1C1C1E"/>
-                </a:solidFill>
-                <a:latin typeface="맑은 고딕"/>
-                <a:ea typeface="맑은 고딕"/>
-              </a:rPr>
-              <a:t>• 분만취약지 = 소득·인구가 적은 지역이 아니라, 그 지역 가임기 여성이 ① 분만 가능 기관까지 60분 안에 닿기 어렵고(접근성) ② 실제 출산도 60분 안에 하지 못하는(이용률) 시·군</a:t>
-            </a:r>
+              <a:rPr sz="1100" b="0" dirty="0">
+                <a:solidFill>
+                  <a:srgbClr val="1C1C1E"/>
+                </a:solidFill>
+                <a:latin typeface="맑은 고딕"/>
+                <a:ea typeface="맑은 고딕"/>
+              </a:rPr>
+              <a:t>• </a:t>
+            </a:r>
+            <a:r>
+              <a:rPr sz="1100" b="0" dirty="0" err="1">
+                <a:solidFill>
+                  <a:srgbClr val="1C1C1E"/>
+                </a:solidFill>
+                <a:latin typeface="맑은 고딕"/>
+                <a:ea typeface="맑은 고딕"/>
+              </a:rPr>
+              <a:t>분만취약지</a:t>
+            </a:r>
+            <a:r>
+              <a:rPr sz="1100" b="0" dirty="0">
+                <a:solidFill>
+                  <a:srgbClr val="1C1C1E"/>
+                </a:solidFill>
+                <a:latin typeface="맑은 고딕"/>
+                <a:ea typeface="맑은 고딕"/>
+              </a:rPr>
+              <a:t> = </a:t>
+            </a:r>
+            <a:r>
+              <a:rPr sz="1100" b="0" dirty="0" err="1">
+                <a:solidFill>
+                  <a:srgbClr val="1C1C1E"/>
+                </a:solidFill>
+                <a:latin typeface="맑은 고딕"/>
+                <a:ea typeface="맑은 고딕"/>
+              </a:rPr>
+              <a:t>소득·인구가</a:t>
+            </a:r>
+            <a:r>
+              <a:rPr sz="1100" b="0" dirty="0">
+                <a:solidFill>
+                  <a:srgbClr val="1C1C1E"/>
+                </a:solidFill>
+                <a:latin typeface="맑은 고딕"/>
+                <a:ea typeface="맑은 고딕"/>
+              </a:rPr>
+              <a:t> </a:t>
+            </a:r>
+            <a:r>
+              <a:rPr sz="1100" b="0" dirty="0" err="1">
+                <a:solidFill>
+                  <a:srgbClr val="1C1C1E"/>
+                </a:solidFill>
+                <a:latin typeface="맑은 고딕"/>
+                <a:ea typeface="맑은 고딕"/>
+              </a:rPr>
+              <a:t>적은</a:t>
+            </a:r>
+            <a:r>
+              <a:rPr sz="1100" b="0" dirty="0">
+                <a:solidFill>
+                  <a:srgbClr val="1C1C1E"/>
+                </a:solidFill>
+                <a:latin typeface="맑은 고딕"/>
+                <a:ea typeface="맑은 고딕"/>
+              </a:rPr>
+              <a:t> </a:t>
+            </a:r>
+            <a:r>
+              <a:rPr sz="1100" b="0" dirty="0" err="1">
+                <a:solidFill>
+                  <a:srgbClr val="1C1C1E"/>
+                </a:solidFill>
+                <a:latin typeface="맑은 고딕"/>
+                <a:ea typeface="맑은 고딕"/>
+              </a:rPr>
+              <a:t>지역이</a:t>
+            </a:r>
+            <a:r>
+              <a:rPr sz="1100" b="0" dirty="0">
+                <a:solidFill>
+                  <a:srgbClr val="1C1C1E"/>
+                </a:solidFill>
+                <a:latin typeface="맑은 고딕"/>
+                <a:ea typeface="맑은 고딕"/>
+              </a:rPr>
+              <a:t> </a:t>
+            </a:r>
+            <a:r>
+              <a:rPr sz="1100" b="0" dirty="0" err="1">
+                <a:solidFill>
+                  <a:srgbClr val="1C1C1E"/>
+                </a:solidFill>
+                <a:latin typeface="맑은 고딕"/>
+                <a:ea typeface="맑은 고딕"/>
+              </a:rPr>
+              <a:t>아니라</a:t>
+            </a:r>
+            <a:r>
+              <a:rPr sz="1100" b="0" dirty="0">
+                <a:solidFill>
+                  <a:srgbClr val="1C1C1E"/>
+                </a:solidFill>
+                <a:latin typeface="맑은 고딕"/>
+                <a:ea typeface="맑은 고딕"/>
+              </a:rPr>
+              <a:t>, 그 </a:t>
+            </a:r>
+            <a:r>
+              <a:rPr sz="1100" b="0" dirty="0" err="1">
+                <a:solidFill>
+                  <a:srgbClr val="1C1C1E"/>
+                </a:solidFill>
+                <a:latin typeface="맑은 고딕"/>
+                <a:ea typeface="맑은 고딕"/>
+              </a:rPr>
+              <a:t>지역</a:t>
+            </a:r>
+            <a:r>
+              <a:rPr sz="1100" b="0" dirty="0">
+                <a:solidFill>
+                  <a:srgbClr val="1C1C1E"/>
+                </a:solidFill>
+                <a:latin typeface="맑은 고딕"/>
+                <a:ea typeface="맑은 고딕"/>
+              </a:rPr>
+              <a:t> </a:t>
+            </a:r>
+            <a:r>
+              <a:rPr sz="1100" b="0" dirty="0" err="1">
+                <a:solidFill>
+                  <a:srgbClr val="1C1C1E"/>
+                </a:solidFill>
+                <a:latin typeface="맑은 고딕"/>
+                <a:ea typeface="맑은 고딕"/>
+              </a:rPr>
+              <a:t>가임기</a:t>
+            </a:r>
+            <a:r>
+              <a:rPr sz="1100" b="0" dirty="0">
+                <a:solidFill>
+                  <a:srgbClr val="1C1C1E"/>
+                </a:solidFill>
+                <a:latin typeface="맑은 고딕"/>
+                <a:ea typeface="맑은 고딕"/>
+              </a:rPr>
+              <a:t> </a:t>
+            </a:r>
+            <a:r>
+              <a:rPr sz="1100" b="0" dirty="0" err="1">
+                <a:solidFill>
+                  <a:srgbClr val="1C1C1E"/>
+                </a:solidFill>
+                <a:latin typeface="맑은 고딕"/>
+                <a:ea typeface="맑은 고딕"/>
+              </a:rPr>
+              <a:t>여성이</a:t>
+            </a:r>
+            <a:r>
+              <a:rPr sz="1100" b="0" dirty="0">
+                <a:solidFill>
+                  <a:srgbClr val="1C1C1E"/>
+                </a:solidFill>
+                <a:latin typeface="맑은 고딕"/>
+                <a:ea typeface="맑은 고딕"/>
+              </a:rPr>
+              <a:t> ① </a:t>
+            </a:r>
+            <a:r>
+              <a:rPr sz="1100" b="0" dirty="0" err="1">
+                <a:solidFill>
+                  <a:srgbClr val="1C1C1E"/>
+                </a:solidFill>
+                <a:latin typeface="맑은 고딕"/>
+                <a:ea typeface="맑은 고딕"/>
+              </a:rPr>
+              <a:t>분만</a:t>
+            </a:r>
+            <a:r>
+              <a:rPr sz="1100" b="0" dirty="0">
+                <a:solidFill>
+                  <a:srgbClr val="1C1C1E"/>
+                </a:solidFill>
+                <a:latin typeface="맑은 고딕"/>
+                <a:ea typeface="맑은 고딕"/>
+              </a:rPr>
+              <a:t> </a:t>
+            </a:r>
+            <a:r>
+              <a:rPr sz="1100" b="0" dirty="0" err="1">
+                <a:solidFill>
+                  <a:srgbClr val="1C1C1E"/>
+                </a:solidFill>
+                <a:latin typeface="맑은 고딕"/>
+                <a:ea typeface="맑은 고딕"/>
+              </a:rPr>
+              <a:t>가능</a:t>
+            </a:r>
+            <a:r>
+              <a:rPr sz="1100" b="0" dirty="0">
+                <a:solidFill>
+                  <a:srgbClr val="1C1C1E"/>
+                </a:solidFill>
+                <a:latin typeface="맑은 고딕"/>
+                <a:ea typeface="맑은 고딕"/>
+              </a:rPr>
+              <a:t> </a:t>
+            </a:r>
+            <a:r>
+              <a:rPr sz="1100" b="0" dirty="0" err="1">
+                <a:solidFill>
+                  <a:srgbClr val="1C1C1E"/>
+                </a:solidFill>
+                <a:latin typeface="맑은 고딕"/>
+                <a:ea typeface="맑은 고딕"/>
+              </a:rPr>
+              <a:t>기관까지</a:t>
+            </a:r>
+            <a:r>
+              <a:rPr sz="1100" b="0" dirty="0">
+                <a:solidFill>
+                  <a:srgbClr val="1C1C1E"/>
+                </a:solidFill>
+                <a:latin typeface="맑은 고딕"/>
+                <a:ea typeface="맑은 고딕"/>
+              </a:rPr>
+              <a:t> 60분 </a:t>
+            </a:r>
+            <a:r>
+              <a:rPr sz="1100" b="0" dirty="0" err="1">
+                <a:solidFill>
+                  <a:srgbClr val="1C1C1E"/>
+                </a:solidFill>
+                <a:latin typeface="맑은 고딕"/>
+                <a:ea typeface="맑은 고딕"/>
+              </a:rPr>
+              <a:t>안에</a:t>
+            </a:r>
+            <a:r>
+              <a:rPr sz="1100" b="0" dirty="0">
+                <a:solidFill>
+                  <a:srgbClr val="1C1C1E"/>
+                </a:solidFill>
+                <a:latin typeface="맑은 고딕"/>
+                <a:ea typeface="맑은 고딕"/>
+              </a:rPr>
+              <a:t> </a:t>
+            </a:r>
+            <a:r>
+              <a:rPr sz="1100" b="0" dirty="0" err="1">
+                <a:solidFill>
+                  <a:srgbClr val="1C1C1E"/>
+                </a:solidFill>
+                <a:latin typeface="맑은 고딕"/>
+                <a:ea typeface="맑은 고딕"/>
+              </a:rPr>
+              <a:t>닿기</a:t>
+            </a:r>
+            <a:r>
+              <a:rPr sz="1100" b="0" dirty="0">
+                <a:solidFill>
+                  <a:srgbClr val="1C1C1E"/>
+                </a:solidFill>
+                <a:latin typeface="맑은 고딕"/>
+                <a:ea typeface="맑은 고딕"/>
+              </a:rPr>
+              <a:t> </a:t>
+            </a:r>
+            <a:r>
+              <a:rPr sz="1100" b="0" dirty="0" err="1">
+                <a:solidFill>
+                  <a:srgbClr val="1C1C1E"/>
+                </a:solidFill>
+                <a:latin typeface="맑은 고딕"/>
+                <a:ea typeface="맑은 고딕"/>
+              </a:rPr>
+              <a:t>어렵고</a:t>
+            </a:r>
+            <a:r>
+              <a:rPr sz="1100" b="0" dirty="0">
+                <a:solidFill>
+                  <a:srgbClr val="1C1C1E"/>
+                </a:solidFill>
+                <a:latin typeface="맑은 고딕"/>
+                <a:ea typeface="맑은 고딕"/>
+              </a:rPr>
+              <a:t>(</a:t>
+            </a:r>
+            <a:r>
+              <a:rPr sz="1100" b="0" dirty="0" err="1">
+                <a:solidFill>
+                  <a:srgbClr val="1C1C1E"/>
+                </a:solidFill>
+                <a:latin typeface="맑은 고딕"/>
+                <a:ea typeface="맑은 고딕"/>
+              </a:rPr>
+              <a:t>접근성</a:t>
+            </a:r>
+            <a:r>
+              <a:rPr sz="1100" b="0" dirty="0">
+                <a:solidFill>
+                  <a:srgbClr val="1C1C1E"/>
+                </a:solidFill>
+                <a:latin typeface="맑은 고딕"/>
+                <a:ea typeface="맑은 고딕"/>
+              </a:rPr>
+              <a:t>) ② </a:t>
+            </a:r>
+            <a:r>
+              <a:rPr sz="1100" b="0" dirty="0" err="1">
+                <a:solidFill>
+                  <a:srgbClr val="1C1C1E"/>
+                </a:solidFill>
+                <a:latin typeface="맑은 고딕"/>
+                <a:ea typeface="맑은 고딕"/>
+              </a:rPr>
+              <a:t>실제</a:t>
+            </a:r>
+            <a:r>
+              <a:rPr sz="1100" b="0" dirty="0">
+                <a:solidFill>
+                  <a:srgbClr val="1C1C1E"/>
+                </a:solidFill>
+                <a:latin typeface="맑은 고딕"/>
+                <a:ea typeface="맑은 고딕"/>
+              </a:rPr>
+              <a:t> </a:t>
+            </a:r>
+            <a:r>
+              <a:rPr sz="1100" b="0" dirty="0" err="1">
+                <a:solidFill>
+                  <a:srgbClr val="1C1C1E"/>
+                </a:solidFill>
+                <a:latin typeface="맑은 고딕"/>
+                <a:ea typeface="맑은 고딕"/>
+              </a:rPr>
+              <a:t>출산도</a:t>
+            </a:r>
+            <a:r>
+              <a:rPr sz="1100" b="0" dirty="0">
+                <a:solidFill>
+                  <a:srgbClr val="1C1C1E"/>
+                </a:solidFill>
+                <a:latin typeface="맑은 고딕"/>
+                <a:ea typeface="맑은 고딕"/>
+              </a:rPr>
+              <a:t> 60분 </a:t>
+            </a:r>
+            <a:r>
+              <a:rPr sz="1100" b="0" dirty="0" err="1">
+                <a:solidFill>
+                  <a:srgbClr val="1C1C1E"/>
+                </a:solidFill>
+                <a:latin typeface="맑은 고딕"/>
+                <a:ea typeface="맑은 고딕"/>
+              </a:rPr>
+              <a:t>안에</a:t>
+            </a:r>
+            <a:r>
+              <a:rPr sz="1100" b="0" dirty="0">
+                <a:solidFill>
+                  <a:srgbClr val="1C1C1E"/>
+                </a:solidFill>
+                <a:latin typeface="맑은 고딕"/>
+                <a:ea typeface="맑은 고딕"/>
+              </a:rPr>
+              <a:t> </a:t>
+            </a:r>
+            <a:r>
+              <a:rPr sz="1100" b="0" dirty="0" err="1">
+                <a:solidFill>
+                  <a:srgbClr val="1C1C1E"/>
+                </a:solidFill>
+                <a:latin typeface="맑은 고딕"/>
+                <a:ea typeface="맑은 고딕"/>
+              </a:rPr>
+              <a:t>하지</a:t>
+            </a:r>
+            <a:r>
+              <a:rPr sz="1100" b="0" dirty="0">
+                <a:solidFill>
+                  <a:srgbClr val="1C1C1E"/>
+                </a:solidFill>
+                <a:latin typeface="맑은 고딕"/>
+                <a:ea typeface="맑은 고딕"/>
+              </a:rPr>
+              <a:t> </a:t>
+            </a:r>
+            <a:r>
+              <a:rPr sz="1100" b="0" dirty="0" err="1">
+                <a:solidFill>
+                  <a:srgbClr val="1C1C1E"/>
+                </a:solidFill>
+                <a:latin typeface="맑은 고딕"/>
+                <a:ea typeface="맑은 고딕"/>
+              </a:rPr>
+              <a:t>못하는</a:t>
+            </a:r>
+            <a:r>
+              <a:rPr sz="1100" b="0" dirty="0">
+                <a:solidFill>
+                  <a:srgbClr val="1C1C1E"/>
+                </a:solidFill>
+                <a:latin typeface="맑은 고딕"/>
+                <a:ea typeface="맑은 고딕"/>
+              </a:rPr>
+              <a:t>(</a:t>
+            </a:r>
+            <a:r>
+              <a:rPr sz="1100" b="0" dirty="0" err="1">
+                <a:solidFill>
+                  <a:srgbClr val="1C1C1E"/>
+                </a:solidFill>
+                <a:latin typeface="맑은 고딕"/>
+                <a:ea typeface="맑은 고딕"/>
+              </a:rPr>
+              <a:t>이용률</a:t>
+            </a:r>
+            <a:r>
+              <a:rPr sz="1100" b="0" dirty="0">
+                <a:solidFill>
+                  <a:srgbClr val="1C1C1E"/>
+                </a:solidFill>
+                <a:latin typeface="맑은 고딕"/>
+                <a:ea typeface="맑은 고딕"/>
+              </a:rPr>
+              <a:t>) </a:t>
+            </a:r>
+            <a:r>
+              <a:rPr sz="1100" b="0" dirty="0" err="1">
+                <a:solidFill>
+                  <a:srgbClr val="1C1C1E"/>
+                </a:solidFill>
+                <a:latin typeface="맑은 고딕"/>
+                <a:ea typeface="맑은 고딕"/>
+              </a:rPr>
+              <a:t>시·군</a:t>
+            </a:r>
+            <a:endParaRPr sz="1100" b="0" dirty="0">
+              <a:solidFill>
+                <a:srgbClr val="1C1C1E"/>
+              </a:solidFill>
+              <a:latin typeface="맑은 고딕"/>
+              <a:ea typeface="맑은 고딕"/>
+            </a:endParaRPr>
           </a:p>
           <a:p>
             <a:pPr marL="160020" indent="-160020">
@@ -10489,15 +13525,262 @@
               </a:spcAft>
             </a:pPr>
             <a:r>
-              <a:rPr sz="1100" b="0">
-                <a:solidFill>
-                  <a:srgbClr val="1C1C1E"/>
-                </a:solidFill>
-                <a:latin typeface="맑은 고딕"/>
-                <a:ea typeface="맑은 고딕"/>
-              </a:rPr>
-              <a:t>• 즉 이 제도에서 "취약"은 처음부터 끝까지 거리와 시간으로 정의된다 — 이 점이 본 연구의 첫 번째 표적이 된다</a:t>
-            </a:r>
+              <a:rPr sz="1100" b="0" dirty="0">
+                <a:solidFill>
+                  <a:srgbClr val="1C1C1E"/>
+                </a:solidFill>
+                <a:latin typeface="맑은 고딕"/>
+                <a:ea typeface="맑은 고딕"/>
+              </a:rPr>
+              <a:t>• 즉 이 </a:t>
+            </a:r>
+            <a:r>
+              <a:rPr sz="1100" b="0" dirty="0" err="1">
+                <a:solidFill>
+                  <a:srgbClr val="1C1C1E"/>
+                </a:solidFill>
+                <a:latin typeface="맑은 고딕"/>
+                <a:ea typeface="맑은 고딕"/>
+              </a:rPr>
+              <a:t>제도에서</a:t>
+            </a:r>
+            <a:r>
+              <a:rPr sz="1100" b="0" dirty="0">
+                <a:solidFill>
+                  <a:srgbClr val="1C1C1E"/>
+                </a:solidFill>
+                <a:latin typeface="맑은 고딕"/>
+                <a:ea typeface="맑은 고딕"/>
+              </a:rPr>
+              <a:t> "</a:t>
+            </a:r>
+            <a:r>
+              <a:rPr sz="1100" b="0" dirty="0" err="1">
+                <a:solidFill>
+                  <a:srgbClr val="1C1C1E"/>
+                </a:solidFill>
+                <a:latin typeface="맑은 고딕"/>
+                <a:ea typeface="맑은 고딕"/>
+              </a:rPr>
+              <a:t>취약"은</a:t>
+            </a:r>
+            <a:r>
+              <a:rPr sz="1100" b="0" dirty="0">
+                <a:solidFill>
+                  <a:srgbClr val="1C1C1E"/>
+                </a:solidFill>
+                <a:latin typeface="맑은 고딕"/>
+                <a:ea typeface="맑은 고딕"/>
+              </a:rPr>
+              <a:t> </a:t>
+            </a:r>
+            <a:r>
+              <a:rPr sz="1100" b="0" dirty="0" err="1">
+                <a:solidFill>
+                  <a:srgbClr val="1C1C1E"/>
+                </a:solidFill>
+                <a:latin typeface="맑은 고딕"/>
+                <a:ea typeface="맑은 고딕"/>
+              </a:rPr>
+              <a:t>처음부터</a:t>
+            </a:r>
+            <a:r>
+              <a:rPr sz="1100" b="0" dirty="0">
+                <a:solidFill>
+                  <a:srgbClr val="1C1C1E"/>
+                </a:solidFill>
+                <a:latin typeface="맑은 고딕"/>
+                <a:ea typeface="맑은 고딕"/>
+              </a:rPr>
+              <a:t> </a:t>
+            </a:r>
+            <a:r>
+              <a:rPr sz="1100" b="0" dirty="0" err="1">
+                <a:solidFill>
+                  <a:srgbClr val="1C1C1E"/>
+                </a:solidFill>
+                <a:latin typeface="맑은 고딕"/>
+                <a:ea typeface="맑은 고딕"/>
+              </a:rPr>
+              <a:t>끝까지</a:t>
+            </a:r>
+            <a:r>
+              <a:rPr sz="1100" b="0" dirty="0">
+                <a:solidFill>
+                  <a:srgbClr val="1C1C1E"/>
+                </a:solidFill>
+                <a:latin typeface="맑은 고딕"/>
+                <a:ea typeface="맑은 고딕"/>
+              </a:rPr>
+              <a:t> </a:t>
+            </a:r>
+            <a:r>
+              <a:rPr lang="ko-KR" altLang="en-US" sz="1100" b="0" dirty="0">
+                <a:solidFill>
+                  <a:srgbClr val="1C1C1E"/>
+                </a:solidFill>
+                <a:latin typeface="맑은 고딕"/>
+                <a:ea typeface="맑은 고딕"/>
+              </a:rPr>
+              <a:t>오직 </a:t>
+            </a:r>
+            <a:r>
+              <a:rPr sz="1100" b="0" dirty="0" err="1">
+                <a:solidFill>
+                  <a:srgbClr val="1C1C1E"/>
+                </a:solidFill>
+                <a:latin typeface="맑은 고딕"/>
+                <a:ea typeface="맑은 고딕"/>
+              </a:rPr>
+              <a:t>거리와</a:t>
+            </a:r>
+            <a:r>
+              <a:rPr sz="1100" b="0" dirty="0">
+                <a:solidFill>
+                  <a:srgbClr val="1C1C1E"/>
+                </a:solidFill>
+                <a:latin typeface="맑은 고딕"/>
+                <a:ea typeface="맑은 고딕"/>
+              </a:rPr>
+              <a:t> </a:t>
+            </a:r>
+            <a:r>
+              <a:rPr sz="1100" b="0" dirty="0" err="1">
+                <a:solidFill>
+                  <a:srgbClr val="1C1C1E"/>
+                </a:solidFill>
+                <a:latin typeface="맑은 고딕"/>
+                <a:ea typeface="맑은 고딕"/>
+              </a:rPr>
+              <a:t>시간으로</a:t>
+            </a:r>
+            <a:r>
+              <a:rPr sz="1100" b="0" dirty="0">
+                <a:solidFill>
+                  <a:srgbClr val="1C1C1E"/>
+                </a:solidFill>
+                <a:latin typeface="맑은 고딕"/>
+                <a:ea typeface="맑은 고딕"/>
+              </a:rPr>
+              <a:t> </a:t>
+            </a:r>
+            <a:r>
+              <a:rPr sz="1100" b="0" dirty="0" err="1">
+                <a:solidFill>
+                  <a:srgbClr val="1C1C1E"/>
+                </a:solidFill>
+                <a:latin typeface="맑은 고딕"/>
+                <a:ea typeface="맑은 고딕"/>
+              </a:rPr>
+              <a:t>정의된다</a:t>
+            </a:r>
+            <a:r>
+              <a:rPr sz="1100" b="0" dirty="0">
+                <a:solidFill>
+                  <a:srgbClr val="1C1C1E"/>
+                </a:solidFill>
+                <a:latin typeface="맑은 고딕"/>
+                <a:ea typeface="맑은 고딕"/>
+              </a:rPr>
+              <a:t> — 이 </a:t>
+            </a:r>
+            <a:r>
+              <a:rPr sz="1100" b="0" dirty="0" err="1">
+                <a:solidFill>
+                  <a:srgbClr val="1C1C1E"/>
+                </a:solidFill>
+                <a:latin typeface="맑은 고딕"/>
+                <a:ea typeface="맑은 고딕"/>
+              </a:rPr>
+              <a:t>점이</a:t>
+            </a:r>
+            <a:r>
+              <a:rPr sz="1100" b="0" dirty="0">
+                <a:solidFill>
+                  <a:srgbClr val="1C1C1E"/>
+                </a:solidFill>
+                <a:latin typeface="맑은 고딕"/>
+                <a:ea typeface="맑은 고딕"/>
+              </a:rPr>
+              <a:t> 본 </a:t>
+            </a:r>
+            <a:r>
+              <a:rPr sz="1100" b="0" dirty="0" err="1">
+                <a:solidFill>
+                  <a:srgbClr val="1C1C1E"/>
+                </a:solidFill>
+                <a:latin typeface="맑은 고딕"/>
+                <a:ea typeface="맑은 고딕"/>
+              </a:rPr>
+              <a:t>연구의</a:t>
+            </a:r>
+            <a:r>
+              <a:rPr sz="1100" b="0" dirty="0">
+                <a:solidFill>
+                  <a:srgbClr val="1C1C1E"/>
+                </a:solidFill>
+                <a:latin typeface="맑은 고딕"/>
+                <a:ea typeface="맑은 고딕"/>
+              </a:rPr>
+              <a:t> 첫 </a:t>
+            </a:r>
+            <a:r>
+              <a:rPr sz="1100" b="0" dirty="0" err="1">
+                <a:solidFill>
+                  <a:srgbClr val="1C1C1E"/>
+                </a:solidFill>
+                <a:latin typeface="맑은 고딕"/>
+                <a:ea typeface="맑은 고딕"/>
+              </a:rPr>
+              <a:t>번째</a:t>
+            </a:r>
+            <a:r>
+              <a:rPr sz="1100" b="0" dirty="0">
+                <a:solidFill>
+                  <a:srgbClr val="1C1C1E"/>
+                </a:solidFill>
+                <a:latin typeface="맑은 고딕"/>
+                <a:ea typeface="맑은 고딕"/>
+              </a:rPr>
+              <a:t> </a:t>
+            </a:r>
+            <a:r>
+              <a:rPr sz="1100" b="0" dirty="0" err="1">
+                <a:solidFill>
+                  <a:srgbClr val="1C1C1E"/>
+                </a:solidFill>
+                <a:latin typeface="맑은 고딕"/>
+                <a:ea typeface="맑은 고딕"/>
+              </a:rPr>
+              <a:t>표적이</a:t>
+            </a:r>
+            <a:r>
+              <a:rPr sz="1100" b="0" dirty="0">
+                <a:solidFill>
+                  <a:srgbClr val="1C1C1E"/>
+                </a:solidFill>
+                <a:latin typeface="맑은 고딕"/>
+                <a:ea typeface="맑은 고딕"/>
+              </a:rPr>
+              <a:t> </a:t>
+            </a:r>
+            <a:r>
+              <a:rPr sz="1100" b="0" dirty="0" err="1">
+                <a:solidFill>
+                  <a:srgbClr val="1C1C1E"/>
+                </a:solidFill>
+                <a:latin typeface="맑은 고딕"/>
+                <a:ea typeface="맑은 고딕"/>
+              </a:rPr>
+              <a:t>된다</a:t>
+            </a:r>
+            <a:endParaRPr sz="1100" b="0" dirty="0">
+              <a:solidFill>
+                <a:srgbClr val="1C1C1E"/>
+              </a:solidFill>
+              <a:latin typeface="맑은 고딕"/>
+              <a:ea typeface="맑은 고딕"/>
+            </a:endParaRPr>
           </a:p>
           <a:p>
             <a:pPr marL="160020" indent="-160020">
@@ -10509,14 +13792,264 @@
               </a:spcAft>
             </a:pPr>
             <a:r>
-              <a:rPr sz="1100" b="0">
-                <a:solidFill>
-                  <a:srgbClr val="1C1C1E"/>
-                </a:solidFill>
-                <a:latin typeface="맑은 고딕"/>
-                <a:ea typeface="맑은 고딕"/>
-              </a:rPr>
-              <a:t>• 정부는 2년마다 전국을 재어 A·B·C 등급을 매기고, 지정 지역 병원에 분만실 설치비 약 10억 원 + 연 운영비 약 5억 원을 지원 (15년 누적 57개소)</a:t>
+              <a:rPr sz="1100" b="0" dirty="0">
+                <a:solidFill>
+                  <a:srgbClr val="1C1C1E"/>
+                </a:solidFill>
+                <a:latin typeface="맑은 고딕"/>
+                <a:ea typeface="맑은 고딕"/>
+              </a:rPr>
+              <a:t>• </a:t>
+            </a:r>
+            <a:r>
+              <a:rPr sz="1100" b="0" dirty="0" err="1">
+                <a:solidFill>
+                  <a:srgbClr val="1C1C1E"/>
+                </a:solidFill>
+                <a:latin typeface="맑은 고딕"/>
+                <a:ea typeface="맑은 고딕"/>
+              </a:rPr>
+              <a:t>정부는</a:t>
+            </a:r>
+            <a:r>
+              <a:rPr sz="1100" b="0" dirty="0">
+                <a:solidFill>
+                  <a:srgbClr val="1C1C1E"/>
+                </a:solidFill>
+                <a:latin typeface="맑은 고딕"/>
+                <a:ea typeface="맑은 고딕"/>
+              </a:rPr>
+              <a:t> 2년마다 </a:t>
+            </a:r>
+            <a:r>
+              <a:rPr sz="1100" b="0" dirty="0" err="1">
+                <a:solidFill>
+                  <a:srgbClr val="1C1C1E"/>
+                </a:solidFill>
+                <a:latin typeface="맑은 고딕"/>
+                <a:ea typeface="맑은 고딕"/>
+              </a:rPr>
+              <a:t>전국</a:t>
+            </a:r>
+            <a:r>
+              <a:rPr lang="en-US" sz="1100" b="0" dirty="0">
+                <a:solidFill>
+                  <a:srgbClr val="1C1C1E"/>
+                </a:solidFill>
+                <a:latin typeface="맑은 고딕"/>
+                <a:ea typeface="맑은 고딕"/>
+              </a:rPr>
+              <a:t> </a:t>
+            </a:r>
+            <a:r>
+              <a:rPr lang="ko-KR" altLang="en-US" sz="1100" b="0" dirty="0">
+                <a:solidFill>
+                  <a:srgbClr val="1C1C1E"/>
+                </a:solidFill>
+                <a:latin typeface="맑은 고딕"/>
+                <a:ea typeface="맑은 고딕"/>
+              </a:rPr>
+              <a:t>단위로 조사하여 </a:t>
+            </a:r>
+            <a:r>
+              <a:rPr sz="1100" b="0" dirty="0">
+                <a:solidFill>
+                  <a:srgbClr val="1C1C1E"/>
+                </a:solidFill>
+                <a:latin typeface="맑은 고딕"/>
+                <a:ea typeface="맑은 고딕"/>
+              </a:rPr>
+              <a:t>A·B·C </a:t>
+            </a:r>
+            <a:r>
+              <a:rPr sz="1100" b="0" dirty="0" err="1">
+                <a:solidFill>
+                  <a:srgbClr val="1C1C1E"/>
+                </a:solidFill>
+                <a:latin typeface="맑은 고딕"/>
+                <a:ea typeface="맑은 고딕"/>
+              </a:rPr>
+              <a:t>등급을</a:t>
+            </a:r>
+            <a:r>
+              <a:rPr sz="1100" b="0" dirty="0">
+                <a:solidFill>
+                  <a:srgbClr val="1C1C1E"/>
+                </a:solidFill>
+                <a:latin typeface="맑은 고딕"/>
+                <a:ea typeface="맑은 고딕"/>
+              </a:rPr>
+              <a:t> </a:t>
+            </a:r>
+            <a:r>
+              <a:rPr sz="1100" b="0" dirty="0" err="1">
+                <a:solidFill>
+                  <a:srgbClr val="1C1C1E"/>
+                </a:solidFill>
+                <a:latin typeface="맑은 고딕"/>
+                <a:ea typeface="맑은 고딕"/>
+              </a:rPr>
+              <a:t>매기고</a:t>
+            </a:r>
+            <a:r>
+              <a:rPr sz="1100" b="0" dirty="0">
+                <a:solidFill>
+                  <a:srgbClr val="1C1C1E"/>
+                </a:solidFill>
+                <a:latin typeface="맑은 고딕"/>
+                <a:ea typeface="맑은 고딕"/>
+              </a:rPr>
+              <a:t>, </a:t>
+            </a:r>
+            <a:r>
+              <a:rPr lang="ko-KR" altLang="en-US" sz="1100" b="0" dirty="0">
+                <a:solidFill>
+                  <a:srgbClr val="1C1C1E"/>
+                </a:solidFill>
+                <a:latin typeface="맑은 고딕"/>
+                <a:ea typeface="맑은 고딕"/>
+              </a:rPr>
+              <a:t>선정 지역의 일부 </a:t>
+            </a:r>
+            <a:r>
+              <a:rPr sz="1100" b="0" dirty="0" err="1">
+                <a:solidFill>
+                  <a:srgbClr val="1C1C1E"/>
+                </a:solidFill>
+                <a:latin typeface="맑은 고딕"/>
+                <a:ea typeface="맑은 고딕"/>
+              </a:rPr>
+              <a:t>병원에</a:t>
+            </a:r>
+            <a:r>
+              <a:rPr sz="1100" b="0" dirty="0">
+                <a:solidFill>
+                  <a:srgbClr val="1C1C1E"/>
+                </a:solidFill>
+                <a:latin typeface="맑은 고딕"/>
+                <a:ea typeface="맑은 고딕"/>
+              </a:rPr>
+              <a:t> </a:t>
+            </a:r>
+            <a:r>
+              <a:rPr sz="1100" b="0" dirty="0" err="1">
+                <a:solidFill>
+                  <a:srgbClr val="1C1C1E"/>
+                </a:solidFill>
+                <a:latin typeface="맑은 고딕"/>
+                <a:ea typeface="맑은 고딕"/>
+              </a:rPr>
+              <a:t>분만실</a:t>
+            </a:r>
+            <a:r>
+              <a:rPr sz="1100" b="0" dirty="0">
+                <a:solidFill>
+                  <a:srgbClr val="1C1C1E"/>
+                </a:solidFill>
+                <a:latin typeface="맑은 고딕"/>
+                <a:ea typeface="맑은 고딕"/>
+              </a:rPr>
+              <a:t> </a:t>
+            </a:r>
+            <a:r>
+              <a:rPr sz="1100" b="0" dirty="0" err="1">
+                <a:solidFill>
+                  <a:srgbClr val="1C1C1E"/>
+                </a:solidFill>
+                <a:latin typeface="맑은 고딕"/>
+                <a:ea typeface="맑은 고딕"/>
+              </a:rPr>
+              <a:t>설치비</a:t>
+            </a:r>
+            <a:r>
+              <a:rPr sz="1100" b="0" dirty="0">
+                <a:solidFill>
+                  <a:srgbClr val="1C1C1E"/>
+                </a:solidFill>
+                <a:latin typeface="맑은 고딕"/>
+                <a:ea typeface="맑은 고딕"/>
+              </a:rPr>
+              <a:t> 약 10억 원 + 연 </a:t>
+            </a:r>
+            <a:r>
+              <a:rPr sz="1100" b="0" dirty="0" err="1">
+                <a:solidFill>
+                  <a:srgbClr val="1C1C1E"/>
+                </a:solidFill>
+                <a:latin typeface="맑은 고딕"/>
+                <a:ea typeface="맑은 고딕"/>
+              </a:rPr>
+              <a:t>운영비</a:t>
+            </a:r>
+            <a:r>
+              <a:rPr sz="1100" b="0" dirty="0">
+                <a:solidFill>
+                  <a:srgbClr val="1C1C1E"/>
+                </a:solidFill>
+                <a:latin typeface="맑은 고딕"/>
+                <a:ea typeface="맑은 고딕"/>
+              </a:rPr>
+              <a:t> 약 5억 </a:t>
+            </a:r>
+            <a:r>
+              <a:rPr sz="1100" b="0" dirty="0" err="1">
+                <a:solidFill>
+                  <a:srgbClr val="1C1C1E"/>
+                </a:solidFill>
+                <a:latin typeface="맑은 고딕"/>
+                <a:ea typeface="맑은 고딕"/>
+              </a:rPr>
+              <a:t>원을</a:t>
+            </a:r>
+            <a:r>
+              <a:rPr sz="1100" b="0" dirty="0">
+                <a:solidFill>
+                  <a:srgbClr val="1C1C1E"/>
+                </a:solidFill>
+                <a:latin typeface="맑은 고딕"/>
+                <a:ea typeface="맑은 고딕"/>
+              </a:rPr>
+              <a:t> </a:t>
+            </a:r>
+            <a:r>
+              <a:rPr sz="1100" b="0" dirty="0" err="1">
+                <a:solidFill>
+                  <a:srgbClr val="1C1C1E"/>
+                </a:solidFill>
+                <a:latin typeface="맑은 고딕"/>
+                <a:ea typeface="맑은 고딕"/>
+              </a:rPr>
+              <a:t>지원</a:t>
+            </a:r>
+            <a:r>
+              <a:rPr sz="1100" b="0" dirty="0">
+                <a:solidFill>
+                  <a:srgbClr val="1C1C1E"/>
+                </a:solidFill>
+                <a:latin typeface="맑은 고딕"/>
+                <a:ea typeface="맑은 고딕"/>
+              </a:rPr>
+              <a:t> (15년 </a:t>
+            </a:r>
+            <a:r>
+              <a:rPr sz="1100" b="0" dirty="0" err="1">
+                <a:solidFill>
+                  <a:srgbClr val="1C1C1E"/>
+                </a:solidFill>
+                <a:latin typeface="맑은 고딕"/>
+                <a:ea typeface="맑은 고딕"/>
+              </a:rPr>
+              <a:t>누적</a:t>
+            </a:r>
+            <a:r>
+              <a:rPr sz="1100" b="0" dirty="0">
+                <a:solidFill>
+                  <a:srgbClr val="1C1C1E"/>
+                </a:solidFill>
+                <a:latin typeface="맑은 고딕"/>
+                <a:ea typeface="맑은 고딕"/>
+              </a:rPr>
+              <a:t> 57개소)</a:t>
             </a:r>
           </a:p>
         </p:txBody>
@@ -10530,7 +14063,7 @@
         <p:spPr>
           <a:xfrm>
             <a:off x="502920" y="5230368"/>
-            <a:ext cx="11247120" cy="1005840"/>
+            <a:ext cx="11247120" cy="331629"/>
           </a:xfrm>
           <a:prstGeom prst="rect">
             <a:avLst/>
@@ -10542,26 +14075,6 @@
             <a:spAutoFit/>
           </a:bodyPr>
           <a:lstStyle/>
-          <a:p>
-            <a:pPr>
-              <a:lnSpc>
-                <a:spcPct val="114000"/>
-              </a:lnSpc>
-              <a:spcAft>
-                <a:spcPts val="400"/>
-              </a:spcAft>
-            </a:pPr>
-            <a:r>
-              <a:rPr sz="1500" b="1">
-                <a:solidFill>
-                  <a:srgbClr val="1C1C1E"/>
-                </a:solidFill>
-                <a:latin typeface="맑은 고딕"/>
-                <a:ea typeface="맑은 고딕"/>
-              </a:rPr>
-              <a:t>자원 부족은 여전히 문제다. 다만 그것과 별개로, 있는 자원이 체계적으로 배분되지 않는 문제가 함께 있다.</a:t>
-            </a:r>
-          </a:p>
           <a:p>
             <a:pPr>
               <a:lnSpc>
@@ -10572,14 +14085,274 @@
               </a:spcAft>
             </a:pPr>
             <a:r>
-              <a:rPr sz="1500" b="1">
+              <a:rPr sz="1500" b="1" dirty="0">
                 <a:solidFill>
                   <a:srgbClr val="000000"/>
                 </a:solidFill>
                 <a:latin typeface="맑은 고딕"/>
                 <a:ea typeface="맑은 고딕"/>
               </a:rPr>
-              <a:t>"지금 있는 것은 체계적으로, 필요한 곳으로 배분되고 있는가" — 이를 데이터로 검증하는 것이 본 계획이다.</a:t>
+              <a:t>"</a:t>
+            </a:r>
+            <a:r>
+              <a:rPr lang="ko-KR" altLang="en-US" sz="1500" b="1" dirty="0">
+                <a:solidFill>
+                  <a:srgbClr val="000000"/>
+                </a:solidFill>
+                <a:latin typeface="맑은 고딕"/>
+                <a:ea typeface="맑은 고딕"/>
+              </a:rPr>
+              <a:t>주어진 자원이</a:t>
+            </a:r>
+            <a:r>
+              <a:rPr sz="1500" b="1" dirty="0">
+                <a:solidFill>
+                  <a:srgbClr val="000000"/>
+                </a:solidFill>
+                <a:latin typeface="맑은 고딕"/>
+                <a:ea typeface="맑은 고딕"/>
+              </a:rPr>
+              <a:t> </a:t>
+            </a:r>
+            <a:r>
+              <a:rPr sz="1500" b="1" dirty="0" err="1">
+                <a:solidFill>
+                  <a:srgbClr val="000000"/>
+                </a:solidFill>
+                <a:latin typeface="맑은 고딕"/>
+                <a:ea typeface="맑은 고딕"/>
+              </a:rPr>
+              <a:t>체계적으로</a:t>
+            </a:r>
+            <a:r>
+              <a:rPr sz="1500" b="1" dirty="0">
+                <a:solidFill>
+                  <a:srgbClr val="000000"/>
+                </a:solidFill>
+                <a:latin typeface="맑은 고딕"/>
+                <a:ea typeface="맑은 고딕"/>
+              </a:rPr>
+              <a:t>, </a:t>
+            </a:r>
+            <a:r>
+              <a:rPr sz="1500" b="1" dirty="0" err="1">
+                <a:solidFill>
+                  <a:srgbClr val="000000"/>
+                </a:solidFill>
+                <a:latin typeface="맑은 고딕"/>
+                <a:ea typeface="맑은 고딕"/>
+              </a:rPr>
+              <a:t>필요한</a:t>
+            </a:r>
+            <a:r>
+              <a:rPr sz="1500" b="1" dirty="0">
+                <a:solidFill>
+                  <a:srgbClr val="000000"/>
+                </a:solidFill>
+                <a:latin typeface="맑은 고딕"/>
+                <a:ea typeface="맑은 고딕"/>
+              </a:rPr>
+              <a:t> </a:t>
+            </a:r>
+            <a:r>
+              <a:rPr sz="1500" b="1" dirty="0" err="1">
+                <a:solidFill>
+                  <a:srgbClr val="000000"/>
+                </a:solidFill>
+                <a:latin typeface="맑은 고딕"/>
+                <a:ea typeface="맑은 고딕"/>
+              </a:rPr>
+              <a:t>곳으로</a:t>
+            </a:r>
+            <a:r>
+              <a:rPr sz="1500" b="1" dirty="0">
+                <a:solidFill>
+                  <a:srgbClr val="000000"/>
+                </a:solidFill>
+                <a:latin typeface="맑은 고딕"/>
+                <a:ea typeface="맑은 고딕"/>
+              </a:rPr>
+              <a:t> </a:t>
+            </a:r>
+            <a:r>
+              <a:rPr sz="1500" b="1" dirty="0" err="1">
+                <a:solidFill>
+                  <a:srgbClr val="000000"/>
+                </a:solidFill>
+                <a:latin typeface="맑은 고딕"/>
+                <a:ea typeface="맑은 고딕"/>
+              </a:rPr>
+              <a:t>배분되고</a:t>
+            </a:r>
+            <a:r>
+              <a:rPr sz="1500" b="1" dirty="0">
+                <a:solidFill>
+                  <a:srgbClr val="000000"/>
+                </a:solidFill>
+                <a:latin typeface="맑은 고딕"/>
+                <a:ea typeface="맑은 고딕"/>
+              </a:rPr>
+              <a:t> </a:t>
+            </a:r>
+            <a:r>
+              <a:rPr sz="1500" b="1" dirty="0" err="1">
+                <a:solidFill>
+                  <a:srgbClr val="000000"/>
+                </a:solidFill>
+                <a:latin typeface="맑은 고딕"/>
+                <a:ea typeface="맑은 고딕"/>
+              </a:rPr>
+              <a:t>있는가</a:t>
+            </a:r>
+            <a:r>
+              <a:rPr sz="1500" b="1" dirty="0">
+                <a:solidFill>
+                  <a:srgbClr val="000000"/>
+                </a:solidFill>
+                <a:latin typeface="맑은 고딕"/>
+                <a:ea typeface="맑은 고딕"/>
+              </a:rPr>
+              <a:t>" — </a:t>
+            </a:r>
+            <a:r>
+              <a:rPr sz="1500" b="1" dirty="0" err="1">
+                <a:solidFill>
+                  <a:srgbClr val="000000"/>
+                </a:solidFill>
+                <a:latin typeface="맑은 고딕"/>
+                <a:ea typeface="맑은 고딕"/>
+              </a:rPr>
+              <a:t>이를</a:t>
+            </a:r>
+            <a:r>
+              <a:rPr sz="1500" b="1" dirty="0">
+                <a:solidFill>
+                  <a:srgbClr val="000000"/>
+                </a:solidFill>
+                <a:latin typeface="맑은 고딕"/>
+                <a:ea typeface="맑은 고딕"/>
+              </a:rPr>
+              <a:t> </a:t>
+            </a:r>
+            <a:r>
+              <a:rPr sz="1500" b="1" dirty="0" err="1">
+                <a:solidFill>
+                  <a:srgbClr val="000000"/>
+                </a:solidFill>
+                <a:latin typeface="맑은 고딕"/>
+                <a:ea typeface="맑은 고딕"/>
+              </a:rPr>
+              <a:t>데이터로</a:t>
+            </a:r>
+            <a:r>
+              <a:rPr sz="1500" b="1" dirty="0">
+                <a:solidFill>
+                  <a:srgbClr val="000000"/>
+                </a:solidFill>
+                <a:latin typeface="맑은 고딕"/>
+                <a:ea typeface="맑은 고딕"/>
+              </a:rPr>
+              <a:t> </a:t>
+            </a:r>
+            <a:r>
+              <a:rPr sz="1500" b="1" dirty="0" err="1">
+                <a:solidFill>
+                  <a:srgbClr val="000000"/>
+                </a:solidFill>
+                <a:latin typeface="맑은 고딕"/>
+                <a:ea typeface="맑은 고딕"/>
+              </a:rPr>
+              <a:t>검증하</a:t>
+            </a:r>
+            <a:r>
+              <a:rPr lang="ko-KR" altLang="en-US" sz="1500" b="1" dirty="0">
+                <a:solidFill>
+                  <a:srgbClr val="000000"/>
+                </a:solidFill>
+                <a:latin typeface="맑은 고딕"/>
+                <a:ea typeface="맑은 고딕"/>
+              </a:rPr>
+              <a:t>고</a:t>
+            </a:r>
+            <a:r>
+              <a:rPr lang="en-US" altLang="ko-KR" sz="1500" b="1" dirty="0">
+                <a:solidFill>
+                  <a:srgbClr val="000000"/>
+                </a:solidFill>
+                <a:latin typeface="맑은 고딕"/>
+                <a:ea typeface="맑은 고딕"/>
+              </a:rPr>
+              <a:t>,</a:t>
+            </a:r>
+            <a:r>
+              <a:rPr lang="ko-KR" altLang="en-US" sz="1500" b="1" dirty="0">
+                <a:solidFill>
+                  <a:srgbClr val="000000"/>
+                </a:solidFill>
+                <a:latin typeface="맑은 고딕"/>
+                <a:ea typeface="맑은 고딕"/>
+              </a:rPr>
+              <a:t> 개선하는</a:t>
+            </a:r>
+            <a:r>
+              <a:rPr sz="1500" b="1" dirty="0">
+                <a:solidFill>
+                  <a:srgbClr val="000000"/>
+                </a:solidFill>
+                <a:latin typeface="맑은 고딕"/>
+                <a:ea typeface="맑은 고딕"/>
+              </a:rPr>
+              <a:t> </a:t>
+            </a:r>
+            <a:r>
+              <a:rPr sz="1500" b="1" dirty="0" err="1">
+                <a:solidFill>
+                  <a:srgbClr val="000000"/>
+                </a:solidFill>
+                <a:latin typeface="맑은 고딕"/>
+                <a:ea typeface="맑은 고딕"/>
+              </a:rPr>
+              <a:t>것이</a:t>
+            </a:r>
+            <a:r>
+              <a:rPr sz="1500" b="1" dirty="0">
+                <a:solidFill>
+                  <a:srgbClr val="000000"/>
+                </a:solidFill>
+                <a:latin typeface="맑은 고딕"/>
+                <a:ea typeface="맑은 고딕"/>
+              </a:rPr>
+              <a:t> 본 </a:t>
+            </a:r>
+            <a:r>
+              <a:rPr lang="ko-KR" altLang="en-US" sz="1500" b="1" dirty="0">
+                <a:solidFill>
+                  <a:srgbClr val="000000"/>
+                </a:solidFill>
+                <a:latin typeface="맑은 고딕"/>
+                <a:ea typeface="맑은 고딕"/>
+              </a:rPr>
+              <a:t>프로젝트의 </a:t>
+            </a:r>
+            <a:r>
+              <a:rPr sz="1500" b="1" dirty="0" err="1">
+                <a:solidFill>
+                  <a:srgbClr val="000000"/>
+                </a:solidFill>
+                <a:latin typeface="맑은 고딕"/>
+                <a:ea typeface="맑은 고딕"/>
+              </a:rPr>
+              <a:t>계획이다</a:t>
+            </a:r>
+            <a:r>
+              <a:rPr sz="1500" b="1" dirty="0">
+                <a:solidFill>
+                  <a:srgbClr val="000000"/>
+                </a:solidFill>
+                <a:latin typeface="맑은 고딕"/>
+                <a:ea typeface="맑은 고딕"/>
+              </a:rPr>
+              <a:t>.</a:t>
             </a:r>
           </a:p>
         </p:txBody>
@@ -10593,7 +14366,7 @@
 </file>
 
 <file path=ppt/slides/slide4.xml><?xml version="1.0" encoding="utf-8"?>
-<p:sld xmlns:a="http://schemas.openxmlformats.org/drawingml/2006/main" xmlns:p="http://schemas.openxmlformats.org/presentationml/2006/main" xmlns:r="http://schemas.openxmlformats.org/officeDocument/2006/relationships">
+<p:sld xmlns:a="http://schemas.openxmlformats.org/drawingml/2006/main" xmlns:r="http://schemas.openxmlformats.org/officeDocument/2006/relationships" xmlns:p="http://schemas.openxmlformats.org/presentationml/2006/main">
   <p:cSld>
     <p:spTree>
       <p:nvGrpSpPr>
@@ -10601,7 +14374,14 @@
         <p:cNvGrpSpPr/>
         <p:nvPr/>
       </p:nvGrpSpPr>
-      <p:grpSpPr/>
+      <p:grpSpPr>
+        <a:xfrm>
+          <a:off x="0" y="0"/>
+          <a:ext cx="0" cy="0"/>
+          <a:chOff x="0" y="0"/>
+          <a:chExt cx="0" cy="0"/>
+        </a:xfrm>
+      </p:grpSpPr>
       <p:sp>
         <p:nvSpPr>
           <p:cNvPr id="2" name="Rectangle 1"/>
@@ -10643,6 +14423,7 @@
           <a:lstStyle/>
           <a:p>
             <a:pPr algn="ctr"/>
+            <a:endParaRPr/>
           </a:p>
         </p:txBody>
       </p:sp>
@@ -10671,7 +14452,7 @@
                 <a:srgbClr val="73787E"/>
               </a:gs>
             </a:gsLst>
-            <a:lin scaled="0" ang="18900000"/>
+            <a:lin ang="18900000" scaled="0"/>
           </a:gradFill>
           <a:ln>
             <a:noFill/>
@@ -10703,6 +14484,7 @@
           <a:lstStyle/>
           <a:p>
             <a:pPr algn="ctr"/>
+            <a:endParaRPr/>
           </a:p>
         </p:txBody>
       </p:sp>
@@ -10772,7 +14554,7 @@
                 <a:srgbClr val="FFFFFF"/>
               </a:gs>
             </a:gsLst>
-            <a:lin scaled="0" ang="0"/>
+            <a:lin ang="0" scaled="0"/>
           </a:gradFill>
           <a:ln>
             <a:noFill/>
@@ -10798,6 +14580,7 @@
           <a:lstStyle/>
           <a:p>
             <a:pPr algn="ctr"/>
+            <a:endParaRPr/>
           </a:p>
         </p:txBody>
       </p:sp>
@@ -10981,6 +14764,7 @@
           <a:lstStyle/>
           <a:p>
             <a:pPr algn="ctr"/>
+            <a:endParaRPr/>
           </a:p>
         </p:txBody>
       </p:sp>
@@ -11181,6 +14965,7 @@
           <a:lstStyle/>
           <a:p>
             <a:pPr algn="ctr"/>
+            <a:endParaRPr/>
           </a:p>
         </p:txBody>
       </p:sp>
@@ -11381,6 +15166,7 @@
           <a:lstStyle/>
           <a:p>
             <a:pPr algn="ctr"/>
+            <a:endParaRPr/>
           </a:p>
         </p:txBody>
       </p:sp>
@@ -11538,6 +15324,7 @@
           <a:lstStyle/>
           <a:p>
             <a:pPr algn="ctr"/>
+            <a:endParaRPr/>
           </a:p>
         </p:txBody>
       </p:sp>
@@ -11695,6 +15482,7 @@
           <a:lstStyle/>
           <a:p>
             <a:pPr algn="ctr"/>
+            <a:endParaRPr/>
           </a:p>
         </p:txBody>
       </p:sp>
@@ -11852,6 +15640,7 @@
           <a:lstStyle/>
           <a:p>
             <a:pPr algn="ctr"/>
+            <a:endParaRPr/>
           </a:p>
         </p:txBody>
       </p:sp>
@@ -11967,7 +15756,7 @@
 </file>
 
 <file path=ppt/slides/slide5.xml><?xml version="1.0" encoding="utf-8"?>
-<p:sld xmlns:a="http://schemas.openxmlformats.org/drawingml/2006/main" xmlns:p="http://schemas.openxmlformats.org/presentationml/2006/main" xmlns:r="http://schemas.openxmlformats.org/officeDocument/2006/relationships">
+<p:sld xmlns:a="http://schemas.openxmlformats.org/drawingml/2006/main" xmlns:r="http://schemas.openxmlformats.org/officeDocument/2006/relationships" xmlns:p="http://schemas.openxmlformats.org/presentationml/2006/main">
   <p:cSld>
     <p:spTree>
       <p:nvGrpSpPr>
@@ -11975,7 +15764,14 @@
         <p:cNvGrpSpPr/>
         <p:nvPr/>
       </p:nvGrpSpPr>
-      <p:grpSpPr/>
+      <p:grpSpPr>
+        <a:xfrm>
+          <a:off x="0" y="0"/>
+          <a:ext cx="0" cy="0"/>
+          <a:chOff x="0" y="0"/>
+          <a:chExt cx="0" cy="0"/>
+        </a:xfrm>
+      </p:grpSpPr>
       <p:sp>
         <p:nvSpPr>
           <p:cNvPr id="2" name="Rectangle 1"/>
@@ -12017,6 +15813,7 @@
           <a:lstStyle/>
           <a:p>
             <a:pPr algn="ctr"/>
+            <a:endParaRPr/>
           </a:p>
         </p:txBody>
       </p:sp>
@@ -12045,7 +15842,7 @@
                 <a:srgbClr val="73787E"/>
               </a:gs>
             </a:gsLst>
-            <a:lin scaled="0" ang="18900000"/>
+            <a:lin ang="18900000" scaled="0"/>
           </a:gradFill>
           <a:ln>
             <a:noFill/>
@@ -12077,6 +15874,7 @@
           <a:lstStyle/>
           <a:p>
             <a:pPr algn="ctr"/>
+            <a:endParaRPr/>
           </a:p>
         </p:txBody>
       </p:sp>
@@ -12146,7 +15944,7 @@
                 <a:srgbClr val="FFFFFF"/>
               </a:gs>
             </a:gsLst>
-            <a:lin scaled="0" ang="0"/>
+            <a:lin ang="0" scaled="0"/>
           </a:gradFill>
           <a:ln>
             <a:noFill/>
@@ -12172,6 +15970,7 @@
           <a:lstStyle/>
           <a:p>
             <a:pPr algn="ctr"/>
+            <a:endParaRPr/>
           </a:p>
         </p:txBody>
       </p:sp>
@@ -12312,6 +16111,7 @@
           <a:lstStyle/>
           <a:p>
             <a:pPr algn="ctr"/>
+            <a:endParaRPr/>
           </a:p>
         </p:txBody>
       </p:sp>
@@ -12340,7 +16140,7 @@
                 <a:srgbClr val="73787E"/>
               </a:gs>
             </a:gsLst>
-            <a:lin scaled="0" ang="18900000"/>
+            <a:lin ang="18900000" scaled="0"/>
           </a:gradFill>
           <a:ln>
             <a:noFill/>
@@ -12372,6 +16172,7 @@
           <a:lstStyle/>
           <a:p>
             <a:pPr algn="ctr"/>
+            <a:endParaRPr/>
           </a:p>
         </p:txBody>
       </p:sp>
@@ -12509,6 +16310,7 @@
           <a:lstStyle/>
           <a:p>
             <a:pPr algn="ctr"/>
+            <a:endParaRPr/>
           </a:p>
         </p:txBody>
       </p:sp>
@@ -12537,7 +16339,7 @@
                 <a:srgbClr val="73787E"/>
               </a:gs>
             </a:gsLst>
-            <a:lin scaled="0" ang="18900000"/>
+            <a:lin ang="18900000" scaled="0"/>
           </a:gradFill>
           <a:ln>
             <a:noFill/>
@@ -12569,6 +16371,7 @@
           <a:lstStyle/>
           <a:p>
             <a:pPr algn="ctr"/>
+            <a:endParaRPr/>
           </a:p>
         </p:txBody>
       </p:sp>
@@ -12706,6 +16509,7 @@
           <a:lstStyle/>
           <a:p>
             <a:pPr algn="ctr"/>
+            <a:endParaRPr/>
           </a:p>
         </p:txBody>
       </p:sp>
@@ -12734,7 +16538,7 @@
                 <a:srgbClr val="73787E"/>
               </a:gs>
             </a:gsLst>
-            <a:lin scaled="0" ang="18900000"/>
+            <a:lin ang="18900000" scaled="0"/>
           </a:gradFill>
           <a:ln>
             <a:noFill/>
@@ -12766,6 +16570,7 @@
           <a:lstStyle/>
           <a:p>
             <a:pPr algn="ctr"/>
+            <a:endParaRPr/>
           </a:p>
         </p:txBody>
       </p:sp>
@@ -12903,6 +16708,7 @@
           <a:lstStyle/>
           <a:p>
             <a:pPr algn="ctr"/>
+            <a:endParaRPr/>
           </a:p>
         </p:txBody>
       </p:sp>
@@ -12931,7 +16737,7 @@
                 <a:srgbClr val="73787E"/>
               </a:gs>
             </a:gsLst>
-            <a:lin scaled="0" ang="18900000"/>
+            <a:lin ang="18900000" scaled="0"/>
           </a:gradFill>
           <a:ln>
             <a:noFill/>
@@ -12963,6 +16769,7 @@
           <a:lstStyle/>
           <a:p>
             <a:pPr algn="ctr"/>
+            <a:endParaRPr/>
           </a:p>
         </p:txBody>
       </p:sp>
@@ -13121,7 +16928,7 @@
 </file>
 
 <file path=ppt/slides/slide6.xml><?xml version="1.0" encoding="utf-8"?>
-<p:sld xmlns:a="http://schemas.openxmlformats.org/drawingml/2006/main" xmlns:p="http://schemas.openxmlformats.org/presentationml/2006/main" xmlns:r="http://schemas.openxmlformats.org/officeDocument/2006/relationships">
+<p:sld xmlns:a="http://schemas.openxmlformats.org/drawingml/2006/main" xmlns:r="http://schemas.openxmlformats.org/officeDocument/2006/relationships" xmlns:p="http://schemas.openxmlformats.org/presentationml/2006/main">
   <p:cSld>
     <p:spTree>
       <p:nvGrpSpPr>
@@ -13129,7 +16936,14 @@
         <p:cNvGrpSpPr/>
         <p:nvPr/>
       </p:nvGrpSpPr>
-      <p:grpSpPr/>
+      <p:grpSpPr>
+        <a:xfrm>
+          <a:off x="0" y="0"/>
+          <a:ext cx="0" cy="0"/>
+          <a:chOff x="0" y="0"/>
+          <a:chExt cx="0" cy="0"/>
+        </a:xfrm>
+      </p:grpSpPr>
       <p:sp>
         <p:nvSpPr>
           <p:cNvPr id="2" name="Rectangle 1"/>
@@ -13171,6 +16985,7 @@
           <a:lstStyle/>
           <a:p>
             <a:pPr algn="ctr"/>
+            <a:endParaRPr/>
           </a:p>
         </p:txBody>
       </p:sp>
@@ -13199,7 +17014,7 @@
                 <a:srgbClr val="73787E"/>
               </a:gs>
             </a:gsLst>
-            <a:lin scaled="0" ang="18900000"/>
+            <a:lin ang="18900000" scaled="0"/>
           </a:gradFill>
           <a:ln>
             <a:noFill/>
@@ -13231,6 +17046,7 @@
           <a:lstStyle/>
           <a:p>
             <a:pPr algn="ctr"/>
+            <a:endParaRPr/>
           </a:p>
         </p:txBody>
       </p:sp>
@@ -13300,7 +17116,7 @@
                 <a:srgbClr val="FFFFFF"/>
               </a:gs>
             </a:gsLst>
-            <a:lin scaled="0" ang="0"/>
+            <a:lin ang="0" scaled="0"/>
           </a:gradFill>
           <a:ln>
             <a:noFill/>
@@ -13326,6 +17142,7 @@
           <a:lstStyle/>
           <a:p>
             <a:pPr algn="ctr"/>
+            <a:endParaRPr/>
           </a:p>
         </p:txBody>
       </p:sp>
@@ -13466,6 +17283,7 @@
           <a:lstStyle/>
           <a:p>
             <a:pPr algn="ctr"/>
+            <a:endParaRPr/>
           </a:p>
         </p:txBody>
       </p:sp>
@@ -13643,6 +17461,7 @@
           <a:lstStyle/>
           <a:p>
             <a:pPr algn="ctr"/>
+            <a:endParaRPr/>
           </a:p>
         </p:txBody>
       </p:sp>
@@ -13811,8 +17630,20 @@
                 <a:tableStyleId>{5C22544A-7EE6-4342-B048-85BDC9FD1C3A}</a:tableStyleId>
               </a:tblPr>
               <a:tblGrid>
-                <a:gridCol w="4754880"/>
-                <a:gridCol w="6537960"/>
+                <a:gridCol w="4754880">
+                  <a:extLst>
+                    <a:ext uri="{9D8B030D-6E8A-4147-A177-3AD203B41FA5}">
+                      <a16:colId xmlns:a16="http://schemas.microsoft.com/office/drawing/2014/main" val="20000"/>
+                    </a:ext>
+                  </a:extLst>
+                </a:gridCol>
+                <a:gridCol w="6537960">
+                  <a:extLst>
+                    <a:ext uri="{9D8B030D-6E8A-4147-A177-3AD203B41FA5}">
+                      <a16:colId xmlns:a16="http://schemas.microsoft.com/office/drawing/2014/main" val="20001"/>
+                    </a:ext>
+                  </a:extLst>
+                </a:gridCol>
               </a:tblGrid>
               <a:tr h="475488">
                 <a:tc>
@@ -13837,7 +17668,7 @@
                       </a:r>
                     </a:p>
                   </a:txBody>
-                  <a:tcPr marT="27432" marB="27432" marL="73152" marR="73152" anchor="ctr">
+                  <a:tcPr marL="73152" marR="73152" marT="27432" marB="27432" anchor="ctr">
                     <a:solidFill>
                       <a:srgbClr val="33393F"/>
                     </a:solidFill>
@@ -13865,12 +17696,17 @@
                       </a:r>
                     </a:p>
                   </a:txBody>
-                  <a:tcPr marT="27432" marB="27432" marL="73152" marR="73152" anchor="ctr">
+                  <a:tcPr marL="73152" marR="73152" marT="27432" marB="27432" anchor="ctr">
                     <a:solidFill>
                       <a:srgbClr val="33393F"/>
                     </a:solidFill>
                   </a:tcPr>
                 </a:tc>
+                <a:extLst>
+                  <a:ext uri="{0D108BD9-81ED-4DB2-BD59-A6C34878D82A}">
+                    <a16:rowId xmlns:a16="http://schemas.microsoft.com/office/drawing/2014/main" val="10000"/>
+                  </a:ext>
+                </a:extLst>
               </a:tr>
               <a:tr h="475488">
                 <a:tc>
@@ -13895,7 +17731,7 @@
                       </a:r>
                     </a:p>
                   </a:txBody>
-                  <a:tcPr marT="27432" marB="27432" marL="73152" marR="73152" anchor="ctr">
+                  <a:tcPr marL="73152" marR="73152" marT="27432" marB="27432" anchor="ctr">
                     <a:solidFill>
                       <a:srgbClr val="FFFFFF"/>
                     </a:solidFill>
@@ -13923,12 +17759,17 @@
                       </a:r>
                     </a:p>
                   </a:txBody>
-                  <a:tcPr marT="27432" marB="27432" marL="73152" marR="73152" anchor="ctr">
+                  <a:tcPr marL="73152" marR="73152" marT="27432" marB="27432" anchor="ctr">
                     <a:solidFill>
                       <a:srgbClr val="FFFFFF"/>
                     </a:solidFill>
                   </a:tcPr>
                 </a:tc>
+                <a:extLst>
+                  <a:ext uri="{0D108BD9-81ED-4DB2-BD59-A6C34878D82A}">
+                    <a16:rowId xmlns:a16="http://schemas.microsoft.com/office/drawing/2014/main" val="10001"/>
+                  </a:ext>
+                </a:extLst>
               </a:tr>
               <a:tr h="475488">
                 <a:tc>
@@ -13953,7 +17794,7 @@
                       </a:r>
                     </a:p>
                   </a:txBody>
-                  <a:tcPr marT="27432" marB="27432" marL="73152" marR="73152" anchor="ctr">
+                  <a:tcPr marL="73152" marR="73152" marT="27432" marB="27432" anchor="ctr">
                     <a:solidFill>
                       <a:srgbClr val="F6F7F8"/>
                     </a:solidFill>
@@ -13981,12 +17822,17 @@
                       </a:r>
                     </a:p>
                   </a:txBody>
-                  <a:tcPr marT="27432" marB="27432" marL="73152" marR="73152" anchor="ctr">
+                  <a:tcPr marL="73152" marR="73152" marT="27432" marB="27432" anchor="ctr">
                     <a:solidFill>
                       <a:srgbClr val="F6F7F8"/>
                     </a:solidFill>
                   </a:tcPr>
                 </a:tc>
+                <a:extLst>
+                  <a:ext uri="{0D108BD9-81ED-4DB2-BD59-A6C34878D82A}">
+                    <a16:rowId xmlns:a16="http://schemas.microsoft.com/office/drawing/2014/main" val="10002"/>
+                  </a:ext>
+                </a:extLst>
               </a:tr>
               <a:tr h="475488">
                 <a:tc>
@@ -14011,7 +17857,7 @@
                       </a:r>
                     </a:p>
                   </a:txBody>
-                  <a:tcPr marT="27432" marB="27432" marL="73152" marR="73152" anchor="ctr">
+                  <a:tcPr marL="73152" marR="73152" marT="27432" marB="27432" anchor="ctr">
                     <a:solidFill>
                       <a:srgbClr val="FFFFFF"/>
                     </a:solidFill>
@@ -14039,12 +17885,17 @@
                       </a:r>
                     </a:p>
                   </a:txBody>
-                  <a:tcPr marT="27432" marB="27432" marL="73152" marR="73152" anchor="ctr">
+                  <a:tcPr marL="73152" marR="73152" marT="27432" marB="27432" anchor="ctr">
                     <a:solidFill>
                       <a:srgbClr val="FFFFFF"/>
                     </a:solidFill>
                   </a:tcPr>
                 </a:tc>
+                <a:extLst>
+                  <a:ext uri="{0D108BD9-81ED-4DB2-BD59-A6C34878D82A}">
+                    <a16:rowId xmlns:a16="http://schemas.microsoft.com/office/drawing/2014/main" val="10003"/>
+                  </a:ext>
+                </a:extLst>
               </a:tr>
             </a:tbl>
           </a:graphicData>
@@ -14059,7 +17910,7 @@
 </file>
 
 <file path=ppt/slides/slide7.xml><?xml version="1.0" encoding="utf-8"?>
-<p:sld xmlns:a="http://schemas.openxmlformats.org/drawingml/2006/main" xmlns:p="http://schemas.openxmlformats.org/presentationml/2006/main" xmlns:r="http://schemas.openxmlformats.org/officeDocument/2006/relationships">
+<p:sld xmlns:a="http://schemas.openxmlformats.org/drawingml/2006/main" xmlns:r="http://schemas.openxmlformats.org/officeDocument/2006/relationships" xmlns:p="http://schemas.openxmlformats.org/presentationml/2006/main">
   <p:cSld>
     <p:spTree>
       <p:nvGrpSpPr>
@@ -14067,7 +17918,14 @@
         <p:cNvGrpSpPr/>
         <p:nvPr/>
       </p:nvGrpSpPr>
-      <p:grpSpPr/>
+      <p:grpSpPr>
+        <a:xfrm>
+          <a:off x="0" y="0"/>
+          <a:ext cx="0" cy="0"/>
+          <a:chOff x="0" y="0"/>
+          <a:chExt cx="0" cy="0"/>
+        </a:xfrm>
+      </p:grpSpPr>
       <p:sp>
         <p:nvSpPr>
           <p:cNvPr id="2" name="Rectangle 1"/>
@@ -14109,6 +17967,7 @@
           <a:lstStyle/>
           <a:p>
             <a:pPr algn="ctr"/>
+            <a:endParaRPr/>
           </a:p>
         </p:txBody>
       </p:sp>
@@ -14137,7 +17996,7 @@
                 <a:srgbClr val="73787E"/>
               </a:gs>
             </a:gsLst>
-            <a:lin scaled="0" ang="18900000"/>
+            <a:lin ang="18900000" scaled="0"/>
           </a:gradFill>
           <a:ln>
             <a:noFill/>
@@ -14169,6 +18028,7 @@
           <a:lstStyle/>
           <a:p>
             <a:pPr algn="ctr"/>
+            <a:endParaRPr/>
           </a:p>
         </p:txBody>
       </p:sp>
@@ -14238,7 +18098,7 @@
                 <a:srgbClr val="FFFFFF"/>
               </a:gs>
             </a:gsLst>
-            <a:lin scaled="0" ang="0"/>
+            <a:lin ang="0" scaled="0"/>
           </a:gradFill>
           <a:ln>
             <a:noFill/>
@@ -14264,6 +18124,7 @@
           <a:lstStyle/>
           <a:p>
             <a:pPr algn="ctr"/>
+            <a:endParaRPr/>
           </a:p>
         </p:txBody>
       </p:sp>
@@ -14415,9 +18276,27 @@
                 <a:tableStyleId>{5C22544A-7EE6-4342-B048-85BDC9FD1C3A}</a:tableStyleId>
               </a:tblPr>
               <a:tblGrid>
-                <a:gridCol w="2834640"/>
-                <a:gridCol w="6675120"/>
-                <a:gridCol w="1783080"/>
+                <a:gridCol w="2834640">
+                  <a:extLst>
+                    <a:ext uri="{9D8B030D-6E8A-4147-A177-3AD203B41FA5}">
+                      <a16:colId xmlns:a16="http://schemas.microsoft.com/office/drawing/2014/main" val="20000"/>
+                    </a:ext>
+                  </a:extLst>
+                </a:gridCol>
+                <a:gridCol w="6675120">
+                  <a:extLst>
+                    <a:ext uri="{9D8B030D-6E8A-4147-A177-3AD203B41FA5}">
+                      <a16:colId xmlns:a16="http://schemas.microsoft.com/office/drawing/2014/main" val="20001"/>
+                    </a:ext>
+                  </a:extLst>
+                </a:gridCol>
+                <a:gridCol w="1783080">
+                  <a:extLst>
+                    <a:ext uri="{9D8B030D-6E8A-4147-A177-3AD203B41FA5}">
+                      <a16:colId xmlns:a16="http://schemas.microsoft.com/office/drawing/2014/main" val="20002"/>
+                    </a:ext>
+                  </a:extLst>
+                </a:gridCol>
               </a:tblGrid>
               <a:tr h="457200">
                 <a:tc>
@@ -14442,7 +18321,7 @@
                       </a:r>
                     </a:p>
                   </a:txBody>
-                  <a:tcPr marT="27432" marB="27432" marL="73152" marR="73152" anchor="ctr">
+                  <a:tcPr marL="73152" marR="73152" marT="27432" marB="27432" anchor="ctr">
                     <a:solidFill>
                       <a:srgbClr val="33393F"/>
                     </a:solidFill>
@@ -14470,7 +18349,7 @@
                       </a:r>
                     </a:p>
                   </a:txBody>
-                  <a:tcPr marT="27432" marB="27432" marL="73152" marR="73152" anchor="ctr">
+                  <a:tcPr marL="73152" marR="73152" marT="27432" marB="27432" anchor="ctr">
                     <a:solidFill>
                       <a:srgbClr val="33393F"/>
                     </a:solidFill>
@@ -14498,12 +18377,17 @@
                       </a:r>
                     </a:p>
                   </a:txBody>
-                  <a:tcPr marT="27432" marB="27432" marL="73152" marR="73152" anchor="ctr">
+                  <a:tcPr marL="73152" marR="73152" marT="27432" marB="27432" anchor="ctr">
                     <a:solidFill>
                       <a:srgbClr val="33393F"/>
                     </a:solidFill>
                   </a:tcPr>
                 </a:tc>
+                <a:extLst>
+                  <a:ext uri="{0D108BD9-81ED-4DB2-BD59-A6C34878D82A}">
+                    <a16:rowId xmlns:a16="http://schemas.microsoft.com/office/drawing/2014/main" val="10000"/>
+                  </a:ext>
+                </a:extLst>
               </a:tr>
               <a:tr h="457200">
                 <a:tc>
@@ -14528,7 +18412,7 @@
                       </a:r>
                     </a:p>
                   </a:txBody>
-                  <a:tcPr marT="27432" marB="27432" marL="73152" marR="73152" anchor="ctr">
+                  <a:tcPr marL="73152" marR="73152" marT="27432" marB="27432" anchor="ctr">
                     <a:solidFill>
                       <a:srgbClr val="FFFFFF"/>
                     </a:solidFill>
@@ -14556,7 +18440,7 @@
                       </a:r>
                     </a:p>
                   </a:txBody>
-                  <a:tcPr marT="27432" marB="27432" marL="73152" marR="73152" anchor="ctr">
+                  <a:tcPr marL="73152" marR="73152" marT="27432" marB="27432" anchor="ctr">
                     <a:solidFill>
                       <a:srgbClr val="FFFFFF"/>
                     </a:solidFill>
@@ -14584,12 +18468,17 @@
                       </a:r>
                     </a:p>
                   </a:txBody>
-                  <a:tcPr marT="27432" marB="27432" marL="73152" marR="73152" anchor="ctr">
+                  <a:tcPr marL="73152" marR="73152" marT="27432" marB="27432" anchor="ctr">
                     <a:solidFill>
                       <a:srgbClr val="FFFFFF"/>
                     </a:solidFill>
                   </a:tcPr>
                 </a:tc>
+                <a:extLst>
+                  <a:ext uri="{0D108BD9-81ED-4DB2-BD59-A6C34878D82A}">
+                    <a16:rowId xmlns:a16="http://schemas.microsoft.com/office/drawing/2014/main" val="10001"/>
+                  </a:ext>
+                </a:extLst>
               </a:tr>
               <a:tr h="457200">
                 <a:tc>
@@ -14614,7 +18503,7 @@
                       </a:r>
                     </a:p>
                   </a:txBody>
-                  <a:tcPr marT="27432" marB="27432" marL="73152" marR="73152" anchor="ctr">
+                  <a:tcPr marL="73152" marR="73152" marT="27432" marB="27432" anchor="ctr">
                     <a:solidFill>
                       <a:srgbClr val="F6F7F8"/>
                     </a:solidFill>
@@ -14642,7 +18531,7 @@
                       </a:r>
                     </a:p>
                   </a:txBody>
-                  <a:tcPr marT="27432" marB="27432" marL="73152" marR="73152" anchor="ctr">
+                  <a:tcPr marL="73152" marR="73152" marT="27432" marB="27432" anchor="ctr">
                     <a:solidFill>
                       <a:srgbClr val="F6F7F8"/>
                     </a:solidFill>
@@ -14670,12 +18559,17 @@
                       </a:r>
                     </a:p>
                   </a:txBody>
-                  <a:tcPr marT="27432" marB="27432" marL="73152" marR="73152" anchor="ctr">
+                  <a:tcPr marL="73152" marR="73152" marT="27432" marB="27432" anchor="ctr">
                     <a:solidFill>
                       <a:srgbClr val="F6F7F8"/>
                     </a:solidFill>
                   </a:tcPr>
                 </a:tc>
+                <a:extLst>
+                  <a:ext uri="{0D108BD9-81ED-4DB2-BD59-A6C34878D82A}">
+                    <a16:rowId xmlns:a16="http://schemas.microsoft.com/office/drawing/2014/main" val="10002"/>
+                  </a:ext>
+                </a:extLst>
               </a:tr>
             </a:tbl>
           </a:graphicData>
@@ -14775,6 +18669,7 @@
           <a:lstStyle/>
           <a:p>
             <a:pPr algn="ctr"/>
+            <a:endParaRPr/>
           </a:p>
         </p:txBody>
       </p:sp>
@@ -14932,6 +18827,7 @@
           <a:lstStyle/>
           <a:p>
             <a:pPr algn="ctr"/>
+            <a:endParaRPr/>
           </a:p>
         </p:txBody>
       </p:sp>
@@ -15110,7 +19006,7 @@
 </file>
 
 <file path=ppt/slides/slide8.xml><?xml version="1.0" encoding="utf-8"?>
-<p:sld xmlns:a="http://schemas.openxmlformats.org/drawingml/2006/main" xmlns:p="http://schemas.openxmlformats.org/presentationml/2006/main" xmlns:r="http://schemas.openxmlformats.org/officeDocument/2006/relationships">
+<p:sld xmlns:a="http://schemas.openxmlformats.org/drawingml/2006/main" xmlns:r="http://schemas.openxmlformats.org/officeDocument/2006/relationships" xmlns:p="http://schemas.openxmlformats.org/presentationml/2006/main">
   <p:cSld>
     <p:spTree>
       <p:nvGrpSpPr>
@@ -15118,7 +19014,14 @@
         <p:cNvGrpSpPr/>
         <p:nvPr/>
       </p:nvGrpSpPr>
-      <p:grpSpPr/>
+      <p:grpSpPr>
+        <a:xfrm>
+          <a:off x="0" y="0"/>
+          <a:ext cx="0" cy="0"/>
+          <a:chOff x="0" y="0"/>
+          <a:chExt cx="0" cy="0"/>
+        </a:xfrm>
+      </p:grpSpPr>
       <p:sp>
         <p:nvSpPr>
           <p:cNvPr id="2" name="Rectangle 1"/>
@@ -15160,6 +19063,7 @@
           <a:lstStyle/>
           <a:p>
             <a:pPr algn="ctr"/>
+            <a:endParaRPr/>
           </a:p>
         </p:txBody>
       </p:sp>
@@ -15188,7 +19092,7 @@
                 <a:srgbClr val="73787E"/>
               </a:gs>
             </a:gsLst>
-            <a:lin scaled="0" ang="18900000"/>
+            <a:lin ang="18900000" scaled="0"/>
           </a:gradFill>
           <a:ln>
             <a:noFill/>
@@ -15220,6 +19124,7 @@
           <a:lstStyle/>
           <a:p>
             <a:pPr algn="ctr"/>
+            <a:endParaRPr/>
           </a:p>
         </p:txBody>
       </p:sp>
@@ -15289,7 +19194,7 @@
                 <a:srgbClr val="FFFFFF"/>
               </a:gs>
             </a:gsLst>
-            <a:lin scaled="0" ang="0"/>
+            <a:lin ang="0" scaled="0"/>
           </a:gradFill>
           <a:ln>
             <a:noFill/>
@@ -15315,6 +19220,7 @@
           <a:lstStyle/>
           <a:p>
             <a:pPr algn="ctr"/>
+            <a:endParaRPr/>
           </a:p>
         </p:txBody>
       </p:sp>
@@ -15423,9 +19329,27 @@
                 <a:tableStyleId>{5C22544A-7EE6-4342-B048-85BDC9FD1C3A}</a:tableStyleId>
               </a:tblPr>
               <a:tblGrid>
-                <a:gridCol w="3566160"/>
-                <a:gridCol w="4709160"/>
-                <a:gridCol w="3017520"/>
+                <a:gridCol w="3566160">
+                  <a:extLst>
+                    <a:ext uri="{9D8B030D-6E8A-4147-A177-3AD203B41FA5}">
+                      <a16:colId xmlns:a16="http://schemas.microsoft.com/office/drawing/2014/main" val="20000"/>
+                    </a:ext>
+                  </a:extLst>
+                </a:gridCol>
+                <a:gridCol w="4709160">
+                  <a:extLst>
+                    <a:ext uri="{9D8B030D-6E8A-4147-A177-3AD203B41FA5}">
+                      <a16:colId xmlns:a16="http://schemas.microsoft.com/office/drawing/2014/main" val="20001"/>
+                    </a:ext>
+                  </a:extLst>
+                </a:gridCol>
+                <a:gridCol w="3017520">
+                  <a:extLst>
+                    <a:ext uri="{9D8B030D-6E8A-4147-A177-3AD203B41FA5}">
+                      <a16:colId xmlns:a16="http://schemas.microsoft.com/office/drawing/2014/main" val="20002"/>
+                    </a:ext>
+                  </a:extLst>
+                </a:gridCol>
               </a:tblGrid>
               <a:tr h="566928">
                 <a:tc>
@@ -15450,7 +19374,7 @@
                       </a:r>
                     </a:p>
                   </a:txBody>
-                  <a:tcPr marT="27432" marB="27432" marL="73152" marR="73152" anchor="ctr">
+                  <a:tcPr marL="73152" marR="73152" marT="27432" marB="27432" anchor="ctr">
                     <a:solidFill>
                       <a:srgbClr val="33393F"/>
                     </a:solidFill>
@@ -15478,7 +19402,7 @@
                       </a:r>
                     </a:p>
                   </a:txBody>
-                  <a:tcPr marT="27432" marB="27432" marL="73152" marR="73152" anchor="ctr">
+                  <a:tcPr marL="73152" marR="73152" marT="27432" marB="27432" anchor="ctr">
                     <a:solidFill>
                       <a:srgbClr val="33393F"/>
                     </a:solidFill>
@@ -15506,12 +19430,17 @@
                       </a:r>
                     </a:p>
                   </a:txBody>
-                  <a:tcPr marT="27432" marB="27432" marL="73152" marR="73152" anchor="ctr">
+                  <a:tcPr marL="73152" marR="73152" marT="27432" marB="27432" anchor="ctr">
                     <a:solidFill>
                       <a:srgbClr val="33393F"/>
                     </a:solidFill>
                   </a:tcPr>
                 </a:tc>
+                <a:extLst>
+                  <a:ext uri="{0D108BD9-81ED-4DB2-BD59-A6C34878D82A}">
+                    <a16:rowId xmlns:a16="http://schemas.microsoft.com/office/drawing/2014/main" val="10000"/>
+                  </a:ext>
+                </a:extLst>
               </a:tr>
               <a:tr h="566928">
                 <a:tc>
@@ -15536,7 +19465,7 @@
                       </a:r>
                     </a:p>
                   </a:txBody>
-                  <a:tcPr marT="27432" marB="27432" marL="73152" marR="73152" anchor="ctr">
+                  <a:tcPr marL="73152" marR="73152" marT="27432" marB="27432" anchor="ctr">
                     <a:solidFill>
                       <a:srgbClr val="FFFFFF"/>
                     </a:solidFill>
@@ -15564,7 +19493,7 @@
                       </a:r>
                     </a:p>
                   </a:txBody>
-                  <a:tcPr marT="27432" marB="27432" marL="73152" marR="73152" anchor="ctr">
+                  <a:tcPr marL="73152" marR="73152" marT="27432" marB="27432" anchor="ctr">
                     <a:solidFill>
                       <a:srgbClr val="FFFFFF"/>
                     </a:solidFill>
@@ -15592,12 +19521,17 @@
                       </a:r>
                     </a:p>
                   </a:txBody>
-                  <a:tcPr marT="27432" marB="27432" marL="73152" marR="73152" anchor="ctr">
+                  <a:tcPr marL="73152" marR="73152" marT="27432" marB="27432" anchor="ctr">
                     <a:solidFill>
                       <a:srgbClr val="FFFFFF"/>
                     </a:solidFill>
                   </a:tcPr>
                 </a:tc>
+                <a:extLst>
+                  <a:ext uri="{0D108BD9-81ED-4DB2-BD59-A6C34878D82A}">
+                    <a16:rowId xmlns:a16="http://schemas.microsoft.com/office/drawing/2014/main" val="10001"/>
+                  </a:ext>
+                </a:extLst>
               </a:tr>
               <a:tr h="566928">
                 <a:tc>
@@ -15622,7 +19556,7 @@
                       </a:r>
                     </a:p>
                   </a:txBody>
-                  <a:tcPr marT="27432" marB="27432" marL="73152" marR="73152" anchor="ctr">
+                  <a:tcPr marL="73152" marR="73152" marT="27432" marB="27432" anchor="ctr">
                     <a:solidFill>
                       <a:srgbClr val="F6F7F8"/>
                     </a:solidFill>
@@ -15650,7 +19584,7 @@
                       </a:r>
                     </a:p>
                   </a:txBody>
-                  <a:tcPr marT="27432" marB="27432" marL="73152" marR="73152" anchor="ctr">
+                  <a:tcPr marL="73152" marR="73152" marT="27432" marB="27432" anchor="ctr">
                     <a:solidFill>
                       <a:srgbClr val="F6F7F8"/>
                     </a:solidFill>
@@ -15678,12 +19612,17 @@
                       </a:r>
                     </a:p>
                   </a:txBody>
-                  <a:tcPr marT="27432" marB="27432" marL="73152" marR="73152" anchor="ctr">
+                  <a:tcPr marL="73152" marR="73152" marT="27432" marB="27432" anchor="ctr">
                     <a:solidFill>
                       <a:srgbClr val="F6F7F8"/>
                     </a:solidFill>
                   </a:tcPr>
                 </a:tc>
+                <a:extLst>
+                  <a:ext uri="{0D108BD9-81ED-4DB2-BD59-A6C34878D82A}">
+                    <a16:rowId xmlns:a16="http://schemas.microsoft.com/office/drawing/2014/main" val="10002"/>
+                  </a:ext>
+                </a:extLst>
               </a:tr>
               <a:tr h="566928">
                 <a:tc>
@@ -15708,7 +19647,7 @@
                       </a:r>
                     </a:p>
                   </a:txBody>
-                  <a:tcPr marT="27432" marB="27432" marL="73152" marR="73152" anchor="ctr">
+                  <a:tcPr marL="73152" marR="73152" marT="27432" marB="27432" anchor="ctr">
                     <a:solidFill>
                       <a:srgbClr val="FFFFFF"/>
                     </a:solidFill>
@@ -15736,7 +19675,7 @@
                       </a:r>
                     </a:p>
                   </a:txBody>
-                  <a:tcPr marT="27432" marB="27432" marL="73152" marR="73152" anchor="ctr">
+                  <a:tcPr marL="73152" marR="73152" marT="27432" marB="27432" anchor="ctr">
                     <a:solidFill>
                       <a:srgbClr val="FFFFFF"/>
                     </a:solidFill>
@@ -15764,12 +19703,17 @@
                       </a:r>
                     </a:p>
                   </a:txBody>
-                  <a:tcPr marT="27432" marB="27432" marL="73152" marR="73152" anchor="ctr">
+                  <a:tcPr marL="73152" marR="73152" marT="27432" marB="27432" anchor="ctr">
                     <a:solidFill>
                       <a:srgbClr val="FFFFFF"/>
                     </a:solidFill>
                   </a:tcPr>
                 </a:tc>
+                <a:extLst>
+                  <a:ext uri="{0D108BD9-81ED-4DB2-BD59-A6C34878D82A}">
+                    <a16:rowId xmlns:a16="http://schemas.microsoft.com/office/drawing/2014/main" val="10003"/>
+                  </a:ext>
+                </a:extLst>
               </a:tr>
             </a:tbl>
           </a:graphicData>
@@ -15869,6 +19813,7 @@
           <a:lstStyle/>
           <a:p>
             <a:pPr algn="ctr"/>
+            <a:endParaRPr/>
           </a:p>
         </p:txBody>
       </p:sp>
@@ -15986,6 +19931,7 @@
           <a:lstStyle/>
           <a:p>
             <a:pPr algn="ctr"/>
+            <a:endParaRPr/>
           </a:p>
         </p:txBody>
       </p:sp>
@@ -16103,6 +20049,7 @@
           <a:lstStyle/>
           <a:p>
             <a:pPr algn="ctr"/>
+            <a:endParaRPr/>
           </a:p>
         </p:txBody>
       </p:sp>
@@ -16221,7 +20168,7 @@
 </file>
 
 <file path=ppt/slides/slide9.xml><?xml version="1.0" encoding="utf-8"?>
-<p:sld xmlns:a="http://schemas.openxmlformats.org/drawingml/2006/main" xmlns:p="http://schemas.openxmlformats.org/presentationml/2006/main" xmlns:r="http://schemas.openxmlformats.org/officeDocument/2006/relationships">
+<p:sld xmlns:a="http://schemas.openxmlformats.org/drawingml/2006/main" xmlns:r="http://schemas.openxmlformats.org/officeDocument/2006/relationships" xmlns:p="http://schemas.openxmlformats.org/presentationml/2006/main">
   <p:cSld>
     <p:spTree>
       <p:nvGrpSpPr>
@@ -16229,7 +20176,14 @@
         <p:cNvGrpSpPr/>
         <p:nvPr/>
       </p:nvGrpSpPr>
-      <p:grpSpPr/>
+      <p:grpSpPr>
+        <a:xfrm>
+          <a:off x="0" y="0"/>
+          <a:ext cx="0" cy="0"/>
+          <a:chOff x="0" y="0"/>
+          <a:chExt cx="0" cy="0"/>
+        </a:xfrm>
+      </p:grpSpPr>
       <p:sp>
         <p:nvSpPr>
           <p:cNvPr id="2" name="Rectangle 1"/>
@@ -16271,6 +20225,7 @@
           <a:lstStyle/>
           <a:p>
             <a:pPr algn="ctr"/>
+            <a:endParaRPr/>
           </a:p>
         </p:txBody>
       </p:sp>
@@ -16299,7 +20254,7 @@
                 <a:srgbClr val="73787E"/>
               </a:gs>
             </a:gsLst>
-            <a:lin scaled="0" ang="18900000"/>
+            <a:lin ang="18900000" scaled="0"/>
           </a:gradFill>
           <a:ln>
             <a:noFill/>
@@ -16331,6 +20286,7 @@
           <a:lstStyle/>
           <a:p>
             <a:pPr algn="ctr"/>
+            <a:endParaRPr/>
           </a:p>
         </p:txBody>
       </p:sp>
@@ -16400,7 +20356,7 @@
                 <a:srgbClr val="FFFFFF"/>
               </a:gs>
             </a:gsLst>
-            <a:lin scaled="0" ang="0"/>
+            <a:lin ang="0" scaled="0"/>
           </a:gradFill>
           <a:ln>
             <a:noFill/>
@@ -16426,6 +20382,7 @@
           <a:lstStyle/>
           <a:p>
             <a:pPr algn="ctr"/>
+            <a:endParaRPr/>
           </a:p>
         </p:txBody>
       </p:sp>
@@ -16534,8 +20491,20 @@
                 <a:tableStyleId>{5C22544A-7EE6-4342-B048-85BDC9FD1C3A}</a:tableStyleId>
               </a:tblPr>
               <a:tblGrid>
-                <a:gridCol w="5029200"/>
-                <a:gridCol w="6263640"/>
+                <a:gridCol w="5029200">
+                  <a:extLst>
+                    <a:ext uri="{9D8B030D-6E8A-4147-A177-3AD203B41FA5}">
+                      <a16:colId xmlns:a16="http://schemas.microsoft.com/office/drawing/2014/main" val="20000"/>
+                    </a:ext>
+                  </a:extLst>
+                </a:gridCol>
+                <a:gridCol w="6263640">
+                  <a:extLst>
+                    <a:ext uri="{9D8B030D-6E8A-4147-A177-3AD203B41FA5}">
+                      <a16:colId xmlns:a16="http://schemas.microsoft.com/office/drawing/2014/main" val="20001"/>
+                    </a:ext>
+                  </a:extLst>
+                </a:gridCol>
               </a:tblGrid>
               <a:tr h="475488">
                 <a:tc>
@@ -16560,7 +20529,7 @@
                       </a:r>
                     </a:p>
                   </a:txBody>
-                  <a:tcPr marT="27432" marB="27432" marL="73152" marR="73152" anchor="ctr">
+                  <a:tcPr marL="73152" marR="73152" marT="27432" marB="27432" anchor="ctr">
                     <a:solidFill>
                       <a:srgbClr val="33393F"/>
                     </a:solidFill>
@@ -16588,12 +20557,17 @@
                       </a:r>
                     </a:p>
                   </a:txBody>
-                  <a:tcPr marT="27432" marB="27432" marL="73152" marR="73152" anchor="ctr">
+                  <a:tcPr marL="73152" marR="73152" marT="27432" marB="27432" anchor="ctr">
                     <a:solidFill>
                       <a:srgbClr val="33393F"/>
                     </a:solidFill>
                   </a:tcPr>
                 </a:tc>
+                <a:extLst>
+                  <a:ext uri="{0D108BD9-81ED-4DB2-BD59-A6C34878D82A}">
+                    <a16:rowId xmlns:a16="http://schemas.microsoft.com/office/drawing/2014/main" val="10000"/>
+                  </a:ext>
+                </a:extLst>
               </a:tr>
               <a:tr h="475488">
                 <a:tc>
@@ -16618,7 +20592,7 @@
                       </a:r>
                     </a:p>
                   </a:txBody>
-                  <a:tcPr marT="27432" marB="27432" marL="73152" marR="73152" anchor="ctr">
+                  <a:tcPr marL="73152" marR="73152" marT="27432" marB="27432" anchor="ctr">
                     <a:solidFill>
                       <a:srgbClr val="FFFFFF"/>
                     </a:solidFill>
@@ -16646,12 +20620,17 @@
                       </a:r>
                     </a:p>
                   </a:txBody>
-                  <a:tcPr marT="27432" marB="27432" marL="73152" marR="73152" anchor="ctr">
+                  <a:tcPr marL="73152" marR="73152" marT="27432" marB="27432" anchor="ctr">
                     <a:solidFill>
                       <a:srgbClr val="FFFFFF"/>
                     </a:solidFill>
                   </a:tcPr>
                 </a:tc>
+                <a:extLst>
+                  <a:ext uri="{0D108BD9-81ED-4DB2-BD59-A6C34878D82A}">
+                    <a16:rowId xmlns:a16="http://schemas.microsoft.com/office/drawing/2014/main" val="10001"/>
+                  </a:ext>
+                </a:extLst>
               </a:tr>
               <a:tr h="475488">
                 <a:tc>
@@ -16676,7 +20655,7 @@
                       </a:r>
                     </a:p>
                   </a:txBody>
-                  <a:tcPr marT="27432" marB="27432" marL="73152" marR="73152" anchor="ctr">
+                  <a:tcPr marL="73152" marR="73152" marT="27432" marB="27432" anchor="ctr">
                     <a:solidFill>
                       <a:srgbClr val="F6F7F8"/>
                     </a:solidFill>
@@ -16704,12 +20683,17 @@
                       </a:r>
                     </a:p>
                   </a:txBody>
-                  <a:tcPr marT="27432" marB="27432" marL="73152" marR="73152" anchor="ctr">
+                  <a:tcPr marL="73152" marR="73152" marT="27432" marB="27432" anchor="ctr">
                     <a:solidFill>
                       <a:srgbClr val="F6F7F8"/>
                     </a:solidFill>
                   </a:tcPr>
                 </a:tc>
+                <a:extLst>
+                  <a:ext uri="{0D108BD9-81ED-4DB2-BD59-A6C34878D82A}">
+                    <a16:rowId xmlns:a16="http://schemas.microsoft.com/office/drawing/2014/main" val="10002"/>
+                  </a:ext>
+                </a:extLst>
               </a:tr>
               <a:tr h="475488">
                 <a:tc>
@@ -16734,7 +20718,7 @@
                       </a:r>
                     </a:p>
                   </a:txBody>
-                  <a:tcPr marT="27432" marB="27432" marL="73152" marR="73152" anchor="ctr">
+                  <a:tcPr marL="73152" marR="73152" marT="27432" marB="27432" anchor="ctr">
                     <a:solidFill>
                       <a:srgbClr val="FFFFFF"/>
                     </a:solidFill>
@@ -16762,12 +20746,17 @@
                       </a:r>
                     </a:p>
                   </a:txBody>
-                  <a:tcPr marT="27432" marB="27432" marL="73152" marR="73152" anchor="ctr">
+                  <a:tcPr marL="73152" marR="73152" marT="27432" marB="27432" anchor="ctr">
                     <a:solidFill>
                       <a:srgbClr val="FFFFFF"/>
                     </a:solidFill>
                   </a:tcPr>
                 </a:tc>
+                <a:extLst>
+                  <a:ext uri="{0D108BD9-81ED-4DB2-BD59-A6C34878D82A}">
+                    <a16:rowId xmlns:a16="http://schemas.microsoft.com/office/drawing/2014/main" val="10003"/>
+                  </a:ext>
+                </a:extLst>
               </a:tr>
               <a:tr h="475488">
                 <a:tc>
@@ -16792,7 +20781,7 @@
                       </a:r>
                     </a:p>
                   </a:txBody>
-                  <a:tcPr marT="27432" marB="27432" marL="73152" marR="73152" anchor="ctr">
+                  <a:tcPr marL="73152" marR="73152" marT="27432" marB="27432" anchor="ctr">
                     <a:solidFill>
                       <a:srgbClr val="F6F7F8"/>
                     </a:solidFill>
@@ -16820,12 +20809,17 @@
                       </a:r>
                     </a:p>
                   </a:txBody>
-                  <a:tcPr marT="27432" marB="27432" marL="73152" marR="73152" anchor="ctr">
+                  <a:tcPr marL="73152" marR="73152" marT="27432" marB="27432" anchor="ctr">
                     <a:solidFill>
                       <a:srgbClr val="F6F7F8"/>
                     </a:solidFill>
                   </a:tcPr>
                 </a:tc>
+                <a:extLst>
+                  <a:ext uri="{0D108BD9-81ED-4DB2-BD59-A6C34878D82A}">
+                    <a16:rowId xmlns:a16="http://schemas.microsoft.com/office/drawing/2014/main" val="10004"/>
+                  </a:ext>
+                </a:extLst>
               </a:tr>
               <a:tr h="475488">
                 <a:tc>
@@ -16850,7 +20844,7 @@
                       </a:r>
                     </a:p>
                   </a:txBody>
-                  <a:tcPr marT="27432" marB="27432" marL="73152" marR="73152" anchor="ctr">
+                  <a:tcPr marL="73152" marR="73152" marT="27432" marB="27432" anchor="ctr">
                     <a:solidFill>
                       <a:srgbClr val="FFFFFF"/>
                     </a:solidFill>
@@ -16878,12 +20872,17 @@
                       </a:r>
                     </a:p>
                   </a:txBody>
-                  <a:tcPr marT="27432" marB="27432" marL="73152" marR="73152" anchor="ctr">
+                  <a:tcPr marL="73152" marR="73152" marT="27432" marB="27432" anchor="ctr">
                     <a:solidFill>
                       <a:srgbClr val="FFFFFF"/>
                     </a:solidFill>
                   </a:tcPr>
                 </a:tc>
+                <a:extLst>
+                  <a:ext uri="{0D108BD9-81ED-4DB2-BD59-A6C34878D82A}">
+                    <a16:rowId xmlns:a16="http://schemas.microsoft.com/office/drawing/2014/main" val="10005"/>
+                  </a:ext>
+                </a:extLst>
               </a:tr>
             </a:tbl>
           </a:graphicData>
@@ -16940,6 +20939,7 @@
           <a:lstStyle/>
           <a:p>
             <a:pPr algn="ctr"/>
+            <a:endParaRPr/>
           </a:p>
         </p:txBody>
       </p:sp>

--- a/04_제출물/데이터분석_계획서.pptx
+++ b/04_제출물/데이터분석_계획서.pptx
@@ -12856,7 +12856,7 @@
         <p:spPr>
           <a:xfrm>
             <a:off x="685800" y="3529584"/>
-            <a:ext cx="10927080" cy="1177566"/>
+            <a:ext cx="10927080" cy="984565"/>
           </a:xfrm>
           <a:prstGeom prst="rect">
             <a:avLst/>
@@ -13095,87 +13095,7 @@
                 <a:latin typeface="맑은 고딕"/>
                 <a:ea typeface="맑은 고딕"/>
               </a:rPr>
-              <a:t> = </a:t>
-            </a:r>
-            <a:r>
-              <a:rPr sz="1100" b="0" dirty="0" err="1">
-                <a:solidFill>
-                  <a:srgbClr val="1C1C1E"/>
-                </a:solidFill>
-                <a:latin typeface="맑은 고딕"/>
-                <a:ea typeface="맑은 고딕"/>
-              </a:rPr>
-              <a:t>소득·인구가</a:t>
-            </a:r>
-            <a:r>
-              <a:rPr sz="1100" b="0" dirty="0">
-                <a:solidFill>
-                  <a:srgbClr val="1C1C1E"/>
-                </a:solidFill>
-                <a:latin typeface="맑은 고딕"/>
-                <a:ea typeface="맑은 고딕"/>
-              </a:rPr>
-              <a:t> </a:t>
-            </a:r>
-            <a:r>
-              <a:rPr sz="1100" b="0" dirty="0" err="1">
-                <a:solidFill>
-                  <a:srgbClr val="1C1C1E"/>
-                </a:solidFill>
-                <a:latin typeface="맑은 고딕"/>
-                <a:ea typeface="맑은 고딕"/>
-              </a:rPr>
-              <a:t>적은</a:t>
-            </a:r>
-            <a:r>
-              <a:rPr sz="1100" b="0" dirty="0">
-                <a:solidFill>
-                  <a:srgbClr val="1C1C1E"/>
-                </a:solidFill>
-                <a:latin typeface="맑은 고딕"/>
-                <a:ea typeface="맑은 고딕"/>
-              </a:rPr>
-              <a:t> </a:t>
-            </a:r>
-            <a:r>
-              <a:rPr sz="1100" b="0" dirty="0" err="1">
-                <a:solidFill>
-                  <a:srgbClr val="1C1C1E"/>
-                </a:solidFill>
-                <a:latin typeface="맑은 고딕"/>
-                <a:ea typeface="맑은 고딕"/>
-              </a:rPr>
-              <a:t>지역이</a:t>
-            </a:r>
-            <a:r>
-              <a:rPr sz="1100" b="0" dirty="0">
-                <a:solidFill>
-                  <a:srgbClr val="1C1C1E"/>
-                </a:solidFill>
-                <a:latin typeface="맑은 고딕"/>
-                <a:ea typeface="맑은 고딕"/>
-              </a:rPr>
-              <a:t> </a:t>
-            </a:r>
-            <a:r>
-              <a:rPr sz="1100" b="0" dirty="0" err="1">
-                <a:solidFill>
-                  <a:srgbClr val="1C1C1E"/>
-                </a:solidFill>
-                <a:latin typeface="맑은 고딕"/>
-                <a:ea typeface="맑은 고딕"/>
-              </a:rPr>
-              <a:t>아니라</a:t>
-            </a:r>
-            <a:r>
-              <a:rPr sz="1100" b="0" dirty="0">
-                <a:solidFill>
-                  <a:srgbClr val="1C1C1E"/>
-                </a:solidFill>
-                <a:latin typeface="맑은 고딕"/>
-                <a:ea typeface="맑은 고딕"/>
-              </a:rPr>
-              <a:t>, 그 </a:t>
+              <a:t> = 그 </a:t>
             </a:r>
             <a:r>
               <a:rPr sz="1100" b="0" dirty="0" err="1">
@@ -14777,7 +14697,7 @@
         <p:spPr>
           <a:xfrm>
             <a:off x="667512" y="1444752"/>
-            <a:ext cx="3017520" cy="1152144"/>
+            <a:ext cx="3017520" cy="929935"/>
           </a:xfrm>
           <a:prstGeom prst="rect">
             <a:avLst/>
@@ -14799,15 +14719,32 @@
               </a:spcAft>
             </a:pPr>
             <a:r>
-              <a:rPr sz="1500" b="1">
+              <a:rPr sz="1500" b="1" dirty="0">
                 <a:solidFill>
                   <a:srgbClr val="33393F"/>
                 </a:solidFill>
                 <a:latin typeface="맑은 고딕"/>
                 <a:ea typeface="맑은 고딕"/>
               </a:rPr>
-              <a:t>① 측정</a:t>
-            </a:r>
+              <a:t>① </a:t>
+            </a:r>
+            <a:r>
+              <a:rPr sz="1500" b="1" dirty="0" err="1">
+                <a:solidFill>
+                  <a:srgbClr val="33393F"/>
+                </a:solidFill>
+                <a:latin typeface="맑은 고딕"/>
+                <a:ea typeface="맑은 고딕"/>
+              </a:rPr>
+              <a:t>측정</a:t>
+            </a:r>
+            <a:endParaRPr sz="1500" b="1" dirty="0">
+              <a:solidFill>
+                <a:srgbClr val="33393F"/>
+              </a:solidFill>
+              <a:latin typeface="맑은 고딕"/>
+              <a:ea typeface="맑은 고딕"/>
+            </a:endParaRPr>
           </a:p>
           <a:p>
             <a:pPr>
@@ -14819,15 +14756,52 @@
               </a:spcAft>
             </a:pPr>
             <a:r>
-              <a:rPr sz="1050" b="0">
-                <a:solidFill>
-                  <a:srgbClr val="1C1C1E"/>
-                </a:solidFill>
-                <a:latin typeface="맑은 고딕"/>
-                <a:ea typeface="맑은 고딕"/>
-              </a:rPr>
-              <a:t>2년마다 전국 시·군·구의</a:t>
-            </a:r>
+              <a:rPr sz="1050" b="0" dirty="0">
+                <a:solidFill>
+                  <a:srgbClr val="1C1C1E"/>
+                </a:solidFill>
+                <a:latin typeface="맑은 고딕"/>
+                <a:ea typeface="맑은 고딕"/>
+              </a:rPr>
+              <a:t>2년마다 </a:t>
+            </a:r>
+            <a:r>
+              <a:rPr sz="1050" b="0" dirty="0" err="1">
+                <a:solidFill>
+                  <a:srgbClr val="1C1C1E"/>
+                </a:solidFill>
+                <a:latin typeface="맑은 고딕"/>
+                <a:ea typeface="맑은 고딕"/>
+              </a:rPr>
+              <a:t>전국</a:t>
+            </a:r>
+            <a:r>
+              <a:rPr sz="1050" b="0" dirty="0">
+                <a:solidFill>
+                  <a:srgbClr val="1C1C1E"/>
+                </a:solidFill>
+                <a:latin typeface="맑은 고딕"/>
+                <a:ea typeface="맑은 고딕"/>
+              </a:rPr>
+              <a:t> </a:t>
+            </a:r>
+            <a:r>
+              <a:rPr sz="1050" b="0" dirty="0" err="1">
+                <a:solidFill>
+                  <a:srgbClr val="1C1C1E"/>
+                </a:solidFill>
+                <a:latin typeface="맑은 고딕"/>
+                <a:ea typeface="맑은 고딕"/>
+              </a:rPr>
+              <a:t>시·군·구의</a:t>
+            </a:r>
+            <a:endParaRPr sz="1050" b="0" dirty="0">
+              <a:solidFill>
+                <a:srgbClr val="1C1C1E"/>
+              </a:solidFill>
+              <a:latin typeface="맑은 고딕"/>
+              <a:ea typeface="맑은 고딕"/>
+            </a:endParaRPr>
           </a:p>
           <a:p>
             <a:pPr>
@@ -14839,15 +14813,92 @@
               </a:spcAft>
             </a:pPr>
             <a:r>
-              <a:rPr sz="1050" b="0">
-                <a:solidFill>
-                  <a:srgbClr val="1C1C1E"/>
-                </a:solidFill>
-                <a:latin typeface="맑은 고딕"/>
-                <a:ea typeface="맑은 고딕"/>
-              </a:rPr>
-              <a:t>분만실 60분 접근성과</a:t>
-            </a:r>
+              <a:rPr sz="1050" b="0" dirty="0" err="1">
+                <a:solidFill>
+                  <a:srgbClr val="1C1C1E"/>
+                </a:solidFill>
+                <a:latin typeface="맑은 고딕"/>
+                <a:ea typeface="맑은 고딕"/>
+              </a:rPr>
+              <a:t>분만실</a:t>
+            </a:r>
+            <a:r>
+              <a:rPr sz="1050" b="0" dirty="0">
+                <a:solidFill>
+                  <a:srgbClr val="1C1C1E"/>
+                </a:solidFill>
+                <a:latin typeface="맑은 고딕"/>
+                <a:ea typeface="맑은 고딕"/>
+              </a:rPr>
+              <a:t> 60분</a:t>
+            </a:r>
+            <a:r>
+              <a:rPr lang="ko-KR" altLang="en-US" sz="1050" b="0" dirty="0">
+                <a:solidFill>
+                  <a:srgbClr val="1C1C1E"/>
+                </a:solidFill>
+                <a:latin typeface="맑은 고딕"/>
+                <a:ea typeface="맑은 고딕"/>
+              </a:rPr>
+              <a:t>내</a:t>
+            </a:r>
+            <a:r>
+              <a:rPr sz="1050" b="0" dirty="0">
+                <a:solidFill>
+                  <a:srgbClr val="1C1C1E"/>
+                </a:solidFill>
+                <a:latin typeface="맑은 고딕"/>
+                <a:ea typeface="맑은 고딕"/>
+              </a:rPr>
+              <a:t> </a:t>
+            </a:r>
+            <a:r>
+              <a:rPr sz="1050" b="0" dirty="0" err="1">
+                <a:solidFill>
+                  <a:srgbClr val="1C1C1E"/>
+                </a:solidFill>
+                <a:latin typeface="맑은 고딕"/>
+                <a:ea typeface="맑은 고딕"/>
+              </a:rPr>
+              <a:t>접근</a:t>
+            </a:r>
+            <a:r>
+              <a:rPr lang="en-US" sz="1050" b="0" dirty="0">
+                <a:solidFill>
+                  <a:srgbClr val="1C1C1E"/>
+                </a:solidFill>
+                <a:latin typeface="맑은 고딕"/>
+                <a:ea typeface="맑은 고딕"/>
+              </a:rPr>
+              <a:t> </a:t>
+            </a:r>
+            <a:r>
+              <a:rPr lang="ko-KR" altLang="en-US" sz="1050" b="0" dirty="0">
+                <a:solidFill>
+                  <a:srgbClr val="1C1C1E"/>
+                </a:solidFill>
+                <a:latin typeface="맑은 고딕"/>
+                <a:ea typeface="맑은 고딕"/>
+              </a:rPr>
+              <a:t>가능 여부</a:t>
+            </a:r>
+            <a:r>
+              <a:rPr lang="ko-KR" altLang="en-US" sz="1050" dirty="0">
+                <a:solidFill>
+                  <a:srgbClr val="1C1C1E"/>
+                </a:solidFill>
+                <a:latin typeface="맑은 고딕"/>
+                <a:ea typeface="맑은 고딕"/>
+              </a:rPr>
+              <a:t>와</a:t>
+            </a:r>
+            <a:endParaRPr sz="1050" b="0" dirty="0">
+              <a:solidFill>
+                <a:srgbClr val="1C1C1E"/>
+              </a:solidFill>
+              <a:latin typeface="맑은 고딕"/>
+              <a:ea typeface="맑은 고딕"/>
+            </a:endParaRPr>
           </a:p>
           <a:p>
             <a:pPr>
@@ -14859,15 +14910,122 @@
               </a:spcAft>
             </a:pPr>
             <a:r>
-              <a:rPr sz="1050" b="0">
-                <a:solidFill>
-                  <a:srgbClr val="1C1C1E"/>
-                </a:solidFill>
-                <a:latin typeface="맑은 고딕"/>
-                <a:ea typeface="맑은 고딕"/>
-              </a:rPr>
-              <a:t>실제 분만 이동시간을 산출</a:t>
-            </a:r>
+              <a:rPr sz="1050" b="0" dirty="0" err="1">
+                <a:solidFill>
+                  <a:srgbClr val="1C1C1E"/>
+                </a:solidFill>
+                <a:latin typeface="맑은 고딕"/>
+                <a:ea typeface="맑은 고딕"/>
+              </a:rPr>
+              <a:t>실제</a:t>
+            </a:r>
+            <a:r>
+              <a:rPr sz="1050" b="0" dirty="0">
+                <a:solidFill>
+                  <a:srgbClr val="1C1C1E"/>
+                </a:solidFill>
+                <a:latin typeface="맑은 고딕"/>
+                <a:ea typeface="맑은 고딕"/>
+              </a:rPr>
+              <a:t> </a:t>
+            </a:r>
+            <a:r>
+              <a:rPr sz="1050" b="0" dirty="0" err="1">
+                <a:solidFill>
+                  <a:srgbClr val="1C1C1E"/>
+                </a:solidFill>
+                <a:latin typeface="맑은 고딕"/>
+                <a:ea typeface="맑은 고딕"/>
+              </a:rPr>
+              <a:t>분만</a:t>
+            </a:r>
+            <a:r>
+              <a:rPr lang="ko-KR" altLang="en-US" sz="1050" b="0" dirty="0">
+                <a:solidFill>
+                  <a:srgbClr val="1C1C1E"/>
+                </a:solidFill>
+                <a:latin typeface="맑은 고딕"/>
+                <a:ea typeface="맑은 고딕"/>
+              </a:rPr>
+              <a:t>시</a:t>
+            </a:r>
+            <a:r>
+              <a:rPr sz="1050" b="0" dirty="0">
+                <a:solidFill>
+                  <a:srgbClr val="1C1C1E"/>
+                </a:solidFill>
+                <a:latin typeface="맑은 고딕"/>
+                <a:ea typeface="맑은 고딕"/>
+              </a:rPr>
+              <a:t> </a:t>
+            </a:r>
+            <a:r>
+              <a:rPr sz="1050" b="0" dirty="0" err="1">
+                <a:solidFill>
+                  <a:srgbClr val="1C1C1E"/>
+                </a:solidFill>
+                <a:latin typeface="맑은 고딕"/>
+                <a:ea typeface="맑은 고딕"/>
+              </a:rPr>
+              <a:t>이동시간</a:t>
+            </a:r>
+            <a:r>
+              <a:rPr lang="en-US" sz="1050" b="0" dirty="0">
+                <a:solidFill>
+                  <a:srgbClr val="1C1C1E"/>
+                </a:solidFill>
+                <a:latin typeface="맑은 고딕"/>
+                <a:ea typeface="맑은 고딕"/>
+              </a:rPr>
+              <a:t> </a:t>
+            </a:r>
+            <a:r>
+              <a:rPr lang="ko-KR" altLang="en-US" sz="1050" b="0" dirty="0">
+                <a:solidFill>
+                  <a:srgbClr val="1C1C1E"/>
+                </a:solidFill>
+                <a:latin typeface="맑은 고딕"/>
+                <a:ea typeface="맑은 고딕"/>
+              </a:rPr>
+              <a:t>기록</a:t>
+            </a:r>
+            <a:r>
+              <a:rPr lang="ko-KR" altLang="en-US" sz="1050" dirty="0">
+                <a:solidFill>
+                  <a:srgbClr val="1C1C1E"/>
+                </a:solidFill>
+                <a:latin typeface="맑은 고딕"/>
+                <a:ea typeface="맑은 고딕"/>
+              </a:rPr>
+              <a:t>을</a:t>
+            </a:r>
+            <a:r>
+              <a:rPr sz="1050" b="0" dirty="0">
+                <a:solidFill>
+                  <a:srgbClr val="1C1C1E"/>
+                </a:solidFill>
+                <a:latin typeface="맑은 고딕"/>
+                <a:ea typeface="맑은 고딕"/>
+              </a:rPr>
+              <a:t> </a:t>
+            </a:r>
+            <a:r>
+              <a:rPr sz="1050" b="0" dirty="0" err="1">
+                <a:solidFill>
+                  <a:srgbClr val="1C1C1E"/>
+                </a:solidFill>
+                <a:latin typeface="맑은 고딕"/>
+                <a:ea typeface="맑은 고딕"/>
+              </a:rPr>
+              <a:t>산출</a:t>
+            </a:r>
+            <a:endParaRPr sz="1050" b="0" dirty="0">
+              <a:solidFill>
+                <a:srgbClr val="1C1C1E"/>
+              </a:solidFill>
+              <a:latin typeface="맑은 고딕"/>
+              <a:ea typeface="맑은 고딕"/>
+            </a:endParaRPr>
           </a:p>
         </p:txBody>
       </p:sp>
@@ -15337,7 +15495,7 @@
         <p:spPr>
           <a:xfrm>
             <a:off x="685800" y="3054096"/>
-            <a:ext cx="5166359" cy="1527048"/>
+            <a:ext cx="5166359" cy="1211678"/>
           </a:xfrm>
           <a:prstGeom prst="rect">
             <a:avLst/>
@@ -15359,15 +15517,62 @@
               </a:spcAft>
             </a:pPr>
             <a:r>
-              <a:rPr sz="1300" b="1">
+              <a:rPr lang="ko-KR" altLang="en-US" sz="1300" b="1" dirty="0">
                 <a:solidFill>
                   <a:srgbClr val="000000"/>
                 </a:solidFill>
                 <a:latin typeface="맑은 고딕"/>
                 <a:ea typeface="맑은 고딕"/>
               </a:rPr>
-              <a:t>의심 1 — 지정 단계</a:t>
-            </a:r>
+              <a:t>검증 타겟</a:t>
+            </a:r>
+            <a:r>
+              <a:rPr sz="1300" b="1" dirty="0">
+                <a:solidFill>
+                  <a:srgbClr val="000000"/>
+                </a:solidFill>
+                <a:latin typeface="맑은 고딕"/>
+                <a:ea typeface="맑은 고딕"/>
+              </a:rPr>
+              <a:t> 1 — </a:t>
+            </a:r>
+            <a:r>
+              <a:rPr sz="1300" b="1" dirty="0" err="1">
+                <a:solidFill>
+                  <a:srgbClr val="000000"/>
+                </a:solidFill>
+                <a:latin typeface="맑은 고딕"/>
+                <a:ea typeface="맑은 고딕"/>
+              </a:rPr>
+              <a:t>지정</a:t>
+            </a:r>
+            <a:r>
+              <a:rPr sz="1300" b="1" dirty="0">
+                <a:solidFill>
+                  <a:srgbClr val="000000"/>
+                </a:solidFill>
+                <a:latin typeface="맑은 고딕"/>
+                <a:ea typeface="맑은 고딕"/>
+              </a:rPr>
+              <a:t> </a:t>
+            </a:r>
+            <a:r>
+              <a:rPr sz="1300" b="1" dirty="0" err="1">
+                <a:solidFill>
+                  <a:srgbClr val="000000"/>
+                </a:solidFill>
+                <a:latin typeface="맑은 고딕"/>
+                <a:ea typeface="맑은 고딕"/>
+              </a:rPr>
+              <a:t>단계</a:t>
+            </a:r>
+            <a:endParaRPr sz="1300" b="1" dirty="0">
+              <a:solidFill>
+                <a:srgbClr val="000000"/>
+              </a:solidFill>
+              <a:latin typeface="맑은 고딕"/>
+              <a:ea typeface="맑은 고딕"/>
+            </a:endParaRPr>
           </a:p>
           <a:p>
             <a:pPr marL="160020" indent="-160020">
@@ -15379,15 +15584,112 @@
               </a:spcAft>
             </a:pPr>
             <a:r>
-              <a:rPr sz="1150" b="0">
-                <a:solidFill>
-                  <a:srgbClr val="1C1C1E"/>
-                </a:solidFill>
-                <a:latin typeface="맑은 고딕"/>
-                <a:ea typeface="맑은 고딕"/>
-              </a:rPr>
-              <a:t>• 판정 기준은 이동시간 파생 지표뿐이다</a:t>
-            </a:r>
+              <a:rPr sz="1150" b="0" dirty="0">
+                <a:solidFill>
+                  <a:srgbClr val="1C1C1E"/>
+                </a:solidFill>
+                <a:latin typeface="맑은 고딕"/>
+                <a:ea typeface="맑은 고딕"/>
+              </a:rPr>
+              <a:t>• </a:t>
+            </a:r>
+            <a:r>
+              <a:rPr sz="1150" b="0" dirty="0" err="1">
+                <a:solidFill>
+                  <a:srgbClr val="1C1C1E"/>
+                </a:solidFill>
+                <a:latin typeface="맑은 고딕"/>
+                <a:ea typeface="맑은 고딕"/>
+              </a:rPr>
+              <a:t>판정</a:t>
+            </a:r>
+            <a:r>
+              <a:rPr sz="1150" b="0" dirty="0">
+                <a:solidFill>
+                  <a:srgbClr val="1C1C1E"/>
+                </a:solidFill>
+                <a:latin typeface="맑은 고딕"/>
+                <a:ea typeface="맑은 고딕"/>
+              </a:rPr>
+              <a:t> </a:t>
+            </a:r>
+            <a:r>
+              <a:rPr sz="1150" b="0" dirty="0" err="1">
+                <a:solidFill>
+                  <a:srgbClr val="1C1C1E"/>
+                </a:solidFill>
+                <a:latin typeface="맑은 고딕"/>
+                <a:ea typeface="맑은 고딕"/>
+              </a:rPr>
+              <a:t>기준은</a:t>
+            </a:r>
+            <a:r>
+              <a:rPr sz="1150" b="0" dirty="0">
+                <a:solidFill>
+                  <a:srgbClr val="1C1C1E"/>
+                </a:solidFill>
+                <a:latin typeface="맑은 고딕"/>
+                <a:ea typeface="맑은 고딕"/>
+              </a:rPr>
+              <a:t> </a:t>
+            </a:r>
+            <a:r>
+              <a:rPr sz="1150" b="0" dirty="0" err="1">
+                <a:solidFill>
+                  <a:srgbClr val="1C1C1E"/>
+                </a:solidFill>
+                <a:latin typeface="맑은 고딕"/>
+                <a:ea typeface="맑은 고딕"/>
+              </a:rPr>
+              <a:t>이동시간</a:t>
+            </a:r>
+            <a:r>
+              <a:rPr sz="1150" b="0" dirty="0">
+                <a:solidFill>
+                  <a:srgbClr val="1C1C1E"/>
+                </a:solidFill>
+                <a:latin typeface="맑은 고딕"/>
+                <a:ea typeface="맑은 고딕"/>
+              </a:rPr>
+              <a:t> </a:t>
+            </a:r>
+            <a:r>
+              <a:rPr sz="1150" b="0" dirty="0" err="1">
+                <a:solidFill>
+                  <a:srgbClr val="1C1C1E"/>
+                </a:solidFill>
+                <a:latin typeface="맑은 고딕"/>
+                <a:ea typeface="맑은 고딕"/>
+              </a:rPr>
+              <a:t>파생</a:t>
+            </a:r>
+            <a:r>
+              <a:rPr sz="1150" b="0" dirty="0">
+                <a:solidFill>
+                  <a:srgbClr val="1C1C1E"/>
+                </a:solidFill>
+                <a:latin typeface="맑은 고딕"/>
+                <a:ea typeface="맑은 고딕"/>
+              </a:rPr>
+              <a:t> </a:t>
+            </a:r>
+            <a:r>
+              <a:rPr sz="1150" b="0" dirty="0" err="1">
+                <a:solidFill>
+                  <a:srgbClr val="1C1C1E"/>
+                </a:solidFill>
+                <a:latin typeface="맑은 고딕"/>
+                <a:ea typeface="맑은 고딕"/>
+              </a:rPr>
+              <a:t>지표뿐이다</a:t>
+            </a:r>
+            <a:endParaRPr sz="1150" b="0" dirty="0">
+              <a:solidFill>
+                <a:srgbClr val="1C1C1E"/>
+              </a:solidFill>
+              <a:latin typeface="맑은 고딕"/>
+              <a:ea typeface="맑은 고딕"/>
+            </a:endParaRPr>
           </a:p>
           <a:p>
             <a:pPr marL="160020" indent="-160020">
@@ -15399,14 +15701,254 @@
               </a:spcAft>
             </a:pPr>
             <a:r>
-              <a:rPr sz="1150" b="0">
-                <a:solidFill>
-                  <a:srgbClr val="1C1C1E"/>
-                </a:solidFill>
-                <a:latin typeface="맑은 고딕"/>
-                <a:ea typeface="맑은 고딕"/>
-              </a:rPr>
-              <a:t>• 관내 분만 인프라가 소멸해도 "옆 도시로 60분 안에 갈 수 있으면" 취약지가 아니게 되는 구조 아닌가?</a:t>
+              <a:rPr sz="1150" b="0" dirty="0">
+                <a:solidFill>
+                  <a:srgbClr val="1C1C1E"/>
+                </a:solidFill>
+                <a:latin typeface="맑은 고딕"/>
+                <a:ea typeface="맑은 고딕"/>
+              </a:rPr>
+              <a:t>• </a:t>
+            </a:r>
+            <a:r>
+              <a:rPr sz="1150" b="0" dirty="0" err="1">
+                <a:solidFill>
+                  <a:srgbClr val="1C1C1E"/>
+                </a:solidFill>
+                <a:latin typeface="맑은 고딕"/>
+                <a:ea typeface="맑은 고딕"/>
+              </a:rPr>
+              <a:t>관내</a:t>
+            </a:r>
+            <a:r>
+              <a:rPr sz="1150" b="0" dirty="0">
+                <a:solidFill>
+                  <a:srgbClr val="1C1C1E"/>
+                </a:solidFill>
+                <a:latin typeface="맑은 고딕"/>
+                <a:ea typeface="맑은 고딕"/>
+              </a:rPr>
+              <a:t> </a:t>
+            </a:r>
+            <a:r>
+              <a:rPr sz="1150" b="0" dirty="0" err="1">
+                <a:solidFill>
+                  <a:srgbClr val="1C1C1E"/>
+                </a:solidFill>
+                <a:latin typeface="맑은 고딕"/>
+                <a:ea typeface="맑은 고딕"/>
+              </a:rPr>
+              <a:t>분만</a:t>
+            </a:r>
+            <a:r>
+              <a:rPr sz="1150" b="0" dirty="0">
+                <a:solidFill>
+                  <a:srgbClr val="1C1C1E"/>
+                </a:solidFill>
+                <a:latin typeface="맑은 고딕"/>
+                <a:ea typeface="맑은 고딕"/>
+              </a:rPr>
+              <a:t> </a:t>
+            </a:r>
+            <a:r>
+              <a:rPr sz="1150" b="0" dirty="0" err="1">
+                <a:solidFill>
+                  <a:srgbClr val="1C1C1E"/>
+                </a:solidFill>
+                <a:latin typeface="맑은 고딕"/>
+                <a:ea typeface="맑은 고딕"/>
+              </a:rPr>
+              <a:t>인프라가</a:t>
+            </a:r>
+            <a:r>
+              <a:rPr sz="1150" b="0" dirty="0">
+                <a:solidFill>
+                  <a:srgbClr val="1C1C1E"/>
+                </a:solidFill>
+                <a:latin typeface="맑은 고딕"/>
+                <a:ea typeface="맑은 고딕"/>
+              </a:rPr>
+              <a:t> </a:t>
+            </a:r>
+            <a:r>
+              <a:rPr sz="1150" b="0" dirty="0" err="1">
+                <a:solidFill>
+                  <a:srgbClr val="1C1C1E"/>
+                </a:solidFill>
+                <a:latin typeface="맑은 고딕"/>
+                <a:ea typeface="맑은 고딕"/>
+              </a:rPr>
+              <a:t>소멸해도</a:t>
+            </a:r>
+            <a:r>
+              <a:rPr sz="1150" b="0" dirty="0">
+                <a:solidFill>
+                  <a:srgbClr val="1C1C1E"/>
+                </a:solidFill>
+                <a:latin typeface="맑은 고딕"/>
+                <a:ea typeface="맑은 고딕"/>
+              </a:rPr>
+              <a:t> "옆 </a:t>
+            </a:r>
+            <a:r>
+              <a:rPr sz="1150" b="0" dirty="0" err="1">
+                <a:solidFill>
+                  <a:srgbClr val="1C1C1E"/>
+                </a:solidFill>
+                <a:latin typeface="맑은 고딕"/>
+                <a:ea typeface="맑은 고딕"/>
+              </a:rPr>
+              <a:t>도시로</a:t>
+            </a:r>
+            <a:r>
+              <a:rPr sz="1150" b="0" dirty="0">
+                <a:solidFill>
+                  <a:srgbClr val="1C1C1E"/>
+                </a:solidFill>
+                <a:latin typeface="맑은 고딕"/>
+                <a:ea typeface="맑은 고딕"/>
+              </a:rPr>
+              <a:t> 60분 </a:t>
+            </a:r>
+            <a:r>
+              <a:rPr sz="1150" b="0" dirty="0" err="1">
+                <a:solidFill>
+                  <a:srgbClr val="1C1C1E"/>
+                </a:solidFill>
+                <a:latin typeface="맑은 고딕"/>
+                <a:ea typeface="맑은 고딕"/>
+              </a:rPr>
+              <a:t>안에</a:t>
+            </a:r>
+            <a:r>
+              <a:rPr sz="1150" b="0" dirty="0">
+                <a:solidFill>
+                  <a:srgbClr val="1C1C1E"/>
+                </a:solidFill>
+                <a:latin typeface="맑은 고딕"/>
+                <a:ea typeface="맑은 고딕"/>
+              </a:rPr>
+              <a:t> 갈 수 </a:t>
+            </a:r>
+            <a:r>
+              <a:rPr sz="1150" b="0" dirty="0" err="1">
+                <a:solidFill>
+                  <a:srgbClr val="1C1C1E"/>
+                </a:solidFill>
+                <a:latin typeface="맑은 고딕"/>
+                <a:ea typeface="맑은 고딕"/>
+              </a:rPr>
+              <a:t>있으면</a:t>
+            </a:r>
+            <a:r>
+              <a:rPr sz="1150" b="0" dirty="0">
+                <a:solidFill>
+                  <a:srgbClr val="1C1C1E"/>
+                </a:solidFill>
+                <a:latin typeface="맑은 고딕"/>
+                <a:ea typeface="맑은 고딕"/>
+              </a:rPr>
+              <a:t>" </a:t>
+            </a:r>
+            <a:r>
+              <a:rPr sz="1150" b="0" dirty="0" err="1">
+                <a:solidFill>
+                  <a:srgbClr val="1C1C1E"/>
+                </a:solidFill>
+                <a:latin typeface="맑은 고딕"/>
+                <a:ea typeface="맑은 고딕"/>
+              </a:rPr>
+              <a:t>취약지가</a:t>
+            </a:r>
+            <a:r>
+              <a:rPr sz="1150" b="0" dirty="0">
+                <a:solidFill>
+                  <a:srgbClr val="1C1C1E"/>
+                </a:solidFill>
+                <a:latin typeface="맑은 고딕"/>
+                <a:ea typeface="맑은 고딕"/>
+              </a:rPr>
+              <a:t> </a:t>
+            </a:r>
+            <a:r>
+              <a:rPr sz="1150" b="0" dirty="0" err="1">
+                <a:solidFill>
+                  <a:srgbClr val="1C1C1E"/>
+                </a:solidFill>
+                <a:latin typeface="맑은 고딕"/>
+                <a:ea typeface="맑은 고딕"/>
+              </a:rPr>
+              <a:t>아니게</a:t>
+            </a:r>
+            <a:r>
+              <a:rPr sz="1150" b="0" dirty="0">
+                <a:solidFill>
+                  <a:srgbClr val="1C1C1E"/>
+                </a:solidFill>
+                <a:latin typeface="맑은 고딕"/>
+                <a:ea typeface="맑은 고딕"/>
+              </a:rPr>
+              <a:t> </a:t>
+            </a:r>
+            <a:r>
+              <a:rPr sz="1150" b="0" dirty="0" err="1">
+                <a:solidFill>
+                  <a:srgbClr val="1C1C1E"/>
+                </a:solidFill>
+                <a:latin typeface="맑은 고딕"/>
+                <a:ea typeface="맑은 고딕"/>
+              </a:rPr>
+              <a:t>되는</a:t>
+            </a:r>
+            <a:r>
+              <a:rPr sz="1150" b="0" dirty="0">
+                <a:solidFill>
+                  <a:srgbClr val="1C1C1E"/>
+                </a:solidFill>
+                <a:latin typeface="맑은 고딕"/>
+                <a:ea typeface="맑은 고딕"/>
+              </a:rPr>
+              <a:t> </a:t>
+            </a:r>
+            <a:r>
+              <a:rPr sz="1150" b="0" dirty="0" err="1">
+                <a:solidFill>
+                  <a:srgbClr val="1C1C1E"/>
+                </a:solidFill>
+                <a:latin typeface="맑은 고딕"/>
+                <a:ea typeface="맑은 고딕"/>
+              </a:rPr>
+              <a:t>구조</a:t>
+            </a:r>
+            <a:r>
+              <a:rPr sz="1150" b="0" dirty="0">
+                <a:solidFill>
+                  <a:srgbClr val="1C1C1E"/>
+                </a:solidFill>
+                <a:latin typeface="맑은 고딕"/>
+                <a:ea typeface="맑은 고딕"/>
+              </a:rPr>
+              <a:t> </a:t>
+            </a:r>
+            <a:r>
+              <a:rPr sz="1150" b="0" dirty="0" err="1">
+                <a:solidFill>
+                  <a:srgbClr val="1C1C1E"/>
+                </a:solidFill>
+                <a:latin typeface="맑은 고딕"/>
+                <a:ea typeface="맑은 고딕"/>
+              </a:rPr>
+              <a:t>아닌가</a:t>
+            </a:r>
+            <a:r>
+              <a:rPr sz="1150" b="0" dirty="0">
+                <a:solidFill>
+                  <a:srgbClr val="1C1C1E"/>
+                </a:solidFill>
+                <a:latin typeface="맑은 고딕"/>
+                <a:ea typeface="맑은 고딕"/>
+              </a:rPr>
+              <a:t>?</a:t>
             </a:r>
           </a:p>
           <a:p>
@@ -15419,15 +15961,132 @@
               </a:spcAft>
             </a:pPr>
             <a:r>
-              <a:rPr sz="1150" b="0">
-                <a:solidFill>
-                  <a:srgbClr val="1C1C1E"/>
-                </a:solidFill>
-                <a:latin typeface="맑은 고딕"/>
-                <a:ea typeface="맑은 고딕"/>
-              </a:rPr>
-              <a:t>→ 기준이 구조적으로 놓치는 지역이 있는지 검증한다</a:t>
-            </a:r>
+              <a:rPr sz="1150" b="0" dirty="0">
+                <a:solidFill>
+                  <a:srgbClr val="1C1C1E"/>
+                </a:solidFill>
+                <a:latin typeface="맑은 고딕"/>
+                <a:ea typeface="맑은 고딕"/>
+              </a:rPr>
+              <a:t>→ </a:t>
+            </a:r>
+            <a:r>
+              <a:rPr sz="1150" b="0" dirty="0" err="1">
+                <a:solidFill>
+                  <a:srgbClr val="1C1C1E"/>
+                </a:solidFill>
+                <a:latin typeface="맑은 고딕"/>
+                <a:ea typeface="맑은 고딕"/>
+              </a:rPr>
+              <a:t>기준이</a:t>
+            </a:r>
+            <a:r>
+              <a:rPr sz="1150" b="0" dirty="0">
+                <a:solidFill>
+                  <a:srgbClr val="1C1C1E"/>
+                </a:solidFill>
+                <a:latin typeface="맑은 고딕"/>
+                <a:ea typeface="맑은 고딕"/>
+              </a:rPr>
+              <a:t> </a:t>
+            </a:r>
+            <a:r>
+              <a:rPr sz="1150" b="0" dirty="0" err="1">
+                <a:solidFill>
+                  <a:srgbClr val="1C1C1E"/>
+                </a:solidFill>
+                <a:latin typeface="맑은 고딕"/>
+                <a:ea typeface="맑은 고딕"/>
+              </a:rPr>
+              <a:t>구조적으로</a:t>
+            </a:r>
+            <a:r>
+              <a:rPr sz="1150" b="0" dirty="0">
+                <a:solidFill>
+                  <a:srgbClr val="1C1C1E"/>
+                </a:solidFill>
+                <a:latin typeface="맑은 고딕"/>
+                <a:ea typeface="맑은 고딕"/>
+              </a:rPr>
+              <a:t> </a:t>
+            </a:r>
+            <a:r>
+              <a:rPr sz="1150" b="0" dirty="0" err="1">
+                <a:solidFill>
+                  <a:srgbClr val="1C1C1E"/>
+                </a:solidFill>
+                <a:latin typeface="맑은 고딕"/>
+                <a:ea typeface="맑은 고딕"/>
+              </a:rPr>
+              <a:t>놓치는</a:t>
+            </a:r>
+            <a:r>
+              <a:rPr sz="1150" b="0" dirty="0">
+                <a:solidFill>
+                  <a:srgbClr val="1C1C1E"/>
+                </a:solidFill>
+                <a:latin typeface="맑은 고딕"/>
+                <a:ea typeface="맑은 고딕"/>
+              </a:rPr>
+              <a:t> </a:t>
+            </a:r>
+            <a:r>
+              <a:rPr sz="1150" b="0" dirty="0" err="1">
+                <a:solidFill>
+                  <a:srgbClr val="1C1C1E"/>
+                </a:solidFill>
+                <a:latin typeface="맑은 고딕"/>
+                <a:ea typeface="맑은 고딕"/>
+              </a:rPr>
+              <a:t>지역이</a:t>
+            </a:r>
+            <a:r>
+              <a:rPr sz="1150" b="0" dirty="0">
+                <a:solidFill>
+                  <a:srgbClr val="1C1C1E"/>
+                </a:solidFill>
+                <a:latin typeface="맑은 고딕"/>
+                <a:ea typeface="맑은 고딕"/>
+              </a:rPr>
+              <a:t> </a:t>
+            </a:r>
+            <a:r>
+              <a:rPr sz="1150" b="0" dirty="0" err="1">
+                <a:solidFill>
+                  <a:srgbClr val="1C1C1E"/>
+                </a:solidFill>
+                <a:latin typeface="맑은 고딕"/>
+                <a:ea typeface="맑은 고딕"/>
+              </a:rPr>
+              <a:t>있는지</a:t>
+            </a:r>
+            <a:r>
+              <a:rPr sz="1150" b="0" dirty="0">
+                <a:solidFill>
+                  <a:srgbClr val="1C1C1E"/>
+                </a:solidFill>
+                <a:latin typeface="맑은 고딕"/>
+                <a:ea typeface="맑은 고딕"/>
+              </a:rPr>
+              <a:t> </a:t>
+            </a:r>
+            <a:r>
+              <a:rPr sz="1150" b="0" dirty="0" err="1">
+                <a:solidFill>
+                  <a:srgbClr val="1C1C1E"/>
+                </a:solidFill>
+                <a:latin typeface="맑은 고딕"/>
+                <a:ea typeface="맑은 고딕"/>
+              </a:rPr>
+              <a:t>검증한다</a:t>
+            </a:r>
+            <a:endParaRPr sz="1150" b="0" dirty="0">
+              <a:solidFill>
+                <a:srgbClr val="1C1C1E"/>
+              </a:solidFill>
+              <a:latin typeface="맑은 고딕"/>
+              <a:ea typeface="맑은 고딕"/>
+            </a:endParaRPr>
           </a:p>
         </p:txBody>
       </p:sp>
@@ -15495,7 +16154,7 @@
         <p:spPr>
           <a:xfrm>
             <a:off x="6446520" y="3054096"/>
-            <a:ext cx="5166359" cy="1527048"/>
+            <a:ext cx="5166359" cy="1211678"/>
           </a:xfrm>
           <a:prstGeom prst="rect">
             <a:avLst/>
@@ -15517,15 +16176,62 @@
               </a:spcAft>
             </a:pPr>
             <a:r>
-              <a:rPr sz="1300" b="1">
+              <a:rPr lang="ko-KR" altLang="en-US" sz="1300" b="1" dirty="0">
                 <a:solidFill>
                   <a:srgbClr val="000000"/>
                 </a:solidFill>
                 <a:latin typeface="맑은 고딕"/>
                 <a:ea typeface="맑은 고딕"/>
               </a:rPr>
-              <a:t>의심 2 — 배분 단계</a:t>
-            </a:r>
+              <a:t>검증 타겟</a:t>
+            </a:r>
+            <a:r>
+              <a:rPr sz="1300" b="1" dirty="0">
+                <a:solidFill>
+                  <a:srgbClr val="000000"/>
+                </a:solidFill>
+                <a:latin typeface="맑은 고딕"/>
+                <a:ea typeface="맑은 고딕"/>
+              </a:rPr>
+              <a:t> 2 — </a:t>
+            </a:r>
+            <a:r>
+              <a:rPr sz="1300" b="1" dirty="0" err="1">
+                <a:solidFill>
+                  <a:srgbClr val="000000"/>
+                </a:solidFill>
+                <a:latin typeface="맑은 고딕"/>
+                <a:ea typeface="맑은 고딕"/>
+              </a:rPr>
+              <a:t>배분</a:t>
+            </a:r>
+            <a:r>
+              <a:rPr sz="1300" b="1" dirty="0">
+                <a:solidFill>
+                  <a:srgbClr val="000000"/>
+                </a:solidFill>
+                <a:latin typeface="맑은 고딕"/>
+                <a:ea typeface="맑은 고딕"/>
+              </a:rPr>
+              <a:t> </a:t>
+            </a:r>
+            <a:r>
+              <a:rPr sz="1300" b="1" dirty="0" err="1">
+                <a:solidFill>
+                  <a:srgbClr val="000000"/>
+                </a:solidFill>
+                <a:latin typeface="맑은 고딕"/>
+                <a:ea typeface="맑은 고딕"/>
+              </a:rPr>
+              <a:t>단계</a:t>
+            </a:r>
+            <a:endParaRPr sz="1300" b="1" dirty="0">
+              <a:solidFill>
+                <a:srgbClr val="000000"/>
+              </a:solidFill>
+              <a:latin typeface="맑은 고딕"/>
+              <a:ea typeface="맑은 고딕"/>
+            </a:endParaRPr>
           </a:p>
           <a:p>
             <a:pPr marL="160020" indent="-160020">
@@ -15537,15 +16243,112 @@
               </a:spcAft>
             </a:pPr>
             <a:r>
-              <a:rPr sz="1150" b="0">
-                <a:solidFill>
-                  <a:srgbClr val="1C1C1E"/>
-                </a:solidFill>
-                <a:latin typeface="맑은 고딕"/>
-                <a:ea typeface="맑은 고딕"/>
-              </a:rPr>
-              <a:t>• 지원 심사 배점 100점 중 취약도 항목은 0점</a:t>
-            </a:r>
+              <a:rPr lang="en-US" altLang="ko-KR" sz="1150" dirty="0">
+                <a:solidFill>
+                  <a:srgbClr val="1C1C1E"/>
+                </a:solidFill>
+                <a:latin typeface="맑은 고딕"/>
+                <a:ea typeface="맑은 고딕"/>
+              </a:rPr>
+              <a:t>• </a:t>
+            </a:r>
+            <a:r>
+              <a:rPr lang="ko-KR" altLang="en-US" sz="1150" dirty="0">
+                <a:solidFill>
+                  <a:srgbClr val="1C1C1E"/>
+                </a:solidFill>
+                <a:latin typeface="맑은 고딕"/>
+                <a:ea typeface="맑은 고딕"/>
+              </a:rPr>
+              <a:t>시</a:t>
+            </a:r>
+            <a:r>
+              <a:rPr lang="en-US" altLang="ko-KR" sz="1150" dirty="0">
+                <a:solidFill>
+                  <a:srgbClr val="1C1C1E"/>
+                </a:solidFill>
+                <a:latin typeface="맑은 고딕"/>
+                <a:ea typeface="맑은 고딕"/>
+              </a:rPr>
+              <a:t>·</a:t>
+            </a:r>
+            <a:r>
+              <a:rPr lang="ko-KR" altLang="en-US" sz="1150" dirty="0">
+                <a:solidFill>
+                  <a:srgbClr val="1C1C1E"/>
+                </a:solidFill>
+                <a:latin typeface="맑은 고딕"/>
+                <a:ea typeface="맑은 고딕"/>
+              </a:rPr>
+              <a:t>도 선별 기준은 </a:t>
+            </a:r>
+            <a:r>
+              <a:rPr lang="en-US" altLang="ko-KR" sz="1150" dirty="0">
+                <a:solidFill>
+                  <a:srgbClr val="1C1C1E"/>
+                </a:solidFill>
+                <a:latin typeface="맑은 고딕"/>
+                <a:ea typeface="맑은 고딕"/>
+              </a:rPr>
+              <a:t>"</a:t>
+            </a:r>
+            <a:r>
+              <a:rPr lang="ko-KR" altLang="en-US" sz="1150" dirty="0">
+                <a:solidFill>
+                  <a:srgbClr val="1C1C1E"/>
+                </a:solidFill>
+                <a:latin typeface="맑은 고딕"/>
+                <a:ea typeface="맑은 고딕"/>
+              </a:rPr>
+              <a:t>예산 규모</a:t>
+            </a:r>
+            <a:r>
+              <a:rPr lang="en-US" altLang="ko-KR" sz="1150" dirty="0">
+                <a:solidFill>
+                  <a:srgbClr val="1C1C1E"/>
+                </a:solidFill>
+                <a:latin typeface="맑은 고딕"/>
+                <a:ea typeface="맑은 고딕"/>
+              </a:rPr>
+              <a:t>, </a:t>
+            </a:r>
+            <a:r>
+              <a:rPr lang="ko-KR" altLang="en-US" sz="1150" dirty="0">
+                <a:solidFill>
+                  <a:srgbClr val="1C1C1E"/>
+                </a:solidFill>
+                <a:latin typeface="맑은 고딕"/>
+                <a:ea typeface="맑은 고딕"/>
+              </a:rPr>
+              <a:t>의료 취약성 등 고려</a:t>
+            </a:r>
+            <a:r>
+              <a:rPr lang="en-US" altLang="ko-KR" sz="1150" dirty="0">
+                <a:solidFill>
+                  <a:srgbClr val="1C1C1E"/>
+                </a:solidFill>
+                <a:latin typeface="맑은 고딕"/>
+                <a:ea typeface="맑은 고딕"/>
+              </a:rPr>
+              <a:t>"</a:t>
+            </a:r>
+            <a:r>
+              <a:rPr lang="ko-KR" altLang="en-US" sz="1150" dirty="0">
+                <a:solidFill>
+                  <a:srgbClr val="1C1C1E"/>
+                </a:solidFill>
+                <a:latin typeface="맑은 고딕"/>
+                <a:ea typeface="맑은 고딕"/>
+              </a:rPr>
+              <a:t>가 전부</a:t>
+            </a:r>
+            <a:endParaRPr lang="en-US" sz="1150" b="0" dirty="0">
+              <a:solidFill>
+                <a:srgbClr val="1C1C1E"/>
+              </a:solidFill>
+              <a:latin typeface="맑은 고딕"/>
+              <a:ea typeface="맑은 고딕"/>
+            </a:endParaRPr>
           </a:p>
           <a:p>
             <a:pPr marL="160020" indent="-160020">
@@ -15557,15 +16360,182 @@
               </a:spcAft>
             </a:pPr>
             <a:r>
-              <a:rPr sz="1150" b="0">
-                <a:solidFill>
-                  <a:srgbClr val="1C1C1E"/>
-                </a:solidFill>
-                <a:latin typeface="맑은 고딕"/>
-                <a:ea typeface="맑은 고딕"/>
-              </a:rPr>
-              <a:t>• 시·도 선별 기준은 "예산 규모, 의료 취약성 등 고려"가 전부 — 누구를 먼저 지원할지의 규칙이 있는가?</a:t>
-            </a:r>
+              <a:rPr sz="1150" b="0" dirty="0">
+                <a:solidFill>
+                  <a:srgbClr val="1C1C1E"/>
+                </a:solidFill>
+                <a:latin typeface="맑은 고딕"/>
+                <a:ea typeface="맑은 고딕"/>
+              </a:rPr>
+              <a:t>• </a:t>
+            </a:r>
+            <a:r>
+              <a:rPr sz="1150" b="0" dirty="0" err="1">
+                <a:solidFill>
+                  <a:srgbClr val="1C1C1E"/>
+                </a:solidFill>
+                <a:latin typeface="맑은 고딕"/>
+                <a:ea typeface="맑은 고딕"/>
+              </a:rPr>
+              <a:t>지원</a:t>
+            </a:r>
+            <a:r>
+              <a:rPr sz="1150" b="0" dirty="0">
+                <a:solidFill>
+                  <a:srgbClr val="1C1C1E"/>
+                </a:solidFill>
+                <a:latin typeface="맑은 고딕"/>
+                <a:ea typeface="맑은 고딕"/>
+              </a:rPr>
+              <a:t> </a:t>
+            </a:r>
+            <a:r>
+              <a:rPr sz="1150" b="0" dirty="0" err="1">
+                <a:solidFill>
+                  <a:srgbClr val="1C1C1E"/>
+                </a:solidFill>
+                <a:latin typeface="맑은 고딕"/>
+                <a:ea typeface="맑은 고딕"/>
+              </a:rPr>
+              <a:t>심사</a:t>
+            </a:r>
+            <a:r>
+              <a:rPr sz="1150" b="0" dirty="0">
+                <a:solidFill>
+                  <a:srgbClr val="1C1C1E"/>
+                </a:solidFill>
+                <a:latin typeface="맑은 고딕"/>
+                <a:ea typeface="맑은 고딕"/>
+              </a:rPr>
+              <a:t> </a:t>
+            </a:r>
+            <a:r>
+              <a:rPr sz="1150" b="0" dirty="0" err="1">
+                <a:solidFill>
+                  <a:srgbClr val="1C1C1E"/>
+                </a:solidFill>
+                <a:latin typeface="맑은 고딕"/>
+                <a:ea typeface="맑은 고딕"/>
+              </a:rPr>
+              <a:t>배점</a:t>
+            </a:r>
+            <a:r>
+              <a:rPr sz="1150" b="0" dirty="0">
+                <a:solidFill>
+                  <a:srgbClr val="1C1C1E"/>
+                </a:solidFill>
+                <a:latin typeface="맑은 고딕"/>
+                <a:ea typeface="맑은 고딕"/>
+              </a:rPr>
+              <a:t> 100점 중 </a:t>
+            </a:r>
+            <a:r>
+              <a:rPr sz="1150" b="0" dirty="0" err="1">
+                <a:solidFill>
+                  <a:srgbClr val="1C1C1E"/>
+                </a:solidFill>
+                <a:latin typeface="맑은 고딕"/>
+                <a:ea typeface="맑은 고딕"/>
+              </a:rPr>
+              <a:t>취약도</a:t>
+            </a:r>
+            <a:r>
+              <a:rPr sz="1150" b="0" dirty="0">
+                <a:solidFill>
+                  <a:srgbClr val="1C1C1E"/>
+                </a:solidFill>
+                <a:latin typeface="맑은 고딕"/>
+                <a:ea typeface="맑은 고딕"/>
+              </a:rPr>
+              <a:t> </a:t>
+            </a:r>
+            <a:r>
+              <a:rPr sz="1150" b="0" dirty="0" err="1">
+                <a:solidFill>
+                  <a:srgbClr val="1C1C1E"/>
+                </a:solidFill>
+                <a:latin typeface="맑은 고딕"/>
+                <a:ea typeface="맑은 고딕"/>
+              </a:rPr>
+              <a:t>항목은</a:t>
+            </a:r>
+            <a:r>
+              <a:rPr sz="1150" b="0" dirty="0">
+                <a:solidFill>
+                  <a:srgbClr val="1C1C1E"/>
+                </a:solidFill>
+                <a:latin typeface="맑은 고딕"/>
+                <a:ea typeface="맑은 고딕"/>
+              </a:rPr>
+              <a:t> 0점</a:t>
+            </a:r>
+            <a:r>
+              <a:rPr lang="en-US" sz="1150" b="0" dirty="0">
+                <a:solidFill>
+                  <a:srgbClr val="1C1C1E"/>
+                </a:solidFill>
+                <a:latin typeface="맑은 고딕"/>
+                <a:ea typeface="맑은 고딕"/>
+              </a:rPr>
+              <a:t> </a:t>
+            </a:r>
+            <a:r>
+              <a:rPr lang="en-US" altLang="ko-KR" sz="1150" dirty="0">
+                <a:solidFill>
+                  <a:srgbClr val="1C1C1E"/>
+                </a:solidFill>
+                <a:latin typeface="맑은 고딕"/>
+                <a:ea typeface="맑은 고딕"/>
+              </a:rPr>
+              <a:t>— </a:t>
+            </a:r>
+            <a:r>
+              <a:rPr lang="ko-KR" altLang="en-US" sz="1150" dirty="0">
+                <a:solidFill>
+                  <a:srgbClr val="1C1C1E"/>
+                </a:solidFill>
+                <a:latin typeface="맑은 고딕"/>
+                <a:ea typeface="맑은 고딕"/>
+              </a:rPr>
+              <a:t>누구를 먼저 </a:t>
+            </a:r>
+            <a:r>
+              <a:rPr lang="ko-KR" altLang="en-US" sz="1150" dirty="0" err="1">
+                <a:solidFill>
+                  <a:srgbClr val="1C1C1E"/>
+                </a:solidFill>
+                <a:latin typeface="맑은 고딕"/>
+                <a:ea typeface="맑은 고딕"/>
+              </a:rPr>
+              <a:t>지원할지의</a:t>
+            </a:r>
+            <a:r>
+              <a:rPr lang="ko-KR" altLang="en-US" sz="1150" dirty="0">
+                <a:solidFill>
+                  <a:srgbClr val="1C1C1E"/>
+                </a:solidFill>
+                <a:latin typeface="맑은 고딕"/>
+                <a:ea typeface="맑은 고딕"/>
+              </a:rPr>
+              <a:t> 합리적 규칙이 있는가</a:t>
+            </a:r>
+            <a:r>
+              <a:rPr lang="en-US" altLang="ko-KR" sz="1150" dirty="0">
+                <a:solidFill>
+                  <a:srgbClr val="1C1C1E"/>
+                </a:solidFill>
+                <a:latin typeface="맑은 고딕"/>
+                <a:ea typeface="맑은 고딕"/>
+              </a:rPr>
+              <a:t>?</a:t>
+            </a:r>
+            <a:endParaRPr sz="1150" b="0" dirty="0">
+              <a:solidFill>
+                <a:srgbClr val="1C1C1E"/>
+              </a:solidFill>
+              <a:latin typeface="맑은 고딕"/>
+              <a:ea typeface="맑은 고딕"/>
+            </a:endParaRPr>
           </a:p>
           <a:p>
             <a:pPr>
@@ -15577,15 +16547,112 @@
               </a:spcAft>
             </a:pPr>
             <a:r>
-              <a:rPr sz="1150" b="0">
-                <a:solidFill>
-                  <a:srgbClr val="1C1C1E"/>
-                </a:solidFill>
-                <a:latin typeface="맑은 고딕"/>
-                <a:ea typeface="맑은 고딕"/>
-              </a:rPr>
-              <a:t>→ 현행 배분이 무엇으로 설명되는지 진단한다</a:t>
-            </a:r>
+              <a:rPr sz="1150" b="0" dirty="0">
+                <a:solidFill>
+                  <a:srgbClr val="1C1C1E"/>
+                </a:solidFill>
+                <a:latin typeface="맑은 고딕"/>
+                <a:ea typeface="맑은 고딕"/>
+              </a:rPr>
+              <a:t>→ </a:t>
+            </a:r>
+            <a:r>
+              <a:rPr sz="1150" b="0" dirty="0" err="1">
+                <a:solidFill>
+                  <a:srgbClr val="1C1C1E"/>
+                </a:solidFill>
+                <a:latin typeface="맑은 고딕"/>
+                <a:ea typeface="맑은 고딕"/>
+              </a:rPr>
+              <a:t>현행</a:t>
+            </a:r>
+            <a:r>
+              <a:rPr sz="1150" b="0" dirty="0">
+                <a:solidFill>
+                  <a:srgbClr val="1C1C1E"/>
+                </a:solidFill>
+                <a:latin typeface="맑은 고딕"/>
+                <a:ea typeface="맑은 고딕"/>
+              </a:rPr>
+              <a:t> </a:t>
+            </a:r>
+            <a:r>
+              <a:rPr sz="1150" b="0" dirty="0" err="1">
+                <a:solidFill>
+                  <a:srgbClr val="1C1C1E"/>
+                </a:solidFill>
+                <a:latin typeface="맑은 고딕"/>
+                <a:ea typeface="맑은 고딕"/>
+              </a:rPr>
+              <a:t>배분이</a:t>
+            </a:r>
+            <a:r>
+              <a:rPr sz="1150" b="0" dirty="0">
+                <a:solidFill>
+                  <a:srgbClr val="1C1C1E"/>
+                </a:solidFill>
+                <a:latin typeface="맑은 고딕"/>
+                <a:ea typeface="맑은 고딕"/>
+              </a:rPr>
+              <a:t> </a:t>
+            </a:r>
+            <a:r>
+              <a:rPr sz="1150" b="0" dirty="0" err="1">
+                <a:solidFill>
+                  <a:srgbClr val="1C1C1E"/>
+                </a:solidFill>
+                <a:latin typeface="맑은 고딕"/>
+                <a:ea typeface="맑은 고딕"/>
+              </a:rPr>
+              <a:t>무엇으로</a:t>
+            </a:r>
+            <a:r>
+              <a:rPr sz="1150" b="0" dirty="0">
+                <a:solidFill>
+                  <a:srgbClr val="1C1C1E"/>
+                </a:solidFill>
+                <a:latin typeface="맑은 고딕"/>
+                <a:ea typeface="맑은 고딕"/>
+              </a:rPr>
+              <a:t> </a:t>
+            </a:r>
+            <a:r>
+              <a:rPr sz="1150" b="0" dirty="0" err="1">
+                <a:solidFill>
+                  <a:srgbClr val="1C1C1E"/>
+                </a:solidFill>
+                <a:latin typeface="맑은 고딕"/>
+                <a:ea typeface="맑은 고딕"/>
+              </a:rPr>
+              <a:t>설명되는지</a:t>
+            </a:r>
+            <a:r>
+              <a:rPr sz="1150" b="0" dirty="0">
+                <a:solidFill>
+                  <a:srgbClr val="1C1C1E"/>
+                </a:solidFill>
+                <a:latin typeface="맑은 고딕"/>
+                <a:ea typeface="맑은 고딕"/>
+              </a:rPr>
+              <a:t> </a:t>
+            </a:r>
+            <a:r>
+              <a:rPr sz="1150" b="0" dirty="0" err="1">
+                <a:solidFill>
+                  <a:srgbClr val="1C1C1E"/>
+                </a:solidFill>
+                <a:latin typeface="맑은 고딕"/>
+                <a:ea typeface="맑은 고딕"/>
+              </a:rPr>
+              <a:t>진단한다</a:t>
+            </a:r>
+            <a:endParaRPr sz="1150" b="0" dirty="0">
+              <a:solidFill>
+                <a:srgbClr val="1C1C1E"/>
+              </a:solidFill>
+              <a:latin typeface="맑은 고딕"/>
+              <a:ea typeface="맑은 고딕"/>
+            </a:endParaRPr>
           </a:p>
         </p:txBody>
       </p:sp>
@@ -15653,7 +16720,7 @@
         <p:spPr>
           <a:xfrm>
             <a:off x="685800" y="5020055"/>
-            <a:ext cx="10927080" cy="1115568"/>
+            <a:ext cx="10927080" cy="1009956"/>
           </a:xfrm>
           <a:prstGeom prst="rect">
             <a:avLst/>
@@ -15675,15 +16742,82 @@
               </a:spcAft>
             </a:pPr>
             <a:r>
-              <a:rPr sz="1300" b="1">
+              <a:rPr sz="1300" b="1" dirty="0">
                 <a:solidFill>
                   <a:srgbClr val="33393F"/>
                 </a:solidFill>
                 <a:latin typeface="맑은 고딕"/>
                 <a:ea typeface="맑은 고딕"/>
               </a:rPr>
-              <a:t>왜 지금, 왜 데이터인가</a:t>
-            </a:r>
+              <a:t>왜 </a:t>
+            </a:r>
+            <a:r>
+              <a:rPr sz="1300" b="1" dirty="0" err="1">
+                <a:solidFill>
+                  <a:srgbClr val="33393F"/>
+                </a:solidFill>
+                <a:latin typeface="맑은 고딕"/>
+                <a:ea typeface="맑은 고딕"/>
+              </a:rPr>
+              <a:t>지금</a:t>
+            </a:r>
+            <a:r>
+              <a:rPr sz="1300" b="1" dirty="0">
+                <a:solidFill>
+                  <a:srgbClr val="33393F"/>
+                </a:solidFill>
+                <a:latin typeface="맑은 고딕"/>
+                <a:ea typeface="맑은 고딕"/>
+              </a:rPr>
+              <a:t>, </a:t>
+            </a:r>
+            <a:r>
+              <a:rPr sz="1300" b="1" dirty="0" err="1">
+                <a:solidFill>
+                  <a:srgbClr val="33393F"/>
+                </a:solidFill>
+                <a:latin typeface="맑은 고딕"/>
+                <a:ea typeface="맑은 고딕"/>
+              </a:rPr>
+              <a:t>데이터</a:t>
+            </a:r>
+            <a:r>
+              <a:rPr lang="en-US" sz="1300" b="1" dirty="0">
+                <a:solidFill>
+                  <a:srgbClr val="33393F"/>
+                </a:solidFill>
+                <a:latin typeface="맑은 고딕"/>
+                <a:ea typeface="맑은 고딕"/>
+              </a:rPr>
+              <a:t> </a:t>
+            </a:r>
+            <a:r>
+              <a:rPr lang="ko-KR" altLang="en-US" sz="1300" b="1" dirty="0">
+                <a:solidFill>
+                  <a:srgbClr val="33393F"/>
+                </a:solidFill>
+                <a:latin typeface="맑은 고딕"/>
+                <a:ea typeface="맑은 고딕"/>
+              </a:rPr>
+              <a:t>분석이 필요한가</a:t>
+            </a:r>
+            <a:r>
+              <a:rPr lang="en-US" altLang="ko-KR" sz="1300" b="1" dirty="0">
+                <a:solidFill>
+                  <a:srgbClr val="33393F"/>
+                </a:solidFill>
+                <a:latin typeface="맑은 고딕"/>
+                <a:ea typeface="맑은 고딕"/>
+              </a:rPr>
+              <a:t>?</a:t>
+            </a:r>
+            <a:endParaRPr sz="1300" b="1" dirty="0">
+              <a:solidFill>
+                <a:srgbClr val="33393F"/>
+              </a:solidFill>
+              <a:latin typeface="맑은 고딕"/>
+              <a:ea typeface="맑은 고딕"/>
+            </a:endParaRPr>
           </a:p>
           <a:p>
             <a:pPr marL="160020" indent="-160020">
@@ -15695,15 +16829,312 @@
               </a:spcAft>
             </a:pPr>
             <a:r>
-              <a:rPr sz="1150" b="0">
-                <a:solidFill>
-                  <a:srgbClr val="1C1C1E"/>
-                </a:solidFill>
-                <a:latin typeface="맑은 고딕"/>
-                <a:ea typeface="맑은 고딕"/>
-              </a:rPr>
-              <a:t>• 분만 인프라 공백은 언론·국회에서 반복 지적되어 왔으나, 전국 단위 공개 데이터로 정량 검증된 적이 없다</a:t>
-            </a:r>
+              <a:rPr sz="1150" b="0" dirty="0">
+                <a:solidFill>
+                  <a:srgbClr val="1C1C1E"/>
+                </a:solidFill>
+                <a:latin typeface="맑은 고딕"/>
+                <a:ea typeface="맑은 고딕"/>
+              </a:rPr>
+              <a:t>• </a:t>
+            </a:r>
+            <a:r>
+              <a:rPr sz="1150" b="0" dirty="0" err="1">
+                <a:solidFill>
+                  <a:srgbClr val="1C1C1E"/>
+                </a:solidFill>
+                <a:latin typeface="맑은 고딕"/>
+                <a:ea typeface="맑은 고딕"/>
+              </a:rPr>
+              <a:t>분만</a:t>
+            </a:r>
+            <a:r>
+              <a:rPr sz="1150" b="0" dirty="0">
+                <a:solidFill>
+                  <a:srgbClr val="1C1C1E"/>
+                </a:solidFill>
+                <a:latin typeface="맑은 고딕"/>
+                <a:ea typeface="맑은 고딕"/>
+              </a:rPr>
+              <a:t> </a:t>
+            </a:r>
+            <a:r>
+              <a:rPr sz="1150" b="0" dirty="0" err="1">
+                <a:solidFill>
+                  <a:srgbClr val="1C1C1E"/>
+                </a:solidFill>
+                <a:latin typeface="맑은 고딕"/>
+                <a:ea typeface="맑은 고딕"/>
+              </a:rPr>
+              <a:t>인프라</a:t>
+            </a:r>
+            <a:r>
+              <a:rPr sz="1150" b="0" dirty="0">
+                <a:solidFill>
+                  <a:srgbClr val="1C1C1E"/>
+                </a:solidFill>
+                <a:latin typeface="맑은 고딕"/>
+                <a:ea typeface="맑은 고딕"/>
+              </a:rPr>
+              <a:t> </a:t>
+            </a:r>
+            <a:r>
+              <a:rPr sz="1150" b="0" dirty="0" err="1">
+                <a:solidFill>
+                  <a:srgbClr val="1C1C1E"/>
+                </a:solidFill>
+                <a:latin typeface="맑은 고딕"/>
+                <a:ea typeface="맑은 고딕"/>
+              </a:rPr>
+              <a:t>공백은</a:t>
+            </a:r>
+            <a:r>
+              <a:rPr sz="1150" b="0" dirty="0">
+                <a:solidFill>
+                  <a:srgbClr val="1C1C1E"/>
+                </a:solidFill>
+                <a:latin typeface="맑은 고딕"/>
+                <a:ea typeface="맑은 고딕"/>
+              </a:rPr>
+              <a:t> </a:t>
+            </a:r>
+            <a:r>
+              <a:rPr sz="1150" b="0" dirty="0" err="1">
+                <a:solidFill>
+                  <a:srgbClr val="1C1C1E"/>
+                </a:solidFill>
+                <a:latin typeface="맑은 고딕"/>
+                <a:ea typeface="맑은 고딕"/>
+              </a:rPr>
+              <a:t>언론·국회에서</a:t>
+            </a:r>
+            <a:r>
+              <a:rPr sz="1150" b="0" dirty="0">
+                <a:solidFill>
+                  <a:srgbClr val="1C1C1E"/>
+                </a:solidFill>
+                <a:latin typeface="맑은 고딕"/>
+                <a:ea typeface="맑은 고딕"/>
+              </a:rPr>
+              <a:t> </a:t>
+            </a:r>
+            <a:r>
+              <a:rPr sz="1150" b="0" dirty="0" err="1">
+                <a:solidFill>
+                  <a:srgbClr val="1C1C1E"/>
+                </a:solidFill>
+                <a:latin typeface="맑은 고딕"/>
+                <a:ea typeface="맑은 고딕"/>
+              </a:rPr>
+              <a:t>반복</a:t>
+            </a:r>
+            <a:r>
+              <a:rPr sz="1150" b="0" dirty="0">
+                <a:solidFill>
+                  <a:srgbClr val="1C1C1E"/>
+                </a:solidFill>
+                <a:latin typeface="맑은 고딕"/>
+                <a:ea typeface="맑은 고딕"/>
+              </a:rPr>
+              <a:t> </a:t>
+            </a:r>
+            <a:r>
+              <a:rPr sz="1150" b="0" dirty="0" err="1">
+                <a:solidFill>
+                  <a:srgbClr val="1C1C1E"/>
+                </a:solidFill>
+                <a:latin typeface="맑은 고딕"/>
+                <a:ea typeface="맑은 고딕"/>
+              </a:rPr>
+              <a:t>지적되어</a:t>
+            </a:r>
+            <a:r>
+              <a:rPr sz="1150" b="0" dirty="0">
+                <a:solidFill>
+                  <a:srgbClr val="1C1C1E"/>
+                </a:solidFill>
+                <a:latin typeface="맑은 고딕"/>
+                <a:ea typeface="맑은 고딕"/>
+              </a:rPr>
+              <a:t> </a:t>
+            </a:r>
+            <a:r>
+              <a:rPr sz="1150" b="0" dirty="0" err="1">
+                <a:solidFill>
+                  <a:srgbClr val="1C1C1E"/>
+                </a:solidFill>
+                <a:latin typeface="맑은 고딕"/>
+                <a:ea typeface="맑은 고딕"/>
+              </a:rPr>
+              <a:t>왔으나</a:t>
+            </a:r>
+            <a:r>
+              <a:rPr sz="1150" b="0" dirty="0">
+                <a:solidFill>
+                  <a:srgbClr val="1C1C1E"/>
+                </a:solidFill>
+                <a:latin typeface="맑은 고딕"/>
+                <a:ea typeface="맑은 고딕"/>
+              </a:rPr>
+              <a:t>, </a:t>
+            </a:r>
+            <a:r>
+              <a:rPr sz="1150" b="0" dirty="0" err="1">
+                <a:solidFill>
+                  <a:srgbClr val="1C1C1E"/>
+                </a:solidFill>
+                <a:latin typeface="맑은 고딕"/>
+                <a:ea typeface="맑은 고딕"/>
+              </a:rPr>
+              <a:t>전국</a:t>
+            </a:r>
+            <a:r>
+              <a:rPr sz="1150" b="0" dirty="0">
+                <a:solidFill>
+                  <a:srgbClr val="1C1C1E"/>
+                </a:solidFill>
+                <a:latin typeface="맑은 고딕"/>
+                <a:ea typeface="맑은 고딕"/>
+              </a:rPr>
+              <a:t> </a:t>
+            </a:r>
+            <a:r>
+              <a:rPr sz="1150" b="0" dirty="0" err="1">
+                <a:solidFill>
+                  <a:srgbClr val="1C1C1E"/>
+                </a:solidFill>
+                <a:latin typeface="맑은 고딕"/>
+                <a:ea typeface="맑은 고딕"/>
+              </a:rPr>
+              <a:t>단위</a:t>
+            </a:r>
+            <a:r>
+              <a:rPr sz="1150" b="0" dirty="0">
+                <a:solidFill>
+                  <a:srgbClr val="1C1C1E"/>
+                </a:solidFill>
+                <a:latin typeface="맑은 고딕"/>
+                <a:ea typeface="맑은 고딕"/>
+              </a:rPr>
+              <a:t> </a:t>
+            </a:r>
+            <a:r>
+              <a:rPr sz="1150" b="0" dirty="0" err="1">
+                <a:solidFill>
+                  <a:srgbClr val="1C1C1E"/>
+                </a:solidFill>
+                <a:latin typeface="맑은 고딕"/>
+                <a:ea typeface="맑은 고딕"/>
+              </a:rPr>
+              <a:t>공개</a:t>
+            </a:r>
+            <a:r>
+              <a:rPr sz="1150" b="0" dirty="0">
+                <a:solidFill>
+                  <a:srgbClr val="1C1C1E"/>
+                </a:solidFill>
+                <a:latin typeface="맑은 고딕"/>
+                <a:ea typeface="맑은 고딕"/>
+              </a:rPr>
+              <a:t> </a:t>
+            </a:r>
+            <a:r>
+              <a:rPr sz="1150" b="0" dirty="0" err="1">
+                <a:solidFill>
+                  <a:srgbClr val="1C1C1E"/>
+                </a:solidFill>
+                <a:latin typeface="맑은 고딕"/>
+                <a:ea typeface="맑은 고딕"/>
+              </a:rPr>
+              <a:t>데이터로</a:t>
+            </a:r>
+            <a:r>
+              <a:rPr sz="1150" b="0" dirty="0">
+                <a:solidFill>
+                  <a:srgbClr val="1C1C1E"/>
+                </a:solidFill>
+                <a:latin typeface="맑은 고딕"/>
+                <a:ea typeface="맑은 고딕"/>
+              </a:rPr>
+              <a:t> </a:t>
+            </a:r>
+            <a:r>
+              <a:rPr sz="1150" b="0" dirty="0" err="1">
+                <a:solidFill>
+                  <a:srgbClr val="1C1C1E"/>
+                </a:solidFill>
+                <a:latin typeface="맑은 고딕"/>
+                <a:ea typeface="맑은 고딕"/>
+              </a:rPr>
+              <a:t>정량</a:t>
+            </a:r>
+            <a:r>
+              <a:rPr sz="1150" b="0" dirty="0">
+                <a:solidFill>
+                  <a:srgbClr val="1C1C1E"/>
+                </a:solidFill>
+                <a:latin typeface="맑은 고딕"/>
+                <a:ea typeface="맑은 고딕"/>
+              </a:rPr>
+              <a:t> </a:t>
+            </a:r>
+            <a:r>
+              <a:rPr sz="1150" b="0" dirty="0" err="1">
+                <a:solidFill>
+                  <a:srgbClr val="1C1C1E"/>
+                </a:solidFill>
+                <a:latin typeface="맑은 고딕"/>
+                <a:ea typeface="맑은 고딕"/>
+              </a:rPr>
+              <a:t>검증된</a:t>
+            </a:r>
+            <a:r>
+              <a:rPr sz="1150" b="0" dirty="0">
+                <a:solidFill>
+                  <a:srgbClr val="1C1C1E"/>
+                </a:solidFill>
+                <a:latin typeface="맑은 고딕"/>
+                <a:ea typeface="맑은 고딕"/>
+              </a:rPr>
+              <a:t> </a:t>
+            </a:r>
+            <a:r>
+              <a:rPr sz="1150" b="0" dirty="0" err="1">
+                <a:solidFill>
+                  <a:srgbClr val="1C1C1E"/>
+                </a:solidFill>
+                <a:latin typeface="맑은 고딕"/>
+                <a:ea typeface="맑은 고딕"/>
+              </a:rPr>
+              <a:t>적이</a:t>
+            </a:r>
+            <a:r>
+              <a:rPr sz="1150" b="0" dirty="0">
+                <a:solidFill>
+                  <a:srgbClr val="1C1C1E"/>
+                </a:solidFill>
+                <a:latin typeface="맑은 고딕"/>
+                <a:ea typeface="맑은 고딕"/>
+              </a:rPr>
+              <a:t> </a:t>
+            </a:r>
+            <a:r>
+              <a:rPr sz="1150" b="0" dirty="0" err="1">
+                <a:solidFill>
+                  <a:srgbClr val="1C1C1E"/>
+                </a:solidFill>
+                <a:latin typeface="맑은 고딕"/>
+                <a:ea typeface="맑은 고딕"/>
+              </a:rPr>
+              <a:t>없다</a:t>
+            </a:r>
+            <a:endParaRPr sz="1150" b="0" dirty="0">
+              <a:solidFill>
+                <a:srgbClr val="1C1C1E"/>
+              </a:solidFill>
+              <a:latin typeface="맑은 고딕"/>
+              <a:ea typeface="맑은 고딕"/>
+            </a:endParaRPr>
           </a:p>
           <a:p>
             <a:pPr marL="160020" indent="-160020">
@@ -15715,14 +17146,274 @@
               </a:spcAft>
             </a:pPr>
             <a:r>
-              <a:rPr sz="1150" b="0">
-                <a:solidFill>
-                  <a:srgbClr val="1C1C1E"/>
-                </a:solidFill>
-                <a:latin typeface="맑은 고딕"/>
-                <a:ea typeface="맑은 고딕"/>
-              </a:rPr>
-              <a:t>• 분석 대상은 취약지라는 현상이 아니라, 취약지를 판정하고 지원하는 제도 그 자체다 (제도 감사 프레임)</a:t>
+              <a:rPr sz="1150" b="0" dirty="0">
+                <a:solidFill>
+                  <a:srgbClr val="1C1C1E"/>
+                </a:solidFill>
+                <a:latin typeface="맑은 고딕"/>
+                <a:ea typeface="맑은 고딕"/>
+              </a:rPr>
+              <a:t>• </a:t>
+            </a:r>
+            <a:r>
+              <a:rPr sz="1150" b="0" dirty="0" err="1">
+                <a:solidFill>
+                  <a:srgbClr val="1C1C1E"/>
+                </a:solidFill>
+                <a:latin typeface="맑은 고딕"/>
+                <a:ea typeface="맑은 고딕"/>
+              </a:rPr>
+              <a:t>분석</a:t>
+            </a:r>
+            <a:r>
+              <a:rPr sz="1150" b="0" dirty="0">
+                <a:solidFill>
+                  <a:srgbClr val="1C1C1E"/>
+                </a:solidFill>
+                <a:latin typeface="맑은 고딕"/>
+                <a:ea typeface="맑은 고딕"/>
+              </a:rPr>
+              <a:t> </a:t>
+            </a:r>
+            <a:r>
+              <a:rPr sz="1150" b="0" dirty="0" err="1">
+                <a:solidFill>
+                  <a:srgbClr val="1C1C1E"/>
+                </a:solidFill>
+                <a:latin typeface="맑은 고딕"/>
+                <a:ea typeface="맑은 고딕"/>
+              </a:rPr>
+              <a:t>대상은</a:t>
+            </a:r>
+            <a:r>
+              <a:rPr sz="1150" b="0" dirty="0">
+                <a:solidFill>
+                  <a:srgbClr val="1C1C1E"/>
+                </a:solidFill>
+                <a:latin typeface="맑은 고딕"/>
+                <a:ea typeface="맑은 고딕"/>
+              </a:rPr>
+              <a:t> </a:t>
+            </a:r>
+            <a:r>
+              <a:rPr sz="1150" b="0" dirty="0" err="1">
+                <a:solidFill>
+                  <a:srgbClr val="1C1C1E"/>
+                </a:solidFill>
+                <a:latin typeface="맑은 고딕"/>
+                <a:ea typeface="맑은 고딕"/>
+              </a:rPr>
+              <a:t>취약지라는</a:t>
+            </a:r>
+            <a:r>
+              <a:rPr sz="1150" b="0" dirty="0">
+                <a:solidFill>
+                  <a:srgbClr val="1C1C1E"/>
+                </a:solidFill>
+                <a:latin typeface="맑은 고딕"/>
+                <a:ea typeface="맑은 고딕"/>
+              </a:rPr>
+              <a:t> </a:t>
+            </a:r>
+            <a:r>
+              <a:rPr sz="1150" b="0" dirty="0" err="1">
+                <a:solidFill>
+                  <a:srgbClr val="1C1C1E"/>
+                </a:solidFill>
+                <a:latin typeface="맑은 고딕"/>
+                <a:ea typeface="맑은 고딕"/>
+              </a:rPr>
+              <a:t>현상이</a:t>
+            </a:r>
+            <a:r>
+              <a:rPr sz="1150" b="0" dirty="0">
+                <a:solidFill>
+                  <a:srgbClr val="1C1C1E"/>
+                </a:solidFill>
+                <a:latin typeface="맑은 고딕"/>
+                <a:ea typeface="맑은 고딕"/>
+              </a:rPr>
+              <a:t> </a:t>
+            </a:r>
+            <a:r>
+              <a:rPr sz="1150" b="0" dirty="0" err="1">
+                <a:solidFill>
+                  <a:srgbClr val="1C1C1E"/>
+                </a:solidFill>
+                <a:latin typeface="맑은 고딕"/>
+                <a:ea typeface="맑은 고딕"/>
+              </a:rPr>
+              <a:t>아니라</a:t>
+            </a:r>
+            <a:r>
+              <a:rPr sz="1150" b="0" dirty="0">
+                <a:solidFill>
+                  <a:srgbClr val="1C1C1E"/>
+                </a:solidFill>
+                <a:latin typeface="맑은 고딕"/>
+                <a:ea typeface="맑은 고딕"/>
+              </a:rPr>
+              <a:t>, </a:t>
+            </a:r>
+            <a:r>
+              <a:rPr sz="1150" b="0" dirty="0" err="1">
+                <a:solidFill>
+                  <a:srgbClr val="1C1C1E"/>
+                </a:solidFill>
+                <a:latin typeface="맑은 고딕"/>
+                <a:ea typeface="맑은 고딕"/>
+              </a:rPr>
+              <a:t>취약지를</a:t>
+            </a:r>
+            <a:r>
+              <a:rPr sz="1150" b="0" dirty="0">
+                <a:solidFill>
+                  <a:srgbClr val="1C1C1E"/>
+                </a:solidFill>
+                <a:latin typeface="맑은 고딕"/>
+                <a:ea typeface="맑은 고딕"/>
+              </a:rPr>
+              <a:t> </a:t>
+            </a:r>
+            <a:r>
+              <a:rPr sz="1150" b="0" dirty="0" err="1">
+                <a:solidFill>
+                  <a:srgbClr val="1C1C1E"/>
+                </a:solidFill>
+                <a:latin typeface="맑은 고딕"/>
+                <a:ea typeface="맑은 고딕"/>
+              </a:rPr>
+              <a:t>판정하고</a:t>
+            </a:r>
+            <a:r>
+              <a:rPr sz="1150" b="0" dirty="0">
+                <a:solidFill>
+                  <a:srgbClr val="1C1C1E"/>
+                </a:solidFill>
+                <a:latin typeface="맑은 고딕"/>
+                <a:ea typeface="맑은 고딕"/>
+              </a:rPr>
+              <a:t> </a:t>
+            </a:r>
+            <a:r>
+              <a:rPr sz="1150" b="0" dirty="0" err="1">
+                <a:solidFill>
+                  <a:srgbClr val="1C1C1E"/>
+                </a:solidFill>
+                <a:latin typeface="맑은 고딕"/>
+                <a:ea typeface="맑은 고딕"/>
+              </a:rPr>
+              <a:t>지원하는</a:t>
+            </a:r>
+            <a:r>
+              <a:rPr sz="1150" b="0" dirty="0">
+                <a:solidFill>
+                  <a:srgbClr val="1C1C1E"/>
+                </a:solidFill>
+                <a:latin typeface="맑은 고딕"/>
+                <a:ea typeface="맑은 고딕"/>
+              </a:rPr>
+              <a:t> </a:t>
+            </a:r>
+            <a:r>
+              <a:rPr sz="1150" b="0" dirty="0" err="1">
+                <a:solidFill>
+                  <a:srgbClr val="1C1C1E"/>
+                </a:solidFill>
+                <a:latin typeface="맑은 고딕"/>
+                <a:ea typeface="맑은 고딕"/>
+              </a:rPr>
+              <a:t>제도</a:t>
+            </a:r>
+            <a:r>
+              <a:rPr sz="1150" b="0" dirty="0">
+                <a:solidFill>
+                  <a:srgbClr val="1C1C1E"/>
+                </a:solidFill>
+                <a:latin typeface="맑은 고딕"/>
+                <a:ea typeface="맑은 고딕"/>
+              </a:rPr>
+              <a:t> 그 </a:t>
+            </a:r>
+            <a:r>
+              <a:rPr sz="1150" b="0" dirty="0" err="1">
+                <a:solidFill>
+                  <a:srgbClr val="1C1C1E"/>
+                </a:solidFill>
+                <a:latin typeface="맑은 고딕"/>
+                <a:ea typeface="맑은 고딕"/>
+              </a:rPr>
+              <a:t>자체다</a:t>
+            </a:r>
+            <a:r>
+              <a:rPr sz="1150" b="0" dirty="0">
+                <a:solidFill>
+                  <a:srgbClr val="1C1C1E"/>
+                </a:solidFill>
+                <a:latin typeface="맑은 고딕"/>
+                <a:ea typeface="맑은 고딕"/>
+              </a:rPr>
+              <a:t> (</a:t>
+            </a:r>
+            <a:r>
+              <a:rPr sz="1150" b="0" dirty="0" err="1">
+                <a:solidFill>
+                  <a:srgbClr val="1C1C1E"/>
+                </a:solidFill>
+                <a:latin typeface="맑은 고딕"/>
+                <a:ea typeface="맑은 고딕"/>
+              </a:rPr>
+              <a:t>제도</a:t>
+            </a:r>
+            <a:r>
+              <a:rPr sz="1150" b="0" dirty="0">
+                <a:solidFill>
+                  <a:srgbClr val="1C1C1E"/>
+                </a:solidFill>
+                <a:latin typeface="맑은 고딕"/>
+                <a:ea typeface="맑은 고딕"/>
+              </a:rPr>
+              <a:t> </a:t>
+            </a:r>
+            <a:r>
+              <a:rPr sz="1150" b="0" dirty="0" err="1">
+                <a:solidFill>
+                  <a:srgbClr val="1C1C1E"/>
+                </a:solidFill>
+                <a:latin typeface="맑은 고딕"/>
+                <a:ea typeface="맑은 고딕"/>
+              </a:rPr>
+              <a:t>감사</a:t>
+            </a:r>
+            <a:r>
+              <a:rPr sz="1150" b="0" dirty="0">
+                <a:solidFill>
+                  <a:srgbClr val="1C1C1E"/>
+                </a:solidFill>
+                <a:latin typeface="맑은 고딕"/>
+                <a:ea typeface="맑은 고딕"/>
+              </a:rPr>
+              <a:t> </a:t>
+            </a:r>
+            <a:r>
+              <a:rPr sz="1150" b="0" dirty="0" err="1">
+                <a:solidFill>
+                  <a:srgbClr val="1C1C1E"/>
+                </a:solidFill>
+                <a:latin typeface="맑은 고딕"/>
+                <a:ea typeface="맑은 고딕"/>
+              </a:rPr>
+              <a:t>프레임</a:t>
+            </a:r>
+            <a:r>
+              <a:rPr sz="1150" b="0" dirty="0">
+                <a:solidFill>
+                  <a:srgbClr val="1C1C1E"/>
+                </a:solidFill>
+                <a:latin typeface="맑은 고딕"/>
+                <a:ea typeface="맑은 고딕"/>
+              </a:rPr>
+              <a:t>)</a:t>
             </a:r>
           </a:p>
           <a:p>
@@ -15735,15 +17426,252 @@
               </a:spcAft>
             </a:pPr>
             <a:r>
-              <a:rPr sz="1150" b="0">
-                <a:solidFill>
-                  <a:srgbClr val="1C1C1E"/>
-                </a:solidFill>
-                <a:latin typeface="맑은 고딕"/>
-                <a:ea typeface="맑은 고딕"/>
-              </a:rPr>
-              <a:t>• 모든 판단 기준과 임계값은 정부 자신의 문서·데이터에서 가져와 실현 가능성을 확보할 계획이다</a:t>
-            </a:r>
+              <a:rPr sz="1150" b="0" dirty="0">
+                <a:solidFill>
+                  <a:srgbClr val="1C1C1E"/>
+                </a:solidFill>
+                <a:latin typeface="맑은 고딕"/>
+                <a:ea typeface="맑은 고딕"/>
+              </a:rPr>
+              <a:t>• </a:t>
+            </a:r>
+            <a:r>
+              <a:rPr sz="1150" b="0" dirty="0" err="1">
+                <a:solidFill>
+                  <a:srgbClr val="1C1C1E"/>
+                </a:solidFill>
+                <a:latin typeface="맑은 고딕"/>
+                <a:ea typeface="맑은 고딕"/>
+              </a:rPr>
+              <a:t>모든</a:t>
+            </a:r>
+            <a:r>
+              <a:rPr sz="1150" b="0" dirty="0">
+                <a:solidFill>
+                  <a:srgbClr val="1C1C1E"/>
+                </a:solidFill>
+                <a:latin typeface="맑은 고딕"/>
+                <a:ea typeface="맑은 고딕"/>
+              </a:rPr>
+              <a:t> </a:t>
+            </a:r>
+            <a:r>
+              <a:rPr sz="1150" b="0" dirty="0" err="1">
+                <a:solidFill>
+                  <a:srgbClr val="1C1C1E"/>
+                </a:solidFill>
+                <a:latin typeface="맑은 고딕"/>
+                <a:ea typeface="맑은 고딕"/>
+              </a:rPr>
+              <a:t>판단</a:t>
+            </a:r>
+            <a:r>
+              <a:rPr sz="1150" b="0" dirty="0">
+                <a:solidFill>
+                  <a:srgbClr val="1C1C1E"/>
+                </a:solidFill>
+                <a:latin typeface="맑은 고딕"/>
+                <a:ea typeface="맑은 고딕"/>
+              </a:rPr>
+              <a:t> </a:t>
+            </a:r>
+            <a:r>
+              <a:rPr sz="1150" b="0" dirty="0" err="1">
+                <a:solidFill>
+                  <a:srgbClr val="1C1C1E"/>
+                </a:solidFill>
+                <a:latin typeface="맑은 고딕"/>
+                <a:ea typeface="맑은 고딕"/>
+              </a:rPr>
+              <a:t>기준과</a:t>
+            </a:r>
+            <a:r>
+              <a:rPr sz="1150" b="0" dirty="0">
+                <a:solidFill>
+                  <a:srgbClr val="1C1C1E"/>
+                </a:solidFill>
+                <a:latin typeface="맑은 고딕"/>
+                <a:ea typeface="맑은 고딕"/>
+              </a:rPr>
+              <a:t> </a:t>
+            </a:r>
+            <a:r>
+              <a:rPr sz="1150" b="0" dirty="0" err="1">
+                <a:solidFill>
+                  <a:srgbClr val="1C1C1E"/>
+                </a:solidFill>
+                <a:latin typeface="맑은 고딕"/>
+                <a:ea typeface="맑은 고딕"/>
+              </a:rPr>
+              <a:t>임계값은</a:t>
+            </a:r>
+            <a:r>
+              <a:rPr sz="1150" b="0" dirty="0">
+                <a:solidFill>
+                  <a:srgbClr val="1C1C1E"/>
+                </a:solidFill>
+                <a:latin typeface="맑은 고딕"/>
+                <a:ea typeface="맑은 고딕"/>
+              </a:rPr>
+              <a:t> </a:t>
+            </a:r>
+            <a:r>
+              <a:rPr sz="1150" b="0" dirty="0" err="1">
+                <a:solidFill>
+                  <a:srgbClr val="1C1C1E"/>
+                </a:solidFill>
+                <a:latin typeface="맑은 고딕"/>
+                <a:ea typeface="맑은 고딕"/>
+              </a:rPr>
+              <a:t>정부</a:t>
+            </a:r>
+            <a:r>
+              <a:rPr sz="1150" b="0" dirty="0">
+                <a:solidFill>
+                  <a:srgbClr val="1C1C1E"/>
+                </a:solidFill>
+                <a:latin typeface="맑은 고딕"/>
+                <a:ea typeface="맑은 고딕"/>
+              </a:rPr>
+              <a:t> </a:t>
+            </a:r>
+            <a:r>
+              <a:rPr sz="1150" b="0" dirty="0" err="1">
+                <a:solidFill>
+                  <a:srgbClr val="1C1C1E"/>
+                </a:solidFill>
+                <a:latin typeface="맑은 고딕"/>
+                <a:ea typeface="맑은 고딕"/>
+              </a:rPr>
+              <a:t>자신의</a:t>
+            </a:r>
+            <a:r>
+              <a:rPr sz="1150" b="0" dirty="0">
+                <a:solidFill>
+                  <a:srgbClr val="1C1C1E"/>
+                </a:solidFill>
+                <a:latin typeface="맑은 고딕"/>
+                <a:ea typeface="맑은 고딕"/>
+              </a:rPr>
+              <a:t> </a:t>
+            </a:r>
+            <a:r>
+              <a:rPr sz="1150" b="0" dirty="0" err="1">
+                <a:solidFill>
+                  <a:srgbClr val="1C1C1E"/>
+                </a:solidFill>
+                <a:latin typeface="맑은 고딕"/>
+                <a:ea typeface="맑은 고딕"/>
+              </a:rPr>
+              <a:t>문서·데이터에서</a:t>
+            </a:r>
+            <a:r>
+              <a:rPr sz="1150" b="0" dirty="0">
+                <a:solidFill>
+                  <a:srgbClr val="1C1C1E"/>
+                </a:solidFill>
+                <a:latin typeface="맑은 고딕"/>
+                <a:ea typeface="맑은 고딕"/>
+              </a:rPr>
+              <a:t> </a:t>
+            </a:r>
+            <a:r>
+              <a:rPr sz="1150" b="0" dirty="0" err="1">
+                <a:solidFill>
+                  <a:srgbClr val="1C1C1E"/>
+                </a:solidFill>
+                <a:latin typeface="맑은 고딕"/>
+                <a:ea typeface="맑은 고딕"/>
+              </a:rPr>
+              <a:t>가져와</a:t>
+            </a:r>
+            <a:r>
+              <a:rPr sz="1150" b="0" dirty="0">
+                <a:solidFill>
+                  <a:srgbClr val="1C1C1E"/>
+                </a:solidFill>
+                <a:latin typeface="맑은 고딕"/>
+                <a:ea typeface="맑은 고딕"/>
+              </a:rPr>
+              <a:t> </a:t>
+            </a:r>
+            <a:r>
+              <a:rPr sz="1150" b="0" dirty="0" err="1">
+                <a:solidFill>
+                  <a:srgbClr val="1C1C1E"/>
+                </a:solidFill>
+                <a:latin typeface="맑은 고딕"/>
+                <a:ea typeface="맑은 고딕"/>
+              </a:rPr>
+              <a:t>실현</a:t>
+            </a:r>
+            <a:r>
+              <a:rPr sz="1150" b="0" dirty="0">
+                <a:solidFill>
+                  <a:srgbClr val="1C1C1E"/>
+                </a:solidFill>
+                <a:latin typeface="맑은 고딕"/>
+                <a:ea typeface="맑은 고딕"/>
+              </a:rPr>
+              <a:t> </a:t>
+            </a:r>
+            <a:r>
+              <a:rPr sz="1150" b="0" dirty="0" err="1">
+                <a:solidFill>
+                  <a:srgbClr val="1C1C1E"/>
+                </a:solidFill>
+                <a:latin typeface="맑은 고딕"/>
+                <a:ea typeface="맑은 고딕"/>
+              </a:rPr>
+              <a:t>가능성을</a:t>
+            </a:r>
+            <a:r>
+              <a:rPr sz="1150" b="0" dirty="0">
+                <a:solidFill>
+                  <a:srgbClr val="1C1C1E"/>
+                </a:solidFill>
+                <a:latin typeface="맑은 고딕"/>
+                <a:ea typeface="맑은 고딕"/>
+              </a:rPr>
+              <a:t> </a:t>
+            </a:r>
+            <a:r>
+              <a:rPr sz="1150" b="0" dirty="0" err="1">
+                <a:solidFill>
+                  <a:srgbClr val="1C1C1E"/>
+                </a:solidFill>
+                <a:latin typeface="맑은 고딕"/>
+                <a:ea typeface="맑은 고딕"/>
+              </a:rPr>
+              <a:t>확보할</a:t>
+            </a:r>
+            <a:r>
+              <a:rPr sz="1150" b="0" dirty="0">
+                <a:solidFill>
+                  <a:srgbClr val="1C1C1E"/>
+                </a:solidFill>
+                <a:latin typeface="맑은 고딕"/>
+                <a:ea typeface="맑은 고딕"/>
+              </a:rPr>
+              <a:t> </a:t>
+            </a:r>
+            <a:r>
+              <a:rPr sz="1150" b="0" dirty="0" err="1">
+                <a:solidFill>
+                  <a:srgbClr val="1C1C1E"/>
+                </a:solidFill>
+                <a:latin typeface="맑은 고딕"/>
+                <a:ea typeface="맑은 고딕"/>
+              </a:rPr>
+              <a:t>계획이다</a:t>
+            </a:r>
+            <a:endParaRPr sz="1150" b="0" dirty="0">
+              <a:solidFill>
+                <a:srgbClr val="1C1C1E"/>
+              </a:solidFill>
+              <a:latin typeface="맑은 고딕"/>
+              <a:ea typeface="맑은 고딕"/>
+            </a:endParaRPr>
           </a:p>
         </p:txBody>
       </p:sp>

--- a/04_제출물/데이터분석_계획서.pptx
+++ b/04_제출물/데이터분석_계획서.pptx
@@ -3686,7 +3686,7 @@
                 <a:latin typeface="맑은 고딕"/>
                 <a:ea typeface="맑은 고딕"/>
               </a:rPr>
-              <a:t>분석 설계 ① 지정 감사 (RQ1·RQ2)</a:t>
+              <a:t>분석 설계 ① 지정 감사 (Q1·Q2)</a:t>
             </a:r>
           </a:p>
         </p:txBody>
@@ -4594,7 +4594,7 @@
                 <a:latin typeface="맑은 고딕"/>
                 <a:ea typeface="맑은 고딕"/>
               </a:rPr>
-              <a:t>분석 설계 ② 배분 진단 (RQ3)</a:t>
+              <a:t>분석 설계 ② 배분 진단 (Q3)</a:t>
             </a:r>
           </a:p>
         </p:txBody>
@@ -5757,7 +5757,7 @@
                 <a:latin typeface="맑은 고딕"/>
                 <a:ea typeface="맑은 고딕"/>
               </a:rPr>
-              <a:t>분석 설계 ③ 처방 — 우선순위·유형 배정 모형 (RQ4)</a:t>
+              <a:t>분석 설계 ③ 처방 — 우선순위·유형 배정 모형 (Q4)</a:t>
             </a:r>
           </a:p>
         </p:txBody>
@@ -7352,7 +7352,7 @@
                           <a:latin typeface="맑은 고딕"/>
                           <a:ea typeface="맑은 고딕"/>
                         </a:rPr>
-                        <a:t>제도 파이프라인 문제화, RQ 4개, 접근성 2축 이론, 사전 명시된 판단 기준</a:t>
+                        <a:t>제도 파이프라인 문제화, Q 4개, 접근성 2축 이론, 사전 명시된 판단 기준</a:t>
                       </a:r>
                     </a:p>
                   </a:txBody>
@@ -10209,7 +10209,7 @@
                 <a:latin typeface="맑은 고딕"/>
                 <a:ea typeface="맑은 고딕"/>
               </a:rPr>
-              <a:t>10   ① </a:t>
+              <a:t>10   ① 지정 감사 (Q1·Q2)</a:t>
             </a:r>
             <a:r>
               <a:rPr sz="1150" b="0" dirty="0" err="1">
@@ -10219,7 +10219,7 @@
                 <a:latin typeface="맑은 고딕"/>
                 <a:ea typeface="맑은 고딕"/>
               </a:rPr>
-              <a:t>지정</a:t>
+              <a:t/>
             </a:r>
             <a:r>
               <a:rPr sz="1150" b="0" dirty="0">
@@ -10229,7 +10229,7 @@
                 <a:latin typeface="맑은 고딕"/>
                 <a:ea typeface="맑은 고딕"/>
               </a:rPr>
-              <a:t> </a:t>
+              <a:t/>
             </a:r>
             <a:r>
               <a:rPr sz="1150" b="0" dirty="0" err="1">
@@ -10239,7 +10239,7 @@
                 <a:latin typeface="맑은 고딕"/>
                 <a:ea typeface="맑은 고딕"/>
               </a:rPr>
-              <a:t>감사</a:t>
+              <a:t/>
             </a:r>
             <a:r>
               <a:rPr sz="1150" b="0" dirty="0">
@@ -10249,7 +10249,7 @@
                 <a:latin typeface="맑은 고딕"/>
                 <a:ea typeface="맑은 고딕"/>
               </a:rPr>
-              <a:t> (RQ1·RQ2)</a:t>
+              <a:t/>
             </a:r>
           </a:p>
           <a:p>
@@ -10269,7 +10269,7 @@
                 <a:latin typeface="맑은 고딕"/>
                 <a:ea typeface="맑은 고딕"/>
               </a:rPr>
-              <a:t>11   ② </a:t>
+              <a:t>11   ② 배분 진단 (Q3)</a:t>
             </a:r>
             <a:r>
               <a:rPr sz="1150" b="0" dirty="0" err="1">
@@ -10279,7 +10279,7 @@
                 <a:latin typeface="맑은 고딕"/>
                 <a:ea typeface="맑은 고딕"/>
               </a:rPr>
-              <a:t>배분</a:t>
+              <a:t/>
             </a:r>
             <a:r>
               <a:rPr sz="1150" b="0" dirty="0">
@@ -10289,7 +10289,7 @@
                 <a:latin typeface="맑은 고딕"/>
                 <a:ea typeface="맑은 고딕"/>
               </a:rPr>
-              <a:t> </a:t>
+              <a:t/>
             </a:r>
             <a:r>
               <a:rPr sz="1150" b="0" dirty="0" err="1">
@@ -10299,7 +10299,7 @@
                 <a:latin typeface="맑은 고딕"/>
                 <a:ea typeface="맑은 고딕"/>
               </a:rPr>
-              <a:t>진단</a:t>
+              <a:t/>
             </a:r>
             <a:r>
               <a:rPr sz="1150" b="0" dirty="0">
@@ -10309,7 +10309,7 @@
                 <a:latin typeface="맑은 고딕"/>
                 <a:ea typeface="맑은 고딕"/>
               </a:rPr>
-              <a:t> (RQ3)</a:t>
+              <a:t/>
             </a:r>
           </a:p>
           <a:p>
@@ -10329,7 +10329,7 @@
                 <a:latin typeface="맑은 고딕"/>
                 <a:ea typeface="맑은 고딕"/>
               </a:rPr>
-              <a:t>12   ③ </a:t>
+              <a:t>12   ③ 처방 모형 (Q4)</a:t>
             </a:r>
             <a:r>
               <a:rPr sz="1150" b="0" dirty="0" err="1">
@@ -10339,7 +10339,7 @@
                 <a:latin typeface="맑은 고딕"/>
                 <a:ea typeface="맑은 고딕"/>
               </a:rPr>
-              <a:t>처방</a:t>
+              <a:t/>
             </a:r>
             <a:r>
               <a:rPr sz="1150" b="0" dirty="0">
@@ -10349,7 +10349,7 @@
                 <a:latin typeface="맑은 고딕"/>
                 <a:ea typeface="맑은 고딕"/>
               </a:rPr>
-              <a:t> </a:t>
+              <a:t/>
             </a:r>
             <a:r>
               <a:rPr sz="1150" b="0" dirty="0" err="1">
@@ -10359,7 +10359,7 @@
                 <a:latin typeface="맑은 고딕"/>
                 <a:ea typeface="맑은 고딕"/>
               </a:rPr>
-              <a:t>모형</a:t>
+              <a:t/>
             </a:r>
             <a:r>
               <a:rPr sz="1150" b="0" dirty="0">
@@ -10369,7 +10369,7 @@
                 <a:latin typeface="맑은 고딕"/>
                 <a:ea typeface="맑은 고딕"/>
               </a:rPr>
-              <a:t> (RQ4)</a:t>
+              <a:t/>
             </a:r>
           </a:p>
         </p:txBody>
@@ -13452,7 +13452,7 @@
                 <a:latin typeface="맑은 고딕"/>
                 <a:ea typeface="맑은 고딕"/>
               </a:rPr>
-              <a:t>• 즉 이 </a:t>
+              <a:t>• 즉 이 제도에서 "취약"은 처음부터 끝까지 오직 거리와 시간으로 정의된다 — 이 점이 이 프로젝트의 첫 번째 표적이 된다</a:t>
             </a:r>
             <a:r>
               <a:rPr sz="1100" b="0" dirty="0" err="1">
@@ -13462,7 +13462,7 @@
                 <a:latin typeface="맑은 고딕"/>
                 <a:ea typeface="맑은 고딕"/>
               </a:rPr>
-              <a:t>제도에서</a:t>
+              <a:t/>
             </a:r>
             <a:r>
               <a:rPr sz="1100" b="0" dirty="0">
@@ -13472,7 +13472,7 @@
                 <a:latin typeface="맑은 고딕"/>
                 <a:ea typeface="맑은 고딕"/>
               </a:rPr>
-              <a:t> "</a:t>
+              <a:t/>
             </a:r>
             <a:r>
               <a:rPr sz="1100" b="0" dirty="0" err="1">
@@ -13482,7 +13482,7 @@
                 <a:latin typeface="맑은 고딕"/>
                 <a:ea typeface="맑은 고딕"/>
               </a:rPr>
-              <a:t>취약"은</a:t>
+              <a:t/>
             </a:r>
             <a:r>
               <a:rPr sz="1100" b="0" dirty="0">
@@ -13492,7 +13492,7 @@
                 <a:latin typeface="맑은 고딕"/>
                 <a:ea typeface="맑은 고딕"/>
               </a:rPr>
-              <a:t> </a:t>
+              <a:t/>
             </a:r>
             <a:r>
               <a:rPr sz="1100" b="0" dirty="0" err="1">
@@ -13502,7 +13502,7 @@
                 <a:latin typeface="맑은 고딕"/>
                 <a:ea typeface="맑은 고딕"/>
               </a:rPr>
-              <a:t>처음부터</a:t>
+              <a:t/>
             </a:r>
             <a:r>
               <a:rPr sz="1100" b="0" dirty="0">
@@ -13512,7 +13512,7 @@
                 <a:latin typeface="맑은 고딕"/>
                 <a:ea typeface="맑은 고딕"/>
               </a:rPr>
-              <a:t> </a:t>
+              <a:t/>
             </a:r>
             <a:r>
               <a:rPr sz="1100" b="0" dirty="0" err="1">
@@ -13522,7 +13522,7 @@
                 <a:latin typeface="맑은 고딕"/>
                 <a:ea typeface="맑은 고딕"/>
               </a:rPr>
-              <a:t>끝까지</a:t>
+              <a:t/>
             </a:r>
             <a:r>
               <a:rPr sz="1100" b="0" dirty="0">
@@ -13532,7 +13532,7 @@
                 <a:latin typeface="맑은 고딕"/>
                 <a:ea typeface="맑은 고딕"/>
               </a:rPr>
-              <a:t> </a:t>
+              <a:t/>
             </a:r>
             <a:r>
               <a:rPr lang="ko-KR" altLang="en-US" sz="1100" b="0" dirty="0">
@@ -13542,7 +13542,7 @@
                 <a:latin typeface="맑은 고딕"/>
                 <a:ea typeface="맑은 고딕"/>
               </a:rPr>
-              <a:t>오직 </a:t>
+              <a:t/>
             </a:r>
             <a:r>
               <a:rPr sz="1100" b="0" dirty="0" err="1">
@@ -13552,7 +13552,7 @@
                 <a:latin typeface="맑은 고딕"/>
                 <a:ea typeface="맑은 고딕"/>
               </a:rPr>
-              <a:t>거리와</a:t>
+              <a:t/>
             </a:r>
             <a:r>
               <a:rPr sz="1100" b="0" dirty="0">
@@ -13562,7 +13562,7 @@
                 <a:latin typeface="맑은 고딕"/>
                 <a:ea typeface="맑은 고딕"/>
               </a:rPr>
-              <a:t> </a:t>
+              <a:t/>
             </a:r>
             <a:r>
               <a:rPr sz="1100" b="0" dirty="0" err="1">
@@ -13572,7 +13572,7 @@
                 <a:latin typeface="맑은 고딕"/>
                 <a:ea typeface="맑은 고딕"/>
               </a:rPr>
-              <a:t>시간으로</a:t>
+              <a:t/>
             </a:r>
             <a:r>
               <a:rPr sz="1100" b="0" dirty="0">
@@ -13582,7 +13582,7 @@
                 <a:latin typeface="맑은 고딕"/>
                 <a:ea typeface="맑은 고딕"/>
               </a:rPr>
-              <a:t> </a:t>
+              <a:t/>
             </a:r>
             <a:r>
               <a:rPr sz="1100" b="0" dirty="0" err="1">
@@ -13592,7 +13592,7 @@
                 <a:latin typeface="맑은 고딕"/>
                 <a:ea typeface="맑은 고딕"/>
               </a:rPr>
-              <a:t>정의된다</a:t>
+              <a:t/>
             </a:r>
             <a:r>
               <a:rPr sz="1100" b="0" dirty="0">
@@ -13602,7 +13602,7 @@
                 <a:latin typeface="맑은 고딕"/>
                 <a:ea typeface="맑은 고딕"/>
               </a:rPr>
-              <a:t> — 이 </a:t>
+              <a:t/>
             </a:r>
             <a:r>
               <a:rPr sz="1100" b="0" dirty="0" err="1">
@@ -13612,7 +13612,7 @@
                 <a:latin typeface="맑은 고딕"/>
                 <a:ea typeface="맑은 고딕"/>
               </a:rPr>
-              <a:t>점이</a:t>
+              <a:t/>
             </a:r>
             <a:r>
               <a:rPr sz="1100" b="0" dirty="0">
@@ -13622,7 +13622,7 @@
                 <a:latin typeface="맑은 고딕"/>
                 <a:ea typeface="맑은 고딕"/>
               </a:rPr>
-              <a:t> 본 </a:t>
+              <a:t/>
             </a:r>
             <a:r>
               <a:rPr sz="1100" b="0" dirty="0" err="1">
@@ -13632,7 +13632,7 @@
                 <a:latin typeface="맑은 고딕"/>
                 <a:ea typeface="맑은 고딕"/>
               </a:rPr>
-              <a:t>연구의</a:t>
+              <a:t/>
             </a:r>
             <a:r>
               <a:rPr sz="1100" b="0" dirty="0">
@@ -13642,7 +13642,7 @@
                 <a:latin typeface="맑은 고딕"/>
                 <a:ea typeface="맑은 고딕"/>
               </a:rPr>
-              <a:t> 첫 </a:t>
+              <a:t/>
             </a:r>
             <a:r>
               <a:rPr sz="1100" b="0" dirty="0" err="1">
@@ -13652,7 +13652,7 @@
                 <a:latin typeface="맑은 고딕"/>
                 <a:ea typeface="맑은 고딕"/>
               </a:rPr>
-              <a:t>번째</a:t>
+              <a:t/>
             </a:r>
             <a:r>
               <a:rPr sz="1100" b="0" dirty="0">
@@ -13662,7 +13662,7 @@
                 <a:latin typeface="맑은 고딕"/>
                 <a:ea typeface="맑은 고딕"/>
               </a:rPr>
-              <a:t> </a:t>
+              <a:t/>
             </a:r>
             <a:r>
               <a:rPr sz="1100" b="0" dirty="0" err="1">
@@ -13672,7 +13672,7 @@
                 <a:latin typeface="맑은 고딕"/>
                 <a:ea typeface="맑은 고딕"/>
               </a:rPr>
-              <a:t>표적이</a:t>
+              <a:t/>
             </a:r>
             <a:r>
               <a:rPr sz="1100" b="0" dirty="0">
@@ -13682,7 +13682,7 @@
                 <a:latin typeface="맑은 고딕"/>
                 <a:ea typeface="맑은 고딕"/>
               </a:rPr>
-              <a:t> </a:t>
+              <a:t/>
             </a:r>
             <a:r>
               <a:rPr sz="1100" b="0" dirty="0" err="1">
@@ -13692,7 +13692,7 @@
                 <a:latin typeface="맑은 고딕"/>
                 <a:ea typeface="맑은 고딕"/>
               </a:rPr>
-              <a:t>된다</a:t>
+              <a:t/>
             </a:r>
             <a:endParaRPr sz="1100" b="0" dirty="0">
               <a:solidFill>
@@ -16554,6 +16554,123 @@
                 <a:latin typeface="맑은 고딕"/>
                 <a:ea typeface="맑은 고딕"/>
               </a:rPr>
+              <a:t>• 15년 누적 57개소, 2025년 분만 신규는 전국 1개소 — 나눠 줄 것이 적을수록 순서는 오히려 더 중요해진다</a:t>
+            </a:r>
+            <a:r>
+              <a:rPr sz="1150" b="0" dirty="0" err="1">
+                <a:solidFill>
+                  <a:srgbClr val="1C1C1E"/>
+                </a:solidFill>
+                <a:latin typeface="맑은 고딕"/>
+                <a:ea typeface="맑은 고딕"/>
+              </a:rPr>
+              <a:t/>
+            </a:r>
+            <a:r>
+              <a:rPr sz="1150" b="0" dirty="0">
+                <a:solidFill>
+                  <a:srgbClr val="1C1C1E"/>
+                </a:solidFill>
+                <a:latin typeface="맑은 고딕"/>
+                <a:ea typeface="맑은 고딕"/>
+              </a:rPr>
+              <a:t/>
+            </a:r>
+            <a:r>
+              <a:rPr sz="1150" b="0" dirty="0" err="1">
+                <a:solidFill>
+                  <a:srgbClr val="1C1C1E"/>
+                </a:solidFill>
+                <a:latin typeface="맑은 고딕"/>
+                <a:ea typeface="맑은 고딕"/>
+              </a:rPr>
+              <a:t/>
+            </a:r>
+            <a:r>
+              <a:rPr sz="1150" b="0" dirty="0">
+                <a:solidFill>
+                  <a:srgbClr val="1C1C1E"/>
+                </a:solidFill>
+                <a:latin typeface="맑은 고딕"/>
+                <a:ea typeface="맑은 고딕"/>
+              </a:rPr>
+              <a:t/>
+            </a:r>
+            <a:r>
+              <a:rPr sz="1150" b="0" dirty="0" err="1">
+                <a:solidFill>
+                  <a:srgbClr val="1C1C1E"/>
+                </a:solidFill>
+                <a:latin typeface="맑은 고딕"/>
+                <a:ea typeface="맑은 고딕"/>
+              </a:rPr>
+              <a:t/>
+            </a:r>
+            <a:r>
+              <a:rPr sz="1150" b="0" dirty="0">
+                <a:solidFill>
+                  <a:srgbClr val="1C1C1E"/>
+                </a:solidFill>
+                <a:latin typeface="맑은 고딕"/>
+                <a:ea typeface="맑은 고딕"/>
+              </a:rPr>
+              <a:t/>
+            </a:r>
+            <a:r>
+              <a:rPr sz="1150" b="0" dirty="0" err="1">
+                <a:solidFill>
+                  <a:srgbClr val="1C1C1E"/>
+                </a:solidFill>
+                <a:latin typeface="맑은 고딕"/>
+                <a:ea typeface="맑은 고딕"/>
+              </a:rPr>
+              <a:t/>
+            </a:r>
+            <a:r>
+              <a:rPr sz="1150" b="0" dirty="0">
+                <a:solidFill>
+                  <a:srgbClr val="1C1C1E"/>
+                </a:solidFill>
+                <a:latin typeface="맑은 고딕"/>
+                <a:ea typeface="맑은 고딕"/>
+              </a:rPr>
+              <a:t/>
+            </a:r>
+            <a:r>
+              <a:rPr sz="1150" b="0" dirty="0" err="1">
+                <a:solidFill>
+                  <a:srgbClr val="1C1C1E"/>
+                </a:solidFill>
+                <a:latin typeface="맑은 고딕"/>
+                <a:ea typeface="맑은 고딕"/>
+              </a:rPr>
+              <a:t/>
+            </a:r>
+            <a:endParaRPr sz="1150" b="0" dirty="0">
+              <a:solidFill>
+                <a:srgbClr val="1C1C1E"/>
+              </a:solidFill>
+              <a:latin typeface="맑은 고딕"/>
+              <a:ea typeface="맑은 고딕"/>
+            </a:endParaRPr>
+          </a:p>
+          <a:p>
+            <a:pPr>
+              <a:lnSpc>
+                <a:spcPct val="114000"/>
+              </a:lnSpc>
+              <a:spcAft>
+                <a:spcPts val="200"/>
+              </a:spcAft>
+            </a:pPr>
+            <a:r>
+              <a:rPr sz="1150" b="0" dirty="0">
+                <a:solidFill>
+                  <a:srgbClr val="1C1C1E"/>
+                </a:solidFill>
+                <a:latin typeface="맑은 고딕"/>
+                <a:ea typeface="맑은 고딕"/>
+              </a:rPr>
               <a:t>→ </a:t>
             </a:r>
             <a:r>
@@ -17433,7 +17550,7 @@
                 <a:latin typeface="맑은 고딕"/>
                 <a:ea typeface="맑은 고딕"/>
               </a:rPr>
-              <a:t>• </a:t>
+              <a:t>• 모든 판단 기준과 임계값은 정부 자신의 문서·데이터에서 가져와 실현 가능성을 확보할 계획이다</a:t>
             </a:r>
             <a:r>
               <a:rPr sz="1150" b="0" dirty="0" err="1">
@@ -17443,7 +17560,7 @@
                 <a:latin typeface="맑은 고딕"/>
                 <a:ea typeface="맑은 고딕"/>
               </a:rPr>
-              <a:t>모든</a:t>
+              <a:t/>
             </a:r>
             <a:r>
               <a:rPr sz="1150" b="0" dirty="0">
@@ -17453,7 +17570,7 @@
                 <a:latin typeface="맑은 고딕"/>
                 <a:ea typeface="맑은 고딕"/>
               </a:rPr>
-              <a:t> </a:t>
+              <a:t/>
             </a:r>
             <a:r>
               <a:rPr sz="1150" b="0" dirty="0" err="1">
@@ -17463,7 +17580,7 @@
                 <a:latin typeface="맑은 고딕"/>
                 <a:ea typeface="맑은 고딕"/>
               </a:rPr>
-              <a:t>판단</a:t>
+              <a:t/>
             </a:r>
             <a:r>
               <a:rPr sz="1150" b="0" dirty="0">
@@ -17473,7 +17590,7 @@
                 <a:latin typeface="맑은 고딕"/>
                 <a:ea typeface="맑은 고딕"/>
               </a:rPr>
-              <a:t> </a:t>
+              <a:t/>
             </a:r>
             <a:r>
               <a:rPr sz="1150" b="0" dirty="0" err="1">
@@ -17483,7 +17600,7 @@
                 <a:latin typeface="맑은 고딕"/>
                 <a:ea typeface="맑은 고딕"/>
               </a:rPr>
-              <a:t>기준과</a:t>
+              <a:t/>
             </a:r>
             <a:r>
               <a:rPr sz="1150" b="0" dirty="0">
@@ -17493,7 +17610,7 @@
                 <a:latin typeface="맑은 고딕"/>
                 <a:ea typeface="맑은 고딕"/>
               </a:rPr>
-              <a:t> </a:t>
+              <a:t/>
             </a:r>
             <a:r>
               <a:rPr sz="1150" b="0" dirty="0" err="1">
@@ -17503,7 +17620,7 @@
                 <a:latin typeface="맑은 고딕"/>
                 <a:ea typeface="맑은 고딕"/>
               </a:rPr>
-              <a:t>임계값은</a:t>
+              <a:t/>
             </a:r>
             <a:r>
               <a:rPr sz="1150" b="0" dirty="0">
@@ -17513,7 +17630,7 @@
                 <a:latin typeface="맑은 고딕"/>
                 <a:ea typeface="맑은 고딕"/>
               </a:rPr>
-              <a:t> </a:t>
+              <a:t/>
             </a:r>
             <a:r>
               <a:rPr sz="1150" b="0" dirty="0" err="1">
@@ -17523,7 +17640,7 @@
                 <a:latin typeface="맑은 고딕"/>
                 <a:ea typeface="맑은 고딕"/>
               </a:rPr>
-              <a:t>정부</a:t>
+              <a:t/>
             </a:r>
             <a:r>
               <a:rPr sz="1150" b="0" dirty="0">
@@ -17533,7 +17650,7 @@
                 <a:latin typeface="맑은 고딕"/>
                 <a:ea typeface="맑은 고딕"/>
               </a:rPr>
-              <a:t> </a:t>
+              <a:t/>
             </a:r>
             <a:r>
               <a:rPr sz="1150" b="0" dirty="0" err="1">
@@ -17543,7 +17660,7 @@
                 <a:latin typeface="맑은 고딕"/>
                 <a:ea typeface="맑은 고딕"/>
               </a:rPr>
-              <a:t>자신의</a:t>
+              <a:t/>
             </a:r>
             <a:r>
               <a:rPr sz="1150" b="0" dirty="0">
@@ -17553,7 +17670,7 @@
                 <a:latin typeface="맑은 고딕"/>
                 <a:ea typeface="맑은 고딕"/>
               </a:rPr>
-              <a:t> </a:t>
+              <a:t/>
             </a:r>
             <a:r>
               <a:rPr sz="1150" b="0" dirty="0" err="1">
@@ -17563,7 +17680,7 @@
                 <a:latin typeface="맑은 고딕"/>
                 <a:ea typeface="맑은 고딕"/>
               </a:rPr>
-              <a:t>문서·데이터에서</a:t>
+              <a:t/>
             </a:r>
             <a:r>
               <a:rPr sz="1150" b="0" dirty="0">
@@ -17573,7 +17690,7 @@
                 <a:latin typeface="맑은 고딕"/>
                 <a:ea typeface="맑은 고딕"/>
               </a:rPr>
-              <a:t> </a:t>
+              <a:t/>
             </a:r>
             <a:r>
               <a:rPr sz="1150" b="0" dirty="0" err="1">
@@ -17583,7 +17700,7 @@
                 <a:latin typeface="맑은 고딕"/>
                 <a:ea typeface="맑은 고딕"/>
               </a:rPr>
-              <a:t>가져와</a:t>
+              <a:t/>
             </a:r>
             <a:r>
               <a:rPr sz="1150" b="0" dirty="0">
@@ -17593,7 +17710,7 @@
                 <a:latin typeface="맑은 고딕"/>
                 <a:ea typeface="맑은 고딕"/>
               </a:rPr>
-              <a:t> </a:t>
+              <a:t/>
             </a:r>
             <a:r>
               <a:rPr sz="1150" b="0" dirty="0" err="1">
@@ -17603,7 +17720,7 @@
                 <a:latin typeface="맑은 고딕"/>
                 <a:ea typeface="맑은 고딕"/>
               </a:rPr>
-              <a:t>실현</a:t>
+              <a:t/>
             </a:r>
             <a:r>
               <a:rPr sz="1150" b="0" dirty="0">
@@ -17613,7 +17730,7 @@
                 <a:latin typeface="맑은 고딕"/>
                 <a:ea typeface="맑은 고딕"/>
               </a:rPr>
-              <a:t> </a:t>
+              <a:t/>
             </a:r>
             <a:r>
               <a:rPr sz="1150" b="0" dirty="0" err="1">
@@ -17623,7 +17740,7 @@
                 <a:latin typeface="맑은 고딕"/>
                 <a:ea typeface="맑은 고딕"/>
               </a:rPr>
-              <a:t>가능성을</a:t>
+              <a:t/>
             </a:r>
             <a:r>
               <a:rPr sz="1150" b="0" dirty="0">
@@ -17633,7 +17750,7 @@
                 <a:latin typeface="맑은 고딕"/>
                 <a:ea typeface="맑은 고딕"/>
               </a:rPr>
-              <a:t> </a:t>
+              <a:t/>
             </a:r>
             <a:r>
               <a:rPr sz="1150" b="0" dirty="0" err="1">
@@ -17643,7 +17760,7 @@
                 <a:latin typeface="맑은 고딕"/>
                 <a:ea typeface="맑은 고딕"/>
               </a:rPr>
-              <a:t>확보할</a:t>
+              <a:t/>
             </a:r>
             <a:r>
               <a:rPr sz="1150" b="0" dirty="0">
@@ -17653,7 +17770,7 @@
                 <a:latin typeface="맑은 고딕"/>
                 <a:ea typeface="맑은 고딕"/>
               </a:rPr>
-              <a:t> </a:t>
+              <a:t/>
             </a:r>
             <a:r>
               <a:rPr sz="1150" b="0" dirty="0" err="1">
@@ -17663,7 +17780,7 @@
                 <a:latin typeface="맑은 고딕"/>
                 <a:ea typeface="맑은 고딕"/>
               </a:rPr>
-              <a:t>계획이다</a:t>
+              <a:t/>
             </a:r>
             <a:endParaRPr sz="1150" b="0" dirty="0">
               <a:solidFill>
@@ -17844,7 +17961,7 @@
                 <a:latin typeface="맑은 고딕"/>
                 <a:ea typeface="맑은 고딕"/>
               </a:rPr>
-              <a:t>연구 질문 (RQ) — 감사의 네 가지 물음</a:t>
+              <a:t>핵심 질문 (Q) — 감사의 네 가지 물음</a:t>
             </a:r>
           </a:p>
         </p:txBody>
@@ -18142,7 +18259,7 @@
                 <a:latin typeface="맑은 고딕"/>
                 <a:ea typeface="맑은 고딕"/>
               </a:rPr>
-              <a:t>RQ1 · 지정의 검증</a:t>
+              <a:t>Q1 · 지정의 검증</a:t>
             </a:r>
           </a:p>
           <a:p>
@@ -18341,7 +18458,7 @@
                 <a:latin typeface="맑은 고딕"/>
                 <a:ea typeface="맑은 고딕"/>
               </a:rPr>
-              <a:t>RQ2 · 사각지대 탐지</a:t>
+              <a:t>Q2 · 사각지대 탐지</a:t>
             </a:r>
           </a:p>
           <a:p>
@@ -18540,7 +18657,7 @@
                 <a:latin typeface="맑은 고딕"/>
                 <a:ea typeface="맑은 고딕"/>
               </a:rPr>
-              <a:t>RQ3 · 배분의 진단</a:t>
+              <a:t>Q3 · 배분의 진단</a:t>
             </a:r>
           </a:p>
           <a:p>
@@ -18739,7 +18856,7 @@
                 <a:latin typeface="맑은 고딕"/>
                 <a:ea typeface="맑은 고딕"/>
               </a:rPr>
-              <a:t>RQ4 · 처방과 대조</a:t>
+              <a:t>Q4 · 처방과 대조</a:t>
             </a:r>
           </a:p>
           <a:p>
@@ -18822,7 +18939,7 @@
                 <a:latin typeface="맑은 고딕"/>
                 <a:ea typeface="맑은 고딕"/>
               </a:rPr>
-              <a:t>RQ1·2는 지정을, RQ3·4는 배분을 본다. 앞의 둘로 "규칙이 무엇을 보는가"를 확정해야 뒤의 둘에서 "그 규칙대로 나눠지고 있는가"를 물을 수 있다.</a:t>
+              <a:t>Q1·2는 지정을, Q3·4는 배분을 본다. 앞의 둘로 "규칙이 무엇을 보는가"를 확정해야 뒤의 둘에서 "그 규칙대로 나눠지고 있는가"를 물을 수 있다.</a:t>
             </a:r>
           </a:p>
           <a:p>
@@ -19016,7 +19133,7 @@
                 <a:latin typeface="맑은 고딕"/>
                 <a:ea typeface="맑은 고딕"/>
               </a:rPr>
-              <a:t>이론적 고찰 — 접근성의 두 축과 연구의 차별점</a:t>
+              <a:t>이론적 고찰 — 접근성의 두 축과 이 프로젝트의 차별점</a:t>
             </a:r>
           </a:p>
         </p:txBody>
@@ -19620,7 +19737,7 @@
                           <a:latin typeface="맑은 고딕"/>
                           <a:ea typeface="맑은 고딕"/>
                         </a:rPr>
-                        <a:t>본 연구의 계획</a:t>
+                        <a:t>이 프로젝트의 계획</a:t>
                       </a:r>
                     </a:p>
                   </a:txBody>

--- a/04_제출물/데이터분석_계획서.pptx
+++ b/04_제출물/데이터분석_계획서.pptx
@@ -10211,46 +10211,6 @@
               </a:rPr>
               <a:t>10   ① 지정 감사 (Q1·Q2)</a:t>
             </a:r>
-            <a:r>
-              <a:rPr sz="1150" b="0" dirty="0" err="1">
-                <a:solidFill>
-                  <a:srgbClr val="1C1C1E"/>
-                </a:solidFill>
-                <a:latin typeface="맑은 고딕"/>
-                <a:ea typeface="맑은 고딕"/>
-              </a:rPr>
-              <a:t/>
-            </a:r>
-            <a:r>
-              <a:rPr sz="1150" b="0" dirty="0">
-                <a:solidFill>
-                  <a:srgbClr val="1C1C1E"/>
-                </a:solidFill>
-                <a:latin typeface="맑은 고딕"/>
-                <a:ea typeface="맑은 고딕"/>
-              </a:rPr>
-              <a:t/>
-            </a:r>
-            <a:r>
-              <a:rPr sz="1150" b="0" dirty="0" err="1">
-                <a:solidFill>
-                  <a:srgbClr val="1C1C1E"/>
-                </a:solidFill>
-                <a:latin typeface="맑은 고딕"/>
-                <a:ea typeface="맑은 고딕"/>
-              </a:rPr>
-              <a:t/>
-            </a:r>
-            <a:r>
-              <a:rPr sz="1150" b="0" dirty="0">
-                <a:solidFill>
-                  <a:srgbClr val="1C1C1E"/>
-                </a:solidFill>
-                <a:latin typeface="맑은 고딕"/>
-                <a:ea typeface="맑은 고딕"/>
-              </a:rPr>
-              <a:t/>
-            </a:r>
           </a:p>
           <a:p>
             <a:pPr>
@@ -10271,46 +10231,6 @@
               </a:rPr>
               <a:t>11   ② 배분 진단 (Q3)</a:t>
             </a:r>
-            <a:r>
-              <a:rPr sz="1150" b="0" dirty="0" err="1">
-                <a:solidFill>
-                  <a:srgbClr val="1C1C1E"/>
-                </a:solidFill>
-                <a:latin typeface="맑은 고딕"/>
-                <a:ea typeface="맑은 고딕"/>
-              </a:rPr>
-              <a:t/>
-            </a:r>
-            <a:r>
-              <a:rPr sz="1150" b="0" dirty="0">
-                <a:solidFill>
-                  <a:srgbClr val="1C1C1E"/>
-                </a:solidFill>
-                <a:latin typeface="맑은 고딕"/>
-                <a:ea typeface="맑은 고딕"/>
-              </a:rPr>
-              <a:t/>
-            </a:r>
-            <a:r>
-              <a:rPr sz="1150" b="0" dirty="0" err="1">
-                <a:solidFill>
-                  <a:srgbClr val="1C1C1E"/>
-                </a:solidFill>
-                <a:latin typeface="맑은 고딕"/>
-                <a:ea typeface="맑은 고딕"/>
-              </a:rPr>
-              <a:t/>
-            </a:r>
-            <a:r>
-              <a:rPr sz="1150" b="0" dirty="0">
-                <a:solidFill>
-                  <a:srgbClr val="1C1C1E"/>
-                </a:solidFill>
-                <a:latin typeface="맑은 고딕"/>
-                <a:ea typeface="맑은 고딕"/>
-              </a:rPr>
-              <a:t/>
-            </a:r>
           </a:p>
           <a:p>
             <a:pPr>
@@ -10330,46 +10250,6 @@
                 <a:ea typeface="맑은 고딕"/>
               </a:rPr>
               <a:t>12   ③ 처방 모형 (Q4)</a:t>
-            </a:r>
-            <a:r>
-              <a:rPr sz="1150" b="0" dirty="0" err="1">
-                <a:solidFill>
-                  <a:srgbClr val="1C1C1E"/>
-                </a:solidFill>
-                <a:latin typeface="맑은 고딕"/>
-                <a:ea typeface="맑은 고딕"/>
-              </a:rPr>
-              <a:t/>
-            </a:r>
-            <a:r>
-              <a:rPr sz="1150" b="0" dirty="0">
-                <a:solidFill>
-                  <a:srgbClr val="1C1C1E"/>
-                </a:solidFill>
-                <a:latin typeface="맑은 고딕"/>
-                <a:ea typeface="맑은 고딕"/>
-              </a:rPr>
-              <a:t/>
-            </a:r>
-            <a:r>
-              <a:rPr sz="1150" b="0" dirty="0" err="1">
-                <a:solidFill>
-                  <a:srgbClr val="1C1C1E"/>
-                </a:solidFill>
-                <a:latin typeface="맑은 고딕"/>
-                <a:ea typeface="맑은 고딕"/>
-              </a:rPr>
-              <a:t/>
-            </a:r>
-            <a:r>
-              <a:rPr sz="1150" b="0" dirty="0">
-                <a:solidFill>
-                  <a:srgbClr val="1C1C1E"/>
-                </a:solidFill>
-                <a:latin typeface="맑은 고딕"/>
-                <a:ea typeface="맑은 고딕"/>
-              </a:rPr>
-              <a:t/>
             </a:r>
           </a:p>
         </p:txBody>
@@ -13454,253 +13334,6 @@
               </a:rPr>
               <a:t>• 즉 이 제도에서 "취약"은 처음부터 끝까지 오직 거리와 시간으로 정의된다 — 이 점이 이 프로젝트의 첫 번째 표적이 된다</a:t>
             </a:r>
-            <a:r>
-              <a:rPr sz="1100" b="0" dirty="0" err="1">
-                <a:solidFill>
-                  <a:srgbClr val="1C1C1E"/>
-                </a:solidFill>
-                <a:latin typeface="맑은 고딕"/>
-                <a:ea typeface="맑은 고딕"/>
-              </a:rPr>
-              <a:t/>
-            </a:r>
-            <a:r>
-              <a:rPr sz="1100" b="0" dirty="0">
-                <a:solidFill>
-                  <a:srgbClr val="1C1C1E"/>
-                </a:solidFill>
-                <a:latin typeface="맑은 고딕"/>
-                <a:ea typeface="맑은 고딕"/>
-              </a:rPr>
-              <a:t/>
-            </a:r>
-            <a:r>
-              <a:rPr sz="1100" b="0" dirty="0" err="1">
-                <a:solidFill>
-                  <a:srgbClr val="1C1C1E"/>
-                </a:solidFill>
-                <a:latin typeface="맑은 고딕"/>
-                <a:ea typeface="맑은 고딕"/>
-              </a:rPr>
-              <a:t/>
-            </a:r>
-            <a:r>
-              <a:rPr sz="1100" b="0" dirty="0">
-                <a:solidFill>
-                  <a:srgbClr val="1C1C1E"/>
-                </a:solidFill>
-                <a:latin typeface="맑은 고딕"/>
-                <a:ea typeface="맑은 고딕"/>
-              </a:rPr>
-              <a:t/>
-            </a:r>
-            <a:r>
-              <a:rPr sz="1100" b="0" dirty="0" err="1">
-                <a:solidFill>
-                  <a:srgbClr val="1C1C1E"/>
-                </a:solidFill>
-                <a:latin typeface="맑은 고딕"/>
-                <a:ea typeface="맑은 고딕"/>
-              </a:rPr>
-              <a:t/>
-            </a:r>
-            <a:r>
-              <a:rPr sz="1100" b="0" dirty="0">
-                <a:solidFill>
-                  <a:srgbClr val="1C1C1E"/>
-                </a:solidFill>
-                <a:latin typeface="맑은 고딕"/>
-                <a:ea typeface="맑은 고딕"/>
-              </a:rPr>
-              <a:t/>
-            </a:r>
-            <a:r>
-              <a:rPr sz="1100" b="0" dirty="0" err="1">
-                <a:solidFill>
-                  <a:srgbClr val="1C1C1E"/>
-                </a:solidFill>
-                <a:latin typeface="맑은 고딕"/>
-                <a:ea typeface="맑은 고딕"/>
-              </a:rPr>
-              <a:t/>
-            </a:r>
-            <a:r>
-              <a:rPr sz="1100" b="0" dirty="0">
-                <a:solidFill>
-                  <a:srgbClr val="1C1C1E"/>
-                </a:solidFill>
-                <a:latin typeface="맑은 고딕"/>
-                <a:ea typeface="맑은 고딕"/>
-              </a:rPr>
-              <a:t/>
-            </a:r>
-            <a:r>
-              <a:rPr lang="ko-KR" altLang="en-US" sz="1100" b="0" dirty="0">
-                <a:solidFill>
-                  <a:srgbClr val="1C1C1E"/>
-                </a:solidFill>
-                <a:latin typeface="맑은 고딕"/>
-                <a:ea typeface="맑은 고딕"/>
-              </a:rPr>
-              <a:t/>
-            </a:r>
-            <a:r>
-              <a:rPr sz="1100" b="0" dirty="0" err="1">
-                <a:solidFill>
-                  <a:srgbClr val="1C1C1E"/>
-                </a:solidFill>
-                <a:latin typeface="맑은 고딕"/>
-                <a:ea typeface="맑은 고딕"/>
-              </a:rPr>
-              <a:t/>
-            </a:r>
-            <a:r>
-              <a:rPr sz="1100" b="0" dirty="0">
-                <a:solidFill>
-                  <a:srgbClr val="1C1C1E"/>
-                </a:solidFill>
-                <a:latin typeface="맑은 고딕"/>
-                <a:ea typeface="맑은 고딕"/>
-              </a:rPr>
-              <a:t/>
-            </a:r>
-            <a:r>
-              <a:rPr sz="1100" b="0" dirty="0" err="1">
-                <a:solidFill>
-                  <a:srgbClr val="1C1C1E"/>
-                </a:solidFill>
-                <a:latin typeface="맑은 고딕"/>
-                <a:ea typeface="맑은 고딕"/>
-              </a:rPr>
-              <a:t/>
-            </a:r>
-            <a:r>
-              <a:rPr sz="1100" b="0" dirty="0">
-                <a:solidFill>
-                  <a:srgbClr val="1C1C1E"/>
-                </a:solidFill>
-                <a:latin typeface="맑은 고딕"/>
-                <a:ea typeface="맑은 고딕"/>
-              </a:rPr>
-              <a:t/>
-            </a:r>
-            <a:r>
-              <a:rPr sz="1100" b="0" dirty="0" err="1">
-                <a:solidFill>
-                  <a:srgbClr val="1C1C1E"/>
-                </a:solidFill>
-                <a:latin typeface="맑은 고딕"/>
-                <a:ea typeface="맑은 고딕"/>
-              </a:rPr>
-              <a:t/>
-            </a:r>
-            <a:r>
-              <a:rPr sz="1100" b="0" dirty="0">
-                <a:solidFill>
-                  <a:srgbClr val="1C1C1E"/>
-                </a:solidFill>
-                <a:latin typeface="맑은 고딕"/>
-                <a:ea typeface="맑은 고딕"/>
-              </a:rPr>
-              <a:t/>
-            </a:r>
-            <a:r>
-              <a:rPr sz="1100" b="0" dirty="0" err="1">
-                <a:solidFill>
-                  <a:srgbClr val="1C1C1E"/>
-                </a:solidFill>
-                <a:latin typeface="맑은 고딕"/>
-                <a:ea typeface="맑은 고딕"/>
-              </a:rPr>
-              <a:t/>
-            </a:r>
-            <a:r>
-              <a:rPr sz="1100" b="0" dirty="0">
-                <a:solidFill>
-                  <a:srgbClr val="1C1C1E"/>
-                </a:solidFill>
-                <a:latin typeface="맑은 고딕"/>
-                <a:ea typeface="맑은 고딕"/>
-              </a:rPr>
-              <a:t/>
-            </a:r>
-            <a:r>
-              <a:rPr sz="1100" b="0" dirty="0" err="1">
-                <a:solidFill>
-                  <a:srgbClr val="1C1C1E"/>
-                </a:solidFill>
-                <a:latin typeface="맑은 고딕"/>
-                <a:ea typeface="맑은 고딕"/>
-              </a:rPr>
-              <a:t/>
-            </a:r>
-            <a:r>
-              <a:rPr sz="1100" b="0" dirty="0">
-                <a:solidFill>
-                  <a:srgbClr val="1C1C1E"/>
-                </a:solidFill>
-                <a:latin typeface="맑은 고딕"/>
-                <a:ea typeface="맑은 고딕"/>
-              </a:rPr>
-              <a:t/>
-            </a:r>
-            <a:r>
-              <a:rPr sz="1100" b="0" dirty="0" err="1">
-                <a:solidFill>
-                  <a:srgbClr val="1C1C1E"/>
-                </a:solidFill>
-                <a:latin typeface="맑은 고딕"/>
-                <a:ea typeface="맑은 고딕"/>
-              </a:rPr>
-              <a:t/>
-            </a:r>
-            <a:r>
-              <a:rPr sz="1100" b="0" dirty="0">
-                <a:solidFill>
-                  <a:srgbClr val="1C1C1E"/>
-                </a:solidFill>
-                <a:latin typeface="맑은 고딕"/>
-                <a:ea typeface="맑은 고딕"/>
-              </a:rPr>
-              <a:t/>
-            </a:r>
-            <a:r>
-              <a:rPr sz="1100" b="0" dirty="0" err="1">
-                <a:solidFill>
-                  <a:srgbClr val="1C1C1E"/>
-                </a:solidFill>
-                <a:latin typeface="맑은 고딕"/>
-                <a:ea typeface="맑은 고딕"/>
-              </a:rPr>
-              <a:t/>
-            </a:r>
-            <a:r>
-              <a:rPr sz="1100" b="0" dirty="0">
-                <a:solidFill>
-                  <a:srgbClr val="1C1C1E"/>
-                </a:solidFill>
-                <a:latin typeface="맑은 고딕"/>
-                <a:ea typeface="맑은 고딕"/>
-              </a:rPr>
-              <a:t/>
-            </a:r>
-            <a:r>
-              <a:rPr sz="1100" b="0" dirty="0" err="1">
-                <a:solidFill>
-                  <a:srgbClr val="1C1C1E"/>
-                </a:solidFill>
-                <a:latin typeface="맑은 고딕"/>
-                <a:ea typeface="맑은 고딕"/>
-              </a:rPr>
-              <a:t/>
-            </a:r>
-            <a:endParaRPr sz="1100" b="0" dirty="0">
-              <a:solidFill>
-                <a:srgbClr val="1C1C1E"/>
-              </a:solidFill>
-              <a:latin typeface="맑은 고딕"/>
-              <a:ea typeface="맑은 고딕"/>
-            </a:endParaRPr>
           </a:p>
           <a:p>
             <a:pPr marL="160020" indent="-160020">
@@ -16556,103 +16189,6 @@
               </a:rPr>
               <a:t>• 15년 누적 57개소, 2025년 분만 신규는 전국 1개소 — 나눠 줄 것이 적을수록 순서는 오히려 더 중요해진다</a:t>
             </a:r>
-            <a:r>
-              <a:rPr sz="1150" b="0" dirty="0" err="1">
-                <a:solidFill>
-                  <a:srgbClr val="1C1C1E"/>
-                </a:solidFill>
-                <a:latin typeface="맑은 고딕"/>
-                <a:ea typeface="맑은 고딕"/>
-              </a:rPr>
-              <a:t/>
-            </a:r>
-            <a:r>
-              <a:rPr sz="1150" b="0" dirty="0">
-                <a:solidFill>
-                  <a:srgbClr val="1C1C1E"/>
-                </a:solidFill>
-                <a:latin typeface="맑은 고딕"/>
-                <a:ea typeface="맑은 고딕"/>
-              </a:rPr>
-              <a:t/>
-            </a:r>
-            <a:r>
-              <a:rPr sz="1150" b="0" dirty="0" err="1">
-                <a:solidFill>
-                  <a:srgbClr val="1C1C1E"/>
-                </a:solidFill>
-                <a:latin typeface="맑은 고딕"/>
-                <a:ea typeface="맑은 고딕"/>
-              </a:rPr>
-              <a:t/>
-            </a:r>
-            <a:r>
-              <a:rPr sz="1150" b="0" dirty="0">
-                <a:solidFill>
-                  <a:srgbClr val="1C1C1E"/>
-                </a:solidFill>
-                <a:latin typeface="맑은 고딕"/>
-                <a:ea typeface="맑은 고딕"/>
-              </a:rPr>
-              <a:t/>
-            </a:r>
-            <a:r>
-              <a:rPr sz="1150" b="0" dirty="0" err="1">
-                <a:solidFill>
-                  <a:srgbClr val="1C1C1E"/>
-                </a:solidFill>
-                <a:latin typeface="맑은 고딕"/>
-                <a:ea typeface="맑은 고딕"/>
-              </a:rPr>
-              <a:t/>
-            </a:r>
-            <a:r>
-              <a:rPr sz="1150" b="0" dirty="0">
-                <a:solidFill>
-                  <a:srgbClr val="1C1C1E"/>
-                </a:solidFill>
-                <a:latin typeface="맑은 고딕"/>
-                <a:ea typeface="맑은 고딕"/>
-              </a:rPr>
-              <a:t/>
-            </a:r>
-            <a:r>
-              <a:rPr sz="1150" b="0" dirty="0" err="1">
-                <a:solidFill>
-                  <a:srgbClr val="1C1C1E"/>
-                </a:solidFill>
-                <a:latin typeface="맑은 고딕"/>
-                <a:ea typeface="맑은 고딕"/>
-              </a:rPr>
-              <a:t/>
-            </a:r>
-            <a:r>
-              <a:rPr sz="1150" b="0" dirty="0">
-                <a:solidFill>
-                  <a:srgbClr val="1C1C1E"/>
-                </a:solidFill>
-                <a:latin typeface="맑은 고딕"/>
-                <a:ea typeface="맑은 고딕"/>
-              </a:rPr>
-              <a:t/>
-            </a:r>
-            <a:r>
-              <a:rPr sz="1150" b="0" dirty="0" err="1">
-                <a:solidFill>
-                  <a:srgbClr val="1C1C1E"/>
-                </a:solidFill>
-                <a:latin typeface="맑은 고딕"/>
-                <a:ea typeface="맑은 고딕"/>
-              </a:rPr>
-              <a:t/>
-            </a:r>
-            <a:endParaRPr sz="1150" b="0" dirty="0">
-              <a:solidFill>
-                <a:srgbClr val="1C1C1E"/>
-              </a:solidFill>
-              <a:latin typeface="맑은 고딕"/>
-              <a:ea typeface="맑은 고딕"/>
-            </a:endParaRPr>
           </a:p>
           <a:p>
             <a:pPr>
@@ -17552,243 +17088,6 @@
               </a:rPr>
               <a:t>• 모든 판단 기준과 임계값은 정부 자신의 문서·데이터에서 가져와 실현 가능성을 확보할 계획이다</a:t>
             </a:r>
-            <a:r>
-              <a:rPr sz="1150" b="0" dirty="0" err="1">
-                <a:solidFill>
-                  <a:srgbClr val="1C1C1E"/>
-                </a:solidFill>
-                <a:latin typeface="맑은 고딕"/>
-                <a:ea typeface="맑은 고딕"/>
-              </a:rPr>
-              <a:t/>
-            </a:r>
-            <a:r>
-              <a:rPr sz="1150" b="0" dirty="0">
-                <a:solidFill>
-                  <a:srgbClr val="1C1C1E"/>
-                </a:solidFill>
-                <a:latin typeface="맑은 고딕"/>
-                <a:ea typeface="맑은 고딕"/>
-              </a:rPr>
-              <a:t/>
-            </a:r>
-            <a:r>
-              <a:rPr sz="1150" b="0" dirty="0" err="1">
-                <a:solidFill>
-                  <a:srgbClr val="1C1C1E"/>
-                </a:solidFill>
-                <a:latin typeface="맑은 고딕"/>
-                <a:ea typeface="맑은 고딕"/>
-              </a:rPr>
-              <a:t/>
-            </a:r>
-            <a:r>
-              <a:rPr sz="1150" b="0" dirty="0">
-                <a:solidFill>
-                  <a:srgbClr val="1C1C1E"/>
-                </a:solidFill>
-                <a:latin typeface="맑은 고딕"/>
-                <a:ea typeface="맑은 고딕"/>
-              </a:rPr>
-              <a:t/>
-            </a:r>
-            <a:r>
-              <a:rPr sz="1150" b="0" dirty="0" err="1">
-                <a:solidFill>
-                  <a:srgbClr val="1C1C1E"/>
-                </a:solidFill>
-                <a:latin typeface="맑은 고딕"/>
-                <a:ea typeface="맑은 고딕"/>
-              </a:rPr>
-              <a:t/>
-            </a:r>
-            <a:r>
-              <a:rPr sz="1150" b="0" dirty="0">
-                <a:solidFill>
-                  <a:srgbClr val="1C1C1E"/>
-                </a:solidFill>
-                <a:latin typeface="맑은 고딕"/>
-                <a:ea typeface="맑은 고딕"/>
-              </a:rPr>
-              <a:t/>
-            </a:r>
-            <a:r>
-              <a:rPr sz="1150" b="0" dirty="0" err="1">
-                <a:solidFill>
-                  <a:srgbClr val="1C1C1E"/>
-                </a:solidFill>
-                <a:latin typeface="맑은 고딕"/>
-                <a:ea typeface="맑은 고딕"/>
-              </a:rPr>
-              <a:t/>
-            </a:r>
-            <a:r>
-              <a:rPr sz="1150" b="0" dirty="0">
-                <a:solidFill>
-                  <a:srgbClr val="1C1C1E"/>
-                </a:solidFill>
-                <a:latin typeface="맑은 고딕"/>
-                <a:ea typeface="맑은 고딕"/>
-              </a:rPr>
-              <a:t/>
-            </a:r>
-            <a:r>
-              <a:rPr sz="1150" b="0" dirty="0" err="1">
-                <a:solidFill>
-                  <a:srgbClr val="1C1C1E"/>
-                </a:solidFill>
-                <a:latin typeface="맑은 고딕"/>
-                <a:ea typeface="맑은 고딕"/>
-              </a:rPr>
-              <a:t/>
-            </a:r>
-            <a:r>
-              <a:rPr sz="1150" b="0" dirty="0">
-                <a:solidFill>
-                  <a:srgbClr val="1C1C1E"/>
-                </a:solidFill>
-                <a:latin typeface="맑은 고딕"/>
-                <a:ea typeface="맑은 고딕"/>
-              </a:rPr>
-              <a:t/>
-            </a:r>
-            <a:r>
-              <a:rPr sz="1150" b="0" dirty="0" err="1">
-                <a:solidFill>
-                  <a:srgbClr val="1C1C1E"/>
-                </a:solidFill>
-                <a:latin typeface="맑은 고딕"/>
-                <a:ea typeface="맑은 고딕"/>
-              </a:rPr>
-              <a:t/>
-            </a:r>
-            <a:r>
-              <a:rPr sz="1150" b="0" dirty="0">
-                <a:solidFill>
-                  <a:srgbClr val="1C1C1E"/>
-                </a:solidFill>
-                <a:latin typeface="맑은 고딕"/>
-                <a:ea typeface="맑은 고딕"/>
-              </a:rPr>
-              <a:t/>
-            </a:r>
-            <a:r>
-              <a:rPr sz="1150" b="0" dirty="0" err="1">
-                <a:solidFill>
-                  <a:srgbClr val="1C1C1E"/>
-                </a:solidFill>
-                <a:latin typeface="맑은 고딕"/>
-                <a:ea typeface="맑은 고딕"/>
-              </a:rPr>
-              <a:t/>
-            </a:r>
-            <a:r>
-              <a:rPr sz="1150" b="0" dirty="0">
-                <a:solidFill>
-                  <a:srgbClr val="1C1C1E"/>
-                </a:solidFill>
-                <a:latin typeface="맑은 고딕"/>
-                <a:ea typeface="맑은 고딕"/>
-              </a:rPr>
-              <a:t/>
-            </a:r>
-            <a:r>
-              <a:rPr sz="1150" b="0" dirty="0" err="1">
-                <a:solidFill>
-                  <a:srgbClr val="1C1C1E"/>
-                </a:solidFill>
-                <a:latin typeface="맑은 고딕"/>
-                <a:ea typeface="맑은 고딕"/>
-              </a:rPr>
-              <a:t/>
-            </a:r>
-            <a:r>
-              <a:rPr sz="1150" b="0" dirty="0">
-                <a:solidFill>
-                  <a:srgbClr val="1C1C1E"/>
-                </a:solidFill>
-                <a:latin typeface="맑은 고딕"/>
-                <a:ea typeface="맑은 고딕"/>
-              </a:rPr>
-              <a:t/>
-            </a:r>
-            <a:r>
-              <a:rPr sz="1150" b="0" dirty="0" err="1">
-                <a:solidFill>
-                  <a:srgbClr val="1C1C1E"/>
-                </a:solidFill>
-                <a:latin typeface="맑은 고딕"/>
-                <a:ea typeface="맑은 고딕"/>
-              </a:rPr>
-              <a:t/>
-            </a:r>
-            <a:r>
-              <a:rPr sz="1150" b="0" dirty="0">
-                <a:solidFill>
-                  <a:srgbClr val="1C1C1E"/>
-                </a:solidFill>
-                <a:latin typeface="맑은 고딕"/>
-                <a:ea typeface="맑은 고딕"/>
-              </a:rPr>
-              <a:t/>
-            </a:r>
-            <a:r>
-              <a:rPr sz="1150" b="0" dirty="0" err="1">
-                <a:solidFill>
-                  <a:srgbClr val="1C1C1E"/>
-                </a:solidFill>
-                <a:latin typeface="맑은 고딕"/>
-                <a:ea typeface="맑은 고딕"/>
-              </a:rPr>
-              <a:t/>
-            </a:r>
-            <a:r>
-              <a:rPr sz="1150" b="0" dirty="0">
-                <a:solidFill>
-                  <a:srgbClr val="1C1C1E"/>
-                </a:solidFill>
-                <a:latin typeface="맑은 고딕"/>
-                <a:ea typeface="맑은 고딕"/>
-              </a:rPr>
-              <a:t/>
-            </a:r>
-            <a:r>
-              <a:rPr sz="1150" b="0" dirty="0" err="1">
-                <a:solidFill>
-                  <a:srgbClr val="1C1C1E"/>
-                </a:solidFill>
-                <a:latin typeface="맑은 고딕"/>
-                <a:ea typeface="맑은 고딕"/>
-              </a:rPr>
-              <a:t/>
-            </a:r>
-            <a:r>
-              <a:rPr sz="1150" b="0" dirty="0">
-                <a:solidFill>
-                  <a:srgbClr val="1C1C1E"/>
-                </a:solidFill>
-                <a:latin typeface="맑은 고딕"/>
-                <a:ea typeface="맑은 고딕"/>
-              </a:rPr>
-              <a:t/>
-            </a:r>
-            <a:r>
-              <a:rPr sz="1150" b="0" dirty="0" err="1">
-                <a:solidFill>
-                  <a:srgbClr val="1C1C1E"/>
-                </a:solidFill>
-                <a:latin typeface="맑은 고딕"/>
-                <a:ea typeface="맑은 고딕"/>
-              </a:rPr>
-              <a:t/>
-            </a:r>
-            <a:endParaRPr sz="1150" b="0" dirty="0">
-              <a:solidFill>
-                <a:srgbClr val="1C1C1E"/>
-              </a:solidFill>
-              <a:latin typeface="맑은 고딕"/>
-              <a:ea typeface="맑은 고딕"/>
-            </a:endParaRPr>
           </a:p>
         </p:txBody>
       </p:sp>
@@ -17931,8 +17230,8 @@
         </p:nvSpPr>
         <p:spPr>
           <a:xfrm>
-            <a:off x="960120" y="274320"/>
-            <a:ext cx="9692640" cy="685800"/>
+            <a:off x="960120" y="399564"/>
+            <a:ext cx="9692640" cy="435312"/>
           </a:xfrm>
           <a:prstGeom prst="rect">
             <a:avLst/>
@@ -17954,15 +17253,72 @@
               </a:spcAft>
             </a:pPr>
             <a:r>
-              <a:rPr sz="2150" b="1">
-                <a:solidFill>
-                  <a:srgbClr val="1C1C1E"/>
-                </a:solidFill>
-                <a:latin typeface="맑은 고딕"/>
-                <a:ea typeface="맑은 고딕"/>
-              </a:rPr>
-              <a:t>핵심 질문 (Q) — 감사의 네 가지 물음</a:t>
-            </a:r>
+              <a:rPr sz="2150" b="1" dirty="0" err="1">
+                <a:solidFill>
+                  <a:srgbClr val="1C1C1E"/>
+                </a:solidFill>
+                <a:latin typeface="맑은 고딕"/>
+                <a:ea typeface="맑은 고딕"/>
+              </a:rPr>
+              <a:t>핵심</a:t>
+            </a:r>
+            <a:r>
+              <a:rPr sz="2150" b="1" dirty="0">
+                <a:solidFill>
+                  <a:srgbClr val="1C1C1E"/>
+                </a:solidFill>
+                <a:latin typeface="맑은 고딕"/>
+                <a:ea typeface="맑은 고딕"/>
+              </a:rPr>
+              <a:t> </a:t>
+            </a:r>
+            <a:r>
+              <a:rPr sz="2150" b="1" dirty="0" err="1">
+                <a:solidFill>
+                  <a:srgbClr val="1C1C1E"/>
+                </a:solidFill>
+                <a:latin typeface="맑은 고딕"/>
+                <a:ea typeface="맑은 고딕"/>
+              </a:rPr>
+              <a:t>질문</a:t>
+            </a:r>
+            <a:r>
+              <a:rPr lang="en-US" sz="2150" b="1" dirty="0">
+                <a:solidFill>
+                  <a:srgbClr val="1C1C1E"/>
+                </a:solidFill>
+                <a:latin typeface="맑은 고딕"/>
+                <a:ea typeface="맑은 고딕"/>
+              </a:rPr>
+              <a:t> </a:t>
+            </a:r>
+            <a:r>
+              <a:rPr sz="2150" b="1" dirty="0">
+                <a:solidFill>
+                  <a:srgbClr val="1C1C1E"/>
+                </a:solidFill>
+                <a:latin typeface="맑은 고딕"/>
+                <a:ea typeface="맑은 고딕"/>
+              </a:rPr>
+              <a:t>— </a:t>
+            </a:r>
+            <a:r>
+              <a:rPr lang="ko-KR" altLang="en-US" sz="2150" b="1" dirty="0">
+                <a:solidFill>
+                  <a:srgbClr val="1C1C1E"/>
+                </a:solidFill>
+                <a:latin typeface="맑은 고딕"/>
+                <a:ea typeface="맑은 고딕"/>
+              </a:rPr>
+              <a:t>프로젝트가 검정하고자 하는 네가지 질문</a:t>
+            </a:r>
+            <a:endParaRPr sz="2150" b="1" dirty="0">
+              <a:solidFill>
+                <a:srgbClr val="1C1C1E"/>
+              </a:solidFill>
+              <a:latin typeface="맑은 고딕"/>
+              <a:ea typeface="맑은 고딕"/>
+            </a:endParaRPr>
           </a:p>
         </p:txBody>
       </p:sp>
@@ -18230,7 +17586,7 @@
         <p:spPr>
           <a:xfrm>
             <a:off x="822960" y="1536192"/>
-            <a:ext cx="5074920" cy="1463040"/>
+            <a:ext cx="5074920" cy="847220"/>
           </a:xfrm>
           <a:prstGeom prst="rect">
             <a:avLst/>
@@ -18252,15 +17608,72 @@
               </a:spcAft>
             </a:pPr>
             <a:r>
-              <a:rPr sz="1500" b="1">
+              <a:rPr sz="1500" b="1" dirty="0">
                 <a:solidFill>
                   <a:srgbClr val="33393F"/>
                 </a:solidFill>
                 <a:latin typeface="맑은 고딕"/>
                 <a:ea typeface="맑은 고딕"/>
               </a:rPr>
-              <a:t>Q1 · 지정의 검증</a:t>
-            </a:r>
+              <a:t>Q1 · </a:t>
+            </a:r>
+            <a:r>
+              <a:rPr sz="1500" b="1" dirty="0" err="1">
+                <a:solidFill>
+                  <a:srgbClr val="33393F"/>
+                </a:solidFill>
+                <a:latin typeface="맑은 고딕"/>
+                <a:ea typeface="맑은 고딕"/>
+              </a:rPr>
+              <a:t>지정</a:t>
+            </a:r>
+            <a:r>
+              <a:rPr lang="en-US" sz="1500" b="1" dirty="0">
+                <a:solidFill>
+                  <a:srgbClr val="33393F"/>
+                </a:solidFill>
+                <a:latin typeface="맑은 고딕"/>
+                <a:ea typeface="맑은 고딕"/>
+              </a:rPr>
+              <a:t> </a:t>
+            </a:r>
+            <a:r>
+              <a:rPr lang="ko-KR" altLang="en-US" sz="1500" b="1" dirty="0">
+                <a:solidFill>
+                  <a:srgbClr val="33393F"/>
+                </a:solidFill>
+                <a:latin typeface="맑은 고딕"/>
+                <a:ea typeface="맑은 고딕"/>
+              </a:rPr>
+              <a:t>단계</a:t>
+            </a:r>
+            <a:r>
+              <a:rPr sz="1500" b="1" dirty="0">
+                <a:solidFill>
+                  <a:srgbClr val="33393F"/>
+                </a:solidFill>
+                <a:latin typeface="맑은 고딕"/>
+                <a:ea typeface="맑은 고딕"/>
+              </a:rPr>
+              <a:t> </a:t>
+            </a:r>
+            <a:r>
+              <a:rPr sz="1500" b="1" dirty="0" err="1">
+                <a:solidFill>
+                  <a:srgbClr val="33393F"/>
+                </a:solidFill>
+                <a:latin typeface="맑은 고딕"/>
+                <a:ea typeface="맑은 고딕"/>
+              </a:rPr>
+              <a:t>검증</a:t>
+            </a:r>
+            <a:endParaRPr sz="1500" b="1" dirty="0">
+              <a:solidFill>
+                <a:srgbClr val="33393F"/>
+              </a:solidFill>
+              <a:latin typeface="맑은 고딕"/>
+              <a:ea typeface="맑은 고딕"/>
+            </a:endParaRPr>
           </a:p>
           <a:p>
             <a:pPr>
@@ -18272,14 +17685,124 @@
               </a:spcAft>
             </a:pPr>
             <a:r>
-              <a:rPr sz="1200" b="0">
-                <a:solidFill>
-                  <a:srgbClr val="1C1C1E"/>
-                </a:solidFill>
-                <a:latin typeface="맑은 고딕"/>
-                <a:ea typeface="맑은 고딕"/>
-              </a:rPr>
-              <a:t>현행 지정은 공표된 판정식대로 실제 작동하는가?</a:t>
+              <a:rPr sz="1200" b="0" dirty="0" err="1">
+                <a:solidFill>
+                  <a:srgbClr val="1C1C1E"/>
+                </a:solidFill>
+                <a:latin typeface="맑은 고딕"/>
+                <a:ea typeface="맑은 고딕"/>
+              </a:rPr>
+              <a:t>현행</a:t>
+            </a:r>
+            <a:r>
+              <a:rPr sz="1200" b="0" dirty="0">
+                <a:solidFill>
+                  <a:srgbClr val="1C1C1E"/>
+                </a:solidFill>
+                <a:latin typeface="맑은 고딕"/>
+                <a:ea typeface="맑은 고딕"/>
+              </a:rPr>
+              <a:t> </a:t>
+            </a:r>
+            <a:r>
+              <a:rPr sz="1200" b="0" dirty="0" err="1">
+                <a:solidFill>
+                  <a:srgbClr val="1C1C1E"/>
+                </a:solidFill>
+                <a:latin typeface="맑은 고딕"/>
+                <a:ea typeface="맑은 고딕"/>
+              </a:rPr>
+              <a:t>지정은</a:t>
+            </a:r>
+            <a:r>
+              <a:rPr sz="1200" b="0" dirty="0">
+                <a:solidFill>
+                  <a:srgbClr val="1C1C1E"/>
+                </a:solidFill>
+                <a:latin typeface="맑은 고딕"/>
+                <a:ea typeface="맑은 고딕"/>
+              </a:rPr>
+              <a:t> </a:t>
+            </a:r>
+            <a:r>
+              <a:rPr sz="1200" b="0" dirty="0" err="1">
+                <a:solidFill>
+                  <a:srgbClr val="1C1C1E"/>
+                </a:solidFill>
+                <a:latin typeface="맑은 고딕"/>
+                <a:ea typeface="맑은 고딕"/>
+              </a:rPr>
+              <a:t>공표된</a:t>
+            </a:r>
+            <a:r>
+              <a:rPr sz="1200" b="0" dirty="0">
+                <a:solidFill>
+                  <a:srgbClr val="1C1C1E"/>
+                </a:solidFill>
+                <a:latin typeface="맑은 고딕"/>
+                <a:ea typeface="맑은 고딕"/>
+              </a:rPr>
+              <a:t> </a:t>
+            </a:r>
+            <a:r>
+              <a:rPr sz="1200" b="0" dirty="0" err="1">
+                <a:solidFill>
+                  <a:srgbClr val="1C1C1E"/>
+                </a:solidFill>
+                <a:latin typeface="맑은 고딕"/>
+                <a:ea typeface="맑은 고딕"/>
+              </a:rPr>
+              <a:t>판정식대로</a:t>
+            </a:r>
+            <a:r>
+              <a:rPr sz="1200" b="0" dirty="0">
+                <a:solidFill>
+                  <a:srgbClr val="1C1C1E"/>
+                </a:solidFill>
+                <a:latin typeface="맑은 고딕"/>
+                <a:ea typeface="맑은 고딕"/>
+              </a:rPr>
+              <a:t> </a:t>
+            </a:r>
+            <a:r>
+              <a:rPr sz="1200" b="0" dirty="0" err="1">
+                <a:solidFill>
+                  <a:srgbClr val="1C1C1E"/>
+                </a:solidFill>
+                <a:latin typeface="맑은 고딕"/>
+                <a:ea typeface="맑은 고딕"/>
+              </a:rPr>
+              <a:t>실제</a:t>
+            </a:r>
+            <a:r>
+              <a:rPr sz="1200" b="0" dirty="0">
+                <a:solidFill>
+                  <a:srgbClr val="1C1C1E"/>
+                </a:solidFill>
+                <a:latin typeface="맑은 고딕"/>
+                <a:ea typeface="맑은 고딕"/>
+              </a:rPr>
+              <a:t> </a:t>
+            </a:r>
+            <a:r>
+              <a:rPr sz="1200" b="0" dirty="0" err="1">
+                <a:solidFill>
+                  <a:srgbClr val="1C1C1E"/>
+                </a:solidFill>
+                <a:latin typeface="맑은 고딕"/>
+                <a:ea typeface="맑은 고딕"/>
+              </a:rPr>
+              <a:t>작동하는가</a:t>
+            </a:r>
+            <a:r>
+              <a:rPr sz="1200" b="0" dirty="0">
+                <a:solidFill>
+                  <a:srgbClr val="1C1C1E"/>
+                </a:solidFill>
+                <a:latin typeface="맑은 고딕"/>
+                <a:ea typeface="맑은 고딕"/>
+              </a:rPr>
+              <a:t>?</a:t>
             </a:r>
           </a:p>
           <a:p>
@@ -18292,14 +17815,124 @@
               </a:spcAft>
             </a:pPr>
             <a:r>
-              <a:rPr sz="1200" b="0">
-                <a:solidFill>
-                  <a:srgbClr val="1C1C1E"/>
-                </a:solidFill>
-                <a:latin typeface="맑은 고딕"/>
-                <a:ea typeface="맑은 고딕"/>
-              </a:rPr>
-              <a:t>공급(관내 인프라) 변수는 판정에 반영되는가?</a:t>
+              <a:rPr sz="1200" b="0" dirty="0" err="1">
+                <a:solidFill>
+                  <a:srgbClr val="1C1C1E"/>
+                </a:solidFill>
+                <a:latin typeface="맑은 고딕"/>
+                <a:ea typeface="맑은 고딕"/>
+              </a:rPr>
+              <a:t>공급</a:t>
+            </a:r>
+            <a:r>
+              <a:rPr sz="1200" b="0" dirty="0">
+                <a:solidFill>
+                  <a:srgbClr val="1C1C1E"/>
+                </a:solidFill>
+                <a:latin typeface="맑은 고딕"/>
+                <a:ea typeface="맑은 고딕"/>
+              </a:rPr>
+              <a:t>(</a:t>
+            </a:r>
+            <a:r>
+              <a:rPr sz="1200" b="0" dirty="0" err="1">
+                <a:solidFill>
+                  <a:srgbClr val="1C1C1E"/>
+                </a:solidFill>
+                <a:latin typeface="맑은 고딕"/>
+                <a:ea typeface="맑은 고딕"/>
+              </a:rPr>
+              <a:t>관내</a:t>
+            </a:r>
+            <a:r>
+              <a:rPr sz="1200" b="0" dirty="0">
+                <a:solidFill>
+                  <a:srgbClr val="1C1C1E"/>
+                </a:solidFill>
+                <a:latin typeface="맑은 고딕"/>
+                <a:ea typeface="맑은 고딕"/>
+              </a:rPr>
+              <a:t> </a:t>
+            </a:r>
+            <a:r>
+              <a:rPr sz="1200" b="0" dirty="0" err="1">
+                <a:solidFill>
+                  <a:srgbClr val="1C1C1E"/>
+                </a:solidFill>
+                <a:latin typeface="맑은 고딕"/>
+                <a:ea typeface="맑은 고딕"/>
+              </a:rPr>
+              <a:t>인프라</a:t>
+            </a:r>
+            <a:r>
+              <a:rPr sz="1200" b="0" dirty="0">
+                <a:solidFill>
+                  <a:srgbClr val="1C1C1E"/>
+                </a:solidFill>
+                <a:latin typeface="맑은 고딕"/>
+                <a:ea typeface="맑은 고딕"/>
+              </a:rPr>
+              <a:t>) </a:t>
+            </a:r>
+            <a:r>
+              <a:rPr sz="1200" b="0" dirty="0" err="1">
+                <a:solidFill>
+                  <a:srgbClr val="1C1C1E"/>
+                </a:solidFill>
+                <a:latin typeface="맑은 고딕"/>
+                <a:ea typeface="맑은 고딕"/>
+              </a:rPr>
+              <a:t>변수는</a:t>
+            </a:r>
+            <a:r>
+              <a:rPr sz="1200" b="0" dirty="0">
+                <a:solidFill>
+                  <a:srgbClr val="1C1C1E"/>
+                </a:solidFill>
+                <a:latin typeface="맑은 고딕"/>
+                <a:ea typeface="맑은 고딕"/>
+              </a:rPr>
+              <a:t> </a:t>
+            </a:r>
+            <a:r>
+              <a:rPr sz="1200" b="0" dirty="0" err="1">
+                <a:solidFill>
+                  <a:srgbClr val="1C1C1E"/>
+                </a:solidFill>
+                <a:latin typeface="맑은 고딕"/>
+                <a:ea typeface="맑은 고딕"/>
+              </a:rPr>
+              <a:t>판정에</a:t>
+            </a:r>
+            <a:r>
+              <a:rPr sz="1200" b="0" dirty="0">
+                <a:solidFill>
+                  <a:srgbClr val="1C1C1E"/>
+                </a:solidFill>
+                <a:latin typeface="맑은 고딕"/>
+                <a:ea typeface="맑은 고딕"/>
+              </a:rPr>
+              <a:t> </a:t>
+            </a:r>
+            <a:r>
+              <a:rPr sz="1200" b="0" dirty="0" err="1">
+                <a:solidFill>
+                  <a:srgbClr val="1C1C1E"/>
+                </a:solidFill>
+                <a:latin typeface="맑은 고딕"/>
+                <a:ea typeface="맑은 고딕"/>
+              </a:rPr>
+              <a:t>반영되는가</a:t>
+            </a:r>
+            <a:r>
+              <a:rPr sz="1200" b="0" dirty="0">
+                <a:solidFill>
+                  <a:srgbClr val="1C1C1E"/>
+                </a:solidFill>
+                <a:latin typeface="맑은 고딕"/>
+                <a:ea typeface="맑은 고딕"/>
+              </a:rPr>
+              <a:t>?</a:t>
             </a:r>
           </a:p>
         </p:txBody>
@@ -18451,15 +18084,52 @@
               </a:spcAft>
             </a:pPr>
             <a:r>
-              <a:rPr sz="1500" b="1">
+              <a:rPr sz="1500" b="1" dirty="0">
                 <a:solidFill>
                   <a:srgbClr val="33393F"/>
                 </a:solidFill>
                 <a:latin typeface="맑은 고딕"/>
                 <a:ea typeface="맑은 고딕"/>
               </a:rPr>
-              <a:t>Q2 · 사각지대 탐지</a:t>
-            </a:r>
+              <a:t>Q2 · </a:t>
+            </a:r>
+            <a:r>
+              <a:rPr sz="1500" b="1" dirty="0" err="1">
+                <a:solidFill>
+                  <a:srgbClr val="33393F"/>
+                </a:solidFill>
+                <a:latin typeface="맑은 고딕"/>
+                <a:ea typeface="맑은 고딕"/>
+              </a:rPr>
+              <a:t>사각지대</a:t>
+            </a:r>
+            <a:r>
+              <a:rPr sz="1500" b="1" dirty="0">
+                <a:solidFill>
+                  <a:srgbClr val="33393F"/>
+                </a:solidFill>
+                <a:latin typeface="맑은 고딕"/>
+                <a:ea typeface="맑은 고딕"/>
+              </a:rPr>
+              <a:t> </a:t>
+            </a:r>
+            <a:r>
+              <a:rPr sz="1500" b="1" dirty="0" err="1">
+                <a:solidFill>
+                  <a:srgbClr val="33393F"/>
+                </a:solidFill>
+                <a:latin typeface="맑은 고딕"/>
+                <a:ea typeface="맑은 고딕"/>
+              </a:rPr>
+              <a:t>탐지</a:t>
+            </a:r>
+            <a:endParaRPr sz="1500" b="1" dirty="0">
+              <a:solidFill>
+                <a:srgbClr val="33393F"/>
+              </a:solidFill>
+              <a:latin typeface="맑은 고딕"/>
+              <a:ea typeface="맑은 고딕"/>
+            </a:endParaRPr>
           </a:p>
           <a:p>
             <a:pPr>
@@ -18471,14 +18141,104 @@
               </a:spcAft>
             </a:pPr>
             <a:r>
-              <a:rPr sz="1200" b="0">
-                <a:solidFill>
-                  <a:srgbClr val="1C1C1E"/>
-                </a:solidFill>
-                <a:latin typeface="맑은 고딕"/>
-                <a:ea typeface="맑은 고딕"/>
-              </a:rPr>
-              <a:t>판정식이 구조적으로 놓치는 지역이 실재하는가?</a:t>
+              <a:rPr sz="1200" b="0" dirty="0" err="1">
+                <a:solidFill>
+                  <a:srgbClr val="1C1C1E"/>
+                </a:solidFill>
+                <a:latin typeface="맑은 고딕"/>
+                <a:ea typeface="맑은 고딕"/>
+              </a:rPr>
+              <a:t>판정식이</a:t>
+            </a:r>
+            <a:r>
+              <a:rPr sz="1200" b="0" dirty="0">
+                <a:solidFill>
+                  <a:srgbClr val="1C1C1E"/>
+                </a:solidFill>
+                <a:latin typeface="맑은 고딕"/>
+                <a:ea typeface="맑은 고딕"/>
+              </a:rPr>
+              <a:t> </a:t>
+            </a:r>
+            <a:r>
+              <a:rPr sz="1200" b="0" dirty="0" err="1">
+                <a:solidFill>
+                  <a:srgbClr val="1C1C1E"/>
+                </a:solidFill>
+                <a:latin typeface="맑은 고딕"/>
+                <a:ea typeface="맑은 고딕"/>
+              </a:rPr>
+              <a:t>구조적으로</a:t>
+            </a:r>
+            <a:r>
+              <a:rPr sz="1200" b="0" dirty="0">
+                <a:solidFill>
+                  <a:srgbClr val="1C1C1E"/>
+                </a:solidFill>
+                <a:latin typeface="맑은 고딕"/>
+                <a:ea typeface="맑은 고딕"/>
+              </a:rPr>
+              <a:t> </a:t>
+            </a:r>
+            <a:r>
+              <a:rPr sz="1200" b="0" dirty="0" err="1">
+                <a:solidFill>
+                  <a:srgbClr val="1C1C1E"/>
+                </a:solidFill>
+                <a:latin typeface="맑은 고딕"/>
+                <a:ea typeface="맑은 고딕"/>
+              </a:rPr>
+              <a:t>놓치는</a:t>
+            </a:r>
+            <a:r>
+              <a:rPr sz="1200" b="0" dirty="0">
+                <a:solidFill>
+                  <a:srgbClr val="1C1C1E"/>
+                </a:solidFill>
+                <a:latin typeface="맑은 고딕"/>
+                <a:ea typeface="맑은 고딕"/>
+              </a:rPr>
+              <a:t> </a:t>
+            </a:r>
+            <a:r>
+              <a:rPr sz="1200" b="0" dirty="0" err="1">
+                <a:solidFill>
+                  <a:srgbClr val="1C1C1E"/>
+                </a:solidFill>
+                <a:latin typeface="맑은 고딕"/>
+                <a:ea typeface="맑은 고딕"/>
+              </a:rPr>
+              <a:t>지역이</a:t>
+            </a:r>
+            <a:r>
+              <a:rPr sz="1200" b="0" dirty="0">
+                <a:solidFill>
+                  <a:srgbClr val="1C1C1E"/>
+                </a:solidFill>
+                <a:latin typeface="맑은 고딕"/>
+                <a:ea typeface="맑은 고딕"/>
+              </a:rPr>
+              <a:t> </a:t>
+            </a:r>
+            <a:r>
+              <a:rPr sz="1200" b="0" dirty="0" err="1">
+                <a:solidFill>
+                  <a:srgbClr val="1C1C1E"/>
+                </a:solidFill>
+                <a:latin typeface="맑은 고딕"/>
+                <a:ea typeface="맑은 고딕"/>
+              </a:rPr>
+              <a:t>실재하는가</a:t>
+            </a:r>
+            <a:r>
+              <a:rPr sz="1200" b="0" dirty="0">
+                <a:solidFill>
+                  <a:srgbClr val="1C1C1E"/>
+                </a:solidFill>
+                <a:latin typeface="맑은 고딕"/>
+                <a:ea typeface="맑은 고딕"/>
+              </a:rPr>
+              <a:t>?</a:t>
             </a:r>
           </a:p>
           <a:p>
@@ -18491,14 +18251,154 @@
               </a:spcAft>
             </a:pPr>
             <a:r>
-              <a:rPr sz="1200" b="0">
-                <a:solidFill>
-                  <a:srgbClr val="1C1C1E"/>
-                </a:solidFill>
-                <a:latin typeface="맑은 고딕"/>
-                <a:ea typeface="맑은 고딕"/>
-              </a:rPr>
-              <a:t>(거리 기준은 통과하지만 관내 공급이 소멸한 지역)</a:t>
+              <a:rPr sz="1200" b="0" dirty="0">
+                <a:solidFill>
+                  <a:srgbClr val="1C1C1E"/>
+                </a:solidFill>
+                <a:latin typeface="맑은 고딕"/>
+                <a:ea typeface="맑은 고딕"/>
+              </a:rPr>
+              <a:t>(</a:t>
+            </a:r>
+            <a:r>
+              <a:rPr sz="1200" b="0" dirty="0" err="1">
+                <a:solidFill>
+                  <a:srgbClr val="1C1C1E"/>
+                </a:solidFill>
+                <a:latin typeface="맑은 고딕"/>
+                <a:ea typeface="맑은 고딕"/>
+              </a:rPr>
+              <a:t>거리</a:t>
+            </a:r>
+            <a:r>
+              <a:rPr sz="1200" b="0" dirty="0">
+                <a:solidFill>
+                  <a:srgbClr val="1C1C1E"/>
+                </a:solidFill>
+                <a:latin typeface="맑은 고딕"/>
+                <a:ea typeface="맑은 고딕"/>
+              </a:rPr>
+              <a:t> </a:t>
+            </a:r>
+            <a:r>
+              <a:rPr sz="1200" b="0" dirty="0" err="1">
+                <a:solidFill>
+                  <a:srgbClr val="1C1C1E"/>
+                </a:solidFill>
+                <a:latin typeface="맑은 고딕"/>
+                <a:ea typeface="맑은 고딕"/>
+              </a:rPr>
+              <a:t>기준은</a:t>
+            </a:r>
+            <a:r>
+              <a:rPr sz="1200" b="0" dirty="0">
+                <a:solidFill>
+                  <a:srgbClr val="1C1C1E"/>
+                </a:solidFill>
+                <a:latin typeface="맑은 고딕"/>
+                <a:ea typeface="맑은 고딕"/>
+              </a:rPr>
+              <a:t> </a:t>
+            </a:r>
+            <a:r>
+              <a:rPr sz="1200" b="0" dirty="0" err="1">
+                <a:solidFill>
+                  <a:srgbClr val="1C1C1E"/>
+                </a:solidFill>
+                <a:latin typeface="맑은 고딕"/>
+                <a:ea typeface="맑은 고딕"/>
+              </a:rPr>
+              <a:t>통과하지만</a:t>
+            </a:r>
+            <a:r>
+              <a:rPr sz="1200" b="0" dirty="0">
+                <a:solidFill>
+                  <a:srgbClr val="1C1C1E"/>
+                </a:solidFill>
+                <a:latin typeface="맑은 고딕"/>
+                <a:ea typeface="맑은 고딕"/>
+              </a:rPr>
+              <a:t> </a:t>
+            </a:r>
+            <a:r>
+              <a:rPr sz="1200" b="0" dirty="0" err="1">
+                <a:solidFill>
+                  <a:srgbClr val="1C1C1E"/>
+                </a:solidFill>
+                <a:latin typeface="맑은 고딕"/>
+                <a:ea typeface="맑은 고딕"/>
+              </a:rPr>
+              <a:t>관내</a:t>
+            </a:r>
+            <a:r>
+              <a:rPr sz="1200" b="0" dirty="0">
+                <a:solidFill>
+                  <a:srgbClr val="1C1C1E"/>
+                </a:solidFill>
+                <a:latin typeface="맑은 고딕"/>
+                <a:ea typeface="맑은 고딕"/>
+              </a:rPr>
+              <a:t> </a:t>
+            </a:r>
+            <a:r>
+              <a:rPr sz="1200" b="0" dirty="0" err="1">
+                <a:solidFill>
+                  <a:srgbClr val="1C1C1E"/>
+                </a:solidFill>
+                <a:latin typeface="맑은 고딕"/>
+                <a:ea typeface="맑은 고딕"/>
+              </a:rPr>
+              <a:t>공급이</a:t>
+            </a:r>
+            <a:r>
+              <a:rPr sz="1200" b="0" dirty="0">
+                <a:solidFill>
+                  <a:srgbClr val="1C1C1E"/>
+                </a:solidFill>
+                <a:latin typeface="맑은 고딕"/>
+                <a:ea typeface="맑은 고딕"/>
+              </a:rPr>
+              <a:t> </a:t>
+            </a:r>
+            <a:r>
+              <a:rPr sz="1200" b="0" dirty="0" err="1">
+                <a:solidFill>
+                  <a:srgbClr val="1C1C1E"/>
+                </a:solidFill>
+                <a:latin typeface="맑은 고딕"/>
+                <a:ea typeface="맑은 고딕"/>
+              </a:rPr>
+              <a:t>소멸한</a:t>
+            </a:r>
+            <a:r>
+              <a:rPr sz="1200" b="0" dirty="0">
+                <a:solidFill>
+                  <a:srgbClr val="1C1C1E"/>
+                </a:solidFill>
+                <a:latin typeface="맑은 고딕"/>
+                <a:ea typeface="맑은 고딕"/>
+              </a:rPr>
+              <a:t> </a:t>
+            </a:r>
+            <a:r>
+              <a:rPr sz="1200" b="0" dirty="0" err="1">
+                <a:solidFill>
+                  <a:srgbClr val="1C1C1E"/>
+                </a:solidFill>
+                <a:latin typeface="맑은 고딕"/>
+                <a:ea typeface="맑은 고딕"/>
+              </a:rPr>
+              <a:t>지역</a:t>
+            </a:r>
+            <a:r>
+              <a:rPr sz="1200" b="0" dirty="0">
+                <a:solidFill>
+                  <a:srgbClr val="1C1C1E"/>
+                </a:solidFill>
+                <a:latin typeface="맑은 고딕"/>
+                <a:ea typeface="맑은 고딕"/>
+              </a:rPr>
+              <a:t>)</a:t>
             </a:r>
           </a:p>
         </p:txBody>
@@ -18628,7 +18528,7 @@
         <p:spPr>
           <a:xfrm>
             <a:off x="822960" y="3502152"/>
-            <a:ext cx="5074920" cy="1463040"/>
+            <a:ext cx="5074920" cy="847220"/>
           </a:xfrm>
           <a:prstGeom prst="rect">
             <a:avLst/>
@@ -18650,15 +18550,72 @@
               </a:spcAft>
             </a:pPr>
             <a:r>
-              <a:rPr sz="1500" b="1">
+              <a:rPr sz="1500" b="1" dirty="0">
                 <a:solidFill>
                   <a:srgbClr val="33393F"/>
                 </a:solidFill>
                 <a:latin typeface="맑은 고딕"/>
                 <a:ea typeface="맑은 고딕"/>
               </a:rPr>
-              <a:t>Q3 · 배분의 진단</a:t>
-            </a:r>
+              <a:t>Q3 · </a:t>
+            </a:r>
+            <a:r>
+              <a:rPr sz="1500" b="1" dirty="0" err="1">
+                <a:solidFill>
+                  <a:srgbClr val="33393F"/>
+                </a:solidFill>
+                <a:latin typeface="맑은 고딕"/>
+                <a:ea typeface="맑은 고딕"/>
+              </a:rPr>
+              <a:t>배분</a:t>
+            </a:r>
+            <a:r>
+              <a:rPr lang="en-US" sz="1500" b="1" dirty="0">
+                <a:solidFill>
+                  <a:srgbClr val="33393F"/>
+                </a:solidFill>
+                <a:latin typeface="맑은 고딕"/>
+                <a:ea typeface="맑은 고딕"/>
+              </a:rPr>
+              <a:t> </a:t>
+            </a:r>
+            <a:r>
+              <a:rPr lang="ko-KR" altLang="en-US" sz="1500" b="1" dirty="0">
+                <a:solidFill>
+                  <a:srgbClr val="33393F"/>
+                </a:solidFill>
+                <a:latin typeface="맑은 고딕"/>
+                <a:ea typeface="맑은 고딕"/>
+              </a:rPr>
+              <a:t>단계</a:t>
+            </a:r>
+            <a:r>
+              <a:rPr sz="1500" b="1" dirty="0">
+                <a:solidFill>
+                  <a:srgbClr val="33393F"/>
+                </a:solidFill>
+                <a:latin typeface="맑은 고딕"/>
+                <a:ea typeface="맑은 고딕"/>
+              </a:rPr>
+              <a:t> </a:t>
+            </a:r>
+            <a:r>
+              <a:rPr lang="ko-KR" altLang="en-US" sz="1500" b="1" dirty="0">
+                <a:solidFill>
+                  <a:srgbClr val="33393F"/>
+                </a:solidFill>
+                <a:latin typeface="맑은 고딕"/>
+                <a:ea typeface="맑은 고딕"/>
+              </a:rPr>
+              <a:t>검증</a:t>
+            </a:r>
+            <a:endParaRPr sz="1500" b="1" dirty="0">
+              <a:solidFill>
+                <a:srgbClr val="33393F"/>
+              </a:solidFill>
+              <a:latin typeface="맑은 고딕"/>
+              <a:ea typeface="맑은 고딕"/>
+            </a:endParaRPr>
           </a:p>
           <a:p>
             <a:pPr>
@@ -18670,14 +18627,144 @@
               </a:spcAft>
             </a:pPr>
             <a:r>
-              <a:rPr sz="1200" b="0">
-                <a:solidFill>
-                  <a:srgbClr val="1C1C1E"/>
-                </a:solidFill>
-                <a:latin typeface="맑은 고딕"/>
-                <a:ea typeface="맑은 고딕"/>
-              </a:rPr>
-              <a:t>지정 이후의 지원 배분은 공개 지표로 설명되는가?</a:t>
+              <a:rPr sz="1200" b="0" dirty="0" err="1">
+                <a:solidFill>
+                  <a:srgbClr val="1C1C1E"/>
+                </a:solidFill>
+                <a:latin typeface="맑은 고딕"/>
+                <a:ea typeface="맑은 고딕"/>
+              </a:rPr>
+              <a:t>지정</a:t>
+            </a:r>
+            <a:r>
+              <a:rPr sz="1200" b="0" dirty="0">
+                <a:solidFill>
+                  <a:srgbClr val="1C1C1E"/>
+                </a:solidFill>
+                <a:latin typeface="맑은 고딕"/>
+                <a:ea typeface="맑은 고딕"/>
+              </a:rPr>
+              <a:t> </a:t>
+            </a:r>
+            <a:r>
+              <a:rPr sz="1200" b="0" dirty="0" err="1">
+                <a:solidFill>
+                  <a:srgbClr val="1C1C1E"/>
+                </a:solidFill>
+                <a:latin typeface="맑은 고딕"/>
+                <a:ea typeface="맑은 고딕"/>
+              </a:rPr>
+              <a:t>이후의</a:t>
+            </a:r>
+            <a:r>
+              <a:rPr sz="1200" b="0" dirty="0">
+                <a:solidFill>
+                  <a:srgbClr val="1C1C1E"/>
+                </a:solidFill>
+                <a:latin typeface="맑은 고딕"/>
+                <a:ea typeface="맑은 고딕"/>
+              </a:rPr>
+              <a:t> </a:t>
+            </a:r>
+            <a:r>
+              <a:rPr sz="1200" b="0" dirty="0" err="1">
+                <a:solidFill>
+                  <a:srgbClr val="1C1C1E"/>
+                </a:solidFill>
+                <a:latin typeface="맑은 고딕"/>
+                <a:ea typeface="맑은 고딕"/>
+              </a:rPr>
+              <a:t>지원</a:t>
+            </a:r>
+            <a:r>
+              <a:rPr sz="1200" b="0" dirty="0">
+                <a:solidFill>
+                  <a:srgbClr val="1C1C1E"/>
+                </a:solidFill>
+                <a:latin typeface="맑은 고딕"/>
+                <a:ea typeface="맑은 고딕"/>
+              </a:rPr>
+              <a:t> </a:t>
+            </a:r>
+            <a:r>
+              <a:rPr sz="1200" b="0" dirty="0" err="1">
+                <a:solidFill>
+                  <a:srgbClr val="1C1C1E"/>
+                </a:solidFill>
+                <a:latin typeface="맑은 고딕"/>
+                <a:ea typeface="맑은 고딕"/>
+              </a:rPr>
+              <a:t>배분은</a:t>
+            </a:r>
+            <a:r>
+              <a:rPr sz="1200" b="0" dirty="0">
+                <a:solidFill>
+                  <a:srgbClr val="1C1C1E"/>
+                </a:solidFill>
+                <a:latin typeface="맑은 고딕"/>
+                <a:ea typeface="맑은 고딕"/>
+              </a:rPr>
+              <a:t> </a:t>
+            </a:r>
+            <a:r>
+              <a:rPr sz="1200" b="0" dirty="0" err="1">
+                <a:solidFill>
+                  <a:srgbClr val="1C1C1E"/>
+                </a:solidFill>
+                <a:latin typeface="맑은 고딕"/>
+                <a:ea typeface="맑은 고딕"/>
+              </a:rPr>
+              <a:t>공개</a:t>
+            </a:r>
+            <a:r>
+              <a:rPr sz="1200" b="0" dirty="0">
+                <a:solidFill>
+                  <a:srgbClr val="1C1C1E"/>
+                </a:solidFill>
+                <a:latin typeface="맑은 고딕"/>
+                <a:ea typeface="맑은 고딕"/>
+              </a:rPr>
+              <a:t> </a:t>
+            </a:r>
+            <a:r>
+              <a:rPr sz="1200" b="0" dirty="0" err="1">
+                <a:solidFill>
+                  <a:srgbClr val="1C1C1E"/>
+                </a:solidFill>
+                <a:latin typeface="맑은 고딕"/>
+                <a:ea typeface="맑은 고딕"/>
+              </a:rPr>
+              <a:t>지표로</a:t>
+            </a:r>
+            <a:r>
+              <a:rPr sz="1200" b="0" dirty="0">
+                <a:solidFill>
+                  <a:srgbClr val="1C1C1E"/>
+                </a:solidFill>
+                <a:latin typeface="맑은 고딕"/>
+                <a:ea typeface="맑은 고딕"/>
+              </a:rPr>
+              <a:t> </a:t>
+            </a:r>
+            <a:r>
+              <a:rPr sz="1200" b="0" dirty="0" err="1">
+                <a:solidFill>
+                  <a:srgbClr val="1C1C1E"/>
+                </a:solidFill>
+                <a:latin typeface="맑은 고딕"/>
+                <a:ea typeface="맑은 고딕"/>
+              </a:rPr>
+              <a:t>설명되는가</a:t>
+            </a:r>
+            <a:r>
+              <a:rPr sz="1200" b="0" dirty="0">
+                <a:solidFill>
+                  <a:srgbClr val="1C1C1E"/>
+                </a:solidFill>
+                <a:latin typeface="맑은 고딕"/>
+                <a:ea typeface="맑은 고딕"/>
+              </a:rPr>
+              <a:t>?</a:t>
             </a:r>
           </a:p>
           <a:p>
@@ -18690,14 +18777,84 @@
               </a:spcAft>
             </a:pPr>
             <a:r>
-              <a:rPr sz="1200" b="0">
-                <a:solidFill>
-                  <a:srgbClr val="1C1C1E"/>
-                </a:solidFill>
-                <a:latin typeface="맑은 고딕"/>
-                <a:ea typeface="맑은 고딕"/>
-              </a:rPr>
-              <a:t>등급·취약도·수요 중 무엇이 선정을 갈랐는가?</a:t>
+              <a:rPr sz="1200" b="0" dirty="0" err="1">
+                <a:solidFill>
+                  <a:srgbClr val="1C1C1E"/>
+                </a:solidFill>
+                <a:latin typeface="맑은 고딕"/>
+                <a:ea typeface="맑은 고딕"/>
+              </a:rPr>
+              <a:t>등급·취약도·수요</a:t>
+            </a:r>
+            <a:r>
+              <a:rPr sz="1200" b="0" dirty="0">
+                <a:solidFill>
+                  <a:srgbClr val="1C1C1E"/>
+                </a:solidFill>
+                <a:latin typeface="맑은 고딕"/>
+                <a:ea typeface="맑은 고딕"/>
+              </a:rPr>
+              <a:t> 중 </a:t>
+            </a:r>
+            <a:r>
+              <a:rPr sz="1200" b="0" dirty="0" err="1">
+                <a:solidFill>
+                  <a:srgbClr val="1C1C1E"/>
+                </a:solidFill>
+                <a:latin typeface="맑은 고딕"/>
+                <a:ea typeface="맑은 고딕"/>
+              </a:rPr>
+              <a:t>무엇이</a:t>
+            </a:r>
+            <a:r>
+              <a:rPr sz="1200" b="0" dirty="0">
+                <a:solidFill>
+                  <a:srgbClr val="1C1C1E"/>
+                </a:solidFill>
+                <a:latin typeface="맑은 고딕"/>
+                <a:ea typeface="맑은 고딕"/>
+              </a:rPr>
+              <a:t> </a:t>
+            </a:r>
+            <a:r>
+              <a:rPr sz="1200" b="0" dirty="0" err="1">
+                <a:solidFill>
+                  <a:srgbClr val="1C1C1E"/>
+                </a:solidFill>
+                <a:latin typeface="맑은 고딕"/>
+                <a:ea typeface="맑은 고딕"/>
+              </a:rPr>
+              <a:t>선정을</a:t>
+            </a:r>
+            <a:r>
+              <a:rPr sz="1200" b="0" dirty="0">
+                <a:solidFill>
+                  <a:srgbClr val="1C1C1E"/>
+                </a:solidFill>
+                <a:latin typeface="맑은 고딕"/>
+                <a:ea typeface="맑은 고딕"/>
+              </a:rPr>
+              <a:t> </a:t>
+            </a:r>
+            <a:r>
+              <a:rPr sz="1200" b="0" dirty="0" err="1">
+                <a:solidFill>
+                  <a:srgbClr val="1C1C1E"/>
+                </a:solidFill>
+                <a:latin typeface="맑은 고딕"/>
+                <a:ea typeface="맑은 고딕"/>
+              </a:rPr>
+              <a:t>갈랐는가</a:t>
+            </a:r>
+            <a:r>
+              <a:rPr sz="1200" b="0" dirty="0">
+                <a:solidFill>
+                  <a:srgbClr val="1C1C1E"/>
+                </a:solidFill>
+                <a:latin typeface="맑은 고딕"/>
+                <a:ea typeface="맑은 고딕"/>
+              </a:rPr>
+              <a:t>?</a:t>
             </a:r>
           </a:p>
         </p:txBody>

--- a/04_제출물/데이터분석_계획서.pptx
+++ b/04_제출물/데이터분석_계획서.pptx
@@ -17815,6 +17815,16 @@
               </a:spcAft>
             </a:pPr>
             <a:r>
+              <a:rPr lang="ko-KR" altLang="en-US" sz="1200" b="0" dirty="0">
+                <a:solidFill>
+                  <a:srgbClr val="1C1C1E"/>
+                </a:solidFill>
+                <a:latin typeface="맑은 고딕"/>
+                <a:ea typeface="맑은 고딕"/>
+              </a:rPr>
+              <a:t>의료 </a:t>
+            </a:r>
+            <a:r>
               <a:rPr sz="1200" b="0" dirty="0" err="1">
                 <a:solidFill>
                   <a:srgbClr val="1C1C1E"/>
@@ -17853,6 +17863,16 @@
                 <a:ea typeface="맑은 고딕"/>
               </a:rPr>
               <a:t> </a:t>
+            </a:r>
+            <a:r>
+              <a:rPr lang="ko-KR" altLang="en-US" sz="1200" b="0" dirty="0">
+                <a:solidFill>
+                  <a:srgbClr val="1C1C1E"/>
+                </a:solidFill>
+                <a:latin typeface="맑은 고딕"/>
+                <a:ea typeface="맑은 고딕"/>
+              </a:rPr>
+              <a:t>분만 </a:t>
             </a:r>
             <a:r>
               <a:rPr sz="1200" b="0" dirty="0" err="1">
@@ -18062,7 +18082,7 @@
         <p:spPr>
           <a:xfrm>
             <a:off x="6583679" y="1536192"/>
-            <a:ext cx="5074920" cy="1463040"/>
+            <a:ext cx="5074920" cy="847220"/>
           </a:xfrm>
           <a:prstGeom prst="rect">
             <a:avLst/>
@@ -18261,6 +18281,16 @@
               <a:t>(</a:t>
             </a:r>
             <a:r>
+              <a:rPr lang="en-US" sz="1200" b="0" dirty="0">
+                <a:solidFill>
+                  <a:srgbClr val="1C1C1E"/>
+                </a:solidFill>
+                <a:latin typeface="맑은 고딕"/>
+                <a:ea typeface="맑은 고딕"/>
+              </a:rPr>
+              <a:t>ex. </a:t>
+            </a:r>
+            <a:r>
               <a:rPr sz="1200" b="0" dirty="0" err="1">
                 <a:solidFill>
                   <a:srgbClr val="1C1C1E"/>
@@ -18271,44 +18301,24 @@
               <a:t>거리</a:t>
             </a:r>
             <a:r>
-              <a:rPr sz="1200" b="0" dirty="0">
-                <a:solidFill>
-                  <a:srgbClr val="1C1C1E"/>
-                </a:solidFill>
-                <a:latin typeface="맑은 고딕"/>
-                <a:ea typeface="맑은 고딕"/>
-              </a:rPr>
-              <a:t> </a:t>
-            </a:r>
-            <a:r>
-              <a:rPr sz="1200" b="0" dirty="0" err="1">
-                <a:solidFill>
-                  <a:srgbClr val="1C1C1E"/>
-                </a:solidFill>
-                <a:latin typeface="맑은 고딕"/>
-                <a:ea typeface="맑은 고딕"/>
-              </a:rPr>
-              <a:t>기준은</a:t>
-            </a:r>
-            <a:r>
-              <a:rPr sz="1200" b="0" dirty="0">
-                <a:solidFill>
-                  <a:srgbClr val="1C1C1E"/>
-                </a:solidFill>
-                <a:latin typeface="맑은 고딕"/>
-                <a:ea typeface="맑은 고딕"/>
-              </a:rPr>
-              <a:t> </a:t>
-            </a:r>
-            <a:r>
-              <a:rPr sz="1200" b="0" dirty="0" err="1">
-                <a:solidFill>
-                  <a:srgbClr val="1C1C1E"/>
-                </a:solidFill>
-                <a:latin typeface="맑은 고딕"/>
-                <a:ea typeface="맑은 고딕"/>
-              </a:rPr>
-              <a:t>통과하지만</a:t>
+              <a:rPr lang="ko-KR" altLang="en-US" sz="1200" dirty="0">
+                <a:solidFill>
+                  <a:srgbClr val="1C1C1E"/>
+                </a:solidFill>
+                <a:latin typeface="맑은 고딕"/>
+                <a:ea typeface="맑은 고딕"/>
+              </a:rPr>
+              <a:t>로만 보면 취약지가 아니지만</a:t>
+            </a:r>
+            <a:r>
+              <a:rPr lang="en-US" altLang="ko-KR" sz="1200" dirty="0">
+                <a:solidFill>
+                  <a:srgbClr val="1C1C1E"/>
+                </a:solidFill>
+                <a:latin typeface="맑은 고딕"/>
+                <a:ea typeface="맑은 고딕"/>
+              </a:rPr>
+              <a:t>,</a:t>
             </a:r>
             <a:r>
               <a:rPr sz="1200" b="0" dirty="0">
@@ -18627,6 +18637,16 @@
               </a:spcAft>
             </a:pPr>
             <a:r>
+              <a:rPr lang="ko-KR" altLang="en-US" sz="1200" b="0" dirty="0">
+                <a:solidFill>
+                  <a:srgbClr val="1C1C1E"/>
+                </a:solidFill>
+                <a:latin typeface="맑은 고딕"/>
+                <a:ea typeface="맑은 고딕"/>
+              </a:rPr>
+              <a:t>취약지 </a:t>
+            </a:r>
+            <a:r>
               <a:rPr sz="1200" b="0" dirty="0" err="1">
                 <a:solidFill>
                   <a:srgbClr val="1C1C1E"/>
@@ -18776,6 +18796,16 @@
                 <a:spcPts val="200"/>
               </a:spcAft>
             </a:pPr>
+            <a:r>
+              <a:rPr lang="en-US" sz="1200" b="0" dirty="0" err="1">
+                <a:solidFill>
+                  <a:srgbClr val="1C1C1E"/>
+                </a:solidFill>
+                <a:latin typeface="맑은 고딕"/>
+                <a:ea typeface="맑은 고딕"/>
+              </a:rPr>
+              <a:t>A,B,C</a:t>
+            </a:r>
             <a:r>
               <a:rPr sz="1200" b="0" dirty="0" err="1">
                 <a:solidFill>
@@ -19006,15 +19036,52 @@
               </a:spcAft>
             </a:pPr>
             <a:r>
-              <a:rPr sz="1500" b="1">
+              <a:rPr sz="1500" b="1" dirty="0">
                 <a:solidFill>
                   <a:srgbClr val="33393F"/>
                 </a:solidFill>
                 <a:latin typeface="맑은 고딕"/>
                 <a:ea typeface="맑은 고딕"/>
               </a:rPr>
-              <a:t>Q4 · 처방과 대조</a:t>
-            </a:r>
+              <a:t>Q4 · </a:t>
+            </a:r>
+            <a:r>
+              <a:rPr sz="1500" b="1" dirty="0" err="1">
+                <a:solidFill>
+                  <a:srgbClr val="33393F"/>
+                </a:solidFill>
+                <a:latin typeface="맑은 고딕"/>
+                <a:ea typeface="맑은 고딕"/>
+              </a:rPr>
+              <a:t>처방과</a:t>
+            </a:r>
+            <a:r>
+              <a:rPr sz="1500" b="1" dirty="0">
+                <a:solidFill>
+                  <a:srgbClr val="33393F"/>
+                </a:solidFill>
+                <a:latin typeface="맑은 고딕"/>
+                <a:ea typeface="맑은 고딕"/>
+              </a:rPr>
+              <a:t> </a:t>
+            </a:r>
+            <a:r>
+              <a:rPr sz="1500" b="1" dirty="0" err="1">
+                <a:solidFill>
+                  <a:srgbClr val="33393F"/>
+                </a:solidFill>
+                <a:latin typeface="맑은 고딕"/>
+                <a:ea typeface="맑은 고딕"/>
+              </a:rPr>
+              <a:t>대조</a:t>
+            </a:r>
+            <a:endParaRPr sz="1500" b="1" dirty="0">
+              <a:solidFill>
+                <a:srgbClr val="33393F"/>
+              </a:solidFill>
+              <a:latin typeface="맑은 고딕"/>
+              <a:ea typeface="맑은 고딕"/>
+            </a:endParaRPr>
           </a:p>
           <a:p>
             <a:pPr>
@@ -19026,15 +19093,162 @@
               </a:spcAft>
             </a:pPr>
             <a:r>
-              <a:rPr sz="1200" b="0">
-                <a:solidFill>
-                  <a:srgbClr val="1C1C1E"/>
-                </a:solidFill>
-                <a:latin typeface="맑은 고딕"/>
-                <a:ea typeface="맑은 고딕"/>
-              </a:rPr>
-              <a:t>정부가 이미 정한 기준만 조합해 배분 규칙을 만들면</a:t>
-            </a:r>
+              <a:rPr sz="1200" b="0" dirty="0" err="1">
+                <a:solidFill>
+                  <a:srgbClr val="1C1C1E"/>
+                </a:solidFill>
+                <a:latin typeface="맑은 고딕"/>
+                <a:ea typeface="맑은 고딕"/>
+              </a:rPr>
+              <a:t>정부가</a:t>
+            </a:r>
+            <a:r>
+              <a:rPr sz="1200" b="0" dirty="0">
+                <a:solidFill>
+                  <a:srgbClr val="1C1C1E"/>
+                </a:solidFill>
+                <a:latin typeface="맑은 고딕"/>
+                <a:ea typeface="맑은 고딕"/>
+              </a:rPr>
+              <a:t> </a:t>
+            </a:r>
+            <a:r>
+              <a:rPr sz="1200" b="0" dirty="0" err="1">
+                <a:solidFill>
+                  <a:srgbClr val="1C1C1E"/>
+                </a:solidFill>
+                <a:latin typeface="맑은 고딕"/>
+                <a:ea typeface="맑은 고딕"/>
+              </a:rPr>
+              <a:t>이미</a:t>
+            </a:r>
+            <a:r>
+              <a:rPr sz="1200" b="0" dirty="0">
+                <a:solidFill>
+                  <a:srgbClr val="1C1C1E"/>
+                </a:solidFill>
+                <a:latin typeface="맑은 고딕"/>
+                <a:ea typeface="맑은 고딕"/>
+              </a:rPr>
+              <a:t> </a:t>
+            </a:r>
+            <a:r>
+              <a:rPr sz="1200" b="0" dirty="0" err="1">
+                <a:solidFill>
+                  <a:srgbClr val="1C1C1E"/>
+                </a:solidFill>
+                <a:latin typeface="맑은 고딕"/>
+                <a:ea typeface="맑은 고딕"/>
+              </a:rPr>
+              <a:t>정한</a:t>
+            </a:r>
+            <a:r>
+              <a:rPr sz="1200" b="0" dirty="0">
+                <a:solidFill>
+                  <a:srgbClr val="1C1C1E"/>
+                </a:solidFill>
+                <a:latin typeface="맑은 고딕"/>
+                <a:ea typeface="맑은 고딕"/>
+              </a:rPr>
+              <a:t> </a:t>
+            </a:r>
+            <a:r>
+              <a:rPr sz="1200" b="0" dirty="0" err="1">
+                <a:solidFill>
+                  <a:srgbClr val="1C1C1E"/>
+                </a:solidFill>
+                <a:latin typeface="맑은 고딕"/>
+                <a:ea typeface="맑은 고딕"/>
+              </a:rPr>
+              <a:t>기준만</a:t>
+            </a:r>
+            <a:r>
+              <a:rPr sz="1200" b="0" dirty="0">
+                <a:solidFill>
+                  <a:srgbClr val="1C1C1E"/>
+                </a:solidFill>
+                <a:latin typeface="맑은 고딕"/>
+                <a:ea typeface="맑은 고딕"/>
+              </a:rPr>
+              <a:t> </a:t>
+            </a:r>
+            <a:r>
+              <a:rPr sz="1200" b="0" dirty="0" err="1">
+                <a:solidFill>
+                  <a:srgbClr val="1C1C1E"/>
+                </a:solidFill>
+                <a:latin typeface="맑은 고딕"/>
+                <a:ea typeface="맑은 고딕"/>
+              </a:rPr>
+              <a:t>조합해</a:t>
+            </a:r>
+            <a:r>
+              <a:rPr sz="1200" b="0" dirty="0">
+                <a:solidFill>
+                  <a:srgbClr val="1C1C1E"/>
+                </a:solidFill>
+                <a:latin typeface="맑은 고딕"/>
+                <a:ea typeface="맑은 고딕"/>
+              </a:rPr>
+              <a:t> </a:t>
+            </a:r>
+            <a:r>
+              <a:rPr sz="1200" b="0" dirty="0" err="1">
+                <a:solidFill>
+                  <a:srgbClr val="1C1C1E"/>
+                </a:solidFill>
+                <a:latin typeface="맑은 고딕"/>
+                <a:ea typeface="맑은 고딕"/>
+              </a:rPr>
+              <a:t>배분</a:t>
+            </a:r>
+            <a:r>
+              <a:rPr sz="1200" b="0" dirty="0">
+                <a:solidFill>
+                  <a:srgbClr val="1C1C1E"/>
+                </a:solidFill>
+                <a:latin typeface="맑은 고딕"/>
+                <a:ea typeface="맑은 고딕"/>
+              </a:rPr>
+              <a:t> </a:t>
+            </a:r>
+            <a:r>
+              <a:rPr sz="1200" b="0" dirty="0" err="1">
+                <a:solidFill>
+                  <a:srgbClr val="1C1C1E"/>
+                </a:solidFill>
+                <a:latin typeface="맑은 고딕"/>
+                <a:ea typeface="맑은 고딕"/>
+              </a:rPr>
+              <a:t>규칙을</a:t>
+            </a:r>
+            <a:r>
+              <a:rPr sz="1200" b="0" dirty="0">
+                <a:solidFill>
+                  <a:srgbClr val="1C1C1E"/>
+                </a:solidFill>
+                <a:latin typeface="맑은 고딕"/>
+                <a:ea typeface="맑은 고딕"/>
+              </a:rPr>
+              <a:t> </a:t>
+            </a:r>
+            <a:r>
+              <a:rPr sz="1200" b="0" dirty="0" err="1">
+                <a:solidFill>
+                  <a:srgbClr val="1C1C1E"/>
+                </a:solidFill>
+                <a:latin typeface="맑은 고딕"/>
+                <a:ea typeface="맑은 고딕"/>
+              </a:rPr>
+              <a:t>만들면</a:t>
+            </a:r>
+            <a:endParaRPr sz="1200" b="0" dirty="0">
+              <a:solidFill>
+                <a:srgbClr val="1C1C1E"/>
+              </a:solidFill>
+              <a:latin typeface="맑은 고딕"/>
+              <a:ea typeface="맑은 고딕"/>
+            </a:endParaRPr>
           </a:p>
           <a:p>
             <a:pPr>
@@ -19046,14 +19260,84 @@
               </a:spcAft>
             </a:pPr>
             <a:r>
-              <a:rPr sz="1200" b="0">
-                <a:solidFill>
-                  <a:srgbClr val="1C1C1E"/>
-                </a:solidFill>
-                <a:latin typeface="맑은 고딕"/>
-                <a:ea typeface="맑은 고딕"/>
-              </a:rPr>
-              <a:t>현행 배분과 어디가 어긋나는가?</a:t>
+              <a:rPr sz="1200" b="0" dirty="0" err="1">
+                <a:solidFill>
+                  <a:srgbClr val="1C1C1E"/>
+                </a:solidFill>
+                <a:latin typeface="맑은 고딕"/>
+                <a:ea typeface="맑은 고딕"/>
+              </a:rPr>
+              <a:t>현행</a:t>
+            </a:r>
+            <a:r>
+              <a:rPr sz="1200" b="0" dirty="0">
+                <a:solidFill>
+                  <a:srgbClr val="1C1C1E"/>
+                </a:solidFill>
+                <a:latin typeface="맑은 고딕"/>
+                <a:ea typeface="맑은 고딕"/>
+              </a:rPr>
+              <a:t> </a:t>
+            </a:r>
+            <a:r>
+              <a:rPr sz="1200" b="0" dirty="0" err="1">
+                <a:solidFill>
+                  <a:srgbClr val="1C1C1E"/>
+                </a:solidFill>
+                <a:latin typeface="맑은 고딕"/>
+                <a:ea typeface="맑은 고딕"/>
+              </a:rPr>
+              <a:t>배분과</a:t>
+            </a:r>
+            <a:r>
+              <a:rPr sz="1200" b="0" dirty="0">
+                <a:solidFill>
+                  <a:srgbClr val="1C1C1E"/>
+                </a:solidFill>
+                <a:latin typeface="맑은 고딕"/>
+                <a:ea typeface="맑은 고딕"/>
+              </a:rPr>
+              <a:t> </a:t>
+            </a:r>
+            <a:r>
+              <a:rPr sz="1200" b="0" dirty="0" err="1">
+                <a:solidFill>
+                  <a:srgbClr val="1C1C1E"/>
+                </a:solidFill>
+                <a:latin typeface="맑은 고딕"/>
+                <a:ea typeface="맑은 고딕"/>
+              </a:rPr>
+              <a:t>어디가</a:t>
+            </a:r>
+            <a:r>
+              <a:rPr sz="1200" b="0" dirty="0">
+                <a:solidFill>
+                  <a:srgbClr val="1C1C1E"/>
+                </a:solidFill>
+                <a:latin typeface="맑은 고딕"/>
+                <a:ea typeface="맑은 고딕"/>
+              </a:rPr>
+              <a:t> </a:t>
+            </a:r>
+            <a:r>
+              <a:rPr sz="1200" b="0" dirty="0" err="1">
+                <a:solidFill>
+                  <a:srgbClr val="1C1C1E"/>
+                </a:solidFill>
+                <a:latin typeface="맑은 고딕"/>
+                <a:ea typeface="맑은 고딕"/>
+              </a:rPr>
+              <a:t>어긋나는가</a:t>
+            </a:r>
+            <a:r>
+              <a:rPr sz="1200" b="0" dirty="0">
+                <a:solidFill>
+                  <a:srgbClr val="1C1C1E"/>
+                </a:solidFill>
+                <a:latin typeface="맑은 고딕"/>
+                <a:ea typeface="맑은 고딕"/>
+              </a:rPr>
+              <a:t>?</a:t>
             </a:r>
           </a:p>
         </p:txBody>

--- a/04_제출물/데이터분석_계획서.pptx
+++ b/04_제출물/데이터분석_계획서.pptx
@@ -14791,15 +14791,32 @@
               </a:spcAft>
             </a:pPr>
             <a:r>
-              <a:rPr sz="1500" b="1">
+              <a:rPr sz="1500" b="1" dirty="0">
                 <a:solidFill>
                   <a:srgbClr val="33393F"/>
                 </a:solidFill>
                 <a:latin typeface="맑은 고딕"/>
                 <a:ea typeface="맑은 고딕"/>
               </a:rPr>
-              <a:t>② 지정</a:t>
-            </a:r>
+              <a:t>② </a:t>
+            </a:r>
+            <a:r>
+              <a:rPr sz="1500" b="1" dirty="0" err="1">
+                <a:solidFill>
+                  <a:srgbClr val="33393F"/>
+                </a:solidFill>
+                <a:latin typeface="맑은 고딕"/>
+                <a:ea typeface="맑은 고딕"/>
+              </a:rPr>
+              <a:t>지정</a:t>
+            </a:r>
+            <a:endParaRPr sz="1500" b="1" dirty="0">
+              <a:solidFill>
+                <a:srgbClr val="33393F"/>
+              </a:solidFill>
+              <a:latin typeface="맑은 고딕"/>
+              <a:ea typeface="맑은 고딕"/>
+            </a:endParaRPr>
           </a:p>
           <a:p>
             <a:pPr>
@@ -14811,15 +14828,72 @@
               </a:spcAft>
             </a:pPr>
             <a:r>
-              <a:rPr sz="1050" b="0">
-                <a:solidFill>
-                  <a:srgbClr val="1C1C1E"/>
-                </a:solidFill>
-                <a:latin typeface="맑은 고딕"/>
-                <a:ea typeface="맑은 고딕"/>
-              </a:rPr>
-              <a:t>그 값을 임계값(30/30)과 대조해</a:t>
-            </a:r>
+              <a:rPr sz="1050" b="0" dirty="0">
+                <a:solidFill>
+                  <a:srgbClr val="1C1C1E"/>
+                </a:solidFill>
+                <a:latin typeface="맑은 고딕"/>
+                <a:ea typeface="맑은 고딕"/>
+              </a:rPr>
+              <a:t>그 </a:t>
+            </a:r>
+            <a:r>
+              <a:rPr sz="1050" b="0" dirty="0" err="1">
+                <a:solidFill>
+                  <a:srgbClr val="1C1C1E"/>
+                </a:solidFill>
+                <a:latin typeface="맑은 고딕"/>
+                <a:ea typeface="맑은 고딕"/>
+              </a:rPr>
+              <a:t>값을</a:t>
+            </a:r>
+            <a:r>
+              <a:rPr sz="1050" b="0" dirty="0">
+                <a:solidFill>
+                  <a:srgbClr val="1C1C1E"/>
+                </a:solidFill>
+                <a:latin typeface="맑은 고딕"/>
+                <a:ea typeface="맑은 고딕"/>
+              </a:rPr>
+              <a:t> </a:t>
+            </a:r>
+            <a:r>
+              <a:rPr sz="1050" b="0" dirty="0" err="1">
+                <a:solidFill>
+                  <a:srgbClr val="1C1C1E"/>
+                </a:solidFill>
+                <a:latin typeface="맑은 고딕"/>
+                <a:ea typeface="맑은 고딕"/>
+              </a:rPr>
+              <a:t>임계값</a:t>
+            </a:r>
+            <a:r>
+              <a:rPr sz="1050" b="0" dirty="0">
+                <a:solidFill>
+                  <a:srgbClr val="1C1C1E"/>
+                </a:solidFill>
+                <a:latin typeface="맑은 고딕"/>
+                <a:ea typeface="맑은 고딕"/>
+              </a:rPr>
+              <a:t>(30/30)과 </a:t>
+            </a:r>
+            <a:r>
+              <a:rPr sz="1050" b="0" dirty="0" err="1">
+                <a:solidFill>
+                  <a:srgbClr val="1C1C1E"/>
+                </a:solidFill>
+                <a:latin typeface="맑은 고딕"/>
+                <a:ea typeface="맑은 고딕"/>
+              </a:rPr>
+              <a:t>대조해</a:t>
+            </a:r>
+            <a:endParaRPr sz="1050" b="0" dirty="0">
+              <a:solidFill>
+                <a:srgbClr val="1C1C1E"/>
+              </a:solidFill>
+              <a:latin typeface="맑은 고딕"/>
+              <a:ea typeface="맑은 고딕"/>
+            </a:endParaRPr>
           </a:p>
           <a:p>
             <a:pPr>
@@ -14831,15 +14905,42 @@
               </a:spcAft>
             </a:pPr>
             <a:r>
-              <a:rPr sz="1050" b="0">
-                <a:solidFill>
-                  <a:srgbClr val="1C1C1E"/>
-                </a:solidFill>
-                <a:latin typeface="맑은 고딕"/>
-                <a:ea typeface="맑은 고딕"/>
-              </a:rPr>
-              <a:t>분만취약지를 판정하고</a:t>
-            </a:r>
+              <a:rPr sz="1050" b="0" dirty="0" err="1">
+                <a:solidFill>
+                  <a:srgbClr val="1C1C1E"/>
+                </a:solidFill>
+                <a:latin typeface="맑은 고딕"/>
+                <a:ea typeface="맑은 고딕"/>
+              </a:rPr>
+              <a:t>분만취약지를</a:t>
+            </a:r>
+            <a:r>
+              <a:rPr sz="1050" b="0" dirty="0">
+                <a:solidFill>
+                  <a:srgbClr val="1C1C1E"/>
+                </a:solidFill>
+                <a:latin typeface="맑은 고딕"/>
+                <a:ea typeface="맑은 고딕"/>
+              </a:rPr>
+              <a:t> </a:t>
+            </a:r>
+            <a:r>
+              <a:rPr sz="1050" b="0" dirty="0" err="1">
+                <a:solidFill>
+                  <a:srgbClr val="1C1C1E"/>
+                </a:solidFill>
+                <a:latin typeface="맑은 고딕"/>
+                <a:ea typeface="맑은 고딕"/>
+              </a:rPr>
+              <a:t>판정하고</a:t>
+            </a:r>
+            <a:endParaRPr sz="1050" b="0" dirty="0">
+              <a:solidFill>
+                <a:srgbClr val="1C1C1E"/>
+              </a:solidFill>
+              <a:latin typeface="맑은 고딕"/>
+              <a:ea typeface="맑은 고딕"/>
+            </a:endParaRPr>
           </a:p>
           <a:p>
             <a:pPr>
@@ -14851,15 +14952,52 @@
               </a:spcAft>
             </a:pPr>
             <a:r>
-              <a:rPr sz="1050" b="0">
-                <a:solidFill>
-                  <a:srgbClr val="1C1C1E"/>
-                </a:solidFill>
-                <a:latin typeface="맑은 고딕"/>
-                <a:ea typeface="맑은 고딕"/>
-              </a:rPr>
-              <a:t>A·B·C 등급 부여</a:t>
-            </a:r>
+              <a:rPr sz="1050" b="0" dirty="0">
+                <a:solidFill>
+                  <a:srgbClr val="1C1C1E"/>
+                </a:solidFill>
+                <a:latin typeface="맑은 고딕"/>
+                <a:ea typeface="맑은 고딕"/>
+              </a:rPr>
+              <a:t>A·B·C </a:t>
+            </a:r>
+            <a:r>
+              <a:rPr sz="1050" b="0" dirty="0" err="1">
+                <a:solidFill>
+                  <a:srgbClr val="1C1C1E"/>
+                </a:solidFill>
+                <a:latin typeface="맑은 고딕"/>
+                <a:ea typeface="맑은 고딕"/>
+              </a:rPr>
+              <a:t>등급</a:t>
+            </a:r>
+            <a:r>
+              <a:rPr sz="1050" b="0" dirty="0">
+                <a:solidFill>
+                  <a:srgbClr val="1C1C1E"/>
+                </a:solidFill>
+                <a:latin typeface="맑은 고딕"/>
+                <a:ea typeface="맑은 고딕"/>
+              </a:rPr>
+              <a:t> </a:t>
+            </a:r>
+            <a:r>
+              <a:rPr sz="1050" b="0" dirty="0" err="1">
+                <a:solidFill>
+                  <a:srgbClr val="1C1C1E"/>
+                </a:solidFill>
+                <a:latin typeface="맑은 고딕"/>
+                <a:ea typeface="맑은 고딕"/>
+              </a:rPr>
+              <a:t>부여</a:t>
+            </a:r>
+            <a:endParaRPr sz="1050" b="0" dirty="0">
+              <a:solidFill>
+                <a:srgbClr val="1C1C1E"/>
+              </a:solidFill>
+              <a:latin typeface="맑은 고딕"/>
+              <a:ea typeface="맑은 고딕"/>
+            </a:endParaRPr>
           </a:p>
         </p:txBody>
       </p:sp>

--- a/04_제출물/데이터분석_계획서.pptx
+++ b/04_제출물/데이터분석_계획서.pptx
@@ -3595,8 +3595,8 @@
         </p:nvSpPr>
         <p:spPr>
           <a:xfrm>
-            <a:off x="502920" y="475488"/>
-            <a:ext cx="310896" cy="310896"/>
+            <a:off x="554736" y="527304"/>
+            <a:ext cx="207264" cy="207264"/>
           </a:xfrm>
           <a:prstGeom prst="roundRect">
             <a:avLst>
@@ -4503,8 +4503,8 @@
         </p:nvSpPr>
         <p:spPr>
           <a:xfrm>
-            <a:off x="502920" y="475488"/>
-            <a:ext cx="310896" cy="310896"/>
+            <a:off x="554736" y="527304"/>
+            <a:ext cx="207264" cy="207264"/>
           </a:xfrm>
           <a:prstGeom prst="roundRect">
             <a:avLst>
@@ -5666,8 +5666,8 @@
         </p:nvSpPr>
         <p:spPr>
           <a:xfrm>
-            <a:off x="502920" y="475488"/>
-            <a:ext cx="310896" cy="310896"/>
+            <a:off x="554736" y="527304"/>
+            <a:ext cx="207264" cy="207264"/>
           </a:xfrm>
           <a:prstGeom prst="roundRect">
             <a:avLst>
@@ -6496,8 +6496,8 @@
         </p:nvSpPr>
         <p:spPr>
           <a:xfrm>
-            <a:off x="502920" y="475488"/>
-            <a:ext cx="310896" cy="310896"/>
+            <a:off x="554736" y="527304"/>
+            <a:ext cx="207264" cy="207264"/>
           </a:xfrm>
           <a:prstGeom prst="roundRect">
             <a:avLst>
@@ -7639,8 +7639,8 @@
         </p:nvSpPr>
         <p:spPr>
           <a:xfrm>
-            <a:off x="502920" y="475488"/>
-            <a:ext cx="310896" cy="310896"/>
+            <a:off x="554736" y="527304"/>
+            <a:ext cx="207264" cy="207264"/>
           </a:xfrm>
           <a:prstGeom prst="roundRect">
             <a:avLst>
@@ -8910,8 +8910,8 @@
         </p:nvSpPr>
         <p:spPr>
           <a:xfrm>
-            <a:off x="502920" y="475488"/>
-            <a:ext cx="310896" cy="310896"/>
+            <a:off x="554736" y="527304"/>
+            <a:ext cx="207264" cy="207264"/>
           </a:xfrm>
           <a:prstGeom prst="roundRect">
             <a:avLst>
@@ -10704,8 +10704,8 @@
         </p:nvSpPr>
         <p:spPr>
           <a:xfrm>
-            <a:off x="502920" y="475488"/>
-            <a:ext cx="310896" cy="310896"/>
+            <a:off x="554736" y="527304"/>
+            <a:ext cx="207264" cy="207264"/>
           </a:xfrm>
           <a:prstGeom prst="roundRect">
             <a:avLst>
@@ -13988,8 +13988,8 @@
         </p:nvSpPr>
         <p:spPr>
           <a:xfrm>
-            <a:off x="502920" y="475488"/>
-            <a:ext cx="310896" cy="310896"/>
+            <a:off x="554736" y="527304"/>
+            <a:ext cx="207264" cy="207264"/>
           </a:xfrm>
           <a:prstGeom prst="roundRect">
             <a:avLst>
@@ -17307,8 +17307,8 @@
         </p:nvSpPr>
         <p:spPr>
           <a:xfrm>
-            <a:off x="502920" y="475488"/>
-            <a:ext cx="310896" cy="310896"/>
+            <a:off x="554736" y="527304"/>
+            <a:ext cx="207264" cy="207264"/>
           </a:xfrm>
           <a:prstGeom prst="roundRect">
             <a:avLst>
@@ -19621,8 +19621,8 @@
         </p:nvSpPr>
         <p:spPr>
           <a:xfrm>
-            <a:off x="502920" y="475488"/>
-            <a:ext cx="310896" cy="310896"/>
+            <a:off x="554736" y="527304"/>
+            <a:ext cx="207264" cy="207264"/>
           </a:xfrm>
           <a:prstGeom prst="roundRect">
             <a:avLst>
@@ -20603,8 +20603,8 @@
         </p:nvSpPr>
         <p:spPr>
           <a:xfrm>
-            <a:off x="502920" y="475488"/>
-            <a:ext cx="310896" cy="310896"/>
+            <a:off x="554736" y="527304"/>
+            <a:ext cx="207264" cy="207264"/>
           </a:xfrm>
           <a:prstGeom prst="roundRect">
             <a:avLst>
@@ -21699,8 +21699,8 @@
         </p:nvSpPr>
         <p:spPr>
           <a:xfrm>
-            <a:off x="502920" y="475488"/>
-            <a:ext cx="310896" cy="310896"/>
+            <a:off x="554736" y="527304"/>
+            <a:ext cx="207264" cy="207264"/>
           </a:xfrm>
           <a:prstGeom prst="roundRect">
             <a:avLst>
@@ -22861,8 +22861,8 @@
         </p:nvSpPr>
         <p:spPr>
           <a:xfrm>
-            <a:off x="502920" y="475488"/>
-            <a:ext cx="310896" cy="310896"/>
+            <a:off x="554736" y="527304"/>
+            <a:ext cx="207264" cy="207264"/>
           </a:xfrm>
           <a:prstGeom prst="roundRect">
             <a:avLst>

--- a/04_제출물/데이터분석_계획서.pptx
+++ b/04_제출물/데이터분석_계획서.pptx
@@ -19152,7 +19152,7 @@
         <p:spPr>
           <a:xfrm>
             <a:off x="6583679" y="3502152"/>
-            <a:ext cx="5074920" cy="1463040"/>
+            <a:ext cx="5074920" cy="847220"/>
           </a:xfrm>
           <a:prstGeom prst="rect">
             <a:avLst/>
@@ -19438,37 +19438,47 @@
               <a:t> </a:t>
             </a:r>
             <a:r>
-              <a:rPr sz="1200" b="0" dirty="0" err="1">
-                <a:solidFill>
-                  <a:srgbClr val="1C1C1E"/>
-                </a:solidFill>
-                <a:latin typeface="맑은 고딕"/>
-                <a:ea typeface="맑은 고딕"/>
-              </a:rPr>
-              <a:t>어디가</a:t>
-            </a:r>
-            <a:r>
-              <a:rPr sz="1200" b="0" dirty="0">
-                <a:solidFill>
-                  <a:srgbClr val="1C1C1E"/>
-                </a:solidFill>
-                <a:latin typeface="맑은 고딕"/>
-                <a:ea typeface="맑은 고딕"/>
-              </a:rPr>
-              <a:t> </a:t>
-            </a:r>
-            <a:r>
-              <a:rPr sz="1200" b="0" dirty="0" err="1">
-                <a:solidFill>
-                  <a:srgbClr val="1C1C1E"/>
-                </a:solidFill>
-                <a:latin typeface="맑은 고딕"/>
-                <a:ea typeface="맑은 고딕"/>
-              </a:rPr>
-              <a:t>어긋나는가</a:t>
-            </a:r>
-            <a:r>
-              <a:rPr sz="1200" b="0" dirty="0">
+              <a:rPr lang="ko-KR" altLang="en-US" sz="1200" b="0" dirty="0">
+                <a:solidFill>
+                  <a:srgbClr val="1C1C1E"/>
+                </a:solidFill>
+                <a:latin typeface="맑은 고딕"/>
+                <a:ea typeface="맑은 고딕"/>
+              </a:rPr>
+              <a:t>잘 부합하는가</a:t>
+            </a:r>
+            <a:r>
+              <a:rPr lang="en-US" altLang="ko-KR" sz="1200" b="0" dirty="0">
+                <a:solidFill>
+                  <a:srgbClr val="1C1C1E"/>
+                </a:solidFill>
+                <a:latin typeface="맑은 고딕"/>
+                <a:ea typeface="맑은 고딕"/>
+              </a:rPr>
+              <a:t>? </a:t>
+            </a:r>
+            <a:r>
+              <a:rPr lang="ko-KR" altLang="en-US" sz="1200" b="0" dirty="0">
+                <a:solidFill>
+                  <a:srgbClr val="1C1C1E"/>
+                </a:solidFill>
+                <a:latin typeface="맑은 고딕"/>
+                <a:ea typeface="맑은 고딕"/>
+              </a:rPr>
+              <a:t>꼭 필요한 곳으로 자원이 </a:t>
+            </a:r>
+            <a:r>
+              <a:rPr lang="ko-KR" altLang="en-US" sz="1200" b="0" dirty="0" err="1">
+                <a:solidFill>
+                  <a:srgbClr val="1C1C1E"/>
+                </a:solidFill>
+                <a:latin typeface="맑은 고딕"/>
+                <a:ea typeface="맑은 고딕"/>
+              </a:rPr>
+              <a:t>가고있는가</a:t>
+            </a:r>
+            <a:r>
+              <a:rPr lang="en-US" altLang="ko-KR" sz="1200" b="0" dirty="0">
                 <a:solidFill>
                   <a:srgbClr val="1C1C1E"/>
                 </a:solidFill>
@@ -19477,6 +19487,13 @@
               </a:rPr>
               <a:t>?</a:t>
             </a:r>
+            <a:endParaRPr sz="1200" b="0" dirty="0">
+              <a:solidFill>
+                <a:srgbClr val="1C1C1E"/>
+              </a:solidFill>
+              <a:latin typeface="맑은 고딕"/>
+              <a:ea typeface="맑은 고딕"/>
+            </a:endParaRPr>
           </a:p>
         </p:txBody>
       </p:sp>
@@ -19511,14 +19528,334 @@
               </a:spcAft>
             </a:pPr>
             <a:r>
-              <a:rPr sz="1250" b="1">
-                <a:solidFill>
-                  <a:srgbClr val="1C1C1E"/>
-                </a:solidFill>
-                <a:latin typeface="맑은 고딕"/>
-                <a:ea typeface="맑은 고딕"/>
-              </a:rPr>
-              <a:t>Q1·2는 지정을, Q3·4는 배분을 본다. 앞의 둘로 "규칙이 무엇을 보는가"를 확정해야 뒤의 둘에서 "그 규칙대로 나눠지고 있는가"를 물을 수 있다.</a:t>
+              <a:rPr sz="1250" b="1" dirty="0">
+                <a:solidFill>
+                  <a:srgbClr val="1C1C1E"/>
+                </a:solidFill>
+                <a:latin typeface="맑은 고딕"/>
+                <a:ea typeface="맑은 고딕"/>
+              </a:rPr>
+              <a:t>Q1·2는 </a:t>
+            </a:r>
+            <a:r>
+              <a:rPr sz="1250" b="1" dirty="0" err="1">
+                <a:solidFill>
+                  <a:srgbClr val="1C1C1E"/>
+                </a:solidFill>
+                <a:latin typeface="맑은 고딕"/>
+                <a:ea typeface="맑은 고딕"/>
+              </a:rPr>
+              <a:t>지정을</a:t>
+            </a:r>
+            <a:r>
+              <a:rPr sz="1250" b="1" dirty="0">
+                <a:solidFill>
+                  <a:srgbClr val="1C1C1E"/>
+                </a:solidFill>
+                <a:latin typeface="맑은 고딕"/>
+                <a:ea typeface="맑은 고딕"/>
+              </a:rPr>
+              <a:t>, Q3·4는 </a:t>
+            </a:r>
+            <a:r>
+              <a:rPr sz="1250" b="1" dirty="0" err="1">
+                <a:solidFill>
+                  <a:srgbClr val="1C1C1E"/>
+                </a:solidFill>
+                <a:latin typeface="맑은 고딕"/>
+                <a:ea typeface="맑은 고딕"/>
+              </a:rPr>
+              <a:t>배분을</a:t>
+            </a:r>
+            <a:r>
+              <a:rPr sz="1250" b="1" dirty="0">
+                <a:solidFill>
+                  <a:srgbClr val="1C1C1E"/>
+                </a:solidFill>
+                <a:latin typeface="맑은 고딕"/>
+                <a:ea typeface="맑은 고딕"/>
+              </a:rPr>
+              <a:t> </a:t>
+            </a:r>
+            <a:r>
+              <a:rPr sz="1250" b="1" dirty="0" err="1">
+                <a:solidFill>
+                  <a:srgbClr val="1C1C1E"/>
+                </a:solidFill>
+                <a:latin typeface="맑은 고딕"/>
+                <a:ea typeface="맑은 고딕"/>
+              </a:rPr>
+              <a:t>본다</a:t>
+            </a:r>
+            <a:r>
+              <a:rPr sz="1250" b="1" dirty="0">
+                <a:solidFill>
+                  <a:srgbClr val="1C1C1E"/>
+                </a:solidFill>
+                <a:latin typeface="맑은 고딕"/>
+                <a:ea typeface="맑은 고딕"/>
+              </a:rPr>
+              <a:t>. </a:t>
+            </a:r>
+            <a:r>
+              <a:rPr sz="1250" b="1" dirty="0" err="1">
+                <a:solidFill>
+                  <a:srgbClr val="1C1C1E"/>
+                </a:solidFill>
+                <a:latin typeface="맑은 고딕"/>
+                <a:ea typeface="맑은 고딕"/>
+              </a:rPr>
+              <a:t>앞의</a:t>
+            </a:r>
+            <a:r>
+              <a:rPr sz="1250" b="1" dirty="0">
+                <a:solidFill>
+                  <a:srgbClr val="1C1C1E"/>
+                </a:solidFill>
+                <a:latin typeface="맑은 고딕"/>
+                <a:ea typeface="맑은 고딕"/>
+              </a:rPr>
+              <a:t> </a:t>
+            </a:r>
+            <a:r>
+              <a:rPr sz="1250" b="1" dirty="0" err="1">
+                <a:solidFill>
+                  <a:srgbClr val="1C1C1E"/>
+                </a:solidFill>
+                <a:latin typeface="맑은 고딕"/>
+                <a:ea typeface="맑은 고딕"/>
+              </a:rPr>
+              <a:t>둘로</a:t>
+            </a:r>
+            <a:r>
+              <a:rPr sz="1250" b="1" dirty="0">
+                <a:solidFill>
+                  <a:srgbClr val="1C1C1E"/>
+                </a:solidFill>
+                <a:latin typeface="맑은 고딕"/>
+                <a:ea typeface="맑은 고딕"/>
+              </a:rPr>
+              <a:t> "</a:t>
+            </a:r>
+            <a:r>
+              <a:rPr sz="1250" b="1" dirty="0" err="1">
+                <a:solidFill>
+                  <a:srgbClr val="1C1C1E"/>
+                </a:solidFill>
+                <a:latin typeface="맑은 고딕"/>
+                <a:ea typeface="맑은 고딕"/>
+              </a:rPr>
+              <a:t>규칙이</a:t>
+            </a:r>
+            <a:r>
+              <a:rPr sz="1250" b="1" dirty="0">
+                <a:solidFill>
+                  <a:srgbClr val="1C1C1E"/>
+                </a:solidFill>
+                <a:latin typeface="맑은 고딕"/>
+                <a:ea typeface="맑은 고딕"/>
+              </a:rPr>
+              <a:t> </a:t>
+            </a:r>
+            <a:r>
+              <a:rPr sz="1250" b="1" dirty="0" err="1">
+                <a:solidFill>
+                  <a:srgbClr val="1C1C1E"/>
+                </a:solidFill>
+                <a:latin typeface="맑은 고딕"/>
+                <a:ea typeface="맑은 고딕"/>
+              </a:rPr>
+              <a:t>무엇을</a:t>
+            </a:r>
+            <a:r>
+              <a:rPr sz="1250" b="1" dirty="0">
+                <a:solidFill>
+                  <a:srgbClr val="1C1C1E"/>
+                </a:solidFill>
+                <a:latin typeface="맑은 고딕"/>
+                <a:ea typeface="맑은 고딕"/>
+              </a:rPr>
+              <a:t> </a:t>
+            </a:r>
+            <a:r>
+              <a:rPr sz="1250" b="1" dirty="0" err="1">
+                <a:solidFill>
+                  <a:srgbClr val="1C1C1E"/>
+                </a:solidFill>
+                <a:latin typeface="맑은 고딕"/>
+                <a:ea typeface="맑은 고딕"/>
+              </a:rPr>
+              <a:t>보는가"를</a:t>
+            </a:r>
+            <a:r>
+              <a:rPr sz="1250" b="1" dirty="0">
+                <a:solidFill>
+                  <a:srgbClr val="1C1C1E"/>
+                </a:solidFill>
+                <a:latin typeface="맑은 고딕"/>
+                <a:ea typeface="맑은 고딕"/>
+              </a:rPr>
+              <a:t> </a:t>
+            </a:r>
+            <a:r>
+              <a:rPr sz="1250" b="1" dirty="0" err="1">
+                <a:solidFill>
+                  <a:srgbClr val="1C1C1E"/>
+                </a:solidFill>
+                <a:latin typeface="맑은 고딕"/>
+                <a:ea typeface="맑은 고딕"/>
+              </a:rPr>
+              <a:t>확정해야</a:t>
+            </a:r>
+            <a:r>
+              <a:rPr sz="1250" b="1" dirty="0">
+                <a:solidFill>
+                  <a:srgbClr val="1C1C1E"/>
+                </a:solidFill>
+                <a:latin typeface="맑은 고딕"/>
+                <a:ea typeface="맑은 고딕"/>
+              </a:rPr>
+              <a:t> </a:t>
+            </a:r>
+            <a:r>
+              <a:rPr sz="1250" b="1" dirty="0" err="1">
+                <a:solidFill>
+                  <a:srgbClr val="1C1C1E"/>
+                </a:solidFill>
+                <a:latin typeface="맑은 고딕"/>
+                <a:ea typeface="맑은 고딕"/>
+              </a:rPr>
+              <a:t>뒤의</a:t>
+            </a:r>
+            <a:r>
+              <a:rPr sz="1250" b="1" dirty="0">
+                <a:solidFill>
+                  <a:srgbClr val="1C1C1E"/>
+                </a:solidFill>
+                <a:latin typeface="맑은 고딕"/>
+                <a:ea typeface="맑은 고딕"/>
+              </a:rPr>
+              <a:t> </a:t>
+            </a:r>
+            <a:r>
+              <a:rPr sz="1250" b="1" dirty="0" err="1">
+                <a:solidFill>
+                  <a:srgbClr val="1C1C1E"/>
+                </a:solidFill>
+                <a:latin typeface="맑은 고딕"/>
+                <a:ea typeface="맑은 고딕"/>
+              </a:rPr>
+              <a:t>둘에서</a:t>
+            </a:r>
+            <a:r>
+              <a:rPr sz="1250" b="1" dirty="0">
+                <a:solidFill>
+                  <a:srgbClr val="1C1C1E"/>
+                </a:solidFill>
+                <a:latin typeface="맑은 고딕"/>
+                <a:ea typeface="맑은 고딕"/>
+              </a:rPr>
+              <a:t> "그 </a:t>
+            </a:r>
+            <a:r>
+              <a:rPr sz="1250" b="1" dirty="0" err="1">
+                <a:solidFill>
+                  <a:srgbClr val="1C1C1E"/>
+                </a:solidFill>
+                <a:latin typeface="맑은 고딕"/>
+                <a:ea typeface="맑은 고딕"/>
+              </a:rPr>
+              <a:t>규칙대로</a:t>
+            </a:r>
+            <a:r>
+              <a:rPr sz="1250" b="1" dirty="0">
+                <a:solidFill>
+                  <a:srgbClr val="1C1C1E"/>
+                </a:solidFill>
+                <a:latin typeface="맑은 고딕"/>
+                <a:ea typeface="맑은 고딕"/>
+              </a:rPr>
+              <a:t> </a:t>
+            </a:r>
+            <a:r>
+              <a:rPr sz="1250" b="1" dirty="0" err="1">
+                <a:solidFill>
+                  <a:srgbClr val="1C1C1E"/>
+                </a:solidFill>
+                <a:latin typeface="맑은 고딕"/>
+                <a:ea typeface="맑은 고딕"/>
+              </a:rPr>
+              <a:t>나눠지고</a:t>
+            </a:r>
+            <a:r>
+              <a:rPr sz="1250" b="1" dirty="0">
+                <a:solidFill>
+                  <a:srgbClr val="1C1C1E"/>
+                </a:solidFill>
+                <a:latin typeface="맑은 고딕"/>
+                <a:ea typeface="맑은 고딕"/>
+              </a:rPr>
+              <a:t> </a:t>
+            </a:r>
+            <a:r>
+              <a:rPr sz="1250" b="1" dirty="0" err="1">
+                <a:solidFill>
+                  <a:srgbClr val="1C1C1E"/>
+                </a:solidFill>
+                <a:latin typeface="맑은 고딕"/>
+                <a:ea typeface="맑은 고딕"/>
+              </a:rPr>
+              <a:t>있는가"를</a:t>
+            </a:r>
+            <a:r>
+              <a:rPr sz="1250" b="1" dirty="0">
+                <a:solidFill>
+                  <a:srgbClr val="1C1C1E"/>
+                </a:solidFill>
+                <a:latin typeface="맑은 고딕"/>
+                <a:ea typeface="맑은 고딕"/>
+              </a:rPr>
+              <a:t> </a:t>
+            </a:r>
+            <a:r>
+              <a:rPr sz="1250" b="1" dirty="0" err="1">
+                <a:solidFill>
+                  <a:srgbClr val="1C1C1E"/>
+                </a:solidFill>
+                <a:latin typeface="맑은 고딕"/>
+                <a:ea typeface="맑은 고딕"/>
+              </a:rPr>
+              <a:t>물을</a:t>
+            </a:r>
+            <a:r>
+              <a:rPr sz="1250" b="1" dirty="0">
+                <a:solidFill>
+                  <a:srgbClr val="1C1C1E"/>
+                </a:solidFill>
+                <a:latin typeface="맑은 고딕"/>
+                <a:ea typeface="맑은 고딕"/>
+              </a:rPr>
+              <a:t> 수 </a:t>
+            </a:r>
+            <a:r>
+              <a:rPr sz="1250" b="1" dirty="0" err="1">
+                <a:solidFill>
+                  <a:srgbClr val="1C1C1E"/>
+                </a:solidFill>
+                <a:latin typeface="맑은 고딕"/>
+                <a:ea typeface="맑은 고딕"/>
+              </a:rPr>
+              <a:t>있다</a:t>
+            </a:r>
+            <a:r>
+              <a:rPr sz="1250" b="1" dirty="0">
+                <a:solidFill>
+                  <a:srgbClr val="1C1C1E"/>
+                </a:solidFill>
+                <a:latin typeface="맑은 고딕"/>
+                <a:ea typeface="맑은 고딕"/>
+              </a:rPr>
+              <a:t>.</a:t>
             </a:r>
           </a:p>
           <a:p>
@@ -19531,14 +19868,364 @@
               </a:spcAft>
             </a:pPr>
             <a:r>
-              <a:rPr sz="1200" b="0">
+              <a:rPr sz="1200" b="0" dirty="0" err="1">
                 <a:solidFill>
                   <a:srgbClr val="767A7F"/>
                 </a:solidFill>
                 <a:latin typeface="맑은 고딕"/>
                 <a:ea typeface="맑은 고딕"/>
               </a:rPr>
-              <a:t>무엇을 "재현 성공"으로 볼지, 무엇을 "사각지대"로 볼지는 분석을 시작하기 전에 정해 둔다 — 결과를 보고 기준을 맞추지 않기 위해서다.</a:t>
+              <a:t>무엇을</a:t>
+            </a:r>
+            <a:r>
+              <a:rPr sz="1200" b="0" dirty="0">
+                <a:solidFill>
+                  <a:srgbClr val="767A7F"/>
+                </a:solidFill>
+                <a:latin typeface="맑은 고딕"/>
+                <a:ea typeface="맑은 고딕"/>
+              </a:rPr>
+              <a:t> "</a:t>
+            </a:r>
+            <a:r>
+              <a:rPr sz="1200" b="0" dirty="0" err="1">
+                <a:solidFill>
+                  <a:srgbClr val="767A7F"/>
+                </a:solidFill>
+                <a:latin typeface="맑은 고딕"/>
+                <a:ea typeface="맑은 고딕"/>
+              </a:rPr>
+              <a:t>재현</a:t>
+            </a:r>
+            <a:r>
+              <a:rPr sz="1200" b="0" dirty="0">
+                <a:solidFill>
+                  <a:srgbClr val="767A7F"/>
+                </a:solidFill>
+                <a:latin typeface="맑은 고딕"/>
+                <a:ea typeface="맑은 고딕"/>
+              </a:rPr>
+              <a:t> </a:t>
+            </a:r>
+            <a:r>
+              <a:rPr sz="1200" b="0" dirty="0" err="1">
+                <a:solidFill>
+                  <a:srgbClr val="767A7F"/>
+                </a:solidFill>
+                <a:latin typeface="맑은 고딕"/>
+                <a:ea typeface="맑은 고딕"/>
+              </a:rPr>
+              <a:t>성공"으로</a:t>
+            </a:r>
+            <a:r>
+              <a:rPr sz="1200" b="0" dirty="0">
+                <a:solidFill>
+                  <a:srgbClr val="767A7F"/>
+                </a:solidFill>
+                <a:latin typeface="맑은 고딕"/>
+                <a:ea typeface="맑은 고딕"/>
+              </a:rPr>
+              <a:t> </a:t>
+            </a:r>
+            <a:r>
+              <a:rPr sz="1200" b="0" dirty="0" err="1">
+                <a:solidFill>
+                  <a:srgbClr val="767A7F"/>
+                </a:solidFill>
+                <a:latin typeface="맑은 고딕"/>
+                <a:ea typeface="맑은 고딕"/>
+              </a:rPr>
+              <a:t>볼지</a:t>
+            </a:r>
+            <a:r>
+              <a:rPr sz="1200" b="0" dirty="0">
+                <a:solidFill>
+                  <a:srgbClr val="767A7F"/>
+                </a:solidFill>
+                <a:latin typeface="맑은 고딕"/>
+                <a:ea typeface="맑은 고딕"/>
+              </a:rPr>
+              <a:t>, </a:t>
+            </a:r>
+            <a:r>
+              <a:rPr sz="1200" b="0" dirty="0" err="1">
+                <a:solidFill>
+                  <a:srgbClr val="767A7F"/>
+                </a:solidFill>
+                <a:latin typeface="맑은 고딕"/>
+                <a:ea typeface="맑은 고딕"/>
+              </a:rPr>
+              <a:t>무엇을</a:t>
+            </a:r>
+            <a:r>
+              <a:rPr sz="1200" b="0" dirty="0">
+                <a:solidFill>
+                  <a:srgbClr val="767A7F"/>
+                </a:solidFill>
+                <a:latin typeface="맑은 고딕"/>
+                <a:ea typeface="맑은 고딕"/>
+              </a:rPr>
+              <a:t> "</a:t>
+            </a:r>
+            <a:r>
+              <a:rPr sz="1200" b="0" dirty="0" err="1">
+                <a:solidFill>
+                  <a:srgbClr val="767A7F"/>
+                </a:solidFill>
+                <a:latin typeface="맑은 고딕"/>
+                <a:ea typeface="맑은 고딕"/>
+              </a:rPr>
+              <a:t>사각지대"로</a:t>
+            </a:r>
+            <a:r>
+              <a:rPr sz="1200" b="0" dirty="0">
+                <a:solidFill>
+                  <a:srgbClr val="767A7F"/>
+                </a:solidFill>
+                <a:latin typeface="맑은 고딕"/>
+                <a:ea typeface="맑은 고딕"/>
+              </a:rPr>
+              <a:t> </a:t>
+            </a:r>
+            <a:r>
+              <a:rPr sz="1200" b="0" dirty="0" err="1">
+                <a:solidFill>
+                  <a:srgbClr val="767A7F"/>
+                </a:solidFill>
+                <a:latin typeface="맑은 고딕"/>
+                <a:ea typeface="맑은 고딕"/>
+              </a:rPr>
+              <a:t>볼지는</a:t>
+            </a:r>
+            <a:r>
+              <a:rPr sz="1200" b="0" dirty="0">
+                <a:solidFill>
+                  <a:srgbClr val="767A7F"/>
+                </a:solidFill>
+                <a:latin typeface="맑은 고딕"/>
+                <a:ea typeface="맑은 고딕"/>
+              </a:rPr>
+              <a:t> </a:t>
+            </a:r>
+            <a:r>
+              <a:rPr sz="1200" b="0" dirty="0" err="1">
+                <a:solidFill>
+                  <a:srgbClr val="767A7F"/>
+                </a:solidFill>
+                <a:latin typeface="맑은 고딕"/>
+                <a:ea typeface="맑은 고딕"/>
+              </a:rPr>
+              <a:t>분석을</a:t>
+            </a:r>
+            <a:r>
+              <a:rPr sz="1200" b="0" dirty="0">
+                <a:solidFill>
+                  <a:srgbClr val="767A7F"/>
+                </a:solidFill>
+                <a:latin typeface="맑은 고딕"/>
+                <a:ea typeface="맑은 고딕"/>
+              </a:rPr>
+              <a:t> </a:t>
+            </a:r>
+            <a:r>
+              <a:rPr sz="1200" b="0" dirty="0" err="1">
+                <a:solidFill>
+                  <a:srgbClr val="767A7F"/>
+                </a:solidFill>
+                <a:latin typeface="맑은 고딕"/>
+                <a:ea typeface="맑은 고딕"/>
+              </a:rPr>
+              <a:t>시작하기</a:t>
+            </a:r>
+            <a:r>
+              <a:rPr sz="1200" b="0" dirty="0">
+                <a:solidFill>
+                  <a:srgbClr val="767A7F"/>
+                </a:solidFill>
+                <a:latin typeface="맑은 고딕"/>
+                <a:ea typeface="맑은 고딕"/>
+              </a:rPr>
+              <a:t> </a:t>
+            </a:r>
+            <a:r>
+              <a:rPr sz="1200" b="0" dirty="0" err="1">
+                <a:solidFill>
+                  <a:srgbClr val="767A7F"/>
+                </a:solidFill>
+                <a:latin typeface="맑은 고딕"/>
+                <a:ea typeface="맑은 고딕"/>
+              </a:rPr>
+              <a:t>전에</a:t>
+            </a:r>
+            <a:r>
+              <a:rPr sz="1200" b="0" dirty="0">
+                <a:solidFill>
+                  <a:srgbClr val="767A7F"/>
+                </a:solidFill>
+                <a:latin typeface="맑은 고딕"/>
+                <a:ea typeface="맑은 고딕"/>
+              </a:rPr>
+              <a:t> </a:t>
+            </a:r>
+            <a:r>
+              <a:rPr sz="1200" b="0" dirty="0" err="1">
+                <a:solidFill>
+                  <a:srgbClr val="767A7F"/>
+                </a:solidFill>
+                <a:latin typeface="맑은 고딕"/>
+                <a:ea typeface="맑은 고딕"/>
+              </a:rPr>
+              <a:t>정해</a:t>
+            </a:r>
+            <a:r>
+              <a:rPr sz="1200" b="0" dirty="0">
+                <a:solidFill>
+                  <a:srgbClr val="767A7F"/>
+                </a:solidFill>
+                <a:latin typeface="맑은 고딕"/>
+                <a:ea typeface="맑은 고딕"/>
+              </a:rPr>
+              <a:t> </a:t>
+            </a:r>
+            <a:r>
+              <a:rPr sz="1200" b="0" dirty="0" err="1">
+                <a:solidFill>
+                  <a:srgbClr val="767A7F"/>
+                </a:solidFill>
+                <a:latin typeface="맑은 고딕"/>
+                <a:ea typeface="맑은 고딕"/>
+              </a:rPr>
+              <a:t>둔다</a:t>
+            </a:r>
+            <a:r>
+              <a:rPr sz="1200" b="0" dirty="0">
+                <a:solidFill>
+                  <a:srgbClr val="767A7F"/>
+                </a:solidFill>
+                <a:latin typeface="맑은 고딕"/>
+                <a:ea typeface="맑은 고딕"/>
+              </a:rPr>
+              <a:t> — </a:t>
+            </a:r>
+            <a:r>
+              <a:rPr sz="1200" b="0" dirty="0" err="1">
+                <a:solidFill>
+                  <a:srgbClr val="767A7F"/>
+                </a:solidFill>
+                <a:latin typeface="맑은 고딕"/>
+                <a:ea typeface="맑은 고딕"/>
+              </a:rPr>
+              <a:t>결과를</a:t>
+            </a:r>
+            <a:r>
+              <a:rPr sz="1200" b="0" dirty="0">
+                <a:solidFill>
+                  <a:srgbClr val="767A7F"/>
+                </a:solidFill>
+                <a:latin typeface="맑은 고딕"/>
+                <a:ea typeface="맑은 고딕"/>
+              </a:rPr>
+              <a:t> </a:t>
+            </a:r>
+            <a:r>
+              <a:rPr sz="1200" b="0" dirty="0" err="1">
+                <a:solidFill>
+                  <a:srgbClr val="767A7F"/>
+                </a:solidFill>
+                <a:latin typeface="맑은 고딕"/>
+                <a:ea typeface="맑은 고딕"/>
+              </a:rPr>
+              <a:t>보고</a:t>
+            </a:r>
+            <a:r>
+              <a:rPr sz="1200" b="0" dirty="0">
+                <a:solidFill>
+                  <a:srgbClr val="767A7F"/>
+                </a:solidFill>
+                <a:latin typeface="맑은 고딕"/>
+                <a:ea typeface="맑은 고딕"/>
+              </a:rPr>
+              <a:t> </a:t>
+            </a:r>
+            <a:r>
+              <a:rPr sz="1200" b="0" dirty="0" err="1">
+                <a:solidFill>
+                  <a:srgbClr val="767A7F"/>
+                </a:solidFill>
+                <a:latin typeface="맑은 고딕"/>
+                <a:ea typeface="맑은 고딕"/>
+              </a:rPr>
+              <a:t>기준을</a:t>
+            </a:r>
+            <a:r>
+              <a:rPr sz="1200" b="0" dirty="0">
+                <a:solidFill>
+                  <a:srgbClr val="767A7F"/>
+                </a:solidFill>
+                <a:latin typeface="맑은 고딕"/>
+                <a:ea typeface="맑은 고딕"/>
+              </a:rPr>
+              <a:t> </a:t>
+            </a:r>
+            <a:r>
+              <a:rPr sz="1200" b="0" dirty="0" err="1">
+                <a:solidFill>
+                  <a:srgbClr val="767A7F"/>
+                </a:solidFill>
+                <a:latin typeface="맑은 고딕"/>
+                <a:ea typeface="맑은 고딕"/>
+              </a:rPr>
+              <a:t>맞추지</a:t>
+            </a:r>
+            <a:r>
+              <a:rPr sz="1200" b="0" dirty="0">
+                <a:solidFill>
+                  <a:srgbClr val="767A7F"/>
+                </a:solidFill>
+                <a:latin typeface="맑은 고딕"/>
+                <a:ea typeface="맑은 고딕"/>
+              </a:rPr>
+              <a:t> </a:t>
+            </a:r>
+            <a:r>
+              <a:rPr sz="1200" b="0" dirty="0" err="1">
+                <a:solidFill>
+                  <a:srgbClr val="767A7F"/>
+                </a:solidFill>
+                <a:latin typeface="맑은 고딕"/>
+                <a:ea typeface="맑은 고딕"/>
+              </a:rPr>
+              <a:t>않기</a:t>
+            </a:r>
+            <a:r>
+              <a:rPr sz="1200" b="0" dirty="0">
+                <a:solidFill>
+                  <a:srgbClr val="767A7F"/>
+                </a:solidFill>
+                <a:latin typeface="맑은 고딕"/>
+                <a:ea typeface="맑은 고딕"/>
+              </a:rPr>
+              <a:t> </a:t>
+            </a:r>
+            <a:r>
+              <a:rPr sz="1200" b="0" dirty="0" err="1">
+                <a:solidFill>
+                  <a:srgbClr val="767A7F"/>
+                </a:solidFill>
+                <a:latin typeface="맑은 고딕"/>
+                <a:ea typeface="맑은 고딕"/>
+              </a:rPr>
+              <a:t>위해서다</a:t>
+            </a:r>
+            <a:r>
+              <a:rPr sz="1200" b="0" dirty="0">
+                <a:solidFill>
+                  <a:srgbClr val="767A7F"/>
+                </a:solidFill>
+                <a:latin typeface="맑은 고딕"/>
+                <a:ea typeface="맑은 고딕"/>
+              </a:rPr>
+              <a:t>.</a:t>
             </a:r>
           </a:p>
         </p:txBody>

--- a/04_제출물/데이터분석_계획서.pptx
+++ b/04_제출물/데이터분석_계획서.pptx
@@ -3595,8 +3595,8 @@
         </p:nvSpPr>
         <p:spPr>
           <a:xfrm>
-            <a:off x="554736" y="527304"/>
-            <a:ext cx="207264" cy="207264"/>
+            <a:off x="606475" y="579043"/>
+            <a:ext cx="103784" cy="103784"/>
           </a:xfrm>
           <a:prstGeom prst="roundRect">
             <a:avLst>
@@ -4503,8 +4503,8 @@
         </p:nvSpPr>
         <p:spPr>
           <a:xfrm>
-            <a:off x="554736" y="527304"/>
-            <a:ext cx="207264" cy="207264"/>
+            <a:off x="606475" y="579043"/>
+            <a:ext cx="103784" cy="103784"/>
           </a:xfrm>
           <a:prstGeom prst="roundRect">
             <a:avLst>
@@ -5666,8 +5666,8 @@
         </p:nvSpPr>
         <p:spPr>
           <a:xfrm>
-            <a:off x="554736" y="527304"/>
-            <a:ext cx="207264" cy="207264"/>
+            <a:off x="606475" y="579043"/>
+            <a:ext cx="103784" cy="103784"/>
           </a:xfrm>
           <a:prstGeom prst="roundRect">
             <a:avLst>
@@ -6496,8 +6496,8 @@
         </p:nvSpPr>
         <p:spPr>
           <a:xfrm>
-            <a:off x="554736" y="527304"/>
-            <a:ext cx="207264" cy="207264"/>
+            <a:off x="606475" y="579043"/>
+            <a:ext cx="103784" cy="103784"/>
           </a:xfrm>
           <a:prstGeom prst="roundRect">
             <a:avLst>
@@ -7639,8 +7639,8 @@
         </p:nvSpPr>
         <p:spPr>
           <a:xfrm>
-            <a:off x="554736" y="527304"/>
-            <a:ext cx="207264" cy="207264"/>
+            <a:off x="606475" y="579043"/>
+            <a:ext cx="103784" cy="103784"/>
           </a:xfrm>
           <a:prstGeom prst="roundRect">
             <a:avLst>
@@ -8910,8 +8910,8 @@
         </p:nvSpPr>
         <p:spPr>
           <a:xfrm>
-            <a:off x="554736" y="527304"/>
-            <a:ext cx="207264" cy="207264"/>
+            <a:off x="606475" y="579043"/>
+            <a:ext cx="103784" cy="103784"/>
           </a:xfrm>
           <a:prstGeom prst="roundRect">
             <a:avLst>
@@ -10704,8 +10704,8 @@
         </p:nvSpPr>
         <p:spPr>
           <a:xfrm>
-            <a:off x="554736" y="527304"/>
-            <a:ext cx="207264" cy="207264"/>
+            <a:off x="606475" y="579043"/>
+            <a:ext cx="103784" cy="103784"/>
           </a:xfrm>
           <a:prstGeom prst="roundRect">
             <a:avLst>
@@ -13988,8 +13988,8 @@
         </p:nvSpPr>
         <p:spPr>
           <a:xfrm>
-            <a:off x="554736" y="527304"/>
-            <a:ext cx="207264" cy="207264"/>
+            <a:off x="606475" y="579043"/>
+            <a:ext cx="103784" cy="103784"/>
           </a:xfrm>
           <a:prstGeom prst="roundRect">
             <a:avLst>
@@ -17307,8 +17307,8 @@
         </p:nvSpPr>
         <p:spPr>
           <a:xfrm>
-            <a:off x="554736" y="527304"/>
-            <a:ext cx="207264" cy="207264"/>
+            <a:off x="606475" y="579043"/>
+            <a:ext cx="103784" cy="103784"/>
           </a:xfrm>
           <a:prstGeom prst="roundRect">
             <a:avLst>
@@ -20308,8 +20308,8 @@
         </p:nvSpPr>
         <p:spPr>
           <a:xfrm>
-            <a:off x="554736" y="527304"/>
-            <a:ext cx="207264" cy="207264"/>
+            <a:off x="606475" y="579043"/>
+            <a:ext cx="103784" cy="103784"/>
           </a:xfrm>
           <a:prstGeom prst="roundRect">
             <a:avLst>
@@ -21290,8 +21290,8 @@
         </p:nvSpPr>
         <p:spPr>
           <a:xfrm>
-            <a:off x="554736" y="527304"/>
-            <a:ext cx="207264" cy="207264"/>
+            <a:off x="606475" y="579043"/>
+            <a:ext cx="103784" cy="103784"/>
           </a:xfrm>
           <a:prstGeom prst="roundRect">
             <a:avLst>
@@ -22386,8 +22386,8 @@
         </p:nvSpPr>
         <p:spPr>
           <a:xfrm>
-            <a:off x="554736" y="527304"/>
-            <a:ext cx="207264" cy="207264"/>
+            <a:off x="606475" y="579043"/>
+            <a:ext cx="103784" cy="103784"/>
           </a:xfrm>
           <a:prstGeom prst="roundRect">
             <a:avLst>
@@ -23548,8 +23548,8 @@
         </p:nvSpPr>
         <p:spPr>
           <a:xfrm>
-            <a:off x="554736" y="527304"/>
-            <a:ext cx="207264" cy="207264"/>
+            <a:off x="606475" y="579043"/>
+            <a:ext cx="103784" cy="103784"/>
           </a:xfrm>
           <a:prstGeom prst="roundRect">
             <a:avLst>

--- a/04_제출물/데이터분석_계획서.pptx
+++ b/04_제출물/데이터분석_계획서.pptx
@@ -11260,7 +11260,7 @@
         <p:spPr>
           <a:xfrm>
             <a:off x="685800" y="1499616"/>
-            <a:ext cx="3246120" cy="1527048"/>
+            <a:ext cx="3246120" cy="933269"/>
           </a:xfrm>
           <a:prstGeom prst="rect">
             <a:avLst/>
@@ -11489,6 +11489,36 @@
               <a:t>. </a:t>
             </a:r>
             <a:r>
+              <a:rPr lang="ko-KR" altLang="en-US" sz="1100" b="0" dirty="0">
+                <a:solidFill>
+                  <a:srgbClr val="1C1C1E"/>
+                </a:solidFill>
+                <a:latin typeface="맑은 고딕"/>
+                <a:ea typeface="맑은 고딕"/>
+              </a:rPr>
+              <a:t>늘 같은 처방</a:t>
+            </a:r>
+            <a:r>
+              <a:rPr sz="1100" b="0" dirty="0">
+                <a:solidFill>
+                  <a:srgbClr val="1C1C1E"/>
+                </a:solidFill>
+                <a:latin typeface="맑은 고딕"/>
+                <a:ea typeface="맑은 고딕"/>
+              </a:rPr>
+              <a:t>: </a:t>
+            </a:r>
+            <a:r>
+              <a:rPr lang="en-US" sz="1100" b="0" dirty="0">
+                <a:solidFill>
+                  <a:srgbClr val="1C1C1E"/>
+                </a:solidFill>
+                <a:latin typeface="맑은 고딕"/>
+                <a:ea typeface="맑은 고딕"/>
+              </a:rPr>
+              <a:t>"</a:t>
+            </a:r>
+            <a:r>
               <a:rPr sz="1100" b="0" dirty="0" err="1">
                 <a:solidFill>
                   <a:srgbClr val="1C1C1E"/>
@@ -11496,7 +11526,7 @@
                 <a:latin typeface="맑은 고딕"/>
                 <a:ea typeface="맑은 고딕"/>
               </a:rPr>
-              <a:t>처방도</a:t>
+              <a:t>의사를</a:t>
             </a:r>
             <a:r>
               <a:rPr sz="1100" b="0" dirty="0">
@@ -11506,7 +11536,7 @@
                 <a:latin typeface="맑은 고딕"/>
                 <a:ea typeface="맑은 고딕"/>
               </a:rPr>
-              <a:t> 늘 </a:t>
+              <a:t> </a:t>
             </a:r>
             <a:r>
               <a:rPr sz="1100" b="0" dirty="0" err="1">
@@ -11516,7 +11546,7 @@
                 <a:latin typeface="맑은 고딕"/>
                 <a:ea typeface="맑은 고딕"/>
               </a:rPr>
-              <a:t>같다</a:t>
+              <a:t>늘리고</a:t>
             </a:r>
             <a:r>
               <a:rPr sz="1100" b="0" dirty="0">
@@ -11526,7 +11556,7 @@
                 <a:latin typeface="맑은 고딕"/>
                 <a:ea typeface="맑은 고딕"/>
               </a:rPr>
-              <a:t>: </a:t>
+              <a:t> </a:t>
             </a:r>
             <a:r>
               <a:rPr sz="1100" b="0" dirty="0" err="1">
@@ -11536,7 +11566,7 @@
                 <a:latin typeface="맑은 고딕"/>
                 <a:ea typeface="맑은 고딕"/>
               </a:rPr>
-              <a:t>의사를</a:t>
+              <a:t>병원을</a:t>
             </a:r>
             <a:r>
               <a:rPr sz="1100" b="0" dirty="0">
@@ -11556,7 +11586,7 @@
                 <a:latin typeface="맑은 고딕"/>
                 <a:ea typeface="맑은 고딕"/>
               </a:rPr>
-              <a:t>늘리고</a:t>
+              <a:t>지어라</a:t>
             </a:r>
             <a:r>
               <a:rPr sz="1100" b="0" dirty="0">
@@ -11566,6 +11596,26 @@
                 <a:latin typeface="맑은 고딕"/>
                 <a:ea typeface="맑은 고딕"/>
               </a:rPr>
+              <a:t>.</a:t>
+            </a:r>
+            <a:r>
+              <a:rPr lang="en-US" sz="1100" b="0" dirty="0">
+                <a:solidFill>
+                  <a:srgbClr val="1C1C1E"/>
+                </a:solidFill>
+                <a:latin typeface="맑은 고딕"/>
+                <a:ea typeface="맑은 고딕"/>
+              </a:rPr>
+              <a:t>"</a:t>
+            </a:r>
+            <a:r>
+              <a:rPr sz="1100" b="0" dirty="0">
+                <a:solidFill>
+                  <a:srgbClr val="1C1C1E"/>
+                </a:solidFill>
+                <a:latin typeface="맑은 고딕"/>
+                <a:ea typeface="맑은 고딕"/>
+              </a:rPr>
               <a:t> </a:t>
             </a:r>
             <a:r>
@@ -11576,7 +11626,7 @@
                 <a:latin typeface="맑은 고딕"/>
                 <a:ea typeface="맑은 고딕"/>
               </a:rPr>
-              <a:t>병원을</a:t>
+              <a:t>절대량이</a:t>
             </a:r>
             <a:r>
               <a:rPr sz="1100" b="0" dirty="0">
@@ -11596,7 +11646,7 @@
                 <a:latin typeface="맑은 고딕"/>
                 <a:ea typeface="맑은 고딕"/>
               </a:rPr>
-              <a:t>지어라</a:t>
+              <a:t>모자란</a:t>
             </a:r>
             <a:r>
               <a:rPr sz="1100" b="0" dirty="0">
@@ -11606,7 +11656,7 @@
                 <a:latin typeface="맑은 고딕"/>
                 <a:ea typeface="맑은 고딕"/>
               </a:rPr>
-              <a:t>. </a:t>
+              <a:t> </a:t>
             </a:r>
             <a:r>
               <a:rPr sz="1100" b="0" dirty="0" err="1">
@@ -11616,7 +11666,7 @@
                 <a:latin typeface="맑은 고딕"/>
                 <a:ea typeface="맑은 고딕"/>
               </a:rPr>
-              <a:t>그리고</a:t>
+              <a:t>것은</a:t>
             </a:r>
             <a:r>
               <a:rPr sz="1100" b="0" dirty="0">
@@ -11626,7 +11676,7 @@
                 <a:latin typeface="맑은 고딕"/>
                 <a:ea typeface="맑은 고딕"/>
               </a:rPr>
-              <a:t> 이 </a:t>
+              <a:t> </a:t>
             </a:r>
             <a:r>
               <a:rPr sz="1100" b="0" dirty="0" err="1">
@@ -11636,107 +11686,7 @@
                 <a:latin typeface="맑은 고딕"/>
                 <a:ea typeface="맑은 고딕"/>
               </a:rPr>
-              <a:t>처방은</a:t>
-            </a:r>
-            <a:r>
-              <a:rPr sz="1100" b="0" dirty="0">
-                <a:solidFill>
-                  <a:srgbClr val="1C1C1E"/>
-                </a:solidFill>
-                <a:latin typeface="맑은 고딕"/>
-                <a:ea typeface="맑은 고딕"/>
-              </a:rPr>
-              <a:t> </a:t>
-            </a:r>
-            <a:r>
-              <a:rPr sz="1100" b="0" dirty="0" err="1">
-                <a:solidFill>
-                  <a:srgbClr val="1C1C1E"/>
-                </a:solidFill>
-                <a:latin typeface="맑은 고딕"/>
-                <a:ea typeface="맑은 고딕"/>
-              </a:rPr>
-              <a:t>옳다</a:t>
-            </a:r>
-            <a:r>
-              <a:rPr sz="1100" b="0" dirty="0">
-                <a:solidFill>
-                  <a:srgbClr val="1C1C1E"/>
-                </a:solidFill>
-                <a:latin typeface="맑은 고딕"/>
-                <a:ea typeface="맑은 고딕"/>
-              </a:rPr>
-              <a:t> — </a:t>
-            </a:r>
-            <a:r>
-              <a:rPr sz="1100" b="0" dirty="0" err="1">
-                <a:solidFill>
-                  <a:srgbClr val="1C1C1E"/>
-                </a:solidFill>
-                <a:latin typeface="맑은 고딕"/>
-                <a:ea typeface="맑은 고딕"/>
-              </a:rPr>
-              <a:t>절대량이</a:t>
-            </a:r>
-            <a:r>
-              <a:rPr sz="1100" b="0" dirty="0">
-                <a:solidFill>
-                  <a:srgbClr val="1C1C1E"/>
-                </a:solidFill>
-                <a:latin typeface="맑은 고딕"/>
-                <a:ea typeface="맑은 고딕"/>
-              </a:rPr>
-              <a:t> </a:t>
-            </a:r>
-            <a:r>
-              <a:rPr sz="1100" b="0" dirty="0" err="1">
-                <a:solidFill>
-                  <a:srgbClr val="1C1C1E"/>
-                </a:solidFill>
-                <a:latin typeface="맑은 고딕"/>
-                <a:ea typeface="맑은 고딕"/>
-              </a:rPr>
-              <a:t>모자란</a:t>
-            </a:r>
-            <a:r>
-              <a:rPr sz="1100" b="0" dirty="0">
-                <a:solidFill>
-                  <a:srgbClr val="1C1C1E"/>
-                </a:solidFill>
-                <a:latin typeface="맑은 고딕"/>
-                <a:ea typeface="맑은 고딕"/>
-              </a:rPr>
-              <a:t> </a:t>
-            </a:r>
-            <a:r>
-              <a:rPr sz="1100" b="0" dirty="0" err="1">
-                <a:solidFill>
-                  <a:srgbClr val="1C1C1E"/>
-                </a:solidFill>
-                <a:latin typeface="맑은 고딕"/>
-                <a:ea typeface="맑은 고딕"/>
-              </a:rPr>
-              <a:t>것은</a:t>
-            </a:r>
-            <a:r>
-              <a:rPr sz="1100" b="0" dirty="0">
-                <a:solidFill>
-                  <a:srgbClr val="1C1C1E"/>
-                </a:solidFill>
-                <a:latin typeface="맑은 고딕"/>
-                <a:ea typeface="맑은 고딕"/>
-              </a:rPr>
-              <a:t> </a:t>
-            </a:r>
-            <a:r>
-              <a:rPr sz="1100" b="0" dirty="0" err="1">
-                <a:solidFill>
-                  <a:srgbClr val="1C1C1E"/>
-                </a:solidFill>
-                <a:latin typeface="맑은 고딕"/>
-                <a:ea typeface="맑은 고딕"/>
-              </a:rPr>
-              <a:t>사실이다</a:t>
+              <a:t>사실</a:t>
             </a:r>
             <a:endParaRPr sz="1100" b="0" dirty="0">
               <a:solidFill>
@@ -11812,7 +11762,7 @@
         <p:spPr>
           <a:xfrm>
             <a:off x="4526280" y="1499616"/>
-            <a:ext cx="3246120" cy="1527048"/>
+            <a:ext cx="3246120" cy="933269"/>
           </a:xfrm>
           <a:prstGeom prst="rect">
             <a:avLst/>
@@ -12088,7 +12038,17 @@
                 <a:latin typeface="맑은 고딕"/>
                 <a:ea typeface="맑은 고딕"/>
               </a:rPr>
-              <a:t>문제다</a:t>
+              <a:t>문제</a:t>
+            </a:r>
+            <a:r>
+              <a:rPr lang="ko-KR" altLang="en-US" sz="1100" b="0" dirty="0">
+                <a:solidFill>
+                  <a:srgbClr val="1C1C1E"/>
+                </a:solidFill>
+                <a:latin typeface="맑은 고딕"/>
+                <a:ea typeface="맑은 고딕"/>
+              </a:rPr>
+              <a:t>임</a:t>
             </a:r>
             <a:r>
               <a:rPr sz="1100" b="0" dirty="0">
@@ -12178,17 +12138,17 @@
                 <a:latin typeface="맑은 고딕"/>
                 <a:ea typeface="맑은 고딕"/>
               </a:rPr>
-              <a:t> 수 </a:t>
-            </a:r>
-            <a:r>
-              <a:rPr sz="1100" b="0" dirty="0" err="1">
-                <a:solidFill>
-                  <a:srgbClr val="1C1C1E"/>
-                </a:solidFill>
-                <a:latin typeface="맑은 고딕"/>
-                <a:ea typeface="맑은 고딕"/>
-              </a:rPr>
-              <a:t>있다</a:t>
+              <a:t> 수 있</a:t>
+            </a:r>
+            <a:r>
+              <a:rPr lang="ko-KR" altLang="en-US" sz="1100" b="0" dirty="0">
+                <a:solidFill>
+                  <a:srgbClr val="1C1C1E"/>
+                </a:solidFill>
+                <a:latin typeface="맑은 고딕"/>
+                <a:ea typeface="맑은 고딕"/>
+              </a:rPr>
+              <a:t>음</a:t>
             </a:r>
             <a:endParaRPr sz="1100" b="0" dirty="0">
               <a:solidFill>
@@ -19506,7 +19466,7 @@
         <p:spPr>
           <a:xfrm>
             <a:off x="502920" y="5440680"/>
-            <a:ext cx="11247120" cy="822960"/>
+            <a:ext cx="11247120" cy="541559"/>
           </a:xfrm>
           <a:prstGeom prst="rect">
             <a:avLst/>
@@ -19595,7 +19555,27 @@
                 <a:latin typeface="맑은 고딕"/>
                 <a:ea typeface="맑은 고딕"/>
               </a:rPr>
-              <a:t>. </a:t>
+              <a:t>. 앞</a:t>
+            </a:r>
+            <a:r>
+              <a:rPr lang="ko-KR" altLang="en-US" sz="1250" b="1" dirty="0">
+                <a:solidFill>
+                  <a:srgbClr val="1C1C1E"/>
+                </a:solidFill>
+                <a:latin typeface="맑은 고딕"/>
+                <a:ea typeface="맑은 고딕"/>
+              </a:rPr>
+              <a:t>에서</a:t>
+            </a:r>
+            <a:r>
+              <a:rPr sz="1250" b="1" dirty="0">
+                <a:solidFill>
+                  <a:srgbClr val="1C1C1E"/>
+                </a:solidFill>
+                <a:latin typeface="맑은 고딕"/>
+                <a:ea typeface="맑은 고딕"/>
+              </a:rPr>
+              <a:t> "</a:t>
             </a:r>
             <a:r>
               <a:rPr sz="1250" b="1" dirty="0" err="1">
@@ -19605,7 +19585,7 @@
                 <a:latin typeface="맑은 고딕"/>
                 <a:ea typeface="맑은 고딕"/>
               </a:rPr>
-              <a:t>앞의</a:t>
+              <a:t>규칙이</a:t>
             </a:r>
             <a:r>
               <a:rPr sz="1250" b="1" dirty="0">
@@ -19625,7 +19605,7 @@
                 <a:latin typeface="맑은 고딕"/>
                 <a:ea typeface="맑은 고딕"/>
               </a:rPr>
-              <a:t>둘로</a:t>
+              <a:t>무엇을</a:t>
             </a:r>
             <a:r>
               <a:rPr sz="1250" b="1" dirty="0">
@@ -19635,7 +19615,7 @@
                 <a:latin typeface="맑은 고딕"/>
                 <a:ea typeface="맑은 고딕"/>
               </a:rPr>
-              <a:t> "</a:t>
+              <a:t> </a:t>
             </a:r>
             <a:r>
               <a:rPr sz="1250" b="1" dirty="0" err="1">
@@ -19645,7 +19625,7 @@
                 <a:latin typeface="맑은 고딕"/>
                 <a:ea typeface="맑은 고딕"/>
               </a:rPr>
-              <a:t>규칙이</a:t>
+              <a:t>보는가"를</a:t>
             </a:r>
             <a:r>
               <a:rPr sz="1250" b="1" dirty="0">
@@ -19665,7 +19645,7 @@
                 <a:latin typeface="맑은 고딕"/>
                 <a:ea typeface="맑은 고딕"/>
               </a:rPr>
-              <a:t>무엇을</a:t>
+              <a:t>확정해야</a:t>
             </a:r>
             <a:r>
               <a:rPr sz="1250" b="1" dirty="0">
@@ -19685,67 +19665,7 @@
                 <a:latin typeface="맑은 고딕"/>
                 <a:ea typeface="맑은 고딕"/>
               </a:rPr>
-              <a:t>보는가"를</a:t>
-            </a:r>
-            <a:r>
-              <a:rPr sz="1250" b="1" dirty="0">
-                <a:solidFill>
-                  <a:srgbClr val="1C1C1E"/>
-                </a:solidFill>
-                <a:latin typeface="맑은 고딕"/>
-                <a:ea typeface="맑은 고딕"/>
-              </a:rPr>
-              <a:t> </a:t>
-            </a:r>
-            <a:r>
-              <a:rPr sz="1250" b="1" dirty="0" err="1">
-                <a:solidFill>
-                  <a:srgbClr val="1C1C1E"/>
-                </a:solidFill>
-                <a:latin typeface="맑은 고딕"/>
-                <a:ea typeface="맑은 고딕"/>
-              </a:rPr>
-              <a:t>확정해야</a:t>
-            </a:r>
-            <a:r>
-              <a:rPr sz="1250" b="1" dirty="0">
-                <a:solidFill>
-                  <a:srgbClr val="1C1C1E"/>
-                </a:solidFill>
-                <a:latin typeface="맑은 고딕"/>
-                <a:ea typeface="맑은 고딕"/>
-              </a:rPr>
-              <a:t> </a:t>
-            </a:r>
-            <a:r>
-              <a:rPr sz="1250" b="1" dirty="0" err="1">
-                <a:solidFill>
-                  <a:srgbClr val="1C1C1E"/>
-                </a:solidFill>
-                <a:latin typeface="맑은 고딕"/>
-                <a:ea typeface="맑은 고딕"/>
-              </a:rPr>
-              <a:t>뒤의</a:t>
-            </a:r>
-            <a:r>
-              <a:rPr sz="1250" b="1" dirty="0">
-                <a:solidFill>
-                  <a:srgbClr val="1C1C1E"/>
-                </a:solidFill>
-                <a:latin typeface="맑은 고딕"/>
-                <a:ea typeface="맑은 고딕"/>
-              </a:rPr>
-              <a:t> </a:t>
-            </a:r>
-            <a:r>
-              <a:rPr sz="1250" b="1" dirty="0" err="1">
-                <a:solidFill>
-                  <a:srgbClr val="1C1C1E"/>
-                </a:solidFill>
-                <a:latin typeface="맑은 고딕"/>
-                <a:ea typeface="맑은 고딕"/>
-              </a:rPr>
-              <a:t>둘에서</a:t>
+              <a:t>뒤에서</a:t>
             </a:r>
             <a:r>
               <a:rPr sz="1250" b="1" dirty="0">
@@ -20807,15 +20727,82 @@
               </a:spcAft>
             </a:pPr>
             <a:r>
-              <a:rPr sz="1300" b="1">
+              <a:rPr sz="1300" b="1" dirty="0" err="1">
                 <a:solidFill>
                   <a:srgbClr val="33393F"/>
                 </a:solidFill>
                 <a:latin typeface="맑은 고딕"/>
                 <a:ea typeface="맑은 고딕"/>
               </a:rPr>
-              <a:t>분석 단위에 대한 원칙</a:t>
-            </a:r>
+              <a:t>분석</a:t>
+            </a:r>
+            <a:r>
+              <a:rPr sz="1300" b="1" dirty="0">
+                <a:solidFill>
+                  <a:srgbClr val="33393F"/>
+                </a:solidFill>
+                <a:latin typeface="맑은 고딕"/>
+                <a:ea typeface="맑은 고딕"/>
+              </a:rPr>
+              <a:t> </a:t>
+            </a:r>
+            <a:r>
+              <a:rPr sz="1300" b="1" dirty="0" err="1">
+                <a:solidFill>
+                  <a:srgbClr val="33393F"/>
+                </a:solidFill>
+                <a:latin typeface="맑은 고딕"/>
+                <a:ea typeface="맑은 고딕"/>
+              </a:rPr>
+              <a:t>단위에</a:t>
+            </a:r>
+            <a:r>
+              <a:rPr sz="1300" b="1" dirty="0">
+                <a:solidFill>
+                  <a:srgbClr val="33393F"/>
+                </a:solidFill>
+                <a:latin typeface="맑은 고딕"/>
+                <a:ea typeface="맑은 고딕"/>
+              </a:rPr>
+              <a:t> </a:t>
+            </a:r>
+            <a:r>
+              <a:rPr sz="1300" b="1" dirty="0" err="1">
+                <a:solidFill>
+                  <a:srgbClr val="33393F"/>
+                </a:solidFill>
+                <a:latin typeface="맑은 고딕"/>
+                <a:ea typeface="맑은 고딕"/>
+              </a:rPr>
+              <a:t>대한</a:t>
+            </a:r>
+            <a:r>
+              <a:rPr sz="1300" b="1" dirty="0">
+                <a:solidFill>
+                  <a:srgbClr val="33393F"/>
+                </a:solidFill>
+                <a:latin typeface="맑은 고딕"/>
+                <a:ea typeface="맑은 고딕"/>
+              </a:rPr>
+              <a:t> </a:t>
+            </a:r>
+            <a:r>
+              <a:rPr sz="1300" b="1" dirty="0" err="1">
+                <a:solidFill>
+                  <a:srgbClr val="33393F"/>
+                </a:solidFill>
+                <a:latin typeface="맑은 고딕"/>
+                <a:ea typeface="맑은 고딕"/>
+              </a:rPr>
+              <a:t>원칙</a:t>
+            </a:r>
+            <a:endParaRPr sz="1300" b="1" dirty="0">
+              <a:solidFill>
+                <a:srgbClr val="33393F"/>
+              </a:solidFill>
+              <a:latin typeface="맑은 고딕"/>
+              <a:ea typeface="맑은 고딕"/>
+            </a:endParaRPr>
           </a:p>
           <a:p>
             <a:pPr marL="160020" indent="-160020">
@@ -20827,14 +20814,154 @@
               </a:spcAft>
             </a:pPr>
             <a:r>
-              <a:rPr sz="1150" b="0">
-                <a:solidFill>
-                  <a:srgbClr val="1C1C1E"/>
-                </a:solidFill>
-                <a:latin typeface="맑은 고딕"/>
-                <a:ea typeface="맑은 고딕"/>
-              </a:rPr>
-              <a:t>• 분석 단위: 전국 시·군·구 250곳 (표본이 아닌 전수)</a:t>
+              <a:rPr sz="1150" b="0" dirty="0">
+                <a:solidFill>
+                  <a:srgbClr val="1C1C1E"/>
+                </a:solidFill>
+                <a:latin typeface="맑은 고딕"/>
+                <a:ea typeface="맑은 고딕"/>
+              </a:rPr>
+              <a:t>• </a:t>
+            </a:r>
+            <a:r>
+              <a:rPr sz="1150" b="0" dirty="0" err="1">
+                <a:solidFill>
+                  <a:srgbClr val="1C1C1E"/>
+                </a:solidFill>
+                <a:latin typeface="맑은 고딕"/>
+                <a:ea typeface="맑은 고딕"/>
+              </a:rPr>
+              <a:t>분석</a:t>
+            </a:r>
+            <a:r>
+              <a:rPr sz="1150" b="0" dirty="0">
+                <a:solidFill>
+                  <a:srgbClr val="1C1C1E"/>
+                </a:solidFill>
+                <a:latin typeface="맑은 고딕"/>
+                <a:ea typeface="맑은 고딕"/>
+              </a:rPr>
+              <a:t> </a:t>
+            </a:r>
+            <a:r>
+              <a:rPr sz="1150" b="0" dirty="0" err="1">
+                <a:solidFill>
+                  <a:srgbClr val="1C1C1E"/>
+                </a:solidFill>
+                <a:latin typeface="맑은 고딕"/>
+                <a:ea typeface="맑은 고딕"/>
+              </a:rPr>
+              <a:t>단위</a:t>
+            </a:r>
+            <a:r>
+              <a:rPr sz="1150" b="0" dirty="0">
+                <a:solidFill>
+                  <a:srgbClr val="1C1C1E"/>
+                </a:solidFill>
+                <a:latin typeface="맑은 고딕"/>
+                <a:ea typeface="맑은 고딕"/>
+              </a:rPr>
+              <a:t>: </a:t>
+            </a:r>
+            <a:r>
+              <a:rPr sz="1150" b="0" dirty="0" err="1">
+                <a:solidFill>
+                  <a:srgbClr val="1C1C1E"/>
+                </a:solidFill>
+                <a:latin typeface="맑은 고딕"/>
+                <a:ea typeface="맑은 고딕"/>
+              </a:rPr>
+              <a:t>전국</a:t>
+            </a:r>
+            <a:r>
+              <a:rPr sz="1150" b="0" dirty="0">
+                <a:solidFill>
+                  <a:srgbClr val="1C1C1E"/>
+                </a:solidFill>
+                <a:latin typeface="맑은 고딕"/>
+                <a:ea typeface="맑은 고딕"/>
+              </a:rPr>
+              <a:t> </a:t>
+            </a:r>
+            <a:r>
+              <a:rPr sz="1150" b="0" dirty="0" err="1">
+                <a:solidFill>
+                  <a:srgbClr val="1C1C1E"/>
+                </a:solidFill>
+                <a:latin typeface="맑은 고딕"/>
+                <a:ea typeface="맑은 고딕"/>
+              </a:rPr>
+              <a:t>시·군·구</a:t>
+            </a:r>
+            <a:r>
+              <a:rPr sz="1150" b="0" dirty="0">
+                <a:solidFill>
+                  <a:srgbClr val="1C1C1E"/>
+                </a:solidFill>
+                <a:latin typeface="맑은 고딕"/>
+                <a:ea typeface="맑은 고딕"/>
+              </a:rPr>
+              <a:t> 250곳 (</a:t>
+            </a:r>
+            <a:r>
+              <a:rPr sz="1150" b="0" dirty="0" err="1">
+                <a:solidFill>
+                  <a:srgbClr val="1C1C1E"/>
+                </a:solidFill>
+                <a:latin typeface="맑은 고딕"/>
+                <a:ea typeface="맑은 고딕"/>
+              </a:rPr>
+              <a:t>표본이</a:t>
+            </a:r>
+            <a:r>
+              <a:rPr sz="1150" b="0" dirty="0">
+                <a:solidFill>
+                  <a:srgbClr val="1C1C1E"/>
+                </a:solidFill>
+                <a:latin typeface="맑은 고딕"/>
+                <a:ea typeface="맑은 고딕"/>
+              </a:rPr>
+              <a:t> </a:t>
+            </a:r>
+            <a:r>
+              <a:rPr sz="1150" b="0" dirty="0" err="1">
+                <a:solidFill>
+                  <a:srgbClr val="1C1C1E"/>
+                </a:solidFill>
+                <a:latin typeface="맑은 고딕"/>
+                <a:ea typeface="맑은 고딕"/>
+              </a:rPr>
+              <a:t>아닌</a:t>
+            </a:r>
+            <a:r>
+              <a:rPr sz="1150" b="0" dirty="0">
+                <a:solidFill>
+                  <a:srgbClr val="1C1C1E"/>
+                </a:solidFill>
+                <a:latin typeface="맑은 고딕"/>
+                <a:ea typeface="맑은 고딕"/>
+              </a:rPr>
+              <a:t> </a:t>
+            </a:r>
+            <a:r>
+              <a:rPr sz="1150" b="0" dirty="0" err="1">
+                <a:solidFill>
+                  <a:srgbClr val="1C1C1E"/>
+                </a:solidFill>
+                <a:latin typeface="맑은 고딕"/>
+                <a:ea typeface="맑은 고딕"/>
+              </a:rPr>
+              <a:t>전수</a:t>
+            </a:r>
+            <a:r>
+              <a:rPr sz="1150" b="0" dirty="0">
+                <a:solidFill>
+                  <a:srgbClr val="1C1C1E"/>
+                </a:solidFill>
+                <a:latin typeface="맑은 고딕"/>
+                <a:ea typeface="맑은 고딕"/>
+              </a:rPr>
+              <a:t>)</a:t>
             </a:r>
           </a:p>
           <a:p>
@@ -20847,15 +20974,352 @@
               </a:spcAft>
             </a:pPr>
             <a:r>
-              <a:rPr sz="1150" b="0">
-                <a:solidFill>
-                  <a:srgbClr val="1C1C1E"/>
-                </a:solidFill>
-                <a:latin typeface="맑은 고딕"/>
-                <a:ea typeface="맑은 고딕"/>
-              </a:rPr>
-              <a:t>• 목적이 미지 표본 예측이 아니라 이미 내려진 판정·배분의 규칙 규명(감사)이므로 일반화 표집 논리와 구분해 설계</a:t>
-            </a:r>
+              <a:rPr sz="1150" b="0" dirty="0">
+                <a:solidFill>
+                  <a:srgbClr val="1C1C1E"/>
+                </a:solidFill>
+                <a:latin typeface="맑은 고딕"/>
+                <a:ea typeface="맑은 고딕"/>
+              </a:rPr>
+              <a:t>• </a:t>
+            </a:r>
+            <a:r>
+              <a:rPr sz="1150" b="0" dirty="0" err="1">
+                <a:solidFill>
+                  <a:srgbClr val="1C1C1E"/>
+                </a:solidFill>
+                <a:latin typeface="맑은 고딕"/>
+                <a:ea typeface="맑은 고딕"/>
+              </a:rPr>
+              <a:t>목적이</a:t>
+            </a:r>
+            <a:r>
+              <a:rPr sz="1150" b="0" dirty="0">
+                <a:solidFill>
+                  <a:srgbClr val="1C1C1E"/>
+                </a:solidFill>
+                <a:latin typeface="맑은 고딕"/>
+                <a:ea typeface="맑은 고딕"/>
+              </a:rPr>
+              <a:t> </a:t>
+            </a:r>
+            <a:r>
+              <a:rPr sz="1150" b="0" dirty="0" err="1">
+                <a:solidFill>
+                  <a:srgbClr val="1C1C1E"/>
+                </a:solidFill>
+                <a:latin typeface="맑은 고딕"/>
+                <a:ea typeface="맑은 고딕"/>
+              </a:rPr>
+              <a:t>미지</a:t>
+            </a:r>
+            <a:r>
+              <a:rPr sz="1150" b="0" dirty="0">
+                <a:solidFill>
+                  <a:srgbClr val="1C1C1E"/>
+                </a:solidFill>
+                <a:latin typeface="맑은 고딕"/>
+                <a:ea typeface="맑은 고딕"/>
+              </a:rPr>
+              <a:t> </a:t>
+            </a:r>
+            <a:r>
+              <a:rPr sz="1150" b="0" dirty="0" err="1">
+                <a:solidFill>
+                  <a:srgbClr val="1C1C1E"/>
+                </a:solidFill>
+                <a:latin typeface="맑은 고딕"/>
+                <a:ea typeface="맑은 고딕"/>
+              </a:rPr>
+              <a:t>표본</a:t>
+            </a:r>
+            <a:r>
+              <a:rPr sz="1150" b="0" dirty="0">
+                <a:solidFill>
+                  <a:srgbClr val="1C1C1E"/>
+                </a:solidFill>
+                <a:latin typeface="맑은 고딕"/>
+                <a:ea typeface="맑은 고딕"/>
+              </a:rPr>
+              <a:t> </a:t>
+            </a:r>
+            <a:r>
+              <a:rPr sz="1150" b="0" dirty="0" err="1">
+                <a:solidFill>
+                  <a:srgbClr val="1C1C1E"/>
+                </a:solidFill>
+                <a:latin typeface="맑은 고딕"/>
+                <a:ea typeface="맑은 고딕"/>
+              </a:rPr>
+              <a:t>예측이</a:t>
+            </a:r>
+            <a:r>
+              <a:rPr sz="1150" b="0" dirty="0">
+                <a:solidFill>
+                  <a:srgbClr val="1C1C1E"/>
+                </a:solidFill>
+                <a:latin typeface="맑은 고딕"/>
+                <a:ea typeface="맑은 고딕"/>
+              </a:rPr>
+              <a:t> </a:t>
+            </a:r>
+            <a:r>
+              <a:rPr sz="1150" b="0" dirty="0" err="1">
+                <a:solidFill>
+                  <a:srgbClr val="1C1C1E"/>
+                </a:solidFill>
+                <a:latin typeface="맑은 고딕"/>
+                <a:ea typeface="맑은 고딕"/>
+              </a:rPr>
+              <a:t>아니라</a:t>
+            </a:r>
+            <a:r>
+              <a:rPr sz="1150" b="0" dirty="0">
+                <a:solidFill>
+                  <a:srgbClr val="1C1C1E"/>
+                </a:solidFill>
+                <a:latin typeface="맑은 고딕"/>
+                <a:ea typeface="맑은 고딕"/>
+              </a:rPr>
+              <a:t> </a:t>
+            </a:r>
+            <a:r>
+              <a:rPr sz="1150" b="0" dirty="0" err="1">
+                <a:solidFill>
+                  <a:srgbClr val="1C1C1E"/>
+                </a:solidFill>
+                <a:latin typeface="맑은 고딕"/>
+                <a:ea typeface="맑은 고딕"/>
+              </a:rPr>
+              <a:t>이미</a:t>
+            </a:r>
+            <a:r>
+              <a:rPr sz="1150" b="0" dirty="0">
+                <a:solidFill>
+                  <a:srgbClr val="1C1C1E"/>
+                </a:solidFill>
+                <a:latin typeface="맑은 고딕"/>
+                <a:ea typeface="맑은 고딕"/>
+              </a:rPr>
+              <a:t> </a:t>
+            </a:r>
+            <a:r>
+              <a:rPr sz="1150" b="0" dirty="0" err="1">
+                <a:solidFill>
+                  <a:srgbClr val="1C1C1E"/>
+                </a:solidFill>
+                <a:latin typeface="맑은 고딕"/>
+                <a:ea typeface="맑은 고딕"/>
+              </a:rPr>
+              <a:t>내려진</a:t>
+            </a:r>
+            <a:r>
+              <a:rPr sz="1150" b="0" dirty="0">
+                <a:solidFill>
+                  <a:srgbClr val="1C1C1E"/>
+                </a:solidFill>
+                <a:latin typeface="맑은 고딕"/>
+                <a:ea typeface="맑은 고딕"/>
+              </a:rPr>
+              <a:t> </a:t>
+            </a:r>
+            <a:r>
+              <a:rPr sz="1150" b="0" dirty="0" err="1">
+                <a:solidFill>
+                  <a:srgbClr val="1C1C1E"/>
+                </a:solidFill>
+                <a:latin typeface="맑은 고딕"/>
+                <a:ea typeface="맑은 고딕"/>
+              </a:rPr>
+              <a:t>판정·배분의</a:t>
+            </a:r>
+            <a:r>
+              <a:rPr sz="1150" b="0" dirty="0">
+                <a:solidFill>
+                  <a:srgbClr val="1C1C1E"/>
+                </a:solidFill>
+                <a:latin typeface="맑은 고딕"/>
+                <a:ea typeface="맑은 고딕"/>
+              </a:rPr>
+              <a:t> </a:t>
+            </a:r>
+            <a:r>
+              <a:rPr sz="1150" b="0" dirty="0" err="1">
+                <a:solidFill>
+                  <a:srgbClr val="1C1C1E"/>
+                </a:solidFill>
+                <a:latin typeface="맑은 고딕"/>
+                <a:ea typeface="맑은 고딕"/>
+              </a:rPr>
+              <a:t>규칙</a:t>
+            </a:r>
+            <a:r>
+              <a:rPr sz="1150" b="0" dirty="0">
+                <a:solidFill>
+                  <a:srgbClr val="1C1C1E"/>
+                </a:solidFill>
+                <a:latin typeface="맑은 고딕"/>
+                <a:ea typeface="맑은 고딕"/>
+              </a:rPr>
+              <a:t> </a:t>
+            </a:r>
+            <a:r>
+              <a:rPr sz="1150" b="0" dirty="0" err="1">
+                <a:solidFill>
+                  <a:srgbClr val="1C1C1E"/>
+                </a:solidFill>
+                <a:latin typeface="맑은 고딕"/>
+                <a:ea typeface="맑은 고딕"/>
+              </a:rPr>
+              <a:t>규명</a:t>
+            </a:r>
+            <a:r>
+              <a:rPr sz="1150" b="0" dirty="0">
+                <a:solidFill>
+                  <a:srgbClr val="1C1C1E"/>
+                </a:solidFill>
+                <a:latin typeface="맑은 고딕"/>
+                <a:ea typeface="맑은 고딕"/>
+              </a:rPr>
+              <a:t>(</a:t>
+            </a:r>
+            <a:r>
+              <a:rPr sz="1150" b="0" dirty="0" err="1">
+                <a:solidFill>
+                  <a:srgbClr val="1C1C1E"/>
+                </a:solidFill>
+                <a:latin typeface="맑은 고딕"/>
+                <a:ea typeface="맑은 고딕"/>
+              </a:rPr>
+              <a:t>감사</a:t>
+            </a:r>
+            <a:r>
+              <a:rPr sz="1150" b="0" dirty="0">
+                <a:solidFill>
+                  <a:srgbClr val="1C1C1E"/>
+                </a:solidFill>
+                <a:latin typeface="맑은 고딕"/>
+                <a:ea typeface="맑은 고딕"/>
+              </a:rPr>
+              <a:t>)</a:t>
+            </a:r>
+            <a:r>
+              <a:rPr sz="1150" b="0" dirty="0" err="1">
+                <a:solidFill>
+                  <a:srgbClr val="1C1C1E"/>
+                </a:solidFill>
+                <a:latin typeface="맑은 고딕"/>
+                <a:ea typeface="맑은 고딕"/>
+              </a:rPr>
+              <a:t>이므로</a:t>
+            </a:r>
+            <a:r>
+              <a:rPr sz="1150" b="0" dirty="0">
+                <a:solidFill>
+                  <a:srgbClr val="1C1C1E"/>
+                </a:solidFill>
+                <a:latin typeface="맑은 고딕"/>
+                <a:ea typeface="맑은 고딕"/>
+              </a:rPr>
+              <a:t> </a:t>
+            </a:r>
+            <a:r>
+              <a:rPr sz="1150" b="0" dirty="0" err="1">
+                <a:solidFill>
+                  <a:srgbClr val="1C1C1E"/>
+                </a:solidFill>
+                <a:latin typeface="맑은 고딕"/>
+                <a:ea typeface="맑은 고딕"/>
+              </a:rPr>
+              <a:t>일반화</a:t>
+            </a:r>
+            <a:r>
+              <a:rPr sz="1150" b="0" dirty="0">
+                <a:solidFill>
+                  <a:srgbClr val="1C1C1E"/>
+                </a:solidFill>
+                <a:latin typeface="맑은 고딕"/>
+                <a:ea typeface="맑은 고딕"/>
+              </a:rPr>
+              <a:t> </a:t>
+            </a:r>
+            <a:r>
+              <a:rPr sz="1150" b="0" dirty="0" err="1">
+                <a:solidFill>
+                  <a:srgbClr val="1C1C1E"/>
+                </a:solidFill>
+                <a:latin typeface="맑은 고딕"/>
+                <a:ea typeface="맑은 고딕"/>
+              </a:rPr>
+              <a:t>표집</a:t>
+            </a:r>
+            <a:r>
+              <a:rPr sz="1150" b="0" dirty="0">
+                <a:solidFill>
+                  <a:srgbClr val="1C1C1E"/>
+                </a:solidFill>
+                <a:latin typeface="맑은 고딕"/>
+                <a:ea typeface="맑은 고딕"/>
+              </a:rPr>
+              <a:t> </a:t>
+            </a:r>
+            <a:r>
+              <a:rPr sz="1150" b="0" dirty="0" err="1">
+                <a:solidFill>
+                  <a:srgbClr val="1C1C1E"/>
+                </a:solidFill>
+                <a:latin typeface="맑은 고딕"/>
+                <a:ea typeface="맑은 고딕"/>
+              </a:rPr>
+              <a:t>논리와</a:t>
+            </a:r>
+            <a:r>
+              <a:rPr sz="1150" b="0" dirty="0">
+                <a:solidFill>
+                  <a:srgbClr val="1C1C1E"/>
+                </a:solidFill>
+                <a:latin typeface="맑은 고딕"/>
+                <a:ea typeface="맑은 고딕"/>
+              </a:rPr>
+              <a:t> </a:t>
+            </a:r>
+            <a:r>
+              <a:rPr sz="1150" b="0" dirty="0" err="1">
+                <a:solidFill>
+                  <a:srgbClr val="1C1C1E"/>
+                </a:solidFill>
+                <a:latin typeface="맑은 고딕"/>
+                <a:ea typeface="맑은 고딕"/>
+              </a:rPr>
+              <a:t>구분해</a:t>
+            </a:r>
+            <a:r>
+              <a:rPr sz="1150" b="0" dirty="0">
+                <a:solidFill>
+                  <a:srgbClr val="1C1C1E"/>
+                </a:solidFill>
+                <a:latin typeface="맑은 고딕"/>
+                <a:ea typeface="맑은 고딕"/>
+              </a:rPr>
+              <a:t> </a:t>
+            </a:r>
+            <a:r>
+              <a:rPr sz="1150" b="0" dirty="0" err="1">
+                <a:solidFill>
+                  <a:srgbClr val="1C1C1E"/>
+                </a:solidFill>
+                <a:latin typeface="맑은 고딕"/>
+                <a:ea typeface="맑은 고딕"/>
+              </a:rPr>
+              <a:t>설계</a:t>
+            </a:r>
+            <a:endParaRPr sz="1150" b="0" dirty="0">
+              <a:solidFill>
+                <a:srgbClr val="1C1C1E"/>
+              </a:solidFill>
+              <a:latin typeface="맑은 고딕"/>
+              <a:ea typeface="맑은 고딕"/>
+            </a:endParaRPr>
           </a:p>
           <a:p>
             <a:pPr marL="160020" indent="-160020">
@@ -20867,14 +21331,194 @@
               </a:spcAft>
             </a:pPr>
             <a:r>
-              <a:rPr sz="1150" b="0">
-                <a:solidFill>
-                  <a:srgbClr val="1C1C1E"/>
-                </a:solidFill>
-                <a:latin typeface="맑은 고딕"/>
-                <a:ea typeface="맑은 고딕"/>
-              </a:rPr>
-              <a:t>• 지역 단위 결론을 개인에게 적용하지 않는다(생태학적 오류 경계)</a:t>
+              <a:rPr sz="1150" b="0" dirty="0">
+                <a:solidFill>
+                  <a:srgbClr val="1C1C1E"/>
+                </a:solidFill>
+                <a:latin typeface="맑은 고딕"/>
+                <a:ea typeface="맑은 고딕"/>
+              </a:rPr>
+              <a:t>• </a:t>
+            </a:r>
+            <a:r>
+              <a:rPr sz="1150" b="0" dirty="0" err="1">
+                <a:solidFill>
+                  <a:srgbClr val="1C1C1E"/>
+                </a:solidFill>
+                <a:latin typeface="맑은 고딕"/>
+                <a:ea typeface="맑은 고딕"/>
+              </a:rPr>
+              <a:t>지역</a:t>
+            </a:r>
+            <a:r>
+              <a:rPr sz="1150" b="0" dirty="0">
+                <a:solidFill>
+                  <a:srgbClr val="1C1C1E"/>
+                </a:solidFill>
+                <a:latin typeface="맑은 고딕"/>
+                <a:ea typeface="맑은 고딕"/>
+              </a:rPr>
+              <a:t> </a:t>
+            </a:r>
+            <a:r>
+              <a:rPr sz="1150" b="0" dirty="0" err="1">
+                <a:solidFill>
+                  <a:srgbClr val="1C1C1E"/>
+                </a:solidFill>
+                <a:latin typeface="맑은 고딕"/>
+                <a:ea typeface="맑은 고딕"/>
+              </a:rPr>
+              <a:t>단위</a:t>
+            </a:r>
+            <a:r>
+              <a:rPr sz="1150" b="0" dirty="0">
+                <a:solidFill>
+                  <a:srgbClr val="1C1C1E"/>
+                </a:solidFill>
+                <a:latin typeface="맑은 고딕"/>
+                <a:ea typeface="맑은 고딕"/>
+              </a:rPr>
+              <a:t> </a:t>
+            </a:r>
+            <a:r>
+              <a:rPr sz="1150" b="0" dirty="0" err="1">
+                <a:solidFill>
+                  <a:srgbClr val="1C1C1E"/>
+                </a:solidFill>
+                <a:latin typeface="맑은 고딕"/>
+                <a:ea typeface="맑은 고딕"/>
+              </a:rPr>
+              <a:t>결론을</a:t>
+            </a:r>
+            <a:r>
+              <a:rPr sz="1150" b="0" dirty="0">
+                <a:solidFill>
+                  <a:srgbClr val="1C1C1E"/>
+                </a:solidFill>
+                <a:latin typeface="맑은 고딕"/>
+                <a:ea typeface="맑은 고딕"/>
+              </a:rPr>
+              <a:t> </a:t>
+            </a:r>
+            <a:r>
+              <a:rPr sz="1150" b="0" dirty="0" err="1">
+                <a:solidFill>
+                  <a:srgbClr val="1C1C1E"/>
+                </a:solidFill>
+                <a:latin typeface="맑은 고딕"/>
+                <a:ea typeface="맑은 고딕"/>
+              </a:rPr>
+              <a:t>개인에게</a:t>
+            </a:r>
+            <a:r>
+              <a:rPr sz="1150" b="0" dirty="0">
+                <a:solidFill>
+                  <a:srgbClr val="1C1C1E"/>
+                </a:solidFill>
+                <a:latin typeface="맑은 고딕"/>
+                <a:ea typeface="맑은 고딕"/>
+              </a:rPr>
+              <a:t> </a:t>
+            </a:r>
+            <a:r>
+              <a:rPr sz="1150" b="0" dirty="0" err="1">
+                <a:solidFill>
+                  <a:srgbClr val="1C1C1E"/>
+                </a:solidFill>
+                <a:latin typeface="맑은 고딕"/>
+                <a:ea typeface="맑은 고딕"/>
+              </a:rPr>
+              <a:t>적용하지</a:t>
+            </a:r>
+            <a:r>
+              <a:rPr sz="1150" b="0" dirty="0">
+                <a:solidFill>
+                  <a:srgbClr val="1C1C1E"/>
+                </a:solidFill>
+                <a:latin typeface="맑은 고딕"/>
+                <a:ea typeface="맑은 고딕"/>
+              </a:rPr>
+              <a:t> </a:t>
+            </a:r>
+            <a:r>
+              <a:rPr sz="1150" b="0" dirty="0" err="1">
+                <a:solidFill>
+                  <a:srgbClr val="1C1C1E"/>
+                </a:solidFill>
+                <a:latin typeface="맑은 고딕"/>
+                <a:ea typeface="맑은 고딕"/>
+              </a:rPr>
+              <a:t>않는다</a:t>
+            </a:r>
+            <a:r>
+              <a:rPr sz="1150" b="0" dirty="0">
+                <a:solidFill>
+                  <a:srgbClr val="1C1C1E"/>
+                </a:solidFill>
+                <a:latin typeface="맑은 고딕"/>
+                <a:ea typeface="맑은 고딕"/>
+              </a:rPr>
+              <a:t>(</a:t>
+            </a:r>
+            <a:r>
+              <a:rPr sz="1150" b="0" dirty="0" err="1">
+                <a:solidFill>
+                  <a:srgbClr val="1C1C1E"/>
+                </a:solidFill>
+                <a:latin typeface="맑은 고딕"/>
+                <a:ea typeface="맑은 고딕"/>
+              </a:rPr>
+              <a:t>생태학적</a:t>
+            </a:r>
+            <a:r>
+              <a:rPr sz="1150" b="0" dirty="0">
+                <a:solidFill>
+                  <a:srgbClr val="1C1C1E"/>
+                </a:solidFill>
+                <a:latin typeface="맑은 고딕"/>
+                <a:ea typeface="맑은 고딕"/>
+              </a:rPr>
+              <a:t> </a:t>
+            </a:r>
+            <a:r>
+              <a:rPr sz="1150" b="0" dirty="0" err="1">
+                <a:solidFill>
+                  <a:srgbClr val="1C1C1E"/>
+                </a:solidFill>
+                <a:latin typeface="맑은 고딕"/>
+                <a:ea typeface="맑은 고딕"/>
+              </a:rPr>
+              <a:t>오류</a:t>
+            </a:r>
+            <a:r>
+              <a:rPr sz="1150" b="0" dirty="0">
+                <a:solidFill>
+                  <a:srgbClr val="1C1C1E"/>
+                </a:solidFill>
+                <a:latin typeface="맑은 고딕"/>
+                <a:ea typeface="맑은 고딕"/>
+              </a:rPr>
+              <a:t> </a:t>
+            </a:r>
+            <a:r>
+              <a:rPr sz="1150" b="0" dirty="0" err="1">
+                <a:solidFill>
+                  <a:srgbClr val="1C1C1E"/>
+                </a:solidFill>
+                <a:latin typeface="맑은 고딕"/>
+                <a:ea typeface="맑은 고딕"/>
+              </a:rPr>
+              <a:t>경계</a:t>
+            </a:r>
+            <a:r>
+              <a:rPr sz="1150" b="0" dirty="0">
+                <a:solidFill>
+                  <a:srgbClr val="1C1C1E"/>
+                </a:solidFill>
+                <a:latin typeface="맑은 고딕"/>
+                <a:ea typeface="맑은 고딕"/>
+              </a:rPr>
+              <a:t>)</a:t>
             </a:r>
           </a:p>
         </p:txBody>

--- a/04_제출물/데이터분석_계획서.pptx
+++ b/04_제출물/데이터분석_계획서.pptx
@@ -3825,7 +3825,7 @@
                 <a:latin typeface="맑은 고딕"/>
                 <a:ea typeface="맑은 고딕"/>
               </a:rPr>
-              <a:t>공표된 규칙을 그대로 재계산해 실제와 대조한다</a:t>
+              <a:t>공표된 규칙을 그대로 재계산해 실제와 대조</a:t>
             </a:r>
           </a:p>
         </p:txBody>
@@ -3986,7 +3986,7 @@
                 <a:latin typeface="맑은 고딕"/>
                 <a:ea typeface="맑은 고딕"/>
               </a:rPr>
-              <a:t>• 공표 임계값(접근성·TRI 30/30 등)으로 전 지역을 재판정하고 실제 지정 결과와 대조한다</a:t>
+              <a:t>• 공표 임계값(접근성·TRI 30/30 등)으로 전 지역을 재판정하고 실제 지정 결과와 대조</a:t>
             </a:r>
           </a:p>
           <a:p>
@@ -4006,7 +4006,7 @@
                 <a:latin typeface="맑은 고딕"/>
                 <a:ea typeface="맑은 고딕"/>
               </a:rPr>
-              <a:t>• 일치율과 불일치 사례를 모두 보고한다 — 불일치는 오류가 아니라 행정 층의 증거로 해석할 계획</a:t>
+              <a:t>• 일치율과 불일치 사례를 모두 보고 — 불일치는 오류가 아니라 행정 층의 증거로 해석할 계획</a:t>
             </a:r>
           </a:p>
         </p:txBody>
@@ -4124,7 +4124,7 @@
                 <a:latin typeface="맑은 고딕"/>
                 <a:ea typeface="맑은 고딕"/>
               </a:rPr>
-              <a:t>• 로지스틱 회귀(5-겹 교차검증)로 판정을 예측하고, 공급 변수(전문의 수 등)를 추가했을 때 판별력(AUC)이 개선되는지 본다</a:t>
+              <a:t>• 로지스틱 회귀(5겹 교차검증)로 판정을 예측하고, 공급 변수(전문의 수 등) 추가 시 판별력(AUC)이 개선되는지 확인</a:t>
             </a:r>
           </a:p>
           <a:p>
@@ -4144,7 +4144,7 @@
                 <a:latin typeface="맑은 고딕"/>
                 <a:ea typeface="맑은 고딕"/>
               </a:rPr>
-              <a:t>• 개선이 없다면 판정이 공급을 보지 않는다는 증거다</a:t>
+              <a:t>• 개선이 없다면 판정이 공급을 보지 않는다는 증거</a:t>
             </a:r>
           </a:p>
         </p:txBody>
@@ -4262,7 +4262,7 @@
                 <a:latin typeface="맑은 고딕"/>
                 <a:ea typeface="맑은 고딕"/>
               </a:rPr>
-              <a:t>• "거리 기준 통과 ∧ 관내 공급 공백 ∧ 관내 이용 0"의 3중 기준을 사전 정의하고 해당 지역을 탐지한다</a:t>
+              <a:t>• "거리 기준 통과 ∧ 관내 공급 공백 ∧ 관내 이용 0"의 3중 기준을 사전 정의하고 해당 지역을 탐지</a:t>
             </a:r>
           </a:p>
           <a:p>
@@ -4282,7 +4282,7 @@
                 <a:latin typeface="맑은 고딕"/>
                 <a:ea typeface="맑은 고딕"/>
               </a:rPr>
-              <a:t>• 중증 이송 반론은 동급 병원 유출 분리로, 선호 원정 반론은 관내 선택지 유무로 통제한다</a:t>
+              <a:t>• 중증 이송 반론은 동급 병원 유출 분리로, 선호 원정 반론은 관내 선택지 유무로 통제</a:t>
             </a:r>
           </a:p>
         </p:txBody>
@@ -4400,7 +4400,7 @@
                 <a:latin typeface="맑은 고딕"/>
                 <a:ea typeface="맑은 고딕"/>
               </a:rPr>
-              <a:t>• 무엇을 "재현 성공"으로, 무엇을 "사각지대"로 볼지의 기준을 분석 전에 확정해 보고서에 명시한다</a:t>
+              <a:t>• 무엇을 "재현 성공"으로, 무엇을 "사각지대"로 볼지의 기준을 분석 전에 확정해 보고서에 명시</a:t>
             </a:r>
           </a:p>
           <a:p>
@@ -4420,7 +4420,7 @@
                 <a:latin typeface="맑은 고딕"/>
                 <a:ea typeface="맑은 고딕"/>
               </a:rPr>
-              <a:t>• 반대 해석(예: "옆 도시로 가면 되지 않는가")을 본문에서 정면으로 다루는 섹션을 계획에 포함한다</a:t>
+              <a:t>• 반대 해석(예: "옆 도시로 가면 되지 않는가")을 본문에서 정면으로 다루는 절을 계획에 포함</a:t>
             </a:r>
           </a:p>
         </p:txBody>
@@ -4894,7 +4894,7 @@
                 <a:latin typeface="맑은 고딕"/>
                 <a:ea typeface="맑은 고딕"/>
               </a:rPr>
-              <a:t>• C의 정의에 "지원 기수령"이 포함되어, 지원받으면 C가 되는 순환 구조가 있다 — 종속변수가 집단 정의에 새어드는 셈</a:t>
+              <a:t>• C의 정의에 "지원 기수령"이 포함되어 지원받으면 C가 되는 순환 구조 — 종속변수가 집단 정의에 새어 드는 셈</a:t>
             </a:r>
           </a:p>
           <a:p>
@@ -4914,7 +4914,7 @@
                 <a:latin typeface="맑은 고딕"/>
                 <a:ea typeface="맑은 고딕"/>
               </a:rPr>
-              <a:t>• 이 누출을 막기 위해 실질 취약지 A·B만으로 배분을 분석한다 (제외 논리 자체를 보고서에 기록)</a:t>
+              <a:t>• 이 누출을 막기 위해 실질 취약지 A·B만으로 배분을 분석 (제외 논리 자체를 보고서에 기록)</a:t>
             </a:r>
           </a:p>
         </p:txBody>
@@ -5563,7 +5563,7 @@
                 <a:latin typeface="맑은 고딕"/>
                 <a:ea typeface="맑은 고딕"/>
               </a:rPr>
-              <a:t>보고 원칙: "유의하지 않음"을 "효과 없음"으로 쓰지 않는다 — 표본이 작아 식별 불가일 수 있음을 명시하고,</a:t>
+              <a:t>보고 원칙: "유의하지 않음"을 "효과 없음"으로 쓰지 않음 — 표본이 작아 식별 불가일 수 있음을 명시하고,</a:t>
             </a:r>
           </a:p>
           <a:p>
@@ -5583,7 +5583,7 @@
                 <a:latin typeface="맑은 고딕"/>
                 <a:ea typeface="맑은 고딕"/>
               </a:rPr>
-              <a:t>개별 p값보다 방향의 안정성(부트스트랩)과 모형 설명력을 함께 제시한다.</a:t>
+              <a:t>개별 p값보다 방향의 안정성(부트스트랩)과 모형 설명력을 함께 제시함</a:t>
             </a:r>
           </a:p>
         </p:txBody>
@@ -5896,7 +5896,7 @@
                 <a:latin typeface="맑은 고딕"/>
                 <a:ea typeface="맑은 고딕"/>
               </a:rPr>
-              <a:t>새 기준을 만들지 않는다: 정부 문서의 임계값만 조합한다</a:t>
+              <a:t>새 기준을 만들지 않음 — 정부 문서의 임계값만 조합</a:t>
             </a:r>
           </a:p>
         </p:txBody>
@@ -6097,7 +6097,7 @@
                 <a:latin typeface="맑은 고딕"/>
                 <a:ea typeface="맑은 고딕"/>
               </a:rPr>
-              <a:t>• 두 축을 평균해 합성하지 않는다 — 가치 선택을 가리는 대신 병렬로 드러내는 것이 목적</a:t>
+              <a:t>• 두 축을 평균해 합성하지 않음 — 가치 선택을 가리는 대신 병렬로 드러내는 것이 목적</a:t>
             </a:r>
           </a:p>
         </p:txBody>
@@ -6235,7 +6235,7 @@
                 <a:latin typeface="맑은 고딕"/>
                 <a:ea typeface="맑은 고딕"/>
               </a:rPr>
-              <a:t>• 학습이 없어 과적합·라벨 누수 논쟁에서 자유롭고, 모든 판정이 문서의 숫자로 소급 가능</a:t>
+              <a:t>• 학습 과정이 없어 과적합·라벨 누수 논쟁에서 자유롭고, 모든 판정이 문서의 숫자로 소급 가능</a:t>
             </a:r>
           </a:p>
         </p:txBody>
@@ -6333,7 +6333,7 @@
                 <a:latin typeface="맑은 고딕"/>
                 <a:ea typeface="맑은 고딕"/>
               </a:rPr>
-              <a:t>검증 계획 — 모형을 스스로 공격한다</a:t>
+              <a:t>검증 계획 — 모형을 스스로 공격</a:t>
             </a:r>
           </a:p>
           <a:p>
@@ -6353,7 +6353,7 @@
                 <a:latin typeface="맑은 고딕"/>
                 <a:ea typeface="맑은 고딕"/>
               </a:rPr>
-              <a:t>• 외부 검증: 공고의 순회진료 대상 목록과 본 규칙의 판정을 교차 대조한다 (일치·불일치 모두 보고)</a:t>
+              <a:t>• 외부 검증: 공고의 순회진료 대상 목록과 본 규칙의 판정을 교차 대조 (일치·불일치 모두 보고)</a:t>
             </a:r>
           </a:p>
           <a:p>
@@ -6373,7 +6373,7 @@
                 <a:latin typeface="맑은 고딕"/>
                 <a:ea typeface="맑은 고딕"/>
               </a:rPr>
-              <a:t>• 민감도 분석: 차용한 임계값을 변화시켜 결과가 얼마나 흔들리는지 공개한다</a:t>
+              <a:t>• 민감도 분석: 차용한 임계값을 변화시켜 결과가 얼마나 흔들리는지 공개</a:t>
             </a:r>
           </a:p>
           <a:p>
@@ -6393,7 +6393,7 @@
                 <a:latin typeface="맑은 고딕"/>
                 <a:ea typeface="맑은 고딕"/>
               </a:rPr>
-              <a:t>• 강건성 분석: 가중법을 바꿔(엔트로피/CRITIC/동일 가중) 순위가 유지되는지 확인한다</a:t>
+              <a:t>• 강건성 분석: 가중법을 바꿔(엔트로피/CRITIC/동일 가중) 순위 유지 여부 확인</a:t>
             </a:r>
           </a:p>
           <a:p>
@@ -6413,7 +6413,7 @@
                 <a:latin typeface="맑은 고딕"/>
                 <a:ea typeface="맑은 고딕"/>
               </a:rPr>
-              <a:t>• 실패한 설계(예: 군집분석이 부적합하면 기각 사유)도 은폐하지 않고 보고서에 남긴다</a:t>
+              <a:t>• 실패한 설계(예: 군집분석이 부적합하면 그 기각 사유)도 은폐하지 않고 보고서에 기록</a:t>
             </a:r>
           </a:p>
         </p:txBody>
@@ -10621,7 +10621,7 @@
                 <a:latin typeface="맑은 고딕"/>
                 <a:ea typeface="맑은 고딕"/>
               </a:rPr>
-              <a:t>본 계획서는 "왜·어떻게 할 것인가"를 다룬다. 실제 발견과 결과는 결과보고서에서 보고한다.</a:t>
+              <a:t>본 계획서는 "왜·어떻게 할 것인가"를 다룸. 실제 발견과 결과는 결과보고서에서 보고함.</a:t>
             </a:r>
           </a:p>
         </p:txBody>
@@ -11001,7 +11001,7 @@
                 <a:latin typeface="맑은 고딕"/>
                 <a:ea typeface="맑은 고딕"/>
               </a:rPr>
-              <a:t>부족</a:t>
+              <a:t>부족(㉠)과 배분(㉡)은 다른 문제이며 해법도 다름 — 본 계획은 ㉡을 맡음</a:t>
             </a:r>
             <a:r>
               <a:rPr sz="1250" b="0" dirty="0">
@@ -11011,7 +11011,7 @@
                 <a:latin typeface="맑은 고딕"/>
                 <a:ea typeface="맑은 고딕"/>
               </a:rPr>
-              <a:t>(㉠)과 </a:t>
+              <a:t/>
             </a:r>
             <a:r>
               <a:rPr sz="1250" b="0" dirty="0" err="1">
@@ -11021,7 +11021,7 @@
                 <a:latin typeface="맑은 고딕"/>
                 <a:ea typeface="맑은 고딕"/>
               </a:rPr>
-              <a:t>배분</a:t>
+              <a:t/>
             </a:r>
             <a:r>
               <a:rPr sz="1250" b="0" dirty="0">
@@ -11031,7 +11031,7 @@
                 <a:latin typeface="맑은 고딕"/>
                 <a:ea typeface="맑은 고딕"/>
               </a:rPr>
-              <a:t>(㉡)은 </a:t>
+              <a:t/>
             </a:r>
             <a:r>
               <a:rPr sz="1250" b="0" dirty="0" err="1">
@@ -11041,7 +11041,7 @@
                 <a:latin typeface="맑은 고딕"/>
                 <a:ea typeface="맑은 고딕"/>
               </a:rPr>
-              <a:t>다른</a:t>
+              <a:t/>
             </a:r>
             <a:r>
               <a:rPr sz="1250" b="0" dirty="0">
@@ -11051,7 +11051,7 @@
                 <a:latin typeface="맑은 고딕"/>
                 <a:ea typeface="맑은 고딕"/>
               </a:rPr>
-              <a:t> </a:t>
+              <a:t/>
             </a:r>
             <a:r>
               <a:rPr sz="1250" b="0" dirty="0" err="1">
@@ -11061,7 +11061,7 @@
                 <a:latin typeface="맑은 고딕"/>
                 <a:ea typeface="맑은 고딕"/>
               </a:rPr>
-              <a:t>문제이고</a:t>
+              <a:t/>
             </a:r>
             <a:r>
               <a:rPr sz="1250" b="0" dirty="0">
@@ -11071,7 +11071,7 @@
                 <a:latin typeface="맑은 고딕"/>
                 <a:ea typeface="맑은 고딕"/>
               </a:rPr>
-              <a:t> </a:t>
+              <a:t/>
             </a:r>
             <a:r>
               <a:rPr sz="1250" b="0" dirty="0" err="1">
@@ -11081,7 +11081,7 @@
                 <a:latin typeface="맑은 고딕"/>
                 <a:ea typeface="맑은 고딕"/>
               </a:rPr>
-              <a:t>해법도</a:t>
+              <a:t/>
             </a:r>
             <a:r>
               <a:rPr sz="1250" b="0" dirty="0">
@@ -11091,7 +11091,7 @@
                 <a:latin typeface="맑은 고딕"/>
                 <a:ea typeface="맑은 고딕"/>
               </a:rPr>
-              <a:t> </a:t>
+              <a:t/>
             </a:r>
             <a:r>
               <a:rPr sz="1250" b="0" dirty="0" err="1">
@@ -11101,7 +11101,7 @@
                 <a:latin typeface="맑은 고딕"/>
                 <a:ea typeface="맑은 고딕"/>
               </a:rPr>
-              <a:t>다르다</a:t>
+              <a:t/>
             </a:r>
             <a:r>
               <a:rPr sz="1250" b="0" dirty="0">
@@ -11111,7 +11111,7 @@
                 <a:latin typeface="맑은 고딕"/>
                 <a:ea typeface="맑은 고딕"/>
               </a:rPr>
-              <a:t> — 본 </a:t>
+              <a:t/>
             </a:r>
             <a:r>
               <a:rPr sz="1250" b="0" dirty="0" err="1">
@@ -11121,7 +11121,7 @@
                 <a:latin typeface="맑은 고딕"/>
                 <a:ea typeface="맑은 고딕"/>
               </a:rPr>
-              <a:t>계획은</a:t>
+              <a:t/>
             </a:r>
             <a:r>
               <a:rPr sz="1250" b="0" dirty="0">
@@ -11131,7 +11131,7 @@
                 <a:latin typeface="맑은 고딕"/>
                 <a:ea typeface="맑은 고딕"/>
               </a:rPr>
-              <a:t> ㉡을 </a:t>
+              <a:t/>
             </a:r>
             <a:r>
               <a:rPr sz="1250" b="0" dirty="0" err="1">
@@ -11141,7 +11141,7 @@
                 <a:latin typeface="맑은 고딕"/>
                 <a:ea typeface="맑은 고딕"/>
               </a:rPr>
-              <a:t>맡는다</a:t>
+              <a:t/>
             </a:r>
             <a:endParaRPr sz="1250" b="0" dirty="0">
               <a:solidFill>
@@ -12330,7 +12330,7 @@
                 <a:latin typeface="맑은 고딕"/>
                 <a:ea typeface="맑은 고딕"/>
               </a:rPr>
-              <a:t>• ㉠은 </a:t>
+              <a:t>• ㉠은 예산·인력에 제한된 영역이라 데이터가 해답을 주기 어려움. ㉡은 배분 규칙의 문제이므로 데이터로 답할 수 있음 — 그리고 ㉡은 아직 제대로 된 검증이 이뤄지지 않았음</a:t>
             </a:r>
             <a:r>
               <a:rPr sz="1100" b="0" dirty="0" err="1">
@@ -12340,7 +12340,7 @@
                 <a:latin typeface="맑은 고딕"/>
                 <a:ea typeface="맑은 고딕"/>
               </a:rPr>
-              <a:t>예산·인력</a:t>
+              <a:t/>
             </a:r>
             <a:r>
               <a:rPr lang="ko-KR" altLang="en-US" sz="1100" b="0" dirty="0">
@@ -12350,7 +12350,7 @@
                 <a:latin typeface="맑은 고딕"/>
                 <a:ea typeface="맑은 고딕"/>
               </a:rPr>
-              <a:t>에 따라 </a:t>
+              <a:t/>
             </a:r>
             <a:r>
               <a:rPr lang="ko-KR" altLang="en-US" sz="1100" b="0" dirty="0" err="1">
@@ -12360,7 +12360,7 @@
                 <a:latin typeface="맑은 고딕"/>
                 <a:ea typeface="맑은 고딕"/>
               </a:rPr>
-              <a:t>재한된</a:t>
+              <a:t/>
             </a:r>
             <a:r>
               <a:rPr lang="ko-KR" altLang="en-US" sz="1100" b="0" dirty="0">
@@ -12370,7 +12370,7 @@
                 <a:latin typeface="맑은 고딕"/>
                 <a:ea typeface="맑은 고딕"/>
               </a:rPr>
-              <a:t> </a:t>
+              <a:t/>
             </a:r>
             <a:r>
               <a:rPr sz="1100" b="0" dirty="0" err="1">
@@ -12380,7 +12380,7 @@
                 <a:latin typeface="맑은 고딕"/>
                 <a:ea typeface="맑은 고딕"/>
               </a:rPr>
-              <a:t>영역이라</a:t>
+              <a:t/>
             </a:r>
             <a:r>
               <a:rPr sz="1100" b="0" dirty="0">
@@ -12390,7 +12390,7 @@
                 <a:latin typeface="맑은 고딕"/>
                 <a:ea typeface="맑은 고딕"/>
               </a:rPr>
-              <a:t> </a:t>
+              <a:t/>
             </a:r>
             <a:r>
               <a:rPr sz="1100" b="0" dirty="0" err="1">
@@ -12400,7 +12400,7 @@
                 <a:latin typeface="맑은 고딕"/>
                 <a:ea typeface="맑은 고딕"/>
               </a:rPr>
-              <a:t>데이터가</a:t>
+              <a:t/>
             </a:r>
             <a:r>
               <a:rPr sz="1100" b="0" dirty="0">
@@ -12410,7 +12410,7 @@
                 <a:latin typeface="맑은 고딕"/>
                 <a:ea typeface="맑은 고딕"/>
               </a:rPr>
-              <a:t> </a:t>
+              <a:t/>
             </a:r>
             <a:r>
               <a:rPr lang="ko-KR" altLang="en-US" sz="1100" dirty="0">
@@ -12420,7 +12420,7 @@
                 <a:latin typeface="맑은 고딕"/>
                 <a:ea typeface="맑은 고딕"/>
               </a:rPr>
-              <a:t>해답을 주기 힘들</a:t>
+              <a:t/>
             </a:r>
             <a:r>
               <a:rPr sz="1100" b="0" dirty="0">
@@ -12430,7 +12430,7 @@
                 <a:latin typeface="맑은 고딕"/>
                 <a:ea typeface="맑은 고딕"/>
               </a:rPr>
-              <a:t>다. ㉡은 </a:t>
+              <a:t/>
             </a:r>
             <a:r>
               <a:rPr sz="1100" b="0" dirty="0" err="1">
@@ -12440,7 +12440,7 @@
                 <a:latin typeface="맑은 고딕"/>
                 <a:ea typeface="맑은 고딕"/>
               </a:rPr>
-              <a:t>배분</a:t>
+              <a:t/>
             </a:r>
             <a:r>
               <a:rPr sz="1100" b="0" dirty="0">
@@ -12450,7 +12450,7 @@
                 <a:latin typeface="맑은 고딕"/>
                 <a:ea typeface="맑은 고딕"/>
               </a:rPr>
-              <a:t> </a:t>
+              <a:t/>
             </a:r>
             <a:r>
               <a:rPr sz="1100" b="0" dirty="0" err="1">
@@ -12460,7 +12460,7 @@
                 <a:latin typeface="맑은 고딕"/>
                 <a:ea typeface="맑은 고딕"/>
               </a:rPr>
-              <a:t>규칙의</a:t>
+              <a:t/>
             </a:r>
             <a:r>
               <a:rPr sz="1100" b="0" dirty="0">
@@ -12470,7 +12470,7 @@
                 <a:latin typeface="맑은 고딕"/>
                 <a:ea typeface="맑은 고딕"/>
               </a:rPr>
-              <a:t> </a:t>
+              <a:t/>
             </a:r>
             <a:r>
               <a:rPr sz="1100" b="0" dirty="0" err="1">
@@ -12480,7 +12480,7 @@
                 <a:latin typeface="맑은 고딕"/>
                 <a:ea typeface="맑은 고딕"/>
               </a:rPr>
-              <a:t>문제이므로</a:t>
+              <a:t/>
             </a:r>
             <a:r>
               <a:rPr sz="1100" b="0" dirty="0">
@@ -12490,7 +12490,7 @@
                 <a:latin typeface="맑은 고딕"/>
                 <a:ea typeface="맑은 고딕"/>
               </a:rPr>
-              <a:t> </a:t>
+              <a:t/>
             </a:r>
             <a:r>
               <a:rPr sz="1100" b="0" dirty="0" err="1">
@@ -12500,7 +12500,7 @@
                 <a:latin typeface="맑은 고딕"/>
                 <a:ea typeface="맑은 고딕"/>
               </a:rPr>
-              <a:t>데이터로</a:t>
+              <a:t/>
             </a:r>
             <a:r>
               <a:rPr sz="1100" b="0" dirty="0">
@@ -12510,7 +12510,7 @@
                 <a:latin typeface="맑은 고딕"/>
                 <a:ea typeface="맑은 고딕"/>
               </a:rPr>
-              <a:t> </a:t>
+              <a:t/>
             </a:r>
             <a:r>
               <a:rPr sz="1100" b="0" dirty="0" err="1">
@@ -12520,7 +12520,7 @@
                 <a:latin typeface="맑은 고딕"/>
                 <a:ea typeface="맑은 고딕"/>
               </a:rPr>
-              <a:t>답할</a:t>
+              <a:t/>
             </a:r>
             <a:r>
               <a:rPr sz="1100" b="0" dirty="0">
@@ -12530,7 +12530,7 @@
                 <a:latin typeface="맑은 고딕"/>
                 <a:ea typeface="맑은 고딕"/>
               </a:rPr>
-              <a:t> 수 </a:t>
+              <a:t/>
             </a:r>
             <a:r>
               <a:rPr sz="1100" b="0" dirty="0" err="1">
@@ -12540,7 +12540,7 @@
                 <a:latin typeface="맑은 고딕"/>
                 <a:ea typeface="맑은 고딕"/>
               </a:rPr>
-              <a:t>있다</a:t>
+              <a:t/>
             </a:r>
             <a:r>
               <a:rPr sz="1100" b="0" dirty="0">
@@ -12550,7 +12550,7 @@
                 <a:latin typeface="맑은 고딕"/>
                 <a:ea typeface="맑은 고딕"/>
               </a:rPr>
-              <a:t> — </a:t>
+              <a:t/>
             </a:r>
             <a:r>
               <a:rPr sz="1100" b="0" dirty="0" err="1">
@@ -12560,7 +12560,7 @@
                 <a:latin typeface="맑은 고딕"/>
                 <a:ea typeface="맑은 고딕"/>
               </a:rPr>
-              <a:t>그리고</a:t>
+              <a:t/>
             </a:r>
             <a:r>
               <a:rPr sz="1100" b="0" dirty="0">
@@ -12570,7 +12570,7 @@
                 <a:latin typeface="맑은 고딕"/>
                 <a:ea typeface="맑은 고딕"/>
               </a:rPr>
-              <a:t> ㉡은 </a:t>
+              <a:t/>
             </a:r>
             <a:r>
               <a:rPr sz="1100" b="0" dirty="0" err="1">
@@ -12580,7 +12580,7 @@
                 <a:latin typeface="맑은 고딕"/>
                 <a:ea typeface="맑은 고딕"/>
               </a:rPr>
-              <a:t>아직</a:t>
+              <a:t/>
             </a:r>
             <a:r>
               <a:rPr sz="1100" b="0" dirty="0">
@@ -12590,7 +12590,7 @@
                 <a:latin typeface="맑은 고딕"/>
                 <a:ea typeface="맑은 고딕"/>
               </a:rPr>
-              <a:t> </a:t>
+              <a:t/>
             </a:r>
             <a:r>
               <a:rPr lang="ko-KR" altLang="en-US" sz="1100" b="0" dirty="0" err="1">
@@ -12600,7 +12600,7 @@
                 <a:latin typeface="맑은 고딕"/>
                 <a:ea typeface="맑은 고딕"/>
               </a:rPr>
-              <a:t>제대로된</a:t>
+              <a:t/>
             </a:r>
             <a:r>
               <a:rPr lang="ko-KR" altLang="en-US" sz="1100" b="0" dirty="0">
@@ -12610,7 +12610,7 @@
                 <a:latin typeface="맑은 고딕"/>
                 <a:ea typeface="맑은 고딕"/>
               </a:rPr>
-              <a:t> 검증이 되지 않았다</a:t>
+              <a:t/>
             </a:r>
             <a:r>
               <a:rPr lang="en-US" altLang="ko-KR" sz="1100" b="0" dirty="0">
@@ -12620,7 +12620,7 @@
                 <a:latin typeface="맑은 고딕"/>
                 <a:ea typeface="맑은 고딕"/>
               </a:rPr>
-              <a:t>.</a:t>
+              <a:t/>
             </a:r>
             <a:endParaRPr sz="1100" b="0" dirty="0">
               <a:solidFill>
@@ -13292,7 +13292,7 @@
                 <a:latin typeface="맑은 고딕"/>
                 <a:ea typeface="맑은 고딕"/>
               </a:rPr>
-              <a:t>• 즉 이 제도에서 "취약"은 처음부터 끝까지 오직 거리와 시간으로 정의된다 — 이 점이 이 프로젝트의 첫 번째 표적이 된다</a:t>
+              <a:t>• 즉 이 제도에서 "취약"은 처음부터 끝까지 오직 거리와 시간으로 정의됨 — 이 점이 이 프로젝트의 첫 번째 표적</a:t>
             </a:r>
           </a:p>
           <a:p>
@@ -13605,7 +13605,7 @@
                 <a:latin typeface="맑은 고딕"/>
                 <a:ea typeface="맑은 고딕"/>
               </a:rPr>
-              <a:t>"</a:t>
+              <a:t>"주어진 자원이 체계적으로, 필요한 곳으로 배분되고 있는가" — 이를 데이터로 검증하고 개선하는 것이 본 계획의 목표</a:t>
             </a:r>
             <a:r>
               <a:rPr lang="ko-KR" altLang="en-US" sz="1500" b="1" dirty="0">
@@ -13615,7 +13615,7 @@
                 <a:latin typeface="맑은 고딕"/>
                 <a:ea typeface="맑은 고딕"/>
               </a:rPr>
-              <a:t>주어진 자원이</a:t>
+              <a:t/>
             </a:r>
             <a:r>
               <a:rPr sz="1500" b="1" dirty="0">
@@ -13625,7 +13625,7 @@
                 <a:latin typeface="맑은 고딕"/>
                 <a:ea typeface="맑은 고딕"/>
               </a:rPr>
-              <a:t> </a:t>
+              <a:t/>
             </a:r>
             <a:r>
               <a:rPr sz="1500" b="1" dirty="0" err="1">
@@ -13635,7 +13635,7 @@
                 <a:latin typeface="맑은 고딕"/>
                 <a:ea typeface="맑은 고딕"/>
               </a:rPr>
-              <a:t>체계적으로</a:t>
+              <a:t/>
             </a:r>
             <a:r>
               <a:rPr sz="1500" b="1" dirty="0">
@@ -13645,7 +13645,7 @@
                 <a:latin typeface="맑은 고딕"/>
                 <a:ea typeface="맑은 고딕"/>
               </a:rPr>
-              <a:t>, </a:t>
+              <a:t/>
             </a:r>
             <a:r>
               <a:rPr sz="1500" b="1" dirty="0" err="1">
@@ -13655,7 +13655,7 @@
                 <a:latin typeface="맑은 고딕"/>
                 <a:ea typeface="맑은 고딕"/>
               </a:rPr>
-              <a:t>필요한</a:t>
+              <a:t/>
             </a:r>
             <a:r>
               <a:rPr sz="1500" b="1" dirty="0">
@@ -13665,7 +13665,7 @@
                 <a:latin typeface="맑은 고딕"/>
                 <a:ea typeface="맑은 고딕"/>
               </a:rPr>
-              <a:t> </a:t>
+              <a:t/>
             </a:r>
             <a:r>
               <a:rPr sz="1500" b="1" dirty="0" err="1">
@@ -13675,7 +13675,7 @@
                 <a:latin typeface="맑은 고딕"/>
                 <a:ea typeface="맑은 고딕"/>
               </a:rPr>
-              <a:t>곳으로</a:t>
+              <a:t/>
             </a:r>
             <a:r>
               <a:rPr sz="1500" b="1" dirty="0">
@@ -13685,7 +13685,7 @@
                 <a:latin typeface="맑은 고딕"/>
                 <a:ea typeface="맑은 고딕"/>
               </a:rPr>
-              <a:t> </a:t>
+              <a:t/>
             </a:r>
             <a:r>
               <a:rPr sz="1500" b="1" dirty="0" err="1">
@@ -13695,7 +13695,7 @@
                 <a:latin typeface="맑은 고딕"/>
                 <a:ea typeface="맑은 고딕"/>
               </a:rPr>
-              <a:t>배분되고</a:t>
+              <a:t/>
             </a:r>
             <a:r>
               <a:rPr sz="1500" b="1" dirty="0">
@@ -13705,7 +13705,7 @@
                 <a:latin typeface="맑은 고딕"/>
                 <a:ea typeface="맑은 고딕"/>
               </a:rPr>
-              <a:t> </a:t>
+              <a:t/>
             </a:r>
             <a:r>
               <a:rPr sz="1500" b="1" dirty="0" err="1">
@@ -13715,7 +13715,7 @@
                 <a:latin typeface="맑은 고딕"/>
                 <a:ea typeface="맑은 고딕"/>
               </a:rPr>
-              <a:t>있는가</a:t>
+              <a:t/>
             </a:r>
             <a:r>
               <a:rPr sz="1500" b="1" dirty="0">
@@ -13725,7 +13725,7 @@
                 <a:latin typeface="맑은 고딕"/>
                 <a:ea typeface="맑은 고딕"/>
               </a:rPr>
-              <a:t>" — </a:t>
+              <a:t/>
             </a:r>
             <a:r>
               <a:rPr sz="1500" b="1" dirty="0" err="1">
@@ -13735,7 +13735,7 @@
                 <a:latin typeface="맑은 고딕"/>
                 <a:ea typeface="맑은 고딕"/>
               </a:rPr>
-              <a:t>이를</a:t>
+              <a:t/>
             </a:r>
             <a:r>
               <a:rPr sz="1500" b="1" dirty="0">
@@ -13745,7 +13745,7 @@
                 <a:latin typeface="맑은 고딕"/>
                 <a:ea typeface="맑은 고딕"/>
               </a:rPr>
-              <a:t> </a:t>
+              <a:t/>
             </a:r>
             <a:r>
               <a:rPr sz="1500" b="1" dirty="0" err="1">
@@ -13755,7 +13755,7 @@
                 <a:latin typeface="맑은 고딕"/>
                 <a:ea typeface="맑은 고딕"/>
               </a:rPr>
-              <a:t>데이터로</a:t>
+              <a:t/>
             </a:r>
             <a:r>
               <a:rPr sz="1500" b="1" dirty="0">
@@ -13765,7 +13765,7 @@
                 <a:latin typeface="맑은 고딕"/>
                 <a:ea typeface="맑은 고딕"/>
               </a:rPr>
-              <a:t> </a:t>
+              <a:t/>
             </a:r>
             <a:r>
               <a:rPr sz="1500" b="1" dirty="0" err="1">
@@ -13775,7 +13775,7 @@
                 <a:latin typeface="맑은 고딕"/>
                 <a:ea typeface="맑은 고딕"/>
               </a:rPr>
-              <a:t>검증하</a:t>
+              <a:t/>
             </a:r>
             <a:r>
               <a:rPr lang="ko-KR" altLang="en-US" sz="1500" b="1" dirty="0">
@@ -13785,7 +13785,7 @@
                 <a:latin typeface="맑은 고딕"/>
                 <a:ea typeface="맑은 고딕"/>
               </a:rPr>
-              <a:t>고</a:t>
+              <a:t/>
             </a:r>
             <a:r>
               <a:rPr lang="en-US" altLang="ko-KR" sz="1500" b="1" dirty="0">
@@ -13795,7 +13795,7 @@
                 <a:latin typeface="맑은 고딕"/>
                 <a:ea typeface="맑은 고딕"/>
               </a:rPr>
-              <a:t>,</a:t>
+              <a:t/>
             </a:r>
             <a:r>
               <a:rPr lang="ko-KR" altLang="en-US" sz="1500" b="1" dirty="0">
@@ -13805,7 +13805,7 @@
                 <a:latin typeface="맑은 고딕"/>
                 <a:ea typeface="맑은 고딕"/>
               </a:rPr>
-              <a:t> 개선하는</a:t>
+              <a:t/>
             </a:r>
             <a:r>
               <a:rPr sz="1500" b="1" dirty="0">
@@ -13815,7 +13815,7 @@
                 <a:latin typeface="맑은 고딕"/>
                 <a:ea typeface="맑은 고딕"/>
               </a:rPr>
-              <a:t> </a:t>
+              <a:t/>
             </a:r>
             <a:r>
               <a:rPr sz="1500" b="1" dirty="0" err="1">
@@ -13825,7 +13825,7 @@
                 <a:latin typeface="맑은 고딕"/>
                 <a:ea typeface="맑은 고딕"/>
               </a:rPr>
-              <a:t>것이</a:t>
+              <a:t/>
             </a:r>
             <a:r>
               <a:rPr sz="1500" b="1" dirty="0">
@@ -13835,7 +13835,7 @@
                 <a:latin typeface="맑은 고딕"/>
                 <a:ea typeface="맑은 고딕"/>
               </a:rPr>
-              <a:t> 본 </a:t>
+              <a:t/>
             </a:r>
             <a:r>
               <a:rPr lang="ko-KR" altLang="en-US" sz="1500" b="1" dirty="0">
@@ -13845,7 +13845,7 @@
                 <a:latin typeface="맑은 고딕"/>
                 <a:ea typeface="맑은 고딕"/>
               </a:rPr>
-              <a:t>프로젝트의 </a:t>
+              <a:t/>
             </a:r>
             <a:r>
               <a:rPr sz="1500" b="1" dirty="0" err="1">
@@ -13855,7 +13855,7 @@
                 <a:latin typeface="맑은 고딕"/>
                 <a:ea typeface="맑은 고딕"/>
               </a:rPr>
-              <a:t>계획이다</a:t>
+              <a:t/>
             </a:r>
             <a:r>
               <a:rPr sz="1500" b="1" dirty="0">
@@ -13865,7 +13865,7 @@
                 <a:latin typeface="맑은 고딕"/>
                 <a:ea typeface="맑은 고딕"/>
               </a:rPr>
-              <a:t>.</a:t>
+              <a:t/>
             </a:r>
           </a:p>
         </p:txBody>
@@ -14178,7 +14178,7 @@
                 <a:latin typeface="맑은 고딕"/>
                 <a:ea typeface="맑은 고딕"/>
               </a:rPr>
-              <a:t>한 단계라도 막히거나 새면, 앞 단계가 아무리 정확해도 자원은 엉뚱한 곳으로 간다</a:t>
+              <a:t>한 단계라도 막히거나 새면, 앞 단계가 아무리 정확해도 자원은 엉뚱한 곳으로 감</a:t>
             </a:r>
           </a:p>
         </p:txBody>
@@ -15322,7 +15322,7 @@
                 <a:latin typeface="맑은 고딕"/>
                 <a:ea typeface="맑은 고딕"/>
               </a:rPr>
-              <a:t>• </a:t>
+              <a:t>• 판정 기준이 이동시간 파생 지표뿐임</a:t>
             </a:r>
             <a:r>
               <a:rPr sz="1150" b="0" dirty="0" err="1">
@@ -15332,7 +15332,7 @@
                 <a:latin typeface="맑은 고딕"/>
                 <a:ea typeface="맑은 고딕"/>
               </a:rPr>
-              <a:t>판정</a:t>
+              <a:t/>
             </a:r>
             <a:r>
               <a:rPr sz="1150" b="0" dirty="0">
@@ -15342,7 +15342,7 @@
                 <a:latin typeface="맑은 고딕"/>
                 <a:ea typeface="맑은 고딕"/>
               </a:rPr>
-              <a:t> </a:t>
+              <a:t/>
             </a:r>
             <a:r>
               <a:rPr sz="1150" b="0" dirty="0" err="1">
@@ -15352,7 +15352,7 @@
                 <a:latin typeface="맑은 고딕"/>
                 <a:ea typeface="맑은 고딕"/>
               </a:rPr>
-              <a:t>기준은</a:t>
+              <a:t/>
             </a:r>
             <a:r>
               <a:rPr sz="1150" b="0" dirty="0">
@@ -15362,7 +15362,7 @@
                 <a:latin typeface="맑은 고딕"/>
                 <a:ea typeface="맑은 고딕"/>
               </a:rPr>
-              <a:t> </a:t>
+              <a:t/>
             </a:r>
             <a:r>
               <a:rPr sz="1150" b="0" dirty="0" err="1">
@@ -15372,7 +15372,7 @@
                 <a:latin typeface="맑은 고딕"/>
                 <a:ea typeface="맑은 고딕"/>
               </a:rPr>
-              <a:t>이동시간</a:t>
+              <a:t/>
             </a:r>
             <a:r>
               <a:rPr sz="1150" b="0" dirty="0">
@@ -15382,7 +15382,7 @@
                 <a:latin typeface="맑은 고딕"/>
                 <a:ea typeface="맑은 고딕"/>
               </a:rPr>
-              <a:t> </a:t>
+              <a:t/>
             </a:r>
             <a:r>
               <a:rPr sz="1150" b="0" dirty="0" err="1">
@@ -15392,7 +15392,7 @@
                 <a:latin typeface="맑은 고딕"/>
                 <a:ea typeface="맑은 고딕"/>
               </a:rPr>
-              <a:t>파생</a:t>
+              <a:t/>
             </a:r>
             <a:r>
               <a:rPr sz="1150" b="0" dirty="0">
@@ -15402,7 +15402,7 @@
                 <a:latin typeface="맑은 고딕"/>
                 <a:ea typeface="맑은 고딕"/>
               </a:rPr>
-              <a:t> </a:t>
+              <a:t/>
             </a:r>
             <a:r>
               <a:rPr sz="1150" b="0" dirty="0" err="1">
@@ -15412,7 +15412,7 @@
                 <a:latin typeface="맑은 고딕"/>
                 <a:ea typeface="맑은 고딕"/>
               </a:rPr>
-              <a:t>지표뿐이다</a:t>
+              <a:t/>
             </a:r>
             <a:endParaRPr sz="1150" b="0" dirty="0">
               <a:solidFill>
@@ -15439,7 +15439,7 @@
                 <a:latin typeface="맑은 고딕"/>
                 <a:ea typeface="맑은 고딕"/>
               </a:rPr>
-              <a:t>• </a:t>
+              <a:t>• 관내 분만 인프라가 소멸해도 "옆 도시로 60분 내 이동 가능"이면 취약지가 아니게 되는 구조 아닌가</a:t>
             </a:r>
             <a:r>
               <a:rPr sz="1150" b="0" dirty="0" err="1">
@@ -15449,7 +15449,7 @@
                 <a:latin typeface="맑은 고딕"/>
                 <a:ea typeface="맑은 고딕"/>
               </a:rPr>
-              <a:t>관내</a:t>
+              <a:t/>
             </a:r>
             <a:r>
               <a:rPr sz="1150" b="0" dirty="0">
@@ -15459,7 +15459,7 @@
                 <a:latin typeface="맑은 고딕"/>
                 <a:ea typeface="맑은 고딕"/>
               </a:rPr>
-              <a:t> </a:t>
+              <a:t/>
             </a:r>
             <a:r>
               <a:rPr sz="1150" b="0" dirty="0" err="1">
@@ -15469,7 +15469,7 @@
                 <a:latin typeface="맑은 고딕"/>
                 <a:ea typeface="맑은 고딕"/>
               </a:rPr>
-              <a:t>분만</a:t>
+              <a:t/>
             </a:r>
             <a:r>
               <a:rPr sz="1150" b="0" dirty="0">
@@ -15479,7 +15479,7 @@
                 <a:latin typeface="맑은 고딕"/>
                 <a:ea typeface="맑은 고딕"/>
               </a:rPr>
-              <a:t> </a:t>
+              <a:t/>
             </a:r>
             <a:r>
               <a:rPr sz="1150" b="0" dirty="0" err="1">
@@ -15489,7 +15489,7 @@
                 <a:latin typeface="맑은 고딕"/>
                 <a:ea typeface="맑은 고딕"/>
               </a:rPr>
-              <a:t>인프라가</a:t>
+              <a:t/>
             </a:r>
             <a:r>
               <a:rPr sz="1150" b="0" dirty="0">
@@ -15499,7 +15499,7 @@
                 <a:latin typeface="맑은 고딕"/>
                 <a:ea typeface="맑은 고딕"/>
               </a:rPr>
-              <a:t> </a:t>
+              <a:t/>
             </a:r>
             <a:r>
               <a:rPr sz="1150" b="0" dirty="0" err="1">
@@ -15509,7 +15509,7 @@
                 <a:latin typeface="맑은 고딕"/>
                 <a:ea typeface="맑은 고딕"/>
               </a:rPr>
-              <a:t>소멸해도</a:t>
+              <a:t/>
             </a:r>
             <a:r>
               <a:rPr sz="1150" b="0" dirty="0">
@@ -15519,7 +15519,7 @@
                 <a:latin typeface="맑은 고딕"/>
                 <a:ea typeface="맑은 고딕"/>
               </a:rPr>
-              <a:t> "옆 </a:t>
+              <a:t/>
             </a:r>
             <a:r>
               <a:rPr sz="1150" b="0" dirty="0" err="1">
@@ -15529,7 +15529,7 @@
                 <a:latin typeface="맑은 고딕"/>
                 <a:ea typeface="맑은 고딕"/>
               </a:rPr>
-              <a:t>도시로</a:t>
+              <a:t/>
             </a:r>
             <a:r>
               <a:rPr sz="1150" b="0" dirty="0">
@@ -15539,7 +15539,7 @@
                 <a:latin typeface="맑은 고딕"/>
                 <a:ea typeface="맑은 고딕"/>
               </a:rPr>
-              <a:t> 60분 </a:t>
+              <a:t/>
             </a:r>
             <a:r>
               <a:rPr sz="1150" b="0" dirty="0" err="1">
@@ -15549,7 +15549,7 @@
                 <a:latin typeface="맑은 고딕"/>
                 <a:ea typeface="맑은 고딕"/>
               </a:rPr>
-              <a:t>안에</a:t>
+              <a:t/>
             </a:r>
             <a:r>
               <a:rPr sz="1150" b="0" dirty="0">
@@ -15559,7 +15559,7 @@
                 <a:latin typeface="맑은 고딕"/>
                 <a:ea typeface="맑은 고딕"/>
               </a:rPr>
-              <a:t> 갈 수 </a:t>
+              <a:t/>
             </a:r>
             <a:r>
               <a:rPr sz="1150" b="0" dirty="0" err="1">
@@ -15569,7 +15569,7 @@
                 <a:latin typeface="맑은 고딕"/>
                 <a:ea typeface="맑은 고딕"/>
               </a:rPr>
-              <a:t>있으면</a:t>
+              <a:t/>
             </a:r>
             <a:r>
               <a:rPr sz="1150" b="0" dirty="0">
@@ -15579,7 +15579,7 @@
                 <a:latin typeface="맑은 고딕"/>
                 <a:ea typeface="맑은 고딕"/>
               </a:rPr>
-              <a:t>" </a:t>
+              <a:t/>
             </a:r>
             <a:r>
               <a:rPr sz="1150" b="0" dirty="0" err="1">
@@ -15589,7 +15589,7 @@
                 <a:latin typeface="맑은 고딕"/>
                 <a:ea typeface="맑은 고딕"/>
               </a:rPr>
-              <a:t>취약지가</a:t>
+              <a:t/>
             </a:r>
             <a:r>
               <a:rPr sz="1150" b="0" dirty="0">
@@ -15599,7 +15599,7 @@
                 <a:latin typeface="맑은 고딕"/>
                 <a:ea typeface="맑은 고딕"/>
               </a:rPr>
-              <a:t> </a:t>
+              <a:t/>
             </a:r>
             <a:r>
               <a:rPr sz="1150" b="0" dirty="0" err="1">
@@ -15609,7 +15609,7 @@
                 <a:latin typeface="맑은 고딕"/>
                 <a:ea typeface="맑은 고딕"/>
               </a:rPr>
-              <a:t>아니게</a:t>
+              <a:t/>
             </a:r>
             <a:r>
               <a:rPr sz="1150" b="0" dirty="0">
@@ -15619,7 +15619,7 @@
                 <a:latin typeface="맑은 고딕"/>
                 <a:ea typeface="맑은 고딕"/>
               </a:rPr>
-              <a:t> </a:t>
+              <a:t/>
             </a:r>
             <a:r>
               <a:rPr sz="1150" b="0" dirty="0" err="1">
@@ -15629,7 +15629,7 @@
                 <a:latin typeface="맑은 고딕"/>
                 <a:ea typeface="맑은 고딕"/>
               </a:rPr>
-              <a:t>되는</a:t>
+              <a:t/>
             </a:r>
             <a:r>
               <a:rPr sz="1150" b="0" dirty="0">
@@ -15639,7 +15639,7 @@
                 <a:latin typeface="맑은 고딕"/>
                 <a:ea typeface="맑은 고딕"/>
               </a:rPr>
-              <a:t> </a:t>
+              <a:t/>
             </a:r>
             <a:r>
               <a:rPr sz="1150" b="0" dirty="0" err="1">
@@ -15649,7 +15649,7 @@
                 <a:latin typeface="맑은 고딕"/>
                 <a:ea typeface="맑은 고딕"/>
               </a:rPr>
-              <a:t>구조</a:t>
+              <a:t/>
             </a:r>
             <a:r>
               <a:rPr sz="1150" b="0" dirty="0">
@@ -15659,7 +15659,7 @@
                 <a:latin typeface="맑은 고딕"/>
                 <a:ea typeface="맑은 고딕"/>
               </a:rPr>
-              <a:t> </a:t>
+              <a:t/>
             </a:r>
             <a:r>
               <a:rPr sz="1150" b="0" dirty="0" err="1">
@@ -15669,7 +15669,7 @@
                 <a:latin typeface="맑은 고딕"/>
                 <a:ea typeface="맑은 고딕"/>
               </a:rPr>
-              <a:t>아닌가</a:t>
+              <a:t/>
             </a:r>
             <a:r>
               <a:rPr sz="1150" b="0" dirty="0">
@@ -15679,7 +15679,7 @@
                 <a:latin typeface="맑은 고딕"/>
                 <a:ea typeface="맑은 고딕"/>
               </a:rPr>
-              <a:t>?</a:t>
+              <a:t/>
             </a:r>
           </a:p>
           <a:p>
@@ -15699,7 +15699,7 @@
                 <a:latin typeface="맑은 고딕"/>
                 <a:ea typeface="맑은 고딕"/>
               </a:rPr>
-              <a:t>→ </a:t>
+              <a:t>→ 기준이 구조적으로 놓치는 지역이 있는지 검증</a:t>
             </a:r>
             <a:r>
               <a:rPr sz="1150" b="0" dirty="0" err="1">
@@ -15709,7 +15709,7 @@
                 <a:latin typeface="맑은 고딕"/>
                 <a:ea typeface="맑은 고딕"/>
               </a:rPr>
-              <a:t>기준이</a:t>
+              <a:t/>
             </a:r>
             <a:r>
               <a:rPr sz="1150" b="0" dirty="0">
@@ -15719,7 +15719,7 @@
                 <a:latin typeface="맑은 고딕"/>
                 <a:ea typeface="맑은 고딕"/>
               </a:rPr>
-              <a:t> </a:t>
+              <a:t/>
             </a:r>
             <a:r>
               <a:rPr sz="1150" b="0" dirty="0" err="1">
@@ -15729,7 +15729,7 @@
                 <a:latin typeface="맑은 고딕"/>
                 <a:ea typeface="맑은 고딕"/>
               </a:rPr>
-              <a:t>구조적으로</a:t>
+              <a:t/>
             </a:r>
             <a:r>
               <a:rPr sz="1150" b="0" dirty="0">
@@ -15739,7 +15739,7 @@
                 <a:latin typeface="맑은 고딕"/>
                 <a:ea typeface="맑은 고딕"/>
               </a:rPr>
-              <a:t> </a:t>
+              <a:t/>
             </a:r>
             <a:r>
               <a:rPr sz="1150" b="0" dirty="0" err="1">
@@ -15749,7 +15749,7 @@
                 <a:latin typeface="맑은 고딕"/>
                 <a:ea typeface="맑은 고딕"/>
               </a:rPr>
-              <a:t>놓치는</a:t>
+              <a:t/>
             </a:r>
             <a:r>
               <a:rPr sz="1150" b="0" dirty="0">
@@ -15759,7 +15759,7 @@
                 <a:latin typeface="맑은 고딕"/>
                 <a:ea typeface="맑은 고딕"/>
               </a:rPr>
-              <a:t> </a:t>
+              <a:t/>
             </a:r>
             <a:r>
               <a:rPr sz="1150" b="0" dirty="0" err="1">
@@ -15769,7 +15769,7 @@
                 <a:latin typeface="맑은 고딕"/>
                 <a:ea typeface="맑은 고딕"/>
               </a:rPr>
-              <a:t>지역이</a:t>
+              <a:t/>
             </a:r>
             <a:r>
               <a:rPr sz="1150" b="0" dirty="0">
@@ -15779,7 +15779,7 @@
                 <a:latin typeface="맑은 고딕"/>
                 <a:ea typeface="맑은 고딕"/>
               </a:rPr>
-              <a:t> </a:t>
+              <a:t/>
             </a:r>
             <a:r>
               <a:rPr sz="1150" b="0" dirty="0" err="1">
@@ -15789,7 +15789,7 @@
                 <a:latin typeface="맑은 고딕"/>
                 <a:ea typeface="맑은 고딕"/>
               </a:rPr>
-              <a:t>있는지</a:t>
+              <a:t/>
             </a:r>
             <a:r>
               <a:rPr sz="1150" b="0" dirty="0">
@@ -15799,7 +15799,7 @@
                 <a:latin typeface="맑은 고딕"/>
                 <a:ea typeface="맑은 고딕"/>
               </a:rPr>
-              <a:t> </a:t>
+              <a:t/>
             </a:r>
             <a:r>
               <a:rPr sz="1150" b="0" dirty="0" err="1">
@@ -15809,7 +15809,7 @@
                 <a:latin typeface="맑은 고딕"/>
                 <a:ea typeface="맑은 고딕"/>
               </a:rPr>
-              <a:t>검증한다</a:t>
+              <a:t/>
             </a:r>
             <a:endParaRPr sz="1150" b="0" dirty="0">
               <a:solidFill>
@@ -15981,7 +15981,7 @@
                 <a:latin typeface="맑은 고딕"/>
                 <a:ea typeface="맑은 고딕"/>
               </a:rPr>
-              <a:t>• </a:t>
+              <a:t>• 시·도 선별 기준은 "예산 규모, 의료 취약성 등 고려"가 전부임</a:t>
             </a:r>
             <a:r>
               <a:rPr lang="ko-KR" altLang="en-US" sz="1150" dirty="0">
@@ -15991,7 +15991,7 @@
                 <a:latin typeface="맑은 고딕"/>
                 <a:ea typeface="맑은 고딕"/>
               </a:rPr>
-              <a:t>시</a:t>
+              <a:t/>
             </a:r>
             <a:r>
               <a:rPr lang="en-US" altLang="ko-KR" sz="1150" dirty="0">
@@ -16001,7 +16001,7 @@
                 <a:latin typeface="맑은 고딕"/>
                 <a:ea typeface="맑은 고딕"/>
               </a:rPr>
-              <a:t>·</a:t>
+              <a:t/>
             </a:r>
             <a:r>
               <a:rPr lang="ko-KR" altLang="en-US" sz="1150" dirty="0">
@@ -16011,7 +16011,7 @@
                 <a:latin typeface="맑은 고딕"/>
                 <a:ea typeface="맑은 고딕"/>
               </a:rPr>
-              <a:t>도 선별 기준은 </a:t>
+              <a:t/>
             </a:r>
             <a:r>
               <a:rPr lang="en-US" altLang="ko-KR" sz="1150" dirty="0">
@@ -16021,7 +16021,7 @@
                 <a:latin typeface="맑은 고딕"/>
                 <a:ea typeface="맑은 고딕"/>
               </a:rPr>
-              <a:t>"</a:t>
+              <a:t/>
             </a:r>
             <a:r>
               <a:rPr lang="ko-KR" altLang="en-US" sz="1150" dirty="0">
@@ -16031,7 +16031,7 @@
                 <a:latin typeface="맑은 고딕"/>
                 <a:ea typeface="맑은 고딕"/>
               </a:rPr>
-              <a:t>예산 규모</a:t>
+              <a:t/>
             </a:r>
             <a:r>
               <a:rPr lang="en-US" altLang="ko-KR" sz="1150" dirty="0">
@@ -16041,7 +16041,7 @@
                 <a:latin typeface="맑은 고딕"/>
                 <a:ea typeface="맑은 고딕"/>
               </a:rPr>
-              <a:t>, </a:t>
+              <a:t/>
             </a:r>
             <a:r>
               <a:rPr lang="ko-KR" altLang="en-US" sz="1150" dirty="0">
@@ -16051,7 +16051,7 @@
                 <a:latin typeface="맑은 고딕"/>
                 <a:ea typeface="맑은 고딕"/>
               </a:rPr>
-              <a:t>의료 취약성 등 고려</a:t>
+              <a:t/>
             </a:r>
             <a:r>
               <a:rPr lang="en-US" altLang="ko-KR" sz="1150" dirty="0">
@@ -16061,7 +16061,7 @@
                 <a:latin typeface="맑은 고딕"/>
                 <a:ea typeface="맑은 고딕"/>
               </a:rPr>
-              <a:t>"</a:t>
+              <a:t/>
             </a:r>
             <a:r>
               <a:rPr lang="ko-KR" altLang="en-US" sz="1150" dirty="0">
@@ -16071,7 +16071,7 @@
                 <a:latin typeface="맑은 고딕"/>
                 <a:ea typeface="맑은 고딕"/>
               </a:rPr>
-              <a:t>가 전부</a:t>
+              <a:t/>
             </a:r>
             <a:endParaRPr lang="en-US" sz="1150" b="0" dirty="0">
               <a:solidFill>
@@ -16098,7 +16098,7 @@
                 <a:latin typeface="맑은 고딕"/>
                 <a:ea typeface="맑은 고딕"/>
               </a:rPr>
-              <a:t>• </a:t>
+              <a:t>• 지원 심사 배점 100점 중 취약도 항목 0점 — 누구를 먼저 지원할지의 합리적 규칙이 있는가</a:t>
             </a:r>
             <a:r>
               <a:rPr sz="1150" b="0" dirty="0" err="1">
@@ -16108,7 +16108,7 @@
                 <a:latin typeface="맑은 고딕"/>
                 <a:ea typeface="맑은 고딕"/>
               </a:rPr>
-              <a:t>지원</a:t>
+              <a:t/>
             </a:r>
             <a:r>
               <a:rPr sz="1150" b="0" dirty="0">
@@ -16118,7 +16118,7 @@
                 <a:latin typeface="맑은 고딕"/>
                 <a:ea typeface="맑은 고딕"/>
               </a:rPr>
-              <a:t> </a:t>
+              <a:t/>
             </a:r>
             <a:r>
               <a:rPr sz="1150" b="0" dirty="0" err="1">
@@ -16128,7 +16128,7 @@
                 <a:latin typeface="맑은 고딕"/>
                 <a:ea typeface="맑은 고딕"/>
               </a:rPr>
-              <a:t>심사</a:t>
+              <a:t/>
             </a:r>
             <a:r>
               <a:rPr sz="1150" b="0" dirty="0">
@@ -16138,7 +16138,7 @@
                 <a:latin typeface="맑은 고딕"/>
                 <a:ea typeface="맑은 고딕"/>
               </a:rPr>
-              <a:t> </a:t>
+              <a:t/>
             </a:r>
             <a:r>
               <a:rPr sz="1150" b="0" dirty="0" err="1">
@@ -16148,7 +16148,7 @@
                 <a:latin typeface="맑은 고딕"/>
                 <a:ea typeface="맑은 고딕"/>
               </a:rPr>
-              <a:t>배점</a:t>
+              <a:t/>
             </a:r>
             <a:r>
               <a:rPr sz="1150" b="0" dirty="0">
@@ -16158,7 +16158,7 @@
                 <a:latin typeface="맑은 고딕"/>
                 <a:ea typeface="맑은 고딕"/>
               </a:rPr>
-              <a:t> 100점 중 </a:t>
+              <a:t/>
             </a:r>
             <a:r>
               <a:rPr sz="1150" b="0" dirty="0" err="1">
@@ -16168,7 +16168,7 @@
                 <a:latin typeface="맑은 고딕"/>
                 <a:ea typeface="맑은 고딕"/>
               </a:rPr>
-              <a:t>취약도</a:t>
+              <a:t/>
             </a:r>
             <a:r>
               <a:rPr sz="1150" b="0" dirty="0">
@@ -16178,7 +16178,7 @@
                 <a:latin typeface="맑은 고딕"/>
                 <a:ea typeface="맑은 고딕"/>
               </a:rPr>
-              <a:t> </a:t>
+              <a:t/>
             </a:r>
             <a:r>
               <a:rPr sz="1150" b="0" dirty="0" err="1">
@@ -16188,7 +16188,7 @@
                 <a:latin typeface="맑은 고딕"/>
                 <a:ea typeface="맑은 고딕"/>
               </a:rPr>
-              <a:t>항목은</a:t>
+              <a:t/>
             </a:r>
             <a:r>
               <a:rPr sz="1150" b="0" dirty="0">
@@ -16198,7 +16198,7 @@
                 <a:latin typeface="맑은 고딕"/>
                 <a:ea typeface="맑은 고딕"/>
               </a:rPr>
-              <a:t> 0점</a:t>
+              <a:t/>
             </a:r>
             <a:r>
               <a:rPr lang="en-US" sz="1150" b="0" dirty="0">
@@ -16208,7 +16208,7 @@
                 <a:latin typeface="맑은 고딕"/>
                 <a:ea typeface="맑은 고딕"/>
               </a:rPr>
-              <a:t> </a:t>
+              <a:t/>
             </a:r>
             <a:r>
               <a:rPr lang="en-US" altLang="ko-KR" sz="1150" dirty="0">
@@ -16218,7 +16218,7 @@
                 <a:latin typeface="맑은 고딕"/>
                 <a:ea typeface="맑은 고딕"/>
               </a:rPr>
-              <a:t>— </a:t>
+              <a:t/>
             </a:r>
             <a:r>
               <a:rPr lang="ko-KR" altLang="en-US" sz="1150" dirty="0">
@@ -16228,7 +16228,7 @@
                 <a:latin typeface="맑은 고딕"/>
                 <a:ea typeface="맑은 고딕"/>
               </a:rPr>
-              <a:t>누구를 먼저 </a:t>
+              <a:t/>
             </a:r>
             <a:r>
               <a:rPr lang="ko-KR" altLang="en-US" sz="1150" dirty="0" err="1">
@@ -16238,7 +16238,7 @@
                 <a:latin typeface="맑은 고딕"/>
                 <a:ea typeface="맑은 고딕"/>
               </a:rPr>
-              <a:t>지원할지의</a:t>
+              <a:t/>
             </a:r>
             <a:r>
               <a:rPr lang="ko-KR" altLang="en-US" sz="1150" dirty="0">
@@ -16248,7 +16248,7 @@
                 <a:latin typeface="맑은 고딕"/>
                 <a:ea typeface="맑은 고딕"/>
               </a:rPr>
-              <a:t> 합리적 규칙이 있는가</a:t>
+              <a:t/>
             </a:r>
             <a:r>
               <a:rPr lang="en-US" altLang="ko-KR" sz="1150" dirty="0">
@@ -16258,7 +16258,7 @@
                 <a:latin typeface="맑은 고딕"/>
                 <a:ea typeface="맑은 고딕"/>
               </a:rPr>
-              <a:t>?</a:t>
+              <a:t/>
             </a:r>
             <a:endParaRPr sz="1150" b="0" dirty="0">
               <a:solidFill>
@@ -16285,7 +16285,7 @@
                 <a:latin typeface="맑은 고딕"/>
                 <a:ea typeface="맑은 고딕"/>
               </a:rPr>
-              <a:t>• 15년 누적 57개소, 2025년 분만 신규는 전국 1개소 — 나눠 줄 것이 적을수록 순서는 오히려 더 중요해진다</a:t>
+              <a:t>• 15년 누적 57개소, 2025년 분만 신규는 전국 1개소 — 나눠 줄 것이 적을수록 순서는 오히려 더 중요해짐</a:t>
             </a:r>
           </a:p>
           <a:p>
@@ -16305,7 +16305,7 @@
                 <a:latin typeface="맑은 고딕"/>
                 <a:ea typeface="맑은 고딕"/>
               </a:rPr>
-              <a:t>→ </a:t>
+              <a:t>→ 현행 배분이 무엇으로 설명되는지 진단</a:t>
             </a:r>
             <a:r>
               <a:rPr sz="1150" b="0" dirty="0" err="1">
@@ -16315,7 +16315,7 @@
                 <a:latin typeface="맑은 고딕"/>
                 <a:ea typeface="맑은 고딕"/>
               </a:rPr>
-              <a:t>현행</a:t>
+              <a:t/>
             </a:r>
             <a:r>
               <a:rPr sz="1150" b="0" dirty="0">
@@ -16325,7 +16325,7 @@
                 <a:latin typeface="맑은 고딕"/>
                 <a:ea typeface="맑은 고딕"/>
               </a:rPr>
-              <a:t> </a:t>
+              <a:t/>
             </a:r>
             <a:r>
               <a:rPr sz="1150" b="0" dirty="0" err="1">
@@ -16335,7 +16335,7 @@
                 <a:latin typeface="맑은 고딕"/>
                 <a:ea typeface="맑은 고딕"/>
               </a:rPr>
-              <a:t>배분이</a:t>
+              <a:t/>
             </a:r>
             <a:r>
               <a:rPr sz="1150" b="0" dirty="0">
@@ -16345,7 +16345,7 @@
                 <a:latin typeface="맑은 고딕"/>
                 <a:ea typeface="맑은 고딕"/>
               </a:rPr>
-              <a:t> </a:t>
+              <a:t/>
             </a:r>
             <a:r>
               <a:rPr sz="1150" b="0" dirty="0" err="1">
@@ -16355,7 +16355,7 @@
                 <a:latin typeface="맑은 고딕"/>
                 <a:ea typeface="맑은 고딕"/>
               </a:rPr>
-              <a:t>무엇으로</a:t>
+              <a:t/>
             </a:r>
             <a:r>
               <a:rPr sz="1150" b="0" dirty="0">
@@ -16365,7 +16365,7 @@
                 <a:latin typeface="맑은 고딕"/>
                 <a:ea typeface="맑은 고딕"/>
               </a:rPr>
-              <a:t> </a:t>
+              <a:t/>
             </a:r>
             <a:r>
               <a:rPr sz="1150" b="0" dirty="0" err="1">
@@ -16375,7 +16375,7 @@
                 <a:latin typeface="맑은 고딕"/>
                 <a:ea typeface="맑은 고딕"/>
               </a:rPr>
-              <a:t>설명되는지</a:t>
+              <a:t/>
             </a:r>
             <a:r>
               <a:rPr sz="1150" b="0" dirty="0">
@@ -16385,7 +16385,7 @@
                 <a:latin typeface="맑은 고딕"/>
                 <a:ea typeface="맑은 고딕"/>
               </a:rPr>
-              <a:t> </a:t>
+              <a:t/>
             </a:r>
             <a:r>
               <a:rPr sz="1150" b="0" dirty="0" err="1">
@@ -16395,7 +16395,7 @@
                 <a:latin typeface="맑은 고딕"/>
                 <a:ea typeface="맑은 고딕"/>
               </a:rPr>
-              <a:t>진단한다</a:t>
+              <a:t/>
             </a:r>
             <a:endParaRPr sz="1150" b="0" dirty="0">
               <a:solidFill>
@@ -16587,7 +16587,7 @@
                 <a:latin typeface="맑은 고딕"/>
                 <a:ea typeface="맑은 고딕"/>
               </a:rPr>
-              <a:t>• </a:t>
+              <a:t>• 분만 인프라 공백은 언론·국회에서 반복 지적되어 왔으나, 전국 단위 공개 데이터로 정량 검증된 바 없음</a:t>
             </a:r>
             <a:r>
               <a:rPr sz="1150" b="0" dirty="0" err="1">
@@ -16597,7 +16597,7 @@
                 <a:latin typeface="맑은 고딕"/>
                 <a:ea typeface="맑은 고딕"/>
               </a:rPr>
-              <a:t>분만</a:t>
+              <a:t/>
             </a:r>
             <a:r>
               <a:rPr sz="1150" b="0" dirty="0">
@@ -16607,7 +16607,7 @@
                 <a:latin typeface="맑은 고딕"/>
                 <a:ea typeface="맑은 고딕"/>
               </a:rPr>
-              <a:t> </a:t>
+              <a:t/>
             </a:r>
             <a:r>
               <a:rPr sz="1150" b="0" dirty="0" err="1">
@@ -16617,7 +16617,7 @@
                 <a:latin typeface="맑은 고딕"/>
                 <a:ea typeface="맑은 고딕"/>
               </a:rPr>
-              <a:t>인프라</a:t>
+              <a:t/>
             </a:r>
             <a:r>
               <a:rPr sz="1150" b="0" dirty="0">
@@ -16627,7 +16627,7 @@
                 <a:latin typeface="맑은 고딕"/>
                 <a:ea typeface="맑은 고딕"/>
               </a:rPr>
-              <a:t> </a:t>
+              <a:t/>
             </a:r>
             <a:r>
               <a:rPr sz="1150" b="0" dirty="0" err="1">
@@ -16637,7 +16637,7 @@
                 <a:latin typeface="맑은 고딕"/>
                 <a:ea typeface="맑은 고딕"/>
               </a:rPr>
-              <a:t>공백은</a:t>
+              <a:t/>
             </a:r>
             <a:r>
               <a:rPr sz="1150" b="0" dirty="0">
@@ -16647,7 +16647,7 @@
                 <a:latin typeface="맑은 고딕"/>
                 <a:ea typeface="맑은 고딕"/>
               </a:rPr>
-              <a:t> </a:t>
+              <a:t/>
             </a:r>
             <a:r>
               <a:rPr sz="1150" b="0" dirty="0" err="1">
@@ -16657,7 +16657,7 @@
                 <a:latin typeface="맑은 고딕"/>
                 <a:ea typeface="맑은 고딕"/>
               </a:rPr>
-              <a:t>언론·국회에서</a:t>
+              <a:t/>
             </a:r>
             <a:r>
               <a:rPr sz="1150" b="0" dirty="0">
@@ -16667,7 +16667,7 @@
                 <a:latin typeface="맑은 고딕"/>
                 <a:ea typeface="맑은 고딕"/>
               </a:rPr>
-              <a:t> </a:t>
+              <a:t/>
             </a:r>
             <a:r>
               <a:rPr sz="1150" b="0" dirty="0" err="1">
@@ -16677,7 +16677,7 @@
                 <a:latin typeface="맑은 고딕"/>
                 <a:ea typeface="맑은 고딕"/>
               </a:rPr>
-              <a:t>반복</a:t>
+              <a:t/>
             </a:r>
             <a:r>
               <a:rPr sz="1150" b="0" dirty="0">
@@ -16687,7 +16687,7 @@
                 <a:latin typeface="맑은 고딕"/>
                 <a:ea typeface="맑은 고딕"/>
               </a:rPr>
-              <a:t> </a:t>
+              <a:t/>
             </a:r>
             <a:r>
               <a:rPr sz="1150" b="0" dirty="0" err="1">
@@ -16697,7 +16697,7 @@
                 <a:latin typeface="맑은 고딕"/>
                 <a:ea typeface="맑은 고딕"/>
               </a:rPr>
-              <a:t>지적되어</a:t>
+              <a:t/>
             </a:r>
             <a:r>
               <a:rPr sz="1150" b="0" dirty="0">
@@ -16707,7 +16707,7 @@
                 <a:latin typeface="맑은 고딕"/>
                 <a:ea typeface="맑은 고딕"/>
               </a:rPr>
-              <a:t> </a:t>
+              <a:t/>
             </a:r>
             <a:r>
               <a:rPr sz="1150" b="0" dirty="0" err="1">
@@ -16717,7 +16717,7 @@
                 <a:latin typeface="맑은 고딕"/>
                 <a:ea typeface="맑은 고딕"/>
               </a:rPr>
-              <a:t>왔으나</a:t>
+              <a:t/>
             </a:r>
             <a:r>
               <a:rPr sz="1150" b="0" dirty="0">
@@ -16727,7 +16727,7 @@
                 <a:latin typeface="맑은 고딕"/>
                 <a:ea typeface="맑은 고딕"/>
               </a:rPr>
-              <a:t>, </a:t>
+              <a:t/>
             </a:r>
             <a:r>
               <a:rPr sz="1150" b="0" dirty="0" err="1">
@@ -16737,7 +16737,7 @@
                 <a:latin typeface="맑은 고딕"/>
                 <a:ea typeface="맑은 고딕"/>
               </a:rPr>
-              <a:t>전국</a:t>
+              <a:t/>
             </a:r>
             <a:r>
               <a:rPr sz="1150" b="0" dirty="0">
@@ -16747,7 +16747,7 @@
                 <a:latin typeface="맑은 고딕"/>
                 <a:ea typeface="맑은 고딕"/>
               </a:rPr>
-              <a:t> </a:t>
+              <a:t/>
             </a:r>
             <a:r>
               <a:rPr sz="1150" b="0" dirty="0" err="1">
@@ -16757,7 +16757,7 @@
                 <a:latin typeface="맑은 고딕"/>
                 <a:ea typeface="맑은 고딕"/>
               </a:rPr>
-              <a:t>단위</a:t>
+              <a:t/>
             </a:r>
             <a:r>
               <a:rPr sz="1150" b="0" dirty="0">
@@ -16767,7 +16767,7 @@
                 <a:latin typeface="맑은 고딕"/>
                 <a:ea typeface="맑은 고딕"/>
               </a:rPr>
-              <a:t> </a:t>
+              <a:t/>
             </a:r>
             <a:r>
               <a:rPr sz="1150" b="0" dirty="0" err="1">
@@ -16777,7 +16777,7 @@
                 <a:latin typeface="맑은 고딕"/>
                 <a:ea typeface="맑은 고딕"/>
               </a:rPr>
-              <a:t>공개</a:t>
+              <a:t/>
             </a:r>
             <a:r>
               <a:rPr sz="1150" b="0" dirty="0">
@@ -16787,7 +16787,7 @@
                 <a:latin typeface="맑은 고딕"/>
                 <a:ea typeface="맑은 고딕"/>
               </a:rPr>
-              <a:t> </a:t>
+              <a:t/>
             </a:r>
             <a:r>
               <a:rPr sz="1150" b="0" dirty="0" err="1">
@@ -16797,7 +16797,7 @@
                 <a:latin typeface="맑은 고딕"/>
                 <a:ea typeface="맑은 고딕"/>
               </a:rPr>
-              <a:t>데이터로</a:t>
+              <a:t/>
             </a:r>
             <a:r>
               <a:rPr sz="1150" b="0" dirty="0">
@@ -16807,7 +16807,7 @@
                 <a:latin typeface="맑은 고딕"/>
                 <a:ea typeface="맑은 고딕"/>
               </a:rPr>
-              <a:t> </a:t>
+              <a:t/>
             </a:r>
             <a:r>
               <a:rPr sz="1150" b="0" dirty="0" err="1">
@@ -16817,7 +16817,7 @@
                 <a:latin typeface="맑은 고딕"/>
                 <a:ea typeface="맑은 고딕"/>
               </a:rPr>
-              <a:t>정량</a:t>
+              <a:t/>
             </a:r>
             <a:r>
               <a:rPr sz="1150" b="0" dirty="0">
@@ -16827,7 +16827,7 @@
                 <a:latin typeface="맑은 고딕"/>
                 <a:ea typeface="맑은 고딕"/>
               </a:rPr>
-              <a:t> </a:t>
+              <a:t/>
             </a:r>
             <a:r>
               <a:rPr sz="1150" b="0" dirty="0" err="1">
@@ -16837,7 +16837,7 @@
                 <a:latin typeface="맑은 고딕"/>
                 <a:ea typeface="맑은 고딕"/>
               </a:rPr>
-              <a:t>검증된</a:t>
+              <a:t/>
             </a:r>
             <a:r>
               <a:rPr sz="1150" b="0" dirty="0">
@@ -16847,7 +16847,7 @@
                 <a:latin typeface="맑은 고딕"/>
                 <a:ea typeface="맑은 고딕"/>
               </a:rPr>
-              <a:t> </a:t>
+              <a:t/>
             </a:r>
             <a:r>
               <a:rPr sz="1150" b="0" dirty="0" err="1">
@@ -16857,7 +16857,7 @@
                 <a:latin typeface="맑은 고딕"/>
                 <a:ea typeface="맑은 고딕"/>
               </a:rPr>
-              <a:t>적이</a:t>
+              <a:t/>
             </a:r>
             <a:r>
               <a:rPr sz="1150" b="0" dirty="0">
@@ -16867,7 +16867,7 @@
                 <a:latin typeface="맑은 고딕"/>
                 <a:ea typeface="맑은 고딕"/>
               </a:rPr>
-              <a:t> </a:t>
+              <a:t/>
             </a:r>
             <a:r>
               <a:rPr sz="1150" b="0" dirty="0" err="1">
@@ -16877,7 +16877,7 @@
                 <a:latin typeface="맑은 고딕"/>
                 <a:ea typeface="맑은 고딕"/>
               </a:rPr>
-              <a:t>없다</a:t>
+              <a:t/>
             </a:r>
             <a:endParaRPr sz="1150" b="0" dirty="0">
               <a:solidFill>
@@ -16904,7 +16904,7 @@
                 <a:latin typeface="맑은 고딕"/>
                 <a:ea typeface="맑은 고딕"/>
               </a:rPr>
-              <a:t>• </a:t>
+              <a:t>• 분석 대상은 취약지라는 현상이 아니라 취약지를 판정하고 지원하는 제도 그 자체 (제도 감사 프레임)</a:t>
             </a:r>
             <a:r>
               <a:rPr sz="1150" b="0" dirty="0" err="1">
@@ -16914,7 +16914,7 @@
                 <a:latin typeface="맑은 고딕"/>
                 <a:ea typeface="맑은 고딕"/>
               </a:rPr>
-              <a:t>분석</a:t>
+              <a:t/>
             </a:r>
             <a:r>
               <a:rPr sz="1150" b="0" dirty="0">
@@ -16924,7 +16924,7 @@
                 <a:latin typeface="맑은 고딕"/>
                 <a:ea typeface="맑은 고딕"/>
               </a:rPr>
-              <a:t> </a:t>
+              <a:t/>
             </a:r>
             <a:r>
               <a:rPr sz="1150" b="0" dirty="0" err="1">
@@ -16934,7 +16934,7 @@
                 <a:latin typeface="맑은 고딕"/>
                 <a:ea typeface="맑은 고딕"/>
               </a:rPr>
-              <a:t>대상은</a:t>
+              <a:t/>
             </a:r>
             <a:r>
               <a:rPr sz="1150" b="0" dirty="0">
@@ -16944,7 +16944,7 @@
                 <a:latin typeface="맑은 고딕"/>
                 <a:ea typeface="맑은 고딕"/>
               </a:rPr>
-              <a:t> </a:t>
+              <a:t/>
             </a:r>
             <a:r>
               <a:rPr sz="1150" b="0" dirty="0" err="1">
@@ -16954,7 +16954,7 @@
                 <a:latin typeface="맑은 고딕"/>
                 <a:ea typeface="맑은 고딕"/>
               </a:rPr>
-              <a:t>취약지라는</a:t>
+              <a:t/>
             </a:r>
             <a:r>
               <a:rPr sz="1150" b="0" dirty="0">
@@ -16964,7 +16964,7 @@
                 <a:latin typeface="맑은 고딕"/>
                 <a:ea typeface="맑은 고딕"/>
               </a:rPr>
-              <a:t> </a:t>
+              <a:t/>
             </a:r>
             <a:r>
               <a:rPr sz="1150" b="0" dirty="0" err="1">
@@ -16974,7 +16974,7 @@
                 <a:latin typeface="맑은 고딕"/>
                 <a:ea typeface="맑은 고딕"/>
               </a:rPr>
-              <a:t>현상이</a:t>
+              <a:t/>
             </a:r>
             <a:r>
               <a:rPr sz="1150" b="0" dirty="0">
@@ -16984,7 +16984,7 @@
                 <a:latin typeface="맑은 고딕"/>
                 <a:ea typeface="맑은 고딕"/>
               </a:rPr>
-              <a:t> </a:t>
+              <a:t/>
             </a:r>
             <a:r>
               <a:rPr sz="1150" b="0" dirty="0" err="1">
@@ -16994,7 +16994,7 @@
                 <a:latin typeface="맑은 고딕"/>
                 <a:ea typeface="맑은 고딕"/>
               </a:rPr>
-              <a:t>아니라</a:t>
+              <a:t/>
             </a:r>
             <a:r>
               <a:rPr sz="1150" b="0" dirty="0">
@@ -17004,7 +17004,7 @@
                 <a:latin typeface="맑은 고딕"/>
                 <a:ea typeface="맑은 고딕"/>
               </a:rPr>
-              <a:t>, </a:t>
+              <a:t/>
             </a:r>
             <a:r>
               <a:rPr sz="1150" b="0" dirty="0" err="1">
@@ -17014,7 +17014,7 @@
                 <a:latin typeface="맑은 고딕"/>
                 <a:ea typeface="맑은 고딕"/>
               </a:rPr>
-              <a:t>취약지를</a:t>
+              <a:t/>
             </a:r>
             <a:r>
               <a:rPr sz="1150" b="0" dirty="0">
@@ -17024,7 +17024,7 @@
                 <a:latin typeface="맑은 고딕"/>
                 <a:ea typeface="맑은 고딕"/>
               </a:rPr>
-              <a:t> </a:t>
+              <a:t/>
             </a:r>
             <a:r>
               <a:rPr sz="1150" b="0" dirty="0" err="1">
@@ -17034,7 +17034,7 @@
                 <a:latin typeface="맑은 고딕"/>
                 <a:ea typeface="맑은 고딕"/>
               </a:rPr>
-              <a:t>판정하고</a:t>
+              <a:t/>
             </a:r>
             <a:r>
               <a:rPr sz="1150" b="0" dirty="0">
@@ -17044,7 +17044,7 @@
                 <a:latin typeface="맑은 고딕"/>
                 <a:ea typeface="맑은 고딕"/>
               </a:rPr>
-              <a:t> </a:t>
+              <a:t/>
             </a:r>
             <a:r>
               <a:rPr sz="1150" b="0" dirty="0" err="1">
@@ -17054,7 +17054,7 @@
                 <a:latin typeface="맑은 고딕"/>
                 <a:ea typeface="맑은 고딕"/>
               </a:rPr>
-              <a:t>지원하는</a:t>
+              <a:t/>
             </a:r>
             <a:r>
               <a:rPr sz="1150" b="0" dirty="0">
@@ -17064,7 +17064,7 @@
                 <a:latin typeface="맑은 고딕"/>
                 <a:ea typeface="맑은 고딕"/>
               </a:rPr>
-              <a:t> </a:t>
+              <a:t/>
             </a:r>
             <a:r>
               <a:rPr sz="1150" b="0" dirty="0" err="1">
@@ -17074,7 +17074,7 @@
                 <a:latin typeface="맑은 고딕"/>
                 <a:ea typeface="맑은 고딕"/>
               </a:rPr>
-              <a:t>제도</a:t>
+              <a:t/>
             </a:r>
             <a:r>
               <a:rPr sz="1150" b="0" dirty="0">
@@ -17084,7 +17084,7 @@
                 <a:latin typeface="맑은 고딕"/>
                 <a:ea typeface="맑은 고딕"/>
               </a:rPr>
-              <a:t> 그 </a:t>
+              <a:t/>
             </a:r>
             <a:r>
               <a:rPr sz="1150" b="0" dirty="0" err="1">
@@ -17094,7 +17094,7 @@
                 <a:latin typeface="맑은 고딕"/>
                 <a:ea typeface="맑은 고딕"/>
               </a:rPr>
-              <a:t>자체다</a:t>
+              <a:t/>
             </a:r>
             <a:r>
               <a:rPr sz="1150" b="0" dirty="0">
@@ -17104,7 +17104,7 @@
                 <a:latin typeface="맑은 고딕"/>
                 <a:ea typeface="맑은 고딕"/>
               </a:rPr>
-              <a:t> (</a:t>
+              <a:t/>
             </a:r>
             <a:r>
               <a:rPr sz="1150" b="0" dirty="0" err="1">
@@ -17114,7 +17114,7 @@
                 <a:latin typeface="맑은 고딕"/>
                 <a:ea typeface="맑은 고딕"/>
               </a:rPr>
-              <a:t>제도</a:t>
+              <a:t/>
             </a:r>
             <a:r>
               <a:rPr sz="1150" b="0" dirty="0">
@@ -17124,7 +17124,7 @@
                 <a:latin typeface="맑은 고딕"/>
                 <a:ea typeface="맑은 고딕"/>
               </a:rPr>
-              <a:t> </a:t>
+              <a:t/>
             </a:r>
             <a:r>
               <a:rPr sz="1150" b="0" dirty="0" err="1">
@@ -17134,7 +17134,7 @@
                 <a:latin typeface="맑은 고딕"/>
                 <a:ea typeface="맑은 고딕"/>
               </a:rPr>
-              <a:t>감사</a:t>
+              <a:t/>
             </a:r>
             <a:r>
               <a:rPr sz="1150" b="0" dirty="0">
@@ -17144,7 +17144,7 @@
                 <a:latin typeface="맑은 고딕"/>
                 <a:ea typeface="맑은 고딕"/>
               </a:rPr>
-              <a:t> </a:t>
+              <a:t/>
             </a:r>
             <a:r>
               <a:rPr sz="1150" b="0" dirty="0" err="1">
@@ -17154,7 +17154,7 @@
                 <a:latin typeface="맑은 고딕"/>
                 <a:ea typeface="맑은 고딕"/>
               </a:rPr>
-              <a:t>프레임</a:t>
+              <a:t/>
             </a:r>
             <a:r>
               <a:rPr sz="1150" b="0" dirty="0">
@@ -17164,7 +17164,7 @@
                 <a:latin typeface="맑은 고딕"/>
                 <a:ea typeface="맑은 고딕"/>
               </a:rPr>
-              <a:t>)</a:t>
+              <a:t/>
             </a:r>
           </a:p>
           <a:p>
@@ -17184,7 +17184,7 @@
                 <a:latin typeface="맑은 고딕"/>
                 <a:ea typeface="맑은 고딕"/>
               </a:rPr>
-              <a:t>• 모든 판단 기준과 임계값은 정부 자신의 문서·데이터에서 가져와 실현 가능성을 확보할 계획이다</a:t>
+              <a:t>• 모든 판단 기준·임계값은 정부 문서·데이터에서 차용해 실현 가능성을 확보</a:t>
             </a:r>
           </a:p>
         </p:txBody>
@@ -19495,7 +19495,7 @@
                 <a:latin typeface="맑은 고딕"/>
                 <a:ea typeface="맑은 고딕"/>
               </a:rPr>
-              <a:t>Q1·2는 </a:t>
+              <a:t>Q1·2는 지정을, Q3·4는 배분을 봄. 앞에서 "규칙이 무엇을 보는가"를 확정해야 뒤에서 "그 규칙대로 나눠지는가"를 물을 수 있음</a:t>
             </a:r>
             <a:r>
               <a:rPr sz="1250" b="1" dirty="0" err="1">
@@ -19505,7 +19505,7 @@
                 <a:latin typeface="맑은 고딕"/>
                 <a:ea typeface="맑은 고딕"/>
               </a:rPr>
-              <a:t>지정을</a:t>
+              <a:t/>
             </a:r>
             <a:r>
               <a:rPr sz="1250" b="1" dirty="0">
@@ -19515,7 +19515,7 @@
                 <a:latin typeface="맑은 고딕"/>
                 <a:ea typeface="맑은 고딕"/>
               </a:rPr>
-              <a:t>, Q3·4는 </a:t>
+              <a:t/>
             </a:r>
             <a:r>
               <a:rPr sz="1250" b="1" dirty="0" err="1">
@@ -19525,7 +19525,7 @@
                 <a:latin typeface="맑은 고딕"/>
                 <a:ea typeface="맑은 고딕"/>
               </a:rPr>
-              <a:t>배분을</a:t>
+              <a:t/>
             </a:r>
             <a:r>
               <a:rPr sz="1250" b="1" dirty="0">
@@ -19535,7 +19535,7 @@
                 <a:latin typeface="맑은 고딕"/>
                 <a:ea typeface="맑은 고딕"/>
               </a:rPr>
-              <a:t> </a:t>
+              <a:t/>
             </a:r>
             <a:r>
               <a:rPr sz="1250" b="1" dirty="0" err="1">
@@ -19545,7 +19545,7 @@
                 <a:latin typeface="맑은 고딕"/>
                 <a:ea typeface="맑은 고딕"/>
               </a:rPr>
-              <a:t>본다</a:t>
+              <a:t/>
             </a:r>
             <a:r>
               <a:rPr sz="1250" b="1" dirty="0">
@@ -19555,7 +19555,7 @@
                 <a:latin typeface="맑은 고딕"/>
                 <a:ea typeface="맑은 고딕"/>
               </a:rPr>
-              <a:t>. 앞</a:t>
+              <a:t/>
             </a:r>
             <a:r>
               <a:rPr lang="ko-KR" altLang="en-US" sz="1250" b="1" dirty="0">
@@ -19565,7 +19565,7 @@
                 <a:latin typeface="맑은 고딕"/>
                 <a:ea typeface="맑은 고딕"/>
               </a:rPr>
-              <a:t>에서</a:t>
+              <a:t/>
             </a:r>
             <a:r>
               <a:rPr sz="1250" b="1" dirty="0">
@@ -19575,7 +19575,7 @@
                 <a:latin typeface="맑은 고딕"/>
                 <a:ea typeface="맑은 고딕"/>
               </a:rPr>
-              <a:t> "</a:t>
+              <a:t/>
             </a:r>
             <a:r>
               <a:rPr sz="1250" b="1" dirty="0" err="1">
@@ -19585,7 +19585,7 @@
                 <a:latin typeface="맑은 고딕"/>
                 <a:ea typeface="맑은 고딕"/>
               </a:rPr>
-              <a:t>규칙이</a:t>
+              <a:t/>
             </a:r>
             <a:r>
               <a:rPr sz="1250" b="1" dirty="0">
@@ -19595,7 +19595,7 @@
                 <a:latin typeface="맑은 고딕"/>
                 <a:ea typeface="맑은 고딕"/>
               </a:rPr>
-              <a:t> </a:t>
+              <a:t/>
             </a:r>
             <a:r>
               <a:rPr sz="1250" b="1" dirty="0" err="1">
@@ -19605,7 +19605,7 @@
                 <a:latin typeface="맑은 고딕"/>
                 <a:ea typeface="맑은 고딕"/>
               </a:rPr>
-              <a:t>무엇을</a:t>
+              <a:t/>
             </a:r>
             <a:r>
               <a:rPr sz="1250" b="1" dirty="0">
@@ -19615,7 +19615,7 @@
                 <a:latin typeface="맑은 고딕"/>
                 <a:ea typeface="맑은 고딕"/>
               </a:rPr>
-              <a:t> </a:t>
+              <a:t/>
             </a:r>
             <a:r>
               <a:rPr sz="1250" b="1" dirty="0" err="1">
@@ -19625,7 +19625,7 @@
                 <a:latin typeface="맑은 고딕"/>
                 <a:ea typeface="맑은 고딕"/>
               </a:rPr>
-              <a:t>보는가"를</a:t>
+              <a:t/>
             </a:r>
             <a:r>
               <a:rPr sz="1250" b="1" dirty="0">
@@ -19635,7 +19635,7 @@
                 <a:latin typeface="맑은 고딕"/>
                 <a:ea typeface="맑은 고딕"/>
               </a:rPr>
-              <a:t> </a:t>
+              <a:t/>
             </a:r>
             <a:r>
               <a:rPr sz="1250" b="1" dirty="0" err="1">
@@ -19645,7 +19645,7 @@
                 <a:latin typeface="맑은 고딕"/>
                 <a:ea typeface="맑은 고딕"/>
               </a:rPr>
-              <a:t>확정해야</a:t>
+              <a:t/>
             </a:r>
             <a:r>
               <a:rPr sz="1250" b="1" dirty="0">
@@ -19655,7 +19655,7 @@
                 <a:latin typeface="맑은 고딕"/>
                 <a:ea typeface="맑은 고딕"/>
               </a:rPr>
-              <a:t> </a:t>
+              <a:t/>
             </a:r>
             <a:r>
               <a:rPr sz="1250" b="1" dirty="0" err="1">
@@ -19665,7 +19665,7 @@
                 <a:latin typeface="맑은 고딕"/>
                 <a:ea typeface="맑은 고딕"/>
               </a:rPr>
-              <a:t>뒤에서</a:t>
+              <a:t/>
             </a:r>
             <a:r>
               <a:rPr sz="1250" b="1" dirty="0">
@@ -19675,7 +19675,7 @@
                 <a:latin typeface="맑은 고딕"/>
                 <a:ea typeface="맑은 고딕"/>
               </a:rPr>
-              <a:t> "그 </a:t>
+              <a:t/>
             </a:r>
             <a:r>
               <a:rPr sz="1250" b="1" dirty="0" err="1">
@@ -19685,7 +19685,7 @@
                 <a:latin typeface="맑은 고딕"/>
                 <a:ea typeface="맑은 고딕"/>
               </a:rPr>
-              <a:t>규칙대로</a:t>
+              <a:t/>
             </a:r>
             <a:r>
               <a:rPr sz="1250" b="1" dirty="0">
@@ -19695,7 +19695,7 @@
                 <a:latin typeface="맑은 고딕"/>
                 <a:ea typeface="맑은 고딕"/>
               </a:rPr>
-              <a:t> </a:t>
+              <a:t/>
             </a:r>
             <a:r>
               <a:rPr sz="1250" b="1" dirty="0" err="1">
@@ -19705,7 +19705,7 @@
                 <a:latin typeface="맑은 고딕"/>
                 <a:ea typeface="맑은 고딕"/>
               </a:rPr>
-              <a:t>나눠지고</a:t>
+              <a:t/>
             </a:r>
             <a:r>
               <a:rPr sz="1250" b="1" dirty="0">
@@ -19715,7 +19715,7 @@
                 <a:latin typeface="맑은 고딕"/>
                 <a:ea typeface="맑은 고딕"/>
               </a:rPr>
-              <a:t> </a:t>
+              <a:t/>
             </a:r>
             <a:r>
               <a:rPr sz="1250" b="1" dirty="0" err="1">
@@ -19725,7 +19725,7 @@
                 <a:latin typeface="맑은 고딕"/>
                 <a:ea typeface="맑은 고딕"/>
               </a:rPr>
-              <a:t>있는가"를</a:t>
+              <a:t/>
             </a:r>
             <a:r>
               <a:rPr sz="1250" b="1" dirty="0">
@@ -19735,7 +19735,7 @@
                 <a:latin typeface="맑은 고딕"/>
                 <a:ea typeface="맑은 고딕"/>
               </a:rPr>
-              <a:t> </a:t>
+              <a:t/>
             </a:r>
             <a:r>
               <a:rPr sz="1250" b="1" dirty="0" err="1">
@@ -19745,7 +19745,7 @@
                 <a:latin typeface="맑은 고딕"/>
                 <a:ea typeface="맑은 고딕"/>
               </a:rPr>
-              <a:t>물을</a:t>
+              <a:t/>
             </a:r>
             <a:r>
               <a:rPr sz="1250" b="1" dirty="0">
@@ -19755,7 +19755,7 @@
                 <a:latin typeface="맑은 고딕"/>
                 <a:ea typeface="맑은 고딕"/>
               </a:rPr>
-              <a:t> 수 </a:t>
+              <a:t/>
             </a:r>
             <a:r>
               <a:rPr sz="1250" b="1" dirty="0" err="1">
@@ -19765,7 +19765,7 @@
                 <a:latin typeface="맑은 고딕"/>
                 <a:ea typeface="맑은 고딕"/>
               </a:rPr>
-              <a:t>있다</a:t>
+              <a:t/>
             </a:r>
             <a:r>
               <a:rPr sz="1250" b="1" dirty="0">
@@ -19775,7 +19775,7 @@
                 <a:latin typeface="맑은 고딕"/>
                 <a:ea typeface="맑은 고딕"/>
               </a:rPr>
-              <a:t>.</a:t>
+              <a:t/>
             </a:r>
           </a:p>
           <a:p>
@@ -19795,7 +19795,7 @@
                 <a:latin typeface="맑은 고딕"/>
                 <a:ea typeface="맑은 고딕"/>
               </a:rPr>
-              <a:t>무엇을</a:t>
+              <a:t>무엇을 "재현 성공"으로 볼지, 무엇을 "사각지대"로 볼지는 분석 착수 전에 확정 — 결과를 보고 기준을 맞추지 않기 위함</a:t>
             </a:r>
             <a:r>
               <a:rPr sz="1200" b="0" dirty="0">
@@ -19805,7 +19805,7 @@
                 <a:latin typeface="맑은 고딕"/>
                 <a:ea typeface="맑은 고딕"/>
               </a:rPr>
-              <a:t> "</a:t>
+              <a:t/>
             </a:r>
             <a:r>
               <a:rPr sz="1200" b="0" dirty="0" err="1">
@@ -19815,7 +19815,7 @@
                 <a:latin typeface="맑은 고딕"/>
                 <a:ea typeface="맑은 고딕"/>
               </a:rPr>
-              <a:t>재현</a:t>
+              <a:t/>
             </a:r>
             <a:r>
               <a:rPr sz="1200" b="0" dirty="0">
@@ -19825,7 +19825,7 @@
                 <a:latin typeface="맑은 고딕"/>
                 <a:ea typeface="맑은 고딕"/>
               </a:rPr>
-              <a:t> </a:t>
+              <a:t/>
             </a:r>
             <a:r>
               <a:rPr sz="1200" b="0" dirty="0" err="1">
@@ -19835,7 +19835,7 @@
                 <a:latin typeface="맑은 고딕"/>
                 <a:ea typeface="맑은 고딕"/>
               </a:rPr>
-              <a:t>성공"으로</a:t>
+              <a:t/>
             </a:r>
             <a:r>
               <a:rPr sz="1200" b="0" dirty="0">
@@ -19845,7 +19845,7 @@
                 <a:latin typeface="맑은 고딕"/>
                 <a:ea typeface="맑은 고딕"/>
               </a:rPr>
-              <a:t> </a:t>
+              <a:t/>
             </a:r>
             <a:r>
               <a:rPr sz="1200" b="0" dirty="0" err="1">
@@ -19855,7 +19855,7 @@
                 <a:latin typeface="맑은 고딕"/>
                 <a:ea typeface="맑은 고딕"/>
               </a:rPr>
-              <a:t>볼지</a:t>
+              <a:t/>
             </a:r>
             <a:r>
               <a:rPr sz="1200" b="0" dirty="0">
@@ -19865,7 +19865,7 @@
                 <a:latin typeface="맑은 고딕"/>
                 <a:ea typeface="맑은 고딕"/>
               </a:rPr>
-              <a:t>, </a:t>
+              <a:t/>
             </a:r>
             <a:r>
               <a:rPr sz="1200" b="0" dirty="0" err="1">
@@ -19875,7 +19875,7 @@
                 <a:latin typeface="맑은 고딕"/>
                 <a:ea typeface="맑은 고딕"/>
               </a:rPr>
-              <a:t>무엇을</a:t>
+              <a:t/>
             </a:r>
             <a:r>
               <a:rPr sz="1200" b="0" dirty="0">
@@ -19885,7 +19885,7 @@
                 <a:latin typeface="맑은 고딕"/>
                 <a:ea typeface="맑은 고딕"/>
               </a:rPr>
-              <a:t> "</a:t>
+              <a:t/>
             </a:r>
             <a:r>
               <a:rPr sz="1200" b="0" dirty="0" err="1">
@@ -19895,7 +19895,7 @@
                 <a:latin typeface="맑은 고딕"/>
                 <a:ea typeface="맑은 고딕"/>
               </a:rPr>
-              <a:t>사각지대"로</a:t>
+              <a:t/>
             </a:r>
             <a:r>
               <a:rPr sz="1200" b="0" dirty="0">
@@ -19905,7 +19905,7 @@
                 <a:latin typeface="맑은 고딕"/>
                 <a:ea typeface="맑은 고딕"/>
               </a:rPr>
-              <a:t> </a:t>
+              <a:t/>
             </a:r>
             <a:r>
               <a:rPr sz="1200" b="0" dirty="0" err="1">
@@ -19915,7 +19915,7 @@
                 <a:latin typeface="맑은 고딕"/>
                 <a:ea typeface="맑은 고딕"/>
               </a:rPr>
-              <a:t>볼지는</a:t>
+              <a:t/>
             </a:r>
             <a:r>
               <a:rPr sz="1200" b="0" dirty="0">
@@ -19925,7 +19925,7 @@
                 <a:latin typeface="맑은 고딕"/>
                 <a:ea typeface="맑은 고딕"/>
               </a:rPr>
-              <a:t> </a:t>
+              <a:t/>
             </a:r>
             <a:r>
               <a:rPr sz="1200" b="0" dirty="0" err="1">
@@ -19935,7 +19935,7 @@
                 <a:latin typeface="맑은 고딕"/>
                 <a:ea typeface="맑은 고딕"/>
               </a:rPr>
-              <a:t>분석을</a:t>
+              <a:t/>
             </a:r>
             <a:r>
               <a:rPr sz="1200" b="0" dirty="0">
@@ -19945,7 +19945,7 @@
                 <a:latin typeface="맑은 고딕"/>
                 <a:ea typeface="맑은 고딕"/>
               </a:rPr>
-              <a:t> </a:t>
+              <a:t/>
             </a:r>
             <a:r>
               <a:rPr sz="1200" b="0" dirty="0" err="1">
@@ -19955,7 +19955,7 @@
                 <a:latin typeface="맑은 고딕"/>
                 <a:ea typeface="맑은 고딕"/>
               </a:rPr>
-              <a:t>시작하기</a:t>
+              <a:t/>
             </a:r>
             <a:r>
               <a:rPr sz="1200" b="0" dirty="0">
@@ -19965,7 +19965,7 @@
                 <a:latin typeface="맑은 고딕"/>
                 <a:ea typeface="맑은 고딕"/>
               </a:rPr>
-              <a:t> </a:t>
+              <a:t/>
             </a:r>
             <a:r>
               <a:rPr sz="1200" b="0" dirty="0" err="1">
@@ -19975,7 +19975,7 @@
                 <a:latin typeface="맑은 고딕"/>
                 <a:ea typeface="맑은 고딕"/>
               </a:rPr>
-              <a:t>전에</a:t>
+              <a:t/>
             </a:r>
             <a:r>
               <a:rPr sz="1200" b="0" dirty="0">
@@ -19985,7 +19985,7 @@
                 <a:latin typeface="맑은 고딕"/>
                 <a:ea typeface="맑은 고딕"/>
               </a:rPr>
-              <a:t> </a:t>
+              <a:t/>
             </a:r>
             <a:r>
               <a:rPr sz="1200" b="0" dirty="0" err="1">
@@ -19995,7 +19995,7 @@
                 <a:latin typeface="맑은 고딕"/>
                 <a:ea typeface="맑은 고딕"/>
               </a:rPr>
-              <a:t>정해</a:t>
+              <a:t/>
             </a:r>
             <a:r>
               <a:rPr sz="1200" b="0" dirty="0">
@@ -20005,7 +20005,7 @@
                 <a:latin typeface="맑은 고딕"/>
                 <a:ea typeface="맑은 고딕"/>
               </a:rPr>
-              <a:t> </a:t>
+              <a:t/>
             </a:r>
             <a:r>
               <a:rPr sz="1200" b="0" dirty="0" err="1">
@@ -20015,7 +20015,7 @@
                 <a:latin typeface="맑은 고딕"/>
                 <a:ea typeface="맑은 고딕"/>
               </a:rPr>
-              <a:t>둔다</a:t>
+              <a:t/>
             </a:r>
             <a:r>
               <a:rPr sz="1200" b="0" dirty="0">
@@ -20025,7 +20025,7 @@
                 <a:latin typeface="맑은 고딕"/>
                 <a:ea typeface="맑은 고딕"/>
               </a:rPr>
-              <a:t> — </a:t>
+              <a:t/>
             </a:r>
             <a:r>
               <a:rPr sz="1200" b="0" dirty="0" err="1">
@@ -20035,7 +20035,7 @@
                 <a:latin typeface="맑은 고딕"/>
                 <a:ea typeface="맑은 고딕"/>
               </a:rPr>
-              <a:t>결과를</a:t>
+              <a:t/>
             </a:r>
             <a:r>
               <a:rPr sz="1200" b="0" dirty="0">
@@ -20045,7 +20045,7 @@
                 <a:latin typeface="맑은 고딕"/>
                 <a:ea typeface="맑은 고딕"/>
               </a:rPr>
-              <a:t> </a:t>
+              <a:t/>
             </a:r>
             <a:r>
               <a:rPr sz="1200" b="0" dirty="0" err="1">
@@ -20055,7 +20055,7 @@
                 <a:latin typeface="맑은 고딕"/>
                 <a:ea typeface="맑은 고딕"/>
               </a:rPr>
-              <a:t>보고</a:t>
+              <a:t/>
             </a:r>
             <a:r>
               <a:rPr sz="1200" b="0" dirty="0">
@@ -20065,7 +20065,7 @@
                 <a:latin typeface="맑은 고딕"/>
                 <a:ea typeface="맑은 고딕"/>
               </a:rPr>
-              <a:t> </a:t>
+              <a:t/>
             </a:r>
             <a:r>
               <a:rPr sz="1200" b="0" dirty="0" err="1">
@@ -20075,7 +20075,7 @@
                 <a:latin typeface="맑은 고딕"/>
                 <a:ea typeface="맑은 고딕"/>
               </a:rPr>
-              <a:t>기준을</a:t>
+              <a:t/>
             </a:r>
             <a:r>
               <a:rPr sz="1200" b="0" dirty="0">
@@ -20085,7 +20085,7 @@
                 <a:latin typeface="맑은 고딕"/>
                 <a:ea typeface="맑은 고딕"/>
               </a:rPr>
-              <a:t> </a:t>
+              <a:t/>
             </a:r>
             <a:r>
               <a:rPr sz="1200" b="0" dirty="0" err="1">
@@ -20095,7 +20095,7 @@
                 <a:latin typeface="맑은 고딕"/>
                 <a:ea typeface="맑은 고딕"/>
               </a:rPr>
-              <a:t>맞추지</a:t>
+              <a:t/>
             </a:r>
             <a:r>
               <a:rPr sz="1200" b="0" dirty="0">
@@ -20105,7 +20105,7 @@
                 <a:latin typeface="맑은 고딕"/>
                 <a:ea typeface="맑은 고딕"/>
               </a:rPr>
-              <a:t> </a:t>
+              <a:t/>
             </a:r>
             <a:r>
               <a:rPr sz="1200" b="0" dirty="0" err="1">
@@ -20115,7 +20115,7 @@
                 <a:latin typeface="맑은 고딕"/>
                 <a:ea typeface="맑은 고딕"/>
               </a:rPr>
-              <a:t>않기</a:t>
+              <a:t/>
             </a:r>
             <a:r>
               <a:rPr sz="1200" b="0" dirty="0">
@@ -20125,7 +20125,7 @@
                 <a:latin typeface="맑은 고딕"/>
                 <a:ea typeface="맑은 고딕"/>
               </a:rPr>
-              <a:t> </a:t>
+              <a:t/>
             </a:r>
             <a:r>
               <a:rPr sz="1200" b="0" dirty="0" err="1">
@@ -20135,7 +20135,7 @@
                 <a:latin typeface="맑은 고딕"/>
                 <a:ea typeface="맑은 고딕"/>
               </a:rPr>
-              <a:t>위해서다</a:t>
+              <a:t/>
             </a:r>
             <a:r>
               <a:rPr sz="1200" b="0" dirty="0">
@@ -20145,7 +20145,7 @@
                 <a:latin typeface="맑은 고딕"/>
                 <a:ea typeface="맑은 고딕"/>
               </a:rPr>
-              <a:t>.</a:t>
+              <a:t/>
             </a:r>
           </a:p>
         </p:txBody>
@@ -22947,7 +22947,7 @@
                 <a:latin typeface="맑은 고딕"/>
                 <a:ea typeface="맑은 고딕"/>
               </a:rPr>
-              <a:t>이 제도 사실들은 모두 공개 문서(고시·공고·지침)에서 확인했으며, 분석의 판단 기준으로만 사용한다.</a:t>
+              <a:t>이 제도 사실은 모두 공개 문서(고시·공고·지침)에서 확인했으며, 분석의 판단 기준으로만 사용함</a:t>
             </a:r>
           </a:p>
         </p:txBody>
@@ -24109,7 +24109,7 @@
                 <a:latin typeface="맑은 고딕"/>
                 <a:ea typeface="맑은 고딕"/>
               </a:rPr>
-              <a:t>원칙: 로그인이 필요하거나 재현 불가능한 자료는 쓰지 않는다 — 누구나 같은 결과를 재현할 수 있어야 한다.</a:t>
+              <a:t>원칙: 로그인이 필요하거나 재현 불가능한 자료는 사용하지 않음 — 누구나 같은 결과를 재현할 수 있어야 함</a:t>
             </a:r>
           </a:p>
         </p:txBody>
@@ -24956,7 +24956,7 @@
                 <a:latin typeface="맑은 고딕"/>
                 <a:ea typeface="맑은 고딕"/>
               </a:rPr>
-              <a:t>• 보고서의 모든 수치는 스크립트 재실행으로 재현되어야 한다 (수기 계산 금지)</a:t>
+              <a:t>• 보고서의 모든 수치는 스크립트 재실행으로 재현되어야 함 (수기 계산 금지)</a:t>
             </a:r>
           </a:p>
           <a:p>
@@ -24976,7 +24976,7 @@
                 <a:latin typeface="맑은 고딕"/>
                 <a:ea typeface="맑은 고딕"/>
               </a:rPr>
-              <a:t>• 직접 구축 지표(D2 등)는 공식 통계와 상관·오차를 대조하는 이중 검증을 통과해야 한다</a:t>
+              <a:t>• 직접 구축 지표(D2 등)는 공식 통계와 상관·오차를 대조하는 이중 검증을 통과해야 함</a:t>
             </a:r>
           </a:p>
           <a:p>
@@ -24996,7 +24996,7 @@
                 <a:latin typeface="맑은 고딕"/>
                 <a:ea typeface="맑은 고딕"/>
               </a:rPr>
-              <a:t>• 전사 데이터(D1)는 공고의 등급별 합계와 자동 대조(assert)한다</a:t>
+              <a:t>• 전사 데이터(D1)는 공고의 등급별 합계와 자동 대조(assert)함</a:t>
             </a:r>
           </a:p>
         </p:txBody>

--- a/04_제출물/데이터분석_계획서.pptx
+++ b/04_제출물/데이터분석_계획서.pptx
@@ -3132,9 +3132,9 @@
             <a:avLst/>
           </a:prstGeom>
           <a:effectLst>
-            <a:outerShdw blurRad="50800" dist="38100" dir="2700000" algn="tl" rotWithShape="0">
+            <a:outerShdw blurRad="25400" dist="25400" dir="2700000" algn="tl" rotWithShape="0">
               <a:prstClr val="black">
-                <a:alpha val="40000"/>
+                <a:alpha val="68000"/>
               </a:prstClr>
             </a:outerShdw>
           </a:effectLst>
@@ -3589,75 +3589,14 @@
       </p:sp>
       <p:sp>
         <p:nvSpPr>
-          <p:cNvPr id="3" name="Rounded Rectangle 2"/>
-          <p:cNvSpPr/>
-          <p:nvPr/>
-        </p:nvSpPr>
-        <p:spPr>
-          <a:xfrm>
-            <a:off x="606475" y="579043"/>
-            <a:ext cx="103784" cy="103784"/>
-          </a:xfrm>
-          <a:prstGeom prst="roundRect">
-            <a:avLst>
-              <a:gd name="adj" fmla="val 50000"/>
-            </a:avLst>
-          </a:prstGeom>
-          <a:gradFill rotWithShape="1">
-            <a:gsLst>
-              <a:gs pos="0">
-                <a:srgbClr val="3A3F45"/>
-              </a:gs>
-              <a:gs pos="100000">
-                <a:srgbClr val="73787E"/>
-              </a:gs>
-            </a:gsLst>
-            <a:lin ang="18900000" scaled="0"/>
-          </a:gradFill>
-          <a:ln>
-            <a:noFill/>
-          </a:ln>
-          <a:effectLst>
-            <a:outerShdw blurRad="109728" dist="36576" dir="5400000" rotWithShape="0">
-              <a:srgbClr val="000000">
-                <a:alpha val="35000"/>
-              </a:srgbClr>
-            </a:outerShdw>
-          </a:effectLst>
-        </p:spPr>
-        <p:style>
-          <a:lnRef idx="1">
-            <a:schemeClr val="accent1"/>
-          </a:lnRef>
-          <a:fillRef idx="3">
-            <a:schemeClr val="accent1"/>
-          </a:fillRef>
-          <a:effectRef idx="2">
-            <a:schemeClr val="accent1"/>
-          </a:effectRef>
-          <a:fontRef idx="minor">
-            <a:schemeClr val="lt1"/>
-          </a:fontRef>
-        </p:style>
-        <p:txBody>
-          <a:bodyPr rtlCol="0" anchor="ctr"/>
-          <a:lstStyle/>
-          <a:p>
-            <a:pPr algn="ctr"/>
-            <a:endParaRPr/>
-          </a:p>
-        </p:txBody>
-      </p:sp>
-      <p:sp>
-        <p:nvSpPr>
           <p:cNvPr id="4" name="TextBox 3"/>
           <p:cNvSpPr txBox="1"/>
           <p:nvPr/>
         </p:nvSpPr>
         <p:spPr>
           <a:xfrm>
-            <a:off x="960120" y="274320"/>
-            <a:ext cx="9692640" cy="685800"/>
+            <a:off x="1417320" y="274320"/>
+            <a:ext cx="9235440" cy="685800"/>
           </a:xfrm>
           <a:prstGeom prst="rect">
             <a:avLst/>
@@ -4425,6 +4364,49 @@
           </a:p>
         </p:txBody>
       </p:sp>
+      <p:sp>
+        <p:nvSpPr>
+          <p:cNvPr id="17" name="TextBox 16"/>
+          <p:cNvSpPr txBox="1"/>
+          <p:nvPr/>
+        </p:nvSpPr>
+        <p:spPr>
+          <a:xfrm>
+            <a:off x="502920" y="274320"/>
+            <a:ext cx="914400" cy="685800"/>
+          </a:xfrm>
+          <a:prstGeom prst="rect">
+            <a:avLst/>
+          </a:prstGeom>
+          <a:noFill/>
+        </p:spPr>
+        <p:txBody>
+          <a:bodyPr wrap="square" anchor="ctr">
+            <a:spAutoFit/>
+          </a:bodyPr>
+          <a:lstStyle/>
+          <a:p>
+            <a:pPr>
+              <a:lnSpc>
+                <a:spcPct val="114000"/>
+              </a:lnSpc>
+              <a:spcAft>
+                <a:spcPts val="0"/>
+              </a:spcAft>
+            </a:pPr>
+            <a:r>
+              <a:rPr sz="1500" b="1">
+                <a:solidFill>
+                  <a:srgbClr val="8A8F95"/>
+                </a:solidFill>
+                <a:latin typeface="맑은 고딕"/>
+                <a:ea typeface="맑은 고딕"/>
+              </a:rPr>
+              <a:t>Ⅳ-1</a:t>
+            </a:r>
+          </a:p>
+        </p:txBody>
+      </p:sp>
     </p:spTree>
   </p:cSld>
   <p:clrMapOvr>
@@ -4497,75 +4479,14 @@
       </p:sp>
       <p:sp>
         <p:nvSpPr>
-          <p:cNvPr id="3" name="Rounded Rectangle 2"/>
-          <p:cNvSpPr/>
-          <p:nvPr/>
-        </p:nvSpPr>
-        <p:spPr>
-          <a:xfrm>
-            <a:off x="606475" y="579043"/>
-            <a:ext cx="103784" cy="103784"/>
-          </a:xfrm>
-          <a:prstGeom prst="roundRect">
-            <a:avLst>
-              <a:gd name="adj" fmla="val 50000"/>
-            </a:avLst>
-          </a:prstGeom>
-          <a:gradFill rotWithShape="1">
-            <a:gsLst>
-              <a:gs pos="0">
-                <a:srgbClr val="3A3F45"/>
-              </a:gs>
-              <a:gs pos="100000">
-                <a:srgbClr val="73787E"/>
-              </a:gs>
-            </a:gsLst>
-            <a:lin ang="18900000" scaled="0"/>
-          </a:gradFill>
-          <a:ln>
-            <a:noFill/>
-          </a:ln>
-          <a:effectLst>
-            <a:outerShdw blurRad="109728" dist="36576" dir="5400000" rotWithShape="0">
-              <a:srgbClr val="000000">
-                <a:alpha val="35000"/>
-              </a:srgbClr>
-            </a:outerShdw>
-          </a:effectLst>
-        </p:spPr>
-        <p:style>
-          <a:lnRef idx="1">
-            <a:schemeClr val="accent1"/>
-          </a:lnRef>
-          <a:fillRef idx="3">
-            <a:schemeClr val="accent1"/>
-          </a:fillRef>
-          <a:effectRef idx="2">
-            <a:schemeClr val="accent1"/>
-          </a:effectRef>
-          <a:fontRef idx="minor">
-            <a:schemeClr val="lt1"/>
-          </a:fontRef>
-        </p:style>
-        <p:txBody>
-          <a:bodyPr rtlCol="0" anchor="ctr"/>
-          <a:lstStyle/>
-          <a:p>
-            <a:pPr algn="ctr"/>
-            <a:endParaRPr/>
-          </a:p>
-        </p:txBody>
-      </p:sp>
-      <p:sp>
-        <p:nvSpPr>
           <p:cNvPr id="4" name="TextBox 3"/>
           <p:cNvSpPr txBox="1"/>
           <p:nvPr/>
         </p:nvSpPr>
         <p:spPr>
           <a:xfrm>
-            <a:off x="960120" y="274320"/>
-            <a:ext cx="9692640" cy="685800"/>
+            <a:off x="1417320" y="274320"/>
+            <a:ext cx="9235440" cy="685800"/>
           </a:xfrm>
           <a:prstGeom prst="rect">
             <a:avLst/>
@@ -5588,6 +5509,49 @@
           </a:p>
         </p:txBody>
       </p:sp>
+      <p:sp>
+        <p:nvSpPr>
+          <p:cNvPr id="24" name="TextBox 23"/>
+          <p:cNvSpPr txBox="1"/>
+          <p:nvPr/>
+        </p:nvSpPr>
+        <p:spPr>
+          <a:xfrm>
+            <a:off x="502920" y="274320"/>
+            <a:ext cx="914400" cy="685800"/>
+          </a:xfrm>
+          <a:prstGeom prst="rect">
+            <a:avLst/>
+          </a:prstGeom>
+          <a:noFill/>
+        </p:spPr>
+        <p:txBody>
+          <a:bodyPr wrap="square" anchor="ctr">
+            <a:spAutoFit/>
+          </a:bodyPr>
+          <a:lstStyle/>
+          <a:p>
+            <a:pPr>
+              <a:lnSpc>
+                <a:spcPct val="114000"/>
+              </a:lnSpc>
+              <a:spcAft>
+                <a:spcPts val="0"/>
+              </a:spcAft>
+            </a:pPr>
+            <a:r>
+              <a:rPr sz="1500" b="1">
+                <a:solidFill>
+                  <a:srgbClr val="8A8F95"/>
+                </a:solidFill>
+                <a:latin typeface="맑은 고딕"/>
+                <a:ea typeface="맑은 고딕"/>
+              </a:rPr>
+              <a:t>Ⅳ-2</a:t>
+            </a:r>
+          </a:p>
+        </p:txBody>
+      </p:sp>
     </p:spTree>
   </p:cSld>
   <p:clrMapOvr>
@@ -5660,75 +5624,14 @@
       </p:sp>
       <p:sp>
         <p:nvSpPr>
-          <p:cNvPr id="3" name="Rounded Rectangle 2"/>
-          <p:cNvSpPr/>
-          <p:nvPr/>
-        </p:nvSpPr>
-        <p:spPr>
-          <a:xfrm>
-            <a:off x="606475" y="579043"/>
-            <a:ext cx="103784" cy="103784"/>
-          </a:xfrm>
-          <a:prstGeom prst="roundRect">
-            <a:avLst>
-              <a:gd name="adj" fmla="val 50000"/>
-            </a:avLst>
-          </a:prstGeom>
-          <a:gradFill rotWithShape="1">
-            <a:gsLst>
-              <a:gs pos="0">
-                <a:srgbClr val="3A3F45"/>
-              </a:gs>
-              <a:gs pos="100000">
-                <a:srgbClr val="73787E"/>
-              </a:gs>
-            </a:gsLst>
-            <a:lin ang="18900000" scaled="0"/>
-          </a:gradFill>
-          <a:ln>
-            <a:noFill/>
-          </a:ln>
-          <a:effectLst>
-            <a:outerShdw blurRad="109728" dist="36576" dir="5400000" rotWithShape="0">
-              <a:srgbClr val="000000">
-                <a:alpha val="35000"/>
-              </a:srgbClr>
-            </a:outerShdw>
-          </a:effectLst>
-        </p:spPr>
-        <p:style>
-          <a:lnRef idx="1">
-            <a:schemeClr val="accent1"/>
-          </a:lnRef>
-          <a:fillRef idx="3">
-            <a:schemeClr val="accent1"/>
-          </a:fillRef>
-          <a:effectRef idx="2">
-            <a:schemeClr val="accent1"/>
-          </a:effectRef>
-          <a:fontRef idx="minor">
-            <a:schemeClr val="lt1"/>
-          </a:fontRef>
-        </p:style>
-        <p:txBody>
-          <a:bodyPr rtlCol="0" anchor="ctr"/>
-          <a:lstStyle/>
-          <a:p>
-            <a:pPr algn="ctr"/>
-            <a:endParaRPr/>
-          </a:p>
-        </p:txBody>
-      </p:sp>
-      <p:sp>
-        <p:nvSpPr>
           <p:cNvPr id="4" name="TextBox 3"/>
           <p:cNvSpPr txBox="1"/>
           <p:nvPr/>
         </p:nvSpPr>
         <p:spPr>
           <a:xfrm>
-            <a:off x="960120" y="274320"/>
-            <a:ext cx="9692640" cy="685800"/>
+            <a:off x="1417320" y="274320"/>
+            <a:ext cx="9235440" cy="685800"/>
           </a:xfrm>
           <a:prstGeom prst="rect">
             <a:avLst/>
@@ -6418,6 +6321,49 @@
           </a:p>
         </p:txBody>
       </p:sp>
+      <p:sp>
+        <p:nvSpPr>
+          <p:cNvPr id="15" name="TextBox 14"/>
+          <p:cNvSpPr txBox="1"/>
+          <p:nvPr/>
+        </p:nvSpPr>
+        <p:spPr>
+          <a:xfrm>
+            <a:off x="502920" y="274320"/>
+            <a:ext cx="914400" cy="685800"/>
+          </a:xfrm>
+          <a:prstGeom prst="rect">
+            <a:avLst/>
+          </a:prstGeom>
+          <a:noFill/>
+        </p:spPr>
+        <p:txBody>
+          <a:bodyPr wrap="square" anchor="ctr">
+            <a:spAutoFit/>
+          </a:bodyPr>
+          <a:lstStyle/>
+          <a:p>
+            <a:pPr>
+              <a:lnSpc>
+                <a:spcPct val="114000"/>
+              </a:lnSpc>
+              <a:spcAft>
+                <a:spcPts val="0"/>
+              </a:spcAft>
+            </a:pPr>
+            <a:r>
+              <a:rPr sz="1500" b="1">
+                <a:solidFill>
+                  <a:srgbClr val="8A8F95"/>
+                </a:solidFill>
+                <a:latin typeface="맑은 고딕"/>
+                <a:ea typeface="맑은 고딕"/>
+              </a:rPr>
+              <a:t>Ⅳ-3</a:t>
+            </a:r>
+          </a:p>
+        </p:txBody>
+      </p:sp>
     </p:spTree>
   </p:cSld>
   <p:clrMapOvr>
@@ -6490,75 +6436,14 @@
       </p:sp>
       <p:sp>
         <p:nvSpPr>
-          <p:cNvPr id="3" name="Rounded Rectangle 2"/>
-          <p:cNvSpPr/>
-          <p:nvPr/>
-        </p:nvSpPr>
-        <p:spPr>
-          <a:xfrm>
-            <a:off x="606475" y="579043"/>
-            <a:ext cx="103784" cy="103784"/>
-          </a:xfrm>
-          <a:prstGeom prst="roundRect">
-            <a:avLst>
-              <a:gd name="adj" fmla="val 50000"/>
-            </a:avLst>
-          </a:prstGeom>
-          <a:gradFill rotWithShape="1">
-            <a:gsLst>
-              <a:gs pos="0">
-                <a:srgbClr val="3A3F45"/>
-              </a:gs>
-              <a:gs pos="100000">
-                <a:srgbClr val="73787E"/>
-              </a:gs>
-            </a:gsLst>
-            <a:lin ang="18900000" scaled="0"/>
-          </a:gradFill>
-          <a:ln>
-            <a:noFill/>
-          </a:ln>
-          <a:effectLst>
-            <a:outerShdw blurRad="109728" dist="36576" dir="5400000" rotWithShape="0">
-              <a:srgbClr val="000000">
-                <a:alpha val="35000"/>
-              </a:srgbClr>
-            </a:outerShdw>
-          </a:effectLst>
-        </p:spPr>
-        <p:style>
-          <a:lnRef idx="1">
-            <a:schemeClr val="accent1"/>
-          </a:lnRef>
-          <a:fillRef idx="3">
-            <a:schemeClr val="accent1"/>
-          </a:fillRef>
-          <a:effectRef idx="2">
-            <a:schemeClr val="accent1"/>
-          </a:effectRef>
-          <a:fontRef idx="minor">
-            <a:schemeClr val="lt1"/>
-          </a:fontRef>
-        </p:style>
-        <p:txBody>
-          <a:bodyPr rtlCol="0" anchor="ctr"/>
-          <a:lstStyle/>
-          <a:p>
-            <a:pPr algn="ctr"/>
-            <a:endParaRPr/>
-          </a:p>
-        </p:txBody>
-      </p:sp>
-      <p:sp>
-        <p:nvSpPr>
           <p:cNvPr id="4" name="TextBox 3"/>
           <p:cNvSpPr txBox="1"/>
           <p:nvPr/>
         </p:nvSpPr>
         <p:spPr>
           <a:xfrm>
-            <a:off x="960120" y="274320"/>
-            <a:ext cx="9692640" cy="685800"/>
+            <a:off x="1417320" y="274320"/>
+            <a:ext cx="9235440" cy="685800"/>
           </a:xfrm>
           <a:prstGeom prst="rect">
             <a:avLst/>
@@ -7561,6 +7446,49 @@
           </a:graphicData>
         </a:graphic>
       </p:graphicFrame>
+      <p:sp>
+        <p:nvSpPr>
+          <p:cNvPr id="16" name="TextBox 15"/>
+          <p:cNvSpPr txBox="1"/>
+          <p:nvPr/>
+        </p:nvSpPr>
+        <p:spPr>
+          <a:xfrm>
+            <a:off x="502920" y="274320"/>
+            <a:ext cx="914400" cy="685800"/>
+          </a:xfrm>
+          <a:prstGeom prst="rect">
+            <a:avLst/>
+          </a:prstGeom>
+          <a:noFill/>
+        </p:spPr>
+        <p:txBody>
+          <a:bodyPr wrap="square" anchor="ctr">
+            <a:spAutoFit/>
+          </a:bodyPr>
+          <a:lstStyle/>
+          <a:p>
+            <a:pPr>
+              <a:lnSpc>
+                <a:spcPct val="114000"/>
+              </a:lnSpc>
+              <a:spcAft>
+                <a:spcPts val="0"/>
+              </a:spcAft>
+            </a:pPr>
+            <a:r>
+              <a:rPr sz="1500" b="1">
+                <a:solidFill>
+                  <a:srgbClr val="8A8F95"/>
+                </a:solidFill>
+                <a:latin typeface="맑은 고딕"/>
+                <a:ea typeface="맑은 고딕"/>
+              </a:rPr>
+              <a:t>Ⅴ-1</a:t>
+            </a:r>
+          </a:p>
+        </p:txBody>
+      </p:sp>
     </p:spTree>
   </p:cSld>
   <p:clrMapOvr>
@@ -7633,75 +7561,14 @@
       </p:sp>
       <p:sp>
         <p:nvSpPr>
-          <p:cNvPr id="3" name="Rounded Rectangle 2"/>
-          <p:cNvSpPr/>
-          <p:nvPr/>
-        </p:nvSpPr>
-        <p:spPr>
-          <a:xfrm>
-            <a:off x="606475" y="579043"/>
-            <a:ext cx="103784" cy="103784"/>
-          </a:xfrm>
-          <a:prstGeom prst="roundRect">
-            <a:avLst>
-              <a:gd name="adj" fmla="val 50000"/>
-            </a:avLst>
-          </a:prstGeom>
-          <a:gradFill rotWithShape="1">
-            <a:gsLst>
-              <a:gs pos="0">
-                <a:srgbClr val="3A3F45"/>
-              </a:gs>
-              <a:gs pos="100000">
-                <a:srgbClr val="73787E"/>
-              </a:gs>
-            </a:gsLst>
-            <a:lin ang="18900000" scaled="0"/>
-          </a:gradFill>
-          <a:ln>
-            <a:noFill/>
-          </a:ln>
-          <a:effectLst>
-            <a:outerShdw blurRad="109728" dist="36576" dir="5400000" rotWithShape="0">
-              <a:srgbClr val="000000">
-                <a:alpha val="35000"/>
-              </a:srgbClr>
-            </a:outerShdw>
-          </a:effectLst>
-        </p:spPr>
-        <p:style>
-          <a:lnRef idx="1">
-            <a:schemeClr val="accent1"/>
-          </a:lnRef>
-          <a:fillRef idx="3">
-            <a:schemeClr val="accent1"/>
-          </a:fillRef>
-          <a:effectRef idx="2">
-            <a:schemeClr val="accent1"/>
-          </a:effectRef>
-          <a:fontRef idx="minor">
-            <a:schemeClr val="lt1"/>
-          </a:fontRef>
-        </p:style>
-        <p:txBody>
-          <a:bodyPr rtlCol="0" anchor="ctr"/>
-          <a:lstStyle/>
-          <a:p>
-            <a:pPr algn="ctr"/>
-            <a:endParaRPr/>
-          </a:p>
-        </p:txBody>
-      </p:sp>
-      <p:sp>
-        <p:nvSpPr>
           <p:cNvPr id="4" name="TextBox 3"/>
           <p:cNvSpPr txBox="1"/>
           <p:nvPr/>
         </p:nvSpPr>
         <p:spPr>
           <a:xfrm>
-            <a:off x="960120" y="274320"/>
-            <a:ext cx="9692640" cy="685800"/>
+            <a:off x="1417320" y="274320"/>
+            <a:ext cx="9235440" cy="685800"/>
           </a:xfrm>
           <a:prstGeom prst="rect">
             <a:avLst/>
@@ -8832,6 +8699,49 @@
           </a:p>
         </p:txBody>
       </p:sp>
+      <p:sp>
+        <p:nvSpPr>
+          <p:cNvPr id="13" name="TextBox 12"/>
+          <p:cNvSpPr txBox="1"/>
+          <p:nvPr/>
+        </p:nvSpPr>
+        <p:spPr>
+          <a:xfrm>
+            <a:off x="502920" y="274320"/>
+            <a:ext cx="914400" cy="685800"/>
+          </a:xfrm>
+          <a:prstGeom prst="rect">
+            <a:avLst/>
+          </a:prstGeom>
+          <a:noFill/>
+        </p:spPr>
+        <p:txBody>
+          <a:bodyPr wrap="square" anchor="ctr">
+            <a:spAutoFit/>
+          </a:bodyPr>
+          <a:lstStyle/>
+          <a:p>
+            <a:pPr>
+              <a:lnSpc>
+                <a:spcPct val="114000"/>
+              </a:lnSpc>
+              <a:spcAft>
+                <a:spcPts val="0"/>
+              </a:spcAft>
+            </a:pPr>
+            <a:r>
+              <a:rPr sz="1500" b="1">
+                <a:solidFill>
+                  <a:srgbClr val="8A8F95"/>
+                </a:solidFill>
+                <a:latin typeface="맑은 고딕"/>
+                <a:ea typeface="맑은 고딕"/>
+              </a:rPr>
+              <a:t>Ⅴ-2</a:t>
+            </a:r>
+          </a:p>
+        </p:txBody>
+      </p:sp>
     </p:spTree>
   </p:cSld>
   <p:clrMapOvr>
@@ -10698,75 +10608,14 @@
       </p:sp>
       <p:sp>
         <p:nvSpPr>
-          <p:cNvPr id="3" name="Rounded Rectangle 2"/>
-          <p:cNvSpPr/>
-          <p:nvPr/>
-        </p:nvSpPr>
-        <p:spPr>
-          <a:xfrm>
-            <a:off x="606475" y="579043"/>
-            <a:ext cx="103784" cy="103784"/>
-          </a:xfrm>
-          <a:prstGeom prst="roundRect">
-            <a:avLst>
-              <a:gd name="adj" fmla="val 50000"/>
-            </a:avLst>
-          </a:prstGeom>
-          <a:gradFill rotWithShape="1">
-            <a:gsLst>
-              <a:gs pos="0">
-                <a:srgbClr val="3A3F45"/>
-              </a:gs>
-              <a:gs pos="100000">
-                <a:srgbClr val="73787E"/>
-              </a:gs>
-            </a:gsLst>
-            <a:lin ang="18900000" scaled="0"/>
-          </a:gradFill>
-          <a:ln>
-            <a:noFill/>
-          </a:ln>
-          <a:effectLst>
-            <a:outerShdw blurRad="109728" dist="36576" dir="5400000" rotWithShape="0">
-              <a:srgbClr val="000000">
-                <a:alpha val="35000"/>
-              </a:srgbClr>
-            </a:outerShdw>
-          </a:effectLst>
-        </p:spPr>
-        <p:style>
-          <a:lnRef idx="1">
-            <a:schemeClr val="accent1"/>
-          </a:lnRef>
-          <a:fillRef idx="3">
-            <a:schemeClr val="accent1"/>
-          </a:fillRef>
-          <a:effectRef idx="2">
-            <a:schemeClr val="accent1"/>
-          </a:effectRef>
-          <a:fontRef idx="minor">
-            <a:schemeClr val="lt1"/>
-          </a:fontRef>
-        </p:style>
-        <p:txBody>
-          <a:bodyPr rtlCol="0" anchor="ctr"/>
-          <a:lstStyle/>
-          <a:p>
-            <a:pPr algn="ctr"/>
-            <a:endParaRPr/>
-          </a:p>
-        </p:txBody>
-      </p:sp>
-      <p:sp>
-        <p:nvSpPr>
           <p:cNvPr id="4" name="TextBox 3"/>
           <p:cNvSpPr txBox="1"/>
           <p:nvPr/>
         </p:nvSpPr>
         <p:spPr>
           <a:xfrm>
-            <a:off x="960120" y="399564"/>
-            <a:ext cx="9692640" cy="435312"/>
+            <a:off x="1417320" y="399564"/>
+            <a:ext cx="9235440" cy="435312"/>
           </a:xfrm>
           <a:prstGeom prst="rect">
             <a:avLst/>
@@ -11002,146 +10851,6 @@
                 <a:ea typeface="맑은 고딕"/>
               </a:rPr>
               <a:t>부족(㉠)과 배분(㉡)은 다른 문제이며 해법도 다름 — 본 계획은 ㉡을 맡음</a:t>
-            </a:r>
-            <a:r>
-              <a:rPr sz="1250" b="0" dirty="0">
-                <a:solidFill>
-                  <a:srgbClr val="767A7F"/>
-                </a:solidFill>
-                <a:latin typeface="맑은 고딕"/>
-                <a:ea typeface="맑은 고딕"/>
-              </a:rPr>
-              <a:t/>
-            </a:r>
-            <a:r>
-              <a:rPr sz="1250" b="0" dirty="0" err="1">
-                <a:solidFill>
-                  <a:srgbClr val="767A7F"/>
-                </a:solidFill>
-                <a:latin typeface="맑은 고딕"/>
-                <a:ea typeface="맑은 고딕"/>
-              </a:rPr>
-              <a:t/>
-            </a:r>
-            <a:r>
-              <a:rPr sz="1250" b="0" dirty="0">
-                <a:solidFill>
-                  <a:srgbClr val="767A7F"/>
-                </a:solidFill>
-                <a:latin typeface="맑은 고딕"/>
-                <a:ea typeface="맑은 고딕"/>
-              </a:rPr>
-              <a:t/>
-            </a:r>
-            <a:r>
-              <a:rPr sz="1250" b="0" dirty="0" err="1">
-                <a:solidFill>
-                  <a:srgbClr val="767A7F"/>
-                </a:solidFill>
-                <a:latin typeface="맑은 고딕"/>
-                <a:ea typeface="맑은 고딕"/>
-              </a:rPr>
-              <a:t/>
-            </a:r>
-            <a:r>
-              <a:rPr sz="1250" b="0" dirty="0">
-                <a:solidFill>
-                  <a:srgbClr val="767A7F"/>
-                </a:solidFill>
-                <a:latin typeface="맑은 고딕"/>
-                <a:ea typeface="맑은 고딕"/>
-              </a:rPr>
-              <a:t/>
-            </a:r>
-            <a:r>
-              <a:rPr sz="1250" b="0" dirty="0" err="1">
-                <a:solidFill>
-                  <a:srgbClr val="767A7F"/>
-                </a:solidFill>
-                <a:latin typeface="맑은 고딕"/>
-                <a:ea typeface="맑은 고딕"/>
-              </a:rPr>
-              <a:t/>
-            </a:r>
-            <a:r>
-              <a:rPr sz="1250" b="0" dirty="0">
-                <a:solidFill>
-                  <a:srgbClr val="767A7F"/>
-                </a:solidFill>
-                <a:latin typeface="맑은 고딕"/>
-                <a:ea typeface="맑은 고딕"/>
-              </a:rPr>
-              <a:t/>
-            </a:r>
-            <a:r>
-              <a:rPr sz="1250" b="0" dirty="0" err="1">
-                <a:solidFill>
-                  <a:srgbClr val="767A7F"/>
-                </a:solidFill>
-                <a:latin typeface="맑은 고딕"/>
-                <a:ea typeface="맑은 고딕"/>
-              </a:rPr>
-              <a:t/>
-            </a:r>
-            <a:r>
-              <a:rPr sz="1250" b="0" dirty="0">
-                <a:solidFill>
-                  <a:srgbClr val="767A7F"/>
-                </a:solidFill>
-                <a:latin typeface="맑은 고딕"/>
-                <a:ea typeface="맑은 고딕"/>
-              </a:rPr>
-              <a:t/>
-            </a:r>
-            <a:r>
-              <a:rPr sz="1250" b="0" dirty="0" err="1">
-                <a:solidFill>
-                  <a:srgbClr val="767A7F"/>
-                </a:solidFill>
-                <a:latin typeface="맑은 고딕"/>
-                <a:ea typeface="맑은 고딕"/>
-              </a:rPr>
-              <a:t/>
-            </a:r>
-            <a:r>
-              <a:rPr sz="1250" b="0" dirty="0">
-                <a:solidFill>
-                  <a:srgbClr val="767A7F"/>
-                </a:solidFill>
-                <a:latin typeface="맑은 고딕"/>
-                <a:ea typeface="맑은 고딕"/>
-              </a:rPr>
-              <a:t/>
-            </a:r>
-            <a:r>
-              <a:rPr sz="1250" b="0" dirty="0" err="1">
-                <a:solidFill>
-                  <a:srgbClr val="767A7F"/>
-                </a:solidFill>
-                <a:latin typeface="맑은 고딕"/>
-                <a:ea typeface="맑은 고딕"/>
-              </a:rPr>
-              <a:t/>
-            </a:r>
-            <a:r>
-              <a:rPr sz="1250" b="0" dirty="0">
-                <a:solidFill>
-                  <a:srgbClr val="767A7F"/>
-                </a:solidFill>
-                <a:latin typeface="맑은 고딕"/>
-                <a:ea typeface="맑은 고딕"/>
-              </a:rPr>
-              <a:t/>
-            </a:r>
-            <a:r>
-              <a:rPr sz="1250" b="0" dirty="0" err="1">
-                <a:solidFill>
-                  <a:srgbClr val="767A7F"/>
-                </a:solidFill>
-                <a:latin typeface="맑은 고딕"/>
-                <a:ea typeface="맑은 고딕"/>
-              </a:rPr>
-              <a:t/>
             </a:r>
             <a:endParaRPr sz="1250" b="0" dirty="0">
               <a:solidFill>
@@ -11429,6 +11138,26 @@
               <a:t>" — </a:t>
             </a:r>
             <a:r>
+              <a:rPr lang="ko-KR" altLang="en-US" sz="1100" b="0" dirty="0">
+                <a:solidFill>
+                  <a:srgbClr val="1C1C1E"/>
+                </a:solidFill>
+                <a:latin typeface="맑은 고딕"/>
+                <a:ea typeface="맑은 고딕"/>
+              </a:rPr>
+              <a:t>매년</a:t>
+            </a:r>
+            <a:r>
+              <a:rPr sz="1100" b="0" dirty="0">
+                <a:solidFill>
+                  <a:srgbClr val="1C1C1E"/>
+                </a:solidFill>
+                <a:latin typeface="맑은 고딕"/>
+                <a:ea typeface="맑은 고딕"/>
+              </a:rPr>
+              <a:t> </a:t>
+            </a:r>
+            <a:r>
               <a:rPr sz="1100" b="0" dirty="0" err="1">
                 <a:solidFill>
                   <a:srgbClr val="1C1C1E"/>
@@ -11436,7 +11165,7 @@
                 <a:latin typeface="맑은 고딕"/>
                 <a:ea typeface="맑은 고딕"/>
               </a:rPr>
-              <a:t>해마다</a:t>
+              <a:t>반복되는</a:t>
             </a:r>
             <a:r>
               <a:rPr sz="1100" b="0" dirty="0">
@@ -11456,7 +11185,7 @@
                 <a:latin typeface="맑은 고딕"/>
                 <a:ea typeface="맑은 고딕"/>
               </a:rPr>
-              <a:t>반복되는</a:t>
+              <a:t>기사</a:t>
             </a:r>
             <a:r>
               <a:rPr sz="1100" b="0" dirty="0">
@@ -11466,6 +11195,56 @@
                 <a:latin typeface="맑은 고딕"/>
                 <a:ea typeface="맑은 고딕"/>
               </a:rPr>
+              <a:t>. </a:t>
+            </a:r>
+            <a:r>
+              <a:rPr lang="ko-KR" altLang="en-US" sz="1100" b="0" dirty="0">
+                <a:solidFill>
+                  <a:srgbClr val="1C1C1E"/>
+                </a:solidFill>
+                <a:latin typeface="맑은 고딕"/>
+                <a:ea typeface="맑은 고딕"/>
+              </a:rPr>
+              <a:t>늘 같은 처방</a:t>
+            </a:r>
+            <a:r>
+              <a:rPr sz="1100" b="0" dirty="0">
+                <a:solidFill>
+                  <a:srgbClr val="1C1C1E"/>
+                </a:solidFill>
+                <a:latin typeface="맑은 고딕"/>
+                <a:ea typeface="맑은 고딕"/>
+              </a:rPr>
+              <a:t>: </a:t>
+            </a:r>
+            <a:r>
+              <a:rPr lang="en-US" sz="1100" b="0" dirty="0">
+                <a:solidFill>
+                  <a:srgbClr val="1C1C1E"/>
+                </a:solidFill>
+                <a:latin typeface="맑은 고딕"/>
+                <a:ea typeface="맑은 고딕"/>
+              </a:rPr>
+              <a:t>"</a:t>
+            </a:r>
+            <a:r>
+              <a:rPr sz="1100" b="0" dirty="0" err="1">
+                <a:solidFill>
+                  <a:srgbClr val="1C1C1E"/>
+                </a:solidFill>
+                <a:latin typeface="맑은 고딕"/>
+                <a:ea typeface="맑은 고딕"/>
+              </a:rPr>
+              <a:t>의사를</a:t>
+            </a:r>
+            <a:r>
+              <a:rPr sz="1100" b="0" dirty="0">
+                <a:solidFill>
+                  <a:srgbClr val="1C1C1E"/>
+                </a:solidFill>
+                <a:latin typeface="맑은 고딕"/>
+                <a:ea typeface="맑은 고딕"/>
+              </a:rPr>
               <a:t> </a:t>
             </a:r>
             <a:r>
@@ -11476,7 +11255,7 @@
                 <a:latin typeface="맑은 고딕"/>
                 <a:ea typeface="맑은 고딕"/>
               </a:rPr>
-              <a:t>기사</a:t>
+              <a:t>늘리고</a:t>
             </a:r>
             <a:r>
               <a:rPr sz="1100" b="0" dirty="0">
@@ -11486,7 +11265,77 @@
                 <a:latin typeface="맑은 고딕"/>
                 <a:ea typeface="맑은 고딕"/>
               </a:rPr>
-              <a:t>. </a:t>
+              <a:t> </a:t>
+            </a:r>
+            <a:r>
+              <a:rPr sz="1100" b="0" dirty="0" err="1">
+                <a:solidFill>
+                  <a:srgbClr val="1C1C1E"/>
+                </a:solidFill>
+                <a:latin typeface="맑은 고딕"/>
+                <a:ea typeface="맑은 고딕"/>
+              </a:rPr>
+              <a:t>병원을</a:t>
+            </a:r>
+            <a:r>
+              <a:rPr sz="1100" b="0" dirty="0">
+                <a:solidFill>
+                  <a:srgbClr val="1C1C1E"/>
+                </a:solidFill>
+                <a:latin typeface="맑은 고딕"/>
+                <a:ea typeface="맑은 고딕"/>
+              </a:rPr>
+              <a:t> </a:t>
+            </a:r>
+            <a:r>
+              <a:rPr sz="1100" b="0" dirty="0" err="1">
+                <a:solidFill>
+                  <a:srgbClr val="1C1C1E"/>
+                </a:solidFill>
+                <a:latin typeface="맑은 고딕"/>
+                <a:ea typeface="맑은 고딕"/>
+              </a:rPr>
+              <a:t>지어라</a:t>
+            </a:r>
+            <a:r>
+              <a:rPr sz="1100" b="0" dirty="0">
+                <a:solidFill>
+                  <a:srgbClr val="1C1C1E"/>
+                </a:solidFill>
+                <a:latin typeface="맑은 고딕"/>
+                <a:ea typeface="맑은 고딕"/>
+              </a:rPr>
+              <a:t>.</a:t>
+            </a:r>
+            <a:r>
+              <a:rPr lang="en-US" sz="1100" b="0" dirty="0">
+                <a:solidFill>
+                  <a:srgbClr val="1C1C1E"/>
+                </a:solidFill>
+                <a:latin typeface="맑은 고딕"/>
+                <a:ea typeface="맑은 고딕"/>
+              </a:rPr>
+              <a:t>"</a:t>
+            </a:r>
+            <a:r>
+              <a:rPr sz="1100" b="0" dirty="0">
+                <a:solidFill>
+                  <a:srgbClr val="1C1C1E"/>
+                </a:solidFill>
+                <a:latin typeface="맑은 고딕"/>
+                <a:ea typeface="맑은 고딕"/>
+              </a:rPr>
+              <a:t> </a:t>
+            </a:r>
+            <a:r>
+              <a:rPr sz="1100" b="0" dirty="0" err="1">
+                <a:solidFill>
+                  <a:srgbClr val="1C1C1E"/>
+                </a:solidFill>
+                <a:latin typeface="맑은 고딕"/>
+                <a:ea typeface="맑은 고딕"/>
+              </a:rPr>
+              <a:t>절대</a:t>
             </a:r>
             <a:r>
               <a:rPr lang="ko-KR" altLang="en-US" sz="1100" b="0" dirty="0">
@@ -11496,27 +11345,7 @@
                 <a:latin typeface="맑은 고딕"/>
                 <a:ea typeface="맑은 고딕"/>
               </a:rPr>
-              <a:t>늘 같은 처방</a:t>
-            </a:r>
-            <a:r>
-              <a:rPr sz="1100" b="0" dirty="0">
-                <a:solidFill>
-                  <a:srgbClr val="1C1C1E"/>
-                </a:solidFill>
-                <a:latin typeface="맑은 고딕"/>
-                <a:ea typeface="맑은 고딕"/>
-              </a:rPr>
-              <a:t>: </a:t>
-            </a:r>
-            <a:r>
-              <a:rPr lang="en-US" sz="1100" b="0" dirty="0">
-                <a:solidFill>
-                  <a:srgbClr val="1C1C1E"/>
-                </a:solidFill>
-                <a:latin typeface="맑은 고딕"/>
-                <a:ea typeface="맑은 고딕"/>
-              </a:rPr>
-              <a:t>"</a:t>
+              <a:t>적 공급</a:t>
             </a:r>
             <a:r>
               <a:rPr sz="1100" b="0" dirty="0" err="1">
@@ -11526,107 +11355,7 @@
                 <a:latin typeface="맑은 고딕"/>
                 <a:ea typeface="맑은 고딕"/>
               </a:rPr>
-              <a:t>의사를</a:t>
-            </a:r>
-            <a:r>
-              <a:rPr sz="1100" b="0" dirty="0">
-                <a:solidFill>
-                  <a:srgbClr val="1C1C1E"/>
-                </a:solidFill>
-                <a:latin typeface="맑은 고딕"/>
-                <a:ea typeface="맑은 고딕"/>
-              </a:rPr>
-              <a:t> </a:t>
-            </a:r>
-            <a:r>
-              <a:rPr sz="1100" b="0" dirty="0" err="1">
-                <a:solidFill>
-                  <a:srgbClr val="1C1C1E"/>
-                </a:solidFill>
-                <a:latin typeface="맑은 고딕"/>
-                <a:ea typeface="맑은 고딕"/>
-              </a:rPr>
-              <a:t>늘리고</a:t>
-            </a:r>
-            <a:r>
-              <a:rPr sz="1100" b="0" dirty="0">
-                <a:solidFill>
-                  <a:srgbClr val="1C1C1E"/>
-                </a:solidFill>
-                <a:latin typeface="맑은 고딕"/>
-                <a:ea typeface="맑은 고딕"/>
-              </a:rPr>
-              <a:t> </a:t>
-            </a:r>
-            <a:r>
-              <a:rPr sz="1100" b="0" dirty="0" err="1">
-                <a:solidFill>
-                  <a:srgbClr val="1C1C1E"/>
-                </a:solidFill>
-                <a:latin typeface="맑은 고딕"/>
-                <a:ea typeface="맑은 고딕"/>
-              </a:rPr>
-              <a:t>병원을</a:t>
-            </a:r>
-            <a:r>
-              <a:rPr sz="1100" b="0" dirty="0">
-                <a:solidFill>
-                  <a:srgbClr val="1C1C1E"/>
-                </a:solidFill>
-                <a:latin typeface="맑은 고딕"/>
-                <a:ea typeface="맑은 고딕"/>
-              </a:rPr>
-              <a:t> </a:t>
-            </a:r>
-            <a:r>
-              <a:rPr sz="1100" b="0" dirty="0" err="1">
-                <a:solidFill>
-                  <a:srgbClr val="1C1C1E"/>
-                </a:solidFill>
-                <a:latin typeface="맑은 고딕"/>
-                <a:ea typeface="맑은 고딕"/>
-              </a:rPr>
-              <a:t>지어라</a:t>
-            </a:r>
-            <a:r>
-              <a:rPr sz="1100" b="0" dirty="0">
-                <a:solidFill>
-                  <a:srgbClr val="1C1C1E"/>
-                </a:solidFill>
-                <a:latin typeface="맑은 고딕"/>
-                <a:ea typeface="맑은 고딕"/>
-              </a:rPr>
-              <a:t>.</a:t>
-            </a:r>
-            <a:r>
-              <a:rPr lang="en-US" sz="1100" b="0" dirty="0">
-                <a:solidFill>
-                  <a:srgbClr val="1C1C1E"/>
-                </a:solidFill>
-                <a:latin typeface="맑은 고딕"/>
-                <a:ea typeface="맑은 고딕"/>
-              </a:rPr>
-              <a:t>"</a:t>
-            </a:r>
-            <a:r>
-              <a:rPr sz="1100" b="0" dirty="0">
-                <a:solidFill>
-                  <a:srgbClr val="1C1C1E"/>
-                </a:solidFill>
-                <a:latin typeface="맑은 고딕"/>
-                <a:ea typeface="맑은 고딕"/>
-              </a:rPr>
-              <a:t> </a:t>
-            </a:r>
-            <a:r>
-              <a:rPr sz="1100" b="0" dirty="0" err="1">
-                <a:solidFill>
-                  <a:srgbClr val="1C1C1E"/>
-                </a:solidFill>
-                <a:latin typeface="맑은 고딕"/>
-                <a:ea typeface="맑은 고딕"/>
-              </a:rPr>
-              <a:t>절대량이</a:t>
+              <a:t>량이</a:t>
             </a:r>
             <a:r>
               <a:rPr sz="1100" b="0" dirty="0">
@@ -12332,303 +12061,6 @@
               </a:rPr>
               <a:t>• ㉠은 예산·인력에 제한된 영역이라 데이터가 해답을 주기 어려움. ㉡은 배분 규칙의 문제이므로 데이터로 답할 수 있음 — 그리고 ㉡은 아직 제대로 된 검증이 이뤄지지 않았음</a:t>
             </a:r>
-            <a:r>
-              <a:rPr sz="1100" b="0" dirty="0" err="1">
-                <a:solidFill>
-                  <a:srgbClr val="1C1C1E"/>
-                </a:solidFill>
-                <a:latin typeface="맑은 고딕"/>
-                <a:ea typeface="맑은 고딕"/>
-              </a:rPr>
-              <a:t/>
-            </a:r>
-            <a:r>
-              <a:rPr lang="ko-KR" altLang="en-US" sz="1100" b="0" dirty="0">
-                <a:solidFill>
-                  <a:srgbClr val="1C1C1E"/>
-                </a:solidFill>
-                <a:latin typeface="맑은 고딕"/>
-                <a:ea typeface="맑은 고딕"/>
-              </a:rPr>
-              <a:t/>
-            </a:r>
-            <a:r>
-              <a:rPr lang="ko-KR" altLang="en-US" sz="1100" b="0" dirty="0" err="1">
-                <a:solidFill>
-                  <a:srgbClr val="1C1C1E"/>
-                </a:solidFill>
-                <a:latin typeface="맑은 고딕"/>
-                <a:ea typeface="맑은 고딕"/>
-              </a:rPr>
-              <a:t/>
-            </a:r>
-            <a:r>
-              <a:rPr lang="ko-KR" altLang="en-US" sz="1100" b="0" dirty="0">
-                <a:solidFill>
-                  <a:srgbClr val="1C1C1E"/>
-                </a:solidFill>
-                <a:latin typeface="맑은 고딕"/>
-                <a:ea typeface="맑은 고딕"/>
-              </a:rPr>
-              <a:t/>
-            </a:r>
-            <a:r>
-              <a:rPr sz="1100" b="0" dirty="0" err="1">
-                <a:solidFill>
-                  <a:srgbClr val="1C1C1E"/>
-                </a:solidFill>
-                <a:latin typeface="맑은 고딕"/>
-                <a:ea typeface="맑은 고딕"/>
-              </a:rPr>
-              <a:t/>
-            </a:r>
-            <a:r>
-              <a:rPr sz="1100" b="0" dirty="0">
-                <a:solidFill>
-                  <a:srgbClr val="1C1C1E"/>
-                </a:solidFill>
-                <a:latin typeface="맑은 고딕"/>
-                <a:ea typeface="맑은 고딕"/>
-              </a:rPr>
-              <a:t/>
-            </a:r>
-            <a:r>
-              <a:rPr sz="1100" b="0" dirty="0" err="1">
-                <a:solidFill>
-                  <a:srgbClr val="1C1C1E"/>
-                </a:solidFill>
-                <a:latin typeface="맑은 고딕"/>
-                <a:ea typeface="맑은 고딕"/>
-              </a:rPr>
-              <a:t/>
-            </a:r>
-            <a:r>
-              <a:rPr sz="1100" b="0" dirty="0">
-                <a:solidFill>
-                  <a:srgbClr val="1C1C1E"/>
-                </a:solidFill>
-                <a:latin typeface="맑은 고딕"/>
-                <a:ea typeface="맑은 고딕"/>
-              </a:rPr>
-              <a:t/>
-            </a:r>
-            <a:r>
-              <a:rPr lang="ko-KR" altLang="en-US" sz="1100" dirty="0">
-                <a:solidFill>
-                  <a:srgbClr val="1C1C1E"/>
-                </a:solidFill>
-                <a:latin typeface="맑은 고딕"/>
-                <a:ea typeface="맑은 고딕"/>
-              </a:rPr>
-              <a:t/>
-            </a:r>
-            <a:r>
-              <a:rPr sz="1100" b="0" dirty="0">
-                <a:solidFill>
-                  <a:srgbClr val="1C1C1E"/>
-                </a:solidFill>
-                <a:latin typeface="맑은 고딕"/>
-                <a:ea typeface="맑은 고딕"/>
-              </a:rPr>
-              <a:t/>
-            </a:r>
-            <a:r>
-              <a:rPr sz="1100" b="0" dirty="0" err="1">
-                <a:solidFill>
-                  <a:srgbClr val="1C1C1E"/>
-                </a:solidFill>
-                <a:latin typeface="맑은 고딕"/>
-                <a:ea typeface="맑은 고딕"/>
-              </a:rPr>
-              <a:t/>
-            </a:r>
-            <a:r>
-              <a:rPr sz="1100" b="0" dirty="0">
-                <a:solidFill>
-                  <a:srgbClr val="1C1C1E"/>
-                </a:solidFill>
-                <a:latin typeface="맑은 고딕"/>
-                <a:ea typeface="맑은 고딕"/>
-              </a:rPr>
-              <a:t/>
-            </a:r>
-            <a:r>
-              <a:rPr sz="1100" b="0" dirty="0" err="1">
-                <a:solidFill>
-                  <a:srgbClr val="1C1C1E"/>
-                </a:solidFill>
-                <a:latin typeface="맑은 고딕"/>
-                <a:ea typeface="맑은 고딕"/>
-              </a:rPr>
-              <a:t/>
-            </a:r>
-            <a:r>
-              <a:rPr sz="1100" b="0" dirty="0">
-                <a:solidFill>
-                  <a:srgbClr val="1C1C1E"/>
-                </a:solidFill>
-                <a:latin typeface="맑은 고딕"/>
-                <a:ea typeface="맑은 고딕"/>
-              </a:rPr>
-              <a:t/>
-            </a:r>
-            <a:r>
-              <a:rPr sz="1100" b="0" dirty="0" err="1">
-                <a:solidFill>
-                  <a:srgbClr val="1C1C1E"/>
-                </a:solidFill>
-                <a:latin typeface="맑은 고딕"/>
-                <a:ea typeface="맑은 고딕"/>
-              </a:rPr>
-              <a:t/>
-            </a:r>
-            <a:r>
-              <a:rPr sz="1100" b="0" dirty="0">
-                <a:solidFill>
-                  <a:srgbClr val="1C1C1E"/>
-                </a:solidFill>
-                <a:latin typeface="맑은 고딕"/>
-                <a:ea typeface="맑은 고딕"/>
-              </a:rPr>
-              <a:t/>
-            </a:r>
-            <a:r>
-              <a:rPr sz="1100" b="0" dirty="0" err="1">
-                <a:solidFill>
-                  <a:srgbClr val="1C1C1E"/>
-                </a:solidFill>
-                <a:latin typeface="맑은 고딕"/>
-                <a:ea typeface="맑은 고딕"/>
-              </a:rPr>
-              <a:t/>
-            </a:r>
-            <a:r>
-              <a:rPr sz="1100" b="0" dirty="0">
-                <a:solidFill>
-                  <a:srgbClr val="1C1C1E"/>
-                </a:solidFill>
-                <a:latin typeface="맑은 고딕"/>
-                <a:ea typeface="맑은 고딕"/>
-              </a:rPr>
-              <a:t/>
-            </a:r>
-            <a:r>
-              <a:rPr sz="1100" b="0" dirty="0" err="1">
-                <a:solidFill>
-                  <a:srgbClr val="1C1C1E"/>
-                </a:solidFill>
-                <a:latin typeface="맑은 고딕"/>
-                <a:ea typeface="맑은 고딕"/>
-              </a:rPr>
-              <a:t/>
-            </a:r>
-            <a:r>
-              <a:rPr sz="1100" b="0" dirty="0">
-                <a:solidFill>
-                  <a:srgbClr val="1C1C1E"/>
-                </a:solidFill>
-                <a:latin typeface="맑은 고딕"/>
-                <a:ea typeface="맑은 고딕"/>
-              </a:rPr>
-              <a:t/>
-            </a:r>
-            <a:r>
-              <a:rPr sz="1100" b="0" dirty="0" err="1">
-                <a:solidFill>
-                  <a:srgbClr val="1C1C1E"/>
-                </a:solidFill>
-                <a:latin typeface="맑은 고딕"/>
-                <a:ea typeface="맑은 고딕"/>
-              </a:rPr>
-              <a:t/>
-            </a:r>
-            <a:r>
-              <a:rPr sz="1100" b="0" dirty="0">
-                <a:solidFill>
-                  <a:srgbClr val="1C1C1E"/>
-                </a:solidFill>
-                <a:latin typeface="맑은 고딕"/>
-                <a:ea typeface="맑은 고딕"/>
-              </a:rPr>
-              <a:t/>
-            </a:r>
-            <a:r>
-              <a:rPr sz="1100" b="0" dirty="0" err="1">
-                <a:solidFill>
-                  <a:srgbClr val="1C1C1E"/>
-                </a:solidFill>
-                <a:latin typeface="맑은 고딕"/>
-                <a:ea typeface="맑은 고딕"/>
-              </a:rPr>
-              <a:t/>
-            </a:r>
-            <a:r>
-              <a:rPr sz="1100" b="0" dirty="0">
-                <a:solidFill>
-                  <a:srgbClr val="1C1C1E"/>
-                </a:solidFill>
-                <a:latin typeface="맑은 고딕"/>
-                <a:ea typeface="맑은 고딕"/>
-              </a:rPr>
-              <a:t/>
-            </a:r>
-            <a:r>
-              <a:rPr sz="1100" b="0" dirty="0" err="1">
-                <a:solidFill>
-                  <a:srgbClr val="1C1C1E"/>
-                </a:solidFill>
-                <a:latin typeface="맑은 고딕"/>
-                <a:ea typeface="맑은 고딕"/>
-              </a:rPr>
-              <a:t/>
-            </a:r>
-            <a:r>
-              <a:rPr sz="1100" b="0" dirty="0">
-                <a:solidFill>
-                  <a:srgbClr val="1C1C1E"/>
-                </a:solidFill>
-                <a:latin typeface="맑은 고딕"/>
-                <a:ea typeface="맑은 고딕"/>
-              </a:rPr>
-              <a:t/>
-            </a:r>
-            <a:r>
-              <a:rPr lang="ko-KR" altLang="en-US" sz="1100" b="0" dirty="0" err="1">
-                <a:solidFill>
-                  <a:srgbClr val="1C1C1E"/>
-                </a:solidFill>
-                <a:latin typeface="맑은 고딕"/>
-                <a:ea typeface="맑은 고딕"/>
-              </a:rPr>
-              <a:t/>
-            </a:r>
-            <a:r>
-              <a:rPr lang="ko-KR" altLang="en-US" sz="1100" b="0" dirty="0">
-                <a:solidFill>
-                  <a:srgbClr val="1C1C1E"/>
-                </a:solidFill>
-                <a:latin typeface="맑은 고딕"/>
-                <a:ea typeface="맑은 고딕"/>
-              </a:rPr>
-              <a:t/>
-            </a:r>
-            <a:r>
-              <a:rPr lang="en-US" altLang="ko-KR" sz="1100" b="0" dirty="0">
-                <a:solidFill>
-                  <a:srgbClr val="1C1C1E"/>
-                </a:solidFill>
-                <a:latin typeface="맑은 고딕"/>
-                <a:ea typeface="맑은 고딕"/>
-              </a:rPr>
-              <a:t/>
-            </a:r>
-            <a:endParaRPr sz="1100" b="0" dirty="0">
-              <a:solidFill>
-                <a:srgbClr val="1C1C1E"/>
-              </a:solidFill>
-              <a:latin typeface="맑은 고딕"/>
-              <a:ea typeface="맑은 고딕"/>
-            </a:endParaRPr>
           </a:p>
         </p:txBody>
       </p:sp>
@@ -13607,265 +13039,48 @@
               </a:rPr>
               <a:t>"주어진 자원이 체계적으로, 필요한 곳으로 배분되고 있는가" — 이를 데이터로 검증하고 개선하는 것이 본 계획의 목표</a:t>
             </a:r>
-            <a:r>
-              <a:rPr lang="ko-KR" altLang="en-US" sz="1500" b="1" dirty="0">
-                <a:solidFill>
-                  <a:srgbClr val="000000"/>
-                </a:solidFill>
-                <a:latin typeface="맑은 고딕"/>
-                <a:ea typeface="맑은 고딕"/>
-              </a:rPr>
-              <a:t/>
-            </a:r>
-            <a:r>
-              <a:rPr sz="1500" b="1" dirty="0">
-                <a:solidFill>
-                  <a:srgbClr val="000000"/>
-                </a:solidFill>
-                <a:latin typeface="맑은 고딕"/>
-                <a:ea typeface="맑은 고딕"/>
-              </a:rPr>
-              <a:t/>
-            </a:r>
-            <a:r>
-              <a:rPr sz="1500" b="1" dirty="0" err="1">
-                <a:solidFill>
-                  <a:srgbClr val="000000"/>
-                </a:solidFill>
-                <a:latin typeface="맑은 고딕"/>
-                <a:ea typeface="맑은 고딕"/>
-              </a:rPr>
-              <a:t/>
-            </a:r>
-            <a:r>
-              <a:rPr sz="1500" b="1" dirty="0">
-                <a:solidFill>
-                  <a:srgbClr val="000000"/>
-                </a:solidFill>
-                <a:latin typeface="맑은 고딕"/>
-                <a:ea typeface="맑은 고딕"/>
-              </a:rPr>
-              <a:t/>
-            </a:r>
-            <a:r>
-              <a:rPr sz="1500" b="1" dirty="0" err="1">
-                <a:solidFill>
-                  <a:srgbClr val="000000"/>
-                </a:solidFill>
-                <a:latin typeface="맑은 고딕"/>
-                <a:ea typeface="맑은 고딕"/>
-              </a:rPr>
-              <a:t/>
-            </a:r>
-            <a:r>
-              <a:rPr sz="1500" b="1" dirty="0">
-                <a:solidFill>
-                  <a:srgbClr val="000000"/>
-                </a:solidFill>
-                <a:latin typeface="맑은 고딕"/>
-                <a:ea typeface="맑은 고딕"/>
-              </a:rPr>
-              <a:t/>
-            </a:r>
-            <a:r>
-              <a:rPr sz="1500" b="1" dirty="0" err="1">
-                <a:solidFill>
-                  <a:srgbClr val="000000"/>
-                </a:solidFill>
-                <a:latin typeface="맑은 고딕"/>
-                <a:ea typeface="맑은 고딕"/>
-              </a:rPr>
-              <a:t/>
-            </a:r>
-            <a:r>
-              <a:rPr sz="1500" b="1" dirty="0">
-                <a:solidFill>
-                  <a:srgbClr val="000000"/>
-                </a:solidFill>
-                <a:latin typeface="맑은 고딕"/>
-                <a:ea typeface="맑은 고딕"/>
-              </a:rPr>
-              <a:t/>
-            </a:r>
-            <a:r>
-              <a:rPr sz="1500" b="1" dirty="0" err="1">
-                <a:solidFill>
-                  <a:srgbClr val="000000"/>
-                </a:solidFill>
-                <a:latin typeface="맑은 고딕"/>
-                <a:ea typeface="맑은 고딕"/>
-              </a:rPr>
-              <a:t/>
-            </a:r>
-            <a:r>
-              <a:rPr sz="1500" b="1" dirty="0">
-                <a:solidFill>
-                  <a:srgbClr val="000000"/>
-                </a:solidFill>
-                <a:latin typeface="맑은 고딕"/>
-                <a:ea typeface="맑은 고딕"/>
-              </a:rPr>
-              <a:t/>
-            </a:r>
-            <a:r>
-              <a:rPr sz="1500" b="1" dirty="0" err="1">
-                <a:solidFill>
-                  <a:srgbClr val="000000"/>
-                </a:solidFill>
-                <a:latin typeface="맑은 고딕"/>
-                <a:ea typeface="맑은 고딕"/>
-              </a:rPr>
-              <a:t/>
-            </a:r>
-            <a:r>
-              <a:rPr sz="1500" b="1" dirty="0">
-                <a:solidFill>
-                  <a:srgbClr val="000000"/>
-                </a:solidFill>
-                <a:latin typeface="맑은 고딕"/>
-                <a:ea typeface="맑은 고딕"/>
-              </a:rPr>
-              <a:t/>
-            </a:r>
-            <a:r>
-              <a:rPr sz="1500" b="1" dirty="0" err="1">
-                <a:solidFill>
-                  <a:srgbClr val="000000"/>
-                </a:solidFill>
-                <a:latin typeface="맑은 고딕"/>
-                <a:ea typeface="맑은 고딕"/>
-              </a:rPr>
-              <a:t/>
-            </a:r>
-            <a:r>
-              <a:rPr sz="1500" b="1" dirty="0">
-                <a:solidFill>
-                  <a:srgbClr val="000000"/>
-                </a:solidFill>
-                <a:latin typeface="맑은 고딕"/>
-                <a:ea typeface="맑은 고딕"/>
-              </a:rPr>
-              <a:t/>
-            </a:r>
-            <a:r>
-              <a:rPr sz="1500" b="1" dirty="0" err="1">
-                <a:solidFill>
-                  <a:srgbClr val="000000"/>
-                </a:solidFill>
-                <a:latin typeface="맑은 고딕"/>
-                <a:ea typeface="맑은 고딕"/>
-              </a:rPr>
-              <a:t/>
-            </a:r>
-            <a:r>
-              <a:rPr sz="1500" b="1" dirty="0">
-                <a:solidFill>
-                  <a:srgbClr val="000000"/>
-                </a:solidFill>
-                <a:latin typeface="맑은 고딕"/>
-                <a:ea typeface="맑은 고딕"/>
-              </a:rPr>
-              <a:t/>
-            </a:r>
-            <a:r>
-              <a:rPr sz="1500" b="1" dirty="0" err="1">
-                <a:solidFill>
-                  <a:srgbClr val="000000"/>
-                </a:solidFill>
-                <a:latin typeface="맑은 고딕"/>
-                <a:ea typeface="맑은 고딕"/>
-              </a:rPr>
-              <a:t/>
-            </a:r>
-            <a:r>
-              <a:rPr lang="ko-KR" altLang="en-US" sz="1500" b="1" dirty="0">
-                <a:solidFill>
-                  <a:srgbClr val="000000"/>
-                </a:solidFill>
-                <a:latin typeface="맑은 고딕"/>
-                <a:ea typeface="맑은 고딕"/>
-              </a:rPr>
-              <a:t/>
-            </a:r>
-            <a:r>
-              <a:rPr lang="en-US" altLang="ko-KR" sz="1500" b="1" dirty="0">
-                <a:solidFill>
-                  <a:srgbClr val="000000"/>
-                </a:solidFill>
-                <a:latin typeface="맑은 고딕"/>
-                <a:ea typeface="맑은 고딕"/>
-              </a:rPr>
-              <a:t/>
-            </a:r>
-            <a:r>
-              <a:rPr lang="ko-KR" altLang="en-US" sz="1500" b="1" dirty="0">
-                <a:solidFill>
-                  <a:srgbClr val="000000"/>
-                </a:solidFill>
-                <a:latin typeface="맑은 고딕"/>
-                <a:ea typeface="맑은 고딕"/>
-              </a:rPr>
-              <a:t/>
-            </a:r>
-            <a:r>
-              <a:rPr sz="1500" b="1" dirty="0">
-                <a:solidFill>
-                  <a:srgbClr val="000000"/>
-                </a:solidFill>
-                <a:latin typeface="맑은 고딕"/>
-                <a:ea typeface="맑은 고딕"/>
-              </a:rPr>
-              <a:t/>
-            </a:r>
-            <a:r>
-              <a:rPr sz="1500" b="1" dirty="0" err="1">
-                <a:solidFill>
-                  <a:srgbClr val="000000"/>
-                </a:solidFill>
-                <a:latin typeface="맑은 고딕"/>
-                <a:ea typeface="맑은 고딕"/>
-              </a:rPr>
-              <a:t/>
-            </a:r>
-            <a:r>
-              <a:rPr sz="1500" b="1" dirty="0">
-                <a:solidFill>
-                  <a:srgbClr val="000000"/>
-                </a:solidFill>
-                <a:latin typeface="맑은 고딕"/>
-                <a:ea typeface="맑은 고딕"/>
-              </a:rPr>
-              <a:t/>
-            </a:r>
-            <a:r>
-              <a:rPr lang="ko-KR" altLang="en-US" sz="1500" b="1" dirty="0">
-                <a:solidFill>
-                  <a:srgbClr val="000000"/>
-                </a:solidFill>
-                <a:latin typeface="맑은 고딕"/>
-                <a:ea typeface="맑은 고딕"/>
-              </a:rPr>
-              <a:t/>
-            </a:r>
-            <a:r>
-              <a:rPr sz="1500" b="1" dirty="0" err="1">
-                <a:solidFill>
-                  <a:srgbClr val="000000"/>
-                </a:solidFill>
-                <a:latin typeface="맑은 고딕"/>
-                <a:ea typeface="맑은 고딕"/>
-              </a:rPr>
-              <a:t/>
-            </a:r>
-            <a:r>
-              <a:rPr sz="1500" b="1" dirty="0">
-                <a:solidFill>
-                  <a:srgbClr val="000000"/>
-                </a:solidFill>
-                <a:latin typeface="맑은 고딕"/>
-                <a:ea typeface="맑은 고딕"/>
-              </a:rPr>
-              <a:t/>
+          </a:p>
+        </p:txBody>
+      </p:sp>
+      <p:sp>
+        <p:nvSpPr>
+          <p:cNvPr id="18" name="TextBox 17"/>
+          <p:cNvSpPr txBox="1"/>
+          <p:nvPr/>
+        </p:nvSpPr>
+        <p:spPr>
+          <a:xfrm>
+            <a:off x="502920" y="274320"/>
+            <a:ext cx="914400" cy="685800"/>
+          </a:xfrm>
+          <a:prstGeom prst="rect">
+            <a:avLst/>
+          </a:prstGeom>
+          <a:noFill/>
+        </p:spPr>
+        <p:txBody>
+          <a:bodyPr wrap="square" anchor="ctr">
+            <a:spAutoFit/>
+          </a:bodyPr>
+          <a:lstStyle/>
+          <a:p>
+            <a:pPr>
+              <a:lnSpc>
+                <a:spcPct val="114000"/>
+              </a:lnSpc>
+              <a:spcAft>
+                <a:spcPts val="0"/>
+              </a:spcAft>
+            </a:pPr>
+            <a:r>
+              <a:rPr sz="1500" b="1">
+                <a:solidFill>
+                  <a:srgbClr val="8A8F95"/>
+                </a:solidFill>
+                <a:latin typeface="맑은 고딕"/>
+                <a:ea typeface="맑은 고딕"/>
+              </a:rPr>
+              <a:t>Ⅰ-1</a:t>
             </a:r>
           </a:p>
         </p:txBody>
@@ -13942,75 +13157,14 @@
       </p:sp>
       <p:sp>
         <p:nvSpPr>
-          <p:cNvPr id="3" name="Rounded Rectangle 2"/>
-          <p:cNvSpPr/>
-          <p:nvPr/>
-        </p:nvSpPr>
-        <p:spPr>
-          <a:xfrm>
-            <a:off x="606475" y="579043"/>
-            <a:ext cx="103784" cy="103784"/>
-          </a:xfrm>
-          <a:prstGeom prst="roundRect">
-            <a:avLst>
-              <a:gd name="adj" fmla="val 50000"/>
-            </a:avLst>
-          </a:prstGeom>
-          <a:gradFill rotWithShape="1">
-            <a:gsLst>
-              <a:gs pos="0">
-                <a:srgbClr val="3A3F45"/>
-              </a:gs>
-              <a:gs pos="100000">
-                <a:srgbClr val="73787E"/>
-              </a:gs>
-            </a:gsLst>
-            <a:lin ang="18900000" scaled="0"/>
-          </a:gradFill>
-          <a:ln>
-            <a:noFill/>
-          </a:ln>
-          <a:effectLst>
-            <a:outerShdw blurRad="109728" dist="36576" dir="5400000" rotWithShape="0">
-              <a:srgbClr val="000000">
-                <a:alpha val="35000"/>
-              </a:srgbClr>
-            </a:outerShdw>
-          </a:effectLst>
-        </p:spPr>
-        <p:style>
-          <a:lnRef idx="1">
-            <a:schemeClr val="accent1"/>
-          </a:lnRef>
-          <a:fillRef idx="3">
-            <a:schemeClr val="accent1"/>
-          </a:fillRef>
-          <a:effectRef idx="2">
-            <a:schemeClr val="accent1"/>
-          </a:effectRef>
-          <a:fontRef idx="minor">
-            <a:schemeClr val="lt1"/>
-          </a:fontRef>
-        </p:style>
-        <p:txBody>
-          <a:bodyPr rtlCol="0" anchor="ctr"/>
-          <a:lstStyle/>
-          <a:p>
-            <a:pPr algn="ctr"/>
-            <a:endParaRPr/>
-          </a:p>
-        </p:txBody>
-      </p:sp>
-      <p:sp>
-        <p:nvSpPr>
           <p:cNvPr id="4" name="TextBox 3"/>
           <p:cNvSpPr txBox="1"/>
           <p:nvPr/>
         </p:nvSpPr>
         <p:spPr>
           <a:xfrm>
-            <a:off x="960120" y="274320"/>
-            <a:ext cx="9692640" cy="685800"/>
+            <a:off x="1417320" y="274320"/>
+            <a:ext cx="9235440" cy="685800"/>
           </a:xfrm>
           <a:prstGeom prst="rect">
             <a:avLst/>
@@ -15324,103 +14478,6 @@
               </a:rPr>
               <a:t>• 판정 기준이 이동시간 파생 지표뿐임</a:t>
             </a:r>
-            <a:r>
-              <a:rPr sz="1150" b="0" dirty="0" err="1">
-                <a:solidFill>
-                  <a:srgbClr val="1C1C1E"/>
-                </a:solidFill>
-                <a:latin typeface="맑은 고딕"/>
-                <a:ea typeface="맑은 고딕"/>
-              </a:rPr>
-              <a:t/>
-            </a:r>
-            <a:r>
-              <a:rPr sz="1150" b="0" dirty="0">
-                <a:solidFill>
-                  <a:srgbClr val="1C1C1E"/>
-                </a:solidFill>
-                <a:latin typeface="맑은 고딕"/>
-                <a:ea typeface="맑은 고딕"/>
-              </a:rPr>
-              <a:t/>
-            </a:r>
-            <a:r>
-              <a:rPr sz="1150" b="0" dirty="0" err="1">
-                <a:solidFill>
-                  <a:srgbClr val="1C1C1E"/>
-                </a:solidFill>
-                <a:latin typeface="맑은 고딕"/>
-                <a:ea typeface="맑은 고딕"/>
-              </a:rPr>
-              <a:t/>
-            </a:r>
-            <a:r>
-              <a:rPr sz="1150" b="0" dirty="0">
-                <a:solidFill>
-                  <a:srgbClr val="1C1C1E"/>
-                </a:solidFill>
-                <a:latin typeface="맑은 고딕"/>
-                <a:ea typeface="맑은 고딕"/>
-              </a:rPr>
-              <a:t/>
-            </a:r>
-            <a:r>
-              <a:rPr sz="1150" b="0" dirty="0" err="1">
-                <a:solidFill>
-                  <a:srgbClr val="1C1C1E"/>
-                </a:solidFill>
-                <a:latin typeface="맑은 고딕"/>
-                <a:ea typeface="맑은 고딕"/>
-              </a:rPr>
-              <a:t/>
-            </a:r>
-            <a:r>
-              <a:rPr sz="1150" b="0" dirty="0">
-                <a:solidFill>
-                  <a:srgbClr val="1C1C1E"/>
-                </a:solidFill>
-                <a:latin typeface="맑은 고딕"/>
-                <a:ea typeface="맑은 고딕"/>
-              </a:rPr>
-              <a:t/>
-            </a:r>
-            <a:r>
-              <a:rPr sz="1150" b="0" dirty="0" err="1">
-                <a:solidFill>
-                  <a:srgbClr val="1C1C1E"/>
-                </a:solidFill>
-                <a:latin typeface="맑은 고딕"/>
-                <a:ea typeface="맑은 고딕"/>
-              </a:rPr>
-              <a:t/>
-            </a:r>
-            <a:r>
-              <a:rPr sz="1150" b="0" dirty="0">
-                <a:solidFill>
-                  <a:srgbClr val="1C1C1E"/>
-                </a:solidFill>
-                <a:latin typeface="맑은 고딕"/>
-                <a:ea typeface="맑은 고딕"/>
-              </a:rPr>
-              <a:t/>
-            </a:r>
-            <a:r>
-              <a:rPr sz="1150" b="0" dirty="0" err="1">
-                <a:solidFill>
-                  <a:srgbClr val="1C1C1E"/>
-                </a:solidFill>
-                <a:latin typeface="맑은 고딕"/>
-                <a:ea typeface="맑은 고딕"/>
-              </a:rPr>
-              <a:t/>
-            </a:r>
-            <a:endParaRPr sz="1150" b="0" dirty="0">
-              <a:solidFill>
-                <a:srgbClr val="1C1C1E"/>
-              </a:solidFill>
-              <a:latin typeface="맑은 고딕"/>
-              <a:ea typeface="맑은 고딕"/>
-            </a:endParaRPr>
           </a:p>
           <a:p>
             <a:pPr marL="160020" indent="-160020">
@@ -15441,246 +14498,6 @@
               </a:rPr>
               <a:t>• 관내 분만 인프라가 소멸해도 "옆 도시로 60분 내 이동 가능"이면 취약지가 아니게 되는 구조 아닌가</a:t>
             </a:r>
-            <a:r>
-              <a:rPr sz="1150" b="0" dirty="0" err="1">
-                <a:solidFill>
-                  <a:srgbClr val="1C1C1E"/>
-                </a:solidFill>
-                <a:latin typeface="맑은 고딕"/>
-                <a:ea typeface="맑은 고딕"/>
-              </a:rPr>
-              <a:t/>
-            </a:r>
-            <a:r>
-              <a:rPr sz="1150" b="0" dirty="0">
-                <a:solidFill>
-                  <a:srgbClr val="1C1C1E"/>
-                </a:solidFill>
-                <a:latin typeface="맑은 고딕"/>
-                <a:ea typeface="맑은 고딕"/>
-              </a:rPr>
-              <a:t/>
-            </a:r>
-            <a:r>
-              <a:rPr sz="1150" b="0" dirty="0" err="1">
-                <a:solidFill>
-                  <a:srgbClr val="1C1C1E"/>
-                </a:solidFill>
-                <a:latin typeface="맑은 고딕"/>
-                <a:ea typeface="맑은 고딕"/>
-              </a:rPr>
-              <a:t/>
-            </a:r>
-            <a:r>
-              <a:rPr sz="1150" b="0" dirty="0">
-                <a:solidFill>
-                  <a:srgbClr val="1C1C1E"/>
-                </a:solidFill>
-                <a:latin typeface="맑은 고딕"/>
-                <a:ea typeface="맑은 고딕"/>
-              </a:rPr>
-              <a:t/>
-            </a:r>
-            <a:r>
-              <a:rPr sz="1150" b="0" dirty="0" err="1">
-                <a:solidFill>
-                  <a:srgbClr val="1C1C1E"/>
-                </a:solidFill>
-                <a:latin typeface="맑은 고딕"/>
-                <a:ea typeface="맑은 고딕"/>
-              </a:rPr>
-              <a:t/>
-            </a:r>
-            <a:r>
-              <a:rPr sz="1150" b="0" dirty="0">
-                <a:solidFill>
-                  <a:srgbClr val="1C1C1E"/>
-                </a:solidFill>
-                <a:latin typeface="맑은 고딕"/>
-                <a:ea typeface="맑은 고딕"/>
-              </a:rPr>
-              <a:t/>
-            </a:r>
-            <a:r>
-              <a:rPr sz="1150" b="0" dirty="0" err="1">
-                <a:solidFill>
-                  <a:srgbClr val="1C1C1E"/>
-                </a:solidFill>
-                <a:latin typeface="맑은 고딕"/>
-                <a:ea typeface="맑은 고딕"/>
-              </a:rPr>
-              <a:t/>
-            </a:r>
-            <a:r>
-              <a:rPr sz="1150" b="0" dirty="0">
-                <a:solidFill>
-                  <a:srgbClr val="1C1C1E"/>
-                </a:solidFill>
-                <a:latin typeface="맑은 고딕"/>
-                <a:ea typeface="맑은 고딕"/>
-              </a:rPr>
-              <a:t/>
-            </a:r>
-            <a:r>
-              <a:rPr sz="1150" b="0" dirty="0" err="1">
-                <a:solidFill>
-                  <a:srgbClr val="1C1C1E"/>
-                </a:solidFill>
-                <a:latin typeface="맑은 고딕"/>
-                <a:ea typeface="맑은 고딕"/>
-              </a:rPr>
-              <a:t/>
-            </a:r>
-            <a:r>
-              <a:rPr sz="1150" b="0" dirty="0">
-                <a:solidFill>
-                  <a:srgbClr val="1C1C1E"/>
-                </a:solidFill>
-                <a:latin typeface="맑은 고딕"/>
-                <a:ea typeface="맑은 고딕"/>
-              </a:rPr>
-              <a:t/>
-            </a:r>
-            <a:r>
-              <a:rPr sz="1150" b="0" dirty="0" err="1">
-                <a:solidFill>
-                  <a:srgbClr val="1C1C1E"/>
-                </a:solidFill>
-                <a:latin typeface="맑은 고딕"/>
-                <a:ea typeface="맑은 고딕"/>
-              </a:rPr>
-              <a:t/>
-            </a:r>
-            <a:r>
-              <a:rPr sz="1150" b="0" dirty="0">
-                <a:solidFill>
-                  <a:srgbClr val="1C1C1E"/>
-                </a:solidFill>
-                <a:latin typeface="맑은 고딕"/>
-                <a:ea typeface="맑은 고딕"/>
-              </a:rPr>
-              <a:t/>
-            </a:r>
-            <a:r>
-              <a:rPr sz="1150" b="0" dirty="0" err="1">
-                <a:solidFill>
-                  <a:srgbClr val="1C1C1E"/>
-                </a:solidFill>
-                <a:latin typeface="맑은 고딕"/>
-                <a:ea typeface="맑은 고딕"/>
-              </a:rPr>
-              <a:t/>
-            </a:r>
-            <a:r>
-              <a:rPr sz="1150" b="0" dirty="0">
-                <a:solidFill>
-                  <a:srgbClr val="1C1C1E"/>
-                </a:solidFill>
-                <a:latin typeface="맑은 고딕"/>
-                <a:ea typeface="맑은 고딕"/>
-              </a:rPr>
-              <a:t/>
-            </a:r>
-            <a:r>
-              <a:rPr sz="1150" b="0" dirty="0" err="1">
-                <a:solidFill>
-                  <a:srgbClr val="1C1C1E"/>
-                </a:solidFill>
-                <a:latin typeface="맑은 고딕"/>
-                <a:ea typeface="맑은 고딕"/>
-              </a:rPr>
-              <a:t/>
-            </a:r>
-            <a:r>
-              <a:rPr sz="1150" b="0" dirty="0">
-                <a:solidFill>
-                  <a:srgbClr val="1C1C1E"/>
-                </a:solidFill>
-                <a:latin typeface="맑은 고딕"/>
-                <a:ea typeface="맑은 고딕"/>
-              </a:rPr>
-              <a:t/>
-            </a:r>
-            <a:r>
-              <a:rPr sz="1150" b="0" dirty="0" err="1">
-                <a:solidFill>
-                  <a:srgbClr val="1C1C1E"/>
-                </a:solidFill>
-                <a:latin typeface="맑은 고딕"/>
-                <a:ea typeface="맑은 고딕"/>
-              </a:rPr>
-              <a:t/>
-            </a:r>
-            <a:r>
-              <a:rPr sz="1150" b="0" dirty="0">
-                <a:solidFill>
-                  <a:srgbClr val="1C1C1E"/>
-                </a:solidFill>
-                <a:latin typeface="맑은 고딕"/>
-                <a:ea typeface="맑은 고딕"/>
-              </a:rPr>
-              <a:t/>
-            </a:r>
-            <a:r>
-              <a:rPr sz="1150" b="0" dirty="0" err="1">
-                <a:solidFill>
-                  <a:srgbClr val="1C1C1E"/>
-                </a:solidFill>
-                <a:latin typeface="맑은 고딕"/>
-                <a:ea typeface="맑은 고딕"/>
-              </a:rPr>
-              <a:t/>
-            </a:r>
-            <a:r>
-              <a:rPr sz="1150" b="0" dirty="0">
-                <a:solidFill>
-                  <a:srgbClr val="1C1C1E"/>
-                </a:solidFill>
-                <a:latin typeface="맑은 고딕"/>
-                <a:ea typeface="맑은 고딕"/>
-              </a:rPr>
-              <a:t/>
-            </a:r>
-            <a:r>
-              <a:rPr sz="1150" b="0" dirty="0" err="1">
-                <a:solidFill>
-                  <a:srgbClr val="1C1C1E"/>
-                </a:solidFill>
-                <a:latin typeface="맑은 고딕"/>
-                <a:ea typeface="맑은 고딕"/>
-              </a:rPr>
-              <a:t/>
-            </a:r>
-            <a:r>
-              <a:rPr sz="1150" b="0" dirty="0">
-                <a:solidFill>
-                  <a:srgbClr val="1C1C1E"/>
-                </a:solidFill>
-                <a:latin typeface="맑은 고딕"/>
-                <a:ea typeface="맑은 고딕"/>
-              </a:rPr>
-              <a:t/>
-            </a:r>
-            <a:r>
-              <a:rPr sz="1150" b="0" dirty="0" err="1">
-                <a:solidFill>
-                  <a:srgbClr val="1C1C1E"/>
-                </a:solidFill>
-                <a:latin typeface="맑은 고딕"/>
-                <a:ea typeface="맑은 고딕"/>
-              </a:rPr>
-              <a:t/>
-            </a:r>
-            <a:r>
-              <a:rPr sz="1150" b="0" dirty="0">
-                <a:solidFill>
-                  <a:srgbClr val="1C1C1E"/>
-                </a:solidFill>
-                <a:latin typeface="맑은 고딕"/>
-                <a:ea typeface="맑은 고딕"/>
-              </a:rPr>
-              <a:t/>
-            </a:r>
           </a:p>
           <a:p>
             <a:pPr>
@@ -15701,123 +14518,6 @@
               </a:rPr>
               <a:t>→ 기준이 구조적으로 놓치는 지역이 있는지 검증</a:t>
             </a:r>
-            <a:r>
-              <a:rPr sz="1150" b="0" dirty="0" err="1">
-                <a:solidFill>
-                  <a:srgbClr val="1C1C1E"/>
-                </a:solidFill>
-                <a:latin typeface="맑은 고딕"/>
-                <a:ea typeface="맑은 고딕"/>
-              </a:rPr>
-              <a:t/>
-            </a:r>
-            <a:r>
-              <a:rPr sz="1150" b="0" dirty="0">
-                <a:solidFill>
-                  <a:srgbClr val="1C1C1E"/>
-                </a:solidFill>
-                <a:latin typeface="맑은 고딕"/>
-                <a:ea typeface="맑은 고딕"/>
-              </a:rPr>
-              <a:t/>
-            </a:r>
-            <a:r>
-              <a:rPr sz="1150" b="0" dirty="0" err="1">
-                <a:solidFill>
-                  <a:srgbClr val="1C1C1E"/>
-                </a:solidFill>
-                <a:latin typeface="맑은 고딕"/>
-                <a:ea typeface="맑은 고딕"/>
-              </a:rPr>
-              <a:t/>
-            </a:r>
-            <a:r>
-              <a:rPr sz="1150" b="0" dirty="0">
-                <a:solidFill>
-                  <a:srgbClr val="1C1C1E"/>
-                </a:solidFill>
-                <a:latin typeface="맑은 고딕"/>
-                <a:ea typeface="맑은 고딕"/>
-              </a:rPr>
-              <a:t/>
-            </a:r>
-            <a:r>
-              <a:rPr sz="1150" b="0" dirty="0" err="1">
-                <a:solidFill>
-                  <a:srgbClr val="1C1C1E"/>
-                </a:solidFill>
-                <a:latin typeface="맑은 고딕"/>
-                <a:ea typeface="맑은 고딕"/>
-              </a:rPr>
-              <a:t/>
-            </a:r>
-            <a:r>
-              <a:rPr sz="1150" b="0" dirty="0">
-                <a:solidFill>
-                  <a:srgbClr val="1C1C1E"/>
-                </a:solidFill>
-                <a:latin typeface="맑은 고딕"/>
-                <a:ea typeface="맑은 고딕"/>
-              </a:rPr>
-              <a:t/>
-            </a:r>
-            <a:r>
-              <a:rPr sz="1150" b="0" dirty="0" err="1">
-                <a:solidFill>
-                  <a:srgbClr val="1C1C1E"/>
-                </a:solidFill>
-                <a:latin typeface="맑은 고딕"/>
-                <a:ea typeface="맑은 고딕"/>
-              </a:rPr>
-              <a:t/>
-            </a:r>
-            <a:r>
-              <a:rPr sz="1150" b="0" dirty="0">
-                <a:solidFill>
-                  <a:srgbClr val="1C1C1E"/>
-                </a:solidFill>
-                <a:latin typeface="맑은 고딕"/>
-                <a:ea typeface="맑은 고딕"/>
-              </a:rPr>
-              <a:t/>
-            </a:r>
-            <a:r>
-              <a:rPr sz="1150" b="0" dirty="0" err="1">
-                <a:solidFill>
-                  <a:srgbClr val="1C1C1E"/>
-                </a:solidFill>
-                <a:latin typeface="맑은 고딕"/>
-                <a:ea typeface="맑은 고딕"/>
-              </a:rPr>
-              <a:t/>
-            </a:r>
-            <a:r>
-              <a:rPr sz="1150" b="0" dirty="0">
-                <a:solidFill>
-                  <a:srgbClr val="1C1C1E"/>
-                </a:solidFill>
-                <a:latin typeface="맑은 고딕"/>
-                <a:ea typeface="맑은 고딕"/>
-              </a:rPr>
-              <a:t/>
-            </a:r>
-            <a:r>
-              <a:rPr sz="1150" b="0" dirty="0" err="1">
-                <a:solidFill>
-                  <a:srgbClr val="1C1C1E"/>
-                </a:solidFill>
-                <a:latin typeface="맑은 고딕"/>
-                <a:ea typeface="맑은 고딕"/>
-              </a:rPr>
-              <a:t/>
-            </a:r>
-            <a:endParaRPr sz="1150" b="0" dirty="0">
-              <a:solidFill>
-                <a:srgbClr val="1C1C1E"/>
-              </a:solidFill>
-              <a:latin typeface="맑은 고딕"/>
-              <a:ea typeface="맑은 고딕"/>
-            </a:endParaRPr>
           </a:p>
         </p:txBody>
       </p:sp>
@@ -15983,96 +14683,6 @@
               </a:rPr>
               <a:t>• 시·도 선별 기준은 "예산 규모, 의료 취약성 등 고려"가 전부임</a:t>
             </a:r>
-            <a:r>
-              <a:rPr lang="ko-KR" altLang="en-US" sz="1150" dirty="0">
-                <a:solidFill>
-                  <a:srgbClr val="1C1C1E"/>
-                </a:solidFill>
-                <a:latin typeface="맑은 고딕"/>
-                <a:ea typeface="맑은 고딕"/>
-              </a:rPr>
-              <a:t/>
-            </a:r>
-            <a:r>
-              <a:rPr lang="en-US" altLang="ko-KR" sz="1150" dirty="0">
-                <a:solidFill>
-                  <a:srgbClr val="1C1C1E"/>
-                </a:solidFill>
-                <a:latin typeface="맑은 고딕"/>
-                <a:ea typeface="맑은 고딕"/>
-              </a:rPr>
-              <a:t/>
-            </a:r>
-            <a:r>
-              <a:rPr lang="ko-KR" altLang="en-US" sz="1150" dirty="0">
-                <a:solidFill>
-                  <a:srgbClr val="1C1C1E"/>
-                </a:solidFill>
-                <a:latin typeface="맑은 고딕"/>
-                <a:ea typeface="맑은 고딕"/>
-              </a:rPr>
-              <a:t/>
-            </a:r>
-            <a:r>
-              <a:rPr lang="en-US" altLang="ko-KR" sz="1150" dirty="0">
-                <a:solidFill>
-                  <a:srgbClr val="1C1C1E"/>
-                </a:solidFill>
-                <a:latin typeface="맑은 고딕"/>
-                <a:ea typeface="맑은 고딕"/>
-              </a:rPr>
-              <a:t/>
-            </a:r>
-            <a:r>
-              <a:rPr lang="ko-KR" altLang="en-US" sz="1150" dirty="0">
-                <a:solidFill>
-                  <a:srgbClr val="1C1C1E"/>
-                </a:solidFill>
-                <a:latin typeface="맑은 고딕"/>
-                <a:ea typeface="맑은 고딕"/>
-              </a:rPr>
-              <a:t/>
-            </a:r>
-            <a:r>
-              <a:rPr lang="en-US" altLang="ko-KR" sz="1150" dirty="0">
-                <a:solidFill>
-                  <a:srgbClr val="1C1C1E"/>
-                </a:solidFill>
-                <a:latin typeface="맑은 고딕"/>
-                <a:ea typeface="맑은 고딕"/>
-              </a:rPr>
-              <a:t/>
-            </a:r>
-            <a:r>
-              <a:rPr lang="ko-KR" altLang="en-US" sz="1150" dirty="0">
-                <a:solidFill>
-                  <a:srgbClr val="1C1C1E"/>
-                </a:solidFill>
-                <a:latin typeface="맑은 고딕"/>
-                <a:ea typeface="맑은 고딕"/>
-              </a:rPr>
-              <a:t/>
-            </a:r>
-            <a:r>
-              <a:rPr lang="en-US" altLang="ko-KR" sz="1150" dirty="0">
-                <a:solidFill>
-                  <a:srgbClr val="1C1C1E"/>
-                </a:solidFill>
-                <a:latin typeface="맑은 고딕"/>
-                <a:ea typeface="맑은 고딕"/>
-              </a:rPr>
-              <a:t/>
-            </a:r>
-            <a:r>
-              <a:rPr lang="ko-KR" altLang="en-US" sz="1150" dirty="0">
-                <a:solidFill>
-                  <a:srgbClr val="1C1C1E"/>
-                </a:solidFill>
-                <a:latin typeface="맑은 고딕"/>
-                <a:ea typeface="맑은 고딕"/>
-              </a:rPr>
-              <a:t/>
-            </a:r>
             <a:endParaRPr lang="en-US" sz="1150" b="0" dirty="0">
               <a:solidFill>
                 <a:srgbClr val="1C1C1E"/>
@@ -16100,173 +14710,6 @@
               </a:rPr>
               <a:t>• 지원 심사 배점 100점 중 취약도 항목 0점 — 누구를 먼저 지원할지의 합리적 규칙이 있는가</a:t>
             </a:r>
-            <a:r>
-              <a:rPr sz="1150" b="0" dirty="0" err="1">
-                <a:solidFill>
-                  <a:srgbClr val="1C1C1E"/>
-                </a:solidFill>
-                <a:latin typeface="맑은 고딕"/>
-                <a:ea typeface="맑은 고딕"/>
-              </a:rPr>
-              <a:t/>
-            </a:r>
-            <a:r>
-              <a:rPr sz="1150" b="0" dirty="0">
-                <a:solidFill>
-                  <a:srgbClr val="1C1C1E"/>
-                </a:solidFill>
-                <a:latin typeface="맑은 고딕"/>
-                <a:ea typeface="맑은 고딕"/>
-              </a:rPr>
-              <a:t/>
-            </a:r>
-            <a:r>
-              <a:rPr sz="1150" b="0" dirty="0" err="1">
-                <a:solidFill>
-                  <a:srgbClr val="1C1C1E"/>
-                </a:solidFill>
-                <a:latin typeface="맑은 고딕"/>
-                <a:ea typeface="맑은 고딕"/>
-              </a:rPr>
-              <a:t/>
-            </a:r>
-            <a:r>
-              <a:rPr sz="1150" b="0" dirty="0">
-                <a:solidFill>
-                  <a:srgbClr val="1C1C1E"/>
-                </a:solidFill>
-                <a:latin typeface="맑은 고딕"/>
-                <a:ea typeface="맑은 고딕"/>
-              </a:rPr>
-              <a:t/>
-            </a:r>
-            <a:r>
-              <a:rPr sz="1150" b="0" dirty="0" err="1">
-                <a:solidFill>
-                  <a:srgbClr val="1C1C1E"/>
-                </a:solidFill>
-                <a:latin typeface="맑은 고딕"/>
-                <a:ea typeface="맑은 고딕"/>
-              </a:rPr>
-              <a:t/>
-            </a:r>
-            <a:r>
-              <a:rPr sz="1150" b="0" dirty="0">
-                <a:solidFill>
-                  <a:srgbClr val="1C1C1E"/>
-                </a:solidFill>
-                <a:latin typeface="맑은 고딕"/>
-                <a:ea typeface="맑은 고딕"/>
-              </a:rPr>
-              <a:t/>
-            </a:r>
-            <a:r>
-              <a:rPr sz="1150" b="0" dirty="0" err="1">
-                <a:solidFill>
-                  <a:srgbClr val="1C1C1E"/>
-                </a:solidFill>
-                <a:latin typeface="맑은 고딕"/>
-                <a:ea typeface="맑은 고딕"/>
-              </a:rPr>
-              <a:t/>
-            </a:r>
-            <a:r>
-              <a:rPr sz="1150" b="0" dirty="0">
-                <a:solidFill>
-                  <a:srgbClr val="1C1C1E"/>
-                </a:solidFill>
-                <a:latin typeface="맑은 고딕"/>
-                <a:ea typeface="맑은 고딕"/>
-              </a:rPr>
-              <a:t/>
-            </a:r>
-            <a:r>
-              <a:rPr sz="1150" b="0" dirty="0" err="1">
-                <a:solidFill>
-                  <a:srgbClr val="1C1C1E"/>
-                </a:solidFill>
-                <a:latin typeface="맑은 고딕"/>
-                <a:ea typeface="맑은 고딕"/>
-              </a:rPr>
-              <a:t/>
-            </a:r>
-            <a:r>
-              <a:rPr sz="1150" b="0" dirty="0">
-                <a:solidFill>
-                  <a:srgbClr val="1C1C1E"/>
-                </a:solidFill>
-                <a:latin typeface="맑은 고딕"/>
-                <a:ea typeface="맑은 고딕"/>
-              </a:rPr>
-              <a:t/>
-            </a:r>
-            <a:r>
-              <a:rPr lang="en-US" sz="1150" b="0" dirty="0">
-                <a:solidFill>
-                  <a:srgbClr val="1C1C1E"/>
-                </a:solidFill>
-                <a:latin typeface="맑은 고딕"/>
-                <a:ea typeface="맑은 고딕"/>
-              </a:rPr>
-              <a:t/>
-            </a:r>
-            <a:r>
-              <a:rPr lang="en-US" altLang="ko-KR" sz="1150" dirty="0">
-                <a:solidFill>
-                  <a:srgbClr val="1C1C1E"/>
-                </a:solidFill>
-                <a:latin typeface="맑은 고딕"/>
-                <a:ea typeface="맑은 고딕"/>
-              </a:rPr>
-              <a:t/>
-            </a:r>
-            <a:r>
-              <a:rPr lang="ko-KR" altLang="en-US" sz="1150" dirty="0">
-                <a:solidFill>
-                  <a:srgbClr val="1C1C1E"/>
-                </a:solidFill>
-                <a:latin typeface="맑은 고딕"/>
-                <a:ea typeface="맑은 고딕"/>
-              </a:rPr>
-              <a:t/>
-            </a:r>
-            <a:r>
-              <a:rPr lang="ko-KR" altLang="en-US" sz="1150" dirty="0" err="1">
-                <a:solidFill>
-                  <a:srgbClr val="1C1C1E"/>
-                </a:solidFill>
-                <a:latin typeface="맑은 고딕"/>
-                <a:ea typeface="맑은 고딕"/>
-              </a:rPr>
-              <a:t/>
-            </a:r>
-            <a:r>
-              <a:rPr lang="ko-KR" altLang="en-US" sz="1150" dirty="0">
-                <a:solidFill>
-                  <a:srgbClr val="1C1C1E"/>
-                </a:solidFill>
-                <a:latin typeface="맑은 고딕"/>
-                <a:ea typeface="맑은 고딕"/>
-              </a:rPr>
-              <a:t/>
-            </a:r>
-            <a:r>
-              <a:rPr lang="en-US" altLang="ko-KR" sz="1150" dirty="0">
-                <a:solidFill>
-                  <a:srgbClr val="1C1C1E"/>
-                </a:solidFill>
-                <a:latin typeface="맑은 고딕"/>
-                <a:ea typeface="맑은 고딕"/>
-              </a:rPr>
-              <a:t/>
-            </a:r>
-            <a:endParaRPr sz="1150" b="0" dirty="0">
-              <a:solidFill>
-                <a:srgbClr val="1C1C1E"/>
-              </a:solidFill>
-              <a:latin typeface="맑은 고딕"/>
-              <a:ea typeface="맑은 고딕"/>
-            </a:endParaRPr>
           </a:p>
           <a:p>
             <a:pPr>
@@ -16307,103 +14750,6 @@
               </a:rPr>
               <a:t>→ 현행 배분이 무엇으로 설명되는지 진단</a:t>
             </a:r>
-            <a:r>
-              <a:rPr sz="1150" b="0" dirty="0" err="1">
-                <a:solidFill>
-                  <a:srgbClr val="1C1C1E"/>
-                </a:solidFill>
-                <a:latin typeface="맑은 고딕"/>
-                <a:ea typeface="맑은 고딕"/>
-              </a:rPr>
-              <a:t/>
-            </a:r>
-            <a:r>
-              <a:rPr sz="1150" b="0" dirty="0">
-                <a:solidFill>
-                  <a:srgbClr val="1C1C1E"/>
-                </a:solidFill>
-                <a:latin typeface="맑은 고딕"/>
-                <a:ea typeface="맑은 고딕"/>
-              </a:rPr>
-              <a:t/>
-            </a:r>
-            <a:r>
-              <a:rPr sz="1150" b="0" dirty="0" err="1">
-                <a:solidFill>
-                  <a:srgbClr val="1C1C1E"/>
-                </a:solidFill>
-                <a:latin typeface="맑은 고딕"/>
-                <a:ea typeface="맑은 고딕"/>
-              </a:rPr>
-              <a:t/>
-            </a:r>
-            <a:r>
-              <a:rPr sz="1150" b="0" dirty="0">
-                <a:solidFill>
-                  <a:srgbClr val="1C1C1E"/>
-                </a:solidFill>
-                <a:latin typeface="맑은 고딕"/>
-                <a:ea typeface="맑은 고딕"/>
-              </a:rPr>
-              <a:t/>
-            </a:r>
-            <a:r>
-              <a:rPr sz="1150" b="0" dirty="0" err="1">
-                <a:solidFill>
-                  <a:srgbClr val="1C1C1E"/>
-                </a:solidFill>
-                <a:latin typeface="맑은 고딕"/>
-                <a:ea typeface="맑은 고딕"/>
-              </a:rPr>
-              <a:t/>
-            </a:r>
-            <a:r>
-              <a:rPr sz="1150" b="0" dirty="0">
-                <a:solidFill>
-                  <a:srgbClr val="1C1C1E"/>
-                </a:solidFill>
-                <a:latin typeface="맑은 고딕"/>
-                <a:ea typeface="맑은 고딕"/>
-              </a:rPr>
-              <a:t/>
-            </a:r>
-            <a:r>
-              <a:rPr sz="1150" b="0" dirty="0" err="1">
-                <a:solidFill>
-                  <a:srgbClr val="1C1C1E"/>
-                </a:solidFill>
-                <a:latin typeface="맑은 고딕"/>
-                <a:ea typeface="맑은 고딕"/>
-              </a:rPr>
-              <a:t/>
-            </a:r>
-            <a:r>
-              <a:rPr sz="1150" b="0" dirty="0">
-                <a:solidFill>
-                  <a:srgbClr val="1C1C1E"/>
-                </a:solidFill>
-                <a:latin typeface="맑은 고딕"/>
-                <a:ea typeface="맑은 고딕"/>
-              </a:rPr>
-              <a:t/>
-            </a:r>
-            <a:r>
-              <a:rPr sz="1150" b="0" dirty="0" err="1">
-                <a:solidFill>
-                  <a:srgbClr val="1C1C1E"/>
-                </a:solidFill>
-                <a:latin typeface="맑은 고딕"/>
-                <a:ea typeface="맑은 고딕"/>
-              </a:rPr>
-              <a:t/>
-            </a:r>
-            <a:endParaRPr sz="1150" b="0" dirty="0">
-              <a:solidFill>
-                <a:srgbClr val="1C1C1E"/>
-              </a:solidFill>
-              <a:latin typeface="맑은 고딕"/>
-              <a:ea typeface="맑은 고딕"/>
-            </a:endParaRPr>
           </a:p>
         </p:txBody>
       </p:sp>
@@ -16589,303 +14935,6 @@
               </a:rPr>
               <a:t>• 분만 인프라 공백은 언론·국회에서 반복 지적되어 왔으나, 전국 단위 공개 데이터로 정량 검증된 바 없음</a:t>
             </a:r>
-            <a:r>
-              <a:rPr sz="1150" b="0" dirty="0" err="1">
-                <a:solidFill>
-                  <a:srgbClr val="1C1C1E"/>
-                </a:solidFill>
-                <a:latin typeface="맑은 고딕"/>
-                <a:ea typeface="맑은 고딕"/>
-              </a:rPr>
-              <a:t/>
-            </a:r>
-            <a:r>
-              <a:rPr sz="1150" b="0" dirty="0">
-                <a:solidFill>
-                  <a:srgbClr val="1C1C1E"/>
-                </a:solidFill>
-                <a:latin typeface="맑은 고딕"/>
-                <a:ea typeface="맑은 고딕"/>
-              </a:rPr>
-              <a:t/>
-            </a:r>
-            <a:r>
-              <a:rPr sz="1150" b="0" dirty="0" err="1">
-                <a:solidFill>
-                  <a:srgbClr val="1C1C1E"/>
-                </a:solidFill>
-                <a:latin typeface="맑은 고딕"/>
-                <a:ea typeface="맑은 고딕"/>
-              </a:rPr>
-              <a:t/>
-            </a:r>
-            <a:r>
-              <a:rPr sz="1150" b="0" dirty="0">
-                <a:solidFill>
-                  <a:srgbClr val="1C1C1E"/>
-                </a:solidFill>
-                <a:latin typeface="맑은 고딕"/>
-                <a:ea typeface="맑은 고딕"/>
-              </a:rPr>
-              <a:t/>
-            </a:r>
-            <a:r>
-              <a:rPr sz="1150" b="0" dirty="0" err="1">
-                <a:solidFill>
-                  <a:srgbClr val="1C1C1E"/>
-                </a:solidFill>
-                <a:latin typeface="맑은 고딕"/>
-                <a:ea typeface="맑은 고딕"/>
-              </a:rPr>
-              <a:t/>
-            </a:r>
-            <a:r>
-              <a:rPr sz="1150" b="0" dirty="0">
-                <a:solidFill>
-                  <a:srgbClr val="1C1C1E"/>
-                </a:solidFill>
-                <a:latin typeface="맑은 고딕"/>
-                <a:ea typeface="맑은 고딕"/>
-              </a:rPr>
-              <a:t/>
-            </a:r>
-            <a:r>
-              <a:rPr sz="1150" b="0" dirty="0" err="1">
-                <a:solidFill>
-                  <a:srgbClr val="1C1C1E"/>
-                </a:solidFill>
-                <a:latin typeface="맑은 고딕"/>
-                <a:ea typeface="맑은 고딕"/>
-              </a:rPr>
-              <a:t/>
-            </a:r>
-            <a:r>
-              <a:rPr sz="1150" b="0" dirty="0">
-                <a:solidFill>
-                  <a:srgbClr val="1C1C1E"/>
-                </a:solidFill>
-                <a:latin typeface="맑은 고딕"/>
-                <a:ea typeface="맑은 고딕"/>
-              </a:rPr>
-              <a:t/>
-            </a:r>
-            <a:r>
-              <a:rPr sz="1150" b="0" dirty="0" err="1">
-                <a:solidFill>
-                  <a:srgbClr val="1C1C1E"/>
-                </a:solidFill>
-                <a:latin typeface="맑은 고딕"/>
-                <a:ea typeface="맑은 고딕"/>
-              </a:rPr>
-              <a:t/>
-            </a:r>
-            <a:r>
-              <a:rPr sz="1150" b="0" dirty="0">
-                <a:solidFill>
-                  <a:srgbClr val="1C1C1E"/>
-                </a:solidFill>
-                <a:latin typeface="맑은 고딕"/>
-                <a:ea typeface="맑은 고딕"/>
-              </a:rPr>
-              <a:t/>
-            </a:r>
-            <a:r>
-              <a:rPr sz="1150" b="0" dirty="0" err="1">
-                <a:solidFill>
-                  <a:srgbClr val="1C1C1E"/>
-                </a:solidFill>
-                <a:latin typeface="맑은 고딕"/>
-                <a:ea typeface="맑은 고딕"/>
-              </a:rPr>
-              <a:t/>
-            </a:r>
-            <a:r>
-              <a:rPr sz="1150" b="0" dirty="0">
-                <a:solidFill>
-                  <a:srgbClr val="1C1C1E"/>
-                </a:solidFill>
-                <a:latin typeface="맑은 고딕"/>
-                <a:ea typeface="맑은 고딕"/>
-              </a:rPr>
-              <a:t/>
-            </a:r>
-            <a:r>
-              <a:rPr sz="1150" b="0" dirty="0" err="1">
-                <a:solidFill>
-                  <a:srgbClr val="1C1C1E"/>
-                </a:solidFill>
-                <a:latin typeface="맑은 고딕"/>
-                <a:ea typeface="맑은 고딕"/>
-              </a:rPr>
-              <a:t/>
-            </a:r>
-            <a:r>
-              <a:rPr sz="1150" b="0" dirty="0">
-                <a:solidFill>
-                  <a:srgbClr val="1C1C1E"/>
-                </a:solidFill>
-                <a:latin typeface="맑은 고딕"/>
-                <a:ea typeface="맑은 고딕"/>
-              </a:rPr>
-              <a:t/>
-            </a:r>
-            <a:r>
-              <a:rPr sz="1150" b="0" dirty="0" err="1">
-                <a:solidFill>
-                  <a:srgbClr val="1C1C1E"/>
-                </a:solidFill>
-                <a:latin typeface="맑은 고딕"/>
-                <a:ea typeface="맑은 고딕"/>
-              </a:rPr>
-              <a:t/>
-            </a:r>
-            <a:r>
-              <a:rPr sz="1150" b="0" dirty="0">
-                <a:solidFill>
-                  <a:srgbClr val="1C1C1E"/>
-                </a:solidFill>
-                <a:latin typeface="맑은 고딕"/>
-                <a:ea typeface="맑은 고딕"/>
-              </a:rPr>
-              <a:t/>
-            </a:r>
-            <a:r>
-              <a:rPr sz="1150" b="0" dirty="0" err="1">
-                <a:solidFill>
-                  <a:srgbClr val="1C1C1E"/>
-                </a:solidFill>
-                <a:latin typeface="맑은 고딕"/>
-                <a:ea typeface="맑은 고딕"/>
-              </a:rPr>
-              <a:t/>
-            </a:r>
-            <a:r>
-              <a:rPr sz="1150" b="0" dirty="0">
-                <a:solidFill>
-                  <a:srgbClr val="1C1C1E"/>
-                </a:solidFill>
-                <a:latin typeface="맑은 고딕"/>
-                <a:ea typeface="맑은 고딕"/>
-              </a:rPr>
-              <a:t/>
-            </a:r>
-            <a:r>
-              <a:rPr sz="1150" b="0" dirty="0" err="1">
-                <a:solidFill>
-                  <a:srgbClr val="1C1C1E"/>
-                </a:solidFill>
-                <a:latin typeface="맑은 고딕"/>
-                <a:ea typeface="맑은 고딕"/>
-              </a:rPr>
-              <a:t/>
-            </a:r>
-            <a:r>
-              <a:rPr sz="1150" b="0" dirty="0">
-                <a:solidFill>
-                  <a:srgbClr val="1C1C1E"/>
-                </a:solidFill>
-                <a:latin typeface="맑은 고딕"/>
-                <a:ea typeface="맑은 고딕"/>
-              </a:rPr>
-              <a:t/>
-            </a:r>
-            <a:r>
-              <a:rPr sz="1150" b="0" dirty="0" err="1">
-                <a:solidFill>
-                  <a:srgbClr val="1C1C1E"/>
-                </a:solidFill>
-                <a:latin typeface="맑은 고딕"/>
-                <a:ea typeface="맑은 고딕"/>
-              </a:rPr>
-              <a:t/>
-            </a:r>
-            <a:r>
-              <a:rPr sz="1150" b="0" dirty="0">
-                <a:solidFill>
-                  <a:srgbClr val="1C1C1E"/>
-                </a:solidFill>
-                <a:latin typeface="맑은 고딕"/>
-                <a:ea typeface="맑은 고딕"/>
-              </a:rPr>
-              <a:t/>
-            </a:r>
-            <a:r>
-              <a:rPr sz="1150" b="0" dirty="0" err="1">
-                <a:solidFill>
-                  <a:srgbClr val="1C1C1E"/>
-                </a:solidFill>
-                <a:latin typeface="맑은 고딕"/>
-                <a:ea typeface="맑은 고딕"/>
-              </a:rPr>
-              <a:t/>
-            </a:r>
-            <a:r>
-              <a:rPr sz="1150" b="0" dirty="0">
-                <a:solidFill>
-                  <a:srgbClr val="1C1C1E"/>
-                </a:solidFill>
-                <a:latin typeface="맑은 고딕"/>
-                <a:ea typeface="맑은 고딕"/>
-              </a:rPr>
-              <a:t/>
-            </a:r>
-            <a:r>
-              <a:rPr sz="1150" b="0" dirty="0" err="1">
-                <a:solidFill>
-                  <a:srgbClr val="1C1C1E"/>
-                </a:solidFill>
-                <a:latin typeface="맑은 고딕"/>
-                <a:ea typeface="맑은 고딕"/>
-              </a:rPr>
-              <a:t/>
-            </a:r>
-            <a:r>
-              <a:rPr sz="1150" b="0" dirty="0">
-                <a:solidFill>
-                  <a:srgbClr val="1C1C1E"/>
-                </a:solidFill>
-                <a:latin typeface="맑은 고딕"/>
-                <a:ea typeface="맑은 고딕"/>
-              </a:rPr>
-              <a:t/>
-            </a:r>
-            <a:r>
-              <a:rPr sz="1150" b="0" dirty="0" err="1">
-                <a:solidFill>
-                  <a:srgbClr val="1C1C1E"/>
-                </a:solidFill>
-                <a:latin typeface="맑은 고딕"/>
-                <a:ea typeface="맑은 고딕"/>
-              </a:rPr>
-              <a:t/>
-            </a:r>
-            <a:r>
-              <a:rPr sz="1150" b="0" dirty="0">
-                <a:solidFill>
-                  <a:srgbClr val="1C1C1E"/>
-                </a:solidFill>
-                <a:latin typeface="맑은 고딕"/>
-                <a:ea typeface="맑은 고딕"/>
-              </a:rPr>
-              <a:t/>
-            </a:r>
-            <a:r>
-              <a:rPr sz="1150" b="0" dirty="0" err="1">
-                <a:solidFill>
-                  <a:srgbClr val="1C1C1E"/>
-                </a:solidFill>
-                <a:latin typeface="맑은 고딕"/>
-                <a:ea typeface="맑은 고딕"/>
-              </a:rPr>
-              <a:t/>
-            </a:r>
-            <a:endParaRPr sz="1150" b="0" dirty="0">
-              <a:solidFill>
-                <a:srgbClr val="1C1C1E"/>
-              </a:solidFill>
-              <a:latin typeface="맑은 고딕"/>
-              <a:ea typeface="맑은 고딕"/>
-            </a:endParaRPr>
           </a:p>
           <a:p>
             <a:pPr marL="160020" indent="-160020">
@@ -16906,266 +14955,6 @@
               </a:rPr>
               <a:t>• 분석 대상은 취약지라는 현상이 아니라 취약지를 판정하고 지원하는 제도 그 자체 (제도 감사 프레임)</a:t>
             </a:r>
-            <a:r>
-              <a:rPr sz="1150" b="0" dirty="0" err="1">
-                <a:solidFill>
-                  <a:srgbClr val="1C1C1E"/>
-                </a:solidFill>
-                <a:latin typeface="맑은 고딕"/>
-                <a:ea typeface="맑은 고딕"/>
-              </a:rPr>
-              <a:t/>
-            </a:r>
-            <a:r>
-              <a:rPr sz="1150" b="0" dirty="0">
-                <a:solidFill>
-                  <a:srgbClr val="1C1C1E"/>
-                </a:solidFill>
-                <a:latin typeface="맑은 고딕"/>
-                <a:ea typeface="맑은 고딕"/>
-              </a:rPr>
-              <a:t/>
-            </a:r>
-            <a:r>
-              <a:rPr sz="1150" b="0" dirty="0" err="1">
-                <a:solidFill>
-                  <a:srgbClr val="1C1C1E"/>
-                </a:solidFill>
-                <a:latin typeface="맑은 고딕"/>
-                <a:ea typeface="맑은 고딕"/>
-              </a:rPr>
-              <a:t/>
-            </a:r>
-            <a:r>
-              <a:rPr sz="1150" b="0" dirty="0">
-                <a:solidFill>
-                  <a:srgbClr val="1C1C1E"/>
-                </a:solidFill>
-                <a:latin typeface="맑은 고딕"/>
-                <a:ea typeface="맑은 고딕"/>
-              </a:rPr>
-              <a:t/>
-            </a:r>
-            <a:r>
-              <a:rPr sz="1150" b="0" dirty="0" err="1">
-                <a:solidFill>
-                  <a:srgbClr val="1C1C1E"/>
-                </a:solidFill>
-                <a:latin typeface="맑은 고딕"/>
-                <a:ea typeface="맑은 고딕"/>
-              </a:rPr>
-              <a:t/>
-            </a:r>
-            <a:r>
-              <a:rPr sz="1150" b="0" dirty="0">
-                <a:solidFill>
-                  <a:srgbClr val="1C1C1E"/>
-                </a:solidFill>
-                <a:latin typeface="맑은 고딕"/>
-                <a:ea typeface="맑은 고딕"/>
-              </a:rPr>
-              <a:t/>
-            </a:r>
-            <a:r>
-              <a:rPr sz="1150" b="0" dirty="0" err="1">
-                <a:solidFill>
-                  <a:srgbClr val="1C1C1E"/>
-                </a:solidFill>
-                <a:latin typeface="맑은 고딕"/>
-                <a:ea typeface="맑은 고딕"/>
-              </a:rPr>
-              <a:t/>
-            </a:r>
-            <a:r>
-              <a:rPr sz="1150" b="0" dirty="0">
-                <a:solidFill>
-                  <a:srgbClr val="1C1C1E"/>
-                </a:solidFill>
-                <a:latin typeface="맑은 고딕"/>
-                <a:ea typeface="맑은 고딕"/>
-              </a:rPr>
-              <a:t/>
-            </a:r>
-            <a:r>
-              <a:rPr sz="1150" b="0" dirty="0" err="1">
-                <a:solidFill>
-                  <a:srgbClr val="1C1C1E"/>
-                </a:solidFill>
-                <a:latin typeface="맑은 고딕"/>
-                <a:ea typeface="맑은 고딕"/>
-              </a:rPr>
-              <a:t/>
-            </a:r>
-            <a:r>
-              <a:rPr sz="1150" b="0" dirty="0">
-                <a:solidFill>
-                  <a:srgbClr val="1C1C1E"/>
-                </a:solidFill>
-                <a:latin typeface="맑은 고딕"/>
-                <a:ea typeface="맑은 고딕"/>
-              </a:rPr>
-              <a:t/>
-            </a:r>
-            <a:r>
-              <a:rPr sz="1150" b="0" dirty="0" err="1">
-                <a:solidFill>
-                  <a:srgbClr val="1C1C1E"/>
-                </a:solidFill>
-                <a:latin typeface="맑은 고딕"/>
-                <a:ea typeface="맑은 고딕"/>
-              </a:rPr>
-              <a:t/>
-            </a:r>
-            <a:r>
-              <a:rPr sz="1150" b="0" dirty="0">
-                <a:solidFill>
-                  <a:srgbClr val="1C1C1E"/>
-                </a:solidFill>
-                <a:latin typeface="맑은 고딕"/>
-                <a:ea typeface="맑은 고딕"/>
-              </a:rPr>
-              <a:t/>
-            </a:r>
-            <a:r>
-              <a:rPr sz="1150" b="0" dirty="0" err="1">
-                <a:solidFill>
-                  <a:srgbClr val="1C1C1E"/>
-                </a:solidFill>
-                <a:latin typeface="맑은 고딕"/>
-                <a:ea typeface="맑은 고딕"/>
-              </a:rPr>
-              <a:t/>
-            </a:r>
-            <a:r>
-              <a:rPr sz="1150" b="0" dirty="0">
-                <a:solidFill>
-                  <a:srgbClr val="1C1C1E"/>
-                </a:solidFill>
-                <a:latin typeface="맑은 고딕"/>
-                <a:ea typeface="맑은 고딕"/>
-              </a:rPr>
-              <a:t/>
-            </a:r>
-            <a:r>
-              <a:rPr sz="1150" b="0" dirty="0" err="1">
-                <a:solidFill>
-                  <a:srgbClr val="1C1C1E"/>
-                </a:solidFill>
-                <a:latin typeface="맑은 고딕"/>
-                <a:ea typeface="맑은 고딕"/>
-              </a:rPr>
-              <a:t/>
-            </a:r>
-            <a:r>
-              <a:rPr sz="1150" b="0" dirty="0">
-                <a:solidFill>
-                  <a:srgbClr val="1C1C1E"/>
-                </a:solidFill>
-                <a:latin typeface="맑은 고딕"/>
-                <a:ea typeface="맑은 고딕"/>
-              </a:rPr>
-              <a:t/>
-            </a:r>
-            <a:r>
-              <a:rPr sz="1150" b="0" dirty="0" err="1">
-                <a:solidFill>
-                  <a:srgbClr val="1C1C1E"/>
-                </a:solidFill>
-                <a:latin typeface="맑은 고딕"/>
-                <a:ea typeface="맑은 고딕"/>
-              </a:rPr>
-              <a:t/>
-            </a:r>
-            <a:r>
-              <a:rPr sz="1150" b="0" dirty="0">
-                <a:solidFill>
-                  <a:srgbClr val="1C1C1E"/>
-                </a:solidFill>
-                <a:latin typeface="맑은 고딕"/>
-                <a:ea typeface="맑은 고딕"/>
-              </a:rPr>
-              <a:t/>
-            </a:r>
-            <a:r>
-              <a:rPr sz="1150" b="0" dirty="0" err="1">
-                <a:solidFill>
-                  <a:srgbClr val="1C1C1E"/>
-                </a:solidFill>
-                <a:latin typeface="맑은 고딕"/>
-                <a:ea typeface="맑은 고딕"/>
-              </a:rPr>
-              <a:t/>
-            </a:r>
-            <a:r>
-              <a:rPr sz="1150" b="0" dirty="0">
-                <a:solidFill>
-                  <a:srgbClr val="1C1C1E"/>
-                </a:solidFill>
-                <a:latin typeface="맑은 고딕"/>
-                <a:ea typeface="맑은 고딕"/>
-              </a:rPr>
-              <a:t/>
-            </a:r>
-            <a:r>
-              <a:rPr sz="1150" b="0" dirty="0" err="1">
-                <a:solidFill>
-                  <a:srgbClr val="1C1C1E"/>
-                </a:solidFill>
-                <a:latin typeface="맑은 고딕"/>
-                <a:ea typeface="맑은 고딕"/>
-              </a:rPr>
-              <a:t/>
-            </a:r>
-            <a:r>
-              <a:rPr sz="1150" b="0" dirty="0">
-                <a:solidFill>
-                  <a:srgbClr val="1C1C1E"/>
-                </a:solidFill>
-                <a:latin typeface="맑은 고딕"/>
-                <a:ea typeface="맑은 고딕"/>
-              </a:rPr>
-              <a:t/>
-            </a:r>
-            <a:r>
-              <a:rPr sz="1150" b="0" dirty="0" err="1">
-                <a:solidFill>
-                  <a:srgbClr val="1C1C1E"/>
-                </a:solidFill>
-                <a:latin typeface="맑은 고딕"/>
-                <a:ea typeface="맑은 고딕"/>
-              </a:rPr>
-              <a:t/>
-            </a:r>
-            <a:r>
-              <a:rPr sz="1150" b="0" dirty="0">
-                <a:solidFill>
-                  <a:srgbClr val="1C1C1E"/>
-                </a:solidFill>
-                <a:latin typeface="맑은 고딕"/>
-                <a:ea typeface="맑은 고딕"/>
-              </a:rPr>
-              <a:t/>
-            </a:r>
-            <a:r>
-              <a:rPr sz="1150" b="0" dirty="0" err="1">
-                <a:solidFill>
-                  <a:srgbClr val="1C1C1E"/>
-                </a:solidFill>
-                <a:latin typeface="맑은 고딕"/>
-                <a:ea typeface="맑은 고딕"/>
-              </a:rPr>
-              <a:t/>
-            </a:r>
-            <a:r>
-              <a:rPr sz="1150" b="0" dirty="0">
-                <a:solidFill>
-                  <a:srgbClr val="1C1C1E"/>
-                </a:solidFill>
-                <a:latin typeface="맑은 고딕"/>
-                <a:ea typeface="맑은 고딕"/>
-              </a:rPr>
-              <a:t/>
-            </a:r>
           </a:p>
           <a:p>
             <a:pPr marL="160020" indent="-160020">
@@ -17185,6 +14974,49 @@
                 <a:ea typeface="맑은 고딕"/>
               </a:rPr>
               <a:t>• 모든 판단 기준·임계값은 정부 문서·데이터에서 차용해 실현 가능성을 확보</a:t>
+            </a:r>
+          </a:p>
+        </p:txBody>
+      </p:sp>
+      <p:sp>
+        <p:nvSpPr>
+          <p:cNvPr id="23" name="TextBox 22"/>
+          <p:cNvSpPr txBox="1"/>
+          <p:nvPr/>
+        </p:nvSpPr>
+        <p:spPr>
+          <a:xfrm>
+            <a:off x="502920" y="274320"/>
+            <a:ext cx="914400" cy="685800"/>
+          </a:xfrm>
+          <a:prstGeom prst="rect">
+            <a:avLst/>
+          </a:prstGeom>
+          <a:noFill/>
+        </p:spPr>
+        <p:txBody>
+          <a:bodyPr wrap="square" anchor="ctr">
+            <a:spAutoFit/>
+          </a:bodyPr>
+          <a:lstStyle/>
+          <a:p>
+            <a:pPr>
+              <a:lnSpc>
+                <a:spcPct val="114000"/>
+              </a:lnSpc>
+              <a:spcAft>
+                <a:spcPts val="0"/>
+              </a:spcAft>
+            </a:pPr>
+            <a:r>
+              <a:rPr sz="1500" b="1">
+                <a:solidFill>
+                  <a:srgbClr val="8A8F95"/>
+                </a:solidFill>
+                <a:latin typeface="맑은 고딕"/>
+                <a:ea typeface="맑은 고딕"/>
+              </a:rPr>
+              <a:t>Ⅰ-2</a:t>
             </a:r>
           </a:p>
         </p:txBody>
@@ -17261,75 +15093,14 @@
       </p:sp>
       <p:sp>
         <p:nvSpPr>
-          <p:cNvPr id="3" name="Rounded Rectangle 2"/>
-          <p:cNvSpPr/>
-          <p:nvPr/>
-        </p:nvSpPr>
-        <p:spPr>
-          <a:xfrm>
-            <a:off x="606475" y="579043"/>
-            <a:ext cx="103784" cy="103784"/>
-          </a:xfrm>
-          <a:prstGeom prst="roundRect">
-            <a:avLst>
-              <a:gd name="adj" fmla="val 50000"/>
-            </a:avLst>
-          </a:prstGeom>
-          <a:gradFill rotWithShape="1">
-            <a:gsLst>
-              <a:gs pos="0">
-                <a:srgbClr val="3A3F45"/>
-              </a:gs>
-              <a:gs pos="100000">
-                <a:srgbClr val="73787E"/>
-              </a:gs>
-            </a:gsLst>
-            <a:lin ang="18900000" scaled="0"/>
-          </a:gradFill>
-          <a:ln>
-            <a:noFill/>
-          </a:ln>
-          <a:effectLst>
-            <a:outerShdw blurRad="109728" dist="36576" dir="5400000" rotWithShape="0">
-              <a:srgbClr val="000000">
-                <a:alpha val="35000"/>
-              </a:srgbClr>
-            </a:outerShdw>
-          </a:effectLst>
-        </p:spPr>
-        <p:style>
-          <a:lnRef idx="1">
-            <a:schemeClr val="accent1"/>
-          </a:lnRef>
-          <a:fillRef idx="3">
-            <a:schemeClr val="accent1"/>
-          </a:fillRef>
-          <a:effectRef idx="2">
-            <a:schemeClr val="accent1"/>
-          </a:effectRef>
-          <a:fontRef idx="minor">
-            <a:schemeClr val="lt1"/>
-          </a:fontRef>
-        </p:style>
-        <p:txBody>
-          <a:bodyPr rtlCol="0" anchor="ctr"/>
-          <a:lstStyle/>
-          <a:p>
-            <a:pPr algn="ctr"/>
-            <a:endParaRPr/>
-          </a:p>
-        </p:txBody>
-      </p:sp>
-      <p:sp>
-        <p:nvSpPr>
           <p:cNvPr id="4" name="TextBox 3"/>
           <p:cNvSpPr txBox="1"/>
           <p:nvPr/>
         </p:nvSpPr>
         <p:spPr>
           <a:xfrm>
-            <a:off x="960120" y="399564"/>
-            <a:ext cx="9692640" cy="435312"/>
+            <a:off x="1417320" y="399564"/>
+            <a:ext cx="9235440" cy="435312"/>
           </a:xfrm>
           <a:prstGeom prst="rect">
             <a:avLst/>
@@ -19497,286 +17268,6 @@
               </a:rPr>
               <a:t>Q1·2는 지정을, Q3·4는 배분을 봄. 앞에서 "규칙이 무엇을 보는가"를 확정해야 뒤에서 "그 규칙대로 나눠지는가"를 물을 수 있음</a:t>
             </a:r>
-            <a:r>
-              <a:rPr sz="1250" b="1" dirty="0" err="1">
-                <a:solidFill>
-                  <a:srgbClr val="1C1C1E"/>
-                </a:solidFill>
-                <a:latin typeface="맑은 고딕"/>
-                <a:ea typeface="맑은 고딕"/>
-              </a:rPr>
-              <a:t/>
-            </a:r>
-            <a:r>
-              <a:rPr sz="1250" b="1" dirty="0">
-                <a:solidFill>
-                  <a:srgbClr val="1C1C1E"/>
-                </a:solidFill>
-                <a:latin typeface="맑은 고딕"/>
-                <a:ea typeface="맑은 고딕"/>
-              </a:rPr>
-              <a:t/>
-            </a:r>
-            <a:r>
-              <a:rPr sz="1250" b="1" dirty="0" err="1">
-                <a:solidFill>
-                  <a:srgbClr val="1C1C1E"/>
-                </a:solidFill>
-                <a:latin typeface="맑은 고딕"/>
-                <a:ea typeface="맑은 고딕"/>
-              </a:rPr>
-              <a:t/>
-            </a:r>
-            <a:r>
-              <a:rPr sz="1250" b="1" dirty="0">
-                <a:solidFill>
-                  <a:srgbClr val="1C1C1E"/>
-                </a:solidFill>
-                <a:latin typeface="맑은 고딕"/>
-                <a:ea typeface="맑은 고딕"/>
-              </a:rPr>
-              <a:t/>
-            </a:r>
-            <a:r>
-              <a:rPr sz="1250" b="1" dirty="0" err="1">
-                <a:solidFill>
-                  <a:srgbClr val="1C1C1E"/>
-                </a:solidFill>
-                <a:latin typeface="맑은 고딕"/>
-                <a:ea typeface="맑은 고딕"/>
-              </a:rPr>
-              <a:t/>
-            </a:r>
-            <a:r>
-              <a:rPr sz="1250" b="1" dirty="0">
-                <a:solidFill>
-                  <a:srgbClr val="1C1C1E"/>
-                </a:solidFill>
-                <a:latin typeface="맑은 고딕"/>
-                <a:ea typeface="맑은 고딕"/>
-              </a:rPr>
-              <a:t/>
-            </a:r>
-            <a:r>
-              <a:rPr lang="ko-KR" altLang="en-US" sz="1250" b="1" dirty="0">
-                <a:solidFill>
-                  <a:srgbClr val="1C1C1E"/>
-                </a:solidFill>
-                <a:latin typeface="맑은 고딕"/>
-                <a:ea typeface="맑은 고딕"/>
-              </a:rPr>
-              <a:t/>
-            </a:r>
-            <a:r>
-              <a:rPr sz="1250" b="1" dirty="0">
-                <a:solidFill>
-                  <a:srgbClr val="1C1C1E"/>
-                </a:solidFill>
-                <a:latin typeface="맑은 고딕"/>
-                <a:ea typeface="맑은 고딕"/>
-              </a:rPr>
-              <a:t/>
-            </a:r>
-            <a:r>
-              <a:rPr sz="1250" b="1" dirty="0" err="1">
-                <a:solidFill>
-                  <a:srgbClr val="1C1C1E"/>
-                </a:solidFill>
-                <a:latin typeface="맑은 고딕"/>
-                <a:ea typeface="맑은 고딕"/>
-              </a:rPr>
-              <a:t/>
-            </a:r>
-            <a:r>
-              <a:rPr sz="1250" b="1" dirty="0">
-                <a:solidFill>
-                  <a:srgbClr val="1C1C1E"/>
-                </a:solidFill>
-                <a:latin typeface="맑은 고딕"/>
-                <a:ea typeface="맑은 고딕"/>
-              </a:rPr>
-              <a:t/>
-            </a:r>
-            <a:r>
-              <a:rPr sz="1250" b="1" dirty="0" err="1">
-                <a:solidFill>
-                  <a:srgbClr val="1C1C1E"/>
-                </a:solidFill>
-                <a:latin typeface="맑은 고딕"/>
-                <a:ea typeface="맑은 고딕"/>
-              </a:rPr>
-              <a:t/>
-            </a:r>
-            <a:r>
-              <a:rPr sz="1250" b="1" dirty="0">
-                <a:solidFill>
-                  <a:srgbClr val="1C1C1E"/>
-                </a:solidFill>
-                <a:latin typeface="맑은 고딕"/>
-                <a:ea typeface="맑은 고딕"/>
-              </a:rPr>
-              <a:t/>
-            </a:r>
-            <a:r>
-              <a:rPr sz="1250" b="1" dirty="0" err="1">
-                <a:solidFill>
-                  <a:srgbClr val="1C1C1E"/>
-                </a:solidFill>
-                <a:latin typeface="맑은 고딕"/>
-                <a:ea typeface="맑은 고딕"/>
-              </a:rPr>
-              <a:t/>
-            </a:r>
-            <a:r>
-              <a:rPr sz="1250" b="1" dirty="0">
-                <a:solidFill>
-                  <a:srgbClr val="1C1C1E"/>
-                </a:solidFill>
-                <a:latin typeface="맑은 고딕"/>
-                <a:ea typeface="맑은 고딕"/>
-              </a:rPr>
-              <a:t/>
-            </a:r>
-            <a:r>
-              <a:rPr sz="1250" b="1" dirty="0" err="1">
-                <a:solidFill>
-                  <a:srgbClr val="1C1C1E"/>
-                </a:solidFill>
-                <a:latin typeface="맑은 고딕"/>
-                <a:ea typeface="맑은 고딕"/>
-              </a:rPr>
-              <a:t/>
-            </a:r>
-            <a:r>
-              <a:rPr sz="1250" b="1" dirty="0">
-                <a:solidFill>
-                  <a:srgbClr val="1C1C1E"/>
-                </a:solidFill>
-                <a:latin typeface="맑은 고딕"/>
-                <a:ea typeface="맑은 고딕"/>
-              </a:rPr>
-              <a:t/>
-            </a:r>
-            <a:r>
-              <a:rPr sz="1250" b="1" dirty="0" err="1">
-                <a:solidFill>
-                  <a:srgbClr val="1C1C1E"/>
-                </a:solidFill>
-                <a:latin typeface="맑은 고딕"/>
-                <a:ea typeface="맑은 고딕"/>
-              </a:rPr>
-              <a:t/>
-            </a:r>
-            <a:r>
-              <a:rPr sz="1250" b="1" dirty="0">
-                <a:solidFill>
-                  <a:srgbClr val="1C1C1E"/>
-                </a:solidFill>
-                <a:latin typeface="맑은 고딕"/>
-                <a:ea typeface="맑은 고딕"/>
-              </a:rPr>
-              <a:t/>
-            </a:r>
-            <a:r>
-              <a:rPr sz="1250" b="1" dirty="0" err="1">
-                <a:solidFill>
-                  <a:srgbClr val="1C1C1E"/>
-                </a:solidFill>
-                <a:latin typeface="맑은 고딕"/>
-                <a:ea typeface="맑은 고딕"/>
-              </a:rPr>
-              <a:t/>
-            </a:r>
-            <a:r>
-              <a:rPr sz="1250" b="1" dirty="0">
-                <a:solidFill>
-                  <a:srgbClr val="1C1C1E"/>
-                </a:solidFill>
-                <a:latin typeface="맑은 고딕"/>
-                <a:ea typeface="맑은 고딕"/>
-              </a:rPr>
-              <a:t/>
-            </a:r>
-            <a:r>
-              <a:rPr sz="1250" b="1" dirty="0" err="1">
-                <a:solidFill>
-                  <a:srgbClr val="1C1C1E"/>
-                </a:solidFill>
-                <a:latin typeface="맑은 고딕"/>
-                <a:ea typeface="맑은 고딕"/>
-              </a:rPr>
-              <a:t/>
-            </a:r>
-            <a:r>
-              <a:rPr sz="1250" b="1" dirty="0">
-                <a:solidFill>
-                  <a:srgbClr val="1C1C1E"/>
-                </a:solidFill>
-                <a:latin typeface="맑은 고딕"/>
-                <a:ea typeface="맑은 고딕"/>
-              </a:rPr>
-              <a:t/>
-            </a:r>
-            <a:r>
-              <a:rPr sz="1250" b="1" dirty="0" err="1">
-                <a:solidFill>
-                  <a:srgbClr val="1C1C1E"/>
-                </a:solidFill>
-                <a:latin typeface="맑은 고딕"/>
-                <a:ea typeface="맑은 고딕"/>
-              </a:rPr>
-              <a:t/>
-            </a:r>
-            <a:r>
-              <a:rPr sz="1250" b="1" dirty="0">
-                <a:solidFill>
-                  <a:srgbClr val="1C1C1E"/>
-                </a:solidFill>
-                <a:latin typeface="맑은 고딕"/>
-                <a:ea typeface="맑은 고딕"/>
-              </a:rPr>
-              <a:t/>
-            </a:r>
-            <a:r>
-              <a:rPr sz="1250" b="1" dirty="0" err="1">
-                <a:solidFill>
-                  <a:srgbClr val="1C1C1E"/>
-                </a:solidFill>
-                <a:latin typeface="맑은 고딕"/>
-                <a:ea typeface="맑은 고딕"/>
-              </a:rPr>
-              <a:t/>
-            </a:r>
-            <a:r>
-              <a:rPr sz="1250" b="1" dirty="0">
-                <a:solidFill>
-                  <a:srgbClr val="1C1C1E"/>
-                </a:solidFill>
-                <a:latin typeface="맑은 고딕"/>
-                <a:ea typeface="맑은 고딕"/>
-              </a:rPr>
-              <a:t/>
-            </a:r>
-            <a:r>
-              <a:rPr sz="1250" b="1" dirty="0" err="1">
-                <a:solidFill>
-                  <a:srgbClr val="1C1C1E"/>
-                </a:solidFill>
-                <a:latin typeface="맑은 고딕"/>
-                <a:ea typeface="맑은 고딕"/>
-              </a:rPr>
-              <a:t/>
-            </a:r>
-            <a:r>
-              <a:rPr sz="1250" b="1" dirty="0">
-                <a:solidFill>
-                  <a:srgbClr val="1C1C1E"/>
-                </a:solidFill>
-                <a:latin typeface="맑은 고딕"/>
-                <a:ea typeface="맑은 고딕"/>
-              </a:rPr>
-              <a:t/>
-            </a:r>
           </a:p>
           <a:p>
             <a:pPr>
@@ -19797,355 +17288,48 @@
               </a:rPr>
               <a:t>무엇을 "재현 성공"으로 볼지, 무엇을 "사각지대"로 볼지는 분석 착수 전에 확정 — 결과를 보고 기준을 맞추지 않기 위함</a:t>
             </a:r>
-            <a:r>
-              <a:rPr sz="1200" b="0" dirty="0">
-                <a:solidFill>
-                  <a:srgbClr val="767A7F"/>
-                </a:solidFill>
-                <a:latin typeface="맑은 고딕"/>
-                <a:ea typeface="맑은 고딕"/>
-              </a:rPr>
-              <a:t/>
-            </a:r>
-            <a:r>
-              <a:rPr sz="1200" b="0" dirty="0" err="1">
-                <a:solidFill>
-                  <a:srgbClr val="767A7F"/>
-                </a:solidFill>
-                <a:latin typeface="맑은 고딕"/>
-                <a:ea typeface="맑은 고딕"/>
-              </a:rPr>
-              <a:t/>
-            </a:r>
-            <a:r>
-              <a:rPr sz="1200" b="0" dirty="0">
-                <a:solidFill>
-                  <a:srgbClr val="767A7F"/>
-                </a:solidFill>
-                <a:latin typeface="맑은 고딕"/>
-                <a:ea typeface="맑은 고딕"/>
-              </a:rPr>
-              <a:t/>
-            </a:r>
-            <a:r>
-              <a:rPr sz="1200" b="0" dirty="0" err="1">
-                <a:solidFill>
-                  <a:srgbClr val="767A7F"/>
-                </a:solidFill>
-                <a:latin typeface="맑은 고딕"/>
-                <a:ea typeface="맑은 고딕"/>
-              </a:rPr>
-              <a:t/>
-            </a:r>
-            <a:r>
-              <a:rPr sz="1200" b="0" dirty="0">
-                <a:solidFill>
-                  <a:srgbClr val="767A7F"/>
-                </a:solidFill>
-                <a:latin typeface="맑은 고딕"/>
-                <a:ea typeface="맑은 고딕"/>
-              </a:rPr>
-              <a:t/>
-            </a:r>
-            <a:r>
-              <a:rPr sz="1200" b="0" dirty="0" err="1">
-                <a:solidFill>
-                  <a:srgbClr val="767A7F"/>
-                </a:solidFill>
-                <a:latin typeface="맑은 고딕"/>
-                <a:ea typeface="맑은 고딕"/>
-              </a:rPr>
-              <a:t/>
-            </a:r>
-            <a:r>
-              <a:rPr sz="1200" b="0" dirty="0">
-                <a:solidFill>
-                  <a:srgbClr val="767A7F"/>
-                </a:solidFill>
-                <a:latin typeface="맑은 고딕"/>
-                <a:ea typeface="맑은 고딕"/>
-              </a:rPr>
-              <a:t/>
-            </a:r>
-            <a:r>
-              <a:rPr sz="1200" b="0" dirty="0" err="1">
-                <a:solidFill>
-                  <a:srgbClr val="767A7F"/>
-                </a:solidFill>
-                <a:latin typeface="맑은 고딕"/>
-                <a:ea typeface="맑은 고딕"/>
-              </a:rPr>
-              <a:t/>
-            </a:r>
-            <a:r>
-              <a:rPr sz="1200" b="0" dirty="0">
-                <a:solidFill>
-                  <a:srgbClr val="767A7F"/>
-                </a:solidFill>
-                <a:latin typeface="맑은 고딕"/>
-                <a:ea typeface="맑은 고딕"/>
-              </a:rPr>
-              <a:t/>
-            </a:r>
-            <a:r>
-              <a:rPr sz="1200" b="0" dirty="0" err="1">
-                <a:solidFill>
-                  <a:srgbClr val="767A7F"/>
-                </a:solidFill>
-                <a:latin typeface="맑은 고딕"/>
-                <a:ea typeface="맑은 고딕"/>
-              </a:rPr>
-              <a:t/>
-            </a:r>
-            <a:r>
-              <a:rPr sz="1200" b="0" dirty="0">
-                <a:solidFill>
-                  <a:srgbClr val="767A7F"/>
-                </a:solidFill>
-                <a:latin typeface="맑은 고딕"/>
-                <a:ea typeface="맑은 고딕"/>
-              </a:rPr>
-              <a:t/>
-            </a:r>
-            <a:r>
-              <a:rPr sz="1200" b="0" dirty="0" err="1">
-                <a:solidFill>
-                  <a:srgbClr val="767A7F"/>
-                </a:solidFill>
-                <a:latin typeface="맑은 고딕"/>
-                <a:ea typeface="맑은 고딕"/>
-              </a:rPr>
-              <a:t/>
-            </a:r>
-            <a:r>
-              <a:rPr sz="1200" b="0" dirty="0">
-                <a:solidFill>
-                  <a:srgbClr val="767A7F"/>
-                </a:solidFill>
-                <a:latin typeface="맑은 고딕"/>
-                <a:ea typeface="맑은 고딕"/>
-              </a:rPr>
-              <a:t/>
-            </a:r>
-            <a:r>
-              <a:rPr sz="1200" b="0" dirty="0" err="1">
-                <a:solidFill>
-                  <a:srgbClr val="767A7F"/>
-                </a:solidFill>
-                <a:latin typeface="맑은 고딕"/>
-                <a:ea typeface="맑은 고딕"/>
-              </a:rPr>
-              <a:t/>
-            </a:r>
-            <a:r>
-              <a:rPr sz="1200" b="0" dirty="0">
-                <a:solidFill>
-                  <a:srgbClr val="767A7F"/>
-                </a:solidFill>
-                <a:latin typeface="맑은 고딕"/>
-                <a:ea typeface="맑은 고딕"/>
-              </a:rPr>
-              <a:t/>
-            </a:r>
-            <a:r>
-              <a:rPr sz="1200" b="0" dirty="0" err="1">
-                <a:solidFill>
-                  <a:srgbClr val="767A7F"/>
-                </a:solidFill>
-                <a:latin typeface="맑은 고딕"/>
-                <a:ea typeface="맑은 고딕"/>
-              </a:rPr>
-              <a:t/>
-            </a:r>
-            <a:r>
-              <a:rPr sz="1200" b="0" dirty="0">
-                <a:solidFill>
-                  <a:srgbClr val="767A7F"/>
-                </a:solidFill>
-                <a:latin typeface="맑은 고딕"/>
-                <a:ea typeface="맑은 고딕"/>
-              </a:rPr>
-              <a:t/>
-            </a:r>
-            <a:r>
-              <a:rPr sz="1200" b="0" dirty="0" err="1">
-                <a:solidFill>
-                  <a:srgbClr val="767A7F"/>
-                </a:solidFill>
-                <a:latin typeface="맑은 고딕"/>
-                <a:ea typeface="맑은 고딕"/>
-              </a:rPr>
-              <a:t/>
-            </a:r>
-            <a:r>
-              <a:rPr sz="1200" b="0" dirty="0">
-                <a:solidFill>
-                  <a:srgbClr val="767A7F"/>
-                </a:solidFill>
-                <a:latin typeface="맑은 고딕"/>
-                <a:ea typeface="맑은 고딕"/>
-              </a:rPr>
-              <a:t/>
-            </a:r>
-            <a:r>
-              <a:rPr sz="1200" b="0" dirty="0" err="1">
-                <a:solidFill>
-                  <a:srgbClr val="767A7F"/>
-                </a:solidFill>
-                <a:latin typeface="맑은 고딕"/>
-                <a:ea typeface="맑은 고딕"/>
-              </a:rPr>
-              <a:t/>
-            </a:r>
-            <a:r>
-              <a:rPr sz="1200" b="0" dirty="0">
-                <a:solidFill>
-                  <a:srgbClr val="767A7F"/>
-                </a:solidFill>
-                <a:latin typeface="맑은 고딕"/>
-                <a:ea typeface="맑은 고딕"/>
-              </a:rPr>
-              <a:t/>
-            </a:r>
-            <a:r>
-              <a:rPr sz="1200" b="0" dirty="0" err="1">
-                <a:solidFill>
-                  <a:srgbClr val="767A7F"/>
-                </a:solidFill>
-                <a:latin typeface="맑은 고딕"/>
-                <a:ea typeface="맑은 고딕"/>
-              </a:rPr>
-              <a:t/>
-            </a:r>
-            <a:r>
-              <a:rPr sz="1200" b="0" dirty="0">
-                <a:solidFill>
-                  <a:srgbClr val="767A7F"/>
-                </a:solidFill>
-                <a:latin typeface="맑은 고딕"/>
-                <a:ea typeface="맑은 고딕"/>
-              </a:rPr>
-              <a:t/>
-            </a:r>
-            <a:r>
-              <a:rPr sz="1200" b="0" dirty="0" err="1">
-                <a:solidFill>
-                  <a:srgbClr val="767A7F"/>
-                </a:solidFill>
-                <a:latin typeface="맑은 고딕"/>
-                <a:ea typeface="맑은 고딕"/>
-              </a:rPr>
-              <a:t/>
-            </a:r>
-            <a:r>
-              <a:rPr sz="1200" b="0" dirty="0">
-                <a:solidFill>
-                  <a:srgbClr val="767A7F"/>
-                </a:solidFill>
-                <a:latin typeface="맑은 고딕"/>
-                <a:ea typeface="맑은 고딕"/>
-              </a:rPr>
-              <a:t/>
-            </a:r>
-            <a:r>
-              <a:rPr sz="1200" b="0" dirty="0" err="1">
-                <a:solidFill>
-                  <a:srgbClr val="767A7F"/>
-                </a:solidFill>
-                <a:latin typeface="맑은 고딕"/>
-                <a:ea typeface="맑은 고딕"/>
-              </a:rPr>
-              <a:t/>
-            </a:r>
-            <a:r>
-              <a:rPr sz="1200" b="0" dirty="0">
-                <a:solidFill>
-                  <a:srgbClr val="767A7F"/>
-                </a:solidFill>
-                <a:latin typeface="맑은 고딕"/>
-                <a:ea typeface="맑은 고딕"/>
-              </a:rPr>
-              <a:t/>
-            </a:r>
-            <a:r>
-              <a:rPr sz="1200" b="0" dirty="0" err="1">
-                <a:solidFill>
-                  <a:srgbClr val="767A7F"/>
-                </a:solidFill>
-                <a:latin typeface="맑은 고딕"/>
-                <a:ea typeface="맑은 고딕"/>
-              </a:rPr>
-              <a:t/>
-            </a:r>
-            <a:r>
-              <a:rPr sz="1200" b="0" dirty="0">
-                <a:solidFill>
-                  <a:srgbClr val="767A7F"/>
-                </a:solidFill>
-                <a:latin typeface="맑은 고딕"/>
-                <a:ea typeface="맑은 고딕"/>
-              </a:rPr>
-              <a:t/>
-            </a:r>
-            <a:r>
-              <a:rPr sz="1200" b="0" dirty="0" err="1">
-                <a:solidFill>
-                  <a:srgbClr val="767A7F"/>
-                </a:solidFill>
-                <a:latin typeface="맑은 고딕"/>
-                <a:ea typeface="맑은 고딕"/>
-              </a:rPr>
-              <a:t/>
-            </a:r>
-            <a:r>
-              <a:rPr sz="1200" b="0" dirty="0">
-                <a:solidFill>
-                  <a:srgbClr val="767A7F"/>
-                </a:solidFill>
-                <a:latin typeface="맑은 고딕"/>
-                <a:ea typeface="맑은 고딕"/>
-              </a:rPr>
-              <a:t/>
-            </a:r>
-            <a:r>
-              <a:rPr sz="1200" b="0" dirty="0" err="1">
-                <a:solidFill>
-                  <a:srgbClr val="767A7F"/>
-                </a:solidFill>
-                <a:latin typeface="맑은 고딕"/>
-                <a:ea typeface="맑은 고딕"/>
-              </a:rPr>
-              <a:t/>
-            </a:r>
-            <a:r>
-              <a:rPr sz="1200" b="0" dirty="0">
-                <a:solidFill>
-                  <a:srgbClr val="767A7F"/>
-                </a:solidFill>
-                <a:latin typeface="맑은 고딕"/>
-                <a:ea typeface="맑은 고딕"/>
-              </a:rPr>
-              <a:t/>
-            </a:r>
-            <a:r>
-              <a:rPr sz="1200" b="0" dirty="0" err="1">
-                <a:solidFill>
-                  <a:srgbClr val="767A7F"/>
-                </a:solidFill>
-                <a:latin typeface="맑은 고딕"/>
-                <a:ea typeface="맑은 고딕"/>
-              </a:rPr>
-              <a:t/>
-            </a:r>
-            <a:r>
-              <a:rPr sz="1200" b="0" dirty="0">
-                <a:solidFill>
-                  <a:srgbClr val="767A7F"/>
-                </a:solidFill>
-                <a:latin typeface="맑은 고딕"/>
-                <a:ea typeface="맑은 고딕"/>
-              </a:rPr>
-              <a:t/>
+          </a:p>
+        </p:txBody>
+      </p:sp>
+      <p:sp>
+        <p:nvSpPr>
+          <p:cNvPr id="21" name="TextBox 20"/>
+          <p:cNvSpPr txBox="1"/>
+          <p:nvPr/>
+        </p:nvSpPr>
+        <p:spPr>
+          <a:xfrm>
+            <a:off x="502920" y="274320"/>
+            <a:ext cx="914400" cy="685800"/>
+          </a:xfrm>
+          <a:prstGeom prst="rect">
+            <a:avLst/>
+          </a:prstGeom>
+          <a:noFill/>
+        </p:spPr>
+        <p:txBody>
+          <a:bodyPr wrap="square" anchor="ctr">
+            <a:spAutoFit/>
+          </a:bodyPr>
+          <a:lstStyle/>
+          <a:p>
+            <a:pPr>
+              <a:lnSpc>
+                <a:spcPct val="114000"/>
+              </a:lnSpc>
+              <a:spcAft>
+                <a:spcPts val="0"/>
+              </a:spcAft>
+            </a:pPr>
+            <a:r>
+              <a:rPr sz="1500" b="1">
+                <a:solidFill>
+                  <a:srgbClr val="8A8F95"/>
+                </a:solidFill>
+                <a:latin typeface="맑은 고딕"/>
+                <a:ea typeface="맑은 고딕"/>
+              </a:rPr>
+              <a:t>Ⅰ-3</a:t>
             </a:r>
           </a:p>
         </p:txBody>
@@ -20222,75 +17406,14 @@
       </p:sp>
       <p:sp>
         <p:nvSpPr>
-          <p:cNvPr id="3" name="Rounded Rectangle 2"/>
-          <p:cNvSpPr/>
-          <p:nvPr/>
-        </p:nvSpPr>
-        <p:spPr>
-          <a:xfrm>
-            <a:off x="606475" y="579043"/>
-            <a:ext cx="103784" cy="103784"/>
-          </a:xfrm>
-          <a:prstGeom prst="roundRect">
-            <a:avLst>
-              <a:gd name="adj" fmla="val 50000"/>
-            </a:avLst>
-          </a:prstGeom>
-          <a:gradFill rotWithShape="1">
-            <a:gsLst>
-              <a:gs pos="0">
-                <a:srgbClr val="3A3F45"/>
-              </a:gs>
-              <a:gs pos="100000">
-                <a:srgbClr val="73787E"/>
-              </a:gs>
-            </a:gsLst>
-            <a:lin ang="18900000" scaled="0"/>
-          </a:gradFill>
-          <a:ln>
-            <a:noFill/>
-          </a:ln>
-          <a:effectLst>
-            <a:outerShdw blurRad="109728" dist="36576" dir="5400000" rotWithShape="0">
-              <a:srgbClr val="000000">
-                <a:alpha val="35000"/>
-              </a:srgbClr>
-            </a:outerShdw>
-          </a:effectLst>
-        </p:spPr>
-        <p:style>
-          <a:lnRef idx="1">
-            <a:schemeClr val="accent1"/>
-          </a:lnRef>
-          <a:fillRef idx="3">
-            <a:schemeClr val="accent1"/>
-          </a:fillRef>
-          <a:effectRef idx="2">
-            <a:schemeClr val="accent1"/>
-          </a:effectRef>
-          <a:fontRef idx="minor">
-            <a:schemeClr val="lt1"/>
-          </a:fontRef>
-        </p:style>
-        <p:txBody>
-          <a:bodyPr rtlCol="0" anchor="ctr"/>
-          <a:lstStyle/>
-          <a:p>
-            <a:pPr algn="ctr"/>
-            <a:endParaRPr/>
-          </a:p>
-        </p:txBody>
-      </p:sp>
-      <p:sp>
-        <p:nvSpPr>
           <p:cNvPr id="4" name="TextBox 3"/>
           <p:cNvSpPr txBox="1"/>
           <p:nvPr/>
         </p:nvSpPr>
         <p:spPr>
           <a:xfrm>
-            <a:off x="960120" y="274320"/>
-            <a:ext cx="9692640" cy="685800"/>
+            <a:off x="1417320" y="274320"/>
+            <a:ext cx="9235440" cy="685800"/>
           </a:xfrm>
           <a:prstGeom prst="rect">
             <a:avLst/>
@@ -21572,7 +18695,13 @@
           <p:cNvGraphicFramePr>
             <a:graphicFrameLocks noGrp="1"/>
           </p:cNvGraphicFramePr>
-          <p:nvPr/>
+          <p:nvPr>
+            <p:extLst>
+              <p:ext uri="{D42A27DB-BD31-4B8C-83A1-F6EECF244321}">
+                <p14:modId xmlns:p14="http://schemas.microsoft.com/office/powerpoint/2010/main" val="4075181056"/>
+              </p:ext>
+            </p:extLst>
+          </p:nvPr>
         </p:nvGraphicFramePr>
         <p:xfrm>
           <a:off x="502920" y="4297680"/>
@@ -21766,15 +18895,132 @@
                         </a:lnSpc>
                       </a:pPr>
                       <a:r>
-                        <a:rPr sz="1100" b="0">
+                        <a:rPr sz="1100" b="0" dirty="0" err="1">
                           <a:solidFill>
                             <a:srgbClr val="1C1C1E"/>
                           </a:solidFill>
                           <a:latin typeface="맑은 고딕"/>
                           <a:ea typeface="맑은 고딕"/>
                         </a:rPr>
-                        <a:t>정부 임계값만으로 구성한 재지정·우선순위 시뮬레이션과 표 산출물</a:t>
+                        <a:t>정부</a:t>
                       </a:r>
+                      <a:r>
+                        <a:rPr sz="1100" b="0" dirty="0">
+                          <a:solidFill>
+                            <a:srgbClr val="1C1C1E"/>
+                          </a:solidFill>
+                          <a:latin typeface="맑은 고딕"/>
+                          <a:ea typeface="맑은 고딕"/>
+                        </a:rPr>
+                        <a:t> </a:t>
+                      </a:r>
+                      <a:r>
+                        <a:rPr sz="1100" b="0" dirty="0" err="1">
+                          <a:solidFill>
+                            <a:srgbClr val="1C1C1E"/>
+                          </a:solidFill>
+                          <a:latin typeface="맑은 고딕"/>
+                          <a:ea typeface="맑은 고딕"/>
+                        </a:rPr>
+                        <a:t>임계값만으로</a:t>
+                      </a:r>
+                      <a:r>
+                        <a:rPr sz="1100" b="0" dirty="0">
+                          <a:solidFill>
+                            <a:srgbClr val="1C1C1E"/>
+                          </a:solidFill>
+                          <a:latin typeface="맑은 고딕"/>
+                          <a:ea typeface="맑은 고딕"/>
+                        </a:rPr>
+                        <a:t> </a:t>
+                      </a:r>
+                      <a:r>
+                        <a:rPr sz="1100" b="0" dirty="0" err="1">
+                          <a:solidFill>
+                            <a:srgbClr val="1C1C1E"/>
+                          </a:solidFill>
+                          <a:latin typeface="맑은 고딕"/>
+                          <a:ea typeface="맑은 고딕"/>
+                        </a:rPr>
+                        <a:t>구성한</a:t>
+                      </a:r>
+                      <a:r>
+                        <a:rPr sz="1100" b="0" dirty="0">
+                          <a:solidFill>
+                            <a:srgbClr val="1C1C1E"/>
+                          </a:solidFill>
+                          <a:latin typeface="맑은 고딕"/>
+                          <a:ea typeface="맑은 고딕"/>
+                        </a:rPr>
+                        <a:t> </a:t>
+                      </a:r>
+                      <a:r>
+                        <a:rPr sz="1100" b="0" dirty="0" err="1">
+                          <a:solidFill>
+                            <a:srgbClr val="1C1C1E"/>
+                          </a:solidFill>
+                          <a:latin typeface="맑은 고딕"/>
+                          <a:ea typeface="맑은 고딕"/>
+                        </a:rPr>
+                        <a:t>재지정·우선순위</a:t>
+                      </a:r>
+                      <a:r>
+                        <a:rPr sz="1100" b="0" dirty="0">
+                          <a:solidFill>
+                            <a:srgbClr val="1C1C1E"/>
+                          </a:solidFill>
+                          <a:latin typeface="맑은 고딕"/>
+                          <a:ea typeface="맑은 고딕"/>
+                        </a:rPr>
+                        <a:t> </a:t>
+                      </a:r>
+                      <a:r>
+                        <a:rPr lang="ko-KR" altLang="en-US" sz="1100" b="0" dirty="0">
+                          <a:solidFill>
+                            <a:srgbClr val="1C1C1E"/>
+                          </a:solidFill>
+                          <a:latin typeface="맑은 고딕"/>
+                          <a:ea typeface="맑은 고딕"/>
+                        </a:rPr>
+                        <a:t>결정 </a:t>
+                      </a:r>
+                      <a:r>
+                        <a:rPr sz="1100" b="0" dirty="0" err="1">
+                          <a:solidFill>
+                            <a:srgbClr val="1C1C1E"/>
+                          </a:solidFill>
+                          <a:latin typeface="맑은 고딕"/>
+                          <a:ea typeface="맑은 고딕"/>
+                        </a:rPr>
+                        <a:t>시뮬레이션과</a:t>
+                      </a:r>
+                      <a:r>
+                        <a:rPr sz="1100" b="0" dirty="0">
+                          <a:solidFill>
+                            <a:srgbClr val="1C1C1E"/>
+                          </a:solidFill>
+                          <a:latin typeface="맑은 고딕"/>
+                          <a:ea typeface="맑은 고딕"/>
+                        </a:rPr>
+                        <a:t> 표 </a:t>
+                      </a:r>
+                      <a:r>
+                        <a:rPr sz="1100" b="0" dirty="0" err="1">
+                          <a:solidFill>
+                            <a:srgbClr val="1C1C1E"/>
+                          </a:solidFill>
+                          <a:latin typeface="맑은 고딕"/>
+                          <a:ea typeface="맑은 고딕"/>
+                        </a:rPr>
+                        <a:t>산출물</a:t>
+                      </a:r>
+                      <a:endParaRPr sz="1100" b="0" dirty="0">
+                        <a:solidFill>
+                          <a:srgbClr val="1C1C1E"/>
+                        </a:solidFill>
+                        <a:latin typeface="맑은 고딕"/>
+                        <a:ea typeface="맑은 고딕"/>
+                      </a:endParaRPr>
                     </a:p>
                   </a:txBody>
                   <a:tcPr marL="73152" marR="73152" marT="27432" marB="27432" anchor="ctr">
@@ -21801,15 +19047,62 @@
                         </a:lnSpc>
                       </a:pPr>
                       <a:r>
-                        <a:rPr sz="1100" b="0">
+                        <a:rPr sz="1100" b="0" dirty="0" err="1">
                           <a:solidFill>
                             <a:srgbClr val="1C1C1E"/>
                           </a:solidFill>
                           <a:latin typeface="맑은 고딕"/>
                           <a:ea typeface="맑은 고딕"/>
                         </a:rPr>
-                        <a:t>성공한 분석만 보고</a:t>
+                        <a:t>성공한</a:t>
                       </a:r>
+                      <a:r>
+                        <a:rPr sz="1100" b="0" dirty="0">
+                          <a:solidFill>
+                            <a:srgbClr val="1C1C1E"/>
+                          </a:solidFill>
+                          <a:latin typeface="맑은 고딕"/>
+                          <a:ea typeface="맑은 고딕"/>
+                        </a:rPr>
+                        <a:t> </a:t>
+                      </a:r>
+                      <a:r>
+                        <a:rPr sz="1100" b="0" dirty="0" err="1">
+                          <a:solidFill>
+                            <a:srgbClr val="1C1C1E"/>
+                          </a:solidFill>
+                          <a:latin typeface="맑은 고딕"/>
+                          <a:ea typeface="맑은 고딕"/>
+                        </a:rPr>
+                        <a:t>분석만</a:t>
+                      </a:r>
+                      <a:r>
+                        <a:rPr sz="1100" b="0" dirty="0">
+                          <a:solidFill>
+                            <a:srgbClr val="1C1C1E"/>
+                          </a:solidFill>
+                          <a:latin typeface="맑은 고딕"/>
+                          <a:ea typeface="맑은 고딕"/>
+                        </a:rPr>
+                        <a:t> </a:t>
+                      </a:r>
+                      <a:r>
+                        <a:rPr sz="1100" b="0" dirty="0" err="1">
+                          <a:solidFill>
+                            <a:srgbClr val="1C1C1E"/>
+                          </a:solidFill>
+                          <a:latin typeface="맑은 고딕"/>
+                          <a:ea typeface="맑은 고딕"/>
+                        </a:rPr>
+                        <a:t>보고</a:t>
+                      </a:r>
+                      <a:endParaRPr sz="1100" b="0" dirty="0">
+                        <a:solidFill>
+                          <a:srgbClr val="1C1C1E"/>
+                        </a:solidFill>
+                        <a:latin typeface="맑은 고딕"/>
+                        <a:ea typeface="맑은 고딕"/>
+                      </a:endParaRPr>
                     </a:p>
                   </a:txBody>
                   <a:tcPr marL="73152" marR="73152" marT="27432" marB="27432" anchor="ctr">
@@ -21829,15 +19122,122 @@
                         </a:lnSpc>
                       </a:pPr>
                       <a:r>
-                        <a:rPr sz="1100" b="0">
+                        <a:rPr sz="1100" b="0" dirty="0" err="1">
                           <a:solidFill>
                             <a:srgbClr val="1C1C1E"/>
                           </a:solidFill>
                           <a:latin typeface="맑은 고딕"/>
                           <a:ea typeface="맑은 고딕"/>
                         </a:rPr>
-                        <a:t>기각된 설계(군집 등)와 민감도까지 투명하게 공개</a:t>
+                        <a:t>기각된</a:t>
                       </a:r>
+                      <a:r>
+                        <a:rPr sz="1100" b="0" dirty="0">
+                          <a:solidFill>
+                            <a:srgbClr val="1C1C1E"/>
+                          </a:solidFill>
+                          <a:latin typeface="맑은 고딕"/>
+                          <a:ea typeface="맑은 고딕"/>
+                        </a:rPr>
+                        <a:t> </a:t>
+                      </a:r>
+                      <a:r>
+                        <a:rPr sz="1100" b="0" dirty="0" err="1">
+                          <a:solidFill>
+                            <a:srgbClr val="1C1C1E"/>
+                          </a:solidFill>
+                          <a:latin typeface="맑은 고딕"/>
+                          <a:ea typeface="맑은 고딕"/>
+                        </a:rPr>
+                        <a:t>설계</a:t>
+                      </a:r>
+                      <a:r>
+                        <a:rPr sz="1100" b="0" dirty="0">
+                          <a:solidFill>
+                            <a:srgbClr val="1C1C1E"/>
+                          </a:solidFill>
+                          <a:latin typeface="맑은 고딕"/>
+                          <a:ea typeface="맑은 고딕"/>
+                        </a:rPr>
+                        <a:t>(</a:t>
+                      </a:r>
+                      <a:r>
+                        <a:rPr sz="1100" b="0" dirty="0" err="1">
+                          <a:solidFill>
+                            <a:srgbClr val="1C1C1E"/>
+                          </a:solidFill>
+                          <a:latin typeface="맑은 고딕"/>
+                          <a:ea typeface="맑은 고딕"/>
+                        </a:rPr>
+                        <a:t>군집</a:t>
+                      </a:r>
+                      <a:r>
+                        <a:rPr sz="1100" b="0" dirty="0">
+                          <a:solidFill>
+                            <a:srgbClr val="1C1C1E"/>
+                          </a:solidFill>
+                          <a:latin typeface="맑은 고딕"/>
+                          <a:ea typeface="맑은 고딕"/>
+                        </a:rPr>
+                        <a:t> 등)와 </a:t>
+                      </a:r>
+                      <a:r>
+                        <a:rPr sz="1100" b="0" dirty="0" err="1">
+                          <a:solidFill>
+                            <a:srgbClr val="1C1C1E"/>
+                          </a:solidFill>
+                          <a:latin typeface="맑은 고딕"/>
+                          <a:ea typeface="맑은 고딕"/>
+                        </a:rPr>
+                        <a:t>민감도까지</a:t>
+                      </a:r>
+                      <a:r>
+                        <a:rPr sz="1100" b="0" dirty="0">
+                          <a:solidFill>
+                            <a:srgbClr val="1C1C1E"/>
+                          </a:solidFill>
+                          <a:latin typeface="맑은 고딕"/>
+                          <a:ea typeface="맑은 고딕"/>
+                        </a:rPr>
+                        <a:t> </a:t>
+                      </a:r>
+                      <a:r>
+                        <a:rPr sz="1100" b="0" dirty="0" err="1">
+                          <a:solidFill>
+                            <a:srgbClr val="1C1C1E"/>
+                          </a:solidFill>
+                          <a:latin typeface="맑은 고딕"/>
+                          <a:ea typeface="맑은 고딕"/>
+                        </a:rPr>
+                        <a:t>투명하게</a:t>
+                      </a:r>
+                      <a:r>
+                        <a:rPr sz="1100" b="0" dirty="0">
+                          <a:solidFill>
+                            <a:srgbClr val="1C1C1E"/>
+                          </a:solidFill>
+                          <a:latin typeface="맑은 고딕"/>
+                          <a:ea typeface="맑은 고딕"/>
+                        </a:rPr>
+                        <a:t> </a:t>
+                      </a:r>
+                      <a:r>
+                        <a:rPr sz="1100" b="0" dirty="0" err="1">
+                          <a:solidFill>
+                            <a:srgbClr val="1C1C1E"/>
+                          </a:solidFill>
+                          <a:latin typeface="맑은 고딕"/>
+                          <a:ea typeface="맑은 고딕"/>
+                        </a:rPr>
+                        <a:t>공개</a:t>
+                      </a:r>
+                      <a:endParaRPr sz="1100" b="0" dirty="0">
+                        <a:solidFill>
+                          <a:srgbClr val="1C1C1E"/>
+                        </a:solidFill>
+                        <a:latin typeface="맑은 고딕"/>
+                        <a:ea typeface="맑은 고딕"/>
+                      </a:endParaRPr>
                     </a:p>
                   </a:txBody>
                   <a:tcPr marL="73152" marR="73152" marT="27432" marB="27432" anchor="ctr">
@@ -21856,6 +19256,49 @@
           </a:graphicData>
         </a:graphic>
       </p:graphicFrame>
+      <p:sp>
+        <p:nvSpPr>
+          <p:cNvPr id="14" name="TextBox 13"/>
+          <p:cNvSpPr txBox="1"/>
+          <p:nvPr/>
+        </p:nvSpPr>
+        <p:spPr>
+          <a:xfrm>
+            <a:off x="502920" y="274320"/>
+            <a:ext cx="914400" cy="685800"/>
+          </a:xfrm>
+          <a:prstGeom prst="rect">
+            <a:avLst/>
+          </a:prstGeom>
+          <a:noFill/>
+        </p:spPr>
+        <p:txBody>
+          <a:bodyPr wrap="square" anchor="ctr">
+            <a:spAutoFit/>
+          </a:bodyPr>
+          <a:lstStyle/>
+          <a:p>
+            <a:pPr>
+              <a:lnSpc>
+                <a:spcPct val="114000"/>
+              </a:lnSpc>
+              <a:spcAft>
+                <a:spcPts val="0"/>
+              </a:spcAft>
+            </a:pPr>
+            <a:r>
+              <a:rPr sz="1500" b="1">
+                <a:solidFill>
+                  <a:srgbClr val="8A8F95"/>
+                </a:solidFill>
+                <a:latin typeface="맑은 고딕"/>
+                <a:ea typeface="맑은 고딕"/>
+              </a:rPr>
+              <a:t>Ⅱ-1</a:t>
+            </a:r>
+          </a:p>
+        </p:txBody>
+      </p:sp>
     </p:spTree>
   </p:cSld>
   <p:clrMapOvr>
@@ -21928,75 +19371,14 @@
       </p:sp>
       <p:sp>
         <p:nvSpPr>
-          <p:cNvPr id="3" name="Rounded Rectangle 2"/>
-          <p:cNvSpPr/>
-          <p:nvPr/>
-        </p:nvSpPr>
-        <p:spPr>
-          <a:xfrm>
-            <a:off x="606475" y="579043"/>
-            <a:ext cx="103784" cy="103784"/>
-          </a:xfrm>
-          <a:prstGeom prst="roundRect">
-            <a:avLst>
-              <a:gd name="adj" fmla="val 50000"/>
-            </a:avLst>
-          </a:prstGeom>
-          <a:gradFill rotWithShape="1">
-            <a:gsLst>
-              <a:gs pos="0">
-                <a:srgbClr val="3A3F45"/>
-              </a:gs>
-              <a:gs pos="100000">
-                <a:srgbClr val="73787E"/>
-              </a:gs>
-            </a:gsLst>
-            <a:lin ang="18900000" scaled="0"/>
-          </a:gradFill>
-          <a:ln>
-            <a:noFill/>
-          </a:ln>
-          <a:effectLst>
-            <a:outerShdw blurRad="109728" dist="36576" dir="5400000" rotWithShape="0">
-              <a:srgbClr val="000000">
-                <a:alpha val="35000"/>
-              </a:srgbClr>
-            </a:outerShdw>
-          </a:effectLst>
-        </p:spPr>
-        <p:style>
-          <a:lnRef idx="1">
-            <a:schemeClr val="accent1"/>
-          </a:lnRef>
-          <a:fillRef idx="3">
-            <a:schemeClr val="accent1"/>
-          </a:fillRef>
-          <a:effectRef idx="2">
-            <a:schemeClr val="accent1"/>
-          </a:effectRef>
-          <a:fontRef idx="minor">
-            <a:schemeClr val="lt1"/>
-          </a:fontRef>
-        </p:style>
-        <p:txBody>
-          <a:bodyPr rtlCol="0" anchor="ctr"/>
-          <a:lstStyle/>
-          <a:p>
-            <a:pPr algn="ctr"/>
-            <a:endParaRPr/>
-          </a:p>
-        </p:txBody>
-      </p:sp>
-      <p:sp>
-        <p:nvSpPr>
           <p:cNvPr id="4" name="TextBox 3"/>
           <p:cNvSpPr txBox="1"/>
           <p:nvPr/>
         </p:nvSpPr>
         <p:spPr>
           <a:xfrm>
-            <a:off x="960120" y="274320"/>
-            <a:ext cx="9692640" cy="685800"/>
+            <a:off x="1417320" y="274320"/>
+            <a:ext cx="9235440" cy="685800"/>
           </a:xfrm>
           <a:prstGeom prst="rect">
             <a:avLst/>
@@ -22952,6 +20334,49 @@
           </a:p>
         </p:txBody>
       </p:sp>
+      <p:sp>
+        <p:nvSpPr>
+          <p:cNvPr id="16" name="TextBox 15"/>
+          <p:cNvSpPr txBox="1"/>
+          <p:nvPr/>
+        </p:nvSpPr>
+        <p:spPr>
+          <a:xfrm>
+            <a:off x="502920" y="274320"/>
+            <a:ext cx="914400" cy="685800"/>
+          </a:xfrm>
+          <a:prstGeom prst="rect">
+            <a:avLst/>
+          </a:prstGeom>
+          <a:noFill/>
+        </p:spPr>
+        <p:txBody>
+          <a:bodyPr wrap="square" anchor="ctr">
+            <a:spAutoFit/>
+          </a:bodyPr>
+          <a:lstStyle/>
+          <a:p>
+            <a:pPr>
+              <a:lnSpc>
+                <a:spcPct val="114000"/>
+              </a:lnSpc>
+              <a:spcAft>
+                <a:spcPts val="0"/>
+              </a:spcAft>
+            </a:pPr>
+            <a:r>
+              <a:rPr sz="1500" b="1">
+                <a:solidFill>
+                  <a:srgbClr val="8A8F95"/>
+                </a:solidFill>
+                <a:latin typeface="맑은 고딕"/>
+                <a:ea typeface="맑은 고딕"/>
+              </a:rPr>
+              <a:t>Ⅱ-2</a:t>
+            </a:r>
+          </a:p>
+        </p:txBody>
+      </p:sp>
     </p:spTree>
   </p:cSld>
   <p:clrMapOvr>
@@ -23024,75 +20449,14 @@
       </p:sp>
       <p:sp>
         <p:nvSpPr>
-          <p:cNvPr id="3" name="Rounded Rectangle 2"/>
-          <p:cNvSpPr/>
-          <p:nvPr/>
-        </p:nvSpPr>
-        <p:spPr>
-          <a:xfrm>
-            <a:off x="606475" y="579043"/>
-            <a:ext cx="103784" cy="103784"/>
-          </a:xfrm>
-          <a:prstGeom prst="roundRect">
-            <a:avLst>
-              <a:gd name="adj" fmla="val 50000"/>
-            </a:avLst>
-          </a:prstGeom>
-          <a:gradFill rotWithShape="1">
-            <a:gsLst>
-              <a:gs pos="0">
-                <a:srgbClr val="3A3F45"/>
-              </a:gs>
-              <a:gs pos="100000">
-                <a:srgbClr val="73787E"/>
-              </a:gs>
-            </a:gsLst>
-            <a:lin ang="18900000" scaled="0"/>
-          </a:gradFill>
-          <a:ln>
-            <a:noFill/>
-          </a:ln>
-          <a:effectLst>
-            <a:outerShdw blurRad="109728" dist="36576" dir="5400000" rotWithShape="0">
-              <a:srgbClr val="000000">
-                <a:alpha val="35000"/>
-              </a:srgbClr>
-            </a:outerShdw>
-          </a:effectLst>
-        </p:spPr>
-        <p:style>
-          <a:lnRef idx="1">
-            <a:schemeClr val="accent1"/>
-          </a:lnRef>
-          <a:fillRef idx="3">
-            <a:schemeClr val="accent1"/>
-          </a:fillRef>
-          <a:effectRef idx="2">
-            <a:schemeClr val="accent1"/>
-          </a:effectRef>
-          <a:fontRef idx="minor">
-            <a:schemeClr val="lt1"/>
-          </a:fontRef>
-        </p:style>
-        <p:txBody>
-          <a:bodyPr rtlCol="0" anchor="ctr"/>
-          <a:lstStyle/>
-          <a:p>
-            <a:pPr algn="ctr"/>
-            <a:endParaRPr/>
-          </a:p>
-        </p:txBody>
-      </p:sp>
-      <p:sp>
-        <p:nvSpPr>
           <p:cNvPr id="4" name="TextBox 3"/>
           <p:cNvSpPr txBox="1"/>
           <p:nvPr/>
         </p:nvSpPr>
         <p:spPr>
           <a:xfrm>
-            <a:off x="960120" y="274320"/>
-            <a:ext cx="9692640" cy="685800"/>
+            <a:off x="1417320" y="274320"/>
+            <a:ext cx="9235440" cy="685800"/>
           </a:xfrm>
           <a:prstGeom prst="rect">
             <a:avLst/>
@@ -24114,6 +21478,49 @@
           </a:p>
         </p:txBody>
       </p:sp>
+      <p:sp>
+        <p:nvSpPr>
+          <p:cNvPr id="17" name="TextBox 16"/>
+          <p:cNvSpPr txBox="1"/>
+          <p:nvPr/>
+        </p:nvSpPr>
+        <p:spPr>
+          <a:xfrm>
+            <a:off x="502920" y="274320"/>
+            <a:ext cx="914400" cy="685800"/>
+          </a:xfrm>
+          <a:prstGeom prst="rect">
+            <a:avLst/>
+          </a:prstGeom>
+          <a:noFill/>
+        </p:spPr>
+        <p:txBody>
+          <a:bodyPr wrap="square" anchor="ctr">
+            <a:spAutoFit/>
+          </a:bodyPr>
+          <a:lstStyle/>
+          <a:p>
+            <a:pPr>
+              <a:lnSpc>
+                <a:spcPct val="114000"/>
+              </a:lnSpc>
+              <a:spcAft>
+                <a:spcPts val="0"/>
+              </a:spcAft>
+            </a:pPr>
+            <a:r>
+              <a:rPr sz="1500" b="1">
+                <a:solidFill>
+                  <a:srgbClr val="8A8F95"/>
+                </a:solidFill>
+                <a:latin typeface="맑은 고딕"/>
+                <a:ea typeface="맑은 고딕"/>
+              </a:rPr>
+              <a:t>Ⅲ-1</a:t>
+            </a:r>
+          </a:p>
+        </p:txBody>
+      </p:sp>
     </p:spTree>
   </p:cSld>
   <p:clrMapOvr>
@@ -24186,75 +21593,14 @@
       </p:sp>
       <p:sp>
         <p:nvSpPr>
-          <p:cNvPr id="3" name="Rounded Rectangle 2"/>
-          <p:cNvSpPr/>
-          <p:nvPr/>
-        </p:nvSpPr>
-        <p:spPr>
-          <a:xfrm>
-            <a:off x="606475" y="579043"/>
-            <a:ext cx="103784" cy="103784"/>
-          </a:xfrm>
-          <a:prstGeom prst="roundRect">
-            <a:avLst>
-              <a:gd name="adj" fmla="val 50000"/>
-            </a:avLst>
-          </a:prstGeom>
-          <a:gradFill rotWithShape="1">
-            <a:gsLst>
-              <a:gs pos="0">
-                <a:srgbClr val="3A3F45"/>
-              </a:gs>
-              <a:gs pos="100000">
-                <a:srgbClr val="73787E"/>
-              </a:gs>
-            </a:gsLst>
-            <a:lin ang="18900000" scaled="0"/>
-          </a:gradFill>
-          <a:ln>
-            <a:noFill/>
-          </a:ln>
-          <a:effectLst>
-            <a:outerShdw blurRad="109728" dist="36576" dir="5400000" rotWithShape="0">
-              <a:srgbClr val="000000">
-                <a:alpha val="35000"/>
-              </a:srgbClr>
-            </a:outerShdw>
-          </a:effectLst>
-        </p:spPr>
-        <p:style>
-          <a:lnRef idx="1">
-            <a:schemeClr val="accent1"/>
-          </a:lnRef>
-          <a:fillRef idx="3">
-            <a:schemeClr val="accent1"/>
-          </a:fillRef>
-          <a:effectRef idx="2">
-            <a:schemeClr val="accent1"/>
-          </a:effectRef>
-          <a:fontRef idx="minor">
-            <a:schemeClr val="lt1"/>
-          </a:fontRef>
-        </p:style>
-        <p:txBody>
-          <a:bodyPr rtlCol="0" anchor="ctr"/>
-          <a:lstStyle/>
-          <a:p>
-            <a:pPr algn="ctr"/>
-            <a:endParaRPr/>
-          </a:p>
-        </p:txBody>
-      </p:sp>
-      <p:sp>
-        <p:nvSpPr>
           <p:cNvPr id="4" name="TextBox 3"/>
           <p:cNvSpPr txBox="1"/>
           <p:nvPr/>
         </p:nvSpPr>
         <p:spPr>
           <a:xfrm>
-            <a:off x="960120" y="274320"/>
-            <a:ext cx="9692640" cy="685800"/>
+            <a:off x="1417320" y="274320"/>
+            <a:ext cx="9235440" cy="685800"/>
           </a:xfrm>
           <a:prstGeom prst="rect">
             <a:avLst/>
@@ -25001,6 +22347,49 @@
           </a:p>
         </p:txBody>
       </p:sp>
+      <p:sp>
+        <p:nvSpPr>
+          <p:cNvPr id="11" name="TextBox 10"/>
+          <p:cNvSpPr txBox="1"/>
+          <p:nvPr/>
+        </p:nvSpPr>
+        <p:spPr>
+          <a:xfrm>
+            <a:off x="502920" y="274320"/>
+            <a:ext cx="914400" cy="685800"/>
+          </a:xfrm>
+          <a:prstGeom prst="rect">
+            <a:avLst/>
+          </a:prstGeom>
+          <a:noFill/>
+        </p:spPr>
+        <p:txBody>
+          <a:bodyPr wrap="square" anchor="ctr">
+            <a:spAutoFit/>
+          </a:bodyPr>
+          <a:lstStyle/>
+          <a:p>
+            <a:pPr>
+              <a:lnSpc>
+                <a:spcPct val="114000"/>
+              </a:lnSpc>
+              <a:spcAft>
+                <a:spcPts val="0"/>
+              </a:spcAft>
+            </a:pPr>
+            <a:r>
+              <a:rPr sz="1500" b="1">
+                <a:solidFill>
+                  <a:srgbClr val="8A8F95"/>
+                </a:solidFill>
+                <a:latin typeface="맑은 고딕"/>
+                <a:ea typeface="맑은 고딕"/>
+              </a:rPr>
+              <a:t>Ⅲ-2</a:t>
+            </a:r>
+          </a:p>
+        </p:txBody>
+      </p:sp>
     </p:spTree>
   </p:cSld>
   <p:clrMapOvr>

--- a/04_제출물/데이터분석_계획서.pptx
+++ b/04_제출물/데이터분석_계획서.pptx
@@ -314,7 +314,7 @@
           <a:p>
             <a:fld id="{5BCAD085-E8A6-8845-BD4E-CB4CCA059FC4}" type="datetimeFigureOut">
               <a:rPr lang="en-US" smtClean="0"/>
-              <a:t>8/12/2026</a:t>
+              <a:t>8/13/2026</a:t>
             </a:fld>
             <a:endParaRPr lang="en-US"/>
           </a:p>
@@ -482,7 +482,7 @@
           <a:p>
             <a:fld id="{5BCAD085-E8A6-8845-BD4E-CB4CCA059FC4}" type="datetimeFigureOut">
               <a:rPr lang="en-US" smtClean="0"/>
-              <a:t>8/12/2026</a:t>
+              <a:t>8/13/2026</a:t>
             </a:fld>
             <a:endParaRPr lang="en-US"/>
           </a:p>
@@ -660,7 +660,7 @@
           <a:p>
             <a:fld id="{5BCAD085-E8A6-8845-BD4E-CB4CCA059FC4}" type="datetimeFigureOut">
               <a:rPr lang="en-US" smtClean="0"/>
-              <a:t>8/12/2026</a:t>
+              <a:t>8/13/2026</a:t>
             </a:fld>
             <a:endParaRPr lang="en-US"/>
           </a:p>
@@ -828,7 +828,7 @@
           <a:p>
             <a:fld id="{5BCAD085-E8A6-8845-BD4E-CB4CCA059FC4}" type="datetimeFigureOut">
               <a:rPr lang="en-US" smtClean="0"/>
-              <a:t>8/12/2026</a:t>
+              <a:t>8/13/2026</a:t>
             </a:fld>
             <a:endParaRPr lang="en-US"/>
           </a:p>
@@ -1073,7 +1073,7 @@
           <a:p>
             <a:fld id="{5BCAD085-E8A6-8845-BD4E-CB4CCA059FC4}" type="datetimeFigureOut">
               <a:rPr lang="en-US" smtClean="0"/>
-              <a:t>8/12/2026</a:t>
+              <a:t>8/13/2026</a:t>
             </a:fld>
             <a:endParaRPr lang="en-US"/>
           </a:p>
@@ -1358,7 +1358,7 @@
           <a:p>
             <a:fld id="{5BCAD085-E8A6-8845-BD4E-CB4CCA059FC4}" type="datetimeFigureOut">
               <a:rPr lang="en-US" smtClean="0"/>
-              <a:t>8/12/2026</a:t>
+              <a:t>8/13/2026</a:t>
             </a:fld>
             <a:endParaRPr lang="en-US"/>
           </a:p>
@@ -1777,7 +1777,7 @@
           <a:p>
             <a:fld id="{5BCAD085-E8A6-8845-BD4E-CB4CCA059FC4}" type="datetimeFigureOut">
               <a:rPr lang="en-US" smtClean="0"/>
-              <a:t>8/12/2026</a:t>
+              <a:t>8/13/2026</a:t>
             </a:fld>
             <a:endParaRPr lang="en-US"/>
           </a:p>
@@ -1894,7 +1894,7 @@
           <a:p>
             <a:fld id="{5BCAD085-E8A6-8845-BD4E-CB4CCA059FC4}" type="datetimeFigureOut">
               <a:rPr lang="en-US" smtClean="0"/>
-              <a:t>8/12/2026</a:t>
+              <a:t>8/13/2026</a:t>
             </a:fld>
             <a:endParaRPr lang="en-US"/>
           </a:p>
@@ -1989,7 +1989,7 @@
           <a:p>
             <a:fld id="{5BCAD085-E8A6-8845-BD4E-CB4CCA059FC4}" type="datetimeFigureOut">
               <a:rPr lang="en-US" smtClean="0"/>
-              <a:t>8/12/2026</a:t>
+              <a:t>8/13/2026</a:t>
             </a:fld>
             <a:endParaRPr lang="en-US"/>
           </a:p>
@@ -2264,7 +2264,7 @@
           <a:p>
             <a:fld id="{5BCAD085-E8A6-8845-BD4E-CB4CCA059FC4}" type="datetimeFigureOut">
               <a:rPr lang="en-US" smtClean="0"/>
-              <a:t>8/12/2026</a:t>
+              <a:t>8/13/2026</a:t>
             </a:fld>
             <a:endParaRPr lang="en-US"/>
           </a:p>
@@ -2516,7 +2516,7 @@
           <a:p>
             <a:fld id="{5BCAD085-E8A6-8845-BD4E-CB4CCA059FC4}" type="datetimeFigureOut">
               <a:rPr lang="en-US" smtClean="0"/>
-              <a:t>8/12/2026</a:t>
+              <a:t>8/13/2026</a:t>
             </a:fld>
             <a:endParaRPr lang="en-US"/>
           </a:p>
@@ -2727,7 +2727,7 @@
           <a:p>
             <a:fld id="{5BCAD085-E8A6-8845-BD4E-CB4CCA059FC4}" type="datetimeFigureOut">
               <a:rPr lang="en-US" smtClean="0"/>
-              <a:t>8/12/2026</a:t>
+              <a:t>8/13/2026</a:t>
             </a:fld>
             <a:endParaRPr lang="en-US"/>
           </a:p>
@@ -3594,7 +3594,7 @@
         </p:nvSpPr>
         <p:spPr>
           <a:xfrm>
-            <a:off x="1691640" y="402336"/>
+            <a:off x="1353312" y="384048"/>
             <a:ext cx="9006840" cy="530352"/>
           </a:xfrm>
           <a:prstGeom prst="rect">
@@ -3760,8 +3760,8 @@
         </p:nvSpPr>
         <p:spPr>
           <a:xfrm>
-            <a:off x="10835640" y="164592"/>
-            <a:ext cx="1188720" cy="777240"/>
+            <a:off x="11393424" y="6117336"/>
+            <a:ext cx="777240" cy="374904"/>
           </a:xfrm>
           <a:prstGeom prst="rect">
             <a:avLst/>
@@ -3997,7 +3997,7 @@
         <p:spPr>
           <a:xfrm>
             <a:off x="502920" y="1737360"/>
-            <a:ext cx="3611880" cy="1920240"/>
+            <a:ext cx="3611880" cy="1499616"/>
           </a:xfrm>
           <a:prstGeom prst="roundRect">
             <a:avLst>
@@ -4052,7 +4052,7 @@
         <p:spPr>
           <a:xfrm>
             <a:off x="685800" y="1865376"/>
-            <a:ext cx="3246120" cy="1664208"/>
+            <a:ext cx="3246120" cy="1243584"/>
           </a:xfrm>
           <a:prstGeom prst="rect">
             <a:avLst/>
@@ -4626,7 +4626,7 @@
         <p:spPr>
           <a:xfrm>
             <a:off x="4343400" y="1737360"/>
-            <a:ext cx="3611880" cy="1920240"/>
+            <a:ext cx="3611880" cy="1499616"/>
           </a:xfrm>
           <a:prstGeom prst="roundRect">
             <a:avLst>
@@ -4681,7 +4681,7 @@
         <p:spPr>
           <a:xfrm>
             <a:off x="4526280" y="1865376"/>
-            <a:ext cx="3246120" cy="1664208"/>
+            <a:ext cx="3246120" cy="1243584"/>
           </a:xfrm>
           <a:prstGeom prst="rect">
             <a:avLst/>
@@ -4764,7 +4764,7 @@
         <p:spPr>
           <a:xfrm>
             <a:off x="8183880" y="1737360"/>
-            <a:ext cx="3611880" cy="1920240"/>
+            <a:ext cx="3611880" cy="1499616"/>
           </a:xfrm>
           <a:prstGeom prst="roundRect">
             <a:avLst>
@@ -4819,7 +4819,7 @@
         <p:spPr>
           <a:xfrm>
             <a:off x="8366760" y="1865376"/>
-            <a:ext cx="3246120" cy="1664208"/>
+            <a:ext cx="3246120" cy="1243584"/>
           </a:xfrm>
           <a:prstGeom prst="rect">
             <a:avLst/>
@@ -5503,7 +5503,7 @@
         <p:spPr>
           <a:xfrm>
             <a:off x="502920" y="3977639"/>
-            <a:ext cx="11292840" cy="1417320"/>
+            <a:ext cx="11292840" cy="676656"/>
           </a:xfrm>
           <a:prstGeom prst="roundRect">
             <a:avLst>
@@ -5558,7 +5558,7 @@
         <p:spPr>
           <a:xfrm>
             <a:off x="685800" y="4105656"/>
-            <a:ext cx="10927080" cy="555217"/>
+            <a:ext cx="10927080" cy="420623"/>
           </a:xfrm>
           <a:prstGeom prst="rect">
             <a:avLst/>
@@ -5924,8 +5924,8 @@
         </p:nvSpPr>
         <p:spPr>
           <a:xfrm>
-            <a:off x="502920" y="182880"/>
-            <a:ext cx="1051560" cy="749808"/>
+            <a:off x="502920" y="356616"/>
+            <a:ext cx="1051560" cy="475488"/>
           </a:xfrm>
           <a:prstGeom prst="rect">
             <a:avLst/>
@@ -5967,8 +5967,8 @@
         </p:nvSpPr>
         <p:spPr>
           <a:xfrm>
-            <a:off x="1691640" y="182880"/>
-            <a:ext cx="9006840" cy="219456"/>
+            <a:off x="10698480" y="502920"/>
+            <a:ext cx="1417320" cy="274320"/>
           </a:xfrm>
           <a:prstGeom prst="rect">
             <a:avLst/>
@@ -6080,7 +6080,7 @@
         </p:nvSpPr>
         <p:spPr>
           <a:xfrm>
-            <a:off x="1691640" y="402336"/>
+            <a:off x="1353312" y="384048"/>
             <a:ext cx="9006840" cy="530352"/>
           </a:xfrm>
           <a:prstGeom prst="rect">
@@ -6176,8 +6176,8 @@
         </p:nvSpPr>
         <p:spPr>
           <a:xfrm>
-            <a:off x="10835640" y="164592"/>
-            <a:ext cx="1188720" cy="777240"/>
+            <a:off x="11393424" y="6117336"/>
+            <a:ext cx="777240" cy="374904"/>
           </a:xfrm>
           <a:prstGeom prst="rect">
             <a:avLst/>
@@ -6306,7 +6306,7 @@
         <p:spPr>
           <a:xfrm>
             <a:off x="502920" y="1737360"/>
-            <a:ext cx="11292840" cy="1188720"/>
+            <a:ext cx="11292840" cy="868680"/>
           </a:xfrm>
           <a:prstGeom prst="roundRect">
             <a:avLst>
@@ -6361,7 +6361,7 @@
         <p:spPr>
           <a:xfrm>
             <a:off x="685800" y="1865376"/>
-            <a:ext cx="10927080" cy="932688"/>
+            <a:ext cx="10927080" cy="612647"/>
           </a:xfrm>
           <a:prstGeom prst="rect">
             <a:avLst/>
@@ -6444,7 +6444,7 @@
         <p:spPr>
           <a:xfrm>
             <a:off x="502920" y="3154680"/>
-            <a:ext cx="2286000" cy="685800"/>
+            <a:ext cx="2286000" cy="502920"/>
           </a:xfrm>
           <a:prstGeom prst="roundRect">
             <a:avLst>
@@ -6505,7 +6505,7 @@
         <p:spPr>
           <a:xfrm>
             <a:off x="640080" y="3227832"/>
-            <a:ext cx="2103120" cy="548640"/>
+            <a:ext cx="2103120" cy="246888"/>
           </a:xfrm>
           <a:prstGeom prst="rect">
             <a:avLst/>
@@ -6548,7 +6548,7 @@
         <p:spPr>
           <a:xfrm>
             <a:off x="2926080" y="3154680"/>
-            <a:ext cx="8869680" cy="685800"/>
+            <a:ext cx="8869680" cy="502920"/>
           </a:xfrm>
           <a:prstGeom prst="roundRect">
             <a:avLst>
@@ -6603,7 +6603,7 @@
         <p:spPr>
           <a:xfrm>
             <a:off x="3108960" y="3227832"/>
-            <a:ext cx="8549640" cy="548640"/>
+            <a:ext cx="8549640" cy="246888"/>
           </a:xfrm>
           <a:prstGeom prst="rect">
             <a:avLst/>
@@ -6646,7 +6646,7 @@
         <p:spPr>
           <a:xfrm>
             <a:off x="502920" y="4023360"/>
-            <a:ext cx="2286000" cy="685800"/>
+            <a:ext cx="2286000" cy="502920"/>
           </a:xfrm>
           <a:prstGeom prst="roundRect">
             <a:avLst>
@@ -6707,7 +6707,7 @@
         <p:spPr>
           <a:xfrm>
             <a:off x="640080" y="4096512"/>
-            <a:ext cx="2103120" cy="548640"/>
+            <a:ext cx="2103120" cy="246888"/>
           </a:xfrm>
           <a:prstGeom prst="rect">
             <a:avLst/>
@@ -6750,7 +6750,7 @@
         <p:spPr>
           <a:xfrm>
             <a:off x="2926080" y="4023360"/>
-            <a:ext cx="8869680" cy="685800"/>
+            <a:ext cx="8869680" cy="502920"/>
           </a:xfrm>
           <a:prstGeom prst="roundRect">
             <a:avLst>
@@ -6805,7 +6805,7 @@
         <p:spPr>
           <a:xfrm>
             <a:off x="3108960" y="4096512"/>
-            <a:ext cx="8549640" cy="548640"/>
+            <a:ext cx="8549640" cy="246888"/>
           </a:xfrm>
           <a:prstGeom prst="rect">
             <a:avLst/>
@@ -7736,8 +7736,8 @@
         </p:nvSpPr>
         <p:spPr>
           <a:xfrm>
-            <a:off x="502920" y="182880"/>
-            <a:ext cx="1051560" cy="749808"/>
+            <a:off x="502920" y="356616"/>
+            <a:ext cx="1051560" cy="475488"/>
           </a:xfrm>
           <a:prstGeom prst="rect">
             <a:avLst/>
@@ -7779,8 +7779,8 @@
         </p:nvSpPr>
         <p:spPr>
           <a:xfrm>
-            <a:off x="1691640" y="182880"/>
-            <a:ext cx="9006840" cy="219456"/>
+            <a:off x="10698480" y="502920"/>
+            <a:ext cx="1417320" cy="274320"/>
           </a:xfrm>
           <a:prstGeom prst="rect">
             <a:avLst/>
@@ -7892,7 +7892,7 @@
         </p:nvSpPr>
         <p:spPr>
           <a:xfrm>
-            <a:off x="1691640" y="402336"/>
+            <a:off x="1353312" y="384048"/>
             <a:ext cx="9006840" cy="530352"/>
           </a:xfrm>
           <a:prstGeom prst="rect">
@@ -7988,8 +7988,8 @@
         </p:nvSpPr>
         <p:spPr>
           <a:xfrm>
-            <a:off x="10835640" y="164592"/>
-            <a:ext cx="1188720" cy="777240"/>
+            <a:off x="11393424" y="6117336"/>
+            <a:ext cx="777240" cy="374904"/>
           </a:xfrm>
           <a:prstGeom prst="rect">
             <a:avLst/>
@@ -9596,7 +9596,7 @@
         <p:spPr>
           <a:xfrm>
             <a:off x="502920" y="3474720"/>
-            <a:ext cx="11292840" cy="1417320"/>
+            <a:ext cx="11292840" cy="1252728"/>
           </a:xfrm>
           <a:prstGeom prst="roundRect">
             <a:avLst>
@@ -9651,7 +9651,7 @@
         <p:spPr>
           <a:xfrm>
             <a:off x="685800" y="3602736"/>
-            <a:ext cx="10927080" cy="1161288"/>
+            <a:ext cx="10927080" cy="996696"/>
           </a:xfrm>
           <a:prstGeom prst="rect">
             <a:avLst/>
@@ -10711,8 +10711,8 @@
         </p:nvSpPr>
         <p:spPr>
           <a:xfrm>
-            <a:off x="502920" y="182880"/>
-            <a:ext cx="1051560" cy="749808"/>
+            <a:off x="502920" y="356616"/>
+            <a:ext cx="1051560" cy="475488"/>
           </a:xfrm>
           <a:prstGeom prst="rect">
             <a:avLst/>
@@ -10754,8 +10754,8 @@
         </p:nvSpPr>
         <p:spPr>
           <a:xfrm>
-            <a:off x="1691640" y="182880"/>
-            <a:ext cx="9006840" cy="219456"/>
+            <a:off x="10698480" y="502920"/>
+            <a:ext cx="1417320" cy="274320"/>
           </a:xfrm>
           <a:prstGeom prst="rect">
             <a:avLst/>
@@ -10867,7 +10867,7 @@
         </p:nvSpPr>
         <p:spPr>
           <a:xfrm>
-            <a:off x="1691640" y="402336"/>
+            <a:off x="1353312" y="384048"/>
             <a:ext cx="9006840" cy="530352"/>
           </a:xfrm>
           <a:prstGeom prst="rect">
@@ -10970,8 +10970,8 @@
         </p:nvSpPr>
         <p:spPr>
           <a:xfrm>
-            <a:off x="10835640" y="164592"/>
-            <a:ext cx="1188720" cy="570926"/>
+            <a:off x="11393424" y="6117336"/>
+            <a:ext cx="777240" cy="374904"/>
           </a:xfrm>
           <a:prstGeom prst="rect">
             <a:avLst/>
@@ -11755,8 +11755,8 @@
         </p:nvSpPr>
         <p:spPr>
           <a:xfrm>
-            <a:off x="502920" y="182880"/>
-            <a:ext cx="1051560" cy="749808"/>
+            <a:off x="502920" y="356616"/>
+            <a:ext cx="1051560" cy="475488"/>
           </a:xfrm>
           <a:prstGeom prst="rect">
             <a:avLst/>
@@ -11798,8 +11798,8 @@
         </p:nvSpPr>
         <p:spPr>
           <a:xfrm>
-            <a:off x="1691640" y="182880"/>
-            <a:ext cx="9006840" cy="219456"/>
+            <a:off x="10698480" y="502920"/>
+            <a:ext cx="1417320" cy="274320"/>
           </a:xfrm>
           <a:prstGeom prst="rect">
             <a:avLst/>
@@ -12337,7 +12337,7 @@
         <p:spPr>
           <a:xfrm>
             <a:off x="502920" y="1325880"/>
-            <a:ext cx="5532120" cy="1499616"/>
+            <a:ext cx="5532120" cy="1042415"/>
           </a:xfrm>
           <a:prstGeom prst="roundRect">
             <a:avLst>
@@ -12392,7 +12392,7 @@
         <p:spPr>
           <a:xfrm>
             <a:off x="685800" y="1444752"/>
-            <a:ext cx="5166360" cy="1005916"/>
+            <a:ext cx="5166360" cy="786383"/>
           </a:xfrm>
           <a:prstGeom prst="rect">
             <a:avLst/>
@@ -12693,7 +12693,7 @@
         <p:spPr>
           <a:xfrm>
             <a:off x="502920" y="3026663"/>
-            <a:ext cx="5532120" cy="1225296"/>
+            <a:ext cx="5532120" cy="859536"/>
           </a:xfrm>
           <a:prstGeom prst="roundRect">
             <a:avLst>
@@ -12748,7 +12748,7 @@
         <p:spPr>
           <a:xfrm>
             <a:off x="685800" y="3145535"/>
-            <a:ext cx="5166360" cy="778546"/>
+            <a:ext cx="5166360" cy="603503"/>
           </a:xfrm>
           <a:prstGeom prst="rect">
             <a:avLst/>
@@ -13005,7 +13005,7 @@
         <p:spPr>
           <a:xfrm>
             <a:off x="502920" y="4453127"/>
-            <a:ext cx="5532120" cy="1225296"/>
+            <a:ext cx="5532120" cy="859536"/>
           </a:xfrm>
           <a:prstGeom prst="roundRect">
             <a:avLst>
@@ -13060,7 +13060,7 @@
         <p:spPr>
           <a:xfrm>
             <a:off x="685800" y="4571999"/>
-            <a:ext cx="5166360" cy="778546"/>
+            <a:ext cx="5166360" cy="603503"/>
           </a:xfrm>
           <a:prstGeom prst="rect">
             <a:avLst/>
@@ -13294,7 +13294,7 @@
         <p:spPr>
           <a:xfrm>
             <a:off x="6263640" y="1325880"/>
-            <a:ext cx="5532120" cy="1499616"/>
+            <a:ext cx="5532120" cy="1042415"/>
           </a:xfrm>
           <a:prstGeom prst="roundRect">
             <a:avLst>
@@ -13349,7 +13349,7 @@
         <p:spPr>
           <a:xfrm>
             <a:off x="6446520" y="1444752"/>
-            <a:ext cx="5166360" cy="1005916"/>
+            <a:ext cx="5166360" cy="786383"/>
           </a:xfrm>
           <a:prstGeom prst="rect">
             <a:avLst/>
@@ -13489,7 +13489,7 @@
         <p:spPr>
           <a:xfrm>
             <a:off x="6263640" y="3026663"/>
-            <a:ext cx="5532120" cy="1225296"/>
+            <a:ext cx="5532120" cy="859536"/>
           </a:xfrm>
           <a:prstGeom prst="roundRect">
             <a:avLst>
@@ -13544,7 +13544,7 @@
         <p:spPr>
           <a:xfrm>
             <a:off x="6446520" y="3145535"/>
-            <a:ext cx="5166360" cy="551177"/>
+            <a:ext cx="5166360" cy="603503"/>
           </a:xfrm>
           <a:prstGeom prst="rect">
             <a:avLst/>
@@ -13612,23 +13612,6 @@
               </a:rPr>
               <a:t>13   기간별 일정표</a:t>
             </a:r>
-            <a:r>
-              <a:rPr lang="ko-KR" altLang="en-US" sz="1150" b="0" dirty="0">
-                <a:solidFill>
-                  <a:srgbClr val="1C1C1E"/>
-                </a:solidFill>
-                <a:latin typeface="맑은 고딕"/>
-                <a:ea typeface="맑은 고딕"/>
-              </a:rPr>
-              <a:t/>
-            </a:r>
-            <a:endParaRPr sz="1150" b="0" dirty="0">
-              <a:solidFill>
-                <a:srgbClr val="1C1C1E"/>
-              </a:solidFill>
-              <a:latin typeface="맑은 고딕"/>
-              <a:ea typeface="맑은 고딕"/>
-            </a:endParaRPr>
           </a:p>
         </p:txBody>
       </p:sp>
@@ -13753,7 +13736,7 @@
         </p:nvSpPr>
         <p:spPr>
           <a:xfrm>
-            <a:off x="1691640" y="402336"/>
+            <a:off x="1348740" y="380129"/>
             <a:ext cx="9006840" cy="530352"/>
           </a:xfrm>
           <a:prstGeom prst="rect">
@@ -13916,8 +13899,8 @@
         </p:nvSpPr>
         <p:spPr>
           <a:xfrm>
-            <a:off x="10835640" y="164592"/>
-            <a:ext cx="1188720" cy="777240"/>
+            <a:off x="11393424" y="6117336"/>
+            <a:ext cx="777240" cy="374904"/>
           </a:xfrm>
           <a:prstGeom prst="rect">
             <a:avLst/>
@@ -13948,56 +13931,6 @@
               </a:rPr>
               <a:t>03</a:t>
             </a:r>
-          </a:p>
-        </p:txBody>
-      </p:sp>
-      <p:sp>
-        <p:nvSpPr>
-          <p:cNvPr id="7" name="TextBox 6"/>
-          <p:cNvSpPr txBox="1"/>
-          <p:nvPr/>
-        </p:nvSpPr>
-        <p:spPr>
-          <a:xfrm>
-            <a:off x="548640" y="1097280"/>
-            <a:ext cx="11155680" cy="384048"/>
-          </a:xfrm>
-          <a:prstGeom prst="rect">
-            <a:avLst/>
-          </a:prstGeom>
-          <a:noFill/>
-        </p:spPr>
-        <p:txBody>
-          <a:bodyPr wrap="square" anchor="t">
-            <a:spAutoFit/>
-          </a:bodyPr>
-          <a:lstStyle/>
-          <a:p>
-            <a:pPr>
-              <a:lnSpc>
-                <a:spcPct val="114000"/>
-              </a:lnSpc>
-              <a:spcAft>
-                <a:spcPts val="0"/>
-              </a:spcAft>
-            </a:pPr>
-            <a:r>
-              <a:rPr sz="1250" b="0" dirty="0" err="1">
-                <a:solidFill>
-                  <a:srgbClr val="767A7F"/>
-                </a:solidFill>
-                <a:latin typeface="맑은 고딕"/>
-                <a:ea typeface="맑은 고딕"/>
-              </a:rPr>
-              <a:t>부족(㉠)과 배분(㉡)은 다른 문제이며 해법도 다름 — 본 계획은 ㉡을 맡음</a:t>
-            </a:r>
-            <a:endParaRPr sz="1250" b="0" dirty="0">
-              <a:solidFill>
-                <a:srgbClr val="767A7F"/>
-              </a:solidFill>
-              <a:latin typeface="맑은 고딕"/>
-              <a:ea typeface="맑은 고딕"/>
-            </a:endParaRPr>
           </a:p>
         </p:txBody>
       </p:sp>
@@ -14053,7 +13986,7 @@
         <p:spPr>
           <a:xfrm>
             <a:off x="502920" y="1371600"/>
-            <a:ext cx="3611880" cy="1783080"/>
+            <a:ext cx="3611880" cy="1307592"/>
           </a:xfrm>
           <a:prstGeom prst="roundRect">
             <a:avLst>
@@ -14108,7 +14041,7 @@
         <p:spPr>
           <a:xfrm>
             <a:off x="685800" y="1499616"/>
-            <a:ext cx="3246120" cy="933269"/>
+            <a:ext cx="3246120" cy="1051560"/>
           </a:xfrm>
           <a:prstGeom prst="rect">
             <a:avLst/>
@@ -14575,7 +14508,7 @@
         <p:spPr>
           <a:xfrm>
             <a:off x="4343400" y="1371600"/>
-            <a:ext cx="3611880" cy="1783080"/>
+            <a:ext cx="3611880" cy="1307592"/>
           </a:xfrm>
           <a:prstGeom prst="roundRect">
             <a:avLst>
@@ -14630,7 +14563,7 @@
         <p:spPr>
           <a:xfrm>
             <a:off x="4526280" y="1499616"/>
-            <a:ext cx="3246120" cy="933269"/>
+            <a:ext cx="3246120" cy="1051560"/>
           </a:xfrm>
           <a:prstGeom prst="rect">
             <a:avLst/>
@@ -15037,7 +14970,7 @@
         <p:spPr>
           <a:xfrm>
             <a:off x="8183880" y="1371600"/>
-            <a:ext cx="3611880" cy="1783080"/>
+            <a:ext cx="3611880" cy="1307592"/>
           </a:xfrm>
           <a:prstGeom prst="roundRect">
             <a:avLst>
@@ -15092,7 +15025,7 @@
         <p:spPr>
           <a:xfrm>
             <a:off x="8366760" y="1499616"/>
-            <a:ext cx="3246120" cy="1126270"/>
+            <a:ext cx="3246120" cy="1051560"/>
           </a:xfrm>
           <a:prstGeom prst="rect">
             <a:avLst/>
@@ -15212,7 +15145,7 @@
         <p:spPr>
           <a:xfrm>
             <a:off x="502920" y="3401568"/>
-            <a:ext cx="11292840" cy="1783080"/>
+            <a:ext cx="11292840" cy="1362456"/>
           </a:xfrm>
           <a:prstGeom prst="roundRect">
             <a:avLst>
@@ -15267,7 +15200,7 @@
         <p:spPr>
           <a:xfrm>
             <a:off x="685800" y="3529584"/>
-            <a:ext cx="10927080" cy="1197864"/>
+            <a:ext cx="10927080" cy="1106424"/>
           </a:xfrm>
           <a:prstGeom prst="rect">
             <a:avLst/>
@@ -16189,8 +16122,8 @@
         </p:nvSpPr>
         <p:spPr>
           <a:xfrm>
-            <a:off x="502920" y="182880"/>
-            <a:ext cx="1051560" cy="749808"/>
+            <a:off x="502920" y="356616"/>
+            <a:ext cx="1051560" cy="475488"/>
           </a:xfrm>
           <a:prstGeom prst="rect">
             <a:avLst/>
@@ -16212,7 +16145,7 @@
               </a:spcAft>
             </a:pPr>
             <a:r>
-              <a:rPr sz="2200" b="1">
+              <a:rPr sz="2200" b="1" dirty="0">
                 <a:solidFill>
                   <a:srgbClr val="5A5E64"/>
                 </a:solidFill>
@@ -16232,8 +16165,8 @@
         </p:nvSpPr>
         <p:spPr>
           <a:xfrm>
-            <a:off x="1691640" y="182880"/>
-            <a:ext cx="9006840" cy="219456"/>
+            <a:off x="10698480" y="502920"/>
+            <a:ext cx="1417320" cy="274320"/>
           </a:xfrm>
           <a:prstGeom prst="rect">
             <a:avLst/>
@@ -16345,7 +16278,7 @@
         </p:nvSpPr>
         <p:spPr>
           <a:xfrm>
-            <a:off x="1691640" y="402336"/>
+            <a:off x="1353312" y="384048"/>
             <a:ext cx="9006840" cy="530352"/>
           </a:xfrm>
           <a:prstGeom prst="rect">
@@ -16441,8 +16374,8 @@
         </p:nvSpPr>
         <p:spPr>
           <a:xfrm>
-            <a:off x="10835640" y="164592"/>
-            <a:ext cx="1188720" cy="777240"/>
+            <a:off x="11393424" y="6117336"/>
+            <a:ext cx="777240" cy="374904"/>
           </a:xfrm>
           <a:prstGeom prst="rect">
             <a:avLst/>
@@ -16571,7 +16504,7 @@
         <p:spPr>
           <a:xfrm>
             <a:off x="502920" y="1371600"/>
-            <a:ext cx="3291840" cy="1298448"/>
+            <a:ext cx="3291840" cy="969264"/>
           </a:xfrm>
           <a:prstGeom prst="roundRect">
             <a:avLst>
@@ -16626,7 +16559,7 @@
         <p:spPr>
           <a:xfrm>
             <a:off x="667512" y="1444752"/>
-            <a:ext cx="3017520" cy="929935"/>
+            <a:ext cx="3017520" cy="713232"/>
           </a:xfrm>
           <a:prstGeom prst="rect">
             <a:avLst/>
@@ -17010,7 +16943,7 @@
         <p:spPr>
           <a:xfrm>
             <a:off x="4480559" y="1371600"/>
-            <a:ext cx="3291840" cy="1298448"/>
+            <a:ext cx="3291840" cy="969264"/>
           </a:xfrm>
           <a:prstGeom prst="roundRect">
             <a:avLst>
@@ -17065,7 +16998,7 @@
         <p:spPr>
           <a:xfrm>
             <a:off x="4645151" y="1444752"/>
-            <a:ext cx="3017520" cy="1152144"/>
+            <a:ext cx="3017520" cy="713232"/>
           </a:xfrm>
           <a:prstGeom prst="rect">
             <a:avLst/>
@@ -17349,7 +17282,7 @@
         <p:spPr>
           <a:xfrm>
             <a:off x="8458200" y="1371600"/>
-            <a:ext cx="3291840" cy="1298448"/>
+            <a:ext cx="3291840" cy="969264"/>
           </a:xfrm>
           <a:prstGeom prst="roundRect">
             <a:avLst>
@@ -17404,7 +17337,7 @@
         <p:spPr>
           <a:xfrm>
             <a:off x="8622792" y="1444752"/>
-            <a:ext cx="3017520" cy="1152144"/>
+            <a:ext cx="3017520" cy="713232"/>
           </a:xfrm>
           <a:prstGeom prst="rect">
             <a:avLst/>
@@ -17507,7 +17440,7 @@
         <p:spPr>
           <a:xfrm>
             <a:off x="502920" y="2834640"/>
-            <a:ext cx="5532120" cy="1965960"/>
+            <a:ext cx="5532120" cy="1755648"/>
           </a:xfrm>
           <a:prstGeom prst="roundRect">
             <a:avLst>
@@ -17562,7 +17495,7 @@
         <p:spPr>
           <a:xfrm>
             <a:off x="685800" y="2962656"/>
-            <a:ext cx="5166359" cy="1691640"/>
+            <a:ext cx="5166359" cy="1499616"/>
           </a:xfrm>
           <a:prstGeom prst="rect">
             <a:avLst/>
@@ -17712,7 +17645,7 @@
         <p:spPr>
           <a:xfrm>
             <a:off x="6263640" y="2834640"/>
-            <a:ext cx="5532120" cy="1965960"/>
+            <a:ext cx="5532120" cy="1755648"/>
           </a:xfrm>
           <a:prstGeom prst="roundRect">
             <a:avLst>
@@ -17767,7 +17700,7 @@
         <p:spPr>
           <a:xfrm>
             <a:off x="6446520" y="2962656"/>
-            <a:ext cx="5166359" cy="1691640"/>
+            <a:ext cx="5166359" cy="1499616"/>
           </a:xfrm>
           <a:prstGeom prst="rect">
             <a:avLst/>
@@ -17944,7 +17877,7 @@
         <p:spPr>
           <a:xfrm>
             <a:off x="502920" y="4965192"/>
-            <a:ext cx="11292840" cy="1371600"/>
+            <a:ext cx="11292840" cy="1060704"/>
           </a:xfrm>
           <a:prstGeom prst="roundRect">
             <a:avLst>
@@ -17999,7 +17932,7 @@
         <p:spPr>
           <a:xfrm>
             <a:off x="685800" y="5093207"/>
-            <a:ext cx="10927080" cy="1115568"/>
+            <a:ext cx="10927080" cy="804671"/>
           </a:xfrm>
           <a:prstGeom prst="rect">
             <a:avLst/>
@@ -18168,8 +18101,8 @@
         </p:nvSpPr>
         <p:spPr>
           <a:xfrm>
-            <a:off x="502920" y="182880"/>
-            <a:ext cx="1051560" cy="749808"/>
+            <a:off x="502920" y="356616"/>
+            <a:ext cx="1051560" cy="475488"/>
           </a:xfrm>
           <a:prstGeom prst="rect">
             <a:avLst/>
@@ -18211,8 +18144,8 @@
         </p:nvSpPr>
         <p:spPr>
           <a:xfrm>
-            <a:off x="1691640" y="182880"/>
-            <a:ext cx="9006840" cy="219456"/>
+            <a:off x="10698480" y="502920"/>
+            <a:ext cx="1417320" cy="274320"/>
           </a:xfrm>
           <a:prstGeom prst="rect">
             <a:avLst/>
@@ -18324,7 +18257,7 @@
         </p:nvSpPr>
         <p:spPr>
           <a:xfrm>
-            <a:off x="1691640" y="402336"/>
+            <a:off x="1353312" y="384048"/>
             <a:ext cx="9006840" cy="530352"/>
           </a:xfrm>
           <a:prstGeom prst="rect">
@@ -18477,8 +18410,8 @@
         </p:nvSpPr>
         <p:spPr>
           <a:xfrm>
-            <a:off x="10835640" y="164592"/>
-            <a:ext cx="1188720" cy="777240"/>
+            <a:off x="11393424" y="6117336"/>
+            <a:ext cx="777240" cy="374904"/>
           </a:xfrm>
           <a:prstGeom prst="rect">
             <a:avLst/>
@@ -18564,7 +18497,7 @@
         <p:spPr>
           <a:xfrm>
             <a:off x="502920" y="1371600"/>
-            <a:ext cx="5532120" cy="1737360"/>
+            <a:ext cx="5532120" cy="1106424"/>
           </a:xfrm>
           <a:prstGeom prst="roundRect">
             <a:avLst>
@@ -18619,7 +18552,7 @@
         <p:spPr>
           <a:xfrm>
             <a:off x="521208" y="1600200"/>
-            <a:ext cx="82296" cy="1280160"/>
+            <a:ext cx="82296" cy="649224"/>
           </a:xfrm>
           <a:prstGeom prst="roundRect">
             <a:avLst>
@@ -18680,7 +18613,7 @@
         <p:spPr>
           <a:xfrm>
             <a:off x="822960" y="1536192"/>
-            <a:ext cx="5074920" cy="847220"/>
+            <a:ext cx="5074920" cy="850392"/>
           </a:xfrm>
           <a:prstGeom prst="rect">
             <a:avLst/>
@@ -19060,7 +18993,7 @@
         <p:spPr>
           <a:xfrm>
             <a:off x="6263640" y="1371600"/>
-            <a:ext cx="5532120" cy="1737360"/>
+            <a:ext cx="5532120" cy="1106424"/>
           </a:xfrm>
           <a:prstGeom prst="roundRect">
             <a:avLst>
@@ -19115,7 +19048,7 @@
         <p:spPr>
           <a:xfrm>
             <a:off x="6281927" y="1600200"/>
-            <a:ext cx="82296" cy="1280160"/>
+            <a:ext cx="82296" cy="649224"/>
           </a:xfrm>
           <a:prstGeom prst="roundRect">
             <a:avLst>
@@ -19176,7 +19109,7 @@
         <p:spPr>
           <a:xfrm>
             <a:off x="6583679" y="1536192"/>
-            <a:ext cx="5074920" cy="847220"/>
+            <a:ext cx="5074920" cy="850392"/>
           </a:xfrm>
           <a:prstGeom prst="rect">
             <a:avLst/>
@@ -19516,7 +19449,7 @@
         <p:spPr>
           <a:xfrm>
             <a:off x="502920" y="3337560"/>
-            <a:ext cx="5532120" cy="1737360"/>
+            <a:ext cx="5532120" cy="1106424"/>
           </a:xfrm>
           <a:prstGeom prst="roundRect">
             <a:avLst>
@@ -19571,7 +19504,7 @@
         <p:spPr>
           <a:xfrm>
             <a:off x="521208" y="3566160"/>
-            <a:ext cx="82296" cy="1280160"/>
+            <a:ext cx="82296" cy="649224"/>
           </a:xfrm>
           <a:prstGeom prst="roundRect">
             <a:avLst>
@@ -19632,7 +19565,7 @@
         <p:spPr>
           <a:xfrm>
             <a:off x="822960" y="3502152"/>
-            <a:ext cx="5074920" cy="847220"/>
+            <a:ext cx="5074920" cy="850392"/>
           </a:xfrm>
           <a:prstGeom prst="rect">
             <a:avLst/>
@@ -19992,7 +19925,7 @@
         <p:spPr>
           <a:xfrm>
             <a:off x="6263640" y="3337560"/>
-            <a:ext cx="5532120" cy="1737360"/>
+            <a:ext cx="5532120" cy="1106424"/>
           </a:xfrm>
           <a:prstGeom prst="roundRect">
             <a:avLst>
@@ -20047,7 +19980,7 @@
         <p:spPr>
           <a:xfrm>
             <a:off x="6281927" y="3566160"/>
-            <a:ext cx="82296" cy="1280160"/>
+            <a:ext cx="82296" cy="649224"/>
           </a:xfrm>
           <a:prstGeom prst="roundRect">
             <a:avLst>
@@ -20108,7 +20041,7 @@
         <p:spPr>
           <a:xfrm>
             <a:off x="6583679" y="3502152"/>
-            <a:ext cx="5074920" cy="847220"/>
+            <a:ext cx="5074920" cy="850392"/>
           </a:xfrm>
           <a:prstGeom prst="rect">
             <a:avLst/>
@@ -20524,8 +20457,8 @@
         </p:nvSpPr>
         <p:spPr>
           <a:xfrm>
-            <a:off x="502920" y="182880"/>
-            <a:ext cx="1051560" cy="749808"/>
+            <a:off x="502920" y="356616"/>
+            <a:ext cx="1051560" cy="475488"/>
           </a:xfrm>
           <a:prstGeom prst="rect">
             <a:avLst/>
@@ -20547,7 +20480,7 @@
               </a:spcAft>
             </a:pPr>
             <a:r>
-              <a:rPr sz="2200" b="1">
+              <a:rPr sz="2200" b="1" dirty="0">
                 <a:solidFill>
                   <a:srgbClr val="5A5E64"/>
                 </a:solidFill>
@@ -20567,8 +20500,8 @@
         </p:nvSpPr>
         <p:spPr>
           <a:xfrm>
-            <a:off x="1691640" y="182880"/>
-            <a:ext cx="9006840" cy="219456"/>
+            <a:off x="10698480" y="502920"/>
+            <a:ext cx="1417320" cy="274320"/>
           </a:xfrm>
           <a:prstGeom prst="rect">
             <a:avLst/>
@@ -20680,7 +20613,7 @@
         </p:nvSpPr>
         <p:spPr>
           <a:xfrm>
-            <a:off x="1691640" y="402336"/>
+            <a:off x="1353312" y="384048"/>
             <a:ext cx="9006840" cy="530352"/>
           </a:xfrm>
           <a:prstGeom prst="rect">
@@ -20776,8 +20709,8 @@
         </p:nvSpPr>
         <p:spPr>
           <a:xfrm>
-            <a:off x="10835640" y="164592"/>
-            <a:ext cx="1188720" cy="777240"/>
+            <a:off x="11393424" y="6117336"/>
+            <a:ext cx="777240" cy="374904"/>
           </a:xfrm>
           <a:prstGeom prst="rect">
             <a:avLst/>
@@ -20863,7 +20796,7 @@
         <p:spPr>
           <a:xfrm>
             <a:off x="502920" y="1371600"/>
-            <a:ext cx="5532120" cy="1645920"/>
+            <a:ext cx="5532120" cy="1426464"/>
           </a:xfrm>
           <a:prstGeom prst="roundRect">
             <a:avLst>
@@ -20918,7 +20851,7 @@
         <p:spPr>
           <a:xfrm>
             <a:off x="685800" y="1499616"/>
-            <a:ext cx="5166359" cy="1389888"/>
+            <a:ext cx="5166359" cy="1170432"/>
           </a:xfrm>
           <a:prstGeom prst="rect">
             <a:avLst/>
@@ -21041,7 +20974,7 @@
         <p:spPr>
           <a:xfrm>
             <a:off x="6263640" y="1371600"/>
-            <a:ext cx="5532120" cy="1645920"/>
+            <a:ext cx="5532120" cy="1426464"/>
           </a:xfrm>
           <a:prstGeom prst="roundRect">
             <a:avLst>
@@ -21096,7 +21029,7 @@
         <p:spPr>
           <a:xfrm>
             <a:off x="6446520" y="1499616"/>
-            <a:ext cx="5166359" cy="1389888"/>
+            <a:ext cx="5166359" cy="1170432"/>
           </a:xfrm>
           <a:prstGeom prst="rect">
             <a:avLst/>
@@ -22532,8 +22465,8 @@
         </p:nvSpPr>
         <p:spPr>
           <a:xfrm>
-            <a:off x="502920" y="182880"/>
-            <a:ext cx="1051560" cy="749808"/>
+            <a:off x="502920" y="356616"/>
+            <a:ext cx="1051560" cy="475488"/>
           </a:xfrm>
           <a:prstGeom prst="rect">
             <a:avLst/>
@@ -22575,8 +22508,8 @@
         </p:nvSpPr>
         <p:spPr>
           <a:xfrm>
-            <a:off x="1691640" y="182880"/>
-            <a:ext cx="9006840" cy="219456"/>
+            <a:off x="10698480" y="502920"/>
+            <a:ext cx="1417320" cy="274320"/>
           </a:xfrm>
           <a:prstGeom prst="rect">
             <a:avLst/>
@@ -22688,7 +22621,7 @@
         </p:nvSpPr>
         <p:spPr>
           <a:xfrm>
-            <a:off x="1691640" y="402336"/>
+            <a:off x="1353312" y="384048"/>
             <a:ext cx="9006840" cy="530352"/>
           </a:xfrm>
           <a:prstGeom prst="rect">
@@ -22931,8 +22864,8 @@
         </p:nvSpPr>
         <p:spPr>
           <a:xfrm>
-            <a:off x="10835640" y="164592"/>
-            <a:ext cx="1188720" cy="777240"/>
+            <a:off x="11393424" y="6117336"/>
+            <a:ext cx="777240" cy="374904"/>
           </a:xfrm>
           <a:prstGeom prst="rect">
             <a:avLst/>
@@ -23649,7 +23582,7 @@
         <p:spPr>
           <a:xfrm>
             <a:off x="502920" y="3703320"/>
-            <a:ext cx="5532120" cy="1920240"/>
+            <a:ext cx="5532120" cy="1609344"/>
           </a:xfrm>
           <a:prstGeom prst="roundRect">
             <a:avLst>
@@ -23704,7 +23637,7 @@
         <p:spPr>
           <a:xfrm>
             <a:off x="685800" y="3831335"/>
-            <a:ext cx="5166359" cy="1211678"/>
+            <a:ext cx="5166359" cy="1353312"/>
           </a:xfrm>
           <a:prstGeom prst="rect">
             <a:avLst/>
@@ -24357,7 +24290,7 @@
         <p:spPr>
           <a:xfrm>
             <a:off x="6263640" y="3703320"/>
-            <a:ext cx="5532120" cy="1920240"/>
+            <a:ext cx="5532120" cy="1609344"/>
           </a:xfrm>
           <a:prstGeom prst="roundRect">
             <a:avLst>
@@ -24412,7 +24345,7 @@
         <p:spPr>
           <a:xfrm>
             <a:off x="6446520" y="3831335"/>
-            <a:ext cx="5166359" cy="1262974"/>
+            <a:ext cx="5166359" cy="1353312"/>
           </a:xfrm>
           <a:prstGeom prst="rect">
             <a:avLst/>
@@ -25439,8 +25372,8 @@
         </p:nvSpPr>
         <p:spPr>
           <a:xfrm>
-            <a:off x="502920" y="182880"/>
-            <a:ext cx="1051560" cy="749808"/>
+            <a:off x="502920" y="356616"/>
+            <a:ext cx="1051560" cy="475488"/>
           </a:xfrm>
           <a:prstGeom prst="rect">
             <a:avLst/>
@@ -25482,8 +25415,8 @@
         </p:nvSpPr>
         <p:spPr>
           <a:xfrm>
-            <a:off x="1691640" y="182880"/>
-            <a:ext cx="9006840" cy="219456"/>
+            <a:off x="10698480" y="502920"/>
+            <a:ext cx="1417320" cy="274320"/>
           </a:xfrm>
           <a:prstGeom prst="rect">
             <a:avLst/>
@@ -25595,7 +25528,7 @@
         </p:nvSpPr>
         <p:spPr>
           <a:xfrm>
-            <a:off x="1691640" y="402336"/>
+            <a:off x="1353312" y="384048"/>
             <a:ext cx="9006840" cy="530352"/>
           </a:xfrm>
           <a:prstGeom prst="rect">
@@ -25838,8 +25771,8 @@
         </p:nvSpPr>
         <p:spPr>
           <a:xfrm>
-            <a:off x="10835640" y="164592"/>
-            <a:ext cx="1188720" cy="777240"/>
+            <a:off x="11393424" y="6117336"/>
+            <a:ext cx="777240" cy="374904"/>
           </a:xfrm>
           <a:prstGeom prst="rect">
             <a:avLst/>
@@ -26628,7 +26561,7 @@
         <p:spPr>
           <a:xfrm>
             <a:off x="502920" y="4297680"/>
-            <a:ext cx="3611880" cy="1627632"/>
+            <a:ext cx="3611880" cy="1179576"/>
           </a:xfrm>
           <a:prstGeom prst="roundRect">
             <a:avLst>
@@ -26683,7 +26616,7 @@
         <p:spPr>
           <a:xfrm>
             <a:off x="685800" y="4425696"/>
-            <a:ext cx="3246120" cy="1371600"/>
+            <a:ext cx="3246120" cy="923544"/>
           </a:xfrm>
           <a:prstGeom prst="rect">
             <a:avLst/>
@@ -26990,7 +26923,7 @@
         <p:spPr>
           <a:xfrm>
             <a:off x="4343400" y="4297680"/>
-            <a:ext cx="3611880" cy="1627632"/>
+            <a:ext cx="3611880" cy="1179576"/>
           </a:xfrm>
           <a:prstGeom prst="roundRect">
             <a:avLst>
@@ -27045,7 +26978,7 @@
         <p:spPr>
           <a:xfrm>
             <a:off x="4526280" y="4425696"/>
-            <a:ext cx="3246120" cy="1371600"/>
+            <a:ext cx="3246120" cy="923544"/>
           </a:xfrm>
           <a:prstGeom prst="rect">
             <a:avLst/>
@@ -27382,7 +27315,7 @@
         <p:spPr>
           <a:xfrm>
             <a:off x="8183880" y="4297680"/>
-            <a:ext cx="3611880" cy="1627632"/>
+            <a:ext cx="3611880" cy="1179576"/>
           </a:xfrm>
           <a:prstGeom prst="roundRect">
             <a:avLst>
@@ -27437,7 +27370,7 @@
         <p:spPr>
           <a:xfrm>
             <a:off x="8366760" y="4425696"/>
-            <a:ext cx="3246120" cy="1371600"/>
+            <a:ext cx="3246120" cy="923544"/>
           </a:xfrm>
           <a:prstGeom prst="rect">
             <a:avLst/>
@@ -28019,8 +27952,8 @@
         </p:nvSpPr>
         <p:spPr>
           <a:xfrm>
-            <a:off x="502920" y="182880"/>
-            <a:ext cx="1051560" cy="749808"/>
+            <a:off x="502920" y="356616"/>
+            <a:ext cx="1051560" cy="475488"/>
           </a:xfrm>
           <a:prstGeom prst="rect">
             <a:avLst/>
@@ -28062,8 +27995,8 @@
         </p:nvSpPr>
         <p:spPr>
           <a:xfrm>
-            <a:off x="1691640" y="182880"/>
-            <a:ext cx="9006840" cy="219456"/>
+            <a:off x="10698480" y="502920"/>
+            <a:ext cx="1417320" cy="274320"/>
           </a:xfrm>
           <a:prstGeom prst="rect">
             <a:avLst/>
@@ -28175,7 +28108,7 @@
         </p:nvSpPr>
         <p:spPr>
           <a:xfrm>
-            <a:off x="1691640" y="402336"/>
+            <a:off x="1353312" y="384048"/>
             <a:ext cx="9006840" cy="530352"/>
           </a:xfrm>
           <a:prstGeom prst="rect">
@@ -28338,8 +28271,8 @@
         </p:nvSpPr>
         <p:spPr>
           <a:xfrm>
-            <a:off x="10835640" y="164592"/>
-            <a:ext cx="1188720" cy="777240"/>
+            <a:off x="11393424" y="6117336"/>
+            <a:ext cx="777240" cy="374904"/>
           </a:xfrm>
           <a:prstGeom prst="rect">
             <a:avLst/>
@@ -29509,7 +29442,7 @@
         <p:spPr>
           <a:xfrm>
             <a:off x="502920" y="4480560"/>
-            <a:ext cx="11292840" cy="1600200"/>
+            <a:ext cx="11292840" cy="1060704"/>
           </a:xfrm>
           <a:prstGeom prst="roundRect">
             <a:avLst>
@@ -29564,7 +29497,7 @@
         <p:spPr>
           <a:xfrm>
             <a:off x="685800" y="4608576"/>
-            <a:ext cx="10927080" cy="1344168"/>
+            <a:ext cx="10927080" cy="804671"/>
           </a:xfrm>
           <a:prstGeom prst="rect">
             <a:avLst/>
@@ -29666,8 +29599,8 @@
         </p:nvSpPr>
         <p:spPr>
           <a:xfrm>
-            <a:off x="502920" y="182880"/>
-            <a:ext cx="1051560" cy="749808"/>
+            <a:off x="502920" y="356616"/>
+            <a:ext cx="1051560" cy="475488"/>
           </a:xfrm>
           <a:prstGeom prst="rect">
             <a:avLst/>
@@ -29709,8 +29642,8 @@
         </p:nvSpPr>
         <p:spPr>
           <a:xfrm>
-            <a:off x="1691640" y="182880"/>
-            <a:ext cx="9006840" cy="219456"/>
+            <a:off x="10698480" y="502920"/>
+            <a:ext cx="1417320" cy="274320"/>
           </a:xfrm>
           <a:prstGeom prst="rect">
             <a:avLst/>

--- a/04_제출물/데이터분석_계획서.pptx
+++ b/04_제출물/데이터분석_계획서.pptx
@@ -6504,8 +6504,8 @@
         </p:nvSpPr>
         <p:spPr>
           <a:xfrm>
-            <a:off x="640080" y="3227832"/>
-            <a:ext cx="2103120" cy="246888"/>
+            <a:off x="685800" y="3282696"/>
+            <a:ext cx="1920239" cy="246888"/>
           </a:xfrm>
           <a:prstGeom prst="rect">
             <a:avLst/>
@@ -6602,8 +6602,8 @@
         </p:nvSpPr>
         <p:spPr>
           <a:xfrm>
-            <a:off x="3108960" y="3227832"/>
-            <a:ext cx="8549640" cy="246888"/>
+            <a:off x="3108960" y="3282696"/>
+            <a:ext cx="8503920" cy="246888"/>
           </a:xfrm>
           <a:prstGeom prst="rect">
             <a:avLst/>
@@ -6706,8 +6706,8 @@
         </p:nvSpPr>
         <p:spPr>
           <a:xfrm>
-            <a:off x="640080" y="4096512"/>
-            <a:ext cx="2103120" cy="246888"/>
+            <a:off x="685800" y="4151376"/>
+            <a:ext cx="1920239" cy="246888"/>
           </a:xfrm>
           <a:prstGeom prst="rect">
             <a:avLst/>
@@ -6804,8 +6804,8 @@
         </p:nvSpPr>
         <p:spPr>
           <a:xfrm>
-            <a:off x="3108960" y="4096512"/>
-            <a:ext cx="8549640" cy="246888"/>
+            <a:off x="3108960" y="4151376"/>
+            <a:ext cx="8503920" cy="246888"/>
           </a:xfrm>
           <a:prstGeom prst="rect">
             <a:avLst/>
@@ -7095,8 +7095,8 @@
         </p:nvSpPr>
         <p:spPr>
           <a:xfrm>
-            <a:off x="640080" y="4965192"/>
-            <a:ext cx="2103120" cy="548640"/>
+            <a:off x="685800" y="5020055"/>
+            <a:ext cx="1920239" cy="429768"/>
           </a:xfrm>
           <a:prstGeom prst="rect">
             <a:avLst/>
@@ -7193,8 +7193,8 @@
         </p:nvSpPr>
         <p:spPr>
           <a:xfrm>
-            <a:off x="3108960" y="4965192"/>
-            <a:ext cx="8549640" cy="548640"/>
+            <a:off x="3108960" y="5020055"/>
+            <a:ext cx="8503920" cy="429768"/>
           </a:xfrm>
           <a:prstGeom prst="rect">
             <a:avLst/>
@@ -12337,7 +12337,7 @@
         <p:spPr>
           <a:xfrm>
             <a:off x="502920" y="1325880"/>
-            <a:ext cx="5532120" cy="1042415"/>
+            <a:ext cx="5532120" cy="1188720"/>
           </a:xfrm>
           <a:prstGeom prst="roundRect">
             <a:avLst>
@@ -12391,8 +12391,8 @@
         </p:nvSpPr>
         <p:spPr>
           <a:xfrm>
-            <a:off x="685800" y="1444752"/>
-            <a:ext cx="5166360" cy="786383"/>
+            <a:off x="685800" y="1453895"/>
+            <a:ext cx="5166359" cy="932688"/>
           </a:xfrm>
           <a:prstGeom prst="rect">
             <a:avLst/>
@@ -12693,7 +12693,7 @@
         <p:spPr>
           <a:xfrm>
             <a:off x="502920" y="3026663"/>
-            <a:ext cx="5532120" cy="859536"/>
+            <a:ext cx="5532120" cy="1005840"/>
           </a:xfrm>
           <a:prstGeom prst="roundRect">
             <a:avLst>
@@ -12747,8 +12747,8 @@
         </p:nvSpPr>
         <p:spPr>
           <a:xfrm>
-            <a:off x="685800" y="3145535"/>
-            <a:ext cx="5166360" cy="603503"/>
+            <a:off x="685800" y="3154679"/>
+            <a:ext cx="5166359" cy="749808"/>
           </a:xfrm>
           <a:prstGeom prst="rect">
             <a:avLst/>
@@ -13005,7 +13005,7 @@
         <p:spPr>
           <a:xfrm>
             <a:off x="502920" y="4453127"/>
-            <a:ext cx="5532120" cy="859536"/>
+            <a:ext cx="5532120" cy="1005840"/>
           </a:xfrm>
           <a:prstGeom prst="roundRect">
             <a:avLst>
@@ -13059,8 +13059,8 @@
         </p:nvSpPr>
         <p:spPr>
           <a:xfrm>
-            <a:off x="685800" y="4571999"/>
-            <a:ext cx="5166360" cy="603503"/>
+            <a:off x="685800" y="4581143"/>
+            <a:ext cx="5166359" cy="749808"/>
           </a:xfrm>
           <a:prstGeom prst="rect">
             <a:avLst/>
@@ -13294,7 +13294,7 @@
         <p:spPr>
           <a:xfrm>
             <a:off x="6263640" y="1325880"/>
-            <a:ext cx="5532120" cy="1042415"/>
+            <a:ext cx="5532120" cy="1188720"/>
           </a:xfrm>
           <a:prstGeom prst="roundRect">
             <a:avLst>
@@ -13348,8 +13348,8 @@
         </p:nvSpPr>
         <p:spPr>
           <a:xfrm>
-            <a:off x="6446520" y="1444752"/>
-            <a:ext cx="5166360" cy="786383"/>
+            <a:off x="6446520" y="1453895"/>
+            <a:ext cx="5166359" cy="932688"/>
           </a:xfrm>
           <a:prstGeom prst="rect">
             <a:avLst/>
@@ -16558,8 +16558,8 @@
         </p:nvSpPr>
         <p:spPr>
           <a:xfrm>
-            <a:off x="667512" y="1444752"/>
-            <a:ext cx="3017520" cy="713232"/>
+            <a:off x="685800" y="1499616"/>
+            <a:ext cx="2926079" cy="713232"/>
           </a:xfrm>
           <a:prstGeom prst="rect">
             <a:avLst/>
@@ -16997,8 +16997,8 @@
         </p:nvSpPr>
         <p:spPr>
           <a:xfrm>
-            <a:off x="4645151" y="1444752"/>
-            <a:ext cx="3017520" cy="713232"/>
+            <a:off x="4663439" y="1499616"/>
+            <a:ext cx="2926079" cy="713232"/>
           </a:xfrm>
           <a:prstGeom prst="rect">
             <a:avLst/>
@@ -17336,8 +17336,8 @@
         </p:nvSpPr>
         <p:spPr>
           <a:xfrm>
-            <a:off x="8622792" y="1444752"/>
-            <a:ext cx="3017520" cy="713232"/>
+            <a:off x="8641080" y="1499616"/>
+            <a:ext cx="2926079" cy="713232"/>
           </a:xfrm>
           <a:prstGeom prst="rect">
             <a:avLst/>
@@ -18612,8 +18612,8 @@
         </p:nvSpPr>
         <p:spPr>
           <a:xfrm>
-            <a:off x="822960" y="1536192"/>
-            <a:ext cx="5074920" cy="850392"/>
+            <a:off x="822960" y="1499616"/>
+            <a:ext cx="5029200" cy="850391"/>
           </a:xfrm>
           <a:prstGeom prst="rect">
             <a:avLst/>
@@ -19108,8 +19108,8 @@
         </p:nvSpPr>
         <p:spPr>
           <a:xfrm>
-            <a:off x="6583679" y="1536192"/>
-            <a:ext cx="5074920" cy="850392"/>
+            <a:off x="6583679" y="1499616"/>
+            <a:ext cx="5029200" cy="850391"/>
           </a:xfrm>
           <a:prstGeom prst="rect">
             <a:avLst/>
@@ -19564,8 +19564,8 @@
         </p:nvSpPr>
         <p:spPr>
           <a:xfrm>
-            <a:off x="822960" y="3502152"/>
-            <a:ext cx="5074920" cy="850392"/>
+            <a:off x="822960" y="3465576"/>
+            <a:ext cx="5029200" cy="850391"/>
           </a:xfrm>
           <a:prstGeom prst="rect">
             <a:avLst/>
@@ -20040,8 +20040,8 @@
         </p:nvSpPr>
         <p:spPr>
           <a:xfrm>
-            <a:off x="6583679" y="3502152"/>
-            <a:ext cx="5074920" cy="850392"/>
+            <a:off x="6583679" y="3465576"/>
+            <a:ext cx="5029200" cy="850391"/>
           </a:xfrm>
           <a:prstGeom prst="rect">
             <a:avLst/>
@@ -23582,7 +23582,7 @@
         <p:spPr>
           <a:xfrm>
             <a:off x="502920" y="3703320"/>
-            <a:ext cx="5532120" cy="1609344"/>
+            <a:ext cx="5532120" cy="1920240"/>
           </a:xfrm>
           <a:prstGeom prst="roundRect">
             <a:avLst>
@@ -23636,8 +23636,8 @@
         </p:nvSpPr>
         <p:spPr>
           <a:xfrm>
-            <a:off x="685800" y="3831335"/>
-            <a:ext cx="5166359" cy="1353312"/>
+            <a:off x="685800" y="3831336"/>
+            <a:ext cx="5166360" cy="237744"/>
           </a:xfrm>
           <a:prstGeom prst="rect">
             <a:avLst/>
@@ -23709,576 +23709,6 @@
               <a:t> 제2026-144호, 108곳)</a:t>
             </a:r>
           </a:p>
-          <a:p>
-            <a:pPr marL="160020" indent="-160020">
-              <a:lnSpc>
-                <a:spcPct val="114000"/>
-              </a:lnSpc>
-              <a:spcAft>
-                <a:spcPts val="200"/>
-              </a:spcAft>
-            </a:pPr>
-            <a:r>
-              <a:rPr sz="1150" b="0" dirty="0">
-                <a:solidFill>
-                  <a:srgbClr val="1C1C1E"/>
-                </a:solidFill>
-                <a:latin typeface="맑은 고딕"/>
-                <a:ea typeface="맑은 고딕"/>
-              </a:rPr>
-              <a:t>• A: 두 </a:t>
-            </a:r>
-            <a:r>
-              <a:rPr lang="ko-KR" altLang="en-US" sz="1150" b="0" dirty="0">
-                <a:solidFill>
-                  <a:srgbClr val="1C1C1E"/>
-                </a:solidFill>
-                <a:latin typeface="맑은 고딕"/>
-                <a:ea typeface="맑은 고딕"/>
-              </a:rPr>
-              <a:t>판정 </a:t>
-            </a:r>
-            <a:r>
-              <a:rPr sz="1150" b="0" dirty="0" err="1">
-                <a:solidFill>
-                  <a:srgbClr val="1C1C1E"/>
-                </a:solidFill>
-                <a:latin typeface="맑은 고딕"/>
-                <a:ea typeface="맑은 고딕"/>
-              </a:rPr>
-              <a:t>지표</a:t>
-            </a:r>
-            <a:r>
-              <a:rPr sz="1150" b="0" dirty="0">
-                <a:solidFill>
-                  <a:srgbClr val="1C1C1E"/>
-                </a:solidFill>
-                <a:latin typeface="맑은 고딕"/>
-                <a:ea typeface="맑은 고딕"/>
-              </a:rPr>
-              <a:t> </a:t>
-            </a:r>
-            <a:r>
-              <a:rPr sz="1150" b="0" dirty="0" err="1">
-                <a:solidFill>
-                  <a:srgbClr val="1C1C1E"/>
-                </a:solidFill>
-                <a:latin typeface="맑은 고딕"/>
-                <a:ea typeface="맑은 고딕"/>
-              </a:rPr>
-              <a:t>모두</a:t>
-            </a:r>
-            <a:r>
-              <a:rPr sz="1150" b="0" dirty="0">
-                <a:solidFill>
-                  <a:srgbClr val="1C1C1E"/>
-                </a:solidFill>
-                <a:latin typeface="맑은 고딕"/>
-                <a:ea typeface="맑은 고딕"/>
-              </a:rPr>
-              <a:t> </a:t>
-            </a:r>
-            <a:r>
-              <a:rPr sz="1150" b="0" dirty="0" err="1">
-                <a:solidFill>
-                  <a:srgbClr val="1C1C1E"/>
-                </a:solidFill>
-                <a:latin typeface="맑은 고딕"/>
-                <a:ea typeface="맑은 고딕"/>
-              </a:rPr>
-              <a:t>취약</a:t>
-            </a:r>
-            <a:r>
-              <a:rPr sz="1150" b="0" dirty="0">
-                <a:solidFill>
-                  <a:srgbClr val="1C1C1E"/>
-                </a:solidFill>
-                <a:latin typeface="맑은 고딕"/>
-                <a:ea typeface="맑은 고딕"/>
-              </a:rPr>
-              <a:t> (32곳) / B: </a:t>
-            </a:r>
-            <a:r>
-              <a:rPr sz="1150" b="0" dirty="0" err="1">
-                <a:solidFill>
-                  <a:srgbClr val="1C1C1E"/>
-                </a:solidFill>
-                <a:latin typeface="맑은 고딕"/>
-                <a:ea typeface="맑은 고딕"/>
-              </a:rPr>
-              <a:t>하나만</a:t>
-            </a:r>
-            <a:r>
-              <a:rPr sz="1150" b="0" dirty="0">
-                <a:solidFill>
-                  <a:srgbClr val="1C1C1E"/>
-                </a:solidFill>
-                <a:latin typeface="맑은 고딕"/>
-                <a:ea typeface="맑은 고딕"/>
-              </a:rPr>
-              <a:t> </a:t>
-            </a:r>
-            <a:r>
-              <a:rPr sz="1150" b="0" dirty="0" err="1">
-                <a:solidFill>
-                  <a:srgbClr val="1C1C1E"/>
-                </a:solidFill>
-                <a:latin typeface="맑은 고딕"/>
-                <a:ea typeface="맑은 고딕"/>
-              </a:rPr>
-              <a:t>취약</a:t>
-            </a:r>
-            <a:r>
-              <a:rPr sz="1150" b="0" dirty="0">
-                <a:solidFill>
-                  <a:srgbClr val="1C1C1E"/>
-                </a:solidFill>
-                <a:latin typeface="맑은 고딕"/>
-                <a:ea typeface="맑은 고딕"/>
-              </a:rPr>
-              <a:t> (21곳)</a:t>
-            </a:r>
-          </a:p>
-          <a:p>
-            <a:pPr marL="160020" indent="-160020">
-              <a:lnSpc>
-                <a:spcPct val="114000"/>
-              </a:lnSpc>
-              <a:spcAft>
-                <a:spcPts val="200"/>
-              </a:spcAft>
-            </a:pPr>
-            <a:r>
-              <a:rPr sz="1150" b="0" dirty="0">
-                <a:solidFill>
-                  <a:srgbClr val="1C1C1E"/>
-                </a:solidFill>
-                <a:latin typeface="맑은 고딕"/>
-                <a:ea typeface="맑은 고딕"/>
-              </a:rPr>
-              <a:t>• C: </a:t>
-            </a:r>
-            <a:r>
-              <a:rPr sz="1150" b="0" dirty="0" err="1">
-                <a:solidFill>
-                  <a:srgbClr val="1C1C1E"/>
-                </a:solidFill>
-                <a:latin typeface="맑은 고딕"/>
-                <a:ea typeface="맑은 고딕"/>
-              </a:rPr>
-              <a:t>배경인구</a:t>
-            </a:r>
-            <a:r>
-              <a:rPr sz="1150" b="0" dirty="0">
-                <a:solidFill>
-                  <a:srgbClr val="1C1C1E"/>
-                </a:solidFill>
-                <a:latin typeface="맑은 고딕"/>
-                <a:ea typeface="맑은 고딕"/>
-              </a:rPr>
-              <a:t> </a:t>
-            </a:r>
-            <a:r>
-              <a:rPr sz="1150" b="0" dirty="0" err="1">
-                <a:solidFill>
-                  <a:srgbClr val="1C1C1E"/>
-                </a:solidFill>
-                <a:latin typeface="맑은 고딕"/>
-                <a:ea typeface="맑은 고딕"/>
-              </a:rPr>
-              <a:t>미달</a:t>
-            </a:r>
-            <a:r>
-              <a:rPr sz="1150" b="0" dirty="0">
-                <a:solidFill>
-                  <a:srgbClr val="1C1C1E"/>
-                </a:solidFill>
-                <a:latin typeface="맑은 고딕"/>
-                <a:ea typeface="맑은 고딕"/>
-              </a:rPr>
-              <a:t> </a:t>
-            </a:r>
-            <a:r>
-              <a:rPr sz="1150" b="0" dirty="0" err="1">
-                <a:solidFill>
-                  <a:srgbClr val="1C1C1E"/>
-                </a:solidFill>
-                <a:latin typeface="맑은 고딕"/>
-                <a:ea typeface="맑은 고딕"/>
-              </a:rPr>
-              <a:t>또는</a:t>
-            </a:r>
-            <a:r>
-              <a:rPr sz="1150" b="0" dirty="0">
-                <a:solidFill>
-                  <a:srgbClr val="1C1C1E"/>
-                </a:solidFill>
-                <a:latin typeface="맑은 고딕"/>
-                <a:ea typeface="맑은 고딕"/>
-              </a:rPr>
-              <a:t> </a:t>
-            </a:r>
-            <a:r>
-              <a:rPr sz="1150" b="0" dirty="0" err="1">
-                <a:solidFill>
-                  <a:srgbClr val="1C1C1E"/>
-                </a:solidFill>
-                <a:latin typeface="맑은 고딕"/>
-                <a:ea typeface="맑은 고딕"/>
-              </a:rPr>
-              <a:t>분만</a:t>
-            </a:r>
-            <a:r>
-              <a:rPr sz="1150" b="0" dirty="0">
-                <a:solidFill>
-                  <a:srgbClr val="1C1C1E"/>
-                </a:solidFill>
-                <a:latin typeface="맑은 고딕"/>
-                <a:ea typeface="맑은 고딕"/>
-              </a:rPr>
-              <a:t> </a:t>
-            </a:r>
-            <a:r>
-              <a:rPr sz="1150" b="0" dirty="0" err="1">
-                <a:solidFill>
-                  <a:srgbClr val="1C1C1E"/>
-                </a:solidFill>
-                <a:latin typeface="맑은 고딕"/>
-                <a:ea typeface="맑은 고딕"/>
-              </a:rPr>
-              <a:t>지원</a:t>
-            </a:r>
-            <a:r>
-              <a:rPr sz="1150" b="0" dirty="0">
-                <a:solidFill>
-                  <a:srgbClr val="1C1C1E"/>
-                </a:solidFill>
-                <a:latin typeface="맑은 고딕"/>
-                <a:ea typeface="맑은 고딕"/>
-              </a:rPr>
-              <a:t> </a:t>
-            </a:r>
-            <a:r>
-              <a:rPr sz="1150" b="0" dirty="0" err="1">
-                <a:solidFill>
-                  <a:srgbClr val="1C1C1E"/>
-                </a:solidFill>
-                <a:latin typeface="맑은 고딕"/>
-                <a:ea typeface="맑은 고딕"/>
-              </a:rPr>
-              <a:t>기수령</a:t>
-            </a:r>
-            <a:r>
-              <a:rPr sz="1150" b="0" dirty="0">
-                <a:solidFill>
-                  <a:srgbClr val="1C1C1E"/>
-                </a:solidFill>
-                <a:latin typeface="맑은 고딕"/>
-                <a:ea typeface="맑은 고딕"/>
-              </a:rPr>
-              <a:t> (55곳)</a:t>
-            </a:r>
-          </a:p>
-          <a:p>
-            <a:pPr marL="160020" indent="-160020">
-              <a:lnSpc>
-                <a:spcPct val="114000"/>
-              </a:lnSpc>
-              <a:spcAft>
-                <a:spcPts val="200"/>
-              </a:spcAft>
-            </a:pPr>
-            <a:r>
-              <a:rPr sz="1150" b="0" dirty="0">
-                <a:solidFill>
-                  <a:srgbClr val="1C1C1E"/>
-                </a:solidFill>
-                <a:latin typeface="맑은 고딕"/>
-                <a:ea typeface="맑은 고딕"/>
-              </a:rPr>
-              <a:t>• </a:t>
-            </a:r>
-            <a:r>
-              <a:rPr sz="1150" b="0" dirty="0" err="1">
-                <a:solidFill>
-                  <a:srgbClr val="1C1C1E"/>
-                </a:solidFill>
-                <a:latin typeface="맑은 고딕"/>
-                <a:ea typeface="맑은 고딕"/>
-              </a:rPr>
-              <a:t>C는</a:t>
-            </a:r>
-            <a:r>
-              <a:rPr sz="1150" b="0" dirty="0">
-                <a:solidFill>
-                  <a:srgbClr val="1C1C1E"/>
-                </a:solidFill>
-                <a:latin typeface="맑은 고딕"/>
-                <a:ea typeface="맑은 고딕"/>
-              </a:rPr>
-              <a:t> </a:t>
-            </a:r>
-            <a:r>
-              <a:rPr sz="1150" b="0" dirty="0" err="1">
-                <a:solidFill>
-                  <a:srgbClr val="1C1C1E"/>
-                </a:solidFill>
-                <a:latin typeface="맑은 고딕"/>
-                <a:ea typeface="맑은 고딕"/>
-              </a:rPr>
-              <a:t>취약도</a:t>
-            </a:r>
-            <a:r>
-              <a:rPr sz="1150" b="0" dirty="0">
-                <a:solidFill>
-                  <a:srgbClr val="1C1C1E"/>
-                </a:solidFill>
-                <a:latin typeface="맑은 고딕"/>
-                <a:ea typeface="맑은 고딕"/>
-              </a:rPr>
-              <a:t> </a:t>
-            </a:r>
-            <a:r>
-              <a:rPr sz="1150" b="0" dirty="0" err="1">
-                <a:solidFill>
-                  <a:srgbClr val="1C1C1E"/>
-                </a:solidFill>
-                <a:latin typeface="맑은 고딕"/>
-                <a:ea typeface="맑은 고딕"/>
-              </a:rPr>
-              <a:t>서열이</a:t>
-            </a:r>
-            <a:r>
-              <a:rPr sz="1150" b="0" dirty="0">
-                <a:solidFill>
-                  <a:srgbClr val="1C1C1E"/>
-                </a:solidFill>
-                <a:latin typeface="맑은 고딕"/>
-                <a:ea typeface="맑은 고딕"/>
-              </a:rPr>
-              <a:t> </a:t>
-            </a:r>
-            <a:r>
-              <a:rPr sz="1150" b="0" dirty="0" err="1">
-                <a:solidFill>
-                  <a:srgbClr val="1C1C1E"/>
-                </a:solidFill>
-                <a:latin typeface="맑은 고딕"/>
-                <a:ea typeface="맑은 고딕"/>
-              </a:rPr>
-              <a:t>아니라</a:t>
-            </a:r>
-            <a:r>
-              <a:rPr sz="1150" b="0" dirty="0">
-                <a:solidFill>
-                  <a:srgbClr val="1C1C1E"/>
-                </a:solidFill>
-                <a:latin typeface="맑은 고딕"/>
-                <a:ea typeface="맑은 고딕"/>
-              </a:rPr>
-              <a:t> </a:t>
-            </a:r>
-            <a:r>
-              <a:rPr sz="1150" b="0" dirty="0" err="1">
-                <a:solidFill>
-                  <a:srgbClr val="1C1C1E"/>
-                </a:solidFill>
-                <a:latin typeface="맑은 고딕"/>
-                <a:ea typeface="맑은 고딕"/>
-              </a:rPr>
-              <a:t>자격표</a:t>
-            </a:r>
-            <a:r>
-              <a:rPr sz="1150" b="0" dirty="0">
-                <a:solidFill>
-                  <a:srgbClr val="1C1C1E"/>
-                </a:solidFill>
-                <a:latin typeface="맑은 고딕"/>
-                <a:ea typeface="맑은 고딕"/>
-              </a:rPr>
-              <a:t> </a:t>
-            </a:r>
-            <a:r>
-              <a:rPr sz="1150" b="0" dirty="0" err="1">
-                <a:solidFill>
-                  <a:srgbClr val="1C1C1E"/>
-                </a:solidFill>
-                <a:latin typeface="맑은 고딕"/>
-                <a:ea typeface="맑은 고딕"/>
-              </a:rPr>
-              <a:t>성격</a:t>
-            </a:r>
-            <a:r>
-              <a:rPr sz="1150" b="0" dirty="0">
-                <a:solidFill>
-                  <a:srgbClr val="1C1C1E"/>
-                </a:solidFill>
-                <a:latin typeface="맑은 고딕"/>
-                <a:ea typeface="맑은 고딕"/>
-              </a:rPr>
-              <a:t> — "</a:t>
-            </a:r>
-            <a:r>
-              <a:rPr sz="1150" b="0" dirty="0" err="1">
-                <a:solidFill>
-                  <a:srgbClr val="1C1C1E"/>
-                </a:solidFill>
-                <a:latin typeface="맑은 고딕"/>
-                <a:ea typeface="맑은 고딕"/>
-              </a:rPr>
-              <a:t>지원받으면</a:t>
-            </a:r>
-            <a:r>
-              <a:rPr sz="1150" b="0" dirty="0">
-                <a:solidFill>
-                  <a:srgbClr val="1C1C1E"/>
-                </a:solidFill>
-                <a:latin typeface="맑은 고딕"/>
-                <a:ea typeface="맑은 고딕"/>
-              </a:rPr>
-              <a:t> </a:t>
-            </a:r>
-            <a:r>
-              <a:rPr sz="1150" b="0" dirty="0" err="1">
-                <a:solidFill>
-                  <a:srgbClr val="1C1C1E"/>
-                </a:solidFill>
-                <a:latin typeface="맑은 고딕"/>
-                <a:ea typeface="맑은 고딕"/>
-              </a:rPr>
-              <a:t>C가</a:t>
-            </a:r>
-            <a:r>
-              <a:rPr sz="1150" b="0" dirty="0">
-                <a:solidFill>
-                  <a:srgbClr val="1C1C1E"/>
-                </a:solidFill>
-                <a:latin typeface="맑은 고딕"/>
-                <a:ea typeface="맑은 고딕"/>
-              </a:rPr>
-              <a:t> </a:t>
-            </a:r>
-            <a:r>
-              <a:rPr sz="1150" b="0" dirty="0" err="1">
-                <a:solidFill>
-                  <a:srgbClr val="1C1C1E"/>
-                </a:solidFill>
-                <a:latin typeface="맑은 고딕"/>
-                <a:ea typeface="맑은 고딕"/>
-              </a:rPr>
-              <a:t>되는</a:t>
-            </a:r>
-            <a:r>
-              <a:rPr sz="1150" b="0" dirty="0">
-                <a:solidFill>
-                  <a:srgbClr val="1C1C1E"/>
-                </a:solidFill>
-                <a:latin typeface="맑은 고딕"/>
-                <a:ea typeface="맑은 고딕"/>
-              </a:rPr>
-              <a:t>" </a:t>
-            </a:r>
-            <a:r>
-              <a:rPr sz="1150" b="0" dirty="0" err="1">
-                <a:solidFill>
-                  <a:srgbClr val="1C1C1E"/>
-                </a:solidFill>
-                <a:latin typeface="맑은 고딕"/>
-                <a:ea typeface="맑은 고딕"/>
-              </a:rPr>
-              <a:t>정의</a:t>
-            </a:r>
-            <a:r>
-              <a:rPr sz="1150" b="0" dirty="0">
-                <a:solidFill>
-                  <a:srgbClr val="1C1C1E"/>
-                </a:solidFill>
-                <a:latin typeface="맑은 고딕"/>
-                <a:ea typeface="맑은 고딕"/>
-              </a:rPr>
-              <a:t> </a:t>
-            </a:r>
-            <a:r>
-              <a:rPr sz="1150" b="0" dirty="0" err="1">
-                <a:solidFill>
-                  <a:srgbClr val="1C1C1E"/>
-                </a:solidFill>
-                <a:latin typeface="맑은 고딕"/>
-                <a:ea typeface="맑은 고딕"/>
-              </a:rPr>
-              <a:t>구조를</a:t>
-            </a:r>
-            <a:r>
-              <a:rPr sz="1150" b="0" dirty="0">
-                <a:solidFill>
-                  <a:srgbClr val="1C1C1E"/>
-                </a:solidFill>
-                <a:latin typeface="맑은 고딕"/>
-                <a:ea typeface="맑은 고딕"/>
-              </a:rPr>
-              <a:t> </a:t>
-            </a:r>
-            <a:r>
-              <a:rPr sz="1150" b="0" dirty="0" err="1">
-                <a:solidFill>
-                  <a:srgbClr val="1C1C1E"/>
-                </a:solidFill>
-                <a:latin typeface="맑은 고딕"/>
-                <a:ea typeface="맑은 고딕"/>
-              </a:rPr>
-              <a:t>분석</a:t>
-            </a:r>
-            <a:r>
-              <a:rPr sz="1150" b="0" dirty="0">
-                <a:solidFill>
-                  <a:srgbClr val="1C1C1E"/>
-                </a:solidFill>
-                <a:latin typeface="맑은 고딕"/>
-                <a:ea typeface="맑은 고딕"/>
-              </a:rPr>
-              <a:t> </a:t>
-            </a:r>
-            <a:r>
-              <a:rPr sz="1150" b="0" dirty="0" err="1">
-                <a:solidFill>
-                  <a:srgbClr val="1C1C1E"/>
-                </a:solidFill>
-                <a:latin typeface="맑은 고딕"/>
-                <a:ea typeface="맑은 고딕"/>
-              </a:rPr>
-              <a:t>설계에</a:t>
-            </a:r>
-            <a:r>
-              <a:rPr sz="1150" b="0" dirty="0">
-                <a:solidFill>
-                  <a:srgbClr val="1C1C1E"/>
-                </a:solidFill>
-                <a:latin typeface="맑은 고딕"/>
-                <a:ea typeface="맑은 고딕"/>
-              </a:rPr>
-              <a:t> </a:t>
-            </a:r>
-            <a:r>
-              <a:rPr sz="1150" b="0" dirty="0" err="1">
-                <a:solidFill>
-                  <a:srgbClr val="1C1C1E"/>
-                </a:solidFill>
-                <a:latin typeface="맑은 고딕"/>
-                <a:ea typeface="맑은 고딕"/>
-              </a:rPr>
-              <a:t>반영해야</a:t>
-            </a:r>
-            <a:r>
-              <a:rPr sz="1150" b="0" dirty="0">
-                <a:solidFill>
-                  <a:srgbClr val="1C1C1E"/>
-                </a:solidFill>
-                <a:latin typeface="맑은 고딕"/>
-                <a:ea typeface="맑은 고딕"/>
-              </a:rPr>
-              <a:t> 함</a:t>
-            </a:r>
-          </a:p>
         </p:txBody>
       </p:sp>
       <p:sp>
@@ -24290,7 +23720,7 @@
         <p:spPr>
           <a:xfrm>
             <a:off x="6263640" y="3703320"/>
-            <a:ext cx="5532120" cy="1609344"/>
+            <a:ext cx="5532120" cy="1920240"/>
           </a:xfrm>
           <a:prstGeom prst="roundRect">
             <a:avLst>
@@ -24345,7 +23775,7 @@
         <p:spPr>
           <a:xfrm>
             <a:off x="6446520" y="3831335"/>
-            <a:ext cx="5166359" cy="1353312"/>
+            <a:ext cx="5166359" cy="1664208"/>
           </a:xfrm>
           <a:prstGeom prst="rect">
             <a:avLst/>
@@ -25446,6 +24876,420 @@
                 <a:ea typeface="맑은 고딕"/>
               </a:rPr>
               <a:t>Ⅱ. 배경 이해</a:t>
+            </a:r>
+          </a:p>
+        </p:txBody>
+      </p:sp>
+      <p:graphicFrame>
+        <p:nvGraphicFramePr>
+          <p:cNvPr id="18" name="Table 17"/>
+          <p:cNvGraphicFramePr>
+            <a:graphicFrameLocks noGrp="1"/>
+          </p:cNvGraphicFramePr>
+          <p:nvPr/>
+        </p:nvGraphicFramePr>
+        <p:xfrm>
+          <a:off x="685800" y="4133087"/>
+          <a:ext cx="5166360" cy="1207008"/>
+        </p:xfrm>
+        <a:graphic>
+          <a:graphicData uri="http://schemas.openxmlformats.org/drawingml/2006/table">
+            <a:tbl>
+              <a:tblPr>
+                <a:tableStyleId>{5C22544A-7EE6-4342-B048-85BDC9FD1C3A}</a:tableStyleId>
+              </a:tblPr>
+              <a:tblGrid>
+                <a:gridCol w="685800"/>
+                <a:gridCol w="3520440"/>
+                <a:gridCol w="960120"/>
+              </a:tblGrid>
+              <a:tr h="301752">
+                <a:tc>
+                  <a:txBody>
+                    <a:bodyPr/>
+                    <a:lstStyle/>
+                    <a:p>
+                      <a:pPr>
+                        <a:lnSpc>
+                          <a:spcPct val="105000"/>
+                        </a:lnSpc>
+                      </a:pPr>
+                      <a:r>
+                        <a:rPr sz="1050" b="1">
+                          <a:solidFill>
+                            <a:srgbClr val="FFFFFF"/>
+                          </a:solidFill>
+                          <a:latin typeface="맑은 고딕"/>
+                          <a:ea typeface="맑은 고딕"/>
+                        </a:rPr>
+                        <a:t>등급</a:t>
+                      </a:r>
+                    </a:p>
+                  </a:txBody>
+                  <a:tcPr marT="27432" marB="27432" marL="73152" marR="73152" anchor="ctr">
+                    <a:solidFill>
+                      <a:srgbClr val="33393F"/>
+                    </a:solidFill>
+                  </a:tcPr>
+                </a:tc>
+                <a:tc>
+                  <a:txBody>
+                    <a:bodyPr/>
+                    <a:lstStyle/>
+                    <a:p>
+                      <a:pPr>
+                        <a:lnSpc>
+                          <a:spcPct val="105000"/>
+                        </a:lnSpc>
+                      </a:pPr>
+                      <a:r>
+                        <a:rPr sz="1050" b="1">
+                          <a:solidFill>
+                            <a:srgbClr val="FFFFFF"/>
+                          </a:solidFill>
+                          <a:latin typeface="맑은 고딕"/>
+                          <a:ea typeface="맑은 고딕"/>
+                        </a:rPr>
+                        <a:t>정의</a:t>
+                      </a:r>
+                    </a:p>
+                  </a:txBody>
+                  <a:tcPr marT="27432" marB="27432" marL="73152" marR="73152" anchor="ctr">
+                    <a:solidFill>
+                      <a:srgbClr val="33393F"/>
+                    </a:solidFill>
+                  </a:tcPr>
+                </a:tc>
+                <a:tc>
+                  <a:txBody>
+                    <a:bodyPr/>
+                    <a:lstStyle/>
+                    <a:p>
+                      <a:pPr>
+                        <a:lnSpc>
+                          <a:spcPct val="105000"/>
+                        </a:lnSpc>
+                      </a:pPr>
+                      <a:r>
+                        <a:rPr sz="1050" b="1">
+                          <a:solidFill>
+                            <a:srgbClr val="FFFFFF"/>
+                          </a:solidFill>
+                          <a:latin typeface="맑은 고딕"/>
+                          <a:ea typeface="맑은 고딕"/>
+                        </a:rPr>
+                        <a:t>곳수</a:t>
+                      </a:r>
+                    </a:p>
+                  </a:txBody>
+                  <a:tcPr marT="27432" marB="27432" marL="73152" marR="73152" anchor="ctr">
+                    <a:solidFill>
+                      <a:srgbClr val="33393F"/>
+                    </a:solidFill>
+                  </a:tcPr>
+                </a:tc>
+              </a:tr>
+              <a:tr h="301752">
+                <a:tc>
+                  <a:txBody>
+                    <a:bodyPr/>
+                    <a:lstStyle/>
+                    <a:p>
+                      <a:pPr>
+                        <a:lnSpc>
+                          <a:spcPct val="105000"/>
+                        </a:lnSpc>
+                      </a:pPr>
+                      <a:r>
+                        <a:rPr sz="1050" b="0">
+                          <a:solidFill>
+                            <a:srgbClr val="1C1C1E"/>
+                          </a:solidFill>
+                          <a:latin typeface="맑은 고딕"/>
+                          <a:ea typeface="맑은 고딕"/>
+                        </a:rPr>
+                        <a:t>A</a:t>
+                      </a:r>
+                    </a:p>
+                  </a:txBody>
+                  <a:tcPr marT="27432" marB="27432" marL="73152" marR="73152" anchor="ctr">
+                    <a:solidFill>
+                      <a:srgbClr val="FFFFFF"/>
+                    </a:solidFill>
+                  </a:tcPr>
+                </a:tc>
+                <a:tc>
+                  <a:txBody>
+                    <a:bodyPr/>
+                    <a:lstStyle/>
+                    <a:p>
+                      <a:pPr>
+                        <a:lnSpc>
+                          <a:spcPct val="105000"/>
+                        </a:lnSpc>
+                      </a:pPr>
+                      <a:r>
+                        <a:rPr sz="1050" b="0">
+                          <a:solidFill>
+                            <a:srgbClr val="1C1C1E"/>
+                          </a:solidFill>
+                          <a:latin typeface="맑은 고딕"/>
+                          <a:ea typeface="맑은 고딕"/>
+                        </a:rPr>
+                        <a:t>두 판정 지표 모두 취약</a:t>
+                      </a:r>
+                    </a:p>
+                  </a:txBody>
+                  <a:tcPr marT="27432" marB="27432" marL="73152" marR="73152" anchor="ctr">
+                    <a:solidFill>
+                      <a:srgbClr val="FFFFFF"/>
+                    </a:solidFill>
+                  </a:tcPr>
+                </a:tc>
+                <a:tc>
+                  <a:txBody>
+                    <a:bodyPr/>
+                    <a:lstStyle/>
+                    <a:p>
+                      <a:pPr>
+                        <a:lnSpc>
+                          <a:spcPct val="105000"/>
+                        </a:lnSpc>
+                      </a:pPr>
+                      <a:r>
+                        <a:rPr sz="1050" b="0">
+                          <a:solidFill>
+                            <a:srgbClr val="1C1C1E"/>
+                          </a:solidFill>
+                          <a:latin typeface="맑은 고딕"/>
+                          <a:ea typeface="맑은 고딕"/>
+                        </a:rPr>
+                        <a:t>32</a:t>
+                      </a:r>
+                    </a:p>
+                  </a:txBody>
+                  <a:tcPr marT="27432" marB="27432" marL="73152" marR="73152" anchor="ctr">
+                    <a:solidFill>
+                      <a:srgbClr val="FFFFFF"/>
+                    </a:solidFill>
+                  </a:tcPr>
+                </a:tc>
+              </a:tr>
+              <a:tr h="301752">
+                <a:tc>
+                  <a:txBody>
+                    <a:bodyPr/>
+                    <a:lstStyle/>
+                    <a:p>
+                      <a:pPr>
+                        <a:lnSpc>
+                          <a:spcPct val="105000"/>
+                        </a:lnSpc>
+                      </a:pPr>
+                      <a:r>
+                        <a:rPr sz="1050" b="0">
+                          <a:solidFill>
+                            <a:srgbClr val="1C1C1E"/>
+                          </a:solidFill>
+                          <a:latin typeface="맑은 고딕"/>
+                          <a:ea typeface="맑은 고딕"/>
+                        </a:rPr>
+                        <a:t>B</a:t>
+                      </a:r>
+                    </a:p>
+                  </a:txBody>
+                  <a:tcPr marT="27432" marB="27432" marL="73152" marR="73152" anchor="ctr">
+                    <a:solidFill>
+                      <a:srgbClr val="F6F7F8"/>
+                    </a:solidFill>
+                  </a:tcPr>
+                </a:tc>
+                <a:tc>
+                  <a:txBody>
+                    <a:bodyPr/>
+                    <a:lstStyle/>
+                    <a:p>
+                      <a:pPr>
+                        <a:lnSpc>
+                          <a:spcPct val="105000"/>
+                        </a:lnSpc>
+                      </a:pPr>
+                      <a:r>
+                        <a:rPr sz="1050" b="0">
+                          <a:solidFill>
+                            <a:srgbClr val="1C1C1E"/>
+                          </a:solidFill>
+                          <a:latin typeface="맑은 고딕"/>
+                          <a:ea typeface="맑은 고딕"/>
+                        </a:rPr>
+                        <a:t>두 기준 중 하나만 취약</a:t>
+                      </a:r>
+                    </a:p>
+                  </a:txBody>
+                  <a:tcPr marT="27432" marB="27432" marL="73152" marR="73152" anchor="ctr">
+                    <a:solidFill>
+                      <a:srgbClr val="F6F7F8"/>
+                    </a:solidFill>
+                  </a:tcPr>
+                </a:tc>
+                <a:tc>
+                  <a:txBody>
+                    <a:bodyPr/>
+                    <a:lstStyle/>
+                    <a:p>
+                      <a:pPr>
+                        <a:lnSpc>
+                          <a:spcPct val="105000"/>
+                        </a:lnSpc>
+                      </a:pPr>
+                      <a:r>
+                        <a:rPr sz="1050" b="0">
+                          <a:solidFill>
+                            <a:srgbClr val="1C1C1E"/>
+                          </a:solidFill>
+                          <a:latin typeface="맑은 고딕"/>
+                          <a:ea typeface="맑은 고딕"/>
+                        </a:rPr>
+                        <a:t>21</a:t>
+                      </a:r>
+                    </a:p>
+                  </a:txBody>
+                  <a:tcPr marT="27432" marB="27432" marL="73152" marR="73152" anchor="ctr">
+                    <a:solidFill>
+                      <a:srgbClr val="F6F7F8"/>
+                    </a:solidFill>
+                  </a:tcPr>
+                </a:tc>
+              </a:tr>
+              <a:tr h="301752">
+                <a:tc>
+                  <a:txBody>
+                    <a:bodyPr/>
+                    <a:lstStyle/>
+                    <a:p>
+                      <a:pPr>
+                        <a:lnSpc>
+                          <a:spcPct val="105000"/>
+                        </a:lnSpc>
+                      </a:pPr>
+                      <a:r>
+                        <a:rPr sz="1050" b="0">
+                          <a:solidFill>
+                            <a:srgbClr val="1C1C1E"/>
+                          </a:solidFill>
+                          <a:latin typeface="맑은 고딕"/>
+                          <a:ea typeface="맑은 고딕"/>
+                        </a:rPr>
+                        <a:t>C</a:t>
+                      </a:r>
+                    </a:p>
+                  </a:txBody>
+                  <a:tcPr marT="27432" marB="27432" marL="73152" marR="73152" anchor="ctr">
+                    <a:solidFill>
+                      <a:srgbClr val="FFFFFF"/>
+                    </a:solidFill>
+                  </a:tcPr>
+                </a:tc>
+                <a:tc>
+                  <a:txBody>
+                    <a:bodyPr/>
+                    <a:lstStyle/>
+                    <a:p>
+                      <a:pPr>
+                        <a:lnSpc>
+                          <a:spcPct val="105000"/>
+                        </a:lnSpc>
+                      </a:pPr>
+                      <a:r>
+                        <a:rPr sz="1050" b="0">
+                          <a:solidFill>
+                            <a:srgbClr val="1C1C1E"/>
+                          </a:solidFill>
+                          <a:latin typeface="맑은 고딕"/>
+                          <a:ea typeface="맑은 고딕"/>
+                        </a:rPr>
+                        <a:t>배경인구 미달 또는 분만 지원 기수령</a:t>
+                      </a:r>
+                    </a:p>
+                  </a:txBody>
+                  <a:tcPr marT="27432" marB="27432" marL="73152" marR="73152" anchor="ctr">
+                    <a:solidFill>
+                      <a:srgbClr val="FFFFFF"/>
+                    </a:solidFill>
+                  </a:tcPr>
+                </a:tc>
+                <a:tc>
+                  <a:txBody>
+                    <a:bodyPr/>
+                    <a:lstStyle/>
+                    <a:p>
+                      <a:pPr>
+                        <a:lnSpc>
+                          <a:spcPct val="105000"/>
+                        </a:lnSpc>
+                      </a:pPr>
+                      <a:r>
+                        <a:rPr sz="1050" b="0">
+                          <a:solidFill>
+                            <a:srgbClr val="1C1C1E"/>
+                          </a:solidFill>
+                          <a:latin typeface="맑은 고딕"/>
+                          <a:ea typeface="맑은 고딕"/>
+                        </a:rPr>
+                        <a:t>55</a:t>
+                      </a:r>
+                    </a:p>
+                  </a:txBody>
+                  <a:tcPr marT="27432" marB="27432" marL="73152" marR="73152" anchor="ctr">
+                    <a:solidFill>
+                      <a:srgbClr val="FFFFFF"/>
+                    </a:solidFill>
+                  </a:tcPr>
+                </a:tc>
+              </a:tr>
+            </a:tbl>
+          </a:graphicData>
+        </a:graphic>
+      </p:graphicFrame>
+      <p:sp>
+        <p:nvSpPr>
+          <p:cNvPr id="19" name="TextBox 18"/>
+          <p:cNvSpPr txBox="1"/>
+          <p:nvPr/>
+        </p:nvSpPr>
+        <p:spPr>
+          <a:xfrm>
+            <a:off x="685800" y="5358384"/>
+            <a:ext cx="5166360" cy="219456"/>
+          </a:xfrm>
+          <a:prstGeom prst="rect">
+            <a:avLst/>
+          </a:prstGeom>
+          <a:noFill/>
+        </p:spPr>
+        <p:txBody>
+          <a:bodyPr wrap="square" anchor="t">
+            <a:spAutoFit/>
+          </a:bodyPr>
+          <a:lstStyle/>
+          <a:p>
+            <a:pPr>
+              <a:lnSpc>
+                <a:spcPct val="114000"/>
+              </a:lnSpc>
+              <a:spcAft>
+                <a:spcPts val="0"/>
+              </a:spcAft>
+            </a:pPr>
+            <a:r>
+              <a:rPr sz="950" b="0">
+                <a:solidFill>
+                  <a:srgbClr val="767A7F"/>
+                </a:solidFill>
+                <a:latin typeface="맑은 고딕"/>
+                <a:ea typeface="맑은 고딕"/>
+              </a:rPr>
+              <a:t>C는 취약도 서열이 아니라 자격표 — "지원받으면 C가 된다"</a:t>
             </a:r>
           </a:p>
         </p:txBody>

--- a/04_제출물/데이터분석_계획서.pptx
+++ b/04_제출물/데이터분석_계획서.pptx
@@ -3997,7 +3997,7 @@
         <p:spPr>
           <a:xfrm>
             <a:off x="502920" y="1737360"/>
-            <a:ext cx="3611880" cy="1499616"/>
+            <a:ext cx="3611880" cy="1645920"/>
           </a:xfrm>
           <a:prstGeom prst="roundRect">
             <a:avLst>
@@ -4052,7 +4052,7 @@
         <p:spPr>
           <a:xfrm>
             <a:off x="685800" y="1865376"/>
-            <a:ext cx="3246120" cy="1243584"/>
+            <a:ext cx="3246120" cy="1389888"/>
           </a:xfrm>
           <a:prstGeom prst="rect">
             <a:avLst/>
@@ -4626,7 +4626,7 @@
         <p:spPr>
           <a:xfrm>
             <a:off x="4343400" y="1737360"/>
-            <a:ext cx="3611880" cy="1499616"/>
+            <a:ext cx="3611880" cy="1645920"/>
           </a:xfrm>
           <a:prstGeom prst="roundRect">
             <a:avLst>
@@ -4681,7 +4681,7 @@
         <p:spPr>
           <a:xfrm>
             <a:off x="4526280" y="1865376"/>
-            <a:ext cx="3246120" cy="1243584"/>
+            <a:ext cx="3246120" cy="1389888"/>
           </a:xfrm>
           <a:prstGeom prst="rect">
             <a:avLst/>
@@ -4764,7 +4764,7 @@
         <p:spPr>
           <a:xfrm>
             <a:off x="8183880" y="1737360"/>
-            <a:ext cx="3611880" cy="1499616"/>
+            <a:ext cx="3611880" cy="1645920"/>
           </a:xfrm>
           <a:prstGeom prst="roundRect">
             <a:avLst>
@@ -4819,7 +4819,7 @@
         <p:spPr>
           <a:xfrm>
             <a:off x="8366760" y="1865376"/>
-            <a:ext cx="3246120" cy="1243584"/>
+            <a:ext cx="3246120" cy="1389888"/>
           </a:xfrm>
           <a:prstGeom prst="rect">
             <a:avLst/>
@@ -5503,7 +5503,7 @@
         <p:spPr>
           <a:xfrm>
             <a:off x="502920" y="3977639"/>
-            <a:ext cx="11292840" cy="676656"/>
+            <a:ext cx="11292840" cy="822960"/>
           </a:xfrm>
           <a:prstGeom prst="roundRect">
             <a:avLst>
@@ -5557,8 +5557,8 @@
         </p:nvSpPr>
         <p:spPr>
           <a:xfrm>
-            <a:off x="685800" y="4105656"/>
-            <a:ext cx="10927080" cy="420623"/>
+            <a:off x="685800" y="4105655"/>
+            <a:ext cx="10927080" cy="566928"/>
           </a:xfrm>
           <a:prstGeom prst="rect">
             <a:avLst/>
@@ -6306,7 +6306,7 @@
         <p:spPr>
           <a:xfrm>
             <a:off x="502920" y="1737360"/>
-            <a:ext cx="11292840" cy="868680"/>
+            <a:ext cx="11292840" cy="1014984"/>
           </a:xfrm>
           <a:prstGeom prst="roundRect">
             <a:avLst>
@@ -6361,7 +6361,7 @@
         <p:spPr>
           <a:xfrm>
             <a:off x="685800" y="1865376"/>
-            <a:ext cx="10927080" cy="612647"/>
+            <a:ext cx="10927080" cy="758952"/>
           </a:xfrm>
           <a:prstGeom prst="rect">
             <a:avLst/>
@@ -6444,7 +6444,7 @@
         <p:spPr>
           <a:xfrm>
             <a:off x="502920" y="3154680"/>
-            <a:ext cx="2286000" cy="502920"/>
+            <a:ext cx="2286000" cy="594360"/>
           </a:xfrm>
           <a:prstGeom prst="roundRect">
             <a:avLst>
@@ -6505,7 +6505,7 @@
         <p:spPr>
           <a:xfrm>
             <a:off x="685800" y="3282696"/>
-            <a:ext cx="1920239" cy="246888"/>
+            <a:ext cx="1920239" cy="338328"/>
           </a:xfrm>
           <a:prstGeom prst="rect">
             <a:avLst/>
@@ -6548,7 +6548,7 @@
         <p:spPr>
           <a:xfrm>
             <a:off x="2926080" y="3154680"/>
-            <a:ext cx="8869680" cy="502920"/>
+            <a:ext cx="8869680" cy="594360"/>
           </a:xfrm>
           <a:prstGeom prst="roundRect">
             <a:avLst>
@@ -6603,7 +6603,7 @@
         <p:spPr>
           <a:xfrm>
             <a:off x="3108960" y="3282696"/>
-            <a:ext cx="8503920" cy="246888"/>
+            <a:ext cx="8503920" cy="338328"/>
           </a:xfrm>
           <a:prstGeom prst="rect">
             <a:avLst/>
@@ -6646,7 +6646,7 @@
         <p:spPr>
           <a:xfrm>
             <a:off x="502920" y="4023360"/>
-            <a:ext cx="2286000" cy="502920"/>
+            <a:ext cx="2286000" cy="594360"/>
           </a:xfrm>
           <a:prstGeom prst="roundRect">
             <a:avLst>
@@ -6707,7 +6707,7 @@
         <p:spPr>
           <a:xfrm>
             <a:off x="685800" y="4151376"/>
-            <a:ext cx="1920239" cy="246888"/>
+            <a:ext cx="1920239" cy="338328"/>
           </a:xfrm>
           <a:prstGeom prst="rect">
             <a:avLst/>
@@ -6750,7 +6750,7 @@
         <p:spPr>
           <a:xfrm>
             <a:off x="2926080" y="4023360"/>
-            <a:ext cx="8869680" cy="502920"/>
+            <a:ext cx="8869680" cy="594360"/>
           </a:xfrm>
           <a:prstGeom prst="roundRect">
             <a:avLst>
@@ -6805,7 +6805,7 @@
         <p:spPr>
           <a:xfrm>
             <a:off x="3108960" y="4151376"/>
-            <a:ext cx="8503920" cy="246888"/>
+            <a:ext cx="8503920" cy="338328"/>
           </a:xfrm>
           <a:prstGeom prst="rect">
             <a:avLst/>
@@ -7035,7 +7035,7 @@
         <p:spPr>
           <a:xfrm>
             <a:off x="502920" y="4892040"/>
-            <a:ext cx="2286000" cy="685800"/>
+            <a:ext cx="2286000" cy="731520"/>
           </a:xfrm>
           <a:prstGeom prst="roundRect">
             <a:avLst>
@@ -7096,7 +7096,7 @@
         <p:spPr>
           <a:xfrm>
             <a:off x="685800" y="5020055"/>
-            <a:ext cx="1920239" cy="429768"/>
+            <a:ext cx="1920239" cy="475488"/>
           </a:xfrm>
           <a:prstGeom prst="rect">
             <a:avLst/>
@@ -7139,7 +7139,7 @@
         <p:spPr>
           <a:xfrm>
             <a:off x="2926080" y="4892040"/>
-            <a:ext cx="8869680" cy="685800"/>
+            <a:ext cx="8869680" cy="731520"/>
           </a:xfrm>
           <a:prstGeom prst="roundRect">
             <a:avLst>
@@ -7194,7 +7194,7 @@
         <p:spPr>
           <a:xfrm>
             <a:off x="3108960" y="5020055"/>
-            <a:ext cx="8503920" cy="429768"/>
+            <a:ext cx="8503920" cy="475488"/>
           </a:xfrm>
           <a:prstGeom prst="rect">
             <a:avLst/>
@@ -8118,7 +8118,7 @@
         <p:spPr>
           <a:xfrm>
             <a:off x="502920" y="1737360"/>
-            <a:ext cx="5532120" cy="1463040"/>
+            <a:ext cx="5532120" cy="1545336"/>
           </a:xfrm>
           <a:prstGeom prst="roundRect">
             <a:avLst>
@@ -8173,7 +8173,7 @@
         <p:spPr>
           <a:xfrm>
             <a:off x="685800" y="1865376"/>
-            <a:ext cx="5166359" cy="1207008"/>
+            <a:ext cx="5166359" cy="1289304"/>
           </a:xfrm>
           <a:prstGeom prst="rect">
             <a:avLst/>
@@ -8894,7 +8894,7 @@
         <p:spPr>
           <a:xfrm>
             <a:off x="6263640" y="1737360"/>
-            <a:ext cx="5532120" cy="1463040"/>
+            <a:ext cx="5532120" cy="1545336"/>
           </a:xfrm>
           <a:prstGeom prst="roundRect">
             <a:avLst>
@@ -8949,7 +8949,7 @@
         <p:spPr>
           <a:xfrm>
             <a:off x="6446520" y="1865376"/>
-            <a:ext cx="5166359" cy="1207008"/>
+            <a:ext cx="5166359" cy="1289304"/>
           </a:xfrm>
           <a:prstGeom prst="rect">
             <a:avLst/>
@@ -9596,7 +9596,7 @@
         <p:spPr>
           <a:xfrm>
             <a:off x="502920" y="3474720"/>
-            <a:ext cx="11292840" cy="1252728"/>
+            <a:ext cx="11292840" cy="1399032"/>
           </a:xfrm>
           <a:prstGeom prst="roundRect">
             <a:avLst>
@@ -9651,7 +9651,7 @@
         <p:spPr>
           <a:xfrm>
             <a:off x="685800" y="3602736"/>
-            <a:ext cx="10927080" cy="996696"/>
+            <a:ext cx="10927080" cy="1143000"/>
           </a:xfrm>
           <a:prstGeom prst="rect">
             <a:avLst/>
@@ -13489,7 +13489,7 @@
         <p:spPr>
           <a:xfrm>
             <a:off x="6263640" y="3026663"/>
-            <a:ext cx="5532120" cy="859536"/>
+            <a:ext cx="5532120" cy="1005840"/>
           </a:xfrm>
           <a:prstGeom prst="roundRect">
             <a:avLst>
@@ -13543,8 +13543,8 @@
         </p:nvSpPr>
         <p:spPr>
           <a:xfrm>
-            <a:off x="6446520" y="3145535"/>
-            <a:ext cx="5166360" cy="603503"/>
+            <a:off x="6446520" y="3154680"/>
+            <a:ext cx="5166360" cy="749808"/>
           </a:xfrm>
           <a:prstGeom prst="rect">
             <a:avLst/>
@@ -13986,7 +13986,7 @@
         <p:spPr>
           <a:xfrm>
             <a:off x="502920" y="1371600"/>
-            <a:ext cx="3611880" cy="1307592"/>
+            <a:ext cx="3611880" cy="1453896"/>
           </a:xfrm>
           <a:prstGeom prst="roundRect">
             <a:avLst>
@@ -14041,7 +14041,7 @@
         <p:spPr>
           <a:xfrm>
             <a:off x="685800" y="1499616"/>
-            <a:ext cx="3246120" cy="1051560"/>
+            <a:ext cx="3246120" cy="1197864"/>
           </a:xfrm>
           <a:prstGeom prst="rect">
             <a:avLst/>
@@ -14508,7 +14508,7 @@
         <p:spPr>
           <a:xfrm>
             <a:off x="4343400" y="1371600"/>
-            <a:ext cx="3611880" cy="1307592"/>
+            <a:ext cx="3611880" cy="1453896"/>
           </a:xfrm>
           <a:prstGeom prst="roundRect">
             <a:avLst>
@@ -14563,7 +14563,7 @@
         <p:spPr>
           <a:xfrm>
             <a:off x="4526280" y="1499616"/>
-            <a:ext cx="3246120" cy="1051560"/>
+            <a:ext cx="3246120" cy="1197864"/>
           </a:xfrm>
           <a:prstGeom prst="rect">
             <a:avLst/>
@@ -14970,7 +14970,7 @@
         <p:spPr>
           <a:xfrm>
             <a:off x="8183880" y="1371600"/>
-            <a:ext cx="3611880" cy="1307592"/>
+            <a:ext cx="3611880" cy="1453896"/>
           </a:xfrm>
           <a:prstGeom prst="roundRect">
             <a:avLst>
@@ -15025,7 +15025,7 @@
         <p:spPr>
           <a:xfrm>
             <a:off x="8366760" y="1499616"/>
-            <a:ext cx="3246120" cy="1051560"/>
+            <a:ext cx="3246120" cy="1197864"/>
           </a:xfrm>
           <a:prstGeom prst="rect">
             <a:avLst/>
@@ -15145,7 +15145,7 @@
         <p:spPr>
           <a:xfrm>
             <a:off x="502920" y="3401568"/>
-            <a:ext cx="11292840" cy="1362456"/>
+            <a:ext cx="11292840" cy="1508760"/>
           </a:xfrm>
           <a:prstGeom prst="roundRect">
             <a:avLst>
@@ -15200,7 +15200,7 @@
         <p:spPr>
           <a:xfrm>
             <a:off x="685800" y="3529584"/>
-            <a:ext cx="10927080" cy="1106424"/>
+            <a:ext cx="10927080" cy="1252728"/>
           </a:xfrm>
           <a:prstGeom prst="rect">
             <a:avLst/>
@@ -16504,7 +16504,7 @@
         <p:spPr>
           <a:xfrm>
             <a:off x="502920" y="1371600"/>
-            <a:ext cx="3291840" cy="969264"/>
+            <a:ext cx="3291840" cy="1115568"/>
           </a:xfrm>
           <a:prstGeom prst="roundRect">
             <a:avLst>
@@ -16559,7 +16559,7 @@
         <p:spPr>
           <a:xfrm>
             <a:off x="685800" y="1499616"/>
-            <a:ext cx="2926079" cy="713232"/>
+            <a:ext cx="2926079" cy="859536"/>
           </a:xfrm>
           <a:prstGeom prst="rect">
             <a:avLst/>
@@ -16943,7 +16943,7 @@
         <p:spPr>
           <a:xfrm>
             <a:off x="4480559" y="1371600"/>
-            <a:ext cx="3291840" cy="969264"/>
+            <a:ext cx="3291840" cy="1115568"/>
           </a:xfrm>
           <a:prstGeom prst="roundRect">
             <a:avLst>
@@ -16998,7 +16998,7 @@
         <p:spPr>
           <a:xfrm>
             <a:off x="4663439" y="1499616"/>
-            <a:ext cx="2926079" cy="713232"/>
+            <a:ext cx="2926079" cy="859536"/>
           </a:xfrm>
           <a:prstGeom prst="rect">
             <a:avLst/>
@@ -17282,7 +17282,7 @@
         <p:spPr>
           <a:xfrm>
             <a:off x="8458200" y="1371600"/>
-            <a:ext cx="3291840" cy="969264"/>
+            <a:ext cx="3291840" cy="1115568"/>
           </a:xfrm>
           <a:prstGeom prst="roundRect">
             <a:avLst>
@@ -17337,7 +17337,7 @@
         <p:spPr>
           <a:xfrm>
             <a:off x="8641080" y="1499616"/>
-            <a:ext cx="2926079" cy="713232"/>
+            <a:ext cx="2926079" cy="859536"/>
           </a:xfrm>
           <a:prstGeom prst="rect">
             <a:avLst/>
@@ -17440,7 +17440,7 @@
         <p:spPr>
           <a:xfrm>
             <a:off x="502920" y="2834640"/>
-            <a:ext cx="5532120" cy="1755648"/>
+            <a:ext cx="5532120" cy="1901952"/>
           </a:xfrm>
           <a:prstGeom prst="roundRect">
             <a:avLst>
@@ -17495,7 +17495,7 @@
         <p:spPr>
           <a:xfrm>
             <a:off x="685800" y="2962656"/>
-            <a:ext cx="5166359" cy="1499616"/>
+            <a:ext cx="5166359" cy="1645920"/>
           </a:xfrm>
           <a:prstGeom prst="rect">
             <a:avLst/>
@@ -17645,7 +17645,7 @@
         <p:spPr>
           <a:xfrm>
             <a:off x="6263640" y="2834640"/>
-            <a:ext cx="5532120" cy="1755648"/>
+            <a:ext cx="5532120" cy="1901952"/>
           </a:xfrm>
           <a:prstGeom prst="roundRect">
             <a:avLst>
@@ -17700,7 +17700,7 @@
         <p:spPr>
           <a:xfrm>
             <a:off x="6446520" y="2962656"/>
-            <a:ext cx="5166359" cy="1499616"/>
+            <a:ext cx="5166359" cy="1645920"/>
           </a:xfrm>
           <a:prstGeom prst="rect">
             <a:avLst/>
@@ -17877,7 +17877,7 @@
         <p:spPr>
           <a:xfrm>
             <a:off x="502920" y="4965192"/>
-            <a:ext cx="11292840" cy="1060704"/>
+            <a:ext cx="11292840" cy="1207008"/>
           </a:xfrm>
           <a:prstGeom prst="roundRect">
             <a:avLst>
@@ -17932,7 +17932,7 @@
         <p:spPr>
           <a:xfrm>
             <a:off x="685800" y="5093207"/>
-            <a:ext cx="10927080" cy="804671"/>
+            <a:ext cx="10927080" cy="950976"/>
           </a:xfrm>
           <a:prstGeom prst="rect">
             <a:avLst/>
@@ -18497,7 +18497,7 @@
         <p:spPr>
           <a:xfrm>
             <a:off x="502920" y="1371600"/>
-            <a:ext cx="5532120" cy="1106424"/>
+            <a:ext cx="5532120" cy="1252728"/>
           </a:xfrm>
           <a:prstGeom prst="roundRect">
             <a:avLst>
@@ -18552,7 +18552,7 @@
         <p:spPr>
           <a:xfrm>
             <a:off x="521208" y="1600200"/>
-            <a:ext cx="82296" cy="649224"/>
+            <a:ext cx="82296" cy="795528"/>
           </a:xfrm>
           <a:prstGeom prst="roundRect">
             <a:avLst>
@@ -18613,7 +18613,7 @@
         <p:spPr>
           <a:xfrm>
             <a:off x="822960" y="1499616"/>
-            <a:ext cx="5029200" cy="850391"/>
+            <a:ext cx="5029200" cy="996696"/>
           </a:xfrm>
           <a:prstGeom prst="rect">
             <a:avLst/>
@@ -18993,7 +18993,7 @@
         <p:spPr>
           <a:xfrm>
             <a:off x="6263640" y="1371600"/>
-            <a:ext cx="5532120" cy="1106424"/>
+            <a:ext cx="5532120" cy="1252728"/>
           </a:xfrm>
           <a:prstGeom prst="roundRect">
             <a:avLst>
@@ -19048,7 +19048,7 @@
         <p:spPr>
           <a:xfrm>
             <a:off x="6281927" y="1600200"/>
-            <a:ext cx="82296" cy="649224"/>
+            <a:ext cx="82296" cy="795528"/>
           </a:xfrm>
           <a:prstGeom prst="roundRect">
             <a:avLst>
@@ -19109,7 +19109,7 @@
         <p:spPr>
           <a:xfrm>
             <a:off x="6583679" y="1499616"/>
-            <a:ext cx="5029200" cy="850391"/>
+            <a:ext cx="5029200" cy="996696"/>
           </a:xfrm>
           <a:prstGeom prst="rect">
             <a:avLst/>
@@ -19449,7 +19449,7 @@
         <p:spPr>
           <a:xfrm>
             <a:off x="502920" y="3337560"/>
-            <a:ext cx="5532120" cy="1106424"/>
+            <a:ext cx="5532120" cy="1252728"/>
           </a:xfrm>
           <a:prstGeom prst="roundRect">
             <a:avLst>
@@ -19504,7 +19504,7 @@
         <p:spPr>
           <a:xfrm>
             <a:off x="521208" y="3566160"/>
-            <a:ext cx="82296" cy="649224"/>
+            <a:ext cx="82296" cy="795528"/>
           </a:xfrm>
           <a:prstGeom prst="roundRect">
             <a:avLst>
@@ -19565,7 +19565,7 @@
         <p:spPr>
           <a:xfrm>
             <a:off x="822960" y="3465576"/>
-            <a:ext cx="5029200" cy="850391"/>
+            <a:ext cx="5029200" cy="996696"/>
           </a:xfrm>
           <a:prstGeom prst="rect">
             <a:avLst/>
@@ -19925,7 +19925,7 @@
         <p:spPr>
           <a:xfrm>
             <a:off x="6263640" y="3337560"/>
-            <a:ext cx="5532120" cy="1106424"/>
+            <a:ext cx="5532120" cy="1252728"/>
           </a:xfrm>
           <a:prstGeom prst="roundRect">
             <a:avLst>
@@ -19980,7 +19980,7 @@
         <p:spPr>
           <a:xfrm>
             <a:off x="6281927" y="3566160"/>
-            <a:ext cx="82296" cy="649224"/>
+            <a:ext cx="82296" cy="795528"/>
           </a:xfrm>
           <a:prstGeom prst="roundRect">
             <a:avLst>
@@ -20041,7 +20041,7 @@
         <p:spPr>
           <a:xfrm>
             <a:off x="6583679" y="3465576"/>
-            <a:ext cx="5029200" cy="850391"/>
+            <a:ext cx="5029200" cy="996696"/>
           </a:xfrm>
           <a:prstGeom prst="rect">
             <a:avLst/>
@@ -20796,7 +20796,7 @@
         <p:spPr>
           <a:xfrm>
             <a:off x="502920" y="1371600"/>
-            <a:ext cx="5532120" cy="1426464"/>
+            <a:ext cx="5532120" cy="1572768"/>
           </a:xfrm>
           <a:prstGeom prst="roundRect">
             <a:avLst>
@@ -20851,7 +20851,7 @@
         <p:spPr>
           <a:xfrm>
             <a:off x="685800" y="1499616"/>
-            <a:ext cx="5166359" cy="1170432"/>
+            <a:ext cx="5166359" cy="1316736"/>
           </a:xfrm>
           <a:prstGeom prst="rect">
             <a:avLst/>
@@ -20974,7 +20974,7 @@
         <p:spPr>
           <a:xfrm>
             <a:off x="6263640" y="1371600"/>
-            <a:ext cx="5532120" cy="1426464"/>
+            <a:ext cx="5532120" cy="1572768"/>
           </a:xfrm>
           <a:prstGeom prst="roundRect">
             <a:avLst>
@@ -21029,7 +21029,7 @@
         <p:spPr>
           <a:xfrm>
             <a:off x="6446520" y="1499616"/>
-            <a:ext cx="5166359" cy="1170432"/>
+            <a:ext cx="5166359" cy="1316736"/>
           </a:xfrm>
           <a:prstGeom prst="rect">
             <a:avLst/>
@@ -26405,7 +26405,7 @@
         <p:spPr>
           <a:xfrm>
             <a:off x="502920" y="4297680"/>
-            <a:ext cx="3611880" cy="1179576"/>
+            <a:ext cx="3611880" cy="1325880"/>
           </a:xfrm>
           <a:prstGeom prst="roundRect">
             <a:avLst>
@@ -26460,7 +26460,7 @@
         <p:spPr>
           <a:xfrm>
             <a:off x="685800" y="4425696"/>
-            <a:ext cx="3246120" cy="923544"/>
+            <a:ext cx="3246120" cy="1069848"/>
           </a:xfrm>
           <a:prstGeom prst="rect">
             <a:avLst/>
@@ -26767,7 +26767,7 @@
         <p:spPr>
           <a:xfrm>
             <a:off x="4343400" y="4297680"/>
-            <a:ext cx="3611880" cy="1179576"/>
+            <a:ext cx="3611880" cy="1325880"/>
           </a:xfrm>
           <a:prstGeom prst="roundRect">
             <a:avLst>
@@ -26822,7 +26822,7 @@
         <p:spPr>
           <a:xfrm>
             <a:off x="4526280" y="4425696"/>
-            <a:ext cx="3246120" cy="923544"/>
+            <a:ext cx="3246120" cy="1069848"/>
           </a:xfrm>
           <a:prstGeom prst="rect">
             <a:avLst/>
@@ -27159,7 +27159,7 @@
         <p:spPr>
           <a:xfrm>
             <a:off x="8183880" y="4297680"/>
-            <a:ext cx="3611880" cy="1179576"/>
+            <a:ext cx="3611880" cy="1325880"/>
           </a:xfrm>
           <a:prstGeom prst="roundRect">
             <a:avLst>
@@ -27214,7 +27214,7 @@
         <p:spPr>
           <a:xfrm>
             <a:off x="8366760" y="4425696"/>
-            <a:ext cx="3246120" cy="923544"/>
+            <a:ext cx="3246120" cy="1069848"/>
           </a:xfrm>
           <a:prstGeom prst="rect">
             <a:avLst/>
@@ -29286,7 +29286,7 @@
         <p:spPr>
           <a:xfrm>
             <a:off x="502920" y="4480560"/>
-            <a:ext cx="11292840" cy="1060704"/>
+            <a:ext cx="11292840" cy="1207008"/>
           </a:xfrm>
           <a:prstGeom prst="roundRect">
             <a:avLst>
@@ -29341,7 +29341,7 @@
         <p:spPr>
           <a:xfrm>
             <a:off x="685800" y="4608576"/>
-            <a:ext cx="10927080" cy="804671"/>
+            <a:ext cx="10927080" cy="950976"/>
           </a:xfrm>
           <a:prstGeom prst="rect">
             <a:avLst/>
